--- a/presentation/unos_kidney_biopsy.pptx
+++ b/presentation/unos_kidney_biopsy.pptx
@@ -2,36 +2,36 @@
 <file path=ppt/presentation.xml><?xml version="1.0" encoding="utf-8"?>
 <p:presentation xmlns:p="http://schemas.openxmlformats.org/presentationml/2006/main" xmlns:r="http://schemas.openxmlformats.org/officeDocument/2006/relationships">
   <p:sldMasterIdLst>
-    <p:sldMasterId id="2147483648" r:id="Re8093aee81b845f4"/>
+    <p:sldMasterId id="2147483648" r:id="R795e38e1b45941d0"/>
   </p:sldMasterIdLst>
   <p:sldIdLst>
-    <p:sldId id="256" r:id="R27d35d42350f48c3"/>
-    <p:sldId id="257" r:id="R2de282704664476a"/>
-    <p:sldId id="258" r:id="Ra96ac9243e624c0b"/>
-    <p:sldId id="259" r:id="Rf3a7574bda14452f"/>
-    <p:sldId id="260" r:id="R92f47e12211840ca"/>
-    <p:sldId id="261" r:id="R32c273e320db4766"/>
-    <p:sldId id="262" r:id="R069005ad54374942"/>
-    <p:sldId id="263" r:id="Ra268efc20fb14988"/>
-    <p:sldId id="264" r:id="Rf59c5735bcbb49d9"/>
-    <p:sldId id="265" r:id="R7a5a45dcd2ec47aa"/>
-    <p:sldId id="266" r:id="Ra8889290ba704ee9"/>
-    <p:sldId id="267" r:id="R07fa47ae0df64bc9"/>
-    <p:sldId id="268" r:id="Ra9cde02a0670471e"/>
-    <p:sldId id="269" r:id="Rb00b82dcfd234374"/>
-    <p:sldId id="270" r:id="R7c2ba2f5b7ed4b1d"/>
-    <p:sldId id="271" r:id="Rad0c0d45aaf246b2"/>
-    <p:sldId id="272" r:id="R688c01e1cf5b48a4"/>
-    <p:sldId id="273" r:id="R2f31db7a163c46fe"/>
-    <p:sldId id="274" r:id="R28c7c51c2d804ec8"/>
-    <p:sldId id="275" r:id="R59bd98ad52034f2a"/>
-    <p:sldId id="276" r:id="R8ac4cb8efcad4d24"/>
-    <p:sldId id="277" r:id="Rc85a80ad9f43459f"/>
-    <p:sldId id="278" r:id="Rdad09b1d9d5f42fe"/>
-    <p:sldId id="279" r:id="R18e0f5381708400b"/>
-    <p:sldId id="280" r:id="R4a67bf5d7c794828"/>
-    <p:sldId id="281" r:id="Rd8b73157cad945d0"/>
-    <p:sldId id="282" r:id="Re7ad539fc20b4105"/>
+    <p:sldId id="256" r:id="Ra2e5987f5cd9402e"/>
+    <p:sldId id="257" r:id="R88b6c35a67094843"/>
+    <p:sldId id="258" r:id="Rb9e02b2a47b14552"/>
+    <p:sldId id="259" r:id="Raea07e2bc2fd400b"/>
+    <p:sldId id="260" r:id="R4a883e58a0de4092"/>
+    <p:sldId id="261" r:id="R9ee8407c6daa432c"/>
+    <p:sldId id="262" r:id="R487697ab6da547aa"/>
+    <p:sldId id="263" r:id="R625dc816186a4cae"/>
+    <p:sldId id="264" r:id="R163ab851ca464962"/>
+    <p:sldId id="265" r:id="R339b914838de4544"/>
+    <p:sldId id="266" r:id="R387b2356c53e44d5"/>
+    <p:sldId id="267" r:id="R0264449f1a3f47a4"/>
+    <p:sldId id="268" r:id="R81ede3964fca4630"/>
+    <p:sldId id="269" r:id="Rb5b1f94fd2cb453c"/>
+    <p:sldId id="270" r:id="Rb143e5b251fe4859"/>
+    <p:sldId id="271" r:id="R3cf35e120d1e45f1"/>
+    <p:sldId id="272" r:id="R1b7f5e37f6da46eb"/>
+    <p:sldId id="273" r:id="R5151ade6c1f84748"/>
+    <p:sldId id="274" r:id="R09e2f201fc3a4595"/>
+    <p:sldId id="275" r:id="R04b1157f1c8e45de"/>
+    <p:sldId id="276" r:id="Rd4bc542a68d34b1c"/>
+    <p:sldId id="277" r:id="R8d933dfdd60a4a5c"/>
+    <p:sldId id="278" r:id="R3c91bf60e299437a"/>
+    <p:sldId id="279" r:id="R80db1586d1c0439e"/>
+    <p:sldId id="280" r:id="R398152affa034801"/>
+    <p:sldId id="281" r:id="R42b2a288cc9f436b"/>
+    <p:sldId id="282" r:id="R68442a5439ed4b4e"/>
   </p:sldIdLst>
   <p:sldSz cx="12192000" cy="6858000"/>
   <p:notesSz cx="6858000" cy="9144000"/>
@@ -76,7 +76,7 @@
   </p:cSld>
   <p:clrMap bg1="lt1" tx1="dk1" bg2="lt2" tx2="dk2" accent1="accent1" accent2="accent2" accent3="accent3" accent4="accent4" accent5="accent5" accent6="accent6" hlink="hlink" folHlink="folHlink"/>
   <p:sldLayoutIdLst>
-    <p:sldLayoutId xmlns:r="http://schemas.openxmlformats.org/officeDocument/2006/relationships" id="2147483649" r:id="Rb3ef00f2e711481f"/>
+    <p:sldLayoutId xmlns:r="http://schemas.openxmlformats.org/officeDocument/2006/relationships" id="2147483649" r:id="Rf78abd7c10c74a21"/>
   </p:sldLayoutIdLst>
   <p:txStyles>
     <p:titleStyle>
@@ -1245,7 +1245,7 @@
           <p:cNvPr id="2" name="">
             <a:extLst xmlns:a="http://schemas.openxmlformats.org/drawingml/2006/main">
               <a:ext uri="{FF2B5EF4-FFF2-40B4-BE49-F238E27FC236}">
-                <a16:creationId xmlns:a16="http://schemas.microsoft.com/office/drawing/2014/main" id="{3A5879B5-DFDE-4CFF-85D9-0B0344FA0A4B}"/>
+                <a16:creationId xmlns:a16="http://schemas.microsoft.com/office/drawing/2014/main" id="{64D65980-7A9D-421C-B0C9-11C08E5E01FE}"/>
               </a:ext>
             </a:extLst>
           </p:cNvPr>
@@ -1346,7 +1346,7 @@
     </p:spTree>
     <p:extLst>
       <p:ext uri="{BB962C8B-B14F-4D97-AF65-F5344CB8AC3E}">
-        <p14:creationId xmlns:p14="http://schemas.microsoft.com/office/powerpoint/2010/main" val="1483870282"/>
+        <p14:creationId xmlns:p14="http://schemas.microsoft.com/office/powerpoint/2010/main" val="109289756"/>
       </p:ext>
     </p:extLst>
   </p:cSld>
@@ -1377,7 +1377,7 @@
           <p:cNvPr id="6" name="">
             <a:extLst xmlns:a="http://schemas.openxmlformats.org/drawingml/2006/main">
               <a:ext uri="{FF2B5EF4-FFF2-40B4-BE49-F238E27FC236}">
-                <a16:creationId xmlns:a16="http://schemas.microsoft.com/office/drawing/2014/main" id="{F83514BF-8CED-42AA-B464-ABA2F95BD415}"/>
+                <a16:creationId xmlns:a16="http://schemas.microsoft.com/office/drawing/2014/main" id="{F57956E2-EFA5-4C0A-A91C-1A92A7D9EB3D}"/>
               </a:ext>
             </a:extLst>
           </p:cNvPr>
@@ -1434,7 +1434,7 @@
           <p:cNvPr id="2" name="">
             <a:extLst xmlns:a="http://schemas.openxmlformats.org/drawingml/2006/main">
               <a:ext uri="{FF2B5EF4-FFF2-40B4-BE49-F238E27FC236}">
-                <a16:creationId xmlns:a16="http://schemas.microsoft.com/office/drawing/2014/main" id="{C15AEAEC-82DF-4888-AA7A-DDBEB62F7FDD}"/>
+                <a16:creationId xmlns:a16="http://schemas.microsoft.com/office/drawing/2014/main" id="{6EF5938C-3D3B-4319-8680-8B34B396D1E0}"/>
               </a:ext>
             </a:extLst>
           </p:cNvPr>
@@ -1491,7 +1491,7 @@
           <p:cNvPr id="3" name="">
             <a:extLst xmlns:a="http://schemas.openxmlformats.org/drawingml/2006/main">
               <a:ext uri="{FF2B5EF4-FFF2-40B4-BE49-F238E27FC236}">
-                <a16:creationId xmlns:a16="http://schemas.microsoft.com/office/drawing/2014/main" id="{B35FC85A-16CE-4FC1-A9D0-D71F873DB94A}"/>
+                <a16:creationId xmlns:a16="http://schemas.microsoft.com/office/drawing/2014/main" id="{766B4837-61E8-4605-AE74-3CDDD94E8AEF}"/>
               </a:ext>
             </a:extLst>
           </p:cNvPr>
@@ -1548,7 +1548,7 @@
           <p:cNvPr id="4" name="">
             <a:extLst xmlns:a="http://schemas.openxmlformats.org/drawingml/2006/main">
               <a:ext uri="{FF2B5EF4-FFF2-40B4-BE49-F238E27FC236}">
-                <a16:creationId xmlns:a16="http://schemas.microsoft.com/office/drawing/2014/main" id="{2A705363-765D-42DF-8B66-9FCC0B341131}"/>
+                <a16:creationId xmlns:a16="http://schemas.microsoft.com/office/drawing/2014/main" id="{66EA16B6-D15B-4C00-9021-41753FF2085C}"/>
               </a:ext>
             </a:extLst>
           </p:cNvPr>
@@ -1921,7 +1921,7 @@
     </p:spTree>
     <p:extLst>
       <p:ext uri="{BB962C8B-B14F-4D97-AF65-F5344CB8AC3E}">
-        <p14:creationId xmlns:p14="http://schemas.microsoft.com/office/powerpoint/2010/main" val="1307118146"/>
+        <p14:creationId xmlns:p14="http://schemas.microsoft.com/office/powerpoint/2010/main" val="618380760"/>
       </p:ext>
     </p:extLst>
   </p:cSld>
@@ -1952,7 +1952,7 @@
           <p:cNvPr id="13" name="">
             <a:extLst xmlns:a="http://schemas.openxmlformats.org/drawingml/2006/main">
               <a:ext uri="{FF2B5EF4-FFF2-40B4-BE49-F238E27FC236}">
-                <a16:creationId xmlns:a16="http://schemas.microsoft.com/office/drawing/2014/main" id="{1FFDFD1D-1824-46C4-9A0C-999AF100F256}"/>
+                <a16:creationId xmlns:a16="http://schemas.microsoft.com/office/drawing/2014/main" id="{0A1A2DC9-C058-4E1D-BCE8-FB6395FA62DC}"/>
               </a:ext>
             </a:extLst>
           </p:cNvPr>
@@ -2009,7 +2009,7 @@
           <p:cNvPr id="2" name="">
             <a:extLst xmlns:a="http://schemas.openxmlformats.org/drawingml/2006/main">
               <a:ext uri="{FF2B5EF4-FFF2-40B4-BE49-F238E27FC236}">
-                <a16:creationId xmlns:a16="http://schemas.microsoft.com/office/drawing/2014/main" id="{A563B68C-D214-46EF-BA80-A18845BE3E5C}"/>
+                <a16:creationId xmlns:a16="http://schemas.microsoft.com/office/drawing/2014/main" id="{38C4CC90-CA74-4B9A-9EAF-4116E561F242}"/>
               </a:ext>
             </a:extLst>
           </p:cNvPr>
@@ -2066,7 +2066,7 @@
           <p:cNvPr id="3" name="">
             <a:extLst xmlns:a="http://schemas.openxmlformats.org/drawingml/2006/main">
               <a:ext uri="{FF2B5EF4-FFF2-40B4-BE49-F238E27FC236}">
-                <a16:creationId xmlns:a16="http://schemas.microsoft.com/office/drawing/2014/main" id="{82D27729-CEFE-4350-B248-8E6CD5DD6E32}"/>
+                <a16:creationId xmlns:a16="http://schemas.microsoft.com/office/drawing/2014/main" id="{677D08DA-F28D-460F-9E91-39617B951FA3}"/>
               </a:ext>
             </a:extLst>
           </p:cNvPr>
@@ -2123,7 +2123,7 @@
           <p:cNvPr id="4" name="">
             <a:extLst xmlns:a="http://schemas.openxmlformats.org/drawingml/2006/main">
               <a:ext uri="{FF2B5EF4-FFF2-40B4-BE49-F238E27FC236}">
-                <a16:creationId xmlns:a16="http://schemas.microsoft.com/office/drawing/2014/main" id="{6804646C-4E26-4D69-ACD3-B95CB9C7D3C6}"/>
+                <a16:creationId xmlns:a16="http://schemas.microsoft.com/office/drawing/2014/main" id="{E974C0FA-2590-41EF-B83F-2A7C06C1145F}"/>
               </a:ext>
             </a:extLst>
           </p:cNvPr>
@@ -2180,7 +2180,7 @@
           <p:cNvPr id="5" name="">
             <a:extLst xmlns:a="http://schemas.openxmlformats.org/drawingml/2006/main">
               <a:ext uri="{FF2B5EF4-FFF2-40B4-BE49-F238E27FC236}">
-                <a16:creationId xmlns:a16="http://schemas.microsoft.com/office/drawing/2014/main" id="{3573E241-79F3-48F1-8AD0-A4F0DC464C0B}"/>
+                <a16:creationId xmlns:a16="http://schemas.microsoft.com/office/drawing/2014/main" id="{C4EB4253-E172-4AF9-A6BC-0DB23D068B99}"/>
               </a:ext>
             </a:extLst>
           </p:cNvPr>
@@ -2260,7 +2260,7 @@
           <p:cNvPr id="6" name="">
             <a:extLst xmlns:a="http://schemas.openxmlformats.org/drawingml/2006/main">
               <a:ext uri="{FF2B5EF4-FFF2-40B4-BE49-F238E27FC236}">
-                <a16:creationId xmlns:a16="http://schemas.microsoft.com/office/drawing/2014/main" id="{27EACDCA-5CF6-4966-AAE6-A2EB74AE09D4}"/>
+                <a16:creationId xmlns:a16="http://schemas.microsoft.com/office/drawing/2014/main" id="{E5784D09-1BD4-42ED-9525-9B8CA0D1A7BC}"/>
               </a:ext>
             </a:extLst>
           </p:cNvPr>
@@ -2317,7 +2317,7 @@
           <p:cNvPr id="7" name="">
             <a:extLst xmlns:a="http://schemas.openxmlformats.org/drawingml/2006/main">
               <a:ext uri="{FF2B5EF4-FFF2-40B4-BE49-F238E27FC236}">
-                <a16:creationId xmlns:a16="http://schemas.microsoft.com/office/drawing/2014/main" id="{76F589DE-0BD3-44AF-AA94-FC7BFC2CDD90}"/>
+                <a16:creationId xmlns:a16="http://schemas.microsoft.com/office/drawing/2014/main" id="{A818FB0C-1187-4B4A-80D6-2B53DD3E136F}"/>
               </a:ext>
             </a:extLst>
           </p:cNvPr>
@@ -2374,7 +2374,7 @@
           <p:cNvPr id="8" name="">
             <a:extLst xmlns:a="http://schemas.openxmlformats.org/drawingml/2006/main">
               <a:ext uri="{FF2B5EF4-FFF2-40B4-BE49-F238E27FC236}">
-                <a16:creationId xmlns:a16="http://schemas.microsoft.com/office/drawing/2014/main" id="{F6B02BA4-8815-4F54-A416-4B489DFA2FA4}"/>
+                <a16:creationId xmlns:a16="http://schemas.microsoft.com/office/drawing/2014/main" id="{A61EFD17-43D2-4CA2-99C8-4E0C8E9546EB}"/>
               </a:ext>
             </a:extLst>
           </p:cNvPr>
@@ -2454,7 +2454,7 @@
           <p:cNvPr id="9" name="">
             <a:extLst xmlns:a="http://schemas.openxmlformats.org/drawingml/2006/main">
               <a:ext uri="{FF2B5EF4-FFF2-40B4-BE49-F238E27FC236}">
-                <a16:creationId xmlns:a16="http://schemas.microsoft.com/office/drawing/2014/main" id="{D05234F9-5D10-4852-94F4-435C2E732FBC}"/>
+                <a16:creationId xmlns:a16="http://schemas.microsoft.com/office/drawing/2014/main" id="{8037A119-058D-415B-A99E-21385755E95F}"/>
               </a:ext>
             </a:extLst>
           </p:cNvPr>
@@ -2511,7 +2511,7 @@
           <p:cNvPr id="10" name="">
             <a:extLst xmlns:a="http://schemas.openxmlformats.org/drawingml/2006/main">
               <a:ext uri="{FF2B5EF4-FFF2-40B4-BE49-F238E27FC236}">
-                <a16:creationId xmlns:a16="http://schemas.microsoft.com/office/drawing/2014/main" id="{2F7EF0F1-CF8F-411F-980E-F9E035478A75}"/>
+                <a16:creationId xmlns:a16="http://schemas.microsoft.com/office/drawing/2014/main" id="{71BCBAE4-13FA-4210-8CD5-5322D53D3DE6}"/>
               </a:ext>
             </a:extLst>
           </p:cNvPr>
@@ -2806,7 +2806,7 @@
           <p:cNvPr id="12" name="">
             <a:extLst xmlns:a="http://schemas.openxmlformats.org/drawingml/2006/main">
               <a:ext uri="{FF2B5EF4-FFF2-40B4-BE49-F238E27FC236}">
-                <a16:creationId xmlns:a16="http://schemas.microsoft.com/office/drawing/2014/main" id="{54056865-C62F-4496-BD9D-4F4AE5BC9925}"/>
+                <a16:creationId xmlns:a16="http://schemas.microsoft.com/office/drawing/2014/main" id="{E143CE4F-0344-4935-A343-2199181EDD72}"/>
               </a:ext>
             </a:extLst>
           </p:cNvPr>
@@ -2861,7 +2861,7 @@
     </p:spTree>
     <p:extLst>
       <p:ext uri="{BB962C8B-B14F-4D97-AF65-F5344CB8AC3E}">
-        <p14:creationId xmlns:p14="http://schemas.microsoft.com/office/powerpoint/2010/main" val="1192199758"/>
+        <p14:creationId xmlns:p14="http://schemas.microsoft.com/office/powerpoint/2010/main" val="130087960"/>
       </p:ext>
     </p:extLst>
   </p:cSld>
@@ -2892,7 +2892,7 @@
           <p:cNvPr id="7" name="">
             <a:extLst xmlns:a="http://schemas.openxmlformats.org/drawingml/2006/main">
               <a:ext uri="{FF2B5EF4-FFF2-40B4-BE49-F238E27FC236}">
-                <a16:creationId xmlns:a16="http://schemas.microsoft.com/office/drawing/2014/main" id="{AED9C52D-EA13-463C-9E44-845CBF58B82E}"/>
+                <a16:creationId xmlns:a16="http://schemas.microsoft.com/office/drawing/2014/main" id="{93D9871B-70F3-4BCC-9FE0-3C347B9E45AB}"/>
               </a:ext>
             </a:extLst>
           </p:cNvPr>
@@ -2949,7 +2949,7 @@
           <p:cNvPr id="2" name="">
             <a:extLst xmlns:a="http://schemas.openxmlformats.org/drawingml/2006/main">
               <a:ext uri="{FF2B5EF4-FFF2-40B4-BE49-F238E27FC236}">
-                <a16:creationId xmlns:a16="http://schemas.microsoft.com/office/drawing/2014/main" id="{53BC208F-7020-41DB-BFC7-693C0918BDC5}"/>
+                <a16:creationId xmlns:a16="http://schemas.microsoft.com/office/drawing/2014/main" id="{B645D562-9303-469B-8507-BF5AE3956390}"/>
               </a:ext>
             </a:extLst>
           </p:cNvPr>
@@ -3006,7 +3006,7 @@
           <p:cNvPr id="3" name="">
             <a:extLst xmlns:a="http://schemas.openxmlformats.org/drawingml/2006/main">
               <a:ext uri="{FF2B5EF4-FFF2-40B4-BE49-F238E27FC236}">
-                <a16:creationId xmlns:a16="http://schemas.microsoft.com/office/drawing/2014/main" id="{F067271E-FAE5-445A-BE84-3DD40092EED5}"/>
+                <a16:creationId xmlns:a16="http://schemas.microsoft.com/office/drawing/2014/main" id="{C8683C4C-4A13-45E3-8A34-71BABBE4F97E}"/>
               </a:ext>
             </a:extLst>
           </p:cNvPr>
@@ -3063,7 +3063,7 @@
           <p:cNvPr id="4" name="">
             <a:extLst xmlns:a="http://schemas.openxmlformats.org/drawingml/2006/main">
               <a:ext uri="{FF2B5EF4-FFF2-40B4-BE49-F238E27FC236}">
-                <a16:creationId xmlns:a16="http://schemas.microsoft.com/office/drawing/2014/main" id="{07561ECF-D5DC-4ECD-929B-361241B4A0C8}"/>
+                <a16:creationId xmlns:a16="http://schemas.microsoft.com/office/drawing/2014/main" id="{DC07CE36-2BC0-4EF2-B058-271B3BAC6600}"/>
               </a:ext>
             </a:extLst>
           </p:cNvPr>
@@ -3127,7 +3127,7 @@
         </p:xfrm>
         <a:graphic xmlns:a="http://schemas.openxmlformats.org/drawingml/2006/main">
           <a:graphicData uri="http://schemas.openxmlformats.org/drawingml/2006/chart">
-            <c:chart xmlns:r="http://schemas.openxmlformats.org/officeDocument/2006/relationships" xmlns:c="http://schemas.openxmlformats.org/drawingml/2006/chart" r:id="Rca6263f60e7744e2"/>
+            <c:chart xmlns:r="http://schemas.openxmlformats.org/officeDocument/2006/relationships" xmlns:c="http://schemas.openxmlformats.org/drawingml/2006/chart" r:id="R7d94b5ba6c7b44c0"/>
           </a:graphicData>
         </a:graphic>
       </p:graphicFrame>
@@ -3136,7 +3136,7 @@
           <p:cNvPr id="6" name="">
             <a:extLst xmlns:a="http://schemas.openxmlformats.org/drawingml/2006/main">
               <a:ext uri="{FF2B5EF4-FFF2-40B4-BE49-F238E27FC236}">
-                <a16:creationId xmlns:a16="http://schemas.microsoft.com/office/drawing/2014/main" id="{2FF33D3F-FBA1-4ACC-9535-64F158972E7B}"/>
+                <a16:creationId xmlns:a16="http://schemas.microsoft.com/office/drawing/2014/main" id="{D0D8533A-D554-48DE-A334-0BBC0C369357}"/>
               </a:ext>
             </a:extLst>
           </p:cNvPr>
@@ -3222,7 +3222,7 @@
     </p:spTree>
     <p:extLst>
       <p:ext uri="{BB962C8B-B14F-4D97-AF65-F5344CB8AC3E}">
-        <p14:creationId xmlns:p14="http://schemas.microsoft.com/office/powerpoint/2010/main" val="1834464974"/>
+        <p14:creationId xmlns:p14="http://schemas.microsoft.com/office/powerpoint/2010/main" val="1978114221"/>
       </p:ext>
     </p:extLst>
   </p:cSld>
@@ -3253,7 +3253,7 @@
           <p:cNvPr id="9" name="">
             <a:extLst xmlns:a="http://schemas.openxmlformats.org/drawingml/2006/main">
               <a:ext uri="{FF2B5EF4-FFF2-40B4-BE49-F238E27FC236}">
-                <a16:creationId xmlns:a16="http://schemas.microsoft.com/office/drawing/2014/main" id="{C1475BAA-B406-4F67-9C4F-29980A64DE8F}"/>
+                <a16:creationId xmlns:a16="http://schemas.microsoft.com/office/drawing/2014/main" id="{2E0DA066-B79A-4EA9-B34C-44849A563527}"/>
               </a:ext>
             </a:extLst>
           </p:cNvPr>
@@ -3310,7 +3310,7 @@
           <p:cNvPr id="2" name="">
             <a:extLst xmlns:a="http://schemas.openxmlformats.org/drawingml/2006/main">
               <a:ext uri="{FF2B5EF4-FFF2-40B4-BE49-F238E27FC236}">
-                <a16:creationId xmlns:a16="http://schemas.microsoft.com/office/drawing/2014/main" id="{A6B7AAF4-47F9-4163-A5EA-4B6AE71FBBD6}"/>
+                <a16:creationId xmlns:a16="http://schemas.microsoft.com/office/drawing/2014/main" id="{A660362B-A01E-4804-A667-78A2215FE1D9}"/>
               </a:ext>
             </a:extLst>
           </p:cNvPr>
@@ -3367,7 +3367,7 @@
           <p:cNvPr id="3" name="">
             <a:extLst xmlns:a="http://schemas.openxmlformats.org/drawingml/2006/main">
               <a:ext uri="{FF2B5EF4-FFF2-40B4-BE49-F238E27FC236}">
-                <a16:creationId xmlns:a16="http://schemas.microsoft.com/office/drawing/2014/main" id="{10C84328-DA36-41F5-86F4-7DC3B052949A}"/>
+                <a16:creationId xmlns:a16="http://schemas.microsoft.com/office/drawing/2014/main" id="{FB1A113E-35A8-4BAC-97E3-4B502D59278B}"/>
               </a:ext>
             </a:extLst>
           </p:cNvPr>
@@ -3424,7 +3424,7 @@
           <p:cNvPr id="4" name="">
             <a:extLst xmlns:a="http://schemas.openxmlformats.org/drawingml/2006/main">
               <a:ext uri="{FF2B5EF4-FFF2-40B4-BE49-F238E27FC236}">
-                <a16:creationId xmlns:a16="http://schemas.microsoft.com/office/drawing/2014/main" id="{03385D87-40FA-4E1D-8235-8FF0E1691F5B}"/>
+                <a16:creationId xmlns:a16="http://schemas.microsoft.com/office/drawing/2014/main" id="{F5C14B07-C47D-45C2-B62A-811028C7F59A}"/>
               </a:ext>
             </a:extLst>
           </p:cNvPr>
@@ -3481,7 +3481,7 @@
           <p:cNvPr id="5" name="">
             <a:extLst xmlns:a="http://schemas.openxmlformats.org/drawingml/2006/main">
               <a:ext uri="{FF2B5EF4-FFF2-40B4-BE49-F238E27FC236}">
-                <a16:creationId xmlns:a16="http://schemas.microsoft.com/office/drawing/2014/main" id="{0896648A-A816-4706-9EA0-4B57C8D19C0F}"/>
+                <a16:creationId xmlns:a16="http://schemas.microsoft.com/office/drawing/2014/main" id="{BA5004C3-0B24-4EC1-B00F-F7CAF2F80DAE}"/>
               </a:ext>
             </a:extLst>
           </p:cNvPr>
@@ -3561,7 +3561,7 @@
           <p:cNvPr id="6" name="">
             <a:extLst xmlns:a="http://schemas.openxmlformats.org/drawingml/2006/main">
               <a:ext uri="{FF2B5EF4-FFF2-40B4-BE49-F238E27FC236}">
-                <a16:creationId xmlns:a16="http://schemas.microsoft.com/office/drawing/2014/main" id="{5FF27EBB-12E7-4358-A601-C4A7F12DCBAB}"/>
+                <a16:creationId xmlns:a16="http://schemas.microsoft.com/office/drawing/2014/main" id="{4A3FA261-EAD3-43EF-9DA2-F8A29948126A}"/>
               </a:ext>
             </a:extLst>
           </p:cNvPr>
@@ -3649,7 +3649,7 @@
           <p:cNvPr id="7" name="">
             <a:extLst xmlns:a="http://schemas.openxmlformats.org/drawingml/2006/main">
               <a:ext uri="{FF2B5EF4-FFF2-40B4-BE49-F238E27FC236}">
-                <a16:creationId xmlns:a16="http://schemas.microsoft.com/office/drawing/2014/main" id="{3178A475-6542-4184-96FC-787F857B9585}"/>
+                <a16:creationId xmlns:a16="http://schemas.microsoft.com/office/drawing/2014/main" id="{275CE76F-034D-4CEB-A51E-2B00152F9F48}"/>
               </a:ext>
             </a:extLst>
           </p:cNvPr>
@@ -3942,7 +3942,7 @@
     </p:spTree>
     <p:extLst>
       <p:ext uri="{BB962C8B-B14F-4D97-AF65-F5344CB8AC3E}">
-        <p14:creationId xmlns:p14="http://schemas.microsoft.com/office/powerpoint/2010/main" val="1541840098"/>
+        <p14:creationId xmlns:p14="http://schemas.microsoft.com/office/powerpoint/2010/main" val="1451916616"/>
       </p:ext>
     </p:extLst>
   </p:cSld>
@@ -3973,7 +3973,7 @@
           <p:cNvPr id="9" name="">
             <a:extLst xmlns:a="http://schemas.openxmlformats.org/drawingml/2006/main">
               <a:ext uri="{FF2B5EF4-FFF2-40B4-BE49-F238E27FC236}">
-                <a16:creationId xmlns:a16="http://schemas.microsoft.com/office/drawing/2014/main" id="{2FFFFD05-4775-4642-BEF7-C9EA72AA89A4}"/>
+                <a16:creationId xmlns:a16="http://schemas.microsoft.com/office/drawing/2014/main" id="{E40DD3F2-1F8E-4047-8B69-D0B48B042CA2}"/>
               </a:ext>
             </a:extLst>
           </p:cNvPr>
@@ -4030,7 +4030,7 @@
           <p:cNvPr id="2" name="">
             <a:extLst xmlns:a="http://schemas.openxmlformats.org/drawingml/2006/main">
               <a:ext uri="{FF2B5EF4-FFF2-40B4-BE49-F238E27FC236}">
-                <a16:creationId xmlns:a16="http://schemas.microsoft.com/office/drawing/2014/main" id="{2DF82CA6-F3B4-49FF-9502-ECC37D432B32}"/>
+                <a16:creationId xmlns:a16="http://schemas.microsoft.com/office/drawing/2014/main" id="{282562CD-8197-4E18-AD74-CCEAFC401621}"/>
               </a:ext>
             </a:extLst>
           </p:cNvPr>
@@ -4087,7 +4087,7 @@
           <p:cNvPr id="3" name="">
             <a:extLst xmlns:a="http://schemas.openxmlformats.org/drawingml/2006/main">
               <a:ext uri="{FF2B5EF4-FFF2-40B4-BE49-F238E27FC236}">
-                <a16:creationId xmlns:a16="http://schemas.microsoft.com/office/drawing/2014/main" id="{9617792A-7F38-4A04-A606-129FBCF50840}"/>
+                <a16:creationId xmlns:a16="http://schemas.microsoft.com/office/drawing/2014/main" id="{2809DF0E-CBF2-4D8F-8FAA-907119DCE778}"/>
               </a:ext>
             </a:extLst>
           </p:cNvPr>
@@ -4144,7 +4144,7 @@
           <p:cNvPr id="4" name="">
             <a:extLst xmlns:a="http://schemas.openxmlformats.org/drawingml/2006/main">
               <a:ext uri="{FF2B5EF4-FFF2-40B4-BE49-F238E27FC236}">
-                <a16:creationId xmlns:a16="http://schemas.microsoft.com/office/drawing/2014/main" id="{A512E363-B0AD-403E-BE09-ED8500535511}"/>
+                <a16:creationId xmlns:a16="http://schemas.microsoft.com/office/drawing/2014/main" id="{AC706D7A-CD55-4743-9CB7-5A4FD3EC379C}"/>
               </a:ext>
             </a:extLst>
           </p:cNvPr>
@@ -4201,7 +4201,7 @@
           <p:cNvPr id="5" name="">
             <a:extLst xmlns:a="http://schemas.openxmlformats.org/drawingml/2006/main">
               <a:ext uri="{FF2B5EF4-FFF2-40B4-BE49-F238E27FC236}">
-                <a16:creationId xmlns:a16="http://schemas.microsoft.com/office/drawing/2014/main" id="{BDFFE187-378D-43B9-A686-A7D9993F0A18}"/>
+                <a16:creationId xmlns:a16="http://schemas.microsoft.com/office/drawing/2014/main" id="{0059457B-6ADF-4C8A-90B9-EBF95C04B7DF}"/>
               </a:ext>
             </a:extLst>
           </p:cNvPr>
@@ -4316,7 +4316,7 @@
           <p:cNvPr id="6" name="">
             <a:extLst xmlns:a="http://schemas.openxmlformats.org/drawingml/2006/main">
               <a:ext uri="{FF2B5EF4-FFF2-40B4-BE49-F238E27FC236}">
-                <a16:creationId xmlns:a16="http://schemas.microsoft.com/office/drawing/2014/main" id="{37EBD814-053A-4E72-9805-F1606A1324E1}"/>
+                <a16:creationId xmlns:a16="http://schemas.microsoft.com/office/drawing/2014/main" id="{32E1ADC9-27FF-4402-BC6C-AD66D23DC720}"/>
               </a:ext>
             </a:extLst>
           </p:cNvPr>
@@ -4503,7 +4503,7 @@
           <p:cNvPr id="8" name="">
             <a:extLst xmlns:a="http://schemas.openxmlformats.org/drawingml/2006/main">
               <a:ext uri="{FF2B5EF4-FFF2-40B4-BE49-F238E27FC236}">
-                <a16:creationId xmlns:a16="http://schemas.microsoft.com/office/drawing/2014/main" id="{3A419549-9D24-47BB-8874-1336B12883A7}"/>
+                <a16:creationId xmlns:a16="http://schemas.microsoft.com/office/drawing/2014/main" id="{527D5680-E4CD-4D5B-AC9A-E5F341556CD4}"/>
               </a:ext>
             </a:extLst>
           </p:cNvPr>
@@ -4558,7 +4558,7 @@
     </p:spTree>
     <p:extLst>
       <p:ext uri="{BB962C8B-B14F-4D97-AF65-F5344CB8AC3E}">
-        <p14:creationId xmlns:p14="http://schemas.microsoft.com/office/powerpoint/2010/main" val="2088631444"/>
+        <p14:creationId xmlns:p14="http://schemas.microsoft.com/office/powerpoint/2010/main" val="562149893"/>
       </p:ext>
     </p:extLst>
   </p:cSld>
@@ -4589,7 +4589,7 @@
           <p:cNvPr id="13" name="">
             <a:extLst xmlns:a="http://schemas.openxmlformats.org/drawingml/2006/main">
               <a:ext uri="{FF2B5EF4-FFF2-40B4-BE49-F238E27FC236}">
-                <a16:creationId xmlns:a16="http://schemas.microsoft.com/office/drawing/2014/main" id="{05C93409-8EAA-4BF4-A0B0-71B98ECEC7F1}"/>
+                <a16:creationId xmlns:a16="http://schemas.microsoft.com/office/drawing/2014/main" id="{2E0882ED-E60F-42C9-8377-14F27131CB7C}"/>
               </a:ext>
             </a:extLst>
           </p:cNvPr>
@@ -4646,7 +4646,7 @@
           <p:cNvPr id="2" name="">
             <a:extLst xmlns:a="http://schemas.openxmlformats.org/drawingml/2006/main">
               <a:ext uri="{FF2B5EF4-FFF2-40B4-BE49-F238E27FC236}">
-                <a16:creationId xmlns:a16="http://schemas.microsoft.com/office/drawing/2014/main" id="{A5A8C4EA-C2D6-49A4-8B56-D162D2BA4AB4}"/>
+                <a16:creationId xmlns:a16="http://schemas.microsoft.com/office/drawing/2014/main" id="{4FA511B9-A0B6-49F9-841B-4978E9390C2B}"/>
               </a:ext>
             </a:extLst>
           </p:cNvPr>
@@ -4703,7 +4703,7 @@
           <p:cNvPr id="3" name="">
             <a:extLst xmlns:a="http://schemas.openxmlformats.org/drawingml/2006/main">
               <a:ext uri="{FF2B5EF4-FFF2-40B4-BE49-F238E27FC236}">
-                <a16:creationId xmlns:a16="http://schemas.microsoft.com/office/drawing/2014/main" id="{3FE8931E-A3BB-45C7-B2AF-138442094B7C}"/>
+                <a16:creationId xmlns:a16="http://schemas.microsoft.com/office/drawing/2014/main" id="{69890894-B54B-4093-B2C0-FF9D2A57BDB6}"/>
               </a:ext>
             </a:extLst>
           </p:cNvPr>
@@ -4760,7 +4760,7 @@
           <p:cNvPr id="4" name="">
             <a:extLst xmlns:a="http://schemas.openxmlformats.org/drawingml/2006/main">
               <a:ext uri="{FF2B5EF4-FFF2-40B4-BE49-F238E27FC236}">
-                <a16:creationId xmlns:a16="http://schemas.microsoft.com/office/drawing/2014/main" id="{A5649BD6-3E4E-43F9-90C0-5622B8CD622D}"/>
+                <a16:creationId xmlns:a16="http://schemas.microsoft.com/office/drawing/2014/main" id="{F71AD415-61F3-4BD6-B3EA-A9D7ACACA976}"/>
               </a:ext>
             </a:extLst>
           </p:cNvPr>
@@ -4821,7 +4821,7 @@
           <p:cNvPr id="5" name="">
             <a:extLst xmlns:a="http://schemas.openxmlformats.org/drawingml/2006/main">
               <a:ext uri="{FF2B5EF4-FFF2-40B4-BE49-F238E27FC236}">
-                <a16:creationId xmlns:a16="http://schemas.microsoft.com/office/drawing/2014/main" id="{58470725-96A1-4866-8C8C-9A4D691C59FA}"/>
+                <a16:creationId xmlns:a16="http://schemas.microsoft.com/office/drawing/2014/main" id="{966BCBA2-C6E6-462C-BEFC-D5DBECC92E1C}"/>
               </a:ext>
             </a:extLst>
           </p:cNvPr>
@@ -4882,7 +4882,7 @@
           <p:cNvPr id="6" name="">
             <a:extLst xmlns:a="http://schemas.openxmlformats.org/drawingml/2006/main">
               <a:ext uri="{FF2B5EF4-FFF2-40B4-BE49-F238E27FC236}">
-                <a16:creationId xmlns:a16="http://schemas.microsoft.com/office/drawing/2014/main" id="{F981A68A-00B4-49AC-A169-239180FFD0CA}"/>
+                <a16:creationId xmlns:a16="http://schemas.microsoft.com/office/drawing/2014/main" id="{0E45DF08-E0E9-49B0-8354-538CA5BCE163}"/>
               </a:ext>
             </a:extLst>
           </p:cNvPr>
@@ -4991,7 +4991,7 @@
           <p:cNvPr id="8" name="">
             <a:extLst xmlns:a="http://schemas.openxmlformats.org/drawingml/2006/main">
               <a:ext uri="{FF2B5EF4-FFF2-40B4-BE49-F238E27FC236}">
-                <a16:creationId xmlns:a16="http://schemas.microsoft.com/office/drawing/2014/main" id="{72EED323-F945-4F61-B513-81E64BC3842E}"/>
+                <a16:creationId xmlns:a16="http://schemas.microsoft.com/office/drawing/2014/main" id="{944C38F2-084A-4DE9-9B6A-E090758B77AE}"/>
               </a:ext>
             </a:extLst>
           </p:cNvPr>
@@ -5100,7 +5100,7 @@
           <p:cNvPr id="10" name="">
             <a:extLst xmlns:a="http://schemas.openxmlformats.org/drawingml/2006/main">
               <a:ext uri="{FF2B5EF4-FFF2-40B4-BE49-F238E27FC236}">
-                <a16:creationId xmlns:a16="http://schemas.microsoft.com/office/drawing/2014/main" id="{2706F8E5-3BA3-447A-9395-D4B74378C972}"/>
+                <a16:creationId xmlns:a16="http://schemas.microsoft.com/office/drawing/2014/main" id="{E89AFDD9-B5B1-4609-9903-692DD64EE528}"/>
               </a:ext>
             </a:extLst>
           </p:cNvPr>
@@ -5209,7 +5209,7 @@
           <p:cNvPr id="12" name="">
             <a:extLst xmlns:a="http://schemas.openxmlformats.org/drawingml/2006/main">
               <a:ext uri="{FF2B5EF4-FFF2-40B4-BE49-F238E27FC236}">
-                <a16:creationId xmlns:a16="http://schemas.microsoft.com/office/drawing/2014/main" id="{60FEF61A-0090-4561-BD4C-212E9F037144}"/>
+                <a16:creationId xmlns:a16="http://schemas.microsoft.com/office/drawing/2014/main" id="{A9DFF5A5-A5D4-46D9-86AC-5C0466FD4733}"/>
               </a:ext>
             </a:extLst>
           </p:cNvPr>
@@ -5295,7 +5295,7 @@
     </p:spTree>
     <p:extLst>
       <p:ext uri="{BB962C8B-B14F-4D97-AF65-F5344CB8AC3E}">
-        <p14:creationId xmlns:p14="http://schemas.microsoft.com/office/powerpoint/2010/main" val="1700704644"/>
+        <p14:creationId xmlns:p14="http://schemas.microsoft.com/office/powerpoint/2010/main" val="1277179253"/>
       </p:ext>
     </p:extLst>
   </p:cSld>
@@ -5326,7 +5326,7 @@
           <p:cNvPr id="9" name="">
             <a:extLst xmlns:a="http://schemas.openxmlformats.org/drawingml/2006/main">
               <a:ext uri="{FF2B5EF4-FFF2-40B4-BE49-F238E27FC236}">
-                <a16:creationId xmlns:a16="http://schemas.microsoft.com/office/drawing/2014/main" id="{020D3ECF-9DC2-45CE-A07F-6D75EC1F4BA2}"/>
+                <a16:creationId xmlns:a16="http://schemas.microsoft.com/office/drawing/2014/main" id="{4B01B305-F2E8-41BE-802A-29998389A753}"/>
               </a:ext>
             </a:extLst>
           </p:cNvPr>
@@ -5383,7 +5383,7 @@
           <p:cNvPr id="2" name="">
             <a:extLst xmlns:a="http://schemas.openxmlformats.org/drawingml/2006/main">
               <a:ext uri="{FF2B5EF4-FFF2-40B4-BE49-F238E27FC236}">
-                <a16:creationId xmlns:a16="http://schemas.microsoft.com/office/drawing/2014/main" id="{7E688A78-84F5-43B9-8B64-C1BE036D8D29}"/>
+                <a16:creationId xmlns:a16="http://schemas.microsoft.com/office/drawing/2014/main" id="{1B486D4F-38F2-4246-BCB9-53B88E3CBC1D}"/>
               </a:ext>
             </a:extLst>
           </p:cNvPr>
@@ -5440,7 +5440,7 @@
           <p:cNvPr id="3" name="">
             <a:extLst xmlns:a="http://schemas.openxmlformats.org/drawingml/2006/main">
               <a:ext uri="{FF2B5EF4-FFF2-40B4-BE49-F238E27FC236}">
-                <a16:creationId xmlns:a16="http://schemas.microsoft.com/office/drawing/2014/main" id="{FBA9DD6B-26FF-4B17-9F3B-523A56E09568}"/>
+                <a16:creationId xmlns:a16="http://schemas.microsoft.com/office/drawing/2014/main" id="{9B70EE77-3414-4B8A-B95B-51B19F400493}"/>
               </a:ext>
             </a:extLst>
           </p:cNvPr>
@@ -5497,7 +5497,7 @@
           <p:cNvPr id="4" name="">
             <a:extLst xmlns:a="http://schemas.openxmlformats.org/drawingml/2006/main">
               <a:ext uri="{FF2B5EF4-FFF2-40B4-BE49-F238E27FC236}">
-                <a16:creationId xmlns:a16="http://schemas.microsoft.com/office/drawing/2014/main" id="{1D2B267B-1A43-41FA-AC1A-BC6668370D84}"/>
+                <a16:creationId xmlns:a16="http://schemas.microsoft.com/office/drawing/2014/main" id="{CE94F1DE-FFAE-4D8D-AD86-705912AD30B9}"/>
               </a:ext>
             </a:extLst>
           </p:cNvPr>
@@ -5741,7 +5741,7 @@
           <p:cNvPr id="6" name="">
             <a:extLst xmlns:a="http://schemas.openxmlformats.org/drawingml/2006/main">
               <a:ext uri="{FF2B5EF4-FFF2-40B4-BE49-F238E27FC236}">
-                <a16:creationId xmlns:a16="http://schemas.microsoft.com/office/drawing/2014/main" id="{531BEECD-BE3A-4D73-9DD5-82040DE08525}"/>
+                <a16:creationId xmlns:a16="http://schemas.microsoft.com/office/drawing/2014/main" id="{8D5BA349-FFE1-4465-A59D-43BCFEC24A2E}"/>
               </a:ext>
             </a:extLst>
           </p:cNvPr>
@@ -5798,7 +5798,7 @@
           <p:cNvPr id="7" name="">
             <a:extLst xmlns:a="http://schemas.openxmlformats.org/drawingml/2006/main">
               <a:ext uri="{FF2B5EF4-FFF2-40B4-BE49-F238E27FC236}">
-                <a16:creationId xmlns:a16="http://schemas.microsoft.com/office/drawing/2014/main" id="{42E2DAA0-BF1E-4788-BADD-A2F3F086C64C}"/>
+                <a16:creationId xmlns:a16="http://schemas.microsoft.com/office/drawing/2014/main" id="{EC4E6BF0-26E9-49F0-84DC-FA494DCE33B9}"/>
               </a:ext>
             </a:extLst>
           </p:cNvPr>
@@ -5886,7 +5886,7 @@
           <p:cNvPr id="8" name="">
             <a:extLst xmlns:a="http://schemas.openxmlformats.org/drawingml/2006/main">
               <a:ext uri="{FF2B5EF4-FFF2-40B4-BE49-F238E27FC236}">
-                <a16:creationId xmlns:a16="http://schemas.microsoft.com/office/drawing/2014/main" id="{644C0C34-0738-4848-81FD-98B3516D9CD5}"/>
+                <a16:creationId xmlns:a16="http://schemas.microsoft.com/office/drawing/2014/main" id="{5EE7B87D-B935-4237-BEE1-EC5F3572BF8E}"/>
               </a:ext>
             </a:extLst>
           </p:cNvPr>
@@ -5941,7 +5941,7 @@
     </p:spTree>
     <p:extLst>
       <p:ext uri="{BB962C8B-B14F-4D97-AF65-F5344CB8AC3E}">
-        <p14:creationId xmlns:p14="http://schemas.microsoft.com/office/powerpoint/2010/main" val="483760217"/>
+        <p14:creationId xmlns:p14="http://schemas.microsoft.com/office/powerpoint/2010/main" val="933223053"/>
       </p:ext>
     </p:extLst>
   </p:cSld>
@@ -5972,7 +5972,7 @@
           <p:cNvPr id="7" name="">
             <a:extLst xmlns:a="http://schemas.openxmlformats.org/drawingml/2006/main">
               <a:ext uri="{FF2B5EF4-FFF2-40B4-BE49-F238E27FC236}">
-                <a16:creationId xmlns:a16="http://schemas.microsoft.com/office/drawing/2014/main" id="{D9234208-591F-4995-BB5B-5D748D42D50A}"/>
+                <a16:creationId xmlns:a16="http://schemas.microsoft.com/office/drawing/2014/main" id="{5E5257DB-6D79-44B8-ADB0-C0CE130707DF}"/>
               </a:ext>
             </a:extLst>
           </p:cNvPr>
@@ -6029,7 +6029,7 @@
           <p:cNvPr id="2" name="">
             <a:extLst xmlns:a="http://schemas.openxmlformats.org/drawingml/2006/main">
               <a:ext uri="{FF2B5EF4-FFF2-40B4-BE49-F238E27FC236}">
-                <a16:creationId xmlns:a16="http://schemas.microsoft.com/office/drawing/2014/main" id="{1657E6DD-0EB4-4514-8B9D-248019075A43}"/>
+                <a16:creationId xmlns:a16="http://schemas.microsoft.com/office/drawing/2014/main" id="{CE9A73B0-679C-4EE3-A7A5-71A47D6015DB}"/>
               </a:ext>
             </a:extLst>
           </p:cNvPr>
@@ -6086,7 +6086,7 @@
           <p:cNvPr id="3" name="">
             <a:extLst xmlns:a="http://schemas.openxmlformats.org/drawingml/2006/main">
               <a:ext uri="{FF2B5EF4-FFF2-40B4-BE49-F238E27FC236}">
-                <a16:creationId xmlns:a16="http://schemas.microsoft.com/office/drawing/2014/main" id="{CB4915E4-5DCD-4081-9991-DE87EEB2B75C}"/>
+                <a16:creationId xmlns:a16="http://schemas.microsoft.com/office/drawing/2014/main" id="{EA353D05-52B1-4C24-BA8E-8F3E33D3BB76}"/>
               </a:ext>
             </a:extLst>
           </p:cNvPr>
@@ -6143,7 +6143,7 @@
           <p:cNvPr id="4" name="">
             <a:extLst xmlns:a="http://schemas.openxmlformats.org/drawingml/2006/main">
               <a:ext uri="{FF2B5EF4-FFF2-40B4-BE49-F238E27FC236}">
-                <a16:creationId xmlns:a16="http://schemas.microsoft.com/office/drawing/2014/main" id="{27EEE8B8-D184-43AB-A3D6-607355E61BA1}"/>
+                <a16:creationId xmlns:a16="http://schemas.microsoft.com/office/drawing/2014/main" id="{8CD3BC87-D132-4A57-B566-A263EA402437}"/>
               </a:ext>
             </a:extLst>
           </p:cNvPr>
@@ -6442,7 +6442,7 @@
           <p:cNvPr id="6" name="">
             <a:extLst xmlns:a="http://schemas.openxmlformats.org/drawingml/2006/main">
               <a:ext uri="{FF2B5EF4-FFF2-40B4-BE49-F238E27FC236}">
-                <a16:creationId xmlns:a16="http://schemas.microsoft.com/office/drawing/2014/main" id="{5548554C-055F-4382-A9E2-186244869378}"/>
+                <a16:creationId xmlns:a16="http://schemas.microsoft.com/office/drawing/2014/main" id="{E20F8D19-D00F-48DF-8409-46897678A98C}"/>
               </a:ext>
             </a:extLst>
           </p:cNvPr>
@@ -6528,7 +6528,7 @@
     </p:spTree>
     <p:extLst>
       <p:ext uri="{BB962C8B-B14F-4D97-AF65-F5344CB8AC3E}">
-        <p14:creationId xmlns:p14="http://schemas.microsoft.com/office/powerpoint/2010/main" val="284900560"/>
+        <p14:creationId xmlns:p14="http://schemas.microsoft.com/office/powerpoint/2010/main" val="844225268"/>
       </p:ext>
     </p:extLst>
   </p:cSld>
@@ -6559,7 +6559,7 @@
           <p:cNvPr id="6" name="">
             <a:extLst xmlns:a="http://schemas.openxmlformats.org/drawingml/2006/main">
               <a:ext uri="{FF2B5EF4-FFF2-40B4-BE49-F238E27FC236}">
-                <a16:creationId xmlns:a16="http://schemas.microsoft.com/office/drawing/2014/main" id="{35FBD081-7428-4286-BBF5-339D3BFBB9A0}"/>
+                <a16:creationId xmlns:a16="http://schemas.microsoft.com/office/drawing/2014/main" id="{2475668C-DB65-4692-A0D0-41C02CDE662D}"/>
               </a:ext>
             </a:extLst>
           </p:cNvPr>
@@ -6616,7 +6616,7 @@
           <p:cNvPr id="2" name="">
             <a:extLst xmlns:a="http://schemas.openxmlformats.org/drawingml/2006/main">
               <a:ext uri="{FF2B5EF4-FFF2-40B4-BE49-F238E27FC236}">
-                <a16:creationId xmlns:a16="http://schemas.microsoft.com/office/drawing/2014/main" id="{A398AA83-33B9-4089-9FF5-D3BD50B0D47F}"/>
+                <a16:creationId xmlns:a16="http://schemas.microsoft.com/office/drawing/2014/main" id="{B36BA0C0-7E3B-4034-9B51-8D5015735D32}"/>
               </a:ext>
             </a:extLst>
           </p:cNvPr>
@@ -6673,7 +6673,7 @@
           <p:cNvPr id="3" name="">
             <a:extLst xmlns:a="http://schemas.openxmlformats.org/drawingml/2006/main">
               <a:ext uri="{FF2B5EF4-FFF2-40B4-BE49-F238E27FC236}">
-                <a16:creationId xmlns:a16="http://schemas.microsoft.com/office/drawing/2014/main" id="{EF44B4BB-8BCE-4B11-90E3-F8F11D578240}"/>
+                <a16:creationId xmlns:a16="http://schemas.microsoft.com/office/drawing/2014/main" id="{838AC7F4-3E36-4E59-9709-5DDD91AE5E22}"/>
               </a:ext>
             </a:extLst>
           </p:cNvPr>
@@ -6730,7 +6730,7 @@
           <p:cNvPr id="4" name="">
             <a:extLst xmlns:a="http://schemas.openxmlformats.org/drawingml/2006/main">
               <a:ext uri="{FF2B5EF4-FFF2-40B4-BE49-F238E27FC236}">
-                <a16:creationId xmlns:a16="http://schemas.microsoft.com/office/drawing/2014/main" id="{EDFCA2B5-6144-4C70-94A2-244AF2DE3652}"/>
+                <a16:creationId xmlns:a16="http://schemas.microsoft.com/office/drawing/2014/main" id="{67233FF5-93C0-4DB6-9253-5CB39A8BE121}"/>
               </a:ext>
             </a:extLst>
           </p:cNvPr>
@@ -6999,7 +6999,7 @@
     </p:spTree>
     <p:extLst>
       <p:ext uri="{BB962C8B-B14F-4D97-AF65-F5344CB8AC3E}">
-        <p14:creationId xmlns:p14="http://schemas.microsoft.com/office/powerpoint/2010/main" val="107517716"/>
+        <p14:creationId xmlns:p14="http://schemas.microsoft.com/office/powerpoint/2010/main" val="2116705782"/>
       </p:ext>
     </p:extLst>
   </p:cSld>
@@ -7030,7 +7030,7 @@
           <p:cNvPr id="7" name="">
             <a:extLst xmlns:a="http://schemas.openxmlformats.org/drawingml/2006/main">
               <a:ext uri="{FF2B5EF4-FFF2-40B4-BE49-F238E27FC236}">
-                <a16:creationId xmlns:a16="http://schemas.microsoft.com/office/drawing/2014/main" id="{6EDA867F-CC00-438A-8CFC-A49EBCACB966}"/>
+                <a16:creationId xmlns:a16="http://schemas.microsoft.com/office/drawing/2014/main" id="{FEE2714F-C655-4940-9BFB-75345AB5C814}"/>
               </a:ext>
             </a:extLst>
           </p:cNvPr>
@@ -7087,7 +7087,7 @@
           <p:cNvPr id="2" name="">
             <a:extLst xmlns:a="http://schemas.openxmlformats.org/drawingml/2006/main">
               <a:ext uri="{FF2B5EF4-FFF2-40B4-BE49-F238E27FC236}">
-                <a16:creationId xmlns:a16="http://schemas.microsoft.com/office/drawing/2014/main" id="{3E682C42-4D56-49E1-9D96-DF2CB1343334}"/>
+                <a16:creationId xmlns:a16="http://schemas.microsoft.com/office/drawing/2014/main" id="{4F3D158F-3C06-434E-BB3A-521F6341E23B}"/>
               </a:ext>
             </a:extLst>
           </p:cNvPr>
@@ -7144,7 +7144,7 @@
           <p:cNvPr id="3" name="">
             <a:extLst xmlns:a="http://schemas.openxmlformats.org/drawingml/2006/main">
               <a:ext uri="{FF2B5EF4-FFF2-40B4-BE49-F238E27FC236}">
-                <a16:creationId xmlns:a16="http://schemas.microsoft.com/office/drawing/2014/main" id="{6F7A68CA-796A-4E7A-BA7D-67B5E257A143}"/>
+                <a16:creationId xmlns:a16="http://schemas.microsoft.com/office/drawing/2014/main" id="{E98FB051-C36F-48E2-959C-1D3B2B17668A}"/>
               </a:ext>
             </a:extLst>
           </p:cNvPr>
@@ -7201,7 +7201,7 @@
           <p:cNvPr id="4" name="">
             <a:extLst xmlns:a="http://schemas.openxmlformats.org/drawingml/2006/main">
               <a:ext uri="{FF2B5EF4-FFF2-40B4-BE49-F238E27FC236}">
-                <a16:creationId xmlns:a16="http://schemas.microsoft.com/office/drawing/2014/main" id="{2B431625-E31B-43EA-BD4A-697064FBC3A4}"/>
+                <a16:creationId xmlns:a16="http://schemas.microsoft.com/office/drawing/2014/main" id="{DA8B6391-D3E1-4A78-95B0-14E6A65864A3}"/>
               </a:ext>
             </a:extLst>
           </p:cNvPr>
@@ -7258,7 +7258,7 @@
           <p:cNvPr id="5" name="">
             <a:extLst xmlns:a="http://schemas.openxmlformats.org/drawingml/2006/main">
               <a:ext uri="{FF2B5EF4-FFF2-40B4-BE49-F238E27FC236}">
-                <a16:creationId xmlns:a16="http://schemas.microsoft.com/office/drawing/2014/main" id="{B6C4FADB-E72E-458C-A9B7-1B746DB13A0B}"/>
+                <a16:creationId xmlns:a16="http://schemas.microsoft.com/office/drawing/2014/main" id="{DA3A90B5-EBA9-464B-B7F7-E552A905F3CE}"/>
               </a:ext>
             </a:extLst>
           </p:cNvPr>
@@ -7315,7 +7315,7 @@
           <p:cNvPr id="6" name="">
             <a:extLst xmlns:a="http://schemas.openxmlformats.org/drawingml/2006/main">
               <a:ext uri="{FF2B5EF4-FFF2-40B4-BE49-F238E27FC236}">
-                <a16:creationId xmlns:a16="http://schemas.microsoft.com/office/drawing/2014/main" id="{01A27923-9CCB-4158-8B30-CEBE5E4A677B}"/>
+                <a16:creationId xmlns:a16="http://schemas.microsoft.com/office/drawing/2014/main" id="{AB0CB923-9247-45C2-ADC7-AFC0737D3EC8}"/>
               </a:ext>
             </a:extLst>
           </p:cNvPr>
@@ -7428,7 +7428,7 @@
     </p:spTree>
     <p:extLst>
       <p:ext uri="{BB962C8B-B14F-4D97-AF65-F5344CB8AC3E}">
-        <p14:creationId xmlns:p14="http://schemas.microsoft.com/office/powerpoint/2010/main" val="1642001901"/>
+        <p14:creationId xmlns:p14="http://schemas.microsoft.com/office/powerpoint/2010/main" val="454130606"/>
       </p:ext>
     </p:extLst>
   </p:cSld>
@@ -7459,7 +7459,7 @@
           <p:cNvPr id="8" name="">
             <a:extLst xmlns:a="http://schemas.openxmlformats.org/drawingml/2006/main">
               <a:ext uri="{FF2B5EF4-FFF2-40B4-BE49-F238E27FC236}">
-                <a16:creationId xmlns:a16="http://schemas.microsoft.com/office/drawing/2014/main" id="{3F55A85A-BC71-4C35-B4C2-A5A947AB818E}"/>
+                <a16:creationId xmlns:a16="http://schemas.microsoft.com/office/drawing/2014/main" id="{CEF9ABC7-FFB1-4472-A6DB-28B9FC794285}"/>
               </a:ext>
             </a:extLst>
           </p:cNvPr>
@@ -7516,7 +7516,7 @@
           <p:cNvPr id="2" name="">
             <a:extLst xmlns:a="http://schemas.openxmlformats.org/drawingml/2006/main">
               <a:ext uri="{FF2B5EF4-FFF2-40B4-BE49-F238E27FC236}">
-                <a16:creationId xmlns:a16="http://schemas.microsoft.com/office/drawing/2014/main" id="{7AD97EA4-DFE8-4982-8271-4E0701819D8F}"/>
+                <a16:creationId xmlns:a16="http://schemas.microsoft.com/office/drawing/2014/main" id="{3671BE4E-D284-49C3-87B3-AC4DA2D8504D}"/>
               </a:ext>
             </a:extLst>
           </p:cNvPr>
@@ -7573,7 +7573,7 @@
           <p:cNvPr id="3" name="">
             <a:extLst xmlns:a="http://schemas.openxmlformats.org/drawingml/2006/main">
               <a:ext uri="{FF2B5EF4-FFF2-40B4-BE49-F238E27FC236}">
-                <a16:creationId xmlns:a16="http://schemas.microsoft.com/office/drawing/2014/main" id="{8FD0FA6E-57CD-4981-A2F1-C5DC07584576}"/>
+                <a16:creationId xmlns:a16="http://schemas.microsoft.com/office/drawing/2014/main" id="{E38B796D-BD2F-4DEC-A8FC-637296B5EAFB}"/>
               </a:ext>
             </a:extLst>
           </p:cNvPr>
@@ -7630,7 +7630,7 @@
           <p:cNvPr id="4" name="">
             <a:extLst xmlns:a="http://schemas.openxmlformats.org/drawingml/2006/main">
               <a:ext uri="{FF2B5EF4-FFF2-40B4-BE49-F238E27FC236}">
-                <a16:creationId xmlns:a16="http://schemas.microsoft.com/office/drawing/2014/main" id="{93254147-C718-49A0-B7F2-835CBE803671}"/>
+                <a16:creationId xmlns:a16="http://schemas.microsoft.com/office/drawing/2014/main" id="{4B48F20C-40E9-4D07-958B-4ABF110971AA}"/>
               </a:ext>
             </a:extLst>
           </p:cNvPr>
@@ -7687,7 +7687,7 @@
           <p:cNvPr id="5" name="">
             <a:extLst xmlns:a="http://schemas.openxmlformats.org/drawingml/2006/main">
               <a:ext uri="{FF2B5EF4-FFF2-40B4-BE49-F238E27FC236}">
-                <a16:creationId xmlns:a16="http://schemas.microsoft.com/office/drawing/2014/main" id="{277B3972-BEF4-48AF-A48F-0228FC5D15A8}"/>
+                <a16:creationId xmlns:a16="http://schemas.microsoft.com/office/drawing/2014/main" id="{CF9E59C5-AA62-4CA0-BFE6-E1DFA57FFD89}"/>
               </a:ext>
             </a:extLst>
           </p:cNvPr>
@@ -7744,7 +7744,7 @@
           <p:cNvPr id="6" name="">
             <a:extLst xmlns:a="http://schemas.openxmlformats.org/drawingml/2006/main">
               <a:ext uri="{FF2B5EF4-FFF2-40B4-BE49-F238E27FC236}">
-                <a16:creationId xmlns:a16="http://schemas.microsoft.com/office/drawing/2014/main" id="{D760CA93-9B15-43E7-8CE0-6EE21A6E17BC}"/>
+                <a16:creationId xmlns:a16="http://schemas.microsoft.com/office/drawing/2014/main" id="{19A24AED-FF2E-4A0B-B850-16F795FBD124}"/>
               </a:ext>
             </a:extLst>
           </p:cNvPr>
@@ -7801,7 +7801,7 @@
           <p:cNvPr id="7" name="">
             <a:extLst xmlns:a="http://schemas.openxmlformats.org/drawingml/2006/main">
               <a:ext uri="{FF2B5EF4-FFF2-40B4-BE49-F238E27FC236}">
-                <a16:creationId xmlns:a16="http://schemas.microsoft.com/office/drawing/2014/main" id="{4CFE326B-EB13-4F3E-9EA1-50F7621DC0D6}"/>
+                <a16:creationId xmlns:a16="http://schemas.microsoft.com/office/drawing/2014/main" id="{32A628D0-EE51-4521-8189-3A89782D2934}"/>
               </a:ext>
             </a:extLst>
           </p:cNvPr>
@@ -7856,7 +7856,7 @@
     </p:spTree>
     <p:extLst>
       <p:ext uri="{BB962C8B-B14F-4D97-AF65-F5344CB8AC3E}">
-        <p14:creationId xmlns:p14="http://schemas.microsoft.com/office/powerpoint/2010/main" val="1226093040"/>
+        <p14:creationId xmlns:p14="http://schemas.microsoft.com/office/powerpoint/2010/main" val="1480923889"/>
       </p:ext>
     </p:extLst>
   </p:cSld>
@@ -7887,7 +7887,7 @@
           <p:cNvPr id="6" name="">
             <a:extLst xmlns:a="http://schemas.openxmlformats.org/drawingml/2006/main">
               <a:ext uri="{FF2B5EF4-FFF2-40B4-BE49-F238E27FC236}">
-                <a16:creationId xmlns:a16="http://schemas.microsoft.com/office/drawing/2014/main" id="{9740FAD8-288E-425C-87F7-B6992D6ADF2B}"/>
+                <a16:creationId xmlns:a16="http://schemas.microsoft.com/office/drawing/2014/main" id="{9663A43C-F171-4D9C-BDBE-4A19675229F7}"/>
               </a:ext>
             </a:extLst>
           </p:cNvPr>
@@ -7944,7 +7944,7 @@
           <p:cNvPr id="2" name="">
             <a:extLst xmlns:a="http://schemas.openxmlformats.org/drawingml/2006/main">
               <a:ext uri="{FF2B5EF4-FFF2-40B4-BE49-F238E27FC236}">
-                <a16:creationId xmlns:a16="http://schemas.microsoft.com/office/drawing/2014/main" id="{4F815F25-AD11-44DF-B4D0-375A6FA4E6DE}"/>
+                <a16:creationId xmlns:a16="http://schemas.microsoft.com/office/drawing/2014/main" id="{DF195A7F-71B3-4E85-81A9-5E9E65624194}"/>
               </a:ext>
             </a:extLst>
           </p:cNvPr>
@@ -8001,7 +8001,7 @@
           <p:cNvPr id="3" name="">
             <a:extLst xmlns:a="http://schemas.openxmlformats.org/drawingml/2006/main">
               <a:ext uri="{FF2B5EF4-FFF2-40B4-BE49-F238E27FC236}">
-                <a16:creationId xmlns:a16="http://schemas.microsoft.com/office/drawing/2014/main" id="{84E2B0FD-7298-49AD-8919-26FB8C109C7C}"/>
+                <a16:creationId xmlns:a16="http://schemas.microsoft.com/office/drawing/2014/main" id="{372CC687-8C91-424D-857B-737D5BEC4A82}"/>
               </a:ext>
             </a:extLst>
           </p:cNvPr>
@@ -8058,7 +8058,7 @@
           <p:cNvPr id="4" name="">
             <a:extLst xmlns:a="http://schemas.openxmlformats.org/drawingml/2006/main">
               <a:ext uri="{FF2B5EF4-FFF2-40B4-BE49-F238E27FC236}">
-                <a16:creationId xmlns:a16="http://schemas.microsoft.com/office/drawing/2014/main" id="{4E225F91-8C8A-4FA9-8B50-E3E6C91C9732}"/>
+                <a16:creationId xmlns:a16="http://schemas.microsoft.com/office/drawing/2014/main" id="{61D01FF6-47A7-47B3-84E7-75732BEEEE9E}"/>
               </a:ext>
             </a:extLst>
           </p:cNvPr>
@@ -8173,7 +8173,7 @@
           <p:cNvPr id="5" name="">
             <a:extLst xmlns:a="http://schemas.openxmlformats.org/drawingml/2006/main">
               <a:ext uri="{FF2B5EF4-FFF2-40B4-BE49-F238E27FC236}">
-                <a16:creationId xmlns:a16="http://schemas.microsoft.com/office/drawing/2014/main" id="{EBE7B64B-8B68-4486-8646-E27E60B9DC90}"/>
+                <a16:creationId xmlns:a16="http://schemas.microsoft.com/office/drawing/2014/main" id="{FA0347ED-5B9D-4C4B-AAA1-F32BCC7677AC}"/>
               </a:ext>
             </a:extLst>
           </p:cNvPr>
@@ -8228,7 +8228,7 @@
     </p:spTree>
     <p:extLst>
       <p:ext uri="{BB962C8B-B14F-4D97-AF65-F5344CB8AC3E}">
-        <p14:creationId xmlns:p14="http://schemas.microsoft.com/office/powerpoint/2010/main" val="2059133241"/>
+        <p14:creationId xmlns:p14="http://schemas.microsoft.com/office/powerpoint/2010/main" val="30707401"/>
       </p:ext>
     </p:extLst>
   </p:cSld>
@@ -8259,7 +8259,7 @@
           <p:cNvPr id="6" name="">
             <a:extLst xmlns:a="http://schemas.openxmlformats.org/drawingml/2006/main">
               <a:ext uri="{FF2B5EF4-FFF2-40B4-BE49-F238E27FC236}">
-                <a16:creationId xmlns:a16="http://schemas.microsoft.com/office/drawing/2014/main" id="{11F0612B-DE94-4175-8248-8D5C0515E1FE}"/>
+                <a16:creationId xmlns:a16="http://schemas.microsoft.com/office/drawing/2014/main" id="{2B785153-A0A4-421A-94C0-B2CAD1D3EC4A}"/>
               </a:ext>
             </a:extLst>
           </p:cNvPr>
@@ -8316,7 +8316,7 @@
           <p:cNvPr id="2" name="">
             <a:extLst xmlns:a="http://schemas.openxmlformats.org/drawingml/2006/main">
               <a:ext uri="{FF2B5EF4-FFF2-40B4-BE49-F238E27FC236}">
-                <a16:creationId xmlns:a16="http://schemas.microsoft.com/office/drawing/2014/main" id="{84C6F991-59F3-4F41-BFA5-3B372796073C}"/>
+                <a16:creationId xmlns:a16="http://schemas.microsoft.com/office/drawing/2014/main" id="{6E46A1AA-E30E-4604-A09F-40B49ACC05EF}"/>
               </a:ext>
             </a:extLst>
           </p:cNvPr>
@@ -8373,7 +8373,7 @@
           <p:cNvPr id="3" name="">
             <a:extLst xmlns:a="http://schemas.openxmlformats.org/drawingml/2006/main">
               <a:ext uri="{FF2B5EF4-FFF2-40B4-BE49-F238E27FC236}">
-                <a16:creationId xmlns:a16="http://schemas.microsoft.com/office/drawing/2014/main" id="{9AC5B9AC-1114-41D5-AB02-7A37C801D4CB}"/>
+                <a16:creationId xmlns:a16="http://schemas.microsoft.com/office/drawing/2014/main" id="{876FED1E-3EFF-4292-8FE4-C357DBA14042}"/>
               </a:ext>
             </a:extLst>
           </p:cNvPr>
@@ -9246,7 +9246,7 @@
           <p:cNvPr id="5" name="">
             <a:extLst xmlns:a="http://schemas.openxmlformats.org/drawingml/2006/main">
               <a:ext uri="{FF2B5EF4-FFF2-40B4-BE49-F238E27FC236}">
-                <a16:creationId xmlns:a16="http://schemas.microsoft.com/office/drawing/2014/main" id="{60AB3F5E-451E-4047-A88C-E75205E6AF28}"/>
+                <a16:creationId xmlns:a16="http://schemas.microsoft.com/office/drawing/2014/main" id="{E98523FA-3791-444F-9067-9350886F8743}"/>
               </a:ext>
             </a:extLst>
           </p:cNvPr>
@@ -9301,7 +9301,7 @@
     </p:spTree>
     <p:extLst>
       <p:ext uri="{BB962C8B-B14F-4D97-AF65-F5344CB8AC3E}">
-        <p14:creationId xmlns:p14="http://schemas.microsoft.com/office/powerpoint/2010/main" val="269508118"/>
+        <p14:creationId xmlns:p14="http://schemas.microsoft.com/office/powerpoint/2010/main" val="100845625"/>
       </p:ext>
     </p:extLst>
   </p:cSld>
@@ -9332,7 +9332,7 @@
           <p:cNvPr id="6" name="">
             <a:extLst xmlns:a="http://schemas.openxmlformats.org/drawingml/2006/main">
               <a:ext uri="{FF2B5EF4-FFF2-40B4-BE49-F238E27FC236}">
-                <a16:creationId xmlns:a16="http://schemas.microsoft.com/office/drawing/2014/main" id="{6F822553-DB4E-4042-8465-8EC28B419922}"/>
+                <a16:creationId xmlns:a16="http://schemas.microsoft.com/office/drawing/2014/main" id="{D962F0E7-BFF3-4807-8F84-BC62BB818099}"/>
               </a:ext>
             </a:extLst>
           </p:cNvPr>
@@ -9389,7 +9389,7 @@
           <p:cNvPr id="2" name="">
             <a:extLst xmlns:a="http://schemas.openxmlformats.org/drawingml/2006/main">
               <a:ext uri="{FF2B5EF4-FFF2-40B4-BE49-F238E27FC236}">
-                <a16:creationId xmlns:a16="http://schemas.microsoft.com/office/drawing/2014/main" id="{20756BC0-961A-46FB-A73A-4A063BE0EC8D}"/>
+                <a16:creationId xmlns:a16="http://schemas.microsoft.com/office/drawing/2014/main" id="{227B18B6-4FBF-4E4C-95EC-E74B51990F31}"/>
               </a:ext>
             </a:extLst>
           </p:cNvPr>
@@ -9446,7 +9446,7 @@
           <p:cNvPr id="3" name="">
             <a:extLst xmlns:a="http://schemas.openxmlformats.org/drawingml/2006/main">
               <a:ext uri="{FF2B5EF4-FFF2-40B4-BE49-F238E27FC236}">
-                <a16:creationId xmlns:a16="http://schemas.microsoft.com/office/drawing/2014/main" id="{E3F90766-B3C1-4F16-B73C-BB1E8AAA928C}"/>
+                <a16:creationId xmlns:a16="http://schemas.microsoft.com/office/drawing/2014/main" id="{F31D94FA-3DF0-4BF9-962D-67AB11B69422}"/>
               </a:ext>
             </a:extLst>
           </p:cNvPr>
@@ -9503,7 +9503,7 @@
           <p:cNvPr id="4" name="">
             <a:extLst xmlns:a="http://schemas.openxmlformats.org/drawingml/2006/main">
               <a:ext uri="{FF2B5EF4-FFF2-40B4-BE49-F238E27FC236}">
-                <a16:creationId xmlns:a16="http://schemas.microsoft.com/office/drawing/2014/main" id="{AC36A180-ED22-4A9E-855B-CBE8D77B1C2E}"/>
+                <a16:creationId xmlns:a16="http://schemas.microsoft.com/office/drawing/2014/main" id="{24BE6FB2-728D-4A28-AABA-AB387CA0EDB2}"/>
               </a:ext>
             </a:extLst>
           </p:cNvPr>
@@ -9791,7 +9791,7 @@
     </p:spTree>
     <p:extLst>
       <p:ext uri="{BB962C8B-B14F-4D97-AF65-F5344CB8AC3E}">
-        <p14:creationId xmlns:p14="http://schemas.microsoft.com/office/powerpoint/2010/main" val="633891230"/>
+        <p14:creationId xmlns:p14="http://schemas.microsoft.com/office/powerpoint/2010/main" val="1285197974"/>
       </p:ext>
     </p:extLst>
   </p:cSld>
@@ -9822,7 +9822,7 @@
           <p:cNvPr id="9" name="">
             <a:extLst xmlns:a="http://schemas.openxmlformats.org/drawingml/2006/main">
               <a:ext uri="{FF2B5EF4-FFF2-40B4-BE49-F238E27FC236}">
-                <a16:creationId xmlns:a16="http://schemas.microsoft.com/office/drawing/2014/main" id="{93AFD798-0153-4975-867F-16487933A241}"/>
+                <a16:creationId xmlns:a16="http://schemas.microsoft.com/office/drawing/2014/main" id="{26292D99-8FE5-460E-8493-B209E87F92F6}"/>
               </a:ext>
             </a:extLst>
           </p:cNvPr>
@@ -9879,7 +9879,7 @@
           <p:cNvPr id="2" name="">
             <a:extLst xmlns:a="http://schemas.openxmlformats.org/drawingml/2006/main">
               <a:ext uri="{FF2B5EF4-FFF2-40B4-BE49-F238E27FC236}">
-                <a16:creationId xmlns:a16="http://schemas.microsoft.com/office/drawing/2014/main" id="{8599A73F-364A-4695-939E-3BA4D3F958D1}"/>
+                <a16:creationId xmlns:a16="http://schemas.microsoft.com/office/drawing/2014/main" id="{CC58B0E6-594B-4124-8F45-A4B7D3ED632A}"/>
               </a:ext>
             </a:extLst>
           </p:cNvPr>
@@ -9936,7 +9936,7 @@
           <p:cNvPr id="3" name="">
             <a:extLst xmlns:a="http://schemas.openxmlformats.org/drawingml/2006/main">
               <a:ext uri="{FF2B5EF4-FFF2-40B4-BE49-F238E27FC236}">
-                <a16:creationId xmlns:a16="http://schemas.microsoft.com/office/drawing/2014/main" id="{82FF0FF8-6A4B-4CDD-AE8A-F37DEE096D99}"/>
+                <a16:creationId xmlns:a16="http://schemas.microsoft.com/office/drawing/2014/main" id="{13D562C7-7D82-4701-B97E-89AAAF828419}"/>
               </a:ext>
             </a:extLst>
           </p:cNvPr>
@@ -9993,7 +9993,7 @@
           <p:cNvPr id="4" name="">
             <a:extLst xmlns:a="http://schemas.openxmlformats.org/drawingml/2006/main">
               <a:ext uri="{FF2B5EF4-FFF2-40B4-BE49-F238E27FC236}">
-                <a16:creationId xmlns:a16="http://schemas.microsoft.com/office/drawing/2014/main" id="{C48A9997-2A2C-49C8-9612-B10CB7A96856}"/>
+                <a16:creationId xmlns:a16="http://schemas.microsoft.com/office/drawing/2014/main" id="{9E13A2A6-9413-428E-A142-165DA9BBB3CC}"/>
               </a:ext>
             </a:extLst>
           </p:cNvPr>
@@ -10057,7 +10057,7 @@
         </p:xfrm>
         <a:graphic xmlns:a="http://schemas.openxmlformats.org/drawingml/2006/main">
           <a:graphicData uri="http://schemas.openxmlformats.org/drawingml/2006/chart">
-            <c:chart xmlns:r="http://schemas.openxmlformats.org/officeDocument/2006/relationships" xmlns:c="http://schemas.openxmlformats.org/drawingml/2006/chart" r:id="Re3d7429ce7244d72"/>
+            <c:chart xmlns:r="http://schemas.openxmlformats.org/officeDocument/2006/relationships" xmlns:c="http://schemas.openxmlformats.org/drawingml/2006/chart" r:id="Receb76cc05064b59"/>
           </a:graphicData>
         </a:graphic>
       </p:graphicFrame>
@@ -10066,7 +10066,7 @@
           <p:cNvPr id="6" name="">
             <a:extLst xmlns:a="http://schemas.openxmlformats.org/drawingml/2006/main">
               <a:ext uri="{FF2B5EF4-FFF2-40B4-BE49-F238E27FC236}">
-                <a16:creationId xmlns:a16="http://schemas.microsoft.com/office/drawing/2014/main" id="{0B5EB011-701D-4322-9468-A877ACD65CE5}"/>
+                <a16:creationId xmlns:a16="http://schemas.microsoft.com/office/drawing/2014/main" id="{D401E909-04D8-43C3-A2C6-6F090D11D0B8}"/>
               </a:ext>
             </a:extLst>
           </p:cNvPr>
@@ -10123,7 +10123,7 @@
           <p:cNvPr id="7" name="">
             <a:extLst xmlns:a="http://schemas.openxmlformats.org/drawingml/2006/main">
               <a:ext uri="{FF2B5EF4-FFF2-40B4-BE49-F238E27FC236}">
-                <a16:creationId xmlns:a16="http://schemas.microsoft.com/office/drawing/2014/main" id="{C3F0FE2A-6EB5-46A9-A3C2-3254BED91C30}"/>
+                <a16:creationId xmlns:a16="http://schemas.microsoft.com/office/drawing/2014/main" id="{04B29800-147B-4472-B636-43DE9737A1ED}"/>
               </a:ext>
             </a:extLst>
           </p:cNvPr>
@@ -10239,7 +10239,7 @@
           <p:cNvPr id="8" name="">
             <a:extLst xmlns:a="http://schemas.openxmlformats.org/drawingml/2006/main">
               <a:ext uri="{FF2B5EF4-FFF2-40B4-BE49-F238E27FC236}">
-                <a16:creationId xmlns:a16="http://schemas.microsoft.com/office/drawing/2014/main" id="{E0887F57-0B57-4515-9AA7-39536489790B}"/>
+                <a16:creationId xmlns:a16="http://schemas.microsoft.com/office/drawing/2014/main" id="{75106335-6FC0-40EE-A900-65A7DC67D376}"/>
               </a:ext>
             </a:extLst>
           </p:cNvPr>
@@ -10294,7 +10294,7 @@
     </p:spTree>
     <p:extLst>
       <p:ext uri="{BB962C8B-B14F-4D97-AF65-F5344CB8AC3E}">
-        <p14:creationId xmlns:p14="http://schemas.microsoft.com/office/powerpoint/2010/main" val="1970478976"/>
+        <p14:creationId xmlns:p14="http://schemas.microsoft.com/office/powerpoint/2010/main" val="1647793744"/>
       </p:ext>
     </p:extLst>
   </p:cSld>
@@ -10325,7 +10325,7 @@
           <p:cNvPr id="6" name="">
             <a:extLst xmlns:a="http://schemas.openxmlformats.org/drawingml/2006/main">
               <a:ext uri="{FF2B5EF4-FFF2-40B4-BE49-F238E27FC236}">
-                <a16:creationId xmlns:a16="http://schemas.microsoft.com/office/drawing/2014/main" id="{4CA99560-ADE6-4240-B05B-5AD2BCE3679A}"/>
+                <a16:creationId xmlns:a16="http://schemas.microsoft.com/office/drawing/2014/main" id="{A15B28EB-E52B-41C9-8A37-B3E0DE3DBFC0}"/>
               </a:ext>
             </a:extLst>
           </p:cNvPr>
@@ -10382,7 +10382,7 @@
           <p:cNvPr id="2" name="">
             <a:extLst xmlns:a="http://schemas.openxmlformats.org/drawingml/2006/main">
               <a:ext uri="{FF2B5EF4-FFF2-40B4-BE49-F238E27FC236}">
-                <a16:creationId xmlns:a16="http://schemas.microsoft.com/office/drawing/2014/main" id="{CFFCC6D7-19D8-4F1D-B348-D9F82B6BEC4D}"/>
+                <a16:creationId xmlns:a16="http://schemas.microsoft.com/office/drawing/2014/main" id="{E8A74F08-A8B7-40C1-8A6B-CC425D4BE47F}"/>
               </a:ext>
             </a:extLst>
           </p:cNvPr>
@@ -10439,7 +10439,7 @@
           <p:cNvPr id="3" name="">
             <a:extLst xmlns:a="http://schemas.openxmlformats.org/drawingml/2006/main">
               <a:ext uri="{FF2B5EF4-FFF2-40B4-BE49-F238E27FC236}">
-                <a16:creationId xmlns:a16="http://schemas.microsoft.com/office/drawing/2014/main" id="{3FC0D422-6248-43A6-8A1D-083DCED163AE}"/>
+                <a16:creationId xmlns:a16="http://schemas.microsoft.com/office/drawing/2014/main" id="{FF27EE0C-79F9-4B1F-B31F-F3C4840D087A}"/>
               </a:ext>
             </a:extLst>
           </p:cNvPr>
@@ -10919,7 +10919,7 @@
           <p:cNvPr id="5" name="">
             <a:extLst xmlns:a="http://schemas.openxmlformats.org/drawingml/2006/main">
               <a:ext uri="{FF2B5EF4-FFF2-40B4-BE49-F238E27FC236}">
-                <a16:creationId xmlns:a16="http://schemas.microsoft.com/office/drawing/2014/main" id="{141C94F4-963B-4554-878D-1B29012FE32C}"/>
+                <a16:creationId xmlns:a16="http://schemas.microsoft.com/office/drawing/2014/main" id="{4E502C7A-ED13-4207-9B75-5B58C92A30BF}"/>
               </a:ext>
             </a:extLst>
           </p:cNvPr>
@@ -10978,7 +10978,7 @@
     </p:spTree>
     <p:extLst>
       <p:ext uri="{BB962C8B-B14F-4D97-AF65-F5344CB8AC3E}">
-        <p14:creationId xmlns:p14="http://schemas.microsoft.com/office/powerpoint/2010/main" val="1822563191"/>
+        <p14:creationId xmlns:p14="http://schemas.microsoft.com/office/powerpoint/2010/main" val="766076677"/>
       </p:ext>
     </p:extLst>
   </p:cSld>
@@ -11009,7 +11009,7 @@
           <p:cNvPr id="5" name="">
             <a:extLst xmlns:a="http://schemas.openxmlformats.org/drawingml/2006/main">
               <a:ext uri="{FF2B5EF4-FFF2-40B4-BE49-F238E27FC236}">
-                <a16:creationId xmlns:a16="http://schemas.microsoft.com/office/drawing/2014/main" id="{0FE9903F-8142-4CF3-AAB2-89099711FC11}"/>
+                <a16:creationId xmlns:a16="http://schemas.microsoft.com/office/drawing/2014/main" id="{FBEB2474-CB25-4E6D-A224-4DB523C8F5B5}"/>
               </a:ext>
             </a:extLst>
           </p:cNvPr>
@@ -11066,7 +11066,7 @@
           <p:cNvPr id="2" name="">
             <a:extLst xmlns:a="http://schemas.openxmlformats.org/drawingml/2006/main">
               <a:ext uri="{FF2B5EF4-FFF2-40B4-BE49-F238E27FC236}">
-                <a16:creationId xmlns:a16="http://schemas.microsoft.com/office/drawing/2014/main" id="{D2D2BAAD-1FAC-451D-9F5F-AC9B5AEE7D7B}"/>
+                <a16:creationId xmlns:a16="http://schemas.microsoft.com/office/drawing/2014/main" id="{21CD345E-E9C5-4792-8F29-EFD1DF1992D5}"/>
               </a:ext>
             </a:extLst>
           </p:cNvPr>
@@ -11123,7 +11123,7 @@
           <p:cNvPr id="3" name="">
             <a:extLst xmlns:a="http://schemas.openxmlformats.org/drawingml/2006/main">
               <a:ext uri="{FF2B5EF4-FFF2-40B4-BE49-F238E27FC236}">
-                <a16:creationId xmlns:a16="http://schemas.microsoft.com/office/drawing/2014/main" id="{7F9CB7BD-C082-4E98-8C0B-8D28CCE9DE7B}"/>
+                <a16:creationId xmlns:a16="http://schemas.microsoft.com/office/drawing/2014/main" id="{0F3B4FFD-2B8E-4615-8F70-0377EC15D209}"/>
               </a:ext>
             </a:extLst>
           </p:cNvPr>
@@ -11537,7 +11537,7 @@
     </p:spTree>
     <p:extLst>
       <p:ext uri="{BB962C8B-B14F-4D97-AF65-F5344CB8AC3E}">
-        <p14:creationId xmlns:p14="http://schemas.microsoft.com/office/powerpoint/2010/main" val="396115484"/>
+        <p14:creationId xmlns:p14="http://schemas.microsoft.com/office/powerpoint/2010/main" val="131982224"/>
       </p:ext>
     </p:extLst>
   </p:cSld>
@@ -11568,7 +11568,7 @@
           <p:cNvPr id="9" name="">
             <a:extLst xmlns:a="http://schemas.openxmlformats.org/drawingml/2006/main">
               <a:ext uri="{FF2B5EF4-FFF2-40B4-BE49-F238E27FC236}">
-                <a16:creationId xmlns:a16="http://schemas.microsoft.com/office/drawing/2014/main" id="{555A06C4-A759-4C53-A4D8-2396DA180951}"/>
+                <a16:creationId xmlns:a16="http://schemas.microsoft.com/office/drawing/2014/main" id="{A5B48973-B157-415C-B8A6-A4DEC5A09EE9}"/>
               </a:ext>
             </a:extLst>
           </p:cNvPr>
@@ -11625,7 +11625,7 @@
           <p:cNvPr id="2" name="">
             <a:extLst xmlns:a="http://schemas.openxmlformats.org/drawingml/2006/main">
               <a:ext uri="{FF2B5EF4-FFF2-40B4-BE49-F238E27FC236}">
-                <a16:creationId xmlns:a16="http://schemas.microsoft.com/office/drawing/2014/main" id="{8983AB44-ADA5-408A-98B7-DBB50B0DFD6A}"/>
+                <a16:creationId xmlns:a16="http://schemas.microsoft.com/office/drawing/2014/main" id="{CF600A0B-0AF4-48C9-BE6C-39C399537559}"/>
               </a:ext>
             </a:extLst>
           </p:cNvPr>
@@ -11682,7 +11682,7 @@
           <p:cNvPr id="3" name="">
             <a:extLst xmlns:a="http://schemas.openxmlformats.org/drawingml/2006/main">
               <a:ext uri="{FF2B5EF4-FFF2-40B4-BE49-F238E27FC236}">
-                <a16:creationId xmlns:a16="http://schemas.microsoft.com/office/drawing/2014/main" id="{C27CC38B-F026-43C7-AED0-28D1D234FC0A}"/>
+                <a16:creationId xmlns:a16="http://schemas.microsoft.com/office/drawing/2014/main" id="{68F46AFB-4D47-4E4C-BCFC-655424D85ECE}"/>
               </a:ext>
             </a:extLst>
           </p:cNvPr>
@@ -11739,7 +11739,7 @@
           <p:cNvPr id="4" name="">
             <a:extLst xmlns:a="http://schemas.openxmlformats.org/drawingml/2006/main">
               <a:ext uri="{FF2B5EF4-FFF2-40B4-BE49-F238E27FC236}">
-                <a16:creationId xmlns:a16="http://schemas.microsoft.com/office/drawing/2014/main" id="{0BC2B90B-BEE1-44D6-8305-34FD873A8F19}"/>
+                <a16:creationId xmlns:a16="http://schemas.microsoft.com/office/drawing/2014/main" id="{338DAA53-B552-4CA0-BA0D-AA8E089F881D}"/>
               </a:ext>
             </a:extLst>
           </p:cNvPr>
@@ -11800,7 +11800,7 @@
           <p:cNvPr id="5" name="">
             <a:extLst xmlns:a="http://schemas.openxmlformats.org/drawingml/2006/main">
               <a:ext uri="{FF2B5EF4-FFF2-40B4-BE49-F238E27FC236}">
-                <a16:creationId xmlns:a16="http://schemas.microsoft.com/office/drawing/2014/main" id="{1922CBA6-76D2-4D87-9232-EC2102F1EFBF}"/>
+                <a16:creationId xmlns:a16="http://schemas.microsoft.com/office/drawing/2014/main" id="{3B62C125-83C0-479A-904E-A87F0232A7CE}"/>
               </a:ext>
             </a:extLst>
           </p:cNvPr>
@@ -11857,7 +11857,7 @@
           <p:cNvPr id="6" name="">
             <a:extLst xmlns:a="http://schemas.openxmlformats.org/drawingml/2006/main">
               <a:ext uri="{FF2B5EF4-FFF2-40B4-BE49-F238E27FC236}">
-                <a16:creationId xmlns:a16="http://schemas.microsoft.com/office/drawing/2014/main" id="{338871A0-9897-4C83-844F-5BC8047481D0}"/>
+                <a16:creationId xmlns:a16="http://schemas.microsoft.com/office/drawing/2014/main" id="{9790C229-0674-41CC-9775-7BBAE8DDC590}"/>
               </a:ext>
             </a:extLst>
           </p:cNvPr>
@@ -11918,7 +11918,7 @@
           <p:cNvPr id="7" name="">
             <a:extLst xmlns:a="http://schemas.openxmlformats.org/drawingml/2006/main">
               <a:ext uri="{FF2B5EF4-FFF2-40B4-BE49-F238E27FC236}">
-                <a16:creationId xmlns:a16="http://schemas.microsoft.com/office/drawing/2014/main" id="{FD9D3D75-0BD3-48B2-B463-E8B55DF3BCA3}"/>
+                <a16:creationId xmlns:a16="http://schemas.microsoft.com/office/drawing/2014/main" id="{E8AB72F2-3F7A-41F1-A105-3C365DBB16F2}"/>
               </a:ext>
             </a:extLst>
           </p:cNvPr>
@@ -11975,7 +11975,7 @@
           <p:cNvPr id="8" name="">
             <a:extLst xmlns:a="http://schemas.openxmlformats.org/drawingml/2006/main">
               <a:ext uri="{FF2B5EF4-FFF2-40B4-BE49-F238E27FC236}">
-                <a16:creationId xmlns:a16="http://schemas.microsoft.com/office/drawing/2014/main" id="{48DDD0FD-43BB-44C2-AE50-A490304E19D4}"/>
+                <a16:creationId xmlns:a16="http://schemas.microsoft.com/office/drawing/2014/main" id="{307E7E95-C9FC-4774-B544-25CAC2D79F09}"/>
               </a:ext>
             </a:extLst>
           </p:cNvPr>
@@ -12030,7 +12030,7 @@
     </p:spTree>
     <p:extLst>
       <p:ext uri="{BB962C8B-B14F-4D97-AF65-F5344CB8AC3E}">
-        <p14:creationId xmlns:p14="http://schemas.microsoft.com/office/powerpoint/2010/main" val="891671451"/>
+        <p14:creationId xmlns:p14="http://schemas.microsoft.com/office/powerpoint/2010/main" val="634152223"/>
       </p:ext>
     </p:extLst>
   </p:cSld>
@@ -12061,7 +12061,7 @@
           <p:cNvPr id="6" name="">
             <a:extLst xmlns:a="http://schemas.openxmlformats.org/drawingml/2006/main">
               <a:ext uri="{FF2B5EF4-FFF2-40B4-BE49-F238E27FC236}">
-                <a16:creationId xmlns:a16="http://schemas.microsoft.com/office/drawing/2014/main" id="{761135E1-4B78-4069-AA27-36AB8B0C62B8}"/>
+                <a16:creationId xmlns:a16="http://schemas.microsoft.com/office/drawing/2014/main" id="{9C222FF8-19FB-464A-B272-D99AB8A85564}"/>
               </a:ext>
             </a:extLst>
           </p:cNvPr>
@@ -12118,7 +12118,7 @@
           <p:cNvPr id="2" name="">
             <a:extLst xmlns:a="http://schemas.openxmlformats.org/drawingml/2006/main">
               <a:ext uri="{FF2B5EF4-FFF2-40B4-BE49-F238E27FC236}">
-                <a16:creationId xmlns:a16="http://schemas.microsoft.com/office/drawing/2014/main" id="{1DD64403-055D-42C0-AE4A-0C8E9D36ED60}"/>
+                <a16:creationId xmlns:a16="http://schemas.microsoft.com/office/drawing/2014/main" id="{92ED05CB-DB08-46A5-9D50-295FFE2E4353}"/>
               </a:ext>
             </a:extLst>
           </p:cNvPr>
@@ -12175,7 +12175,7 @@
           <p:cNvPr id="3" name="">
             <a:extLst xmlns:a="http://schemas.openxmlformats.org/drawingml/2006/main">
               <a:ext uri="{FF2B5EF4-FFF2-40B4-BE49-F238E27FC236}">
-                <a16:creationId xmlns:a16="http://schemas.microsoft.com/office/drawing/2014/main" id="{60040726-BD82-40D5-8317-393F6478265C}"/>
+                <a16:creationId xmlns:a16="http://schemas.microsoft.com/office/drawing/2014/main" id="{F5321CF7-2D48-41C8-A9F8-E62ED21E216D}"/>
               </a:ext>
             </a:extLst>
           </p:cNvPr>
@@ -12232,7 +12232,7 @@
           <p:cNvPr id="4" name="">
             <a:extLst xmlns:a="http://schemas.openxmlformats.org/drawingml/2006/main">
               <a:ext uri="{FF2B5EF4-FFF2-40B4-BE49-F238E27FC236}">
-                <a16:creationId xmlns:a16="http://schemas.microsoft.com/office/drawing/2014/main" id="{5D9E527B-1CE1-4AA7-B584-406694F7952F}"/>
+                <a16:creationId xmlns:a16="http://schemas.microsoft.com/office/drawing/2014/main" id="{E799F4FE-5C18-4E70-8DDD-434C1D6C5FAD}"/>
               </a:ext>
             </a:extLst>
           </p:cNvPr>
@@ -12374,7 +12374,7 @@
           <p:cNvPr id="5" name="">
             <a:extLst xmlns:a="http://schemas.openxmlformats.org/drawingml/2006/main">
               <a:ext uri="{FF2B5EF4-FFF2-40B4-BE49-F238E27FC236}">
-                <a16:creationId xmlns:a16="http://schemas.microsoft.com/office/drawing/2014/main" id="{450BD5B4-2990-4FA7-A13A-538A247C9B01}"/>
+                <a16:creationId xmlns:a16="http://schemas.microsoft.com/office/drawing/2014/main" id="{21C7E465-4BEF-4BAD-876A-E308AB067DA1}"/>
               </a:ext>
             </a:extLst>
           </p:cNvPr>
@@ -12421,7 +12421,7 @@
                 <a:ea typeface="Arial"/>
                 <a:cs typeface="Arial"/>
               </a:rPr>
-              <a:t>This is a different clinical task and does not validate our classifier.</a:t>
+              <a:t>This is a different clinical task and does not validate my classifier.</a:t>
             </a:r>
           </a:p>
         </p:txBody>
@@ -12429,7 +12429,7 @@
     </p:spTree>
     <p:extLst>
       <p:ext uri="{BB962C8B-B14F-4D97-AF65-F5344CB8AC3E}">
-        <p14:creationId xmlns:p14="http://schemas.microsoft.com/office/powerpoint/2010/main" val="1790455695"/>
+        <p14:creationId xmlns:p14="http://schemas.microsoft.com/office/powerpoint/2010/main" val="635623695"/>
       </p:ext>
     </p:extLst>
   </p:cSld>
@@ -12460,7 +12460,7 @@
           <p:cNvPr id="12" name="">
             <a:extLst xmlns:a="http://schemas.openxmlformats.org/drawingml/2006/main">
               <a:ext uri="{FF2B5EF4-FFF2-40B4-BE49-F238E27FC236}">
-                <a16:creationId xmlns:a16="http://schemas.microsoft.com/office/drawing/2014/main" id="{F34D02E7-368C-4F9E-A9AE-12804AD60F79}"/>
+                <a16:creationId xmlns:a16="http://schemas.microsoft.com/office/drawing/2014/main" id="{B8848057-D04E-4A00-933F-8B0CD66855B8}"/>
               </a:ext>
             </a:extLst>
           </p:cNvPr>
@@ -12517,7 +12517,7 @@
           <p:cNvPr id="2" name="">
             <a:extLst xmlns:a="http://schemas.openxmlformats.org/drawingml/2006/main">
               <a:ext uri="{FF2B5EF4-FFF2-40B4-BE49-F238E27FC236}">
-                <a16:creationId xmlns:a16="http://schemas.microsoft.com/office/drawing/2014/main" id="{DEEBF120-E533-44AC-9727-50F7466A8D83}"/>
+                <a16:creationId xmlns:a16="http://schemas.microsoft.com/office/drawing/2014/main" id="{A5691752-DED8-4E75-AECF-DFB253D7EF94}"/>
               </a:ext>
             </a:extLst>
           </p:cNvPr>
@@ -12574,7 +12574,7 @@
           <p:cNvPr id="3" name="">
             <a:extLst xmlns:a="http://schemas.openxmlformats.org/drawingml/2006/main">
               <a:ext uri="{FF2B5EF4-FFF2-40B4-BE49-F238E27FC236}">
-                <a16:creationId xmlns:a16="http://schemas.microsoft.com/office/drawing/2014/main" id="{2C8C908B-10CC-4D5B-B204-AAEFC984DFB2}"/>
+                <a16:creationId xmlns:a16="http://schemas.microsoft.com/office/drawing/2014/main" id="{B94740A6-D0D0-4E8B-A32F-64D8E7CC9488}"/>
               </a:ext>
             </a:extLst>
           </p:cNvPr>
@@ -12631,7 +12631,7 @@
           <p:cNvPr id="4" name="">
             <a:extLst xmlns:a="http://schemas.openxmlformats.org/drawingml/2006/main">
               <a:ext uri="{FF2B5EF4-FFF2-40B4-BE49-F238E27FC236}">
-                <a16:creationId xmlns:a16="http://schemas.microsoft.com/office/drawing/2014/main" id="{FD2E1ABB-1389-47EA-BD1B-10CDAD5F1CDD}"/>
+                <a16:creationId xmlns:a16="http://schemas.microsoft.com/office/drawing/2014/main" id="{A354281E-11B9-4E7A-B9C5-1106462AC3DA}"/>
               </a:ext>
             </a:extLst>
           </p:cNvPr>
@@ -12692,7 +12692,7 @@
           <p:cNvPr id="5" name="">
             <a:extLst xmlns:a="http://schemas.openxmlformats.org/drawingml/2006/main">
               <a:ext uri="{FF2B5EF4-FFF2-40B4-BE49-F238E27FC236}">
-                <a16:creationId xmlns:a16="http://schemas.microsoft.com/office/drawing/2014/main" id="{878BEEED-04C4-47DC-BB69-6ED26955EDE9}"/>
+                <a16:creationId xmlns:a16="http://schemas.microsoft.com/office/drawing/2014/main" id="{3F3EA7AA-98C8-4422-84EA-3434D5A711D3}"/>
               </a:ext>
             </a:extLst>
           </p:cNvPr>
@@ -12724,7 +12724,7 @@
           <p:cNvPr id="6" name="">
             <a:extLst xmlns:a="http://schemas.openxmlformats.org/drawingml/2006/main">
               <a:ext uri="{FF2B5EF4-FFF2-40B4-BE49-F238E27FC236}">
-                <a16:creationId xmlns:a16="http://schemas.microsoft.com/office/drawing/2014/main" id="{78BD6CEC-A411-4B62-A7E2-55344AEDBDA0}"/>
+                <a16:creationId xmlns:a16="http://schemas.microsoft.com/office/drawing/2014/main" id="{6B77326A-C287-47EC-9B60-B5FD018E63AD}"/>
               </a:ext>
             </a:extLst>
           </p:cNvPr>
@@ -12781,7 +12781,7 @@
           <p:cNvPr id="7" name="">
             <a:extLst xmlns:a="http://schemas.openxmlformats.org/drawingml/2006/main">
               <a:ext uri="{FF2B5EF4-FFF2-40B4-BE49-F238E27FC236}">
-                <a16:creationId xmlns:a16="http://schemas.microsoft.com/office/drawing/2014/main" id="{5AA5AB2C-D59B-4929-888A-4DD31D45AED9}"/>
+                <a16:creationId xmlns:a16="http://schemas.microsoft.com/office/drawing/2014/main" id="{DFA30412-C06A-4880-814A-63FD80F9C82D}"/>
               </a:ext>
             </a:extLst>
           </p:cNvPr>
@@ -12838,7 +12838,7 @@
           <p:cNvPr id="8" name="">
             <a:extLst xmlns:a="http://schemas.openxmlformats.org/drawingml/2006/main">
               <a:ext uri="{FF2B5EF4-FFF2-40B4-BE49-F238E27FC236}">
-                <a16:creationId xmlns:a16="http://schemas.microsoft.com/office/drawing/2014/main" id="{7EDEB9B7-582E-4458-A310-C582D85E564E}"/>
+                <a16:creationId xmlns:a16="http://schemas.microsoft.com/office/drawing/2014/main" id="{66061FE2-2218-42BA-91AE-A42D4B2C7992}"/>
               </a:ext>
             </a:extLst>
           </p:cNvPr>
@@ -12899,7 +12899,7 @@
           <p:cNvPr id="9" name="">
             <a:extLst xmlns:a="http://schemas.openxmlformats.org/drawingml/2006/main">
               <a:ext uri="{FF2B5EF4-FFF2-40B4-BE49-F238E27FC236}">
-                <a16:creationId xmlns:a16="http://schemas.microsoft.com/office/drawing/2014/main" id="{56BF50A0-F60E-48E6-AEFD-128A919F1C1B}"/>
+                <a16:creationId xmlns:a16="http://schemas.microsoft.com/office/drawing/2014/main" id="{265686C7-CA2C-4EF0-8609-A89D6C9095CF}"/>
               </a:ext>
             </a:extLst>
           </p:cNvPr>
@@ -12931,7 +12931,7 @@
           <p:cNvPr id="10" name="">
             <a:extLst xmlns:a="http://schemas.openxmlformats.org/drawingml/2006/main">
               <a:ext uri="{FF2B5EF4-FFF2-40B4-BE49-F238E27FC236}">
-                <a16:creationId xmlns:a16="http://schemas.microsoft.com/office/drawing/2014/main" id="{E91DF608-D7CE-4035-9452-11B163A1C62E}"/>
+                <a16:creationId xmlns:a16="http://schemas.microsoft.com/office/drawing/2014/main" id="{EFB58F6F-084F-4582-9FDD-0489C0C394F7}"/>
               </a:ext>
             </a:extLst>
           </p:cNvPr>
@@ -12988,7 +12988,7 @@
           <p:cNvPr id="11" name="">
             <a:extLst xmlns:a="http://schemas.openxmlformats.org/drawingml/2006/main">
               <a:ext uri="{FF2B5EF4-FFF2-40B4-BE49-F238E27FC236}">
-                <a16:creationId xmlns:a16="http://schemas.microsoft.com/office/drawing/2014/main" id="{5F41BED3-5E98-414C-AE95-5E99BDA14454}"/>
+                <a16:creationId xmlns:a16="http://schemas.microsoft.com/office/drawing/2014/main" id="{75F4AB5A-DC10-465D-B821-AF61BCC2B500}"/>
               </a:ext>
             </a:extLst>
           </p:cNvPr>
@@ -13043,7 +13043,7 @@
     </p:spTree>
     <p:extLst>
       <p:ext uri="{BB962C8B-B14F-4D97-AF65-F5344CB8AC3E}">
-        <p14:creationId xmlns:p14="http://schemas.microsoft.com/office/powerpoint/2010/main" val="1673337828"/>
+        <p14:creationId xmlns:p14="http://schemas.microsoft.com/office/powerpoint/2010/main" val="232443302"/>
       </p:ext>
     </p:extLst>
   </p:cSld>
@@ -13074,7 +13074,7 @@
           <p:cNvPr id="10" name="">
             <a:extLst xmlns:a="http://schemas.openxmlformats.org/drawingml/2006/main">
               <a:ext uri="{FF2B5EF4-FFF2-40B4-BE49-F238E27FC236}">
-                <a16:creationId xmlns:a16="http://schemas.microsoft.com/office/drawing/2014/main" id="{66C4118D-8416-4A7F-B645-B1F2DD6E8A2A}"/>
+                <a16:creationId xmlns:a16="http://schemas.microsoft.com/office/drawing/2014/main" id="{C51F835E-DF58-4A14-A492-85AEF575AE2E}"/>
               </a:ext>
             </a:extLst>
           </p:cNvPr>
@@ -13131,7 +13131,7 @@
           <p:cNvPr id="2" name="">
             <a:extLst xmlns:a="http://schemas.openxmlformats.org/drawingml/2006/main">
               <a:ext uri="{FF2B5EF4-FFF2-40B4-BE49-F238E27FC236}">
-                <a16:creationId xmlns:a16="http://schemas.microsoft.com/office/drawing/2014/main" id="{035A3072-0C5E-4A81-805E-90104609B279}"/>
+                <a16:creationId xmlns:a16="http://schemas.microsoft.com/office/drawing/2014/main" id="{5D82511D-527E-4AF8-83C3-31005CF22055}"/>
               </a:ext>
             </a:extLst>
           </p:cNvPr>
@@ -13188,7 +13188,7 @@
           <p:cNvPr id="3" name="">
             <a:extLst xmlns:a="http://schemas.openxmlformats.org/drawingml/2006/main">
               <a:ext uri="{FF2B5EF4-FFF2-40B4-BE49-F238E27FC236}">
-                <a16:creationId xmlns:a16="http://schemas.microsoft.com/office/drawing/2014/main" id="{66F0516F-0625-4D04-AAF4-4BAEACDA42E4}"/>
+                <a16:creationId xmlns:a16="http://schemas.microsoft.com/office/drawing/2014/main" id="{6CBFF378-5077-408D-9A69-C643423DB53E}"/>
               </a:ext>
             </a:extLst>
           </p:cNvPr>
@@ -13268,7 +13268,7 @@
           <p:cNvPr id="4" name="">
             <a:extLst xmlns:a="http://schemas.openxmlformats.org/drawingml/2006/main">
               <a:ext uri="{FF2B5EF4-FFF2-40B4-BE49-F238E27FC236}">
-                <a16:creationId xmlns:a16="http://schemas.microsoft.com/office/drawing/2014/main" id="{B117401F-EFC6-45B5-8840-BC9FBA48BEFD}"/>
+                <a16:creationId xmlns:a16="http://schemas.microsoft.com/office/drawing/2014/main" id="{1D257D2F-4DA4-463C-A9C9-3B45C7FDF9F6}"/>
               </a:ext>
             </a:extLst>
           </p:cNvPr>
@@ -13348,7 +13348,7 @@
           <p:cNvPr id="5" name="">
             <a:extLst xmlns:a="http://schemas.openxmlformats.org/drawingml/2006/main">
               <a:ext uri="{FF2B5EF4-FFF2-40B4-BE49-F238E27FC236}">
-                <a16:creationId xmlns:a16="http://schemas.microsoft.com/office/drawing/2014/main" id="{34DEB7BD-CEFB-4698-BC57-A7FC9D0C64A8}"/>
+                <a16:creationId xmlns:a16="http://schemas.microsoft.com/office/drawing/2014/main" id="{C5E466E1-0F6A-456A-97BF-24C9374B9A38}"/>
               </a:ext>
             </a:extLst>
           </p:cNvPr>
@@ -13377,7 +13377,7 @@
           <p:cNvPr id="6" name="">
             <a:extLst xmlns:a="http://schemas.openxmlformats.org/drawingml/2006/main">
               <a:ext uri="{FF2B5EF4-FFF2-40B4-BE49-F238E27FC236}">
-                <a16:creationId xmlns:a16="http://schemas.microsoft.com/office/drawing/2014/main" id="{44AEB4EA-ED14-4665-87CD-6C88A993770B}"/>
+                <a16:creationId xmlns:a16="http://schemas.microsoft.com/office/drawing/2014/main" id="{4F5D591D-CB0D-4A3D-AD20-58CCF9E1CE36}"/>
               </a:ext>
             </a:extLst>
           </p:cNvPr>
@@ -13457,7 +13457,7 @@
           <p:cNvPr id="7" name="">
             <a:extLst xmlns:a="http://schemas.openxmlformats.org/drawingml/2006/main">
               <a:ext uri="{FF2B5EF4-FFF2-40B4-BE49-F238E27FC236}">
-                <a16:creationId xmlns:a16="http://schemas.microsoft.com/office/drawing/2014/main" id="{B833412D-67EA-43CC-A02D-BB903C3CEB00}"/>
+                <a16:creationId xmlns:a16="http://schemas.microsoft.com/office/drawing/2014/main" id="{587D9924-844B-42DC-AF11-92198606D6D1}"/>
               </a:ext>
             </a:extLst>
           </p:cNvPr>
@@ -13560,7 +13560,7 @@
           <p:cNvPr id="8" name="">
             <a:extLst xmlns:a="http://schemas.openxmlformats.org/drawingml/2006/main">
               <a:ext uri="{FF2B5EF4-FFF2-40B4-BE49-F238E27FC236}">
-                <a16:creationId xmlns:a16="http://schemas.microsoft.com/office/drawing/2014/main" id="{299538CD-B4F8-4AEB-AE97-45A6EFE7C10C}"/>
+                <a16:creationId xmlns:a16="http://schemas.microsoft.com/office/drawing/2014/main" id="{AEAE6C24-EA5A-4EB5-8A5C-6C92CFBE30DC}"/>
               </a:ext>
             </a:extLst>
           </p:cNvPr>
@@ -13589,7 +13589,7 @@
           <p:cNvPr id="9" name="">
             <a:extLst xmlns:a="http://schemas.openxmlformats.org/drawingml/2006/main">
               <a:ext uri="{FF2B5EF4-FFF2-40B4-BE49-F238E27FC236}">
-                <a16:creationId xmlns:a16="http://schemas.microsoft.com/office/drawing/2014/main" id="{CA59AA53-A6A8-4203-844B-B7697A3431BC}"/>
+                <a16:creationId xmlns:a16="http://schemas.microsoft.com/office/drawing/2014/main" id="{4BD538A9-F641-42C7-B989-E2BD32502DCF}"/>
               </a:ext>
             </a:extLst>
           </p:cNvPr>
@@ -13667,7 +13667,7 @@
     </p:spTree>
     <p:extLst>
       <p:ext uri="{BB962C8B-B14F-4D97-AF65-F5344CB8AC3E}">
-        <p14:creationId xmlns:p14="http://schemas.microsoft.com/office/powerpoint/2010/main" val="2095467691"/>
+        <p14:creationId xmlns:p14="http://schemas.microsoft.com/office/powerpoint/2010/main" val="678934267"/>
       </p:ext>
     </p:extLst>
   </p:cSld>
@@ -13698,7 +13698,7 @@
           <p:cNvPr id="13" name="">
             <a:extLst xmlns:a="http://schemas.openxmlformats.org/drawingml/2006/main">
               <a:ext uri="{FF2B5EF4-FFF2-40B4-BE49-F238E27FC236}">
-                <a16:creationId xmlns:a16="http://schemas.microsoft.com/office/drawing/2014/main" id="{C4F29D6F-3370-43F3-B3C0-A60CDA463CCD}"/>
+                <a16:creationId xmlns:a16="http://schemas.microsoft.com/office/drawing/2014/main" id="{D1C3AF68-6122-4AC9-B4F7-8A37EB18C64F}"/>
               </a:ext>
             </a:extLst>
           </p:cNvPr>
@@ -13755,7 +13755,7 @@
           <p:cNvPr id="2" name="">
             <a:extLst xmlns:a="http://schemas.openxmlformats.org/drawingml/2006/main">
               <a:ext uri="{FF2B5EF4-FFF2-40B4-BE49-F238E27FC236}">
-                <a16:creationId xmlns:a16="http://schemas.microsoft.com/office/drawing/2014/main" id="{F6FAF9AC-AC8D-4A14-B093-5EAD89F89643}"/>
+                <a16:creationId xmlns:a16="http://schemas.microsoft.com/office/drawing/2014/main" id="{B6695A7E-DA75-47BA-A221-0FDC6C04E2C1}"/>
               </a:ext>
             </a:extLst>
           </p:cNvPr>
@@ -13812,7 +13812,7 @@
           <p:cNvPr id="3" name="">
             <a:extLst xmlns:a="http://schemas.openxmlformats.org/drawingml/2006/main">
               <a:ext uri="{FF2B5EF4-FFF2-40B4-BE49-F238E27FC236}">
-                <a16:creationId xmlns:a16="http://schemas.microsoft.com/office/drawing/2014/main" id="{367527E3-35AD-4762-8A0E-1948F4E7998C}"/>
+                <a16:creationId xmlns:a16="http://schemas.microsoft.com/office/drawing/2014/main" id="{2D17BDD4-B208-4689-AC28-93B3359B1426}"/>
               </a:ext>
             </a:extLst>
           </p:cNvPr>
@@ -13869,7 +13869,7 @@
           <p:cNvPr id="4" name="">
             <a:extLst xmlns:a="http://schemas.openxmlformats.org/drawingml/2006/main">
               <a:ext uri="{FF2B5EF4-FFF2-40B4-BE49-F238E27FC236}">
-                <a16:creationId xmlns:a16="http://schemas.microsoft.com/office/drawing/2014/main" id="{CFF7D202-B323-4C97-B2F9-6CE897F50D29}"/>
+                <a16:creationId xmlns:a16="http://schemas.microsoft.com/office/drawing/2014/main" id="{966E6ED7-54A8-449B-9EBE-673551EB4E1A}"/>
               </a:ext>
             </a:extLst>
           </p:cNvPr>
@@ -13926,7 +13926,7 @@
           <p:cNvPr id="5" name="">
             <a:extLst xmlns:a="http://schemas.openxmlformats.org/drawingml/2006/main">
               <a:ext uri="{FF2B5EF4-FFF2-40B4-BE49-F238E27FC236}">
-                <a16:creationId xmlns:a16="http://schemas.microsoft.com/office/drawing/2014/main" id="{D7FF3ACE-CC94-4E45-96E1-2EB9D066F0FC}"/>
+                <a16:creationId xmlns:a16="http://schemas.microsoft.com/office/drawing/2014/main" id="{44CF3F60-C1DD-4B6C-A1BF-C50F49AEFEDE}"/>
               </a:ext>
             </a:extLst>
           </p:cNvPr>
@@ -13983,7 +13983,7 @@
           <p:cNvPr id="6" name="">
             <a:extLst xmlns:a="http://schemas.openxmlformats.org/drawingml/2006/main">
               <a:ext uri="{FF2B5EF4-FFF2-40B4-BE49-F238E27FC236}">
-                <a16:creationId xmlns:a16="http://schemas.microsoft.com/office/drawing/2014/main" id="{A437C660-FF60-43D0-A4E3-6B46E024BF61}"/>
+                <a16:creationId xmlns:a16="http://schemas.microsoft.com/office/drawing/2014/main" id="{B944F978-1822-47C3-BD62-F90CF7883715}"/>
               </a:ext>
             </a:extLst>
           </p:cNvPr>
@@ -14624,7 +14624,7 @@
           <p:cNvPr id="9" name="">
             <a:extLst xmlns:a="http://schemas.openxmlformats.org/drawingml/2006/main">
               <a:ext uri="{FF2B5EF4-FFF2-40B4-BE49-F238E27FC236}">
-                <a16:creationId xmlns:a16="http://schemas.microsoft.com/office/drawing/2014/main" id="{35851B03-D414-4117-B1E2-ADFEB806F30D}"/>
+                <a16:creationId xmlns:a16="http://schemas.microsoft.com/office/drawing/2014/main" id="{A99CF02A-1925-4033-9E34-A7EE6232B789}"/>
               </a:ext>
             </a:extLst>
           </p:cNvPr>
@@ -14653,7 +14653,7 @@
           <p:cNvPr id="10" name="">
             <a:extLst xmlns:a="http://schemas.openxmlformats.org/drawingml/2006/main">
               <a:ext uri="{FF2B5EF4-FFF2-40B4-BE49-F238E27FC236}">
-                <a16:creationId xmlns:a16="http://schemas.microsoft.com/office/drawing/2014/main" id="{AF05D230-526F-4FBC-A7C6-FF641D6EA9AE}"/>
+                <a16:creationId xmlns:a16="http://schemas.microsoft.com/office/drawing/2014/main" id="{88578FD9-F10A-4FF8-BACB-C87439FCD78A}"/>
               </a:ext>
             </a:extLst>
           </p:cNvPr>
@@ -14710,7 +14710,7 @@
           <p:cNvPr id="11" name="">
             <a:extLst xmlns:a="http://schemas.openxmlformats.org/drawingml/2006/main">
               <a:ext uri="{FF2B5EF4-FFF2-40B4-BE49-F238E27FC236}">
-                <a16:creationId xmlns:a16="http://schemas.microsoft.com/office/drawing/2014/main" id="{DA8473DF-7560-4C85-BD8B-15C926F17A66}"/>
+                <a16:creationId xmlns:a16="http://schemas.microsoft.com/office/drawing/2014/main" id="{58D65CD6-CA8C-4DAA-91C1-D6DA5796227E}"/>
               </a:ext>
             </a:extLst>
           </p:cNvPr>
@@ -14767,7 +14767,7 @@
           <p:cNvPr id="12" name="">
             <a:extLst xmlns:a="http://schemas.openxmlformats.org/drawingml/2006/main">
               <a:ext uri="{FF2B5EF4-FFF2-40B4-BE49-F238E27FC236}">
-                <a16:creationId xmlns:a16="http://schemas.microsoft.com/office/drawing/2014/main" id="{3F23F906-F252-4FC2-A4B3-3E2B8B8929D6}"/>
+                <a16:creationId xmlns:a16="http://schemas.microsoft.com/office/drawing/2014/main" id="{B5800147-36EF-4BCE-A64E-277CABDEE080}"/>
               </a:ext>
             </a:extLst>
           </p:cNvPr>
@@ -14822,7 +14822,7 @@
     </p:spTree>
     <p:extLst>
       <p:ext uri="{BB962C8B-B14F-4D97-AF65-F5344CB8AC3E}">
-        <p14:creationId xmlns:p14="http://schemas.microsoft.com/office/powerpoint/2010/main" val="1516088969"/>
+        <p14:creationId xmlns:p14="http://schemas.microsoft.com/office/powerpoint/2010/main" val="226790736"/>
       </p:ext>
     </p:extLst>
   </p:cSld>
@@ -14850,10 +14850,10 @@
       </p:grpSpPr>
       <p:sp>
         <p:nvSpPr>
-          <p:cNvPr id="6" name="">
+          <p:cNvPr id="7" name="">
             <a:extLst xmlns:a="http://schemas.openxmlformats.org/drawingml/2006/main">
               <a:ext uri="{FF2B5EF4-FFF2-40B4-BE49-F238E27FC236}">
-                <a16:creationId xmlns:a16="http://schemas.microsoft.com/office/drawing/2014/main" id="{97082387-50A6-4230-A076-A3DD53BC49E1}"/>
+                <a16:creationId xmlns:a16="http://schemas.microsoft.com/office/drawing/2014/main" id="{9F181F1B-25CF-4DC5-9E56-862CA3703E96}"/>
               </a:ext>
             </a:extLst>
           </p:cNvPr>
@@ -14910,7 +14910,7 @@
           <p:cNvPr id="2" name="">
             <a:extLst xmlns:a="http://schemas.openxmlformats.org/drawingml/2006/main">
               <a:ext uri="{FF2B5EF4-FFF2-40B4-BE49-F238E27FC236}">
-                <a16:creationId xmlns:a16="http://schemas.microsoft.com/office/drawing/2014/main" id="{EC00C321-F4C4-47D7-B8F0-7F0378F6548C}"/>
+                <a16:creationId xmlns:a16="http://schemas.microsoft.com/office/drawing/2014/main" id="{EEF9FD1E-4A1C-48A0-AA04-EA7CDF03E9DB}"/>
               </a:ext>
             </a:extLst>
           </p:cNvPr>
@@ -14957,7 +14957,7 @@
                 <a:ea typeface="Arial"/>
                 <a:cs typeface="Arial"/>
               </a:rPr>
-              <a:t>Source: Zhang et al. (2024), GSE212160; project diagnosis mapping</a:t>
+              <a:t>Sources: Zhang et al. (2024), Tables 5–6 and Discussion, p. 11; project diagnosis mapping</a:t>
             </a:r>
           </a:p>
         </p:txBody>
@@ -14967,7 +14967,7 @@
           <p:cNvPr id="3" name="">
             <a:extLst xmlns:a="http://schemas.openxmlformats.org/drawingml/2006/main">
               <a:ext uri="{FF2B5EF4-FFF2-40B4-BE49-F238E27FC236}">
-                <a16:creationId xmlns:a16="http://schemas.microsoft.com/office/drawing/2014/main" id="{8E840CB6-9A7E-4C51-86F1-ED20DC3D797A}"/>
+                <a16:creationId xmlns:a16="http://schemas.microsoft.com/office/drawing/2014/main" id="{42EF78D0-302D-41D1-A494-3D8C0FF3FECA}"/>
               </a:ext>
             </a:extLst>
           </p:cNvPr>
@@ -15019,15 +15019,72 @@
           </a:p>
         </p:txBody>
       </p:sp>
+      <p:sp>
+        <p:nvSpPr>
+          <p:cNvPr id="4" name="">
+            <a:extLst xmlns:a="http://schemas.openxmlformats.org/drawingml/2006/main">
+              <a:ext uri="{FF2B5EF4-FFF2-40B4-BE49-F238E27FC236}">
+                <a16:creationId xmlns:a16="http://schemas.microsoft.com/office/drawing/2014/main" id="{95539E92-7929-4E7A-81FE-FB039DDDDD6D}"/>
+              </a:ext>
+            </a:extLst>
+          </p:cNvPr>
+          <p:cNvSpPr>
+            <a:spLocks xmlns:a="http://schemas.openxmlformats.org/drawingml/2006/main" noGrp="1"/>
+          </p:cNvSpPr>
+          <p:nvPr/>
+        </p:nvSpPr>
+        <p:spPr>
+          <a:xfrm xmlns:a="http://schemas.openxmlformats.org/drawingml/2006/main">
+            <a:off x="609600" y="1581150"/>
+            <a:ext cx="10972800" cy="666750"/>
+          </a:xfrm>
+          <a:prstGeom xmlns:a="http://schemas.openxmlformats.org/drawingml/2006/main" prst="rect">
+            <a:avLst/>
+          </a:prstGeom>
+          <a:noFill xmlns:a="http://schemas.openxmlformats.org/drawingml/2006/main"/>
+          <a:ln xmlns:a="http://schemas.openxmlformats.org/drawingml/2006/main" w="0">
+            <a:noFill/>
+          </a:ln>
+        </p:spPr>
+        <p:txBody>
+          <a:bodyPr xmlns:a="http://schemas.openxmlformats.org/drawingml/2006/main" anchor="ctr">
+            <a:noAutofit/>
+          </a:bodyPr>
+          <a:lstStyle xmlns:a="http://schemas.openxmlformats.org/drawingml/2006/main"/>
+          <a:p xmlns:a="http://schemas.openxmlformats.org/drawingml/2006/main">
+            <a:pPr algn="l">
+              <a:defRPr sz="2400" b="0">
+                <a:solidFill>
+                  <a:srgbClr val="007C78"/>
+                </a:solidFill>
+                <a:latin typeface="Arial"/>
+                <a:ea typeface="Arial"/>
+                <a:cs typeface="Arial"/>
+              </a:defRPr>
+            </a:pPr>
+            <a:r>
+              <a:rPr sz="2400" b="0">
+                <a:solidFill>
+                  <a:srgbClr val="007C78"/>
+                </a:solidFill>
+                <a:latin typeface="Arial"/>
+                <a:ea typeface="Arial"/>
+                <a:cs typeface="Arial"/>
+              </a:rPr>
+              <a:t>The model combines the three rejection categories included in this study.</a:t>
+            </a:r>
+          </a:p>
+        </p:txBody>
+      </p:sp>
       <p:graphicFrame>
         <p:nvGraphicFramePr>
-          <p:cNvPr id="9" name=""/>
+          <p:cNvPr id="11" name=""/>
           <p:cNvGraphicFramePr/>
           <p:nvPr/>
         </p:nvGraphicFramePr>
         <p:xfrm>
-          <a:off xmlns:a="http://schemas.openxmlformats.org/drawingml/2006/main" x="609600" y="1724025"/>
-          <a:ext xmlns:a="http://schemas.openxmlformats.org/drawingml/2006/main" cx="10972800" cy="3495675"/>
+          <a:off xmlns:a="http://schemas.openxmlformats.org/drawingml/2006/main" x="609600" y="2428875"/>
+          <a:ext xmlns:a="http://schemas.openxmlformats.org/drawingml/2006/main" cx="10972800" cy="3095625"/>
         </p:xfrm>
         <a:graphic xmlns:a="http://schemas.openxmlformats.org/drawingml/2006/main">
           <a:graphicData uri="http://schemas.openxmlformats.org/drawingml/2006/table">
@@ -15038,7 +15095,7 @@
                 <a:gridCol w="3876675"/>
                 <a:gridCol w="2476500"/>
               </a:tblGrid>
-              <a:tr h="699135">
+              <a:tr h="619125">
                 <a:tc>
                   <a:txBody>
                     <a:bodyPr>
@@ -15118,7 +15175,7 @@
                   </a:tcPr>
                 </a:tc>
               </a:tr>
-              <a:tr h="699135">
+              <a:tr h="619125">
                 <a:tc>
                   <a:txBody>
                     <a:bodyPr>
@@ -15198,7 +15255,7 @@
                   </a:tcPr>
                 </a:tc>
               </a:tr>
-              <a:tr h="699135">
+              <a:tr h="619125">
                 <a:tc>
                   <a:txBody>
                     <a:bodyPr>
@@ -15278,7 +15335,7 @@
                   </a:tcPr>
                 </a:tc>
               </a:tr>
-              <a:tr h="699135">
+              <a:tr h="619125">
                 <a:tc>
                   <a:txBody>
                     <a:bodyPr>
@@ -15358,7 +15415,7 @@
                   </a:tcPr>
                 </a:tc>
               </a:tr>
-              <a:tr h="699135">
+              <a:tr h="619125">
                 <a:tc>
                   <a:txBody>
                     <a:bodyPr>
@@ -15444,10 +15501,10 @@
       </p:graphicFrame>
       <p:sp>
         <p:nvSpPr>
-          <p:cNvPr id="5" name="">
+          <p:cNvPr id="6" name="">
             <a:extLst xmlns:a="http://schemas.openxmlformats.org/drawingml/2006/main">
               <a:ext uri="{FF2B5EF4-FFF2-40B4-BE49-F238E27FC236}">
-                <a16:creationId xmlns:a16="http://schemas.microsoft.com/office/drawing/2014/main" id="{986BE59F-1201-4272-8E70-2AA7B5D92065}"/>
+                <a16:creationId xmlns:a16="http://schemas.microsoft.com/office/drawing/2014/main" id="{DDFE2DC3-454F-40B8-A91B-E0ACF30FA75E}"/>
               </a:ext>
             </a:extLst>
           </p:cNvPr>
@@ -15458,8 +15515,8 @@
         </p:nvSpPr>
         <p:spPr>
           <a:xfrm xmlns:a="http://schemas.openxmlformats.org/drawingml/2006/main">
-            <a:off x="609600" y="5572125"/>
-            <a:ext cx="10972800" cy="571500"/>
+            <a:off x="609600" y="5695950"/>
+            <a:ext cx="10972800" cy="419100"/>
           </a:xfrm>
           <a:prstGeom xmlns:a="http://schemas.openxmlformats.org/drawingml/2006/main" prst="rect">
             <a:avLst/>
@@ -15476,25 +15533,25 @@
           <a:lstStyle xmlns:a="http://schemas.openxmlformats.org/drawingml/2006/main"/>
           <a:p xmlns:a="http://schemas.openxmlformats.org/drawingml/2006/main">
             <a:pPr algn="l">
-              <a:defRPr sz="2400" b="0">
-                <a:solidFill>
-                  <a:srgbClr val="007C78"/>
-                </a:solidFill>
-                <a:latin typeface="Arial"/>
-                <a:ea typeface="Arial"/>
-                <a:cs typeface="Arial"/>
-              </a:defRPr>
-            </a:pPr>
-            <a:r>
-              <a:rPr sz="2400" b="0">
-                <a:solidFill>
-                  <a:srgbClr val="007C78"/>
-                </a:solidFill>
-                <a:latin typeface="Arial"/>
-                <a:ea typeface="Arial"/>
-                <a:cs typeface="Arial"/>
-              </a:rPr>
-              <a:t>The main question combines all three forms of rejection.</a:t>
+              <a:defRPr sz="1950" b="0">
+                <a:solidFill>
+                  <a:srgbClr val="52656B"/>
+                </a:solidFill>
+                <a:latin typeface="Arial"/>
+                <a:ea typeface="Arial"/>
+                <a:cs typeface="Arial"/>
+              </a:defRPr>
+            </a:pPr>
+            <a:r>
+              <a:rPr sz="1950" b="0">
+                <a:solidFill>
+                  <a:srgbClr val="52656B"/>
+                </a:solidFill>
+                <a:latin typeface="Arial"/>
+                <a:ea typeface="Arial"/>
+                <a:cs typeface="Arial"/>
+              </a:rPr>
+              <a:t>Some diagnostic categories were excluded from the study.</a:t>
             </a:r>
           </a:p>
         </p:txBody>
@@ -15502,7 +15559,7 @@
     </p:spTree>
     <p:extLst>
       <p:ext uri="{BB962C8B-B14F-4D97-AF65-F5344CB8AC3E}">
-        <p14:creationId xmlns:p14="http://schemas.microsoft.com/office/powerpoint/2010/main" val="96008773"/>
+        <p14:creationId xmlns:p14="http://schemas.microsoft.com/office/powerpoint/2010/main" val="799425300"/>
       </p:ext>
     </p:extLst>
   </p:cSld>
@@ -15533,7 +15590,7 @@
           <p:cNvPr id="11" name="">
             <a:extLst xmlns:a="http://schemas.openxmlformats.org/drawingml/2006/main">
               <a:ext uri="{FF2B5EF4-FFF2-40B4-BE49-F238E27FC236}">
-                <a16:creationId xmlns:a16="http://schemas.microsoft.com/office/drawing/2014/main" id="{8DC0A12B-5F48-44B4-9F1F-3A4B07721167}"/>
+                <a16:creationId xmlns:a16="http://schemas.microsoft.com/office/drawing/2014/main" id="{01019537-945F-459A-89CF-90B826F55CB6}"/>
               </a:ext>
             </a:extLst>
           </p:cNvPr>
@@ -15590,7 +15647,7 @@
           <p:cNvPr id="2" name="">
             <a:extLst xmlns:a="http://schemas.openxmlformats.org/drawingml/2006/main">
               <a:ext uri="{FF2B5EF4-FFF2-40B4-BE49-F238E27FC236}">
-                <a16:creationId xmlns:a16="http://schemas.microsoft.com/office/drawing/2014/main" id="{88A8A3BC-D7A5-4761-8556-641DE8DC053D}"/>
+                <a16:creationId xmlns:a16="http://schemas.microsoft.com/office/drawing/2014/main" id="{C346A449-D8C1-4911-9E10-743D18204D41}"/>
               </a:ext>
             </a:extLst>
           </p:cNvPr>
@@ -15647,7 +15704,7 @@
           <p:cNvPr id="3" name="">
             <a:extLst xmlns:a="http://schemas.openxmlformats.org/drawingml/2006/main">
               <a:ext uri="{FF2B5EF4-FFF2-40B4-BE49-F238E27FC236}">
-                <a16:creationId xmlns:a16="http://schemas.microsoft.com/office/drawing/2014/main" id="{FF273E55-F155-4871-A35B-56CBCB10C84B}"/>
+                <a16:creationId xmlns:a16="http://schemas.microsoft.com/office/drawing/2014/main" id="{8D675409-E84C-4F09-849C-E73A5AA2BD6B}"/>
               </a:ext>
             </a:extLst>
           </p:cNvPr>
@@ -15704,7 +15761,7 @@
           <p:cNvPr id="4" name="">
             <a:extLst xmlns:a="http://schemas.openxmlformats.org/drawingml/2006/main">
               <a:ext uri="{FF2B5EF4-FFF2-40B4-BE49-F238E27FC236}">
-                <a16:creationId xmlns:a16="http://schemas.microsoft.com/office/drawing/2014/main" id="{A522D254-CABD-40A8-81DC-9C1A0BE5DECD}"/>
+                <a16:creationId xmlns:a16="http://schemas.microsoft.com/office/drawing/2014/main" id="{B70F0D56-4DFE-4846-9295-8A006A4433BD}"/>
               </a:ext>
             </a:extLst>
           </p:cNvPr>
@@ -15761,7 +15818,7 @@
           <p:cNvPr id="5" name="">
             <a:extLst xmlns:a="http://schemas.openxmlformats.org/drawingml/2006/main">
               <a:ext uri="{FF2B5EF4-FFF2-40B4-BE49-F238E27FC236}">
-                <a16:creationId xmlns:a16="http://schemas.microsoft.com/office/drawing/2014/main" id="{280204C1-CDCD-43C3-BEE7-4D89F4A5E24E}"/>
+                <a16:creationId xmlns:a16="http://schemas.microsoft.com/office/drawing/2014/main" id="{ED51939A-7B5C-4759-B6F1-ACA5B2A3A50C}"/>
               </a:ext>
             </a:extLst>
           </p:cNvPr>
@@ -15818,7 +15875,7 @@
           <p:cNvPr id="6" name="">
             <a:extLst xmlns:a="http://schemas.openxmlformats.org/drawingml/2006/main">
               <a:ext uri="{FF2B5EF4-FFF2-40B4-BE49-F238E27FC236}">
-                <a16:creationId xmlns:a16="http://schemas.microsoft.com/office/drawing/2014/main" id="{59ABFDFC-E96A-45A5-86F8-6BCE749A4EB7}"/>
+                <a16:creationId xmlns:a16="http://schemas.microsoft.com/office/drawing/2014/main" id="{2AEE672E-3E67-4831-8512-CF8B4C745ED7}"/>
               </a:ext>
             </a:extLst>
           </p:cNvPr>
@@ -15875,7 +15932,7 @@
           <p:cNvPr id="7" name="">
             <a:extLst xmlns:a="http://schemas.openxmlformats.org/drawingml/2006/main">
               <a:ext uri="{FF2B5EF4-FFF2-40B4-BE49-F238E27FC236}">
-                <a16:creationId xmlns:a16="http://schemas.microsoft.com/office/drawing/2014/main" id="{BC81C9D8-65B6-4E03-AEF0-6B7EDFDD4808}"/>
+                <a16:creationId xmlns:a16="http://schemas.microsoft.com/office/drawing/2014/main" id="{8096422C-C33F-4148-990F-C180AC26D2E3}"/>
               </a:ext>
             </a:extLst>
           </p:cNvPr>
@@ -15926,33 +15983,6 @@
                 <a:ea typeface="Arial"/>
                 <a:cs typeface="Arial"/>
               </a:rPr>
-              <a:t>Normalized counts are the model inputs.</a:t>
-            </a:r>
-          </a:p>
-          <a:p xmlns:a="http://schemas.openxmlformats.org/drawingml/2006/main">
-            <a:pPr marL="279400" indent="-152400" algn="l">
-              <a:spcAft>
-                <a:spcPts val="1200"/>
-              </a:spcAft>
-              <a:buChar char="•"/>
-              <a:defRPr sz="2175" b="0">
-                <a:solidFill>
-                  <a:srgbClr val="16343E"/>
-                </a:solidFill>
-                <a:latin typeface="Arial"/>
-                <a:ea typeface="Arial"/>
-                <a:cs typeface="Arial"/>
-              </a:defRPr>
-            </a:pPr>
-            <a:r>
-              <a:rPr sz="2175" b="0">
-                <a:solidFill>
-                  <a:srgbClr val="16343E"/>
-                </a:solidFill>
-                <a:latin typeface="Arial"/>
-                <a:ea typeface="Arial"/>
-                <a:cs typeface="Arial"/>
-              </a:rPr>
               <a:t>Include human and viral RNA.</a:t>
             </a:r>
           </a:p>
@@ -15990,7 +16020,7 @@
           <p:cNvPr id="8" name="">
             <a:extLst xmlns:a="http://schemas.openxmlformats.org/drawingml/2006/main">
               <a:ext uri="{FF2B5EF4-FFF2-40B4-BE49-F238E27FC236}">
-                <a16:creationId xmlns:a16="http://schemas.microsoft.com/office/drawing/2014/main" id="{FEB6434E-DA54-40D9-9A85-BD9A1BDD4E25}"/>
+                <a16:creationId xmlns:a16="http://schemas.microsoft.com/office/drawing/2014/main" id="{B72D3CFD-8E2E-4015-A4B1-D8EB0591A2F8}"/>
               </a:ext>
             </a:extLst>
           </p:cNvPr>
@@ -16047,7 +16077,7 @@
           <p:cNvPr id="9" name="">
             <a:extLst xmlns:a="http://schemas.openxmlformats.org/drawingml/2006/main">
               <a:ext uri="{FF2B5EF4-FFF2-40B4-BE49-F238E27FC236}">
-                <a16:creationId xmlns:a16="http://schemas.microsoft.com/office/drawing/2014/main" id="{68F57799-48A6-4EEF-8650-DABF7F842678}"/>
+                <a16:creationId xmlns:a16="http://schemas.microsoft.com/office/drawing/2014/main" id="{D2574B07-F256-49EC-9289-551127636050}"/>
               </a:ext>
             </a:extLst>
           </p:cNvPr>
@@ -16104,7 +16134,7 @@
           <p:cNvPr id="10" name="">
             <a:extLst xmlns:a="http://schemas.openxmlformats.org/drawingml/2006/main">
               <a:ext uri="{FF2B5EF4-FFF2-40B4-BE49-F238E27FC236}">
-                <a16:creationId xmlns:a16="http://schemas.microsoft.com/office/drawing/2014/main" id="{A0422DDF-D895-4E26-B630-1A434A59A9A5}"/>
+                <a16:creationId xmlns:a16="http://schemas.microsoft.com/office/drawing/2014/main" id="{6170D545-2508-4343-8ACA-E2D772387C95}"/>
               </a:ext>
             </a:extLst>
           </p:cNvPr>
@@ -16182,34 +16212,7 @@
                 <a:ea typeface="Arial"/>
                 <a:cs typeface="Arial"/>
               </a:rPr>
-              <a:t>Used to normalize the other counts.</a:t>
-            </a:r>
-          </a:p>
-          <a:p xmlns:a="http://schemas.openxmlformats.org/drawingml/2006/main">
-            <a:pPr marL="279400" indent="-152400" algn="l">
-              <a:spcAft>
-                <a:spcPts val="1200"/>
-              </a:spcAft>
-              <a:buChar char="•"/>
-              <a:defRPr sz="2175" b="0">
-                <a:solidFill>
-                  <a:srgbClr val="16343E"/>
-                </a:solidFill>
-                <a:latin typeface="Arial"/>
-                <a:ea typeface="Arial"/>
-                <a:cs typeface="Arial"/>
-              </a:defRPr>
-            </a:pPr>
-            <a:r>
-              <a:rPr sz="2175" b="0">
-                <a:solidFill>
-                  <a:srgbClr val="16343E"/>
-                </a:solidFill>
-                <a:latin typeface="Arial"/>
-                <a:ea typeface="Arial"/>
-                <a:cs typeface="Arial"/>
-              </a:rPr>
-              <a:t>Excluded as separate model inputs.</a:t>
+              <a:t>Used to adjust for differences in how much RNA each specimen supplies.</a:t>
             </a:r>
           </a:p>
         </p:txBody>
@@ -16217,7 +16220,7 @@
     </p:spTree>
     <p:extLst>
       <p:ext uri="{BB962C8B-B14F-4D97-AF65-F5344CB8AC3E}">
-        <p14:creationId xmlns:p14="http://schemas.microsoft.com/office/powerpoint/2010/main" val="843577050"/>
+        <p14:creationId xmlns:p14="http://schemas.microsoft.com/office/powerpoint/2010/main" val="970247735"/>
       </p:ext>
     </p:extLst>
   </p:cSld>
@@ -16245,10 +16248,10 @@
       </p:grpSpPr>
       <p:sp>
         <p:nvSpPr>
-          <p:cNvPr id="6" name="">
+          <p:cNvPr id="5" name="">
             <a:extLst xmlns:a="http://schemas.openxmlformats.org/drawingml/2006/main">
               <a:ext uri="{FF2B5EF4-FFF2-40B4-BE49-F238E27FC236}">
-                <a16:creationId xmlns:a16="http://schemas.microsoft.com/office/drawing/2014/main" id="{2A6107D7-3E8E-421F-8341-44C1441E8680}"/>
+                <a16:creationId xmlns:a16="http://schemas.microsoft.com/office/drawing/2014/main" id="{7482C293-6724-4227-A01C-F36D0591C4D2}"/>
               </a:ext>
             </a:extLst>
           </p:cNvPr>
@@ -16305,7 +16308,7 @@
           <p:cNvPr id="2" name="">
             <a:extLst xmlns:a="http://schemas.openxmlformats.org/drawingml/2006/main">
               <a:ext uri="{FF2B5EF4-FFF2-40B4-BE49-F238E27FC236}">
-                <a16:creationId xmlns:a16="http://schemas.microsoft.com/office/drawing/2014/main" id="{5D63FB25-6CA0-4638-90E4-834A9D3E99CE}"/>
+                <a16:creationId xmlns:a16="http://schemas.microsoft.com/office/drawing/2014/main" id="{F032DA67-E3B9-4FFA-8254-27CD28363CC4}"/>
               </a:ext>
             </a:extLst>
           </p:cNvPr>
@@ -16362,7 +16365,7 @@
           <p:cNvPr id="3" name="">
             <a:extLst xmlns:a="http://schemas.openxmlformats.org/drawingml/2006/main">
               <a:ext uri="{FF2B5EF4-FFF2-40B4-BE49-F238E27FC236}">
-                <a16:creationId xmlns:a16="http://schemas.microsoft.com/office/drawing/2014/main" id="{8336F471-8AF2-43F8-86DE-75C27B975177}"/>
+                <a16:creationId xmlns:a16="http://schemas.microsoft.com/office/drawing/2014/main" id="{AE19C01C-B110-412E-BF1E-4F801731A45D}"/>
               </a:ext>
             </a:extLst>
           </p:cNvPr>
@@ -16416,7 +16419,7 @@
       </p:sp>
       <p:graphicFrame>
         <p:nvGraphicFramePr>
-          <p:cNvPr id="9" name=""/>
+          <p:cNvPr id="8" name=""/>
           <p:cNvGraphicFramePr/>
           <p:nvPr/>
         </p:nvGraphicFramePr>
@@ -16706,67 +16709,10 @@
           </a:graphicData>
         </a:graphic>
       </p:graphicFrame>
-      <p:sp>
-        <p:nvSpPr>
-          <p:cNvPr id="5" name="">
-            <a:extLst xmlns:a="http://schemas.openxmlformats.org/drawingml/2006/main">
-              <a:ext uri="{FF2B5EF4-FFF2-40B4-BE49-F238E27FC236}">
-                <a16:creationId xmlns:a16="http://schemas.microsoft.com/office/drawing/2014/main" id="{85A1B3A2-5E76-4AE7-8D95-8234D29A8ABE}"/>
-              </a:ext>
-            </a:extLst>
-          </p:cNvPr>
-          <p:cNvSpPr>
-            <a:spLocks xmlns:a="http://schemas.openxmlformats.org/drawingml/2006/main" noGrp="1"/>
-          </p:cNvSpPr>
-          <p:nvPr/>
-        </p:nvSpPr>
-        <p:spPr>
-          <a:xfrm xmlns:a="http://schemas.openxmlformats.org/drawingml/2006/main">
-            <a:off x="609600" y="5305425"/>
-            <a:ext cx="10972800" cy="847725"/>
-          </a:xfrm>
-          <a:prstGeom xmlns:a="http://schemas.openxmlformats.org/drawingml/2006/main" prst="rect">
-            <a:avLst/>
-          </a:prstGeom>
-          <a:noFill xmlns:a="http://schemas.openxmlformats.org/drawingml/2006/main"/>
-          <a:ln xmlns:a="http://schemas.openxmlformats.org/drawingml/2006/main" w="0">
-            <a:noFill/>
-          </a:ln>
-        </p:spPr>
-        <p:txBody>
-          <a:bodyPr xmlns:a="http://schemas.openxmlformats.org/drawingml/2006/main" anchor="ctr">
-            <a:noAutofit/>
-          </a:bodyPr>
-          <a:lstStyle xmlns:a="http://schemas.openxmlformats.org/drawingml/2006/main"/>
-          <a:p xmlns:a="http://schemas.openxmlformats.org/drawingml/2006/main">
-            <a:pPr algn="l">
-              <a:defRPr sz="2250" b="0">
-                <a:solidFill>
-                  <a:srgbClr val="007C78"/>
-                </a:solidFill>
-                <a:latin typeface="Arial"/>
-                <a:ea typeface="Arial"/>
-                <a:cs typeface="Arial"/>
-              </a:defRPr>
-            </a:pPr>
-            <a:r>
-              <a:rPr sz="2250" b="0">
-                <a:solidFill>
-                  <a:srgbClr val="007C78"/>
-                </a:solidFill>
-                <a:latin typeface="Arial"/>
-                <a:ea typeface="Arial"/>
-                <a:cs typeface="Arial"/>
-              </a:rPr>
-              <a:t>Housekeeping RNAs help account for differences in how much RNA a specimen supplies.</a:t>
-            </a:r>
-          </a:p>
-        </p:txBody>
-      </p:sp>
     </p:spTree>
     <p:extLst>
       <p:ext uri="{BB962C8B-B14F-4D97-AF65-F5344CB8AC3E}">
-        <p14:creationId xmlns:p14="http://schemas.microsoft.com/office/powerpoint/2010/main" val="1107055851"/>
+        <p14:creationId xmlns:p14="http://schemas.microsoft.com/office/powerpoint/2010/main" val="1728725474"/>
       </p:ext>
     </p:extLst>
   </p:cSld>
@@ -16797,7 +16743,7 @@
           <p:cNvPr id="12" name="">
             <a:extLst xmlns:a="http://schemas.openxmlformats.org/drawingml/2006/main">
               <a:ext uri="{FF2B5EF4-FFF2-40B4-BE49-F238E27FC236}">
-                <a16:creationId xmlns:a16="http://schemas.microsoft.com/office/drawing/2014/main" id="{3B969A39-076D-488D-B118-7C3A5E8D4EC7}"/>
+                <a16:creationId xmlns:a16="http://schemas.microsoft.com/office/drawing/2014/main" id="{94D4CBF4-831D-43CB-93D5-E9EF4EC494C8}"/>
               </a:ext>
             </a:extLst>
           </p:cNvPr>
@@ -16854,7 +16800,7 @@
           <p:cNvPr id="2" name="">
             <a:extLst xmlns:a="http://schemas.openxmlformats.org/drawingml/2006/main">
               <a:ext uri="{FF2B5EF4-FFF2-40B4-BE49-F238E27FC236}">
-                <a16:creationId xmlns:a16="http://schemas.microsoft.com/office/drawing/2014/main" id="{2CCA8B5D-0363-4CC7-9B82-482D7AFA0987}"/>
+                <a16:creationId xmlns:a16="http://schemas.microsoft.com/office/drawing/2014/main" id="{2371D178-423C-4789-96AB-CFEF0CD862E7}"/>
               </a:ext>
             </a:extLst>
           </p:cNvPr>
@@ -16911,7 +16857,7 @@
           <p:cNvPr id="3" name="">
             <a:extLst xmlns:a="http://schemas.openxmlformats.org/drawingml/2006/main">
               <a:ext uri="{FF2B5EF4-FFF2-40B4-BE49-F238E27FC236}">
-                <a16:creationId xmlns:a16="http://schemas.microsoft.com/office/drawing/2014/main" id="{64812C08-A442-429A-9549-1F260A3BEB4C}"/>
+                <a16:creationId xmlns:a16="http://schemas.microsoft.com/office/drawing/2014/main" id="{95427286-838E-4AAC-A869-AE1A99368BEB}"/>
               </a:ext>
             </a:extLst>
           </p:cNvPr>
@@ -16968,7 +16914,7 @@
           <p:cNvPr id="4" name="">
             <a:extLst xmlns:a="http://schemas.openxmlformats.org/drawingml/2006/main">
               <a:ext uri="{FF2B5EF4-FFF2-40B4-BE49-F238E27FC236}">
-                <a16:creationId xmlns:a16="http://schemas.microsoft.com/office/drawing/2014/main" id="{D3E59FF1-3C1B-4768-88F3-DE9CD3A40B01}"/>
+                <a16:creationId xmlns:a16="http://schemas.microsoft.com/office/drawing/2014/main" id="{171BD683-7896-40EE-B7BC-8D4E2C88C363}"/>
               </a:ext>
             </a:extLst>
           </p:cNvPr>
@@ -17019,7 +16965,7 @@
                 <a:ea typeface="Arial"/>
                 <a:cs typeface="Arial"/>
               </a:rPr>
-              <a:t>We use the authors’ two study groups: discovery and validation cohorts.</a:t>
+              <a:t>I use the authors’ two study groups: discovery and validation cohorts.</a:t>
             </a:r>
           </a:p>
           <a:p xmlns:a="http://schemas.openxmlformats.org/drawingml/2006/main">
@@ -17046,7 +16992,7 @@
                 <a:ea typeface="Arial"/>
                 <a:cs typeface="Arial"/>
               </a:rPr>
-              <a:t>Our training / screening split keeps diagnosis proportions similar.</a:t>
+              <a:t>My training / screening split keeps diagnosis proportions similar.</a:t>
             </a:r>
           </a:p>
         </p:txBody>
@@ -17056,7 +17002,7 @@
           <p:cNvPr id="5" name="">
             <a:extLst xmlns:a="http://schemas.openxmlformats.org/drawingml/2006/main">
               <a:ext uri="{FF2B5EF4-FFF2-40B4-BE49-F238E27FC236}">
-                <a16:creationId xmlns:a16="http://schemas.microsoft.com/office/drawing/2014/main" id="{B59DF90C-EA5A-4BFE-A620-A240E2A73A79}"/>
+                <a16:creationId xmlns:a16="http://schemas.microsoft.com/office/drawing/2014/main" id="{882A0D62-1850-4028-BD5A-4DD7A40667EB}"/>
               </a:ext>
             </a:extLst>
           </p:cNvPr>
@@ -17140,7 +17086,7 @@
           <p:cNvPr id="6" name="">
             <a:extLst xmlns:a="http://schemas.openxmlformats.org/drawingml/2006/main">
               <a:ext uri="{FF2B5EF4-FFF2-40B4-BE49-F238E27FC236}">
-                <a16:creationId xmlns:a16="http://schemas.microsoft.com/office/drawing/2014/main" id="{979946F0-CCB5-4AE0-85E7-0197B38154B4}"/>
+                <a16:creationId xmlns:a16="http://schemas.microsoft.com/office/drawing/2014/main" id="{115DEF77-144C-476B-AA4B-415592A61FC9}"/>
               </a:ext>
             </a:extLst>
           </p:cNvPr>
@@ -17224,7 +17170,7 @@
           <p:cNvPr id="7" name="">
             <a:extLst xmlns:a="http://schemas.openxmlformats.org/drawingml/2006/main">
               <a:ext uri="{FF2B5EF4-FFF2-40B4-BE49-F238E27FC236}">
-                <a16:creationId xmlns:a16="http://schemas.microsoft.com/office/drawing/2014/main" id="{469E9210-BBAC-4300-B717-8A75592659BD}"/>
+                <a16:creationId xmlns:a16="http://schemas.microsoft.com/office/drawing/2014/main" id="{F298BDEC-EAD2-4E50-ABC3-90086D5A9C5B}"/>
               </a:ext>
             </a:extLst>
           </p:cNvPr>
@@ -17364,7 +17310,7 @@
           <p:cNvPr id="10" name="">
             <a:extLst xmlns:a="http://schemas.openxmlformats.org/drawingml/2006/main">
               <a:ext uri="{FF2B5EF4-FFF2-40B4-BE49-F238E27FC236}">
-                <a16:creationId xmlns:a16="http://schemas.microsoft.com/office/drawing/2014/main" id="{EEB3839F-B30D-4B31-95B7-8647F34BD2C3}"/>
+                <a16:creationId xmlns:a16="http://schemas.microsoft.com/office/drawing/2014/main" id="{98619F37-A93D-4676-80D3-F5CE8C520346}"/>
               </a:ext>
             </a:extLst>
           </p:cNvPr>
@@ -17499,7 +17445,7 @@
           <p:cNvPr id="11" name="">
             <a:extLst xmlns:a="http://schemas.openxmlformats.org/drawingml/2006/main">
               <a:ext uri="{FF2B5EF4-FFF2-40B4-BE49-F238E27FC236}">
-                <a16:creationId xmlns:a16="http://schemas.microsoft.com/office/drawing/2014/main" id="{2B73C6C2-59F3-4156-B228-02A6B6A93D84}"/>
+                <a16:creationId xmlns:a16="http://schemas.microsoft.com/office/drawing/2014/main" id="{D0137FC3-7A2F-4997-AC1A-7CAD01E73411}"/>
               </a:ext>
             </a:extLst>
           </p:cNvPr>
@@ -17554,7 +17500,7 @@
     </p:spTree>
     <p:extLst>
       <p:ext uri="{BB962C8B-B14F-4D97-AF65-F5344CB8AC3E}">
-        <p14:creationId xmlns:p14="http://schemas.microsoft.com/office/powerpoint/2010/main" val="759988669"/>
+        <p14:creationId xmlns:p14="http://schemas.microsoft.com/office/powerpoint/2010/main" val="793949922"/>
       </p:ext>
     </p:extLst>
   </p:cSld>

--- a/presentation/unos_kidney_biopsy.pptx
+++ b/presentation/unos_kidney_biopsy.pptx
@@ -2,36 +2,36 @@
 <file path=ppt/presentation.xml><?xml version="1.0" encoding="utf-8"?>
 <p:presentation xmlns:p="http://schemas.openxmlformats.org/presentationml/2006/main" xmlns:r="http://schemas.openxmlformats.org/officeDocument/2006/relationships">
   <p:sldMasterIdLst>
-    <p:sldMasterId id="2147483648" r:id="R795e38e1b45941d0"/>
+    <p:sldMasterId id="2147483648" r:id="R7c225ff666a24f86"/>
   </p:sldMasterIdLst>
   <p:sldIdLst>
-    <p:sldId id="256" r:id="Ra2e5987f5cd9402e"/>
-    <p:sldId id="257" r:id="R88b6c35a67094843"/>
-    <p:sldId id="258" r:id="Rb9e02b2a47b14552"/>
-    <p:sldId id="259" r:id="Raea07e2bc2fd400b"/>
-    <p:sldId id="260" r:id="R4a883e58a0de4092"/>
-    <p:sldId id="261" r:id="R9ee8407c6daa432c"/>
-    <p:sldId id="262" r:id="R487697ab6da547aa"/>
-    <p:sldId id="263" r:id="R625dc816186a4cae"/>
-    <p:sldId id="264" r:id="R163ab851ca464962"/>
-    <p:sldId id="265" r:id="R339b914838de4544"/>
-    <p:sldId id="266" r:id="R387b2356c53e44d5"/>
-    <p:sldId id="267" r:id="R0264449f1a3f47a4"/>
-    <p:sldId id="268" r:id="R81ede3964fca4630"/>
-    <p:sldId id="269" r:id="Rb5b1f94fd2cb453c"/>
-    <p:sldId id="270" r:id="Rb143e5b251fe4859"/>
-    <p:sldId id="271" r:id="R3cf35e120d1e45f1"/>
-    <p:sldId id="272" r:id="R1b7f5e37f6da46eb"/>
-    <p:sldId id="273" r:id="R5151ade6c1f84748"/>
-    <p:sldId id="274" r:id="R09e2f201fc3a4595"/>
-    <p:sldId id="275" r:id="R04b1157f1c8e45de"/>
-    <p:sldId id="276" r:id="Rd4bc542a68d34b1c"/>
-    <p:sldId id="277" r:id="R8d933dfdd60a4a5c"/>
-    <p:sldId id="278" r:id="R3c91bf60e299437a"/>
-    <p:sldId id="279" r:id="R80db1586d1c0439e"/>
-    <p:sldId id="280" r:id="R398152affa034801"/>
-    <p:sldId id="281" r:id="R42b2a288cc9f436b"/>
-    <p:sldId id="282" r:id="R68442a5439ed4b4e"/>
+    <p:sldId id="256" r:id="R0989a0ca1da64de5"/>
+    <p:sldId id="257" r:id="R5310eeb9830a4618"/>
+    <p:sldId id="258" r:id="Rff08bf3527e441e2"/>
+    <p:sldId id="259" r:id="Rff46253dc12a4256"/>
+    <p:sldId id="260" r:id="Rff63545d8a3545a1"/>
+    <p:sldId id="261" r:id="R09874e4dc9c0486d"/>
+    <p:sldId id="262" r:id="R7c0af833523946e2"/>
+    <p:sldId id="263" r:id="Rc22108eb85894f7b"/>
+    <p:sldId id="264" r:id="R86df1212b1004d79"/>
+    <p:sldId id="265" r:id="Ra7e30180903d4804"/>
+    <p:sldId id="266" r:id="R24adefa6f3434584"/>
+    <p:sldId id="267" r:id="R805c1cd95d204e1a"/>
+    <p:sldId id="268" r:id="Rf890ee60763a4caa"/>
+    <p:sldId id="269" r:id="Rfe95aab059dc4f79"/>
+    <p:sldId id="270" r:id="R2dd9f77b8c31432b"/>
+    <p:sldId id="271" r:id="Rca20f738740c4f48"/>
+    <p:sldId id="272" r:id="R725bc4d31d4d4b6c"/>
+    <p:sldId id="273" r:id="R85291651d66f42a4"/>
+    <p:sldId id="274" r:id="R0daa642d6b2d438b"/>
+    <p:sldId id="275" r:id="Rb274479f1f4e4814"/>
+    <p:sldId id="276" r:id="Rfec517323f8548ef"/>
+    <p:sldId id="277" r:id="R6308870db90d4f3b"/>
+    <p:sldId id="278" r:id="R2d454f2c40cd4238"/>
+    <p:sldId id="279" r:id="R0ca4c9fa79d34962"/>
+    <p:sldId id="280" r:id="R07998d4533c64386"/>
+    <p:sldId id="281" r:id="R09ba7aa6ebce4e57"/>
+    <p:sldId id="282" r:id="Rce23fe55c35643ba"/>
   </p:sldIdLst>
   <p:sldSz cx="12192000" cy="6858000"/>
   <p:notesSz cx="6858000" cy="9144000"/>
@@ -76,7 +76,7 @@
   </p:cSld>
   <p:clrMap bg1="lt1" tx1="dk1" bg2="lt2" tx2="dk2" accent1="accent1" accent2="accent2" accent3="accent3" accent4="accent4" accent5="accent5" accent6="accent6" hlink="hlink" folHlink="folHlink"/>
   <p:sldLayoutIdLst>
-    <p:sldLayoutId xmlns:r="http://schemas.openxmlformats.org/officeDocument/2006/relationships" id="2147483649" r:id="Rf78abd7c10c74a21"/>
+    <p:sldLayoutId xmlns:r="http://schemas.openxmlformats.org/officeDocument/2006/relationships" id="2147483649" r:id="Rf1f3bbf19cf54110"/>
   </p:sldLayoutIdLst>
   <p:txStyles>
     <p:titleStyle>
@@ -1245,7 +1245,7 @@
           <p:cNvPr id="2" name="">
             <a:extLst xmlns:a="http://schemas.openxmlformats.org/drawingml/2006/main">
               <a:ext uri="{FF2B5EF4-FFF2-40B4-BE49-F238E27FC236}">
-                <a16:creationId xmlns:a16="http://schemas.microsoft.com/office/drawing/2014/main" id="{64D65980-7A9D-421C-B0C9-11C08E5E01FE}"/>
+                <a16:creationId xmlns:a16="http://schemas.microsoft.com/office/drawing/2014/main" id="{7F41B514-C8F6-4330-9000-B3C49A6D3374}"/>
               </a:ext>
             </a:extLst>
           </p:cNvPr>
@@ -1346,7 +1346,7 @@
     </p:spTree>
     <p:extLst>
       <p:ext uri="{BB962C8B-B14F-4D97-AF65-F5344CB8AC3E}">
-        <p14:creationId xmlns:p14="http://schemas.microsoft.com/office/powerpoint/2010/main" val="109289756"/>
+        <p14:creationId xmlns:p14="http://schemas.microsoft.com/office/powerpoint/2010/main" val="1294290763"/>
       </p:ext>
     </p:extLst>
   </p:cSld>
@@ -1377,7 +1377,7 @@
           <p:cNvPr id="6" name="">
             <a:extLst xmlns:a="http://schemas.openxmlformats.org/drawingml/2006/main">
               <a:ext uri="{FF2B5EF4-FFF2-40B4-BE49-F238E27FC236}">
-                <a16:creationId xmlns:a16="http://schemas.microsoft.com/office/drawing/2014/main" id="{F57956E2-EFA5-4C0A-A91C-1A92A7D9EB3D}"/>
+                <a16:creationId xmlns:a16="http://schemas.microsoft.com/office/drawing/2014/main" id="{F9A6A437-00AF-4208-9CDA-64688BBE9AB6}"/>
               </a:ext>
             </a:extLst>
           </p:cNvPr>
@@ -1434,7 +1434,7 @@
           <p:cNvPr id="2" name="">
             <a:extLst xmlns:a="http://schemas.openxmlformats.org/drawingml/2006/main">
               <a:ext uri="{FF2B5EF4-FFF2-40B4-BE49-F238E27FC236}">
-                <a16:creationId xmlns:a16="http://schemas.microsoft.com/office/drawing/2014/main" id="{6EF5938C-3D3B-4319-8680-8B34B396D1E0}"/>
+                <a16:creationId xmlns:a16="http://schemas.microsoft.com/office/drawing/2014/main" id="{08AB12C9-386B-42E9-A42F-BF91B19C1C80}"/>
               </a:ext>
             </a:extLst>
           </p:cNvPr>
@@ -1491,7 +1491,7 @@
           <p:cNvPr id="3" name="">
             <a:extLst xmlns:a="http://schemas.openxmlformats.org/drawingml/2006/main">
               <a:ext uri="{FF2B5EF4-FFF2-40B4-BE49-F238E27FC236}">
-                <a16:creationId xmlns:a16="http://schemas.microsoft.com/office/drawing/2014/main" id="{766B4837-61E8-4605-AE74-3CDDD94E8AEF}"/>
+                <a16:creationId xmlns:a16="http://schemas.microsoft.com/office/drawing/2014/main" id="{9770D246-2A6F-4E14-99DC-DEA5E5C619E5}"/>
               </a:ext>
             </a:extLst>
           </p:cNvPr>
@@ -1548,7 +1548,7 @@
           <p:cNvPr id="4" name="">
             <a:extLst xmlns:a="http://schemas.openxmlformats.org/drawingml/2006/main">
               <a:ext uri="{FF2B5EF4-FFF2-40B4-BE49-F238E27FC236}">
-                <a16:creationId xmlns:a16="http://schemas.microsoft.com/office/drawing/2014/main" id="{66EA16B6-D15B-4C00-9021-41753FF2085C}"/>
+                <a16:creationId xmlns:a16="http://schemas.microsoft.com/office/drawing/2014/main" id="{C2636D61-B86C-46BA-B393-D5EEEFAD880E}"/>
               </a:ext>
             </a:extLst>
           </p:cNvPr>
@@ -1921,7 +1921,7 @@
     </p:spTree>
     <p:extLst>
       <p:ext uri="{BB962C8B-B14F-4D97-AF65-F5344CB8AC3E}">
-        <p14:creationId xmlns:p14="http://schemas.microsoft.com/office/powerpoint/2010/main" val="618380760"/>
+        <p14:creationId xmlns:p14="http://schemas.microsoft.com/office/powerpoint/2010/main" val="1966982383"/>
       </p:ext>
     </p:extLst>
   </p:cSld>
@@ -1949,10 +1949,10 @@
       </p:grpSpPr>
       <p:sp>
         <p:nvSpPr>
-          <p:cNvPr id="13" name="">
+          <p:cNvPr id="17" name="">
             <a:extLst xmlns:a="http://schemas.openxmlformats.org/drawingml/2006/main">
               <a:ext uri="{FF2B5EF4-FFF2-40B4-BE49-F238E27FC236}">
-                <a16:creationId xmlns:a16="http://schemas.microsoft.com/office/drawing/2014/main" id="{0A1A2DC9-C058-4E1D-BCE8-FB6395FA62DC}"/>
+                <a16:creationId xmlns:a16="http://schemas.microsoft.com/office/drawing/2014/main" id="{82E554F0-969A-4672-ACC7-ED7AF9A8060D}"/>
               </a:ext>
             </a:extLst>
           </p:cNvPr>
@@ -2009,7 +2009,7 @@
           <p:cNvPr id="2" name="">
             <a:extLst xmlns:a="http://schemas.openxmlformats.org/drawingml/2006/main">
               <a:ext uri="{FF2B5EF4-FFF2-40B4-BE49-F238E27FC236}">
-                <a16:creationId xmlns:a16="http://schemas.microsoft.com/office/drawing/2014/main" id="{38C4CC90-CA74-4B9A-9EAF-4116E561F242}"/>
+                <a16:creationId xmlns:a16="http://schemas.microsoft.com/office/drawing/2014/main" id="{FC1A396B-0A57-46AC-80EF-D8B1F6C9464D}"/>
               </a:ext>
             </a:extLst>
           </p:cNvPr>
@@ -2066,7 +2066,7 @@
           <p:cNvPr id="3" name="">
             <a:extLst xmlns:a="http://schemas.openxmlformats.org/drawingml/2006/main">
               <a:ext uri="{FF2B5EF4-FFF2-40B4-BE49-F238E27FC236}">
-                <a16:creationId xmlns:a16="http://schemas.microsoft.com/office/drawing/2014/main" id="{677D08DA-F28D-460F-9E91-39617B951FA3}"/>
+                <a16:creationId xmlns:a16="http://schemas.microsoft.com/office/drawing/2014/main" id="{8FC80041-1AB7-4DC5-BA56-9302DCE52454}"/>
               </a:ext>
             </a:extLst>
           </p:cNvPr>
@@ -2123,7 +2123,7 @@
           <p:cNvPr id="4" name="">
             <a:extLst xmlns:a="http://schemas.openxmlformats.org/drawingml/2006/main">
               <a:ext uri="{FF2B5EF4-FFF2-40B4-BE49-F238E27FC236}">
-                <a16:creationId xmlns:a16="http://schemas.microsoft.com/office/drawing/2014/main" id="{E974C0FA-2590-41EF-B83F-2A7C06C1145F}"/>
+                <a16:creationId xmlns:a16="http://schemas.microsoft.com/office/drawing/2014/main" id="{695FD238-7FC0-48DF-A2F9-3F50CC0370CD}"/>
               </a:ext>
             </a:extLst>
           </p:cNvPr>
@@ -2180,7 +2180,7 @@
           <p:cNvPr id="5" name="">
             <a:extLst xmlns:a="http://schemas.openxmlformats.org/drawingml/2006/main">
               <a:ext uri="{FF2B5EF4-FFF2-40B4-BE49-F238E27FC236}">
-                <a16:creationId xmlns:a16="http://schemas.microsoft.com/office/drawing/2014/main" id="{C4EB4253-E172-4AF9-A6BC-0DB23D068B99}"/>
+                <a16:creationId xmlns:a16="http://schemas.microsoft.com/office/drawing/2014/main" id="{628F2EC7-A2E5-4E8A-AE19-D372254C6C67}"/>
               </a:ext>
             </a:extLst>
           </p:cNvPr>
@@ -2191,8 +2191,8 @@
         </p:nvSpPr>
         <p:spPr>
           <a:xfrm xmlns:a="http://schemas.openxmlformats.org/drawingml/2006/main">
-            <a:off x="609600" y="2133600"/>
-            <a:ext cx="5181600" cy="771525"/>
+            <a:off x="609600" y="2124075"/>
+            <a:ext cx="5181600" cy="447675"/>
           </a:xfrm>
           <a:prstGeom xmlns:a="http://schemas.openxmlformats.org/drawingml/2006/main" prst="rect">
             <a:avLst/>
@@ -2208,49 +2208,26 @@
           </a:bodyPr>
           <a:lstStyle xmlns:a="http://schemas.openxmlformats.org/drawingml/2006/main"/>
           <a:p xmlns:a="http://schemas.openxmlformats.org/drawingml/2006/main">
-            <a:pPr algn="l">
-              <a:defRPr sz="2250" b="0">
-                <a:solidFill>
-                  <a:srgbClr val="16343E"/>
-                </a:solidFill>
-                <a:latin typeface="Arial"/>
-                <a:ea typeface="Arial"/>
-                <a:cs typeface="Arial"/>
-              </a:defRPr>
-            </a:pPr>
-            <a:r>
-              <a:rPr sz="2250" b="0">
-                <a:solidFill>
-                  <a:srgbClr val="16343E"/>
-                </a:solidFill>
-                <a:latin typeface="Arial"/>
-                <a:ea typeface="Arial"/>
-                <a:cs typeface="Arial"/>
-              </a:rPr>
-              <a:t>Proportion of recorded rejection</a:t>
-            </a:r>
-          </a:p>
-          <a:p xmlns:a="http://schemas.openxmlformats.org/drawingml/2006/main">
-            <a:pPr algn="l">
-              <a:defRPr sz="2250" b="0">
-                <a:solidFill>
-                  <a:srgbClr val="16343E"/>
-                </a:solidFill>
-                <a:latin typeface="Arial"/>
-                <a:ea typeface="Arial"/>
-                <a:cs typeface="Arial"/>
-              </a:defRPr>
-            </a:pPr>
-            <a:r>
-              <a:rPr sz="2250" b="0">
-                <a:solidFill>
-                  <a:srgbClr val="16343E"/>
-                </a:solidFill>
-                <a:latin typeface="Arial"/>
-                <a:ea typeface="Arial"/>
-                <a:cs typeface="Arial"/>
-              </a:rPr>
-              <a:t>cases detected</a:t>
+            <a:pPr algn="ctr">
+              <a:defRPr sz="2100" b="0">
+                <a:solidFill>
+                  <a:srgbClr val="16343E"/>
+                </a:solidFill>
+                <a:latin typeface="Arial"/>
+                <a:ea typeface="Arial"/>
+                <a:cs typeface="Arial"/>
+              </a:defRPr>
+            </a:pPr>
+            <a:r>
+              <a:rPr sz="2100" b="0">
+                <a:solidFill>
+                  <a:srgbClr val="16343E"/>
+                </a:solidFill>
+                <a:latin typeface="Arial"/>
+                <a:ea typeface="Arial"/>
+                <a:cs typeface="Arial"/>
+              </a:rPr>
+              <a:t>Recorded rejection cases detected</a:t>
             </a:r>
           </a:p>
         </p:txBody>
@@ -2260,7 +2237,7 @@
           <p:cNvPr id="6" name="">
             <a:extLst xmlns:a="http://schemas.openxmlformats.org/drawingml/2006/main">
               <a:ext uri="{FF2B5EF4-FFF2-40B4-BE49-F238E27FC236}">
-                <a16:creationId xmlns:a16="http://schemas.microsoft.com/office/drawing/2014/main" id="{E5784D09-1BD4-42ED-9525-9B8CA0D1A7BC}"/>
+                <a16:creationId xmlns:a16="http://schemas.microsoft.com/office/drawing/2014/main" id="{F938E53E-F76B-48F2-87D2-62F76F0F149F}"/>
               </a:ext>
             </a:extLst>
           </p:cNvPr>
@@ -2271,53 +2248,25 @@
         </p:nvSpPr>
         <p:spPr>
           <a:xfrm xmlns:a="http://schemas.openxmlformats.org/drawingml/2006/main">
-            <a:off x="609600" y="3076575"/>
-            <a:ext cx="5181600" cy="638175"/>
-          </a:xfrm>
-          <a:prstGeom xmlns:a="http://schemas.openxmlformats.org/drawingml/2006/main" prst="rect">
-            <a:avLst/>
-          </a:prstGeom>
-          <a:noFill xmlns:a="http://schemas.openxmlformats.org/drawingml/2006/main"/>
-          <a:ln xmlns:a="http://schemas.openxmlformats.org/drawingml/2006/main" w="0">
-            <a:noFill/>
-          </a:ln>
-        </p:spPr>
-        <p:txBody>
-          <a:bodyPr xmlns:a="http://schemas.openxmlformats.org/drawingml/2006/main" anchor="ctr">
-            <a:noAutofit/>
-          </a:bodyPr>
-          <a:lstStyle xmlns:a="http://schemas.openxmlformats.org/drawingml/2006/main"/>
-          <a:p xmlns:a="http://schemas.openxmlformats.org/drawingml/2006/main">
-            <a:pPr algn="l">
-              <a:defRPr sz="2100" b="0">
-                <a:solidFill>
-                  <a:srgbClr val="B55730"/>
-                </a:solidFill>
-                <a:latin typeface="Arial"/>
-                <a:ea typeface="Arial"/>
-                <a:cs typeface="Arial"/>
-              </a:defRPr>
-            </a:pPr>
-            <a:r>
-              <a:rPr sz="2100" b="0">
-                <a:solidFill>
-                  <a:srgbClr val="B55730"/>
-                </a:solidFill>
-                <a:latin typeface="Arial"/>
-                <a:ea typeface="Arial"/>
-                <a:cs typeface="Arial"/>
-              </a:rPr>
-              <a:t>(False negatives are missed cases.)</a:t>
-            </a:r>
-          </a:p>
-        </p:txBody>
+            <a:off x="723900" y="2647950"/>
+            <a:ext cx="4953000" cy="0"/>
+          </a:xfrm>
+          <a:prstGeom xmlns:a="http://schemas.openxmlformats.org/drawingml/2006/main" prst="line">
+            <a:avLst/>
+          </a:prstGeom>
+          <a:ln xmlns:a="http://schemas.openxmlformats.org/drawingml/2006/main" w="11430">
+            <a:solidFill>
+              <a:srgbClr val="16343E"/>
+            </a:solidFill>
+          </a:ln>
+        </p:spPr>
       </p:sp>
       <p:sp>
         <p:nvSpPr>
           <p:cNvPr id="7" name="">
             <a:extLst xmlns:a="http://schemas.openxmlformats.org/drawingml/2006/main">
               <a:ext uri="{FF2B5EF4-FFF2-40B4-BE49-F238E27FC236}">
-                <a16:creationId xmlns:a16="http://schemas.microsoft.com/office/drawing/2014/main" id="{A818FB0C-1187-4B4A-80D6-2B53DD3E136F}"/>
+                <a16:creationId xmlns:a16="http://schemas.microsoft.com/office/drawing/2014/main" id="{452B7F36-C4DE-430D-B848-A89FE8963EE8}"/>
               </a:ext>
             </a:extLst>
           </p:cNvPr>
@@ -2328,8 +2277,8 @@
         </p:nvSpPr>
         <p:spPr>
           <a:xfrm xmlns:a="http://schemas.openxmlformats.org/drawingml/2006/main">
-            <a:off x="6705600" y="1590675"/>
-            <a:ext cx="4876800" cy="428625"/>
+            <a:off x="609600" y="2705100"/>
+            <a:ext cx="5181600" cy="447675"/>
           </a:xfrm>
           <a:prstGeom xmlns:a="http://schemas.openxmlformats.org/drawingml/2006/main" prst="rect">
             <a:avLst/>
@@ -2345,26 +2294,26 @@
           </a:bodyPr>
           <a:lstStyle xmlns:a="http://schemas.openxmlformats.org/drawingml/2006/main"/>
           <a:p xmlns:a="http://schemas.openxmlformats.org/drawingml/2006/main">
-            <a:pPr algn="l">
-              <a:defRPr sz="2625" b="1">
-                <a:solidFill>
-                  <a:srgbClr val="007C78"/>
-                </a:solidFill>
-                <a:latin typeface="Arial"/>
-                <a:ea typeface="Arial"/>
-                <a:cs typeface="Arial"/>
-              </a:defRPr>
-            </a:pPr>
-            <a:r>
-              <a:rPr sz="2625" b="1">
-                <a:solidFill>
-                  <a:srgbClr val="007C78"/>
-                </a:solidFill>
-                <a:latin typeface="Arial"/>
-                <a:ea typeface="Arial"/>
-                <a:cs typeface="Arial"/>
-              </a:rPr>
-              <a:t>Precision</a:t>
+            <a:pPr algn="ctr">
+              <a:defRPr sz="2100" b="0">
+                <a:solidFill>
+                  <a:srgbClr val="16343E"/>
+                </a:solidFill>
+                <a:latin typeface="Arial"/>
+                <a:ea typeface="Arial"/>
+                <a:cs typeface="Arial"/>
+              </a:defRPr>
+            </a:pPr>
+            <a:r>
+              <a:rPr sz="2100" b="0">
+                <a:solidFill>
+                  <a:srgbClr val="16343E"/>
+                </a:solidFill>
+                <a:latin typeface="Arial"/>
+                <a:ea typeface="Arial"/>
+                <a:cs typeface="Arial"/>
+              </a:rPr>
+              <a:t>All recorded rejection cases</a:t>
             </a:r>
           </a:p>
         </p:txBody>
@@ -2374,7 +2323,7 @@
           <p:cNvPr id="8" name="">
             <a:extLst xmlns:a="http://schemas.openxmlformats.org/drawingml/2006/main">
               <a:ext uri="{FF2B5EF4-FFF2-40B4-BE49-F238E27FC236}">
-                <a16:creationId xmlns:a16="http://schemas.microsoft.com/office/drawing/2014/main" id="{A61EFD17-43D2-4CA2-99C8-4E0C8E9546EB}"/>
+                <a16:creationId xmlns:a16="http://schemas.microsoft.com/office/drawing/2014/main" id="{01DAE889-778F-42B9-8F35-B874D529D816}"/>
               </a:ext>
             </a:extLst>
           </p:cNvPr>
@@ -2385,8 +2334,8 @@
         </p:nvSpPr>
         <p:spPr>
           <a:xfrm xmlns:a="http://schemas.openxmlformats.org/drawingml/2006/main">
-            <a:off x="6705600" y="2133600"/>
-            <a:ext cx="4876800" cy="771525"/>
+            <a:off x="609600" y="3257550"/>
+            <a:ext cx="5181600" cy="523875"/>
           </a:xfrm>
           <a:prstGeom xmlns:a="http://schemas.openxmlformats.org/drawingml/2006/main" prst="rect">
             <a:avLst/>
@@ -2403,48 +2352,25 @@
           <a:lstStyle xmlns:a="http://schemas.openxmlformats.org/drawingml/2006/main"/>
           <a:p xmlns:a="http://schemas.openxmlformats.org/drawingml/2006/main">
             <a:pPr algn="l">
-              <a:defRPr sz="2250" b="0">
-                <a:solidFill>
-                  <a:srgbClr val="16343E"/>
-                </a:solidFill>
-                <a:latin typeface="Arial"/>
-                <a:ea typeface="Arial"/>
-                <a:cs typeface="Arial"/>
-              </a:defRPr>
-            </a:pPr>
-            <a:r>
-              <a:rPr sz="2250" b="0">
-                <a:solidFill>
-                  <a:srgbClr val="16343E"/>
-                </a:solidFill>
-                <a:latin typeface="Arial"/>
-                <a:ea typeface="Arial"/>
-                <a:cs typeface="Arial"/>
-              </a:rPr>
-              <a:t>Proportion of positive flags</a:t>
-            </a:r>
-          </a:p>
-          <a:p xmlns:a="http://schemas.openxmlformats.org/drawingml/2006/main">
-            <a:pPr algn="l">
-              <a:defRPr sz="2250" b="0">
-                <a:solidFill>
-                  <a:srgbClr val="16343E"/>
-                </a:solidFill>
-                <a:latin typeface="Arial"/>
-                <a:ea typeface="Arial"/>
-                <a:cs typeface="Arial"/>
-              </a:defRPr>
-            </a:pPr>
-            <a:r>
-              <a:rPr sz="2250" b="0">
-                <a:solidFill>
-                  <a:srgbClr val="16343E"/>
-                </a:solidFill>
-                <a:latin typeface="Arial"/>
-                <a:ea typeface="Arial"/>
-                <a:cs typeface="Arial"/>
-              </a:rPr>
-              <a:t>with recorded rejection</a:t>
+              <a:defRPr sz="2100" b="0">
+                <a:solidFill>
+                  <a:srgbClr val="B55730"/>
+                </a:solidFill>
+                <a:latin typeface="Arial"/>
+                <a:ea typeface="Arial"/>
+                <a:cs typeface="Arial"/>
+              </a:defRPr>
+            </a:pPr>
+            <a:r>
+              <a:rPr sz="2100" b="0">
+                <a:solidFill>
+                  <a:srgbClr val="B55730"/>
+                </a:solidFill>
+                <a:latin typeface="Arial"/>
+                <a:ea typeface="Arial"/>
+                <a:cs typeface="Arial"/>
+              </a:rPr>
+              <a:t>(False negatives are missed cases.)</a:t>
             </a:r>
           </a:p>
         </p:txBody>
@@ -2454,7 +2380,7 @@
           <p:cNvPr id="9" name="">
             <a:extLst xmlns:a="http://schemas.openxmlformats.org/drawingml/2006/main">
               <a:ext uri="{FF2B5EF4-FFF2-40B4-BE49-F238E27FC236}">
-                <a16:creationId xmlns:a16="http://schemas.microsoft.com/office/drawing/2014/main" id="{8037A119-058D-415B-A99E-21385755E95F}"/>
+                <a16:creationId xmlns:a16="http://schemas.microsoft.com/office/drawing/2014/main" id="{CC14D9E0-A1AF-49C4-B32B-8484275CE655}"/>
               </a:ext>
             </a:extLst>
           </p:cNvPr>
@@ -2465,8 +2391,8 @@
         </p:nvSpPr>
         <p:spPr>
           <a:xfrm xmlns:a="http://schemas.openxmlformats.org/drawingml/2006/main">
-            <a:off x="6705600" y="3076575"/>
-            <a:ext cx="4876800" cy="638175"/>
+            <a:off x="6705600" y="1590675"/>
+            <a:ext cx="4876800" cy="428625"/>
           </a:xfrm>
           <a:prstGeom xmlns:a="http://schemas.openxmlformats.org/drawingml/2006/main" prst="rect">
             <a:avLst/>
@@ -2483,7 +2409,7 @@
           <a:lstStyle xmlns:a="http://schemas.openxmlformats.org/drawingml/2006/main"/>
           <a:p xmlns:a="http://schemas.openxmlformats.org/drawingml/2006/main">
             <a:pPr algn="l">
-              <a:defRPr sz="2100" b="0">
+              <a:defRPr sz="2625" b="1">
                 <a:solidFill>
                   <a:srgbClr val="007C78"/>
                 </a:solidFill>
@@ -2493,7 +2419,7 @@
               </a:defRPr>
             </a:pPr>
             <a:r>
-              <a:rPr sz="2100" b="0">
+              <a:rPr sz="2625" b="1">
                 <a:solidFill>
                   <a:srgbClr val="007C78"/>
                 </a:solidFill>
@@ -2501,7 +2427,7 @@
                 <a:ea typeface="Arial"/>
                 <a:cs typeface="Arial"/>
               </a:rPr>
-              <a:t>(False positives are incorrect flags.)</a:t>
+              <a:t>Precision</a:t>
             </a:r>
           </a:p>
         </p:txBody>
@@ -2511,7 +2437,7 @@
           <p:cNvPr id="10" name="">
             <a:extLst xmlns:a="http://schemas.openxmlformats.org/drawingml/2006/main">
               <a:ext uri="{FF2B5EF4-FFF2-40B4-BE49-F238E27FC236}">
-                <a16:creationId xmlns:a16="http://schemas.microsoft.com/office/drawing/2014/main" id="{71BCBAE4-13FA-4210-8CD5-5322D53D3DE6}"/>
+                <a16:creationId xmlns:a16="http://schemas.microsoft.com/office/drawing/2014/main" id="{FA380D3B-F8E0-4812-9CEB-274BD74F7626}"/>
               </a:ext>
             </a:extLst>
           </p:cNvPr>
@@ -2522,8 +2448,8 @@
         </p:nvSpPr>
         <p:spPr>
           <a:xfrm xmlns:a="http://schemas.openxmlformats.org/drawingml/2006/main">
-            <a:off x="609600" y="4000500"/>
-            <a:ext cx="10972800" cy="381000"/>
+            <a:off x="6705600" y="2124075"/>
+            <a:ext cx="4876800" cy="447675"/>
           </a:xfrm>
           <a:prstGeom xmlns:a="http://schemas.openxmlformats.org/drawingml/2006/main" prst="rect">
             <a:avLst/>
@@ -2539,6 +2465,206 @@
           </a:bodyPr>
           <a:lstStyle xmlns:a="http://schemas.openxmlformats.org/drawingml/2006/main"/>
           <a:p xmlns:a="http://schemas.openxmlformats.org/drawingml/2006/main">
+            <a:pPr algn="ctr">
+              <a:defRPr sz="2100" b="0">
+                <a:solidFill>
+                  <a:srgbClr val="16343E"/>
+                </a:solidFill>
+                <a:latin typeface="Arial"/>
+                <a:ea typeface="Arial"/>
+                <a:cs typeface="Arial"/>
+              </a:defRPr>
+            </a:pPr>
+            <a:r>
+              <a:rPr sz="2100" b="0">
+                <a:solidFill>
+                  <a:srgbClr val="16343E"/>
+                </a:solidFill>
+                <a:latin typeface="Arial"/>
+                <a:ea typeface="Arial"/>
+                <a:cs typeface="Arial"/>
+              </a:rPr>
+              <a:t>Flags with recorded rejection</a:t>
+            </a:r>
+          </a:p>
+        </p:txBody>
+      </p:sp>
+      <p:sp>
+        <p:nvSpPr>
+          <p:cNvPr id="11" name="">
+            <a:extLst xmlns:a="http://schemas.openxmlformats.org/drawingml/2006/main">
+              <a:ext uri="{FF2B5EF4-FFF2-40B4-BE49-F238E27FC236}">
+                <a16:creationId xmlns:a16="http://schemas.microsoft.com/office/drawing/2014/main" id="{31F62A75-1633-4745-992E-8326DB939BD5}"/>
+              </a:ext>
+            </a:extLst>
+          </p:cNvPr>
+          <p:cNvSpPr>
+            <a:spLocks xmlns:a="http://schemas.openxmlformats.org/drawingml/2006/main" noGrp="1"/>
+          </p:cNvSpPr>
+          <p:nvPr/>
+        </p:nvSpPr>
+        <p:spPr>
+          <a:xfrm xmlns:a="http://schemas.openxmlformats.org/drawingml/2006/main">
+            <a:off x="6819900" y="2647950"/>
+            <a:ext cx="4648200" cy="0"/>
+          </a:xfrm>
+          <a:prstGeom xmlns:a="http://schemas.openxmlformats.org/drawingml/2006/main" prst="line">
+            <a:avLst/>
+          </a:prstGeom>
+          <a:ln xmlns:a="http://schemas.openxmlformats.org/drawingml/2006/main" w="11430">
+            <a:solidFill>
+              <a:srgbClr val="16343E"/>
+            </a:solidFill>
+          </a:ln>
+        </p:spPr>
+      </p:sp>
+      <p:sp>
+        <p:nvSpPr>
+          <p:cNvPr id="12" name="">
+            <a:extLst xmlns:a="http://schemas.openxmlformats.org/drawingml/2006/main">
+              <a:ext uri="{FF2B5EF4-FFF2-40B4-BE49-F238E27FC236}">
+                <a16:creationId xmlns:a16="http://schemas.microsoft.com/office/drawing/2014/main" id="{1A3F7D60-3ABE-476B-B5D7-46E112A80C11}"/>
+              </a:ext>
+            </a:extLst>
+          </p:cNvPr>
+          <p:cNvSpPr>
+            <a:spLocks xmlns:a="http://schemas.openxmlformats.org/drawingml/2006/main" noGrp="1"/>
+          </p:cNvSpPr>
+          <p:nvPr/>
+        </p:nvSpPr>
+        <p:spPr>
+          <a:xfrm xmlns:a="http://schemas.openxmlformats.org/drawingml/2006/main">
+            <a:off x="6705600" y="2705100"/>
+            <a:ext cx="4876800" cy="447675"/>
+          </a:xfrm>
+          <a:prstGeom xmlns:a="http://schemas.openxmlformats.org/drawingml/2006/main" prst="rect">
+            <a:avLst/>
+          </a:prstGeom>
+          <a:noFill xmlns:a="http://schemas.openxmlformats.org/drawingml/2006/main"/>
+          <a:ln xmlns:a="http://schemas.openxmlformats.org/drawingml/2006/main" w="0">
+            <a:noFill/>
+          </a:ln>
+        </p:spPr>
+        <p:txBody>
+          <a:bodyPr xmlns:a="http://schemas.openxmlformats.org/drawingml/2006/main" anchor="ctr">
+            <a:noAutofit/>
+          </a:bodyPr>
+          <a:lstStyle xmlns:a="http://schemas.openxmlformats.org/drawingml/2006/main"/>
+          <a:p xmlns:a="http://schemas.openxmlformats.org/drawingml/2006/main">
+            <a:pPr algn="ctr">
+              <a:defRPr sz="2100" b="0">
+                <a:solidFill>
+                  <a:srgbClr val="16343E"/>
+                </a:solidFill>
+                <a:latin typeface="Arial"/>
+                <a:ea typeface="Arial"/>
+                <a:cs typeface="Arial"/>
+              </a:defRPr>
+            </a:pPr>
+            <a:r>
+              <a:rPr sz="2100" b="0">
+                <a:solidFill>
+                  <a:srgbClr val="16343E"/>
+                </a:solidFill>
+                <a:latin typeface="Arial"/>
+                <a:ea typeface="Arial"/>
+                <a:cs typeface="Arial"/>
+              </a:rPr>
+              <a:t>All positive flags</a:t>
+            </a:r>
+          </a:p>
+        </p:txBody>
+      </p:sp>
+      <p:sp>
+        <p:nvSpPr>
+          <p:cNvPr id="13" name="">
+            <a:extLst xmlns:a="http://schemas.openxmlformats.org/drawingml/2006/main">
+              <a:ext uri="{FF2B5EF4-FFF2-40B4-BE49-F238E27FC236}">
+                <a16:creationId xmlns:a16="http://schemas.microsoft.com/office/drawing/2014/main" id="{4E7969CB-039F-4945-89C9-D5BC125589A9}"/>
+              </a:ext>
+            </a:extLst>
+          </p:cNvPr>
+          <p:cNvSpPr>
+            <a:spLocks xmlns:a="http://schemas.openxmlformats.org/drawingml/2006/main" noGrp="1"/>
+          </p:cNvSpPr>
+          <p:nvPr/>
+        </p:nvSpPr>
+        <p:spPr>
+          <a:xfrm xmlns:a="http://schemas.openxmlformats.org/drawingml/2006/main">
+            <a:off x="6705600" y="3257550"/>
+            <a:ext cx="4876800" cy="523875"/>
+          </a:xfrm>
+          <a:prstGeom xmlns:a="http://schemas.openxmlformats.org/drawingml/2006/main" prst="rect">
+            <a:avLst/>
+          </a:prstGeom>
+          <a:noFill xmlns:a="http://schemas.openxmlformats.org/drawingml/2006/main"/>
+          <a:ln xmlns:a="http://schemas.openxmlformats.org/drawingml/2006/main" w="0">
+            <a:noFill/>
+          </a:ln>
+        </p:spPr>
+        <p:txBody>
+          <a:bodyPr xmlns:a="http://schemas.openxmlformats.org/drawingml/2006/main" anchor="ctr">
+            <a:noAutofit/>
+          </a:bodyPr>
+          <a:lstStyle xmlns:a="http://schemas.openxmlformats.org/drawingml/2006/main"/>
+          <a:p xmlns:a="http://schemas.openxmlformats.org/drawingml/2006/main">
+            <a:pPr algn="l">
+              <a:defRPr sz="2100" b="0">
+                <a:solidFill>
+                  <a:srgbClr val="007C78"/>
+                </a:solidFill>
+                <a:latin typeface="Arial"/>
+                <a:ea typeface="Arial"/>
+                <a:cs typeface="Arial"/>
+              </a:defRPr>
+            </a:pPr>
+            <a:r>
+              <a:rPr sz="2100" b="0">
+                <a:solidFill>
+                  <a:srgbClr val="007C78"/>
+                </a:solidFill>
+                <a:latin typeface="Arial"/>
+                <a:ea typeface="Arial"/>
+                <a:cs typeface="Arial"/>
+              </a:rPr>
+              <a:t>(False positives are incorrect flags.)</a:t>
+            </a:r>
+          </a:p>
+        </p:txBody>
+      </p:sp>
+      <p:sp>
+        <p:nvSpPr>
+          <p:cNvPr id="14" name="">
+            <a:extLst xmlns:a="http://schemas.openxmlformats.org/drawingml/2006/main">
+              <a:ext uri="{FF2B5EF4-FFF2-40B4-BE49-F238E27FC236}">
+                <a16:creationId xmlns:a16="http://schemas.microsoft.com/office/drawing/2014/main" id="{2F4420A0-6058-4FC8-88FC-3B2BAD156E5F}"/>
+              </a:ext>
+            </a:extLst>
+          </p:cNvPr>
+          <p:cNvSpPr>
+            <a:spLocks xmlns:a="http://schemas.openxmlformats.org/drawingml/2006/main" noGrp="1"/>
+          </p:cNvSpPr>
+          <p:nvPr/>
+        </p:nvSpPr>
+        <p:spPr>
+          <a:xfrm xmlns:a="http://schemas.openxmlformats.org/drawingml/2006/main">
+            <a:off x="609600" y="4000500"/>
+            <a:ext cx="10972800" cy="381000"/>
+          </a:xfrm>
+          <a:prstGeom xmlns:a="http://schemas.openxmlformats.org/drawingml/2006/main" prst="rect">
+            <a:avLst/>
+          </a:prstGeom>
+          <a:noFill xmlns:a="http://schemas.openxmlformats.org/drawingml/2006/main"/>
+          <a:ln xmlns:a="http://schemas.openxmlformats.org/drawingml/2006/main" w="0">
+            <a:noFill/>
+          </a:ln>
+        </p:spPr>
+        <p:txBody>
+          <a:bodyPr xmlns:a="http://schemas.openxmlformats.org/drawingml/2006/main" anchor="ctr">
+            <a:noAutofit/>
+          </a:bodyPr>
+          <a:lstStyle xmlns:a="http://schemas.openxmlformats.org/drawingml/2006/main"/>
+          <a:p xmlns:a="http://schemas.openxmlformats.org/drawingml/2006/main">
             <a:pPr algn="l">
               <a:defRPr sz="2400" b="1">
                 <a:solidFill>
@@ -2565,7 +2691,7 @@
       </p:sp>
       <p:graphicFrame>
         <p:nvGraphicFramePr>
-          <p:cNvPr id="23" name=""/>
+          <p:cNvPr id="31" name=""/>
           <p:cNvGraphicFramePr/>
           <p:nvPr/>
         </p:nvGraphicFramePr>
@@ -2803,10 +2929,10 @@
       </p:graphicFrame>
       <p:sp>
         <p:nvSpPr>
-          <p:cNvPr id="12" name="">
+          <p:cNvPr id="16" name="">
             <a:extLst xmlns:a="http://schemas.openxmlformats.org/drawingml/2006/main">
               <a:ext uri="{FF2B5EF4-FFF2-40B4-BE49-F238E27FC236}">
-                <a16:creationId xmlns:a16="http://schemas.microsoft.com/office/drawing/2014/main" id="{E143CE4F-0344-4935-A343-2199181EDD72}"/>
+                <a16:creationId xmlns:a16="http://schemas.microsoft.com/office/drawing/2014/main" id="{0AEF79EC-0BD2-4CB3-9829-EE39DA58DB2F}"/>
               </a:ext>
             </a:extLst>
           </p:cNvPr>
@@ -2861,7 +2987,7 @@
     </p:spTree>
     <p:extLst>
       <p:ext uri="{BB962C8B-B14F-4D97-AF65-F5344CB8AC3E}">
-        <p14:creationId xmlns:p14="http://schemas.microsoft.com/office/powerpoint/2010/main" val="130087960"/>
+        <p14:creationId xmlns:p14="http://schemas.microsoft.com/office/powerpoint/2010/main" val="1632424565"/>
       </p:ext>
     </p:extLst>
   </p:cSld>
@@ -2892,7 +3018,7 @@
           <p:cNvPr id="7" name="">
             <a:extLst xmlns:a="http://schemas.openxmlformats.org/drawingml/2006/main">
               <a:ext uri="{FF2B5EF4-FFF2-40B4-BE49-F238E27FC236}">
-                <a16:creationId xmlns:a16="http://schemas.microsoft.com/office/drawing/2014/main" id="{93D9871B-70F3-4BCC-9FE0-3C347B9E45AB}"/>
+                <a16:creationId xmlns:a16="http://schemas.microsoft.com/office/drawing/2014/main" id="{E29C166B-21AE-414D-8C5F-DAD7A23B3B01}"/>
               </a:ext>
             </a:extLst>
           </p:cNvPr>
@@ -2949,7 +3075,7 @@
           <p:cNvPr id="2" name="">
             <a:extLst xmlns:a="http://schemas.openxmlformats.org/drawingml/2006/main">
               <a:ext uri="{FF2B5EF4-FFF2-40B4-BE49-F238E27FC236}">
-                <a16:creationId xmlns:a16="http://schemas.microsoft.com/office/drawing/2014/main" id="{B645D562-9303-469B-8507-BF5AE3956390}"/>
+                <a16:creationId xmlns:a16="http://schemas.microsoft.com/office/drawing/2014/main" id="{07587E13-10EF-4227-B11E-14EDA6BF1CE3}"/>
               </a:ext>
             </a:extLst>
           </p:cNvPr>
@@ -3006,7 +3132,7 @@
           <p:cNvPr id="3" name="">
             <a:extLst xmlns:a="http://schemas.openxmlformats.org/drawingml/2006/main">
               <a:ext uri="{FF2B5EF4-FFF2-40B4-BE49-F238E27FC236}">
-                <a16:creationId xmlns:a16="http://schemas.microsoft.com/office/drawing/2014/main" id="{C8683C4C-4A13-45E3-8A34-71BABBE4F97E}"/>
+                <a16:creationId xmlns:a16="http://schemas.microsoft.com/office/drawing/2014/main" id="{0820101C-68D0-4BDC-8031-DA39DD933195}"/>
               </a:ext>
             </a:extLst>
           </p:cNvPr>
@@ -3063,7 +3189,7 @@
           <p:cNvPr id="4" name="">
             <a:extLst xmlns:a="http://schemas.openxmlformats.org/drawingml/2006/main">
               <a:ext uri="{FF2B5EF4-FFF2-40B4-BE49-F238E27FC236}">
-                <a16:creationId xmlns:a16="http://schemas.microsoft.com/office/drawing/2014/main" id="{DC07CE36-2BC0-4EF2-B058-271B3BAC6600}"/>
+                <a16:creationId xmlns:a16="http://schemas.microsoft.com/office/drawing/2014/main" id="{363124D7-118C-40D4-A62C-1DA89D02371B}"/>
               </a:ext>
             </a:extLst>
           </p:cNvPr>
@@ -3127,7 +3253,7 @@
         </p:xfrm>
         <a:graphic xmlns:a="http://schemas.openxmlformats.org/drawingml/2006/main">
           <a:graphicData uri="http://schemas.openxmlformats.org/drawingml/2006/chart">
-            <c:chart xmlns:r="http://schemas.openxmlformats.org/officeDocument/2006/relationships" xmlns:c="http://schemas.openxmlformats.org/drawingml/2006/chart" r:id="R7d94b5ba6c7b44c0"/>
+            <c:chart xmlns:r="http://schemas.openxmlformats.org/officeDocument/2006/relationships" xmlns:c="http://schemas.openxmlformats.org/drawingml/2006/chart" r:id="Rca3b9ed9027f45b4"/>
           </a:graphicData>
         </a:graphic>
       </p:graphicFrame>
@@ -3136,7 +3262,7 @@
           <p:cNvPr id="6" name="">
             <a:extLst xmlns:a="http://schemas.openxmlformats.org/drawingml/2006/main">
               <a:ext uri="{FF2B5EF4-FFF2-40B4-BE49-F238E27FC236}">
-                <a16:creationId xmlns:a16="http://schemas.microsoft.com/office/drawing/2014/main" id="{D0D8533A-D554-48DE-A334-0BBC0C369357}"/>
+                <a16:creationId xmlns:a16="http://schemas.microsoft.com/office/drawing/2014/main" id="{4D3133AB-F27A-444D-BA58-8510313CD4FE}"/>
               </a:ext>
             </a:extLst>
           </p:cNvPr>
@@ -3222,7 +3348,7 @@
     </p:spTree>
     <p:extLst>
       <p:ext uri="{BB962C8B-B14F-4D97-AF65-F5344CB8AC3E}">
-        <p14:creationId xmlns:p14="http://schemas.microsoft.com/office/powerpoint/2010/main" val="1978114221"/>
+        <p14:creationId xmlns:p14="http://schemas.microsoft.com/office/powerpoint/2010/main" val="127773223"/>
       </p:ext>
     </p:extLst>
   </p:cSld>
@@ -3253,7 +3379,7 @@
           <p:cNvPr id="9" name="">
             <a:extLst xmlns:a="http://schemas.openxmlformats.org/drawingml/2006/main">
               <a:ext uri="{FF2B5EF4-FFF2-40B4-BE49-F238E27FC236}">
-                <a16:creationId xmlns:a16="http://schemas.microsoft.com/office/drawing/2014/main" id="{2E0DA066-B79A-4EA9-B34C-44849A563527}"/>
+                <a16:creationId xmlns:a16="http://schemas.microsoft.com/office/drawing/2014/main" id="{66C3FCE4-A5C2-4644-B938-F6D411D28F41}"/>
               </a:ext>
             </a:extLst>
           </p:cNvPr>
@@ -3310,7 +3436,7 @@
           <p:cNvPr id="2" name="">
             <a:extLst xmlns:a="http://schemas.openxmlformats.org/drawingml/2006/main">
               <a:ext uri="{FF2B5EF4-FFF2-40B4-BE49-F238E27FC236}">
-                <a16:creationId xmlns:a16="http://schemas.microsoft.com/office/drawing/2014/main" id="{A660362B-A01E-4804-A667-78A2215FE1D9}"/>
+                <a16:creationId xmlns:a16="http://schemas.microsoft.com/office/drawing/2014/main" id="{B8229517-23CD-4431-BA1B-D9D58D9133C8}"/>
               </a:ext>
             </a:extLst>
           </p:cNvPr>
@@ -3367,7 +3493,7 @@
           <p:cNvPr id="3" name="">
             <a:extLst xmlns:a="http://schemas.openxmlformats.org/drawingml/2006/main">
               <a:ext uri="{FF2B5EF4-FFF2-40B4-BE49-F238E27FC236}">
-                <a16:creationId xmlns:a16="http://schemas.microsoft.com/office/drawing/2014/main" id="{FB1A113E-35A8-4BAC-97E3-4B502D59278B}"/>
+                <a16:creationId xmlns:a16="http://schemas.microsoft.com/office/drawing/2014/main" id="{F5B1AE7B-A413-4063-B17D-3CFBAD98B3E2}"/>
               </a:ext>
             </a:extLst>
           </p:cNvPr>
@@ -3424,7 +3550,7 @@
           <p:cNvPr id="4" name="">
             <a:extLst xmlns:a="http://schemas.openxmlformats.org/drawingml/2006/main">
               <a:ext uri="{FF2B5EF4-FFF2-40B4-BE49-F238E27FC236}">
-                <a16:creationId xmlns:a16="http://schemas.microsoft.com/office/drawing/2014/main" id="{F5C14B07-C47D-45C2-B62A-811028C7F59A}"/>
+                <a16:creationId xmlns:a16="http://schemas.microsoft.com/office/drawing/2014/main" id="{8739D2F5-1B34-452E-B472-AD47631A8FF2}"/>
               </a:ext>
             </a:extLst>
           </p:cNvPr>
@@ -3481,7 +3607,7 @@
           <p:cNvPr id="5" name="">
             <a:extLst xmlns:a="http://schemas.openxmlformats.org/drawingml/2006/main">
               <a:ext uri="{FF2B5EF4-FFF2-40B4-BE49-F238E27FC236}">
-                <a16:creationId xmlns:a16="http://schemas.microsoft.com/office/drawing/2014/main" id="{BA5004C3-0B24-4EC1-B00F-F7CAF2F80DAE}"/>
+                <a16:creationId xmlns:a16="http://schemas.microsoft.com/office/drawing/2014/main" id="{24EEABEC-FBCF-46B1-8A26-14233474A748}"/>
               </a:ext>
             </a:extLst>
           </p:cNvPr>
@@ -3561,7 +3687,7 @@
           <p:cNvPr id="6" name="">
             <a:extLst xmlns:a="http://schemas.openxmlformats.org/drawingml/2006/main">
               <a:ext uri="{FF2B5EF4-FFF2-40B4-BE49-F238E27FC236}">
-                <a16:creationId xmlns:a16="http://schemas.microsoft.com/office/drawing/2014/main" id="{4A3FA261-EAD3-43EF-9DA2-F8A29948126A}"/>
+                <a16:creationId xmlns:a16="http://schemas.microsoft.com/office/drawing/2014/main" id="{1DA375D3-44E1-43F4-9997-EA55F0CED00A}"/>
               </a:ext>
             </a:extLst>
           </p:cNvPr>
@@ -3649,7 +3775,7 @@
           <p:cNvPr id="7" name="">
             <a:extLst xmlns:a="http://schemas.openxmlformats.org/drawingml/2006/main">
               <a:ext uri="{FF2B5EF4-FFF2-40B4-BE49-F238E27FC236}">
-                <a16:creationId xmlns:a16="http://schemas.microsoft.com/office/drawing/2014/main" id="{275CE76F-034D-4CEB-A51E-2B00152F9F48}"/>
+                <a16:creationId xmlns:a16="http://schemas.microsoft.com/office/drawing/2014/main" id="{4FE9D7BA-71ED-4B6A-96FC-94C403EB2C0E}"/>
               </a:ext>
             </a:extLst>
           </p:cNvPr>
@@ -3942,7 +4068,7 @@
     </p:spTree>
     <p:extLst>
       <p:ext uri="{BB962C8B-B14F-4D97-AF65-F5344CB8AC3E}">
-        <p14:creationId xmlns:p14="http://schemas.microsoft.com/office/powerpoint/2010/main" val="1451916616"/>
+        <p14:creationId xmlns:p14="http://schemas.microsoft.com/office/powerpoint/2010/main" val="1169880390"/>
       </p:ext>
     </p:extLst>
   </p:cSld>
@@ -3973,7 +4099,7 @@
           <p:cNvPr id="9" name="">
             <a:extLst xmlns:a="http://schemas.openxmlformats.org/drawingml/2006/main">
               <a:ext uri="{FF2B5EF4-FFF2-40B4-BE49-F238E27FC236}">
-                <a16:creationId xmlns:a16="http://schemas.microsoft.com/office/drawing/2014/main" id="{E40DD3F2-1F8E-4047-8B69-D0B48B042CA2}"/>
+                <a16:creationId xmlns:a16="http://schemas.microsoft.com/office/drawing/2014/main" id="{AB60851F-0479-427C-A7B9-36EE11BF2B56}"/>
               </a:ext>
             </a:extLst>
           </p:cNvPr>
@@ -4030,7 +4156,7 @@
           <p:cNvPr id="2" name="">
             <a:extLst xmlns:a="http://schemas.openxmlformats.org/drawingml/2006/main">
               <a:ext uri="{FF2B5EF4-FFF2-40B4-BE49-F238E27FC236}">
-                <a16:creationId xmlns:a16="http://schemas.microsoft.com/office/drawing/2014/main" id="{282562CD-8197-4E18-AD74-CCEAFC401621}"/>
+                <a16:creationId xmlns:a16="http://schemas.microsoft.com/office/drawing/2014/main" id="{565D2DDF-7B50-4590-A645-158627A5E58F}"/>
               </a:ext>
             </a:extLst>
           </p:cNvPr>
@@ -4087,7 +4213,7 @@
           <p:cNvPr id="3" name="">
             <a:extLst xmlns:a="http://schemas.openxmlformats.org/drawingml/2006/main">
               <a:ext uri="{FF2B5EF4-FFF2-40B4-BE49-F238E27FC236}">
-                <a16:creationId xmlns:a16="http://schemas.microsoft.com/office/drawing/2014/main" id="{2809DF0E-CBF2-4D8F-8FAA-907119DCE778}"/>
+                <a16:creationId xmlns:a16="http://schemas.microsoft.com/office/drawing/2014/main" id="{8D610B85-A8AF-42BF-BDED-27C0FCA34A78}"/>
               </a:ext>
             </a:extLst>
           </p:cNvPr>
@@ -4144,7 +4270,7 @@
           <p:cNvPr id="4" name="">
             <a:extLst xmlns:a="http://schemas.openxmlformats.org/drawingml/2006/main">
               <a:ext uri="{FF2B5EF4-FFF2-40B4-BE49-F238E27FC236}">
-                <a16:creationId xmlns:a16="http://schemas.microsoft.com/office/drawing/2014/main" id="{AC706D7A-CD55-4743-9CB7-5A4FD3EC379C}"/>
+                <a16:creationId xmlns:a16="http://schemas.microsoft.com/office/drawing/2014/main" id="{5ED566BB-48A8-464A-B01B-E06B95162047}"/>
               </a:ext>
             </a:extLst>
           </p:cNvPr>
@@ -4201,7 +4327,7 @@
           <p:cNvPr id="5" name="">
             <a:extLst xmlns:a="http://schemas.openxmlformats.org/drawingml/2006/main">
               <a:ext uri="{FF2B5EF4-FFF2-40B4-BE49-F238E27FC236}">
-                <a16:creationId xmlns:a16="http://schemas.microsoft.com/office/drawing/2014/main" id="{0059457B-6ADF-4C8A-90B9-EBF95C04B7DF}"/>
+                <a16:creationId xmlns:a16="http://schemas.microsoft.com/office/drawing/2014/main" id="{7791DAE0-4627-4BD5-B4E0-B7295939D6F2}"/>
               </a:ext>
             </a:extLst>
           </p:cNvPr>
@@ -4316,7 +4442,7 @@
           <p:cNvPr id="6" name="">
             <a:extLst xmlns:a="http://schemas.openxmlformats.org/drawingml/2006/main">
               <a:ext uri="{FF2B5EF4-FFF2-40B4-BE49-F238E27FC236}">
-                <a16:creationId xmlns:a16="http://schemas.microsoft.com/office/drawing/2014/main" id="{32E1ADC9-27FF-4402-BC6C-AD66D23DC720}"/>
+                <a16:creationId xmlns:a16="http://schemas.microsoft.com/office/drawing/2014/main" id="{506E2892-5F71-402B-ADC5-17B71B5D59DF}"/>
               </a:ext>
             </a:extLst>
           </p:cNvPr>
@@ -4503,7 +4629,7 @@
           <p:cNvPr id="8" name="">
             <a:extLst xmlns:a="http://schemas.openxmlformats.org/drawingml/2006/main">
               <a:ext uri="{FF2B5EF4-FFF2-40B4-BE49-F238E27FC236}">
-                <a16:creationId xmlns:a16="http://schemas.microsoft.com/office/drawing/2014/main" id="{527D5680-E4CD-4D5B-AC9A-E5F341556CD4}"/>
+                <a16:creationId xmlns:a16="http://schemas.microsoft.com/office/drawing/2014/main" id="{F71E7439-1C34-45E0-ADC4-63B9CB307565}"/>
               </a:ext>
             </a:extLst>
           </p:cNvPr>
@@ -4558,7 +4684,7 @@
     </p:spTree>
     <p:extLst>
       <p:ext uri="{BB962C8B-B14F-4D97-AF65-F5344CB8AC3E}">
-        <p14:creationId xmlns:p14="http://schemas.microsoft.com/office/powerpoint/2010/main" val="562149893"/>
+        <p14:creationId xmlns:p14="http://schemas.microsoft.com/office/powerpoint/2010/main" val="598331586"/>
       </p:ext>
     </p:extLst>
   </p:cSld>
@@ -4589,7 +4715,7 @@
           <p:cNvPr id="13" name="">
             <a:extLst xmlns:a="http://schemas.openxmlformats.org/drawingml/2006/main">
               <a:ext uri="{FF2B5EF4-FFF2-40B4-BE49-F238E27FC236}">
-                <a16:creationId xmlns:a16="http://schemas.microsoft.com/office/drawing/2014/main" id="{2E0882ED-E60F-42C9-8377-14F27131CB7C}"/>
+                <a16:creationId xmlns:a16="http://schemas.microsoft.com/office/drawing/2014/main" id="{E54A8FE2-6003-46A6-A716-180B5F3DC258}"/>
               </a:ext>
             </a:extLst>
           </p:cNvPr>
@@ -4636,7 +4762,7 @@
                 <a:ea typeface="Arial"/>
                 <a:cs typeface="Arial"/>
               </a:rPr>
-              <a:t>Training and prediction use the same preparation</a:t>
+              <a:t>Prediction service and demonstration</a:t>
             </a:r>
           </a:p>
         </p:txBody>
@@ -4646,7 +4772,7 @@
           <p:cNvPr id="2" name="">
             <a:extLst xmlns:a="http://schemas.openxmlformats.org/drawingml/2006/main">
               <a:ext uri="{FF2B5EF4-FFF2-40B4-BE49-F238E27FC236}">
-                <a16:creationId xmlns:a16="http://schemas.microsoft.com/office/drawing/2014/main" id="{4FA511B9-A0B6-49F9-841B-4978E9390C2B}"/>
+                <a16:creationId xmlns:a16="http://schemas.microsoft.com/office/drawing/2014/main" id="{4D6B3B66-5D4C-497A-A910-98C5403CF75D}"/>
               </a:ext>
             </a:extLst>
           </p:cNvPr>
@@ -4703,7 +4829,7 @@
           <p:cNvPr id="3" name="">
             <a:extLst xmlns:a="http://schemas.openxmlformats.org/drawingml/2006/main">
               <a:ext uri="{FF2B5EF4-FFF2-40B4-BE49-F238E27FC236}">
-                <a16:creationId xmlns:a16="http://schemas.microsoft.com/office/drawing/2014/main" id="{69890894-B54B-4093-B2C0-FF9D2A57BDB6}"/>
+                <a16:creationId xmlns:a16="http://schemas.microsoft.com/office/drawing/2014/main" id="{21D2080F-1312-4BC8-A0D0-B7079484538F}"/>
               </a:ext>
             </a:extLst>
           </p:cNvPr>
@@ -4760,7 +4886,7 @@
           <p:cNvPr id="4" name="">
             <a:extLst xmlns:a="http://schemas.openxmlformats.org/drawingml/2006/main">
               <a:ext uri="{FF2B5EF4-FFF2-40B4-BE49-F238E27FC236}">
-                <a16:creationId xmlns:a16="http://schemas.microsoft.com/office/drawing/2014/main" id="{F71AD415-61F3-4BD6-B3EA-A9D7ACACA976}"/>
+                <a16:creationId xmlns:a16="http://schemas.microsoft.com/office/drawing/2014/main" id="{A3519A4B-435C-4203-A098-63317865DA2D}"/>
               </a:ext>
             </a:extLst>
           </p:cNvPr>
@@ -4771,8 +4897,8 @@
         </p:nvSpPr>
         <p:spPr>
           <a:xfrm xmlns:a="http://schemas.openxmlformats.org/drawingml/2006/main">
-            <a:off x="609600" y="1571625"/>
-            <a:ext cx="10972800" cy="571500"/>
+            <a:off x="609600" y="1524000"/>
+            <a:ext cx="10972800" cy="790575"/>
           </a:xfrm>
           <a:prstGeom xmlns:a="http://schemas.openxmlformats.org/drawingml/2006/main" prst="rect">
             <a:avLst/>
@@ -4790,20 +4916,20 @@
           <a:p xmlns:a="http://schemas.openxmlformats.org/drawingml/2006/main">
             <a:pPr marL="279400" indent="-152400" algn="l">
               <a:spcAft>
-                <a:spcPts val="1200"/>
+                <a:spcPts val="600"/>
               </a:spcAft>
               <a:buChar char="•"/>
-              <a:defRPr sz="2475" b="0">
-                <a:solidFill>
-                  <a:srgbClr val="16343E"/>
-                </a:solidFill>
-                <a:latin typeface="Arial"/>
-                <a:ea typeface="Arial"/>
-                <a:cs typeface="Arial"/>
-              </a:defRPr>
-            </a:pPr>
-            <a:r>
-              <a:rPr sz="2475" b="0">
+              <a:defRPr sz="2175" b="0">
+                <a:solidFill>
+                  <a:srgbClr val="16343E"/>
+                </a:solidFill>
+                <a:latin typeface="Arial"/>
+                <a:ea typeface="Arial"/>
+                <a:cs typeface="Arial"/>
+              </a:defRPr>
+            </a:pPr>
+            <a:r>
+              <a:rPr sz="2175" b="0">
                 <a:solidFill>
                   <a:srgbClr val="16343E"/>
                 </a:solidFill>
@@ -4812,6 +4938,33 @@
                 <a:cs typeface="Arial"/>
               </a:rPr>
               <a:t>CSV input through the command line or web application.</a:t>
+            </a:r>
+          </a:p>
+          <a:p xmlns:a="http://schemas.openxmlformats.org/drawingml/2006/main">
+            <a:pPr marL="279400" indent="-152400" algn="l">
+              <a:spcAft>
+                <a:spcPts val="600"/>
+              </a:spcAft>
+              <a:buChar char="•"/>
+              <a:defRPr sz="2175" b="0">
+                <a:solidFill>
+                  <a:srgbClr val="16343E"/>
+                </a:solidFill>
+                <a:latin typeface="Arial"/>
+                <a:ea typeface="Arial"/>
+                <a:cs typeface="Arial"/>
+              </a:defRPr>
+            </a:pPr>
+            <a:r>
+              <a:rPr sz="2175" b="0">
+                <a:solidFill>
+                  <a:srgbClr val="16343E"/>
+                </a:solidFill>
+                <a:latin typeface="Arial"/>
+                <a:ea typeface="Arial"/>
+                <a:cs typeface="Arial"/>
+              </a:rPr>
+              <a:t>Training and prediction share the preparation code.</a:t>
             </a:r>
           </a:p>
         </p:txBody>
@@ -4821,7 +4974,7 @@
           <p:cNvPr id="5" name="">
             <a:extLst xmlns:a="http://schemas.openxmlformats.org/drawingml/2006/main">
               <a:ext uri="{FF2B5EF4-FFF2-40B4-BE49-F238E27FC236}">
-                <a16:creationId xmlns:a16="http://schemas.microsoft.com/office/drawing/2014/main" id="{966BCBA2-C6E6-462C-BEFC-D5DBECC92E1C}"/>
+                <a16:creationId xmlns:a16="http://schemas.microsoft.com/office/drawing/2014/main" id="{3CC0AD85-0F67-4B6A-97E2-4EDCA0AABB37}"/>
               </a:ext>
             </a:extLst>
           </p:cNvPr>
@@ -4882,7 +5035,7 @@
           <p:cNvPr id="6" name="">
             <a:extLst xmlns:a="http://schemas.openxmlformats.org/drawingml/2006/main">
               <a:ext uri="{FF2B5EF4-FFF2-40B4-BE49-F238E27FC236}">
-                <a16:creationId xmlns:a16="http://schemas.microsoft.com/office/drawing/2014/main" id="{0E45DF08-E0E9-49B0-8354-538CA5BCE163}"/>
+                <a16:creationId xmlns:a16="http://schemas.microsoft.com/office/drawing/2014/main" id="{884D9139-524E-49E9-9BA4-E06D68CACA01}"/>
               </a:ext>
             </a:extLst>
           </p:cNvPr>
@@ -4991,7 +5144,7 @@
           <p:cNvPr id="8" name="">
             <a:extLst xmlns:a="http://schemas.openxmlformats.org/drawingml/2006/main">
               <a:ext uri="{FF2B5EF4-FFF2-40B4-BE49-F238E27FC236}">
-                <a16:creationId xmlns:a16="http://schemas.microsoft.com/office/drawing/2014/main" id="{944C38F2-084A-4DE9-9B6A-E090758B77AE}"/>
+                <a16:creationId xmlns:a16="http://schemas.microsoft.com/office/drawing/2014/main" id="{64762E3D-26F1-4AFF-A718-0FD0A1BF87B7}"/>
               </a:ext>
             </a:extLst>
           </p:cNvPr>
@@ -5100,7 +5253,7 @@
           <p:cNvPr id="10" name="">
             <a:extLst xmlns:a="http://schemas.openxmlformats.org/drawingml/2006/main">
               <a:ext uri="{FF2B5EF4-FFF2-40B4-BE49-F238E27FC236}">
-                <a16:creationId xmlns:a16="http://schemas.microsoft.com/office/drawing/2014/main" id="{E89AFDD9-B5B1-4609-9903-692DD64EE528}"/>
+                <a16:creationId xmlns:a16="http://schemas.microsoft.com/office/drawing/2014/main" id="{4E2F8D7D-C280-42F8-9599-7394D0F1BF86}"/>
               </a:ext>
             </a:extLst>
           </p:cNvPr>
@@ -5209,7 +5362,7 @@
           <p:cNvPr id="12" name="">
             <a:extLst xmlns:a="http://schemas.openxmlformats.org/drawingml/2006/main">
               <a:ext uri="{FF2B5EF4-FFF2-40B4-BE49-F238E27FC236}">
-                <a16:creationId xmlns:a16="http://schemas.microsoft.com/office/drawing/2014/main" id="{A9DFF5A5-A5D4-46D9-86AC-5C0466FD4733}"/>
+                <a16:creationId xmlns:a16="http://schemas.microsoft.com/office/drawing/2014/main" id="{95EABD82-ECF3-4F7A-9567-36063A3F0AA0}"/>
               </a:ext>
             </a:extLst>
           </p:cNvPr>
@@ -5295,7 +5448,7 @@
     </p:spTree>
     <p:extLst>
       <p:ext uri="{BB962C8B-B14F-4D97-AF65-F5344CB8AC3E}">
-        <p14:creationId xmlns:p14="http://schemas.microsoft.com/office/powerpoint/2010/main" val="1277179253"/>
+        <p14:creationId xmlns:p14="http://schemas.microsoft.com/office/powerpoint/2010/main" val="1404919146"/>
       </p:ext>
     </p:extLst>
   </p:cSld>
@@ -5326,7 +5479,7 @@
           <p:cNvPr id="9" name="">
             <a:extLst xmlns:a="http://schemas.openxmlformats.org/drawingml/2006/main">
               <a:ext uri="{FF2B5EF4-FFF2-40B4-BE49-F238E27FC236}">
-                <a16:creationId xmlns:a16="http://schemas.microsoft.com/office/drawing/2014/main" id="{4B01B305-F2E8-41BE-802A-29998389A753}"/>
+                <a16:creationId xmlns:a16="http://schemas.microsoft.com/office/drawing/2014/main" id="{60B12E10-902A-4D94-B2BB-65ED70346A15}"/>
               </a:ext>
             </a:extLst>
           </p:cNvPr>
@@ -5383,7 +5536,7 @@
           <p:cNvPr id="2" name="">
             <a:extLst xmlns:a="http://schemas.openxmlformats.org/drawingml/2006/main">
               <a:ext uri="{FF2B5EF4-FFF2-40B4-BE49-F238E27FC236}">
-                <a16:creationId xmlns:a16="http://schemas.microsoft.com/office/drawing/2014/main" id="{1B486D4F-38F2-4246-BCB9-53B88E3CBC1D}"/>
+                <a16:creationId xmlns:a16="http://schemas.microsoft.com/office/drawing/2014/main" id="{A40FA92F-E999-4C58-A209-8FBD24C44791}"/>
               </a:ext>
             </a:extLst>
           </p:cNvPr>
@@ -5440,7 +5593,7 @@
           <p:cNvPr id="3" name="">
             <a:extLst xmlns:a="http://schemas.openxmlformats.org/drawingml/2006/main">
               <a:ext uri="{FF2B5EF4-FFF2-40B4-BE49-F238E27FC236}">
-                <a16:creationId xmlns:a16="http://schemas.microsoft.com/office/drawing/2014/main" id="{9B70EE77-3414-4B8A-B95B-51B19F400493}"/>
+                <a16:creationId xmlns:a16="http://schemas.microsoft.com/office/drawing/2014/main" id="{300F3AB6-3108-45FA-950A-23C58CE48E50}"/>
               </a:ext>
             </a:extLst>
           </p:cNvPr>
@@ -5497,7 +5650,7 @@
           <p:cNvPr id="4" name="">
             <a:extLst xmlns:a="http://schemas.openxmlformats.org/drawingml/2006/main">
               <a:ext uri="{FF2B5EF4-FFF2-40B4-BE49-F238E27FC236}">
-                <a16:creationId xmlns:a16="http://schemas.microsoft.com/office/drawing/2014/main" id="{CE94F1DE-FFAE-4D8D-AD86-705912AD30B9}"/>
+                <a16:creationId xmlns:a16="http://schemas.microsoft.com/office/drawing/2014/main" id="{A8F124F3-8051-4078-9915-471577AA7018}"/>
               </a:ext>
             </a:extLst>
           </p:cNvPr>
@@ -5741,7 +5894,7 @@
           <p:cNvPr id="6" name="">
             <a:extLst xmlns:a="http://schemas.openxmlformats.org/drawingml/2006/main">
               <a:ext uri="{FF2B5EF4-FFF2-40B4-BE49-F238E27FC236}">
-                <a16:creationId xmlns:a16="http://schemas.microsoft.com/office/drawing/2014/main" id="{8D5BA349-FFE1-4465-A59D-43BCFEC24A2E}"/>
+                <a16:creationId xmlns:a16="http://schemas.microsoft.com/office/drawing/2014/main" id="{B7054A0A-3161-4CAB-B661-402DE7205CBA}"/>
               </a:ext>
             </a:extLst>
           </p:cNvPr>
@@ -5798,7 +5951,7 @@
           <p:cNvPr id="7" name="">
             <a:extLst xmlns:a="http://schemas.openxmlformats.org/drawingml/2006/main">
               <a:ext uri="{FF2B5EF4-FFF2-40B4-BE49-F238E27FC236}">
-                <a16:creationId xmlns:a16="http://schemas.microsoft.com/office/drawing/2014/main" id="{EC4E6BF0-26E9-49F0-84DC-FA494DCE33B9}"/>
+                <a16:creationId xmlns:a16="http://schemas.microsoft.com/office/drawing/2014/main" id="{15ABC40D-995E-4FC5-BFD9-D9528999ABBF}"/>
               </a:ext>
             </a:extLst>
           </p:cNvPr>
@@ -5886,7 +6039,7 @@
           <p:cNvPr id="8" name="">
             <a:extLst xmlns:a="http://schemas.openxmlformats.org/drawingml/2006/main">
               <a:ext uri="{FF2B5EF4-FFF2-40B4-BE49-F238E27FC236}">
-                <a16:creationId xmlns:a16="http://schemas.microsoft.com/office/drawing/2014/main" id="{5EE7B87D-B935-4237-BEE1-EC5F3572BF8E}"/>
+                <a16:creationId xmlns:a16="http://schemas.microsoft.com/office/drawing/2014/main" id="{FAACC592-0E71-473E-822D-D24BCAE3B592}"/>
               </a:ext>
             </a:extLst>
           </p:cNvPr>
@@ -5941,7 +6094,7 @@
     </p:spTree>
     <p:extLst>
       <p:ext uri="{BB962C8B-B14F-4D97-AF65-F5344CB8AC3E}">
-        <p14:creationId xmlns:p14="http://schemas.microsoft.com/office/powerpoint/2010/main" val="933223053"/>
+        <p14:creationId xmlns:p14="http://schemas.microsoft.com/office/powerpoint/2010/main" val="1755082383"/>
       </p:ext>
     </p:extLst>
   </p:cSld>
@@ -5972,7 +6125,7 @@
           <p:cNvPr id="7" name="">
             <a:extLst xmlns:a="http://schemas.openxmlformats.org/drawingml/2006/main">
               <a:ext uri="{FF2B5EF4-FFF2-40B4-BE49-F238E27FC236}">
-                <a16:creationId xmlns:a16="http://schemas.microsoft.com/office/drawing/2014/main" id="{5E5257DB-6D79-44B8-ADB0-C0CE130707DF}"/>
+                <a16:creationId xmlns:a16="http://schemas.microsoft.com/office/drawing/2014/main" id="{07F5E51B-B22F-44C3-BC86-7BC785A25EA0}"/>
               </a:ext>
             </a:extLst>
           </p:cNvPr>
@@ -6029,7 +6182,7 @@
           <p:cNvPr id="2" name="">
             <a:extLst xmlns:a="http://schemas.openxmlformats.org/drawingml/2006/main">
               <a:ext uri="{FF2B5EF4-FFF2-40B4-BE49-F238E27FC236}">
-                <a16:creationId xmlns:a16="http://schemas.microsoft.com/office/drawing/2014/main" id="{CE9A73B0-679C-4EE3-A7A5-71A47D6015DB}"/>
+                <a16:creationId xmlns:a16="http://schemas.microsoft.com/office/drawing/2014/main" id="{94B8D860-6894-48DD-B17B-CF12F732AB1B}"/>
               </a:ext>
             </a:extLst>
           </p:cNvPr>
@@ -6086,7 +6239,7 @@
           <p:cNvPr id="3" name="">
             <a:extLst xmlns:a="http://schemas.openxmlformats.org/drawingml/2006/main">
               <a:ext uri="{FF2B5EF4-FFF2-40B4-BE49-F238E27FC236}">
-                <a16:creationId xmlns:a16="http://schemas.microsoft.com/office/drawing/2014/main" id="{EA353D05-52B1-4C24-BA8E-8F3E33D3BB76}"/>
+                <a16:creationId xmlns:a16="http://schemas.microsoft.com/office/drawing/2014/main" id="{C7A32D45-DA0E-44FF-8331-5CAEBCC31B48}"/>
               </a:ext>
             </a:extLst>
           </p:cNvPr>
@@ -6143,7 +6296,7 @@
           <p:cNvPr id="4" name="">
             <a:extLst xmlns:a="http://schemas.openxmlformats.org/drawingml/2006/main">
               <a:ext uri="{FF2B5EF4-FFF2-40B4-BE49-F238E27FC236}">
-                <a16:creationId xmlns:a16="http://schemas.microsoft.com/office/drawing/2014/main" id="{8CD3BC87-D132-4A57-B566-A263EA402437}"/>
+                <a16:creationId xmlns:a16="http://schemas.microsoft.com/office/drawing/2014/main" id="{F600F02C-70C9-45DA-B2CB-99A401E30690}"/>
               </a:ext>
             </a:extLst>
           </p:cNvPr>
@@ -6442,7 +6595,7 @@
           <p:cNvPr id="6" name="">
             <a:extLst xmlns:a="http://schemas.openxmlformats.org/drawingml/2006/main">
               <a:ext uri="{FF2B5EF4-FFF2-40B4-BE49-F238E27FC236}">
-                <a16:creationId xmlns:a16="http://schemas.microsoft.com/office/drawing/2014/main" id="{E20F8D19-D00F-48DF-8409-46897678A98C}"/>
+                <a16:creationId xmlns:a16="http://schemas.microsoft.com/office/drawing/2014/main" id="{A15CA0AB-FB60-4A4E-80B5-9394EBBA57A3}"/>
               </a:ext>
             </a:extLst>
           </p:cNvPr>
@@ -6528,7 +6681,7 @@
     </p:spTree>
     <p:extLst>
       <p:ext uri="{BB962C8B-B14F-4D97-AF65-F5344CB8AC3E}">
-        <p14:creationId xmlns:p14="http://schemas.microsoft.com/office/powerpoint/2010/main" val="844225268"/>
+        <p14:creationId xmlns:p14="http://schemas.microsoft.com/office/powerpoint/2010/main" val="2073885485"/>
       </p:ext>
     </p:extLst>
   </p:cSld>
@@ -6559,7 +6712,7 @@
           <p:cNvPr id="6" name="">
             <a:extLst xmlns:a="http://schemas.openxmlformats.org/drawingml/2006/main">
               <a:ext uri="{FF2B5EF4-FFF2-40B4-BE49-F238E27FC236}">
-                <a16:creationId xmlns:a16="http://schemas.microsoft.com/office/drawing/2014/main" id="{2475668C-DB65-4692-A0D0-41C02CDE662D}"/>
+                <a16:creationId xmlns:a16="http://schemas.microsoft.com/office/drawing/2014/main" id="{A4F4E59F-202D-453A-A030-C87C175ED9D0}"/>
               </a:ext>
             </a:extLst>
           </p:cNvPr>
@@ -6606,7 +6759,7 @@
                 <a:ea typeface="Arial"/>
                 <a:cs typeface="Arial"/>
               </a:rPr>
-              <a:t>Testing the proposed use in ambiguous biopsies</a:t>
+              <a:t>Possible next steps</a:t>
             </a:r>
           </a:p>
         </p:txBody>
@@ -6616,7 +6769,7 @@
           <p:cNvPr id="2" name="">
             <a:extLst xmlns:a="http://schemas.openxmlformats.org/drawingml/2006/main">
               <a:ext uri="{FF2B5EF4-FFF2-40B4-BE49-F238E27FC236}">
-                <a16:creationId xmlns:a16="http://schemas.microsoft.com/office/drawing/2014/main" id="{B36BA0C0-7E3B-4034-9B51-8D5015735D32}"/>
+                <a16:creationId xmlns:a16="http://schemas.microsoft.com/office/drawing/2014/main" id="{FDDF993B-8CDC-4ED6-B14C-F738651D3F51}"/>
               </a:ext>
             </a:extLst>
           </p:cNvPr>
@@ -6663,7 +6816,7 @@
                 <a:ea typeface="Arial"/>
                 <a:cs typeface="Arial"/>
               </a:rPr>
-              <a:t>Sources: project research context; primary analysis; Banff work plan (2024). Proposed evaluation.</a:t>
+              <a:t>Sources: project results and research context. Hypothetical extensions.</a:t>
             </a:r>
           </a:p>
         </p:txBody>
@@ -6673,7 +6826,7 @@
           <p:cNvPr id="3" name="">
             <a:extLst xmlns:a="http://schemas.openxmlformats.org/drawingml/2006/main">
               <a:ext uri="{FF2B5EF4-FFF2-40B4-BE49-F238E27FC236}">
-                <a16:creationId xmlns:a16="http://schemas.microsoft.com/office/drawing/2014/main" id="{838AC7F4-3E36-4E59-9709-5DDD91AE5E22}"/>
+                <a16:creationId xmlns:a16="http://schemas.microsoft.com/office/drawing/2014/main" id="{37B6BE33-4A8D-4E3B-9333-E60D6857CC35}"/>
               </a:ext>
             </a:extLst>
           </p:cNvPr>
@@ -6730,7 +6883,7 @@
           <p:cNvPr id="4" name="">
             <a:extLst xmlns:a="http://schemas.openxmlformats.org/drawingml/2006/main">
               <a:ext uri="{FF2B5EF4-FFF2-40B4-BE49-F238E27FC236}">
-                <a16:creationId xmlns:a16="http://schemas.microsoft.com/office/drawing/2014/main" id="{67233FF5-93C0-4DB6-9253-5CB39A8BE121}"/>
+                <a16:creationId xmlns:a16="http://schemas.microsoft.com/office/drawing/2014/main" id="{E35144E4-F508-4F88-9DC8-6523273B8367}"/>
               </a:ext>
             </a:extLst>
           </p:cNvPr>
@@ -6741,8 +6894,8 @@
         </p:nvSpPr>
         <p:spPr>
           <a:xfrm xmlns:a="http://schemas.openxmlformats.org/drawingml/2006/main">
-            <a:off x="609600" y="1590675"/>
-            <a:ext cx="10972800" cy="809625"/>
+            <a:off x="609600" y="1600200"/>
+            <a:ext cx="10972800" cy="647700"/>
           </a:xfrm>
           <a:prstGeom xmlns:a="http://schemas.openxmlformats.org/drawingml/2006/main" prst="rect">
             <a:avLst/>
@@ -6753,19 +6906,15 @@
           </a:ln>
         </p:spPr>
         <p:txBody>
-          <a:bodyPr xmlns:a="http://schemas.openxmlformats.org/drawingml/2006/main" anchor="t">
+          <a:bodyPr xmlns:a="http://schemas.openxmlformats.org/drawingml/2006/main" anchor="ctr">
             <a:noAutofit/>
           </a:bodyPr>
           <a:lstStyle xmlns:a="http://schemas.openxmlformats.org/drawingml/2006/main"/>
           <a:p xmlns:a="http://schemas.openxmlformats.org/drawingml/2006/main">
-            <a:pPr marL="279400" indent="-152400" algn="l">
-              <a:spcAft>
-                <a:spcPts val="1200"/>
-              </a:spcAft>
-              <a:buChar char="•"/>
+            <a:pPr algn="l">
               <a:defRPr sz="2400" b="0">
                 <a:solidFill>
-                  <a:srgbClr val="16343E"/>
+                  <a:srgbClr val="007C78"/>
                 </a:solidFill>
                 <a:latin typeface="Arial"/>
                 <a:ea typeface="Arial"/>
@@ -6775,13 +6924,13 @@
             <a:r>
               <a:rPr sz="2400" b="0">
                 <a:solidFill>
-                  <a:srgbClr val="16343E"/>
-                </a:solidFill>
-                <a:latin typeface="Arial"/>
-                <a:ea typeface="Arial"/>
-                <a:cs typeface="Arial"/>
-              </a:rPr>
-              <a:t>This project establishes classification performance in one deposited study.</a:t>
+                  <a:srgbClr val="007C78"/>
+                </a:solidFill>
+                <a:latin typeface="Arial"/>
+                <a:ea typeface="Arial"/>
+                <a:cs typeface="Arial"/>
+              </a:rPr>
+              <a:t>Ideas for extending this personal project</a:t>
             </a:r>
           </a:p>
         </p:txBody>
@@ -6793,8 +6942,8 @@
           <p:nvPr/>
         </p:nvGraphicFramePr>
         <p:xfrm>
-          <a:off xmlns:a="http://schemas.openxmlformats.org/drawingml/2006/main" x="609600" y="2571750"/>
-          <a:ext xmlns:a="http://schemas.openxmlformats.org/drawingml/2006/main" cx="10972800" cy="3048000"/>
+          <a:off xmlns:a="http://schemas.openxmlformats.org/drawingml/2006/main" x="609600" y="2486025"/>
+          <a:ext xmlns:a="http://schemas.openxmlformats.org/drawingml/2006/main" cx="10972800" cy="3333750"/>
         </p:xfrm>
         <a:graphic xmlns:a="http://schemas.openxmlformats.org/drawingml/2006/main">
           <a:graphicData uri="http://schemas.openxmlformats.org/drawingml/2006/table">
@@ -6847,7 +6996,7 @@
                           <a:ea typeface="Arial"/>
                           <a:cs typeface="Arial"/>
                         </a:rPr>
-                        <a:t>Proposed evaluation</a:t>
+                        <a:t>Possible approach</a:t>
                       </a:r>
                     </a:p>
                   </a:txBody>
@@ -6858,7 +7007,7 @@
                   </a:tcPr>
                 </a:tc>
               </a:tr>
-              <a:tr h="1333500">
+              <a:tr h="1409700">
                 <a:tc>
                   <a:txBody>
                     <a:bodyPr>
@@ -6875,7 +7024,7 @@
                           <a:ea typeface="Arial"/>
                           <a:cs typeface="Arial"/>
                         </a:rPr>
-                        <a:t>Does performance hold in a new study?</a:t>
+                        <a:t>Would the results hold in another dataset?</a:t>
                       </a:r>
                     </a:p>
                   </a:txBody>
@@ -6901,7 +7050,7 @@
                           <a:ea typeface="Arial"/>
                           <a:cs typeface="Arial"/>
                         </a:rPr>
-                        <a:t>New transplant biopsies with patient and center IDs and lab quality records.</a:t>
+                        <a:t>Test the saved models and thresholds on new transplant biopsies.</a:t>
                       </a:r>
                     </a:p>
                     <a:p>
@@ -6914,7 +7063,7 @@
                           <a:ea typeface="Arial"/>
                           <a:cs typeface="Arial"/>
                         </a:rPr>
-                        <a:t>Use the chosen models and thresholds.</a:t>
+                        <a:t>Record patient, center and lab quality information.</a:t>
                       </a:r>
                     </a:p>
                   </a:txBody>
@@ -6925,7 +7074,7 @@
                   </a:tcPr>
                 </a:tc>
               </a:tr>
-              <a:tr h="1200150">
+              <a:tr h="1409700">
                 <a:tc>
                   <a:txBody>
                     <a:bodyPr>
@@ -6942,7 +7091,7 @@
                           <a:ea typeface="Arial"/>
                           <a:cs typeface="Arial"/>
                         </a:rPr>
-                        <a:t>Does the score help with ambiguous biopsies?</a:t>
+                        <a:t>Would RNA help with uncertain biopsies?</a:t>
                       </a:r>
                     </a:p>
                   </a:txBody>
@@ -6968,7 +7117,7 @@
                           <a:ea typeface="Arial"/>
                           <a:cs typeface="Arial"/>
                         </a:rPr>
-                        <a:t>Compare usual assessment with and without the molecular score.</a:t>
+                        <a:t>With clinical collaborators, compare assessment with and without the RNA score.</a:t>
                       </a:r>
                     </a:p>
                     <a:p>
@@ -6981,7 +7130,7 @@
                           <a:ea typeface="Arial"/>
                           <a:cs typeface="Arial"/>
                         </a:rPr>
-                        <a:t>Use independent review and follow-up outcomes.</a:t>
+                        <a:t>Review decisions and follow-up outcomes.</a:t>
                       </a:r>
                     </a:p>
                   </a:txBody>
@@ -6999,7 +7148,7 @@
     </p:spTree>
     <p:extLst>
       <p:ext uri="{BB962C8B-B14F-4D97-AF65-F5344CB8AC3E}">
-        <p14:creationId xmlns:p14="http://schemas.microsoft.com/office/powerpoint/2010/main" val="2116705782"/>
+        <p14:creationId xmlns:p14="http://schemas.microsoft.com/office/powerpoint/2010/main" val="276349190"/>
       </p:ext>
     </p:extLst>
   </p:cSld>
@@ -7027,10 +7176,10 @@
       </p:grpSpPr>
       <p:sp>
         <p:nvSpPr>
-          <p:cNvPr id="7" name="">
+          <p:cNvPr id="14" name="">
             <a:extLst xmlns:a="http://schemas.openxmlformats.org/drawingml/2006/main">
               <a:ext uri="{FF2B5EF4-FFF2-40B4-BE49-F238E27FC236}">
-                <a16:creationId xmlns:a16="http://schemas.microsoft.com/office/drawing/2014/main" id="{FEE2714F-C655-4940-9BFB-75345AB5C814}"/>
+                <a16:creationId xmlns:a16="http://schemas.microsoft.com/office/drawing/2014/main" id="{A827F13D-E296-487E-BC3D-BEC1C5FEF432}"/>
               </a:ext>
             </a:extLst>
           </p:cNvPr>
@@ -7077,7 +7226,7 @@
                 <a:ea typeface="Arial"/>
                 <a:cs typeface="Arial"/>
               </a:rPr>
-              <a:t>Molecular counts can classify recorded rejection</a:t>
+              <a:t>What this project accomplished</a:t>
             </a:r>
           </a:p>
         </p:txBody>
@@ -7087,7 +7236,7 @@
           <p:cNvPr id="2" name="">
             <a:extLst xmlns:a="http://schemas.openxmlformats.org/drawingml/2006/main">
               <a:ext uri="{FF2B5EF4-FFF2-40B4-BE49-F238E27FC236}">
-                <a16:creationId xmlns:a16="http://schemas.microsoft.com/office/drawing/2014/main" id="{4F3D158F-3C06-434E-BB3A-521F6341E23B}"/>
+                <a16:creationId xmlns:a16="http://schemas.microsoft.com/office/drawing/2014/main" id="{1384811A-BC5B-4994-B1FB-840C52CEB48F}"/>
               </a:ext>
             </a:extLst>
           </p:cNvPr>
@@ -7144,7 +7293,7 @@
           <p:cNvPr id="3" name="">
             <a:extLst xmlns:a="http://schemas.openxmlformats.org/drawingml/2006/main">
               <a:ext uri="{FF2B5EF4-FFF2-40B4-BE49-F238E27FC236}">
-                <a16:creationId xmlns:a16="http://schemas.microsoft.com/office/drawing/2014/main" id="{E98FB051-C36F-48E2-959C-1D3B2B17668A}"/>
+                <a16:creationId xmlns:a16="http://schemas.microsoft.com/office/drawing/2014/main" id="{48A84633-E373-4173-B48C-6EDC81AC86E7}"/>
               </a:ext>
             </a:extLst>
           </p:cNvPr>
@@ -7201,7 +7350,7 @@
           <p:cNvPr id="4" name="">
             <a:extLst xmlns:a="http://schemas.openxmlformats.org/drawingml/2006/main">
               <a:ext uri="{FF2B5EF4-FFF2-40B4-BE49-F238E27FC236}">
-                <a16:creationId xmlns:a16="http://schemas.microsoft.com/office/drawing/2014/main" id="{DA8B6391-D3E1-4A78-95B0-14E6A65864A3}"/>
+                <a16:creationId xmlns:a16="http://schemas.microsoft.com/office/drawing/2014/main" id="{3CA30DF5-DED2-491F-9227-8927EF66229C}"/>
               </a:ext>
             </a:extLst>
           </p:cNvPr>
@@ -7212,7 +7361,7 @@
         </p:nvSpPr>
         <p:spPr>
           <a:xfrm xmlns:a="http://schemas.openxmlformats.org/drawingml/2006/main">
-            <a:off x="609600" y="1628775"/>
+            <a:off x="609600" y="1533525"/>
             <a:ext cx="10972800" cy="409575"/>
           </a:xfrm>
           <a:prstGeom xmlns:a="http://schemas.openxmlformats.org/drawingml/2006/main" prst="rect">
@@ -7230,7 +7379,7 @@
           <a:lstStyle xmlns:a="http://schemas.openxmlformats.org/drawingml/2006/main"/>
           <a:p xmlns:a="http://schemas.openxmlformats.org/drawingml/2006/main">
             <a:pPr algn="l">
-              <a:defRPr sz="2325" b="0">
+              <a:defRPr sz="2400" b="1">
                 <a:solidFill>
                   <a:srgbClr val="FFFFFF"/>
                 </a:solidFill>
@@ -7240,7 +7389,7 @@
               </a:defRPr>
             </a:pPr>
             <a:r>
-              <a:rPr sz="2325" b="0">
+              <a:rPr sz="2400" b="1">
                 <a:solidFill>
                   <a:srgbClr val="FFFFFF"/>
                 </a:solidFill>
@@ -7248,7 +7397,7 @@
                 <a:ea typeface="Arial"/>
                 <a:cs typeface="Arial"/>
               </a:rPr>
-              <a:t>CatBoost, 345 evaluation specimens</a:t>
+              <a:t>Model comparison</a:t>
             </a:r>
           </a:p>
         </p:txBody>
@@ -7258,7 +7407,7 @@
           <p:cNvPr id="5" name="">
             <a:extLst xmlns:a="http://schemas.openxmlformats.org/drawingml/2006/main">
               <a:ext uri="{FF2B5EF4-FFF2-40B4-BE49-F238E27FC236}">
-                <a16:creationId xmlns:a16="http://schemas.microsoft.com/office/drawing/2014/main" id="{DA3A90B5-EBA9-464B-B7F7-E552A905F3CE}"/>
+                <a16:creationId xmlns:a16="http://schemas.microsoft.com/office/drawing/2014/main" id="{CCD479A6-5E91-4058-8A49-88481CE0D1F3}"/>
               </a:ext>
             </a:extLst>
           </p:cNvPr>
@@ -7269,8 +7418,8 @@
         </p:nvSpPr>
         <p:spPr>
           <a:xfrm xmlns:a="http://schemas.openxmlformats.org/drawingml/2006/main">
-            <a:off x="609600" y="2085975"/>
-            <a:ext cx="10972800" cy="800100"/>
+            <a:off x="609600" y="1971675"/>
+            <a:ext cx="10972800" cy="381000"/>
           </a:xfrm>
           <a:prstGeom xmlns:a="http://schemas.openxmlformats.org/drawingml/2006/main" prst="rect">
             <a:avLst/>
@@ -7287,7 +7436,7 @@
           <a:lstStyle xmlns:a="http://schemas.openxmlformats.org/drawingml/2006/main"/>
           <a:p xmlns:a="http://schemas.openxmlformats.org/drawingml/2006/main">
             <a:pPr algn="l">
-              <a:defRPr sz="4200" b="1">
+              <a:defRPr sz="2100" b="0">
                 <a:solidFill>
                   <a:srgbClr val="FFFFFF"/>
                 </a:solidFill>
@@ -7297,7 +7446,7 @@
               </a:defRPr>
             </a:pPr>
             <a:r>
-              <a:rPr sz="4200" b="1">
+              <a:rPr sz="2100" b="0">
                 <a:solidFill>
                   <a:srgbClr val="FFFFFF"/>
                 </a:solidFill>
@@ -7305,7 +7454,7 @@
                 <a:ea typeface="Arial"/>
                 <a:cs typeface="Arial"/>
               </a:rPr>
-              <a:t>25 / 169 misses. 8 / 176 false flags.</a:t>
+              <a:t>CatBoost, 345 evaluation specimens</a:t>
             </a:r>
           </a:p>
         </p:txBody>
@@ -7315,7 +7464,7 @@
           <p:cNvPr id="6" name="">
             <a:extLst xmlns:a="http://schemas.openxmlformats.org/drawingml/2006/main">
               <a:ext uri="{FF2B5EF4-FFF2-40B4-BE49-F238E27FC236}">
-                <a16:creationId xmlns:a16="http://schemas.microsoft.com/office/drawing/2014/main" id="{AB0CB923-9247-45C2-ADC7-AFC0737D3EC8}"/>
+                <a16:creationId xmlns:a16="http://schemas.microsoft.com/office/drawing/2014/main" id="{0B4058D1-3828-49FA-916D-A0509C1C2482}"/>
               </a:ext>
             </a:extLst>
           </p:cNvPr>
@@ -7326,8 +7475,402 @@
         </p:nvSpPr>
         <p:spPr>
           <a:xfrm xmlns:a="http://schemas.openxmlformats.org/drawingml/2006/main">
-            <a:off x="609600" y="3381375"/>
-            <a:ext cx="10972800" cy="2428875"/>
+            <a:off x="609600" y="2390775"/>
+            <a:ext cx="5162550" cy="590550"/>
+          </a:xfrm>
+          <a:prstGeom xmlns:a="http://schemas.openxmlformats.org/drawingml/2006/main" prst="rect">
+            <a:avLst/>
+          </a:prstGeom>
+          <a:noFill xmlns:a="http://schemas.openxmlformats.org/drawingml/2006/main"/>
+          <a:ln xmlns:a="http://schemas.openxmlformats.org/drawingml/2006/main" w="0">
+            <a:noFill/>
+          </a:ln>
+        </p:spPr>
+        <p:txBody>
+          <a:bodyPr xmlns:a="http://schemas.openxmlformats.org/drawingml/2006/main" anchor="ctr">
+            <a:noAutofit/>
+          </a:bodyPr>
+          <a:lstStyle xmlns:a="http://schemas.openxmlformats.org/drawingml/2006/main"/>
+          <a:p xmlns:a="http://schemas.openxmlformats.org/drawingml/2006/main">
+            <a:pPr algn="l">
+              <a:defRPr sz="3525" b="1">
+                <a:solidFill>
+                  <a:srgbClr val="FFFFFF"/>
+                </a:solidFill>
+                <a:latin typeface="Arial"/>
+                <a:ea typeface="Arial"/>
+                <a:cs typeface="Arial"/>
+              </a:defRPr>
+            </a:pPr>
+            <a:r>
+              <a:rPr sz="3525" b="1">
+                <a:solidFill>
+                  <a:srgbClr val="FFFFFF"/>
+                </a:solidFill>
+                <a:latin typeface="Arial"/>
+                <a:ea typeface="Arial"/>
+                <a:cs typeface="Arial"/>
+              </a:rPr>
+              <a:t>14.8% missed</a:t>
+            </a:r>
+          </a:p>
+        </p:txBody>
+      </p:sp>
+      <p:sp>
+        <p:nvSpPr>
+          <p:cNvPr id="7" name="">
+            <a:extLst xmlns:a="http://schemas.openxmlformats.org/drawingml/2006/main">
+              <a:ext uri="{FF2B5EF4-FFF2-40B4-BE49-F238E27FC236}">
+                <a16:creationId xmlns:a16="http://schemas.microsoft.com/office/drawing/2014/main" id="{B145E8F5-53D5-4E6F-9760-A59DF66AB278}"/>
+              </a:ext>
+            </a:extLst>
+          </p:cNvPr>
+          <p:cNvSpPr>
+            <a:spLocks xmlns:a="http://schemas.openxmlformats.org/drawingml/2006/main" noGrp="1"/>
+          </p:cNvSpPr>
+          <p:nvPr/>
+        </p:nvSpPr>
+        <p:spPr>
+          <a:xfrm xmlns:a="http://schemas.openxmlformats.org/drawingml/2006/main">
+            <a:off x="6343650" y="2390775"/>
+            <a:ext cx="5238750" cy="590550"/>
+          </a:xfrm>
+          <a:prstGeom xmlns:a="http://schemas.openxmlformats.org/drawingml/2006/main" prst="rect">
+            <a:avLst/>
+          </a:prstGeom>
+          <a:noFill xmlns:a="http://schemas.openxmlformats.org/drawingml/2006/main"/>
+          <a:ln xmlns:a="http://schemas.openxmlformats.org/drawingml/2006/main" w="0">
+            <a:noFill/>
+          </a:ln>
+        </p:spPr>
+        <p:txBody>
+          <a:bodyPr xmlns:a="http://schemas.openxmlformats.org/drawingml/2006/main" anchor="ctr">
+            <a:noAutofit/>
+          </a:bodyPr>
+          <a:lstStyle xmlns:a="http://schemas.openxmlformats.org/drawingml/2006/main"/>
+          <a:p xmlns:a="http://schemas.openxmlformats.org/drawingml/2006/main">
+            <a:pPr algn="l">
+              <a:defRPr sz="3525" b="1">
+                <a:solidFill>
+                  <a:srgbClr val="FFFFFF"/>
+                </a:solidFill>
+                <a:latin typeface="Arial"/>
+                <a:ea typeface="Arial"/>
+                <a:cs typeface="Arial"/>
+              </a:defRPr>
+            </a:pPr>
+            <a:r>
+              <a:rPr sz="3525" b="1">
+                <a:solidFill>
+                  <a:srgbClr val="FFFFFF"/>
+                </a:solidFill>
+                <a:latin typeface="Arial"/>
+                <a:ea typeface="Arial"/>
+                <a:cs typeface="Arial"/>
+              </a:rPr>
+              <a:t>4.5% false flags</a:t>
+            </a:r>
+          </a:p>
+        </p:txBody>
+      </p:sp>
+      <p:sp>
+        <p:nvSpPr>
+          <p:cNvPr id="8" name="">
+            <a:extLst xmlns:a="http://schemas.openxmlformats.org/drawingml/2006/main">
+              <a:ext uri="{FF2B5EF4-FFF2-40B4-BE49-F238E27FC236}">
+                <a16:creationId xmlns:a16="http://schemas.microsoft.com/office/drawing/2014/main" id="{67571658-5BD9-487A-9E6C-8661BE54E4FB}"/>
+              </a:ext>
+            </a:extLst>
+          </p:cNvPr>
+          <p:cNvSpPr>
+            <a:spLocks xmlns:a="http://schemas.openxmlformats.org/drawingml/2006/main" noGrp="1"/>
+          </p:cNvSpPr>
+          <p:nvPr/>
+        </p:nvSpPr>
+        <p:spPr>
+          <a:xfrm xmlns:a="http://schemas.openxmlformats.org/drawingml/2006/main">
+            <a:off x="609600" y="3048000"/>
+            <a:ext cx="5162550" cy="400050"/>
+          </a:xfrm>
+          <a:prstGeom xmlns:a="http://schemas.openxmlformats.org/drawingml/2006/main" prst="rect">
+            <a:avLst/>
+          </a:prstGeom>
+          <a:noFill xmlns:a="http://schemas.openxmlformats.org/drawingml/2006/main"/>
+          <a:ln xmlns:a="http://schemas.openxmlformats.org/drawingml/2006/main" w="0">
+            <a:noFill/>
+          </a:ln>
+        </p:spPr>
+        <p:txBody>
+          <a:bodyPr xmlns:a="http://schemas.openxmlformats.org/drawingml/2006/main" anchor="ctr">
+            <a:noAutofit/>
+          </a:bodyPr>
+          <a:lstStyle xmlns:a="http://schemas.openxmlformats.org/drawingml/2006/main"/>
+          <a:p xmlns:a="http://schemas.openxmlformats.org/drawingml/2006/main">
+            <a:pPr algn="l">
+              <a:defRPr sz="1875" b="0">
+                <a:solidFill>
+                  <a:srgbClr val="FFFFFF"/>
+                </a:solidFill>
+                <a:latin typeface="Arial"/>
+                <a:ea typeface="Arial"/>
+                <a:cs typeface="Arial"/>
+              </a:defRPr>
+            </a:pPr>
+            <a:r>
+              <a:rPr sz="1875" b="0">
+                <a:solidFill>
+                  <a:srgbClr val="FFFFFF"/>
+                </a:solidFill>
+                <a:latin typeface="Arial"/>
+                <a:ea typeface="Arial"/>
+                <a:cs typeface="Arial"/>
+              </a:rPr>
+              <a:t>25 of 169 recorded rejection specimens</a:t>
+            </a:r>
+          </a:p>
+        </p:txBody>
+      </p:sp>
+      <p:sp>
+        <p:nvSpPr>
+          <p:cNvPr id="9" name="">
+            <a:extLst xmlns:a="http://schemas.openxmlformats.org/drawingml/2006/main">
+              <a:ext uri="{FF2B5EF4-FFF2-40B4-BE49-F238E27FC236}">
+                <a16:creationId xmlns:a16="http://schemas.microsoft.com/office/drawing/2014/main" id="{A0E739F1-1484-4F98-BD00-C3599D74D9CE}"/>
+              </a:ext>
+            </a:extLst>
+          </p:cNvPr>
+          <p:cNvSpPr>
+            <a:spLocks xmlns:a="http://schemas.openxmlformats.org/drawingml/2006/main" noGrp="1"/>
+          </p:cNvSpPr>
+          <p:nvPr/>
+        </p:nvSpPr>
+        <p:spPr>
+          <a:xfrm xmlns:a="http://schemas.openxmlformats.org/drawingml/2006/main">
+            <a:off x="6343650" y="3048000"/>
+            <a:ext cx="5238750" cy="400050"/>
+          </a:xfrm>
+          <a:prstGeom xmlns:a="http://schemas.openxmlformats.org/drawingml/2006/main" prst="rect">
+            <a:avLst/>
+          </a:prstGeom>
+          <a:noFill xmlns:a="http://schemas.openxmlformats.org/drawingml/2006/main"/>
+          <a:ln xmlns:a="http://schemas.openxmlformats.org/drawingml/2006/main" w="0">
+            <a:noFill/>
+          </a:ln>
+        </p:spPr>
+        <p:txBody>
+          <a:bodyPr xmlns:a="http://schemas.openxmlformats.org/drawingml/2006/main" anchor="ctr">
+            <a:noAutofit/>
+          </a:bodyPr>
+          <a:lstStyle xmlns:a="http://schemas.openxmlformats.org/drawingml/2006/main"/>
+          <a:p xmlns:a="http://schemas.openxmlformats.org/drawingml/2006/main">
+            <a:pPr algn="l">
+              <a:defRPr sz="1875" b="0">
+                <a:solidFill>
+                  <a:srgbClr val="FFFFFF"/>
+                </a:solidFill>
+                <a:latin typeface="Arial"/>
+                <a:ea typeface="Arial"/>
+                <a:cs typeface="Arial"/>
+              </a:defRPr>
+            </a:pPr>
+            <a:r>
+              <a:rPr sz="1875" b="0">
+                <a:solidFill>
+                  <a:srgbClr val="FFFFFF"/>
+                </a:solidFill>
+                <a:latin typeface="Arial"/>
+                <a:ea typeface="Arial"/>
+                <a:cs typeface="Arial"/>
+              </a:rPr>
+              <a:t>8 of 176 recorded no-rejection specimens</a:t>
+            </a:r>
+          </a:p>
+        </p:txBody>
+      </p:sp>
+      <p:sp>
+        <p:nvSpPr>
+          <p:cNvPr id="10" name="">
+            <a:extLst xmlns:a="http://schemas.openxmlformats.org/drawingml/2006/main">
+              <a:ext uri="{FF2B5EF4-FFF2-40B4-BE49-F238E27FC236}">
+                <a16:creationId xmlns:a16="http://schemas.microsoft.com/office/drawing/2014/main" id="{0A4605B1-D513-47FD-BAEF-BA3D11FDE62E}"/>
+              </a:ext>
+            </a:extLst>
+          </p:cNvPr>
+          <p:cNvSpPr>
+            <a:spLocks xmlns:a="http://schemas.openxmlformats.org/drawingml/2006/main" noGrp="1"/>
+          </p:cNvSpPr>
+          <p:nvPr/>
+        </p:nvSpPr>
+        <p:spPr>
+          <a:xfrm xmlns:a="http://schemas.openxmlformats.org/drawingml/2006/main">
+            <a:off x="609600" y="3552825"/>
+            <a:ext cx="10972800" cy="723900"/>
+          </a:xfrm>
+          <a:prstGeom xmlns:a="http://schemas.openxmlformats.org/drawingml/2006/main" prst="rect">
+            <a:avLst/>
+          </a:prstGeom>
+          <a:noFill xmlns:a="http://schemas.openxmlformats.org/drawingml/2006/main"/>
+          <a:ln xmlns:a="http://schemas.openxmlformats.org/drawingml/2006/main" w="0">
+            <a:noFill/>
+          </a:ln>
+        </p:spPr>
+        <p:txBody>
+          <a:bodyPr xmlns:a="http://schemas.openxmlformats.org/drawingml/2006/main" anchor="ctr">
+            <a:noAutofit/>
+          </a:bodyPr>
+          <a:lstStyle xmlns:a="http://schemas.openxmlformats.org/drawingml/2006/main"/>
+          <a:p xmlns:a="http://schemas.openxmlformats.org/drawingml/2006/main">
+            <a:pPr algn="l">
+              <a:defRPr sz="2175" b="0">
+                <a:solidFill>
+                  <a:srgbClr val="FFFFFF"/>
+                </a:solidFill>
+                <a:latin typeface="Arial"/>
+                <a:ea typeface="Arial"/>
+                <a:cs typeface="Arial"/>
+              </a:defRPr>
+            </a:pPr>
+            <a:r>
+              <a:rPr sz="2175" b="0">
+                <a:solidFill>
+                  <a:srgbClr val="FFFFFF"/>
+                </a:solidFill>
+                <a:latin typeface="Arial"/>
+                <a:ea typeface="Arial"/>
+                <a:cs typeface="Arial"/>
+              </a:rPr>
+              <a:t>Fewer false flags than IFNG, but more misses.</a:t>
+            </a:r>
+          </a:p>
+          <a:p xmlns:a="http://schemas.openxmlformats.org/drawingml/2006/main">
+            <a:pPr algn="l">
+              <a:defRPr sz="2175" b="0">
+                <a:solidFill>
+                  <a:srgbClr val="FFFFFF"/>
+                </a:solidFill>
+                <a:latin typeface="Arial"/>
+                <a:ea typeface="Arial"/>
+                <a:cs typeface="Arial"/>
+              </a:defRPr>
+            </a:pPr>
+            <a:r>
+              <a:rPr sz="2175" b="0">
+                <a:solidFill>
+                  <a:srgbClr val="FFFFFF"/>
+                </a:solidFill>
+                <a:latin typeface="Arial"/>
+                <a:ea typeface="Arial"/>
+                <a:cs typeface="Arial"/>
+              </a:rPr>
+              <a:t>Advantage over logistic regression remains uncertain.</a:t>
+            </a:r>
+          </a:p>
+        </p:txBody>
+      </p:sp>
+      <p:sp>
+        <p:nvSpPr>
+          <p:cNvPr id="11" name="">
+            <a:extLst xmlns:a="http://schemas.openxmlformats.org/drawingml/2006/main">
+              <a:ext uri="{FF2B5EF4-FFF2-40B4-BE49-F238E27FC236}">
+                <a16:creationId xmlns:a16="http://schemas.microsoft.com/office/drawing/2014/main" id="{AD4EFCD4-72FD-4DA6-A388-C9AF351A6CE8}"/>
+              </a:ext>
+            </a:extLst>
+          </p:cNvPr>
+          <p:cNvSpPr>
+            <a:spLocks xmlns:a="http://schemas.openxmlformats.org/drawingml/2006/main" noGrp="1"/>
+          </p:cNvSpPr>
+          <p:nvPr/>
+        </p:nvSpPr>
+        <p:spPr>
+          <a:xfrm xmlns:a="http://schemas.openxmlformats.org/drawingml/2006/main">
+            <a:off x="609600" y="4476750"/>
+            <a:ext cx="10972800" cy="0"/>
+          </a:xfrm>
+          <a:prstGeom xmlns:a="http://schemas.openxmlformats.org/drawingml/2006/main" prst="line">
+            <a:avLst/>
+          </a:prstGeom>
+          <a:ln xmlns:a="http://schemas.openxmlformats.org/drawingml/2006/main" w="11430">
+            <a:solidFill>
+              <a:srgbClr val="78949B"/>
+            </a:solidFill>
+          </a:ln>
+        </p:spPr>
+      </p:sp>
+      <p:sp>
+        <p:nvSpPr>
+          <p:cNvPr id="12" name="">
+            <a:extLst xmlns:a="http://schemas.openxmlformats.org/drawingml/2006/main">
+              <a:ext uri="{FF2B5EF4-FFF2-40B4-BE49-F238E27FC236}">
+                <a16:creationId xmlns:a16="http://schemas.microsoft.com/office/drawing/2014/main" id="{472D92F0-D623-4A0F-807E-C3A912200E61}"/>
+              </a:ext>
+            </a:extLst>
+          </p:cNvPr>
+          <p:cNvSpPr>
+            <a:spLocks xmlns:a="http://schemas.openxmlformats.org/drawingml/2006/main" noGrp="1"/>
+          </p:cNvSpPr>
+          <p:nvPr/>
+        </p:nvSpPr>
+        <p:spPr>
+          <a:xfrm xmlns:a="http://schemas.openxmlformats.org/drawingml/2006/main">
+            <a:off x="609600" y="4629150"/>
+            <a:ext cx="10972800" cy="409575"/>
+          </a:xfrm>
+          <a:prstGeom xmlns:a="http://schemas.openxmlformats.org/drawingml/2006/main" prst="rect">
+            <a:avLst/>
+          </a:prstGeom>
+          <a:noFill xmlns:a="http://schemas.openxmlformats.org/drawingml/2006/main"/>
+          <a:ln xmlns:a="http://schemas.openxmlformats.org/drawingml/2006/main" w="0">
+            <a:noFill/>
+          </a:ln>
+        </p:spPr>
+        <p:txBody>
+          <a:bodyPr xmlns:a="http://schemas.openxmlformats.org/drawingml/2006/main" anchor="ctr">
+            <a:noAutofit/>
+          </a:bodyPr>
+          <a:lstStyle xmlns:a="http://schemas.openxmlformats.org/drawingml/2006/main"/>
+          <a:p xmlns:a="http://schemas.openxmlformats.org/drawingml/2006/main">
+            <a:pPr algn="l">
+              <a:defRPr sz="2400" b="1">
+                <a:solidFill>
+                  <a:srgbClr val="FFFFFF"/>
+                </a:solidFill>
+                <a:latin typeface="Arial"/>
+                <a:ea typeface="Arial"/>
+                <a:cs typeface="Arial"/>
+              </a:defRPr>
+            </a:pPr>
+            <a:r>
+              <a:rPr sz="2400" b="1">
+                <a:solidFill>
+                  <a:srgbClr val="FFFFFF"/>
+                </a:solidFill>
+                <a:latin typeface="Arial"/>
+                <a:ea typeface="Arial"/>
+                <a:cs typeface="Arial"/>
+              </a:rPr>
+              <a:t>Prediction service and demo</a:t>
+            </a:r>
+          </a:p>
+        </p:txBody>
+      </p:sp>
+      <p:sp>
+        <p:nvSpPr>
+          <p:cNvPr id="13" name="">
+            <a:extLst xmlns:a="http://schemas.openxmlformats.org/drawingml/2006/main">
+              <a:ext uri="{FF2B5EF4-FFF2-40B4-BE49-F238E27FC236}">
+                <a16:creationId xmlns:a16="http://schemas.microsoft.com/office/drawing/2014/main" id="{0ABFBC1F-89BC-4FAA-9380-A59ABE375897}"/>
+              </a:ext>
+            </a:extLst>
+          </p:cNvPr>
+          <p:cNvSpPr>
+            <a:spLocks xmlns:a="http://schemas.openxmlformats.org/drawingml/2006/main" noGrp="1"/>
+          </p:cNvSpPr>
+          <p:nvPr/>
+        </p:nvSpPr>
+        <p:spPr>
+          <a:xfrm xmlns:a="http://schemas.openxmlformats.org/drawingml/2006/main">
+            <a:off x="609600" y="5181600"/>
+            <a:ext cx="10972800" cy="838200"/>
           </a:xfrm>
           <a:prstGeom xmlns:a="http://schemas.openxmlformats.org/drawingml/2006/main" prst="rect">
             <a:avLst/>
@@ -7345,10 +7888,10 @@
           <a:p xmlns:a="http://schemas.openxmlformats.org/drawingml/2006/main">
             <a:pPr marL="279400" indent="-152400" algn="l">
               <a:spcAft>
-                <a:spcPts val="2500"/>
+                <a:spcPts val="1000"/>
               </a:spcAft>
               <a:buChar char="•"/>
-              <a:defRPr sz="2550" b="0">
+              <a:defRPr sz="2175" b="0">
                 <a:solidFill>
                   <a:srgbClr val="FFFFFF"/>
                 </a:solidFill>
@@ -7358,7 +7901,7 @@
               </a:defRPr>
             </a:pPr>
             <a:r>
-              <a:rPr sz="2550" b="0">
+              <a:rPr sz="2175" b="0">
                 <a:solidFill>
                   <a:srgbClr val="FFFFFF"/>
                 </a:solidFill>
@@ -7366,16 +7909,16 @@
                 <a:ea typeface="Arial"/>
                 <a:cs typeface="Arial"/>
               </a:rPr>
-              <a:t>Logistic regression remains a credible simpler alternative.</a:t>
+              <a:t>Shared preparation code reproduced all 345 saved scores.</a:t>
             </a:r>
           </a:p>
           <a:p xmlns:a="http://schemas.openxmlformats.org/drawingml/2006/main">
             <a:pPr marL="279400" indent="-152400" algn="l">
               <a:spcAft>
-                <a:spcPts val="2500"/>
+                <a:spcPts val="1000"/>
               </a:spcAft>
               <a:buChar char="•"/>
-              <a:defRPr sz="2550" b="0">
+              <a:defRPr sz="2175" b="0">
                 <a:solidFill>
                   <a:srgbClr val="FFFFFF"/>
                 </a:solidFill>
@@ -7385,7 +7928,7 @@
               </a:defRPr>
             </a:pPr>
             <a:r>
-              <a:rPr sz="2550" b="0">
+              <a:rPr sz="2175" b="0">
                 <a:solidFill>
                   <a:srgbClr val="FFFFFF"/>
                 </a:solidFill>
@@ -7393,34 +7936,7 @@
                 <a:ea typeface="Arial"/>
                 <a:cs typeface="Arial"/>
               </a:rPr>
-              <a:t>The project provides a reproducible classifier and a tested prediction service.</a:t>
-            </a:r>
-          </a:p>
-          <a:p xmlns:a="http://schemas.openxmlformats.org/drawingml/2006/main">
-            <a:pPr marL="279400" indent="-152400" algn="l">
-              <a:spcAft>
-                <a:spcPts val="2500"/>
-              </a:spcAft>
-              <a:buChar char="•"/>
-              <a:defRPr sz="2550" b="0">
-                <a:solidFill>
-                  <a:srgbClr val="FFFFFF"/>
-                </a:solidFill>
-                <a:latin typeface="Arial"/>
-                <a:ea typeface="Arial"/>
-                <a:cs typeface="Arial"/>
-              </a:defRPr>
-            </a:pPr>
-            <a:r>
-              <a:rPr sz="2550" b="0">
-                <a:solidFill>
-                  <a:srgbClr val="FFFFFF"/>
-                </a:solidFill>
-                <a:latin typeface="Arial"/>
-                <a:ea typeface="Arial"/>
-                <a:cs typeface="Arial"/>
-              </a:rPr>
-              <a:t>Next: test added value in ambiguous biopsies in a new study.</a:t>
+              <a:t>Working demo with valid input and clear error messages.</a:t>
             </a:r>
           </a:p>
         </p:txBody>
@@ -7428,7 +7944,7 @@
     </p:spTree>
     <p:extLst>
       <p:ext uri="{BB962C8B-B14F-4D97-AF65-F5344CB8AC3E}">
-        <p14:creationId xmlns:p14="http://schemas.microsoft.com/office/powerpoint/2010/main" val="454130606"/>
+        <p14:creationId xmlns:p14="http://schemas.microsoft.com/office/powerpoint/2010/main" val="675679110"/>
       </p:ext>
     </p:extLst>
   </p:cSld>
@@ -7459,7 +7975,7 @@
           <p:cNvPr id="8" name="">
             <a:extLst xmlns:a="http://schemas.openxmlformats.org/drawingml/2006/main">
               <a:ext uri="{FF2B5EF4-FFF2-40B4-BE49-F238E27FC236}">
-                <a16:creationId xmlns:a16="http://schemas.microsoft.com/office/drawing/2014/main" id="{CEF9ABC7-FFB1-4472-A6DB-28B9FC794285}"/>
+                <a16:creationId xmlns:a16="http://schemas.microsoft.com/office/drawing/2014/main" id="{69BD640E-4046-47B9-A30F-1F7F77ED9C0C}"/>
               </a:ext>
             </a:extLst>
           </p:cNvPr>
@@ -7516,7 +8032,7 @@
           <p:cNvPr id="2" name="">
             <a:extLst xmlns:a="http://schemas.openxmlformats.org/drawingml/2006/main">
               <a:ext uri="{FF2B5EF4-FFF2-40B4-BE49-F238E27FC236}">
-                <a16:creationId xmlns:a16="http://schemas.microsoft.com/office/drawing/2014/main" id="{3671BE4E-D284-49C3-87B3-AC4DA2D8504D}"/>
+                <a16:creationId xmlns:a16="http://schemas.microsoft.com/office/drawing/2014/main" id="{03B5B35D-D0B5-4DA6-B7D3-F4B49472D787}"/>
               </a:ext>
             </a:extLst>
           </p:cNvPr>
@@ -7573,7 +8089,7 @@
           <p:cNvPr id="3" name="">
             <a:extLst xmlns:a="http://schemas.openxmlformats.org/drawingml/2006/main">
               <a:ext uri="{FF2B5EF4-FFF2-40B4-BE49-F238E27FC236}">
-                <a16:creationId xmlns:a16="http://schemas.microsoft.com/office/drawing/2014/main" id="{E38B796D-BD2F-4DEC-A8FC-637296B5EAFB}"/>
+                <a16:creationId xmlns:a16="http://schemas.microsoft.com/office/drawing/2014/main" id="{2D8515F9-FF7F-41D5-8F04-6AF42F14EFDA}"/>
               </a:ext>
             </a:extLst>
           </p:cNvPr>
@@ -7630,7 +8146,7 @@
           <p:cNvPr id="4" name="">
             <a:extLst xmlns:a="http://schemas.openxmlformats.org/drawingml/2006/main">
               <a:ext uri="{FF2B5EF4-FFF2-40B4-BE49-F238E27FC236}">
-                <a16:creationId xmlns:a16="http://schemas.microsoft.com/office/drawing/2014/main" id="{4B48F20C-40E9-4D07-958B-4ABF110971AA}"/>
+                <a16:creationId xmlns:a16="http://schemas.microsoft.com/office/drawing/2014/main" id="{0B7651A8-F593-4D13-8F22-69215C2400E8}"/>
               </a:ext>
             </a:extLst>
           </p:cNvPr>
@@ -7642,7 +8158,7 @@
         <p:spPr>
           <a:xfrm xmlns:a="http://schemas.openxmlformats.org/drawingml/2006/main">
             <a:off x="609600" y="1685925"/>
-            <a:ext cx="10972800" cy="828675"/>
+            <a:ext cx="10972800" cy="571500"/>
           </a:xfrm>
           <a:prstGeom xmlns:a="http://schemas.openxmlformats.org/drawingml/2006/main" prst="rect">
             <a:avLst/>
@@ -7687,7 +8203,7 @@
           <p:cNvPr id="5" name="">
             <a:extLst xmlns:a="http://schemas.openxmlformats.org/drawingml/2006/main">
               <a:ext uri="{FF2B5EF4-FFF2-40B4-BE49-F238E27FC236}">
-                <a16:creationId xmlns:a16="http://schemas.microsoft.com/office/drawing/2014/main" id="{CF9E59C5-AA62-4CA0-BFE6-E1DFA57FFD89}"/>
+                <a16:creationId xmlns:a16="http://schemas.microsoft.com/office/drawing/2014/main" id="{EB6F2983-BE7D-44BE-899E-133A6C7FE6BA}"/>
               </a:ext>
             </a:extLst>
           </p:cNvPr>
@@ -7698,8 +8214,8 @@
         </p:nvSpPr>
         <p:spPr>
           <a:xfrm xmlns:a="http://schemas.openxmlformats.org/drawingml/2006/main">
-            <a:off x="609600" y="2819400"/>
-            <a:ext cx="10972800" cy="838200"/>
+            <a:off x="609600" y="2447925"/>
+            <a:ext cx="10972800" cy="885825"/>
           </a:xfrm>
           <a:prstGeom xmlns:a="http://schemas.openxmlformats.org/drawingml/2006/main" prst="rect">
             <a:avLst/>
@@ -7744,7 +8260,7 @@
           <p:cNvPr id="6" name="">
             <a:extLst xmlns:a="http://schemas.openxmlformats.org/drawingml/2006/main">
               <a:ext uri="{FF2B5EF4-FFF2-40B4-BE49-F238E27FC236}">
-                <a16:creationId xmlns:a16="http://schemas.microsoft.com/office/drawing/2014/main" id="{19A24AED-FF2E-4A0B-B850-16F795FBD124}"/>
+                <a16:creationId xmlns:a16="http://schemas.microsoft.com/office/drawing/2014/main" id="{C5D5123F-C7D6-4E33-BB8E-14AC88BDAC32}"/>
               </a:ext>
             </a:extLst>
           </p:cNvPr>
@@ -7755,7 +8271,7 @@
         </p:nvSpPr>
         <p:spPr>
           <a:xfrm xmlns:a="http://schemas.openxmlformats.org/drawingml/2006/main">
-            <a:off x="1057275" y="3990975"/>
+            <a:off x="1057275" y="3590925"/>
             <a:ext cx="10525125" cy="876300"/>
           </a:xfrm>
           <a:prstGeom xmlns:a="http://schemas.openxmlformats.org/drawingml/2006/main" prst="rect">
@@ -7801,7 +8317,7 @@
           <p:cNvPr id="7" name="">
             <a:extLst xmlns:a="http://schemas.openxmlformats.org/drawingml/2006/main">
               <a:ext uri="{FF2B5EF4-FFF2-40B4-BE49-F238E27FC236}">
-                <a16:creationId xmlns:a16="http://schemas.microsoft.com/office/drawing/2014/main" id="{32A628D0-EE51-4521-8189-3A89782D2934}"/>
+                <a16:creationId xmlns:a16="http://schemas.microsoft.com/office/drawing/2014/main" id="{47713512-A658-4362-8465-29BF3D3277E2}"/>
               </a:ext>
             </a:extLst>
           </p:cNvPr>
@@ -7812,8 +8328,8 @@
         </p:nvSpPr>
         <p:spPr>
           <a:xfrm xmlns:a="http://schemas.openxmlformats.org/drawingml/2006/main">
-            <a:off x="1057275" y="5219700"/>
-            <a:ext cx="10525125" cy="828675"/>
+            <a:off x="1057275" y="4695825"/>
+            <a:ext cx="10525125" cy="876300"/>
           </a:xfrm>
           <a:prstGeom xmlns:a="http://schemas.openxmlformats.org/drawingml/2006/main" prst="rect">
             <a:avLst/>
@@ -7856,7 +8372,7 @@
     </p:spTree>
     <p:extLst>
       <p:ext uri="{BB962C8B-B14F-4D97-AF65-F5344CB8AC3E}">
-        <p14:creationId xmlns:p14="http://schemas.microsoft.com/office/powerpoint/2010/main" val="1480923889"/>
+        <p14:creationId xmlns:p14="http://schemas.microsoft.com/office/powerpoint/2010/main" val="816631428"/>
       </p:ext>
     </p:extLst>
   </p:cSld>
@@ -7887,7 +8403,7 @@
           <p:cNvPr id="6" name="">
             <a:extLst xmlns:a="http://schemas.openxmlformats.org/drawingml/2006/main">
               <a:ext uri="{FF2B5EF4-FFF2-40B4-BE49-F238E27FC236}">
-                <a16:creationId xmlns:a16="http://schemas.microsoft.com/office/drawing/2014/main" id="{9663A43C-F171-4D9C-BDBE-4A19675229F7}"/>
+                <a16:creationId xmlns:a16="http://schemas.microsoft.com/office/drawing/2014/main" id="{68859C7B-C133-43DB-8406-26833AF44958}"/>
               </a:ext>
             </a:extLst>
           </p:cNvPr>
@@ -7944,7 +8460,7 @@
           <p:cNvPr id="2" name="">
             <a:extLst xmlns:a="http://schemas.openxmlformats.org/drawingml/2006/main">
               <a:ext uri="{FF2B5EF4-FFF2-40B4-BE49-F238E27FC236}">
-                <a16:creationId xmlns:a16="http://schemas.microsoft.com/office/drawing/2014/main" id="{DF195A7F-71B3-4E85-81A9-5E9E65624194}"/>
+                <a16:creationId xmlns:a16="http://schemas.microsoft.com/office/drawing/2014/main" id="{F8B927D5-CDED-4880-A59D-52C0B3C432EC}"/>
               </a:ext>
             </a:extLst>
           </p:cNvPr>
@@ -8001,7 +8517,7 @@
           <p:cNvPr id="3" name="">
             <a:extLst xmlns:a="http://schemas.openxmlformats.org/drawingml/2006/main">
               <a:ext uri="{FF2B5EF4-FFF2-40B4-BE49-F238E27FC236}">
-                <a16:creationId xmlns:a16="http://schemas.microsoft.com/office/drawing/2014/main" id="{372CC687-8C91-424D-857B-737D5BEC4A82}"/>
+                <a16:creationId xmlns:a16="http://schemas.microsoft.com/office/drawing/2014/main" id="{DEDD5821-AF82-46C7-B953-30B99ED17FB4}"/>
               </a:ext>
             </a:extLst>
           </p:cNvPr>
@@ -8058,7 +8574,7 @@
           <p:cNvPr id="4" name="">
             <a:extLst xmlns:a="http://schemas.openxmlformats.org/drawingml/2006/main">
               <a:ext uri="{FF2B5EF4-FFF2-40B4-BE49-F238E27FC236}">
-                <a16:creationId xmlns:a16="http://schemas.microsoft.com/office/drawing/2014/main" id="{61D01FF6-47A7-47B3-84E7-75732BEEEE9E}"/>
+                <a16:creationId xmlns:a16="http://schemas.microsoft.com/office/drawing/2014/main" id="{66E948DC-2B29-4761-8428-46F38E13FF4F}"/>
               </a:ext>
             </a:extLst>
           </p:cNvPr>
@@ -8173,7 +8689,7 @@
           <p:cNvPr id="5" name="">
             <a:extLst xmlns:a="http://schemas.openxmlformats.org/drawingml/2006/main">
               <a:ext uri="{FF2B5EF4-FFF2-40B4-BE49-F238E27FC236}">
-                <a16:creationId xmlns:a16="http://schemas.microsoft.com/office/drawing/2014/main" id="{FA0347ED-5B9D-4C4B-AAA1-F32BCC7677AC}"/>
+                <a16:creationId xmlns:a16="http://schemas.microsoft.com/office/drawing/2014/main" id="{9A4EDB1A-646B-4977-9874-003FEFDC02B5}"/>
               </a:ext>
             </a:extLst>
           </p:cNvPr>
@@ -8228,7 +8744,7 @@
     </p:spTree>
     <p:extLst>
       <p:ext uri="{BB962C8B-B14F-4D97-AF65-F5344CB8AC3E}">
-        <p14:creationId xmlns:p14="http://schemas.microsoft.com/office/powerpoint/2010/main" val="30707401"/>
+        <p14:creationId xmlns:p14="http://schemas.microsoft.com/office/powerpoint/2010/main" val="1814137767"/>
       </p:ext>
     </p:extLst>
   </p:cSld>
@@ -8259,7 +8775,7 @@
           <p:cNvPr id="6" name="">
             <a:extLst xmlns:a="http://schemas.openxmlformats.org/drawingml/2006/main">
               <a:ext uri="{FF2B5EF4-FFF2-40B4-BE49-F238E27FC236}">
-                <a16:creationId xmlns:a16="http://schemas.microsoft.com/office/drawing/2014/main" id="{2B785153-A0A4-421A-94C0-B2CAD1D3EC4A}"/>
+                <a16:creationId xmlns:a16="http://schemas.microsoft.com/office/drawing/2014/main" id="{6BF21BDC-B5EA-48C9-ABC5-0329B4E664FE}"/>
               </a:ext>
             </a:extLst>
           </p:cNvPr>
@@ -8316,7 +8832,7 @@
           <p:cNvPr id="2" name="">
             <a:extLst xmlns:a="http://schemas.openxmlformats.org/drawingml/2006/main">
               <a:ext uri="{FF2B5EF4-FFF2-40B4-BE49-F238E27FC236}">
-                <a16:creationId xmlns:a16="http://schemas.microsoft.com/office/drawing/2014/main" id="{6E46A1AA-E30E-4604-A09F-40B49ACC05EF}"/>
+                <a16:creationId xmlns:a16="http://schemas.microsoft.com/office/drawing/2014/main" id="{12632283-4B63-40A1-B3C4-1EF4E7C4CC27}"/>
               </a:ext>
             </a:extLst>
           </p:cNvPr>
@@ -8373,7 +8889,7 @@
           <p:cNvPr id="3" name="">
             <a:extLst xmlns:a="http://schemas.openxmlformats.org/drawingml/2006/main">
               <a:ext uri="{FF2B5EF4-FFF2-40B4-BE49-F238E27FC236}">
-                <a16:creationId xmlns:a16="http://schemas.microsoft.com/office/drawing/2014/main" id="{876FED1E-3EFF-4292-8FE4-C357DBA14042}"/>
+                <a16:creationId xmlns:a16="http://schemas.microsoft.com/office/drawing/2014/main" id="{7D1DCFFB-055C-4FBB-8F8A-F0B0D10F014C}"/>
               </a:ext>
             </a:extLst>
           </p:cNvPr>
@@ -9246,7 +9762,7 @@
           <p:cNvPr id="5" name="">
             <a:extLst xmlns:a="http://schemas.openxmlformats.org/drawingml/2006/main">
               <a:ext uri="{FF2B5EF4-FFF2-40B4-BE49-F238E27FC236}">
-                <a16:creationId xmlns:a16="http://schemas.microsoft.com/office/drawing/2014/main" id="{E98523FA-3791-444F-9067-9350886F8743}"/>
+                <a16:creationId xmlns:a16="http://schemas.microsoft.com/office/drawing/2014/main" id="{78E08BEE-86D8-498D-B03D-5B177B73021F}"/>
               </a:ext>
             </a:extLst>
           </p:cNvPr>
@@ -9301,7 +9817,7 @@
     </p:spTree>
     <p:extLst>
       <p:ext uri="{BB962C8B-B14F-4D97-AF65-F5344CB8AC3E}">
-        <p14:creationId xmlns:p14="http://schemas.microsoft.com/office/powerpoint/2010/main" val="100845625"/>
+        <p14:creationId xmlns:p14="http://schemas.microsoft.com/office/powerpoint/2010/main" val="1002277887"/>
       </p:ext>
     </p:extLst>
   </p:cSld>
@@ -9332,7 +9848,7 @@
           <p:cNvPr id="6" name="">
             <a:extLst xmlns:a="http://schemas.openxmlformats.org/drawingml/2006/main">
               <a:ext uri="{FF2B5EF4-FFF2-40B4-BE49-F238E27FC236}">
-                <a16:creationId xmlns:a16="http://schemas.microsoft.com/office/drawing/2014/main" id="{D962F0E7-BFF3-4807-8F84-BC62BB818099}"/>
+                <a16:creationId xmlns:a16="http://schemas.microsoft.com/office/drawing/2014/main" id="{6CE42A14-EC5A-44A4-9B06-A9F7D555A7BC}"/>
               </a:ext>
             </a:extLst>
           </p:cNvPr>
@@ -9389,7 +9905,7 @@
           <p:cNvPr id="2" name="">
             <a:extLst xmlns:a="http://schemas.openxmlformats.org/drawingml/2006/main">
               <a:ext uri="{FF2B5EF4-FFF2-40B4-BE49-F238E27FC236}">
-                <a16:creationId xmlns:a16="http://schemas.microsoft.com/office/drawing/2014/main" id="{227B18B6-4FBF-4E4C-95EC-E74B51990F31}"/>
+                <a16:creationId xmlns:a16="http://schemas.microsoft.com/office/drawing/2014/main" id="{92A78389-33DD-4083-88A7-B5FD500CFB10}"/>
               </a:ext>
             </a:extLst>
           </p:cNvPr>
@@ -9446,7 +9962,7 @@
           <p:cNvPr id="3" name="">
             <a:extLst xmlns:a="http://schemas.openxmlformats.org/drawingml/2006/main">
               <a:ext uri="{FF2B5EF4-FFF2-40B4-BE49-F238E27FC236}">
-                <a16:creationId xmlns:a16="http://schemas.microsoft.com/office/drawing/2014/main" id="{F31D94FA-3DF0-4BF9-962D-67AB11B69422}"/>
+                <a16:creationId xmlns:a16="http://schemas.microsoft.com/office/drawing/2014/main" id="{440BE242-CAFD-4641-B9A6-68C3697A5380}"/>
               </a:ext>
             </a:extLst>
           </p:cNvPr>
@@ -9503,7 +10019,7 @@
           <p:cNvPr id="4" name="">
             <a:extLst xmlns:a="http://schemas.openxmlformats.org/drawingml/2006/main">
               <a:ext uri="{FF2B5EF4-FFF2-40B4-BE49-F238E27FC236}">
-                <a16:creationId xmlns:a16="http://schemas.microsoft.com/office/drawing/2014/main" id="{24BE6FB2-728D-4A28-AABA-AB387CA0EDB2}"/>
+                <a16:creationId xmlns:a16="http://schemas.microsoft.com/office/drawing/2014/main" id="{2645D3DD-7ED5-454A-87BA-EFE21C3F2550}"/>
               </a:ext>
             </a:extLst>
           </p:cNvPr>
@@ -9791,7 +10307,7 @@
     </p:spTree>
     <p:extLst>
       <p:ext uri="{BB962C8B-B14F-4D97-AF65-F5344CB8AC3E}">
-        <p14:creationId xmlns:p14="http://schemas.microsoft.com/office/powerpoint/2010/main" val="1285197974"/>
+        <p14:creationId xmlns:p14="http://schemas.microsoft.com/office/powerpoint/2010/main" val="799337456"/>
       </p:ext>
     </p:extLst>
   </p:cSld>
@@ -9822,7 +10338,7 @@
           <p:cNvPr id="9" name="">
             <a:extLst xmlns:a="http://schemas.openxmlformats.org/drawingml/2006/main">
               <a:ext uri="{FF2B5EF4-FFF2-40B4-BE49-F238E27FC236}">
-                <a16:creationId xmlns:a16="http://schemas.microsoft.com/office/drawing/2014/main" id="{26292D99-8FE5-460E-8493-B209E87F92F6}"/>
+                <a16:creationId xmlns:a16="http://schemas.microsoft.com/office/drawing/2014/main" id="{BCBFCA71-8016-4738-B724-91A8D2AF7348}"/>
               </a:ext>
             </a:extLst>
           </p:cNvPr>
@@ -9879,7 +10395,7 @@
           <p:cNvPr id="2" name="">
             <a:extLst xmlns:a="http://schemas.openxmlformats.org/drawingml/2006/main">
               <a:ext uri="{FF2B5EF4-FFF2-40B4-BE49-F238E27FC236}">
-                <a16:creationId xmlns:a16="http://schemas.microsoft.com/office/drawing/2014/main" id="{CC58B0E6-594B-4124-8F45-A4B7D3ED632A}"/>
+                <a16:creationId xmlns:a16="http://schemas.microsoft.com/office/drawing/2014/main" id="{E22DD19E-21C9-4C25-A5C2-636E89F3371D}"/>
               </a:ext>
             </a:extLst>
           </p:cNvPr>
@@ -9936,7 +10452,7 @@
           <p:cNvPr id="3" name="">
             <a:extLst xmlns:a="http://schemas.openxmlformats.org/drawingml/2006/main">
               <a:ext uri="{FF2B5EF4-FFF2-40B4-BE49-F238E27FC236}">
-                <a16:creationId xmlns:a16="http://schemas.microsoft.com/office/drawing/2014/main" id="{13D562C7-7D82-4701-B97E-89AAAF828419}"/>
+                <a16:creationId xmlns:a16="http://schemas.microsoft.com/office/drawing/2014/main" id="{098BB7B2-1F1F-4030-8437-13ED6A3C58BF}"/>
               </a:ext>
             </a:extLst>
           </p:cNvPr>
@@ -9993,7 +10509,7 @@
           <p:cNvPr id="4" name="">
             <a:extLst xmlns:a="http://schemas.openxmlformats.org/drawingml/2006/main">
               <a:ext uri="{FF2B5EF4-FFF2-40B4-BE49-F238E27FC236}">
-                <a16:creationId xmlns:a16="http://schemas.microsoft.com/office/drawing/2014/main" id="{9E13A2A6-9413-428E-A142-165DA9BBB3CC}"/>
+                <a16:creationId xmlns:a16="http://schemas.microsoft.com/office/drawing/2014/main" id="{175E1CC5-CD93-4145-95A6-610E28C0CAAA}"/>
               </a:ext>
             </a:extLst>
           </p:cNvPr>
@@ -10057,7 +10573,7 @@
         </p:xfrm>
         <a:graphic xmlns:a="http://schemas.openxmlformats.org/drawingml/2006/main">
           <a:graphicData uri="http://schemas.openxmlformats.org/drawingml/2006/chart">
-            <c:chart xmlns:r="http://schemas.openxmlformats.org/officeDocument/2006/relationships" xmlns:c="http://schemas.openxmlformats.org/drawingml/2006/chart" r:id="Receb76cc05064b59"/>
+            <c:chart xmlns:r="http://schemas.openxmlformats.org/officeDocument/2006/relationships" xmlns:c="http://schemas.openxmlformats.org/drawingml/2006/chart" r:id="R089f47c496794191"/>
           </a:graphicData>
         </a:graphic>
       </p:graphicFrame>
@@ -10066,7 +10582,7 @@
           <p:cNvPr id="6" name="">
             <a:extLst xmlns:a="http://schemas.openxmlformats.org/drawingml/2006/main">
               <a:ext uri="{FF2B5EF4-FFF2-40B4-BE49-F238E27FC236}">
-                <a16:creationId xmlns:a16="http://schemas.microsoft.com/office/drawing/2014/main" id="{D401E909-04D8-43C3-A2C6-6F090D11D0B8}"/>
+                <a16:creationId xmlns:a16="http://schemas.microsoft.com/office/drawing/2014/main" id="{B61CCE58-2154-4204-A3BA-594E6B4BC417}"/>
               </a:ext>
             </a:extLst>
           </p:cNvPr>
@@ -10123,7 +10639,7 @@
           <p:cNvPr id="7" name="">
             <a:extLst xmlns:a="http://schemas.openxmlformats.org/drawingml/2006/main">
               <a:ext uri="{FF2B5EF4-FFF2-40B4-BE49-F238E27FC236}">
-                <a16:creationId xmlns:a16="http://schemas.microsoft.com/office/drawing/2014/main" id="{04B29800-147B-4472-B636-43DE9737A1ED}"/>
+                <a16:creationId xmlns:a16="http://schemas.microsoft.com/office/drawing/2014/main" id="{0B74DB84-DB7A-484D-B67F-F7EB030DE958}"/>
               </a:ext>
             </a:extLst>
           </p:cNvPr>
@@ -10239,7 +10755,7 @@
           <p:cNvPr id="8" name="">
             <a:extLst xmlns:a="http://schemas.openxmlformats.org/drawingml/2006/main">
               <a:ext uri="{FF2B5EF4-FFF2-40B4-BE49-F238E27FC236}">
-                <a16:creationId xmlns:a16="http://schemas.microsoft.com/office/drawing/2014/main" id="{75106335-6FC0-40EE-A900-65A7DC67D376}"/>
+                <a16:creationId xmlns:a16="http://schemas.microsoft.com/office/drawing/2014/main" id="{4914430D-A34F-4828-B049-32E90106BF6C}"/>
               </a:ext>
             </a:extLst>
           </p:cNvPr>
@@ -10294,7 +10810,7 @@
     </p:spTree>
     <p:extLst>
       <p:ext uri="{BB962C8B-B14F-4D97-AF65-F5344CB8AC3E}">
-        <p14:creationId xmlns:p14="http://schemas.microsoft.com/office/powerpoint/2010/main" val="1647793744"/>
+        <p14:creationId xmlns:p14="http://schemas.microsoft.com/office/powerpoint/2010/main" val="1944329423"/>
       </p:ext>
     </p:extLst>
   </p:cSld>
@@ -10325,7 +10841,7 @@
           <p:cNvPr id="6" name="">
             <a:extLst xmlns:a="http://schemas.openxmlformats.org/drawingml/2006/main">
               <a:ext uri="{FF2B5EF4-FFF2-40B4-BE49-F238E27FC236}">
-                <a16:creationId xmlns:a16="http://schemas.microsoft.com/office/drawing/2014/main" id="{A15B28EB-E52B-41C9-8A37-B3E0DE3DBFC0}"/>
+                <a16:creationId xmlns:a16="http://schemas.microsoft.com/office/drawing/2014/main" id="{132B83BB-4939-4147-813F-C4C529BE9DFF}"/>
               </a:ext>
             </a:extLst>
           </p:cNvPr>
@@ -10382,7 +10898,7 @@
           <p:cNvPr id="2" name="">
             <a:extLst xmlns:a="http://schemas.openxmlformats.org/drawingml/2006/main">
               <a:ext uri="{FF2B5EF4-FFF2-40B4-BE49-F238E27FC236}">
-                <a16:creationId xmlns:a16="http://schemas.microsoft.com/office/drawing/2014/main" id="{E8A74F08-A8B7-40C1-8A6B-CC425D4BE47F}"/>
+                <a16:creationId xmlns:a16="http://schemas.microsoft.com/office/drawing/2014/main" id="{F271FB5A-84AA-42BD-93C4-143D4C0908F6}"/>
               </a:ext>
             </a:extLst>
           </p:cNvPr>
@@ -10439,7 +10955,7 @@
           <p:cNvPr id="3" name="">
             <a:extLst xmlns:a="http://schemas.openxmlformats.org/drawingml/2006/main">
               <a:ext uri="{FF2B5EF4-FFF2-40B4-BE49-F238E27FC236}">
-                <a16:creationId xmlns:a16="http://schemas.microsoft.com/office/drawing/2014/main" id="{FF27EE0C-79F9-4B1F-B31F-F3C4840D087A}"/>
+                <a16:creationId xmlns:a16="http://schemas.microsoft.com/office/drawing/2014/main" id="{CA2C940B-83AE-4718-A3A8-98676C63154D}"/>
               </a:ext>
             </a:extLst>
           </p:cNvPr>
@@ -10919,7 +11435,7 @@
           <p:cNvPr id="5" name="">
             <a:extLst xmlns:a="http://schemas.openxmlformats.org/drawingml/2006/main">
               <a:ext uri="{FF2B5EF4-FFF2-40B4-BE49-F238E27FC236}">
-                <a16:creationId xmlns:a16="http://schemas.microsoft.com/office/drawing/2014/main" id="{4E502C7A-ED13-4207-9B75-5B58C92A30BF}"/>
+                <a16:creationId xmlns:a16="http://schemas.microsoft.com/office/drawing/2014/main" id="{61FA32EB-3539-453A-9187-C63639F53E72}"/>
               </a:ext>
             </a:extLst>
           </p:cNvPr>
@@ -10978,7 +11494,7 @@
     </p:spTree>
     <p:extLst>
       <p:ext uri="{BB962C8B-B14F-4D97-AF65-F5344CB8AC3E}">
-        <p14:creationId xmlns:p14="http://schemas.microsoft.com/office/powerpoint/2010/main" val="766076677"/>
+        <p14:creationId xmlns:p14="http://schemas.microsoft.com/office/powerpoint/2010/main" val="584846588"/>
       </p:ext>
     </p:extLst>
   </p:cSld>
@@ -11009,7 +11525,7 @@
           <p:cNvPr id="5" name="">
             <a:extLst xmlns:a="http://schemas.openxmlformats.org/drawingml/2006/main">
               <a:ext uri="{FF2B5EF4-FFF2-40B4-BE49-F238E27FC236}">
-                <a16:creationId xmlns:a16="http://schemas.microsoft.com/office/drawing/2014/main" id="{FBEB2474-CB25-4E6D-A224-4DB523C8F5B5}"/>
+                <a16:creationId xmlns:a16="http://schemas.microsoft.com/office/drawing/2014/main" id="{BB9AD1D0-6B55-4238-B9EF-1F4641CDE395}"/>
               </a:ext>
             </a:extLst>
           </p:cNvPr>
@@ -11066,7 +11582,7 @@
           <p:cNvPr id="2" name="">
             <a:extLst xmlns:a="http://schemas.openxmlformats.org/drawingml/2006/main">
               <a:ext uri="{FF2B5EF4-FFF2-40B4-BE49-F238E27FC236}">
-                <a16:creationId xmlns:a16="http://schemas.microsoft.com/office/drawing/2014/main" id="{21CD345E-E9C5-4792-8F29-EFD1DF1992D5}"/>
+                <a16:creationId xmlns:a16="http://schemas.microsoft.com/office/drawing/2014/main" id="{B2CBFE9D-80A6-4F1B-850C-ADC63C1FAD39}"/>
               </a:ext>
             </a:extLst>
           </p:cNvPr>
@@ -11123,7 +11639,7 @@
           <p:cNvPr id="3" name="">
             <a:extLst xmlns:a="http://schemas.openxmlformats.org/drawingml/2006/main">
               <a:ext uri="{FF2B5EF4-FFF2-40B4-BE49-F238E27FC236}">
-                <a16:creationId xmlns:a16="http://schemas.microsoft.com/office/drawing/2014/main" id="{0F3B4FFD-2B8E-4615-8F70-0377EC15D209}"/>
+                <a16:creationId xmlns:a16="http://schemas.microsoft.com/office/drawing/2014/main" id="{ADE45332-D463-48CD-BC01-59FEE191E0D2}"/>
               </a:ext>
             </a:extLst>
           </p:cNvPr>
@@ -11537,7 +12053,7 @@
     </p:spTree>
     <p:extLst>
       <p:ext uri="{BB962C8B-B14F-4D97-AF65-F5344CB8AC3E}">
-        <p14:creationId xmlns:p14="http://schemas.microsoft.com/office/powerpoint/2010/main" val="131982224"/>
+        <p14:creationId xmlns:p14="http://schemas.microsoft.com/office/powerpoint/2010/main" val="478106522"/>
       </p:ext>
     </p:extLst>
   </p:cSld>
@@ -11568,7 +12084,7 @@
           <p:cNvPr id="9" name="">
             <a:extLst xmlns:a="http://schemas.openxmlformats.org/drawingml/2006/main">
               <a:ext uri="{FF2B5EF4-FFF2-40B4-BE49-F238E27FC236}">
-                <a16:creationId xmlns:a16="http://schemas.microsoft.com/office/drawing/2014/main" id="{A5B48973-B157-415C-B8A6-A4DEC5A09EE9}"/>
+                <a16:creationId xmlns:a16="http://schemas.microsoft.com/office/drawing/2014/main" id="{414A1309-54E9-435D-AF58-CD3E6D407B12}"/>
               </a:ext>
             </a:extLst>
           </p:cNvPr>
@@ -11625,7 +12141,7 @@
           <p:cNvPr id="2" name="">
             <a:extLst xmlns:a="http://schemas.openxmlformats.org/drawingml/2006/main">
               <a:ext uri="{FF2B5EF4-FFF2-40B4-BE49-F238E27FC236}">
-                <a16:creationId xmlns:a16="http://schemas.microsoft.com/office/drawing/2014/main" id="{CF600A0B-0AF4-48C9-BE6C-39C399537559}"/>
+                <a16:creationId xmlns:a16="http://schemas.microsoft.com/office/drawing/2014/main" id="{D0420695-F6D7-4274-9CB2-9AFC56FAACAD}"/>
               </a:ext>
             </a:extLst>
           </p:cNvPr>
@@ -11682,7 +12198,7 @@
           <p:cNvPr id="3" name="">
             <a:extLst xmlns:a="http://schemas.openxmlformats.org/drawingml/2006/main">
               <a:ext uri="{FF2B5EF4-FFF2-40B4-BE49-F238E27FC236}">
-                <a16:creationId xmlns:a16="http://schemas.microsoft.com/office/drawing/2014/main" id="{68F46AFB-4D47-4E4C-BCFC-655424D85ECE}"/>
+                <a16:creationId xmlns:a16="http://schemas.microsoft.com/office/drawing/2014/main" id="{F6CFA779-58D7-40F9-A478-44E449910517}"/>
               </a:ext>
             </a:extLst>
           </p:cNvPr>
@@ -11739,7 +12255,7 @@
           <p:cNvPr id="4" name="">
             <a:extLst xmlns:a="http://schemas.openxmlformats.org/drawingml/2006/main">
               <a:ext uri="{FF2B5EF4-FFF2-40B4-BE49-F238E27FC236}">
-                <a16:creationId xmlns:a16="http://schemas.microsoft.com/office/drawing/2014/main" id="{338DAA53-B552-4CA0-BA0D-AA8E089F881D}"/>
+                <a16:creationId xmlns:a16="http://schemas.microsoft.com/office/drawing/2014/main" id="{43AA88D7-FE97-47CE-930E-A23090F0E43F}"/>
               </a:ext>
             </a:extLst>
           </p:cNvPr>
@@ -11800,7 +12316,7 @@
           <p:cNvPr id="5" name="">
             <a:extLst xmlns:a="http://schemas.openxmlformats.org/drawingml/2006/main">
               <a:ext uri="{FF2B5EF4-FFF2-40B4-BE49-F238E27FC236}">
-                <a16:creationId xmlns:a16="http://schemas.microsoft.com/office/drawing/2014/main" id="{3B62C125-83C0-479A-904E-A87F0232A7CE}"/>
+                <a16:creationId xmlns:a16="http://schemas.microsoft.com/office/drawing/2014/main" id="{9EE1AEBA-5D36-45A6-A0F3-B9AB33C509C2}"/>
               </a:ext>
             </a:extLst>
           </p:cNvPr>
@@ -11857,7 +12373,7 @@
           <p:cNvPr id="6" name="">
             <a:extLst xmlns:a="http://schemas.openxmlformats.org/drawingml/2006/main">
               <a:ext uri="{FF2B5EF4-FFF2-40B4-BE49-F238E27FC236}">
-                <a16:creationId xmlns:a16="http://schemas.microsoft.com/office/drawing/2014/main" id="{9790C229-0674-41CC-9775-7BBAE8DDC590}"/>
+                <a16:creationId xmlns:a16="http://schemas.microsoft.com/office/drawing/2014/main" id="{CA139E2E-04A1-4E92-8247-879072EBA2A9}"/>
               </a:ext>
             </a:extLst>
           </p:cNvPr>
@@ -11918,7 +12434,7 @@
           <p:cNvPr id="7" name="">
             <a:extLst xmlns:a="http://schemas.openxmlformats.org/drawingml/2006/main">
               <a:ext uri="{FF2B5EF4-FFF2-40B4-BE49-F238E27FC236}">
-                <a16:creationId xmlns:a16="http://schemas.microsoft.com/office/drawing/2014/main" id="{E8AB72F2-3F7A-41F1-A105-3C365DBB16F2}"/>
+                <a16:creationId xmlns:a16="http://schemas.microsoft.com/office/drawing/2014/main" id="{247AA429-FCF2-45AF-878C-84AD2FD6295D}"/>
               </a:ext>
             </a:extLst>
           </p:cNvPr>
@@ -11975,7 +12491,7 @@
           <p:cNvPr id="8" name="">
             <a:extLst xmlns:a="http://schemas.openxmlformats.org/drawingml/2006/main">
               <a:ext uri="{FF2B5EF4-FFF2-40B4-BE49-F238E27FC236}">
-                <a16:creationId xmlns:a16="http://schemas.microsoft.com/office/drawing/2014/main" id="{307E7E95-C9FC-4774-B544-25CAC2D79F09}"/>
+                <a16:creationId xmlns:a16="http://schemas.microsoft.com/office/drawing/2014/main" id="{14986899-6338-4165-8EFB-54F0F8D88ABE}"/>
               </a:ext>
             </a:extLst>
           </p:cNvPr>
@@ -12030,7 +12546,7 @@
     </p:spTree>
     <p:extLst>
       <p:ext uri="{BB962C8B-B14F-4D97-AF65-F5344CB8AC3E}">
-        <p14:creationId xmlns:p14="http://schemas.microsoft.com/office/powerpoint/2010/main" val="634152223"/>
+        <p14:creationId xmlns:p14="http://schemas.microsoft.com/office/powerpoint/2010/main" val="1610160321"/>
       </p:ext>
     </p:extLst>
   </p:cSld>
@@ -12061,7 +12577,7 @@
           <p:cNvPr id="6" name="">
             <a:extLst xmlns:a="http://schemas.openxmlformats.org/drawingml/2006/main">
               <a:ext uri="{FF2B5EF4-FFF2-40B4-BE49-F238E27FC236}">
-                <a16:creationId xmlns:a16="http://schemas.microsoft.com/office/drawing/2014/main" id="{9C222FF8-19FB-464A-B272-D99AB8A85564}"/>
+                <a16:creationId xmlns:a16="http://schemas.microsoft.com/office/drawing/2014/main" id="{29F25AD8-8430-4D3E-91A6-D3308F442455}"/>
               </a:ext>
             </a:extLst>
           </p:cNvPr>
@@ -12118,7 +12634,7 @@
           <p:cNvPr id="2" name="">
             <a:extLst xmlns:a="http://schemas.openxmlformats.org/drawingml/2006/main">
               <a:ext uri="{FF2B5EF4-FFF2-40B4-BE49-F238E27FC236}">
-                <a16:creationId xmlns:a16="http://schemas.microsoft.com/office/drawing/2014/main" id="{92ED05CB-DB08-46A5-9D50-295FFE2E4353}"/>
+                <a16:creationId xmlns:a16="http://schemas.microsoft.com/office/drawing/2014/main" id="{862E3D9B-2A42-4FF1-99E2-9605EC4BBB82}"/>
               </a:ext>
             </a:extLst>
           </p:cNvPr>
@@ -12175,7 +12691,7 @@
           <p:cNvPr id="3" name="">
             <a:extLst xmlns:a="http://schemas.openxmlformats.org/drawingml/2006/main">
               <a:ext uri="{FF2B5EF4-FFF2-40B4-BE49-F238E27FC236}">
-                <a16:creationId xmlns:a16="http://schemas.microsoft.com/office/drawing/2014/main" id="{F5321CF7-2D48-41C8-A9F8-E62ED21E216D}"/>
+                <a16:creationId xmlns:a16="http://schemas.microsoft.com/office/drawing/2014/main" id="{5400956E-5E12-4E4C-855C-7ACC2BA7A722}"/>
               </a:ext>
             </a:extLst>
           </p:cNvPr>
@@ -12232,7 +12748,7 @@
           <p:cNvPr id="4" name="">
             <a:extLst xmlns:a="http://schemas.openxmlformats.org/drawingml/2006/main">
               <a:ext uri="{FF2B5EF4-FFF2-40B4-BE49-F238E27FC236}">
-                <a16:creationId xmlns:a16="http://schemas.microsoft.com/office/drawing/2014/main" id="{E799F4FE-5C18-4E70-8DDD-434C1D6C5FAD}"/>
+                <a16:creationId xmlns:a16="http://schemas.microsoft.com/office/drawing/2014/main" id="{29BE0D72-41BA-4D59-8E1C-2EFDC397E930}"/>
               </a:ext>
             </a:extLst>
           </p:cNvPr>
@@ -12374,7 +12890,7 @@
           <p:cNvPr id="5" name="">
             <a:extLst xmlns:a="http://schemas.openxmlformats.org/drawingml/2006/main">
               <a:ext uri="{FF2B5EF4-FFF2-40B4-BE49-F238E27FC236}">
-                <a16:creationId xmlns:a16="http://schemas.microsoft.com/office/drawing/2014/main" id="{21C7E465-4BEF-4BAD-876A-E308AB067DA1}"/>
+                <a16:creationId xmlns:a16="http://schemas.microsoft.com/office/drawing/2014/main" id="{DF76A5BA-B0E2-4735-868B-61323518C00B}"/>
               </a:ext>
             </a:extLst>
           </p:cNvPr>
@@ -12429,7 +12945,7 @@
     </p:spTree>
     <p:extLst>
       <p:ext uri="{BB962C8B-B14F-4D97-AF65-F5344CB8AC3E}">
-        <p14:creationId xmlns:p14="http://schemas.microsoft.com/office/powerpoint/2010/main" val="635623695"/>
+        <p14:creationId xmlns:p14="http://schemas.microsoft.com/office/powerpoint/2010/main" val="1884559718"/>
       </p:ext>
     </p:extLst>
   </p:cSld>
@@ -12460,7 +12976,7 @@
           <p:cNvPr id="12" name="">
             <a:extLst xmlns:a="http://schemas.openxmlformats.org/drawingml/2006/main">
               <a:ext uri="{FF2B5EF4-FFF2-40B4-BE49-F238E27FC236}">
-                <a16:creationId xmlns:a16="http://schemas.microsoft.com/office/drawing/2014/main" id="{B8848057-D04E-4A00-933F-8B0CD66855B8}"/>
+                <a16:creationId xmlns:a16="http://schemas.microsoft.com/office/drawing/2014/main" id="{C2C2B19F-ED62-4F03-A4E9-7C2BF593F45B}"/>
               </a:ext>
             </a:extLst>
           </p:cNvPr>
@@ -12517,7 +13033,7 @@
           <p:cNvPr id="2" name="">
             <a:extLst xmlns:a="http://schemas.openxmlformats.org/drawingml/2006/main">
               <a:ext uri="{FF2B5EF4-FFF2-40B4-BE49-F238E27FC236}">
-                <a16:creationId xmlns:a16="http://schemas.microsoft.com/office/drawing/2014/main" id="{A5691752-DED8-4E75-AECF-DFB253D7EF94}"/>
+                <a16:creationId xmlns:a16="http://schemas.microsoft.com/office/drawing/2014/main" id="{C03AF5C1-9A69-4770-836E-CEFC0FA824F9}"/>
               </a:ext>
             </a:extLst>
           </p:cNvPr>
@@ -12574,7 +13090,7 @@
           <p:cNvPr id="3" name="">
             <a:extLst xmlns:a="http://schemas.openxmlformats.org/drawingml/2006/main">
               <a:ext uri="{FF2B5EF4-FFF2-40B4-BE49-F238E27FC236}">
-                <a16:creationId xmlns:a16="http://schemas.microsoft.com/office/drawing/2014/main" id="{B94740A6-D0D0-4E8B-A32F-64D8E7CC9488}"/>
+                <a16:creationId xmlns:a16="http://schemas.microsoft.com/office/drawing/2014/main" id="{F2FC4AB0-B45B-4992-BA99-7FDAF5DBC4E5}"/>
               </a:ext>
             </a:extLst>
           </p:cNvPr>
@@ -12631,7 +13147,7 @@
           <p:cNvPr id="4" name="">
             <a:extLst xmlns:a="http://schemas.openxmlformats.org/drawingml/2006/main">
               <a:ext uri="{FF2B5EF4-FFF2-40B4-BE49-F238E27FC236}">
-                <a16:creationId xmlns:a16="http://schemas.microsoft.com/office/drawing/2014/main" id="{A354281E-11B9-4E7A-B9C5-1106462AC3DA}"/>
+                <a16:creationId xmlns:a16="http://schemas.microsoft.com/office/drawing/2014/main" id="{D7FAA486-28B4-4122-94D2-15DC600A0804}"/>
               </a:ext>
             </a:extLst>
           </p:cNvPr>
@@ -12692,7 +13208,7 @@
           <p:cNvPr id="5" name="">
             <a:extLst xmlns:a="http://schemas.openxmlformats.org/drawingml/2006/main">
               <a:ext uri="{FF2B5EF4-FFF2-40B4-BE49-F238E27FC236}">
-                <a16:creationId xmlns:a16="http://schemas.microsoft.com/office/drawing/2014/main" id="{3F3EA7AA-98C8-4422-84EA-3434D5A711D3}"/>
+                <a16:creationId xmlns:a16="http://schemas.microsoft.com/office/drawing/2014/main" id="{8050E365-A892-48BC-93F3-9544B8688A1D}"/>
               </a:ext>
             </a:extLst>
           </p:cNvPr>
@@ -12724,7 +13240,7 @@
           <p:cNvPr id="6" name="">
             <a:extLst xmlns:a="http://schemas.openxmlformats.org/drawingml/2006/main">
               <a:ext uri="{FF2B5EF4-FFF2-40B4-BE49-F238E27FC236}">
-                <a16:creationId xmlns:a16="http://schemas.microsoft.com/office/drawing/2014/main" id="{6B77326A-C287-47EC-9B60-B5FD018E63AD}"/>
+                <a16:creationId xmlns:a16="http://schemas.microsoft.com/office/drawing/2014/main" id="{295D5FF2-0A6B-46D9-8E36-6A853A7272DA}"/>
               </a:ext>
             </a:extLst>
           </p:cNvPr>
@@ -12781,7 +13297,7 @@
           <p:cNvPr id="7" name="">
             <a:extLst xmlns:a="http://schemas.openxmlformats.org/drawingml/2006/main">
               <a:ext uri="{FF2B5EF4-FFF2-40B4-BE49-F238E27FC236}">
-                <a16:creationId xmlns:a16="http://schemas.microsoft.com/office/drawing/2014/main" id="{DFA30412-C06A-4880-814A-63FD80F9C82D}"/>
+                <a16:creationId xmlns:a16="http://schemas.microsoft.com/office/drawing/2014/main" id="{8A379BC0-1758-473B-AEAA-CC34C1E16405}"/>
               </a:ext>
             </a:extLst>
           </p:cNvPr>
@@ -12838,7 +13354,7 @@
           <p:cNvPr id="8" name="">
             <a:extLst xmlns:a="http://schemas.openxmlformats.org/drawingml/2006/main">
               <a:ext uri="{FF2B5EF4-FFF2-40B4-BE49-F238E27FC236}">
-                <a16:creationId xmlns:a16="http://schemas.microsoft.com/office/drawing/2014/main" id="{66061FE2-2218-42BA-91AE-A42D4B2C7992}"/>
+                <a16:creationId xmlns:a16="http://schemas.microsoft.com/office/drawing/2014/main" id="{E9495C64-6A4B-4269-8A6A-E862B7242ADA}"/>
               </a:ext>
             </a:extLst>
           </p:cNvPr>
@@ -12899,7 +13415,7 @@
           <p:cNvPr id="9" name="">
             <a:extLst xmlns:a="http://schemas.openxmlformats.org/drawingml/2006/main">
               <a:ext uri="{FF2B5EF4-FFF2-40B4-BE49-F238E27FC236}">
-                <a16:creationId xmlns:a16="http://schemas.microsoft.com/office/drawing/2014/main" id="{265686C7-CA2C-4EF0-8609-A89D6C9095CF}"/>
+                <a16:creationId xmlns:a16="http://schemas.microsoft.com/office/drawing/2014/main" id="{4D8E8992-A284-4830-B5F9-005589A75978}"/>
               </a:ext>
             </a:extLst>
           </p:cNvPr>
@@ -12931,7 +13447,7 @@
           <p:cNvPr id="10" name="">
             <a:extLst xmlns:a="http://schemas.openxmlformats.org/drawingml/2006/main">
               <a:ext uri="{FF2B5EF4-FFF2-40B4-BE49-F238E27FC236}">
-                <a16:creationId xmlns:a16="http://schemas.microsoft.com/office/drawing/2014/main" id="{EFB58F6F-084F-4582-9FDD-0489C0C394F7}"/>
+                <a16:creationId xmlns:a16="http://schemas.microsoft.com/office/drawing/2014/main" id="{2A3E59A0-FEFD-4646-9B17-63CAFBDE3B9E}"/>
               </a:ext>
             </a:extLst>
           </p:cNvPr>
@@ -12988,7 +13504,7 @@
           <p:cNvPr id="11" name="">
             <a:extLst xmlns:a="http://schemas.openxmlformats.org/drawingml/2006/main">
               <a:ext uri="{FF2B5EF4-FFF2-40B4-BE49-F238E27FC236}">
-                <a16:creationId xmlns:a16="http://schemas.microsoft.com/office/drawing/2014/main" id="{75F4AB5A-DC10-465D-B821-AF61BCC2B500}"/>
+                <a16:creationId xmlns:a16="http://schemas.microsoft.com/office/drawing/2014/main" id="{56D68790-3531-4E48-B30C-DB717F840A11}"/>
               </a:ext>
             </a:extLst>
           </p:cNvPr>
@@ -13043,7 +13559,7 @@
     </p:spTree>
     <p:extLst>
       <p:ext uri="{BB962C8B-B14F-4D97-AF65-F5344CB8AC3E}">
-        <p14:creationId xmlns:p14="http://schemas.microsoft.com/office/powerpoint/2010/main" val="232443302"/>
+        <p14:creationId xmlns:p14="http://schemas.microsoft.com/office/powerpoint/2010/main" val="1731437620"/>
       </p:ext>
     </p:extLst>
   </p:cSld>
@@ -13071,10 +13587,10 @@
       </p:grpSpPr>
       <p:sp>
         <p:nvSpPr>
-          <p:cNvPr id="10" name="">
+          <p:cNvPr id="13" name="">
             <a:extLst xmlns:a="http://schemas.openxmlformats.org/drawingml/2006/main">
               <a:ext uri="{FF2B5EF4-FFF2-40B4-BE49-F238E27FC236}">
-                <a16:creationId xmlns:a16="http://schemas.microsoft.com/office/drawing/2014/main" id="{C51F835E-DF58-4A14-A492-85AEF575AE2E}"/>
+                <a16:creationId xmlns:a16="http://schemas.microsoft.com/office/drawing/2014/main" id="{2F79A06A-FAD6-46A5-90B1-3C0D09EB4DE4}"/>
               </a:ext>
             </a:extLst>
           </p:cNvPr>
@@ -13131,7 +13647,7 @@
           <p:cNvPr id="2" name="">
             <a:extLst xmlns:a="http://schemas.openxmlformats.org/drawingml/2006/main">
               <a:ext uri="{FF2B5EF4-FFF2-40B4-BE49-F238E27FC236}">
-                <a16:creationId xmlns:a16="http://schemas.microsoft.com/office/drawing/2014/main" id="{5D82511D-527E-4AF8-83C3-31005CF22055}"/>
+                <a16:creationId xmlns:a16="http://schemas.microsoft.com/office/drawing/2014/main" id="{112A1B6F-5766-432E-AAEA-CFA57988881A}"/>
               </a:ext>
             </a:extLst>
           </p:cNvPr>
@@ -13188,7 +13704,7 @@
           <p:cNvPr id="3" name="">
             <a:extLst xmlns:a="http://schemas.openxmlformats.org/drawingml/2006/main">
               <a:ext uri="{FF2B5EF4-FFF2-40B4-BE49-F238E27FC236}">
-                <a16:creationId xmlns:a16="http://schemas.microsoft.com/office/drawing/2014/main" id="{6CBFF378-5077-408D-9A69-C643423DB53E}"/>
+                <a16:creationId xmlns:a16="http://schemas.microsoft.com/office/drawing/2014/main" id="{F9E35677-C436-4927-AB9D-8E3191DDFD0B}"/>
               </a:ext>
             </a:extLst>
           </p:cNvPr>
@@ -13199,8 +13715,8 @@
         </p:nvSpPr>
         <p:spPr>
           <a:xfrm xmlns:a="http://schemas.openxmlformats.org/drawingml/2006/main">
-            <a:off x="609600" y="1590675"/>
-            <a:ext cx="2609850" cy="914400"/>
+            <a:off x="609600" y="1533525"/>
+            <a:ext cx="2609850" cy="723900"/>
           </a:xfrm>
           <a:prstGeom xmlns:a="http://schemas.openxmlformats.org/drawingml/2006/main" prst="rect">
             <a:avLst/>
@@ -13217,17 +13733,17 @@
           <a:lstStyle xmlns:a="http://schemas.openxmlformats.org/drawingml/2006/main"/>
           <a:p xmlns:a="http://schemas.openxmlformats.org/drawingml/2006/main">
             <a:pPr algn="l">
-              <a:defRPr sz="2400" b="1">
-                <a:solidFill>
-                  <a:srgbClr val="16343E"/>
-                </a:solidFill>
-                <a:latin typeface="Arial"/>
-                <a:ea typeface="Arial"/>
-                <a:cs typeface="Arial"/>
-              </a:defRPr>
-            </a:pPr>
-            <a:r>
-              <a:rPr sz="2400" b="1">
+              <a:defRPr sz="2175" b="1">
+                <a:solidFill>
+                  <a:srgbClr val="16343E"/>
+                </a:solidFill>
+                <a:latin typeface="Arial"/>
+                <a:ea typeface="Arial"/>
+                <a:cs typeface="Arial"/>
+              </a:defRPr>
+            </a:pPr>
+            <a:r>
+              <a:rPr sz="2175" b="1">
                 <a:solidFill>
                   <a:srgbClr val="16343E"/>
                 </a:solidFill>
@@ -13240,17 +13756,17 @@
           </a:p>
           <a:p xmlns:a="http://schemas.openxmlformats.org/drawingml/2006/main">
             <a:pPr algn="l">
-              <a:defRPr sz="2400" b="1">
-                <a:solidFill>
-                  <a:srgbClr val="16343E"/>
-                </a:solidFill>
-                <a:latin typeface="Arial"/>
-                <a:ea typeface="Arial"/>
-                <a:cs typeface="Arial"/>
-              </a:defRPr>
-            </a:pPr>
-            <a:r>
-              <a:rPr sz="2400" b="1">
+              <a:defRPr sz="2175" b="1">
+                <a:solidFill>
+                  <a:srgbClr val="16343E"/>
+                </a:solidFill>
+                <a:latin typeface="Arial"/>
+                <a:ea typeface="Arial"/>
+                <a:cs typeface="Arial"/>
+              </a:defRPr>
+            </a:pPr>
+            <a:r>
+              <a:rPr sz="2175" b="1">
                 <a:solidFill>
                   <a:srgbClr val="16343E"/>
                 </a:solidFill>
@@ -13268,7 +13784,7 @@
           <p:cNvPr id="4" name="">
             <a:extLst xmlns:a="http://schemas.openxmlformats.org/drawingml/2006/main">
               <a:ext uri="{FF2B5EF4-FFF2-40B4-BE49-F238E27FC236}">
-                <a16:creationId xmlns:a16="http://schemas.microsoft.com/office/drawing/2014/main" id="{1D257D2F-4DA4-463C-A9C9-3B45C7FDF9F6}"/>
+                <a16:creationId xmlns:a16="http://schemas.microsoft.com/office/drawing/2014/main" id="{9728830D-33B6-4BF0-9714-6EF9FDBDE3BA}"/>
               </a:ext>
             </a:extLst>
           </p:cNvPr>
@@ -13280,7 +13796,7 @@
         <p:spPr>
           <a:xfrm xmlns:a="http://schemas.openxmlformats.org/drawingml/2006/main">
             <a:off x="3476625" y="1533525"/>
-            <a:ext cx="8105775" cy="990600"/>
+            <a:ext cx="8105775" cy="723900"/>
           </a:xfrm>
           <a:prstGeom xmlns:a="http://schemas.openxmlformats.org/drawingml/2006/main" prst="rect">
             <a:avLst/>
@@ -13297,17 +13813,17 @@
           <a:lstStyle xmlns:a="http://schemas.openxmlformats.org/drawingml/2006/main"/>
           <a:p xmlns:a="http://schemas.openxmlformats.org/drawingml/2006/main">
             <a:pPr algn="l">
-              <a:defRPr sz="2475" b="0">
-                <a:solidFill>
-                  <a:srgbClr val="16343E"/>
-                </a:solidFill>
-                <a:latin typeface="Arial"/>
-                <a:ea typeface="Arial"/>
-                <a:cs typeface="Arial"/>
-              </a:defRPr>
-            </a:pPr>
-            <a:r>
-              <a:rPr sz="2475" b="0">
+              <a:defRPr sz="2250" b="0">
+                <a:solidFill>
+                  <a:srgbClr val="16343E"/>
+                </a:solidFill>
+                <a:latin typeface="Arial"/>
+                <a:ea typeface="Arial"/>
+                <a:cs typeface="Arial"/>
+              </a:defRPr>
+            </a:pPr>
+            <a:r>
+              <a:rPr sz="2250" b="0">
                 <a:solidFill>
                   <a:srgbClr val="16343E"/>
                 </a:solidFill>
@@ -13320,17 +13836,17 @@
           </a:p>
           <a:p xmlns:a="http://schemas.openxmlformats.org/drawingml/2006/main">
             <a:pPr algn="l">
-              <a:defRPr sz="2475" b="0">
-                <a:solidFill>
-                  <a:srgbClr val="16343E"/>
-                </a:solidFill>
-                <a:latin typeface="Arial"/>
-                <a:ea typeface="Arial"/>
-                <a:cs typeface="Arial"/>
-              </a:defRPr>
-            </a:pPr>
-            <a:r>
-              <a:rPr sz="2475" b="0">
+              <a:defRPr sz="2250" b="0">
+                <a:solidFill>
+                  <a:srgbClr val="16343E"/>
+                </a:solidFill>
+                <a:latin typeface="Arial"/>
+                <a:ea typeface="Arial"/>
+                <a:cs typeface="Arial"/>
+              </a:defRPr>
+            </a:pPr>
+            <a:r>
+              <a:rPr sz="2250" b="0">
                 <a:solidFill>
                   <a:srgbClr val="16343E"/>
                 </a:solidFill>
@@ -13348,7 +13864,7 @@
           <p:cNvPr id="5" name="">
             <a:extLst xmlns:a="http://schemas.openxmlformats.org/drawingml/2006/main">
               <a:ext uri="{FF2B5EF4-FFF2-40B4-BE49-F238E27FC236}">
-                <a16:creationId xmlns:a16="http://schemas.microsoft.com/office/drawing/2014/main" id="{C5E466E1-0F6A-456A-97BF-24C9374B9A38}"/>
+                <a16:creationId xmlns:a16="http://schemas.microsoft.com/office/drawing/2014/main" id="{CB430DC7-55E8-4C91-80E0-2C7BA3E14CEA}"/>
               </a:ext>
             </a:extLst>
           </p:cNvPr>
@@ -13359,7 +13875,7 @@
         </p:nvSpPr>
         <p:spPr>
           <a:xfrm xmlns:a="http://schemas.openxmlformats.org/drawingml/2006/main">
-            <a:off x="609600" y="2790825"/>
+            <a:off x="609600" y="2371725"/>
             <a:ext cx="10972800" cy="0"/>
           </a:xfrm>
           <a:prstGeom xmlns:a="http://schemas.openxmlformats.org/drawingml/2006/main" prst="line">
@@ -13377,7 +13893,7 @@
           <p:cNvPr id="6" name="">
             <a:extLst xmlns:a="http://schemas.openxmlformats.org/drawingml/2006/main">
               <a:ext uri="{FF2B5EF4-FFF2-40B4-BE49-F238E27FC236}">
-                <a16:creationId xmlns:a16="http://schemas.microsoft.com/office/drawing/2014/main" id="{4F5D591D-CB0D-4A3D-AD20-58CCF9E1CE36}"/>
+                <a16:creationId xmlns:a16="http://schemas.microsoft.com/office/drawing/2014/main" id="{2A1119C6-95BF-4A1A-AD11-E3AEECF7C0C9}"/>
               </a:ext>
             </a:extLst>
           </p:cNvPr>
@@ -13388,8 +13904,8 @@
         </p:nvSpPr>
         <p:spPr>
           <a:xfrm xmlns:a="http://schemas.openxmlformats.org/drawingml/2006/main">
-            <a:off x="609600" y="3067050"/>
-            <a:ext cx="2609850" cy="857250"/>
+            <a:off x="609600" y="2552700"/>
+            <a:ext cx="2609850" cy="771525"/>
           </a:xfrm>
           <a:prstGeom xmlns:a="http://schemas.openxmlformats.org/drawingml/2006/main" prst="rect">
             <a:avLst/>
@@ -13406,17 +13922,17 @@
           <a:lstStyle xmlns:a="http://schemas.openxmlformats.org/drawingml/2006/main"/>
           <a:p xmlns:a="http://schemas.openxmlformats.org/drawingml/2006/main">
             <a:pPr algn="l">
-              <a:defRPr sz="2325" b="1">
-                <a:solidFill>
-                  <a:srgbClr val="16343E"/>
-                </a:solidFill>
-                <a:latin typeface="Arial"/>
-                <a:ea typeface="Arial"/>
-                <a:cs typeface="Arial"/>
-              </a:defRPr>
-            </a:pPr>
-            <a:r>
-              <a:rPr sz="2325" b="1">
+              <a:defRPr sz="2175" b="1">
+                <a:solidFill>
+                  <a:srgbClr val="16343E"/>
+                </a:solidFill>
+                <a:latin typeface="Arial"/>
+                <a:ea typeface="Arial"/>
+                <a:cs typeface="Arial"/>
+              </a:defRPr>
+            </a:pPr>
+            <a:r>
+              <a:rPr sz="2175" b="1">
                 <a:solidFill>
                   <a:srgbClr val="16343E"/>
                 </a:solidFill>
@@ -13429,17 +13945,17 @@
           </a:p>
           <a:p xmlns:a="http://schemas.openxmlformats.org/drawingml/2006/main">
             <a:pPr algn="l">
-              <a:defRPr sz="2325" b="1">
-                <a:solidFill>
-                  <a:srgbClr val="16343E"/>
-                </a:solidFill>
-                <a:latin typeface="Arial"/>
-                <a:ea typeface="Arial"/>
-                <a:cs typeface="Arial"/>
-              </a:defRPr>
-            </a:pPr>
-            <a:r>
-              <a:rPr sz="2325" b="1">
+              <a:defRPr sz="2175" b="1">
+                <a:solidFill>
+                  <a:srgbClr val="16343E"/>
+                </a:solidFill>
+                <a:latin typeface="Arial"/>
+                <a:ea typeface="Arial"/>
+                <a:cs typeface="Arial"/>
+              </a:defRPr>
+            </a:pPr>
+            <a:r>
+              <a:rPr sz="2175" b="1">
                 <a:solidFill>
                   <a:srgbClr val="16343E"/>
                 </a:solidFill>
@@ -13457,7 +13973,7 @@
           <p:cNvPr id="7" name="">
             <a:extLst xmlns:a="http://schemas.openxmlformats.org/drawingml/2006/main">
               <a:ext uri="{FF2B5EF4-FFF2-40B4-BE49-F238E27FC236}">
-                <a16:creationId xmlns:a16="http://schemas.microsoft.com/office/drawing/2014/main" id="{587D9924-844B-42DC-AF11-92198606D6D1}"/>
+                <a16:creationId xmlns:a16="http://schemas.microsoft.com/office/drawing/2014/main" id="{59DC8E45-8715-4C5A-BE3C-6CEEF3D9E8A1}"/>
               </a:ext>
             </a:extLst>
           </p:cNvPr>
@@ -13468,8 +13984,8 @@
         </p:nvSpPr>
         <p:spPr>
           <a:xfrm xmlns:a="http://schemas.openxmlformats.org/drawingml/2006/main">
-            <a:off x="3476625" y="2962275"/>
-            <a:ext cx="8105775" cy="1333500"/>
+            <a:off x="3476625" y="2466975"/>
+            <a:ext cx="8105775" cy="1028700"/>
           </a:xfrm>
           <a:prstGeom xmlns:a="http://schemas.openxmlformats.org/drawingml/2006/main" prst="rect">
             <a:avLst/>
@@ -13486,71 +14002,71 @@
           <a:lstStyle xmlns:a="http://schemas.openxmlformats.org/drawingml/2006/main"/>
           <a:p xmlns:a="http://schemas.openxmlformats.org/drawingml/2006/main">
             <a:pPr algn="l">
-              <a:defRPr sz="2325" b="0">
-                <a:solidFill>
-                  <a:srgbClr val="16343E"/>
-                </a:solidFill>
-                <a:latin typeface="Arial"/>
-                <a:ea typeface="Arial"/>
-                <a:cs typeface="Arial"/>
-              </a:defRPr>
-            </a:pPr>
-            <a:r>
-              <a:rPr sz="2325" b="0">
-                <a:solidFill>
-                  <a:srgbClr val="16343E"/>
-                </a:solidFill>
-                <a:latin typeface="Arial"/>
-                <a:ea typeface="Arial"/>
-                <a:cs typeface="Arial"/>
-              </a:rPr>
-              <a:t>Higher initial molecular scores in patients who</a:t>
+              <a:defRPr sz="2100" b="0">
+                <a:solidFill>
+                  <a:srgbClr val="16343E"/>
+                </a:solidFill>
+                <a:latin typeface="Arial"/>
+                <a:ea typeface="Arial"/>
+                <a:cs typeface="Arial"/>
+              </a:defRPr>
+            </a:pPr>
+            <a:r>
+              <a:rPr sz="2100" b="0">
+                <a:solidFill>
+                  <a:srgbClr val="16343E"/>
+                </a:solidFill>
+                <a:latin typeface="Arial"/>
+                <a:ea typeface="Arial"/>
+                <a:cs typeface="Arial"/>
+              </a:rPr>
+              <a:t>Higher initial molecular scores in patients who later</a:t>
             </a:r>
           </a:p>
           <a:p xmlns:a="http://schemas.openxmlformats.org/drawingml/2006/main">
             <a:pPr algn="l">
-              <a:defRPr sz="2325" b="0">
-                <a:solidFill>
-                  <a:srgbClr val="16343E"/>
-                </a:solidFill>
-                <a:latin typeface="Arial"/>
-                <a:ea typeface="Arial"/>
-                <a:cs typeface="Arial"/>
-              </a:defRPr>
-            </a:pPr>
-            <a:r>
-              <a:rPr sz="2325" b="0">
-                <a:solidFill>
-                  <a:srgbClr val="16343E"/>
-                </a:solidFill>
-                <a:latin typeface="Arial"/>
-                <a:ea typeface="Arial"/>
-                <a:cs typeface="Arial"/>
-              </a:rPr>
-              <a:t>later developed chronic active antibody-mediated</a:t>
+              <a:defRPr sz="2100" b="0">
+                <a:solidFill>
+                  <a:srgbClr val="16343E"/>
+                </a:solidFill>
+                <a:latin typeface="Arial"/>
+                <a:ea typeface="Arial"/>
+                <a:cs typeface="Arial"/>
+              </a:defRPr>
+            </a:pPr>
+            <a:r>
+              <a:rPr sz="2100" b="0">
+                <a:solidFill>
+                  <a:srgbClr val="16343E"/>
+                </a:solidFill>
+                <a:latin typeface="Arial"/>
+                <a:ea typeface="Arial"/>
+                <a:cs typeface="Arial"/>
+              </a:rPr>
+              <a:t>developed chronic active antibody-mediated rejection,</a:t>
             </a:r>
           </a:p>
           <a:p xmlns:a="http://schemas.openxmlformats.org/drawingml/2006/main">
             <a:pPr algn="l">
-              <a:defRPr sz="2325" b="0">
-                <a:solidFill>
-                  <a:srgbClr val="16343E"/>
-                </a:solidFill>
-                <a:latin typeface="Arial"/>
-                <a:ea typeface="Arial"/>
-                <a:cs typeface="Arial"/>
-              </a:defRPr>
-            </a:pPr>
-            <a:r>
-              <a:rPr sz="2325" b="0">
-                <a:solidFill>
-                  <a:srgbClr val="16343E"/>
-                </a:solidFill>
-                <a:latin typeface="Arial"/>
-                <a:ea typeface="Arial"/>
-                <a:cs typeface="Arial"/>
-              </a:rPr>
-              <a:t>rejection, despite no initial diagnosis of it</a:t>
+              <a:defRPr sz="2100" b="0">
+                <a:solidFill>
+                  <a:srgbClr val="16343E"/>
+                </a:solidFill>
+                <a:latin typeface="Arial"/>
+                <a:ea typeface="Arial"/>
+                <a:cs typeface="Arial"/>
+              </a:defRPr>
+            </a:pPr>
+            <a:r>
+              <a:rPr sz="2100" b="0">
+                <a:solidFill>
+                  <a:srgbClr val="16343E"/>
+                </a:solidFill>
+                <a:latin typeface="Arial"/>
+                <a:ea typeface="Arial"/>
+                <a:cs typeface="Arial"/>
+              </a:rPr>
+              <a:t>despite no initial diagnosis of it</a:t>
             </a:r>
           </a:p>
         </p:txBody>
@@ -13560,7 +14076,7 @@
           <p:cNvPr id="8" name="">
             <a:extLst xmlns:a="http://schemas.openxmlformats.org/drawingml/2006/main">
               <a:ext uri="{FF2B5EF4-FFF2-40B4-BE49-F238E27FC236}">
-                <a16:creationId xmlns:a16="http://schemas.microsoft.com/office/drawing/2014/main" id="{AEAE6C24-EA5A-4EB5-8A5C-6C92CFBE30DC}"/>
+                <a16:creationId xmlns:a16="http://schemas.microsoft.com/office/drawing/2014/main" id="{3F858CA2-683E-48B4-8D22-FD68A1F61C61}"/>
               </a:ext>
             </a:extLst>
           </p:cNvPr>
@@ -13571,7 +14087,7 @@
         </p:nvSpPr>
         <p:spPr>
           <a:xfrm xmlns:a="http://schemas.openxmlformats.org/drawingml/2006/main">
-            <a:off x="609600" y="4572000"/>
+            <a:off x="609600" y="3648075"/>
             <a:ext cx="10972800" cy="0"/>
           </a:xfrm>
           <a:prstGeom xmlns:a="http://schemas.openxmlformats.org/drawingml/2006/main" prst="line">
@@ -13589,7 +14105,7 @@
           <p:cNvPr id="9" name="">
             <a:extLst xmlns:a="http://schemas.openxmlformats.org/drawingml/2006/main">
               <a:ext uri="{FF2B5EF4-FFF2-40B4-BE49-F238E27FC236}">
-                <a16:creationId xmlns:a16="http://schemas.microsoft.com/office/drawing/2014/main" id="{4BD538A9-F641-42C7-B989-E2BD32502DCF}"/>
+                <a16:creationId xmlns:a16="http://schemas.microsoft.com/office/drawing/2014/main" id="{E1ECC72D-AEBC-4041-8F02-491620920AA9}"/>
               </a:ext>
             </a:extLst>
           </p:cNvPr>
@@ -13600,8 +14116,8 @@
         </p:nvSpPr>
         <p:spPr>
           <a:xfrm xmlns:a="http://schemas.openxmlformats.org/drawingml/2006/main">
-            <a:off x="609600" y="4895850"/>
-            <a:ext cx="10972800" cy="1085850"/>
+            <a:off x="609600" y="3829050"/>
+            <a:ext cx="2609850" cy="981075"/>
           </a:xfrm>
           <a:prstGeom xmlns:a="http://schemas.openxmlformats.org/drawingml/2006/main" prst="rect">
             <a:avLst/>
@@ -13618,7 +14134,224 @@
           <a:lstStyle xmlns:a="http://schemas.openxmlformats.org/drawingml/2006/main"/>
           <a:p xmlns:a="http://schemas.openxmlformats.org/drawingml/2006/main">
             <a:pPr algn="l">
-              <a:defRPr sz="2475" b="1">
+              <a:defRPr sz="2100" b="1">
+                <a:solidFill>
+                  <a:srgbClr val="16343E"/>
+                </a:solidFill>
+                <a:latin typeface="Arial"/>
+                <a:ea typeface="Arial"/>
+                <a:cs typeface="Arial"/>
+              </a:defRPr>
+            </a:pPr>
+            <a:r>
+              <a:rPr sz="2100" b="1">
+                <a:solidFill>
+                  <a:srgbClr val="16343E"/>
+                </a:solidFill>
+                <a:latin typeface="Arial"/>
+                <a:ea typeface="Arial"/>
+                <a:cs typeface="Arial"/>
+              </a:rPr>
+              <a:t>Why incorrect</a:t>
+            </a:r>
+          </a:p>
+          <a:p xmlns:a="http://schemas.openxmlformats.org/drawingml/2006/main">
+            <a:pPr algn="l">
+              <a:defRPr sz="2100" b="1">
+                <a:solidFill>
+                  <a:srgbClr val="16343E"/>
+                </a:solidFill>
+                <a:latin typeface="Arial"/>
+                <a:ea typeface="Arial"/>
+                <a:cs typeface="Arial"/>
+              </a:defRPr>
+            </a:pPr>
+            <a:r>
+              <a:rPr sz="2100" b="1">
+                <a:solidFill>
+                  <a:srgbClr val="16343E"/>
+                </a:solidFill>
+                <a:latin typeface="Arial"/>
+                <a:ea typeface="Arial"/>
+                <a:cs typeface="Arial"/>
+              </a:rPr>
+              <a:t>rejection calls matter</a:t>
+            </a:r>
+          </a:p>
+        </p:txBody>
+      </p:sp>
+      <p:sp>
+        <p:nvSpPr>
+          <p:cNvPr id="10" name="">
+            <a:extLst xmlns:a="http://schemas.openxmlformats.org/drawingml/2006/main">
+              <a:ext uri="{FF2B5EF4-FFF2-40B4-BE49-F238E27FC236}">
+                <a16:creationId xmlns:a16="http://schemas.microsoft.com/office/drawing/2014/main" id="{F032FB58-BBDE-475A-AF7C-07746FF4FB97}"/>
+              </a:ext>
+            </a:extLst>
+          </p:cNvPr>
+          <p:cNvSpPr>
+            <a:spLocks xmlns:a="http://schemas.openxmlformats.org/drawingml/2006/main" noGrp="1"/>
+          </p:cNvSpPr>
+          <p:nvPr/>
+        </p:nvSpPr>
+        <p:spPr>
+          <a:xfrm xmlns:a="http://schemas.openxmlformats.org/drawingml/2006/main">
+            <a:off x="3476625" y="3781425"/>
+            <a:ext cx="8105775" cy="1019175"/>
+          </a:xfrm>
+          <a:prstGeom xmlns:a="http://schemas.openxmlformats.org/drawingml/2006/main" prst="rect">
+            <a:avLst/>
+          </a:prstGeom>
+          <a:noFill xmlns:a="http://schemas.openxmlformats.org/drawingml/2006/main"/>
+          <a:ln xmlns:a="http://schemas.openxmlformats.org/drawingml/2006/main" w="0">
+            <a:noFill/>
+          </a:ln>
+        </p:spPr>
+        <p:txBody>
+          <a:bodyPr xmlns:a="http://schemas.openxmlformats.org/drawingml/2006/main" anchor="ctr">
+            <a:noAutofit/>
+          </a:bodyPr>
+          <a:lstStyle xmlns:a="http://schemas.openxmlformats.org/drawingml/2006/main"/>
+          <a:p xmlns:a="http://schemas.openxmlformats.org/drawingml/2006/main">
+            <a:pPr algn="l">
+              <a:defRPr sz="2175" b="0">
+                <a:solidFill>
+                  <a:srgbClr val="16343E"/>
+                </a:solidFill>
+                <a:latin typeface="Arial"/>
+                <a:ea typeface="Arial"/>
+                <a:cs typeface="Arial"/>
+              </a:defRPr>
+            </a:pPr>
+            <a:r>
+              <a:rPr sz="2175" b="0">
+                <a:solidFill>
+                  <a:srgbClr val="16343E"/>
+                </a:solidFill>
+                <a:latin typeface="Arial"/>
+                <a:ea typeface="Arial"/>
+                <a:cs typeface="Arial"/>
+              </a:rPr>
+              <a:t>Unnecessary rejection treatment can weaken the body’s</a:t>
+            </a:r>
+          </a:p>
+          <a:p xmlns:a="http://schemas.openxmlformats.org/drawingml/2006/main">
+            <a:pPr algn="l">
+              <a:defRPr sz="2175" b="0">
+                <a:solidFill>
+                  <a:srgbClr val="16343E"/>
+                </a:solidFill>
+                <a:latin typeface="Arial"/>
+                <a:ea typeface="Arial"/>
+                <a:cs typeface="Arial"/>
+              </a:defRPr>
+            </a:pPr>
+            <a:r>
+              <a:rPr sz="2175" b="0">
+                <a:solidFill>
+                  <a:srgbClr val="16343E"/>
+                </a:solidFill>
+                <a:latin typeface="Arial"/>
+                <a:ea typeface="Arial"/>
+                <a:cs typeface="Arial"/>
+              </a:rPr>
+              <a:t>defenses and worsen an infection.</a:t>
+            </a:r>
+          </a:p>
+        </p:txBody>
+      </p:sp>
+      <p:sp>
+        <p:nvSpPr>
+          <p:cNvPr id="11" name="">
+            <a:extLst xmlns:a="http://schemas.openxmlformats.org/drawingml/2006/main">
+              <a:ext uri="{FF2B5EF4-FFF2-40B4-BE49-F238E27FC236}">
+                <a16:creationId xmlns:a16="http://schemas.microsoft.com/office/drawing/2014/main" id="{17107F7D-5FED-40E1-A405-F51AF263E978}"/>
+              </a:ext>
+            </a:extLst>
+          </p:cNvPr>
+          <p:cNvSpPr>
+            <a:spLocks xmlns:a="http://schemas.openxmlformats.org/drawingml/2006/main" noGrp="1"/>
+          </p:cNvSpPr>
+          <p:nvPr/>
+        </p:nvSpPr>
+        <p:spPr>
+          <a:xfrm xmlns:a="http://schemas.openxmlformats.org/drawingml/2006/main">
+            <a:off x="3476625" y="4829175"/>
+            <a:ext cx="8105775" cy="257175"/>
+          </a:xfrm>
+          <a:prstGeom xmlns:a="http://schemas.openxmlformats.org/drawingml/2006/main" prst="rect">
+            <a:avLst/>
+          </a:prstGeom>
+          <a:noFill xmlns:a="http://schemas.openxmlformats.org/drawingml/2006/main"/>
+          <a:ln xmlns:a="http://schemas.openxmlformats.org/drawingml/2006/main" w="0">
+            <a:noFill/>
+          </a:ln>
+        </p:spPr>
+        <p:txBody>
+          <a:bodyPr xmlns:a="http://schemas.openxmlformats.org/drawingml/2006/main" anchor="ctr">
+            <a:noAutofit/>
+          </a:bodyPr>
+          <a:lstStyle xmlns:a="http://schemas.openxmlformats.org/drawingml/2006/main"/>
+          <a:p xmlns:a="http://schemas.openxmlformats.org/drawingml/2006/main">
+            <a:pPr algn="l">
+              <a:defRPr sz="1350" b="0">
+                <a:solidFill>
+                  <a:srgbClr val="52656B"/>
+                </a:solidFill>
+                <a:latin typeface="Arial"/>
+                <a:ea typeface="Arial"/>
+                <a:cs typeface="Arial"/>
+              </a:defRPr>
+            </a:pPr>
+            <a:r>
+              <a:rPr sz="1350" b="0">
+                <a:solidFill>
+                  <a:srgbClr val="52656B"/>
+                </a:solidFill>
+                <a:latin typeface="Arial"/>
+                <a:ea typeface="Arial"/>
+                <a:cs typeface="Arial"/>
+              </a:rPr>
+              <a:t>KDIGO (2009); BK polyomavirus consensus (2024)</a:t>
+            </a:r>
+          </a:p>
+        </p:txBody>
+      </p:sp>
+      <p:sp>
+        <p:nvSpPr>
+          <p:cNvPr id="12" name="">
+            <a:extLst xmlns:a="http://schemas.openxmlformats.org/drawingml/2006/main">
+              <a:ext uri="{FF2B5EF4-FFF2-40B4-BE49-F238E27FC236}">
+                <a16:creationId xmlns:a16="http://schemas.microsoft.com/office/drawing/2014/main" id="{663C5AA1-6A21-4297-A81D-F39FD1C371FC}"/>
+              </a:ext>
+            </a:extLst>
+          </p:cNvPr>
+          <p:cNvSpPr>
+            <a:spLocks xmlns:a="http://schemas.openxmlformats.org/drawingml/2006/main" noGrp="1"/>
+          </p:cNvSpPr>
+          <p:nvPr/>
+        </p:nvSpPr>
+        <p:spPr>
+          <a:xfrm xmlns:a="http://schemas.openxmlformats.org/drawingml/2006/main">
+            <a:off x="609600" y="5286375"/>
+            <a:ext cx="10972800" cy="809625"/>
+          </a:xfrm>
+          <a:prstGeom xmlns:a="http://schemas.openxmlformats.org/drawingml/2006/main" prst="rect">
+            <a:avLst/>
+          </a:prstGeom>
+          <a:noFill xmlns:a="http://schemas.openxmlformats.org/drawingml/2006/main"/>
+          <a:ln xmlns:a="http://schemas.openxmlformats.org/drawingml/2006/main" w="0">
+            <a:noFill/>
+          </a:ln>
+        </p:spPr>
+        <p:txBody>
+          <a:bodyPr xmlns:a="http://schemas.openxmlformats.org/drawingml/2006/main" anchor="ctr">
+            <a:noAutofit/>
+          </a:bodyPr>
+          <a:lstStyle xmlns:a="http://schemas.openxmlformats.org/drawingml/2006/main"/>
+          <a:p xmlns:a="http://schemas.openxmlformats.org/drawingml/2006/main">
+            <a:pPr algn="l">
+              <a:defRPr sz="2250" b="1">
                 <a:solidFill>
                   <a:srgbClr val="007C78"/>
                 </a:solidFill>
@@ -13628,7 +14361,7 @@
               </a:defRPr>
             </a:pPr>
             <a:r>
-              <a:rPr sz="2475" b="1">
+              <a:rPr sz="2250" b="1">
                 <a:solidFill>
                   <a:srgbClr val="007C78"/>
                 </a:solidFill>
@@ -13641,7 +14374,7 @@
           </a:p>
           <a:p xmlns:a="http://schemas.openxmlformats.org/drawingml/2006/main">
             <a:pPr algn="l">
-              <a:defRPr sz="2475" b="1">
+              <a:defRPr sz="2250" b="1">
                 <a:solidFill>
                   <a:srgbClr val="007C78"/>
                 </a:solidFill>
@@ -13651,7 +14384,7 @@
               </a:defRPr>
             </a:pPr>
             <a:r>
-              <a:rPr sz="2475" b="1">
+              <a:rPr sz="2250" b="1">
                 <a:solidFill>
                   <a:srgbClr val="007C78"/>
                 </a:solidFill>
@@ -13667,7 +14400,7 @@
     </p:spTree>
     <p:extLst>
       <p:ext uri="{BB962C8B-B14F-4D97-AF65-F5344CB8AC3E}">
-        <p14:creationId xmlns:p14="http://schemas.microsoft.com/office/powerpoint/2010/main" val="678934267"/>
+        <p14:creationId xmlns:p14="http://schemas.microsoft.com/office/powerpoint/2010/main" val="1374412812"/>
       </p:ext>
     </p:extLst>
   </p:cSld>
@@ -13698,7 +14431,7 @@
           <p:cNvPr id="13" name="">
             <a:extLst xmlns:a="http://schemas.openxmlformats.org/drawingml/2006/main">
               <a:ext uri="{FF2B5EF4-FFF2-40B4-BE49-F238E27FC236}">
-                <a16:creationId xmlns:a16="http://schemas.microsoft.com/office/drawing/2014/main" id="{D1C3AF68-6122-4AC9-B4F7-8A37EB18C64F}"/>
+                <a16:creationId xmlns:a16="http://schemas.microsoft.com/office/drawing/2014/main" id="{517497A1-0C23-4806-AC7B-AAF575DBB633}"/>
               </a:ext>
             </a:extLst>
           </p:cNvPr>
@@ -13755,7 +14488,7 @@
           <p:cNvPr id="2" name="">
             <a:extLst xmlns:a="http://schemas.openxmlformats.org/drawingml/2006/main">
               <a:ext uri="{FF2B5EF4-FFF2-40B4-BE49-F238E27FC236}">
-                <a16:creationId xmlns:a16="http://schemas.microsoft.com/office/drawing/2014/main" id="{B6695A7E-DA75-47BA-A221-0FDC6C04E2C1}"/>
+                <a16:creationId xmlns:a16="http://schemas.microsoft.com/office/drawing/2014/main" id="{04EC1BB6-D4D2-467B-8E4D-1EE08DA65541}"/>
               </a:ext>
             </a:extLst>
           </p:cNvPr>
@@ -13802,7 +14535,7 @@
                 <a:ea typeface="Arial"/>
                 <a:cs typeface="Arial"/>
               </a:rPr>
-              <a:t>Sources: GSE212160; Zhang et al. (2024), Tables 5–6; project data reader</a:t>
+              <a:t>Sources: GSE212160; Zhang et al. (2024), Methods and Tables 5–6; project data reader</a:t>
             </a:r>
           </a:p>
         </p:txBody>
@@ -13812,7 +14545,7 @@
           <p:cNvPr id="3" name="">
             <a:extLst xmlns:a="http://schemas.openxmlformats.org/drawingml/2006/main">
               <a:ext uri="{FF2B5EF4-FFF2-40B4-BE49-F238E27FC236}">
-                <a16:creationId xmlns:a16="http://schemas.microsoft.com/office/drawing/2014/main" id="{2D17BDD4-B208-4689-AC28-93B3359B1426}"/>
+                <a16:creationId xmlns:a16="http://schemas.microsoft.com/office/drawing/2014/main" id="{4245295C-B14B-4CFE-BF8A-0909F342A510}"/>
               </a:ext>
             </a:extLst>
           </p:cNvPr>
@@ -13869,7 +14602,7 @@
           <p:cNvPr id="4" name="">
             <a:extLst xmlns:a="http://schemas.openxmlformats.org/drawingml/2006/main">
               <a:ext uri="{FF2B5EF4-FFF2-40B4-BE49-F238E27FC236}">
-                <a16:creationId xmlns:a16="http://schemas.microsoft.com/office/drawing/2014/main" id="{966E6ED7-54A8-449B-9EBE-673551EB4E1A}"/>
+                <a16:creationId xmlns:a16="http://schemas.microsoft.com/office/drawing/2014/main" id="{1BF2AB9C-AD2E-41C6-8B9A-F79927A20DA8}"/>
               </a:ext>
             </a:extLst>
           </p:cNvPr>
@@ -13926,7 +14659,7 @@
           <p:cNvPr id="5" name="">
             <a:extLst xmlns:a="http://schemas.openxmlformats.org/drawingml/2006/main">
               <a:ext uri="{FF2B5EF4-FFF2-40B4-BE49-F238E27FC236}">
-                <a16:creationId xmlns:a16="http://schemas.microsoft.com/office/drawing/2014/main" id="{44CF3F60-C1DD-4B6C-A1BF-C50F49AEFEDE}"/>
+                <a16:creationId xmlns:a16="http://schemas.microsoft.com/office/drawing/2014/main" id="{EF1D6A05-DCF3-4F01-9DE7-722B805433A9}"/>
               </a:ext>
             </a:extLst>
           </p:cNvPr>
@@ -13937,7 +14670,7 @@
         </p:nvSpPr>
         <p:spPr>
           <a:xfrm xmlns:a="http://schemas.openxmlformats.org/drawingml/2006/main">
-            <a:off x="609600" y="2628900"/>
+            <a:off x="609600" y="2343150"/>
             <a:ext cx="4781550" cy="447675"/>
           </a:xfrm>
           <a:prstGeom xmlns:a="http://schemas.openxmlformats.org/drawingml/2006/main" prst="rect">
@@ -13983,7 +14716,7 @@
           <p:cNvPr id="6" name="">
             <a:extLst xmlns:a="http://schemas.openxmlformats.org/drawingml/2006/main">
               <a:ext uri="{FF2B5EF4-FFF2-40B4-BE49-F238E27FC236}">
-                <a16:creationId xmlns:a16="http://schemas.microsoft.com/office/drawing/2014/main" id="{B944F978-1822-47C3-BD62-F90CF7883715}"/>
+                <a16:creationId xmlns:a16="http://schemas.microsoft.com/office/drawing/2014/main" id="{6F4DEA1B-4018-45BA-B3C1-48CB8218DAEF}"/>
               </a:ext>
             </a:extLst>
           </p:cNvPr>
@@ -13994,7 +14727,7 @@
         </p:nvSpPr>
         <p:spPr>
           <a:xfrm xmlns:a="http://schemas.openxmlformats.org/drawingml/2006/main">
-            <a:off x="6819900" y="2628900"/>
+            <a:off x="6819900" y="2343150"/>
             <a:ext cx="4762500" cy="447675"/>
           </a:xfrm>
           <a:prstGeom xmlns:a="http://schemas.openxmlformats.org/drawingml/2006/main" prst="rect">
@@ -14042,7 +14775,7 @@
           <p:nvPr/>
         </p:nvGraphicFramePr>
         <p:xfrm>
-          <a:off xmlns:a="http://schemas.openxmlformats.org/drawingml/2006/main" x="609600" y="3333750"/>
+          <a:off xmlns:a="http://schemas.openxmlformats.org/drawingml/2006/main" x="609600" y="2990850"/>
           <a:ext xmlns:a="http://schemas.openxmlformats.org/drawingml/2006/main" cx="4781550" cy="2276475"/>
         </p:xfrm>
         <a:graphic xmlns:a="http://schemas.openxmlformats.org/drawingml/2006/main">
@@ -14334,7 +15067,7 @@
           <p:nvPr/>
         </p:nvGraphicFramePr>
         <p:xfrm>
-          <a:off xmlns:a="http://schemas.openxmlformats.org/drawingml/2006/main" x="6819900" y="3333750"/>
+          <a:off xmlns:a="http://schemas.openxmlformats.org/drawingml/2006/main" x="6819900" y="2990850"/>
           <a:ext xmlns:a="http://schemas.openxmlformats.org/drawingml/2006/main" cx="4762500" cy="2276475"/>
         </p:xfrm>
         <a:graphic xmlns:a="http://schemas.openxmlformats.org/drawingml/2006/main">
@@ -14624,7 +15357,7 @@
           <p:cNvPr id="9" name="">
             <a:extLst xmlns:a="http://schemas.openxmlformats.org/drawingml/2006/main">
               <a:ext uri="{FF2B5EF4-FFF2-40B4-BE49-F238E27FC236}">
-                <a16:creationId xmlns:a16="http://schemas.microsoft.com/office/drawing/2014/main" id="{A99CF02A-1925-4033-9E34-A7EE6232B789}"/>
+                <a16:creationId xmlns:a16="http://schemas.microsoft.com/office/drawing/2014/main" id="{D9E367C0-0516-42F2-85D1-9042DE15EAD7}"/>
               </a:ext>
             </a:extLst>
           </p:cNvPr>
@@ -14635,7 +15368,7 @@
         </p:nvSpPr>
         <p:spPr>
           <a:xfrm xmlns:a="http://schemas.openxmlformats.org/drawingml/2006/main">
-            <a:off x="5391150" y="4019550"/>
+            <a:off x="5391150" y="3676650"/>
             <a:ext cx="1428750" cy="0"/>
           </a:xfrm>
           <a:prstGeom xmlns:a="http://schemas.openxmlformats.org/drawingml/2006/main" prst="line">
@@ -14653,7 +15386,7 @@
           <p:cNvPr id="10" name="">
             <a:extLst xmlns:a="http://schemas.openxmlformats.org/drawingml/2006/main">
               <a:ext uri="{FF2B5EF4-FFF2-40B4-BE49-F238E27FC236}">
-                <a16:creationId xmlns:a16="http://schemas.microsoft.com/office/drawing/2014/main" id="{88578FD9-F10A-4FF8-BACB-C87439FCD78A}"/>
+                <a16:creationId xmlns:a16="http://schemas.microsoft.com/office/drawing/2014/main" id="{8190575A-F8D9-4C93-B3D2-B23863226946}"/>
               </a:ext>
             </a:extLst>
           </p:cNvPr>
@@ -14664,7 +15397,7 @@
         </p:nvSpPr>
         <p:spPr>
           <a:xfrm xmlns:a="http://schemas.openxmlformats.org/drawingml/2006/main">
-            <a:off x="5467350" y="3619500"/>
+            <a:off x="5467350" y="3276600"/>
             <a:ext cx="1276350" cy="323850"/>
           </a:xfrm>
           <a:prstGeom xmlns:a="http://schemas.openxmlformats.org/drawingml/2006/main" prst="rect">
@@ -14710,7 +15443,7 @@
           <p:cNvPr id="11" name="">
             <a:extLst xmlns:a="http://schemas.openxmlformats.org/drawingml/2006/main">
               <a:ext uri="{FF2B5EF4-FFF2-40B4-BE49-F238E27FC236}">
-                <a16:creationId xmlns:a16="http://schemas.microsoft.com/office/drawing/2014/main" id="{58D65CD6-CA8C-4DAA-91C1-D6DA5796227E}"/>
+                <a16:creationId xmlns:a16="http://schemas.microsoft.com/office/drawing/2014/main" id="{6FC5A186-1A1A-42D1-8A13-D3BA6D88870A}"/>
               </a:ext>
             </a:extLst>
           </p:cNvPr>
@@ -14721,7 +15454,7 @@
         </p:nvSpPr>
         <p:spPr>
           <a:xfrm xmlns:a="http://schemas.openxmlformats.org/drawingml/2006/main">
-            <a:off x="5467350" y="4095750"/>
+            <a:off x="5467350" y="3752850"/>
             <a:ext cx="1276350" cy="333375"/>
           </a:xfrm>
           <a:prstGeom xmlns:a="http://schemas.openxmlformats.org/drawingml/2006/main" prst="rect">
@@ -14767,7 +15500,7 @@
           <p:cNvPr id="12" name="">
             <a:extLst xmlns:a="http://schemas.openxmlformats.org/drawingml/2006/main">
               <a:ext uri="{FF2B5EF4-FFF2-40B4-BE49-F238E27FC236}">
-                <a16:creationId xmlns:a16="http://schemas.microsoft.com/office/drawing/2014/main" id="{B5800147-36EF-4BCE-A64E-277CABDEE080}"/>
+                <a16:creationId xmlns:a16="http://schemas.microsoft.com/office/drawing/2014/main" id="{0BC0FA2D-1820-4D9A-BF5D-FEAB20B7DD22}"/>
               </a:ext>
             </a:extLst>
           </p:cNvPr>
@@ -14778,8 +15511,8 @@
         </p:nvSpPr>
         <p:spPr>
           <a:xfrm xmlns:a="http://schemas.openxmlformats.org/drawingml/2006/main">
-            <a:off x="609600" y="5810250"/>
-            <a:ext cx="10972800" cy="371475"/>
+            <a:off x="609600" y="5467350"/>
+            <a:ext cx="10972800" cy="723900"/>
           </a:xfrm>
           <a:prstGeom xmlns:a="http://schemas.openxmlformats.org/drawingml/2006/main" prst="rect">
             <a:avLst/>
@@ -14790,23 +15523,27 @@
           </a:ln>
         </p:spPr>
         <p:txBody>
-          <a:bodyPr xmlns:a="http://schemas.openxmlformats.org/drawingml/2006/main" anchor="ctr">
+          <a:bodyPr xmlns:a="http://schemas.openxmlformats.org/drawingml/2006/main" anchor="t">
             <a:noAutofit/>
           </a:bodyPr>
           <a:lstStyle xmlns:a="http://schemas.openxmlformats.org/drawingml/2006/main"/>
           <a:p xmlns:a="http://schemas.openxmlformats.org/drawingml/2006/main">
-            <a:pPr algn="l">
-              <a:defRPr sz="2025" b="0">
-                <a:solidFill>
-                  <a:srgbClr val="16343E"/>
-                </a:solidFill>
-                <a:latin typeface="Arial"/>
-                <a:ea typeface="Arial"/>
-                <a:cs typeface="Arial"/>
-              </a:defRPr>
-            </a:pPr>
-            <a:r>
-              <a:rPr sz="2025" b="0">
+            <a:pPr marL="279400" indent="-152400" algn="l">
+              <a:spcAft>
+                <a:spcPts val="800"/>
+              </a:spcAft>
+              <a:buChar char="•"/>
+              <a:defRPr sz="1875" b="0">
+                <a:solidFill>
+                  <a:srgbClr val="16343E"/>
+                </a:solidFill>
+                <a:latin typeface="Arial"/>
+                <a:ea typeface="Arial"/>
+                <a:cs typeface="Arial"/>
+              </a:defRPr>
+            </a:pPr>
+            <a:r>
+              <a:rPr sz="1875" b="0">
                 <a:solidFill>
                   <a:srgbClr val="16343E"/>
                 </a:solidFill>
@@ -14815,6 +15552,33 @@
                 <a:cs typeface="Arial"/>
               </a:rPr>
               <a:t>Includes 1,193 transplant biopsies and 202 native-kidney controls.</a:t>
+            </a:r>
+          </a:p>
+          <a:p xmlns:a="http://schemas.openxmlformats.org/drawingml/2006/main">
+            <a:pPr marL="279400" indent="-152400" algn="l">
+              <a:spcAft>
+                <a:spcPts val="800"/>
+              </a:spcAft>
+              <a:buChar char="•"/>
+              <a:defRPr sz="1875" b="0">
+                <a:solidFill>
+                  <a:srgbClr val="16343E"/>
+                </a:solidFill>
+                <a:latin typeface="Arial"/>
+                <a:ea typeface="Arial"/>
+                <a:cs typeface="Arial"/>
+              </a:defRPr>
+            </a:pPr>
+            <a:r>
+              <a:rPr sz="1875" b="0">
+                <a:solidFill>
+                  <a:srgbClr val="16343E"/>
+                </a:solidFill>
+                <a:latin typeface="Arial"/>
+                <a:ea typeface="Arial"/>
+                <a:cs typeface="Arial"/>
+              </a:rPr>
+              <a:t>The study does not document separation by patient or referring center between study groups.</a:t>
             </a:r>
           </a:p>
         </p:txBody>
@@ -14822,7 +15586,7 @@
     </p:spTree>
     <p:extLst>
       <p:ext uri="{BB962C8B-B14F-4D97-AF65-F5344CB8AC3E}">
-        <p14:creationId xmlns:p14="http://schemas.microsoft.com/office/powerpoint/2010/main" val="226790736"/>
+        <p14:creationId xmlns:p14="http://schemas.microsoft.com/office/powerpoint/2010/main" val="53266795"/>
       </p:ext>
     </p:extLst>
   </p:cSld>
@@ -14853,7 +15617,7 @@
           <p:cNvPr id="7" name="">
             <a:extLst xmlns:a="http://schemas.openxmlformats.org/drawingml/2006/main">
               <a:ext uri="{FF2B5EF4-FFF2-40B4-BE49-F238E27FC236}">
-                <a16:creationId xmlns:a16="http://schemas.microsoft.com/office/drawing/2014/main" id="{9F181F1B-25CF-4DC5-9E56-862CA3703E96}"/>
+                <a16:creationId xmlns:a16="http://schemas.microsoft.com/office/drawing/2014/main" id="{3B13B808-2BB4-4937-B684-33B4F348E3D8}"/>
               </a:ext>
             </a:extLst>
           </p:cNvPr>
@@ -14910,7 +15674,7 @@
           <p:cNvPr id="2" name="">
             <a:extLst xmlns:a="http://schemas.openxmlformats.org/drawingml/2006/main">
               <a:ext uri="{FF2B5EF4-FFF2-40B4-BE49-F238E27FC236}">
-                <a16:creationId xmlns:a16="http://schemas.microsoft.com/office/drawing/2014/main" id="{EEF9FD1E-4A1C-48A0-AA04-EA7CDF03E9DB}"/>
+                <a16:creationId xmlns:a16="http://schemas.microsoft.com/office/drawing/2014/main" id="{8B0563C3-7CC1-4BA1-BC4E-C3896C419745}"/>
               </a:ext>
             </a:extLst>
           </p:cNvPr>
@@ -14967,7 +15731,7 @@
           <p:cNvPr id="3" name="">
             <a:extLst xmlns:a="http://schemas.openxmlformats.org/drawingml/2006/main">
               <a:ext uri="{FF2B5EF4-FFF2-40B4-BE49-F238E27FC236}">
-                <a16:creationId xmlns:a16="http://schemas.microsoft.com/office/drawing/2014/main" id="{42EF78D0-302D-41D1-A494-3D8C0FF3FECA}"/>
+                <a16:creationId xmlns:a16="http://schemas.microsoft.com/office/drawing/2014/main" id="{F934B2D8-1DCD-4FAC-BC37-99F02BD24DA9}"/>
               </a:ext>
             </a:extLst>
           </p:cNvPr>
@@ -15024,7 +15788,7 @@
           <p:cNvPr id="4" name="">
             <a:extLst xmlns:a="http://schemas.openxmlformats.org/drawingml/2006/main">
               <a:ext uri="{FF2B5EF4-FFF2-40B4-BE49-F238E27FC236}">
-                <a16:creationId xmlns:a16="http://schemas.microsoft.com/office/drawing/2014/main" id="{95539E92-7929-4E7A-81FE-FB039DDDDD6D}"/>
+                <a16:creationId xmlns:a16="http://schemas.microsoft.com/office/drawing/2014/main" id="{2362F86C-0BF9-4658-BBD7-AE3E9F846C23}"/>
               </a:ext>
             </a:extLst>
           </p:cNvPr>
@@ -15504,7 +16268,7 @@
           <p:cNvPr id="6" name="">
             <a:extLst xmlns:a="http://schemas.openxmlformats.org/drawingml/2006/main">
               <a:ext uri="{FF2B5EF4-FFF2-40B4-BE49-F238E27FC236}">
-                <a16:creationId xmlns:a16="http://schemas.microsoft.com/office/drawing/2014/main" id="{DDFE2DC3-454F-40B8-A91B-E0ACF30FA75E}"/>
+                <a16:creationId xmlns:a16="http://schemas.microsoft.com/office/drawing/2014/main" id="{9F559C41-DB40-4107-9C0B-8EBA86D27B45}"/>
               </a:ext>
             </a:extLst>
           </p:cNvPr>
@@ -15559,7 +16323,7 @@
     </p:spTree>
     <p:extLst>
       <p:ext uri="{BB962C8B-B14F-4D97-AF65-F5344CB8AC3E}">
-        <p14:creationId xmlns:p14="http://schemas.microsoft.com/office/powerpoint/2010/main" val="799425300"/>
+        <p14:creationId xmlns:p14="http://schemas.microsoft.com/office/powerpoint/2010/main" val="1867624314"/>
       </p:ext>
     </p:extLst>
   </p:cSld>
@@ -15590,7 +16354,7 @@
           <p:cNvPr id="11" name="">
             <a:extLst xmlns:a="http://schemas.openxmlformats.org/drawingml/2006/main">
               <a:ext uri="{FF2B5EF4-FFF2-40B4-BE49-F238E27FC236}">
-                <a16:creationId xmlns:a16="http://schemas.microsoft.com/office/drawing/2014/main" id="{01019537-945F-459A-89CF-90B826F55CB6}"/>
+                <a16:creationId xmlns:a16="http://schemas.microsoft.com/office/drawing/2014/main" id="{8FA6ABA4-7136-4747-9567-66C3F23819FB}"/>
               </a:ext>
             </a:extLst>
           </p:cNvPr>
@@ -15647,7 +16411,7 @@
           <p:cNvPr id="2" name="">
             <a:extLst xmlns:a="http://schemas.openxmlformats.org/drawingml/2006/main">
               <a:ext uri="{FF2B5EF4-FFF2-40B4-BE49-F238E27FC236}">
-                <a16:creationId xmlns:a16="http://schemas.microsoft.com/office/drawing/2014/main" id="{C346A449-D8C1-4911-9E10-743D18204D41}"/>
+                <a16:creationId xmlns:a16="http://schemas.microsoft.com/office/drawing/2014/main" id="{B8679DE8-5A33-4F4C-A307-361D66662BAA}"/>
               </a:ext>
             </a:extLst>
           </p:cNvPr>
@@ -15704,7 +16468,7 @@
           <p:cNvPr id="3" name="">
             <a:extLst xmlns:a="http://schemas.openxmlformats.org/drawingml/2006/main">
               <a:ext uri="{FF2B5EF4-FFF2-40B4-BE49-F238E27FC236}">
-                <a16:creationId xmlns:a16="http://schemas.microsoft.com/office/drawing/2014/main" id="{8D675409-E84C-4F09-849C-E73A5AA2BD6B}"/>
+                <a16:creationId xmlns:a16="http://schemas.microsoft.com/office/drawing/2014/main" id="{A945066F-904A-4C5C-BE02-6857700C5B2F}"/>
               </a:ext>
             </a:extLst>
           </p:cNvPr>
@@ -15761,7 +16525,7 @@
           <p:cNvPr id="4" name="">
             <a:extLst xmlns:a="http://schemas.openxmlformats.org/drawingml/2006/main">
               <a:ext uri="{FF2B5EF4-FFF2-40B4-BE49-F238E27FC236}">
-                <a16:creationId xmlns:a16="http://schemas.microsoft.com/office/drawing/2014/main" id="{B70F0D56-4DFE-4846-9295-8A006A4433BD}"/>
+                <a16:creationId xmlns:a16="http://schemas.microsoft.com/office/drawing/2014/main" id="{D4435EB7-FDB9-4AC4-968B-DCB4DAD16862}"/>
               </a:ext>
             </a:extLst>
           </p:cNvPr>
@@ -15818,7 +16582,7 @@
           <p:cNvPr id="5" name="">
             <a:extLst xmlns:a="http://schemas.openxmlformats.org/drawingml/2006/main">
               <a:ext uri="{FF2B5EF4-FFF2-40B4-BE49-F238E27FC236}">
-                <a16:creationId xmlns:a16="http://schemas.microsoft.com/office/drawing/2014/main" id="{ED51939A-7B5C-4759-B6F1-ACA5B2A3A50C}"/>
+                <a16:creationId xmlns:a16="http://schemas.microsoft.com/office/drawing/2014/main" id="{289C47E9-43DD-4001-A86F-CBA8B1228B37}"/>
               </a:ext>
             </a:extLst>
           </p:cNvPr>
@@ -15875,7 +16639,7 @@
           <p:cNvPr id="6" name="">
             <a:extLst xmlns:a="http://schemas.openxmlformats.org/drawingml/2006/main">
               <a:ext uri="{FF2B5EF4-FFF2-40B4-BE49-F238E27FC236}">
-                <a16:creationId xmlns:a16="http://schemas.microsoft.com/office/drawing/2014/main" id="{2AEE672E-3E67-4831-8512-CF8B4C745ED7}"/>
+                <a16:creationId xmlns:a16="http://schemas.microsoft.com/office/drawing/2014/main" id="{1DD675FC-F32B-42AB-B917-48D75F7163BE}"/>
               </a:ext>
             </a:extLst>
           </p:cNvPr>
@@ -15932,7 +16696,7 @@
           <p:cNvPr id="7" name="">
             <a:extLst xmlns:a="http://schemas.openxmlformats.org/drawingml/2006/main">
               <a:ext uri="{FF2B5EF4-FFF2-40B4-BE49-F238E27FC236}">
-                <a16:creationId xmlns:a16="http://schemas.microsoft.com/office/drawing/2014/main" id="{8096422C-C33F-4148-990F-C180AC26D2E3}"/>
+                <a16:creationId xmlns:a16="http://schemas.microsoft.com/office/drawing/2014/main" id="{70DC698D-BDEA-4A70-8C68-3ADC74FC6EC3}"/>
               </a:ext>
             </a:extLst>
           </p:cNvPr>
@@ -16020,7 +16784,7 @@
           <p:cNvPr id="8" name="">
             <a:extLst xmlns:a="http://schemas.openxmlformats.org/drawingml/2006/main">
               <a:ext uri="{FF2B5EF4-FFF2-40B4-BE49-F238E27FC236}">
-                <a16:creationId xmlns:a16="http://schemas.microsoft.com/office/drawing/2014/main" id="{B72D3CFD-8E2E-4015-A4B1-D8EB0591A2F8}"/>
+                <a16:creationId xmlns:a16="http://schemas.microsoft.com/office/drawing/2014/main" id="{F33373E1-ADE9-476C-B000-E4341011AC2B}"/>
               </a:ext>
             </a:extLst>
           </p:cNvPr>
@@ -16077,7 +16841,7 @@
           <p:cNvPr id="9" name="">
             <a:extLst xmlns:a="http://schemas.openxmlformats.org/drawingml/2006/main">
               <a:ext uri="{FF2B5EF4-FFF2-40B4-BE49-F238E27FC236}">
-                <a16:creationId xmlns:a16="http://schemas.microsoft.com/office/drawing/2014/main" id="{D2574B07-F256-49EC-9289-551127636050}"/>
+                <a16:creationId xmlns:a16="http://schemas.microsoft.com/office/drawing/2014/main" id="{655B14D4-CDA2-44BA-A0E2-CF066D25AAFC}"/>
               </a:ext>
             </a:extLst>
           </p:cNvPr>
@@ -16134,7 +16898,7 @@
           <p:cNvPr id="10" name="">
             <a:extLst xmlns:a="http://schemas.openxmlformats.org/drawingml/2006/main">
               <a:ext uri="{FF2B5EF4-FFF2-40B4-BE49-F238E27FC236}">
-                <a16:creationId xmlns:a16="http://schemas.microsoft.com/office/drawing/2014/main" id="{6170D545-2508-4343-8ACA-E2D772387C95}"/>
+                <a16:creationId xmlns:a16="http://schemas.microsoft.com/office/drawing/2014/main" id="{A2BC13FD-3F68-46D9-8392-9EAEEB02B34F}"/>
               </a:ext>
             </a:extLst>
           </p:cNvPr>
@@ -16220,7 +16984,7 @@
     </p:spTree>
     <p:extLst>
       <p:ext uri="{BB962C8B-B14F-4D97-AF65-F5344CB8AC3E}">
-        <p14:creationId xmlns:p14="http://schemas.microsoft.com/office/powerpoint/2010/main" val="970247735"/>
+        <p14:creationId xmlns:p14="http://schemas.microsoft.com/office/powerpoint/2010/main" val="481325537"/>
       </p:ext>
     </p:extLst>
   </p:cSld>
@@ -16251,7 +17015,7 @@
           <p:cNvPr id="5" name="">
             <a:extLst xmlns:a="http://schemas.openxmlformats.org/drawingml/2006/main">
               <a:ext uri="{FF2B5EF4-FFF2-40B4-BE49-F238E27FC236}">
-                <a16:creationId xmlns:a16="http://schemas.microsoft.com/office/drawing/2014/main" id="{7482C293-6724-4227-A01C-F36D0591C4D2}"/>
+                <a16:creationId xmlns:a16="http://schemas.microsoft.com/office/drawing/2014/main" id="{998BC72A-C5D1-4659-80EB-65CA7696DF34}"/>
               </a:ext>
             </a:extLst>
           </p:cNvPr>
@@ -16308,7 +17072,7 @@
           <p:cNvPr id="2" name="">
             <a:extLst xmlns:a="http://schemas.openxmlformats.org/drawingml/2006/main">
               <a:ext uri="{FF2B5EF4-FFF2-40B4-BE49-F238E27FC236}">
-                <a16:creationId xmlns:a16="http://schemas.microsoft.com/office/drawing/2014/main" id="{F032DA67-E3B9-4FFA-8254-27CD28363CC4}"/>
+                <a16:creationId xmlns:a16="http://schemas.microsoft.com/office/drawing/2014/main" id="{44AEECC4-F095-4F81-8CA4-452EE1AD821A}"/>
               </a:ext>
             </a:extLst>
           </p:cNvPr>
@@ -16365,7 +17129,7 @@
           <p:cNvPr id="3" name="">
             <a:extLst xmlns:a="http://schemas.openxmlformats.org/drawingml/2006/main">
               <a:ext uri="{FF2B5EF4-FFF2-40B4-BE49-F238E27FC236}">
-                <a16:creationId xmlns:a16="http://schemas.microsoft.com/office/drawing/2014/main" id="{AE19C01C-B110-412E-BF1E-4F801731A45D}"/>
+                <a16:creationId xmlns:a16="http://schemas.microsoft.com/office/drawing/2014/main" id="{D1F921DB-AA27-4F56-9EDE-8F4EAC388976}"/>
               </a:ext>
             </a:extLst>
           </p:cNvPr>
@@ -16712,7 +17476,7 @@
     </p:spTree>
     <p:extLst>
       <p:ext uri="{BB962C8B-B14F-4D97-AF65-F5344CB8AC3E}">
-        <p14:creationId xmlns:p14="http://schemas.microsoft.com/office/powerpoint/2010/main" val="1728725474"/>
+        <p14:creationId xmlns:p14="http://schemas.microsoft.com/office/powerpoint/2010/main" val="603511967"/>
       </p:ext>
     </p:extLst>
   </p:cSld>
@@ -16740,10 +17504,10 @@
       </p:grpSpPr>
       <p:sp>
         <p:nvSpPr>
-          <p:cNvPr id="12" name="">
+          <p:cNvPr id="11" name="">
             <a:extLst xmlns:a="http://schemas.openxmlformats.org/drawingml/2006/main">
               <a:ext uri="{FF2B5EF4-FFF2-40B4-BE49-F238E27FC236}">
-                <a16:creationId xmlns:a16="http://schemas.microsoft.com/office/drawing/2014/main" id="{94D4CBF4-831D-43CB-93D5-E9EF4EC494C8}"/>
+                <a16:creationId xmlns:a16="http://schemas.microsoft.com/office/drawing/2014/main" id="{A32EED76-5B79-45EA-B79E-62E593160FBF}"/>
               </a:ext>
             </a:extLst>
           </p:cNvPr>
@@ -16800,7 +17564,7 @@
           <p:cNvPr id="2" name="">
             <a:extLst xmlns:a="http://schemas.openxmlformats.org/drawingml/2006/main">
               <a:ext uri="{FF2B5EF4-FFF2-40B4-BE49-F238E27FC236}">
-                <a16:creationId xmlns:a16="http://schemas.microsoft.com/office/drawing/2014/main" id="{2371D178-423C-4789-96AB-CFEF0CD862E7}"/>
+                <a16:creationId xmlns:a16="http://schemas.microsoft.com/office/drawing/2014/main" id="{303DDE87-11A4-43E5-8369-63F91B8AE660}"/>
               </a:ext>
             </a:extLst>
           </p:cNvPr>
@@ -16857,7 +17621,7 @@
           <p:cNvPr id="3" name="">
             <a:extLst xmlns:a="http://schemas.openxmlformats.org/drawingml/2006/main">
               <a:ext uri="{FF2B5EF4-FFF2-40B4-BE49-F238E27FC236}">
-                <a16:creationId xmlns:a16="http://schemas.microsoft.com/office/drawing/2014/main" id="{95427286-838E-4AAC-A869-AE1A99368BEB}"/>
+                <a16:creationId xmlns:a16="http://schemas.microsoft.com/office/drawing/2014/main" id="{5FFDEF61-9CDB-4A07-877F-75CD426FC67C}"/>
               </a:ext>
             </a:extLst>
           </p:cNvPr>
@@ -16914,7 +17678,7 @@
           <p:cNvPr id="4" name="">
             <a:extLst xmlns:a="http://schemas.openxmlformats.org/drawingml/2006/main">
               <a:ext uri="{FF2B5EF4-FFF2-40B4-BE49-F238E27FC236}">
-                <a16:creationId xmlns:a16="http://schemas.microsoft.com/office/drawing/2014/main" id="{171BD683-7896-40EE-B7BC-8D4E2C88C363}"/>
+                <a16:creationId xmlns:a16="http://schemas.microsoft.com/office/drawing/2014/main" id="{19CB5857-2414-41EF-BD6A-E7E5F588F03B}"/>
               </a:ext>
             </a:extLst>
           </p:cNvPr>
@@ -17002,7 +17766,7 @@
           <p:cNvPr id="5" name="">
             <a:extLst xmlns:a="http://schemas.openxmlformats.org/drawingml/2006/main">
               <a:ext uri="{FF2B5EF4-FFF2-40B4-BE49-F238E27FC236}">
-                <a16:creationId xmlns:a16="http://schemas.microsoft.com/office/drawing/2014/main" id="{882A0D62-1850-4028-BD5A-4DD7A40667EB}"/>
+                <a16:creationId xmlns:a16="http://schemas.microsoft.com/office/drawing/2014/main" id="{3D3CEF92-A00E-4EA1-B540-EE2232A9D827}"/>
               </a:ext>
             </a:extLst>
           </p:cNvPr>
@@ -17086,7 +17850,7 @@
           <p:cNvPr id="6" name="">
             <a:extLst xmlns:a="http://schemas.openxmlformats.org/drawingml/2006/main">
               <a:ext uri="{FF2B5EF4-FFF2-40B4-BE49-F238E27FC236}">
-                <a16:creationId xmlns:a16="http://schemas.microsoft.com/office/drawing/2014/main" id="{115DEF77-144C-476B-AA4B-415592A61FC9}"/>
+                <a16:creationId xmlns:a16="http://schemas.microsoft.com/office/drawing/2014/main" id="{A38DCAF6-EA70-4EF7-B719-FDF680382F68}"/>
               </a:ext>
             </a:extLst>
           </p:cNvPr>
@@ -17170,7 +17934,7 @@
           <p:cNvPr id="7" name="">
             <a:extLst xmlns:a="http://schemas.openxmlformats.org/drawingml/2006/main">
               <a:ext uri="{FF2B5EF4-FFF2-40B4-BE49-F238E27FC236}">
-                <a16:creationId xmlns:a16="http://schemas.microsoft.com/office/drawing/2014/main" id="{F298BDEC-EAD2-4E50-ABC3-90086D5A9C5B}"/>
+                <a16:creationId xmlns:a16="http://schemas.microsoft.com/office/drawing/2014/main" id="{2C1B96DD-6EF8-42EB-ADEE-3251F0BB2613}"/>
               </a:ext>
             </a:extLst>
           </p:cNvPr>
@@ -17251,7 +18015,7 @@
       </p:sp>
       <p:cxnSp>
         <p:nvCxnSpPr>
-          <p:cNvPr id="19" name=""/>
+          <p:cNvPr id="18" name=""/>
           <p:cNvCxnSpPr>
             <a:stCxn xmlns:a="http://schemas.openxmlformats.org/drawingml/2006/main" id="5" idx="2"/>
             <a:endCxn xmlns:a="http://schemas.openxmlformats.org/drawingml/2006/main" id="6" idx="0"/>
@@ -17279,7 +18043,7 @@
       </p:cxnSp>
       <p:cxnSp>
         <p:nvCxnSpPr>
-          <p:cNvPr id="20" name=""/>
+          <p:cNvPr id="19" name=""/>
           <p:cNvCxnSpPr>
             <a:stCxn xmlns:a="http://schemas.openxmlformats.org/drawingml/2006/main" id="5" idx="2"/>
             <a:endCxn xmlns:a="http://schemas.openxmlformats.org/drawingml/2006/main" id="7" idx="0"/>
@@ -17310,7 +18074,7 @@
           <p:cNvPr id="10" name="">
             <a:extLst xmlns:a="http://schemas.openxmlformats.org/drawingml/2006/main">
               <a:ext uri="{FF2B5EF4-FFF2-40B4-BE49-F238E27FC236}">
-                <a16:creationId xmlns:a16="http://schemas.microsoft.com/office/drawing/2014/main" id="{98619F37-A93D-4676-80D3-F5CE8C520346}"/>
+                <a16:creationId xmlns:a16="http://schemas.microsoft.com/office/drawing/2014/main" id="{D47066D6-D86B-40BF-92F1-032E797BE925}"/>
               </a:ext>
             </a:extLst>
           </p:cNvPr>
@@ -17440,67 +18204,10 @@
           </a:p>
         </p:txBody>
       </p:sp>
-      <p:sp>
-        <p:nvSpPr>
-          <p:cNvPr id="11" name="">
-            <a:extLst xmlns:a="http://schemas.openxmlformats.org/drawingml/2006/main">
-              <a:ext uri="{FF2B5EF4-FFF2-40B4-BE49-F238E27FC236}">
-                <a16:creationId xmlns:a16="http://schemas.microsoft.com/office/drawing/2014/main" id="{D0137FC3-7A2F-4997-AC1A-7CAD01E73411}"/>
-              </a:ext>
-            </a:extLst>
-          </p:cNvPr>
-          <p:cNvSpPr>
-            <a:spLocks xmlns:a="http://schemas.openxmlformats.org/drawingml/2006/main" noGrp="1"/>
-          </p:cNvSpPr>
-          <p:nvPr/>
-        </p:nvSpPr>
-        <p:spPr>
-          <a:xfrm xmlns:a="http://schemas.openxmlformats.org/drawingml/2006/main">
-            <a:off x="609600" y="5848350"/>
-            <a:ext cx="10972800" cy="342900"/>
-          </a:xfrm>
-          <a:prstGeom xmlns:a="http://schemas.openxmlformats.org/drawingml/2006/main" prst="rect">
-            <a:avLst/>
-          </a:prstGeom>
-          <a:noFill xmlns:a="http://schemas.openxmlformats.org/drawingml/2006/main"/>
-          <a:ln xmlns:a="http://schemas.openxmlformats.org/drawingml/2006/main" w="0">
-            <a:noFill/>
-          </a:ln>
-        </p:spPr>
-        <p:txBody>
-          <a:bodyPr xmlns:a="http://schemas.openxmlformats.org/drawingml/2006/main" anchor="ctr">
-            <a:noAutofit/>
-          </a:bodyPr>
-          <a:lstStyle xmlns:a="http://schemas.openxmlformats.org/drawingml/2006/main"/>
-          <a:p xmlns:a="http://schemas.openxmlformats.org/drawingml/2006/main">
-            <a:pPr algn="l">
-              <a:defRPr sz="1950" b="0">
-                <a:solidFill>
-                  <a:srgbClr val="16343E"/>
-                </a:solidFill>
-                <a:latin typeface="Arial"/>
-                <a:ea typeface="Arial"/>
-                <a:cs typeface="Arial"/>
-              </a:defRPr>
-            </a:pPr>
-            <a:r>
-              <a:rPr sz="1950" b="0">
-                <a:solidFill>
-                  <a:srgbClr val="16343E"/>
-                </a:solidFill>
-                <a:latin typeface="Arial"/>
-                <a:ea typeface="Arial"/>
-                <a:cs typeface="Arial"/>
-              </a:rPr>
-              <a:t>*Patient and referring-center separation are not documented in the study.</a:t>
-            </a:r>
-          </a:p>
-        </p:txBody>
-      </p:sp>
     </p:spTree>
     <p:extLst>
       <p:ext uri="{BB962C8B-B14F-4D97-AF65-F5344CB8AC3E}">
-        <p14:creationId xmlns:p14="http://schemas.microsoft.com/office/powerpoint/2010/main" val="793949922"/>
+        <p14:creationId xmlns:p14="http://schemas.microsoft.com/office/powerpoint/2010/main" val="782157859"/>
       </p:ext>
     </p:extLst>
   </p:cSld>

--- a/presentation/unos_kidney_biopsy.pptx
+++ b/presentation/unos_kidney_biopsy.pptx
@@ -2,36 +2,37 @@
 <file path=ppt/presentation.xml><?xml version="1.0" encoding="utf-8"?>
 <p:presentation xmlns:p="http://schemas.openxmlformats.org/presentationml/2006/main" xmlns:r="http://schemas.openxmlformats.org/officeDocument/2006/relationships">
   <p:sldMasterIdLst>
-    <p:sldMasterId id="2147483648" r:id="R7c225ff666a24f86"/>
+    <p:sldMasterId id="2147483648" r:id="R6aa170a24b4340e0"/>
   </p:sldMasterIdLst>
   <p:sldIdLst>
-    <p:sldId id="256" r:id="R0989a0ca1da64de5"/>
-    <p:sldId id="257" r:id="R5310eeb9830a4618"/>
-    <p:sldId id="258" r:id="Rff08bf3527e441e2"/>
-    <p:sldId id="259" r:id="Rff46253dc12a4256"/>
-    <p:sldId id="260" r:id="Rff63545d8a3545a1"/>
-    <p:sldId id="261" r:id="R09874e4dc9c0486d"/>
-    <p:sldId id="262" r:id="R7c0af833523946e2"/>
-    <p:sldId id="263" r:id="Rc22108eb85894f7b"/>
-    <p:sldId id="264" r:id="R86df1212b1004d79"/>
-    <p:sldId id="265" r:id="Ra7e30180903d4804"/>
-    <p:sldId id="266" r:id="R24adefa6f3434584"/>
-    <p:sldId id="267" r:id="R805c1cd95d204e1a"/>
-    <p:sldId id="268" r:id="Rf890ee60763a4caa"/>
-    <p:sldId id="269" r:id="Rfe95aab059dc4f79"/>
-    <p:sldId id="270" r:id="R2dd9f77b8c31432b"/>
-    <p:sldId id="271" r:id="Rca20f738740c4f48"/>
-    <p:sldId id="272" r:id="R725bc4d31d4d4b6c"/>
-    <p:sldId id="273" r:id="R85291651d66f42a4"/>
-    <p:sldId id="274" r:id="R0daa642d6b2d438b"/>
-    <p:sldId id="275" r:id="Rb274479f1f4e4814"/>
-    <p:sldId id="276" r:id="Rfec517323f8548ef"/>
-    <p:sldId id="277" r:id="R6308870db90d4f3b"/>
-    <p:sldId id="278" r:id="R2d454f2c40cd4238"/>
-    <p:sldId id="279" r:id="R0ca4c9fa79d34962"/>
-    <p:sldId id="280" r:id="R07998d4533c64386"/>
-    <p:sldId id="281" r:id="R09ba7aa6ebce4e57"/>
-    <p:sldId id="282" r:id="Rce23fe55c35643ba"/>
+    <p:sldId id="256" r:id="Rb8a9d4ff5c114b4d"/>
+    <p:sldId id="257" r:id="Rd1cfa362c39a4d0f"/>
+    <p:sldId id="258" r:id="R669a1701949b43ab"/>
+    <p:sldId id="259" r:id="R114cb4a482b94705"/>
+    <p:sldId id="260" r:id="R02264290dfaf4008"/>
+    <p:sldId id="261" r:id="Rab168b01868a44fc"/>
+    <p:sldId id="262" r:id="R2a4b077876e94aef"/>
+    <p:sldId id="263" r:id="R377b62088b7d4a89"/>
+    <p:sldId id="264" r:id="Rb3e8736392ac4b5d"/>
+    <p:sldId id="265" r:id="R49d4573d94844bd8"/>
+    <p:sldId id="266" r:id="Re4f2fdd002a449fb"/>
+    <p:sldId id="267" r:id="R40b860add8c0490d"/>
+    <p:sldId id="268" r:id="Ra4cca81810b24d3a"/>
+    <p:sldId id="269" r:id="R46a20048d58a4a19"/>
+    <p:sldId id="270" r:id="Rd22a3041bc5d4a22"/>
+    <p:sldId id="271" r:id="R747708837d23423a"/>
+    <p:sldId id="272" r:id="R0d3e2cc92efd428f"/>
+    <p:sldId id="273" r:id="R694ad4f27212493b"/>
+    <p:sldId id="274" r:id="Rec6cf7b1574e4a8d"/>
+    <p:sldId id="275" r:id="R4227d634ef9b4500"/>
+    <p:sldId id="276" r:id="R3d4454a4d0564758"/>
+    <p:sldId id="277" r:id="R30410cdb453144eb"/>
+    <p:sldId id="278" r:id="Rddc5eb51e4324ef8"/>
+    <p:sldId id="279" r:id="Rec7c7b38083e4cd0"/>
+    <p:sldId id="280" r:id="R6944550b5df94736"/>
+    <p:sldId id="281" r:id="R2f319dd0935548f9"/>
+    <p:sldId id="282" r:id="Ra867be7762d84d2c"/>
+    <p:sldId id="283" r:id="R7c1174a5d7c848d2"/>
   </p:sldIdLst>
   <p:sldSz cx="12192000" cy="6858000"/>
   <p:notesSz cx="6858000" cy="9144000"/>
@@ -76,7 +77,7 @@
   </p:cSld>
   <p:clrMap bg1="lt1" tx1="dk1" bg2="lt2" tx2="dk2" accent1="accent1" accent2="accent2" accent3="accent3" accent4="accent4" accent5="accent5" accent6="accent6" hlink="hlink" folHlink="folHlink"/>
   <p:sldLayoutIdLst>
-    <p:sldLayoutId xmlns:r="http://schemas.openxmlformats.org/officeDocument/2006/relationships" id="2147483649" r:id="Rf1f3bbf19cf54110"/>
+    <p:sldLayoutId xmlns:r="http://schemas.openxmlformats.org/officeDocument/2006/relationships" id="2147483649" r:id="R0f1890886f2f4f66"/>
   </p:sldLayoutIdLst>
   <p:txStyles>
     <p:titleStyle>
@@ -629,10 +630,12 @@
               <c:strCache>
                 <c:ptCount val="3"/>
                 <c:pt idx="0">
-                  <c:v>IFNG only</c:v>
+                  <c:v>IFNG only
+(Logistic regression)</c:v>
                 </c:pt>
                 <c:pt idx="1">
-                  <c:v>Logistic regression</c:v>
+                  <c:v>All RNA
+(Logistic Regression)</c:v>
                 </c:pt>
                 <c:pt idx="2">
                   <c:v>CatBoost</c:v>
@@ -676,10 +679,12 @@
               <c:strCache>
                 <c:ptCount val="3"/>
                 <c:pt idx="0">
-                  <c:v>IFNG only</c:v>
+                  <c:v>IFNG only
+(Logistic regression)</c:v>
                 </c:pt>
                 <c:pt idx="1">
-                  <c:v>Logistic regression</c:v>
+                  <c:v>All RNA
+(Logistic Regression)</c:v>
                 </c:pt>
                 <c:pt idx="2">
                   <c:v>CatBoost</c:v>
@@ -1245,7 +1250,7 @@
           <p:cNvPr id="2" name="">
             <a:extLst xmlns:a="http://schemas.openxmlformats.org/drawingml/2006/main">
               <a:ext uri="{FF2B5EF4-FFF2-40B4-BE49-F238E27FC236}">
-                <a16:creationId xmlns:a16="http://schemas.microsoft.com/office/drawing/2014/main" id="{7F41B514-C8F6-4330-9000-B3C49A6D3374}"/>
+                <a16:creationId xmlns:a16="http://schemas.microsoft.com/office/drawing/2014/main" id="{053830A3-EEC7-4B0E-81E9-471F45253A22}"/>
               </a:ext>
             </a:extLst>
           </p:cNvPr>
@@ -1346,7 +1351,7 @@
     </p:spTree>
     <p:extLst>
       <p:ext uri="{BB962C8B-B14F-4D97-AF65-F5344CB8AC3E}">
-        <p14:creationId xmlns:p14="http://schemas.microsoft.com/office/powerpoint/2010/main" val="1294290763"/>
+        <p14:creationId xmlns:p14="http://schemas.microsoft.com/office/powerpoint/2010/main" val="1672114085"/>
       </p:ext>
     </p:extLst>
   </p:cSld>
@@ -1377,7 +1382,7 @@
           <p:cNvPr id="6" name="">
             <a:extLst xmlns:a="http://schemas.openxmlformats.org/drawingml/2006/main">
               <a:ext uri="{FF2B5EF4-FFF2-40B4-BE49-F238E27FC236}">
-                <a16:creationId xmlns:a16="http://schemas.microsoft.com/office/drawing/2014/main" id="{F9A6A437-00AF-4208-9CDA-64688BBE9AB6}"/>
+                <a16:creationId xmlns:a16="http://schemas.microsoft.com/office/drawing/2014/main" id="{78192CDD-B1C2-42E2-8D2D-729A3E0435E9}"/>
               </a:ext>
             </a:extLst>
           </p:cNvPr>
@@ -1434,7 +1439,7 @@
           <p:cNvPr id="2" name="">
             <a:extLst xmlns:a="http://schemas.openxmlformats.org/drawingml/2006/main">
               <a:ext uri="{FF2B5EF4-FFF2-40B4-BE49-F238E27FC236}">
-                <a16:creationId xmlns:a16="http://schemas.microsoft.com/office/drawing/2014/main" id="{08AB12C9-386B-42E9-A42F-BF91B19C1C80}"/>
+                <a16:creationId xmlns:a16="http://schemas.microsoft.com/office/drawing/2014/main" id="{63517380-117D-4BC6-84F3-D0ABE4648B86}"/>
               </a:ext>
             </a:extLst>
           </p:cNvPr>
@@ -1491,7 +1496,7 @@
           <p:cNvPr id="3" name="">
             <a:extLst xmlns:a="http://schemas.openxmlformats.org/drawingml/2006/main">
               <a:ext uri="{FF2B5EF4-FFF2-40B4-BE49-F238E27FC236}">
-                <a16:creationId xmlns:a16="http://schemas.microsoft.com/office/drawing/2014/main" id="{9770D246-2A6F-4E14-99DC-DEA5E5C619E5}"/>
+                <a16:creationId xmlns:a16="http://schemas.microsoft.com/office/drawing/2014/main" id="{D1AAB18C-E75F-48B0-878C-895804BF773C}"/>
               </a:ext>
             </a:extLst>
           </p:cNvPr>
@@ -1548,7 +1553,7 @@
           <p:cNvPr id="4" name="">
             <a:extLst xmlns:a="http://schemas.openxmlformats.org/drawingml/2006/main">
               <a:ext uri="{FF2B5EF4-FFF2-40B4-BE49-F238E27FC236}">
-                <a16:creationId xmlns:a16="http://schemas.microsoft.com/office/drawing/2014/main" id="{C2636D61-B86C-46BA-B393-D5EEEFAD880E}"/>
+                <a16:creationId xmlns:a16="http://schemas.microsoft.com/office/drawing/2014/main" id="{757C03AB-72D9-45B5-B02C-5C0F85DB55D0}"/>
               </a:ext>
             </a:extLst>
           </p:cNvPr>
@@ -1746,6 +1751,19 @@
                         <a:t>IFNG only</a:t>
                       </a:r>
                     </a:p>
+                    <a:p>
+                      <a:r>
+                        <a:rPr sz="2175" b="0">
+                          <a:solidFill>
+                            <a:srgbClr val="16343E"/>
+                          </a:solidFill>
+                          <a:latin typeface="Arial"/>
+                          <a:ea typeface="Arial"/>
+                          <a:cs typeface="Arial"/>
+                        </a:rPr>
+                        <a:t>(Logistic regression)</a:t>
+                      </a:r>
+                    </a:p>
                   </a:txBody>
                   <a:tcPr marL="171450" marR="142875" marT="104775" marB="104775" anchor="ctr">
                     <a:solidFill>
@@ -1810,7 +1828,20 @@
                           <a:ea typeface="Arial"/>
                           <a:cs typeface="Arial"/>
                         </a:rPr>
-                        <a:t>Logistic regression</a:t>
+                        <a:t>All RNA</a:t>
+                      </a:r>
+                    </a:p>
+                    <a:p>
+                      <a:r>
+                        <a:rPr sz="2175" b="0">
+                          <a:solidFill>
+                            <a:srgbClr val="16343E"/>
+                          </a:solidFill>
+                          <a:latin typeface="Arial"/>
+                          <a:ea typeface="Arial"/>
+                          <a:cs typeface="Arial"/>
+                        </a:rPr>
+                        <a:t>(Logistic Regression)</a:t>
                       </a:r>
                     </a:p>
                   </a:txBody>
@@ -1921,7 +1952,7 @@
     </p:spTree>
     <p:extLst>
       <p:ext uri="{BB962C8B-B14F-4D97-AF65-F5344CB8AC3E}">
-        <p14:creationId xmlns:p14="http://schemas.microsoft.com/office/powerpoint/2010/main" val="1966982383"/>
+        <p14:creationId xmlns:p14="http://schemas.microsoft.com/office/powerpoint/2010/main" val="1776389490"/>
       </p:ext>
     </p:extLst>
   </p:cSld>
@@ -1952,7 +1983,7 @@
           <p:cNvPr id="17" name="">
             <a:extLst xmlns:a="http://schemas.openxmlformats.org/drawingml/2006/main">
               <a:ext uri="{FF2B5EF4-FFF2-40B4-BE49-F238E27FC236}">
-                <a16:creationId xmlns:a16="http://schemas.microsoft.com/office/drawing/2014/main" id="{82E554F0-969A-4672-ACC7-ED7AF9A8060D}"/>
+                <a16:creationId xmlns:a16="http://schemas.microsoft.com/office/drawing/2014/main" id="{5C647A27-521D-4B78-8FC2-5DB69725297E}"/>
               </a:ext>
             </a:extLst>
           </p:cNvPr>
@@ -2009,7 +2040,7 @@
           <p:cNvPr id="2" name="">
             <a:extLst xmlns:a="http://schemas.openxmlformats.org/drawingml/2006/main">
               <a:ext uri="{FF2B5EF4-FFF2-40B4-BE49-F238E27FC236}">
-                <a16:creationId xmlns:a16="http://schemas.microsoft.com/office/drawing/2014/main" id="{FC1A396B-0A57-46AC-80EF-D8B1F6C9464D}"/>
+                <a16:creationId xmlns:a16="http://schemas.microsoft.com/office/drawing/2014/main" id="{8A971F09-B754-4F30-A2F0-1874F535B141}"/>
               </a:ext>
             </a:extLst>
           </p:cNvPr>
@@ -2066,7 +2097,7 @@
           <p:cNvPr id="3" name="">
             <a:extLst xmlns:a="http://schemas.openxmlformats.org/drawingml/2006/main">
               <a:ext uri="{FF2B5EF4-FFF2-40B4-BE49-F238E27FC236}">
-                <a16:creationId xmlns:a16="http://schemas.microsoft.com/office/drawing/2014/main" id="{8FC80041-1AB7-4DC5-BA56-9302DCE52454}"/>
+                <a16:creationId xmlns:a16="http://schemas.microsoft.com/office/drawing/2014/main" id="{723AF733-B116-436E-8183-79B26D249D6E}"/>
               </a:ext>
             </a:extLst>
           </p:cNvPr>
@@ -2123,7 +2154,7 @@
           <p:cNvPr id="4" name="">
             <a:extLst xmlns:a="http://schemas.openxmlformats.org/drawingml/2006/main">
               <a:ext uri="{FF2B5EF4-FFF2-40B4-BE49-F238E27FC236}">
-                <a16:creationId xmlns:a16="http://schemas.microsoft.com/office/drawing/2014/main" id="{695FD238-7FC0-48DF-A2F9-3F50CC0370CD}"/>
+                <a16:creationId xmlns:a16="http://schemas.microsoft.com/office/drawing/2014/main" id="{DF276B88-3497-4DB9-A1A4-4DB1E0B1B80A}"/>
               </a:ext>
             </a:extLst>
           </p:cNvPr>
@@ -2180,7 +2211,7 @@
           <p:cNvPr id="5" name="">
             <a:extLst xmlns:a="http://schemas.openxmlformats.org/drawingml/2006/main">
               <a:ext uri="{FF2B5EF4-FFF2-40B4-BE49-F238E27FC236}">
-                <a16:creationId xmlns:a16="http://schemas.microsoft.com/office/drawing/2014/main" id="{628F2EC7-A2E5-4E8A-AE19-D372254C6C67}"/>
+                <a16:creationId xmlns:a16="http://schemas.microsoft.com/office/drawing/2014/main" id="{76611A0B-3A24-467B-9617-1CBFBCD6CC6B}"/>
               </a:ext>
             </a:extLst>
           </p:cNvPr>
@@ -2237,7 +2268,7 @@
           <p:cNvPr id="6" name="">
             <a:extLst xmlns:a="http://schemas.openxmlformats.org/drawingml/2006/main">
               <a:ext uri="{FF2B5EF4-FFF2-40B4-BE49-F238E27FC236}">
-                <a16:creationId xmlns:a16="http://schemas.microsoft.com/office/drawing/2014/main" id="{F938E53E-F76B-48F2-87D2-62F76F0F149F}"/>
+                <a16:creationId xmlns:a16="http://schemas.microsoft.com/office/drawing/2014/main" id="{AEE8327A-1CF4-4312-88F6-2844F3B38CD1}"/>
               </a:ext>
             </a:extLst>
           </p:cNvPr>
@@ -2266,7 +2297,7 @@
           <p:cNvPr id="7" name="">
             <a:extLst xmlns:a="http://schemas.openxmlformats.org/drawingml/2006/main">
               <a:ext uri="{FF2B5EF4-FFF2-40B4-BE49-F238E27FC236}">
-                <a16:creationId xmlns:a16="http://schemas.microsoft.com/office/drawing/2014/main" id="{452B7F36-C4DE-430D-B848-A89FE8963EE8}"/>
+                <a16:creationId xmlns:a16="http://schemas.microsoft.com/office/drawing/2014/main" id="{CA97ED30-2F9C-4923-9233-935D615DE9D8}"/>
               </a:ext>
             </a:extLst>
           </p:cNvPr>
@@ -2323,7 +2354,7 @@
           <p:cNvPr id="8" name="">
             <a:extLst xmlns:a="http://schemas.openxmlformats.org/drawingml/2006/main">
               <a:ext uri="{FF2B5EF4-FFF2-40B4-BE49-F238E27FC236}">
-                <a16:creationId xmlns:a16="http://schemas.microsoft.com/office/drawing/2014/main" id="{01DAE889-778F-42B9-8F35-B874D529D816}"/>
+                <a16:creationId xmlns:a16="http://schemas.microsoft.com/office/drawing/2014/main" id="{720E2A1F-3BB6-4A2F-91B0-9AFF8DF92B03}"/>
               </a:ext>
             </a:extLst>
           </p:cNvPr>
@@ -2380,7 +2411,7 @@
           <p:cNvPr id="9" name="">
             <a:extLst xmlns:a="http://schemas.openxmlformats.org/drawingml/2006/main">
               <a:ext uri="{FF2B5EF4-FFF2-40B4-BE49-F238E27FC236}">
-                <a16:creationId xmlns:a16="http://schemas.microsoft.com/office/drawing/2014/main" id="{CC14D9E0-A1AF-49C4-B32B-8484275CE655}"/>
+                <a16:creationId xmlns:a16="http://schemas.microsoft.com/office/drawing/2014/main" id="{77E9857B-17F0-4303-990C-5DEB49A8DE9E}"/>
               </a:ext>
             </a:extLst>
           </p:cNvPr>
@@ -2437,7 +2468,7 @@
           <p:cNvPr id="10" name="">
             <a:extLst xmlns:a="http://schemas.openxmlformats.org/drawingml/2006/main">
               <a:ext uri="{FF2B5EF4-FFF2-40B4-BE49-F238E27FC236}">
-                <a16:creationId xmlns:a16="http://schemas.microsoft.com/office/drawing/2014/main" id="{FA380D3B-F8E0-4812-9CEB-274BD74F7626}"/>
+                <a16:creationId xmlns:a16="http://schemas.microsoft.com/office/drawing/2014/main" id="{FB18350F-6227-4593-AE11-F819BCBBF3E5}"/>
               </a:ext>
             </a:extLst>
           </p:cNvPr>
@@ -2494,7 +2525,7 @@
           <p:cNvPr id="11" name="">
             <a:extLst xmlns:a="http://schemas.openxmlformats.org/drawingml/2006/main">
               <a:ext uri="{FF2B5EF4-FFF2-40B4-BE49-F238E27FC236}">
-                <a16:creationId xmlns:a16="http://schemas.microsoft.com/office/drawing/2014/main" id="{31F62A75-1633-4745-992E-8326DB939BD5}"/>
+                <a16:creationId xmlns:a16="http://schemas.microsoft.com/office/drawing/2014/main" id="{A3BEEAB5-477C-428B-B725-0F6EDDCFA586}"/>
               </a:ext>
             </a:extLst>
           </p:cNvPr>
@@ -2523,7 +2554,7 @@
           <p:cNvPr id="12" name="">
             <a:extLst xmlns:a="http://schemas.openxmlformats.org/drawingml/2006/main">
               <a:ext uri="{FF2B5EF4-FFF2-40B4-BE49-F238E27FC236}">
-                <a16:creationId xmlns:a16="http://schemas.microsoft.com/office/drawing/2014/main" id="{1A3F7D60-3ABE-476B-B5D7-46E112A80C11}"/>
+                <a16:creationId xmlns:a16="http://schemas.microsoft.com/office/drawing/2014/main" id="{C5B6BBEA-BA7B-47A3-884E-FBD443571EFF}"/>
               </a:ext>
             </a:extLst>
           </p:cNvPr>
@@ -2580,7 +2611,7 @@
           <p:cNvPr id="13" name="">
             <a:extLst xmlns:a="http://schemas.openxmlformats.org/drawingml/2006/main">
               <a:ext uri="{FF2B5EF4-FFF2-40B4-BE49-F238E27FC236}">
-                <a16:creationId xmlns:a16="http://schemas.microsoft.com/office/drawing/2014/main" id="{4E7969CB-039F-4945-89C9-D5BC125589A9}"/>
+                <a16:creationId xmlns:a16="http://schemas.microsoft.com/office/drawing/2014/main" id="{FFE4EFDD-090B-4BAB-B508-17BF1A4A520A}"/>
               </a:ext>
             </a:extLst>
           </p:cNvPr>
@@ -2637,7 +2668,7 @@
           <p:cNvPr id="14" name="">
             <a:extLst xmlns:a="http://schemas.openxmlformats.org/drawingml/2006/main">
               <a:ext uri="{FF2B5EF4-FFF2-40B4-BE49-F238E27FC236}">
-                <a16:creationId xmlns:a16="http://schemas.microsoft.com/office/drawing/2014/main" id="{2F4420A0-6058-4FC8-88FC-3B2BAD156E5F}"/>
+                <a16:creationId xmlns:a16="http://schemas.microsoft.com/office/drawing/2014/main" id="{41A684D0-AAA4-499C-A989-9F0CA5DC1753}"/>
               </a:ext>
             </a:extLst>
           </p:cNvPr>
@@ -2932,7 +2963,7 @@
           <p:cNvPr id="16" name="">
             <a:extLst xmlns:a="http://schemas.openxmlformats.org/drawingml/2006/main">
               <a:ext uri="{FF2B5EF4-FFF2-40B4-BE49-F238E27FC236}">
-                <a16:creationId xmlns:a16="http://schemas.microsoft.com/office/drawing/2014/main" id="{0AEF79EC-0BD2-4CB3-9829-EE39DA58DB2F}"/>
+                <a16:creationId xmlns:a16="http://schemas.microsoft.com/office/drawing/2014/main" id="{5E2A9AA0-6C13-4E79-B75B-F59A98537C08}"/>
               </a:ext>
             </a:extLst>
           </p:cNvPr>
@@ -2987,7 +3018,7 @@
     </p:spTree>
     <p:extLst>
       <p:ext uri="{BB962C8B-B14F-4D97-AF65-F5344CB8AC3E}">
-        <p14:creationId xmlns:p14="http://schemas.microsoft.com/office/powerpoint/2010/main" val="1632424565"/>
+        <p14:creationId xmlns:p14="http://schemas.microsoft.com/office/powerpoint/2010/main" val="857207569"/>
       </p:ext>
     </p:extLst>
   </p:cSld>
@@ -3018,7 +3049,7 @@
           <p:cNvPr id="7" name="">
             <a:extLst xmlns:a="http://schemas.openxmlformats.org/drawingml/2006/main">
               <a:ext uri="{FF2B5EF4-FFF2-40B4-BE49-F238E27FC236}">
-                <a16:creationId xmlns:a16="http://schemas.microsoft.com/office/drawing/2014/main" id="{E29C166B-21AE-414D-8C5F-DAD7A23B3B01}"/>
+                <a16:creationId xmlns:a16="http://schemas.microsoft.com/office/drawing/2014/main" id="{5C940AE1-DE54-4835-BA29-F594E62C8A2A}"/>
               </a:ext>
             </a:extLst>
           </p:cNvPr>
@@ -3075,7 +3106,7 @@
           <p:cNvPr id="2" name="">
             <a:extLst xmlns:a="http://schemas.openxmlformats.org/drawingml/2006/main">
               <a:ext uri="{FF2B5EF4-FFF2-40B4-BE49-F238E27FC236}">
-                <a16:creationId xmlns:a16="http://schemas.microsoft.com/office/drawing/2014/main" id="{07587E13-10EF-4227-B11E-14EDA6BF1CE3}"/>
+                <a16:creationId xmlns:a16="http://schemas.microsoft.com/office/drawing/2014/main" id="{11C12C9E-2FBD-4120-8065-FD1C86AE1479}"/>
               </a:ext>
             </a:extLst>
           </p:cNvPr>
@@ -3132,7 +3163,7 @@
           <p:cNvPr id="3" name="">
             <a:extLst xmlns:a="http://schemas.openxmlformats.org/drawingml/2006/main">
               <a:ext uri="{FF2B5EF4-FFF2-40B4-BE49-F238E27FC236}">
-                <a16:creationId xmlns:a16="http://schemas.microsoft.com/office/drawing/2014/main" id="{0820101C-68D0-4BDC-8031-DA39DD933195}"/>
+                <a16:creationId xmlns:a16="http://schemas.microsoft.com/office/drawing/2014/main" id="{81631855-5B35-4B6C-B76C-7D42F809444E}"/>
               </a:ext>
             </a:extLst>
           </p:cNvPr>
@@ -3189,7 +3220,7 @@
           <p:cNvPr id="4" name="">
             <a:extLst xmlns:a="http://schemas.openxmlformats.org/drawingml/2006/main">
               <a:ext uri="{FF2B5EF4-FFF2-40B4-BE49-F238E27FC236}">
-                <a16:creationId xmlns:a16="http://schemas.microsoft.com/office/drawing/2014/main" id="{363124D7-118C-40D4-A62C-1DA89D02371B}"/>
+                <a16:creationId xmlns:a16="http://schemas.microsoft.com/office/drawing/2014/main" id="{3A839108-C94E-494C-827F-1A6206C8987C}"/>
               </a:ext>
             </a:extLst>
           </p:cNvPr>
@@ -3253,7 +3284,7 @@
         </p:xfrm>
         <a:graphic xmlns:a="http://schemas.openxmlformats.org/drawingml/2006/main">
           <a:graphicData uri="http://schemas.openxmlformats.org/drawingml/2006/chart">
-            <c:chart xmlns:r="http://schemas.openxmlformats.org/officeDocument/2006/relationships" xmlns:c="http://schemas.openxmlformats.org/drawingml/2006/chart" r:id="Rca3b9ed9027f45b4"/>
+            <c:chart xmlns:r="http://schemas.openxmlformats.org/officeDocument/2006/relationships" xmlns:c="http://schemas.openxmlformats.org/drawingml/2006/chart" r:id="Rf0701bf17ef54bbf"/>
           </a:graphicData>
         </a:graphic>
       </p:graphicFrame>
@@ -3262,7 +3293,7 @@
           <p:cNvPr id="6" name="">
             <a:extLst xmlns:a="http://schemas.openxmlformats.org/drawingml/2006/main">
               <a:ext uri="{FF2B5EF4-FFF2-40B4-BE49-F238E27FC236}">
-                <a16:creationId xmlns:a16="http://schemas.microsoft.com/office/drawing/2014/main" id="{4D3133AB-F27A-444D-BA58-8510313CD4FE}"/>
+                <a16:creationId xmlns:a16="http://schemas.microsoft.com/office/drawing/2014/main" id="{758C8D1F-C68C-46C0-9DC8-7B36346A6975}"/>
               </a:ext>
             </a:extLst>
           </p:cNvPr>
@@ -3348,7 +3379,7 @@
     </p:spTree>
     <p:extLst>
       <p:ext uri="{BB962C8B-B14F-4D97-AF65-F5344CB8AC3E}">
-        <p14:creationId xmlns:p14="http://schemas.microsoft.com/office/powerpoint/2010/main" val="127773223"/>
+        <p14:creationId xmlns:p14="http://schemas.microsoft.com/office/powerpoint/2010/main" val="591472627"/>
       </p:ext>
     </p:extLst>
   </p:cSld>
@@ -3379,7 +3410,7 @@
           <p:cNvPr id="9" name="">
             <a:extLst xmlns:a="http://schemas.openxmlformats.org/drawingml/2006/main">
               <a:ext uri="{FF2B5EF4-FFF2-40B4-BE49-F238E27FC236}">
-                <a16:creationId xmlns:a16="http://schemas.microsoft.com/office/drawing/2014/main" id="{66C3FCE4-A5C2-4644-B938-F6D411D28F41}"/>
+                <a16:creationId xmlns:a16="http://schemas.microsoft.com/office/drawing/2014/main" id="{C80AAE4C-886B-45B5-B2E7-DCE15F7F0E29}"/>
               </a:ext>
             </a:extLst>
           </p:cNvPr>
@@ -3436,7 +3467,7 @@
           <p:cNvPr id="2" name="">
             <a:extLst xmlns:a="http://schemas.openxmlformats.org/drawingml/2006/main">
               <a:ext uri="{FF2B5EF4-FFF2-40B4-BE49-F238E27FC236}">
-                <a16:creationId xmlns:a16="http://schemas.microsoft.com/office/drawing/2014/main" id="{B8229517-23CD-4431-BA1B-D9D58D9133C8}"/>
+                <a16:creationId xmlns:a16="http://schemas.microsoft.com/office/drawing/2014/main" id="{7D955AE2-4864-4421-8D05-43695D13BF61}"/>
               </a:ext>
             </a:extLst>
           </p:cNvPr>
@@ -3493,7 +3524,7 @@
           <p:cNvPr id="3" name="">
             <a:extLst xmlns:a="http://schemas.openxmlformats.org/drawingml/2006/main">
               <a:ext uri="{FF2B5EF4-FFF2-40B4-BE49-F238E27FC236}">
-                <a16:creationId xmlns:a16="http://schemas.microsoft.com/office/drawing/2014/main" id="{F5B1AE7B-A413-4063-B17D-3CFBAD98B3E2}"/>
+                <a16:creationId xmlns:a16="http://schemas.microsoft.com/office/drawing/2014/main" id="{FCD32ADD-A1A9-4F9D-951C-D8534A56110B}"/>
               </a:ext>
             </a:extLst>
           </p:cNvPr>
@@ -3550,7 +3581,7 @@
           <p:cNvPr id="4" name="">
             <a:extLst xmlns:a="http://schemas.openxmlformats.org/drawingml/2006/main">
               <a:ext uri="{FF2B5EF4-FFF2-40B4-BE49-F238E27FC236}">
-                <a16:creationId xmlns:a16="http://schemas.microsoft.com/office/drawing/2014/main" id="{8739D2F5-1B34-452E-B472-AD47631A8FF2}"/>
+                <a16:creationId xmlns:a16="http://schemas.microsoft.com/office/drawing/2014/main" id="{E021A7CC-4E01-45D4-8E4E-61D356BC4EE6}"/>
               </a:ext>
             </a:extLst>
           </p:cNvPr>
@@ -3607,7 +3638,7 @@
           <p:cNvPr id="5" name="">
             <a:extLst xmlns:a="http://schemas.openxmlformats.org/drawingml/2006/main">
               <a:ext uri="{FF2B5EF4-FFF2-40B4-BE49-F238E27FC236}">
-                <a16:creationId xmlns:a16="http://schemas.microsoft.com/office/drawing/2014/main" id="{24EEABEC-FBCF-46B1-8A26-14233474A748}"/>
+                <a16:creationId xmlns:a16="http://schemas.microsoft.com/office/drawing/2014/main" id="{A4D7FF17-72DD-46AB-A181-1D224E92DA8E}"/>
               </a:ext>
             </a:extLst>
           </p:cNvPr>
@@ -3687,7 +3718,7 @@
           <p:cNvPr id="6" name="">
             <a:extLst xmlns:a="http://schemas.openxmlformats.org/drawingml/2006/main">
               <a:ext uri="{FF2B5EF4-FFF2-40B4-BE49-F238E27FC236}">
-                <a16:creationId xmlns:a16="http://schemas.microsoft.com/office/drawing/2014/main" id="{1DA375D3-44E1-43F4-9997-EA55F0CED00A}"/>
+                <a16:creationId xmlns:a16="http://schemas.microsoft.com/office/drawing/2014/main" id="{34A779BF-972D-4A71-AA95-7FB7A52BE8A3}"/>
               </a:ext>
             </a:extLst>
           </p:cNvPr>
@@ -3775,7 +3806,7 @@
           <p:cNvPr id="7" name="">
             <a:extLst xmlns:a="http://schemas.openxmlformats.org/drawingml/2006/main">
               <a:ext uri="{FF2B5EF4-FFF2-40B4-BE49-F238E27FC236}">
-                <a16:creationId xmlns:a16="http://schemas.microsoft.com/office/drawing/2014/main" id="{4FE9D7BA-71ED-4B6A-96FC-94C403EB2C0E}"/>
+                <a16:creationId xmlns:a16="http://schemas.microsoft.com/office/drawing/2014/main" id="{6E62E209-0072-47FF-BFF8-0426E02FD628}"/>
               </a:ext>
             </a:extLst>
           </p:cNvPr>
@@ -4068,7 +4099,7 @@
     </p:spTree>
     <p:extLst>
       <p:ext uri="{BB962C8B-B14F-4D97-AF65-F5344CB8AC3E}">
-        <p14:creationId xmlns:p14="http://schemas.microsoft.com/office/powerpoint/2010/main" val="1169880390"/>
+        <p14:creationId xmlns:p14="http://schemas.microsoft.com/office/powerpoint/2010/main" val="1992736716"/>
       </p:ext>
     </p:extLst>
   </p:cSld>
@@ -4096,10 +4127,10 @@
       </p:grpSpPr>
       <p:sp>
         <p:nvSpPr>
-          <p:cNvPr id="9" name="">
-            <a:extLst xmlns:a="http://schemas.openxmlformats.org/drawingml/2006/main">
-              <a:ext uri="{FF2B5EF4-FFF2-40B4-BE49-F238E27FC236}">
-                <a16:creationId xmlns:a16="http://schemas.microsoft.com/office/drawing/2014/main" id="{AB60851F-0479-427C-A7B9-36EE11BF2B56}"/>
+          <p:cNvPr id="12" name="">
+            <a:extLst xmlns:a="http://schemas.openxmlformats.org/drawingml/2006/main">
+              <a:ext uri="{FF2B5EF4-FFF2-40B4-BE49-F238E27FC236}">
+                <a16:creationId xmlns:a16="http://schemas.microsoft.com/office/drawing/2014/main" id="{2D2D6C23-0A98-48FF-9285-76E573259D25}"/>
               </a:ext>
             </a:extLst>
           </p:cNvPr>
@@ -4156,7 +4187,7 @@
           <p:cNvPr id="2" name="">
             <a:extLst xmlns:a="http://schemas.openxmlformats.org/drawingml/2006/main">
               <a:ext uri="{FF2B5EF4-FFF2-40B4-BE49-F238E27FC236}">
-                <a16:creationId xmlns:a16="http://schemas.microsoft.com/office/drawing/2014/main" id="{565D2DDF-7B50-4590-A645-158627A5E58F}"/>
+                <a16:creationId xmlns:a16="http://schemas.microsoft.com/office/drawing/2014/main" id="{7462FE3B-D308-4693-A8C5-E74228D3DAF1}"/>
               </a:ext>
             </a:extLst>
           </p:cNvPr>
@@ -4213,7 +4244,7 @@
           <p:cNvPr id="3" name="">
             <a:extLst xmlns:a="http://schemas.openxmlformats.org/drawingml/2006/main">
               <a:ext uri="{FF2B5EF4-FFF2-40B4-BE49-F238E27FC236}">
-                <a16:creationId xmlns:a16="http://schemas.microsoft.com/office/drawing/2014/main" id="{8D610B85-A8AF-42BF-BDED-27C0FCA34A78}"/>
+                <a16:creationId xmlns:a16="http://schemas.microsoft.com/office/drawing/2014/main" id="{4C906FD0-E5D5-4CA4-B826-4FB0CA4EDB9F}"/>
               </a:ext>
             </a:extLst>
           </p:cNvPr>
@@ -4270,18 +4301,18 @@
           <p:cNvPr id="4" name="">
             <a:extLst xmlns:a="http://schemas.openxmlformats.org/drawingml/2006/main">
               <a:ext uri="{FF2B5EF4-FFF2-40B4-BE49-F238E27FC236}">
-                <a16:creationId xmlns:a16="http://schemas.microsoft.com/office/drawing/2014/main" id="{5ED566BB-48A8-464A-B01B-E06B95162047}"/>
-              </a:ext>
-            </a:extLst>
-          </p:cNvPr>
-          <p:cNvSpPr>
-            <a:spLocks xmlns:a="http://schemas.openxmlformats.org/drawingml/2006/main" noGrp="1"/>
-          </p:cNvSpPr>
-          <p:nvPr/>
-        </p:nvSpPr>
-        <p:spPr>
-          <a:xfrm xmlns:a="http://schemas.openxmlformats.org/drawingml/2006/main">
-            <a:off x="609600" y="1609725"/>
+                <a16:creationId xmlns:a16="http://schemas.microsoft.com/office/drawing/2014/main" id="{F2ED0915-1FB8-4A26-AC5A-897C53250384}"/>
+              </a:ext>
+            </a:extLst>
+          </p:cNvPr>
+          <p:cNvSpPr>
+            <a:spLocks xmlns:a="http://schemas.openxmlformats.org/drawingml/2006/main" noGrp="1"/>
+          </p:cNvSpPr>
+          <p:nvPr/>
+        </p:nvSpPr>
+        <p:spPr>
+          <a:xfrm xmlns:a="http://schemas.openxmlformats.org/drawingml/2006/main">
+            <a:off x="609600" y="1514475"/>
             <a:ext cx="10972800" cy="457200"/>
           </a:xfrm>
           <a:prstGeom xmlns:a="http://schemas.openxmlformats.org/drawingml/2006/main" prst="rect">
@@ -4299,25 +4330,25 @@
           <a:lstStyle xmlns:a="http://schemas.openxmlformats.org/drawingml/2006/main"/>
           <a:p xmlns:a="http://schemas.openxmlformats.org/drawingml/2006/main">
             <a:pPr algn="l">
-              <a:defRPr sz="2475" b="1">
-                <a:solidFill>
-                  <a:srgbClr val="16343E"/>
-                </a:solidFill>
-                <a:latin typeface="Arial"/>
-                <a:ea typeface="Arial"/>
-                <a:cs typeface="Arial"/>
-              </a:defRPr>
-            </a:pPr>
-            <a:r>
-              <a:rPr sz="2475" b="1">
-                <a:solidFill>
-                  <a:srgbClr val="16343E"/>
-                </a:solidFill>
-                <a:latin typeface="Arial"/>
-                <a:ea typeface="Arial"/>
-                <a:cs typeface="Arial"/>
-              </a:rPr>
-              <a:t>CatBoost versus logistic regression</a:t>
+              <a:defRPr sz="2400" b="1">
+                <a:solidFill>
+                  <a:srgbClr val="16343E"/>
+                </a:solidFill>
+                <a:latin typeface="Arial"/>
+                <a:ea typeface="Arial"/>
+                <a:cs typeface="Arial"/>
+              </a:defRPr>
+            </a:pPr>
+            <a:r>
+              <a:rPr sz="2400" b="1">
+                <a:solidFill>
+                  <a:srgbClr val="16343E"/>
+                </a:solidFill>
+                <a:latin typeface="Arial"/>
+                <a:ea typeface="Arial"/>
+                <a:cs typeface="Arial"/>
+              </a:rPr>
+              <a:t>CatBoost versus All RNA (Logistic Regression)</a:t>
             </a:r>
           </a:p>
         </p:txBody>
@@ -4327,134 +4358,19 @@
           <p:cNvPr id="5" name="">
             <a:extLst xmlns:a="http://schemas.openxmlformats.org/drawingml/2006/main">
               <a:ext uri="{FF2B5EF4-FFF2-40B4-BE49-F238E27FC236}">
-                <a16:creationId xmlns:a16="http://schemas.microsoft.com/office/drawing/2014/main" id="{7791DAE0-4627-4BD5-B4E0-B7295939D6F2}"/>
-              </a:ext>
-            </a:extLst>
-          </p:cNvPr>
-          <p:cNvSpPr>
-            <a:spLocks xmlns:a="http://schemas.openxmlformats.org/drawingml/2006/main" noGrp="1"/>
-          </p:cNvSpPr>
-          <p:nvPr/>
-        </p:nvSpPr>
-        <p:spPr>
-          <a:xfrm xmlns:a="http://schemas.openxmlformats.org/drawingml/2006/main">
-            <a:off x="609600" y="2190750"/>
-            <a:ext cx="10972800" cy="1428750"/>
-          </a:xfrm>
-          <a:prstGeom xmlns:a="http://schemas.openxmlformats.org/drawingml/2006/main" prst="rect">
-            <a:avLst/>
-          </a:prstGeom>
-          <a:noFill xmlns:a="http://schemas.openxmlformats.org/drawingml/2006/main"/>
-          <a:ln xmlns:a="http://schemas.openxmlformats.org/drawingml/2006/main" w="0">
-            <a:noFill/>
-          </a:ln>
-        </p:spPr>
-        <p:txBody>
-          <a:bodyPr xmlns:a="http://schemas.openxmlformats.org/drawingml/2006/main" anchor="t">
-            <a:noAutofit/>
-          </a:bodyPr>
-          <a:lstStyle xmlns:a="http://schemas.openxmlformats.org/drawingml/2006/main"/>
-          <a:p xmlns:a="http://schemas.openxmlformats.org/drawingml/2006/main">
-            <a:pPr marL="279400" indent="-152400" algn="l">
-              <a:spcAft>
-                <a:spcPts val="900"/>
-              </a:spcAft>
-              <a:buChar char="•"/>
-              <a:defRPr sz="2325" b="0">
-                <a:solidFill>
-                  <a:srgbClr val="16343E"/>
-                </a:solidFill>
-                <a:latin typeface="Arial"/>
-                <a:ea typeface="Arial"/>
-                <a:cs typeface="Arial"/>
-              </a:defRPr>
-            </a:pPr>
-            <a:r>
-              <a:rPr sz="2325" b="0">
-                <a:solidFill>
-                  <a:srgbClr val="16343E"/>
-                </a:solidFill>
-                <a:latin typeface="Arial"/>
-                <a:ea typeface="Arial"/>
-                <a:cs typeface="Arial"/>
-              </a:rPr>
-              <a:t>8 fewer misses among the same 169 rejection specimens.</a:t>
-            </a:r>
-          </a:p>
-          <a:p xmlns:a="http://schemas.openxmlformats.org/drawingml/2006/main">
-            <a:pPr marL="279400" indent="-152400" algn="l">
-              <a:spcAft>
-                <a:spcPts val="900"/>
-              </a:spcAft>
-              <a:buChar char="•"/>
-              <a:defRPr sz="2325" b="0">
-                <a:solidFill>
-                  <a:srgbClr val="16343E"/>
-                </a:solidFill>
-                <a:latin typeface="Arial"/>
-                <a:ea typeface="Arial"/>
-                <a:cs typeface="Arial"/>
-              </a:defRPr>
-            </a:pPr>
-            <a:r>
-              <a:rPr sz="2325" b="0">
-                <a:solidFill>
-                  <a:srgbClr val="16343E"/>
-                </a:solidFill>
-                <a:latin typeface="Arial"/>
-                <a:ea typeface="Arial"/>
-                <a:cs typeface="Arial"/>
-              </a:rPr>
-              <a:t>Both make 8 false flags among 176 no-rejection specimens.</a:t>
-            </a:r>
-          </a:p>
-          <a:p xmlns:a="http://schemas.openxmlformats.org/drawingml/2006/main">
-            <a:pPr marL="279400" indent="-152400" algn="l">
-              <a:spcAft>
-                <a:spcPts val="900"/>
-              </a:spcAft>
-              <a:buChar char="•"/>
-              <a:defRPr sz="2325" b="0">
-                <a:solidFill>
-                  <a:srgbClr val="16343E"/>
-                </a:solidFill>
-                <a:latin typeface="Arial"/>
-                <a:ea typeface="Arial"/>
-                <a:cs typeface="Arial"/>
-              </a:defRPr>
-            </a:pPr>
-            <a:r>
-              <a:rPr sz="2325" b="0">
-                <a:solidFill>
-                  <a:srgbClr val="16343E"/>
-                </a:solidFill>
-                <a:latin typeface="Arial"/>
-                <a:ea typeface="Arial"/>
-                <a:cs typeface="Arial"/>
-              </a:rPr>
-              <a:t>The 95% interval for the detection advantage includes zero.</a:t>
-            </a:r>
-          </a:p>
-        </p:txBody>
-      </p:sp>
-      <p:sp>
-        <p:nvSpPr>
-          <p:cNvPr id="6" name="">
-            <a:extLst xmlns:a="http://schemas.openxmlformats.org/drawingml/2006/main">
-              <a:ext uri="{FF2B5EF4-FFF2-40B4-BE49-F238E27FC236}">
-                <a16:creationId xmlns:a16="http://schemas.microsoft.com/office/drawing/2014/main" id="{506E2892-5F71-402B-ADC5-17B71B5D59DF}"/>
-              </a:ext>
-            </a:extLst>
-          </p:cNvPr>
-          <p:cNvSpPr>
-            <a:spLocks xmlns:a="http://schemas.openxmlformats.org/drawingml/2006/main" noGrp="1"/>
-          </p:cNvSpPr>
-          <p:nvPr/>
-        </p:nvSpPr>
-        <p:spPr>
-          <a:xfrm xmlns:a="http://schemas.openxmlformats.org/drawingml/2006/main">
-            <a:off x="609600" y="3924300"/>
-            <a:ext cx="10972800" cy="457200"/>
+                <a16:creationId xmlns:a16="http://schemas.microsoft.com/office/drawing/2014/main" id="{2AA5978B-3413-4654-AC74-94384431F552}"/>
+              </a:ext>
+            </a:extLst>
+          </p:cNvPr>
+          <p:cNvSpPr>
+            <a:spLocks xmlns:a="http://schemas.openxmlformats.org/drawingml/2006/main" noGrp="1"/>
+          </p:cNvSpPr>
+          <p:nvPr/>
+        </p:nvSpPr>
+        <p:spPr>
+          <a:xfrm xmlns:a="http://schemas.openxmlformats.org/drawingml/2006/main">
+            <a:off x="609600" y="2019300"/>
+            <a:ext cx="10972800" cy="419100"/>
           </a:xfrm>
           <a:prstGeom xmlns:a="http://schemas.openxmlformats.org/drawingml/2006/main" prst="rect">
             <a:avLst/>
@@ -4471,177 +4387,47 @@
           <a:lstStyle xmlns:a="http://schemas.openxmlformats.org/drawingml/2006/main"/>
           <a:p xmlns:a="http://schemas.openxmlformats.org/drawingml/2006/main">
             <a:pPr algn="l">
-              <a:defRPr sz="2475" b="1">
-                <a:solidFill>
-                  <a:srgbClr val="16343E"/>
-                </a:solidFill>
-                <a:latin typeface="Arial"/>
-                <a:ea typeface="Arial"/>
-                <a:cs typeface="Arial"/>
-              </a:defRPr>
-            </a:pPr>
-            <a:r>
-              <a:rPr sz="2475" b="1">
-                <a:solidFill>
-                  <a:srgbClr val="16343E"/>
-                </a:solidFill>
-                <a:latin typeface="Arial"/>
-                <a:ea typeface="Arial"/>
-                <a:cs typeface="Arial"/>
-              </a:rPr>
-              <a:t>Model choice across 20 development splits</a:t>
+              <a:defRPr sz="2175" b="0">
+                <a:solidFill>
+                  <a:srgbClr val="007C78"/>
+                </a:solidFill>
+                <a:latin typeface="Arial"/>
+                <a:ea typeface="Arial"/>
+                <a:cs typeface="Arial"/>
+              </a:defRPr>
+            </a:pPr>
+            <a:r>
+              <a:rPr sz="2175" b="0">
+                <a:solidFill>
+                  <a:srgbClr val="007C78"/>
+                </a:solidFill>
+                <a:latin typeface="Arial"/>
+                <a:ea typeface="Arial"/>
+                <a:cs typeface="Arial"/>
+              </a:rPr>
+              <a:t>Observed recall difference: +4.73 percentage points (8 / 169 specimens).</a:t>
             </a:r>
           </a:p>
         </p:txBody>
       </p:sp>
-      <p:graphicFrame>
-        <p:nvGraphicFramePr>
-          <p:cNvPr id="15" name=""/>
-          <p:cNvGraphicFramePr/>
-          <p:nvPr/>
-        </p:nvGraphicFramePr>
-        <p:xfrm>
-          <a:off xmlns:a="http://schemas.openxmlformats.org/drawingml/2006/main" x="609600" y="4562475"/>
-          <a:ext xmlns:a="http://schemas.openxmlformats.org/drawingml/2006/main" cx="10972800" cy="1066800"/>
-        </p:xfrm>
-        <a:graphic xmlns:a="http://schemas.openxmlformats.org/drawingml/2006/main">
-          <a:graphicData uri="http://schemas.openxmlformats.org/drawingml/2006/table">
-            <a:tbl>
-              <a:tblPr/>
-              <a:tblGrid>
-                <a:gridCol w="5486400"/>
-                <a:gridCol w="5486400"/>
-              </a:tblGrid>
-              <a:tr h="533400">
-                <a:tc>
-                  <a:txBody>
-                    <a:bodyPr>
-                      <a:noAutofit/>
-                    </a:bodyPr>
-                    <a:lstStyle/>
-                    <a:p>
-                      <a:r>
-                        <a:rPr sz="2250" b="1">
-                          <a:solidFill>
-                            <a:srgbClr val="FFFFFF"/>
-                          </a:solidFill>
-                          <a:latin typeface="Arial"/>
-                          <a:ea typeface="Arial"/>
-                          <a:cs typeface="Arial"/>
-                        </a:rPr>
-                        <a:t>CatBoost</a:t>
-                      </a:r>
-                    </a:p>
-                  </a:txBody>
-                  <a:tcPr marL="171450" marR="142875" marT="104775" marB="104775" anchor="ctr">
-                    <a:solidFill>
-                      <a:srgbClr val="16343E"/>
-                    </a:solidFill>
-                  </a:tcPr>
-                </a:tc>
-                <a:tc>
-                  <a:txBody>
-                    <a:bodyPr>
-                      <a:noAutofit/>
-                    </a:bodyPr>
-                    <a:lstStyle/>
-                    <a:p>
-                      <a:r>
-                        <a:rPr sz="2250" b="1">
-                          <a:solidFill>
-                            <a:srgbClr val="FFFFFF"/>
-                          </a:solidFill>
-                          <a:latin typeface="Arial"/>
-                          <a:ea typeface="Arial"/>
-                          <a:cs typeface="Arial"/>
-                        </a:rPr>
-                        <a:t>Logistic regression</a:t>
-                      </a:r>
-                    </a:p>
-                  </a:txBody>
-                  <a:tcPr marL="171450" marR="142875" marT="104775" marB="104775" anchor="ctr">
-                    <a:solidFill>
-                      <a:srgbClr val="16343E"/>
-                    </a:solidFill>
-                  </a:tcPr>
-                </a:tc>
-              </a:tr>
-              <a:tr h="533400">
-                <a:tc>
-                  <a:txBody>
-                    <a:bodyPr>
-                      <a:noAutofit/>
-                    </a:bodyPr>
-                    <a:lstStyle/>
-                    <a:p>
-                      <a:r>
-                        <a:rPr sz="2250" b="0">
-                          <a:solidFill>
-                            <a:srgbClr val="16343E"/>
-                          </a:solidFill>
-                          <a:latin typeface="Arial"/>
-                          <a:ea typeface="Arial"/>
-                          <a:cs typeface="Arial"/>
-                        </a:rPr>
-                        <a:t>13 selections</a:t>
-                      </a:r>
-                    </a:p>
-                  </a:txBody>
-                  <a:tcPr marL="171450" marR="142875" marT="104775" marB="104775" anchor="ctr">
-                    <a:solidFill>
-                      <a:srgbClr val="FFFFFF"/>
-                    </a:solidFill>
-                  </a:tcPr>
-                </a:tc>
-                <a:tc>
-                  <a:txBody>
-                    <a:bodyPr>
-                      <a:noAutofit/>
-                    </a:bodyPr>
-                    <a:lstStyle/>
-                    <a:p>
-                      <a:r>
-                        <a:rPr sz="2250" b="0">
-                          <a:solidFill>
-                            <a:srgbClr val="16343E"/>
-                          </a:solidFill>
-                          <a:latin typeface="Arial"/>
-                          <a:ea typeface="Arial"/>
-                          <a:cs typeface="Arial"/>
-                        </a:rPr>
-                        <a:t>7 selections</a:t>
-                      </a:r>
-                    </a:p>
-                  </a:txBody>
-                  <a:tcPr marL="171450" marR="142875" marT="104775" marB="104775" anchor="ctr">
-                    <a:solidFill>
-                      <a:srgbClr val="FFFFFF"/>
-                    </a:solidFill>
-                  </a:tcPr>
-                </a:tc>
-              </a:tr>
-            </a:tbl>
-          </a:graphicData>
-        </a:graphic>
-      </p:graphicFrame>
-      <p:sp>
-        <p:nvSpPr>
-          <p:cNvPr id="8" name="">
-            <a:extLst xmlns:a="http://schemas.openxmlformats.org/drawingml/2006/main">
-              <a:ext uri="{FF2B5EF4-FFF2-40B4-BE49-F238E27FC236}">
-                <a16:creationId xmlns:a16="http://schemas.microsoft.com/office/drawing/2014/main" id="{F71E7439-1C34-45E0-ADC4-63B9CB307565}"/>
-              </a:ext>
-            </a:extLst>
-          </p:cNvPr>
-          <p:cNvSpPr>
-            <a:spLocks xmlns:a="http://schemas.openxmlformats.org/drawingml/2006/main" noGrp="1"/>
-          </p:cNvSpPr>
-          <p:nvPr/>
-        </p:nvSpPr>
-        <p:spPr>
-          <a:xfrm xmlns:a="http://schemas.openxmlformats.org/drawingml/2006/main">
-            <a:off x="609600" y="5905500"/>
-            <a:ext cx="10972800" cy="295275"/>
+      <p:sp>
+        <p:nvSpPr>
+          <p:cNvPr id="6" name="">
+            <a:extLst xmlns:a="http://schemas.openxmlformats.org/drawingml/2006/main">
+              <a:ext uri="{FF2B5EF4-FFF2-40B4-BE49-F238E27FC236}">
+                <a16:creationId xmlns:a16="http://schemas.microsoft.com/office/drawing/2014/main" id="{1BD05947-A7EF-4D70-B214-7EC2377CD1B3}"/>
+              </a:ext>
+            </a:extLst>
+          </p:cNvPr>
+          <p:cNvSpPr>
+            <a:spLocks xmlns:a="http://schemas.openxmlformats.org/drawingml/2006/main" noGrp="1"/>
+          </p:cNvSpPr>
+          <p:nvPr/>
+        </p:nvSpPr>
+        <p:spPr>
+          <a:xfrm xmlns:a="http://schemas.openxmlformats.org/drawingml/2006/main">
+            <a:off x="609600" y="2609850"/>
+            <a:ext cx="10972800" cy="409575"/>
           </a:xfrm>
           <a:prstGeom xmlns:a="http://schemas.openxmlformats.org/drawingml/2006/main" prst="rect">
             <a:avLst/>
@@ -4658,25 +4444,333 @@
           <a:lstStyle xmlns:a="http://schemas.openxmlformats.org/drawingml/2006/main"/>
           <a:p xmlns:a="http://schemas.openxmlformats.org/drawingml/2006/main">
             <a:pPr algn="l">
-              <a:defRPr sz="2025" b="0">
-                <a:solidFill>
-                  <a:srgbClr val="16343E"/>
-                </a:solidFill>
-                <a:latin typeface="Arial"/>
-                <a:ea typeface="Arial"/>
-                <a:cs typeface="Arial"/>
-              </a:defRPr>
-            </a:pPr>
-            <a:r>
-              <a:rPr sz="2025" b="0">
-                <a:solidFill>
-                  <a:srgbClr val="16343E"/>
-                </a:solidFill>
-                <a:latin typeface="Arial"/>
-                <a:ea typeface="Arial"/>
-                <a:cs typeface="Arial"/>
-              </a:rPr>
-              <a:t>The splits overlap. These counts describe variation in model choice.</a:t>
+              <a:defRPr sz="2400" b="1">
+                <a:solidFill>
+                  <a:srgbClr val="16343E"/>
+                </a:solidFill>
+                <a:latin typeface="Arial"/>
+                <a:ea typeface="Arial"/>
+                <a:cs typeface="Arial"/>
+              </a:defRPr>
+            </a:pPr>
+            <a:r>
+              <a:rPr sz="2400" b="1">
+                <a:solidFill>
+                  <a:srgbClr val="16343E"/>
+                </a:solidFill>
+                <a:latin typeface="Arial"/>
+                <a:ea typeface="Arial"/>
+                <a:cs typeface="Arial"/>
+              </a:rPr>
+              <a:t>How I calculated the 95% confidence interval</a:t>
+            </a:r>
+          </a:p>
+        </p:txBody>
+      </p:sp>
+      <p:sp>
+        <p:nvSpPr>
+          <p:cNvPr id="7" name="">
+            <a:extLst xmlns:a="http://schemas.openxmlformats.org/drawingml/2006/main">
+              <a:ext uri="{FF2B5EF4-FFF2-40B4-BE49-F238E27FC236}">
+                <a16:creationId xmlns:a16="http://schemas.microsoft.com/office/drawing/2014/main" id="{6471CF54-1415-4BAB-AB84-FB23602D0D1D}"/>
+              </a:ext>
+            </a:extLst>
+          </p:cNvPr>
+          <p:cNvSpPr>
+            <a:spLocks xmlns:a="http://schemas.openxmlformats.org/drawingml/2006/main" noGrp="1"/>
+          </p:cNvSpPr>
+          <p:nvPr/>
+        </p:nvSpPr>
+        <p:spPr>
+          <a:xfrm xmlns:a="http://schemas.openxmlformats.org/drawingml/2006/main">
+            <a:off x="609600" y="3076575"/>
+            <a:ext cx="10972800" cy="533400"/>
+          </a:xfrm>
+          <a:prstGeom xmlns:a="http://schemas.openxmlformats.org/drawingml/2006/main" prst="rect">
+            <a:avLst/>
+          </a:prstGeom>
+          <a:noFill xmlns:a="http://schemas.openxmlformats.org/drawingml/2006/main"/>
+          <a:ln xmlns:a="http://schemas.openxmlformats.org/drawingml/2006/main" w="0">
+            <a:noFill/>
+          </a:ln>
+        </p:spPr>
+        <p:txBody>
+          <a:bodyPr xmlns:a="http://schemas.openxmlformats.org/drawingml/2006/main" anchor="ctr">
+            <a:noAutofit/>
+          </a:bodyPr>
+          <a:lstStyle xmlns:a="http://schemas.openxmlformats.org/drawingml/2006/main"/>
+          <a:p xmlns:a="http://schemas.openxmlformats.org/drawingml/2006/main">
+            <a:pPr algn="l">
+              <a:defRPr sz="2100" b="0">
+                <a:solidFill>
+                  <a:srgbClr val="16343E"/>
+                </a:solidFill>
+                <a:latin typeface="Arial"/>
+                <a:ea typeface="Arial"/>
+                <a:cs typeface="Arial"/>
+              </a:defRPr>
+            </a:pPr>
+            <a:r>
+              <a:rPr sz="2100" b="0">
+                <a:solidFill>
+                  <a:srgbClr val="16343E"/>
+                </a:solidFill>
+                <a:latin typeface="Arial"/>
+                <a:ea typeface="Arial"/>
+                <a:cs typeface="Arial"/>
+              </a:rPr>
+              <a:t>1. I drew 2,000 resamples of the 345 validation specimens, with replacement.</a:t>
+            </a:r>
+          </a:p>
+        </p:txBody>
+      </p:sp>
+      <p:sp>
+        <p:nvSpPr>
+          <p:cNvPr id="8" name="">
+            <a:extLst xmlns:a="http://schemas.openxmlformats.org/drawingml/2006/main">
+              <a:ext uri="{FF2B5EF4-FFF2-40B4-BE49-F238E27FC236}">
+                <a16:creationId xmlns:a16="http://schemas.microsoft.com/office/drawing/2014/main" id="{72F264EF-6FA0-4F41-B23D-4F0C1341D36F}"/>
+              </a:ext>
+            </a:extLst>
+          </p:cNvPr>
+          <p:cNvSpPr>
+            <a:spLocks xmlns:a="http://schemas.openxmlformats.org/drawingml/2006/main" noGrp="1"/>
+          </p:cNvSpPr>
+          <p:nvPr/>
+        </p:nvSpPr>
+        <p:spPr>
+          <a:xfrm xmlns:a="http://schemas.openxmlformats.org/drawingml/2006/main">
+            <a:off x="609600" y="3609975"/>
+            <a:ext cx="10972800" cy="533400"/>
+          </a:xfrm>
+          <a:prstGeom xmlns:a="http://schemas.openxmlformats.org/drawingml/2006/main" prst="rect">
+            <a:avLst/>
+          </a:prstGeom>
+          <a:noFill xmlns:a="http://schemas.openxmlformats.org/drawingml/2006/main"/>
+          <a:ln xmlns:a="http://schemas.openxmlformats.org/drawingml/2006/main" w="0">
+            <a:noFill/>
+          </a:ln>
+        </p:spPr>
+        <p:txBody>
+          <a:bodyPr xmlns:a="http://schemas.openxmlformats.org/drawingml/2006/main" anchor="ctr">
+            <a:noAutofit/>
+          </a:bodyPr>
+          <a:lstStyle xmlns:a="http://schemas.openxmlformats.org/drawingml/2006/main"/>
+          <a:p xmlns:a="http://schemas.openxmlformats.org/drawingml/2006/main">
+            <a:pPr algn="l">
+              <a:defRPr sz="2100" b="0">
+                <a:solidFill>
+                  <a:srgbClr val="16343E"/>
+                </a:solidFill>
+                <a:latin typeface="Arial"/>
+                <a:ea typeface="Arial"/>
+                <a:cs typeface="Arial"/>
+              </a:defRPr>
+            </a:pPr>
+            <a:r>
+              <a:rPr sz="2100" b="0">
+                <a:solidFill>
+                  <a:srgbClr val="16343E"/>
+                </a:solidFill>
+                <a:latin typeface="Arial"/>
+                <a:ea typeface="Arial"/>
+                <a:cs typeface="Arial"/>
+              </a:rPr>
+              <a:t>2. I kept both models and thresholds fixed and compared recall on each draw.</a:t>
+            </a:r>
+          </a:p>
+        </p:txBody>
+      </p:sp>
+      <p:sp>
+        <p:nvSpPr>
+          <p:cNvPr id="9" name="">
+            <a:extLst xmlns:a="http://schemas.openxmlformats.org/drawingml/2006/main">
+              <a:ext uri="{FF2B5EF4-FFF2-40B4-BE49-F238E27FC236}">
+                <a16:creationId xmlns:a16="http://schemas.microsoft.com/office/drawing/2014/main" id="{E6EB486E-27AD-4958-8F41-92FC66308158}"/>
+              </a:ext>
+            </a:extLst>
+          </p:cNvPr>
+          <p:cNvSpPr>
+            <a:spLocks xmlns:a="http://schemas.openxmlformats.org/drawingml/2006/main" noGrp="1"/>
+          </p:cNvSpPr>
+          <p:nvPr/>
+        </p:nvSpPr>
+        <p:spPr>
+          <a:xfrm xmlns:a="http://schemas.openxmlformats.org/drawingml/2006/main">
+            <a:off x="609600" y="4143375"/>
+            <a:ext cx="10972800" cy="533400"/>
+          </a:xfrm>
+          <a:prstGeom xmlns:a="http://schemas.openxmlformats.org/drawingml/2006/main" prst="rect">
+            <a:avLst/>
+          </a:prstGeom>
+          <a:noFill xmlns:a="http://schemas.openxmlformats.org/drawingml/2006/main"/>
+          <a:ln xmlns:a="http://schemas.openxmlformats.org/drawingml/2006/main" w="0">
+            <a:noFill/>
+          </a:ln>
+        </p:spPr>
+        <p:txBody>
+          <a:bodyPr xmlns:a="http://schemas.openxmlformats.org/drawingml/2006/main" anchor="ctr">
+            <a:noAutofit/>
+          </a:bodyPr>
+          <a:lstStyle xmlns:a="http://schemas.openxmlformats.org/drawingml/2006/main"/>
+          <a:p xmlns:a="http://schemas.openxmlformats.org/drawingml/2006/main">
+            <a:pPr algn="l">
+              <a:defRPr sz="2100" b="0">
+                <a:solidFill>
+                  <a:srgbClr val="16343E"/>
+                </a:solidFill>
+                <a:latin typeface="Arial"/>
+                <a:ea typeface="Arial"/>
+                <a:cs typeface="Arial"/>
+              </a:defRPr>
+            </a:pPr>
+            <a:r>
+              <a:rPr sz="2100" b="0">
+                <a:solidFill>
+                  <a:srgbClr val="16343E"/>
+                </a:solidFill>
+                <a:latin typeface="Arial"/>
+                <a:ea typeface="Arial"/>
+                <a:cs typeface="Arial"/>
+              </a:rPr>
+              <a:t>3. The middle 95% ran from −0.01 to +9.74 percentage points, including zero.</a:t>
+            </a:r>
+          </a:p>
+        </p:txBody>
+      </p:sp>
+      <p:sp>
+        <p:nvSpPr>
+          <p:cNvPr id="10" name="">
+            <a:extLst xmlns:a="http://schemas.openxmlformats.org/drawingml/2006/main">
+              <a:ext uri="{FF2B5EF4-FFF2-40B4-BE49-F238E27FC236}">
+                <a16:creationId xmlns:a16="http://schemas.microsoft.com/office/drawing/2014/main" id="{1102C108-A99F-46B4-9E1E-FB0A944A3661}"/>
+              </a:ext>
+            </a:extLst>
+          </p:cNvPr>
+          <p:cNvSpPr>
+            <a:spLocks xmlns:a="http://schemas.openxmlformats.org/drawingml/2006/main" noGrp="1"/>
+          </p:cNvSpPr>
+          <p:nvPr/>
+        </p:nvSpPr>
+        <p:spPr>
+          <a:xfrm xmlns:a="http://schemas.openxmlformats.org/drawingml/2006/main">
+            <a:off x="609600" y="4905375"/>
+            <a:ext cx="10972800" cy="419100"/>
+          </a:xfrm>
+          <a:prstGeom xmlns:a="http://schemas.openxmlformats.org/drawingml/2006/main" prst="rect">
+            <a:avLst/>
+          </a:prstGeom>
+          <a:noFill xmlns:a="http://schemas.openxmlformats.org/drawingml/2006/main"/>
+          <a:ln xmlns:a="http://schemas.openxmlformats.org/drawingml/2006/main" w="0">
+            <a:noFill/>
+          </a:ln>
+        </p:spPr>
+        <p:txBody>
+          <a:bodyPr xmlns:a="http://schemas.openxmlformats.org/drawingml/2006/main" anchor="ctr">
+            <a:noAutofit/>
+          </a:bodyPr>
+          <a:lstStyle xmlns:a="http://schemas.openxmlformats.org/drawingml/2006/main"/>
+          <a:p xmlns:a="http://schemas.openxmlformats.org/drawingml/2006/main">
+            <a:pPr algn="l">
+              <a:defRPr sz="2400" b="1">
+                <a:solidFill>
+                  <a:srgbClr val="16343E"/>
+                </a:solidFill>
+                <a:latin typeface="Arial"/>
+                <a:ea typeface="Arial"/>
+                <a:cs typeface="Arial"/>
+              </a:defRPr>
+            </a:pPr>
+            <a:r>
+              <a:rPr sz="2400" b="1">
+                <a:solidFill>
+                  <a:srgbClr val="16343E"/>
+                </a:solidFill>
+                <a:latin typeface="Arial"/>
+                <a:ea typeface="Arial"/>
+                <a:cs typeface="Arial"/>
+              </a:rPr>
+              <a:t>Why I also repeated model development</a:t>
+            </a:r>
+          </a:p>
+        </p:txBody>
+      </p:sp>
+      <p:sp>
+        <p:nvSpPr>
+          <p:cNvPr id="11" name="">
+            <a:extLst xmlns:a="http://schemas.openxmlformats.org/drawingml/2006/main">
+              <a:ext uri="{FF2B5EF4-FFF2-40B4-BE49-F238E27FC236}">
+                <a16:creationId xmlns:a16="http://schemas.microsoft.com/office/drawing/2014/main" id="{D65B065E-FB84-4B02-BF40-2F4B95F9530B}"/>
+              </a:ext>
+            </a:extLst>
+          </p:cNvPr>
+          <p:cNvSpPr>
+            <a:spLocks xmlns:a="http://schemas.openxmlformats.org/drawingml/2006/main" noGrp="1"/>
+          </p:cNvSpPr>
+          <p:nvPr/>
+        </p:nvSpPr>
+        <p:spPr>
+          <a:xfrm xmlns:a="http://schemas.openxmlformats.org/drawingml/2006/main">
+            <a:off x="609600" y="5381625"/>
+            <a:ext cx="10972800" cy="714375"/>
+          </a:xfrm>
+          <a:prstGeom xmlns:a="http://schemas.openxmlformats.org/drawingml/2006/main" prst="rect">
+            <a:avLst/>
+          </a:prstGeom>
+          <a:noFill xmlns:a="http://schemas.openxmlformats.org/drawingml/2006/main"/>
+          <a:ln xmlns:a="http://schemas.openxmlformats.org/drawingml/2006/main" w="0">
+            <a:noFill/>
+          </a:ln>
+        </p:spPr>
+        <p:txBody>
+          <a:bodyPr xmlns:a="http://schemas.openxmlformats.org/drawingml/2006/main" anchor="ctr">
+            <a:noAutofit/>
+          </a:bodyPr>
+          <a:lstStyle xmlns:a="http://schemas.openxmlformats.org/drawingml/2006/main"/>
+          <a:p xmlns:a="http://schemas.openxmlformats.org/drawingml/2006/main">
+            <a:pPr algn="l">
+              <a:defRPr sz="2175" b="0">
+                <a:solidFill>
+                  <a:srgbClr val="16343E"/>
+                </a:solidFill>
+                <a:latin typeface="Arial"/>
+                <a:ea typeface="Arial"/>
+                <a:cs typeface="Arial"/>
+              </a:defRPr>
+            </a:pPr>
+            <a:r>
+              <a:rPr sz="2175" b="0">
+                <a:solidFill>
+                  <a:srgbClr val="16343E"/>
+                </a:solidFill>
+                <a:latin typeface="Arial"/>
+                <a:ea typeface="Arial"/>
+                <a:cs typeface="Arial"/>
+              </a:rPr>
+              <a:t>One training / screening split might favor CatBoost.</a:t>
+            </a:r>
+          </a:p>
+          <a:p xmlns:a="http://schemas.openxmlformats.org/drawingml/2006/main">
+            <a:pPr algn="l">
+              <a:defRPr sz="2175" b="0">
+                <a:solidFill>
+                  <a:srgbClr val="16343E"/>
+                </a:solidFill>
+                <a:latin typeface="Arial"/>
+                <a:ea typeface="Arial"/>
+                <a:cs typeface="Arial"/>
+              </a:defRPr>
+            </a:pPr>
+            <a:r>
+              <a:rPr sz="2175" b="0">
+                <a:solidFill>
+                  <a:srgbClr val="16343E"/>
+                </a:solidFill>
+                <a:latin typeface="Arial"/>
+                <a:ea typeface="Arial"/>
+                <a:cs typeface="Arial"/>
+              </a:rPr>
+              <a:t>I checked whether changing those assignments changed the selected model.</a:t>
             </a:r>
           </a:p>
         </p:txBody>
@@ -4684,7 +4778,7 @@
     </p:spTree>
     <p:extLst>
       <p:ext uri="{BB962C8B-B14F-4D97-AF65-F5344CB8AC3E}">
-        <p14:creationId xmlns:p14="http://schemas.microsoft.com/office/powerpoint/2010/main" val="598331586"/>
+        <p14:creationId xmlns:p14="http://schemas.microsoft.com/office/powerpoint/2010/main" val="676686587"/>
       </p:ext>
     </p:extLst>
   </p:cSld>
@@ -4712,10 +4806,10 @@
       </p:grpSpPr>
       <p:sp>
         <p:nvSpPr>
-          <p:cNvPr id="13" name="">
-            <a:extLst xmlns:a="http://schemas.openxmlformats.org/drawingml/2006/main">
-              <a:ext uri="{FF2B5EF4-FFF2-40B4-BE49-F238E27FC236}">
-                <a16:creationId xmlns:a16="http://schemas.microsoft.com/office/drawing/2014/main" id="{E54A8FE2-6003-46A6-A716-180B5F3DC258}"/>
+          <p:cNvPr id="12" name="">
+            <a:extLst xmlns:a="http://schemas.openxmlformats.org/drawingml/2006/main">
+              <a:ext uri="{FF2B5EF4-FFF2-40B4-BE49-F238E27FC236}">
+                <a16:creationId xmlns:a16="http://schemas.microsoft.com/office/drawing/2014/main" id="{76FAE3E8-437F-4D9B-BE80-9ABEC2579FA0}"/>
               </a:ext>
             </a:extLst>
           </p:cNvPr>
@@ -4762,7 +4856,7 @@
                 <a:ea typeface="Arial"/>
                 <a:cs typeface="Arial"/>
               </a:rPr>
-              <a:t>Prediction service and demonstration</a:t>
+              <a:t>Model choice depended on the development split</a:t>
             </a:r>
           </a:p>
         </p:txBody>
@@ -4772,7 +4866,7 @@
           <p:cNvPr id="2" name="">
             <a:extLst xmlns:a="http://schemas.openxmlformats.org/drawingml/2006/main">
               <a:ext uri="{FF2B5EF4-FFF2-40B4-BE49-F238E27FC236}">
-                <a16:creationId xmlns:a16="http://schemas.microsoft.com/office/drawing/2014/main" id="{4D6B3B66-5D4C-497A-A910-98C5403CF75D}"/>
+                <a16:creationId xmlns:a16="http://schemas.microsoft.com/office/drawing/2014/main" id="{CFE3A630-B308-4CAA-8349-1C8718F82766}"/>
               </a:ext>
             </a:extLst>
           </p:cNvPr>
@@ -4819,7 +4913,7 @@
                 <a:ea typeface="Arial"/>
                 <a:cs typeface="Arial"/>
               </a:rPr>
-              <a:t>Source: shared preprocessing and Predictor; application contract</a:t>
+              <a:t>Source: discovery stability follow-up, 17 Sep 2026.</a:t>
             </a:r>
           </a:p>
         </p:txBody>
@@ -4829,7 +4923,7 @@
           <p:cNvPr id="3" name="">
             <a:extLst xmlns:a="http://schemas.openxmlformats.org/drawingml/2006/main">
               <a:ext uri="{FF2B5EF4-FFF2-40B4-BE49-F238E27FC236}">
-                <a16:creationId xmlns:a16="http://schemas.microsoft.com/office/drawing/2014/main" id="{21D2080F-1312-4BC8-A0D0-B7079484538F}"/>
+                <a16:creationId xmlns:a16="http://schemas.microsoft.com/office/drawing/2014/main" id="{FF2D7058-245A-4B6F-B38A-6CCE08621001}"/>
               </a:ext>
             </a:extLst>
           </p:cNvPr>
@@ -4886,19 +4980,19 @@
           <p:cNvPr id="4" name="">
             <a:extLst xmlns:a="http://schemas.openxmlformats.org/drawingml/2006/main">
               <a:ext uri="{FF2B5EF4-FFF2-40B4-BE49-F238E27FC236}">
-                <a16:creationId xmlns:a16="http://schemas.microsoft.com/office/drawing/2014/main" id="{A3519A4B-435C-4203-A098-63317865DA2D}"/>
-              </a:ext>
-            </a:extLst>
-          </p:cNvPr>
-          <p:cNvSpPr>
-            <a:spLocks xmlns:a="http://schemas.openxmlformats.org/drawingml/2006/main" noGrp="1"/>
-          </p:cNvSpPr>
-          <p:nvPr/>
-        </p:nvSpPr>
-        <p:spPr>
-          <a:xfrm xmlns:a="http://schemas.openxmlformats.org/drawingml/2006/main">
-            <a:off x="609600" y="1524000"/>
-            <a:ext cx="10972800" cy="790575"/>
+                <a16:creationId xmlns:a16="http://schemas.microsoft.com/office/drawing/2014/main" id="{2FDFD909-6B8F-459F-8A90-02028EB2A4F2}"/>
+              </a:ext>
+            </a:extLst>
+          </p:cNvPr>
+          <p:cNvSpPr>
+            <a:spLocks xmlns:a="http://schemas.openxmlformats.org/drawingml/2006/main" noGrp="1"/>
+          </p:cNvSpPr>
+          <p:nvPr/>
+        </p:nvSpPr>
+        <p:spPr>
+          <a:xfrm xmlns:a="http://schemas.openxmlformats.org/drawingml/2006/main">
+            <a:off x="609600" y="1514475"/>
+            <a:ext cx="10972800" cy="504825"/>
           </a:xfrm>
           <a:prstGeom xmlns:a="http://schemas.openxmlformats.org/drawingml/2006/main" prst="rect">
             <a:avLst/>
@@ -4909,62 +5003,31 @@
           </a:ln>
         </p:spPr>
         <p:txBody>
-          <a:bodyPr xmlns:a="http://schemas.openxmlformats.org/drawingml/2006/main" anchor="t">
+          <a:bodyPr xmlns:a="http://schemas.openxmlformats.org/drawingml/2006/main" anchor="ctr">
             <a:noAutofit/>
           </a:bodyPr>
           <a:lstStyle xmlns:a="http://schemas.openxmlformats.org/drawingml/2006/main"/>
           <a:p xmlns:a="http://schemas.openxmlformats.org/drawingml/2006/main">
-            <a:pPr marL="279400" indent="-152400" algn="l">
-              <a:spcAft>
-                <a:spcPts val="600"/>
-              </a:spcAft>
-              <a:buChar char="•"/>
-              <a:defRPr sz="2175" b="0">
-                <a:solidFill>
-                  <a:srgbClr val="16343E"/>
-                </a:solidFill>
-                <a:latin typeface="Arial"/>
-                <a:ea typeface="Arial"/>
-                <a:cs typeface="Arial"/>
-              </a:defRPr>
-            </a:pPr>
-            <a:r>
-              <a:rPr sz="2175" b="0">
-                <a:solidFill>
-                  <a:srgbClr val="16343E"/>
-                </a:solidFill>
-                <a:latin typeface="Arial"/>
-                <a:ea typeface="Arial"/>
-                <a:cs typeface="Arial"/>
-              </a:rPr>
-              <a:t>CSV input through the command line or web application.</a:t>
-            </a:r>
-          </a:p>
-          <a:p xmlns:a="http://schemas.openxmlformats.org/drawingml/2006/main">
-            <a:pPr marL="279400" indent="-152400" algn="l">
-              <a:spcAft>
-                <a:spcPts val="600"/>
-              </a:spcAft>
-              <a:buChar char="•"/>
-              <a:defRPr sz="2175" b="0">
-                <a:solidFill>
-                  <a:srgbClr val="16343E"/>
-                </a:solidFill>
-                <a:latin typeface="Arial"/>
-                <a:ea typeface="Arial"/>
-                <a:cs typeface="Arial"/>
-              </a:defRPr>
-            </a:pPr>
-            <a:r>
-              <a:rPr sz="2175" b="0">
-                <a:solidFill>
-                  <a:srgbClr val="16343E"/>
-                </a:solidFill>
-                <a:latin typeface="Arial"/>
-                <a:ea typeface="Arial"/>
-                <a:cs typeface="Arial"/>
-              </a:rPr>
-              <a:t>Training and prediction share the preparation code.</a:t>
+            <a:pPr algn="l">
+              <a:defRPr sz="2325" b="0">
+                <a:solidFill>
+                  <a:srgbClr val="16343E"/>
+                </a:solidFill>
+                <a:latin typeface="Arial"/>
+                <a:ea typeface="Arial"/>
+                <a:cs typeface="Arial"/>
+              </a:defRPr>
+            </a:pPr>
+            <a:r>
+              <a:rPr sz="2325" b="0">
+                <a:solidFill>
+                  <a:srgbClr val="16343E"/>
+                </a:solidFill>
+                <a:latin typeface="Arial"/>
+                <a:ea typeface="Arial"/>
+                <a:cs typeface="Arial"/>
+              </a:rPr>
+              <a:t>I repeated development with 20 splits of the 1,050 discovery specimens.</a:t>
             </a:r>
           </a:p>
         </p:txBody>
@@ -4974,19 +5037,99 @@
           <p:cNvPr id="5" name="">
             <a:extLst xmlns:a="http://schemas.openxmlformats.org/drawingml/2006/main">
               <a:ext uri="{FF2B5EF4-FFF2-40B4-BE49-F238E27FC236}">
-                <a16:creationId xmlns:a16="http://schemas.microsoft.com/office/drawing/2014/main" id="{3CC0AD85-0F67-4B6A-97E2-4EDCA0AABB37}"/>
-              </a:ext>
-            </a:extLst>
-          </p:cNvPr>
-          <p:cNvSpPr>
-            <a:spLocks xmlns:a="http://schemas.openxmlformats.org/drawingml/2006/main" noGrp="1"/>
-          </p:cNvSpPr>
-          <p:nvPr/>
-        </p:nvSpPr>
-        <p:spPr>
-          <a:xfrm xmlns:a="http://schemas.openxmlformats.org/drawingml/2006/main">
-            <a:off x="609600" y="2409825"/>
-            <a:ext cx="2438400" cy="1238250"/>
+                <a16:creationId xmlns:a16="http://schemas.microsoft.com/office/drawing/2014/main" id="{1F52B2F2-E6B3-4C88-9158-3D2776DB842E}"/>
+              </a:ext>
+            </a:extLst>
+          </p:cNvPr>
+          <p:cNvSpPr>
+            <a:spLocks xmlns:a="http://schemas.openxmlformats.org/drawingml/2006/main" noGrp="1"/>
+          </p:cNvSpPr>
+          <p:nvPr/>
+        </p:nvSpPr>
+        <p:spPr>
+          <a:xfrm xmlns:a="http://schemas.openxmlformats.org/drawingml/2006/main">
+            <a:off x="609600" y="2105025"/>
+            <a:ext cx="10972800" cy="666750"/>
+          </a:xfrm>
+          <a:prstGeom xmlns:a="http://schemas.openxmlformats.org/drawingml/2006/main" prst="rect">
+            <a:avLst/>
+          </a:prstGeom>
+          <a:noFill xmlns:a="http://schemas.openxmlformats.org/drawingml/2006/main"/>
+          <a:ln xmlns:a="http://schemas.openxmlformats.org/drawingml/2006/main" w="0">
+            <a:noFill/>
+          </a:ln>
+        </p:spPr>
+        <p:txBody>
+          <a:bodyPr xmlns:a="http://schemas.openxmlformats.org/drawingml/2006/main" anchor="ctr">
+            <a:noAutofit/>
+          </a:bodyPr>
+          <a:lstStyle xmlns:a="http://schemas.openxmlformats.org/drawingml/2006/main"/>
+          <a:p xmlns:a="http://schemas.openxmlformats.org/drawingml/2006/main">
+            <a:pPr algn="l">
+              <a:defRPr sz="2100" b="0">
+                <a:solidFill>
+                  <a:srgbClr val="16343E"/>
+                </a:solidFill>
+                <a:latin typeface="Arial"/>
+                <a:ea typeface="Arial"/>
+                <a:cs typeface="Arial"/>
+              </a:defRPr>
+            </a:pPr>
+            <a:r>
+              <a:rPr sz="2100" b="0">
+                <a:solidFill>
+                  <a:srgbClr val="16343E"/>
+                </a:solidFill>
+                <a:latin typeface="Arial"/>
+                <a:ea typeface="Arial"/>
+                <a:cs typeface="Arial"/>
+              </a:rPr>
+              <a:t>Each random split kept the four diagnosis proportions similar.</a:t>
+            </a:r>
+          </a:p>
+          <a:p xmlns:a="http://schemas.openxmlformats.org/drawingml/2006/main">
+            <a:pPr algn="l">
+              <a:defRPr sz="2100" b="0">
+                <a:solidFill>
+                  <a:srgbClr val="16343E"/>
+                </a:solidFill>
+                <a:latin typeface="Arial"/>
+                <a:ea typeface="Arial"/>
+                <a:cs typeface="Arial"/>
+              </a:defRPr>
+            </a:pPr>
+            <a:r>
+              <a:rPr sz="2100" b="0">
+                <a:solidFill>
+                  <a:srgbClr val="16343E"/>
+                </a:solidFill>
+                <a:latin typeface="Arial"/>
+                <a:ea typeface="Arial"/>
+                <a:cs typeface="Arial"/>
+              </a:rPr>
+              <a:t>I used the same rows for both model families.</a:t>
+            </a:r>
+          </a:p>
+        </p:txBody>
+      </p:sp>
+      <p:sp>
+        <p:nvSpPr>
+          <p:cNvPr id="6" name="">
+            <a:extLst xmlns:a="http://schemas.openxmlformats.org/drawingml/2006/main">
+              <a:ext uri="{FF2B5EF4-FFF2-40B4-BE49-F238E27FC236}">
+                <a16:creationId xmlns:a16="http://schemas.microsoft.com/office/drawing/2014/main" id="{B8B892BA-8FA4-4079-80DE-F1A2F0AF2F59}"/>
+              </a:ext>
+            </a:extLst>
+          </p:cNvPr>
+          <p:cNvSpPr>
+            <a:spLocks xmlns:a="http://schemas.openxmlformats.org/drawingml/2006/main" noGrp="1"/>
+          </p:cNvSpPr>
+          <p:nvPr/>
+        </p:nvSpPr>
+        <p:spPr>
+          <a:xfrm xmlns:a="http://schemas.openxmlformats.org/drawingml/2006/main">
+            <a:off x="609600" y="2962275"/>
+            <a:ext cx="3390900" cy="876300"/>
           </a:xfrm>
           <a:prstGeom xmlns:a="http://schemas.openxmlformats.org/drawingml/2006/main" prst="rect">
             <a:avLst/>
@@ -5007,47 +5150,70 @@
           <a:lstStyle xmlns:a="http://schemas.openxmlformats.org/drawingml/2006/main"/>
           <a:p xmlns:a="http://schemas.openxmlformats.org/drawingml/2006/main">
             <a:pPr algn="ctr">
-              <a:defRPr sz="2325">
-                <a:solidFill>
-                  <a:srgbClr val="16343E"/>
-                </a:solidFill>
-                <a:latin typeface="Arial"/>
-                <a:ea typeface="Arial"/>
-                <a:cs typeface="Arial"/>
-              </a:defRPr>
-            </a:pPr>
-            <a:r>
-              <a:rPr sz="2325">
-                <a:solidFill>
-                  <a:srgbClr val="16343E"/>
-                </a:solidFill>
-                <a:latin typeface="Arial"/>
-                <a:ea typeface="Arial"/>
-                <a:cs typeface="Arial"/>
-              </a:rPr>
-              <a:t>Read counts</a:t>
+              <a:defRPr sz="2025">
+                <a:solidFill>
+                  <a:srgbClr val="16343E"/>
+                </a:solidFill>
+                <a:latin typeface="Arial"/>
+                <a:ea typeface="Arial"/>
+                <a:cs typeface="Arial"/>
+              </a:defRPr>
+            </a:pPr>
+            <a:r>
+              <a:rPr sz="2025">
+                <a:solidFill>
+                  <a:srgbClr val="16343E"/>
+                </a:solidFill>
+                <a:latin typeface="Arial"/>
+                <a:ea typeface="Arial"/>
+                <a:cs typeface="Arial"/>
+              </a:rPr>
+              <a:t>630 fitting</a:t>
+            </a:r>
+          </a:p>
+          <a:p xmlns:a="http://schemas.openxmlformats.org/drawingml/2006/main">
+            <a:pPr algn="ctr">
+              <a:defRPr sz="2025">
+                <a:solidFill>
+                  <a:srgbClr val="16343E"/>
+                </a:solidFill>
+                <a:latin typeface="Arial"/>
+                <a:ea typeface="Arial"/>
+                <a:cs typeface="Arial"/>
+              </a:defRPr>
+            </a:pPr>
+            <a:r>
+              <a:rPr sz="2025">
+                <a:solidFill>
+                  <a:srgbClr val="16343E"/>
+                </a:solidFill>
+                <a:latin typeface="Arial"/>
+                <a:ea typeface="Arial"/>
+                <a:cs typeface="Arial"/>
+              </a:rPr>
+              <a:t>Train both model families</a:t>
             </a:r>
           </a:p>
         </p:txBody>
       </p:sp>
       <p:sp>
         <p:nvSpPr>
-          <p:cNvPr id="6" name="">
-            <a:extLst xmlns:a="http://schemas.openxmlformats.org/drawingml/2006/main">
-              <a:ext uri="{FF2B5EF4-FFF2-40B4-BE49-F238E27FC236}">
-                <a16:creationId xmlns:a16="http://schemas.microsoft.com/office/drawing/2014/main" id="{884D9139-524E-49E9-9BA4-E06D68CACA01}"/>
-              </a:ext>
-            </a:extLst>
-          </p:cNvPr>
-          <p:cNvSpPr>
-            <a:spLocks xmlns:a="http://schemas.openxmlformats.org/drawingml/2006/main" noGrp="1"/>
-          </p:cNvSpPr>
-          <p:nvPr/>
-        </p:nvSpPr>
-        <p:spPr>
-          <a:xfrm xmlns:a="http://schemas.openxmlformats.org/drawingml/2006/main">
-            <a:off x="3448050" y="2409825"/>
-            <a:ext cx="2438400" cy="1238250"/>
+          <p:cNvPr id="7" name="">
+            <a:extLst xmlns:a="http://schemas.openxmlformats.org/drawingml/2006/main">
+              <a:ext uri="{FF2B5EF4-FFF2-40B4-BE49-F238E27FC236}">
+                <a16:creationId xmlns:a16="http://schemas.microsoft.com/office/drawing/2014/main" id="{B5EB2564-BFFB-4EF7-B3BC-940AADD99FCE}"/>
+              </a:ext>
+            </a:extLst>
+          </p:cNvPr>
+          <p:cNvSpPr>
+            <a:spLocks xmlns:a="http://schemas.openxmlformats.org/drawingml/2006/main" noGrp="1"/>
+          </p:cNvSpPr>
+          <p:nvPr/>
+        </p:nvSpPr>
+        <p:spPr>
+          <a:xfrm xmlns:a="http://schemas.openxmlformats.org/drawingml/2006/main">
+            <a:off x="4400550" y="2962275"/>
+            <a:ext cx="3390900" cy="876300"/>
           </a:xfrm>
           <a:prstGeom xmlns:a="http://schemas.openxmlformats.org/drawingml/2006/main" prst="rect">
             <a:avLst/>
@@ -5068,95 +5234,70 @@
           <a:lstStyle xmlns:a="http://schemas.openxmlformats.org/drawingml/2006/main"/>
           <a:p xmlns:a="http://schemas.openxmlformats.org/drawingml/2006/main">
             <a:pPr algn="ctr">
-              <a:defRPr sz="2325">
-                <a:solidFill>
-                  <a:srgbClr val="16343E"/>
-                </a:solidFill>
-                <a:latin typeface="Arial"/>
-                <a:ea typeface="Arial"/>
-                <a:cs typeface="Arial"/>
-              </a:defRPr>
-            </a:pPr>
-            <a:r>
-              <a:rPr sz="2325">
-                <a:solidFill>
-                  <a:srgbClr val="16343E"/>
-                </a:solidFill>
-                <a:latin typeface="Arial"/>
-                <a:ea typeface="Arial"/>
-                <a:cs typeface="Arial"/>
-              </a:rPr>
-              <a:t>Check names</a:t>
+              <a:defRPr sz="1950">
+                <a:solidFill>
+                  <a:srgbClr val="16343E"/>
+                </a:solidFill>
+                <a:latin typeface="Arial"/>
+                <a:ea typeface="Arial"/>
+                <a:cs typeface="Arial"/>
+              </a:defRPr>
+            </a:pPr>
+            <a:r>
+              <a:rPr sz="1950">
+                <a:solidFill>
+                  <a:srgbClr val="16343E"/>
+                </a:solidFill>
+                <a:latin typeface="Arial"/>
+                <a:ea typeface="Arial"/>
+                <a:cs typeface="Arial"/>
+              </a:rPr>
+              <a:t>210 screening</a:t>
             </a:r>
           </a:p>
           <a:p xmlns:a="http://schemas.openxmlformats.org/drawingml/2006/main">
             <a:pPr algn="ctr">
-              <a:defRPr sz="2325">
-                <a:solidFill>
-                  <a:srgbClr val="16343E"/>
-                </a:solidFill>
-                <a:latin typeface="Arial"/>
-                <a:ea typeface="Arial"/>
-                <a:cs typeface="Arial"/>
-              </a:defRPr>
-            </a:pPr>
-            <a:r>
-              <a:rPr sz="2325">
-                <a:solidFill>
-                  <a:srgbClr val="16343E"/>
-                </a:solidFill>
-                <a:latin typeface="Arial"/>
-                <a:ea typeface="Arial"/>
-                <a:cs typeface="Arial"/>
-              </a:rPr>
-              <a:t>and numbers</a:t>
+              <a:defRPr sz="1950">
+                <a:solidFill>
+                  <a:srgbClr val="16343E"/>
+                </a:solidFill>
+                <a:latin typeface="Arial"/>
+                <a:ea typeface="Arial"/>
+                <a:cs typeface="Arial"/>
+              </a:defRPr>
+            </a:pPr>
+            <a:r>
+              <a:rPr sz="1950">
+                <a:solidFill>
+                  <a:srgbClr val="16343E"/>
+                </a:solidFill>
+                <a:latin typeface="Arial"/>
+                <a:ea typeface="Arial"/>
+                <a:cs typeface="Arial"/>
+              </a:rPr>
+              <a:t>Choose model and threshold</a:t>
             </a:r>
           </a:p>
         </p:txBody>
       </p:sp>
-      <p:cxnSp>
-        <p:nvCxnSpPr>
-          <p:cNvPr id="19" name=""/>
-          <p:cNvCxnSpPr>
-            <a:stCxn xmlns:a="http://schemas.openxmlformats.org/drawingml/2006/main" id="5" idx="3"/>
-            <a:endCxn xmlns:a="http://schemas.openxmlformats.org/drawingml/2006/main" id="6" idx="1"/>
-          </p:cNvCxnSpPr>
-          <p:nvPr/>
-        </p:nvCxnSpPr>
-        <p:spPr>
-          <a:xfrm xmlns:a="http://schemas.openxmlformats.org/drawingml/2006/main">
-            <a:off x="3048000" y="3028950"/>
-            <a:ext cx="400050" cy="0"/>
-          </a:xfrm>
-          <a:prstGeom xmlns:a="http://schemas.openxmlformats.org/drawingml/2006/main" prst="straightConnector1">
-            <a:avLst/>
-          </a:prstGeom>
-          <a:ln xmlns:a="http://schemas.openxmlformats.org/drawingml/2006/main" w="23813">
-            <a:solidFill>
-              <a:srgbClr val="52656B"/>
-            </a:solidFill>
-            <a:tailEnd type="arrow" w="med" len="med"/>
-          </a:ln>
-        </p:spPr>
-      </p:cxnSp>
       <p:sp>
         <p:nvSpPr>
           <p:cNvPr id="8" name="">
             <a:extLst xmlns:a="http://schemas.openxmlformats.org/drawingml/2006/main">
               <a:ext uri="{FF2B5EF4-FFF2-40B4-BE49-F238E27FC236}">
-                <a16:creationId xmlns:a16="http://schemas.microsoft.com/office/drawing/2014/main" id="{64762E3D-26F1-4AFF-A718-0FD0A1BF87B7}"/>
-              </a:ext>
-            </a:extLst>
-          </p:cNvPr>
-          <p:cNvSpPr>
-            <a:spLocks xmlns:a="http://schemas.openxmlformats.org/drawingml/2006/main" noGrp="1"/>
-          </p:cNvSpPr>
-          <p:nvPr/>
-        </p:nvSpPr>
-        <p:spPr>
-          <a:xfrm xmlns:a="http://schemas.openxmlformats.org/drawingml/2006/main">
-            <a:off x="6286500" y="2409825"/>
-            <a:ext cx="2438400" cy="1238250"/>
+                <a16:creationId xmlns:a16="http://schemas.microsoft.com/office/drawing/2014/main" id="{2EAC8B61-AA71-4305-9159-D482824265B6}"/>
+              </a:ext>
+            </a:extLst>
+          </p:cNvPr>
+          <p:cNvSpPr>
+            <a:spLocks xmlns:a="http://schemas.openxmlformats.org/drawingml/2006/main" noGrp="1"/>
+          </p:cNvSpPr>
+          <p:nvPr/>
+        </p:nvSpPr>
+        <p:spPr>
+          <a:xfrm xmlns:a="http://schemas.openxmlformats.org/drawingml/2006/main">
+            <a:off x="8191500" y="2962275"/>
+            <a:ext cx="3390900" cy="876300"/>
           </a:xfrm>
           <a:prstGeom xmlns:a="http://schemas.openxmlformats.org/drawingml/2006/main" prst="rect">
             <a:avLst/>
@@ -5177,106 +5318,77 @@
           <a:lstStyle xmlns:a="http://schemas.openxmlformats.org/drawingml/2006/main"/>
           <a:p xmlns:a="http://schemas.openxmlformats.org/drawingml/2006/main">
             <a:pPr algn="ctr">
-              <a:defRPr sz="2325">
-                <a:solidFill>
-                  <a:srgbClr val="16343E"/>
-                </a:solidFill>
-                <a:latin typeface="Arial"/>
-                <a:ea typeface="Arial"/>
-                <a:cs typeface="Arial"/>
-              </a:defRPr>
-            </a:pPr>
-            <a:r>
-              <a:rPr sz="2325">
-                <a:solidFill>
-                  <a:srgbClr val="16343E"/>
-                </a:solidFill>
-                <a:latin typeface="Arial"/>
-                <a:ea typeface="Arial"/>
-                <a:cs typeface="Arial"/>
-              </a:rPr>
-              <a:t>Normalize</a:t>
+              <a:defRPr sz="2025">
+                <a:solidFill>
+                  <a:srgbClr val="16343E"/>
+                </a:solidFill>
+                <a:latin typeface="Arial"/>
+                <a:ea typeface="Arial"/>
+                <a:cs typeface="Arial"/>
+              </a:defRPr>
+            </a:pPr>
+            <a:r>
+              <a:rPr sz="2025">
+                <a:solidFill>
+                  <a:srgbClr val="16343E"/>
+                </a:solidFill>
+                <a:latin typeface="Arial"/>
+                <a:ea typeface="Arial"/>
+                <a:cs typeface="Arial"/>
+              </a:rPr>
+              <a:t>210 assessment</a:t>
             </a:r>
           </a:p>
           <a:p xmlns:a="http://schemas.openxmlformats.org/drawingml/2006/main">
             <a:pPr algn="ctr">
-              <a:defRPr sz="2325">
-                <a:solidFill>
-                  <a:srgbClr val="16343E"/>
-                </a:solidFill>
-                <a:latin typeface="Arial"/>
-                <a:ea typeface="Arial"/>
-                <a:cs typeface="Arial"/>
-              </a:defRPr>
-            </a:pPr>
-            <a:r>
-              <a:rPr sz="2325">
-                <a:solidFill>
-                  <a:srgbClr val="16343E"/>
-                </a:solidFill>
-                <a:latin typeface="Arial"/>
-                <a:ea typeface="Arial"/>
-                <a:cs typeface="Arial"/>
-              </a:rPr>
-              <a:t>758 inputs</a:t>
+              <a:defRPr sz="2025">
+                <a:solidFill>
+                  <a:srgbClr val="16343E"/>
+                </a:solidFill>
+                <a:latin typeface="Arial"/>
+                <a:ea typeface="Arial"/>
+                <a:cs typeface="Arial"/>
+              </a:defRPr>
+            </a:pPr>
+            <a:r>
+              <a:rPr sz="2025">
+                <a:solidFill>
+                  <a:srgbClr val="16343E"/>
+                </a:solidFill>
+                <a:latin typeface="Arial"/>
+                <a:ea typeface="Arial"/>
+                <a:cs typeface="Arial"/>
+              </a:rPr>
+              <a:t>Measure held-out errors</a:t>
             </a:r>
           </a:p>
         </p:txBody>
       </p:sp>
-      <p:cxnSp>
-        <p:nvCxnSpPr>
-          <p:cNvPr id="21" name=""/>
-          <p:cNvCxnSpPr>
-            <a:stCxn xmlns:a="http://schemas.openxmlformats.org/drawingml/2006/main" id="6" idx="3"/>
-            <a:endCxn xmlns:a="http://schemas.openxmlformats.org/drawingml/2006/main" id="8" idx="1"/>
-          </p:cNvCxnSpPr>
-          <p:nvPr/>
-        </p:nvCxnSpPr>
-        <p:spPr>
-          <a:xfrm xmlns:a="http://schemas.openxmlformats.org/drawingml/2006/main">
-            <a:off x="5886450" y="3028950"/>
-            <a:ext cx="400050" cy="0"/>
-          </a:xfrm>
-          <a:prstGeom xmlns:a="http://schemas.openxmlformats.org/drawingml/2006/main" prst="straightConnector1">
-            <a:avLst/>
-          </a:prstGeom>
-          <a:ln xmlns:a="http://schemas.openxmlformats.org/drawingml/2006/main" w="23813">
-            <a:solidFill>
-              <a:srgbClr val="52656B"/>
-            </a:solidFill>
-            <a:tailEnd type="arrow" w="med" len="med"/>
-          </a:ln>
-        </p:spPr>
-      </p:cxnSp>
-      <p:sp>
-        <p:nvSpPr>
-          <p:cNvPr id="10" name="">
-            <a:extLst xmlns:a="http://schemas.openxmlformats.org/drawingml/2006/main">
-              <a:ext uri="{FF2B5EF4-FFF2-40B4-BE49-F238E27FC236}">
-                <a16:creationId xmlns:a16="http://schemas.microsoft.com/office/drawing/2014/main" id="{4E2F8D7D-C280-42F8-9599-7394D0F1BF86}"/>
-              </a:ext>
-            </a:extLst>
-          </p:cNvPr>
-          <p:cNvSpPr>
-            <a:spLocks xmlns:a="http://schemas.openxmlformats.org/drawingml/2006/main" noGrp="1"/>
-          </p:cNvSpPr>
-          <p:nvPr/>
-        </p:nvSpPr>
-        <p:spPr>
-          <a:xfrm xmlns:a="http://schemas.openxmlformats.org/drawingml/2006/main">
-            <a:off x="9124950" y="2409825"/>
-            <a:ext cx="2438400" cy="1238250"/>
+      <p:sp>
+        <p:nvSpPr>
+          <p:cNvPr id="9" name="">
+            <a:extLst xmlns:a="http://schemas.openxmlformats.org/drawingml/2006/main">
+              <a:ext uri="{FF2B5EF4-FFF2-40B4-BE49-F238E27FC236}">
+                <a16:creationId xmlns:a16="http://schemas.microsoft.com/office/drawing/2014/main" id="{A8E21444-79CC-4FCF-8046-026E6A42A63F}"/>
+              </a:ext>
+            </a:extLst>
+          </p:cNvPr>
+          <p:cNvSpPr>
+            <a:spLocks xmlns:a="http://schemas.openxmlformats.org/drawingml/2006/main" noGrp="1"/>
+          </p:cNvSpPr>
+          <p:nvPr/>
+        </p:nvSpPr>
+        <p:spPr>
+          <a:xfrm xmlns:a="http://schemas.openxmlformats.org/drawingml/2006/main">
+            <a:off x="609600" y="4000500"/>
+            <a:ext cx="10972800" cy="685800"/>
           </a:xfrm>
           <a:prstGeom xmlns:a="http://schemas.openxmlformats.org/drawingml/2006/main" prst="rect">
             <a:avLst/>
           </a:prstGeom>
-          <a:solidFill xmlns:a="http://schemas.openxmlformats.org/drawingml/2006/main">
-            <a:srgbClr val="E4EFEB"/>
-          </a:solidFill>
-          <a:ln xmlns:a="http://schemas.openxmlformats.org/drawingml/2006/main" w="9525">
-            <a:solidFill>
-              <a:srgbClr val="CEDBD7"/>
-            </a:solidFill>
+          <a:noFill xmlns:a="http://schemas.openxmlformats.org/drawingml/2006/main"/>
+          <a:ln xmlns:a="http://schemas.openxmlformats.org/drawingml/2006/main" w="0">
+            <a:noFill/>
           </a:ln>
         </p:spPr>
         <p:txBody>
@@ -5285,96 +5397,201 @@
           </a:bodyPr>
           <a:lstStyle xmlns:a="http://schemas.openxmlformats.org/drawingml/2006/main"/>
           <a:p xmlns:a="http://schemas.openxmlformats.org/drawingml/2006/main">
-            <a:pPr algn="ctr">
-              <a:defRPr sz="2325">
-                <a:solidFill>
-                  <a:srgbClr val="16343E"/>
-                </a:solidFill>
-                <a:latin typeface="Arial"/>
-                <a:ea typeface="Arial"/>
-                <a:cs typeface="Arial"/>
-              </a:defRPr>
-            </a:pPr>
-            <a:r>
-              <a:rPr sz="2325">
-                <a:solidFill>
-                  <a:srgbClr val="16343E"/>
-                </a:solidFill>
-                <a:latin typeface="Arial"/>
-                <a:ea typeface="Arial"/>
-                <a:cs typeface="Arial"/>
-              </a:rPr>
-              <a:t>Score with</a:t>
-            </a:r>
-          </a:p>
-          <a:p xmlns:a="http://schemas.openxmlformats.org/drawingml/2006/main">
-            <a:pPr algn="ctr">
-              <a:defRPr sz="2325">
-                <a:solidFill>
-                  <a:srgbClr val="16343E"/>
-                </a:solidFill>
-                <a:latin typeface="Arial"/>
-                <a:ea typeface="Arial"/>
-                <a:cs typeface="Arial"/>
-              </a:defRPr>
-            </a:pPr>
-            <a:r>
-              <a:rPr sz="2325">
-                <a:solidFill>
-                  <a:srgbClr val="16343E"/>
-                </a:solidFill>
-                <a:latin typeface="Arial"/>
-                <a:ea typeface="Arial"/>
-                <a:cs typeface="Arial"/>
-              </a:rPr>
-              <a:t>saved model</a:t>
+            <a:pPr algn="l">
+              <a:defRPr sz="2100" b="0">
+                <a:solidFill>
+                  <a:srgbClr val="16343E"/>
+                </a:solidFill>
+                <a:latin typeface="Arial"/>
+                <a:ea typeface="Arial"/>
+                <a:cs typeface="Arial"/>
+              </a:defRPr>
+            </a:pPr>
+            <a:r>
+              <a:rPr sz="2100" b="0">
+                <a:solidFill>
+                  <a:srgbClr val="16343E"/>
+                </a:solidFill>
+                <a:latin typeface="Arial"/>
+                <a:ea typeface="Arial"/>
+                <a:cs typeface="Arial"/>
+              </a:rPr>
+              <a:t>Screening: at least 90% recall, then fewest false flags.</a:t>
+            </a:r>
+          </a:p>
+          <a:p xmlns:a="http://schemas.openxmlformats.org/drawingml/2006/main">
+            <a:pPr algn="l">
+              <a:defRPr sz="2100" b="0">
+                <a:solidFill>
+                  <a:srgbClr val="16343E"/>
+                </a:solidFill>
+                <a:latin typeface="Arial"/>
+                <a:ea typeface="Arial"/>
+                <a:cs typeface="Arial"/>
+              </a:defRPr>
+            </a:pPr>
+            <a:r>
+              <a:rPr sz="2100" b="0">
+                <a:solidFill>
+                  <a:srgbClr val="16343E"/>
+                </a:solidFill>
+                <a:latin typeface="Arial"/>
+                <a:ea typeface="Arial"/>
+                <a:cs typeface="Arial"/>
+              </a:rPr>
+              <a:t>I used ROC-AUC to break ties.</a:t>
             </a:r>
           </a:p>
         </p:txBody>
       </p:sp>
-      <p:cxnSp>
-        <p:nvCxnSpPr>
-          <p:cNvPr id="23" name=""/>
-          <p:cNvCxnSpPr>
-            <a:stCxn xmlns:a="http://schemas.openxmlformats.org/drawingml/2006/main" id="8" idx="3"/>
-            <a:endCxn xmlns:a="http://schemas.openxmlformats.org/drawingml/2006/main" id="10" idx="1"/>
-          </p:cNvCxnSpPr>
-          <p:nvPr/>
-        </p:nvCxnSpPr>
-        <p:spPr>
-          <a:xfrm xmlns:a="http://schemas.openxmlformats.org/drawingml/2006/main">
-            <a:off x="8724900" y="3028950"/>
-            <a:ext cx="400050" cy="0"/>
-          </a:xfrm>
-          <a:prstGeom xmlns:a="http://schemas.openxmlformats.org/drawingml/2006/main" prst="straightConnector1">
-            <a:avLst/>
-          </a:prstGeom>
-          <a:ln xmlns:a="http://schemas.openxmlformats.org/drawingml/2006/main" w="23813">
-            <a:solidFill>
-              <a:srgbClr val="52656B"/>
-            </a:solidFill>
-            <a:tailEnd type="arrow" w="med" len="med"/>
-          </a:ln>
-        </p:spPr>
-      </p:cxnSp>
-      <p:sp>
-        <p:nvSpPr>
-          <p:cNvPr id="12" name="">
-            <a:extLst xmlns:a="http://schemas.openxmlformats.org/drawingml/2006/main">
-              <a:ext uri="{FF2B5EF4-FFF2-40B4-BE49-F238E27FC236}">
-                <a16:creationId xmlns:a16="http://schemas.microsoft.com/office/drawing/2014/main" id="{95EABD82-ECF3-4F7A-9567-36063A3F0AA0}"/>
-              </a:ext>
-            </a:extLst>
-          </p:cNvPr>
-          <p:cNvSpPr>
-            <a:spLocks xmlns:a="http://schemas.openxmlformats.org/drawingml/2006/main" noGrp="1"/>
-          </p:cNvSpPr>
-          <p:nvPr/>
-        </p:nvSpPr>
-        <p:spPr>
-          <a:xfrm xmlns:a="http://schemas.openxmlformats.org/drawingml/2006/main">
-            <a:off x="609600" y="4181475"/>
-            <a:ext cx="10972800" cy="1676400"/>
+      <p:graphicFrame>
+        <p:nvGraphicFramePr>
+          <p:cNvPr id="21" name=""/>
+          <p:cNvGraphicFramePr/>
+          <p:nvPr/>
+        </p:nvGraphicFramePr>
+        <p:xfrm>
+          <a:off xmlns:a="http://schemas.openxmlformats.org/drawingml/2006/main" x="609600" y="4886325"/>
+          <a:ext xmlns:a="http://schemas.openxmlformats.org/drawingml/2006/main" cx="10972800" cy="876300"/>
+        </p:xfrm>
+        <a:graphic xmlns:a="http://schemas.openxmlformats.org/drawingml/2006/main">
+          <a:graphicData uri="http://schemas.openxmlformats.org/drawingml/2006/table">
+            <a:tbl>
+              <a:tblPr/>
+              <a:tblGrid>
+                <a:gridCol w="5486400"/>
+                <a:gridCol w="5486400"/>
+              </a:tblGrid>
+              <a:tr h="438150">
+                <a:tc>
+                  <a:txBody>
+                    <a:bodyPr>
+                      <a:noAutofit/>
+                    </a:bodyPr>
+                    <a:lstStyle/>
+                    <a:p>
+                      <a:r>
+                        <a:rPr sz="2175" b="1">
+                          <a:solidFill>
+                            <a:srgbClr val="FFFFFF"/>
+                          </a:solidFill>
+                          <a:latin typeface="Arial"/>
+                          <a:ea typeface="Arial"/>
+                          <a:cs typeface="Arial"/>
+                        </a:rPr>
+                        <a:t>CatBoost</a:t>
+                      </a:r>
+                    </a:p>
+                  </a:txBody>
+                  <a:tcPr marL="171450" marR="142875" marT="38100" marB="38100" anchor="ctr">
+                    <a:solidFill>
+                      <a:srgbClr val="16343E"/>
+                    </a:solidFill>
+                  </a:tcPr>
+                </a:tc>
+                <a:tc>
+                  <a:txBody>
+                    <a:bodyPr>
+                      <a:noAutofit/>
+                    </a:bodyPr>
+                    <a:lstStyle/>
+                    <a:p>
+                      <a:r>
+                        <a:rPr sz="2175" b="1">
+                          <a:solidFill>
+                            <a:srgbClr val="FFFFFF"/>
+                          </a:solidFill>
+                          <a:latin typeface="Arial"/>
+                          <a:ea typeface="Arial"/>
+                          <a:cs typeface="Arial"/>
+                        </a:rPr>
+                        <a:t>All RNA (Logistic Regression)</a:t>
+                      </a:r>
+                    </a:p>
+                  </a:txBody>
+                  <a:tcPr marL="171450" marR="142875" marT="38100" marB="38100" anchor="ctr">
+                    <a:solidFill>
+                      <a:srgbClr val="16343E"/>
+                    </a:solidFill>
+                  </a:tcPr>
+                </a:tc>
+              </a:tr>
+              <a:tr h="438150">
+                <a:tc>
+                  <a:txBody>
+                    <a:bodyPr>
+                      <a:noAutofit/>
+                    </a:bodyPr>
+                    <a:lstStyle/>
+                    <a:p>
+                      <a:r>
+                        <a:rPr sz="2175" b="0">
+                          <a:solidFill>
+                            <a:srgbClr val="16343E"/>
+                          </a:solidFill>
+                          <a:latin typeface="Arial"/>
+                          <a:ea typeface="Arial"/>
+                          <a:cs typeface="Arial"/>
+                        </a:rPr>
+                        <a:t>13 / 20 selections</a:t>
+                      </a:r>
+                    </a:p>
+                  </a:txBody>
+                  <a:tcPr marL="171450" marR="142875" marT="38100" marB="38100" anchor="ctr">
+                    <a:solidFill>
+                      <a:srgbClr val="FFFFFF"/>
+                    </a:solidFill>
+                  </a:tcPr>
+                </a:tc>
+                <a:tc>
+                  <a:txBody>
+                    <a:bodyPr>
+                      <a:noAutofit/>
+                    </a:bodyPr>
+                    <a:lstStyle/>
+                    <a:p>
+                      <a:r>
+                        <a:rPr sz="2175" b="0">
+                          <a:solidFill>
+                            <a:srgbClr val="16343E"/>
+                          </a:solidFill>
+                          <a:latin typeface="Arial"/>
+                          <a:ea typeface="Arial"/>
+                          <a:cs typeface="Arial"/>
+                        </a:rPr>
+                        <a:t>7 / 20 selections</a:t>
+                      </a:r>
+                    </a:p>
+                  </a:txBody>
+                  <a:tcPr marL="171450" marR="142875" marT="38100" marB="38100" anchor="ctr">
+                    <a:solidFill>
+                      <a:srgbClr val="FFFFFF"/>
+                    </a:solidFill>
+                  </a:tcPr>
+                </a:tc>
+              </a:tr>
+            </a:tbl>
+          </a:graphicData>
+        </a:graphic>
+      </p:graphicFrame>
+      <p:sp>
+        <p:nvSpPr>
+          <p:cNvPr id="11" name="">
+            <a:extLst xmlns:a="http://schemas.openxmlformats.org/drawingml/2006/main">
+              <a:ext uri="{FF2B5EF4-FFF2-40B4-BE49-F238E27FC236}">
+                <a16:creationId xmlns:a16="http://schemas.microsoft.com/office/drawing/2014/main" id="{54F148CA-0417-4B89-92F8-1602D958F0F2}"/>
+              </a:ext>
+            </a:extLst>
+          </p:cNvPr>
+          <p:cNvSpPr>
+            <a:spLocks xmlns:a="http://schemas.openxmlformats.org/drawingml/2006/main" noGrp="1"/>
+          </p:cNvSpPr>
+          <p:nvPr/>
+        </p:nvSpPr>
+        <p:spPr>
+          <a:xfrm xmlns:a="http://schemas.openxmlformats.org/drawingml/2006/main">
+            <a:off x="609600" y="5895975"/>
+            <a:ext cx="10972800" cy="333375"/>
           </a:xfrm>
           <a:prstGeom xmlns:a="http://schemas.openxmlformats.org/drawingml/2006/main" prst="rect">
             <a:avLst/>
@@ -5385,62 +5602,31 @@
           </a:ln>
         </p:spPr>
         <p:txBody>
-          <a:bodyPr xmlns:a="http://schemas.openxmlformats.org/drawingml/2006/main" anchor="t">
+          <a:bodyPr xmlns:a="http://schemas.openxmlformats.org/drawingml/2006/main" anchor="ctr">
             <a:noAutofit/>
           </a:bodyPr>
           <a:lstStyle xmlns:a="http://schemas.openxmlformats.org/drawingml/2006/main"/>
           <a:p xmlns:a="http://schemas.openxmlformats.org/drawingml/2006/main">
-            <a:pPr marL="279400" indent="-152400" algn="l">
-              <a:spcAft>
-                <a:spcPts val="2200"/>
-              </a:spcAft>
-              <a:buChar char="•"/>
-              <a:defRPr sz="2400" b="0">
-                <a:solidFill>
-                  <a:srgbClr val="16343E"/>
-                </a:solidFill>
-                <a:latin typeface="Arial"/>
-                <a:ea typeface="Arial"/>
-                <a:cs typeface="Arial"/>
-              </a:defRPr>
-            </a:pPr>
-            <a:r>
-              <a:rPr sz="2400" b="0">
-                <a:solidFill>
-                  <a:srgbClr val="16343E"/>
-                </a:solidFill>
-                <a:latin typeface="Arial"/>
-                <a:ea typeface="Arial"/>
-                <a:cs typeface="Arial"/>
-              </a:rPr>
-              <a:t>A valid request returns the specimen ID, model score, threshold, flag and model version.</a:t>
-            </a:r>
-          </a:p>
-          <a:p xmlns:a="http://schemas.openxmlformats.org/drawingml/2006/main">
-            <a:pPr marL="279400" indent="-152400" algn="l">
-              <a:spcAft>
-                <a:spcPts val="2200"/>
-              </a:spcAft>
-              <a:buChar char="•"/>
-              <a:defRPr sz="2400" b="0">
-                <a:solidFill>
-                  <a:srgbClr val="16343E"/>
-                </a:solidFill>
-                <a:latin typeface="Arial"/>
-                <a:ea typeface="Arial"/>
-                <a:cs typeface="Arial"/>
-              </a:defRPr>
-            </a:pPr>
-            <a:r>
-              <a:rPr sz="2400" b="0">
-                <a:solidFill>
-                  <a:srgbClr val="16343E"/>
-                </a:solidFill>
-                <a:latin typeface="Arial"/>
-                <a:ea typeface="Arial"/>
-                <a:cs typeface="Arial"/>
-              </a:rPr>
-              <a:t>Missing or duplicate measurements, negative counts or non-finite values stop scoring.</a:t>
+            <a:pPr algn="l">
+              <a:defRPr sz="1875" b="0">
+                <a:solidFill>
+                  <a:srgbClr val="16343E"/>
+                </a:solidFill>
+                <a:latin typeface="Arial"/>
+                <a:ea typeface="Arial"/>
+                <a:cs typeface="Arial"/>
+              </a:defRPr>
+            </a:pPr>
+            <a:r>
+              <a:rPr sz="1875" b="0">
+                <a:solidFill>
+                  <a:srgbClr val="16343E"/>
+                </a:solidFill>
+                <a:latin typeface="Arial"/>
+                <a:ea typeface="Arial"/>
+                <a:cs typeface="Arial"/>
+              </a:rPr>
+              <a:t>The splits shared specimens; the 20 selections were not independent trials.</a:t>
             </a:r>
           </a:p>
         </p:txBody>
@@ -5448,7 +5634,7 @@
     </p:spTree>
     <p:extLst>
       <p:ext uri="{BB962C8B-B14F-4D97-AF65-F5344CB8AC3E}">
-        <p14:creationId xmlns:p14="http://schemas.microsoft.com/office/powerpoint/2010/main" val="1404919146"/>
+        <p14:creationId xmlns:p14="http://schemas.microsoft.com/office/powerpoint/2010/main" val="1814131044"/>
       </p:ext>
     </p:extLst>
   </p:cSld>
@@ -5476,10 +5662,10 @@
       </p:grpSpPr>
       <p:sp>
         <p:nvSpPr>
-          <p:cNvPr id="9" name="">
-            <a:extLst xmlns:a="http://schemas.openxmlformats.org/drawingml/2006/main">
-              <a:ext uri="{FF2B5EF4-FFF2-40B4-BE49-F238E27FC236}">
-                <a16:creationId xmlns:a16="http://schemas.microsoft.com/office/drawing/2014/main" id="{60B12E10-902A-4D94-B2BB-65ED70346A15}"/>
+          <p:cNvPr id="13" name="">
+            <a:extLst xmlns:a="http://schemas.openxmlformats.org/drawingml/2006/main">
+              <a:ext uri="{FF2B5EF4-FFF2-40B4-BE49-F238E27FC236}">
+                <a16:creationId xmlns:a16="http://schemas.microsoft.com/office/drawing/2014/main" id="{A5F92D5E-7AA5-45F5-A5CA-5AE5AAEB37B5}"/>
               </a:ext>
             </a:extLst>
           </p:cNvPr>
@@ -5526,7 +5712,7 @@
                 <a:ea typeface="Arial"/>
                 <a:cs typeface="Arial"/>
               </a:rPr>
-              <a:t>One public specimen through the service</a:t>
+              <a:t>Prediction service and demonstration</a:t>
             </a:r>
           </a:p>
         </p:txBody>
@@ -5536,7 +5722,7 @@
           <p:cNvPr id="2" name="">
             <a:extLst xmlns:a="http://schemas.openxmlformats.org/drawingml/2006/main">
               <a:ext uri="{FF2B5EF4-FFF2-40B4-BE49-F238E27FC236}">
-                <a16:creationId xmlns:a16="http://schemas.microsoft.com/office/drawing/2014/main" id="{A40FA92F-E999-4C58-A209-8FBD24C44791}"/>
+                <a16:creationId xmlns:a16="http://schemas.microsoft.com/office/drawing/2014/main" id="{3D8BA2EE-6300-4B92-8F27-D1AEFE767041}"/>
               </a:ext>
             </a:extLst>
           </p:cNvPr>
@@ -5583,7 +5769,7 @@
                 <a:ea typeface="Arial"/>
                 <a:cs typeface="Arial"/>
               </a:rPr>
-              <a:t>Source: public discovery-screen example and saved application checks</a:t>
+              <a:t>Source: shared preprocessing and Predictor; application contract</a:t>
             </a:r>
           </a:p>
         </p:txBody>
@@ -5593,7 +5779,7 @@
           <p:cNvPr id="3" name="">
             <a:extLst xmlns:a="http://schemas.openxmlformats.org/drawingml/2006/main">
               <a:ext uri="{FF2B5EF4-FFF2-40B4-BE49-F238E27FC236}">
-                <a16:creationId xmlns:a16="http://schemas.microsoft.com/office/drawing/2014/main" id="{300F3AB6-3108-45FA-950A-23C58CE48E50}"/>
+                <a16:creationId xmlns:a16="http://schemas.microsoft.com/office/drawing/2014/main" id="{7419EC9F-53B6-4C63-A61E-3715B16CF623}"/>
               </a:ext>
             </a:extLst>
           </p:cNvPr>
@@ -5650,7 +5836,771 @@
           <p:cNvPr id="4" name="">
             <a:extLst xmlns:a="http://schemas.openxmlformats.org/drawingml/2006/main">
               <a:ext uri="{FF2B5EF4-FFF2-40B4-BE49-F238E27FC236}">
-                <a16:creationId xmlns:a16="http://schemas.microsoft.com/office/drawing/2014/main" id="{A8F124F3-8051-4078-9915-471577AA7018}"/>
+                <a16:creationId xmlns:a16="http://schemas.microsoft.com/office/drawing/2014/main" id="{AE677B5D-6E8C-42AF-8D35-27F15C485583}"/>
+              </a:ext>
+            </a:extLst>
+          </p:cNvPr>
+          <p:cNvSpPr>
+            <a:spLocks xmlns:a="http://schemas.openxmlformats.org/drawingml/2006/main" noGrp="1"/>
+          </p:cNvSpPr>
+          <p:nvPr/>
+        </p:nvSpPr>
+        <p:spPr>
+          <a:xfrm xmlns:a="http://schemas.openxmlformats.org/drawingml/2006/main">
+            <a:off x="609600" y="1524000"/>
+            <a:ext cx="10972800" cy="790575"/>
+          </a:xfrm>
+          <a:prstGeom xmlns:a="http://schemas.openxmlformats.org/drawingml/2006/main" prst="rect">
+            <a:avLst/>
+          </a:prstGeom>
+          <a:noFill xmlns:a="http://schemas.openxmlformats.org/drawingml/2006/main"/>
+          <a:ln xmlns:a="http://schemas.openxmlformats.org/drawingml/2006/main" w="0">
+            <a:noFill/>
+          </a:ln>
+        </p:spPr>
+        <p:txBody>
+          <a:bodyPr xmlns:a="http://schemas.openxmlformats.org/drawingml/2006/main" anchor="t">
+            <a:noAutofit/>
+          </a:bodyPr>
+          <a:lstStyle xmlns:a="http://schemas.openxmlformats.org/drawingml/2006/main"/>
+          <a:p xmlns:a="http://schemas.openxmlformats.org/drawingml/2006/main">
+            <a:pPr marL="279400" indent="-152400" algn="l">
+              <a:spcAft>
+                <a:spcPts val="600"/>
+              </a:spcAft>
+              <a:buChar char="•"/>
+              <a:defRPr sz="2175" b="0">
+                <a:solidFill>
+                  <a:srgbClr val="16343E"/>
+                </a:solidFill>
+                <a:latin typeface="Arial"/>
+                <a:ea typeface="Arial"/>
+                <a:cs typeface="Arial"/>
+              </a:defRPr>
+            </a:pPr>
+            <a:r>
+              <a:rPr sz="2175" b="0">
+                <a:solidFill>
+                  <a:srgbClr val="16343E"/>
+                </a:solidFill>
+                <a:latin typeface="Arial"/>
+                <a:ea typeface="Arial"/>
+                <a:cs typeface="Arial"/>
+              </a:rPr>
+              <a:t>CSV input through the command line or web application.</a:t>
+            </a:r>
+          </a:p>
+          <a:p xmlns:a="http://schemas.openxmlformats.org/drawingml/2006/main">
+            <a:pPr marL="279400" indent="-152400" algn="l">
+              <a:spcAft>
+                <a:spcPts val="600"/>
+              </a:spcAft>
+              <a:buChar char="•"/>
+              <a:defRPr sz="2175" b="0">
+                <a:solidFill>
+                  <a:srgbClr val="16343E"/>
+                </a:solidFill>
+                <a:latin typeface="Arial"/>
+                <a:ea typeface="Arial"/>
+                <a:cs typeface="Arial"/>
+              </a:defRPr>
+            </a:pPr>
+            <a:r>
+              <a:rPr sz="2175" b="0">
+                <a:solidFill>
+                  <a:srgbClr val="16343E"/>
+                </a:solidFill>
+                <a:latin typeface="Arial"/>
+                <a:ea typeface="Arial"/>
+                <a:cs typeface="Arial"/>
+              </a:rPr>
+              <a:t>Training and prediction share the preparation code.</a:t>
+            </a:r>
+          </a:p>
+        </p:txBody>
+      </p:sp>
+      <p:sp>
+        <p:nvSpPr>
+          <p:cNvPr id="5" name="">
+            <a:extLst xmlns:a="http://schemas.openxmlformats.org/drawingml/2006/main">
+              <a:ext uri="{FF2B5EF4-FFF2-40B4-BE49-F238E27FC236}">
+                <a16:creationId xmlns:a16="http://schemas.microsoft.com/office/drawing/2014/main" id="{14E9555C-D18F-4F96-80B0-0C8E3A81451B}"/>
+              </a:ext>
+            </a:extLst>
+          </p:cNvPr>
+          <p:cNvSpPr>
+            <a:spLocks xmlns:a="http://schemas.openxmlformats.org/drawingml/2006/main" noGrp="1"/>
+          </p:cNvSpPr>
+          <p:nvPr/>
+        </p:nvSpPr>
+        <p:spPr>
+          <a:xfrm xmlns:a="http://schemas.openxmlformats.org/drawingml/2006/main">
+            <a:off x="609600" y="2409825"/>
+            <a:ext cx="2438400" cy="1238250"/>
+          </a:xfrm>
+          <a:prstGeom xmlns:a="http://schemas.openxmlformats.org/drawingml/2006/main" prst="rect">
+            <a:avLst/>
+          </a:prstGeom>
+          <a:solidFill xmlns:a="http://schemas.openxmlformats.org/drawingml/2006/main">
+            <a:srgbClr val="E4EFEB"/>
+          </a:solidFill>
+          <a:ln xmlns:a="http://schemas.openxmlformats.org/drawingml/2006/main" w="9525">
+            <a:solidFill>
+              <a:srgbClr val="CEDBD7"/>
+            </a:solidFill>
+          </a:ln>
+        </p:spPr>
+        <p:txBody>
+          <a:bodyPr xmlns:a="http://schemas.openxmlformats.org/drawingml/2006/main" anchor="ctr">
+            <a:noAutofit/>
+          </a:bodyPr>
+          <a:lstStyle xmlns:a="http://schemas.openxmlformats.org/drawingml/2006/main"/>
+          <a:p xmlns:a="http://schemas.openxmlformats.org/drawingml/2006/main">
+            <a:pPr algn="ctr">
+              <a:defRPr sz="2325">
+                <a:solidFill>
+                  <a:srgbClr val="16343E"/>
+                </a:solidFill>
+                <a:latin typeface="Arial"/>
+                <a:ea typeface="Arial"/>
+                <a:cs typeface="Arial"/>
+              </a:defRPr>
+            </a:pPr>
+            <a:r>
+              <a:rPr sz="2325">
+                <a:solidFill>
+                  <a:srgbClr val="16343E"/>
+                </a:solidFill>
+                <a:latin typeface="Arial"/>
+                <a:ea typeface="Arial"/>
+                <a:cs typeface="Arial"/>
+              </a:rPr>
+              <a:t>Read counts</a:t>
+            </a:r>
+          </a:p>
+        </p:txBody>
+      </p:sp>
+      <p:sp>
+        <p:nvSpPr>
+          <p:cNvPr id="6" name="">
+            <a:extLst xmlns:a="http://schemas.openxmlformats.org/drawingml/2006/main">
+              <a:ext uri="{FF2B5EF4-FFF2-40B4-BE49-F238E27FC236}">
+                <a16:creationId xmlns:a16="http://schemas.microsoft.com/office/drawing/2014/main" id="{D1BF87C8-A90D-4150-9F0C-0983F8BA5D05}"/>
+              </a:ext>
+            </a:extLst>
+          </p:cNvPr>
+          <p:cNvSpPr>
+            <a:spLocks xmlns:a="http://schemas.openxmlformats.org/drawingml/2006/main" noGrp="1"/>
+          </p:cNvSpPr>
+          <p:nvPr/>
+        </p:nvSpPr>
+        <p:spPr>
+          <a:xfrm xmlns:a="http://schemas.openxmlformats.org/drawingml/2006/main">
+            <a:off x="3448050" y="2409825"/>
+            <a:ext cx="2438400" cy="1238250"/>
+          </a:xfrm>
+          <a:prstGeom xmlns:a="http://schemas.openxmlformats.org/drawingml/2006/main" prst="rect">
+            <a:avLst/>
+          </a:prstGeom>
+          <a:solidFill xmlns:a="http://schemas.openxmlformats.org/drawingml/2006/main">
+            <a:srgbClr val="E4EFEB"/>
+          </a:solidFill>
+          <a:ln xmlns:a="http://schemas.openxmlformats.org/drawingml/2006/main" w="9525">
+            <a:solidFill>
+              <a:srgbClr val="CEDBD7"/>
+            </a:solidFill>
+          </a:ln>
+        </p:spPr>
+        <p:txBody>
+          <a:bodyPr xmlns:a="http://schemas.openxmlformats.org/drawingml/2006/main" anchor="ctr">
+            <a:noAutofit/>
+          </a:bodyPr>
+          <a:lstStyle xmlns:a="http://schemas.openxmlformats.org/drawingml/2006/main"/>
+          <a:p xmlns:a="http://schemas.openxmlformats.org/drawingml/2006/main">
+            <a:pPr algn="ctr">
+              <a:defRPr sz="2325">
+                <a:solidFill>
+                  <a:srgbClr val="16343E"/>
+                </a:solidFill>
+                <a:latin typeface="Arial"/>
+                <a:ea typeface="Arial"/>
+                <a:cs typeface="Arial"/>
+              </a:defRPr>
+            </a:pPr>
+            <a:r>
+              <a:rPr sz="2325">
+                <a:solidFill>
+                  <a:srgbClr val="16343E"/>
+                </a:solidFill>
+                <a:latin typeface="Arial"/>
+                <a:ea typeface="Arial"/>
+                <a:cs typeface="Arial"/>
+              </a:rPr>
+              <a:t>Check names</a:t>
+            </a:r>
+          </a:p>
+          <a:p xmlns:a="http://schemas.openxmlformats.org/drawingml/2006/main">
+            <a:pPr algn="ctr">
+              <a:defRPr sz="2325">
+                <a:solidFill>
+                  <a:srgbClr val="16343E"/>
+                </a:solidFill>
+                <a:latin typeface="Arial"/>
+                <a:ea typeface="Arial"/>
+                <a:cs typeface="Arial"/>
+              </a:defRPr>
+            </a:pPr>
+            <a:r>
+              <a:rPr sz="2325">
+                <a:solidFill>
+                  <a:srgbClr val="16343E"/>
+                </a:solidFill>
+                <a:latin typeface="Arial"/>
+                <a:ea typeface="Arial"/>
+                <a:cs typeface="Arial"/>
+              </a:rPr>
+              <a:t>and numbers</a:t>
+            </a:r>
+          </a:p>
+        </p:txBody>
+      </p:sp>
+      <p:cxnSp>
+        <p:nvCxnSpPr>
+          <p:cNvPr id="19" name=""/>
+          <p:cNvCxnSpPr>
+            <a:stCxn xmlns:a="http://schemas.openxmlformats.org/drawingml/2006/main" id="5" idx="3"/>
+            <a:endCxn xmlns:a="http://schemas.openxmlformats.org/drawingml/2006/main" id="6" idx="1"/>
+          </p:cNvCxnSpPr>
+          <p:nvPr/>
+        </p:nvCxnSpPr>
+        <p:spPr>
+          <a:xfrm xmlns:a="http://schemas.openxmlformats.org/drawingml/2006/main">
+            <a:off x="3048000" y="3028950"/>
+            <a:ext cx="400050" cy="0"/>
+          </a:xfrm>
+          <a:prstGeom xmlns:a="http://schemas.openxmlformats.org/drawingml/2006/main" prst="straightConnector1">
+            <a:avLst/>
+          </a:prstGeom>
+          <a:ln xmlns:a="http://schemas.openxmlformats.org/drawingml/2006/main" w="23813">
+            <a:solidFill>
+              <a:srgbClr val="52656B"/>
+            </a:solidFill>
+            <a:tailEnd type="arrow" w="med" len="med"/>
+          </a:ln>
+        </p:spPr>
+      </p:cxnSp>
+      <p:sp>
+        <p:nvSpPr>
+          <p:cNvPr id="8" name="">
+            <a:extLst xmlns:a="http://schemas.openxmlformats.org/drawingml/2006/main">
+              <a:ext uri="{FF2B5EF4-FFF2-40B4-BE49-F238E27FC236}">
+                <a16:creationId xmlns:a16="http://schemas.microsoft.com/office/drawing/2014/main" id="{30D3BCC8-1C38-45BC-8918-C392945E7E3C}"/>
+              </a:ext>
+            </a:extLst>
+          </p:cNvPr>
+          <p:cNvSpPr>
+            <a:spLocks xmlns:a="http://schemas.openxmlformats.org/drawingml/2006/main" noGrp="1"/>
+          </p:cNvSpPr>
+          <p:nvPr/>
+        </p:nvSpPr>
+        <p:spPr>
+          <a:xfrm xmlns:a="http://schemas.openxmlformats.org/drawingml/2006/main">
+            <a:off x="6286500" y="2409825"/>
+            <a:ext cx="2438400" cy="1238250"/>
+          </a:xfrm>
+          <a:prstGeom xmlns:a="http://schemas.openxmlformats.org/drawingml/2006/main" prst="rect">
+            <a:avLst/>
+          </a:prstGeom>
+          <a:solidFill xmlns:a="http://schemas.openxmlformats.org/drawingml/2006/main">
+            <a:srgbClr val="E4EFEB"/>
+          </a:solidFill>
+          <a:ln xmlns:a="http://schemas.openxmlformats.org/drawingml/2006/main" w="9525">
+            <a:solidFill>
+              <a:srgbClr val="CEDBD7"/>
+            </a:solidFill>
+          </a:ln>
+        </p:spPr>
+        <p:txBody>
+          <a:bodyPr xmlns:a="http://schemas.openxmlformats.org/drawingml/2006/main" anchor="ctr">
+            <a:noAutofit/>
+          </a:bodyPr>
+          <a:lstStyle xmlns:a="http://schemas.openxmlformats.org/drawingml/2006/main"/>
+          <a:p xmlns:a="http://schemas.openxmlformats.org/drawingml/2006/main">
+            <a:pPr algn="ctr">
+              <a:defRPr sz="2325">
+                <a:solidFill>
+                  <a:srgbClr val="16343E"/>
+                </a:solidFill>
+                <a:latin typeface="Arial"/>
+                <a:ea typeface="Arial"/>
+                <a:cs typeface="Arial"/>
+              </a:defRPr>
+            </a:pPr>
+            <a:r>
+              <a:rPr sz="2325">
+                <a:solidFill>
+                  <a:srgbClr val="16343E"/>
+                </a:solidFill>
+                <a:latin typeface="Arial"/>
+                <a:ea typeface="Arial"/>
+                <a:cs typeface="Arial"/>
+              </a:rPr>
+              <a:t>Normalize</a:t>
+            </a:r>
+          </a:p>
+          <a:p xmlns:a="http://schemas.openxmlformats.org/drawingml/2006/main">
+            <a:pPr algn="ctr">
+              <a:defRPr sz="2325">
+                <a:solidFill>
+                  <a:srgbClr val="16343E"/>
+                </a:solidFill>
+                <a:latin typeface="Arial"/>
+                <a:ea typeface="Arial"/>
+                <a:cs typeface="Arial"/>
+              </a:defRPr>
+            </a:pPr>
+            <a:r>
+              <a:rPr sz="2325">
+                <a:solidFill>
+                  <a:srgbClr val="16343E"/>
+                </a:solidFill>
+                <a:latin typeface="Arial"/>
+                <a:ea typeface="Arial"/>
+                <a:cs typeface="Arial"/>
+              </a:rPr>
+              <a:t>758 inputs</a:t>
+            </a:r>
+          </a:p>
+        </p:txBody>
+      </p:sp>
+      <p:cxnSp>
+        <p:nvCxnSpPr>
+          <p:cNvPr id="21" name=""/>
+          <p:cNvCxnSpPr>
+            <a:stCxn xmlns:a="http://schemas.openxmlformats.org/drawingml/2006/main" id="6" idx="3"/>
+            <a:endCxn xmlns:a="http://schemas.openxmlformats.org/drawingml/2006/main" id="8" idx="1"/>
+          </p:cNvCxnSpPr>
+          <p:nvPr/>
+        </p:nvCxnSpPr>
+        <p:spPr>
+          <a:xfrm xmlns:a="http://schemas.openxmlformats.org/drawingml/2006/main">
+            <a:off x="5886450" y="3028950"/>
+            <a:ext cx="400050" cy="0"/>
+          </a:xfrm>
+          <a:prstGeom xmlns:a="http://schemas.openxmlformats.org/drawingml/2006/main" prst="straightConnector1">
+            <a:avLst/>
+          </a:prstGeom>
+          <a:ln xmlns:a="http://schemas.openxmlformats.org/drawingml/2006/main" w="23813">
+            <a:solidFill>
+              <a:srgbClr val="52656B"/>
+            </a:solidFill>
+            <a:tailEnd type="arrow" w="med" len="med"/>
+          </a:ln>
+        </p:spPr>
+      </p:cxnSp>
+      <p:sp>
+        <p:nvSpPr>
+          <p:cNvPr id="10" name="">
+            <a:extLst xmlns:a="http://schemas.openxmlformats.org/drawingml/2006/main">
+              <a:ext uri="{FF2B5EF4-FFF2-40B4-BE49-F238E27FC236}">
+                <a16:creationId xmlns:a16="http://schemas.microsoft.com/office/drawing/2014/main" id="{0311F743-97D6-4CF7-A206-63AD5B98BCA5}"/>
+              </a:ext>
+            </a:extLst>
+          </p:cNvPr>
+          <p:cNvSpPr>
+            <a:spLocks xmlns:a="http://schemas.openxmlformats.org/drawingml/2006/main" noGrp="1"/>
+          </p:cNvSpPr>
+          <p:nvPr/>
+        </p:nvSpPr>
+        <p:spPr>
+          <a:xfrm xmlns:a="http://schemas.openxmlformats.org/drawingml/2006/main">
+            <a:off x="9124950" y="2409825"/>
+            <a:ext cx="2438400" cy="1238250"/>
+          </a:xfrm>
+          <a:prstGeom xmlns:a="http://schemas.openxmlformats.org/drawingml/2006/main" prst="rect">
+            <a:avLst/>
+          </a:prstGeom>
+          <a:solidFill xmlns:a="http://schemas.openxmlformats.org/drawingml/2006/main">
+            <a:srgbClr val="E4EFEB"/>
+          </a:solidFill>
+          <a:ln xmlns:a="http://schemas.openxmlformats.org/drawingml/2006/main" w="9525">
+            <a:solidFill>
+              <a:srgbClr val="CEDBD7"/>
+            </a:solidFill>
+          </a:ln>
+        </p:spPr>
+        <p:txBody>
+          <a:bodyPr xmlns:a="http://schemas.openxmlformats.org/drawingml/2006/main" anchor="ctr">
+            <a:noAutofit/>
+          </a:bodyPr>
+          <a:lstStyle xmlns:a="http://schemas.openxmlformats.org/drawingml/2006/main"/>
+          <a:p xmlns:a="http://schemas.openxmlformats.org/drawingml/2006/main">
+            <a:pPr algn="ctr">
+              <a:defRPr sz="2325">
+                <a:solidFill>
+                  <a:srgbClr val="16343E"/>
+                </a:solidFill>
+                <a:latin typeface="Arial"/>
+                <a:ea typeface="Arial"/>
+                <a:cs typeface="Arial"/>
+              </a:defRPr>
+            </a:pPr>
+            <a:r>
+              <a:rPr sz="2325">
+                <a:solidFill>
+                  <a:srgbClr val="16343E"/>
+                </a:solidFill>
+                <a:latin typeface="Arial"/>
+                <a:ea typeface="Arial"/>
+                <a:cs typeface="Arial"/>
+              </a:rPr>
+              <a:t>Score with</a:t>
+            </a:r>
+          </a:p>
+          <a:p xmlns:a="http://schemas.openxmlformats.org/drawingml/2006/main">
+            <a:pPr algn="ctr">
+              <a:defRPr sz="2325">
+                <a:solidFill>
+                  <a:srgbClr val="16343E"/>
+                </a:solidFill>
+                <a:latin typeface="Arial"/>
+                <a:ea typeface="Arial"/>
+                <a:cs typeface="Arial"/>
+              </a:defRPr>
+            </a:pPr>
+            <a:r>
+              <a:rPr sz="2325">
+                <a:solidFill>
+                  <a:srgbClr val="16343E"/>
+                </a:solidFill>
+                <a:latin typeface="Arial"/>
+                <a:ea typeface="Arial"/>
+                <a:cs typeface="Arial"/>
+              </a:rPr>
+              <a:t>saved model</a:t>
+            </a:r>
+          </a:p>
+        </p:txBody>
+      </p:sp>
+      <p:cxnSp>
+        <p:nvCxnSpPr>
+          <p:cNvPr id="23" name=""/>
+          <p:cNvCxnSpPr>
+            <a:stCxn xmlns:a="http://schemas.openxmlformats.org/drawingml/2006/main" id="8" idx="3"/>
+            <a:endCxn xmlns:a="http://schemas.openxmlformats.org/drawingml/2006/main" id="10" idx="1"/>
+          </p:cNvCxnSpPr>
+          <p:nvPr/>
+        </p:nvCxnSpPr>
+        <p:spPr>
+          <a:xfrm xmlns:a="http://schemas.openxmlformats.org/drawingml/2006/main">
+            <a:off x="8724900" y="3028950"/>
+            <a:ext cx="400050" cy="0"/>
+          </a:xfrm>
+          <a:prstGeom xmlns:a="http://schemas.openxmlformats.org/drawingml/2006/main" prst="straightConnector1">
+            <a:avLst/>
+          </a:prstGeom>
+          <a:ln xmlns:a="http://schemas.openxmlformats.org/drawingml/2006/main" w="23813">
+            <a:solidFill>
+              <a:srgbClr val="52656B"/>
+            </a:solidFill>
+            <a:tailEnd type="arrow" w="med" len="med"/>
+          </a:ln>
+        </p:spPr>
+      </p:cxnSp>
+      <p:sp>
+        <p:nvSpPr>
+          <p:cNvPr id="12" name="">
+            <a:extLst xmlns:a="http://schemas.openxmlformats.org/drawingml/2006/main">
+              <a:ext uri="{FF2B5EF4-FFF2-40B4-BE49-F238E27FC236}">
+                <a16:creationId xmlns:a16="http://schemas.microsoft.com/office/drawing/2014/main" id="{FACE142C-28AE-44A3-8CDD-550231EB68FF}"/>
+              </a:ext>
+            </a:extLst>
+          </p:cNvPr>
+          <p:cNvSpPr>
+            <a:spLocks xmlns:a="http://schemas.openxmlformats.org/drawingml/2006/main" noGrp="1"/>
+          </p:cNvSpPr>
+          <p:nvPr/>
+        </p:nvSpPr>
+        <p:spPr>
+          <a:xfrm xmlns:a="http://schemas.openxmlformats.org/drawingml/2006/main">
+            <a:off x="609600" y="4181475"/>
+            <a:ext cx="10972800" cy="1676400"/>
+          </a:xfrm>
+          <a:prstGeom xmlns:a="http://schemas.openxmlformats.org/drawingml/2006/main" prst="rect">
+            <a:avLst/>
+          </a:prstGeom>
+          <a:noFill xmlns:a="http://schemas.openxmlformats.org/drawingml/2006/main"/>
+          <a:ln xmlns:a="http://schemas.openxmlformats.org/drawingml/2006/main" w="0">
+            <a:noFill/>
+          </a:ln>
+        </p:spPr>
+        <p:txBody>
+          <a:bodyPr xmlns:a="http://schemas.openxmlformats.org/drawingml/2006/main" anchor="t">
+            <a:noAutofit/>
+          </a:bodyPr>
+          <a:lstStyle xmlns:a="http://schemas.openxmlformats.org/drawingml/2006/main"/>
+          <a:p xmlns:a="http://schemas.openxmlformats.org/drawingml/2006/main">
+            <a:pPr marL="279400" indent="-152400" algn="l">
+              <a:spcAft>
+                <a:spcPts val="2200"/>
+              </a:spcAft>
+              <a:buChar char="•"/>
+              <a:defRPr sz="2400" b="0">
+                <a:solidFill>
+                  <a:srgbClr val="16343E"/>
+                </a:solidFill>
+                <a:latin typeface="Arial"/>
+                <a:ea typeface="Arial"/>
+                <a:cs typeface="Arial"/>
+              </a:defRPr>
+            </a:pPr>
+            <a:r>
+              <a:rPr sz="2400" b="0">
+                <a:solidFill>
+                  <a:srgbClr val="16343E"/>
+                </a:solidFill>
+                <a:latin typeface="Arial"/>
+                <a:ea typeface="Arial"/>
+                <a:cs typeface="Arial"/>
+              </a:rPr>
+              <a:t>A valid request returns the specimen ID, model score, threshold, flag and model version.</a:t>
+            </a:r>
+          </a:p>
+          <a:p xmlns:a="http://schemas.openxmlformats.org/drawingml/2006/main">
+            <a:pPr marL="279400" indent="-152400" algn="l">
+              <a:spcAft>
+                <a:spcPts val="2200"/>
+              </a:spcAft>
+              <a:buChar char="•"/>
+              <a:defRPr sz="2400" b="0">
+                <a:solidFill>
+                  <a:srgbClr val="16343E"/>
+                </a:solidFill>
+                <a:latin typeface="Arial"/>
+                <a:ea typeface="Arial"/>
+                <a:cs typeface="Arial"/>
+              </a:defRPr>
+            </a:pPr>
+            <a:r>
+              <a:rPr sz="2400" b="0">
+                <a:solidFill>
+                  <a:srgbClr val="16343E"/>
+                </a:solidFill>
+                <a:latin typeface="Arial"/>
+                <a:ea typeface="Arial"/>
+                <a:cs typeface="Arial"/>
+              </a:rPr>
+              <a:t>Missing or duplicate measurements, negative counts or non-finite values stop scoring.</a:t>
+            </a:r>
+          </a:p>
+        </p:txBody>
+      </p:sp>
+    </p:spTree>
+    <p:extLst>
+      <p:ext uri="{BB962C8B-B14F-4D97-AF65-F5344CB8AC3E}">
+        <p14:creationId xmlns:p14="http://schemas.microsoft.com/office/powerpoint/2010/main" val="1702856441"/>
+      </p:ext>
+    </p:extLst>
+  </p:cSld>
+</p:sld>
+</file>
+
+<file path=ppt/slides/slide17.xml><?xml version="1.0" encoding="utf-8"?>
+<p:sld xmlns:p="http://schemas.openxmlformats.org/presentationml/2006/main">
+  <p:cSld>
+    <p:bg>
+      <p:bgPr>
+        <a:solidFill xmlns:a="http://schemas.openxmlformats.org/drawingml/2006/main">
+          <a:srgbClr val="F7F8F5"/>
+        </a:solidFill>
+      </p:bgPr>
+    </p:bg>
+    <p:spTree>
+      <p:nvGrpSpPr>
+        <p:cNvPr id="1" name=""/>
+        <p:cNvGrpSpPr/>
+        <p:nvPr/>
+      </p:nvGrpSpPr>
+      <p:grpSpPr>
+        <a:xfrm xmlns:a="http://schemas.openxmlformats.org/drawingml/2006/main"/>
+      </p:grpSpPr>
+      <p:sp>
+        <p:nvSpPr>
+          <p:cNvPr id="9" name="">
+            <a:extLst xmlns:a="http://schemas.openxmlformats.org/drawingml/2006/main">
+              <a:ext uri="{FF2B5EF4-FFF2-40B4-BE49-F238E27FC236}">
+                <a16:creationId xmlns:a16="http://schemas.microsoft.com/office/drawing/2014/main" id="{512AB1B2-D2F9-406C-B3ED-0C1BF0C51050}"/>
+              </a:ext>
+            </a:extLst>
+          </p:cNvPr>
+          <p:cNvSpPr>
+            <a:spLocks xmlns:a="http://schemas.openxmlformats.org/drawingml/2006/main" noGrp="1"/>
+          </p:cNvSpPr>
+          <p:nvPr/>
+        </p:nvSpPr>
+        <p:spPr>
+          <a:xfrm xmlns:a="http://schemas.openxmlformats.org/drawingml/2006/main">
+            <a:off x="609600" y="409575"/>
+            <a:ext cx="10972800" cy="1000125"/>
+          </a:xfrm>
+          <a:prstGeom xmlns:a="http://schemas.openxmlformats.org/drawingml/2006/main" prst="rect">
+            <a:avLst/>
+          </a:prstGeom>
+          <a:noFill xmlns:a="http://schemas.openxmlformats.org/drawingml/2006/main"/>
+          <a:ln xmlns:a="http://schemas.openxmlformats.org/drawingml/2006/main" w="0">
+            <a:noFill/>
+          </a:ln>
+        </p:spPr>
+        <p:txBody>
+          <a:bodyPr xmlns:a="http://schemas.openxmlformats.org/drawingml/2006/main" anchor="ctr">
+            <a:noAutofit/>
+          </a:bodyPr>
+          <a:lstStyle xmlns:a="http://schemas.openxmlformats.org/drawingml/2006/main"/>
+          <a:p xmlns:a="http://schemas.openxmlformats.org/drawingml/2006/main">
+            <a:pPr algn="l">
+              <a:defRPr sz="3450" b="1">
+                <a:solidFill>
+                  <a:srgbClr val="16343E"/>
+                </a:solidFill>
+                <a:latin typeface="Arial"/>
+                <a:ea typeface="Arial"/>
+                <a:cs typeface="Arial"/>
+              </a:defRPr>
+            </a:pPr>
+            <a:r>
+              <a:rPr sz="3450" b="1">
+                <a:solidFill>
+                  <a:srgbClr val="16343E"/>
+                </a:solidFill>
+                <a:latin typeface="Arial"/>
+                <a:ea typeface="Arial"/>
+                <a:cs typeface="Arial"/>
+              </a:rPr>
+              <a:t>One public specimen through the service</a:t>
+            </a:r>
+          </a:p>
+        </p:txBody>
+      </p:sp>
+      <p:sp>
+        <p:nvSpPr>
+          <p:cNvPr id="2" name="">
+            <a:extLst xmlns:a="http://schemas.openxmlformats.org/drawingml/2006/main">
+              <a:ext uri="{FF2B5EF4-FFF2-40B4-BE49-F238E27FC236}">
+                <a16:creationId xmlns:a16="http://schemas.microsoft.com/office/drawing/2014/main" id="{04F3292F-9668-4270-B136-DACC03BC8AF0}"/>
+              </a:ext>
+            </a:extLst>
+          </p:cNvPr>
+          <p:cNvSpPr>
+            <a:spLocks xmlns:a="http://schemas.openxmlformats.org/drawingml/2006/main" noGrp="1"/>
+          </p:cNvSpPr>
+          <p:nvPr/>
+        </p:nvSpPr>
+        <p:spPr>
+          <a:xfrm xmlns:a="http://schemas.openxmlformats.org/drawingml/2006/main">
+            <a:off x="609600" y="6257925"/>
+            <a:ext cx="10382250" cy="361950"/>
+          </a:xfrm>
+          <a:prstGeom xmlns:a="http://schemas.openxmlformats.org/drawingml/2006/main" prst="rect">
+            <a:avLst/>
+          </a:prstGeom>
+          <a:noFill xmlns:a="http://schemas.openxmlformats.org/drawingml/2006/main"/>
+          <a:ln xmlns:a="http://schemas.openxmlformats.org/drawingml/2006/main" w="0">
+            <a:noFill/>
+          </a:ln>
+        </p:spPr>
+        <p:txBody>
+          <a:bodyPr xmlns:a="http://schemas.openxmlformats.org/drawingml/2006/main" anchor="ctr">
+            <a:noAutofit/>
+          </a:bodyPr>
+          <a:lstStyle xmlns:a="http://schemas.openxmlformats.org/drawingml/2006/main"/>
+          <a:p xmlns:a="http://schemas.openxmlformats.org/drawingml/2006/main">
+            <a:pPr algn="l">
+              <a:defRPr sz="1350" b="0">
+                <a:solidFill>
+                  <a:srgbClr val="52656B"/>
+                </a:solidFill>
+                <a:latin typeface="Arial"/>
+                <a:ea typeface="Arial"/>
+                <a:cs typeface="Arial"/>
+              </a:defRPr>
+            </a:pPr>
+            <a:r>
+              <a:rPr sz="1350" b="0">
+                <a:solidFill>
+                  <a:srgbClr val="52656B"/>
+                </a:solidFill>
+                <a:latin typeface="Arial"/>
+                <a:ea typeface="Arial"/>
+                <a:cs typeface="Arial"/>
+              </a:rPr>
+              <a:t>Source: public discovery-screen example and saved application checks</a:t>
+            </a:r>
+          </a:p>
+        </p:txBody>
+      </p:sp>
+      <p:sp>
+        <p:nvSpPr>
+          <p:cNvPr id="3" name="">
+            <a:extLst xmlns:a="http://schemas.openxmlformats.org/drawingml/2006/main">
+              <a:ext uri="{FF2B5EF4-FFF2-40B4-BE49-F238E27FC236}">
+                <a16:creationId xmlns:a16="http://schemas.microsoft.com/office/drawing/2014/main" id="{5D68E0C8-325F-40DE-82F3-39D40D3824BC}"/>
+              </a:ext>
+            </a:extLst>
+          </p:cNvPr>
+          <p:cNvSpPr>
+            <a:spLocks xmlns:a="http://schemas.openxmlformats.org/drawingml/2006/main" noGrp="1"/>
+          </p:cNvSpPr>
+          <p:nvPr/>
+        </p:nvSpPr>
+        <p:spPr>
+          <a:xfrm xmlns:a="http://schemas.openxmlformats.org/drawingml/2006/main">
+            <a:off x="11115675" y="6305550"/>
+            <a:ext cx="457200" cy="285750"/>
+          </a:xfrm>
+          <a:prstGeom xmlns:a="http://schemas.openxmlformats.org/drawingml/2006/main" prst="rect">
+            <a:avLst/>
+          </a:prstGeom>
+          <a:noFill xmlns:a="http://schemas.openxmlformats.org/drawingml/2006/main"/>
+          <a:ln xmlns:a="http://schemas.openxmlformats.org/drawingml/2006/main" w="0">
+            <a:noFill/>
+          </a:ln>
+        </p:spPr>
+        <p:txBody>
+          <a:bodyPr xmlns:a="http://schemas.openxmlformats.org/drawingml/2006/main" anchor="ctr">
+            <a:noAutofit/>
+          </a:bodyPr>
+          <a:lstStyle xmlns:a="http://schemas.openxmlformats.org/drawingml/2006/main"/>
+          <a:p xmlns:a="http://schemas.openxmlformats.org/drawingml/2006/main">
+            <a:pPr algn="r">
+              <a:defRPr sz="1350" b="0">
+                <a:solidFill>
+                  <a:srgbClr val="52656B"/>
+                </a:solidFill>
+                <a:latin typeface="Arial"/>
+                <a:ea typeface="Arial"/>
+                <a:cs typeface="Arial"/>
+              </a:defRPr>
+            </a:pPr>
+            <a:r>
+              <a:rPr sz="1350" b="0">
+                <a:solidFill>
+                  <a:srgbClr val="52656B"/>
+                </a:solidFill>
+                <a:latin typeface="Arial"/>
+                <a:ea typeface="Arial"/>
+                <a:cs typeface="Arial"/>
+              </a:rPr>
+              <a:t>17</a:t>
+            </a:r>
+          </a:p>
+        </p:txBody>
+      </p:sp>
+      <p:sp>
+        <p:nvSpPr>
+          <p:cNvPr id="4" name="">
+            <a:extLst xmlns:a="http://schemas.openxmlformats.org/drawingml/2006/main">
+              <a:ext uri="{FF2B5EF4-FFF2-40B4-BE49-F238E27FC236}">
+                <a16:creationId xmlns:a16="http://schemas.microsoft.com/office/drawing/2014/main" id="{81C82799-C50F-4A6F-9C8C-53BCD74E2AAF}"/>
               </a:ext>
             </a:extLst>
           </p:cNvPr>
@@ -5894,7 +6844,7 @@
           <p:cNvPr id="6" name="">
             <a:extLst xmlns:a="http://schemas.openxmlformats.org/drawingml/2006/main">
               <a:ext uri="{FF2B5EF4-FFF2-40B4-BE49-F238E27FC236}">
-                <a16:creationId xmlns:a16="http://schemas.microsoft.com/office/drawing/2014/main" id="{B7054A0A-3161-4CAB-B661-402DE7205CBA}"/>
+                <a16:creationId xmlns:a16="http://schemas.microsoft.com/office/drawing/2014/main" id="{B1E504DE-FDF3-4B5E-AAF5-FEDF54EF0DD3}"/>
               </a:ext>
             </a:extLst>
           </p:cNvPr>
@@ -5951,7 +6901,7 @@
           <p:cNvPr id="7" name="">
             <a:extLst xmlns:a="http://schemas.openxmlformats.org/drawingml/2006/main">
               <a:ext uri="{FF2B5EF4-FFF2-40B4-BE49-F238E27FC236}">
-                <a16:creationId xmlns:a16="http://schemas.microsoft.com/office/drawing/2014/main" id="{15ABC40D-995E-4FC5-BFD9-D9528999ABBF}"/>
+                <a16:creationId xmlns:a16="http://schemas.microsoft.com/office/drawing/2014/main" id="{37C1509C-A401-4C9C-ADD1-BC18C90EAB6E}"/>
               </a:ext>
             </a:extLst>
           </p:cNvPr>
@@ -6039,7 +6989,7 @@
           <p:cNvPr id="8" name="">
             <a:extLst xmlns:a="http://schemas.openxmlformats.org/drawingml/2006/main">
               <a:ext uri="{FF2B5EF4-FFF2-40B4-BE49-F238E27FC236}">
-                <a16:creationId xmlns:a16="http://schemas.microsoft.com/office/drawing/2014/main" id="{FAACC592-0E71-473E-822D-D24BCAE3B592}"/>
+                <a16:creationId xmlns:a16="http://schemas.microsoft.com/office/drawing/2014/main" id="{EA09217C-350B-4766-AC16-2692BAAB9069}"/>
               </a:ext>
             </a:extLst>
           </p:cNvPr>
@@ -6094,14 +7044,14 @@
     </p:spTree>
     <p:extLst>
       <p:ext uri="{BB962C8B-B14F-4D97-AF65-F5344CB8AC3E}">
-        <p14:creationId xmlns:p14="http://schemas.microsoft.com/office/powerpoint/2010/main" val="1755082383"/>
+        <p14:creationId xmlns:p14="http://schemas.microsoft.com/office/powerpoint/2010/main" val="314869899"/>
       </p:ext>
     </p:extLst>
   </p:cSld>
 </p:sld>
 </file>
 
-<file path=ppt/slides/slide17.xml><?xml version="1.0" encoding="utf-8"?>
+<file path=ppt/slides/slide18.xml><?xml version="1.0" encoding="utf-8"?>
 <p:sld xmlns:p="http://schemas.openxmlformats.org/presentationml/2006/main">
   <p:cSld>
     <p:bg>
@@ -6125,7 +7075,7 @@
           <p:cNvPr id="7" name="">
             <a:extLst xmlns:a="http://schemas.openxmlformats.org/drawingml/2006/main">
               <a:ext uri="{FF2B5EF4-FFF2-40B4-BE49-F238E27FC236}">
-                <a16:creationId xmlns:a16="http://schemas.microsoft.com/office/drawing/2014/main" id="{07F5E51B-B22F-44C3-BC86-7BC785A25EA0}"/>
+                <a16:creationId xmlns:a16="http://schemas.microsoft.com/office/drawing/2014/main" id="{F9791DE8-A369-4EEA-ACB9-6056FB9A364D}"/>
               </a:ext>
             </a:extLst>
           </p:cNvPr>
@@ -6182,7 +7132,7 @@
           <p:cNvPr id="2" name="">
             <a:extLst xmlns:a="http://schemas.openxmlformats.org/drawingml/2006/main">
               <a:ext uri="{FF2B5EF4-FFF2-40B4-BE49-F238E27FC236}">
-                <a16:creationId xmlns:a16="http://schemas.microsoft.com/office/drawing/2014/main" id="{94B8D860-6894-48DD-B17B-CF12F732AB1B}"/>
+                <a16:creationId xmlns:a16="http://schemas.microsoft.com/office/drawing/2014/main" id="{DE702F9E-6FD3-42F9-81C9-45792AA79E75}"/>
               </a:ext>
             </a:extLst>
           </p:cNvPr>
@@ -6239,7 +7189,7 @@
           <p:cNvPr id="3" name="">
             <a:extLst xmlns:a="http://schemas.openxmlformats.org/drawingml/2006/main">
               <a:ext uri="{FF2B5EF4-FFF2-40B4-BE49-F238E27FC236}">
-                <a16:creationId xmlns:a16="http://schemas.microsoft.com/office/drawing/2014/main" id="{C7A32D45-DA0E-44FF-8331-5CAEBCC31B48}"/>
+                <a16:creationId xmlns:a16="http://schemas.microsoft.com/office/drawing/2014/main" id="{174C9C47-2163-4BF2-8970-163DE9D2CCEC}"/>
               </a:ext>
             </a:extLst>
           </p:cNvPr>
@@ -6286,7 +7236,7 @@
                 <a:ea typeface="Arial"/>
                 <a:cs typeface="Arial"/>
               </a:rPr>
-              <a:t>17</a:t>
+              <a:t>18</a:t>
             </a:r>
           </a:p>
         </p:txBody>
@@ -6296,7 +7246,7 @@
           <p:cNvPr id="4" name="">
             <a:extLst xmlns:a="http://schemas.openxmlformats.org/drawingml/2006/main">
               <a:ext uri="{FF2B5EF4-FFF2-40B4-BE49-F238E27FC236}">
-                <a16:creationId xmlns:a16="http://schemas.microsoft.com/office/drawing/2014/main" id="{F600F02C-70C9-45DA-B2CB-99A401E30690}"/>
+                <a16:creationId xmlns:a16="http://schemas.microsoft.com/office/drawing/2014/main" id="{E3E01AA3-2579-44D2-A5C7-8F6CF2D14E0E}"/>
               </a:ext>
             </a:extLst>
           </p:cNvPr>
@@ -6595,7 +7545,7 @@
           <p:cNvPr id="6" name="">
             <a:extLst xmlns:a="http://schemas.openxmlformats.org/drawingml/2006/main">
               <a:ext uri="{FF2B5EF4-FFF2-40B4-BE49-F238E27FC236}">
-                <a16:creationId xmlns:a16="http://schemas.microsoft.com/office/drawing/2014/main" id="{A15CA0AB-FB60-4A4E-80B5-9394EBBA57A3}"/>
+                <a16:creationId xmlns:a16="http://schemas.microsoft.com/office/drawing/2014/main" id="{D089A4B5-599E-4CE2-BC07-4ABD16DA19C3}"/>
               </a:ext>
             </a:extLst>
           </p:cNvPr>
@@ -6681,14 +7631,14 @@
     </p:spTree>
     <p:extLst>
       <p:ext uri="{BB962C8B-B14F-4D97-AF65-F5344CB8AC3E}">
-        <p14:creationId xmlns:p14="http://schemas.microsoft.com/office/powerpoint/2010/main" val="2073885485"/>
+        <p14:creationId xmlns:p14="http://schemas.microsoft.com/office/powerpoint/2010/main" val="560650925"/>
       </p:ext>
     </p:extLst>
   </p:cSld>
 </p:sld>
 </file>
 
-<file path=ppt/slides/slide18.xml><?xml version="1.0" encoding="utf-8"?>
+<file path=ppt/slides/slide19.xml><?xml version="1.0" encoding="utf-8"?>
 <p:sld xmlns:p="http://schemas.openxmlformats.org/presentationml/2006/main">
   <p:cSld>
     <p:bg>
@@ -6712,7 +7662,7 @@
           <p:cNvPr id="6" name="">
             <a:extLst xmlns:a="http://schemas.openxmlformats.org/drawingml/2006/main">
               <a:ext uri="{FF2B5EF4-FFF2-40B4-BE49-F238E27FC236}">
-                <a16:creationId xmlns:a16="http://schemas.microsoft.com/office/drawing/2014/main" id="{A4F4E59F-202D-453A-A030-C87C175ED9D0}"/>
+                <a16:creationId xmlns:a16="http://schemas.microsoft.com/office/drawing/2014/main" id="{C47680F7-9713-4E13-8A9D-16D5A9D690E9}"/>
               </a:ext>
             </a:extLst>
           </p:cNvPr>
@@ -6769,7 +7719,7 @@
           <p:cNvPr id="2" name="">
             <a:extLst xmlns:a="http://schemas.openxmlformats.org/drawingml/2006/main">
               <a:ext uri="{FF2B5EF4-FFF2-40B4-BE49-F238E27FC236}">
-                <a16:creationId xmlns:a16="http://schemas.microsoft.com/office/drawing/2014/main" id="{FDDF993B-8CDC-4ED6-B14C-F738651D3F51}"/>
+                <a16:creationId xmlns:a16="http://schemas.microsoft.com/office/drawing/2014/main" id="{8EF958C0-4594-442D-82D9-F50D420AA723}"/>
               </a:ext>
             </a:extLst>
           </p:cNvPr>
@@ -6826,7 +7776,7 @@
           <p:cNvPr id="3" name="">
             <a:extLst xmlns:a="http://schemas.openxmlformats.org/drawingml/2006/main">
               <a:ext uri="{FF2B5EF4-FFF2-40B4-BE49-F238E27FC236}">
-                <a16:creationId xmlns:a16="http://schemas.microsoft.com/office/drawing/2014/main" id="{37B6BE33-4A8D-4E3B-9333-E60D6857CC35}"/>
+                <a16:creationId xmlns:a16="http://schemas.microsoft.com/office/drawing/2014/main" id="{5F1C8A97-3922-49D9-8062-63D2955DF567}"/>
               </a:ext>
             </a:extLst>
           </p:cNvPr>
@@ -6873,7 +7823,7 @@
                 <a:ea typeface="Arial"/>
                 <a:cs typeface="Arial"/>
               </a:rPr>
-              <a:t>18</a:t>
+              <a:t>19</a:t>
             </a:r>
           </a:p>
         </p:txBody>
@@ -6883,7 +7833,7 @@
           <p:cNvPr id="4" name="">
             <a:extLst xmlns:a="http://schemas.openxmlformats.org/drawingml/2006/main">
               <a:ext uri="{FF2B5EF4-FFF2-40B4-BE49-F238E27FC236}">
-                <a16:creationId xmlns:a16="http://schemas.microsoft.com/office/drawing/2014/main" id="{E35144E4-F508-4F88-9DC8-6523273B8367}"/>
+                <a16:creationId xmlns:a16="http://schemas.microsoft.com/office/drawing/2014/main" id="{7239DF67-969A-4C7F-A79C-830876A285EC}"/>
               </a:ext>
             </a:extLst>
           </p:cNvPr>
@@ -7148,803 +8098,7 @@
     </p:spTree>
     <p:extLst>
       <p:ext uri="{BB962C8B-B14F-4D97-AF65-F5344CB8AC3E}">
-        <p14:creationId xmlns:p14="http://schemas.microsoft.com/office/powerpoint/2010/main" val="276349190"/>
-      </p:ext>
-    </p:extLst>
-  </p:cSld>
-</p:sld>
-</file>
-
-<file path=ppt/slides/slide19.xml><?xml version="1.0" encoding="utf-8"?>
-<p:sld xmlns:p="http://schemas.openxmlformats.org/presentationml/2006/main">
-  <p:cSld>
-    <p:bg>
-      <p:bgPr>
-        <a:solidFill xmlns:a="http://schemas.openxmlformats.org/drawingml/2006/main">
-          <a:srgbClr val="16343E"/>
-        </a:solidFill>
-      </p:bgPr>
-    </p:bg>
-    <p:spTree>
-      <p:nvGrpSpPr>
-        <p:cNvPr id="1" name=""/>
-        <p:cNvGrpSpPr/>
-        <p:nvPr/>
-      </p:nvGrpSpPr>
-      <p:grpSpPr>
-        <a:xfrm xmlns:a="http://schemas.openxmlformats.org/drawingml/2006/main"/>
-      </p:grpSpPr>
-      <p:sp>
-        <p:nvSpPr>
-          <p:cNvPr id="14" name="">
-            <a:extLst xmlns:a="http://schemas.openxmlformats.org/drawingml/2006/main">
-              <a:ext uri="{FF2B5EF4-FFF2-40B4-BE49-F238E27FC236}">
-                <a16:creationId xmlns:a16="http://schemas.microsoft.com/office/drawing/2014/main" id="{A827F13D-E296-487E-BC3D-BEC1C5FEF432}"/>
-              </a:ext>
-            </a:extLst>
-          </p:cNvPr>
-          <p:cNvSpPr>
-            <a:spLocks xmlns:a="http://schemas.openxmlformats.org/drawingml/2006/main" noGrp="1"/>
-          </p:cNvSpPr>
-          <p:nvPr/>
-        </p:nvSpPr>
-        <p:spPr>
-          <a:xfrm xmlns:a="http://schemas.openxmlformats.org/drawingml/2006/main">
-            <a:off x="609600" y="409575"/>
-            <a:ext cx="10972800" cy="1000125"/>
-          </a:xfrm>
-          <a:prstGeom xmlns:a="http://schemas.openxmlformats.org/drawingml/2006/main" prst="rect">
-            <a:avLst/>
-          </a:prstGeom>
-          <a:noFill xmlns:a="http://schemas.openxmlformats.org/drawingml/2006/main"/>
-          <a:ln xmlns:a="http://schemas.openxmlformats.org/drawingml/2006/main" w="0">
-            <a:noFill/>
-          </a:ln>
-        </p:spPr>
-        <p:txBody>
-          <a:bodyPr xmlns:a="http://schemas.openxmlformats.org/drawingml/2006/main" anchor="ctr">
-            <a:noAutofit/>
-          </a:bodyPr>
-          <a:lstStyle xmlns:a="http://schemas.openxmlformats.org/drawingml/2006/main"/>
-          <a:p xmlns:a="http://schemas.openxmlformats.org/drawingml/2006/main">
-            <a:pPr algn="l">
-              <a:defRPr sz="3450" b="1">
-                <a:solidFill>
-                  <a:srgbClr val="FFFFFF"/>
-                </a:solidFill>
-                <a:latin typeface="Arial"/>
-                <a:ea typeface="Arial"/>
-                <a:cs typeface="Arial"/>
-              </a:defRPr>
-            </a:pPr>
-            <a:r>
-              <a:rPr sz="3450" b="1">
-                <a:solidFill>
-                  <a:srgbClr val="FFFFFF"/>
-                </a:solidFill>
-                <a:latin typeface="Arial"/>
-                <a:ea typeface="Arial"/>
-                <a:cs typeface="Arial"/>
-              </a:rPr>
-              <a:t>What this project accomplished</a:t>
-            </a:r>
-          </a:p>
-        </p:txBody>
-      </p:sp>
-      <p:sp>
-        <p:nvSpPr>
-          <p:cNvPr id="2" name="">
-            <a:extLst xmlns:a="http://schemas.openxmlformats.org/drawingml/2006/main">
-              <a:ext uri="{FF2B5EF4-FFF2-40B4-BE49-F238E27FC236}">
-                <a16:creationId xmlns:a16="http://schemas.microsoft.com/office/drawing/2014/main" id="{1384811A-BC5B-4994-B1FB-840C52CEB48F}"/>
-              </a:ext>
-            </a:extLst>
-          </p:cNvPr>
-          <p:cNvSpPr>
-            <a:spLocks xmlns:a="http://schemas.openxmlformats.org/drawingml/2006/main" noGrp="1"/>
-          </p:cNvSpPr>
-          <p:nvPr/>
-        </p:nvSpPr>
-        <p:spPr>
-          <a:xfrm xmlns:a="http://schemas.openxmlformats.org/drawingml/2006/main">
-            <a:off x="609600" y="6257925"/>
-            <a:ext cx="10382250" cy="361950"/>
-          </a:xfrm>
-          <a:prstGeom xmlns:a="http://schemas.openxmlformats.org/drawingml/2006/main" prst="rect">
-            <a:avLst/>
-          </a:prstGeom>
-          <a:noFill xmlns:a="http://schemas.openxmlformats.org/drawingml/2006/main"/>
-          <a:ln xmlns:a="http://schemas.openxmlformats.org/drawingml/2006/main" w="0">
-            <a:noFill/>
-          </a:ln>
-        </p:spPr>
-        <p:txBody>
-          <a:bodyPr xmlns:a="http://schemas.openxmlformats.org/drawingml/2006/main" anchor="ctr">
-            <a:noAutofit/>
-          </a:bodyPr>
-          <a:lstStyle xmlns:a="http://schemas.openxmlformats.org/drawingml/2006/main"/>
-          <a:p xmlns:a="http://schemas.openxmlformats.org/drawingml/2006/main">
-            <a:pPr algn="l">
-              <a:defRPr sz="1350" b="0">
-                <a:solidFill>
-                  <a:srgbClr val="D6E8E5"/>
-                </a:solidFill>
-                <a:latin typeface="Arial"/>
-                <a:ea typeface="Arial"/>
-                <a:cs typeface="Arial"/>
-              </a:defRPr>
-            </a:pPr>
-            <a:r>
-              <a:rPr sz="1350" b="0">
-                <a:solidFill>
-                  <a:srgbClr val="D6E8E5"/>
-                </a:solidFill>
-                <a:latin typeface="Arial"/>
-                <a:ea typeface="Arial"/>
-                <a:cs typeface="Arial"/>
-              </a:rPr>
-              <a:t>Public data: Zhang et al. (2024), GSE212160. Presentation prepared with AI assistance.</a:t>
-            </a:r>
-          </a:p>
-        </p:txBody>
-      </p:sp>
-      <p:sp>
-        <p:nvSpPr>
-          <p:cNvPr id="3" name="">
-            <a:extLst xmlns:a="http://schemas.openxmlformats.org/drawingml/2006/main">
-              <a:ext uri="{FF2B5EF4-FFF2-40B4-BE49-F238E27FC236}">
-                <a16:creationId xmlns:a16="http://schemas.microsoft.com/office/drawing/2014/main" id="{48A84633-E373-4173-B48C-6EDC81AC86E7}"/>
-              </a:ext>
-            </a:extLst>
-          </p:cNvPr>
-          <p:cNvSpPr>
-            <a:spLocks xmlns:a="http://schemas.openxmlformats.org/drawingml/2006/main" noGrp="1"/>
-          </p:cNvSpPr>
-          <p:nvPr/>
-        </p:nvSpPr>
-        <p:spPr>
-          <a:xfrm xmlns:a="http://schemas.openxmlformats.org/drawingml/2006/main">
-            <a:off x="11115675" y="6305550"/>
-            <a:ext cx="457200" cy="285750"/>
-          </a:xfrm>
-          <a:prstGeom xmlns:a="http://schemas.openxmlformats.org/drawingml/2006/main" prst="rect">
-            <a:avLst/>
-          </a:prstGeom>
-          <a:noFill xmlns:a="http://schemas.openxmlformats.org/drawingml/2006/main"/>
-          <a:ln xmlns:a="http://schemas.openxmlformats.org/drawingml/2006/main" w="0">
-            <a:noFill/>
-          </a:ln>
-        </p:spPr>
-        <p:txBody>
-          <a:bodyPr xmlns:a="http://schemas.openxmlformats.org/drawingml/2006/main" anchor="ctr">
-            <a:noAutofit/>
-          </a:bodyPr>
-          <a:lstStyle xmlns:a="http://schemas.openxmlformats.org/drawingml/2006/main"/>
-          <a:p xmlns:a="http://schemas.openxmlformats.org/drawingml/2006/main">
-            <a:pPr algn="r">
-              <a:defRPr sz="1350" b="0">
-                <a:solidFill>
-                  <a:srgbClr val="D6E8E5"/>
-                </a:solidFill>
-                <a:latin typeface="Arial"/>
-                <a:ea typeface="Arial"/>
-                <a:cs typeface="Arial"/>
-              </a:defRPr>
-            </a:pPr>
-            <a:r>
-              <a:rPr sz="1350" b="0">
-                <a:solidFill>
-                  <a:srgbClr val="D6E8E5"/>
-                </a:solidFill>
-                <a:latin typeface="Arial"/>
-                <a:ea typeface="Arial"/>
-                <a:cs typeface="Arial"/>
-              </a:rPr>
-              <a:t>19</a:t>
-            </a:r>
-          </a:p>
-        </p:txBody>
-      </p:sp>
-      <p:sp>
-        <p:nvSpPr>
-          <p:cNvPr id="4" name="">
-            <a:extLst xmlns:a="http://schemas.openxmlformats.org/drawingml/2006/main">
-              <a:ext uri="{FF2B5EF4-FFF2-40B4-BE49-F238E27FC236}">
-                <a16:creationId xmlns:a16="http://schemas.microsoft.com/office/drawing/2014/main" id="{3CA30DF5-DED2-491F-9227-8927EF66229C}"/>
-              </a:ext>
-            </a:extLst>
-          </p:cNvPr>
-          <p:cNvSpPr>
-            <a:spLocks xmlns:a="http://schemas.openxmlformats.org/drawingml/2006/main" noGrp="1"/>
-          </p:cNvSpPr>
-          <p:nvPr/>
-        </p:nvSpPr>
-        <p:spPr>
-          <a:xfrm xmlns:a="http://schemas.openxmlformats.org/drawingml/2006/main">
-            <a:off x="609600" y="1533525"/>
-            <a:ext cx="10972800" cy="409575"/>
-          </a:xfrm>
-          <a:prstGeom xmlns:a="http://schemas.openxmlformats.org/drawingml/2006/main" prst="rect">
-            <a:avLst/>
-          </a:prstGeom>
-          <a:noFill xmlns:a="http://schemas.openxmlformats.org/drawingml/2006/main"/>
-          <a:ln xmlns:a="http://schemas.openxmlformats.org/drawingml/2006/main" w="0">
-            <a:noFill/>
-          </a:ln>
-        </p:spPr>
-        <p:txBody>
-          <a:bodyPr xmlns:a="http://schemas.openxmlformats.org/drawingml/2006/main" anchor="ctr">
-            <a:noAutofit/>
-          </a:bodyPr>
-          <a:lstStyle xmlns:a="http://schemas.openxmlformats.org/drawingml/2006/main"/>
-          <a:p xmlns:a="http://schemas.openxmlformats.org/drawingml/2006/main">
-            <a:pPr algn="l">
-              <a:defRPr sz="2400" b="1">
-                <a:solidFill>
-                  <a:srgbClr val="FFFFFF"/>
-                </a:solidFill>
-                <a:latin typeface="Arial"/>
-                <a:ea typeface="Arial"/>
-                <a:cs typeface="Arial"/>
-              </a:defRPr>
-            </a:pPr>
-            <a:r>
-              <a:rPr sz="2400" b="1">
-                <a:solidFill>
-                  <a:srgbClr val="FFFFFF"/>
-                </a:solidFill>
-                <a:latin typeface="Arial"/>
-                <a:ea typeface="Arial"/>
-                <a:cs typeface="Arial"/>
-              </a:rPr>
-              <a:t>Model comparison</a:t>
-            </a:r>
-          </a:p>
-        </p:txBody>
-      </p:sp>
-      <p:sp>
-        <p:nvSpPr>
-          <p:cNvPr id="5" name="">
-            <a:extLst xmlns:a="http://schemas.openxmlformats.org/drawingml/2006/main">
-              <a:ext uri="{FF2B5EF4-FFF2-40B4-BE49-F238E27FC236}">
-                <a16:creationId xmlns:a16="http://schemas.microsoft.com/office/drawing/2014/main" id="{CCD479A6-5E91-4058-8A49-88481CE0D1F3}"/>
-              </a:ext>
-            </a:extLst>
-          </p:cNvPr>
-          <p:cNvSpPr>
-            <a:spLocks xmlns:a="http://schemas.openxmlformats.org/drawingml/2006/main" noGrp="1"/>
-          </p:cNvSpPr>
-          <p:nvPr/>
-        </p:nvSpPr>
-        <p:spPr>
-          <a:xfrm xmlns:a="http://schemas.openxmlformats.org/drawingml/2006/main">
-            <a:off x="609600" y="1971675"/>
-            <a:ext cx="10972800" cy="381000"/>
-          </a:xfrm>
-          <a:prstGeom xmlns:a="http://schemas.openxmlformats.org/drawingml/2006/main" prst="rect">
-            <a:avLst/>
-          </a:prstGeom>
-          <a:noFill xmlns:a="http://schemas.openxmlformats.org/drawingml/2006/main"/>
-          <a:ln xmlns:a="http://schemas.openxmlformats.org/drawingml/2006/main" w="0">
-            <a:noFill/>
-          </a:ln>
-        </p:spPr>
-        <p:txBody>
-          <a:bodyPr xmlns:a="http://schemas.openxmlformats.org/drawingml/2006/main" anchor="ctr">
-            <a:noAutofit/>
-          </a:bodyPr>
-          <a:lstStyle xmlns:a="http://schemas.openxmlformats.org/drawingml/2006/main"/>
-          <a:p xmlns:a="http://schemas.openxmlformats.org/drawingml/2006/main">
-            <a:pPr algn="l">
-              <a:defRPr sz="2100" b="0">
-                <a:solidFill>
-                  <a:srgbClr val="FFFFFF"/>
-                </a:solidFill>
-                <a:latin typeface="Arial"/>
-                <a:ea typeface="Arial"/>
-                <a:cs typeface="Arial"/>
-              </a:defRPr>
-            </a:pPr>
-            <a:r>
-              <a:rPr sz="2100" b="0">
-                <a:solidFill>
-                  <a:srgbClr val="FFFFFF"/>
-                </a:solidFill>
-                <a:latin typeface="Arial"/>
-                <a:ea typeface="Arial"/>
-                <a:cs typeface="Arial"/>
-              </a:rPr>
-              <a:t>CatBoost, 345 evaluation specimens</a:t>
-            </a:r>
-          </a:p>
-        </p:txBody>
-      </p:sp>
-      <p:sp>
-        <p:nvSpPr>
-          <p:cNvPr id="6" name="">
-            <a:extLst xmlns:a="http://schemas.openxmlformats.org/drawingml/2006/main">
-              <a:ext uri="{FF2B5EF4-FFF2-40B4-BE49-F238E27FC236}">
-                <a16:creationId xmlns:a16="http://schemas.microsoft.com/office/drawing/2014/main" id="{0B4058D1-3828-49FA-916D-A0509C1C2482}"/>
-              </a:ext>
-            </a:extLst>
-          </p:cNvPr>
-          <p:cNvSpPr>
-            <a:spLocks xmlns:a="http://schemas.openxmlformats.org/drawingml/2006/main" noGrp="1"/>
-          </p:cNvSpPr>
-          <p:nvPr/>
-        </p:nvSpPr>
-        <p:spPr>
-          <a:xfrm xmlns:a="http://schemas.openxmlformats.org/drawingml/2006/main">
-            <a:off x="609600" y="2390775"/>
-            <a:ext cx="5162550" cy="590550"/>
-          </a:xfrm>
-          <a:prstGeom xmlns:a="http://schemas.openxmlformats.org/drawingml/2006/main" prst="rect">
-            <a:avLst/>
-          </a:prstGeom>
-          <a:noFill xmlns:a="http://schemas.openxmlformats.org/drawingml/2006/main"/>
-          <a:ln xmlns:a="http://schemas.openxmlformats.org/drawingml/2006/main" w="0">
-            <a:noFill/>
-          </a:ln>
-        </p:spPr>
-        <p:txBody>
-          <a:bodyPr xmlns:a="http://schemas.openxmlformats.org/drawingml/2006/main" anchor="ctr">
-            <a:noAutofit/>
-          </a:bodyPr>
-          <a:lstStyle xmlns:a="http://schemas.openxmlformats.org/drawingml/2006/main"/>
-          <a:p xmlns:a="http://schemas.openxmlformats.org/drawingml/2006/main">
-            <a:pPr algn="l">
-              <a:defRPr sz="3525" b="1">
-                <a:solidFill>
-                  <a:srgbClr val="FFFFFF"/>
-                </a:solidFill>
-                <a:latin typeface="Arial"/>
-                <a:ea typeface="Arial"/>
-                <a:cs typeface="Arial"/>
-              </a:defRPr>
-            </a:pPr>
-            <a:r>
-              <a:rPr sz="3525" b="1">
-                <a:solidFill>
-                  <a:srgbClr val="FFFFFF"/>
-                </a:solidFill>
-                <a:latin typeface="Arial"/>
-                <a:ea typeface="Arial"/>
-                <a:cs typeface="Arial"/>
-              </a:rPr>
-              <a:t>14.8% missed</a:t>
-            </a:r>
-          </a:p>
-        </p:txBody>
-      </p:sp>
-      <p:sp>
-        <p:nvSpPr>
-          <p:cNvPr id="7" name="">
-            <a:extLst xmlns:a="http://schemas.openxmlformats.org/drawingml/2006/main">
-              <a:ext uri="{FF2B5EF4-FFF2-40B4-BE49-F238E27FC236}">
-                <a16:creationId xmlns:a16="http://schemas.microsoft.com/office/drawing/2014/main" id="{B145E8F5-53D5-4E6F-9760-A59DF66AB278}"/>
-              </a:ext>
-            </a:extLst>
-          </p:cNvPr>
-          <p:cNvSpPr>
-            <a:spLocks xmlns:a="http://schemas.openxmlformats.org/drawingml/2006/main" noGrp="1"/>
-          </p:cNvSpPr>
-          <p:nvPr/>
-        </p:nvSpPr>
-        <p:spPr>
-          <a:xfrm xmlns:a="http://schemas.openxmlformats.org/drawingml/2006/main">
-            <a:off x="6343650" y="2390775"/>
-            <a:ext cx="5238750" cy="590550"/>
-          </a:xfrm>
-          <a:prstGeom xmlns:a="http://schemas.openxmlformats.org/drawingml/2006/main" prst="rect">
-            <a:avLst/>
-          </a:prstGeom>
-          <a:noFill xmlns:a="http://schemas.openxmlformats.org/drawingml/2006/main"/>
-          <a:ln xmlns:a="http://schemas.openxmlformats.org/drawingml/2006/main" w="0">
-            <a:noFill/>
-          </a:ln>
-        </p:spPr>
-        <p:txBody>
-          <a:bodyPr xmlns:a="http://schemas.openxmlformats.org/drawingml/2006/main" anchor="ctr">
-            <a:noAutofit/>
-          </a:bodyPr>
-          <a:lstStyle xmlns:a="http://schemas.openxmlformats.org/drawingml/2006/main"/>
-          <a:p xmlns:a="http://schemas.openxmlformats.org/drawingml/2006/main">
-            <a:pPr algn="l">
-              <a:defRPr sz="3525" b="1">
-                <a:solidFill>
-                  <a:srgbClr val="FFFFFF"/>
-                </a:solidFill>
-                <a:latin typeface="Arial"/>
-                <a:ea typeface="Arial"/>
-                <a:cs typeface="Arial"/>
-              </a:defRPr>
-            </a:pPr>
-            <a:r>
-              <a:rPr sz="3525" b="1">
-                <a:solidFill>
-                  <a:srgbClr val="FFFFFF"/>
-                </a:solidFill>
-                <a:latin typeface="Arial"/>
-                <a:ea typeface="Arial"/>
-                <a:cs typeface="Arial"/>
-              </a:rPr>
-              <a:t>4.5% false flags</a:t>
-            </a:r>
-          </a:p>
-        </p:txBody>
-      </p:sp>
-      <p:sp>
-        <p:nvSpPr>
-          <p:cNvPr id="8" name="">
-            <a:extLst xmlns:a="http://schemas.openxmlformats.org/drawingml/2006/main">
-              <a:ext uri="{FF2B5EF4-FFF2-40B4-BE49-F238E27FC236}">
-                <a16:creationId xmlns:a16="http://schemas.microsoft.com/office/drawing/2014/main" id="{67571658-5BD9-487A-9E6C-8661BE54E4FB}"/>
-              </a:ext>
-            </a:extLst>
-          </p:cNvPr>
-          <p:cNvSpPr>
-            <a:spLocks xmlns:a="http://schemas.openxmlformats.org/drawingml/2006/main" noGrp="1"/>
-          </p:cNvSpPr>
-          <p:nvPr/>
-        </p:nvSpPr>
-        <p:spPr>
-          <a:xfrm xmlns:a="http://schemas.openxmlformats.org/drawingml/2006/main">
-            <a:off x="609600" y="3048000"/>
-            <a:ext cx="5162550" cy="400050"/>
-          </a:xfrm>
-          <a:prstGeom xmlns:a="http://schemas.openxmlformats.org/drawingml/2006/main" prst="rect">
-            <a:avLst/>
-          </a:prstGeom>
-          <a:noFill xmlns:a="http://schemas.openxmlformats.org/drawingml/2006/main"/>
-          <a:ln xmlns:a="http://schemas.openxmlformats.org/drawingml/2006/main" w="0">
-            <a:noFill/>
-          </a:ln>
-        </p:spPr>
-        <p:txBody>
-          <a:bodyPr xmlns:a="http://schemas.openxmlformats.org/drawingml/2006/main" anchor="ctr">
-            <a:noAutofit/>
-          </a:bodyPr>
-          <a:lstStyle xmlns:a="http://schemas.openxmlformats.org/drawingml/2006/main"/>
-          <a:p xmlns:a="http://schemas.openxmlformats.org/drawingml/2006/main">
-            <a:pPr algn="l">
-              <a:defRPr sz="1875" b="0">
-                <a:solidFill>
-                  <a:srgbClr val="FFFFFF"/>
-                </a:solidFill>
-                <a:latin typeface="Arial"/>
-                <a:ea typeface="Arial"/>
-                <a:cs typeface="Arial"/>
-              </a:defRPr>
-            </a:pPr>
-            <a:r>
-              <a:rPr sz="1875" b="0">
-                <a:solidFill>
-                  <a:srgbClr val="FFFFFF"/>
-                </a:solidFill>
-                <a:latin typeface="Arial"/>
-                <a:ea typeface="Arial"/>
-                <a:cs typeface="Arial"/>
-              </a:rPr>
-              <a:t>25 of 169 recorded rejection specimens</a:t>
-            </a:r>
-          </a:p>
-        </p:txBody>
-      </p:sp>
-      <p:sp>
-        <p:nvSpPr>
-          <p:cNvPr id="9" name="">
-            <a:extLst xmlns:a="http://schemas.openxmlformats.org/drawingml/2006/main">
-              <a:ext uri="{FF2B5EF4-FFF2-40B4-BE49-F238E27FC236}">
-                <a16:creationId xmlns:a16="http://schemas.microsoft.com/office/drawing/2014/main" id="{A0E739F1-1484-4F98-BD00-C3599D74D9CE}"/>
-              </a:ext>
-            </a:extLst>
-          </p:cNvPr>
-          <p:cNvSpPr>
-            <a:spLocks xmlns:a="http://schemas.openxmlformats.org/drawingml/2006/main" noGrp="1"/>
-          </p:cNvSpPr>
-          <p:nvPr/>
-        </p:nvSpPr>
-        <p:spPr>
-          <a:xfrm xmlns:a="http://schemas.openxmlformats.org/drawingml/2006/main">
-            <a:off x="6343650" y="3048000"/>
-            <a:ext cx="5238750" cy="400050"/>
-          </a:xfrm>
-          <a:prstGeom xmlns:a="http://schemas.openxmlformats.org/drawingml/2006/main" prst="rect">
-            <a:avLst/>
-          </a:prstGeom>
-          <a:noFill xmlns:a="http://schemas.openxmlformats.org/drawingml/2006/main"/>
-          <a:ln xmlns:a="http://schemas.openxmlformats.org/drawingml/2006/main" w="0">
-            <a:noFill/>
-          </a:ln>
-        </p:spPr>
-        <p:txBody>
-          <a:bodyPr xmlns:a="http://schemas.openxmlformats.org/drawingml/2006/main" anchor="ctr">
-            <a:noAutofit/>
-          </a:bodyPr>
-          <a:lstStyle xmlns:a="http://schemas.openxmlformats.org/drawingml/2006/main"/>
-          <a:p xmlns:a="http://schemas.openxmlformats.org/drawingml/2006/main">
-            <a:pPr algn="l">
-              <a:defRPr sz="1875" b="0">
-                <a:solidFill>
-                  <a:srgbClr val="FFFFFF"/>
-                </a:solidFill>
-                <a:latin typeface="Arial"/>
-                <a:ea typeface="Arial"/>
-                <a:cs typeface="Arial"/>
-              </a:defRPr>
-            </a:pPr>
-            <a:r>
-              <a:rPr sz="1875" b="0">
-                <a:solidFill>
-                  <a:srgbClr val="FFFFFF"/>
-                </a:solidFill>
-                <a:latin typeface="Arial"/>
-                <a:ea typeface="Arial"/>
-                <a:cs typeface="Arial"/>
-              </a:rPr>
-              <a:t>8 of 176 recorded no-rejection specimens</a:t>
-            </a:r>
-          </a:p>
-        </p:txBody>
-      </p:sp>
-      <p:sp>
-        <p:nvSpPr>
-          <p:cNvPr id="10" name="">
-            <a:extLst xmlns:a="http://schemas.openxmlformats.org/drawingml/2006/main">
-              <a:ext uri="{FF2B5EF4-FFF2-40B4-BE49-F238E27FC236}">
-                <a16:creationId xmlns:a16="http://schemas.microsoft.com/office/drawing/2014/main" id="{0A4605B1-D513-47FD-BAEF-BA3D11FDE62E}"/>
-              </a:ext>
-            </a:extLst>
-          </p:cNvPr>
-          <p:cNvSpPr>
-            <a:spLocks xmlns:a="http://schemas.openxmlformats.org/drawingml/2006/main" noGrp="1"/>
-          </p:cNvSpPr>
-          <p:nvPr/>
-        </p:nvSpPr>
-        <p:spPr>
-          <a:xfrm xmlns:a="http://schemas.openxmlformats.org/drawingml/2006/main">
-            <a:off x="609600" y="3552825"/>
-            <a:ext cx="10972800" cy="723900"/>
-          </a:xfrm>
-          <a:prstGeom xmlns:a="http://schemas.openxmlformats.org/drawingml/2006/main" prst="rect">
-            <a:avLst/>
-          </a:prstGeom>
-          <a:noFill xmlns:a="http://schemas.openxmlformats.org/drawingml/2006/main"/>
-          <a:ln xmlns:a="http://schemas.openxmlformats.org/drawingml/2006/main" w="0">
-            <a:noFill/>
-          </a:ln>
-        </p:spPr>
-        <p:txBody>
-          <a:bodyPr xmlns:a="http://schemas.openxmlformats.org/drawingml/2006/main" anchor="ctr">
-            <a:noAutofit/>
-          </a:bodyPr>
-          <a:lstStyle xmlns:a="http://schemas.openxmlformats.org/drawingml/2006/main"/>
-          <a:p xmlns:a="http://schemas.openxmlformats.org/drawingml/2006/main">
-            <a:pPr algn="l">
-              <a:defRPr sz="2175" b="0">
-                <a:solidFill>
-                  <a:srgbClr val="FFFFFF"/>
-                </a:solidFill>
-                <a:latin typeface="Arial"/>
-                <a:ea typeface="Arial"/>
-                <a:cs typeface="Arial"/>
-              </a:defRPr>
-            </a:pPr>
-            <a:r>
-              <a:rPr sz="2175" b="0">
-                <a:solidFill>
-                  <a:srgbClr val="FFFFFF"/>
-                </a:solidFill>
-                <a:latin typeface="Arial"/>
-                <a:ea typeface="Arial"/>
-                <a:cs typeface="Arial"/>
-              </a:rPr>
-              <a:t>Fewer false flags than IFNG, but more misses.</a:t>
-            </a:r>
-          </a:p>
-          <a:p xmlns:a="http://schemas.openxmlformats.org/drawingml/2006/main">
-            <a:pPr algn="l">
-              <a:defRPr sz="2175" b="0">
-                <a:solidFill>
-                  <a:srgbClr val="FFFFFF"/>
-                </a:solidFill>
-                <a:latin typeface="Arial"/>
-                <a:ea typeface="Arial"/>
-                <a:cs typeface="Arial"/>
-              </a:defRPr>
-            </a:pPr>
-            <a:r>
-              <a:rPr sz="2175" b="0">
-                <a:solidFill>
-                  <a:srgbClr val="FFFFFF"/>
-                </a:solidFill>
-                <a:latin typeface="Arial"/>
-                <a:ea typeface="Arial"/>
-                <a:cs typeface="Arial"/>
-              </a:rPr>
-              <a:t>Advantage over logistic regression remains uncertain.</a:t>
-            </a:r>
-          </a:p>
-        </p:txBody>
-      </p:sp>
-      <p:sp>
-        <p:nvSpPr>
-          <p:cNvPr id="11" name="">
-            <a:extLst xmlns:a="http://schemas.openxmlformats.org/drawingml/2006/main">
-              <a:ext uri="{FF2B5EF4-FFF2-40B4-BE49-F238E27FC236}">
-                <a16:creationId xmlns:a16="http://schemas.microsoft.com/office/drawing/2014/main" id="{AD4EFCD4-72FD-4DA6-A388-C9AF351A6CE8}"/>
-              </a:ext>
-            </a:extLst>
-          </p:cNvPr>
-          <p:cNvSpPr>
-            <a:spLocks xmlns:a="http://schemas.openxmlformats.org/drawingml/2006/main" noGrp="1"/>
-          </p:cNvSpPr>
-          <p:nvPr/>
-        </p:nvSpPr>
-        <p:spPr>
-          <a:xfrm xmlns:a="http://schemas.openxmlformats.org/drawingml/2006/main">
-            <a:off x="609600" y="4476750"/>
-            <a:ext cx="10972800" cy="0"/>
-          </a:xfrm>
-          <a:prstGeom xmlns:a="http://schemas.openxmlformats.org/drawingml/2006/main" prst="line">
-            <a:avLst/>
-          </a:prstGeom>
-          <a:ln xmlns:a="http://schemas.openxmlformats.org/drawingml/2006/main" w="11430">
-            <a:solidFill>
-              <a:srgbClr val="78949B"/>
-            </a:solidFill>
-          </a:ln>
-        </p:spPr>
-      </p:sp>
-      <p:sp>
-        <p:nvSpPr>
-          <p:cNvPr id="12" name="">
-            <a:extLst xmlns:a="http://schemas.openxmlformats.org/drawingml/2006/main">
-              <a:ext uri="{FF2B5EF4-FFF2-40B4-BE49-F238E27FC236}">
-                <a16:creationId xmlns:a16="http://schemas.microsoft.com/office/drawing/2014/main" id="{472D92F0-D623-4A0F-807E-C3A912200E61}"/>
-              </a:ext>
-            </a:extLst>
-          </p:cNvPr>
-          <p:cNvSpPr>
-            <a:spLocks xmlns:a="http://schemas.openxmlformats.org/drawingml/2006/main" noGrp="1"/>
-          </p:cNvSpPr>
-          <p:nvPr/>
-        </p:nvSpPr>
-        <p:spPr>
-          <a:xfrm xmlns:a="http://schemas.openxmlformats.org/drawingml/2006/main">
-            <a:off x="609600" y="4629150"/>
-            <a:ext cx="10972800" cy="409575"/>
-          </a:xfrm>
-          <a:prstGeom xmlns:a="http://schemas.openxmlformats.org/drawingml/2006/main" prst="rect">
-            <a:avLst/>
-          </a:prstGeom>
-          <a:noFill xmlns:a="http://schemas.openxmlformats.org/drawingml/2006/main"/>
-          <a:ln xmlns:a="http://schemas.openxmlformats.org/drawingml/2006/main" w="0">
-            <a:noFill/>
-          </a:ln>
-        </p:spPr>
-        <p:txBody>
-          <a:bodyPr xmlns:a="http://schemas.openxmlformats.org/drawingml/2006/main" anchor="ctr">
-            <a:noAutofit/>
-          </a:bodyPr>
-          <a:lstStyle xmlns:a="http://schemas.openxmlformats.org/drawingml/2006/main"/>
-          <a:p xmlns:a="http://schemas.openxmlformats.org/drawingml/2006/main">
-            <a:pPr algn="l">
-              <a:defRPr sz="2400" b="1">
-                <a:solidFill>
-                  <a:srgbClr val="FFFFFF"/>
-                </a:solidFill>
-                <a:latin typeface="Arial"/>
-                <a:ea typeface="Arial"/>
-                <a:cs typeface="Arial"/>
-              </a:defRPr>
-            </a:pPr>
-            <a:r>
-              <a:rPr sz="2400" b="1">
-                <a:solidFill>
-                  <a:srgbClr val="FFFFFF"/>
-                </a:solidFill>
-                <a:latin typeface="Arial"/>
-                <a:ea typeface="Arial"/>
-                <a:cs typeface="Arial"/>
-              </a:rPr>
-              <a:t>Prediction service and demo</a:t>
-            </a:r>
-          </a:p>
-        </p:txBody>
-      </p:sp>
-      <p:sp>
-        <p:nvSpPr>
-          <p:cNvPr id="13" name="">
-            <a:extLst xmlns:a="http://schemas.openxmlformats.org/drawingml/2006/main">
-              <a:ext uri="{FF2B5EF4-FFF2-40B4-BE49-F238E27FC236}">
-                <a16:creationId xmlns:a16="http://schemas.microsoft.com/office/drawing/2014/main" id="{0ABFBC1F-89BC-4FAA-9380-A59ABE375897}"/>
-              </a:ext>
-            </a:extLst>
-          </p:cNvPr>
-          <p:cNvSpPr>
-            <a:spLocks xmlns:a="http://schemas.openxmlformats.org/drawingml/2006/main" noGrp="1"/>
-          </p:cNvSpPr>
-          <p:nvPr/>
-        </p:nvSpPr>
-        <p:spPr>
-          <a:xfrm xmlns:a="http://schemas.openxmlformats.org/drawingml/2006/main">
-            <a:off x="609600" y="5181600"/>
-            <a:ext cx="10972800" cy="838200"/>
-          </a:xfrm>
-          <a:prstGeom xmlns:a="http://schemas.openxmlformats.org/drawingml/2006/main" prst="rect">
-            <a:avLst/>
-          </a:prstGeom>
-          <a:noFill xmlns:a="http://schemas.openxmlformats.org/drawingml/2006/main"/>
-          <a:ln xmlns:a="http://schemas.openxmlformats.org/drawingml/2006/main" w="0">
-            <a:noFill/>
-          </a:ln>
-        </p:spPr>
-        <p:txBody>
-          <a:bodyPr xmlns:a="http://schemas.openxmlformats.org/drawingml/2006/main" anchor="t">
-            <a:noAutofit/>
-          </a:bodyPr>
-          <a:lstStyle xmlns:a="http://schemas.openxmlformats.org/drawingml/2006/main"/>
-          <a:p xmlns:a="http://schemas.openxmlformats.org/drawingml/2006/main">
-            <a:pPr marL="279400" indent="-152400" algn="l">
-              <a:spcAft>
-                <a:spcPts val="1000"/>
-              </a:spcAft>
-              <a:buChar char="•"/>
-              <a:defRPr sz="2175" b="0">
-                <a:solidFill>
-                  <a:srgbClr val="FFFFFF"/>
-                </a:solidFill>
-                <a:latin typeface="Arial"/>
-                <a:ea typeface="Arial"/>
-                <a:cs typeface="Arial"/>
-              </a:defRPr>
-            </a:pPr>
-            <a:r>
-              <a:rPr sz="2175" b="0">
-                <a:solidFill>
-                  <a:srgbClr val="FFFFFF"/>
-                </a:solidFill>
-                <a:latin typeface="Arial"/>
-                <a:ea typeface="Arial"/>
-                <a:cs typeface="Arial"/>
-              </a:rPr>
-              <a:t>Shared preparation code reproduced all 345 saved scores.</a:t>
-            </a:r>
-          </a:p>
-          <a:p xmlns:a="http://schemas.openxmlformats.org/drawingml/2006/main">
-            <a:pPr marL="279400" indent="-152400" algn="l">
-              <a:spcAft>
-                <a:spcPts val="1000"/>
-              </a:spcAft>
-              <a:buChar char="•"/>
-              <a:defRPr sz="2175" b="0">
-                <a:solidFill>
-                  <a:srgbClr val="FFFFFF"/>
-                </a:solidFill>
-                <a:latin typeface="Arial"/>
-                <a:ea typeface="Arial"/>
-                <a:cs typeface="Arial"/>
-              </a:defRPr>
-            </a:pPr>
-            <a:r>
-              <a:rPr sz="2175" b="0">
-                <a:solidFill>
-                  <a:srgbClr val="FFFFFF"/>
-                </a:solidFill>
-                <a:latin typeface="Arial"/>
-                <a:ea typeface="Arial"/>
-                <a:cs typeface="Arial"/>
-              </a:rPr>
-              <a:t>Working demo with valid input and clear error messages.</a:t>
-            </a:r>
-          </a:p>
-        </p:txBody>
-      </p:sp>
-    </p:spTree>
-    <p:extLst>
-      <p:ext uri="{BB962C8B-B14F-4D97-AF65-F5344CB8AC3E}">
-        <p14:creationId xmlns:p14="http://schemas.microsoft.com/office/powerpoint/2010/main" val="675679110"/>
+        <p14:creationId xmlns:p14="http://schemas.microsoft.com/office/powerpoint/2010/main" val="1404689855"/>
       </p:ext>
     </p:extLst>
   </p:cSld>
@@ -7975,7 +8129,7 @@
           <p:cNvPr id="8" name="">
             <a:extLst xmlns:a="http://schemas.openxmlformats.org/drawingml/2006/main">
               <a:ext uri="{FF2B5EF4-FFF2-40B4-BE49-F238E27FC236}">
-                <a16:creationId xmlns:a16="http://schemas.microsoft.com/office/drawing/2014/main" id="{69BD640E-4046-47B9-A30F-1F7F77ED9C0C}"/>
+                <a16:creationId xmlns:a16="http://schemas.microsoft.com/office/drawing/2014/main" id="{9B789894-4C24-4FD9-BB48-5299E26DBD80}"/>
               </a:ext>
             </a:extLst>
           </p:cNvPr>
@@ -8032,7 +8186,7 @@
           <p:cNvPr id="2" name="">
             <a:extLst xmlns:a="http://schemas.openxmlformats.org/drawingml/2006/main">
               <a:ext uri="{FF2B5EF4-FFF2-40B4-BE49-F238E27FC236}">
-                <a16:creationId xmlns:a16="http://schemas.microsoft.com/office/drawing/2014/main" id="{03B5B35D-D0B5-4DA6-B7D3-F4B49472D787}"/>
+                <a16:creationId xmlns:a16="http://schemas.microsoft.com/office/drawing/2014/main" id="{DFAC3BD8-CF10-4A07-87FF-68F3C9CCE7B9}"/>
               </a:ext>
             </a:extLst>
           </p:cNvPr>
@@ -8089,7 +8243,7 @@
           <p:cNvPr id="3" name="">
             <a:extLst xmlns:a="http://schemas.openxmlformats.org/drawingml/2006/main">
               <a:ext uri="{FF2B5EF4-FFF2-40B4-BE49-F238E27FC236}">
-                <a16:creationId xmlns:a16="http://schemas.microsoft.com/office/drawing/2014/main" id="{2D8515F9-FF7F-41D5-8F04-6AF42F14EFDA}"/>
+                <a16:creationId xmlns:a16="http://schemas.microsoft.com/office/drawing/2014/main" id="{0CE1269E-94EF-468A-BDE3-6B6F85C58C02}"/>
               </a:ext>
             </a:extLst>
           </p:cNvPr>
@@ -8146,7 +8300,7 @@
           <p:cNvPr id="4" name="">
             <a:extLst xmlns:a="http://schemas.openxmlformats.org/drawingml/2006/main">
               <a:ext uri="{FF2B5EF4-FFF2-40B4-BE49-F238E27FC236}">
-                <a16:creationId xmlns:a16="http://schemas.microsoft.com/office/drawing/2014/main" id="{0B7651A8-F593-4D13-8F22-69215C2400E8}"/>
+                <a16:creationId xmlns:a16="http://schemas.microsoft.com/office/drawing/2014/main" id="{ACA7BAB9-6742-4446-B4A0-9E8CD294F7E6}"/>
               </a:ext>
             </a:extLst>
           </p:cNvPr>
@@ -8203,7 +8357,7 @@
           <p:cNvPr id="5" name="">
             <a:extLst xmlns:a="http://schemas.openxmlformats.org/drawingml/2006/main">
               <a:ext uri="{FF2B5EF4-FFF2-40B4-BE49-F238E27FC236}">
-                <a16:creationId xmlns:a16="http://schemas.microsoft.com/office/drawing/2014/main" id="{EB6F2983-BE7D-44BE-899E-133A6C7FE6BA}"/>
+                <a16:creationId xmlns:a16="http://schemas.microsoft.com/office/drawing/2014/main" id="{3A0AA65C-2BCA-43F8-B27C-87CA40A3AC02}"/>
               </a:ext>
             </a:extLst>
           </p:cNvPr>
@@ -8260,7 +8414,7 @@
           <p:cNvPr id="6" name="">
             <a:extLst xmlns:a="http://schemas.openxmlformats.org/drawingml/2006/main">
               <a:ext uri="{FF2B5EF4-FFF2-40B4-BE49-F238E27FC236}">
-                <a16:creationId xmlns:a16="http://schemas.microsoft.com/office/drawing/2014/main" id="{C5D5123F-C7D6-4E33-BB8E-14AC88BDAC32}"/>
+                <a16:creationId xmlns:a16="http://schemas.microsoft.com/office/drawing/2014/main" id="{10752F35-5091-474A-9E55-E50579C9607C}"/>
               </a:ext>
             </a:extLst>
           </p:cNvPr>
@@ -8317,7 +8471,7 @@
           <p:cNvPr id="7" name="">
             <a:extLst xmlns:a="http://schemas.openxmlformats.org/drawingml/2006/main">
               <a:ext uri="{FF2B5EF4-FFF2-40B4-BE49-F238E27FC236}">
-                <a16:creationId xmlns:a16="http://schemas.microsoft.com/office/drawing/2014/main" id="{47713512-A658-4362-8465-29BF3D3277E2}"/>
+                <a16:creationId xmlns:a16="http://schemas.microsoft.com/office/drawing/2014/main" id="{90DA3038-C760-4BD1-B92C-34FD98ECFC25}"/>
               </a:ext>
             </a:extLst>
           </p:cNvPr>
@@ -8372,7 +8526,7 @@
     </p:spTree>
     <p:extLst>
       <p:ext uri="{BB962C8B-B14F-4D97-AF65-F5344CB8AC3E}">
-        <p14:creationId xmlns:p14="http://schemas.microsoft.com/office/powerpoint/2010/main" val="816631428"/>
+        <p14:creationId xmlns:p14="http://schemas.microsoft.com/office/powerpoint/2010/main" val="1745022577"/>
       </p:ext>
     </p:extLst>
   </p:cSld>
@@ -8385,7 +8539,7 @@
     <p:bg>
       <p:bgPr>
         <a:solidFill xmlns:a="http://schemas.openxmlformats.org/drawingml/2006/main">
-          <a:srgbClr val="F7F8F5"/>
+          <a:srgbClr val="16343E"/>
         </a:solidFill>
       </p:bgPr>
     </p:bg>
@@ -8400,10 +8554,10 @@
       </p:grpSpPr>
       <p:sp>
         <p:nvSpPr>
-          <p:cNvPr id="6" name="">
-            <a:extLst xmlns:a="http://schemas.openxmlformats.org/drawingml/2006/main">
-              <a:ext uri="{FF2B5EF4-FFF2-40B4-BE49-F238E27FC236}">
-                <a16:creationId xmlns:a16="http://schemas.microsoft.com/office/drawing/2014/main" id="{68859C7B-C133-43DB-8406-26833AF44958}"/>
+          <p:cNvPr id="14" name="">
+            <a:extLst xmlns:a="http://schemas.openxmlformats.org/drawingml/2006/main">
+              <a:ext uri="{FF2B5EF4-FFF2-40B4-BE49-F238E27FC236}">
+                <a16:creationId xmlns:a16="http://schemas.microsoft.com/office/drawing/2014/main" id="{0EB9D23E-F3CB-4D74-8288-CEB3D998ECDD}"/>
               </a:ext>
             </a:extLst>
           </p:cNvPr>
@@ -8434,7 +8588,7 @@
             <a:pPr algn="l">
               <a:defRPr sz="3450" b="1">
                 <a:solidFill>
-                  <a:srgbClr val="16343E"/>
+                  <a:srgbClr val="FFFFFF"/>
                 </a:solidFill>
                 <a:latin typeface="Arial"/>
                 <a:ea typeface="Arial"/>
@@ -8444,13 +8598,13 @@
             <a:r>
               <a:rPr sz="3450" b="1">
                 <a:solidFill>
-                  <a:srgbClr val="16343E"/>
-                </a:solidFill>
-                <a:latin typeface="Arial"/>
-                <a:ea typeface="Arial"/>
-                <a:cs typeface="Arial"/>
-              </a:rPr>
-              <a:t>Backup: measuring biopsy RNA with NanoString nCounter</a:t>
+                  <a:srgbClr val="FFFFFF"/>
+                </a:solidFill>
+                <a:latin typeface="Arial"/>
+                <a:ea typeface="Arial"/>
+                <a:cs typeface="Arial"/>
+              </a:rPr>
+              <a:t>What this project accomplished</a:t>
             </a:r>
           </a:p>
         </p:txBody>
@@ -8460,7 +8614,7 @@
           <p:cNvPr id="2" name="">
             <a:extLst xmlns:a="http://schemas.openxmlformats.org/drawingml/2006/main">
               <a:ext uri="{FF2B5EF4-FFF2-40B4-BE49-F238E27FC236}">
-                <a16:creationId xmlns:a16="http://schemas.microsoft.com/office/drawing/2014/main" id="{F8B927D5-CDED-4880-A59D-52C0B3C432EC}"/>
+                <a16:creationId xmlns:a16="http://schemas.microsoft.com/office/drawing/2014/main" id="{D9FB61FB-2B88-4E97-9013-3274CD82477C}"/>
               </a:ext>
             </a:extLst>
           </p:cNvPr>
@@ -8491,7 +8645,7 @@
             <a:pPr algn="l">
               <a:defRPr sz="1350" b="0">
                 <a:solidFill>
-                  <a:srgbClr val="52656B"/>
+                  <a:srgbClr val="D6E8E5"/>
                 </a:solidFill>
                 <a:latin typeface="Arial"/>
                 <a:ea typeface="Arial"/>
@@ -8501,13 +8655,13 @@
             <a:r>
               <a:rPr sz="1350" b="0">
                 <a:solidFill>
-                  <a:srgbClr val="52656B"/>
-                </a:solidFill>
-                <a:latin typeface="Arial"/>
-                <a:ea typeface="Arial"/>
-                <a:cs typeface="Arial"/>
-              </a:rPr>
-              <a:t>Sources: Zhang et al. (2024), Methods; Bruker nCounter documentation; GSE212160</a:t>
+                  <a:srgbClr val="D6E8E5"/>
+                </a:solidFill>
+                <a:latin typeface="Arial"/>
+                <a:ea typeface="Arial"/>
+                <a:cs typeface="Arial"/>
+              </a:rPr>
+              <a:t>Public data: Zhang et al. (2024), GSE212160. Presentation prepared with AI assistance.</a:t>
             </a:r>
           </a:p>
         </p:txBody>
@@ -8517,7 +8671,7 @@
           <p:cNvPr id="3" name="">
             <a:extLst xmlns:a="http://schemas.openxmlformats.org/drawingml/2006/main">
               <a:ext uri="{FF2B5EF4-FFF2-40B4-BE49-F238E27FC236}">
-                <a16:creationId xmlns:a16="http://schemas.microsoft.com/office/drawing/2014/main" id="{DEDD5821-AF82-46C7-B953-30B99ED17FB4}"/>
+                <a16:creationId xmlns:a16="http://schemas.microsoft.com/office/drawing/2014/main" id="{630D4BC9-4379-43C0-9E3E-A8709C8D2ED0}"/>
               </a:ext>
             </a:extLst>
           </p:cNvPr>
@@ -8548,7 +8702,7 @@
             <a:pPr algn="r">
               <a:defRPr sz="1350" b="0">
                 <a:solidFill>
-                  <a:srgbClr val="52656B"/>
+                  <a:srgbClr val="D6E8E5"/>
                 </a:solidFill>
                 <a:latin typeface="Arial"/>
                 <a:ea typeface="Arial"/>
@@ -8558,7 +8712,7 @@
             <a:r>
               <a:rPr sz="1350" b="0">
                 <a:solidFill>
-                  <a:srgbClr val="52656B"/>
+                  <a:srgbClr val="D6E8E5"/>
                 </a:solidFill>
                 <a:latin typeface="Arial"/>
                 <a:ea typeface="Arial"/>
@@ -8574,19 +8728,527 @@
           <p:cNvPr id="4" name="">
             <a:extLst xmlns:a="http://schemas.openxmlformats.org/drawingml/2006/main">
               <a:ext uri="{FF2B5EF4-FFF2-40B4-BE49-F238E27FC236}">
-                <a16:creationId xmlns:a16="http://schemas.microsoft.com/office/drawing/2014/main" id="{66E948DC-2B29-4761-8428-46F38E13FF4F}"/>
-              </a:ext>
-            </a:extLst>
-          </p:cNvPr>
-          <p:cNvSpPr>
-            <a:spLocks xmlns:a="http://schemas.openxmlformats.org/drawingml/2006/main" noGrp="1"/>
-          </p:cNvSpPr>
-          <p:nvPr/>
-        </p:nvSpPr>
-        <p:spPr>
-          <a:xfrm xmlns:a="http://schemas.openxmlformats.org/drawingml/2006/main">
-            <a:off x="609600" y="1704975"/>
-            <a:ext cx="10972800" cy="3543300"/>
+                <a16:creationId xmlns:a16="http://schemas.microsoft.com/office/drawing/2014/main" id="{931B0BB0-F3C7-45D3-90F8-BC66A60F3926}"/>
+              </a:ext>
+            </a:extLst>
+          </p:cNvPr>
+          <p:cNvSpPr>
+            <a:spLocks xmlns:a="http://schemas.openxmlformats.org/drawingml/2006/main" noGrp="1"/>
+          </p:cNvSpPr>
+          <p:nvPr/>
+        </p:nvSpPr>
+        <p:spPr>
+          <a:xfrm xmlns:a="http://schemas.openxmlformats.org/drawingml/2006/main">
+            <a:off x="609600" y="1533525"/>
+            <a:ext cx="10972800" cy="409575"/>
+          </a:xfrm>
+          <a:prstGeom xmlns:a="http://schemas.openxmlformats.org/drawingml/2006/main" prst="rect">
+            <a:avLst/>
+          </a:prstGeom>
+          <a:noFill xmlns:a="http://schemas.openxmlformats.org/drawingml/2006/main"/>
+          <a:ln xmlns:a="http://schemas.openxmlformats.org/drawingml/2006/main" w="0">
+            <a:noFill/>
+          </a:ln>
+        </p:spPr>
+        <p:txBody>
+          <a:bodyPr xmlns:a="http://schemas.openxmlformats.org/drawingml/2006/main" anchor="ctr">
+            <a:noAutofit/>
+          </a:bodyPr>
+          <a:lstStyle xmlns:a="http://schemas.openxmlformats.org/drawingml/2006/main"/>
+          <a:p xmlns:a="http://schemas.openxmlformats.org/drawingml/2006/main">
+            <a:pPr algn="l">
+              <a:defRPr sz="2400" b="1">
+                <a:solidFill>
+                  <a:srgbClr val="FFFFFF"/>
+                </a:solidFill>
+                <a:latin typeface="Arial"/>
+                <a:ea typeface="Arial"/>
+                <a:cs typeface="Arial"/>
+              </a:defRPr>
+            </a:pPr>
+            <a:r>
+              <a:rPr sz="2400" b="1">
+                <a:solidFill>
+                  <a:srgbClr val="FFFFFF"/>
+                </a:solidFill>
+                <a:latin typeface="Arial"/>
+                <a:ea typeface="Arial"/>
+                <a:cs typeface="Arial"/>
+              </a:rPr>
+              <a:t>Model comparison</a:t>
+            </a:r>
+          </a:p>
+        </p:txBody>
+      </p:sp>
+      <p:sp>
+        <p:nvSpPr>
+          <p:cNvPr id="5" name="">
+            <a:extLst xmlns:a="http://schemas.openxmlformats.org/drawingml/2006/main">
+              <a:ext uri="{FF2B5EF4-FFF2-40B4-BE49-F238E27FC236}">
+                <a16:creationId xmlns:a16="http://schemas.microsoft.com/office/drawing/2014/main" id="{EC4FBF3C-8411-4336-91F1-620DAC2AB4CF}"/>
+              </a:ext>
+            </a:extLst>
+          </p:cNvPr>
+          <p:cNvSpPr>
+            <a:spLocks xmlns:a="http://schemas.openxmlformats.org/drawingml/2006/main" noGrp="1"/>
+          </p:cNvSpPr>
+          <p:nvPr/>
+        </p:nvSpPr>
+        <p:spPr>
+          <a:xfrm xmlns:a="http://schemas.openxmlformats.org/drawingml/2006/main">
+            <a:off x="609600" y="1971675"/>
+            <a:ext cx="10972800" cy="381000"/>
+          </a:xfrm>
+          <a:prstGeom xmlns:a="http://schemas.openxmlformats.org/drawingml/2006/main" prst="rect">
+            <a:avLst/>
+          </a:prstGeom>
+          <a:noFill xmlns:a="http://schemas.openxmlformats.org/drawingml/2006/main"/>
+          <a:ln xmlns:a="http://schemas.openxmlformats.org/drawingml/2006/main" w="0">
+            <a:noFill/>
+          </a:ln>
+        </p:spPr>
+        <p:txBody>
+          <a:bodyPr xmlns:a="http://schemas.openxmlformats.org/drawingml/2006/main" anchor="ctr">
+            <a:noAutofit/>
+          </a:bodyPr>
+          <a:lstStyle xmlns:a="http://schemas.openxmlformats.org/drawingml/2006/main"/>
+          <a:p xmlns:a="http://schemas.openxmlformats.org/drawingml/2006/main">
+            <a:pPr algn="l">
+              <a:defRPr sz="2100" b="0">
+                <a:solidFill>
+                  <a:srgbClr val="FFFFFF"/>
+                </a:solidFill>
+                <a:latin typeface="Arial"/>
+                <a:ea typeface="Arial"/>
+                <a:cs typeface="Arial"/>
+              </a:defRPr>
+            </a:pPr>
+            <a:r>
+              <a:rPr sz="2100" b="0">
+                <a:solidFill>
+                  <a:srgbClr val="FFFFFF"/>
+                </a:solidFill>
+                <a:latin typeface="Arial"/>
+                <a:ea typeface="Arial"/>
+                <a:cs typeface="Arial"/>
+              </a:rPr>
+              <a:t>CatBoost, 345 evaluation specimens</a:t>
+            </a:r>
+          </a:p>
+        </p:txBody>
+      </p:sp>
+      <p:sp>
+        <p:nvSpPr>
+          <p:cNvPr id="6" name="">
+            <a:extLst xmlns:a="http://schemas.openxmlformats.org/drawingml/2006/main">
+              <a:ext uri="{FF2B5EF4-FFF2-40B4-BE49-F238E27FC236}">
+                <a16:creationId xmlns:a16="http://schemas.microsoft.com/office/drawing/2014/main" id="{66792A48-028C-42F7-AD59-D4B7821A1016}"/>
+              </a:ext>
+            </a:extLst>
+          </p:cNvPr>
+          <p:cNvSpPr>
+            <a:spLocks xmlns:a="http://schemas.openxmlformats.org/drawingml/2006/main" noGrp="1"/>
+          </p:cNvSpPr>
+          <p:nvPr/>
+        </p:nvSpPr>
+        <p:spPr>
+          <a:xfrm xmlns:a="http://schemas.openxmlformats.org/drawingml/2006/main">
+            <a:off x="609600" y="2390775"/>
+            <a:ext cx="5162550" cy="590550"/>
+          </a:xfrm>
+          <a:prstGeom xmlns:a="http://schemas.openxmlformats.org/drawingml/2006/main" prst="rect">
+            <a:avLst/>
+          </a:prstGeom>
+          <a:noFill xmlns:a="http://schemas.openxmlformats.org/drawingml/2006/main"/>
+          <a:ln xmlns:a="http://schemas.openxmlformats.org/drawingml/2006/main" w="0">
+            <a:noFill/>
+          </a:ln>
+        </p:spPr>
+        <p:txBody>
+          <a:bodyPr xmlns:a="http://schemas.openxmlformats.org/drawingml/2006/main" anchor="ctr">
+            <a:noAutofit/>
+          </a:bodyPr>
+          <a:lstStyle xmlns:a="http://schemas.openxmlformats.org/drawingml/2006/main"/>
+          <a:p xmlns:a="http://schemas.openxmlformats.org/drawingml/2006/main">
+            <a:pPr algn="l">
+              <a:defRPr sz="3525" b="1">
+                <a:solidFill>
+                  <a:srgbClr val="FFFFFF"/>
+                </a:solidFill>
+                <a:latin typeface="Arial"/>
+                <a:ea typeface="Arial"/>
+                <a:cs typeface="Arial"/>
+              </a:defRPr>
+            </a:pPr>
+            <a:r>
+              <a:rPr sz="3525" b="1">
+                <a:solidFill>
+                  <a:srgbClr val="FFFFFF"/>
+                </a:solidFill>
+                <a:latin typeface="Arial"/>
+                <a:ea typeface="Arial"/>
+                <a:cs typeface="Arial"/>
+              </a:rPr>
+              <a:t>14.8% missed</a:t>
+            </a:r>
+          </a:p>
+        </p:txBody>
+      </p:sp>
+      <p:sp>
+        <p:nvSpPr>
+          <p:cNvPr id="7" name="">
+            <a:extLst xmlns:a="http://schemas.openxmlformats.org/drawingml/2006/main">
+              <a:ext uri="{FF2B5EF4-FFF2-40B4-BE49-F238E27FC236}">
+                <a16:creationId xmlns:a16="http://schemas.microsoft.com/office/drawing/2014/main" id="{7358D622-67F7-4992-BF5A-2C0A776FF4B4}"/>
+              </a:ext>
+            </a:extLst>
+          </p:cNvPr>
+          <p:cNvSpPr>
+            <a:spLocks xmlns:a="http://schemas.openxmlformats.org/drawingml/2006/main" noGrp="1"/>
+          </p:cNvSpPr>
+          <p:nvPr/>
+        </p:nvSpPr>
+        <p:spPr>
+          <a:xfrm xmlns:a="http://schemas.openxmlformats.org/drawingml/2006/main">
+            <a:off x="6343650" y="2390775"/>
+            <a:ext cx="5238750" cy="590550"/>
+          </a:xfrm>
+          <a:prstGeom xmlns:a="http://schemas.openxmlformats.org/drawingml/2006/main" prst="rect">
+            <a:avLst/>
+          </a:prstGeom>
+          <a:noFill xmlns:a="http://schemas.openxmlformats.org/drawingml/2006/main"/>
+          <a:ln xmlns:a="http://schemas.openxmlformats.org/drawingml/2006/main" w="0">
+            <a:noFill/>
+          </a:ln>
+        </p:spPr>
+        <p:txBody>
+          <a:bodyPr xmlns:a="http://schemas.openxmlformats.org/drawingml/2006/main" anchor="ctr">
+            <a:noAutofit/>
+          </a:bodyPr>
+          <a:lstStyle xmlns:a="http://schemas.openxmlformats.org/drawingml/2006/main"/>
+          <a:p xmlns:a="http://schemas.openxmlformats.org/drawingml/2006/main">
+            <a:pPr algn="l">
+              <a:defRPr sz="3525" b="1">
+                <a:solidFill>
+                  <a:srgbClr val="FFFFFF"/>
+                </a:solidFill>
+                <a:latin typeface="Arial"/>
+                <a:ea typeface="Arial"/>
+                <a:cs typeface="Arial"/>
+              </a:defRPr>
+            </a:pPr>
+            <a:r>
+              <a:rPr sz="3525" b="1">
+                <a:solidFill>
+                  <a:srgbClr val="FFFFFF"/>
+                </a:solidFill>
+                <a:latin typeface="Arial"/>
+                <a:ea typeface="Arial"/>
+                <a:cs typeface="Arial"/>
+              </a:rPr>
+              <a:t>4.5% false flags</a:t>
+            </a:r>
+          </a:p>
+        </p:txBody>
+      </p:sp>
+      <p:sp>
+        <p:nvSpPr>
+          <p:cNvPr id="8" name="">
+            <a:extLst xmlns:a="http://schemas.openxmlformats.org/drawingml/2006/main">
+              <a:ext uri="{FF2B5EF4-FFF2-40B4-BE49-F238E27FC236}">
+                <a16:creationId xmlns:a16="http://schemas.microsoft.com/office/drawing/2014/main" id="{5E486D8A-4D82-41B2-8E30-A9ECF8F23416}"/>
+              </a:ext>
+            </a:extLst>
+          </p:cNvPr>
+          <p:cNvSpPr>
+            <a:spLocks xmlns:a="http://schemas.openxmlformats.org/drawingml/2006/main" noGrp="1"/>
+          </p:cNvSpPr>
+          <p:nvPr/>
+        </p:nvSpPr>
+        <p:spPr>
+          <a:xfrm xmlns:a="http://schemas.openxmlformats.org/drawingml/2006/main">
+            <a:off x="609600" y="3048000"/>
+            <a:ext cx="5162550" cy="400050"/>
+          </a:xfrm>
+          <a:prstGeom xmlns:a="http://schemas.openxmlformats.org/drawingml/2006/main" prst="rect">
+            <a:avLst/>
+          </a:prstGeom>
+          <a:noFill xmlns:a="http://schemas.openxmlformats.org/drawingml/2006/main"/>
+          <a:ln xmlns:a="http://schemas.openxmlformats.org/drawingml/2006/main" w="0">
+            <a:noFill/>
+          </a:ln>
+        </p:spPr>
+        <p:txBody>
+          <a:bodyPr xmlns:a="http://schemas.openxmlformats.org/drawingml/2006/main" anchor="ctr">
+            <a:noAutofit/>
+          </a:bodyPr>
+          <a:lstStyle xmlns:a="http://schemas.openxmlformats.org/drawingml/2006/main"/>
+          <a:p xmlns:a="http://schemas.openxmlformats.org/drawingml/2006/main">
+            <a:pPr algn="l">
+              <a:defRPr sz="1875" b="0">
+                <a:solidFill>
+                  <a:srgbClr val="FFFFFF"/>
+                </a:solidFill>
+                <a:latin typeface="Arial"/>
+                <a:ea typeface="Arial"/>
+                <a:cs typeface="Arial"/>
+              </a:defRPr>
+            </a:pPr>
+            <a:r>
+              <a:rPr sz="1875" b="0">
+                <a:solidFill>
+                  <a:srgbClr val="FFFFFF"/>
+                </a:solidFill>
+                <a:latin typeface="Arial"/>
+                <a:ea typeface="Arial"/>
+                <a:cs typeface="Arial"/>
+              </a:rPr>
+              <a:t>25 of 169 recorded rejection specimens</a:t>
+            </a:r>
+          </a:p>
+        </p:txBody>
+      </p:sp>
+      <p:sp>
+        <p:nvSpPr>
+          <p:cNvPr id="9" name="">
+            <a:extLst xmlns:a="http://schemas.openxmlformats.org/drawingml/2006/main">
+              <a:ext uri="{FF2B5EF4-FFF2-40B4-BE49-F238E27FC236}">
+                <a16:creationId xmlns:a16="http://schemas.microsoft.com/office/drawing/2014/main" id="{9F96EC2A-DD3F-4404-A4F8-F0293E51DBDD}"/>
+              </a:ext>
+            </a:extLst>
+          </p:cNvPr>
+          <p:cNvSpPr>
+            <a:spLocks xmlns:a="http://schemas.openxmlformats.org/drawingml/2006/main" noGrp="1"/>
+          </p:cNvSpPr>
+          <p:nvPr/>
+        </p:nvSpPr>
+        <p:spPr>
+          <a:xfrm xmlns:a="http://schemas.openxmlformats.org/drawingml/2006/main">
+            <a:off x="6343650" y="3048000"/>
+            <a:ext cx="5238750" cy="400050"/>
+          </a:xfrm>
+          <a:prstGeom xmlns:a="http://schemas.openxmlformats.org/drawingml/2006/main" prst="rect">
+            <a:avLst/>
+          </a:prstGeom>
+          <a:noFill xmlns:a="http://schemas.openxmlformats.org/drawingml/2006/main"/>
+          <a:ln xmlns:a="http://schemas.openxmlformats.org/drawingml/2006/main" w="0">
+            <a:noFill/>
+          </a:ln>
+        </p:spPr>
+        <p:txBody>
+          <a:bodyPr xmlns:a="http://schemas.openxmlformats.org/drawingml/2006/main" anchor="ctr">
+            <a:noAutofit/>
+          </a:bodyPr>
+          <a:lstStyle xmlns:a="http://schemas.openxmlformats.org/drawingml/2006/main"/>
+          <a:p xmlns:a="http://schemas.openxmlformats.org/drawingml/2006/main">
+            <a:pPr algn="l">
+              <a:defRPr sz="1875" b="0">
+                <a:solidFill>
+                  <a:srgbClr val="FFFFFF"/>
+                </a:solidFill>
+                <a:latin typeface="Arial"/>
+                <a:ea typeface="Arial"/>
+                <a:cs typeface="Arial"/>
+              </a:defRPr>
+            </a:pPr>
+            <a:r>
+              <a:rPr sz="1875" b="0">
+                <a:solidFill>
+                  <a:srgbClr val="FFFFFF"/>
+                </a:solidFill>
+                <a:latin typeface="Arial"/>
+                <a:ea typeface="Arial"/>
+                <a:cs typeface="Arial"/>
+              </a:rPr>
+              <a:t>8 of 176 recorded no-rejection specimens</a:t>
+            </a:r>
+          </a:p>
+        </p:txBody>
+      </p:sp>
+      <p:sp>
+        <p:nvSpPr>
+          <p:cNvPr id="10" name="">
+            <a:extLst xmlns:a="http://schemas.openxmlformats.org/drawingml/2006/main">
+              <a:ext uri="{FF2B5EF4-FFF2-40B4-BE49-F238E27FC236}">
+                <a16:creationId xmlns:a16="http://schemas.microsoft.com/office/drawing/2014/main" id="{10CD939B-7CFE-420C-9AD9-532AC7A46B04}"/>
+              </a:ext>
+            </a:extLst>
+          </p:cNvPr>
+          <p:cNvSpPr>
+            <a:spLocks xmlns:a="http://schemas.openxmlformats.org/drawingml/2006/main" noGrp="1"/>
+          </p:cNvSpPr>
+          <p:nvPr/>
+        </p:nvSpPr>
+        <p:spPr>
+          <a:xfrm xmlns:a="http://schemas.openxmlformats.org/drawingml/2006/main">
+            <a:off x="609600" y="3552825"/>
+            <a:ext cx="10972800" cy="723900"/>
+          </a:xfrm>
+          <a:prstGeom xmlns:a="http://schemas.openxmlformats.org/drawingml/2006/main" prst="rect">
+            <a:avLst/>
+          </a:prstGeom>
+          <a:noFill xmlns:a="http://schemas.openxmlformats.org/drawingml/2006/main"/>
+          <a:ln xmlns:a="http://schemas.openxmlformats.org/drawingml/2006/main" w="0">
+            <a:noFill/>
+          </a:ln>
+        </p:spPr>
+        <p:txBody>
+          <a:bodyPr xmlns:a="http://schemas.openxmlformats.org/drawingml/2006/main" anchor="ctr">
+            <a:noAutofit/>
+          </a:bodyPr>
+          <a:lstStyle xmlns:a="http://schemas.openxmlformats.org/drawingml/2006/main"/>
+          <a:p xmlns:a="http://schemas.openxmlformats.org/drawingml/2006/main">
+            <a:pPr algn="l">
+              <a:defRPr sz="2175" b="0">
+                <a:solidFill>
+                  <a:srgbClr val="FFFFFF"/>
+                </a:solidFill>
+                <a:latin typeface="Arial"/>
+                <a:ea typeface="Arial"/>
+                <a:cs typeface="Arial"/>
+              </a:defRPr>
+            </a:pPr>
+            <a:r>
+              <a:rPr sz="2175" b="0">
+                <a:solidFill>
+                  <a:srgbClr val="FFFFFF"/>
+                </a:solidFill>
+                <a:latin typeface="Arial"/>
+                <a:ea typeface="Arial"/>
+                <a:cs typeface="Arial"/>
+              </a:rPr>
+              <a:t>Fewer false flags than IFNG, but more misses.</a:t>
+            </a:r>
+          </a:p>
+          <a:p xmlns:a="http://schemas.openxmlformats.org/drawingml/2006/main">
+            <a:pPr algn="l">
+              <a:defRPr sz="2175" b="0">
+                <a:solidFill>
+                  <a:srgbClr val="FFFFFF"/>
+                </a:solidFill>
+                <a:latin typeface="Arial"/>
+                <a:ea typeface="Arial"/>
+                <a:cs typeface="Arial"/>
+              </a:defRPr>
+            </a:pPr>
+            <a:r>
+              <a:rPr sz="2175" b="0">
+                <a:solidFill>
+                  <a:srgbClr val="FFFFFF"/>
+                </a:solidFill>
+                <a:latin typeface="Arial"/>
+                <a:ea typeface="Arial"/>
+                <a:cs typeface="Arial"/>
+              </a:rPr>
+              <a:t>Advantage over logistic regression remains uncertain.</a:t>
+            </a:r>
+          </a:p>
+        </p:txBody>
+      </p:sp>
+      <p:sp>
+        <p:nvSpPr>
+          <p:cNvPr id="11" name="">
+            <a:extLst xmlns:a="http://schemas.openxmlformats.org/drawingml/2006/main">
+              <a:ext uri="{FF2B5EF4-FFF2-40B4-BE49-F238E27FC236}">
+                <a16:creationId xmlns:a16="http://schemas.microsoft.com/office/drawing/2014/main" id="{A31C8520-16FA-460E-AD7A-F0DD36A6E945}"/>
+              </a:ext>
+            </a:extLst>
+          </p:cNvPr>
+          <p:cNvSpPr>
+            <a:spLocks xmlns:a="http://schemas.openxmlformats.org/drawingml/2006/main" noGrp="1"/>
+          </p:cNvSpPr>
+          <p:nvPr/>
+        </p:nvSpPr>
+        <p:spPr>
+          <a:xfrm xmlns:a="http://schemas.openxmlformats.org/drawingml/2006/main">
+            <a:off x="609600" y="4476750"/>
+            <a:ext cx="10972800" cy="0"/>
+          </a:xfrm>
+          <a:prstGeom xmlns:a="http://schemas.openxmlformats.org/drawingml/2006/main" prst="line">
+            <a:avLst/>
+          </a:prstGeom>
+          <a:ln xmlns:a="http://schemas.openxmlformats.org/drawingml/2006/main" w="11430">
+            <a:solidFill>
+              <a:srgbClr val="78949B"/>
+            </a:solidFill>
+          </a:ln>
+        </p:spPr>
+      </p:sp>
+      <p:sp>
+        <p:nvSpPr>
+          <p:cNvPr id="12" name="">
+            <a:extLst xmlns:a="http://schemas.openxmlformats.org/drawingml/2006/main">
+              <a:ext uri="{FF2B5EF4-FFF2-40B4-BE49-F238E27FC236}">
+                <a16:creationId xmlns:a16="http://schemas.microsoft.com/office/drawing/2014/main" id="{C95AE0D7-0797-47C9-9F8E-8C23B64B65AC}"/>
+              </a:ext>
+            </a:extLst>
+          </p:cNvPr>
+          <p:cNvSpPr>
+            <a:spLocks xmlns:a="http://schemas.openxmlformats.org/drawingml/2006/main" noGrp="1"/>
+          </p:cNvSpPr>
+          <p:nvPr/>
+        </p:nvSpPr>
+        <p:spPr>
+          <a:xfrm xmlns:a="http://schemas.openxmlformats.org/drawingml/2006/main">
+            <a:off x="609600" y="4629150"/>
+            <a:ext cx="10972800" cy="409575"/>
+          </a:xfrm>
+          <a:prstGeom xmlns:a="http://schemas.openxmlformats.org/drawingml/2006/main" prst="rect">
+            <a:avLst/>
+          </a:prstGeom>
+          <a:noFill xmlns:a="http://schemas.openxmlformats.org/drawingml/2006/main"/>
+          <a:ln xmlns:a="http://schemas.openxmlformats.org/drawingml/2006/main" w="0">
+            <a:noFill/>
+          </a:ln>
+        </p:spPr>
+        <p:txBody>
+          <a:bodyPr xmlns:a="http://schemas.openxmlformats.org/drawingml/2006/main" anchor="ctr">
+            <a:noAutofit/>
+          </a:bodyPr>
+          <a:lstStyle xmlns:a="http://schemas.openxmlformats.org/drawingml/2006/main"/>
+          <a:p xmlns:a="http://schemas.openxmlformats.org/drawingml/2006/main">
+            <a:pPr algn="l">
+              <a:defRPr sz="2400" b="1">
+                <a:solidFill>
+                  <a:srgbClr val="FFFFFF"/>
+                </a:solidFill>
+                <a:latin typeface="Arial"/>
+                <a:ea typeface="Arial"/>
+                <a:cs typeface="Arial"/>
+              </a:defRPr>
+            </a:pPr>
+            <a:r>
+              <a:rPr sz="2400" b="1">
+                <a:solidFill>
+                  <a:srgbClr val="FFFFFF"/>
+                </a:solidFill>
+                <a:latin typeface="Arial"/>
+                <a:ea typeface="Arial"/>
+                <a:cs typeface="Arial"/>
+              </a:rPr>
+              <a:t>Prediction service and demo</a:t>
+            </a:r>
+          </a:p>
+        </p:txBody>
+      </p:sp>
+      <p:sp>
+        <p:nvSpPr>
+          <p:cNvPr id="13" name="">
+            <a:extLst xmlns:a="http://schemas.openxmlformats.org/drawingml/2006/main">
+              <a:ext uri="{FF2B5EF4-FFF2-40B4-BE49-F238E27FC236}">
+                <a16:creationId xmlns:a16="http://schemas.microsoft.com/office/drawing/2014/main" id="{0B54C290-35D1-4AC8-A4FF-9CEA02452853}"/>
+              </a:ext>
+            </a:extLst>
+          </p:cNvPr>
+          <p:cNvSpPr>
+            <a:spLocks xmlns:a="http://schemas.openxmlformats.org/drawingml/2006/main" noGrp="1"/>
+          </p:cNvSpPr>
+          <p:nvPr/>
+        </p:nvSpPr>
+        <p:spPr>
+          <a:xfrm xmlns:a="http://schemas.openxmlformats.org/drawingml/2006/main">
+            <a:off x="609600" y="5181600"/>
+            <a:ext cx="10972800" cy="838200"/>
           </a:xfrm>
           <a:prstGeom xmlns:a="http://schemas.openxmlformats.org/drawingml/2006/main" prst="rect">
             <a:avLst/>
@@ -8604,139 +9266,55 @@
           <a:p xmlns:a="http://schemas.openxmlformats.org/drawingml/2006/main">
             <a:pPr marL="279400" indent="-152400" algn="l">
               <a:spcAft>
-                <a:spcPts val="2200"/>
+                <a:spcPts val="1000"/>
               </a:spcAft>
               <a:buChar char="•"/>
-              <a:defRPr sz="2550" b="0">
-                <a:solidFill>
-                  <a:srgbClr val="16343E"/>
-                </a:solidFill>
-                <a:latin typeface="Arial"/>
-                <a:ea typeface="Arial"/>
-                <a:cs typeface="Arial"/>
-              </a:defRPr>
-            </a:pPr>
-            <a:r>
-              <a:rPr sz="2550" b="0">
-                <a:solidFill>
-                  <a:srgbClr val="16343E"/>
-                </a:solidFill>
-                <a:latin typeface="Arial"/>
-                <a:ea typeface="Arial"/>
-                <a:cs typeface="Arial"/>
-              </a:rPr>
-              <a:t>RNA includes messages cells make when genes are active.</a:t>
+              <a:defRPr sz="2175" b="0">
+                <a:solidFill>
+                  <a:srgbClr val="FFFFFF"/>
+                </a:solidFill>
+                <a:latin typeface="Arial"/>
+                <a:ea typeface="Arial"/>
+                <a:cs typeface="Arial"/>
+              </a:defRPr>
+            </a:pPr>
+            <a:r>
+              <a:rPr sz="2175" b="0">
+                <a:solidFill>
+                  <a:srgbClr val="FFFFFF"/>
+                </a:solidFill>
+                <a:latin typeface="Arial"/>
+                <a:ea typeface="Arial"/>
+                <a:cs typeface="Arial"/>
+              </a:rPr>
+              <a:t>Shared preparation code reproduced all 345 saved scores.</a:t>
             </a:r>
           </a:p>
           <a:p xmlns:a="http://schemas.openxmlformats.org/drawingml/2006/main">
             <a:pPr marL="279400" indent="-152400" algn="l">
               <a:spcAft>
-                <a:spcPts val="2200"/>
+                <a:spcPts val="1000"/>
               </a:spcAft>
               <a:buChar char="•"/>
-              <a:defRPr sz="2550" b="0">
-                <a:solidFill>
-                  <a:srgbClr val="16343E"/>
-                </a:solidFill>
-                <a:latin typeface="Arial"/>
-                <a:ea typeface="Arial"/>
-                <a:cs typeface="Arial"/>
-              </a:defRPr>
-            </a:pPr>
-            <a:r>
-              <a:rPr sz="2550" b="0">
-                <a:solidFill>
-                  <a:srgbClr val="16343E"/>
-                </a:solidFill>
-                <a:latin typeface="Arial"/>
-                <a:ea typeface="Arial"/>
-                <a:cs typeface="Arial"/>
-              </a:rPr>
-              <a:t>An assay is a laboratory test. B-HOT is the fixed panel of RNA types measured in this study.</a:t>
-            </a:r>
-          </a:p>
-          <a:p xmlns:a="http://schemas.openxmlformats.org/drawingml/2006/main">
-            <a:pPr marL="279400" indent="-152400" algn="l">
-              <a:spcAft>
-                <a:spcPts val="2200"/>
-              </a:spcAft>
-              <a:buChar char="•"/>
-              <a:defRPr sz="2550" b="0">
-                <a:solidFill>
-                  <a:srgbClr val="16343E"/>
-                </a:solidFill>
-                <a:latin typeface="Arial"/>
-                <a:ea typeface="Arial"/>
-                <a:cs typeface="Arial"/>
-              </a:defRPr>
-            </a:pPr>
-            <a:r>
-              <a:rPr sz="2550" b="0">
-                <a:solidFill>
-                  <a:srgbClr val="16343E"/>
-                </a:solidFill>
-                <a:latin typeface="Arial"/>
-                <a:ea typeface="Arial"/>
-                <a:cs typeface="Arial"/>
-              </a:rPr>
-              <a:t>The laboratory extracts RNA from preserved tissue. Probes recognize selected RNAs, and NanoString nCounter counts their identifying barcodes.</a:t>
-            </a:r>
-          </a:p>
-        </p:txBody>
-      </p:sp>
-      <p:sp>
-        <p:nvSpPr>
-          <p:cNvPr id="5" name="">
-            <a:extLst xmlns:a="http://schemas.openxmlformats.org/drawingml/2006/main">
-              <a:ext uri="{FF2B5EF4-FFF2-40B4-BE49-F238E27FC236}">
-                <a16:creationId xmlns:a16="http://schemas.microsoft.com/office/drawing/2014/main" id="{9A4EDB1A-646B-4977-9874-003FEFDC02B5}"/>
-              </a:ext>
-            </a:extLst>
-          </p:cNvPr>
-          <p:cNvSpPr>
-            <a:spLocks xmlns:a="http://schemas.openxmlformats.org/drawingml/2006/main" noGrp="1"/>
-          </p:cNvSpPr>
-          <p:nvPr/>
-        </p:nvSpPr>
-        <p:spPr>
-          <a:xfrm xmlns:a="http://schemas.openxmlformats.org/drawingml/2006/main">
-            <a:off x="895350" y="5219700"/>
-            <a:ext cx="10687050" cy="552450"/>
-          </a:xfrm>
-          <a:prstGeom xmlns:a="http://schemas.openxmlformats.org/drawingml/2006/main" prst="rect">
-            <a:avLst/>
-          </a:prstGeom>
-          <a:noFill xmlns:a="http://schemas.openxmlformats.org/drawingml/2006/main"/>
-          <a:ln xmlns:a="http://schemas.openxmlformats.org/drawingml/2006/main" w="0">
-            <a:noFill/>
-          </a:ln>
-        </p:spPr>
-        <p:txBody>
-          <a:bodyPr xmlns:a="http://schemas.openxmlformats.org/drawingml/2006/main" anchor="ctr">
-            <a:noAutofit/>
-          </a:bodyPr>
-          <a:lstStyle xmlns:a="http://schemas.openxmlformats.org/drawingml/2006/main"/>
-          <a:p xmlns:a="http://schemas.openxmlformats.org/drawingml/2006/main">
-            <a:pPr algn="l">
-              <a:defRPr sz="2550" b="1">
-                <a:solidFill>
-                  <a:srgbClr val="16343E"/>
-                </a:solidFill>
-                <a:latin typeface="Arial"/>
-                <a:ea typeface="Arial"/>
-                <a:cs typeface="Arial"/>
-              </a:defRPr>
-            </a:pPr>
-            <a:r>
-              <a:rPr sz="2550" b="1">
-                <a:solidFill>
-                  <a:srgbClr val="16343E"/>
-                </a:solidFill>
-                <a:latin typeface="Arial"/>
-                <a:ea typeface="Arial"/>
-                <a:cs typeface="Arial"/>
-              </a:rPr>
-              <a:t>Example: IFNG count = 4 in one public specimen</a:t>
+              <a:defRPr sz="2175" b="0">
+                <a:solidFill>
+                  <a:srgbClr val="FFFFFF"/>
+                </a:solidFill>
+                <a:latin typeface="Arial"/>
+                <a:ea typeface="Arial"/>
+                <a:cs typeface="Arial"/>
+              </a:defRPr>
+            </a:pPr>
+            <a:r>
+              <a:rPr sz="2175" b="0">
+                <a:solidFill>
+                  <a:srgbClr val="FFFFFF"/>
+                </a:solidFill>
+                <a:latin typeface="Arial"/>
+                <a:ea typeface="Arial"/>
+                <a:cs typeface="Arial"/>
+              </a:rPr>
+              <a:t>Working demo with valid input and clear error messages.</a:t>
             </a:r>
           </a:p>
         </p:txBody>
@@ -8744,7 +9322,7 @@
     </p:spTree>
     <p:extLst>
       <p:ext uri="{BB962C8B-B14F-4D97-AF65-F5344CB8AC3E}">
-        <p14:creationId xmlns:p14="http://schemas.microsoft.com/office/powerpoint/2010/main" val="1814137767"/>
+        <p14:creationId xmlns:p14="http://schemas.microsoft.com/office/powerpoint/2010/main" val="655841451"/>
       </p:ext>
     </p:extLst>
   </p:cSld>
@@ -8775,7 +9353,7 @@
           <p:cNvPr id="6" name="">
             <a:extLst xmlns:a="http://schemas.openxmlformats.org/drawingml/2006/main">
               <a:ext uri="{FF2B5EF4-FFF2-40B4-BE49-F238E27FC236}">
-                <a16:creationId xmlns:a16="http://schemas.microsoft.com/office/drawing/2014/main" id="{6BF21BDC-B5EA-48C9-ABC5-0329B4E664FE}"/>
+                <a16:creationId xmlns:a16="http://schemas.microsoft.com/office/drawing/2014/main" id="{379C9F2C-355D-41B4-A4DB-4F034399CFEA}"/>
               </a:ext>
             </a:extLst>
           </p:cNvPr>
@@ -8822,7 +9400,7 @@
                 <a:ea typeface="Arial"/>
                 <a:cs typeface="Arial"/>
               </a:rPr>
-              <a:t>Backup: complete primary comparison</a:t>
+              <a:t>Backup: measuring biopsy RNA with NanoString nCounter</a:t>
             </a:r>
           </a:p>
         </p:txBody>
@@ -8832,7 +9410,7 @@
           <p:cNvPr id="2" name="">
             <a:extLst xmlns:a="http://schemas.openxmlformats.org/drawingml/2006/main">
               <a:ext uri="{FF2B5EF4-FFF2-40B4-BE49-F238E27FC236}">
-                <a16:creationId xmlns:a16="http://schemas.microsoft.com/office/drawing/2014/main" id="{12632283-4B63-40A1-B3C4-1EF4E7C4CC27}"/>
+                <a16:creationId xmlns:a16="http://schemas.microsoft.com/office/drawing/2014/main" id="{6A01092B-9DB2-4124-87CD-E1FE142F042B}"/>
               </a:ext>
             </a:extLst>
           </p:cNvPr>
@@ -8879,7 +9457,7 @@
                 <a:ea typeface="Arial"/>
                 <a:cs typeface="Arial"/>
               </a:rPr>
-              <a:t>Source: primary evaluation, 15 Sep 2026. Same 345 specimens.</a:t>
+              <a:t>Sources: Zhang et al. (2024), Methods; Bruker nCounter documentation; GSE212160</a:t>
             </a:r>
           </a:p>
         </p:txBody>
@@ -8889,7 +9467,7 @@
           <p:cNvPr id="3" name="">
             <a:extLst xmlns:a="http://schemas.openxmlformats.org/drawingml/2006/main">
               <a:ext uri="{FF2B5EF4-FFF2-40B4-BE49-F238E27FC236}">
-                <a16:creationId xmlns:a16="http://schemas.microsoft.com/office/drawing/2014/main" id="{7D1DCFFB-055C-4FBB-8F8A-F0B0D10F014C}"/>
+                <a16:creationId xmlns:a16="http://schemas.microsoft.com/office/drawing/2014/main" id="{011CD939-E608-4287-B439-8C3FEDEEA9AD}"/>
               </a:ext>
             </a:extLst>
           </p:cNvPr>
@@ -8941,6 +9519,378 @@
           </a:p>
         </p:txBody>
       </p:sp>
+      <p:sp>
+        <p:nvSpPr>
+          <p:cNvPr id="4" name="">
+            <a:extLst xmlns:a="http://schemas.openxmlformats.org/drawingml/2006/main">
+              <a:ext uri="{FF2B5EF4-FFF2-40B4-BE49-F238E27FC236}">
+                <a16:creationId xmlns:a16="http://schemas.microsoft.com/office/drawing/2014/main" id="{A7C29AE9-F394-45E9-8837-AF904B09BB7D}"/>
+              </a:ext>
+            </a:extLst>
+          </p:cNvPr>
+          <p:cNvSpPr>
+            <a:spLocks xmlns:a="http://schemas.openxmlformats.org/drawingml/2006/main" noGrp="1"/>
+          </p:cNvSpPr>
+          <p:nvPr/>
+        </p:nvSpPr>
+        <p:spPr>
+          <a:xfrm xmlns:a="http://schemas.openxmlformats.org/drawingml/2006/main">
+            <a:off x="609600" y="1704975"/>
+            <a:ext cx="10972800" cy="3543300"/>
+          </a:xfrm>
+          <a:prstGeom xmlns:a="http://schemas.openxmlformats.org/drawingml/2006/main" prst="rect">
+            <a:avLst/>
+          </a:prstGeom>
+          <a:noFill xmlns:a="http://schemas.openxmlformats.org/drawingml/2006/main"/>
+          <a:ln xmlns:a="http://schemas.openxmlformats.org/drawingml/2006/main" w="0">
+            <a:noFill/>
+          </a:ln>
+        </p:spPr>
+        <p:txBody>
+          <a:bodyPr xmlns:a="http://schemas.openxmlformats.org/drawingml/2006/main" anchor="t">
+            <a:noAutofit/>
+          </a:bodyPr>
+          <a:lstStyle xmlns:a="http://schemas.openxmlformats.org/drawingml/2006/main"/>
+          <a:p xmlns:a="http://schemas.openxmlformats.org/drawingml/2006/main">
+            <a:pPr marL="279400" indent="-152400" algn="l">
+              <a:spcAft>
+                <a:spcPts val="2200"/>
+              </a:spcAft>
+              <a:buChar char="•"/>
+              <a:defRPr sz="2550" b="0">
+                <a:solidFill>
+                  <a:srgbClr val="16343E"/>
+                </a:solidFill>
+                <a:latin typeface="Arial"/>
+                <a:ea typeface="Arial"/>
+                <a:cs typeface="Arial"/>
+              </a:defRPr>
+            </a:pPr>
+            <a:r>
+              <a:rPr sz="2550" b="0">
+                <a:solidFill>
+                  <a:srgbClr val="16343E"/>
+                </a:solidFill>
+                <a:latin typeface="Arial"/>
+                <a:ea typeface="Arial"/>
+                <a:cs typeface="Arial"/>
+              </a:rPr>
+              <a:t>RNA includes messages cells make when genes are active.</a:t>
+            </a:r>
+          </a:p>
+          <a:p xmlns:a="http://schemas.openxmlformats.org/drawingml/2006/main">
+            <a:pPr marL="279400" indent="-152400" algn="l">
+              <a:spcAft>
+                <a:spcPts val="2200"/>
+              </a:spcAft>
+              <a:buChar char="•"/>
+              <a:defRPr sz="2550" b="0">
+                <a:solidFill>
+                  <a:srgbClr val="16343E"/>
+                </a:solidFill>
+                <a:latin typeface="Arial"/>
+                <a:ea typeface="Arial"/>
+                <a:cs typeface="Arial"/>
+              </a:defRPr>
+            </a:pPr>
+            <a:r>
+              <a:rPr sz="2550" b="0">
+                <a:solidFill>
+                  <a:srgbClr val="16343E"/>
+                </a:solidFill>
+                <a:latin typeface="Arial"/>
+                <a:ea typeface="Arial"/>
+                <a:cs typeface="Arial"/>
+              </a:rPr>
+              <a:t>An assay is a laboratory test. B-HOT is the fixed panel of RNA types measured in the public dataset.</a:t>
+            </a:r>
+          </a:p>
+          <a:p xmlns:a="http://schemas.openxmlformats.org/drawingml/2006/main">
+            <a:pPr marL="279400" indent="-152400" algn="l">
+              <a:spcAft>
+                <a:spcPts val="2200"/>
+              </a:spcAft>
+              <a:buChar char="•"/>
+              <a:defRPr sz="2550" b="0">
+                <a:solidFill>
+                  <a:srgbClr val="16343E"/>
+                </a:solidFill>
+                <a:latin typeface="Arial"/>
+                <a:ea typeface="Arial"/>
+                <a:cs typeface="Arial"/>
+              </a:defRPr>
+            </a:pPr>
+            <a:r>
+              <a:rPr sz="2550" b="0">
+                <a:solidFill>
+                  <a:srgbClr val="16343E"/>
+                </a:solidFill>
+                <a:latin typeface="Arial"/>
+                <a:ea typeface="Arial"/>
+                <a:cs typeface="Arial"/>
+              </a:rPr>
+              <a:t>The laboratory extracts RNA from preserved tissue. Probes recognize selected RNAs, and NanoString nCounter counts their identifying barcodes.</a:t>
+            </a:r>
+          </a:p>
+        </p:txBody>
+      </p:sp>
+      <p:sp>
+        <p:nvSpPr>
+          <p:cNvPr id="5" name="">
+            <a:extLst xmlns:a="http://schemas.openxmlformats.org/drawingml/2006/main">
+              <a:ext uri="{FF2B5EF4-FFF2-40B4-BE49-F238E27FC236}">
+                <a16:creationId xmlns:a16="http://schemas.microsoft.com/office/drawing/2014/main" id="{4817C926-D581-4717-9CAD-59658267CB3F}"/>
+              </a:ext>
+            </a:extLst>
+          </p:cNvPr>
+          <p:cNvSpPr>
+            <a:spLocks xmlns:a="http://schemas.openxmlformats.org/drawingml/2006/main" noGrp="1"/>
+          </p:cNvSpPr>
+          <p:nvPr/>
+        </p:nvSpPr>
+        <p:spPr>
+          <a:xfrm xmlns:a="http://schemas.openxmlformats.org/drawingml/2006/main">
+            <a:off x="895350" y="5219700"/>
+            <a:ext cx="10687050" cy="552450"/>
+          </a:xfrm>
+          <a:prstGeom xmlns:a="http://schemas.openxmlformats.org/drawingml/2006/main" prst="rect">
+            <a:avLst/>
+          </a:prstGeom>
+          <a:noFill xmlns:a="http://schemas.openxmlformats.org/drawingml/2006/main"/>
+          <a:ln xmlns:a="http://schemas.openxmlformats.org/drawingml/2006/main" w="0">
+            <a:noFill/>
+          </a:ln>
+        </p:spPr>
+        <p:txBody>
+          <a:bodyPr xmlns:a="http://schemas.openxmlformats.org/drawingml/2006/main" anchor="ctr">
+            <a:noAutofit/>
+          </a:bodyPr>
+          <a:lstStyle xmlns:a="http://schemas.openxmlformats.org/drawingml/2006/main"/>
+          <a:p xmlns:a="http://schemas.openxmlformats.org/drawingml/2006/main">
+            <a:pPr algn="l">
+              <a:defRPr sz="2550" b="1">
+                <a:solidFill>
+                  <a:srgbClr val="16343E"/>
+                </a:solidFill>
+                <a:latin typeface="Arial"/>
+                <a:ea typeface="Arial"/>
+                <a:cs typeface="Arial"/>
+              </a:defRPr>
+            </a:pPr>
+            <a:r>
+              <a:rPr sz="2550" b="1">
+                <a:solidFill>
+                  <a:srgbClr val="16343E"/>
+                </a:solidFill>
+                <a:latin typeface="Arial"/>
+                <a:ea typeface="Arial"/>
+                <a:cs typeface="Arial"/>
+              </a:rPr>
+              <a:t>Example: IFNG count = 4 in one public specimen</a:t>
+            </a:r>
+          </a:p>
+        </p:txBody>
+      </p:sp>
+    </p:spTree>
+    <p:extLst>
+      <p:ext uri="{BB962C8B-B14F-4D97-AF65-F5344CB8AC3E}">
+        <p14:creationId xmlns:p14="http://schemas.microsoft.com/office/powerpoint/2010/main" val="32729578"/>
+      </p:ext>
+    </p:extLst>
+  </p:cSld>
+</p:sld>
+</file>
+
+<file path=ppt/slides/slide22.xml><?xml version="1.0" encoding="utf-8"?>
+<p:sld xmlns:p="http://schemas.openxmlformats.org/presentationml/2006/main">
+  <p:cSld>
+    <p:bg>
+      <p:bgPr>
+        <a:solidFill xmlns:a="http://schemas.openxmlformats.org/drawingml/2006/main">
+          <a:srgbClr val="F7F8F5"/>
+        </a:solidFill>
+      </p:bgPr>
+    </p:bg>
+    <p:spTree>
+      <p:nvGrpSpPr>
+        <p:cNvPr id="1" name=""/>
+        <p:cNvGrpSpPr/>
+        <p:nvPr/>
+      </p:nvGrpSpPr>
+      <p:grpSpPr>
+        <a:xfrm xmlns:a="http://schemas.openxmlformats.org/drawingml/2006/main"/>
+      </p:grpSpPr>
+      <p:sp>
+        <p:nvSpPr>
+          <p:cNvPr id="6" name="">
+            <a:extLst xmlns:a="http://schemas.openxmlformats.org/drawingml/2006/main">
+              <a:ext uri="{FF2B5EF4-FFF2-40B4-BE49-F238E27FC236}">
+                <a16:creationId xmlns:a16="http://schemas.microsoft.com/office/drawing/2014/main" id="{55949734-689B-48E3-89AA-022DFF037B25}"/>
+              </a:ext>
+            </a:extLst>
+          </p:cNvPr>
+          <p:cNvSpPr>
+            <a:spLocks xmlns:a="http://schemas.openxmlformats.org/drawingml/2006/main" noGrp="1"/>
+          </p:cNvSpPr>
+          <p:nvPr/>
+        </p:nvSpPr>
+        <p:spPr>
+          <a:xfrm xmlns:a="http://schemas.openxmlformats.org/drawingml/2006/main">
+            <a:off x="609600" y="409575"/>
+            <a:ext cx="10972800" cy="1000125"/>
+          </a:xfrm>
+          <a:prstGeom xmlns:a="http://schemas.openxmlformats.org/drawingml/2006/main" prst="rect">
+            <a:avLst/>
+          </a:prstGeom>
+          <a:noFill xmlns:a="http://schemas.openxmlformats.org/drawingml/2006/main"/>
+          <a:ln xmlns:a="http://schemas.openxmlformats.org/drawingml/2006/main" w="0">
+            <a:noFill/>
+          </a:ln>
+        </p:spPr>
+        <p:txBody>
+          <a:bodyPr xmlns:a="http://schemas.openxmlformats.org/drawingml/2006/main" anchor="ctr">
+            <a:noAutofit/>
+          </a:bodyPr>
+          <a:lstStyle xmlns:a="http://schemas.openxmlformats.org/drawingml/2006/main"/>
+          <a:p xmlns:a="http://schemas.openxmlformats.org/drawingml/2006/main">
+            <a:pPr algn="l">
+              <a:defRPr sz="3450" b="1">
+                <a:solidFill>
+                  <a:srgbClr val="16343E"/>
+                </a:solidFill>
+                <a:latin typeface="Arial"/>
+                <a:ea typeface="Arial"/>
+                <a:cs typeface="Arial"/>
+              </a:defRPr>
+            </a:pPr>
+            <a:r>
+              <a:rPr sz="3450" b="1">
+                <a:solidFill>
+                  <a:srgbClr val="16343E"/>
+                </a:solidFill>
+                <a:latin typeface="Arial"/>
+                <a:ea typeface="Arial"/>
+                <a:cs typeface="Arial"/>
+              </a:rPr>
+              <a:t>Backup: complete primary comparison</a:t>
+            </a:r>
+          </a:p>
+        </p:txBody>
+      </p:sp>
+      <p:sp>
+        <p:nvSpPr>
+          <p:cNvPr id="2" name="">
+            <a:extLst xmlns:a="http://schemas.openxmlformats.org/drawingml/2006/main">
+              <a:ext uri="{FF2B5EF4-FFF2-40B4-BE49-F238E27FC236}">
+                <a16:creationId xmlns:a16="http://schemas.microsoft.com/office/drawing/2014/main" id="{34AEB1E3-5A98-4D21-BF17-7414DC691BFB}"/>
+              </a:ext>
+            </a:extLst>
+          </p:cNvPr>
+          <p:cNvSpPr>
+            <a:spLocks xmlns:a="http://schemas.openxmlformats.org/drawingml/2006/main" noGrp="1"/>
+          </p:cNvSpPr>
+          <p:nvPr/>
+        </p:nvSpPr>
+        <p:spPr>
+          <a:xfrm xmlns:a="http://schemas.openxmlformats.org/drawingml/2006/main">
+            <a:off x="609600" y="6257925"/>
+            <a:ext cx="10382250" cy="361950"/>
+          </a:xfrm>
+          <a:prstGeom xmlns:a="http://schemas.openxmlformats.org/drawingml/2006/main" prst="rect">
+            <a:avLst/>
+          </a:prstGeom>
+          <a:noFill xmlns:a="http://schemas.openxmlformats.org/drawingml/2006/main"/>
+          <a:ln xmlns:a="http://schemas.openxmlformats.org/drawingml/2006/main" w="0">
+            <a:noFill/>
+          </a:ln>
+        </p:spPr>
+        <p:txBody>
+          <a:bodyPr xmlns:a="http://schemas.openxmlformats.org/drawingml/2006/main" anchor="ctr">
+            <a:noAutofit/>
+          </a:bodyPr>
+          <a:lstStyle xmlns:a="http://schemas.openxmlformats.org/drawingml/2006/main"/>
+          <a:p xmlns:a="http://schemas.openxmlformats.org/drawingml/2006/main">
+            <a:pPr algn="l">
+              <a:defRPr sz="1350" b="0">
+                <a:solidFill>
+                  <a:srgbClr val="52656B"/>
+                </a:solidFill>
+                <a:latin typeface="Arial"/>
+                <a:ea typeface="Arial"/>
+                <a:cs typeface="Arial"/>
+              </a:defRPr>
+            </a:pPr>
+            <a:r>
+              <a:rPr sz="1350" b="0">
+                <a:solidFill>
+                  <a:srgbClr val="52656B"/>
+                </a:solidFill>
+                <a:latin typeface="Arial"/>
+                <a:ea typeface="Arial"/>
+                <a:cs typeface="Arial"/>
+              </a:rPr>
+              <a:t>Source: primary evaluation, 15 Sep 2026. Same 345 specimens.</a:t>
+            </a:r>
+          </a:p>
+        </p:txBody>
+      </p:sp>
+      <p:sp>
+        <p:nvSpPr>
+          <p:cNvPr id="3" name="">
+            <a:extLst xmlns:a="http://schemas.openxmlformats.org/drawingml/2006/main">
+              <a:ext uri="{FF2B5EF4-FFF2-40B4-BE49-F238E27FC236}">
+                <a16:creationId xmlns:a16="http://schemas.microsoft.com/office/drawing/2014/main" id="{AC7BBF0E-B263-47C5-916C-31E5D4F6ABEB}"/>
+              </a:ext>
+            </a:extLst>
+          </p:cNvPr>
+          <p:cNvSpPr>
+            <a:spLocks xmlns:a="http://schemas.openxmlformats.org/drawingml/2006/main" noGrp="1"/>
+          </p:cNvSpPr>
+          <p:nvPr/>
+        </p:nvSpPr>
+        <p:spPr>
+          <a:xfrm xmlns:a="http://schemas.openxmlformats.org/drawingml/2006/main">
+            <a:off x="11115675" y="6305550"/>
+            <a:ext cx="457200" cy="285750"/>
+          </a:xfrm>
+          <a:prstGeom xmlns:a="http://schemas.openxmlformats.org/drawingml/2006/main" prst="rect">
+            <a:avLst/>
+          </a:prstGeom>
+          <a:noFill xmlns:a="http://schemas.openxmlformats.org/drawingml/2006/main"/>
+          <a:ln xmlns:a="http://schemas.openxmlformats.org/drawingml/2006/main" w="0">
+            <a:noFill/>
+          </a:ln>
+        </p:spPr>
+        <p:txBody>
+          <a:bodyPr xmlns:a="http://schemas.openxmlformats.org/drawingml/2006/main" anchor="ctr">
+            <a:noAutofit/>
+          </a:bodyPr>
+          <a:lstStyle xmlns:a="http://schemas.openxmlformats.org/drawingml/2006/main"/>
+          <a:p xmlns:a="http://schemas.openxmlformats.org/drawingml/2006/main">
+            <a:pPr algn="r">
+              <a:defRPr sz="1350" b="0">
+                <a:solidFill>
+                  <a:srgbClr val="52656B"/>
+                </a:solidFill>
+                <a:latin typeface="Arial"/>
+                <a:ea typeface="Arial"/>
+                <a:cs typeface="Arial"/>
+              </a:defRPr>
+            </a:pPr>
+            <a:r>
+              <a:rPr sz="1350" b="0">
+                <a:solidFill>
+                  <a:srgbClr val="52656B"/>
+                </a:solidFill>
+                <a:latin typeface="Arial"/>
+                <a:ea typeface="Arial"/>
+                <a:cs typeface="Arial"/>
+              </a:rPr>
+              <a:t>22</a:t>
+            </a:r>
+          </a:p>
+        </p:txBody>
+      </p:sp>
       <p:graphicFrame>
         <p:nvGraphicFramePr>
           <p:cNvPr id="9" name=""/>
@@ -8948,22 +9898,22 @@
           <p:nvPr/>
         </p:nvGraphicFramePr>
         <p:xfrm>
-          <a:off xmlns:a="http://schemas.openxmlformats.org/drawingml/2006/main" x="609600" y="1885950"/>
-          <a:ext xmlns:a="http://schemas.openxmlformats.org/drawingml/2006/main" cx="10972800" cy="3276600"/>
+          <a:off xmlns:a="http://schemas.openxmlformats.org/drawingml/2006/main" x="609600" y="1781175"/>
+          <a:ext xmlns:a="http://schemas.openxmlformats.org/drawingml/2006/main" cx="10972800" cy="3581400"/>
         </p:xfrm>
         <a:graphic xmlns:a="http://schemas.openxmlformats.org/drawingml/2006/main">
           <a:graphicData uri="http://schemas.openxmlformats.org/drawingml/2006/table">
             <a:tbl>
               <a:tblPr/>
               <a:tblGrid>
-                <a:gridCol w="2324100"/>
-                <a:gridCol w="1295400"/>
-                <a:gridCol w="1600200"/>
-                <a:gridCol w="1914525"/>
-                <a:gridCol w="1952625"/>
-                <a:gridCol w="1885950"/>
+                <a:gridCol w="3048000"/>
+                <a:gridCol w="1333500"/>
+                <a:gridCol w="1390650"/>
+                <a:gridCol w="1685925"/>
+                <a:gridCol w="1752600"/>
+                <a:gridCol w="1762125"/>
               </a:tblGrid>
-              <a:tr h="655320">
+              <a:tr h="762000">
                 <a:tc>
                   <a:txBody>
                     <a:bodyPr>
@@ -8984,7 +9934,7 @@
                       </a:r>
                     </a:p>
                   </a:txBody>
-                  <a:tcPr marL="171450" marR="142875" marT="104775" marB="104775" anchor="ctr">
+                  <a:tcPr marL="171450" marR="142875" marT="76200" marB="76200" anchor="ctr">
                     <a:solidFill>
                       <a:srgbClr val="16343E"/>
                     </a:solidFill>
@@ -9010,7 +9960,7 @@
                       </a:r>
                     </a:p>
                   </a:txBody>
-                  <a:tcPr marL="171450" marR="142875" marT="104775" marB="104775" anchor="ctr">
+                  <a:tcPr marL="171450" marR="142875" marT="76200" marB="76200" anchor="ctr">
                     <a:solidFill>
                       <a:srgbClr val="16343E"/>
                     </a:solidFill>
@@ -9036,7 +9986,7 @@
                       </a:r>
                     </a:p>
                   </a:txBody>
-                  <a:tcPr marL="171450" marR="142875" marT="104775" marB="104775" anchor="ctr">
+                  <a:tcPr marL="171450" marR="142875" marT="76200" marB="76200" anchor="ctr">
                     <a:solidFill>
                       <a:srgbClr val="16343E"/>
                     </a:solidFill>
@@ -9062,7 +10012,7 @@
                       </a:r>
                     </a:p>
                   </a:txBody>
-                  <a:tcPr marL="171450" marR="142875" marT="104775" marB="104775" anchor="ctr">
+                  <a:tcPr marL="171450" marR="142875" marT="76200" marB="76200" anchor="ctr">
                     <a:solidFill>
                       <a:srgbClr val="16343E"/>
                     </a:solidFill>
@@ -9088,7 +10038,7 @@
                       </a:r>
                     </a:p>
                   </a:txBody>
-                  <a:tcPr marL="171450" marR="142875" marT="104775" marB="104775" anchor="ctr">
+                  <a:tcPr marL="171450" marR="142875" marT="76200" marB="76200" anchor="ctr">
                     <a:solidFill>
                       <a:srgbClr val="16343E"/>
                     </a:solidFill>
@@ -9114,14 +10064,14 @@
                       </a:r>
                     </a:p>
                   </a:txBody>
-                  <a:tcPr marL="171450" marR="142875" marT="104775" marB="104775" anchor="ctr">
+                  <a:tcPr marL="171450" marR="142875" marT="76200" marB="76200" anchor="ctr">
                     <a:solidFill>
                       <a:srgbClr val="16343E"/>
                     </a:solidFill>
                   </a:tcPr>
                 </a:tc>
               </a:tr>
-              <a:tr h="655320">
+              <a:tr h="552450">
                 <a:tc>
                   <a:txBody>
                     <a:bodyPr>
@@ -9142,7 +10092,7 @@
                       </a:r>
                     </a:p>
                   </a:txBody>
-                  <a:tcPr marL="171450" marR="142875" marT="104775" marB="104775" anchor="ctr">
+                  <a:tcPr marL="171450" marR="142875" marT="76200" marB="76200" anchor="ctr">
                     <a:solidFill>
                       <a:srgbClr val="FFFFFF"/>
                     </a:solidFill>
@@ -9168,7 +10118,7 @@
                       </a:r>
                     </a:p>
                   </a:txBody>
-                  <a:tcPr marL="171450" marR="142875" marT="104775" marB="104775" anchor="ctr">
+                  <a:tcPr marL="171450" marR="142875" marT="76200" marB="76200" anchor="ctr">
                     <a:solidFill>
                       <a:srgbClr val="FFFFFF"/>
                     </a:solidFill>
@@ -9194,7 +10144,7 @@
                       </a:r>
                     </a:p>
                   </a:txBody>
-                  <a:tcPr marL="171450" marR="142875" marT="104775" marB="104775" anchor="ctr">
+                  <a:tcPr marL="171450" marR="142875" marT="76200" marB="76200" anchor="ctr">
                     <a:solidFill>
                       <a:srgbClr val="FFFFFF"/>
                     </a:solidFill>
@@ -9220,7 +10170,7 @@
                       </a:r>
                     </a:p>
                   </a:txBody>
-                  <a:tcPr marL="171450" marR="142875" marT="104775" marB="104775" anchor="ctr">
+                  <a:tcPr marL="171450" marR="142875" marT="76200" marB="76200" anchor="ctr">
                     <a:solidFill>
                       <a:srgbClr val="FFFFFF"/>
                     </a:solidFill>
@@ -9246,7 +10196,7 @@
                       </a:r>
                     </a:p>
                   </a:txBody>
-                  <a:tcPr marL="171450" marR="142875" marT="104775" marB="104775" anchor="ctr">
+                  <a:tcPr marL="171450" marR="142875" marT="76200" marB="76200" anchor="ctr">
                     <a:solidFill>
                       <a:srgbClr val="FFFFFF"/>
                     </a:solidFill>
@@ -9272,14 +10222,14 @@
                       </a:r>
                     </a:p>
                   </a:txBody>
-                  <a:tcPr marL="171450" marR="142875" marT="104775" marB="104775" anchor="ctr">
+                  <a:tcPr marL="171450" marR="142875" marT="76200" marB="76200" anchor="ctr">
                     <a:solidFill>
                       <a:srgbClr val="FFFFFF"/>
                     </a:solidFill>
                   </a:tcPr>
                 </a:tc>
               </a:tr>
-              <a:tr h="655320">
+              <a:tr h="857250">
                 <a:tc>
                   <a:txBody>
                     <a:bodyPr>
@@ -9296,11 +10246,24 @@
                           <a:ea typeface="Arial"/>
                           <a:cs typeface="Arial"/>
                         </a:rPr>
-                        <a:t>Logistic</a:t>
+                        <a:t>All RNA</a:t>
+                      </a:r>
+                    </a:p>
+                    <a:p>
+                      <a:r>
+                        <a:rPr sz="1950" b="0">
+                          <a:solidFill>
+                            <a:srgbClr val="16343E"/>
+                          </a:solidFill>
+                          <a:latin typeface="Arial"/>
+                          <a:ea typeface="Arial"/>
+                          <a:cs typeface="Arial"/>
+                        </a:rPr>
+                        <a:t>(Logistic Regression)</a:t>
                       </a:r>
                     </a:p>
                   </a:txBody>
-                  <a:tcPr marL="171450" marR="142875" marT="104775" marB="104775" anchor="ctr">
+                  <a:tcPr marL="171450" marR="142875" marT="76200" marB="76200" anchor="ctr">
                     <a:solidFill>
                       <a:srgbClr val="EDF3F0"/>
                     </a:solidFill>
@@ -9326,7 +10289,7 @@
                       </a:r>
                     </a:p>
                   </a:txBody>
-                  <a:tcPr marL="171450" marR="142875" marT="104775" marB="104775" anchor="ctr">
+                  <a:tcPr marL="171450" marR="142875" marT="76200" marB="76200" anchor="ctr">
                     <a:solidFill>
                       <a:srgbClr val="EDF3F0"/>
                     </a:solidFill>
@@ -9352,7 +10315,7 @@
                       </a:r>
                     </a:p>
                   </a:txBody>
-                  <a:tcPr marL="171450" marR="142875" marT="104775" marB="104775" anchor="ctr">
+                  <a:tcPr marL="171450" marR="142875" marT="76200" marB="76200" anchor="ctr">
                     <a:solidFill>
                       <a:srgbClr val="EDF3F0"/>
                     </a:solidFill>
@@ -9378,7 +10341,7 @@
                       </a:r>
                     </a:p>
                   </a:txBody>
-                  <a:tcPr marL="171450" marR="142875" marT="104775" marB="104775" anchor="ctr">
+                  <a:tcPr marL="171450" marR="142875" marT="76200" marB="76200" anchor="ctr">
                     <a:solidFill>
                       <a:srgbClr val="EDF3F0"/>
                     </a:solidFill>
@@ -9404,7 +10367,7 @@
                       </a:r>
                     </a:p>
                   </a:txBody>
-                  <a:tcPr marL="171450" marR="142875" marT="104775" marB="104775" anchor="ctr">
+                  <a:tcPr marL="171450" marR="142875" marT="76200" marB="76200" anchor="ctr">
                     <a:solidFill>
                       <a:srgbClr val="EDF3F0"/>
                     </a:solidFill>
@@ -9430,14 +10393,14 @@
                       </a:r>
                     </a:p>
                   </a:txBody>
-                  <a:tcPr marL="171450" marR="142875" marT="104775" marB="104775" anchor="ctr">
+                  <a:tcPr marL="171450" marR="142875" marT="76200" marB="76200" anchor="ctr">
                     <a:solidFill>
                       <a:srgbClr val="EDF3F0"/>
                     </a:solidFill>
                   </a:tcPr>
                 </a:tc>
               </a:tr>
-              <a:tr h="655320">
+              <a:tr h="857250">
                 <a:tc>
                   <a:txBody>
                     <a:bodyPr>
@@ -9457,8 +10420,21 @@
                         <a:t>IFNG only</a:t>
                       </a:r>
                     </a:p>
+                    <a:p>
+                      <a:r>
+                        <a:rPr sz="1950" b="0">
+                          <a:solidFill>
+                            <a:srgbClr val="16343E"/>
+                          </a:solidFill>
+                          <a:latin typeface="Arial"/>
+                          <a:ea typeface="Arial"/>
+                          <a:cs typeface="Arial"/>
+                        </a:rPr>
+                        <a:t>(Logistic regression)</a:t>
+                      </a:r>
+                    </a:p>
                   </a:txBody>
-                  <a:tcPr marL="171450" marR="142875" marT="104775" marB="104775" anchor="ctr">
+                  <a:tcPr marL="171450" marR="142875" marT="76200" marB="76200" anchor="ctr">
                     <a:solidFill>
                       <a:srgbClr val="FFFFFF"/>
                     </a:solidFill>
@@ -9484,7 +10460,7 @@
                       </a:r>
                     </a:p>
                   </a:txBody>
-                  <a:tcPr marL="171450" marR="142875" marT="104775" marB="104775" anchor="ctr">
+                  <a:tcPr marL="171450" marR="142875" marT="76200" marB="76200" anchor="ctr">
                     <a:solidFill>
                       <a:srgbClr val="FFFFFF"/>
                     </a:solidFill>
@@ -9510,7 +10486,7 @@
                       </a:r>
                     </a:p>
                   </a:txBody>
-                  <a:tcPr marL="171450" marR="142875" marT="104775" marB="104775" anchor="ctr">
+                  <a:tcPr marL="171450" marR="142875" marT="76200" marB="76200" anchor="ctr">
                     <a:solidFill>
                       <a:srgbClr val="FFFFFF"/>
                     </a:solidFill>
@@ -9536,7 +10512,7 @@
                       </a:r>
                     </a:p>
                   </a:txBody>
-                  <a:tcPr marL="171450" marR="142875" marT="104775" marB="104775" anchor="ctr">
+                  <a:tcPr marL="171450" marR="142875" marT="76200" marB="76200" anchor="ctr">
                     <a:solidFill>
                       <a:srgbClr val="FFFFFF"/>
                     </a:solidFill>
@@ -9562,7 +10538,7 @@
                       </a:r>
                     </a:p>
                   </a:txBody>
-                  <a:tcPr marL="171450" marR="142875" marT="104775" marB="104775" anchor="ctr">
+                  <a:tcPr marL="171450" marR="142875" marT="76200" marB="76200" anchor="ctr">
                     <a:solidFill>
                       <a:srgbClr val="FFFFFF"/>
                     </a:solidFill>
@@ -9588,14 +10564,14 @@
                       </a:r>
                     </a:p>
                   </a:txBody>
-                  <a:tcPr marL="171450" marR="142875" marT="104775" marB="104775" anchor="ctr">
+                  <a:tcPr marL="171450" marR="142875" marT="76200" marB="76200" anchor="ctr">
                     <a:solidFill>
                       <a:srgbClr val="FFFFFF"/>
                     </a:solidFill>
                   </a:tcPr>
                 </a:tc>
               </a:tr>
-              <a:tr h="655320">
+              <a:tr h="552450">
                 <a:tc>
                   <a:txBody>
                     <a:bodyPr>
@@ -9616,7 +10592,7 @@
                       </a:r>
                     </a:p>
                   </a:txBody>
-                  <a:tcPr marL="171450" marR="142875" marT="104775" marB="104775" anchor="ctr">
+                  <a:tcPr marL="171450" marR="142875" marT="76200" marB="76200" anchor="ctr">
                     <a:solidFill>
                       <a:srgbClr val="EDF3F0"/>
                     </a:solidFill>
@@ -9642,7 +10618,7 @@
                       </a:r>
                     </a:p>
                   </a:txBody>
-                  <a:tcPr marL="171450" marR="142875" marT="104775" marB="104775" anchor="ctr">
+                  <a:tcPr marL="171450" marR="142875" marT="76200" marB="76200" anchor="ctr">
                     <a:solidFill>
                       <a:srgbClr val="EDF3F0"/>
                     </a:solidFill>
@@ -9668,7 +10644,7 @@
                       </a:r>
                     </a:p>
                   </a:txBody>
-                  <a:tcPr marL="171450" marR="142875" marT="104775" marB="104775" anchor="ctr">
+                  <a:tcPr marL="171450" marR="142875" marT="76200" marB="76200" anchor="ctr">
                     <a:solidFill>
                       <a:srgbClr val="EDF3F0"/>
                     </a:solidFill>
@@ -9694,7 +10670,7 @@
                       </a:r>
                     </a:p>
                   </a:txBody>
-                  <a:tcPr marL="171450" marR="142875" marT="104775" marB="104775" anchor="ctr">
+                  <a:tcPr marL="171450" marR="142875" marT="76200" marB="76200" anchor="ctr">
                     <a:solidFill>
                       <a:srgbClr val="EDF3F0"/>
                     </a:solidFill>
@@ -9720,7 +10696,7 @@
                       </a:r>
                     </a:p>
                   </a:txBody>
-                  <a:tcPr marL="171450" marR="142875" marT="104775" marB="104775" anchor="ctr">
+                  <a:tcPr marL="171450" marR="142875" marT="76200" marB="76200" anchor="ctr">
                     <a:solidFill>
                       <a:srgbClr val="EDF3F0"/>
                     </a:solidFill>
@@ -9746,7 +10722,7 @@
                       </a:r>
                     </a:p>
                   </a:txBody>
-                  <a:tcPr marL="171450" marR="142875" marT="104775" marB="104775" anchor="ctr">
+                  <a:tcPr marL="171450" marR="142875" marT="76200" marB="76200" anchor="ctr">
                     <a:solidFill>
                       <a:srgbClr val="EDF3F0"/>
                     </a:solidFill>
@@ -9762,19 +10738,19 @@
           <p:cNvPr id="5" name="">
             <a:extLst xmlns:a="http://schemas.openxmlformats.org/drawingml/2006/main">
               <a:ext uri="{FF2B5EF4-FFF2-40B4-BE49-F238E27FC236}">
-                <a16:creationId xmlns:a16="http://schemas.microsoft.com/office/drawing/2014/main" id="{78E08BEE-86D8-498D-B03D-5B177B73021F}"/>
-              </a:ext>
-            </a:extLst>
-          </p:cNvPr>
-          <p:cNvSpPr>
-            <a:spLocks xmlns:a="http://schemas.openxmlformats.org/drawingml/2006/main" noGrp="1"/>
-          </p:cNvSpPr>
-          <p:nvPr/>
-        </p:nvSpPr>
-        <p:spPr>
-          <a:xfrm xmlns:a="http://schemas.openxmlformats.org/drawingml/2006/main">
-            <a:off x="609600" y="5476875"/>
-            <a:ext cx="10972800" cy="628650"/>
+                <a16:creationId xmlns:a16="http://schemas.microsoft.com/office/drawing/2014/main" id="{DC7E0400-2B1B-4BA7-8933-B4ECC74F4D0A}"/>
+              </a:ext>
+            </a:extLst>
+          </p:cNvPr>
+          <p:cNvSpPr>
+            <a:spLocks xmlns:a="http://schemas.openxmlformats.org/drawingml/2006/main" noGrp="1"/>
+          </p:cNvSpPr>
+          <p:nvPr/>
+        </p:nvSpPr>
+        <p:spPr>
+          <a:xfrm xmlns:a="http://schemas.openxmlformats.org/drawingml/2006/main">
+            <a:off x="609600" y="5610225"/>
+            <a:ext cx="10972800" cy="476250"/>
           </a:xfrm>
           <a:prstGeom xmlns:a="http://schemas.openxmlformats.org/drawingml/2006/main" prst="rect">
             <a:avLst/>
@@ -9817,14 +10793,14 @@
     </p:spTree>
     <p:extLst>
       <p:ext uri="{BB962C8B-B14F-4D97-AF65-F5344CB8AC3E}">
-        <p14:creationId xmlns:p14="http://schemas.microsoft.com/office/powerpoint/2010/main" val="1002277887"/>
+        <p14:creationId xmlns:p14="http://schemas.microsoft.com/office/powerpoint/2010/main" val="2018317244"/>
       </p:ext>
     </p:extLst>
   </p:cSld>
 </p:sld>
 </file>
 
-<file path=ppt/slides/slide22.xml><?xml version="1.0" encoding="utf-8"?>
+<file path=ppt/slides/slide23.xml><?xml version="1.0" encoding="utf-8"?>
 <p:sld xmlns:p="http://schemas.openxmlformats.org/presentationml/2006/main">
   <p:cSld>
     <p:bg>
@@ -9848,7 +10824,7 @@
           <p:cNvPr id="6" name="">
             <a:extLst xmlns:a="http://schemas.openxmlformats.org/drawingml/2006/main">
               <a:ext uri="{FF2B5EF4-FFF2-40B4-BE49-F238E27FC236}">
-                <a16:creationId xmlns:a16="http://schemas.microsoft.com/office/drawing/2014/main" id="{6CE42A14-EC5A-44A4-9B06-A9F7D555A7BC}"/>
+                <a16:creationId xmlns:a16="http://schemas.microsoft.com/office/drawing/2014/main" id="{94CA99D4-B806-4884-8E2F-4AEB56133331}"/>
               </a:ext>
             </a:extLst>
           </p:cNvPr>
@@ -9905,7 +10881,7 @@
           <p:cNvPr id="2" name="">
             <a:extLst xmlns:a="http://schemas.openxmlformats.org/drawingml/2006/main">
               <a:ext uri="{FF2B5EF4-FFF2-40B4-BE49-F238E27FC236}">
-                <a16:creationId xmlns:a16="http://schemas.microsoft.com/office/drawing/2014/main" id="{92A78389-33DD-4083-88A7-B5FD500CFB10}"/>
+                <a16:creationId xmlns:a16="http://schemas.microsoft.com/office/drawing/2014/main" id="{E04FDE31-204C-4CB9-98F1-495FB4F491B1}"/>
               </a:ext>
             </a:extLst>
           </p:cNvPr>
@@ -9962,7 +10938,7 @@
           <p:cNvPr id="3" name="">
             <a:extLst xmlns:a="http://schemas.openxmlformats.org/drawingml/2006/main">
               <a:ext uri="{FF2B5EF4-FFF2-40B4-BE49-F238E27FC236}">
-                <a16:creationId xmlns:a16="http://schemas.microsoft.com/office/drawing/2014/main" id="{440BE242-CAFD-4641-B9A6-68C3697A5380}"/>
+                <a16:creationId xmlns:a16="http://schemas.microsoft.com/office/drawing/2014/main" id="{A0F575E8-28AC-47FA-805A-2FD9469231DF}"/>
               </a:ext>
             </a:extLst>
           </p:cNvPr>
@@ -10009,7 +10985,7 @@
                 <a:ea typeface="Arial"/>
                 <a:cs typeface="Arial"/>
               </a:rPr>
-              <a:t>22</a:t>
+              <a:t>23</a:t>
             </a:r>
           </a:p>
         </p:txBody>
@@ -10019,7 +10995,7 @@
           <p:cNvPr id="4" name="">
             <a:extLst xmlns:a="http://schemas.openxmlformats.org/drawingml/2006/main">
               <a:ext uri="{FF2B5EF4-FFF2-40B4-BE49-F238E27FC236}">
-                <a16:creationId xmlns:a16="http://schemas.microsoft.com/office/drawing/2014/main" id="{2645D3DD-7ED5-454A-87BA-EFE21C3F2550}"/>
+                <a16:creationId xmlns:a16="http://schemas.microsoft.com/office/drawing/2014/main" id="{46888CD7-0CA2-4AB4-AB92-8212291DD8B7}"/>
               </a:ext>
             </a:extLst>
           </p:cNvPr>
@@ -10307,510 +11283,7 @@
     </p:spTree>
     <p:extLst>
       <p:ext uri="{BB962C8B-B14F-4D97-AF65-F5344CB8AC3E}">
-        <p14:creationId xmlns:p14="http://schemas.microsoft.com/office/powerpoint/2010/main" val="799337456"/>
-      </p:ext>
-    </p:extLst>
-  </p:cSld>
-</p:sld>
-</file>
-
-<file path=ppt/slides/slide23.xml><?xml version="1.0" encoding="utf-8"?>
-<p:sld xmlns:p="http://schemas.openxmlformats.org/presentationml/2006/main">
-  <p:cSld>
-    <p:bg>
-      <p:bgPr>
-        <a:solidFill xmlns:a="http://schemas.openxmlformats.org/drawingml/2006/main">
-          <a:srgbClr val="F7F8F5"/>
-        </a:solidFill>
-      </p:bgPr>
-    </p:bg>
-    <p:spTree>
-      <p:nvGrpSpPr>
-        <p:cNvPr id="1" name=""/>
-        <p:cNvGrpSpPr/>
-        <p:nvPr/>
-      </p:nvGrpSpPr>
-      <p:grpSpPr>
-        <a:xfrm xmlns:a="http://schemas.openxmlformats.org/drawingml/2006/main"/>
-      </p:grpSpPr>
-      <p:sp>
-        <p:nvSpPr>
-          <p:cNvPr id="9" name="">
-            <a:extLst xmlns:a="http://schemas.openxmlformats.org/drawingml/2006/main">
-              <a:ext uri="{FF2B5EF4-FFF2-40B4-BE49-F238E27FC236}">
-                <a16:creationId xmlns:a16="http://schemas.microsoft.com/office/drawing/2014/main" id="{BCBFCA71-8016-4738-B724-91A8D2AF7348}"/>
-              </a:ext>
-            </a:extLst>
-          </p:cNvPr>
-          <p:cNvSpPr>
-            <a:spLocks xmlns:a="http://schemas.openxmlformats.org/drawingml/2006/main" noGrp="1"/>
-          </p:cNvSpPr>
-          <p:nvPr/>
-        </p:nvSpPr>
-        <p:spPr>
-          <a:xfrm xmlns:a="http://schemas.openxmlformats.org/drawingml/2006/main">
-            <a:off x="609600" y="409575"/>
-            <a:ext cx="10972800" cy="1000125"/>
-          </a:xfrm>
-          <a:prstGeom xmlns:a="http://schemas.openxmlformats.org/drawingml/2006/main" prst="rect">
-            <a:avLst/>
-          </a:prstGeom>
-          <a:noFill xmlns:a="http://schemas.openxmlformats.org/drawingml/2006/main"/>
-          <a:ln xmlns:a="http://schemas.openxmlformats.org/drawingml/2006/main" w="0">
-            <a:noFill/>
-          </a:ln>
-        </p:spPr>
-        <p:txBody>
-          <a:bodyPr xmlns:a="http://schemas.openxmlformats.org/drawingml/2006/main" anchor="ctr">
-            <a:noAutofit/>
-          </a:bodyPr>
-          <a:lstStyle xmlns:a="http://schemas.openxmlformats.org/drawingml/2006/main"/>
-          <a:p xmlns:a="http://schemas.openxmlformats.org/drawingml/2006/main">
-            <a:pPr algn="l">
-              <a:defRPr sz="3450" b="1">
-                <a:solidFill>
-                  <a:srgbClr val="16343E"/>
-                </a:solidFill>
-                <a:latin typeface="Arial"/>
-                <a:ea typeface="Arial"/>
-                <a:cs typeface="Arial"/>
-              </a:defRPr>
-            </a:pPr>
-            <a:r>
-              <a:rPr sz="3450" b="1">
-                <a:solidFill>
-                  <a:srgbClr val="16343E"/>
-                </a:solidFill>
-                <a:latin typeface="Arial"/>
-                <a:ea typeface="Arial"/>
-                <a:cs typeface="Arial"/>
-              </a:rPr>
-              <a:t>Backup: interpreting model scores</a:t>
-            </a:r>
-          </a:p>
-        </p:txBody>
-      </p:sp>
-      <p:sp>
-        <p:nvSpPr>
-          <p:cNvPr id="2" name="">
-            <a:extLst xmlns:a="http://schemas.openxmlformats.org/drawingml/2006/main">
-              <a:ext uri="{FF2B5EF4-FFF2-40B4-BE49-F238E27FC236}">
-                <a16:creationId xmlns:a16="http://schemas.microsoft.com/office/drawing/2014/main" id="{E22DD19E-21C9-4C25-A5C2-636E89F3371D}"/>
-              </a:ext>
-            </a:extLst>
-          </p:cNvPr>
-          <p:cNvSpPr>
-            <a:spLocks xmlns:a="http://schemas.openxmlformats.org/drawingml/2006/main" noGrp="1"/>
-          </p:cNvSpPr>
-          <p:nvPr/>
-        </p:nvSpPr>
-        <p:spPr>
-          <a:xfrm xmlns:a="http://schemas.openxmlformats.org/drawingml/2006/main">
-            <a:off x="609600" y="6257925"/>
-            <a:ext cx="10382250" cy="361950"/>
-          </a:xfrm>
-          <a:prstGeom xmlns:a="http://schemas.openxmlformats.org/drawingml/2006/main" prst="rect">
-            <a:avLst/>
-          </a:prstGeom>
-          <a:noFill xmlns:a="http://schemas.openxmlformats.org/drawingml/2006/main"/>
-          <a:ln xmlns:a="http://schemas.openxmlformats.org/drawingml/2006/main" w="0">
-            <a:noFill/>
-          </a:ln>
-        </p:spPr>
-        <p:txBody>
-          <a:bodyPr xmlns:a="http://schemas.openxmlformats.org/drawingml/2006/main" anchor="ctr">
-            <a:noAutofit/>
-          </a:bodyPr>
-          <a:lstStyle xmlns:a="http://schemas.openxmlformats.org/drawingml/2006/main"/>
-          <a:p xmlns:a="http://schemas.openxmlformats.org/drawingml/2006/main">
-            <a:pPr algn="l">
-              <a:defRPr sz="1350" b="0">
-                <a:solidFill>
-                  <a:srgbClr val="52656B"/>
-                </a:solidFill>
-                <a:latin typeface="Arial"/>
-                <a:ea typeface="Arial"/>
-                <a:cs typeface="Arial"/>
-              </a:defRPr>
-            </a:pPr>
-            <a:r>
-              <a:rPr sz="1350" b="0">
-                <a:solidFill>
-                  <a:srgbClr val="52656B"/>
-                </a:solidFill>
-                <a:latin typeface="Arial"/>
-                <a:ea typeface="Arial"/>
-                <a:cs typeface="Arial"/>
-              </a:rPr>
-              <a:t>Source: reliability_bins.csv. The highlighted bin has a Wilson 95% interval. No recalibration fitted.</a:t>
-            </a:r>
-          </a:p>
-        </p:txBody>
-      </p:sp>
-      <p:sp>
-        <p:nvSpPr>
-          <p:cNvPr id="3" name="">
-            <a:extLst xmlns:a="http://schemas.openxmlformats.org/drawingml/2006/main">
-              <a:ext uri="{FF2B5EF4-FFF2-40B4-BE49-F238E27FC236}">
-                <a16:creationId xmlns:a16="http://schemas.microsoft.com/office/drawing/2014/main" id="{098BB7B2-1F1F-4030-8437-13ED6A3C58BF}"/>
-              </a:ext>
-            </a:extLst>
-          </p:cNvPr>
-          <p:cNvSpPr>
-            <a:spLocks xmlns:a="http://schemas.openxmlformats.org/drawingml/2006/main" noGrp="1"/>
-          </p:cNvSpPr>
-          <p:nvPr/>
-        </p:nvSpPr>
-        <p:spPr>
-          <a:xfrm xmlns:a="http://schemas.openxmlformats.org/drawingml/2006/main">
-            <a:off x="11115675" y="6305550"/>
-            <a:ext cx="457200" cy="285750"/>
-          </a:xfrm>
-          <a:prstGeom xmlns:a="http://schemas.openxmlformats.org/drawingml/2006/main" prst="rect">
-            <a:avLst/>
-          </a:prstGeom>
-          <a:noFill xmlns:a="http://schemas.openxmlformats.org/drawingml/2006/main"/>
-          <a:ln xmlns:a="http://schemas.openxmlformats.org/drawingml/2006/main" w="0">
-            <a:noFill/>
-          </a:ln>
-        </p:spPr>
-        <p:txBody>
-          <a:bodyPr xmlns:a="http://schemas.openxmlformats.org/drawingml/2006/main" anchor="ctr">
-            <a:noAutofit/>
-          </a:bodyPr>
-          <a:lstStyle xmlns:a="http://schemas.openxmlformats.org/drawingml/2006/main"/>
-          <a:p xmlns:a="http://schemas.openxmlformats.org/drawingml/2006/main">
-            <a:pPr algn="r">
-              <a:defRPr sz="1350" b="0">
-                <a:solidFill>
-                  <a:srgbClr val="52656B"/>
-                </a:solidFill>
-                <a:latin typeface="Arial"/>
-                <a:ea typeface="Arial"/>
-                <a:cs typeface="Arial"/>
-              </a:defRPr>
-            </a:pPr>
-            <a:r>
-              <a:rPr sz="1350" b="0">
-                <a:solidFill>
-                  <a:srgbClr val="52656B"/>
-                </a:solidFill>
-                <a:latin typeface="Arial"/>
-                <a:ea typeface="Arial"/>
-                <a:cs typeface="Arial"/>
-              </a:rPr>
-              <a:t>23</a:t>
-            </a:r>
-          </a:p>
-        </p:txBody>
-      </p:sp>
-      <p:sp>
-        <p:nvSpPr>
-          <p:cNvPr id="4" name="">
-            <a:extLst xmlns:a="http://schemas.openxmlformats.org/drawingml/2006/main">
-              <a:ext uri="{FF2B5EF4-FFF2-40B4-BE49-F238E27FC236}">
-                <a16:creationId xmlns:a16="http://schemas.microsoft.com/office/drawing/2014/main" id="{175E1CC5-CD93-4145-95A6-610E28C0CAAA}"/>
-              </a:ext>
-            </a:extLst>
-          </p:cNvPr>
-          <p:cNvSpPr>
-            <a:spLocks xmlns:a="http://schemas.openxmlformats.org/drawingml/2006/main" noGrp="1"/>
-          </p:cNvSpPr>
-          <p:nvPr/>
-        </p:nvSpPr>
-        <p:spPr>
-          <a:xfrm xmlns:a="http://schemas.openxmlformats.org/drawingml/2006/main">
-            <a:off x="609600" y="1447800"/>
-            <a:ext cx="10972800" cy="390525"/>
-          </a:xfrm>
-          <a:prstGeom xmlns:a="http://schemas.openxmlformats.org/drawingml/2006/main" prst="rect">
-            <a:avLst/>
-          </a:prstGeom>
-          <a:noFill xmlns:a="http://schemas.openxmlformats.org/drawingml/2006/main"/>
-          <a:ln xmlns:a="http://schemas.openxmlformats.org/drawingml/2006/main" w="0">
-            <a:noFill/>
-          </a:ln>
-        </p:spPr>
-        <p:txBody>
-          <a:bodyPr xmlns:a="http://schemas.openxmlformats.org/drawingml/2006/main" anchor="ctr">
-            <a:noAutofit/>
-          </a:bodyPr>
-          <a:lstStyle xmlns:a="http://schemas.openxmlformats.org/drawingml/2006/main"/>
-          <a:p xmlns:a="http://schemas.openxmlformats.org/drawingml/2006/main">
-            <a:pPr algn="l">
-              <a:defRPr sz="2250" b="1">
-                <a:solidFill>
-                  <a:srgbClr val="16343E"/>
-                </a:solidFill>
-                <a:latin typeface="Arial"/>
-                <a:ea typeface="Arial"/>
-                <a:cs typeface="Arial"/>
-              </a:defRPr>
-            </a:pPr>
-            <a:r>
-              <a:rPr sz="2250" b="1">
-                <a:solidFill>
-                  <a:srgbClr val="16343E"/>
-                </a:solidFill>
-                <a:latin typeface="Arial"/>
-                <a:ea typeface="Arial"/>
-                <a:cs typeface="Arial"/>
-              </a:rPr>
-              <a:t>CatBoost on 345 validation specimens</a:t>
-            </a:r>
-          </a:p>
-        </p:txBody>
-      </p:sp>
-      <p:graphicFrame>
-        <p:nvGraphicFramePr>
-          <p:cNvPr id="13" name="Chart"/>
-          <p:cNvGraphicFramePr/>
-          <p:nvPr/>
-        </p:nvGraphicFramePr>
-        <p:xfrm>
-          <a:off xmlns:a="http://schemas.openxmlformats.org/drawingml/2006/main" x="561975" y="2047875"/>
-          <a:ext xmlns:a="http://schemas.openxmlformats.org/drawingml/2006/main" cx="6915150" cy="3743325"/>
-        </p:xfrm>
-        <a:graphic xmlns:a="http://schemas.openxmlformats.org/drawingml/2006/main">
-          <a:graphicData uri="http://schemas.openxmlformats.org/drawingml/2006/chart">
-            <c:chart xmlns:r="http://schemas.openxmlformats.org/officeDocument/2006/relationships" xmlns:c="http://schemas.openxmlformats.org/drawingml/2006/chart" r:id="R089f47c496794191"/>
-          </a:graphicData>
-        </a:graphic>
-      </p:graphicFrame>
-      <p:sp>
-        <p:nvSpPr>
-          <p:cNvPr id="6" name="">
-            <a:extLst xmlns:a="http://schemas.openxmlformats.org/drawingml/2006/main">
-              <a:ext uri="{FF2B5EF4-FFF2-40B4-BE49-F238E27FC236}">
-                <a16:creationId xmlns:a16="http://schemas.microsoft.com/office/drawing/2014/main" id="{B61CCE58-2154-4204-A3BA-594E6B4BC417}"/>
-              </a:ext>
-            </a:extLst>
-          </p:cNvPr>
-          <p:cNvSpPr>
-            <a:spLocks xmlns:a="http://schemas.openxmlformats.org/drawingml/2006/main" noGrp="1"/>
-          </p:cNvSpPr>
-          <p:nvPr/>
-        </p:nvSpPr>
-        <p:spPr>
-          <a:xfrm xmlns:a="http://schemas.openxmlformats.org/drawingml/2006/main">
-            <a:off x="7972425" y="2152650"/>
-            <a:ext cx="3609975" cy="476250"/>
-          </a:xfrm>
-          <a:prstGeom xmlns:a="http://schemas.openxmlformats.org/drawingml/2006/main" prst="rect">
-            <a:avLst/>
-          </a:prstGeom>
-          <a:noFill xmlns:a="http://schemas.openxmlformats.org/drawingml/2006/main"/>
-          <a:ln xmlns:a="http://schemas.openxmlformats.org/drawingml/2006/main" w="0">
-            <a:noFill/>
-          </a:ln>
-        </p:spPr>
-        <p:txBody>
-          <a:bodyPr xmlns:a="http://schemas.openxmlformats.org/drawingml/2006/main" anchor="ctr">
-            <a:noAutofit/>
-          </a:bodyPr>
-          <a:lstStyle xmlns:a="http://schemas.openxmlformats.org/drawingml/2006/main"/>
-          <a:p xmlns:a="http://schemas.openxmlformats.org/drawingml/2006/main">
-            <a:pPr algn="l">
-              <a:defRPr sz="2325" b="1">
-                <a:solidFill>
-                  <a:srgbClr val="16343E"/>
-                </a:solidFill>
-                <a:latin typeface="Arial"/>
-                <a:ea typeface="Arial"/>
-                <a:cs typeface="Arial"/>
-              </a:defRPr>
-            </a:pPr>
-            <a:r>
-              <a:rPr sz="2325" b="1">
-                <a:solidFill>
-                  <a:srgbClr val="16343E"/>
-                </a:solidFill>
-                <a:latin typeface="Arial"/>
-                <a:ea typeface="Arial"/>
-                <a:cs typeface="Arial"/>
-              </a:rPr>
-              <a:t>Score bin 0.8–0.9</a:t>
-            </a:r>
-          </a:p>
-        </p:txBody>
-      </p:sp>
-      <p:sp>
-        <p:nvSpPr>
-          <p:cNvPr id="7" name="">
-            <a:extLst xmlns:a="http://schemas.openxmlformats.org/drawingml/2006/main">
-              <a:ext uri="{FF2B5EF4-FFF2-40B4-BE49-F238E27FC236}">
-                <a16:creationId xmlns:a16="http://schemas.microsoft.com/office/drawing/2014/main" id="{0B74DB84-DB7A-484D-B67F-F7EB030DE958}"/>
-              </a:ext>
-            </a:extLst>
-          </p:cNvPr>
-          <p:cNvSpPr>
-            <a:spLocks xmlns:a="http://schemas.openxmlformats.org/drawingml/2006/main" noGrp="1"/>
-          </p:cNvSpPr>
-          <p:nvPr/>
-        </p:nvSpPr>
-        <p:spPr>
-          <a:xfrm xmlns:a="http://schemas.openxmlformats.org/drawingml/2006/main">
-            <a:off x="7972425" y="2886075"/>
-            <a:ext cx="3609975" cy="2571750"/>
-          </a:xfrm>
-          <a:prstGeom xmlns:a="http://schemas.openxmlformats.org/drawingml/2006/main" prst="rect">
-            <a:avLst/>
-          </a:prstGeom>
-          <a:noFill xmlns:a="http://schemas.openxmlformats.org/drawingml/2006/main"/>
-          <a:ln xmlns:a="http://schemas.openxmlformats.org/drawingml/2006/main" w="0">
-            <a:noFill/>
-          </a:ln>
-        </p:spPr>
-        <p:txBody>
-          <a:bodyPr xmlns:a="http://schemas.openxmlformats.org/drawingml/2006/main" anchor="t">
-            <a:noAutofit/>
-          </a:bodyPr>
-          <a:lstStyle xmlns:a="http://schemas.openxmlformats.org/drawingml/2006/main"/>
-          <a:p xmlns:a="http://schemas.openxmlformats.org/drawingml/2006/main">
-            <a:pPr marL="279400" indent="-152400" algn="l">
-              <a:spcAft>
-                <a:spcPts val="2000"/>
-              </a:spcAft>
-              <a:buChar char="•"/>
-              <a:defRPr sz="2100" b="0">
-                <a:solidFill>
-                  <a:srgbClr val="16343E"/>
-                </a:solidFill>
-                <a:latin typeface="Arial"/>
-                <a:ea typeface="Arial"/>
-                <a:cs typeface="Arial"/>
-              </a:defRPr>
-            </a:pPr>
-            <a:r>
-              <a:rPr sz="2100" b="0">
-                <a:solidFill>
-                  <a:srgbClr val="16343E"/>
-                </a:solidFill>
-                <a:latin typeface="Arial"/>
-                <a:ea typeface="Arial"/>
-                <a:cs typeface="Arial"/>
-              </a:rPr>
-              <a:t>Mean score: 0.847</a:t>
-            </a:r>
-          </a:p>
-          <a:p xmlns:a="http://schemas.openxmlformats.org/drawingml/2006/main">
-            <a:pPr marL="279400" indent="-152400" algn="l">
-              <a:spcAft>
-                <a:spcPts val="2000"/>
-              </a:spcAft>
-              <a:buChar char="•"/>
-              <a:defRPr sz="2100" b="0">
-                <a:solidFill>
-                  <a:srgbClr val="16343E"/>
-                </a:solidFill>
-                <a:latin typeface="Arial"/>
-                <a:ea typeface="Arial"/>
-                <a:cs typeface="Arial"/>
-              </a:defRPr>
-            </a:pPr>
-            <a:r>
-              <a:rPr sz="2100" b="0">
-                <a:solidFill>
-                  <a:srgbClr val="16343E"/>
-                </a:solidFill>
-                <a:latin typeface="Arial"/>
-                <a:ea typeface="Arial"/>
-                <a:cs typeface="Arial"/>
-              </a:rPr>
-              <a:t>Recorded rejection: 7 / 16</a:t>
-            </a:r>
-          </a:p>
-          <a:p xmlns:a="http://schemas.openxmlformats.org/drawingml/2006/main">
-            <a:pPr marL="279400" indent="-152400" algn="l">
-              <a:spcAft>
-                <a:spcPts val="2000"/>
-              </a:spcAft>
-              <a:buChar char="•"/>
-              <a:defRPr sz="2100" b="0">
-                <a:solidFill>
-                  <a:srgbClr val="16343E"/>
-                </a:solidFill>
-                <a:latin typeface="Arial"/>
-                <a:ea typeface="Arial"/>
-                <a:cs typeface="Arial"/>
-              </a:defRPr>
-            </a:pPr>
-            <a:r>
-              <a:rPr sz="2100" b="0">
-                <a:solidFill>
-                  <a:srgbClr val="16343E"/>
-                </a:solidFill>
-                <a:latin typeface="Arial"/>
-                <a:ea typeface="Arial"/>
-                <a:cs typeface="Arial"/>
-              </a:rPr>
-              <a:t>Observed fraction: 43.8%
-95% interval: 23.1–66.8%</a:t>
-            </a:r>
-          </a:p>
-        </p:txBody>
-      </p:sp>
-      <p:sp>
-        <p:nvSpPr>
-          <p:cNvPr id="8" name="">
-            <a:extLst xmlns:a="http://schemas.openxmlformats.org/drawingml/2006/main">
-              <a:ext uri="{FF2B5EF4-FFF2-40B4-BE49-F238E27FC236}">
-                <a16:creationId xmlns:a16="http://schemas.microsoft.com/office/drawing/2014/main" id="{4914430D-A34F-4828-B049-32E90106BF6C}"/>
-              </a:ext>
-            </a:extLst>
-          </p:cNvPr>
-          <p:cNvSpPr>
-            <a:spLocks xmlns:a="http://schemas.openxmlformats.org/drawingml/2006/main" noGrp="1"/>
-          </p:cNvSpPr>
-          <p:nvPr/>
-        </p:nvSpPr>
-        <p:spPr>
-          <a:xfrm xmlns:a="http://schemas.openxmlformats.org/drawingml/2006/main">
-            <a:off x="895350" y="5895975"/>
-            <a:ext cx="10687050" cy="295275"/>
-          </a:xfrm>
-          <a:prstGeom xmlns:a="http://schemas.openxmlformats.org/drawingml/2006/main" prst="rect">
-            <a:avLst/>
-          </a:prstGeom>
-          <a:noFill xmlns:a="http://schemas.openxmlformats.org/drawingml/2006/main"/>
-          <a:ln xmlns:a="http://schemas.openxmlformats.org/drawingml/2006/main" w="0">
-            <a:noFill/>
-          </a:ln>
-        </p:spPr>
-        <p:txBody>
-          <a:bodyPr xmlns:a="http://schemas.openxmlformats.org/drawingml/2006/main" anchor="ctr">
-            <a:noAutofit/>
-          </a:bodyPr>
-          <a:lstStyle xmlns:a="http://schemas.openxmlformats.org/drawingml/2006/main"/>
-          <a:p xmlns:a="http://schemas.openxmlformats.org/drawingml/2006/main">
-            <a:pPr algn="l">
-              <a:defRPr sz="1800" b="0">
-                <a:solidFill>
-                  <a:srgbClr val="16343E"/>
-                </a:solidFill>
-                <a:latin typeface="Arial"/>
-                <a:ea typeface="Arial"/>
-                <a:cs typeface="Arial"/>
-              </a:defRPr>
-            </a:pPr>
-            <a:r>
-              <a:rPr sz="1800" b="0">
-                <a:solidFill>
-                  <a:srgbClr val="16343E"/>
-                </a:solidFill>
-                <a:latin typeface="Arial"/>
-                <a:ea typeface="Arial"/>
-                <a:cs typeface="Arial"/>
-              </a:rPr>
-              <a:t>Diagonal: score equals observed rejection fraction</a:t>
-            </a:r>
-          </a:p>
-        </p:txBody>
-      </p:sp>
-    </p:spTree>
-    <p:extLst>
-      <p:ext uri="{BB962C8B-B14F-4D97-AF65-F5344CB8AC3E}">
-        <p14:creationId xmlns:p14="http://schemas.microsoft.com/office/powerpoint/2010/main" val="1944329423"/>
+        <p14:creationId xmlns:p14="http://schemas.microsoft.com/office/powerpoint/2010/main" val="2063255045"/>
       </p:ext>
     </p:extLst>
   </p:cSld>
@@ -10838,10 +11311,10 @@
       </p:grpSpPr>
       <p:sp>
         <p:nvSpPr>
-          <p:cNvPr id="6" name="">
-            <a:extLst xmlns:a="http://schemas.openxmlformats.org/drawingml/2006/main">
-              <a:ext uri="{FF2B5EF4-FFF2-40B4-BE49-F238E27FC236}">
-                <a16:creationId xmlns:a16="http://schemas.microsoft.com/office/drawing/2014/main" id="{132B83BB-4939-4147-813F-C4C529BE9DFF}"/>
+          <p:cNvPr id="9" name="">
+            <a:extLst xmlns:a="http://schemas.openxmlformats.org/drawingml/2006/main">
+              <a:ext uri="{FF2B5EF4-FFF2-40B4-BE49-F238E27FC236}">
+                <a16:creationId xmlns:a16="http://schemas.microsoft.com/office/drawing/2014/main" id="{8A32D8E0-FF44-4BE2-9CFB-986A8B0D238F}"/>
               </a:ext>
             </a:extLst>
           </p:cNvPr>
@@ -10888,7 +11361,7 @@
                 <a:ea typeface="Arial"/>
                 <a:cs typeface="Arial"/>
               </a:rPr>
-              <a:t>Backup: rejection subtype follow-up</a:t>
+              <a:t>Backup: interpreting model scores</a:t>
             </a:r>
           </a:p>
         </p:txBody>
@@ -10898,7 +11371,7 @@
           <p:cNvPr id="2" name="">
             <a:extLst xmlns:a="http://schemas.openxmlformats.org/drawingml/2006/main">
               <a:ext uri="{FF2B5EF4-FFF2-40B4-BE49-F238E27FC236}">
-                <a16:creationId xmlns:a16="http://schemas.microsoft.com/office/drawing/2014/main" id="{F271FB5A-84AA-42BD-93C4-143D4C0908F6}"/>
+                <a16:creationId xmlns:a16="http://schemas.microsoft.com/office/drawing/2014/main" id="{4EB33213-B83B-4721-96ED-76442E42DD98}"/>
               </a:ext>
             </a:extLst>
           </p:cNvPr>
@@ -10945,7 +11418,7 @@
                 <a:ea typeface="Arial"/>
                 <a:cs typeface="Arial"/>
               </a:rPr>
-              <a:t>Source: subtype follow-up, 15 Sep 2026. Reuses the examined validation cohort; needs independent confirmation.</a:t>
+              <a:t>Source: reliability_bins.csv. The highlighted bin has a Wilson 95% interval. No recalibration fitted.</a:t>
             </a:r>
           </a:p>
         </p:txBody>
@@ -10955,7 +11428,7 @@
           <p:cNvPr id="3" name="">
             <a:extLst xmlns:a="http://schemas.openxmlformats.org/drawingml/2006/main">
               <a:ext uri="{FF2B5EF4-FFF2-40B4-BE49-F238E27FC236}">
-                <a16:creationId xmlns:a16="http://schemas.microsoft.com/office/drawing/2014/main" id="{CA2C940B-83AE-4718-A3A8-98676C63154D}"/>
+                <a16:creationId xmlns:a16="http://schemas.microsoft.com/office/drawing/2014/main" id="{9C0ACBFF-05B7-4B3D-940E-B6FD3159A4E4}"/>
               </a:ext>
             </a:extLst>
           </p:cNvPr>
@@ -11003,6 +11476,509 @@
                 <a:cs typeface="Arial"/>
               </a:rPr>
               <a:t>24</a:t>
+            </a:r>
+          </a:p>
+        </p:txBody>
+      </p:sp>
+      <p:sp>
+        <p:nvSpPr>
+          <p:cNvPr id="4" name="">
+            <a:extLst xmlns:a="http://schemas.openxmlformats.org/drawingml/2006/main">
+              <a:ext uri="{FF2B5EF4-FFF2-40B4-BE49-F238E27FC236}">
+                <a16:creationId xmlns:a16="http://schemas.microsoft.com/office/drawing/2014/main" id="{121AF52B-247E-4943-8B8E-540AADEA40D2}"/>
+              </a:ext>
+            </a:extLst>
+          </p:cNvPr>
+          <p:cNvSpPr>
+            <a:spLocks xmlns:a="http://schemas.openxmlformats.org/drawingml/2006/main" noGrp="1"/>
+          </p:cNvSpPr>
+          <p:nvPr/>
+        </p:nvSpPr>
+        <p:spPr>
+          <a:xfrm xmlns:a="http://schemas.openxmlformats.org/drawingml/2006/main">
+            <a:off x="609600" y="1447800"/>
+            <a:ext cx="10972800" cy="390525"/>
+          </a:xfrm>
+          <a:prstGeom xmlns:a="http://schemas.openxmlformats.org/drawingml/2006/main" prst="rect">
+            <a:avLst/>
+          </a:prstGeom>
+          <a:noFill xmlns:a="http://schemas.openxmlformats.org/drawingml/2006/main"/>
+          <a:ln xmlns:a="http://schemas.openxmlformats.org/drawingml/2006/main" w="0">
+            <a:noFill/>
+          </a:ln>
+        </p:spPr>
+        <p:txBody>
+          <a:bodyPr xmlns:a="http://schemas.openxmlformats.org/drawingml/2006/main" anchor="ctr">
+            <a:noAutofit/>
+          </a:bodyPr>
+          <a:lstStyle xmlns:a="http://schemas.openxmlformats.org/drawingml/2006/main"/>
+          <a:p xmlns:a="http://schemas.openxmlformats.org/drawingml/2006/main">
+            <a:pPr algn="l">
+              <a:defRPr sz="2250" b="1">
+                <a:solidFill>
+                  <a:srgbClr val="16343E"/>
+                </a:solidFill>
+                <a:latin typeface="Arial"/>
+                <a:ea typeface="Arial"/>
+                <a:cs typeface="Arial"/>
+              </a:defRPr>
+            </a:pPr>
+            <a:r>
+              <a:rPr sz="2250" b="1">
+                <a:solidFill>
+                  <a:srgbClr val="16343E"/>
+                </a:solidFill>
+                <a:latin typeface="Arial"/>
+                <a:ea typeface="Arial"/>
+                <a:cs typeface="Arial"/>
+              </a:rPr>
+              <a:t>CatBoost on 345 validation specimens</a:t>
+            </a:r>
+          </a:p>
+        </p:txBody>
+      </p:sp>
+      <p:graphicFrame>
+        <p:nvGraphicFramePr>
+          <p:cNvPr id="13" name="Chart"/>
+          <p:cNvGraphicFramePr/>
+          <p:nvPr/>
+        </p:nvGraphicFramePr>
+        <p:xfrm>
+          <a:off xmlns:a="http://schemas.openxmlformats.org/drawingml/2006/main" x="561975" y="2047875"/>
+          <a:ext xmlns:a="http://schemas.openxmlformats.org/drawingml/2006/main" cx="6915150" cy="3743325"/>
+        </p:xfrm>
+        <a:graphic xmlns:a="http://schemas.openxmlformats.org/drawingml/2006/main">
+          <a:graphicData uri="http://schemas.openxmlformats.org/drawingml/2006/chart">
+            <c:chart xmlns:r="http://schemas.openxmlformats.org/officeDocument/2006/relationships" xmlns:c="http://schemas.openxmlformats.org/drawingml/2006/chart" r:id="Rdb5be6f53d784fec"/>
+          </a:graphicData>
+        </a:graphic>
+      </p:graphicFrame>
+      <p:sp>
+        <p:nvSpPr>
+          <p:cNvPr id="6" name="">
+            <a:extLst xmlns:a="http://schemas.openxmlformats.org/drawingml/2006/main">
+              <a:ext uri="{FF2B5EF4-FFF2-40B4-BE49-F238E27FC236}">
+                <a16:creationId xmlns:a16="http://schemas.microsoft.com/office/drawing/2014/main" id="{2622B0D4-E884-4620-B1B0-921155D8EF9D}"/>
+              </a:ext>
+            </a:extLst>
+          </p:cNvPr>
+          <p:cNvSpPr>
+            <a:spLocks xmlns:a="http://schemas.openxmlformats.org/drawingml/2006/main" noGrp="1"/>
+          </p:cNvSpPr>
+          <p:nvPr/>
+        </p:nvSpPr>
+        <p:spPr>
+          <a:xfrm xmlns:a="http://schemas.openxmlformats.org/drawingml/2006/main">
+            <a:off x="7972425" y="2152650"/>
+            <a:ext cx="3609975" cy="476250"/>
+          </a:xfrm>
+          <a:prstGeom xmlns:a="http://schemas.openxmlformats.org/drawingml/2006/main" prst="rect">
+            <a:avLst/>
+          </a:prstGeom>
+          <a:noFill xmlns:a="http://schemas.openxmlformats.org/drawingml/2006/main"/>
+          <a:ln xmlns:a="http://schemas.openxmlformats.org/drawingml/2006/main" w="0">
+            <a:noFill/>
+          </a:ln>
+        </p:spPr>
+        <p:txBody>
+          <a:bodyPr xmlns:a="http://schemas.openxmlformats.org/drawingml/2006/main" anchor="ctr">
+            <a:noAutofit/>
+          </a:bodyPr>
+          <a:lstStyle xmlns:a="http://schemas.openxmlformats.org/drawingml/2006/main"/>
+          <a:p xmlns:a="http://schemas.openxmlformats.org/drawingml/2006/main">
+            <a:pPr algn="l">
+              <a:defRPr sz="2325" b="1">
+                <a:solidFill>
+                  <a:srgbClr val="16343E"/>
+                </a:solidFill>
+                <a:latin typeface="Arial"/>
+                <a:ea typeface="Arial"/>
+                <a:cs typeface="Arial"/>
+              </a:defRPr>
+            </a:pPr>
+            <a:r>
+              <a:rPr sz="2325" b="1">
+                <a:solidFill>
+                  <a:srgbClr val="16343E"/>
+                </a:solidFill>
+                <a:latin typeface="Arial"/>
+                <a:ea typeface="Arial"/>
+                <a:cs typeface="Arial"/>
+              </a:rPr>
+              <a:t>Score bin 0.8–0.9</a:t>
+            </a:r>
+          </a:p>
+        </p:txBody>
+      </p:sp>
+      <p:sp>
+        <p:nvSpPr>
+          <p:cNvPr id="7" name="">
+            <a:extLst xmlns:a="http://schemas.openxmlformats.org/drawingml/2006/main">
+              <a:ext uri="{FF2B5EF4-FFF2-40B4-BE49-F238E27FC236}">
+                <a16:creationId xmlns:a16="http://schemas.microsoft.com/office/drawing/2014/main" id="{CC790DE9-2EAD-454D-ABE5-2D1A29391439}"/>
+              </a:ext>
+            </a:extLst>
+          </p:cNvPr>
+          <p:cNvSpPr>
+            <a:spLocks xmlns:a="http://schemas.openxmlformats.org/drawingml/2006/main" noGrp="1"/>
+          </p:cNvSpPr>
+          <p:nvPr/>
+        </p:nvSpPr>
+        <p:spPr>
+          <a:xfrm xmlns:a="http://schemas.openxmlformats.org/drawingml/2006/main">
+            <a:off x="7972425" y="2886075"/>
+            <a:ext cx="3609975" cy="2571750"/>
+          </a:xfrm>
+          <a:prstGeom xmlns:a="http://schemas.openxmlformats.org/drawingml/2006/main" prst="rect">
+            <a:avLst/>
+          </a:prstGeom>
+          <a:noFill xmlns:a="http://schemas.openxmlformats.org/drawingml/2006/main"/>
+          <a:ln xmlns:a="http://schemas.openxmlformats.org/drawingml/2006/main" w="0">
+            <a:noFill/>
+          </a:ln>
+        </p:spPr>
+        <p:txBody>
+          <a:bodyPr xmlns:a="http://schemas.openxmlformats.org/drawingml/2006/main" anchor="t">
+            <a:noAutofit/>
+          </a:bodyPr>
+          <a:lstStyle xmlns:a="http://schemas.openxmlformats.org/drawingml/2006/main"/>
+          <a:p xmlns:a="http://schemas.openxmlformats.org/drawingml/2006/main">
+            <a:pPr marL="279400" indent="-152400" algn="l">
+              <a:spcAft>
+                <a:spcPts val="2000"/>
+              </a:spcAft>
+              <a:buChar char="•"/>
+              <a:defRPr sz="2100" b="0">
+                <a:solidFill>
+                  <a:srgbClr val="16343E"/>
+                </a:solidFill>
+                <a:latin typeface="Arial"/>
+                <a:ea typeface="Arial"/>
+                <a:cs typeface="Arial"/>
+              </a:defRPr>
+            </a:pPr>
+            <a:r>
+              <a:rPr sz="2100" b="0">
+                <a:solidFill>
+                  <a:srgbClr val="16343E"/>
+                </a:solidFill>
+                <a:latin typeface="Arial"/>
+                <a:ea typeface="Arial"/>
+                <a:cs typeface="Arial"/>
+              </a:rPr>
+              <a:t>Mean score: 0.847</a:t>
+            </a:r>
+          </a:p>
+          <a:p xmlns:a="http://schemas.openxmlformats.org/drawingml/2006/main">
+            <a:pPr marL="279400" indent="-152400" algn="l">
+              <a:spcAft>
+                <a:spcPts val="2000"/>
+              </a:spcAft>
+              <a:buChar char="•"/>
+              <a:defRPr sz="2100" b="0">
+                <a:solidFill>
+                  <a:srgbClr val="16343E"/>
+                </a:solidFill>
+                <a:latin typeface="Arial"/>
+                <a:ea typeface="Arial"/>
+                <a:cs typeface="Arial"/>
+              </a:defRPr>
+            </a:pPr>
+            <a:r>
+              <a:rPr sz="2100" b="0">
+                <a:solidFill>
+                  <a:srgbClr val="16343E"/>
+                </a:solidFill>
+                <a:latin typeface="Arial"/>
+                <a:ea typeface="Arial"/>
+                <a:cs typeface="Arial"/>
+              </a:rPr>
+              <a:t>Recorded rejection: 7 / 16</a:t>
+            </a:r>
+          </a:p>
+          <a:p xmlns:a="http://schemas.openxmlformats.org/drawingml/2006/main">
+            <a:pPr marL="279400" indent="-152400" algn="l">
+              <a:spcAft>
+                <a:spcPts val="2000"/>
+              </a:spcAft>
+              <a:buChar char="•"/>
+              <a:defRPr sz="2100" b="0">
+                <a:solidFill>
+                  <a:srgbClr val="16343E"/>
+                </a:solidFill>
+                <a:latin typeface="Arial"/>
+                <a:ea typeface="Arial"/>
+                <a:cs typeface="Arial"/>
+              </a:defRPr>
+            </a:pPr>
+            <a:r>
+              <a:rPr sz="2100" b="0">
+                <a:solidFill>
+                  <a:srgbClr val="16343E"/>
+                </a:solidFill>
+                <a:latin typeface="Arial"/>
+                <a:ea typeface="Arial"/>
+                <a:cs typeface="Arial"/>
+              </a:rPr>
+              <a:t>Observed fraction: 43.8%
+95% interval: 23.1–66.8%</a:t>
+            </a:r>
+          </a:p>
+        </p:txBody>
+      </p:sp>
+      <p:sp>
+        <p:nvSpPr>
+          <p:cNvPr id="8" name="">
+            <a:extLst xmlns:a="http://schemas.openxmlformats.org/drawingml/2006/main">
+              <a:ext uri="{FF2B5EF4-FFF2-40B4-BE49-F238E27FC236}">
+                <a16:creationId xmlns:a16="http://schemas.microsoft.com/office/drawing/2014/main" id="{42E79CB4-9A24-4FE6-A128-BEC205DE1A99}"/>
+              </a:ext>
+            </a:extLst>
+          </p:cNvPr>
+          <p:cNvSpPr>
+            <a:spLocks xmlns:a="http://schemas.openxmlformats.org/drawingml/2006/main" noGrp="1"/>
+          </p:cNvSpPr>
+          <p:nvPr/>
+        </p:nvSpPr>
+        <p:spPr>
+          <a:xfrm xmlns:a="http://schemas.openxmlformats.org/drawingml/2006/main">
+            <a:off x="895350" y="5895975"/>
+            <a:ext cx="10687050" cy="295275"/>
+          </a:xfrm>
+          <a:prstGeom xmlns:a="http://schemas.openxmlformats.org/drawingml/2006/main" prst="rect">
+            <a:avLst/>
+          </a:prstGeom>
+          <a:noFill xmlns:a="http://schemas.openxmlformats.org/drawingml/2006/main"/>
+          <a:ln xmlns:a="http://schemas.openxmlformats.org/drawingml/2006/main" w="0">
+            <a:noFill/>
+          </a:ln>
+        </p:spPr>
+        <p:txBody>
+          <a:bodyPr xmlns:a="http://schemas.openxmlformats.org/drawingml/2006/main" anchor="ctr">
+            <a:noAutofit/>
+          </a:bodyPr>
+          <a:lstStyle xmlns:a="http://schemas.openxmlformats.org/drawingml/2006/main"/>
+          <a:p xmlns:a="http://schemas.openxmlformats.org/drawingml/2006/main">
+            <a:pPr algn="l">
+              <a:defRPr sz="1800" b="0">
+                <a:solidFill>
+                  <a:srgbClr val="16343E"/>
+                </a:solidFill>
+                <a:latin typeface="Arial"/>
+                <a:ea typeface="Arial"/>
+                <a:cs typeface="Arial"/>
+              </a:defRPr>
+            </a:pPr>
+            <a:r>
+              <a:rPr sz="1800" b="0">
+                <a:solidFill>
+                  <a:srgbClr val="16343E"/>
+                </a:solidFill>
+                <a:latin typeface="Arial"/>
+                <a:ea typeface="Arial"/>
+                <a:cs typeface="Arial"/>
+              </a:rPr>
+              <a:t>Diagonal: score equals observed rejection fraction</a:t>
+            </a:r>
+          </a:p>
+        </p:txBody>
+      </p:sp>
+    </p:spTree>
+    <p:extLst>
+      <p:ext uri="{BB962C8B-B14F-4D97-AF65-F5344CB8AC3E}">
+        <p14:creationId xmlns:p14="http://schemas.microsoft.com/office/powerpoint/2010/main" val="1128465027"/>
+      </p:ext>
+    </p:extLst>
+  </p:cSld>
+</p:sld>
+</file>
+
+<file path=ppt/slides/slide25.xml><?xml version="1.0" encoding="utf-8"?>
+<p:sld xmlns:p="http://schemas.openxmlformats.org/presentationml/2006/main">
+  <p:cSld>
+    <p:bg>
+      <p:bgPr>
+        <a:solidFill xmlns:a="http://schemas.openxmlformats.org/drawingml/2006/main">
+          <a:srgbClr val="F7F8F5"/>
+        </a:solidFill>
+      </p:bgPr>
+    </p:bg>
+    <p:spTree>
+      <p:nvGrpSpPr>
+        <p:cNvPr id="1" name=""/>
+        <p:cNvGrpSpPr/>
+        <p:nvPr/>
+      </p:nvGrpSpPr>
+      <p:grpSpPr>
+        <a:xfrm xmlns:a="http://schemas.openxmlformats.org/drawingml/2006/main"/>
+      </p:grpSpPr>
+      <p:sp>
+        <p:nvSpPr>
+          <p:cNvPr id="6" name="">
+            <a:extLst xmlns:a="http://schemas.openxmlformats.org/drawingml/2006/main">
+              <a:ext uri="{FF2B5EF4-FFF2-40B4-BE49-F238E27FC236}">
+                <a16:creationId xmlns:a16="http://schemas.microsoft.com/office/drawing/2014/main" id="{F97148CA-A3EC-4BF9-8EAE-08483ABB644F}"/>
+              </a:ext>
+            </a:extLst>
+          </p:cNvPr>
+          <p:cNvSpPr>
+            <a:spLocks xmlns:a="http://schemas.openxmlformats.org/drawingml/2006/main" noGrp="1"/>
+          </p:cNvSpPr>
+          <p:nvPr/>
+        </p:nvSpPr>
+        <p:spPr>
+          <a:xfrm xmlns:a="http://schemas.openxmlformats.org/drawingml/2006/main">
+            <a:off x="609600" y="409575"/>
+            <a:ext cx="10972800" cy="1000125"/>
+          </a:xfrm>
+          <a:prstGeom xmlns:a="http://schemas.openxmlformats.org/drawingml/2006/main" prst="rect">
+            <a:avLst/>
+          </a:prstGeom>
+          <a:noFill xmlns:a="http://schemas.openxmlformats.org/drawingml/2006/main"/>
+          <a:ln xmlns:a="http://schemas.openxmlformats.org/drawingml/2006/main" w="0">
+            <a:noFill/>
+          </a:ln>
+        </p:spPr>
+        <p:txBody>
+          <a:bodyPr xmlns:a="http://schemas.openxmlformats.org/drawingml/2006/main" anchor="ctr">
+            <a:noAutofit/>
+          </a:bodyPr>
+          <a:lstStyle xmlns:a="http://schemas.openxmlformats.org/drawingml/2006/main"/>
+          <a:p xmlns:a="http://schemas.openxmlformats.org/drawingml/2006/main">
+            <a:pPr algn="l">
+              <a:defRPr sz="3450" b="1">
+                <a:solidFill>
+                  <a:srgbClr val="16343E"/>
+                </a:solidFill>
+                <a:latin typeface="Arial"/>
+                <a:ea typeface="Arial"/>
+                <a:cs typeface="Arial"/>
+              </a:defRPr>
+            </a:pPr>
+            <a:r>
+              <a:rPr sz="3450" b="1">
+                <a:solidFill>
+                  <a:srgbClr val="16343E"/>
+                </a:solidFill>
+                <a:latin typeface="Arial"/>
+                <a:ea typeface="Arial"/>
+                <a:cs typeface="Arial"/>
+              </a:rPr>
+              <a:t>Backup: rejection subtype follow-up</a:t>
+            </a:r>
+          </a:p>
+        </p:txBody>
+      </p:sp>
+      <p:sp>
+        <p:nvSpPr>
+          <p:cNvPr id="2" name="">
+            <a:extLst xmlns:a="http://schemas.openxmlformats.org/drawingml/2006/main">
+              <a:ext uri="{FF2B5EF4-FFF2-40B4-BE49-F238E27FC236}">
+                <a16:creationId xmlns:a16="http://schemas.microsoft.com/office/drawing/2014/main" id="{80A451FE-5834-485B-B4AE-ED3A7364D28D}"/>
+              </a:ext>
+            </a:extLst>
+          </p:cNvPr>
+          <p:cNvSpPr>
+            <a:spLocks xmlns:a="http://schemas.openxmlformats.org/drawingml/2006/main" noGrp="1"/>
+          </p:cNvSpPr>
+          <p:nvPr/>
+        </p:nvSpPr>
+        <p:spPr>
+          <a:xfrm xmlns:a="http://schemas.openxmlformats.org/drawingml/2006/main">
+            <a:off x="609600" y="6257925"/>
+            <a:ext cx="10382250" cy="361950"/>
+          </a:xfrm>
+          <a:prstGeom xmlns:a="http://schemas.openxmlformats.org/drawingml/2006/main" prst="rect">
+            <a:avLst/>
+          </a:prstGeom>
+          <a:noFill xmlns:a="http://schemas.openxmlformats.org/drawingml/2006/main"/>
+          <a:ln xmlns:a="http://schemas.openxmlformats.org/drawingml/2006/main" w="0">
+            <a:noFill/>
+          </a:ln>
+        </p:spPr>
+        <p:txBody>
+          <a:bodyPr xmlns:a="http://schemas.openxmlformats.org/drawingml/2006/main" anchor="ctr">
+            <a:noAutofit/>
+          </a:bodyPr>
+          <a:lstStyle xmlns:a="http://schemas.openxmlformats.org/drawingml/2006/main"/>
+          <a:p xmlns:a="http://schemas.openxmlformats.org/drawingml/2006/main">
+            <a:pPr algn="l">
+              <a:defRPr sz="1350" b="0">
+                <a:solidFill>
+                  <a:srgbClr val="52656B"/>
+                </a:solidFill>
+                <a:latin typeface="Arial"/>
+                <a:ea typeface="Arial"/>
+                <a:cs typeface="Arial"/>
+              </a:defRPr>
+            </a:pPr>
+            <a:r>
+              <a:rPr sz="1350" b="0">
+                <a:solidFill>
+                  <a:srgbClr val="52656B"/>
+                </a:solidFill>
+                <a:latin typeface="Arial"/>
+                <a:ea typeface="Arial"/>
+                <a:cs typeface="Arial"/>
+              </a:rPr>
+              <a:t>Source: subtype follow-up, 15 Sep 2026. Reuses the examined validation cohort; needs independent confirmation.</a:t>
+            </a:r>
+          </a:p>
+        </p:txBody>
+      </p:sp>
+      <p:sp>
+        <p:nvSpPr>
+          <p:cNvPr id="3" name="">
+            <a:extLst xmlns:a="http://schemas.openxmlformats.org/drawingml/2006/main">
+              <a:ext uri="{FF2B5EF4-FFF2-40B4-BE49-F238E27FC236}">
+                <a16:creationId xmlns:a16="http://schemas.microsoft.com/office/drawing/2014/main" id="{8DACE6B3-499E-4A3E-B00C-0F2C60CAB1B9}"/>
+              </a:ext>
+            </a:extLst>
+          </p:cNvPr>
+          <p:cNvSpPr>
+            <a:spLocks xmlns:a="http://schemas.openxmlformats.org/drawingml/2006/main" noGrp="1"/>
+          </p:cNvSpPr>
+          <p:nvPr/>
+        </p:nvSpPr>
+        <p:spPr>
+          <a:xfrm xmlns:a="http://schemas.openxmlformats.org/drawingml/2006/main">
+            <a:off x="11115675" y="6305550"/>
+            <a:ext cx="457200" cy="285750"/>
+          </a:xfrm>
+          <a:prstGeom xmlns:a="http://schemas.openxmlformats.org/drawingml/2006/main" prst="rect">
+            <a:avLst/>
+          </a:prstGeom>
+          <a:noFill xmlns:a="http://schemas.openxmlformats.org/drawingml/2006/main"/>
+          <a:ln xmlns:a="http://schemas.openxmlformats.org/drawingml/2006/main" w="0">
+            <a:noFill/>
+          </a:ln>
+        </p:spPr>
+        <p:txBody>
+          <a:bodyPr xmlns:a="http://schemas.openxmlformats.org/drawingml/2006/main" anchor="ctr">
+            <a:noAutofit/>
+          </a:bodyPr>
+          <a:lstStyle xmlns:a="http://schemas.openxmlformats.org/drawingml/2006/main"/>
+          <a:p xmlns:a="http://schemas.openxmlformats.org/drawingml/2006/main">
+            <a:pPr algn="r">
+              <a:defRPr sz="1350" b="0">
+                <a:solidFill>
+                  <a:srgbClr val="52656B"/>
+                </a:solidFill>
+                <a:latin typeface="Arial"/>
+                <a:ea typeface="Arial"/>
+                <a:cs typeface="Arial"/>
+              </a:defRPr>
+            </a:pPr>
+            <a:r>
+              <a:rPr sz="1350" b="0">
+                <a:solidFill>
+                  <a:srgbClr val="52656B"/>
+                </a:solidFill>
+                <a:latin typeface="Arial"/>
+                <a:ea typeface="Arial"/>
+                <a:cs typeface="Arial"/>
+              </a:rPr>
+              <a:t>25</a:t>
             </a:r>
           </a:p>
         </p:txBody>
@@ -11435,7 +12411,7 @@
           <p:cNvPr id="5" name="">
             <a:extLst xmlns:a="http://schemas.openxmlformats.org/drawingml/2006/main">
               <a:ext uri="{FF2B5EF4-FFF2-40B4-BE49-F238E27FC236}">
-                <a16:creationId xmlns:a16="http://schemas.microsoft.com/office/drawing/2014/main" id="{61FA32EB-3539-453A-9187-C63639F53E72}"/>
+                <a16:creationId xmlns:a16="http://schemas.microsoft.com/office/drawing/2014/main" id="{79F5D0DE-361B-4A61-AF76-638BE0EFF6CF}"/>
               </a:ext>
             </a:extLst>
           </p:cNvPr>
@@ -11494,14 +12470,14 @@
     </p:spTree>
     <p:extLst>
       <p:ext uri="{BB962C8B-B14F-4D97-AF65-F5344CB8AC3E}">
-        <p14:creationId xmlns:p14="http://schemas.microsoft.com/office/powerpoint/2010/main" val="584846588"/>
+        <p14:creationId xmlns:p14="http://schemas.microsoft.com/office/powerpoint/2010/main" val="1748712610"/>
       </p:ext>
     </p:extLst>
   </p:cSld>
 </p:sld>
 </file>
 
-<file path=ppt/slides/slide25.xml><?xml version="1.0" encoding="utf-8"?>
+<file path=ppt/slides/slide26.xml><?xml version="1.0" encoding="utf-8"?>
 <p:sld xmlns:p="http://schemas.openxmlformats.org/presentationml/2006/main">
   <p:cSld>
     <p:bg>
@@ -11525,7 +12501,7 @@
           <p:cNvPr id="5" name="">
             <a:extLst xmlns:a="http://schemas.openxmlformats.org/drawingml/2006/main">
               <a:ext uri="{FF2B5EF4-FFF2-40B4-BE49-F238E27FC236}">
-                <a16:creationId xmlns:a16="http://schemas.microsoft.com/office/drawing/2014/main" id="{BB9AD1D0-6B55-4238-B9EF-1F4641CDE395}"/>
+                <a16:creationId xmlns:a16="http://schemas.microsoft.com/office/drawing/2014/main" id="{E70CABA4-0B91-44F2-887D-AED6C7DC16C2}"/>
               </a:ext>
             </a:extLst>
           </p:cNvPr>
@@ -11572,7 +12548,7 @@
                 <a:ea typeface="Arial"/>
                 <a:cs typeface="Arial"/>
               </a:rPr>
-              <a:t>Backup: study, assay and deployment limits</a:t>
+              <a:t>Backup: dataset, assay and deployment limits</a:t>
             </a:r>
           </a:p>
         </p:txBody>
@@ -11582,7 +12558,7 @@
           <p:cNvPr id="2" name="">
             <a:extLst xmlns:a="http://schemas.openxmlformats.org/drawingml/2006/main">
               <a:ext uri="{FF2B5EF4-FFF2-40B4-BE49-F238E27FC236}">
-                <a16:creationId xmlns:a16="http://schemas.microsoft.com/office/drawing/2014/main" id="{B2CBFE9D-80A6-4F1B-850C-ADC63C1FAD39}"/>
+                <a16:creationId xmlns:a16="http://schemas.microsoft.com/office/drawing/2014/main" id="{6725FDBC-741E-43C6-BE5B-3128796BBDDC}"/>
               </a:ext>
             </a:extLst>
           </p:cNvPr>
@@ -11639,7 +12615,7 @@
           <p:cNvPr id="3" name="">
             <a:extLst xmlns:a="http://schemas.openxmlformats.org/drawingml/2006/main">
               <a:ext uri="{FF2B5EF4-FFF2-40B4-BE49-F238E27FC236}">
-                <a16:creationId xmlns:a16="http://schemas.microsoft.com/office/drawing/2014/main" id="{ADE45332-D463-48CD-BC01-59FEE191E0D2}"/>
+                <a16:creationId xmlns:a16="http://schemas.microsoft.com/office/drawing/2014/main" id="{ACEC57C8-88F3-45D0-BEBF-3143468EE48C}"/>
               </a:ext>
             </a:extLst>
           </p:cNvPr>
@@ -11686,7 +12662,7 @@
                 <a:ea typeface="Arial"/>
                 <a:cs typeface="Arial"/>
               </a:rPr>
-              <a:t>25</a:t>
+              <a:t>26</a:t>
             </a:r>
           </a:p>
         </p:txBody>
@@ -12053,500 +13029,7 @@
     </p:spTree>
     <p:extLst>
       <p:ext uri="{BB962C8B-B14F-4D97-AF65-F5344CB8AC3E}">
-        <p14:creationId xmlns:p14="http://schemas.microsoft.com/office/powerpoint/2010/main" val="478106522"/>
-      </p:ext>
-    </p:extLst>
-  </p:cSld>
-</p:sld>
-</file>
-
-<file path=ppt/slides/slide26.xml><?xml version="1.0" encoding="utf-8"?>
-<p:sld xmlns:p="http://schemas.openxmlformats.org/presentationml/2006/main">
-  <p:cSld>
-    <p:bg>
-      <p:bgPr>
-        <a:solidFill xmlns:a="http://schemas.openxmlformats.org/drawingml/2006/main">
-          <a:srgbClr val="F7F8F5"/>
-        </a:solidFill>
-      </p:bgPr>
-    </p:bg>
-    <p:spTree>
-      <p:nvGrpSpPr>
-        <p:cNvPr id="1" name=""/>
-        <p:cNvGrpSpPr/>
-        <p:nvPr/>
-      </p:nvGrpSpPr>
-      <p:grpSpPr>
-        <a:xfrm xmlns:a="http://schemas.openxmlformats.org/drawingml/2006/main"/>
-      </p:grpSpPr>
-      <p:sp>
-        <p:nvSpPr>
-          <p:cNvPr id="9" name="">
-            <a:extLst xmlns:a="http://schemas.openxmlformats.org/drawingml/2006/main">
-              <a:ext uri="{FF2B5EF4-FFF2-40B4-BE49-F238E27FC236}">
-                <a16:creationId xmlns:a16="http://schemas.microsoft.com/office/drawing/2014/main" id="{414A1309-54E9-435D-AF58-CD3E6D407B12}"/>
-              </a:ext>
-            </a:extLst>
-          </p:cNvPr>
-          <p:cNvSpPr>
-            <a:spLocks xmlns:a="http://schemas.openxmlformats.org/drawingml/2006/main" noGrp="1"/>
-          </p:cNvSpPr>
-          <p:nvPr/>
-        </p:nvSpPr>
-        <p:spPr>
-          <a:xfrm xmlns:a="http://schemas.openxmlformats.org/drawingml/2006/main">
-            <a:off x="609600" y="409575"/>
-            <a:ext cx="10972800" cy="1000125"/>
-          </a:xfrm>
-          <a:prstGeom xmlns:a="http://schemas.openxmlformats.org/drawingml/2006/main" prst="rect">
-            <a:avLst/>
-          </a:prstGeom>
-          <a:noFill xmlns:a="http://schemas.openxmlformats.org/drawingml/2006/main"/>
-          <a:ln xmlns:a="http://schemas.openxmlformats.org/drawingml/2006/main" w="0">
-            <a:noFill/>
-          </a:ln>
-        </p:spPr>
-        <p:txBody>
-          <a:bodyPr xmlns:a="http://schemas.openxmlformats.org/drawingml/2006/main" anchor="ctr">
-            <a:noAutofit/>
-          </a:bodyPr>
-          <a:lstStyle xmlns:a="http://schemas.openxmlformats.org/drawingml/2006/main"/>
-          <a:p xmlns:a="http://schemas.openxmlformats.org/drawingml/2006/main">
-            <a:pPr algn="l">
-              <a:defRPr sz="3450" b="1">
-                <a:solidFill>
-                  <a:srgbClr val="16343E"/>
-                </a:solidFill>
-                <a:latin typeface="Arial"/>
-                <a:ea typeface="Arial"/>
-                <a:cs typeface="Arial"/>
-              </a:defRPr>
-            </a:pPr>
-            <a:r>
-              <a:rPr sz="3450" b="1">
-                <a:solidFill>
-                  <a:srgbClr val="16343E"/>
-                </a:solidFill>
-                <a:latin typeface="Arial"/>
-                <a:ea typeface="Arial"/>
-                <a:cs typeface="Arial"/>
-              </a:rPr>
-              <a:t>Backup: sources and contributions</a:t>
-            </a:r>
-          </a:p>
-        </p:txBody>
-      </p:sp>
-      <p:sp>
-        <p:nvSpPr>
-          <p:cNvPr id="2" name="">
-            <a:extLst xmlns:a="http://schemas.openxmlformats.org/drawingml/2006/main">
-              <a:ext uri="{FF2B5EF4-FFF2-40B4-BE49-F238E27FC236}">
-                <a16:creationId xmlns:a16="http://schemas.microsoft.com/office/drawing/2014/main" id="{D0420695-F6D7-4274-9CB2-9AFC56FAACAD}"/>
-              </a:ext>
-            </a:extLst>
-          </p:cNvPr>
-          <p:cNvSpPr>
-            <a:spLocks xmlns:a="http://schemas.openxmlformats.org/drawingml/2006/main" noGrp="1"/>
-          </p:cNvSpPr>
-          <p:nvPr/>
-        </p:nvSpPr>
-        <p:spPr>
-          <a:xfrm xmlns:a="http://schemas.openxmlformats.org/drawingml/2006/main">
-            <a:off x="11115675" y="6305550"/>
-            <a:ext cx="457200" cy="285750"/>
-          </a:xfrm>
-          <a:prstGeom xmlns:a="http://schemas.openxmlformats.org/drawingml/2006/main" prst="rect">
-            <a:avLst/>
-          </a:prstGeom>
-          <a:noFill xmlns:a="http://schemas.openxmlformats.org/drawingml/2006/main"/>
-          <a:ln xmlns:a="http://schemas.openxmlformats.org/drawingml/2006/main" w="0">
-            <a:noFill/>
-          </a:ln>
-        </p:spPr>
-        <p:txBody>
-          <a:bodyPr xmlns:a="http://schemas.openxmlformats.org/drawingml/2006/main" anchor="ctr">
-            <a:noAutofit/>
-          </a:bodyPr>
-          <a:lstStyle xmlns:a="http://schemas.openxmlformats.org/drawingml/2006/main"/>
-          <a:p xmlns:a="http://schemas.openxmlformats.org/drawingml/2006/main">
-            <a:pPr algn="r">
-              <a:defRPr sz="1350" b="0">
-                <a:solidFill>
-                  <a:srgbClr val="52656B"/>
-                </a:solidFill>
-                <a:latin typeface="Arial"/>
-                <a:ea typeface="Arial"/>
-                <a:cs typeface="Arial"/>
-              </a:defRPr>
-            </a:pPr>
-            <a:r>
-              <a:rPr sz="1350" b="0">
-                <a:solidFill>
-                  <a:srgbClr val="52656B"/>
-                </a:solidFill>
-                <a:latin typeface="Arial"/>
-                <a:ea typeface="Arial"/>
-                <a:cs typeface="Arial"/>
-              </a:rPr>
-              <a:t>26</a:t>
-            </a:r>
-          </a:p>
-        </p:txBody>
-      </p:sp>
-      <p:sp>
-        <p:nvSpPr>
-          <p:cNvPr id="3" name="">
-            <a:extLst xmlns:a="http://schemas.openxmlformats.org/drawingml/2006/main">
-              <a:ext uri="{FF2B5EF4-FFF2-40B4-BE49-F238E27FC236}">
-                <a16:creationId xmlns:a16="http://schemas.microsoft.com/office/drawing/2014/main" id="{F6CFA779-58D7-40F9-A478-44E449910517}"/>
-              </a:ext>
-            </a:extLst>
-          </p:cNvPr>
-          <p:cNvSpPr>
-            <a:spLocks xmlns:a="http://schemas.openxmlformats.org/drawingml/2006/main" noGrp="1"/>
-          </p:cNvSpPr>
-          <p:nvPr/>
-        </p:nvSpPr>
-        <p:spPr>
-          <a:xfrm xmlns:a="http://schemas.openxmlformats.org/drawingml/2006/main">
-            <a:off x="609600" y="1628775"/>
-            <a:ext cx="10972800" cy="419100"/>
-          </a:xfrm>
-          <a:prstGeom xmlns:a="http://schemas.openxmlformats.org/drawingml/2006/main" prst="rect">
-            <a:avLst/>
-          </a:prstGeom>
-          <a:noFill xmlns:a="http://schemas.openxmlformats.org/drawingml/2006/main"/>
-          <a:ln xmlns:a="http://schemas.openxmlformats.org/drawingml/2006/main" w="0">
-            <a:noFill/>
-          </a:ln>
-        </p:spPr>
-        <p:txBody>
-          <a:bodyPr xmlns:a="http://schemas.openxmlformats.org/drawingml/2006/main" anchor="ctr">
-            <a:noAutofit/>
-          </a:bodyPr>
-          <a:lstStyle xmlns:a="http://schemas.openxmlformats.org/drawingml/2006/main"/>
-          <a:p xmlns:a="http://schemas.openxmlformats.org/drawingml/2006/main">
-            <a:pPr algn="l">
-              <a:defRPr sz="2400" b="1">
-                <a:solidFill>
-                  <a:srgbClr val="16343E"/>
-                </a:solidFill>
-                <a:latin typeface="Arial"/>
-                <a:ea typeface="Arial"/>
-                <a:cs typeface="Arial"/>
-              </a:defRPr>
-            </a:pPr>
-            <a:r>
-              <a:rPr sz="2400" b="1">
-                <a:solidFill>
-                  <a:srgbClr val="16343E"/>
-                </a:solidFill>
-                <a:latin typeface="Arial"/>
-                <a:ea typeface="Arial"/>
-                <a:cs typeface="Arial"/>
-              </a:rPr>
-              <a:t>Public study</a:t>
-            </a:r>
-          </a:p>
-        </p:txBody>
-      </p:sp>
-      <p:sp>
-        <p:nvSpPr>
-          <p:cNvPr id="4" name="">
-            <a:extLst xmlns:a="http://schemas.openxmlformats.org/drawingml/2006/main">
-              <a:ext uri="{FF2B5EF4-FFF2-40B4-BE49-F238E27FC236}">
-                <a16:creationId xmlns:a16="http://schemas.microsoft.com/office/drawing/2014/main" id="{43AA88D7-FE97-47CE-930E-A23090F0E43F}"/>
-              </a:ext>
-            </a:extLst>
-          </p:cNvPr>
-          <p:cNvSpPr>
-            <a:spLocks xmlns:a="http://schemas.openxmlformats.org/drawingml/2006/main" noGrp="1"/>
-          </p:cNvSpPr>
-          <p:nvPr/>
-        </p:nvSpPr>
-        <p:spPr>
-          <a:xfrm xmlns:a="http://schemas.openxmlformats.org/drawingml/2006/main">
-            <a:off x="609600" y="2143125"/>
-            <a:ext cx="10972800" cy="866775"/>
-          </a:xfrm>
-          <a:prstGeom xmlns:a="http://schemas.openxmlformats.org/drawingml/2006/main" prst="rect">
-            <a:avLst/>
-          </a:prstGeom>
-          <a:noFill xmlns:a="http://schemas.openxmlformats.org/drawingml/2006/main"/>
-          <a:ln xmlns:a="http://schemas.openxmlformats.org/drawingml/2006/main" w="0">
-            <a:noFill/>
-          </a:ln>
-        </p:spPr>
-        <p:txBody>
-          <a:bodyPr xmlns:a="http://schemas.openxmlformats.org/drawingml/2006/main" anchor="t">
-            <a:noAutofit/>
-          </a:bodyPr>
-          <a:lstStyle xmlns:a="http://schemas.openxmlformats.org/drawingml/2006/main"/>
-          <a:p xmlns:a="http://schemas.openxmlformats.org/drawingml/2006/main">
-            <a:pPr marL="279400" indent="-152400" algn="l">
-              <a:spcAft>
-                <a:spcPts val="1200"/>
-              </a:spcAft>
-              <a:buChar char="•"/>
-              <a:defRPr sz="2400" b="0">
-                <a:solidFill>
-                  <a:srgbClr val="16343E"/>
-                </a:solidFill>
-                <a:latin typeface="Arial"/>
-                <a:ea typeface="Arial"/>
-                <a:cs typeface="Arial"/>
-              </a:defRPr>
-            </a:pPr>
-            <a:r>
-              <a:rPr sz="2400" b="0">
-                <a:solidFill>
-                  <a:srgbClr val="16343E"/>
-                </a:solidFill>
-                <a:latin typeface="Arial"/>
-                <a:ea typeface="Arial"/>
-                <a:cs typeface="Arial"/>
-              </a:rPr>
-              <a:t>Zhang et al., Laboratory Investigation (2024): GSE212160 raw NanoString B-HOT measurements.</a:t>
-            </a:r>
-          </a:p>
-        </p:txBody>
-      </p:sp>
-      <p:sp>
-        <p:nvSpPr>
-          <p:cNvPr id="5" name="">
-            <a:extLst xmlns:a="http://schemas.openxmlformats.org/drawingml/2006/main">
-              <a:ext uri="{FF2B5EF4-FFF2-40B4-BE49-F238E27FC236}">
-                <a16:creationId xmlns:a16="http://schemas.microsoft.com/office/drawing/2014/main" id="{9EE1AEBA-5D36-45A6-A0F3-B9AB33C509C2}"/>
-              </a:ext>
-            </a:extLst>
-          </p:cNvPr>
-          <p:cNvSpPr>
-            <a:spLocks xmlns:a="http://schemas.openxmlformats.org/drawingml/2006/main" noGrp="1"/>
-          </p:cNvSpPr>
-          <p:nvPr/>
-        </p:nvSpPr>
-        <p:spPr>
-          <a:xfrm xmlns:a="http://schemas.openxmlformats.org/drawingml/2006/main">
-            <a:off x="609600" y="3343275"/>
-            <a:ext cx="10972800" cy="419100"/>
-          </a:xfrm>
-          <a:prstGeom xmlns:a="http://schemas.openxmlformats.org/drawingml/2006/main" prst="rect">
-            <a:avLst/>
-          </a:prstGeom>
-          <a:noFill xmlns:a="http://schemas.openxmlformats.org/drawingml/2006/main"/>
-          <a:ln xmlns:a="http://schemas.openxmlformats.org/drawingml/2006/main" w="0">
-            <a:noFill/>
-          </a:ln>
-        </p:spPr>
-        <p:txBody>
-          <a:bodyPr xmlns:a="http://schemas.openxmlformats.org/drawingml/2006/main" anchor="ctr">
-            <a:noAutofit/>
-          </a:bodyPr>
-          <a:lstStyle xmlns:a="http://schemas.openxmlformats.org/drawingml/2006/main"/>
-          <a:p xmlns:a="http://schemas.openxmlformats.org/drawingml/2006/main">
-            <a:pPr algn="l">
-              <a:defRPr sz="2400" b="1">
-                <a:solidFill>
-                  <a:srgbClr val="16343E"/>
-                </a:solidFill>
-                <a:latin typeface="Arial"/>
-                <a:ea typeface="Arial"/>
-                <a:cs typeface="Arial"/>
-              </a:defRPr>
-            </a:pPr>
-            <a:r>
-              <a:rPr sz="2400" b="1">
-                <a:solidFill>
-                  <a:srgbClr val="16343E"/>
-                </a:solidFill>
-                <a:latin typeface="Arial"/>
-                <a:ea typeface="Arial"/>
-                <a:cs typeface="Arial"/>
-              </a:rPr>
-              <a:t>This project</a:t>
-            </a:r>
-          </a:p>
-        </p:txBody>
-      </p:sp>
-      <p:sp>
-        <p:nvSpPr>
-          <p:cNvPr id="6" name="">
-            <a:extLst xmlns:a="http://schemas.openxmlformats.org/drawingml/2006/main">
-              <a:ext uri="{FF2B5EF4-FFF2-40B4-BE49-F238E27FC236}">
-                <a16:creationId xmlns:a16="http://schemas.microsoft.com/office/drawing/2014/main" id="{CA139E2E-04A1-4E92-8247-879072EBA2A9}"/>
-              </a:ext>
-            </a:extLst>
-          </p:cNvPr>
-          <p:cNvSpPr>
-            <a:spLocks xmlns:a="http://schemas.openxmlformats.org/drawingml/2006/main" noGrp="1"/>
-          </p:cNvSpPr>
-          <p:nvPr/>
-        </p:nvSpPr>
-        <p:spPr>
-          <a:xfrm xmlns:a="http://schemas.openxmlformats.org/drawingml/2006/main">
-            <a:off x="609600" y="3857625"/>
-            <a:ext cx="10972800" cy="942975"/>
-          </a:xfrm>
-          <a:prstGeom xmlns:a="http://schemas.openxmlformats.org/drawingml/2006/main" prst="rect">
-            <a:avLst/>
-          </a:prstGeom>
-          <a:noFill xmlns:a="http://schemas.openxmlformats.org/drawingml/2006/main"/>
-          <a:ln xmlns:a="http://schemas.openxmlformats.org/drawingml/2006/main" w="0">
-            <a:noFill/>
-          </a:ln>
-        </p:spPr>
-        <p:txBody>
-          <a:bodyPr xmlns:a="http://schemas.openxmlformats.org/drawingml/2006/main" anchor="t">
-            <a:noAutofit/>
-          </a:bodyPr>
-          <a:lstStyle xmlns:a="http://schemas.openxmlformats.org/drawingml/2006/main"/>
-          <a:p xmlns:a="http://schemas.openxmlformats.org/drawingml/2006/main">
-            <a:pPr marL="279400" indent="-152400" algn="l">
-              <a:spcAft>
-                <a:spcPts val="1200"/>
-              </a:spcAft>
-              <a:buChar char="•"/>
-              <a:defRPr sz="2400" b="0">
-                <a:solidFill>
-                  <a:srgbClr val="16343E"/>
-                </a:solidFill>
-                <a:latin typeface="Arial"/>
-                <a:ea typeface="Arial"/>
-                <a:cs typeface="Arial"/>
-              </a:defRPr>
-            </a:pPr>
-            <a:r>
-              <a:rPr sz="2400" b="0">
-                <a:solidFill>
-                  <a:srgbClr val="16343E"/>
-                </a:solidFill>
-                <a:latin typeface="Arial"/>
-                <a:ea typeface="Arial"/>
-                <a:cs typeface="Arial"/>
-              </a:rPr>
-              <a:t>Binary model comparisons and runs produced here, shared preparation code, and a tested local prediction service.</a:t>
-            </a:r>
-          </a:p>
-        </p:txBody>
-      </p:sp>
-      <p:sp>
-        <p:nvSpPr>
-          <p:cNvPr id="7" name="">
-            <a:extLst xmlns:a="http://schemas.openxmlformats.org/drawingml/2006/main">
-              <a:ext uri="{FF2B5EF4-FFF2-40B4-BE49-F238E27FC236}">
-                <a16:creationId xmlns:a16="http://schemas.microsoft.com/office/drawing/2014/main" id="{247AA429-FCF2-45AF-878C-84AD2FD6295D}"/>
-              </a:ext>
-            </a:extLst>
-          </p:cNvPr>
-          <p:cNvSpPr>
-            <a:spLocks xmlns:a="http://schemas.openxmlformats.org/drawingml/2006/main" noGrp="1"/>
-          </p:cNvSpPr>
-          <p:nvPr/>
-        </p:nvSpPr>
-        <p:spPr>
-          <a:xfrm xmlns:a="http://schemas.openxmlformats.org/drawingml/2006/main">
-            <a:off x="609600" y="5191125"/>
-            <a:ext cx="10972800" cy="409575"/>
-          </a:xfrm>
-          <a:prstGeom xmlns:a="http://schemas.openxmlformats.org/drawingml/2006/main" prst="rect">
-            <a:avLst/>
-          </a:prstGeom>
-          <a:noFill xmlns:a="http://schemas.openxmlformats.org/drawingml/2006/main"/>
-          <a:ln xmlns:a="http://schemas.openxmlformats.org/drawingml/2006/main" w="0">
-            <a:noFill/>
-          </a:ln>
-        </p:spPr>
-        <p:txBody>
-          <a:bodyPr xmlns:a="http://schemas.openxmlformats.org/drawingml/2006/main" anchor="ctr">
-            <a:noAutofit/>
-          </a:bodyPr>
-          <a:lstStyle xmlns:a="http://schemas.openxmlformats.org/drawingml/2006/main"/>
-          <a:p xmlns:a="http://schemas.openxmlformats.org/drawingml/2006/main">
-            <a:pPr algn="l">
-              <a:defRPr sz="2250" b="1">
-                <a:solidFill>
-                  <a:srgbClr val="16343E"/>
-                </a:solidFill>
-                <a:latin typeface="Arial"/>
-                <a:ea typeface="Arial"/>
-                <a:cs typeface="Arial"/>
-              </a:defRPr>
-            </a:pPr>
-            <a:r>
-              <a:rPr sz="2250" b="1">
-                <a:solidFill>
-                  <a:srgbClr val="16343E"/>
-                </a:solidFill>
-                <a:latin typeface="Arial"/>
-                <a:ea typeface="Arial"/>
-                <a:cs typeface="Arial"/>
-              </a:rPr>
-              <a:t>Presentation guidance</a:t>
-            </a:r>
-          </a:p>
-        </p:txBody>
-      </p:sp>
-      <p:sp>
-        <p:nvSpPr>
-          <p:cNvPr id="8" name="">
-            <a:extLst xmlns:a="http://schemas.openxmlformats.org/drawingml/2006/main">
-              <a:ext uri="{FF2B5EF4-FFF2-40B4-BE49-F238E27FC236}">
-                <a16:creationId xmlns:a16="http://schemas.microsoft.com/office/drawing/2014/main" id="{14986899-6338-4165-8EFB-54F0F8D88ABE}"/>
-              </a:ext>
-            </a:extLst>
-          </p:cNvPr>
-          <p:cNvSpPr>
-            <a:spLocks xmlns:a="http://schemas.openxmlformats.org/drawingml/2006/main" noGrp="1"/>
-          </p:cNvSpPr>
-          <p:nvPr/>
-        </p:nvSpPr>
-        <p:spPr>
-          <a:xfrm xmlns:a="http://schemas.openxmlformats.org/drawingml/2006/main">
-            <a:off x="609600" y="5667375"/>
-            <a:ext cx="10972800" cy="428625"/>
-          </a:xfrm>
-          <a:prstGeom xmlns:a="http://schemas.openxmlformats.org/drawingml/2006/main" prst="rect">
-            <a:avLst/>
-          </a:prstGeom>
-          <a:noFill xmlns:a="http://schemas.openxmlformats.org/drawingml/2006/main"/>
-          <a:ln xmlns:a="http://schemas.openxmlformats.org/drawingml/2006/main" w="0">
-            <a:noFill/>
-          </a:ln>
-        </p:spPr>
-        <p:txBody>
-          <a:bodyPr xmlns:a="http://schemas.openxmlformats.org/drawingml/2006/main" anchor="ctr">
-            <a:noAutofit/>
-          </a:bodyPr>
-          <a:lstStyle xmlns:a="http://schemas.openxmlformats.org/drawingml/2006/main"/>
-          <a:p xmlns:a="http://schemas.openxmlformats.org/drawingml/2006/main">
-            <a:pPr algn="l">
-              <a:defRPr sz="1875" b="0">
-                <a:solidFill>
-                  <a:srgbClr val="16343E"/>
-                </a:solidFill>
-                <a:latin typeface="Arial"/>
-                <a:ea typeface="Arial"/>
-                <a:cs typeface="Arial"/>
-              </a:defRPr>
-            </a:pPr>
-            <a:r>
-              <a:rPr sz="1875" b="0">
-                <a:solidFill>
-                  <a:srgbClr val="16343E"/>
-                </a:solidFill>
-                <a:latin typeface="Arial"/>
-                <a:ea typeface="Arial"/>
-                <a:cs typeface="Arial"/>
-              </a:rPr>
-              <a:t>Bourne (2007), Kosslyn et al. (2012), Garner and Alley (2013), Rougier et al. (2014)</a:t>
-            </a:r>
-          </a:p>
-        </p:txBody>
-      </p:sp>
-    </p:spTree>
-    <p:extLst>
-      <p:ext uri="{BB962C8B-B14F-4D97-AF65-F5344CB8AC3E}">
-        <p14:creationId xmlns:p14="http://schemas.microsoft.com/office/powerpoint/2010/main" val="1610160321"/>
+        <p14:creationId xmlns:p14="http://schemas.microsoft.com/office/powerpoint/2010/main" val="927022904"/>
       </p:ext>
     </p:extLst>
   </p:cSld>
@@ -12574,10 +13057,10 @@
       </p:grpSpPr>
       <p:sp>
         <p:nvSpPr>
-          <p:cNvPr id="6" name="">
-            <a:extLst xmlns:a="http://schemas.openxmlformats.org/drawingml/2006/main">
-              <a:ext uri="{FF2B5EF4-FFF2-40B4-BE49-F238E27FC236}">
-                <a16:creationId xmlns:a16="http://schemas.microsoft.com/office/drawing/2014/main" id="{29F25AD8-8430-4D3E-91A6-D3308F442455}"/>
+          <p:cNvPr id="9" name="">
+            <a:extLst xmlns:a="http://schemas.openxmlformats.org/drawingml/2006/main">
+              <a:ext uri="{FF2B5EF4-FFF2-40B4-BE49-F238E27FC236}">
+                <a16:creationId xmlns:a16="http://schemas.microsoft.com/office/drawing/2014/main" id="{DD6F1A53-D048-4571-A82A-77FA85F84425}"/>
               </a:ext>
             </a:extLst>
           </p:cNvPr>
@@ -12624,7 +13107,7 @@
                 <a:ea typeface="Arial"/>
                 <a:cs typeface="Arial"/>
               </a:rPr>
-              <a:t>Backup: UNOS research connection</a:t>
+              <a:t>Backup: sources and contributions</a:t>
             </a:r>
           </a:p>
         </p:txBody>
@@ -12634,19 +13117,19 @@
           <p:cNvPr id="2" name="">
             <a:extLst xmlns:a="http://schemas.openxmlformats.org/drawingml/2006/main">
               <a:ext uri="{FF2B5EF4-FFF2-40B4-BE49-F238E27FC236}">
-                <a16:creationId xmlns:a16="http://schemas.microsoft.com/office/drawing/2014/main" id="{862E3D9B-2A42-4FF1-99E2-9605EC4BBB82}"/>
-              </a:ext>
-            </a:extLst>
-          </p:cNvPr>
-          <p:cNvSpPr>
-            <a:spLocks xmlns:a="http://schemas.openxmlformats.org/drawingml/2006/main" noGrp="1"/>
-          </p:cNvSpPr>
-          <p:nvPr/>
-        </p:nvSpPr>
-        <p:spPr>
-          <a:xfrm xmlns:a="http://schemas.openxmlformats.org/drawingml/2006/main">
-            <a:off x="609600" y="6257925"/>
-            <a:ext cx="10382250" cy="361950"/>
+                <a16:creationId xmlns:a16="http://schemas.microsoft.com/office/drawing/2014/main" id="{50F5A7F3-CBD2-43F4-B9A2-34ABFF0B5BB4}"/>
+              </a:ext>
+            </a:extLst>
+          </p:cNvPr>
+          <p:cNvSpPr>
+            <a:spLocks xmlns:a="http://schemas.openxmlformats.org/drawingml/2006/main" noGrp="1"/>
+          </p:cNvSpPr>
+          <p:nvPr/>
+        </p:nvSpPr>
+        <p:spPr>
+          <a:xfrm xmlns:a="http://schemas.openxmlformats.org/drawingml/2006/main">
+            <a:off x="11115675" y="6305550"/>
+            <a:ext cx="457200" cy="285750"/>
           </a:xfrm>
           <a:prstGeom xmlns:a="http://schemas.openxmlformats.org/drawingml/2006/main" prst="rect">
             <a:avLst/>
@@ -12662,7 +13145,7 @@
           </a:bodyPr>
           <a:lstStyle xmlns:a="http://schemas.openxmlformats.org/drawingml/2006/main"/>
           <a:p xmlns:a="http://schemas.openxmlformats.org/drawingml/2006/main">
-            <a:pPr algn="l">
+            <a:pPr algn="r">
               <a:defRPr sz="1350" b="0">
                 <a:solidFill>
                   <a:srgbClr val="52656B"/>
@@ -12681,7 +13164,7 @@
                 <a:ea typeface="Arial"/>
                 <a:cs typeface="Arial"/>
               </a:rPr>
-              <a:t>Source: UNOS, Using AI to identify kidney anatomy issues (2 Jun 2026)</a:t>
+              <a:t>27</a:t>
             </a:r>
           </a:p>
         </p:txBody>
@@ -12691,19 +13174,19 @@
           <p:cNvPr id="3" name="">
             <a:extLst xmlns:a="http://schemas.openxmlformats.org/drawingml/2006/main">
               <a:ext uri="{FF2B5EF4-FFF2-40B4-BE49-F238E27FC236}">
-                <a16:creationId xmlns:a16="http://schemas.microsoft.com/office/drawing/2014/main" id="{5400956E-5E12-4E4C-855C-7ACC2BA7A722}"/>
-              </a:ext>
-            </a:extLst>
-          </p:cNvPr>
-          <p:cNvSpPr>
-            <a:spLocks xmlns:a="http://schemas.openxmlformats.org/drawingml/2006/main" noGrp="1"/>
-          </p:cNvSpPr>
-          <p:nvPr/>
-        </p:nvSpPr>
-        <p:spPr>
-          <a:xfrm xmlns:a="http://schemas.openxmlformats.org/drawingml/2006/main">
-            <a:off x="11115675" y="6305550"/>
-            <a:ext cx="457200" cy="285750"/>
+                <a16:creationId xmlns:a16="http://schemas.microsoft.com/office/drawing/2014/main" id="{6BC82A0E-893D-4517-8617-69B38F41E430}"/>
+              </a:ext>
+            </a:extLst>
+          </p:cNvPr>
+          <p:cNvSpPr>
+            <a:spLocks xmlns:a="http://schemas.openxmlformats.org/drawingml/2006/main" noGrp="1"/>
+          </p:cNvSpPr>
+          <p:nvPr/>
+        </p:nvSpPr>
+        <p:spPr>
+          <a:xfrm xmlns:a="http://schemas.openxmlformats.org/drawingml/2006/main">
+            <a:off x="609600" y="1628775"/>
+            <a:ext cx="10972800" cy="419100"/>
           </a:xfrm>
           <a:prstGeom xmlns:a="http://schemas.openxmlformats.org/drawingml/2006/main" prst="rect">
             <a:avLst/>
@@ -12719,6 +13202,499 @@
           </a:bodyPr>
           <a:lstStyle xmlns:a="http://schemas.openxmlformats.org/drawingml/2006/main"/>
           <a:p xmlns:a="http://schemas.openxmlformats.org/drawingml/2006/main">
+            <a:pPr algn="l">
+              <a:defRPr sz="2400" b="1">
+                <a:solidFill>
+                  <a:srgbClr val="16343E"/>
+                </a:solidFill>
+                <a:latin typeface="Arial"/>
+                <a:ea typeface="Arial"/>
+                <a:cs typeface="Arial"/>
+              </a:defRPr>
+            </a:pPr>
+            <a:r>
+              <a:rPr sz="2400" b="1">
+                <a:solidFill>
+                  <a:srgbClr val="16343E"/>
+                </a:solidFill>
+                <a:latin typeface="Arial"/>
+                <a:ea typeface="Arial"/>
+                <a:cs typeface="Arial"/>
+              </a:rPr>
+              <a:t>Public study</a:t>
+            </a:r>
+          </a:p>
+        </p:txBody>
+      </p:sp>
+      <p:sp>
+        <p:nvSpPr>
+          <p:cNvPr id="4" name="">
+            <a:extLst xmlns:a="http://schemas.openxmlformats.org/drawingml/2006/main">
+              <a:ext uri="{FF2B5EF4-FFF2-40B4-BE49-F238E27FC236}">
+                <a16:creationId xmlns:a16="http://schemas.microsoft.com/office/drawing/2014/main" id="{E6377937-E98E-43C0-AB32-2B5875CD3E7C}"/>
+              </a:ext>
+            </a:extLst>
+          </p:cNvPr>
+          <p:cNvSpPr>
+            <a:spLocks xmlns:a="http://schemas.openxmlformats.org/drawingml/2006/main" noGrp="1"/>
+          </p:cNvSpPr>
+          <p:nvPr/>
+        </p:nvSpPr>
+        <p:spPr>
+          <a:xfrm xmlns:a="http://schemas.openxmlformats.org/drawingml/2006/main">
+            <a:off x="609600" y="2143125"/>
+            <a:ext cx="10972800" cy="866775"/>
+          </a:xfrm>
+          <a:prstGeom xmlns:a="http://schemas.openxmlformats.org/drawingml/2006/main" prst="rect">
+            <a:avLst/>
+          </a:prstGeom>
+          <a:noFill xmlns:a="http://schemas.openxmlformats.org/drawingml/2006/main"/>
+          <a:ln xmlns:a="http://schemas.openxmlformats.org/drawingml/2006/main" w="0">
+            <a:noFill/>
+          </a:ln>
+        </p:spPr>
+        <p:txBody>
+          <a:bodyPr xmlns:a="http://schemas.openxmlformats.org/drawingml/2006/main" anchor="t">
+            <a:noAutofit/>
+          </a:bodyPr>
+          <a:lstStyle xmlns:a="http://schemas.openxmlformats.org/drawingml/2006/main"/>
+          <a:p xmlns:a="http://schemas.openxmlformats.org/drawingml/2006/main">
+            <a:pPr marL="279400" indent="-152400" algn="l">
+              <a:spcAft>
+                <a:spcPts val="1200"/>
+              </a:spcAft>
+              <a:buChar char="•"/>
+              <a:defRPr sz="2400" b="0">
+                <a:solidFill>
+                  <a:srgbClr val="16343E"/>
+                </a:solidFill>
+                <a:latin typeface="Arial"/>
+                <a:ea typeface="Arial"/>
+                <a:cs typeface="Arial"/>
+              </a:defRPr>
+            </a:pPr>
+            <a:r>
+              <a:rPr sz="2400" b="0">
+                <a:solidFill>
+                  <a:srgbClr val="16343E"/>
+                </a:solidFill>
+                <a:latin typeface="Arial"/>
+                <a:ea typeface="Arial"/>
+                <a:cs typeface="Arial"/>
+              </a:rPr>
+              <a:t>Zhang et al., Laboratory Investigation (2024): GSE212160 raw NanoString B-HOT measurements.</a:t>
+            </a:r>
+          </a:p>
+        </p:txBody>
+      </p:sp>
+      <p:sp>
+        <p:nvSpPr>
+          <p:cNvPr id="5" name="">
+            <a:extLst xmlns:a="http://schemas.openxmlformats.org/drawingml/2006/main">
+              <a:ext uri="{FF2B5EF4-FFF2-40B4-BE49-F238E27FC236}">
+                <a16:creationId xmlns:a16="http://schemas.microsoft.com/office/drawing/2014/main" id="{8C971C1F-17EF-4710-8AB3-BA3398344F6D}"/>
+              </a:ext>
+            </a:extLst>
+          </p:cNvPr>
+          <p:cNvSpPr>
+            <a:spLocks xmlns:a="http://schemas.openxmlformats.org/drawingml/2006/main" noGrp="1"/>
+          </p:cNvSpPr>
+          <p:nvPr/>
+        </p:nvSpPr>
+        <p:spPr>
+          <a:xfrm xmlns:a="http://schemas.openxmlformats.org/drawingml/2006/main">
+            <a:off x="609600" y="3343275"/>
+            <a:ext cx="10972800" cy="419100"/>
+          </a:xfrm>
+          <a:prstGeom xmlns:a="http://schemas.openxmlformats.org/drawingml/2006/main" prst="rect">
+            <a:avLst/>
+          </a:prstGeom>
+          <a:noFill xmlns:a="http://schemas.openxmlformats.org/drawingml/2006/main"/>
+          <a:ln xmlns:a="http://schemas.openxmlformats.org/drawingml/2006/main" w="0">
+            <a:noFill/>
+          </a:ln>
+        </p:spPr>
+        <p:txBody>
+          <a:bodyPr xmlns:a="http://schemas.openxmlformats.org/drawingml/2006/main" anchor="ctr">
+            <a:noAutofit/>
+          </a:bodyPr>
+          <a:lstStyle xmlns:a="http://schemas.openxmlformats.org/drawingml/2006/main"/>
+          <a:p xmlns:a="http://schemas.openxmlformats.org/drawingml/2006/main">
+            <a:pPr algn="l">
+              <a:defRPr sz="2400" b="1">
+                <a:solidFill>
+                  <a:srgbClr val="16343E"/>
+                </a:solidFill>
+                <a:latin typeface="Arial"/>
+                <a:ea typeface="Arial"/>
+                <a:cs typeface="Arial"/>
+              </a:defRPr>
+            </a:pPr>
+            <a:r>
+              <a:rPr sz="2400" b="1">
+                <a:solidFill>
+                  <a:srgbClr val="16343E"/>
+                </a:solidFill>
+                <a:latin typeface="Arial"/>
+                <a:ea typeface="Arial"/>
+                <a:cs typeface="Arial"/>
+              </a:rPr>
+              <a:t>This personal project</a:t>
+            </a:r>
+          </a:p>
+        </p:txBody>
+      </p:sp>
+      <p:sp>
+        <p:nvSpPr>
+          <p:cNvPr id="6" name="">
+            <a:extLst xmlns:a="http://schemas.openxmlformats.org/drawingml/2006/main">
+              <a:ext uri="{FF2B5EF4-FFF2-40B4-BE49-F238E27FC236}">
+                <a16:creationId xmlns:a16="http://schemas.microsoft.com/office/drawing/2014/main" id="{D420B206-7506-4C74-B0FF-6547D1C3DC23}"/>
+              </a:ext>
+            </a:extLst>
+          </p:cNvPr>
+          <p:cNvSpPr>
+            <a:spLocks xmlns:a="http://schemas.openxmlformats.org/drawingml/2006/main" noGrp="1"/>
+          </p:cNvSpPr>
+          <p:nvPr/>
+        </p:nvSpPr>
+        <p:spPr>
+          <a:xfrm xmlns:a="http://schemas.openxmlformats.org/drawingml/2006/main">
+            <a:off x="609600" y="3857625"/>
+            <a:ext cx="10972800" cy="942975"/>
+          </a:xfrm>
+          <a:prstGeom xmlns:a="http://schemas.openxmlformats.org/drawingml/2006/main" prst="rect">
+            <a:avLst/>
+          </a:prstGeom>
+          <a:noFill xmlns:a="http://schemas.openxmlformats.org/drawingml/2006/main"/>
+          <a:ln xmlns:a="http://schemas.openxmlformats.org/drawingml/2006/main" w="0">
+            <a:noFill/>
+          </a:ln>
+        </p:spPr>
+        <p:txBody>
+          <a:bodyPr xmlns:a="http://schemas.openxmlformats.org/drawingml/2006/main" anchor="t">
+            <a:noAutofit/>
+          </a:bodyPr>
+          <a:lstStyle xmlns:a="http://schemas.openxmlformats.org/drawingml/2006/main"/>
+          <a:p xmlns:a="http://schemas.openxmlformats.org/drawingml/2006/main">
+            <a:pPr marL="279400" indent="-152400" algn="l">
+              <a:spcAft>
+                <a:spcPts val="1200"/>
+              </a:spcAft>
+              <a:buChar char="•"/>
+              <a:defRPr sz="2400" b="0">
+                <a:solidFill>
+                  <a:srgbClr val="16343E"/>
+                </a:solidFill>
+                <a:latin typeface="Arial"/>
+                <a:ea typeface="Arial"/>
+                <a:cs typeface="Arial"/>
+              </a:defRPr>
+            </a:pPr>
+            <a:r>
+              <a:rPr sz="2400" b="0">
+                <a:solidFill>
+                  <a:srgbClr val="16343E"/>
+                </a:solidFill>
+                <a:latin typeface="Arial"/>
+                <a:ea typeface="Arial"/>
+                <a:cs typeface="Arial"/>
+              </a:rPr>
+              <a:t>Binary model comparisons and runs produced here, shared preparation code, and a tested local prediction service.</a:t>
+            </a:r>
+          </a:p>
+        </p:txBody>
+      </p:sp>
+      <p:sp>
+        <p:nvSpPr>
+          <p:cNvPr id="7" name="">
+            <a:extLst xmlns:a="http://schemas.openxmlformats.org/drawingml/2006/main">
+              <a:ext uri="{FF2B5EF4-FFF2-40B4-BE49-F238E27FC236}">
+                <a16:creationId xmlns:a16="http://schemas.microsoft.com/office/drawing/2014/main" id="{D00FF0A2-78F3-4229-A6EA-65361DF68C71}"/>
+              </a:ext>
+            </a:extLst>
+          </p:cNvPr>
+          <p:cNvSpPr>
+            <a:spLocks xmlns:a="http://schemas.openxmlformats.org/drawingml/2006/main" noGrp="1"/>
+          </p:cNvSpPr>
+          <p:nvPr/>
+        </p:nvSpPr>
+        <p:spPr>
+          <a:xfrm xmlns:a="http://schemas.openxmlformats.org/drawingml/2006/main">
+            <a:off x="609600" y="5191125"/>
+            <a:ext cx="10972800" cy="409575"/>
+          </a:xfrm>
+          <a:prstGeom xmlns:a="http://schemas.openxmlformats.org/drawingml/2006/main" prst="rect">
+            <a:avLst/>
+          </a:prstGeom>
+          <a:noFill xmlns:a="http://schemas.openxmlformats.org/drawingml/2006/main"/>
+          <a:ln xmlns:a="http://schemas.openxmlformats.org/drawingml/2006/main" w="0">
+            <a:noFill/>
+          </a:ln>
+        </p:spPr>
+        <p:txBody>
+          <a:bodyPr xmlns:a="http://schemas.openxmlformats.org/drawingml/2006/main" anchor="ctr">
+            <a:noAutofit/>
+          </a:bodyPr>
+          <a:lstStyle xmlns:a="http://schemas.openxmlformats.org/drawingml/2006/main"/>
+          <a:p xmlns:a="http://schemas.openxmlformats.org/drawingml/2006/main">
+            <a:pPr algn="l">
+              <a:defRPr sz="2250" b="1">
+                <a:solidFill>
+                  <a:srgbClr val="16343E"/>
+                </a:solidFill>
+                <a:latin typeface="Arial"/>
+                <a:ea typeface="Arial"/>
+                <a:cs typeface="Arial"/>
+              </a:defRPr>
+            </a:pPr>
+            <a:r>
+              <a:rPr sz="2250" b="1">
+                <a:solidFill>
+                  <a:srgbClr val="16343E"/>
+                </a:solidFill>
+                <a:latin typeface="Arial"/>
+                <a:ea typeface="Arial"/>
+                <a:cs typeface="Arial"/>
+              </a:rPr>
+              <a:t>Presentation guidance</a:t>
+            </a:r>
+          </a:p>
+        </p:txBody>
+      </p:sp>
+      <p:sp>
+        <p:nvSpPr>
+          <p:cNvPr id="8" name="">
+            <a:extLst xmlns:a="http://schemas.openxmlformats.org/drawingml/2006/main">
+              <a:ext uri="{FF2B5EF4-FFF2-40B4-BE49-F238E27FC236}">
+                <a16:creationId xmlns:a16="http://schemas.microsoft.com/office/drawing/2014/main" id="{19E3BB0A-BFA3-4717-8BBD-1C31B0E58D9A}"/>
+              </a:ext>
+            </a:extLst>
+          </p:cNvPr>
+          <p:cNvSpPr>
+            <a:spLocks xmlns:a="http://schemas.openxmlformats.org/drawingml/2006/main" noGrp="1"/>
+          </p:cNvSpPr>
+          <p:nvPr/>
+        </p:nvSpPr>
+        <p:spPr>
+          <a:xfrm xmlns:a="http://schemas.openxmlformats.org/drawingml/2006/main">
+            <a:off x="609600" y="5667375"/>
+            <a:ext cx="10972800" cy="428625"/>
+          </a:xfrm>
+          <a:prstGeom xmlns:a="http://schemas.openxmlformats.org/drawingml/2006/main" prst="rect">
+            <a:avLst/>
+          </a:prstGeom>
+          <a:noFill xmlns:a="http://schemas.openxmlformats.org/drawingml/2006/main"/>
+          <a:ln xmlns:a="http://schemas.openxmlformats.org/drawingml/2006/main" w="0">
+            <a:noFill/>
+          </a:ln>
+        </p:spPr>
+        <p:txBody>
+          <a:bodyPr xmlns:a="http://schemas.openxmlformats.org/drawingml/2006/main" anchor="ctr">
+            <a:noAutofit/>
+          </a:bodyPr>
+          <a:lstStyle xmlns:a="http://schemas.openxmlformats.org/drawingml/2006/main"/>
+          <a:p xmlns:a="http://schemas.openxmlformats.org/drawingml/2006/main">
+            <a:pPr algn="l">
+              <a:defRPr sz="1875" b="0">
+                <a:solidFill>
+                  <a:srgbClr val="16343E"/>
+                </a:solidFill>
+                <a:latin typeface="Arial"/>
+                <a:ea typeface="Arial"/>
+                <a:cs typeface="Arial"/>
+              </a:defRPr>
+            </a:pPr>
+            <a:r>
+              <a:rPr sz="1875" b="0">
+                <a:solidFill>
+                  <a:srgbClr val="16343E"/>
+                </a:solidFill>
+                <a:latin typeface="Arial"/>
+                <a:ea typeface="Arial"/>
+                <a:cs typeface="Arial"/>
+              </a:rPr>
+              <a:t>Bourne (2007), Kosslyn et al. (2012), Garner and Alley (2013), Rougier et al. (2014)</a:t>
+            </a:r>
+          </a:p>
+        </p:txBody>
+      </p:sp>
+    </p:spTree>
+    <p:extLst>
+      <p:ext uri="{BB962C8B-B14F-4D97-AF65-F5344CB8AC3E}">
+        <p14:creationId xmlns:p14="http://schemas.microsoft.com/office/powerpoint/2010/main" val="1702687091"/>
+      </p:ext>
+    </p:extLst>
+  </p:cSld>
+</p:sld>
+</file>
+
+<file path=ppt/slides/slide28.xml><?xml version="1.0" encoding="utf-8"?>
+<p:sld xmlns:p="http://schemas.openxmlformats.org/presentationml/2006/main">
+  <p:cSld>
+    <p:bg>
+      <p:bgPr>
+        <a:solidFill xmlns:a="http://schemas.openxmlformats.org/drawingml/2006/main">
+          <a:srgbClr val="F7F8F5"/>
+        </a:solidFill>
+      </p:bgPr>
+    </p:bg>
+    <p:spTree>
+      <p:nvGrpSpPr>
+        <p:cNvPr id="1" name=""/>
+        <p:cNvGrpSpPr/>
+        <p:nvPr/>
+      </p:nvGrpSpPr>
+      <p:grpSpPr>
+        <a:xfrm xmlns:a="http://schemas.openxmlformats.org/drawingml/2006/main"/>
+      </p:grpSpPr>
+      <p:sp>
+        <p:nvSpPr>
+          <p:cNvPr id="6" name="">
+            <a:extLst xmlns:a="http://schemas.openxmlformats.org/drawingml/2006/main">
+              <a:ext uri="{FF2B5EF4-FFF2-40B4-BE49-F238E27FC236}">
+                <a16:creationId xmlns:a16="http://schemas.microsoft.com/office/drawing/2014/main" id="{792F73D4-7FC3-4CF0-8799-946D4DDEDAB7}"/>
+              </a:ext>
+            </a:extLst>
+          </p:cNvPr>
+          <p:cNvSpPr>
+            <a:spLocks xmlns:a="http://schemas.openxmlformats.org/drawingml/2006/main" noGrp="1"/>
+          </p:cNvSpPr>
+          <p:nvPr/>
+        </p:nvSpPr>
+        <p:spPr>
+          <a:xfrm xmlns:a="http://schemas.openxmlformats.org/drawingml/2006/main">
+            <a:off x="609600" y="409575"/>
+            <a:ext cx="10972800" cy="1000125"/>
+          </a:xfrm>
+          <a:prstGeom xmlns:a="http://schemas.openxmlformats.org/drawingml/2006/main" prst="rect">
+            <a:avLst/>
+          </a:prstGeom>
+          <a:noFill xmlns:a="http://schemas.openxmlformats.org/drawingml/2006/main"/>
+          <a:ln xmlns:a="http://schemas.openxmlformats.org/drawingml/2006/main" w="0">
+            <a:noFill/>
+          </a:ln>
+        </p:spPr>
+        <p:txBody>
+          <a:bodyPr xmlns:a="http://schemas.openxmlformats.org/drawingml/2006/main" anchor="ctr">
+            <a:noAutofit/>
+          </a:bodyPr>
+          <a:lstStyle xmlns:a="http://schemas.openxmlformats.org/drawingml/2006/main"/>
+          <a:p xmlns:a="http://schemas.openxmlformats.org/drawingml/2006/main">
+            <a:pPr algn="l">
+              <a:defRPr sz="3450" b="1">
+                <a:solidFill>
+                  <a:srgbClr val="16343E"/>
+                </a:solidFill>
+                <a:latin typeface="Arial"/>
+                <a:ea typeface="Arial"/>
+                <a:cs typeface="Arial"/>
+              </a:defRPr>
+            </a:pPr>
+            <a:r>
+              <a:rPr sz="3450" b="1">
+                <a:solidFill>
+                  <a:srgbClr val="16343E"/>
+                </a:solidFill>
+                <a:latin typeface="Arial"/>
+                <a:ea typeface="Arial"/>
+                <a:cs typeface="Arial"/>
+              </a:rPr>
+              <a:t>Backup: UNOS research connection</a:t>
+            </a:r>
+          </a:p>
+        </p:txBody>
+      </p:sp>
+      <p:sp>
+        <p:nvSpPr>
+          <p:cNvPr id="2" name="">
+            <a:extLst xmlns:a="http://schemas.openxmlformats.org/drawingml/2006/main">
+              <a:ext uri="{FF2B5EF4-FFF2-40B4-BE49-F238E27FC236}">
+                <a16:creationId xmlns:a16="http://schemas.microsoft.com/office/drawing/2014/main" id="{BA5272BD-AC75-41B0-859F-7DE3E75C903D}"/>
+              </a:ext>
+            </a:extLst>
+          </p:cNvPr>
+          <p:cNvSpPr>
+            <a:spLocks xmlns:a="http://schemas.openxmlformats.org/drawingml/2006/main" noGrp="1"/>
+          </p:cNvSpPr>
+          <p:nvPr/>
+        </p:nvSpPr>
+        <p:spPr>
+          <a:xfrm xmlns:a="http://schemas.openxmlformats.org/drawingml/2006/main">
+            <a:off x="609600" y="6257925"/>
+            <a:ext cx="10382250" cy="361950"/>
+          </a:xfrm>
+          <a:prstGeom xmlns:a="http://schemas.openxmlformats.org/drawingml/2006/main" prst="rect">
+            <a:avLst/>
+          </a:prstGeom>
+          <a:noFill xmlns:a="http://schemas.openxmlformats.org/drawingml/2006/main"/>
+          <a:ln xmlns:a="http://schemas.openxmlformats.org/drawingml/2006/main" w="0">
+            <a:noFill/>
+          </a:ln>
+        </p:spPr>
+        <p:txBody>
+          <a:bodyPr xmlns:a="http://schemas.openxmlformats.org/drawingml/2006/main" anchor="ctr">
+            <a:noAutofit/>
+          </a:bodyPr>
+          <a:lstStyle xmlns:a="http://schemas.openxmlformats.org/drawingml/2006/main"/>
+          <a:p xmlns:a="http://schemas.openxmlformats.org/drawingml/2006/main">
+            <a:pPr algn="l">
+              <a:defRPr sz="1350" b="0">
+                <a:solidFill>
+                  <a:srgbClr val="52656B"/>
+                </a:solidFill>
+                <a:latin typeface="Arial"/>
+                <a:ea typeface="Arial"/>
+                <a:cs typeface="Arial"/>
+              </a:defRPr>
+            </a:pPr>
+            <a:r>
+              <a:rPr sz="1350" b="0">
+                <a:solidFill>
+                  <a:srgbClr val="52656B"/>
+                </a:solidFill>
+                <a:latin typeface="Arial"/>
+                <a:ea typeface="Arial"/>
+                <a:cs typeface="Arial"/>
+              </a:rPr>
+              <a:t>Source: UNOS, Using AI to identify kidney anatomy issues (2 Jun 2026)</a:t>
+            </a:r>
+          </a:p>
+        </p:txBody>
+      </p:sp>
+      <p:sp>
+        <p:nvSpPr>
+          <p:cNvPr id="3" name="">
+            <a:extLst xmlns:a="http://schemas.openxmlformats.org/drawingml/2006/main">
+              <a:ext uri="{FF2B5EF4-FFF2-40B4-BE49-F238E27FC236}">
+                <a16:creationId xmlns:a16="http://schemas.microsoft.com/office/drawing/2014/main" id="{7E6F8FD4-DB0D-4106-ADAB-B21335ED430D}"/>
+              </a:ext>
+            </a:extLst>
+          </p:cNvPr>
+          <p:cNvSpPr>
+            <a:spLocks xmlns:a="http://schemas.openxmlformats.org/drawingml/2006/main" noGrp="1"/>
+          </p:cNvSpPr>
+          <p:nvPr/>
+        </p:nvSpPr>
+        <p:spPr>
+          <a:xfrm xmlns:a="http://schemas.openxmlformats.org/drawingml/2006/main">
+            <a:off x="11115675" y="6305550"/>
+            <a:ext cx="457200" cy="285750"/>
+          </a:xfrm>
+          <a:prstGeom xmlns:a="http://schemas.openxmlformats.org/drawingml/2006/main" prst="rect">
+            <a:avLst/>
+          </a:prstGeom>
+          <a:noFill xmlns:a="http://schemas.openxmlformats.org/drawingml/2006/main"/>
+          <a:ln xmlns:a="http://schemas.openxmlformats.org/drawingml/2006/main" w="0">
+            <a:noFill/>
+          </a:ln>
+        </p:spPr>
+        <p:txBody>
+          <a:bodyPr xmlns:a="http://schemas.openxmlformats.org/drawingml/2006/main" anchor="ctr">
+            <a:noAutofit/>
+          </a:bodyPr>
+          <a:lstStyle xmlns:a="http://schemas.openxmlformats.org/drawingml/2006/main"/>
+          <a:p xmlns:a="http://schemas.openxmlformats.org/drawingml/2006/main">
             <a:pPr algn="r">
               <a:defRPr sz="1350" b="0">
                 <a:solidFill>
@@ -12738,7 +13714,7 @@
                 <a:ea typeface="Arial"/>
                 <a:cs typeface="Arial"/>
               </a:rPr>
-              <a:t>27</a:t>
+              <a:t>28</a:t>
             </a:r>
           </a:p>
         </p:txBody>
@@ -12748,7 +13724,7 @@
           <p:cNvPr id="4" name="">
             <a:extLst xmlns:a="http://schemas.openxmlformats.org/drawingml/2006/main">
               <a:ext uri="{FF2B5EF4-FFF2-40B4-BE49-F238E27FC236}">
-                <a16:creationId xmlns:a16="http://schemas.microsoft.com/office/drawing/2014/main" id="{29BE0D72-41BA-4D59-8E1C-2EFDC397E930}"/>
+                <a16:creationId xmlns:a16="http://schemas.microsoft.com/office/drawing/2014/main" id="{6259CAD9-3C27-4250-AAB4-93235A36833C}"/>
               </a:ext>
             </a:extLst>
           </p:cNvPr>
@@ -12890,7 +13866,7 @@
           <p:cNvPr id="5" name="">
             <a:extLst xmlns:a="http://schemas.openxmlformats.org/drawingml/2006/main">
               <a:ext uri="{FF2B5EF4-FFF2-40B4-BE49-F238E27FC236}">
-                <a16:creationId xmlns:a16="http://schemas.microsoft.com/office/drawing/2014/main" id="{DF76A5BA-B0E2-4735-868B-61323518C00B}"/>
+                <a16:creationId xmlns:a16="http://schemas.microsoft.com/office/drawing/2014/main" id="{6062BA0A-ECED-4DEE-95B3-D6FFF1E22A0A}"/>
               </a:ext>
             </a:extLst>
           </p:cNvPr>
@@ -12945,7 +13921,7 @@
     </p:spTree>
     <p:extLst>
       <p:ext uri="{BB962C8B-B14F-4D97-AF65-F5344CB8AC3E}">
-        <p14:creationId xmlns:p14="http://schemas.microsoft.com/office/powerpoint/2010/main" val="1884559718"/>
+        <p14:creationId xmlns:p14="http://schemas.microsoft.com/office/powerpoint/2010/main" val="1785283183"/>
       </p:ext>
     </p:extLst>
   </p:cSld>
@@ -12976,7 +13952,7 @@
           <p:cNvPr id="12" name="">
             <a:extLst xmlns:a="http://schemas.openxmlformats.org/drawingml/2006/main">
               <a:ext uri="{FF2B5EF4-FFF2-40B4-BE49-F238E27FC236}">
-                <a16:creationId xmlns:a16="http://schemas.microsoft.com/office/drawing/2014/main" id="{C2C2B19F-ED62-4F03-A4E9-7C2BF593F45B}"/>
+                <a16:creationId xmlns:a16="http://schemas.microsoft.com/office/drawing/2014/main" id="{D4D853AF-C761-4DA2-8765-B68C043E00AD}"/>
               </a:ext>
             </a:extLst>
           </p:cNvPr>
@@ -13033,7 +14009,7 @@
           <p:cNvPr id="2" name="">
             <a:extLst xmlns:a="http://schemas.openxmlformats.org/drawingml/2006/main">
               <a:ext uri="{FF2B5EF4-FFF2-40B4-BE49-F238E27FC236}">
-                <a16:creationId xmlns:a16="http://schemas.microsoft.com/office/drawing/2014/main" id="{C03AF5C1-9A69-4770-836E-CEFC0FA824F9}"/>
+                <a16:creationId xmlns:a16="http://schemas.microsoft.com/office/drawing/2014/main" id="{D90DCD1E-C6DE-45A0-A022-222066D91A07}"/>
               </a:ext>
             </a:extLst>
           </p:cNvPr>
@@ -13090,7 +14066,7 @@
           <p:cNvPr id="3" name="">
             <a:extLst xmlns:a="http://schemas.openxmlformats.org/drawingml/2006/main">
               <a:ext uri="{FF2B5EF4-FFF2-40B4-BE49-F238E27FC236}">
-                <a16:creationId xmlns:a16="http://schemas.microsoft.com/office/drawing/2014/main" id="{F2FC4AB0-B45B-4992-BA99-7FDAF5DBC4E5}"/>
+                <a16:creationId xmlns:a16="http://schemas.microsoft.com/office/drawing/2014/main" id="{1DCC894F-656A-41C3-9B2E-F66B0B888985}"/>
               </a:ext>
             </a:extLst>
           </p:cNvPr>
@@ -13147,7 +14123,7 @@
           <p:cNvPr id="4" name="">
             <a:extLst xmlns:a="http://schemas.openxmlformats.org/drawingml/2006/main">
               <a:ext uri="{FF2B5EF4-FFF2-40B4-BE49-F238E27FC236}">
-                <a16:creationId xmlns:a16="http://schemas.microsoft.com/office/drawing/2014/main" id="{D7FAA486-28B4-4122-94D2-15DC600A0804}"/>
+                <a16:creationId xmlns:a16="http://schemas.microsoft.com/office/drawing/2014/main" id="{F40695B3-CF66-46F7-8B21-BFFC0DF85315}"/>
               </a:ext>
             </a:extLst>
           </p:cNvPr>
@@ -13208,7 +14184,7 @@
           <p:cNvPr id="5" name="">
             <a:extLst xmlns:a="http://schemas.openxmlformats.org/drawingml/2006/main">
               <a:ext uri="{FF2B5EF4-FFF2-40B4-BE49-F238E27FC236}">
-                <a16:creationId xmlns:a16="http://schemas.microsoft.com/office/drawing/2014/main" id="{8050E365-A892-48BC-93F3-9544B8688A1D}"/>
+                <a16:creationId xmlns:a16="http://schemas.microsoft.com/office/drawing/2014/main" id="{D3C16AB5-4208-418F-B1A0-54A23D6A8903}"/>
               </a:ext>
             </a:extLst>
           </p:cNvPr>
@@ -13240,7 +14216,7 @@
           <p:cNvPr id="6" name="">
             <a:extLst xmlns:a="http://schemas.openxmlformats.org/drawingml/2006/main">
               <a:ext uri="{FF2B5EF4-FFF2-40B4-BE49-F238E27FC236}">
-                <a16:creationId xmlns:a16="http://schemas.microsoft.com/office/drawing/2014/main" id="{295D5FF2-0A6B-46D9-8E36-6A853A7272DA}"/>
+                <a16:creationId xmlns:a16="http://schemas.microsoft.com/office/drawing/2014/main" id="{05B485C7-E960-4EAC-B4C5-0C35F420C4C6}"/>
               </a:ext>
             </a:extLst>
           </p:cNvPr>
@@ -13297,7 +14273,7 @@
           <p:cNvPr id="7" name="">
             <a:extLst xmlns:a="http://schemas.openxmlformats.org/drawingml/2006/main">
               <a:ext uri="{FF2B5EF4-FFF2-40B4-BE49-F238E27FC236}">
-                <a16:creationId xmlns:a16="http://schemas.microsoft.com/office/drawing/2014/main" id="{8A379BC0-1758-473B-AEAA-CC34C1E16405}"/>
+                <a16:creationId xmlns:a16="http://schemas.microsoft.com/office/drawing/2014/main" id="{10CD0D37-BC50-4B47-A78B-32D6F4346256}"/>
               </a:ext>
             </a:extLst>
           </p:cNvPr>
@@ -13354,7 +14330,7 @@
           <p:cNvPr id="8" name="">
             <a:extLst xmlns:a="http://schemas.openxmlformats.org/drawingml/2006/main">
               <a:ext uri="{FF2B5EF4-FFF2-40B4-BE49-F238E27FC236}">
-                <a16:creationId xmlns:a16="http://schemas.microsoft.com/office/drawing/2014/main" id="{E9495C64-6A4B-4269-8A6A-E862B7242ADA}"/>
+                <a16:creationId xmlns:a16="http://schemas.microsoft.com/office/drawing/2014/main" id="{444710FB-0765-402D-8454-E83CE206B99D}"/>
               </a:ext>
             </a:extLst>
           </p:cNvPr>
@@ -13405,7 +14381,7 @@
                 <a:ea typeface="Arial"/>
                 <a:cs typeface="Arial"/>
               </a:rPr>
-              <a:t>This project tests how well RNA classifies recorded rejection diagnoses.</a:t>
+              <a:t>I used RNA to classify recorded diagnoses in this personal project.</a:t>
             </a:r>
           </a:p>
         </p:txBody>
@@ -13415,7 +14391,7 @@
           <p:cNvPr id="9" name="">
             <a:extLst xmlns:a="http://schemas.openxmlformats.org/drawingml/2006/main">
               <a:ext uri="{FF2B5EF4-FFF2-40B4-BE49-F238E27FC236}">
-                <a16:creationId xmlns:a16="http://schemas.microsoft.com/office/drawing/2014/main" id="{4D8E8992-A284-4830-B5F9-005589A75978}"/>
+                <a16:creationId xmlns:a16="http://schemas.microsoft.com/office/drawing/2014/main" id="{E94AB028-1A71-4941-BDD5-67B75AAF820D}"/>
               </a:ext>
             </a:extLst>
           </p:cNvPr>
@@ -13447,7 +14423,7 @@
           <p:cNvPr id="10" name="">
             <a:extLst xmlns:a="http://schemas.openxmlformats.org/drawingml/2006/main">
               <a:ext uri="{FF2B5EF4-FFF2-40B4-BE49-F238E27FC236}">
-                <a16:creationId xmlns:a16="http://schemas.microsoft.com/office/drawing/2014/main" id="{2A3E59A0-FEFD-4646-9B17-63CAFBDE3B9E}"/>
+                <a16:creationId xmlns:a16="http://schemas.microsoft.com/office/drawing/2014/main" id="{81792C3B-F69B-4268-91FA-5B4103559451}"/>
               </a:ext>
             </a:extLst>
           </p:cNvPr>
@@ -13504,7 +14480,7 @@
           <p:cNvPr id="11" name="">
             <a:extLst xmlns:a="http://schemas.openxmlformats.org/drawingml/2006/main">
               <a:ext uri="{FF2B5EF4-FFF2-40B4-BE49-F238E27FC236}">
-                <a16:creationId xmlns:a16="http://schemas.microsoft.com/office/drawing/2014/main" id="{56D68790-3531-4E48-B30C-DB717F840A11}"/>
+                <a16:creationId xmlns:a16="http://schemas.microsoft.com/office/drawing/2014/main" id="{740B7907-02BB-42C8-B8B8-20C34DECC240}"/>
               </a:ext>
             </a:extLst>
           </p:cNvPr>
@@ -13551,7 +14527,7 @@
                 <a:ea typeface="Arial"/>
                 <a:cs typeface="Arial"/>
               </a:rPr>
-              <a:t>A high rejection score could add evidence for specialist review of this biopsy. That use needs direct validation.</a:t>
+              <a:t>A high rejection score could add evidence for specialist review of this biopsy.</a:t>
             </a:r>
           </a:p>
         </p:txBody>
@@ -13559,7 +14535,7 @@
     </p:spTree>
     <p:extLst>
       <p:ext uri="{BB962C8B-B14F-4D97-AF65-F5344CB8AC3E}">
-        <p14:creationId xmlns:p14="http://schemas.microsoft.com/office/powerpoint/2010/main" val="1731437620"/>
+        <p14:creationId xmlns:p14="http://schemas.microsoft.com/office/powerpoint/2010/main" val="1781090242"/>
       </p:ext>
     </p:extLst>
   </p:cSld>
@@ -13590,7 +14566,7 @@
           <p:cNvPr id="13" name="">
             <a:extLst xmlns:a="http://schemas.openxmlformats.org/drawingml/2006/main">
               <a:ext uri="{FF2B5EF4-FFF2-40B4-BE49-F238E27FC236}">
-                <a16:creationId xmlns:a16="http://schemas.microsoft.com/office/drawing/2014/main" id="{2F79A06A-FAD6-46A5-90B1-3C0D09EB4DE4}"/>
+                <a16:creationId xmlns:a16="http://schemas.microsoft.com/office/drawing/2014/main" id="{4A0A6802-60E1-4F71-841B-0B9DB7E3D07F}"/>
               </a:ext>
             </a:extLst>
           </p:cNvPr>
@@ -13647,7 +14623,7 @@
           <p:cNvPr id="2" name="">
             <a:extLst xmlns:a="http://schemas.openxmlformats.org/drawingml/2006/main">
               <a:ext uri="{FF2B5EF4-FFF2-40B4-BE49-F238E27FC236}">
-                <a16:creationId xmlns:a16="http://schemas.microsoft.com/office/drawing/2014/main" id="{112A1B6F-5766-432E-AAEA-CFA57988881A}"/>
+                <a16:creationId xmlns:a16="http://schemas.microsoft.com/office/drawing/2014/main" id="{5FD35806-55B6-48E9-AE77-0ACD56DF9AE1}"/>
               </a:ext>
             </a:extLst>
           </p:cNvPr>
@@ -13704,7 +14680,7 @@
           <p:cNvPr id="3" name="">
             <a:extLst xmlns:a="http://schemas.openxmlformats.org/drawingml/2006/main">
               <a:ext uri="{FF2B5EF4-FFF2-40B4-BE49-F238E27FC236}">
-                <a16:creationId xmlns:a16="http://schemas.microsoft.com/office/drawing/2014/main" id="{F9E35677-C436-4927-AB9D-8E3191DDFD0B}"/>
+                <a16:creationId xmlns:a16="http://schemas.microsoft.com/office/drawing/2014/main" id="{9764B4CD-157D-43D5-AB9A-EBAFDC5F04E1}"/>
               </a:ext>
             </a:extLst>
           </p:cNvPr>
@@ -13784,7 +14760,7 @@
           <p:cNvPr id="4" name="">
             <a:extLst xmlns:a="http://schemas.openxmlformats.org/drawingml/2006/main">
               <a:ext uri="{FF2B5EF4-FFF2-40B4-BE49-F238E27FC236}">
-                <a16:creationId xmlns:a16="http://schemas.microsoft.com/office/drawing/2014/main" id="{9728830D-33B6-4BF0-9714-6EF9FDBDE3BA}"/>
+                <a16:creationId xmlns:a16="http://schemas.microsoft.com/office/drawing/2014/main" id="{700A1483-CD9B-4E66-AF79-9DBED3DA28FF}"/>
               </a:ext>
             </a:extLst>
           </p:cNvPr>
@@ -13864,7 +14840,7 @@
           <p:cNvPr id="5" name="">
             <a:extLst xmlns:a="http://schemas.openxmlformats.org/drawingml/2006/main">
               <a:ext uri="{FF2B5EF4-FFF2-40B4-BE49-F238E27FC236}">
-                <a16:creationId xmlns:a16="http://schemas.microsoft.com/office/drawing/2014/main" id="{CB430DC7-55E8-4C91-80E0-2C7BA3E14CEA}"/>
+                <a16:creationId xmlns:a16="http://schemas.microsoft.com/office/drawing/2014/main" id="{CA48B105-69D3-43C6-9F16-DD65D2CBC73F}"/>
               </a:ext>
             </a:extLst>
           </p:cNvPr>
@@ -13893,7 +14869,7 @@
           <p:cNvPr id="6" name="">
             <a:extLst xmlns:a="http://schemas.openxmlformats.org/drawingml/2006/main">
               <a:ext uri="{FF2B5EF4-FFF2-40B4-BE49-F238E27FC236}">
-                <a16:creationId xmlns:a16="http://schemas.microsoft.com/office/drawing/2014/main" id="{2A1119C6-95BF-4A1A-AD11-E3AEECF7C0C9}"/>
+                <a16:creationId xmlns:a16="http://schemas.microsoft.com/office/drawing/2014/main" id="{FD3044F7-8F33-4C18-835A-A0522F10B3E2}"/>
               </a:ext>
             </a:extLst>
           </p:cNvPr>
@@ -13973,7 +14949,7 @@
           <p:cNvPr id="7" name="">
             <a:extLst xmlns:a="http://schemas.openxmlformats.org/drawingml/2006/main">
               <a:ext uri="{FF2B5EF4-FFF2-40B4-BE49-F238E27FC236}">
-                <a16:creationId xmlns:a16="http://schemas.microsoft.com/office/drawing/2014/main" id="{59DC8E45-8715-4C5A-BE3C-6CEEF3D9E8A1}"/>
+                <a16:creationId xmlns:a16="http://schemas.microsoft.com/office/drawing/2014/main" id="{099AAEA2-2CBB-4743-AF46-592AFF36E53C}"/>
               </a:ext>
             </a:extLst>
           </p:cNvPr>
@@ -14076,7 +15052,7 @@
           <p:cNvPr id="8" name="">
             <a:extLst xmlns:a="http://schemas.openxmlformats.org/drawingml/2006/main">
               <a:ext uri="{FF2B5EF4-FFF2-40B4-BE49-F238E27FC236}">
-                <a16:creationId xmlns:a16="http://schemas.microsoft.com/office/drawing/2014/main" id="{3F858CA2-683E-48B4-8D22-FD68A1F61C61}"/>
+                <a16:creationId xmlns:a16="http://schemas.microsoft.com/office/drawing/2014/main" id="{5B7DC1EA-A84A-4DA6-BEBA-0703FC176FCB}"/>
               </a:ext>
             </a:extLst>
           </p:cNvPr>
@@ -14105,7 +15081,7 @@
           <p:cNvPr id="9" name="">
             <a:extLst xmlns:a="http://schemas.openxmlformats.org/drawingml/2006/main">
               <a:ext uri="{FF2B5EF4-FFF2-40B4-BE49-F238E27FC236}">
-                <a16:creationId xmlns:a16="http://schemas.microsoft.com/office/drawing/2014/main" id="{E1ECC72D-AEBC-4041-8F02-491620920AA9}"/>
+                <a16:creationId xmlns:a16="http://schemas.microsoft.com/office/drawing/2014/main" id="{B74A76E9-C457-4A65-B468-59A7F1A5AE9F}"/>
               </a:ext>
             </a:extLst>
           </p:cNvPr>
@@ -14185,7 +15161,7 @@
           <p:cNvPr id="10" name="">
             <a:extLst xmlns:a="http://schemas.openxmlformats.org/drawingml/2006/main">
               <a:ext uri="{FF2B5EF4-FFF2-40B4-BE49-F238E27FC236}">
-                <a16:creationId xmlns:a16="http://schemas.microsoft.com/office/drawing/2014/main" id="{F032FB58-BBDE-475A-AF7C-07746FF4FB97}"/>
+                <a16:creationId xmlns:a16="http://schemas.microsoft.com/office/drawing/2014/main" id="{C14773EF-9F56-4DA7-AC34-9CB4C9F59933}"/>
               </a:ext>
             </a:extLst>
           </p:cNvPr>
@@ -14265,7 +15241,7 @@
           <p:cNvPr id="11" name="">
             <a:extLst xmlns:a="http://schemas.openxmlformats.org/drawingml/2006/main">
               <a:ext uri="{FF2B5EF4-FFF2-40B4-BE49-F238E27FC236}">
-                <a16:creationId xmlns:a16="http://schemas.microsoft.com/office/drawing/2014/main" id="{17107F7D-5FED-40E1-A405-F51AF263E978}"/>
+                <a16:creationId xmlns:a16="http://schemas.microsoft.com/office/drawing/2014/main" id="{319A97AD-B028-4ADC-9E5F-3348E01FCE5F}"/>
               </a:ext>
             </a:extLst>
           </p:cNvPr>
@@ -14322,7 +15298,7 @@
           <p:cNvPr id="12" name="">
             <a:extLst xmlns:a="http://schemas.openxmlformats.org/drawingml/2006/main">
               <a:ext uri="{FF2B5EF4-FFF2-40B4-BE49-F238E27FC236}">
-                <a16:creationId xmlns:a16="http://schemas.microsoft.com/office/drawing/2014/main" id="{663C5AA1-6A21-4297-A81D-F39FD1C371FC}"/>
+                <a16:creationId xmlns:a16="http://schemas.microsoft.com/office/drawing/2014/main" id="{7B5DC6CA-C3C7-4715-878B-406D312C8EC3}"/>
               </a:ext>
             </a:extLst>
           </p:cNvPr>
@@ -14369,7 +15345,7 @@
                 <a:ea typeface="Arial"/>
                 <a:cs typeface="Arial"/>
               </a:rPr>
-              <a:t>This project measures agreement with recorded diagnoses.</a:t>
+              <a:t>This personal project measured agreement with recorded diagnoses.</a:t>
             </a:r>
           </a:p>
           <a:p xmlns:a="http://schemas.openxmlformats.org/drawingml/2006/main">
@@ -14400,7 +15376,7 @@
     </p:spTree>
     <p:extLst>
       <p:ext uri="{BB962C8B-B14F-4D97-AF65-F5344CB8AC3E}">
-        <p14:creationId xmlns:p14="http://schemas.microsoft.com/office/powerpoint/2010/main" val="1374412812"/>
+        <p14:creationId xmlns:p14="http://schemas.microsoft.com/office/powerpoint/2010/main" val="386584874"/>
       </p:ext>
     </p:extLst>
   </p:cSld>
@@ -14431,7 +15407,7 @@
           <p:cNvPr id="13" name="">
             <a:extLst xmlns:a="http://schemas.openxmlformats.org/drawingml/2006/main">
               <a:ext uri="{FF2B5EF4-FFF2-40B4-BE49-F238E27FC236}">
-                <a16:creationId xmlns:a16="http://schemas.microsoft.com/office/drawing/2014/main" id="{517497A1-0C23-4806-AC7B-AAF575DBB633}"/>
+                <a16:creationId xmlns:a16="http://schemas.microsoft.com/office/drawing/2014/main" id="{1AEE0D6C-C4B9-44FD-95A3-7FE38B892007}"/>
               </a:ext>
             </a:extLst>
           </p:cNvPr>
@@ -14488,7 +15464,7 @@
           <p:cNvPr id="2" name="">
             <a:extLst xmlns:a="http://schemas.openxmlformats.org/drawingml/2006/main">
               <a:ext uri="{FF2B5EF4-FFF2-40B4-BE49-F238E27FC236}">
-                <a16:creationId xmlns:a16="http://schemas.microsoft.com/office/drawing/2014/main" id="{04EC1BB6-D4D2-467B-8E4D-1EE08DA65541}"/>
+                <a16:creationId xmlns:a16="http://schemas.microsoft.com/office/drawing/2014/main" id="{8ACFE6E9-E7AD-43A1-B79F-DB52D31F433A}"/>
               </a:ext>
             </a:extLst>
           </p:cNvPr>
@@ -14545,7 +15521,7 @@
           <p:cNvPr id="3" name="">
             <a:extLst xmlns:a="http://schemas.openxmlformats.org/drawingml/2006/main">
               <a:ext uri="{FF2B5EF4-FFF2-40B4-BE49-F238E27FC236}">
-                <a16:creationId xmlns:a16="http://schemas.microsoft.com/office/drawing/2014/main" id="{4245295C-B14B-4CFE-BF8A-0909F342A510}"/>
+                <a16:creationId xmlns:a16="http://schemas.microsoft.com/office/drawing/2014/main" id="{7AA12727-FDB6-4C8A-B214-8BFAC369F758}"/>
               </a:ext>
             </a:extLst>
           </p:cNvPr>
@@ -14602,7 +15578,7 @@
           <p:cNvPr id="4" name="">
             <a:extLst xmlns:a="http://schemas.openxmlformats.org/drawingml/2006/main">
               <a:ext uri="{FF2B5EF4-FFF2-40B4-BE49-F238E27FC236}">
-                <a16:creationId xmlns:a16="http://schemas.microsoft.com/office/drawing/2014/main" id="{1BF2AB9C-AD2E-41C6-8B9A-F79927A20DA8}"/>
+                <a16:creationId xmlns:a16="http://schemas.microsoft.com/office/drawing/2014/main" id="{248C12FC-B961-47E0-BE82-C3E202D12CA0}"/>
               </a:ext>
             </a:extLst>
           </p:cNvPr>
@@ -14659,7 +15635,7 @@
           <p:cNvPr id="5" name="">
             <a:extLst xmlns:a="http://schemas.openxmlformats.org/drawingml/2006/main">
               <a:ext uri="{FF2B5EF4-FFF2-40B4-BE49-F238E27FC236}">
-                <a16:creationId xmlns:a16="http://schemas.microsoft.com/office/drawing/2014/main" id="{EF1D6A05-DCF3-4F01-9DE7-722B805433A9}"/>
+                <a16:creationId xmlns:a16="http://schemas.microsoft.com/office/drawing/2014/main" id="{85913D47-B39E-46CF-89EC-DB045E975E62}"/>
               </a:ext>
             </a:extLst>
           </p:cNvPr>
@@ -14716,7 +15692,7 @@
           <p:cNvPr id="6" name="">
             <a:extLst xmlns:a="http://schemas.openxmlformats.org/drawingml/2006/main">
               <a:ext uri="{FF2B5EF4-FFF2-40B4-BE49-F238E27FC236}">
-                <a16:creationId xmlns:a16="http://schemas.microsoft.com/office/drawing/2014/main" id="{6F4DEA1B-4018-45BA-B3C1-48CB8218DAEF}"/>
+                <a16:creationId xmlns:a16="http://schemas.microsoft.com/office/drawing/2014/main" id="{30F3E37F-F324-439D-BA90-5BB03D5BDF74}"/>
               </a:ext>
             </a:extLst>
           </p:cNvPr>
@@ -15357,7 +16333,7 @@
           <p:cNvPr id="9" name="">
             <a:extLst xmlns:a="http://schemas.openxmlformats.org/drawingml/2006/main">
               <a:ext uri="{FF2B5EF4-FFF2-40B4-BE49-F238E27FC236}">
-                <a16:creationId xmlns:a16="http://schemas.microsoft.com/office/drawing/2014/main" id="{D9E367C0-0516-42F2-85D1-9042DE15EAD7}"/>
+                <a16:creationId xmlns:a16="http://schemas.microsoft.com/office/drawing/2014/main" id="{F5F9059B-0022-469F-BD4A-D19A69E2FBD4}"/>
               </a:ext>
             </a:extLst>
           </p:cNvPr>
@@ -15386,7 +16362,7 @@
           <p:cNvPr id="10" name="">
             <a:extLst xmlns:a="http://schemas.openxmlformats.org/drawingml/2006/main">
               <a:ext uri="{FF2B5EF4-FFF2-40B4-BE49-F238E27FC236}">
-                <a16:creationId xmlns:a16="http://schemas.microsoft.com/office/drawing/2014/main" id="{8190575A-F8D9-4C93-B3D2-B23863226946}"/>
+                <a16:creationId xmlns:a16="http://schemas.microsoft.com/office/drawing/2014/main" id="{A2F07EE9-05BA-499C-BCFB-78E3A41B2A29}"/>
               </a:ext>
             </a:extLst>
           </p:cNvPr>
@@ -15443,7 +16419,7 @@
           <p:cNvPr id="11" name="">
             <a:extLst xmlns:a="http://schemas.openxmlformats.org/drawingml/2006/main">
               <a:ext uri="{FF2B5EF4-FFF2-40B4-BE49-F238E27FC236}">
-                <a16:creationId xmlns:a16="http://schemas.microsoft.com/office/drawing/2014/main" id="{6FC5A186-1A1A-42D1-8A13-D3BA6D88870A}"/>
+                <a16:creationId xmlns:a16="http://schemas.microsoft.com/office/drawing/2014/main" id="{ACB8663F-7049-4618-BD05-FBF0192726B2}"/>
               </a:ext>
             </a:extLst>
           </p:cNvPr>
@@ -15500,7 +16476,7 @@
           <p:cNvPr id="12" name="">
             <a:extLst xmlns:a="http://schemas.openxmlformats.org/drawingml/2006/main">
               <a:ext uri="{FF2B5EF4-FFF2-40B4-BE49-F238E27FC236}">
-                <a16:creationId xmlns:a16="http://schemas.microsoft.com/office/drawing/2014/main" id="{0BC0FA2D-1820-4D9A-BF5D-FEAB20B7DD22}"/>
+                <a16:creationId xmlns:a16="http://schemas.microsoft.com/office/drawing/2014/main" id="{5AACCB7D-5496-4790-95E7-488540F0C82E}"/>
               </a:ext>
             </a:extLst>
           </p:cNvPr>
@@ -15586,7 +16562,7 @@
     </p:spTree>
     <p:extLst>
       <p:ext uri="{BB962C8B-B14F-4D97-AF65-F5344CB8AC3E}">
-        <p14:creationId xmlns:p14="http://schemas.microsoft.com/office/powerpoint/2010/main" val="53266795"/>
+        <p14:creationId xmlns:p14="http://schemas.microsoft.com/office/powerpoint/2010/main" val="1565939520"/>
       </p:ext>
     </p:extLst>
   </p:cSld>
@@ -15617,7 +16593,7 @@
           <p:cNvPr id="7" name="">
             <a:extLst xmlns:a="http://schemas.openxmlformats.org/drawingml/2006/main">
               <a:ext uri="{FF2B5EF4-FFF2-40B4-BE49-F238E27FC236}">
-                <a16:creationId xmlns:a16="http://schemas.microsoft.com/office/drawing/2014/main" id="{3B13B808-2BB4-4937-B684-33B4F348E3D8}"/>
+                <a16:creationId xmlns:a16="http://schemas.microsoft.com/office/drawing/2014/main" id="{530203F8-063A-41FF-BE49-026824C9C152}"/>
               </a:ext>
             </a:extLst>
           </p:cNvPr>
@@ -15674,7 +16650,7 @@
           <p:cNvPr id="2" name="">
             <a:extLst xmlns:a="http://schemas.openxmlformats.org/drawingml/2006/main">
               <a:ext uri="{FF2B5EF4-FFF2-40B4-BE49-F238E27FC236}">
-                <a16:creationId xmlns:a16="http://schemas.microsoft.com/office/drawing/2014/main" id="{8B0563C3-7CC1-4BA1-BC4E-C3896C419745}"/>
+                <a16:creationId xmlns:a16="http://schemas.microsoft.com/office/drawing/2014/main" id="{64EC3BB2-2CA0-4BDD-A69D-C55F9CE9EAB2}"/>
               </a:ext>
             </a:extLst>
           </p:cNvPr>
@@ -15731,7 +16707,7 @@
           <p:cNvPr id="3" name="">
             <a:extLst xmlns:a="http://schemas.openxmlformats.org/drawingml/2006/main">
               <a:ext uri="{FF2B5EF4-FFF2-40B4-BE49-F238E27FC236}">
-                <a16:creationId xmlns:a16="http://schemas.microsoft.com/office/drawing/2014/main" id="{F934B2D8-1DCD-4FAC-BC37-99F02BD24DA9}"/>
+                <a16:creationId xmlns:a16="http://schemas.microsoft.com/office/drawing/2014/main" id="{F17EA671-C37B-4538-8E20-4E11F85D2D2F}"/>
               </a:ext>
             </a:extLst>
           </p:cNvPr>
@@ -15788,7 +16764,7 @@
           <p:cNvPr id="4" name="">
             <a:extLst xmlns:a="http://schemas.openxmlformats.org/drawingml/2006/main">
               <a:ext uri="{FF2B5EF4-FFF2-40B4-BE49-F238E27FC236}">
-                <a16:creationId xmlns:a16="http://schemas.microsoft.com/office/drawing/2014/main" id="{2362F86C-0BF9-4658-BBD7-AE3E9F846C23}"/>
+                <a16:creationId xmlns:a16="http://schemas.microsoft.com/office/drawing/2014/main" id="{E19FD193-D912-427E-B74A-BC9F58455B3E}"/>
               </a:ext>
             </a:extLst>
           </p:cNvPr>
@@ -15835,7 +16811,7 @@
                 <a:ea typeface="Arial"/>
                 <a:cs typeface="Arial"/>
               </a:rPr>
-              <a:t>The model combines the three rejection categories included in this study.</a:t>
+              <a:t>The model combines the three rejection categories in the public dataset.</a:t>
             </a:r>
           </a:p>
         </p:txBody>
@@ -16268,7 +17244,7 @@
           <p:cNvPr id="6" name="">
             <a:extLst xmlns:a="http://schemas.openxmlformats.org/drawingml/2006/main">
               <a:ext uri="{FF2B5EF4-FFF2-40B4-BE49-F238E27FC236}">
-                <a16:creationId xmlns:a16="http://schemas.microsoft.com/office/drawing/2014/main" id="{9F559C41-DB40-4107-9C0B-8EBA86D27B45}"/>
+                <a16:creationId xmlns:a16="http://schemas.microsoft.com/office/drawing/2014/main" id="{1E3310EB-7759-43E9-A078-3D6C3FD810A9}"/>
               </a:ext>
             </a:extLst>
           </p:cNvPr>
@@ -16315,7 +17291,7 @@
                 <a:ea typeface="Arial"/>
                 <a:cs typeface="Arial"/>
               </a:rPr>
-              <a:t>Some diagnostic categories were excluded from the study.</a:t>
+              <a:t>The authors excluded some diagnostic categories from the dataset.</a:t>
             </a:r>
           </a:p>
         </p:txBody>
@@ -16323,7 +17299,7 @@
     </p:spTree>
     <p:extLst>
       <p:ext uri="{BB962C8B-B14F-4D97-AF65-F5344CB8AC3E}">
-        <p14:creationId xmlns:p14="http://schemas.microsoft.com/office/powerpoint/2010/main" val="1867624314"/>
+        <p14:creationId xmlns:p14="http://schemas.microsoft.com/office/powerpoint/2010/main" val="921123833"/>
       </p:ext>
     </p:extLst>
   </p:cSld>
@@ -16354,7 +17330,7 @@
           <p:cNvPr id="11" name="">
             <a:extLst xmlns:a="http://schemas.openxmlformats.org/drawingml/2006/main">
               <a:ext uri="{FF2B5EF4-FFF2-40B4-BE49-F238E27FC236}">
-                <a16:creationId xmlns:a16="http://schemas.microsoft.com/office/drawing/2014/main" id="{8FA6ABA4-7136-4747-9567-66C3F23819FB}"/>
+                <a16:creationId xmlns:a16="http://schemas.microsoft.com/office/drawing/2014/main" id="{1A9EC766-77A7-4389-B5FF-64FC1971935C}"/>
               </a:ext>
             </a:extLst>
           </p:cNvPr>
@@ -16411,7 +17387,7 @@
           <p:cNvPr id="2" name="">
             <a:extLst xmlns:a="http://schemas.openxmlformats.org/drawingml/2006/main">
               <a:ext uri="{FF2B5EF4-FFF2-40B4-BE49-F238E27FC236}">
-                <a16:creationId xmlns:a16="http://schemas.microsoft.com/office/drawing/2014/main" id="{B8679DE8-5A33-4F4C-A307-361D66662BAA}"/>
+                <a16:creationId xmlns:a16="http://schemas.microsoft.com/office/drawing/2014/main" id="{85567666-AAC0-4B7C-96AB-85D15D3A87DE}"/>
               </a:ext>
             </a:extLst>
           </p:cNvPr>
@@ -16468,7 +17444,7 @@
           <p:cNvPr id="3" name="">
             <a:extLst xmlns:a="http://schemas.openxmlformats.org/drawingml/2006/main">
               <a:ext uri="{FF2B5EF4-FFF2-40B4-BE49-F238E27FC236}">
-                <a16:creationId xmlns:a16="http://schemas.microsoft.com/office/drawing/2014/main" id="{A945066F-904A-4C5C-BE02-6857700C5B2F}"/>
+                <a16:creationId xmlns:a16="http://schemas.microsoft.com/office/drawing/2014/main" id="{6323A5A9-B1E6-4060-8032-B6E244107C4A}"/>
               </a:ext>
             </a:extLst>
           </p:cNvPr>
@@ -16525,7 +17501,7 @@
           <p:cNvPr id="4" name="">
             <a:extLst xmlns:a="http://schemas.openxmlformats.org/drawingml/2006/main">
               <a:ext uri="{FF2B5EF4-FFF2-40B4-BE49-F238E27FC236}">
-                <a16:creationId xmlns:a16="http://schemas.microsoft.com/office/drawing/2014/main" id="{D4435EB7-FDB9-4AC4-968B-DCB4DAD16862}"/>
+                <a16:creationId xmlns:a16="http://schemas.microsoft.com/office/drawing/2014/main" id="{C345ECE2-89D5-4EF4-85A0-160E90189ADC}"/>
               </a:ext>
             </a:extLst>
           </p:cNvPr>
@@ -16582,7 +17558,7 @@
           <p:cNvPr id="5" name="">
             <a:extLst xmlns:a="http://schemas.openxmlformats.org/drawingml/2006/main">
               <a:ext uri="{FF2B5EF4-FFF2-40B4-BE49-F238E27FC236}">
-                <a16:creationId xmlns:a16="http://schemas.microsoft.com/office/drawing/2014/main" id="{289C47E9-43DD-4001-A86F-CBA8B1228B37}"/>
+                <a16:creationId xmlns:a16="http://schemas.microsoft.com/office/drawing/2014/main" id="{2F6AB28F-A9CA-4536-AC0F-68BD5C74AD32}"/>
               </a:ext>
             </a:extLst>
           </p:cNvPr>
@@ -16639,7 +17615,7 @@
           <p:cNvPr id="6" name="">
             <a:extLst xmlns:a="http://schemas.openxmlformats.org/drawingml/2006/main">
               <a:ext uri="{FF2B5EF4-FFF2-40B4-BE49-F238E27FC236}">
-                <a16:creationId xmlns:a16="http://schemas.microsoft.com/office/drawing/2014/main" id="{1DD675FC-F32B-42AB-B917-48D75F7163BE}"/>
+                <a16:creationId xmlns:a16="http://schemas.microsoft.com/office/drawing/2014/main" id="{26C9D8F6-2B95-4C71-B7BF-897685A95465}"/>
               </a:ext>
             </a:extLst>
           </p:cNvPr>
@@ -16696,7 +17672,7 @@
           <p:cNvPr id="7" name="">
             <a:extLst xmlns:a="http://schemas.openxmlformats.org/drawingml/2006/main">
               <a:ext uri="{FF2B5EF4-FFF2-40B4-BE49-F238E27FC236}">
-                <a16:creationId xmlns:a16="http://schemas.microsoft.com/office/drawing/2014/main" id="{70DC698D-BDEA-4A70-8C68-3ADC74FC6EC3}"/>
+                <a16:creationId xmlns:a16="http://schemas.microsoft.com/office/drawing/2014/main" id="{142126E8-305D-488B-A1EC-3AB53A4CD8AD}"/>
               </a:ext>
             </a:extLst>
           </p:cNvPr>
@@ -16784,7 +17760,7 @@
           <p:cNvPr id="8" name="">
             <a:extLst xmlns:a="http://schemas.openxmlformats.org/drawingml/2006/main">
               <a:ext uri="{FF2B5EF4-FFF2-40B4-BE49-F238E27FC236}">
-                <a16:creationId xmlns:a16="http://schemas.microsoft.com/office/drawing/2014/main" id="{F33373E1-ADE9-476C-B000-E4341011AC2B}"/>
+                <a16:creationId xmlns:a16="http://schemas.microsoft.com/office/drawing/2014/main" id="{A9070DA0-29A3-4EFF-B02F-E37870919204}"/>
               </a:ext>
             </a:extLst>
           </p:cNvPr>
@@ -16841,7 +17817,7 @@
           <p:cNvPr id="9" name="">
             <a:extLst xmlns:a="http://schemas.openxmlformats.org/drawingml/2006/main">
               <a:ext uri="{FF2B5EF4-FFF2-40B4-BE49-F238E27FC236}">
-                <a16:creationId xmlns:a16="http://schemas.microsoft.com/office/drawing/2014/main" id="{655B14D4-CDA2-44BA-A0E2-CF066D25AAFC}"/>
+                <a16:creationId xmlns:a16="http://schemas.microsoft.com/office/drawing/2014/main" id="{69AD5B74-29E0-4123-AE44-CF7D9DEF89FB}"/>
               </a:ext>
             </a:extLst>
           </p:cNvPr>
@@ -16898,7 +17874,7 @@
           <p:cNvPr id="10" name="">
             <a:extLst xmlns:a="http://schemas.openxmlformats.org/drawingml/2006/main">
               <a:ext uri="{FF2B5EF4-FFF2-40B4-BE49-F238E27FC236}">
-                <a16:creationId xmlns:a16="http://schemas.microsoft.com/office/drawing/2014/main" id="{A2BC13FD-3F68-46D9-8392-9EAEEB02B34F}"/>
+                <a16:creationId xmlns:a16="http://schemas.microsoft.com/office/drawing/2014/main" id="{08970738-5308-405F-8E5B-B2D491585586}"/>
               </a:ext>
             </a:extLst>
           </p:cNvPr>
@@ -16984,7 +17960,7 @@
     </p:spTree>
     <p:extLst>
       <p:ext uri="{BB962C8B-B14F-4D97-AF65-F5344CB8AC3E}">
-        <p14:creationId xmlns:p14="http://schemas.microsoft.com/office/powerpoint/2010/main" val="481325537"/>
+        <p14:creationId xmlns:p14="http://schemas.microsoft.com/office/powerpoint/2010/main" val="954663590"/>
       </p:ext>
     </p:extLst>
   </p:cSld>
@@ -17015,7 +17991,7 @@
           <p:cNvPr id="5" name="">
             <a:extLst xmlns:a="http://schemas.openxmlformats.org/drawingml/2006/main">
               <a:ext uri="{FF2B5EF4-FFF2-40B4-BE49-F238E27FC236}">
-                <a16:creationId xmlns:a16="http://schemas.microsoft.com/office/drawing/2014/main" id="{998BC72A-C5D1-4659-80EB-65CA7696DF34}"/>
+                <a16:creationId xmlns:a16="http://schemas.microsoft.com/office/drawing/2014/main" id="{F59022C3-8492-4A1A-9115-541B3434698A}"/>
               </a:ext>
             </a:extLst>
           </p:cNvPr>
@@ -17072,7 +18048,7 @@
           <p:cNvPr id="2" name="">
             <a:extLst xmlns:a="http://schemas.openxmlformats.org/drawingml/2006/main">
               <a:ext uri="{FF2B5EF4-FFF2-40B4-BE49-F238E27FC236}">
-                <a16:creationId xmlns:a16="http://schemas.microsoft.com/office/drawing/2014/main" id="{44AEECC4-F095-4F81-8CA4-452EE1AD821A}"/>
+                <a16:creationId xmlns:a16="http://schemas.microsoft.com/office/drawing/2014/main" id="{42A1B70B-B1A7-44B0-AD75-8A440A85C1D3}"/>
               </a:ext>
             </a:extLst>
           </p:cNvPr>
@@ -17129,7 +18105,7 @@
           <p:cNvPr id="3" name="">
             <a:extLst xmlns:a="http://schemas.openxmlformats.org/drawingml/2006/main">
               <a:ext uri="{FF2B5EF4-FFF2-40B4-BE49-F238E27FC236}">
-                <a16:creationId xmlns:a16="http://schemas.microsoft.com/office/drawing/2014/main" id="{D1F921DB-AA27-4F56-9EDE-8F4EAC388976}"/>
+                <a16:creationId xmlns:a16="http://schemas.microsoft.com/office/drawing/2014/main" id="{8D781209-53D4-4F98-919E-464A38163246}"/>
               </a:ext>
             </a:extLst>
           </p:cNvPr>
@@ -17476,7 +18452,7 @@
     </p:spTree>
     <p:extLst>
       <p:ext uri="{BB962C8B-B14F-4D97-AF65-F5344CB8AC3E}">
-        <p14:creationId xmlns:p14="http://schemas.microsoft.com/office/powerpoint/2010/main" val="603511967"/>
+        <p14:creationId xmlns:p14="http://schemas.microsoft.com/office/powerpoint/2010/main" val="54921498"/>
       </p:ext>
     </p:extLst>
   </p:cSld>
@@ -17507,7 +18483,7 @@
           <p:cNvPr id="11" name="">
             <a:extLst xmlns:a="http://schemas.openxmlformats.org/drawingml/2006/main">
               <a:ext uri="{FF2B5EF4-FFF2-40B4-BE49-F238E27FC236}">
-                <a16:creationId xmlns:a16="http://schemas.microsoft.com/office/drawing/2014/main" id="{A32EED76-5B79-45EA-B79E-62E593160FBF}"/>
+                <a16:creationId xmlns:a16="http://schemas.microsoft.com/office/drawing/2014/main" id="{E759C133-CC44-41D0-800A-FD32AA27D446}"/>
               </a:ext>
             </a:extLst>
           </p:cNvPr>
@@ -17564,7 +18540,7 @@
           <p:cNvPr id="2" name="">
             <a:extLst xmlns:a="http://schemas.openxmlformats.org/drawingml/2006/main">
               <a:ext uri="{FF2B5EF4-FFF2-40B4-BE49-F238E27FC236}">
-                <a16:creationId xmlns:a16="http://schemas.microsoft.com/office/drawing/2014/main" id="{303DDE87-11A4-43E5-8369-63F91B8AE660}"/>
+                <a16:creationId xmlns:a16="http://schemas.microsoft.com/office/drawing/2014/main" id="{A0CC3C13-2C92-44B5-B27A-7F26B0BFB94C}"/>
               </a:ext>
             </a:extLst>
           </p:cNvPr>
@@ -17621,7 +18597,7 @@
           <p:cNvPr id="3" name="">
             <a:extLst xmlns:a="http://schemas.openxmlformats.org/drawingml/2006/main">
               <a:ext uri="{FF2B5EF4-FFF2-40B4-BE49-F238E27FC236}">
-                <a16:creationId xmlns:a16="http://schemas.microsoft.com/office/drawing/2014/main" id="{5FFDEF61-9CDB-4A07-877F-75CD426FC67C}"/>
+                <a16:creationId xmlns:a16="http://schemas.microsoft.com/office/drawing/2014/main" id="{3B1DD1C5-7E8E-492D-8AE3-6F7C821738A5}"/>
               </a:ext>
             </a:extLst>
           </p:cNvPr>
@@ -17678,7 +18654,7 @@
           <p:cNvPr id="4" name="">
             <a:extLst xmlns:a="http://schemas.openxmlformats.org/drawingml/2006/main">
               <a:ext uri="{FF2B5EF4-FFF2-40B4-BE49-F238E27FC236}">
-                <a16:creationId xmlns:a16="http://schemas.microsoft.com/office/drawing/2014/main" id="{19CB5857-2414-41EF-BD6A-E7E5F588F03B}"/>
+                <a16:creationId xmlns:a16="http://schemas.microsoft.com/office/drawing/2014/main" id="{80859537-BB7A-4813-9A5F-0C2846AC0F48}"/>
               </a:ext>
             </a:extLst>
           </p:cNvPr>
@@ -17729,7 +18705,7 @@
                 <a:ea typeface="Arial"/>
                 <a:cs typeface="Arial"/>
               </a:rPr>
-              <a:t>I use the authors’ two study groups: discovery and validation cohorts.</a:t>
+              <a:t>I used the authors’ two study groups: discovery and validation cohorts.</a:t>
             </a:r>
           </a:p>
           <a:p xmlns:a="http://schemas.openxmlformats.org/drawingml/2006/main">
@@ -17756,7 +18732,7 @@
                 <a:ea typeface="Arial"/>
                 <a:cs typeface="Arial"/>
               </a:rPr>
-              <a:t>My training / screening split keeps diagnosis proportions similar.</a:t>
+              <a:t>My training / screening split kept diagnosis proportions similar.</a:t>
             </a:r>
           </a:p>
         </p:txBody>
@@ -17766,7 +18742,7 @@
           <p:cNvPr id="5" name="">
             <a:extLst xmlns:a="http://schemas.openxmlformats.org/drawingml/2006/main">
               <a:ext uri="{FF2B5EF4-FFF2-40B4-BE49-F238E27FC236}">
-                <a16:creationId xmlns:a16="http://schemas.microsoft.com/office/drawing/2014/main" id="{3D3CEF92-A00E-4EA1-B540-EE2232A9D827}"/>
+                <a16:creationId xmlns:a16="http://schemas.microsoft.com/office/drawing/2014/main" id="{254BE008-643D-4571-85B4-8431E0C81359}"/>
               </a:ext>
             </a:extLst>
           </p:cNvPr>
@@ -17850,7 +18826,7 @@
           <p:cNvPr id="6" name="">
             <a:extLst xmlns:a="http://schemas.openxmlformats.org/drawingml/2006/main">
               <a:ext uri="{FF2B5EF4-FFF2-40B4-BE49-F238E27FC236}">
-                <a16:creationId xmlns:a16="http://schemas.microsoft.com/office/drawing/2014/main" id="{A38DCAF6-EA70-4EF7-B719-FDF680382F68}"/>
+                <a16:creationId xmlns:a16="http://schemas.microsoft.com/office/drawing/2014/main" id="{C70E6C67-B448-4F6A-B7F3-0E872F918F70}"/>
               </a:ext>
             </a:extLst>
           </p:cNvPr>
@@ -17934,7 +18910,7 @@
           <p:cNvPr id="7" name="">
             <a:extLst xmlns:a="http://schemas.openxmlformats.org/drawingml/2006/main">
               <a:ext uri="{FF2B5EF4-FFF2-40B4-BE49-F238E27FC236}">
-                <a16:creationId xmlns:a16="http://schemas.microsoft.com/office/drawing/2014/main" id="{2C1B96DD-6EF8-42EB-ADEE-3251F0BB2613}"/>
+                <a16:creationId xmlns:a16="http://schemas.microsoft.com/office/drawing/2014/main" id="{3FBFDBE0-7ABB-4EFE-96F8-F6982A7C9292}"/>
               </a:ext>
             </a:extLst>
           </p:cNvPr>
@@ -18074,7 +19050,7 @@
           <p:cNvPr id="10" name="">
             <a:extLst xmlns:a="http://schemas.openxmlformats.org/drawingml/2006/main">
               <a:ext uri="{FF2B5EF4-FFF2-40B4-BE49-F238E27FC236}">
-                <a16:creationId xmlns:a16="http://schemas.microsoft.com/office/drawing/2014/main" id="{D47066D6-D86B-40BF-92F1-032E797BE925}"/>
+                <a16:creationId xmlns:a16="http://schemas.microsoft.com/office/drawing/2014/main" id="{8CF1867D-68D4-4E9E-B71F-7D292EF90FA7}"/>
               </a:ext>
             </a:extLst>
           </p:cNvPr>
@@ -18207,7 +19183,7 @@
     </p:spTree>
     <p:extLst>
       <p:ext uri="{BB962C8B-B14F-4D97-AF65-F5344CB8AC3E}">
-        <p14:creationId xmlns:p14="http://schemas.microsoft.com/office/powerpoint/2010/main" val="782157859"/>
+        <p14:creationId xmlns:p14="http://schemas.microsoft.com/office/powerpoint/2010/main" val="1406353616"/>
       </p:ext>
     </p:extLst>
   </p:cSld>

--- a/presentation/unos_kidney_biopsy.pptx
+++ b/presentation/unos_kidney_biopsy.pptx
@@ -2,37 +2,37 @@
 <file path=ppt/presentation.xml><?xml version="1.0" encoding="utf-8"?>
 <p:presentation xmlns:p="http://schemas.openxmlformats.org/presentationml/2006/main" xmlns:r="http://schemas.openxmlformats.org/officeDocument/2006/relationships">
   <p:sldMasterIdLst>
-    <p:sldMasterId id="2147483648" r:id="R6aa170a24b4340e0"/>
+    <p:sldMasterId id="2147483648" r:id="R7774073c01bb411c"/>
   </p:sldMasterIdLst>
   <p:sldIdLst>
-    <p:sldId id="256" r:id="Rb8a9d4ff5c114b4d"/>
-    <p:sldId id="257" r:id="Rd1cfa362c39a4d0f"/>
-    <p:sldId id="258" r:id="R669a1701949b43ab"/>
-    <p:sldId id="259" r:id="R114cb4a482b94705"/>
-    <p:sldId id="260" r:id="R02264290dfaf4008"/>
-    <p:sldId id="261" r:id="Rab168b01868a44fc"/>
-    <p:sldId id="262" r:id="R2a4b077876e94aef"/>
-    <p:sldId id="263" r:id="R377b62088b7d4a89"/>
-    <p:sldId id="264" r:id="Rb3e8736392ac4b5d"/>
-    <p:sldId id="265" r:id="R49d4573d94844bd8"/>
-    <p:sldId id="266" r:id="Re4f2fdd002a449fb"/>
-    <p:sldId id="267" r:id="R40b860add8c0490d"/>
-    <p:sldId id="268" r:id="Ra4cca81810b24d3a"/>
-    <p:sldId id="269" r:id="R46a20048d58a4a19"/>
-    <p:sldId id="270" r:id="Rd22a3041bc5d4a22"/>
-    <p:sldId id="271" r:id="R747708837d23423a"/>
-    <p:sldId id="272" r:id="R0d3e2cc92efd428f"/>
-    <p:sldId id="273" r:id="R694ad4f27212493b"/>
-    <p:sldId id="274" r:id="Rec6cf7b1574e4a8d"/>
-    <p:sldId id="275" r:id="R4227d634ef9b4500"/>
-    <p:sldId id="276" r:id="R3d4454a4d0564758"/>
-    <p:sldId id="277" r:id="R30410cdb453144eb"/>
-    <p:sldId id="278" r:id="Rddc5eb51e4324ef8"/>
-    <p:sldId id="279" r:id="Rec7c7b38083e4cd0"/>
-    <p:sldId id="280" r:id="R6944550b5df94736"/>
-    <p:sldId id="281" r:id="R2f319dd0935548f9"/>
-    <p:sldId id="282" r:id="Ra867be7762d84d2c"/>
-    <p:sldId id="283" r:id="R7c1174a5d7c848d2"/>
+    <p:sldId id="256" r:id="Rfd8531a0aec54c3f"/>
+    <p:sldId id="257" r:id="R74bb408217b5440d"/>
+    <p:sldId id="258" r:id="R1cf8721bd4194095"/>
+    <p:sldId id="259" r:id="R35cda89b91ba4f51"/>
+    <p:sldId id="260" r:id="R1fbdc952ff884d3a"/>
+    <p:sldId id="261" r:id="R7fe7089d49234dda"/>
+    <p:sldId id="262" r:id="R52f7fed439054593"/>
+    <p:sldId id="263" r:id="R2c8067f3d5b34a05"/>
+    <p:sldId id="264" r:id="Rb3b5e4264c254af8"/>
+    <p:sldId id="265" r:id="R887e41daa2754bc7"/>
+    <p:sldId id="266" r:id="Rc7c6314caafa4ae5"/>
+    <p:sldId id="267" r:id="R9207c263edb14e95"/>
+    <p:sldId id="268" r:id="R768de5ec83f5410d"/>
+    <p:sldId id="269" r:id="R91f7a4618cd84434"/>
+    <p:sldId id="270" r:id="R94ff88df8e614afa"/>
+    <p:sldId id="271" r:id="Rcfeb2795a64b4df7"/>
+    <p:sldId id="272" r:id="Rfaf8ae27affc4a77"/>
+    <p:sldId id="273" r:id="R0fc17d1099794fd3"/>
+    <p:sldId id="274" r:id="R1b07c50167c94d32"/>
+    <p:sldId id="275" r:id="Rcbb6821efe0d4a65"/>
+    <p:sldId id="276" r:id="R30e803465e1b4d4a"/>
+    <p:sldId id="277" r:id="R534315b83c4c490d"/>
+    <p:sldId id="278" r:id="R881ed418b3804c6b"/>
+    <p:sldId id="279" r:id="Rd512c2c93ab64101"/>
+    <p:sldId id="280" r:id="R97bcf03cee7e473c"/>
+    <p:sldId id="281" r:id="R67135188b8204a6c"/>
+    <p:sldId id="282" r:id="Rdc5326e1ba9d4c41"/>
+    <p:sldId id="283" r:id="R82c812a3451e4bee"/>
   </p:sldIdLst>
   <p:sldSz cx="12192000" cy="6858000"/>
   <p:notesSz cx="6858000" cy="9144000"/>
@@ -77,7 +77,7 @@
   </p:cSld>
   <p:clrMap bg1="lt1" tx1="dk1" bg2="lt2" tx2="dk2" accent1="accent1" accent2="accent2" accent3="accent3" accent4="accent4" accent5="accent5" accent6="accent6" hlink="hlink" folHlink="folHlink"/>
   <p:sldLayoutIdLst>
-    <p:sldLayoutId xmlns:r="http://schemas.openxmlformats.org/officeDocument/2006/relationships" id="2147483649" r:id="R0f1890886f2f4f66"/>
+    <p:sldLayoutId xmlns:r="http://schemas.openxmlformats.org/officeDocument/2006/relationships" id="2147483649" r:id="R779a5abcae41489b"/>
   </p:sldLayoutIdLst>
   <p:txStyles>
     <p:titleStyle>
@@ -1250,7 +1250,7 @@
           <p:cNvPr id="2" name="">
             <a:extLst xmlns:a="http://schemas.openxmlformats.org/drawingml/2006/main">
               <a:ext uri="{FF2B5EF4-FFF2-40B4-BE49-F238E27FC236}">
-                <a16:creationId xmlns:a16="http://schemas.microsoft.com/office/drawing/2014/main" id="{053830A3-EEC7-4B0E-81E9-471F45253A22}"/>
+                <a16:creationId xmlns:a16="http://schemas.microsoft.com/office/drawing/2014/main" id="{C847B5AB-E997-4182-8808-DC8405BE635E}"/>
               </a:ext>
             </a:extLst>
           </p:cNvPr>
@@ -1351,7 +1351,7 @@
     </p:spTree>
     <p:extLst>
       <p:ext uri="{BB962C8B-B14F-4D97-AF65-F5344CB8AC3E}">
-        <p14:creationId xmlns:p14="http://schemas.microsoft.com/office/powerpoint/2010/main" val="1672114085"/>
+        <p14:creationId xmlns:p14="http://schemas.microsoft.com/office/powerpoint/2010/main" val="1680737355"/>
       </p:ext>
     </p:extLst>
   </p:cSld>
@@ -1382,7 +1382,7 @@
           <p:cNvPr id="6" name="">
             <a:extLst xmlns:a="http://schemas.openxmlformats.org/drawingml/2006/main">
               <a:ext uri="{FF2B5EF4-FFF2-40B4-BE49-F238E27FC236}">
-                <a16:creationId xmlns:a16="http://schemas.microsoft.com/office/drawing/2014/main" id="{78192CDD-B1C2-42E2-8D2D-729A3E0435E9}"/>
+                <a16:creationId xmlns:a16="http://schemas.microsoft.com/office/drawing/2014/main" id="{68F695A3-119B-4C4A-AB88-617B9E9CCABF}"/>
               </a:ext>
             </a:extLst>
           </p:cNvPr>
@@ -1439,7 +1439,7 @@
           <p:cNvPr id="2" name="">
             <a:extLst xmlns:a="http://schemas.openxmlformats.org/drawingml/2006/main">
               <a:ext uri="{FF2B5EF4-FFF2-40B4-BE49-F238E27FC236}">
-                <a16:creationId xmlns:a16="http://schemas.microsoft.com/office/drawing/2014/main" id="{63517380-117D-4BC6-84F3-D0ABE4648B86}"/>
+                <a16:creationId xmlns:a16="http://schemas.microsoft.com/office/drawing/2014/main" id="{048D4573-32F9-425A-AB2E-798DC8CD86B7}"/>
               </a:ext>
             </a:extLst>
           </p:cNvPr>
@@ -1496,7 +1496,7 @@
           <p:cNvPr id="3" name="">
             <a:extLst xmlns:a="http://schemas.openxmlformats.org/drawingml/2006/main">
               <a:ext uri="{FF2B5EF4-FFF2-40B4-BE49-F238E27FC236}">
-                <a16:creationId xmlns:a16="http://schemas.microsoft.com/office/drawing/2014/main" id="{D1AAB18C-E75F-48B0-878C-895804BF773C}"/>
+                <a16:creationId xmlns:a16="http://schemas.microsoft.com/office/drawing/2014/main" id="{32FE306D-2D8F-4340-A7BF-3DC53B4E744E}"/>
               </a:ext>
             </a:extLst>
           </p:cNvPr>
@@ -1553,7 +1553,7 @@
           <p:cNvPr id="4" name="">
             <a:extLst xmlns:a="http://schemas.openxmlformats.org/drawingml/2006/main">
               <a:ext uri="{FF2B5EF4-FFF2-40B4-BE49-F238E27FC236}">
-                <a16:creationId xmlns:a16="http://schemas.microsoft.com/office/drawing/2014/main" id="{757C03AB-72D9-45B5-B02C-5C0F85DB55D0}"/>
+                <a16:creationId xmlns:a16="http://schemas.microsoft.com/office/drawing/2014/main" id="{017407CE-690B-4408-BC39-065275C665E5}"/>
               </a:ext>
             </a:extLst>
           </p:cNvPr>
@@ -1952,7 +1952,7 @@
     </p:spTree>
     <p:extLst>
       <p:ext uri="{BB962C8B-B14F-4D97-AF65-F5344CB8AC3E}">
-        <p14:creationId xmlns:p14="http://schemas.microsoft.com/office/powerpoint/2010/main" val="1776389490"/>
+        <p14:creationId xmlns:p14="http://schemas.microsoft.com/office/powerpoint/2010/main" val="1135119898"/>
       </p:ext>
     </p:extLst>
   </p:cSld>
@@ -1983,7 +1983,7 @@
           <p:cNvPr id="17" name="">
             <a:extLst xmlns:a="http://schemas.openxmlformats.org/drawingml/2006/main">
               <a:ext uri="{FF2B5EF4-FFF2-40B4-BE49-F238E27FC236}">
-                <a16:creationId xmlns:a16="http://schemas.microsoft.com/office/drawing/2014/main" id="{5C647A27-521D-4B78-8FC2-5DB69725297E}"/>
+                <a16:creationId xmlns:a16="http://schemas.microsoft.com/office/drawing/2014/main" id="{AD559558-3735-4E4C-9CF2-7CC11AF12CAC}"/>
               </a:ext>
             </a:extLst>
           </p:cNvPr>
@@ -2040,7 +2040,7 @@
           <p:cNvPr id="2" name="">
             <a:extLst xmlns:a="http://schemas.openxmlformats.org/drawingml/2006/main">
               <a:ext uri="{FF2B5EF4-FFF2-40B4-BE49-F238E27FC236}">
-                <a16:creationId xmlns:a16="http://schemas.microsoft.com/office/drawing/2014/main" id="{8A971F09-B754-4F30-A2F0-1874F535B141}"/>
+                <a16:creationId xmlns:a16="http://schemas.microsoft.com/office/drawing/2014/main" id="{97FE6F22-14A2-4EBA-91D1-A16752AC0177}"/>
               </a:ext>
             </a:extLst>
           </p:cNvPr>
@@ -2097,7 +2097,7 @@
           <p:cNvPr id="3" name="">
             <a:extLst xmlns:a="http://schemas.openxmlformats.org/drawingml/2006/main">
               <a:ext uri="{FF2B5EF4-FFF2-40B4-BE49-F238E27FC236}">
-                <a16:creationId xmlns:a16="http://schemas.microsoft.com/office/drawing/2014/main" id="{723AF733-B116-436E-8183-79B26D249D6E}"/>
+                <a16:creationId xmlns:a16="http://schemas.microsoft.com/office/drawing/2014/main" id="{FCCC86D0-3906-45EA-82D5-1E29C5E19856}"/>
               </a:ext>
             </a:extLst>
           </p:cNvPr>
@@ -2154,7 +2154,7 @@
           <p:cNvPr id="4" name="">
             <a:extLst xmlns:a="http://schemas.openxmlformats.org/drawingml/2006/main">
               <a:ext uri="{FF2B5EF4-FFF2-40B4-BE49-F238E27FC236}">
-                <a16:creationId xmlns:a16="http://schemas.microsoft.com/office/drawing/2014/main" id="{DF276B88-3497-4DB9-A1A4-4DB1E0B1B80A}"/>
+                <a16:creationId xmlns:a16="http://schemas.microsoft.com/office/drawing/2014/main" id="{7414763F-C5D2-4CD4-AC0B-2C10C8541D63}"/>
               </a:ext>
             </a:extLst>
           </p:cNvPr>
@@ -2211,7 +2211,7 @@
           <p:cNvPr id="5" name="">
             <a:extLst xmlns:a="http://schemas.openxmlformats.org/drawingml/2006/main">
               <a:ext uri="{FF2B5EF4-FFF2-40B4-BE49-F238E27FC236}">
-                <a16:creationId xmlns:a16="http://schemas.microsoft.com/office/drawing/2014/main" id="{76611A0B-3A24-467B-9617-1CBFBCD6CC6B}"/>
+                <a16:creationId xmlns:a16="http://schemas.microsoft.com/office/drawing/2014/main" id="{E82BF9D3-3AAC-400B-92A5-DB88559C883B}"/>
               </a:ext>
             </a:extLst>
           </p:cNvPr>
@@ -2268,7 +2268,7 @@
           <p:cNvPr id="6" name="">
             <a:extLst xmlns:a="http://schemas.openxmlformats.org/drawingml/2006/main">
               <a:ext uri="{FF2B5EF4-FFF2-40B4-BE49-F238E27FC236}">
-                <a16:creationId xmlns:a16="http://schemas.microsoft.com/office/drawing/2014/main" id="{AEE8327A-1CF4-4312-88F6-2844F3B38CD1}"/>
+                <a16:creationId xmlns:a16="http://schemas.microsoft.com/office/drawing/2014/main" id="{90545AC7-1434-4985-B17A-ED880AEF03A1}"/>
               </a:ext>
             </a:extLst>
           </p:cNvPr>
@@ -2297,7 +2297,7 @@
           <p:cNvPr id="7" name="">
             <a:extLst xmlns:a="http://schemas.openxmlformats.org/drawingml/2006/main">
               <a:ext uri="{FF2B5EF4-FFF2-40B4-BE49-F238E27FC236}">
-                <a16:creationId xmlns:a16="http://schemas.microsoft.com/office/drawing/2014/main" id="{CA97ED30-2F9C-4923-9233-935D615DE9D8}"/>
+                <a16:creationId xmlns:a16="http://schemas.microsoft.com/office/drawing/2014/main" id="{5F427BF2-A5D0-49D6-8A1A-5C950E3A9D53}"/>
               </a:ext>
             </a:extLst>
           </p:cNvPr>
@@ -2354,7 +2354,7 @@
           <p:cNvPr id="8" name="">
             <a:extLst xmlns:a="http://schemas.openxmlformats.org/drawingml/2006/main">
               <a:ext uri="{FF2B5EF4-FFF2-40B4-BE49-F238E27FC236}">
-                <a16:creationId xmlns:a16="http://schemas.microsoft.com/office/drawing/2014/main" id="{720E2A1F-3BB6-4A2F-91B0-9AFF8DF92B03}"/>
+                <a16:creationId xmlns:a16="http://schemas.microsoft.com/office/drawing/2014/main" id="{5D0C0FA8-24CC-48E7-9D39-E860CB4D262E}"/>
               </a:ext>
             </a:extLst>
           </p:cNvPr>
@@ -2411,7 +2411,7 @@
           <p:cNvPr id="9" name="">
             <a:extLst xmlns:a="http://schemas.openxmlformats.org/drawingml/2006/main">
               <a:ext uri="{FF2B5EF4-FFF2-40B4-BE49-F238E27FC236}">
-                <a16:creationId xmlns:a16="http://schemas.microsoft.com/office/drawing/2014/main" id="{77E9857B-17F0-4303-990C-5DEB49A8DE9E}"/>
+                <a16:creationId xmlns:a16="http://schemas.microsoft.com/office/drawing/2014/main" id="{85D1C4A9-FBE7-4DED-AB05-FCEEA9FB9111}"/>
               </a:ext>
             </a:extLst>
           </p:cNvPr>
@@ -2468,7 +2468,7 @@
           <p:cNvPr id="10" name="">
             <a:extLst xmlns:a="http://schemas.openxmlformats.org/drawingml/2006/main">
               <a:ext uri="{FF2B5EF4-FFF2-40B4-BE49-F238E27FC236}">
-                <a16:creationId xmlns:a16="http://schemas.microsoft.com/office/drawing/2014/main" id="{FB18350F-6227-4593-AE11-F819BCBBF3E5}"/>
+                <a16:creationId xmlns:a16="http://schemas.microsoft.com/office/drawing/2014/main" id="{F9BC31CA-676F-4EDC-A78B-3B1BBDDBAFD3}"/>
               </a:ext>
             </a:extLst>
           </p:cNvPr>
@@ -2525,7 +2525,7 @@
           <p:cNvPr id="11" name="">
             <a:extLst xmlns:a="http://schemas.openxmlformats.org/drawingml/2006/main">
               <a:ext uri="{FF2B5EF4-FFF2-40B4-BE49-F238E27FC236}">
-                <a16:creationId xmlns:a16="http://schemas.microsoft.com/office/drawing/2014/main" id="{A3BEEAB5-477C-428B-B725-0F6EDDCFA586}"/>
+                <a16:creationId xmlns:a16="http://schemas.microsoft.com/office/drawing/2014/main" id="{E109645C-9DEA-4EA6-AB36-DEF8AAA9544B}"/>
               </a:ext>
             </a:extLst>
           </p:cNvPr>
@@ -2554,7 +2554,7 @@
           <p:cNvPr id="12" name="">
             <a:extLst xmlns:a="http://schemas.openxmlformats.org/drawingml/2006/main">
               <a:ext uri="{FF2B5EF4-FFF2-40B4-BE49-F238E27FC236}">
-                <a16:creationId xmlns:a16="http://schemas.microsoft.com/office/drawing/2014/main" id="{C5B6BBEA-BA7B-47A3-884E-FBD443571EFF}"/>
+                <a16:creationId xmlns:a16="http://schemas.microsoft.com/office/drawing/2014/main" id="{9E10687A-C4D7-473B-936F-7DB6BAA01DCE}"/>
               </a:ext>
             </a:extLst>
           </p:cNvPr>
@@ -2611,7 +2611,7 @@
           <p:cNvPr id="13" name="">
             <a:extLst xmlns:a="http://schemas.openxmlformats.org/drawingml/2006/main">
               <a:ext uri="{FF2B5EF4-FFF2-40B4-BE49-F238E27FC236}">
-                <a16:creationId xmlns:a16="http://schemas.microsoft.com/office/drawing/2014/main" id="{FFE4EFDD-090B-4BAB-B508-17BF1A4A520A}"/>
+                <a16:creationId xmlns:a16="http://schemas.microsoft.com/office/drawing/2014/main" id="{DD91675A-35A7-43C7-AF9D-73D9F7F42CB3}"/>
               </a:ext>
             </a:extLst>
           </p:cNvPr>
@@ -2668,7 +2668,7 @@
           <p:cNvPr id="14" name="">
             <a:extLst xmlns:a="http://schemas.openxmlformats.org/drawingml/2006/main">
               <a:ext uri="{FF2B5EF4-FFF2-40B4-BE49-F238E27FC236}">
-                <a16:creationId xmlns:a16="http://schemas.microsoft.com/office/drawing/2014/main" id="{41A684D0-AAA4-499C-A989-9F0CA5DC1753}"/>
+                <a16:creationId xmlns:a16="http://schemas.microsoft.com/office/drawing/2014/main" id="{F8DC9333-CF2F-4963-B1C0-3B9A17DCF050}"/>
               </a:ext>
             </a:extLst>
           </p:cNvPr>
@@ -2963,7 +2963,7 @@
           <p:cNvPr id="16" name="">
             <a:extLst xmlns:a="http://schemas.openxmlformats.org/drawingml/2006/main">
               <a:ext uri="{FF2B5EF4-FFF2-40B4-BE49-F238E27FC236}">
-                <a16:creationId xmlns:a16="http://schemas.microsoft.com/office/drawing/2014/main" id="{5E2A9AA0-6C13-4E79-B75B-F59A98537C08}"/>
+                <a16:creationId xmlns:a16="http://schemas.microsoft.com/office/drawing/2014/main" id="{50A8C3C3-A62A-46DC-920A-5914995B504B}"/>
               </a:ext>
             </a:extLst>
           </p:cNvPr>
@@ -3018,7 +3018,7 @@
     </p:spTree>
     <p:extLst>
       <p:ext uri="{BB962C8B-B14F-4D97-AF65-F5344CB8AC3E}">
-        <p14:creationId xmlns:p14="http://schemas.microsoft.com/office/powerpoint/2010/main" val="857207569"/>
+        <p14:creationId xmlns:p14="http://schemas.microsoft.com/office/powerpoint/2010/main" val="2032064345"/>
       </p:ext>
     </p:extLst>
   </p:cSld>
@@ -3049,7 +3049,7 @@
           <p:cNvPr id="7" name="">
             <a:extLst xmlns:a="http://schemas.openxmlformats.org/drawingml/2006/main">
               <a:ext uri="{FF2B5EF4-FFF2-40B4-BE49-F238E27FC236}">
-                <a16:creationId xmlns:a16="http://schemas.microsoft.com/office/drawing/2014/main" id="{5C940AE1-DE54-4835-BA29-F594E62C8A2A}"/>
+                <a16:creationId xmlns:a16="http://schemas.microsoft.com/office/drawing/2014/main" id="{4487ADB7-EA64-4629-B855-31E299FCC41C}"/>
               </a:ext>
             </a:extLst>
           </p:cNvPr>
@@ -3106,7 +3106,7 @@
           <p:cNvPr id="2" name="">
             <a:extLst xmlns:a="http://schemas.openxmlformats.org/drawingml/2006/main">
               <a:ext uri="{FF2B5EF4-FFF2-40B4-BE49-F238E27FC236}">
-                <a16:creationId xmlns:a16="http://schemas.microsoft.com/office/drawing/2014/main" id="{11C12C9E-2FBD-4120-8065-FD1C86AE1479}"/>
+                <a16:creationId xmlns:a16="http://schemas.microsoft.com/office/drawing/2014/main" id="{72465C40-548B-430A-848F-17C7B4BAB7F4}"/>
               </a:ext>
             </a:extLst>
           </p:cNvPr>
@@ -3163,7 +3163,7 @@
           <p:cNvPr id="3" name="">
             <a:extLst xmlns:a="http://schemas.openxmlformats.org/drawingml/2006/main">
               <a:ext uri="{FF2B5EF4-FFF2-40B4-BE49-F238E27FC236}">
-                <a16:creationId xmlns:a16="http://schemas.microsoft.com/office/drawing/2014/main" id="{81631855-5B35-4B6C-B76C-7D42F809444E}"/>
+                <a16:creationId xmlns:a16="http://schemas.microsoft.com/office/drawing/2014/main" id="{BF815E61-FC08-4301-8593-B56A8AD00C8A}"/>
               </a:ext>
             </a:extLst>
           </p:cNvPr>
@@ -3220,7 +3220,7 @@
           <p:cNvPr id="4" name="">
             <a:extLst xmlns:a="http://schemas.openxmlformats.org/drawingml/2006/main">
               <a:ext uri="{FF2B5EF4-FFF2-40B4-BE49-F238E27FC236}">
-                <a16:creationId xmlns:a16="http://schemas.microsoft.com/office/drawing/2014/main" id="{3A839108-C94E-494C-827F-1A6206C8987C}"/>
+                <a16:creationId xmlns:a16="http://schemas.microsoft.com/office/drawing/2014/main" id="{C93517B1-9B5C-495F-8843-E18CF27028AE}"/>
               </a:ext>
             </a:extLst>
           </p:cNvPr>
@@ -3284,7 +3284,7 @@
         </p:xfrm>
         <a:graphic xmlns:a="http://schemas.openxmlformats.org/drawingml/2006/main">
           <a:graphicData uri="http://schemas.openxmlformats.org/drawingml/2006/chart">
-            <c:chart xmlns:r="http://schemas.openxmlformats.org/officeDocument/2006/relationships" xmlns:c="http://schemas.openxmlformats.org/drawingml/2006/chart" r:id="Rf0701bf17ef54bbf"/>
+            <c:chart xmlns:r="http://schemas.openxmlformats.org/officeDocument/2006/relationships" xmlns:c="http://schemas.openxmlformats.org/drawingml/2006/chart" r:id="Rf33c028e63ef4b5b"/>
           </a:graphicData>
         </a:graphic>
       </p:graphicFrame>
@@ -3293,7 +3293,7 @@
           <p:cNvPr id="6" name="">
             <a:extLst xmlns:a="http://schemas.openxmlformats.org/drawingml/2006/main">
               <a:ext uri="{FF2B5EF4-FFF2-40B4-BE49-F238E27FC236}">
-                <a16:creationId xmlns:a16="http://schemas.microsoft.com/office/drawing/2014/main" id="{758C8D1F-C68C-46C0-9DC8-7B36346A6975}"/>
+                <a16:creationId xmlns:a16="http://schemas.microsoft.com/office/drawing/2014/main" id="{79E7EEC6-575E-4773-82FB-46FCF4FDA23F}"/>
               </a:ext>
             </a:extLst>
           </p:cNvPr>
@@ -3379,7 +3379,7 @@
     </p:spTree>
     <p:extLst>
       <p:ext uri="{BB962C8B-B14F-4D97-AF65-F5344CB8AC3E}">
-        <p14:creationId xmlns:p14="http://schemas.microsoft.com/office/powerpoint/2010/main" val="591472627"/>
+        <p14:creationId xmlns:p14="http://schemas.microsoft.com/office/powerpoint/2010/main" val="1034749709"/>
       </p:ext>
     </p:extLst>
   </p:cSld>
@@ -3410,7 +3410,7 @@
           <p:cNvPr id="9" name="">
             <a:extLst xmlns:a="http://schemas.openxmlformats.org/drawingml/2006/main">
               <a:ext uri="{FF2B5EF4-FFF2-40B4-BE49-F238E27FC236}">
-                <a16:creationId xmlns:a16="http://schemas.microsoft.com/office/drawing/2014/main" id="{C80AAE4C-886B-45B5-B2E7-DCE15F7F0E29}"/>
+                <a16:creationId xmlns:a16="http://schemas.microsoft.com/office/drawing/2014/main" id="{A5B17974-0F56-4F3E-9D4B-904C715C3261}"/>
               </a:ext>
             </a:extLst>
           </p:cNvPr>
@@ -3467,7 +3467,7 @@
           <p:cNvPr id="2" name="">
             <a:extLst xmlns:a="http://schemas.openxmlformats.org/drawingml/2006/main">
               <a:ext uri="{FF2B5EF4-FFF2-40B4-BE49-F238E27FC236}">
-                <a16:creationId xmlns:a16="http://schemas.microsoft.com/office/drawing/2014/main" id="{7D955AE2-4864-4421-8D05-43695D13BF61}"/>
+                <a16:creationId xmlns:a16="http://schemas.microsoft.com/office/drawing/2014/main" id="{CCBAF3D8-E96D-4C69-9FB0-4D083957EE88}"/>
               </a:ext>
             </a:extLst>
           </p:cNvPr>
@@ -3524,7 +3524,7 @@
           <p:cNvPr id="3" name="">
             <a:extLst xmlns:a="http://schemas.openxmlformats.org/drawingml/2006/main">
               <a:ext uri="{FF2B5EF4-FFF2-40B4-BE49-F238E27FC236}">
-                <a16:creationId xmlns:a16="http://schemas.microsoft.com/office/drawing/2014/main" id="{FCD32ADD-A1A9-4F9D-951C-D8534A56110B}"/>
+                <a16:creationId xmlns:a16="http://schemas.microsoft.com/office/drawing/2014/main" id="{03FACB15-D590-409E-9185-2A239A326E60}"/>
               </a:ext>
             </a:extLst>
           </p:cNvPr>
@@ -3581,7 +3581,7 @@
           <p:cNvPr id="4" name="">
             <a:extLst xmlns:a="http://schemas.openxmlformats.org/drawingml/2006/main">
               <a:ext uri="{FF2B5EF4-FFF2-40B4-BE49-F238E27FC236}">
-                <a16:creationId xmlns:a16="http://schemas.microsoft.com/office/drawing/2014/main" id="{E021A7CC-4E01-45D4-8E4E-61D356BC4EE6}"/>
+                <a16:creationId xmlns:a16="http://schemas.microsoft.com/office/drawing/2014/main" id="{7F700A8E-5AC8-4BED-B542-86E8FE6D47B0}"/>
               </a:ext>
             </a:extLst>
           </p:cNvPr>
@@ -3638,7 +3638,7 @@
           <p:cNvPr id="5" name="">
             <a:extLst xmlns:a="http://schemas.openxmlformats.org/drawingml/2006/main">
               <a:ext uri="{FF2B5EF4-FFF2-40B4-BE49-F238E27FC236}">
-                <a16:creationId xmlns:a16="http://schemas.microsoft.com/office/drawing/2014/main" id="{A4D7FF17-72DD-46AB-A181-1D224E92DA8E}"/>
+                <a16:creationId xmlns:a16="http://schemas.microsoft.com/office/drawing/2014/main" id="{50DDDDB7-DF63-4199-9BB3-9AE2A85BD323}"/>
               </a:ext>
             </a:extLst>
           </p:cNvPr>
@@ -3718,7 +3718,7 @@
           <p:cNvPr id="6" name="">
             <a:extLst xmlns:a="http://schemas.openxmlformats.org/drawingml/2006/main">
               <a:ext uri="{FF2B5EF4-FFF2-40B4-BE49-F238E27FC236}">
-                <a16:creationId xmlns:a16="http://schemas.microsoft.com/office/drawing/2014/main" id="{34A779BF-972D-4A71-AA95-7FB7A52BE8A3}"/>
+                <a16:creationId xmlns:a16="http://schemas.microsoft.com/office/drawing/2014/main" id="{DB4B5FEC-80B6-4668-B1FF-7CAB43F9381E}"/>
               </a:ext>
             </a:extLst>
           </p:cNvPr>
@@ -3806,7 +3806,7 @@
           <p:cNvPr id="7" name="">
             <a:extLst xmlns:a="http://schemas.openxmlformats.org/drawingml/2006/main">
               <a:ext uri="{FF2B5EF4-FFF2-40B4-BE49-F238E27FC236}">
-                <a16:creationId xmlns:a16="http://schemas.microsoft.com/office/drawing/2014/main" id="{6E62E209-0072-47FF-BFF8-0426E02FD628}"/>
+                <a16:creationId xmlns:a16="http://schemas.microsoft.com/office/drawing/2014/main" id="{A1670AFB-99D7-4942-8B4A-DA82EEBD7096}"/>
               </a:ext>
             </a:extLst>
           </p:cNvPr>
@@ -4099,7 +4099,7 @@
     </p:spTree>
     <p:extLst>
       <p:ext uri="{BB962C8B-B14F-4D97-AF65-F5344CB8AC3E}">
-        <p14:creationId xmlns:p14="http://schemas.microsoft.com/office/powerpoint/2010/main" val="1992736716"/>
+        <p14:creationId xmlns:p14="http://schemas.microsoft.com/office/powerpoint/2010/main" val="133267846"/>
       </p:ext>
     </p:extLst>
   </p:cSld>
@@ -4130,7 +4130,7 @@
           <p:cNvPr id="12" name="">
             <a:extLst xmlns:a="http://schemas.openxmlformats.org/drawingml/2006/main">
               <a:ext uri="{FF2B5EF4-FFF2-40B4-BE49-F238E27FC236}">
-                <a16:creationId xmlns:a16="http://schemas.microsoft.com/office/drawing/2014/main" id="{2D2D6C23-0A98-48FF-9285-76E573259D25}"/>
+                <a16:creationId xmlns:a16="http://schemas.microsoft.com/office/drawing/2014/main" id="{A76C0583-17D9-4DAB-BA79-BD16DA8D53C8}"/>
               </a:ext>
             </a:extLst>
           </p:cNvPr>
@@ -4187,7 +4187,7 @@
           <p:cNvPr id="2" name="">
             <a:extLst xmlns:a="http://schemas.openxmlformats.org/drawingml/2006/main">
               <a:ext uri="{FF2B5EF4-FFF2-40B4-BE49-F238E27FC236}">
-                <a16:creationId xmlns:a16="http://schemas.microsoft.com/office/drawing/2014/main" id="{7462FE3B-D308-4693-A8C5-E74228D3DAF1}"/>
+                <a16:creationId xmlns:a16="http://schemas.microsoft.com/office/drawing/2014/main" id="{74122BAD-8038-439E-B13F-81D5A459F264}"/>
               </a:ext>
             </a:extLst>
           </p:cNvPr>
@@ -4244,7 +4244,7 @@
           <p:cNvPr id="3" name="">
             <a:extLst xmlns:a="http://schemas.openxmlformats.org/drawingml/2006/main">
               <a:ext uri="{FF2B5EF4-FFF2-40B4-BE49-F238E27FC236}">
-                <a16:creationId xmlns:a16="http://schemas.microsoft.com/office/drawing/2014/main" id="{4C906FD0-E5D5-4CA4-B826-4FB0CA4EDB9F}"/>
+                <a16:creationId xmlns:a16="http://schemas.microsoft.com/office/drawing/2014/main" id="{C6441EC8-B0E5-4D7E-BC81-C7F41DB2E4D3}"/>
               </a:ext>
             </a:extLst>
           </p:cNvPr>
@@ -4301,7 +4301,7 @@
           <p:cNvPr id="4" name="">
             <a:extLst xmlns:a="http://schemas.openxmlformats.org/drawingml/2006/main">
               <a:ext uri="{FF2B5EF4-FFF2-40B4-BE49-F238E27FC236}">
-                <a16:creationId xmlns:a16="http://schemas.microsoft.com/office/drawing/2014/main" id="{F2ED0915-1FB8-4A26-AC5A-897C53250384}"/>
+                <a16:creationId xmlns:a16="http://schemas.microsoft.com/office/drawing/2014/main" id="{3A4A7751-98E4-43AC-9B2C-845039DBB552}"/>
               </a:ext>
             </a:extLst>
           </p:cNvPr>
@@ -4358,7 +4358,7 @@
           <p:cNvPr id="5" name="">
             <a:extLst xmlns:a="http://schemas.openxmlformats.org/drawingml/2006/main">
               <a:ext uri="{FF2B5EF4-FFF2-40B4-BE49-F238E27FC236}">
-                <a16:creationId xmlns:a16="http://schemas.microsoft.com/office/drawing/2014/main" id="{2AA5978B-3413-4654-AC74-94384431F552}"/>
+                <a16:creationId xmlns:a16="http://schemas.microsoft.com/office/drawing/2014/main" id="{4B72CE75-4962-403F-BEE9-232337F7F45F}"/>
               </a:ext>
             </a:extLst>
           </p:cNvPr>
@@ -4415,7 +4415,7 @@
           <p:cNvPr id="6" name="">
             <a:extLst xmlns:a="http://schemas.openxmlformats.org/drawingml/2006/main">
               <a:ext uri="{FF2B5EF4-FFF2-40B4-BE49-F238E27FC236}">
-                <a16:creationId xmlns:a16="http://schemas.microsoft.com/office/drawing/2014/main" id="{1BD05947-A7EF-4D70-B214-7EC2377CD1B3}"/>
+                <a16:creationId xmlns:a16="http://schemas.microsoft.com/office/drawing/2014/main" id="{6B7EAB8F-47F5-4B4D-A58C-47262D406686}"/>
               </a:ext>
             </a:extLst>
           </p:cNvPr>
@@ -4472,7 +4472,7 @@
           <p:cNvPr id="7" name="">
             <a:extLst xmlns:a="http://schemas.openxmlformats.org/drawingml/2006/main">
               <a:ext uri="{FF2B5EF4-FFF2-40B4-BE49-F238E27FC236}">
-                <a16:creationId xmlns:a16="http://schemas.microsoft.com/office/drawing/2014/main" id="{6471CF54-1415-4BAB-AB84-FB23602D0D1D}"/>
+                <a16:creationId xmlns:a16="http://schemas.microsoft.com/office/drawing/2014/main" id="{B1B81B74-E217-4D90-B481-876DA972D128}"/>
               </a:ext>
             </a:extLst>
           </p:cNvPr>
@@ -4529,7 +4529,7 @@
           <p:cNvPr id="8" name="">
             <a:extLst xmlns:a="http://schemas.openxmlformats.org/drawingml/2006/main">
               <a:ext uri="{FF2B5EF4-FFF2-40B4-BE49-F238E27FC236}">
-                <a16:creationId xmlns:a16="http://schemas.microsoft.com/office/drawing/2014/main" id="{72F264EF-6FA0-4F41-B23D-4F0C1341D36F}"/>
+                <a16:creationId xmlns:a16="http://schemas.microsoft.com/office/drawing/2014/main" id="{0C9C9990-E373-41C9-B861-807FC8E1878A}"/>
               </a:ext>
             </a:extLst>
           </p:cNvPr>
@@ -4586,7 +4586,7 @@
           <p:cNvPr id="9" name="">
             <a:extLst xmlns:a="http://schemas.openxmlformats.org/drawingml/2006/main">
               <a:ext uri="{FF2B5EF4-FFF2-40B4-BE49-F238E27FC236}">
-                <a16:creationId xmlns:a16="http://schemas.microsoft.com/office/drawing/2014/main" id="{E6EB486E-27AD-4958-8F41-92FC66308158}"/>
+                <a16:creationId xmlns:a16="http://schemas.microsoft.com/office/drawing/2014/main" id="{47D59F4F-9C21-415D-8CFE-FDC99EE43D39}"/>
               </a:ext>
             </a:extLst>
           </p:cNvPr>
@@ -4643,7 +4643,7 @@
           <p:cNvPr id="10" name="">
             <a:extLst xmlns:a="http://schemas.openxmlformats.org/drawingml/2006/main">
               <a:ext uri="{FF2B5EF4-FFF2-40B4-BE49-F238E27FC236}">
-                <a16:creationId xmlns:a16="http://schemas.microsoft.com/office/drawing/2014/main" id="{1102C108-A99F-46B4-9E1E-FB0A944A3661}"/>
+                <a16:creationId xmlns:a16="http://schemas.microsoft.com/office/drawing/2014/main" id="{01EEF60B-9892-4F52-A509-8F6580E0DDA1}"/>
               </a:ext>
             </a:extLst>
           </p:cNvPr>
@@ -4700,7 +4700,7 @@
           <p:cNvPr id="11" name="">
             <a:extLst xmlns:a="http://schemas.openxmlformats.org/drawingml/2006/main">
               <a:ext uri="{FF2B5EF4-FFF2-40B4-BE49-F238E27FC236}">
-                <a16:creationId xmlns:a16="http://schemas.microsoft.com/office/drawing/2014/main" id="{D65B065E-FB84-4B02-BF40-2F4B95F9530B}"/>
+                <a16:creationId xmlns:a16="http://schemas.microsoft.com/office/drawing/2014/main" id="{28CDFAB3-2CD7-448E-AC96-667D69E65E5D}"/>
               </a:ext>
             </a:extLst>
           </p:cNvPr>
@@ -4778,7 +4778,7 @@
     </p:spTree>
     <p:extLst>
       <p:ext uri="{BB962C8B-B14F-4D97-AF65-F5344CB8AC3E}">
-        <p14:creationId xmlns:p14="http://schemas.microsoft.com/office/powerpoint/2010/main" val="676686587"/>
+        <p14:creationId xmlns:p14="http://schemas.microsoft.com/office/powerpoint/2010/main" val="1445958360"/>
       </p:ext>
     </p:extLst>
   </p:cSld>
@@ -4809,7 +4809,7 @@
           <p:cNvPr id="12" name="">
             <a:extLst xmlns:a="http://schemas.openxmlformats.org/drawingml/2006/main">
               <a:ext uri="{FF2B5EF4-FFF2-40B4-BE49-F238E27FC236}">
-                <a16:creationId xmlns:a16="http://schemas.microsoft.com/office/drawing/2014/main" id="{76FAE3E8-437F-4D9B-BE80-9ABEC2579FA0}"/>
+                <a16:creationId xmlns:a16="http://schemas.microsoft.com/office/drawing/2014/main" id="{0C300CBF-9C93-467E-8039-A0305FD5BBA3}"/>
               </a:ext>
             </a:extLst>
           </p:cNvPr>
@@ -4866,7 +4866,7 @@
           <p:cNvPr id="2" name="">
             <a:extLst xmlns:a="http://schemas.openxmlformats.org/drawingml/2006/main">
               <a:ext uri="{FF2B5EF4-FFF2-40B4-BE49-F238E27FC236}">
-                <a16:creationId xmlns:a16="http://schemas.microsoft.com/office/drawing/2014/main" id="{CFE3A630-B308-4CAA-8349-1C8718F82766}"/>
+                <a16:creationId xmlns:a16="http://schemas.microsoft.com/office/drawing/2014/main" id="{7F0A18DA-E78F-4B5D-828D-18D0631915E4}"/>
               </a:ext>
             </a:extLst>
           </p:cNvPr>
@@ -4923,7 +4923,7 @@
           <p:cNvPr id="3" name="">
             <a:extLst xmlns:a="http://schemas.openxmlformats.org/drawingml/2006/main">
               <a:ext uri="{FF2B5EF4-FFF2-40B4-BE49-F238E27FC236}">
-                <a16:creationId xmlns:a16="http://schemas.microsoft.com/office/drawing/2014/main" id="{FF2D7058-245A-4B6F-B38A-6CCE08621001}"/>
+                <a16:creationId xmlns:a16="http://schemas.microsoft.com/office/drawing/2014/main" id="{4B63846E-65C0-45DB-9908-B68EFAE4B5A3}"/>
               </a:ext>
             </a:extLst>
           </p:cNvPr>
@@ -4980,7 +4980,7 @@
           <p:cNvPr id="4" name="">
             <a:extLst xmlns:a="http://schemas.openxmlformats.org/drawingml/2006/main">
               <a:ext uri="{FF2B5EF4-FFF2-40B4-BE49-F238E27FC236}">
-                <a16:creationId xmlns:a16="http://schemas.microsoft.com/office/drawing/2014/main" id="{2FDFD909-6B8F-459F-8A90-02028EB2A4F2}"/>
+                <a16:creationId xmlns:a16="http://schemas.microsoft.com/office/drawing/2014/main" id="{39893A83-EEE6-4C35-B0ED-CBFF3EBC186A}"/>
               </a:ext>
             </a:extLst>
           </p:cNvPr>
@@ -5037,7 +5037,7 @@
           <p:cNvPr id="5" name="">
             <a:extLst xmlns:a="http://schemas.openxmlformats.org/drawingml/2006/main">
               <a:ext uri="{FF2B5EF4-FFF2-40B4-BE49-F238E27FC236}">
-                <a16:creationId xmlns:a16="http://schemas.microsoft.com/office/drawing/2014/main" id="{1F52B2F2-E6B3-4C88-9158-3D2776DB842E}"/>
+                <a16:creationId xmlns:a16="http://schemas.microsoft.com/office/drawing/2014/main" id="{E90D1B00-E797-4293-BF10-FA3438FDD992}"/>
               </a:ext>
             </a:extLst>
           </p:cNvPr>
@@ -5117,7 +5117,7 @@
           <p:cNvPr id="6" name="">
             <a:extLst xmlns:a="http://schemas.openxmlformats.org/drawingml/2006/main">
               <a:ext uri="{FF2B5EF4-FFF2-40B4-BE49-F238E27FC236}">
-                <a16:creationId xmlns:a16="http://schemas.microsoft.com/office/drawing/2014/main" id="{B8B892BA-8FA4-4079-80DE-F1A2F0AF2F59}"/>
+                <a16:creationId xmlns:a16="http://schemas.microsoft.com/office/drawing/2014/main" id="{5B661367-C0D1-4606-BBC5-26100304157A}"/>
               </a:ext>
             </a:extLst>
           </p:cNvPr>
@@ -5201,7 +5201,7 @@
           <p:cNvPr id="7" name="">
             <a:extLst xmlns:a="http://schemas.openxmlformats.org/drawingml/2006/main">
               <a:ext uri="{FF2B5EF4-FFF2-40B4-BE49-F238E27FC236}">
-                <a16:creationId xmlns:a16="http://schemas.microsoft.com/office/drawing/2014/main" id="{B5EB2564-BFFB-4EF7-B3BC-940AADD99FCE}"/>
+                <a16:creationId xmlns:a16="http://schemas.microsoft.com/office/drawing/2014/main" id="{BC5F9EFE-F0EA-42C6-8358-D0F69D155C02}"/>
               </a:ext>
             </a:extLst>
           </p:cNvPr>
@@ -5285,7 +5285,7 @@
           <p:cNvPr id="8" name="">
             <a:extLst xmlns:a="http://schemas.openxmlformats.org/drawingml/2006/main">
               <a:ext uri="{FF2B5EF4-FFF2-40B4-BE49-F238E27FC236}">
-                <a16:creationId xmlns:a16="http://schemas.microsoft.com/office/drawing/2014/main" id="{2EAC8B61-AA71-4305-9159-D482824265B6}"/>
+                <a16:creationId xmlns:a16="http://schemas.microsoft.com/office/drawing/2014/main" id="{57374A53-08FD-4F25-8C75-7F0000D91AA3}"/>
               </a:ext>
             </a:extLst>
           </p:cNvPr>
@@ -5369,7 +5369,7 @@
           <p:cNvPr id="9" name="">
             <a:extLst xmlns:a="http://schemas.openxmlformats.org/drawingml/2006/main">
               <a:ext uri="{FF2B5EF4-FFF2-40B4-BE49-F238E27FC236}">
-                <a16:creationId xmlns:a16="http://schemas.microsoft.com/office/drawing/2014/main" id="{A8E21444-79CC-4FCF-8046-026E6A42A63F}"/>
+                <a16:creationId xmlns:a16="http://schemas.microsoft.com/office/drawing/2014/main" id="{67026311-537A-4EAE-964D-7EED1467B797}"/>
               </a:ext>
             </a:extLst>
           </p:cNvPr>
@@ -5579,7 +5579,7 @@
           <p:cNvPr id="11" name="">
             <a:extLst xmlns:a="http://schemas.openxmlformats.org/drawingml/2006/main">
               <a:ext uri="{FF2B5EF4-FFF2-40B4-BE49-F238E27FC236}">
-                <a16:creationId xmlns:a16="http://schemas.microsoft.com/office/drawing/2014/main" id="{54F148CA-0417-4B89-92F8-1602D958F0F2}"/>
+                <a16:creationId xmlns:a16="http://schemas.microsoft.com/office/drawing/2014/main" id="{E01C12E7-963B-42C3-92A2-D6B5F7AE0267}"/>
               </a:ext>
             </a:extLst>
           </p:cNvPr>
@@ -5634,7 +5634,7 @@
     </p:spTree>
     <p:extLst>
       <p:ext uri="{BB962C8B-B14F-4D97-AF65-F5344CB8AC3E}">
-        <p14:creationId xmlns:p14="http://schemas.microsoft.com/office/powerpoint/2010/main" val="1814131044"/>
+        <p14:creationId xmlns:p14="http://schemas.microsoft.com/office/powerpoint/2010/main" val="1286257210"/>
       </p:ext>
     </p:extLst>
   </p:cSld>
@@ -5665,7 +5665,7 @@
           <p:cNvPr id="13" name="">
             <a:extLst xmlns:a="http://schemas.openxmlformats.org/drawingml/2006/main">
               <a:ext uri="{FF2B5EF4-FFF2-40B4-BE49-F238E27FC236}">
-                <a16:creationId xmlns:a16="http://schemas.microsoft.com/office/drawing/2014/main" id="{A5F92D5E-7AA5-45F5-A5CA-5AE5AAEB37B5}"/>
+                <a16:creationId xmlns:a16="http://schemas.microsoft.com/office/drawing/2014/main" id="{86C08364-F238-47F7-A63A-50EE5745A86A}"/>
               </a:ext>
             </a:extLst>
           </p:cNvPr>
@@ -5722,7 +5722,7 @@
           <p:cNvPr id="2" name="">
             <a:extLst xmlns:a="http://schemas.openxmlformats.org/drawingml/2006/main">
               <a:ext uri="{FF2B5EF4-FFF2-40B4-BE49-F238E27FC236}">
-                <a16:creationId xmlns:a16="http://schemas.microsoft.com/office/drawing/2014/main" id="{3D8BA2EE-6300-4B92-8F27-D1AEFE767041}"/>
+                <a16:creationId xmlns:a16="http://schemas.microsoft.com/office/drawing/2014/main" id="{F73C4790-0A83-4E7E-A91A-20932EE32D51}"/>
               </a:ext>
             </a:extLst>
           </p:cNvPr>
@@ -5779,7 +5779,7 @@
           <p:cNvPr id="3" name="">
             <a:extLst xmlns:a="http://schemas.openxmlformats.org/drawingml/2006/main">
               <a:ext uri="{FF2B5EF4-FFF2-40B4-BE49-F238E27FC236}">
-                <a16:creationId xmlns:a16="http://schemas.microsoft.com/office/drawing/2014/main" id="{7419EC9F-53B6-4C63-A61E-3715B16CF623}"/>
+                <a16:creationId xmlns:a16="http://schemas.microsoft.com/office/drawing/2014/main" id="{1E635A88-8BC4-4190-A989-0132FAF59B1E}"/>
               </a:ext>
             </a:extLst>
           </p:cNvPr>
@@ -5836,7 +5836,7 @@
           <p:cNvPr id="4" name="">
             <a:extLst xmlns:a="http://schemas.openxmlformats.org/drawingml/2006/main">
               <a:ext uri="{FF2B5EF4-FFF2-40B4-BE49-F238E27FC236}">
-                <a16:creationId xmlns:a16="http://schemas.microsoft.com/office/drawing/2014/main" id="{AE677B5D-6E8C-42AF-8D35-27F15C485583}"/>
+                <a16:creationId xmlns:a16="http://schemas.microsoft.com/office/drawing/2014/main" id="{76168E4C-223A-453F-98BB-55DE1695234D}"/>
               </a:ext>
             </a:extLst>
           </p:cNvPr>
@@ -5924,7 +5924,7 @@
           <p:cNvPr id="5" name="">
             <a:extLst xmlns:a="http://schemas.openxmlformats.org/drawingml/2006/main">
               <a:ext uri="{FF2B5EF4-FFF2-40B4-BE49-F238E27FC236}">
-                <a16:creationId xmlns:a16="http://schemas.microsoft.com/office/drawing/2014/main" id="{14E9555C-D18F-4F96-80B0-0C8E3A81451B}"/>
+                <a16:creationId xmlns:a16="http://schemas.microsoft.com/office/drawing/2014/main" id="{00E6EC05-94C6-44C0-985A-F388816898E1}"/>
               </a:ext>
             </a:extLst>
           </p:cNvPr>
@@ -5985,7 +5985,7 @@
           <p:cNvPr id="6" name="">
             <a:extLst xmlns:a="http://schemas.openxmlformats.org/drawingml/2006/main">
               <a:ext uri="{FF2B5EF4-FFF2-40B4-BE49-F238E27FC236}">
-                <a16:creationId xmlns:a16="http://schemas.microsoft.com/office/drawing/2014/main" id="{D1BF87C8-A90D-4150-9F0C-0983F8BA5D05}"/>
+                <a16:creationId xmlns:a16="http://schemas.microsoft.com/office/drawing/2014/main" id="{6547A84F-059B-42C9-A461-2A342EC1F237}"/>
               </a:ext>
             </a:extLst>
           </p:cNvPr>
@@ -6094,7 +6094,7 @@
           <p:cNvPr id="8" name="">
             <a:extLst xmlns:a="http://schemas.openxmlformats.org/drawingml/2006/main">
               <a:ext uri="{FF2B5EF4-FFF2-40B4-BE49-F238E27FC236}">
-                <a16:creationId xmlns:a16="http://schemas.microsoft.com/office/drawing/2014/main" id="{30D3BCC8-1C38-45BC-8918-C392945E7E3C}"/>
+                <a16:creationId xmlns:a16="http://schemas.microsoft.com/office/drawing/2014/main" id="{EF62F07F-3264-4524-9048-FF56DC066D0B}"/>
               </a:ext>
             </a:extLst>
           </p:cNvPr>
@@ -6203,7 +6203,7 @@
           <p:cNvPr id="10" name="">
             <a:extLst xmlns:a="http://schemas.openxmlformats.org/drawingml/2006/main">
               <a:ext uri="{FF2B5EF4-FFF2-40B4-BE49-F238E27FC236}">
-                <a16:creationId xmlns:a16="http://schemas.microsoft.com/office/drawing/2014/main" id="{0311F743-97D6-4CF7-A206-63AD5B98BCA5}"/>
+                <a16:creationId xmlns:a16="http://schemas.microsoft.com/office/drawing/2014/main" id="{25BA0861-73E2-4AEF-9664-C79BDD8B9E87}"/>
               </a:ext>
             </a:extLst>
           </p:cNvPr>
@@ -6312,7 +6312,7 @@
           <p:cNvPr id="12" name="">
             <a:extLst xmlns:a="http://schemas.openxmlformats.org/drawingml/2006/main">
               <a:ext uri="{FF2B5EF4-FFF2-40B4-BE49-F238E27FC236}">
-                <a16:creationId xmlns:a16="http://schemas.microsoft.com/office/drawing/2014/main" id="{FACE142C-28AE-44A3-8CDD-550231EB68FF}"/>
+                <a16:creationId xmlns:a16="http://schemas.microsoft.com/office/drawing/2014/main" id="{236AC334-BC79-4E65-BB95-FC5F3F62DC25}"/>
               </a:ext>
             </a:extLst>
           </p:cNvPr>
@@ -6398,7 +6398,7 @@
     </p:spTree>
     <p:extLst>
       <p:ext uri="{BB962C8B-B14F-4D97-AF65-F5344CB8AC3E}">
-        <p14:creationId xmlns:p14="http://schemas.microsoft.com/office/powerpoint/2010/main" val="1702856441"/>
+        <p14:creationId xmlns:p14="http://schemas.microsoft.com/office/powerpoint/2010/main" val="1300901033"/>
       </p:ext>
     </p:extLst>
   </p:cSld>
@@ -6429,7 +6429,7 @@
           <p:cNvPr id="9" name="">
             <a:extLst xmlns:a="http://schemas.openxmlformats.org/drawingml/2006/main">
               <a:ext uri="{FF2B5EF4-FFF2-40B4-BE49-F238E27FC236}">
-                <a16:creationId xmlns:a16="http://schemas.microsoft.com/office/drawing/2014/main" id="{512AB1B2-D2F9-406C-B3ED-0C1BF0C51050}"/>
+                <a16:creationId xmlns:a16="http://schemas.microsoft.com/office/drawing/2014/main" id="{4BA15E8D-8808-4AE6-AF8C-27C5E8733BAA}"/>
               </a:ext>
             </a:extLst>
           </p:cNvPr>
@@ -6486,7 +6486,7 @@
           <p:cNvPr id="2" name="">
             <a:extLst xmlns:a="http://schemas.openxmlformats.org/drawingml/2006/main">
               <a:ext uri="{FF2B5EF4-FFF2-40B4-BE49-F238E27FC236}">
-                <a16:creationId xmlns:a16="http://schemas.microsoft.com/office/drawing/2014/main" id="{04F3292F-9668-4270-B136-DACC03BC8AF0}"/>
+                <a16:creationId xmlns:a16="http://schemas.microsoft.com/office/drawing/2014/main" id="{C220C7DD-143D-41C1-B29F-095147E03B41}"/>
               </a:ext>
             </a:extLst>
           </p:cNvPr>
@@ -6543,7 +6543,7 @@
           <p:cNvPr id="3" name="">
             <a:extLst xmlns:a="http://schemas.openxmlformats.org/drawingml/2006/main">
               <a:ext uri="{FF2B5EF4-FFF2-40B4-BE49-F238E27FC236}">
-                <a16:creationId xmlns:a16="http://schemas.microsoft.com/office/drawing/2014/main" id="{5D68E0C8-325F-40DE-82F3-39D40D3824BC}"/>
+                <a16:creationId xmlns:a16="http://schemas.microsoft.com/office/drawing/2014/main" id="{7B5B5326-CA99-4824-9557-98B49634BF06}"/>
               </a:ext>
             </a:extLst>
           </p:cNvPr>
@@ -6600,7 +6600,7 @@
           <p:cNvPr id="4" name="">
             <a:extLst xmlns:a="http://schemas.openxmlformats.org/drawingml/2006/main">
               <a:ext uri="{FF2B5EF4-FFF2-40B4-BE49-F238E27FC236}">
-                <a16:creationId xmlns:a16="http://schemas.microsoft.com/office/drawing/2014/main" id="{81C82799-C50F-4A6F-9C8C-53BCD74E2AAF}"/>
+                <a16:creationId xmlns:a16="http://schemas.microsoft.com/office/drawing/2014/main" id="{F2CF8ECB-F20A-4EEB-9A1A-198999CA2B79}"/>
               </a:ext>
             </a:extLst>
           </p:cNvPr>
@@ -6844,7 +6844,7 @@
           <p:cNvPr id="6" name="">
             <a:extLst xmlns:a="http://schemas.openxmlformats.org/drawingml/2006/main">
               <a:ext uri="{FF2B5EF4-FFF2-40B4-BE49-F238E27FC236}">
-                <a16:creationId xmlns:a16="http://schemas.microsoft.com/office/drawing/2014/main" id="{B1E504DE-FDF3-4B5E-AAF5-FEDF54EF0DD3}"/>
+                <a16:creationId xmlns:a16="http://schemas.microsoft.com/office/drawing/2014/main" id="{549A60AB-0597-410A-AE64-807464AE1F7C}"/>
               </a:ext>
             </a:extLst>
           </p:cNvPr>
@@ -6901,7 +6901,7 @@
           <p:cNvPr id="7" name="">
             <a:extLst xmlns:a="http://schemas.openxmlformats.org/drawingml/2006/main">
               <a:ext uri="{FF2B5EF4-FFF2-40B4-BE49-F238E27FC236}">
-                <a16:creationId xmlns:a16="http://schemas.microsoft.com/office/drawing/2014/main" id="{37C1509C-A401-4C9C-ADD1-BC18C90EAB6E}"/>
+                <a16:creationId xmlns:a16="http://schemas.microsoft.com/office/drawing/2014/main" id="{B4061017-FA0E-4E7A-AA75-46350E45F6EF}"/>
               </a:ext>
             </a:extLst>
           </p:cNvPr>
@@ -6989,7 +6989,7 @@
           <p:cNvPr id="8" name="">
             <a:extLst xmlns:a="http://schemas.openxmlformats.org/drawingml/2006/main">
               <a:ext uri="{FF2B5EF4-FFF2-40B4-BE49-F238E27FC236}">
-                <a16:creationId xmlns:a16="http://schemas.microsoft.com/office/drawing/2014/main" id="{EA09217C-350B-4766-AC16-2692BAAB9069}"/>
+                <a16:creationId xmlns:a16="http://schemas.microsoft.com/office/drawing/2014/main" id="{2BA52406-7684-428F-99B1-848F1E20912A}"/>
               </a:ext>
             </a:extLst>
           </p:cNvPr>
@@ -7044,7 +7044,7 @@
     </p:spTree>
     <p:extLst>
       <p:ext uri="{BB962C8B-B14F-4D97-AF65-F5344CB8AC3E}">
-        <p14:creationId xmlns:p14="http://schemas.microsoft.com/office/powerpoint/2010/main" val="314869899"/>
+        <p14:creationId xmlns:p14="http://schemas.microsoft.com/office/powerpoint/2010/main" val="1427917535"/>
       </p:ext>
     </p:extLst>
   </p:cSld>
@@ -7075,7 +7075,7 @@
           <p:cNvPr id="7" name="">
             <a:extLst xmlns:a="http://schemas.openxmlformats.org/drawingml/2006/main">
               <a:ext uri="{FF2B5EF4-FFF2-40B4-BE49-F238E27FC236}">
-                <a16:creationId xmlns:a16="http://schemas.microsoft.com/office/drawing/2014/main" id="{F9791DE8-A369-4EEA-ACB9-6056FB9A364D}"/>
+                <a16:creationId xmlns:a16="http://schemas.microsoft.com/office/drawing/2014/main" id="{E2DD152C-D34C-4382-938D-B1228406D7B2}"/>
               </a:ext>
             </a:extLst>
           </p:cNvPr>
@@ -7132,7 +7132,7 @@
           <p:cNvPr id="2" name="">
             <a:extLst xmlns:a="http://schemas.openxmlformats.org/drawingml/2006/main">
               <a:ext uri="{FF2B5EF4-FFF2-40B4-BE49-F238E27FC236}">
-                <a16:creationId xmlns:a16="http://schemas.microsoft.com/office/drawing/2014/main" id="{DE702F9E-6FD3-42F9-81C9-45792AA79E75}"/>
+                <a16:creationId xmlns:a16="http://schemas.microsoft.com/office/drawing/2014/main" id="{749F084D-26B3-40D5-A787-9FC4DE2CBEC5}"/>
               </a:ext>
             </a:extLst>
           </p:cNvPr>
@@ -7189,7 +7189,7 @@
           <p:cNvPr id="3" name="">
             <a:extLst xmlns:a="http://schemas.openxmlformats.org/drawingml/2006/main">
               <a:ext uri="{FF2B5EF4-FFF2-40B4-BE49-F238E27FC236}">
-                <a16:creationId xmlns:a16="http://schemas.microsoft.com/office/drawing/2014/main" id="{174C9C47-2163-4BF2-8970-163DE9D2CCEC}"/>
+                <a16:creationId xmlns:a16="http://schemas.microsoft.com/office/drawing/2014/main" id="{07EB0D2B-AAEE-4AFA-A5E1-2A8D7A8AD3E1}"/>
               </a:ext>
             </a:extLst>
           </p:cNvPr>
@@ -7246,7 +7246,7 @@
           <p:cNvPr id="4" name="">
             <a:extLst xmlns:a="http://schemas.openxmlformats.org/drawingml/2006/main">
               <a:ext uri="{FF2B5EF4-FFF2-40B4-BE49-F238E27FC236}">
-                <a16:creationId xmlns:a16="http://schemas.microsoft.com/office/drawing/2014/main" id="{E3E01AA3-2579-44D2-A5C7-8F6CF2D14E0E}"/>
+                <a16:creationId xmlns:a16="http://schemas.microsoft.com/office/drawing/2014/main" id="{5E9AFF45-49C1-4C6F-BA57-74C9DCE046B5}"/>
               </a:ext>
             </a:extLst>
           </p:cNvPr>
@@ -7545,7 +7545,7 @@
           <p:cNvPr id="6" name="">
             <a:extLst xmlns:a="http://schemas.openxmlformats.org/drawingml/2006/main">
               <a:ext uri="{FF2B5EF4-FFF2-40B4-BE49-F238E27FC236}">
-                <a16:creationId xmlns:a16="http://schemas.microsoft.com/office/drawing/2014/main" id="{D089A4B5-599E-4CE2-BC07-4ABD16DA19C3}"/>
+                <a16:creationId xmlns:a16="http://schemas.microsoft.com/office/drawing/2014/main" id="{7891FF3F-8747-4424-AF92-BED79FAB3181}"/>
               </a:ext>
             </a:extLst>
           </p:cNvPr>
@@ -7631,7 +7631,7 @@
     </p:spTree>
     <p:extLst>
       <p:ext uri="{BB962C8B-B14F-4D97-AF65-F5344CB8AC3E}">
-        <p14:creationId xmlns:p14="http://schemas.microsoft.com/office/powerpoint/2010/main" val="560650925"/>
+        <p14:creationId xmlns:p14="http://schemas.microsoft.com/office/powerpoint/2010/main" val="930436447"/>
       </p:ext>
     </p:extLst>
   </p:cSld>
@@ -7662,7 +7662,7 @@
           <p:cNvPr id="6" name="">
             <a:extLst xmlns:a="http://schemas.openxmlformats.org/drawingml/2006/main">
               <a:ext uri="{FF2B5EF4-FFF2-40B4-BE49-F238E27FC236}">
-                <a16:creationId xmlns:a16="http://schemas.microsoft.com/office/drawing/2014/main" id="{C47680F7-9713-4E13-8A9D-16D5A9D690E9}"/>
+                <a16:creationId xmlns:a16="http://schemas.microsoft.com/office/drawing/2014/main" id="{34BB26CF-9DC5-4B83-836E-DE228C26B6FE}"/>
               </a:ext>
             </a:extLst>
           </p:cNvPr>
@@ -7719,7 +7719,7 @@
           <p:cNvPr id="2" name="">
             <a:extLst xmlns:a="http://schemas.openxmlformats.org/drawingml/2006/main">
               <a:ext uri="{FF2B5EF4-FFF2-40B4-BE49-F238E27FC236}">
-                <a16:creationId xmlns:a16="http://schemas.microsoft.com/office/drawing/2014/main" id="{8EF958C0-4594-442D-82D9-F50D420AA723}"/>
+                <a16:creationId xmlns:a16="http://schemas.microsoft.com/office/drawing/2014/main" id="{07AF5AB7-DA6A-4FB8-85FA-C9EDF8B881C3}"/>
               </a:ext>
             </a:extLst>
           </p:cNvPr>
@@ -7776,7 +7776,7 @@
           <p:cNvPr id="3" name="">
             <a:extLst xmlns:a="http://schemas.openxmlformats.org/drawingml/2006/main">
               <a:ext uri="{FF2B5EF4-FFF2-40B4-BE49-F238E27FC236}">
-                <a16:creationId xmlns:a16="http://schemas.microsoft.com/office/drawing/2014/main" id="{5F1C8A97-3922-49D9-8062-63D2955DF567}"/>
+                <a16:creationId xmlns:a16="http://schemas.microsoft.com/office/drawing/2014/main" id="{4BD11FC6-CE83-410D-816C-956FB6B0FF10}"/>
               </a:ext>
             </a:extLst>
           </p:cNvPr>
@@ -7833,7 +7833,7 @@
           <p:cNvPr id="4" name="">
             <a:extLst xmlns:a="http://schemas.openxmlformats.org/drawingml/2006/main">
               <a:ext uri="{FF2B5EF4-FFF2-40B4-BE49-F238E27FC236}">
-                <a16:creationId xmlns:a16="http://schemas.microsoft.com/office/drawing/2014/main" id="{7239DF67-969A-4C7F-A79C-830876A285EC}"/>
+                <a16:creationId xmlns:a16="http://schemas.microsoft.com/office/drawing/2014/main" id="{98F6FA2A-5C70-47FE-86AA-5734516015F4}"/>
               </a:ext>
             </a:extLst>
           </p:cNvPr>
@@ -8098,7 +8098,7 @@
     </p:spTree>
     <p:extLst>
       <p:ext uri="{BB962C8B-B14F-4D97-AF65-F5344CB8AC3E}">
-        <p14:creationId xmlns:p14="http://schemas.microsoft.com/office/powerpoint/2010/main" val="1404689855"/>
+        <p14:creationId xmlns:p14="http://schemas.microsoft.com/office/powerpoint/2010/main" val="222135518"/>
       </p:ext>
     </p:extLst>
   </p:cSld>
@@ -8129,7 +8129,7 @@
           <p:cNvPr id="8" name="">
             <a:extLst xmlns:a="http://schemas.openxmlformats.org/drawingml/2006/main">
               <a:ext uri="{FF2B5EF4-FFF2-40B4-BE49-F238E27FC236}">
-                <a16:creationId xmlns:a16="http://schemas.microsoft.com/office/drawing/2014/main" id="{9B789894-4C24-4FD9-BB48-5299E26DBD80}"/>
+                <a16:creationId xmlns:a16="http://schemas.microsoft.com/office/drawing/2014/main" id="{D0509877-C2F3-47F0-B001-ABABDE00DD35}"/>
               </a:ext>
             </a:extLst>
           </p:cNvPr>
@@ -8186,7 +8186,7 @@
           <p:cNvPr id="2" name="">
             <a:extLst xmlns:a="http://schemas.openxmlformats.org/drawingml/2006/main">
               <a:ext uri="{FF2B5EF4-FFF2-40B4-BE49-F238E27FC236}">
-                <a16:creationId xmlns:a16="http://schemas.microsoft.com/office/drawing/2014/main" id="{DFAC3BD8-CF10-4A07-87FF-68F3C9CCE7B9}"/>
+                <a16:creationId xmlns:a16="http://schemas.microsoft.com/office/drawing/2014/main" id="{449DE7A4-6A0A-4B1D-825D-FC3AC8B41C2A}"/>
               </a:ext>
             </a:extLst>
           </p:cNvPr>
@@ -8243,7 +8243,7 @@
           <p:cNvPr id="3" name="">
             <a:extLst xmlns:a="http://schemas.openxmlformats.org/drawingml/2006/main">
               <a:ext uri="{FF2B5EF4-FFF2-40B4-BE49-F238E27FC236}">
-                <a16:creationId xmlns:a16="http://schemas.microsoft.com/office/drawing/2014/main" id="{0CE1269E-94EF-468A-BDE3-6B6F85C58C02}"/>
+                <a16:creationId xmlns:a16="http://schemas.microsoft.com/office/drawing/2014/main" id="{8759A6E2-A894-4712-B2F2-F6D01D2897E9}"/>
               </a:ext>
             </a:extLst>
           </p:cNvPr>
@@ -8300,7 +8300,7 @@
           <p:cNvPr id="4" name="">
             <a:extLst xmlns:a="http://schemas.openxmlformats.org/drawingml/2006/main">
               <a:ext uri="{FF2B5EF4-FFF2-40B4-BE49-F238E27FC236}">
-                <a16:creationId xmlns:a16="http://schemas.microsoft.com/office/drawing/2014/main" id="{ACA7BAB9-6742-4446-B4A0-9E8CD294F7E6}"/>
+                <a16:creationId xmlns:a16="http://schemas.microsoft.com/office/drawing/2014/main" id="{EE1514B2-FE6C-446F-9028-9578D9594793}"/>
               </a:ext>
             </a:extLst>
           </p:cNvPr>
@@ -8357,7 +8357,7 @@
           <p:cNvPr id="5" name="">
             <a:extLst xmlns:a="http://schemas.openxmlformats.org/drawingml/2006/main">
               <a:ext uri="{FF2B5EF4-FFF2-40B4-BE49-F238E27FC236}">
-                <a16:creationId xmlns:a16="http://schemas.microsoft.com/office/drawing/2014/main" id="{3A0AA65C-2BCA-43F8-B27C-87CA40A3AC02}"/>
+                <a16:creationId xmlns:a16="http://schemas.microsoft.com/office/drawing/2014/main" id="{127152C6-5915-4C5A-AB18-E823F55190F9}"/>
               </a:ext>
             </a:extLst>
           </p:cNvPr>
@@ -8414,7 +8414,7 @@
           <p:cNvPr id="6" name="">
             <a:extLst xmlns:a="http://schemas.openxmlformats.org/drawingml/2006/main">
               <a:ext uri="{FF2B5EF4-FFF2-40B4-BE49-F238E27FC236}">
-                <a16:creationId xmlns:a16="http://schemas.microsoft.com/office/drawing/2014/main" id="{10752F35-5091-474A-9E55-E50579C9607C}"/>
+                <a16:creationId xmlns:a16="http://schemas.microsoft.com/office/drawing/2014/main" id="{2FA05D8E-E9F4-44CF-A983-31186E977ADE}"/>
               </a:ext>
             </a:extLst>
           </p:cNvPr>
@@ -8471,7 +8471,7 @@
           <p:cNvPr id="7" name="">
             <a:extLst xmlns:a="http://schemas.openxmlformats.org/drawingml/2006/main">
               <a:ext uri="{FF2B5EF4-FFF2-40B4-BE49-F238E27FC236}">
-                <a16:creationId xmlns:a16="http://schemas.microsoft.com/office/drawing/2014/main" id="{90DA3038-C760-4BD1-B92C-34FD98ECFC25}"/>
+                <a16:creationId xmlns:a16="http://schemas.microsoft.com/office/drawing/2014/main" id="{D72F19BE-FFEF-4029-9A6C-BC7955BCBE47}"/>
               </a:ext>
             </a:extLst>
           </p:cNvPr>
@@ -8526,7 +8526,7 @@
     </p:spTree>
     <p:extLst>
       <p:ext uri="{BB962C8B-B14F-4D97-AF65-F5344CB8AC3E}">
-        <p14:creationId xmlns:p14="http://schemas.microsoft.com/office/powerpoint/2010/main" val="1745022577"/>
+        <p14:creationId xmlns:p14="http://schemas.microsoft.com/office/powerpoint/2010/main" val="1412634186"/>
       </p:ext>
     </p:extLst>
   </p:cSld>
@@ -8557,7 +8557,7 @@
           <p:cNvPr id="14" name="">
             <a:extLst xmlns:a="http://schemas.openxmlformats.org/drawingml/2006/main">
               <a:ext uri="{FF2B5EF4-FFF2-40B4-BE49-F238E27FC236}">
-                <a16:creationId xmlns:a16="http://schemas.microsoft.com/office/drawing/2014/main" id="{0EB9D23E-F3CB-4D74-8288-CEB3D998ECDD}"/>
+                <a16:creationId xmlns:a16="http://schemas.microsoft.com/office/drawing/2014/main" id="{7746058B-331B-4A9B-8DE8-4AE8198516EA}"/>
               </a:ext>
             </a:extLst>
           </p:cNvPr>
@@ -8614,7 +8614,7 @@
           <p:cNvPr id="2" name="">
             <a:extLst xmlns:a="http://schemas.openxmlformats.org/drawingml/2006/main">
               <a:ext uri="{FF2B5EF4-FFF2-40B4-BE49-F238E27FC236}">
-                <a16:creationId xmlns:a16="http://schemas.microsoft.com/office/drawing/2014/main" id="{D9FB61FB-2B88-4E97-9013-3274CD82477C}"/>
+                <a16:creationId xmlns:a16="http://schemas.microsoft.com/office/drawing/2014/main" id="{D5956F79-6A35-4649-B7DF-F65DF40AF5B5}"/>
               </a:ext>
             </a:extLst>
           </p:cNvPr>
@@ -8671,7 +8671,7 @@
           <p:cNvPr id="3" name="">
             <a:extLst xmlns:a="http://schemas.openxmlformats.org/drawingml/2006/main">
               <a:ext uri="{FF2B5EF4-FFF2-40B4-BE49-F238E27FC236}">
-                <a16:creationId xmlns:a16="http://schemas.microsoft.com/office/drawing/2014/main" id="{630D4BC9-4379-43C0-9E3E-A8709C8D2ED0}"/>
+                <a16:creationId xmlns:a16="http://schemas.microsoft.com/office/drawing/2014/main" id="{EE084E5F-528E-478A-96DF-A6ABF262D4AF}"/>
               </a:ext>
             </a:extLst>
           </p:cNvPr>
@@ -8728,7 +8728,7 @@
           <p:cNvPr id="4" name="">
             <a:extLst xmlns:a="http://schemas.openxmlformats.org/drawingml/2006/main">
               <a:ext uri="{FF2B5EF4-FFF2-40B4-BE49-F238E27FC236}">
-                <a16:creationId xmlns:a16="http://schemas.microsoft.com/office/drawing/2014/main" id="{931B0BB0-F3C7-45D3-90F8-BC66A60F3926}"/>
+                <a16:creationId xmlns:a16="http://schemas.microsoft.com/office/drawing/2014/main" id="{72A7C96B-61B6-471A-B46E-8695B7B720A9}"/>
               </a:ext>
             </a:extLst>
           </p:cNvPr>
@@ -8785,7 +8785,7 @@
           <p:cNvPr id="5" name="">
             <a:extLst xmlns:a="http://schemas.openxmlformats.org/drawingml/2006/main">
               <a:ext uri="{FF2B5EF4-FFF2-40B4-BE49-F238E27FC236}">
-                <a16:creationId xmlns:a16="http://schemas.microsoft.com/office/drawing/2014/main" id="{EC4FBF3C-8411-4336-91F1-620DAC2AB4CF}"/>
+                <a16:creationId xmlns:a16="http://schemas.microsoft.com/office/drawing/2014/main" id="{586490A8-EB35-4927-BC35-A866A0378D5F}"/>
               </a:ext>
             </a:extLst>
           </p:cNvPr>
@@ -8842,7 +8842,7 @@
           <p:cNvPr id="6" name="">
             <a:extLst xmlns:a="http://schemas.openxmlformats.org/drawingml/2006/main">
               <a:ext uri="{FF2B5EF4-FFF2-40B4-BE49-F238E27FC236}">
-                <a16:creationId xmlns:a16="http://schemas.microsoft.com/office/drawing/2014/main" id="{66792A48-028C-42F7-AD59-D4B7821A1016}"/>
+                <a16:creationId xmlns:a16="http://schemas.microsoft.com/office/drawing/2014/main" id="{5DF08409-35FB-4A37-BA95-D0BB5D575764}"/>
               </a:ext>
             </a:extLst>
           </p:cNvPr>
@@ -8899,7 +8899,7 @@
           <p:cNvPr id="7" name="">
             <a:extLst xmlns:a="http://schemas.openxmlformats.org/drawingml/2006/main">
               <a:ext uri="{FF2B5EF4-FFF2-40B4-BE49-F238E27FC236}">
-                <a16:creationId xmlns:a16="http://schemas.microsoft.com/office/drawing/2014/main" id="{7358D622-67F7-4992-BF5A-2C0A776FF4B4}"/>
+                <a16:creationId xmlns:a16="http://schemas.microsoft.com/office/drawing/2014/main" id="{CDDD1E70-E201-436E-B46E-F07CB08E77EA}"/>
               </a:ext>
             </a:extLst>
           </p:cNvPr>
@@ -8956,7 +8956,7 @@
           <p:cNvPr id="8" name="">
             <a:extLst xmlns:a="http://schemas.openxmlformats.org/drawingml/2006/main">
               <a:ext uri="{FF2B5EF4-FFF2-40B4-BE49-F238E27FC236}">
-                <a16:creationId xmlns:a16="http://schemas.microsoft.com/office/drawing/2014/main" id="{5E486D8A-4D82-41B2-8E30-A9ECF8F23416}"/>
+                <a16:creationId xmlns:a16="http://schemas.microsoft.com/office/drawing/2014/main" id="{34D5847D-9EC4-4929-84AE-428D00A685CB}"/>
               </a:ext>
             </a:extLst>
           </p:cNvPr>
@@ -9013,7 +9013,7 @@
           <p:cNvPr id="9" name="">
             <a:extLst xmlns:a="http://schemas.openxmlformats.org/drawingml/2006/main">
               <a:ext uri="{FF2B5EF4-FFF2-40B4-BE49-F238E27FC236}">
-                <a16:creationId xmlns:a16="http://schemas.microsoft.com/office/drawing/2014/main" id="{9F96EC2A-DD3F-4404-A4F8-F0293E51DBDD}"/>
+                <a16:creationId xmlns:a16="http://schemas.microsoft.com/office/drawing/2014/main" id="{2CEF4E99-A094-4512-B6D4-F3858A8DA736}"/>
               </a:ext>
             </a:extLst>
           </p:cNvPr>
@@ -9070,7 +9070,7 @@
           <p:cNvPr id="10" name="">
             <a:extLst xmlns:a="http://schemas.openxmlformats.org/drawingml/2006/main">
               <a:ext uri="{FF2B5EF4-FFF2-40B4-BE49-F238E27FC236}">
-                <a16:creationId xmlns:a16="http://schemas.microsoft.com/office/drawing/2014/main" id="{10CD939B-7CFE-420C-9AD9-532AC7A46B04}"/>
+                <a16:creationId xmlns:a16="http://schemas.microsoft.com/office/drawing/2014/main" id="{FC9750C4-E106-4DB3-A111-30EFCED86194}"/>
               </a:ext>
             </a:extLst>
           </p:cNvPr>
@@ -9150,7 +9150,7 @@
           <p:cNvPr id="11" name="">
             <a:extLst xmlns:a="http://schemas.openxmlformats.org/drawingml/2006/main">
               <a:ext uri="{FF2B5EF4-FFF2-40B4-BE49-F238E27FC236}">
-                <a16:creationId xmlns:a16="http://schemas.microsoft.com/office/drawing/2014/main" id="{A31C8520-16FA-460E-AD7A-F0DD36A6E945}"/>
+                <a16:creationId xmlns:a16="http://schemas.microsoft.com/office/drawing/2014/main" id="{40D9EF88-31DE-4A12-9E57-F545DAA12BC8}"/>
               </a:ext>
             </a:extLst>
           </p:cNvPr>
@@ -9179,7 +9179,7 @@
           <p:cNvPr id="12" name="">
             <a:extLst xmlns:a="http://schemas.openxmlformats.org/drawingml/2006/main">
               <a:ext uri="{FF2B5EF4-FFF2-40B4-BE49-F238E27FC236}">
-                <a16:creationId xmlns:a16="http://schemas.microsoft.com/office/drawing/2014/main" id="{C95AE0D7-0797-47C9-9F8E-8C23B64B65AC}"/>
+                <a16:creationId xmlns:a16="http://schemas.microsoft.com/office/drawing/2014/main" id="{6960D0A6-F588-4F2A-8E13-9998CCA16362}"/>
               </a:ext>
             </a:extLst>
           </p:cNvPr>
@@ -9236,7 +9236,7 @@
           <p:cNvPr id="13" name="">
             <a:extLst xmlns:a="http://schemas.openxmlformats.org/drawingml/2006/main">
               <a:ext uri="{FF2B5EF4-FFF2-40B4-BE49-F238E27FC236}">
-                <a16:creationId xmlns:a16="http://schemas.microsoft.com/office/drawing/2014/main" id="{0B54C290-35D1-4AC8-A4FF-9CEA02452853}"/>
+                <a16:creationId xmlns:a16="http://schemas.microsoft.com/office/drawing/2014/main" id="{BDF19639-9A27-4F2E-A551-AC654E243312}"/>
               </a:ext>
             </a:extLst>
           </p:cNvPr>
@@ -9322,7 +9322,7 @@
     </p:spTree>
     <p:extLst>
       <p:ext uri="{BB962C8B-B14F-4D97-AF65-F5344CB8AC3E}">
-        <p14:creationId xmlns:p14="http://schemas.microsoft.com/office/powerpoint/2010/main" val="655841451"/>
+        <p14:creationId xmlns:p14="http://schemas.microsoft.com/office/powerpoint/2010/main" val="1683374267"/>
       </p:ext>
     </p:extLst>
   </p:cSld>
@@ -9353,7 +9353,7 @@
           <p:cNvPr id="6" name="">
             <a:extLst xmlns:a="http://schemas.openxmlformats.org/drawingml/2006/main">
               <a:ext uri="{FF2B5EF4-FFF2-40B4-BE49-F238E27FC236}">
-                <a16:creationId xmlns:a16="http://schemas.microsoft.com/office/drawing/2014/main" id="{379C9F2C-355D-41B4-A4DB-4F034399CFEA}"/>
+                <a16:creationId xmlns:a16="http://schemas.microsoft.com/office/drawing/2014/main" id="{33E9DC4B-4EFD-4587-891E-D088592DC576}"/>
               </a:ext>
             </a:extLst>
           </p:cNvPr>
@@ -9410,7 +9410,7 @@
           <p:cNvPr id="2" name="">
             <a:extLst xmlns:a="http://schemas.openxmlformats.org/drawingml/2006/main">
               <a:ext uri="{FF2B5EF4-FFF2-40B4-BE49-F238E27FC236}">
-                <a16:creationId xmlns:a16="http://schemas.microsoft.com/office/drawing/2014/main" id="{6A01092B-9DB2-4124-87CD-E1FE142F042B}"/>
+                <a16:creationId xmlns:a16="http://schemas.microsoft.com/office/drawing/2014/main" id="{54E5521F-A98F-4C38-B28A-BE1EFD2B10D9}"/>
               </a:ext>
             </a:extLst>
           </p:cNvPr>
@@ -9467,7 +9467,7 @@
           <p:cNvPr id="3" name="">
             <a:extLst xmlns:a="http://schemas.openxmlformats.org/drawingml/2006/main">
               <a:ext uri="{FF2B5EF4-FFF2-40B4-BE49-F238E27FC236}">
-                <a16:creationId xmlns:a16="http://schemas.microsoft.com/office/drawing/2014/main" id="{011CD939-E608-4287-B439-8C3FEDEEA9AD}"/>
+                <a16:creationId xmlns:a16="http://schemas.microsoft.com/office/drawing/2014/main" id="{5B4C3BEE-D9C6-4505-8C5F-7B317C9F60C7}"/>
               </a:ext>
             </a:extLst>
           </p:cNvPr>
@@ -9524,7 +9524,7 @@
           <p:cNvPr id="4" name="">
             <a:extLst xmlns:a="http://schemas.openxmlformats.org/drawingml/2006/main">
               <a:ext uri="{FF2B5EF4-FFF2-40B4-BE49-F238E27FC236}">
-                <a16:creationId xmlns:a16="http://schemas.microsoft.com/office/drawing/2014/main" id="{A7C29AE9-F394-45E9-8837-AF904B09BB7D}"/>
+                <a16:creationId xmlns:a16="http://schemas.microsoft.com/office/drawing/2014/main" id="{71A24727-BC96-4095-AADE-B10875EE04F8}"/>
               </a:ext>
             </a:extLst>
           </p:cNvPr>
@@ -9639,7 +9639,7 @@
           <p:cNvPr id="5" name="">
             <a:extLst xmlns:a="http://schemas.openxmlformats.org/drawingml/2006/main">
               <a:ext uri="{FF2B5EF4-FFF2-40B4-BE49-F238E27FC236}">
-                <a16:creationId xmlns:a16="http://schemas.microsoft.com/office/drawing/2014/main" id="{4817C926-D581-4717-9CAD-59658267CB3F}"/>
+                <a16:creationId xmlns:a16="http://schemas.microsoft.com/office/drawing/2014/main" id="{A66F0C37-B1B6-4BA4-B7E9-4E6B95567A3D}"/>
               </a:ext>
             </a:extLst>
           </p:cNvPr>
@@ -9694,7 +9694,7 @@
     </p:spTree>
     <p:extLst>
       <p:ext uri="{BB962C8B-B14F-4D97-AF65-F5344CB8AC3E}">
-        <p14:creationId xmlns:p14="http://schemas.microsoft.com/office/powerpoint/2010/main" val="32729578"/>
+        <p14:creationId xmlns:p14="http://schemas.microsoft.com/office/powerpoint/2010/main" val="1951878457"/>
       </p:ext>
     </p:extLst>
   </p:cSld>
@@ -9725,7 +9725,7 @@
           <p:cNvPr id="6" name="">
             <a:extLst xmlns:a="http://schemas.openxmlformats.org/drawingml/2006/main">
               <a:ext uri="{FF2B5EF4-FFF2-40B4-BE49-F238E27FC236}">
-                <a16:creationId xmlns:a16="http://schemas.microsoft.com/office/drawing/2014/main" id="{55949734-689B-48E3-89AA-022DFF037B25}"/>
+                <a16:creationId xmlns:a16="http://schemas.microsoft.com/office/drawing/2014/main" id="{46659465-7F9F-4D7B-B8FF-4AEAF9E029B8}"/>
               </a:ext>
             </a:extLst>
           </p:cNvPr>
@@ -9782,7 +9782,7 @@
           <p:cNvPr id="2" name="">
             <a:extLst xmlns:a="http://schemas.openxmlformats.org/drawingml/2006/main">
               <a:ext uri="{FF2B5EF4-FFF2-40B4-BE49-F238E27FC236}">
-                <a16:creationId xmlns:a16="http://schemas.microsoft.com/office/drawing/2014/main" id="{34AEB1E3-5A98-4D21-BF17-7414DC691BFB}"/>
+                <a16:creationId xmlns:a16="http://schemas.microsoft.com/office/drawing/2014/main" id="{D867557F-66A9-4BB2-A26C-C821505DE292}"/>
               </a:ext>
             </a:extLst>
           </p:cNvPr>
@@ -9839,7 +9839,7 @@
           <p:cNvPr id="3" name="">
             <a:extLst xmlns:a="http://schemas.openxmlformats.org/drawingml/2006/main">
               <a:ext uri="{FF2B5EF4-FFF2-40B4-BE49-F238E27FC236}">
-                <a16:creationId xmlns:a16="http://schemas.microsoft.com/office/drawing/2014/main" id="{AC7BBF0E-B263-47C5-916C-31E5D4F6ABEB}"/>
+                <a16:creationId xmlns:a16="http://schemas.microsoft.com/office/drawing/2014/main" id="{A6345670-FD3C-4661-9339-E6A278D7C61B}"/>
               </a:ext>
             </a:extLst>
           </p:cNvPr>
@@ -10738,7 +10738,7 @@
           <p:cNvPr id="5" name="">
             <a:extLst xmlns:a="http://schemas.openxmlformats.org/drawingml/2006/main">
               <a:ext uri="{FF2B5EF4-FFF2-40B4-BE49-F238E27FC236}">
-                <a16:creationId xmlns:a16="http://schemas.microsoft.com/office/drawing/2014/main" id="{DC7E0400-2B1B-4BA7-8933-B4ECC74F4D0A}"/>
+                <a16:creationId xmlns:a16="http://schemas.microsoft.com/office/drawing/2014/main" id="{AC929227-29A6-4967-BB18-16F160E107EA}"/>
               </a:ext>
             </a:extLst>
           </p:cNvPr>
@@ -10793,7 +10793,7 @@
     </p:spTree>
     <p:extLst>
       <p:ext uri="{BB962C8B-B14F-4D97-AF65-F5344CB8AC3E}">
-        <p14:creationId xmlns:p14="http://schemas.microsoft.com/office/powerpoint/2010/main" val="2018317244"/>
+        <p14:creationId xmlns:p14="http://schemas.microsoft.com/office/powerpoint/2010/main" val="52263718"/>
       </p:ext>
     </p:extLst>
   </p:cSld>
@@ -10824,7 +10824,7 @@
           <p:cNvPr id="6" name="">
             <a:extLst xmlns:a="http://schemas.openxmlformats.org/drawingml/2006/main">
               <a:ext uri="{FF2B5EF4-FFF2-40B4-BE49-F238E27FC236}">
-                <a16:creationId xmlns:a16="http://schemas.microsoft.com/office/drawing/2014/main" id="{94CA99D4-B806-4884-8E2F-4AEB56133331}"/>
+                <a16:creationId xmlns:a16="http://schemas.microsoft.com/office/drawing/2014/main" id="{D689ADE2-4D0B-412F-89C9-737F2ADC7BDA}"/>
               </a:ext>
             </a:extLst>
           </p:cNvPr>
@@ -10881,7 +10881,7 @@
           <p:cNvPr id="2" name="">
             <a:extLst xmlns:a="http://schemas.openxmlformats.org/drawingml/2006/main">
               <a:ext uri="{FF2B5EF4-FFF2-40B4-BE49-F238E27FC236}">
-                <a16:creationId xmlns:a16="http://schemas.microsoft.com/office/drawing/2014/main" id="{E04FDE31-204C-4CB9-98F1-495FB4F491B1}"/>
+                <a16:creationId xmlns:a16="http://schemas.microsoft.com/office/drawing/2014/main" id="{F4B2D2DB-5685-48C3-B467-BA737B4E018E}"/>
               </a:ext>
             </a:extLst>
           </p:cNvPr>
@@ -10938,7 +10938,7 @@
           <p:cNvPr id="3" name="">
             <a:extLst xmlns:a="http://schemas.openxmlformats.org/drawingml/2006/main">
               <a:ext uri="{FF2B5EF4-FFF2-40B4-BE49-F238E27FC236}">
-                <a16:creationId xmlns:a16="http://schemas.microsoft.com/office/drawing/2014/main" id="{A0F575E8-28AC-47FA-805A-2FD9469231DF}"/>
+                <a16:creationId xmlns:a16="http://schemas.microsoft.com/office/drawing/2014/main" id="{3BF790DE-C94B-4CE6-AE7F-5A2CC33D2FD6}"/>
               </a:ext>
             </a:extLst>
           </p:cNvPr>
@@ -10995,7 +10995,7 @@
           <p:cNvPr id="4" name="">
             <a:extLst xmlns:a="http://schemas.openxmlformats.org/drawingml/2006/main">
               <a:ext uri="{FF2B5EF4-FFF2-40B4-BE49-F238E27FC236}">
-                <a16:creationId xmlns:a16="http://schemas.microsoft.com/office/drawing/2014/main" id="{46888CD7-0CA2-4AB4-AB92-8212291DD8B7}"/>
+                <a16:creationId xmlns:a16="http://schemas.microsoft.com/office/drawing/2014/main" id="{56F414A4-092F-4C18-9D73-741E3D54774D}"/>
               </a:ext>
             </a:extLst>
           </p:cNvPr>
@@ -11159,7 +11159,20 @@
                           <a:ea typeface="Arial"/>
                           <a:cs typeface="Arial"/>
                         </a:rPr>
-                        <a:t>Logistic regression</a:t>
+                        <a:t>All RNA</a:t>
+                      </a:r>
+                    </a:p>
+                    <a:p>
+                      <a:r>
+                        <a:rPr sz="2100" b="0">
+                          <a:solidFill>
+                            <a:srgbClr val="16343E"/>
+                          </a:solidFill>
+                          <a:latin typeface="Arial"/>
+                          <a:ea typeface="Arial"/>
+                          <a:cs typeface="Arial"/>
+                        </a:rPr>
+                        <a:t>(Logistic Regression)</a:t>
                       </a:r>
                     </a:p>
                   </a:txBody>
@@ -11283,7 +11296,7 @@
     </p:spTree>
     <p:extLst>
       <p:ext uri="{BB962C8B-B14F-4D97-AF65-F5344CB8AC3E}">
-        <p14:creationId xmlns:p14="http://schemas.microsoft.com/office/powerpoint/2010/main" val="2063255045"/>
+        <p14:creationId xmlns:p14="http://schemas.microsoft.com/office/powerpoint/2010/main" val="219983860"/>
       </p:ext>
     </p:extLst>
   </p:cSld>
@@ -11314,7 +11327,7 @@
           <p:cNvPr id="9" name="">
             <a:extLst xmlns:a="http://schemas.openxmlformats.org/drawingml/2006/main">
               <a:ext uri="{FF2B5EF4-FFF2-40B4-BE49-F238E27FC236}">
-                <a16:creationId xmlns:a16="http://schemas.microsoft.com/office/drawing/2014/main" id="{8A32D8E0-FF44-4BE2-9CFB-986A8B0D238F}"/>
+                <a16:creationId xmlns:a16="http://schemas.microsoft.com/office/drawing/2014/main" id="{747543AD-C6F5-40BE-9DE2-619718B36445}"/>
               </a:ext>
             </a:extLst>
           </p:cNvPr>
@@ -11371,7 +11384,7 @@
           <p:cNvPr id="2" name="">
             <a:extLst xmlns:a="http://schemas.openxmlformats.org/drawingml/2006/main">
               <a:ext uri="{FF2B5EF4-FFF2-40B4-BE49-F238E27FC236}">
-                <a16:creationId xmlns:a16="http://schemas.microsoft.com/office/drawing/2014/main" id="{4EB33213-B83B-4721-96ED-76442E42DD98}"/>
+                <a16:creationId xmlns:a16="http://schemas.microsoft.com/office/drawing/2014/main" id="{0895CCC0-1271-425F-A124-15C07C70327F}"/>
               </a:ext>
             </a:extLst>
           </p:cNvPr>
@@ -11428,7 +11441,7 @@
           <p:cNvPr id="3" name="">
             <a:extLst xmlns:a="http://schemas.openxmlformats.org/drawingml/2006/main">
               <a:ext uri="{FF2B5EF4-FFF2-40B4-BE49-F238E27FC236}">
-                <a16:creationId xmlns:a16="http://schemas.microsoft.com/office/drawing/2014/main" id="{9C0ACBFF-05B7-4B3D-940E-B6FD3159A4E4}"/>
+                <a16:creationId xmlns:a16="http://schemas.microsoft.com/office/drawing/2014/main" id="{3AA42124-549C-4D7F-9C48-202E0DF4D28D}"/>
               </a:ext>
             </a:extLst>
           </p:cNvPr>
@@ -11485,7 +11498,7 @@
           <p:cNvPr id="4" name="">
             <a:extLst xmlns:a="http://schemas.openxmlformats.org/drawingml/2006/main">
               <a:ext uri="{FF2B5EF4-FFF2-40B4-BE49-F238E27FC236}">
-                <a16:creationId xmlns:a16="http://schemas.microsoft.com/office/drawing/2014/main" id="{121AF52B-247E-4943-8B8E-540AADEA40D2}"/>
+                <a16:creationId xmlns:a16="http://schemas.microsoft.com/office/drawing/2014/main" id="{84D4E816-D788-4751-AFE5-0AF7FFA67E4A}"/>
               </a:ext>
             </a:extLst>
           </p:cNvPr>
@@ -11549,7 +11562,7 @@
         </p:xfrm>
         <a:graphic xmlns:a="http://schemas.openxmlformats.org/drawingml/2006/main">
           <a:graphicData uri="http://schemas.openxmlformats.org/drawingml/2006/chart">
-            <c:chart xmlns:r="http://schemas.openxmlformats.org/officeDocument/2006/relationships" xmlns:c="http://schemas.openxmlformats.org/drawingml/2006/chart" r:id="Rdb5be6f53d784fec"/>
+            <c:chart xmlns:r="http://schemas.openxmlformats.org/officeDocument/2006/relationships" xmlns:c="http://schemas.openxmlformats.org/drawingml/2006/chart" r:id="R619cde001f45431e"/>
           </a:graphicData>
         </a:graphic>
       </p:graphicFrame>
@@ -11558,7 +11571,7 @@
           <p:cNvPr id="6" name="">
             <a:extLst xmlns:a="http://schemas.openxmlformats.org/drawingml/2006/main">
               <a:ext uri="{FF2B5EF4-FFF2-40B4-BE49-F238E27FC236}">
-                <a16:creationId xmlns:a16="http://schemas.microsoft.com/office/drawing/2014/main" id="{2622B0D4-E884-4620-B1B0-921155D8EF9D}"/>
+                <a16:creationId xmlns:a16="http://schemas.microsoft.com/office/drawing/2014/main" id="{05CCD67C-E81B-4374-BA9B-79912B8A1572}"/>
               </a:ext>
             </a:extLst>
           </p:cNvPr>
@@ -11615,7 +11628,7 @@
           <p:cNvPr id="7" name="">
             <a:extLst xmlns:a="http://schemas.openxmlformats.org/drawingml/2006/main">
               <a:ext uri="{FF2B5EF4-FFF2-40B4-BE49-F238E27FC236}">
-                <a16:creationId xmlns:a16="http://schemas.microsoft.com/office/drawing/2014/main" id="{CC790DE9-2EAD-454D-ABE5-2D1A29391439}"/>
+                <a16:creationId xmlns:a16="http://schemas.microsoft.com/office/drawing/2014/main" id="{B4B380D1-84D2-43EC-BBFD-C6B6CA8610C0}"/>
               </a:ext>
             </a:extLst>
           </p:cNvPr>
@@ -11731,7 +11744,7 @@
           <p:cNvPr id="8" name="">
             <a:extLst xmlns:a="http://schemas.openxmlformats.org/drawingml/2006/main">
               <a:ext uri="{FF2B5EF4-FFF2-40B4-BE49-F238E27FC236}">
-                <a16:creationId xmlns:a16="http://schemas.microsoft.com/office/drawing/2014/main" id="{42E79CB4-9A24-4FE6-A128-BEC205DE1A99}"/>
+                <a16:creationId xmlns:a16="http://schemas.microsoft.com/office/drawing/2014/main" id="{A4877D99-A50E-4936-B1B4-C85CDB2AB788}"/>
               </a:ext>
             </a:extLst>
           </p:cNvPr>
@@ -11786,7 +11799,7 @@
     </p:spTree>
     <p:extLst>
       <p:ext uri="{BB962C8B-B14F-4D97-AF65-F5344CB8AC3E}">
-        <p14:creationId xmlns:p14="http://schemas.microsoft.com/office/powerpoint/2010/main" val="1128465027"/>
+        <p14:creationId xmlns:p14="http://schemas.microsoft.com/office/powerpoint/2010/main" val="1188728465"/>
       </p:ext>
     </p:extLst>
   </p:cSld>
@@ -11817,7 +11830,7 @@
           <p:cNvPr id="6" name="">
             <a:extLst xmlns:a="http://schemas.openxmlformats.org/drawingml/2006/main">
               <a:ext uri="{FF2B5EF4-FFF2-40B4-BE49-F238E27FC236}">
-                <a16:creationId xmlns:a16="http://schemas.microsoft.com/office/drawing/2014/main" id="{F97148CA-A3EC-4BF9-8EAE-08483ABB644F}"/>
+                <a16:creationId xmlns:a16="http://schemas.microsoft.com/office/drawing/2014/main" id="{1232AB50-136A-46CC-BBF0-C02403D4EA0A}"/>
               </a:ext>
             </a:extLst>
           </p:cNvPr>
@@ -11874,7 +11887,7 @@
           <p:cNvPr id="2" name="">
             <a:extLst xmlns:a="http://schemas.openxmlformats.org/drawingml/2006/main">
               <a:ext uri="{FF2B5EF4-FFF2-40B4-BE49-F238E27FC236}">
-                <a16:creationId xmlns:a16="http://schemas.microsoft.com/office/drawing/2014/main" id="{80A451FE-5834-485B-B4AE-ED3A7364D28D}"/>
+                <a16:creationId xmlns:a16="http://schemas.microsoft.com/office/drawing/2014/main" id="{DAF49CAA-5FC2-40E9-87A7-2B13D2512877}"/>
               </a:ext>
             </a:extLst>
           </p:cNvPr>
@@ -11931,7 +11944,7 @@
           <p:cNvPr id="3" name="">
             <a:extLst xmlns:a="http://schemas.openxmlformats.org/drawingml/2006/main">
               <a:ext uri="{FF2B5EF4-FFF2-40B4-BE49-F238E27FC236}">
-                <a16:creationId xmlns:a16="http://schemas.microsoft.com/office/drawing/2014/main" id="{8DACE6B3-499E-4A3E-B00C-0F2C60CAB1B9}"/>
+                <a16:creationId xmlns:a16="http://schemas.microsoft.com/office/drawing/2014/main" id="{7F91929E-A4B3-459C-8C05-6FB92E57CAD5}"/>
               </a:ext>
             </a:extLst>
           </p:cNvPr>
@@ -12411,7 +12424,7 @@
           <p:cNvPr id="5" name="">
             <a:extLst xmlns:a="http://schemas.openxmlformats.org/drawingml/2006/main">
               <a:ext uri="{FF2B5EF4-FFF2-40B4-BE49-F238E27FC236}">
-                <a16:creationId xmlns:a16="http://schemas.microsoft.com/office/drawing/2014/main" id="{79F5D0DE-361B-4A61-AF76-638BE0EFF6CF}"/>
+                <a16:creationId xmlns:a16="http://schemas.microsoft.com/office/drawing/2014/main" id="{9FC79E3C-79F9-4E29-A9D5-8628D0D24354}"/>
               </a:ext>
             </a:extLst>
           </p:cNvPr>
@@ -12470,7 +12483,7 @@
     </p:spTree>
     <p:extLst>
       <p:ext uri="{BB962C8B-B14F-4D97-AF65-F5344CB8AC3E}">
-        <p14:creationId xmlns:p14="http://schemas.microsoft.com/office/powerpoint/2010/main" val="1748712610"/>
+        <p14:creationId xmlns:p14="http://schemas.microsoft.com/office/powerpoint/2010/main" val="439906211"/>
       </p:ext>
     </p:extLst>
   </p:cSld>
@@ -12501,7 +12514,7 @@
           <p:cNvPr id="5" name="">
             <a:extLst xmlns:a="http://schemas.openxmlformats.org/drawingml/2006/main">
               <a:ext uri="{FF2B5EF4-FFF2-40B4-BE49-F238E27FC236}">
-                <a16:creationId xmlns:a16="http://schemas.microsoft.com/office/drawing/2014/main" id="{E70CABA4-0B91-44F2-887D-AED6C7DC16C2}"/>
+                <a16:creationId xmlns:a16="http://schemas.microsoft.com/office/drawing/2014/main" id="{868A43C7-957D-45FB-95B7-1827737FAC5C}"/>
               </a:ext>
             </a:extLst>
           </p:cNvPr>
@@ -12558,7 +12571,7 @@
           <p:cNvPr id="2" name="">
             <a:extLst xmlns:a="http://schemas.openxmlformats.org/drawingml/2006/main">
               <a:ext uri="{FF2B5EF4-FFF2-40B4-BE49-F238E27FC236}">
-                <a16:creationId xmlns:a16="http://schemas.microsoft.com/office/drawing/2014/main" id="{6725FDBC-741E-43C6-BE5B-3128796BBDDC}"/>
+                <a16:creationId xmlns:a16="http://schemas.microsoft.com/office/drawing/2014/main" id="{B03C8645-EAF6-4FA4-AF0F-0A95CF368CFF}"/>
               </a:ext>
             </a:extLst>
           </p:cNvPr>
@@ -12615,7 +12628,7 @@
           <p:cNvPr id="3" name="">
             <a:extLst xmlns:a="http://schemas.openxmlformats.org/drawingml/2006/main">
               <a:ext uri="{FF2B5EF4-FFF2-40B4-BE49-F238E27FC236}">
-                <a16:creationId xmlns:a16="http://schemas.microsoft.com/office/drawing/2014/main" id="{ACEC57C8-88F3-45D0-BEBF-3143468EE48C}"/>
+                <a16:creationId xmlns:a16="http://schemas.microsoft.com/office/drawing/2014/main" id="{D08B6D4F-59A8-4AF6-816A-5E2979440FFB}"/>
               </a:ext>
             </a:extLst>
           </p:cNvPr>
@@ -13029,7 +13042,7 @@
     </p:spTree>
     <p:extLst>
       <p:ext uri="{BB962C8B-B14F-4D97-AF65-F5344CB8AC3E}">
-        <p14:creationId xmlns:p14="http://schemas.microsoft.com/office/powerpoint/2010/main" val="927022904"/>
+        <p14:creationId xmlns:p14="http://schemas.microsoft.com/office/powerpoint/2010/main" val="169428397"/>
       </p:ext>
     </p:extLst>
   </p:cSld>
@@ -13060,7 +13073,7 @@
           <p:cNvPr id="9" name="">
             <a:extLst xmlns:a="http://schemas.openxmlformats.org/drawingml/2006/main">
               <a:ext uri="{FF2B5EF4-FFF2-40B4-BE49-F238E27FC236}">
-                <a16:creationId xmlns:a16="http://schemas.microsoft.com/office/drawing/2014/main" id="{DD6F1A53-D048-4571-A82A-77FA85F84425}"/>
+                <a16:creationId xmlns:a16="http://schemas.microsoft.com/office/drawing/2014/main" id="{EE6DA9B7-F60F-489B-B241-98FE5043D3A2}"/>
               </a:ext>
             </a:extLst>
           </p:cNvPr>
@@ -13117,7 +13130,7 @@
           <p:cNvPr id="2" name="">
             <a:extLst xmlns:a="http://schemas.openxmlformats.org/drawingml/2006/main">
               <a:ext uri="{FF2B5EF4-FFF2-40B4-BE49-F238E27FC236}">
-                <a16:creationId xmlns:a16="http://schemas.microsoft.com/office/drawing/2014/main" id="{50F5A7F3-CBD2-43F4-B9A2-34ABFF0B5BB4}"/>
+                <a16:creationId xmlns:a16="http://schemas.microsoft.com/office/drawing/2014/main" id="{92E6F405-8D85-4974-A273-480B849B94F5}"/>
               </a:ext>
             </a:extLst>
           </p:cNvPr>
@@ -13174,7 +13187,7 @@
           <p:cNvPr id="3" name="">
             <a:extLst xmlns:a="http://schemas.openxmlformats.org/drawingml/2006/main">
               <a:ext uri="{FF2B5EF4-FFF2-40B4-BE49-F238E27FC236}">
-                <a16:creationId xmlns:a16="http://schemas.microsoft.com/office/drawing/2014/main" id="{6BC82A0E-893D-4517-8617-69B38F41E430}"/>
+                <a16:creationId xmlns:a16="http://schemas.microsoft.com/office/drawing/2014/main" id="{E87FE2A1-8BE3-474B-B3A2-5ADEA6FE9122}"/>
               </a:ext>
             </a:extLst>
           </p:cNvPr>
@@ -13231,7 +13244,7 @@
           <p:cNvPr id="4" name="">
             <a:extLst xmlns:a="http://schemas.openxmlformats.org/drawingml/2006/main">
               <a:ext uri="{FF2B5EF4-FFF2-40B4-BE49-F238E27FC236}">
-                <a16:creationId xmlns:a16="http://schemas.microsoft.com/office/drawing/2014/main" id="{E6377937-E98E-43C0-AB32-2B5875CD3E7C}"/>
+                <a16:creationId xmlns:a16="http://schemas.microsoft.com/office/drawing/2014/main" id="{577AEE9C-0C6E-43C5-9419-069AFA530131}"/>
               </a:ext>
             </a:extLst>
           </p:cNvPr>
@@ -13292,7 +13305,7 @@
           <p:cNvPr id="5" name="">
             <a:extLst xmlns:a="http://schemas.openxmlformats.org/drawingml/2006/main">
               <a:ext uri="{FF2B5EF4-FFF2-40B4-BE49-F238E27FC236}">
-                <a16:creationId xmlns:a16="http://schemas.microsoft.com/office/drawing/2014/main" id="{8C971C1F-17EF-4710-8AB3-BA3398344F6D}"/>
+                <a16:creationId xmlns:a16="http://schemas.microsoft.com/office/drawing/2014/main" id="{885231EE-69CD-4445-8A6D-B74F76BEC09A}"/>
               </a:ext>
             </a:extLst>
           </p:cNvPr>
@@ -13349,7 +13362,7 @@
           <p:cNvPr id="6" name="">
             <a:extLst xmlns:a="http://schemas.openxmlformats.org/drawingml/2006/main">
               <a:ext uri="{FF2B5EF4-FFF2-40B4-BE49-F238E27FC236}">
-                <a16:creationId xmlns:a16="http://schemas.microsoft.com/office/drawing/2014/main" id="{D420B206-7506-4C74-B0FF-6547D1C3DC23}"/>
+                <a16:creationId xmlns:a16="http://schemas.microsoft.com/office/drawing/2014/main" id="{DC477BF9-4BD8-4AA7-85A3-9D9E44EE15ED}"/>
               </a:ext>
             </a:extLst>
           </p:cNvPr>
@@ -13410,7 +13423,7 @@
           <p:cNvPr id="7" name="">
             <a:extLst xmlns:a="http://schemas.openxmlformats.org/drawingml/2006/main">
               <a:ext uri="{FF2B5EF4-FFF2-40B4-BE49-F238E27FC236}">
-                <a16:creationId xmlns:a16="http://schemas.microsoft.com/office/drawing/2014/main" id="{D00FF0A2-78F3-4229-A6EA-65361DF68C71}"/>
+                <a16:creationId xmlns:a16="http://schemas.microsoft.com/office/drawing/2014/main" id="{1B88A194-1C87-47D8-B7FB-0CA0370637FC}"/>
               </a:ext>
             </a:extLst>
           </p:cNvPr>
@@ -13467,7 +13480,7 @@
           <p:cNvPr id="8" name="">
             <a:extLst xmlns:a="http://schemas.openxmlformats.org/drawingml/2006/main">
               <a:ext uri="{FF2B5EF4-FFF2-40B4-BE49-F238E27FC236}">
-                <a16:creationId xmlns:a16="http://schemas.microsoft.com/office/drawing/2014/main" id="{19E3BB0A-BFA3-4717-8BBD-1C31B0E58D9A}"/>
+                <a16:creationId xmlns:a16="http://schemas.microsoft.com/office/drawing/2014/main" id="{96AE9056-C0AD-445C-94B7-41527272514D}"/>
               </a:ext>
             </a:extLst>
           </p:cNvPr>
@@ -13522,7 +13535,7 @@
     </p:spTree>
     <p:extLst>
       <p:ext uri="{BB962C8B-B14F-4D97-AF65-F5344CB8AC3E}">
-        <p14:creationId xmlns:p14="http://schemas.microsoft.com/office/powerpoint/2010/main" val="1702687091"/>
+        <p14:creationId xmlns:p14="http://schemas.microsoft.com/office/powerpoint/2010/main" val="694160498"/>
       </p:ext>
     </p:extLst>
   </p:cSld>
@@ -13553,7 +13566,7 @@
           <p:cNvPr id="6" name="">
             <a:extLst xmlns:a="http://schemas.openxmlformats.org/drawingml/2006/main">
               <a:ext uri="{FF2B5EF4-FFF2-40B4-BE49-F238E27FC236}">
-                <a16:creationId xmlns:a16="http://schemas.microsoft.com/office/drawing/2014/main" id="{792F73D4-7FC3-4CF0-8799-946D4DDEDAB7}"/>
+                <a16:creationId xmlns:a16="http://schemas.microsoft.com/office/drawing/2014/main" id="{54756BC6-E61F-4BE5-9C9C-0B9D419F5788}"/>
               </a:ext>
             </a:extLst>
           </p:cNvPr>
@@ -13610,7 +13623,7 @@
           <p:cNvPr id="2" name="">
             <a:extLst xmlns:a="http://schemas.openxmlformats.org/drawingml/2006/main">
               <a:ext uri="{FF2B5EF4-FFF2-40B4-BE49-F238E27FC236}">
-                <a16:creationId xmlns:a16="http://schemas.microsoft.com/office/drawing/2014/main" id="{BA5272BD-AC75-41B0-859F-7DE3E75C903D}"/>
+                <a16:creationId xmlns:a16="http://schemas.microsoft.com/office/drawing/2014/main" id="{01CCF35F-CE2E-42F1-BCAF-D691BAFFF801}"/>
               </a:ext>
             </a:extLst>
           </p:cNvPr>
@@ -13667,7 +13680,7 @@
           <p:cNvPr id="3" name="">
             <a:extLst xmlns:a="http://schemas.openxmlformats.org/drawingml/2006/main">
               <a:ext uri="{FF2B5EF4-FFF2-40B4-BE49-F238E27FC236}">
-                <a16:creationId xmlns:a16="http://schemas.microsoft.com/office/drawing/2014/main" id="{7E6F8FD4-DB0D-4106-ADAB-B21335ED430D}"/>
+                <a16:creationId xmlns:a16="http://schemas.microsoft.com/office/drawing/2014/main" id="{47716137-55C9-4DFB-8A00-E94F8C7FFC51}"/>
               </a:ext>
             </a:extLst>
           </p:cNvPr>
@@ -13724,7 +13737,7 @@
           <p:cNvPr id="4" name="">
             <a:extLst xmlns:a="http://schemas.openxmlformats.org/drawingml/2006/main">
               <a:ext uri="{FF2B5EF4-FFF2-40B4-BE49-F238E27FC236}">
-                <a16:creationId xmlns:a16="http://schemas.microsoft.com/office/drawing/2014/main" id="{6259CAD9-3C27-4250-AAB4-93235A36833C}"/>
+                <a16:creationId xmlns:a16="http://schemas.microsoft.com/office/drawing/2014/main" id="{0E797420-AB25-4E8B-B4CE-4CA59E912071}"/>
               </a:ext>
             </a:extLst>
           </p:cNvPr>
@@ -13866,7 +13879,7 @@
           <p:cNvPr id="5" name="">
             <a:extLst xmlns:a="http://schemas.openxmlformats.org/drawingml/2006/main">
               <a:ext uri="{FF2B5EF4-FFF2-40B4-BE49-F238E27FC236}">
-                <a16:creationId xmlns:a16="http://schemas.microsoft.com/office/drawing/2014/main" id="{6062BA0A-ECED-4DEE-95B3-D6FFF1E22A0A}"/>
+                <a16:creationId xmlns:a16="http://schemas.microsoft.com/office/drawing/2014/main" id="{4ED16745-8C7A-48E8-8997-163E3B0D5D7E}"/>
               </a:ext>
             </a:extLst>
           </p:cNvPr>
@@ -13921,7 +13934,7 @@
     </p:spTree>
     <p:extLst>
       <p:ext uri="{BB962C8B-B14F-4D97-AF65-F5344CB8AC3E}">
-        <p14:creationId xmlns:p14="http://schemas.microsoft.com/office/powerpoint/2010/main" val="1785283183"/>
+        <p14:creationId xmlns:p14="http://schemas.microsoft.com/office/powerpoint/2010/main" val="601556736"/>
       </p:ext>
     </p:extLst>
   </p:cSld>
@@ -13952,7 +13965,7 @@
           <p:cNvPr id="12" name="">
             <a:extLst xmlns:a="http://schemas.openxmlformats.org/drawingml/2006/main">
               <a:ext uri="{FF2B5EF4-FFF2-40B4-BE49-F238E27FC236}">
-                <a16:creationId xmlns:a16="http://schemas.microsoft.com/office/drawing/2014/main" id="{D4D853AF-C761-4DA2-8765-B68C043E00AD}"/>
+                <a16:creationId xmlns:a16="http://schemas.microsoft.com/office/drawing/2014/main" id="{7D0094FF-D06F-482B-9242-7BDFB4A9C78D}"/>
               </a:ext>
             </a:extLst>
           </p:cNvPr>
@@ -14009,7 +14022,7 @@
           <p:cNvPr id="2" name="">
             <a:extLst xmlns:a="http://schemas.openxmlformats.org/drawingml/2006/main">
               <a:ext uri="{FF2B5EF4-FFF2-40B4-BE49-F238E27FC236}">
-                <a16:creationId xmlns:a16="http://schemas.microsoft.com/office/drawing/2014/main" id="{D90DCD1E-C6DE-45A0-A022-222066D91A07}"/>
+                <a16:creationId xmlns:a16="http://schemas.microsoft.com/office/drawing/2014/main" id="{C7B8DF2E-2A67-43E8-BC68-500678ABAB6F}"/>
               </a:ext>
             </a:extLst>
           </p:cNvPr>
@@ -14066,7 +14079,7 @@
           <p:cNvPr id="3" name="">
             <a:extLst xmlns:a="http://schemas.openxmlformats.org/drawingml/2006/main">
               <a:ext uri="{FF2B5EF4-FFF2-40B4-BE49-F238E27FC236}">
-                <a16:creationId xmlns:a16="http://schemas.microsoft.com/office/drawing/2014/main" id="{1DCC894F-656A-41C3-9B2E-F66B0B888985}"/>
+                <a16:creationId xmlns:a16="http://schemas.microsoft.com/office/drawing/2014/main" id="{9524CB2D-7365-45BB-AA6B-73B32B7F3A63}"/>
               </a:ext>
             </a:extLst>
           </p:cNvPr>
@@ -14123,7 +14136,7 @@
           <p:cNvPr id="4" name="">
             <a:extLst xmlns:a="http://schemas.openxmlformats.org/drawingml/2006/main">
               <a:ext uri="{FF2B5EF4-FFF2-40B4-BE49-F238E27FC236}">
-                <a16:creationId xmlns:a16="http://schemas.microsoft.com/office/drawing/2014/main" id="{F40695B3-CF66-46F7-8B21-BFFC0DF85315}"/>
+                <a16:creationId xmlns:a16="http://schemas.microsoft.com/office/drawing/2014/main" id="{B23DB8C7-25C3-468D-A25F-3F3D7025F824}"/>
               </a:ext>
             </a:extLst>
           </p:cNvPr>
@@ -14184,7 +14197,7 @@
           <p:cNvPr id="5" name="">
             <a:extLst xmlns:a="http://schemas.openxmlformats.org/drawingml/2006/main">
               <a:ext uri="{FF2B5EF4-FFF2-40B4-BE49-F238E27FC236}">
-                <a16:creationId xmlns:a16="http://schemas.microsoft.com/office/drawing/2014/main" id="{D3C16AB5-4208-418F-B1A0-54A23D6A8903}"/>
+                <a16:creationId xmlns:a16="http://schemas.microsoft.com/office/drawing/2014/main" id="{CE814467-ED1A-4400-BFB3-F808AE2195DA}"/>
               </a:ext>
             </a:extLst>
           </p:cNvPr>
@@ -14216,7 +14229,7 @@
           <p:cNvPr id="6" name="">
             <a:extLst xmlns:a="http://schemas.openxmlformats.org/drawingml/2006/main">
               <a:ext uri="{FF2B5EF4-FFF2-40B4-BE49-F238E27FC236}">
-                <a16:creationId xmlns:a16="http://schemas.microsoft.com/office/drawing/2014/main" id="{05B485C7-E960-4EAC-B4C5-0C35F420C4C6}"/>
+                <a16:creationId xmlns:a16="http://schemas.microsoft.com/office/drawing/2014/main" id="{6C7DD97A-7F99-4356-B33D-F8D138297D7E}"/>
               </a:ext>
             </a:extLst>
           </p:cNvPr>
@@ -14273,7 +14286,7 @@
           <p:cNvPr id="7" name="">
             <a:extLst xmlns:a="http://schemas.openxmlformats.org/drawingml/2006/main">
               <a:ext uri="{FF2B5EF4-FFF2-40B4-BE49-F238E27FC236}">
-                <a16:creationId xmlns:a16="http://schemas.microsoft.com/office/drawing/2014/main" id="{10CD0D37-BC50-4B47-A78B-32D6F4346256}"/>
+                <a16:creationId xmlns:a16="http://schemas.microsoft.com/office/drawing/2014/main" id="{19D159D8-DA08-4A07-B0FA-265373FAC45A}"/>
               </a:ext>
             </a:extLst>
           </p:cNvPr>
@@ -14330,7 +14343,7 @@
           <p:cNvPr id="8" name="">
             <a:extLst xmlns:a="http://schemas.openxmlformats.org/drawingml/2006/main">
               <a:ext uri="{FF2B5EF4-FFF2-40B4-BE49-F238E27FC236}">
-                <a16:creationId xmlns:a16="http://schemas.microsoft.com/office/drawing/2014/main" id="{444710FB-0765-402D-8454-E83CE206B99D}"/>
+                <a16:creationId xmlns:a16="http://schemas.microsoft.com/office/drawing/2014/main" id="{04E0DEF9-6650-415E-A398-6A114C24555A}"/>
               </a:ext>
             </a:extLst>
           </p:cNvPr>
@@ -14391,7 +14404,7 @@
           <p:cNvPr id="9" name="">
             <a:extLst xmlns:a="http://schemas.openxmlformats.org/drawingml/2006/main">
               <a:ext uri="{FF2B5EF4-FFF2-40B4-BE49-F238E27FC236}">
-                <a16:creationId xmlns:a16="http://schemas.microsoft.com/office/drawing/2014/main" id="{E94AB028-1A71-4941-BDD5-67B75AAF820D}"/>
+                <a16:creationId xmlns:a16="http://schemas.microsoft.com/office/drawing/2014/main" id="{47412A2E-02DE-4CDB-8073-565EB9E26ABC}"/>
               </a:ext>
             </a:extLst>
           </p:cNvPr>
@@ -14423,7 +14436,7 @@
           <p:cNvPr id="10" name="">
             <a:extLst xmlns:a="http://schemas.openxmlformats.org/drawingml/2006/main">
               <a:ext uri="{FF2B5EF4-FFF2-40B4-BE49-F238E27FC236}">
-                <a16:creationId xmlns:a16="http://schemas.microsoft.com/office/drawing/2014/main" id="{81792C3B-F69B-4268-91FA-5B4103559451}"/>
+                <a16:creationId xmlns:a16="http://schemas.microsoft.com/office/drawing/2014/main" id="{3DD79409-DA12-44E8-83E1-C08C83F66DF9}"/>
               </a:ext>
             </a:extLst>
           </p:cNvPr>
@@ -14480,7 +14493,7 @@
           <p:cNvPr id="11" name="">
             <a:extLst xmlns:a="http://schemas.openxmlformats.org/drawingml/2006/main">
               <a:ext uri="{FF2B5EF4-FFF2-40B4-BE49-F238E27FC236}">
-                <a16:creationId xmlns:a16="http://schemas.microsoft.com/office/drawing/2014/main" id="{740B7907-02BB-42C8-B8B8-20C34DECC240}"/>
+                <a16:creationId xmlns:a16="http://schemas.microsoft.com/office/drawing/2014/main" id="{9221B7A7-BB82-47E5-8297-BF3AA2D21AFB}"/>
               </a:ext>
             </a:extLst>
           </p:cNvPr>
@@ -14535,7 +14548,7 @@
     </p:spTree>
     <p:extLst>
       <p:ext uri="{BB962C8B-B14F-4D97-AF65-F5344CB8AC3E}">
-        <p14:creationId xmlns:p14="http://schemas.microsoft.com/office/powerpoint/2010/main" val="1781090242"/>
+        <p14:creationId xmlns:p14="http://schemas.microsoft.com/office/powerpoint/2010/main" val="2045445522"/>
       </p:ext>
     </p:extLst>
   </p:cSld>
@@ -14566,7 +14579,7 @@
           <p:cNvPr id="13" name="">
             <a:extLst xmlns:a="http://schemas.openxmlformats.org/drawingml/2006/main">
               <a:ext uri="{FF2B5EF4-FFF2-40B4-BE49-F238E27FC236}">
-                <a16:creationId xmlns:a16="http://schemas.microsoft.com/office/drawing/2014/main" id="{4A0A6802-60E1-4F71-841B-0B9DB7E3D07F}"/>
+                <a16:creationId xmlns:a16="http://schemas.microsoft.com/office/drawing/2014/main" id="{8F689941-81D0-410F-AB8B-57AEB8C1665F}"/>
               </a:ext>
             </a:extLst>
           </p:cNvPr>
@@ -14623,7 +14636,7 @@
           <p:cNvPr id="2" name="">
             <a:extLst xmlns:a="http://schemas.openxmlformats.org/drawingml/2006/main">
               <a:ext uri="{FF2B5EF4-FFF2-40B4-BE49-F238E27FC236}">
-                <a16:creationId xmlns:a16="http://schemas.microsoft.com/office/drawing/2014/main" id="{5FD35806-55B6-48E9-AE77-0ACD56DF9AE1}"/>
+                <a16:creationId xmlns:a16="http://schemas.microsoft.com/office/drawing/2014/main" id="{DE445F7D-7B7F-4154-A019-8A4A3F06776B}"/>
               </a:ext>
             </a:extLst>
           </p:cNvPr>
@@ -14680,7 +14693,7 @@
           <p:cNvPr id="3" name="">
             <a:extLst xmlns:a="http://schemas.openxmlformats.org/drawingml/2006/main">
               <a:ext uri="{FF2B5EF4-FFF2-40B4-BE49-F238E27FC236}">
-                <a16:creationId xmlns:a16="http://schemas.microsoft.com/office/drawing/2014/main" id="{9764B4CD-157D-43D5-AB9A-EBAFDC5F04E1}"/>
+                <a16:creationId xmlns:a16="http://schemas.microsoft.com/office/drawing/2014/main" id="{752ECA23-295A-4957-AC18-5B29EA19AF5C}"/>
               </a:ext>
             </a:extLst>
           </p:cNvPr>
@@ -14760,7 +14773,7 @@
           <p:cNvPr id="4" name="">
             <a:extLst xmlns:a="http://schemas.openxmlformats.org/drawingml/2006/main">
               <a:ext uri="{FF2B5EF4-FFF2-40B4-BE49-F238E27FC236}">
-                <a16:creationId xmlns:a16="http://schemas.microsoft.com/office/drawing/2014/main" id="{700A1483-CD9B-4E66-AF79-9DBED3DA28FF}"/>
+                <a16:creationId xmlns:a16="http://schemas.microsoft.com/office/drawing/2014/main" id="{369761E7-060B-4CB7-8B23-7F6B73943D29}"/>
               </a:ext>
             </a:extLst>
           </p:cNvPr>
@@ -14840,7 +14853,7 @@
           <p:cNvPr id="5" name="">
             <a:extLst xmlns:a="http://schemas.openxmlformats.org/drawingml/2006/main">
               <a:ext uri="{FF2B5EF4-FFF2-40B4-BE49-F238E27FC236}">
-                <a16:creationId xmlns:a16="http://schemas.microsoft.com/office/drawing/2014/main" id="{CA48B105-69D3-43C6-9F16-DD65D2CBC73F}"/>
+                <a16:creationId xmlns:a16="http://schemas.microsoft.com/office/drawing/2014/main" id="{11E4EAB0-2B96-415C-8E28-3E5472EF237B}"/>
               </a:ext>
             </a:extLst>
           </p:cNvPr>
@@ -14869,7 +14882,7 @@
           <p:cNvPr id="6" name="">
             <a:extLst xmlns:a="http://schemas.openxmlformats.org/drawingml/2006/main">
               <a:ext uri="{FF2B5EF4-FFF2-40B4-BE49-F238E27FC236}">
-                <a16:creationId xmlns:a16="http://schemas.microsoft.com/office/drawing/2014/main" id="{FD3044F7-8F33-4C18-835A-A0522F10B3E2}"/>
+                <a16:creationId xmlns:a16="http://schemas.microsoft.com/office/drawing/2014/main" id="{E85079C7-066D-4961-8B00-31F9984FB331}"/>
               </a:ext>
             </a:extLst>
           </p:cNvPr>
@@ -14949,7 +14962,7 @@
           <p:cNvPr id="7" name="">
             <a:extLst xmlns:a="http://schemas.openxmlformats.org/drawingml/2006/main">
               <a:ext uri="{FF2B5EF4-FFF2-40B4-BE49-F238E27FC236}">
-                <a16:creationId xmlns:a16="http://schemas.microsoft.com/office/drawing/2014/main" id="{099AAEA2-2CBB-4743-AF46-592AFF36E53C}"/>
+                <a16:creationId xmlns:a16="http://schemas.microsoft.com/office/drawing/2014/main" id="{17147D30-8F26-450B-94A3-A2CB3435E34B}"/>
               </a:ext>
             </a:extLst>
           </p:cNvPr>
@@ -15052,7 +15065,7 @@
           <p:cNvPr id="8" name="">
             <a:extLst xmlns:a="http://schemas.openxmlformats.org/drawingml/2006/main">
               <a:ext uri="{FF2B5EF4-FFF2-40B4-BE49-F238E27FC236}">
-                <a16:creationId xmlns:a16="http://schemas.microsoft.com/office/drawing/2014/main" id="{5B7DC1EA-A84A-4DA6-BEBA-0703FC176FCB}"/>
+                <a16:creationId xmlns:a16="http://schemas.microsoft.com/office/drawing/2014/main" id="{AF230726-4AE7-4CD9-8F36-9D17DF0A1E64}"/>
               </a:ext>
             </a:extLst>
           </p:cNvPr>
@@ -15081,7 +15094,7 @@
           <p:cNvPr id="9" name="">
             <a:extLst xmlns:a="http://schemas.openxmlformats.org/drawingml/2006/main">
               <a:ext uri="{FF2B5EF4-FFF2-40B4-BE49-F238E27FC236}">
-                <a16:creationId xmlns:a16="http://schemas.microsoft.com/office/drawing/2014/main" id="{B74A76E9-C457-4A65-B468-59A7F1A5AE9F}"/>
+                <a16:creationId xmlns:a16="http://schemas.microsoft.com/office/drawing/2014/main" id="{C20A3927-01C7-41B2-B761-26D0D432F00C}"/>
               </a:ext>
             </a:extLst>
           </p:cNvPr>
@@ -15161,7 +15174,7 @@
           <p:cNvPr id="10" name="">
             <a:extLst xmlns:a="http://schemas.openxmlformats.org/drawingml/2006/main">
               <a:ext uri="{FF2B5EF4-FFF2-40B4-BE49-F238E27FC236}">
-                <a16:creationId xmlns:a16="http://schemas.microsoft.com/office/drawing/2014/main" id="{C14773EF-9F56-4DA7-AC34-9CB4C9F59933}"/>
+                <a16:creationId xmlns:a16="http://schemas.microsoft.com/office/drawing/2014/main" id="{85254D21-E6AA-4F3E-9FEB-400BA3315AF8}"/>
               </a:ext>
             </a:extLst>
           </p:cNvPr>
@@ -15241,7 +15254,7 @@
           <p:cNvPr id="11" name="">
             <a:extLst xmlns:a="http://schemas.openxmlformats.org/drawingml/2006/main">
               <a:ext uri="{FF2B5EF4-FFF2-40B4-BE49-F238E27FC236}">
-                <a16:creationId xmlns:a16="http://schemas.microsoft.com/office/drawing/2014/main" id="{319A97AD-B028-4ADC-9E5F-3348E01FCE5F}"/>
+                <a16:creationId xmlns:a16="http://schemas.microsoft.com/office/drawing/2014/main" id="{DA6C99F6-69E2-4508-AAA7-26E93EE87238}"/>
               </a:ext>
             </a:extLst>
           </p:cNvPr>
@@ -15298,7 +15311,7 @@
           <p:cNvPr id="12" name="">
             <a:extLst xmlns:a="http://schemas.openxmlformats.org/drawingml/2006/main">
               <a:ext uri="{FF2B5EF4-FFF2-40B4-BE49-F238E27FC236}">
-                <a16:creationId xmlns:a16="http://schemas.microsoft.com/office/drawing/2014/main" id="{7B5DC6CA-C3C7-4715-878B-406D312C8EC3}"/>
+                <a16:creationId xmlns:a16="http://schemas.microsoft.com/office/drawing/2014/main" id="{4DCF1F5A-E7F9-4CF4-8BFD-8214ED0BBD01}"/>
               </a:ext>
             </a:extLst>
           </p:cNvPr>
@@ -15376,7 +15389,7 @@
     </p:spTree>
     <p:extLst>
       <p:ext uri="{BB962C8B-B14F-4D97-AF65-F5344CB8AC3E}">
-        <p14:creationId xmlns:p14="http://schemas.microsoft.com/office/powerpoint/2010/main" val="386584874"/>
+        <p14:creationId xmlns:p14="http://schemas.microsoft.com/office/powerpoint/2010/main" val="345486194"/>
       </p:ext>
     </p:extLst>
   </p:cSld>
@@ -15407,7 +15420,7 @@
           <p:cNvPr id="13" name="">
             <a:extLst xmlns:a="http://schemas.openxmlformats.org/drawingml/2006/main">
               <a:ext uri="{FF2B5EF4-FFF2-40B4-BE49-F238E27FC236}">
-                <a16:creationId xmlns:a16="http://schemas.microsoft.com/office/drawing/2014/main" id="{1AEE0D6C-C4B9-44FD-95A3-7FE38B892007}"/>
+                <a16:creationId xmlns:a16="http://schemas.microsoft.com/office/drawing/2014/main" id="{8BBF5194-FEEA-46CA-9010-6186471E4359}"/>
               </a:ext>
             </a:extLst>
           </p:cNvPr>
@@ -15464,7 +15477,7 @@
           <p:cNvPr id="2" name="">
             <a:extLst xmlns:a="http://schemas.openxmlformats.org/drawingml/2006/main">
               <a:ext uri="{FF2B5EF4-FFF2-40B4-BE49-F238E27FC236}">
-                <a16:creationId xmlns:a16="http://schemas.microsoft.com/office/drawing/2014/main" id="{8ACFE6E9-E7AD-43A1-B79F-DB52D31F433A}"/>
+                <a16:creationId xmlns:a16="http://schemas.microsoft.com/office/drawing/2014/main" id="{4A8A6468-B3F1-4DF1-B4F4-6A1FF615CF5B}"/>
               </a:ext>
             </a:extLst>
           </p:cNvPr>
@@ -15521,7 +15534,7 @@
           <p:cNvPr id="3" name="">
             <a:extLst xmlns:a="http://schemas.openxmlformats.org/drawingml/2006/main">
               <a:ext uri="{FF2B5EF4-FFF2-40B4-BE49-F238E27FC236}">
-                <a16:creationId xmlns:a16="http://schemas.microsoft.com/office/drawing/2014/main" id="{7AA12727-FDB6-4C8A-B214-8BFAC369F758}"/>
+                <a16:creationId xmlns:a16="http://schemas.microsoft.com/office/drawing/2014/main" id="{52363668-78B2-4682-BB2F-AFA4E8557FC9}"/>
               </a:ext>
             </a:extLst>
           </p:cNvPr>
@@ -15578,7 +15591,7 @@
           <p:cNvPr id="4" name="">
             <a:extLst xmlns:a="http://schemas.openxmlformats.org/drawingml/2006/main">
               <a:ext uri="{FF2B5EF4-FFF2-40B4-BE49-F238E27FC236}">
-                <a16:creationId xmlns:a16="http://schemas.microsoft.com/office/drawing/2014/main" id="{248C12FC-B961-47E0-BE82-C3E202D12CA0}"/>
+                <a16:creationId xmlns:a16="http://schemas.microsoft.com/office/drawing/2014/main" id="{D2EE6615-AD9A-40EC-9790-0BC1330F7EB8}"/>
               </a:ext>
             </a:extLst>
           </p:cNvPr>
@@ -15635,7 +15648,7 @@
           <p:cNvPr id="5" name="">
             <a:extLst xmlns:a="http://schemas.openxmlformats.org/drawingml/2006/main">
               <a:ext uri="{FF2B5EF4-FFF2-40B4-BE49-F238E27FC236}">
-                <a16:creationId xmlns:a16="http://schemas.microsoft.com/office/drawing/2014/main" id="{85913D47-B39E-46CF-89EC-DB045E975E62}"/>
+                <a16:creationId xmlns:a16="http://schemas.microsoft.com/office/drawing/2014/main" id="{458081A9-CE04-43AB-9B8B-0C639994366C}"/>
               </a:ext>
             </a:extLst>
           </p:cNvPr>
@@ -15692,7 +15705,7 @@
           <p:cNvPr id="6" name="">
             <a:extLst xmlns:a="http://schemas.openxmlformats.org/drawingml/2006/main">
               <a:ext uri="{FF2B5EF4-FFF2-40B4-BE49-F238E27FC236}">
-                <a16:creationId xmlns:a16="http://schemas.microsoft.com/office/drawing/2014/main" id="{30F3E37F-F324-439D-BA90-5BB03D5BDF74}"/>
+                <a16:creationId xmlns:a16="http://schemas.microsoft.com/office/drawing/2014/main" id="{7A892AA4-A78A-4874-875D-38D1F4ED341A}"/>
               </a:ext>
             </a:extLst>
           </p:cNvPr>
@@ -16333,7 +16346,7 @@
           <p:cNvPr id="9" name="">
             <a:extLst xmlns:a="http://schemas.openxmlformats.org/drawingml/2006/main">
               <a:ext uri="{FF2B5EF4-FFF2-40B4-BE49-F238E27FC236}">
-                <a16:creationId xmlns:a16="http://schemas.microsoft.com/office/drawing/2014/main" id="{F5F9059B-0022-469F-BD4A-D19A69E2FBD4}"/>
+                <a16:creationId xmlns:a16="http://schemas.microsoft.com/office/drawing/2014/main" id="{E5DE46CB-2CD0-4D27-863F-9A1A8B9822EA}"/>
               </a:ext>
             </a:extLst>
           </p:cNvPr>
@@ -16362,7 +16375,7 @@
           <p:cNvPr id="10" name="">
             <a:extLst xmlns:a="http://schemas.openxmlformats.org/drawingml/2006/main">
               <a:ext uri="{FF2B5EF4-FFF2-40B4-BE49-F238E27FC236}">
-                <a16:creationId xmlns:a16="http://schemas.microsoft.com/office/drawing/2014/main" id="{A2F07EE9-05BA-499C-BCFB-78E3A41B2A29}"/>
+                <a16:creationId xmlns:a16="http://schemas.microsoft.com/office/drawing/2014/main" id="{B8C19ECA-71B8-4971-A0FC-6CE595A51252}"/>
               </a:ext>
             </a:extLst>
           </p:cNvPr>
@@ -16419,7 +16432,7 @@
           <p:cNvPr id="11" name="">
             <a:extLst xmlns:a="http://schemas.openxmlformats.org/drawingml/2006/main">
               <a:ext uri="{FF2B5EF4-FFF2-40B4-BE49-F238E27FC236}">
-                <a16:creationId xmlns:a16="http://schemas.microsoft.com/office/drawing/2014/main" id="{ACB8663F-7049-4618-BD05-FBF0192726B2}"/>
+                <a16:creationId xmlns:a16="http://schemas.microsoft.com/office/drawing/2014/main" id="{5A75C413-DEE7-4861-B17D-6515401959BF}"/>
               </a:ext>
             </a:extLst>
           </p:cNvPr>
@@ -16476,7 +16489,7 @@
           <p:cNvPr id="12" name="">
             <a:extLst xmlns:a="http://schemas.openxmlformats.org/drawingml/2006/main">
               <a:ext uri="{FF2B5EF4-FFF2-40B4-BE49-F238E27FC236}">
-                <a16:creationId xmlns:a16="http://schemas.microsoft.com/office/drawing/2014/main" id="{5AACCB7D-5496-4790-95E7-488540F0C82E}"/>
+                <a16:creationId xmlns:a16="http://schemas.microsoft.com/office/drawing/2014/main" id="{1FAA44A5-B590-4499-8EB0-CC8D4249FDBB}"/>
               </a:ext>
             </a:extLst>
           </p:cNvPr>
@@ -16562,7 +16575,7 @@
     </p:spTree>
     <p:extLst>
       <p:ext uri="{BB962C8B-B14F-4D97-AF65-F5344CB8AC3E}">
-        <p14:creationId xmlns:p14="http://schemas.microsoft.com/office/powerpoint/2010/main" val="1565939520"/>
+        <p14:creationId xmlns:p14="http://schemas.microsoft.com/office/powerpoint/2010/main" val="1584666981"/>
       </p:ext>
     </p:extLst>
   </p:cSld>
@@ -16593,7 +16606,7 @@
           <p:cNvPr id="7" name="">
             <a:extLst xmlns:a="http://schemas.openxmlformats.org/drawingml/2006/main">
               <a:ext uri="{FF2B5EF4-FFF2-40B4-BE49-F238E27FC236}">
-                <a16:creationId xmlns:a16="http://schemas.microsoft.com/office/drawing/2014/main" id="{530203F8-063A-41FF-BE49-026824C9C152}"/>
+                <a16:creationId xmlns:a16="http://schemas.microsoft.com/office/drawing/2014/main" id="{44A8CF2A-A2DF-44D8-8CA8-42E4DC8874B9}"/>
               </a:ext>
             </a:extLst>
           </p:cNvPr>
@@ -16650,7 +16663,7 @@
           <p:cNvPr id="2" name="">
             <a:extLst xmlns:a="http://schemas.openxmlformats.org/drawingml/2006/main">
               <a:ext uri="{FF2B5EF4-FFF2-40B4-BE49-F238E27FC236}">
-                <a16:creationId xmlns:a16="http://schemas.microsoft.com/office/drawing/2014/main" id="{64EC3BB2-2CA0-4BDD-A69D-C55F9CE9EAB2}"/>
+                <a16:creationId xmlns:a16="http://schemas.microsoft.com/office/drawing/2014/main" id="{B46E3E09-CAFB-424A-85C7-EA6F0C854FCA}"/>
               </a:ext>
             </a:extLst>
           </p:cNvPr>
@@ -16707,7 +16720,7 @@
           <p:cNvPr id="3" name="">
             <a:extLst xmlns:a="http://schemas.openxmlformats.org/drawingml/2006/main">
               <a:ext uri="{FF2B5EF4-FFF2-40B4-BE49-F238E27FC236}">
-                <a16:creationId xmlns:a16="http://schemas.microsoft.com/office/drawing/2014/main" id="{F17EA671-C37B-4538-8E20-4E11F85D2D2F}"/>
+                <a16:creationId xmlns:a16="http://schemas.microsoft.com/office/drawing/2014/main" id="{47350866-03CB-4344-AB3C-3DBC517D60B4}"/>
               </a:ext>
             </a:extLst>
           </p:cNvPr>
@@ -16764,7 +16777,7 @@
           <p:cNvPr id="4" name="">
             <a:extLst xmlns:a="http://schemas.openxmlformats.org/drawingml/2006/main">
               <a:ext uri="{FF2B5EF4-FFF2-40B4-BE49-F238E27FC236}">
-                <a16:creationId xmlns:a16="http://schemas.microsoft.com/office/drawing/2014/main" id="{E19FD193-D912-427E-B74A-BC9F58455B3E}"/>
+                <a16:creationId xmlns:a16="http://schemas.microsoft.com/office/drawing/2014/main" id="{B871FCA2-D629-4D78-BC9F-555A136B6638}"/>
               </a:ext>
             </a:extLst>
           </p:cNvPr>
@@ -17244,7 +17257,7 @@
           <p:cNvPr id="6" name="">
             <a:extLst xmlns:a="http://schemas.openxmlformats.org/drawingml/2006/main">
               <a:ext uri="{FF2B5EF4-FFF2-40B4-BE49-F238E27FC236}">
-                <a16:creationId xmlns:a16="http://schemas.microsoft.com/office/drawing/2014/main" id="{1E3310EB-7759-43E9-A078-3D6C3FD810A9}"/>
+                <a16:creationId xmlns:a16="http://schemas.microsoft.com/office/drawing/2014/main" id="{22D7393C-BA82-49A6-B44A-BAB803BCC5CA}"/>
               </a:ext>
             </a:extLst>
           </p:cNvPr>
@@ -17299,7 +17312,7 @@
     </p:spTree>
     <p:extLst>
       <p:ext uri="{BB962C8B-B14F-4D97-AF65-F5344CB8AC3E}">
-        <p14:creationId xmlns:p14="http://schemas.microsoft.com/office/powerpoint/2010/main" val="921123833"/>
+        <p14:creationId xmlns:p14="http://schemas.microsoft.com/office/powerpoint/2010/main" val="222773135"/>
       </p:ext>
     </p:extLst>
   </p:cSld>
@@ -17330,7 +17343,7 @@
           <p:cNvPr id="11" name="">
             <a:extLst xmlns:a="http://schemas.openxmlformats.org/drawingml/2006/main">
               <a:ext uri="{FF2B5EF4-FFF2-40B4-BE49-F238E27FC236}">
-                <a16:creationId xmlns:a16="http://schemas.microsoft.com/office/drawing/2014/main" id="{1A9EC766-77A7-4389-B5FF-64FC1971935C}"/>
+                <a16:creationId xmlns:a16="http://schemas.microsoft.com/office/drawing/2014/main" id="{BF5E277B-C1D1-4483-B2FD-04AE347221EF}"/>
               </a:ext>
             </a:extLst>
           </p:cNvPr>
@@ -17387,7 +17400,7 @@
           <p:cNvPr id="2" name="">
             <a:extLst xmlns:a="http://schemas.openxmlformats.org/drawingml/2006/main">
               <a:ext uri="{FF2B5EF4-FFF2-40B4-BE49-F238E27FC236}">
-                <a16:creationId xmlns:a16="http://schemas.microsoft.com/office/drawing/2014/main" id="{85567666-AAC0-4B7C-96AB-85D15D3A87DE}"/>
+                <a16:creationId xmlns:a16="http://schemas.microsoft.com/office/drawing/2014/main" id="{A247485B-5955-4C35-9F57-27CCEEC912BF}"/>
               </a:ext>
             </a:extLst>
           </p:cNvPr>
@@ -17444,7 +17457,7 @@
           <p:cNvPr id="3" name="">
             <a:extLst xmlns:a="http://schemas.openxmlformats.org/drawingml/2006/main">
               <a:ext uri="{FF2B5EF4-FFF2-40B4-BE49-F238E27FC236}">
-                <a16:creationId xmlns:a16="http://schemas.microsoft.com/office/drawing/2014/main" id="{6323A5A9-B1E6-4060-8032-B6E244107C4A}"/>
+                <a16:creationId xmlns:a16="http://schemas.microsoft.com/office/drawing/2014/main" id="{DE3A25CC-357A-4C47-98DD-EB022F226405}"/>
               </a:ext>
             </a:extLst>
           </p:cNvPr>
@@ -17501,7 +17514,7 @@
           <p:cNvPr id="4" name="">
             <a:extLst xmlns:a="http://schemas.openxmlformats.org/drawingml/2006/main">
               <a:ext uri="{FF2B5EF4-FFF2-40B4-BE49-F238E27FC236}">
-                <a16:creationId xmlns:a16="http://schemas.microsoft.com/office/drawing/2014/main" id="{C345ECE2-89D5-4EF4-85A0-160E90189ADC}"/>
+                <a16:creationId xmlns:a16="http://schemas.microsoft.com/office/drawing/2014/main" id="{8956A68A-A1FA-4DA6-A32C-B5F890D75FFC}"/>
               </a:ext>
             </a:extLst>
           </p:cNvPr>
@@ -17558,7 +17571,7 @@
           <p:cNvPr id="5" name="">
             <a:extLst xmlns:a="http://schemas.openxmlformats.org/drawingml/2006/main">
               <a:ext uri="{FF2B5EF4-FFF2-40B4-BE49-F238E27FC236}">
-                <a16:creationId xmlns:a16="http://schemas.microsoft.com/office/drawing/2014/main" id="{2F6AB28F-A9CA-4536-AC0F-68BD5C74AD32}"/>
+                <a16:creationId xmlns:a16="http://schemas.microsoft.com/office/drawing/2014/main" id="{9D2896D0-D3E7-47F2-ADD4-A1F464B762C2}"/>
               </a:ext>
             </a:extLst>
           </p:cNvPr>
@@ -17615,7 +17628,7 @@
           <p:cNvPr id="6" name="">
             <a:extLst xmlns:a="http://schemas.openxmlformats.org/drawingml/2006/main">
               <a:ext uri="{FF2B5EF4-FFF2-40B4-BE49-F238E27FC236}">
-                <a16:creationId xmlns:a16="http://schemas.microsoft.com/office/drawing/2014/main" id="{26C9D8F6-2B95-4C71-B7BF-897685A95465}"/>
+                <a16:creationId xmlns:a16="http://schemas.microsoft.com/office/drawing/2014/main" id="{4137A967-7F02-4CD1-B6AC-06500951854C}"/>
               </a:ext>
             </a:extLst>
           </p:cNvPr>
@@ -17672,7 +17685,7 @@
           <p:cNvPr id="7" name="">
             <a:extLst xmlns:a="http://schemas.openxmlformats.org/drawingml/2006/main">
               <a:ext uri="{FF2B5EF4-FFF2-40B4-BE49-F238E27FC236}">
-                <a16:creationId xmlns:a16="http://schemas.microsoft.com/office/drawing/2014/main" id="{142126E8-305D-488B-A1EC-3AB53A4CD8AD}"/>
+                <a16:creationId xmlns:a16="http://schemas.microsoft.com/office/drawing/2014/main" id="{4E3B97A8-9E57-4588-963E-2D4EB585E46B}"/>
               </a:ext>
             </a:extLst>
           </p:cNvPr>
@@ -17760,7 +17773,7 @@
           <p:cNvPr id="8" name="">
             <a:extLst xmlns:a="http://schemas.openxmlformats.org/drawingml/2006/main">
               <a:ext uri="{FF2B5EF4-FFF2-40B4-BE49-F238E27FC236}">
-                <a16:creationId xmlns:a16="http://schemas.microsoft.com/office/drawing/2014/main" id="{A9070DA0-29A3-4EFF-B02F-E37870919204}"/>
+                <a16:creationId xmlns:a16="http://schemas.microsoft.com/office/drawing/2014/main" id="{82055B4A-41A5-4F73-B508-6488529D9057}"/>
               </a:ext>
             </a:extLst>
           </p:cNvPr>
@@ -17817,7 +17830,7 @@
           <p:cNvPr id="9" name="">
             <a:extLst xmlns:a="http://schemas.openxmlformats.org/drawingml/2006/main">
               <a:ext uri="{FF2B5EF4-FFF2-40B4-BE49-F238E27FC236}">
-                <a16:creationId xmlns:a16="http://schemas.microsoft.com/office/drawing/2014/main" id="{69AD5B74-29E0-4123-AE44-CF7D9DEF89FB}"/>
+                <a16:creationId xmlns:a16="http://schemas.microsoft.com/office/drawing/2014/main" id="{584981A0-8D2C-4969-854D-068B6AEFCB8B}"/>
               </a:ext>
             </a:extLst>
           </p:cNvPr>
@@ -17874,7 +17887,7 @@
           <p:cNvPr id="10" name="">
             <a:extLst xmlns:a="http://schemas.openxmlformats.org/drawingml/2006/main">
               <a:ext uri="{FF2B5EF4-FFF2-40B4-BE49-F238E27FC236}">
-                <a16:creationId xmlns:a16="http://schemas.microsoft.com/office/drawing/2014/main" id="{08970738-5308-405F-8E5B-B2D491585586}"/>
+                <a16:creationId xmlns:a16="http://schemas.microsoft.com/office/drawing/2014/main" id="{5FEB0AB1-71A1-45B0-BB16-B29FED619364}"/>
               </a:ext>
             </a:extLst>
           </p:cNvPr>
@@ -17960,7 +17973,7 @@
     </p:spTree>
     <p:extLst>
       <p:ext uri="{BB962C8B-B14F-4D97-AF65-F5344CB8AC3E}">
-        <p14:creationId xmlns:p14="http://schemas.microsoft.com/office/powerpoint/2010/main" val="954663590"/>
+        <p14:creationId xmlns:p14="http://schemas.microsoft.com/office/powerpoint/2010/main" val="50937248"/>
       </p:ext>
     </p:extLst>
   </p:cSld>
@@ -17991,7 +18004,7 @@
           <p:cNvPr id="5" name="">
             <a:extLst xmlns:a="http://schemas.openxmlformats.org/drawingml/2006/main">
               <a:ext uri="{FF2B5EF4-FFF2-40B4-BE49-F238E27FC236}">
-                <a16:creationId xmlns:a16="http://schemas.microsoft.com/office/drawing/2014/main" id="{F59022C3-8492-4A1A-9115-541B3434698A}"/>
+                <a16:creationId xmlns:a16="http://schemas.microsoft.com/office/drawing/2014/main" id="{7E8FD5C5-8EE8-44B4-8DC3-9E93C2F931F5}"/>
               </a:ext>
             </a:extLst>
           </p:cNvPr>
@@ -18048,7 +18061,7 @@
           <p:cNvPr id="2" name="">
             <a:extLst xmlns:a="http://schemas.openxmlformats.org/drawingml/2006/main">
               <a:ext uri="{FF2B5EF4-FFF2-40B4-BE49-F238E27FC236}">
-                <a16:creationId xmlns:a16="http://schemas.microsoft.com/office/drawing/2014/main" id="{42A1B70B-B1A7-44B0-AD75-8A440A85C1D3}"/>
+                <a16:creationId xmlns:a16="http://schemas.microsoft.com/office/drawing/2014/main" id="{13E62D48-0548-41BA-B291-C48F3D328C22}"/>
               </a:ext>
             </a:extLst>
           </p:cNvPr>
@@ -18105,7 +18118,7 @@
           <p:cNvPr id="3" name="">
             <a:extLst xmlns:a="http://schemas.openxmlformats.org/drawingml/2006/main">
               <a:ext uri="{FF2B5EF4-FFF2-40B4-BE49-F238E27FC236}">
-                <a16:creationId xmlns:a16="http://schemas.microsoft.com/office/drawing/2014/main" id="{8D781209-53D4-4F98-919E-464A38163246}"/>
+                <a16:creationId xmlns:a16="http://schemas.microsoft.com/office/drawing/2014/main" id="{E0DDD4C0-7D48-428B-801A-FDD94C7B13DB}"/>
               </a:ext>
             </a:extLst>
           </p:cNvPr>
@@ -18452,7 +18465,7 @@
     </p:spTree>
     <p:extLst>
       <p:ext uri="{BB962C8B-B14F-4D97-AF65-F5344CB8AC3E}">
-        <p14:creationId xmlns:p14="http://schemas.microsoft.com/office/powerpoint/2010/main" val="54921498"/>
+        <p14:creationId xmlns:p14="http://schemas.microsoft.com/office/powerpoint/2010/main" val="1488822957"/>
       </p:ext>
     </p:extLst>
   </p:cSld>
@@ -18483,7 +18496,7 @@
           <p:cNvPr id="11" name="">
             <a:extLst xmlns:a="http://schemas.openxmlformats.org/drawingml/2006/main">
               <a:ext uri="{FF2B5EF4-FFF2-40B4-BE49-F238E27FC236}">
-                <a16:creationId xmlns:a16="http://schemas.microsoft.com/office/drawing/2014/main" id="{E759C133-CC44-41D0-800A-FD32AA27D446}"/>
+                <a16:creationId xmlns:a16="http://schemas.microsoft.com/office/drawing/2014/main" id="{6114CA52-274F-433E-ABB8-2D911D3A85C6}"/>
               </a:ext>
             </a:extLst>
           </p:cNvPr>
@@ -18540,7 +18553,7 @@
           <p:cNvPr id="2" name="">
             <a:extLst xmlns:a="http://schemas.openxmlformats.org/drawingml/2006/main">
               <a:ext uri="{FF2B5EF4-FFF2-40B4-BE49-F238E27FC236}">
-                <a16:creationId xmlns:a16="http://schemas.microsoft.com/office/drawing/2014/main" id="{A0CC3C13-2C92-44B5-B27A-7F26B0BFB94C}"/>
+                <a16:creationId xmlns:a16="http://schemas.microsoft.com/office/drawing/2014/main" id="{E2B4C38D-2772-4F26-9BDD-91678CE996E2}"/>
               </a:ext>
             </a:extLst>
           </p:cNvPr>
@@ -18597,7 +18610,7 @@
           <p:cNvPr id="3" name="">
             <a:extLst xmlns:a="http://schemas.openxmlformats.org/drawingml/2006/main">
               <a:ext uri="{FF2B5EF4-FFF2-40B4-BE49-F238E27FC236}">
-                <a16:creationId xmlns:a16="http://schemas.microsoft.com/office/drawing/2014/main" id="{3B1DD1C5-7E8E-492D-8AE3-6F7C821738A5}"/>
+                <a16:creationId xmlns:a16="http://schemas.microsoft.com/office/drawing/2014/main" id="{512F66B1-62F2-4C2F-8214-8687C8989219}"/>
               </a:ext>
             </a:extLst>
           </p:cNvPr>
@@ -18654,7 +18667,7 @@
           <p:cNvPr id="4" name="">
             <a:extLst xmlns:a="http://schemas.openxmlformats.org/drawingml/2006/main">
               <a:ext uri="{FF2B5EF4-FFF2-40B4-BE49-F238E27FC236}">
-                <a16:creationId xmlns:a16="http://schemas.microsoft.com/office/drawing/2014/main" id="{80859537-BB7A-4813-9A5F-0C2846AC0F48}"/>
+                <a16:creationId xmlns:a16="http://schemas.microsoft.com/office/drawing/2014/main" id="{53B143AD-1642-4ECF-BE05-422AA4277AD8}"/>
               </a:ext>
             </a:extLst>
           </p:cNvPr>
@@ -18742,7 +18755,7 @@
           <p:cNvPr id="5" name="">
             <a:extLst xmlns:a="http://schemas.openxmlformats.org/drawingml/2006/main">
               <a:ext uri="{FF2B5EF4-FFF2-40B4-BE49-F238E27FC236}">
-                <a16:creationId xmlns:a16="http://schemas.microsoft.com/office/drawing/2014/main" id="{254BE008-643D-4571-85B4-8431E0C81359}"/>
+                <a16:creationId xmlns:a16="http://schemas.microsoft.com/office/drawing/2014/main" id="{F590A919-B82E-4E39-B417-4CC35FE8493D}"/>
               </a:ext>
             </a:extLst>
           </p:cNvPr>
@@ -18826,7 +18839,7 @@
           <p:cNvPr id="6" name="">
             <a:extLst xmlns:a="http://schemas.openxmlformats.org/drawingml/2006/main">
               <a:ext uri="{FF2B5EF4-FFF2-40B4-BE49-F238E27FC236}">
-                <a16:creationId xmlns:a16="http://schemas.microsoft.com/office/drawing/2014/main" id="{C70E6C67-B448-4F6A-B7F3-0E872F918F70}"/>
+                <a16:creationId xmlns:a16="http://schemas.microsoft.com/office/drawing/2014/main" id="{0066D6D9-1315-4F93-9F88-ADA149EBA050}"/>
               </a:ext>
             </a:extLst>
           </p:cNvPr>
@@ -18910,7 +18923,7 @@
           <p:cNvPr id="7" name="">
             <a:extLst xmlns:a="http://schemas.openxmlformats.org/drawingml/2006/main">
               <a:ext uri="{FF2B5EF4-FFF2-40B4-BE49-F238E27FC236}">
-                <a16:creationId xmlns:a16="http://schemas.microsoft.com/office/drawing/2014/main" id="{3FBFDBE0-7ABB-4EFE-96F8-F6982A7C9292}"/>
+                <a16:creationId xmlns:a16="http://schemas.microsoft.com/office/drawing/2014/main" id="{19CA6D13-C9EE-425B-88E6-6D74673A23A2}"/>
               </a:ext>
             </a:extLst>
           </p:cNvPr>
@@ -19050,7 +19063,7 @@
           <p:cNvPr id="10" name="">
             <a:extLst xmlns:a="http://schemas.openxmlformats.org/drawingml/2006/main">
               <a:ext uri="{FF2B5EF4-FFF2-40B4-BE49-F238E27FC236}">
-                <a16:creationId xmlns:a16="http://schemas.microsoft.com/office/drawing/2014/main" id="{8CF1867D-68D4-4E9E-B71F-7D292EF90FA7}"/>
+                <a16:creationId xmlns:a16="http://schemas.microsoft.com/office/drawing/2014/main" id="{95731F0C-BFF1-4203-8771-33B8E31CB2DE}"/>
               </a:ext>
             </a:extLst>
           </p:cNvPr>
@@ -19183,7 +19196,7 @@
     </p:spTree>
     <p:extLst>
       <p:ext uri="{BB962C8B-B14F-4D97-AF65-F5344CB8AC3E}">
-        <p14:creationId xmlns:p14="http://schemas.microsoft.com/office/powerpoint/2010/main" val="1406353616"/>
+        <p14:creationId xmlns:p14="http://schemas.microsoft.com/office/powerpoint/2010/main" val="374104987"/>
       </p:ext>
     </p:extLst>
   </p:cSld>

--- a/presentation/unos_kidney_biopsy.pptx
+++ b/presentation/unos_kidney_biopsy.pptx
@@ -2,28 +2,28 @@
 <file path=ppt/presentation.xml><?xml version="1.0" encoding="utf-8"?>
 <p:presentation xmlns:p="http://schemas.openxmlformats.org/presentationml/2006/main" xmlns:r="http://schemas.openxmlformats.org/officeDocument/2006/relationships">
   <p:sldMasterIdLst>
-    <p:sldMasterId id="2147483648" r:id="R5ac9bf43fd1741ad"/>
+    <p:sldMasterId id="2147483648" r:id="R2f5593aa621b4e14"/>
   </p:sldMasterIdLst>
   <p:sldIdLst>
-    <p:sldId id="256" r:id="Rb761648119a748d7"/>
-    <p:sldId id="257" r:id="R20316546560d4435"/>
-    <p:sldId id="258" r:id="R6b87b9dc2cf344f5"/>
-    <p:sldId id="259" r:id="R4c73422dd9cb4624"/>
-    <p:sldId id="260" r:id="Rceaa3b837aa14030"/>
-    <p:sldId id="261" r:id="R01ed0b07ff504dab"/>
-    <p:sldId id="262" r:id="R0448e53deb174397"/>
-    <p:sldId id="263" r:id="R727f32439f9449bd"/>
-    <p:sldId id="264" r:id="R8cdb559f21fb41e5"/>
-    <p:sldId id="265" r:id="R804967aea8024232"/>
-    <p:sldId id="266" r:id="R394c5884fbe544ea"/>
-    <p:sldId id="267" r:id="Reb18bd7aab514550"/>
-    <p:sldId id="268" r:id="R7f734f0506d14450"/>
-    <p:sldId id="269" r:id="R32607bcb26f14daf"/>
-    <p:sldId id="270" r:id="R63f50a9736224c60"/>
-    <p:sldId id="271" r:id="R97c7b9b5e40e41aa"/>
-    <p:sldId id="272" r:id="R74f913f8555a4261"/>
-    <p:sldId id="273" r:id="R157d6b87740f43ad"/>
-    <p:sldId id="274" r:id="R285fdeb55cba4a3f"/>
+    <p:sldId id="256" r:id="R6af083f13c514270"/>
+    <p:sldId id="257" r:id="Rd2005c56bab44848"/>
+    <p:sldId id="258" r:id="R575f649317514e6d"/>
+    <p:sldId id="259" r:id="R5c78b9f69e99416c"/>
+    <p:sldId id="260" r:id="R3396020e0e3b4607"/>
+    <p:sldId id="261" r:id="Rde80d4debbc44634"/>
+    <p:sldId id="262" r:id="R28bc347e9b5f45d1"/>
+    <p:sldId id="263" r:id="Raf5f8eb1951f48d4"/>
+    <p:sldId id="264" r:id="R559de7d27ecd4ee4"/>
+    <p:sldId id="265" r:id="R462996b1044b4b66"/>
+    <p:sldId id="266" r:id="R6d1caee9d2924780"/>
+    <p:sldId id="267" r:id="R333a4931b4c04fd4"/>
+    <p:sldId id="268" r:id="R1deb519cb37446a0"/>
+    <p:sldId id="269" r:id="R8982a2c4a3254457"/>
+    <p:sldId id="270" r:id="R9e1c7f4126a94010"/>
+    <p:sldId id="271" r:id="Rcb9a468b62614145"/>
+    <p:sldId id="272" r:id="Re28cc3ae880c4886"/>
+    <p:sldId id="273" r:id="Rd0ffb4a6e6384feb"/>
+    <p:sldId id="274" r:id="R27da1c5114c646c2"/>
   </p:sldIdLst>
   <p:sldSz cx="12192000" cy="6858000"/>
   <p:notesSz cx="6858000" cy="9144000"/>
@@ -68,7 +68,7 @@
   </p:cSld>
   <p:clrMap bg1="lt1" tx1="dk1" bg2="lt2" tx2="dk2" accent1="accent1" accent2="accent2" accent3="accent3" accent4="accent4" accent5="accent5" accent6="accent6" hlink="hlink" folHlink="folHlink"/>
   <p:sldLayoutIdLst>
-    <p:sldLayoutId xmlns:r="http://schemas.openxmlformats.org/officeDocument/2006/relationships" id="2147483649" r:id="Rd4ddbdfe1f9a4c18"/>
+    <p:sldLayoutId xmlns:r="http://schemas.openxmlformats.org/officeDocument/2006/relationships" id="2147483649" r:id="R810f935cb2bb4b05"/>
   </p:sldLayoutIdLst>
   <p:txStyles>
     <p:titleStyle>
@@ -621,12 +621,10 @@
               <c:strCache>
                 <c:ptCount val="3"/>
                 <c:pt idx="0">
-                  <c:v>IFNG only
-(Logistic regression)</c:v>
+                  <c:v>IFNG only (Logistic regression)</c:v>
                 </c:pt>
                 <c:pt idx="1">
-                  <c:v>All RNA
-(Logistic Regression)</c:v>
+                  <c:v>All RNA (Logistic Regression)</c:v>
                 </c:pt>
                 <c:pt idx="2">
                   <c:v>CatBoost</c:v>
@@ -670,12 +668,10 @@
               <c:strCache>
                 <c:ptCount val="3"/>
                 <c:pt idx="0">
-                  <c:v>IFNG only
-(Logistic regression)</c:v>
+                  <c:v>IFNG only (Logistic regression)</c:v>
                 </c:pt>
                 <c:pt idx="1">
-                  <c:v>All RNA
-(Logistic Regression)</c:v>
+                  <c:v>All RNA (Logistic Regression)</c:v>
                 </c:pt>
                 <c:pt idx="2">
                   <c:v>CatBoost</c:v>
@@ -880,7 +876,7 @@
           <p:cNvPr id="2" name="">
             <a:extLst xmlns:a="http://schemas.openxmlformats.org/drawingml/2006/main">
               <a:ext uri="{FF2B5EF4-FFF2-40B4-BE49-F238E27FC236}">
-                <a16:creationId xmlns:a16="http://schemas.microsoft.com/office/drawing/2014/main" id="{55BC9681-E49C-460C-AC02-57CCC38F5CA3}"/>
+                <a16:creationId xmlns:a16="http://schemas.microsoft.com/office/drawing/2014/main" id="{BDFC2154-D641-48E7-BA1B-E292A3CFF361}"/>
               </a:ext>
             </a:extLst>
           </p:cNvPr>
@@ -981,7 +977,7 @@
     </p:spTree>
     <p:extLst>
       <p:ext uri="{BB962C8B-B14F-4D97-AF65-F5344CB8AC3E}">
-        <p14:creationId xmlns:p14="http://schemas.microsoft.com/office/powerpoint/2010/main" val="1110922102"/>
+        <p14:creationId xmlns:p14="http://schemas.microsoft.com/office/powerpoint/2010/main" val="1031283710"/>
       </p:ext>
     </p:extLst>
   </p:cSld>
@@ -1012,7 +1008,7 @@
           <p:cNvPr id="6" name="">
             <a:extLst xmlns:a="http://schemas.openxmlformats.org/drawingml/2006/main">
               <a:ext uri="{FF2B5EF4-FFF2-40B4-BE49-F238E27FC236}">
-                <a16:creationId xmlns:a16="http://schemas.microsoft.com/office/drawing/2014/main" id="{CC411EA0-D2F9-412E-9833-E99D3391CC47}"/>
+                <a16:creationId xmlns:a16="http://schemas.microsoft.com/office/drawing/2014/main" id="{0685FF4D-AFA1-41AC-8672-6378914C5B6A}"/>
               </a:ext>
             </a:extLst>
           </p:cNvPr>
@@ -1069,7 +1065,7 @@
           <p:cNvPr id="2" name="">
             <a:extLst xmlns:a="http://schemas.openxmlformats.org/drawingml/2006/main">
               <a:ext uri="{FF2B5EF4-FFF2-40B4-BE49-F238E27FC236}">
-                <a16:creationId xmlns:a16="http://schemas.microsoft.com/office/drawing/2014/main" id="{F657D59F-4801-480E-A688-053C354DBD22}"/>
+                <a16:creationId xmlns:a16="http://schemas.microsoft.com/office/drawing/2014/main" id="{51BE201A-DE25-4482-8E99-A5EE8FF5B835}"/>
               </a:ext>
             </a:extLst>
           </p:cNvPr>
@@ -1116,7 +1112,7 @@
                 <a:ea typeface="Arial"/>
                 <a:cs typeface="Arial"/>
               </a:rPr>
-              <a:t>Sources: primary configuration and analysis, 15 Sep 2026; Zhang et al., Supplementary Table S2</a:t>
+              <a:t>Sources: primary configuration and analysis; Zhang et al., Table S2; CatBoost documentation</a:t>
             </a:r>
           </a:p>
         </p:txBody>
@@ -1126,7 +1122,7 @@
           <p:cNvPr id="3" name="">
             <a:extLst xmlns:a="http://schemas.openxmlformats.org/drawingml/2006/main">
               <a:ext uri="{FF2B5EF4-FFF2-40B4-BE49-F238E27FC236}">
-                <a16:creationId xmlns:a16="http://schemas.microsoft.com/office/drawing/2014/main" id="{B0DE3C64-7DF6-43AD-8BDB-874565D1F0B3}"/>
+                <a16:creationId xmlns:a16="http://schemas.microsoft.com/office/drawing/2014/main" id="{CDBCBFE4-EFF9-4C14-999F-39D0DD82A92F}"/>
               </a:ext>
             </a:extLst>
           </p:cNvPr>
@@ -1183,7 +1179,7 @@
           <p:cNvPr id="4" name="">
             <a:extLst xmlns:a="http://schemas.openxmlformats.org/drawingml/2006/main">
               <a:ext uri="{FF2B5EF4-FFF2-40B4-BE49-F238E27FC236}">
-                <a16:creationId xmlns:a16="http://schemas.microsoft.com/office/drawing/2014/main" id="{AE9DA401-62DC-48B2-AFF8-4DE1874E1AFA}"/>
+                <a16:creationId xmlns:a16="http://schemas.microsoft.com/office/drawing/2014/main" id="{81C3F490-88C3-4E43-BDC9-80FAF95AD15C}"/>
               </a:ext>
             </a:extLst>
           </p:cNvPr>
@@ -1242,8 +1238,8 @@
           <p:nvPr/>
         </p:nvGraphicFramePr>
         <p:xfrm>
-          <a:off xmlns:a="http://schemas.openxmlformats.org/drawingml/2006/main" x="609600" y="2419350"/>
-          <a:ext xmlns:a="http://schemas.openxmlformats.org/drawingml/2006/main" cx="10972800" cy="3543300"/>
+          <a:off xmlns:a="http://schemas.openxmlformats.org/drawingml/2006/main" x="609600" y="2381250"/>
+          <a:ext xmlns:a="http://schemas.openxmlformats.org/drawingml/2006/main" cx="10972800" cy="3695700"/>
         </p:xfrm>
         <a:graphic xmlns:a="http://schemas.openxmlformats.org/drawingml/2006/main">
           <a:graphicData uri="http://schemas.openxmlformats.org/drawingml/2006/table">
@@ -1253,7 +1249,7 @@
                 <a:gridCol w="3371850"/>
                 <a:gridCol w="7600950"/>
               </a:tblGrid>
-              <a:tr h="504825">
+              <a:tr h="476250">
                 <a:tc>
                   <a:txBody>
                     <a:bodyPr>
@@ -1296,7 +1292,7 @@
                           <a:ea typeface="Arial"/>
                           <a:cs typeface="Arial"/>
                         </a:rPr>
-                        <a:t>What it learns</a:t>
+                        <a:t>Approach and rationale</a:t>
                       </a:r>
                     </a:p>
                   </a:txBody>
@@ -1307,7 +1303,7 @@
                   </a:tcPr>
                 </a:tc>
               </a:tr>
-              <a:tr h="581025">
+              <a:tr h="571500">
                 <a:tc>
                   <a:txBody>
                     <a:bodyPr>
@@ -1361,7 +1357,7 @@
                   </a:tcPr>
                 </a:tc>
               </a:tr>
-              <a:tr h="742950">
+              <a:tr h="819150">
                 <a:tc>
                   <a:txBody>
                     <a:bodyPr>
@@ -1441,7 +1437,7 @@
                   </a:tcPr>
                 </a:tc>
               </a:tr>
-              <a:tr h="1047750">
+              <a:tr h="914400">
                 <a:tc>
                   <a:txBody>
                     <a:bodyPr>
@@ -1521,7 +1517,7 @@
                   </a:tcPr>
                 </a:tc>
               </a:tr>
-              <a:tr h="666750">
+              <a:tr h="914400">
                 <a:tc>
                   <a:txBody>
                     <a:bodyPr>
@@ -1564,7 +1560,20 @@
                           <a:ea typeface="Arial"/>
                           <a:cs typeface="Arial"/>
                         </a:rPr>
-                        <a:t>A combination of decision trees</a:t>
+                        <a:t>Can capture nonlinear RNA patterns and interactions.</a:t>
+                      </a:r>
+                    </a:p>
+                    <a:p>
+                      <a:r>
+                        <a:rPr sz="2175" b="0">
+                          <a:solidFill>
+                            <a:srgbClr val="16343E"/>
+                          </a:solidFill>
+                          <a:latin typeface="Arial"/>
+                          <a:ea typeface="Arial"/>
+                          <a:cs typeface="Arial"/>
+                        </a:rPr>
+                        <a:t>Shallow trees help limit overfitting.</a:t>
                       </a:r>
                     </a:p>
                   </a:txBody>
@@ -1582,7 +1591,7 @@
     </p:spTree>
     <p:extLst>
       <p:ext uri="{BB962C8B-B14F-4D97-AF65-F5344CB8AC3E}">
-        <p14:creationId xmlns:p14="http://schemas.microsoft.com/office/powerpoint/2010/main" val="1352433315"/>
+        <p14:creationId xmlns:p14="http://schemas.microsoft.com/office/powerpoint/2010/main" val="182769313"/>
       </p:ext>
     </p:extLst>
   </p:cSld>
@@ -1610,10 +1619,10 @@
       </p:grpSpPr>
       <p:sp>
         <p:nvSpPr>
-          <p:cNvPr id="17" name="">
-            <a:extLst xmlns:a="http://schemas.openxmlformats.org/drawingml/2006/main">
-              <a:ext uri="{FF2B5EF4-FFF2-40B4-BE49-F238E27FC236}">
-                <a16:creationId xmlns:a16="http://schemas.microsoft.com/office/drawing/2014/main" id="{B5498CF6-9274-4372-AE63-643A82C9ED83}"/>
+          <p:cNvPr id="16" name="">
+            <a:extLst xmlns:a="http://schemas.openxmlformats.org/drawingml/2006/main">
+              <a:ext uri="{FF2B5EF4-FFF2-40B4-BE49-F238E27FC236}">
+                <a16:creationId xmlns:a16="http://schemas.microsoft.com/office/drawing/2014/main" id="{8FF86D79-7813-4009-BDA3-25DB380A239A}"/>
               </a:ext>
             </a:extLst>
           </p:cNvPr>
@@ -1670,7 +1679,7 @@
           <p:cNvPr id="2" name="">
             <a:extLst xmlns:a="http://schemas.openxmlformats.org/drawingml/2006/main">
               <a:ext uri="{FF2B5EF4-FFF2-40B4-BE49-F238E27FC236}">
-                <a16:creationId xmlns:a16="http://schemas.microsoft.com/office/drawing/2014/main" id="{8D636659-2E75-49D9-911E-068D2D2496B9}"/>
+                <a16:creationId xmlns:a16="http://schemas.microsoft.com/office/drawing/2014/main" id="{B55F21AB-DD30-4803-9712-EE0EE8404CAE}"/>
               </a:ext>
             </a:extLst>
           </p:cNvPr>
@@ -1717,7 +1726,7 @@
                 <a:ea typeface="Arial"/>
                 <a:cs typeface="Arial"/>
               </a:rPr>
-              <a:t>Source: discovery screening rule and selected model metadata</a:t>
+              <a:t>Reference: recorded biopsy diagnoses. Source: discovery screening rule and model metadata</a:t>
             </a:r>
           </a:p>
         </p:txBody>
@@ -1727,7 +1736,7 @@
           <p:cNvPr id="3" name="">
             <a:extLst xmlns:a="http://schemas.openxmlformats.org/drawingml/2006/main">
               <a:ext uri="{FF2B5EF4-FFF2-40B4-BE49-F238E27FC236}">
-                <a16:creationId xmlns:a16="http://schemas.microsoft.com/office/drawing/2014/main" id="{82B49FF9-FB97-416B-847D-F3DD8F2AE2AC}"/>
+                <a16:creationId xmlns:a16="http://schemas.microsoft.com/office/drawing/2014/main" id="{68D801E5-241B-4470-889C-7874FD170DBE}"/>
               </a:ext>
             </a:extLst>
           </p:cNvPr>
@@ -1784,7 +1793,7 @@
           <p:cNvPr id="4" name="">
             <a:extLst xmlns:a="http://schemas.openxmlformats.org/drawingml/2006/main">
               <a:ext uri="{FF2B5EF4-FFF2-40B4-BE49-F238E27FC236}">
-                <a16:creationId xmlns:a16="http://schemas.microsoft.com/office/drawing/2014/main" id="{9222552C-5868-49B4-B32A-BA1F70A6E490}"/>
+                <a16:creationId xmlns:a16="http://schemas.microsoft.com/office/drawing/2014/main" id="{832DD8D2-FF57-44AE-884E-85C2C88102CB}"/>
               </a:ext>
             </a:extLst>
           </p:cNvPr>
@@ -1841,7 +1850,7 @@
           <p:cNvPr id="5" name="">
             <a:extLst xmlns:a="http://schemas.openxmlformats.org/drawingml/2006/main">
               <a:ext uri="{FF2B5EF4-FFF2-40B4-BE49-F238E27FC236}">
-                <a16:creationId xmlns:a16="http://schemas.microsoft.com/office/drawing/2014/main" id="{7AA8B872-A5CE-430F-A094-062BF79D95E6}"/>
+                <a16:creationId xmlns:a16="http://schemas.microsoft.com/office/drawing/2014/main" id="{4F9D5E13-637C-48B6-85BD-A0EEB57955F7}"/>
               </a:ext>
             </a:extLst>
           </p:cNvPr>
@@ -1888,7 +1897,7 @@
                 <a:ea typeface="Arial"/>
                 <a:cs typeface="Arial"/>
               </a:rPr>
-              <a:t>Recorded rejection cases detected</a:t>
+              <a:t>Correctly flagged rejection cases</a:t>
             </a:r>
           </a:p>
         </p:txBody>
@@ -1898,7 +1907,7 @@
           <p:cNvPr id="6" name="">
             <a:extLst xmlns:a="http://schemas.openxmlformats.org/drawingml/2006/main">
               <a:ext uri="{FF2B5EF4-FFF2-40B4-BE49-F238E27FC236}">
-                <a16:creationId xmlns:a16="http://schemas.microsoft.com/office/drawing/2014/main" id="{A2067A76-5124-4307-9A23-48AF42B59DDE}"/>
+                <a16:creationId xmlns:a16="http://schemas.microsoft.com/office/drawing/2014/main" id="{82D4EE50-7DFA-4261-A6DA-B261A8A9F136}"/>
               </a:ext>
             </a:extLst>
           </p:cNvPr>
@@ -1927,7 +1936,7 @@
           <p:cNvPr id="7" name="">
             <a:extLst xmlns:a="http://schemas.openxmlformats.org/drawingml/2006/main">
               <a:ext uri="{FF2B5EF4-FFF2-40B4-BE49-F238E27FC236}">
-                <a16:creationId xmlns:a16="http://schemas.microsoft.com/office/drawing/2014/main" id="{E989BAFB-12BF-4CB7-8B82-B31C5BBE7C2B}"/>
+                <a16:creationId xmlns:a16="http://schemas.microsoft.com/office/drawing/2014/main" id="{DE0FFA52-364F-4537-A107-951CE7D2BDE3}"/>
               </a:ext>
             </a:extLst>
           </p:cNvPr>
@@ -1974,7 +1983,7 @@
                 <a:ea typeface="Arial"/>
                 <a:cs typeface="Arial"/>
               </a:rPr>
-              <a:t>All recorded rejection cases</a:t>
+              <a:t>All cases diagnosed as rejection</a:t>
             </a:r>
           </a:p>
         </p:txBody>
@@ -1984,7 +1993,7 @@
           <p:cNvPr id="8" name="">
             <a:extLst xmlns:a="http://schemas.openxmlformats.org/drawingml/2006/main">
               <a:ext uri="{FF2B5EF4-FFF2-40B4-BE49-F238E27FC236}">
-                <a16:creationId xmlns:a16="http://schemas.microsoft.com/office/drawing/2014/main" id="{763C7CD0-66F8-4DD5-A8D8-5051CB430E23}"/>
+                <a16:creationId xmlns:a16="http://schemas.microsoft.com/office/drawing/2014/main" id="{23161C76-98E1-4335-BF82-CF35C9E35B15}"/>
               </a:ext>
             </a:extLst>
           </p:cNvPr>
@@ -2041,7 +2050,7 @@
           <p:cNvPr id="9" name="">
             <a:extLst xmlns:a="http://schemas.openxmlformats.org/drawingml/2006/main">
               <a:ext uri="{FF2B5EF4-FFF2-40B4-BE49-F238E27FC236}">
-                <a16:creationId xmlns:a16="http://schemas.microsoft.com/office/drawing/2014/main" id="{62D31ADB-175D-4776-B85C-B8A7DEF340D6}"/>
+                <a16:creationId xmlns:a16="http://schemas.microsoft.com/office/drawing/2014/main" id="{5560FA24-84CD-4B0E-A326-A837FFB6E01E}"/>
               </a:ext>
             </a:extLst>
           </p:cNvPr>
@@ -2098,7 +2107,7 @@
           <p:cNvPr id="10" name="">
             <a:extLst xmlns:a="http://schemas.openxmlformats.org/drawingml/2006/main">
               <a:ext uri="{FF2B5EF4-FFF2-40B4-BE49-F238E27FC236}">
-                <a16:creationId xmlns:a16="http://schemas.microsoft.com/office/drawing/2014/main" id="{4BF0C857-B113-40EE-995A-C59457CFE7DD}"/>
+                <a16:creationId xmlns:a16="http://schemas.microsoft.com/office/drawing/2014/main" id="{B5FCE23D-6425-45BB-999F-4B8D1FD698B6}"/>
               </a:ext>
             </a:extLst>
           </p:cNvPr>
@@ -2145,7 +2154,7 @@
                 <a:ea typeface="Arial"/>
                 <a:cs typeface="Arial"/>
               </a:rPr>
-              <a:t>Flags with recorded rejection</a:t>
+              <a:t>Correctly flagged rejection cases</a:t>
             </a:r>
           </a:p>
         </p:txBody>
@@ -2155,7 +2164,7 @@
           <p:cNvPr id="11" name="">
             <a:extLst xmlns:a="http://schemas.openxmlformats.org/drawingml/2006/main">
               <a:ext uri="{FF2B5EF4-FFF2-40B4-BE49-F238E27FC236}">
-                <a16:creationId xmlns:a16="http://schemas.microsoft.com/office/drawing/2014/main" id="{4565C612-6B34-4BAE-A4AE-1C14A831C7B2}"/>
+                <a16:creationId xmlns:a16="http://schemas.microsoft.com/office/drawing/2014/main" id="{AAA5B813-FB01-4742-85BC-A7BAFED9D194}"/>
               </a:ext>
             </a:extLst>
           </p:cNvPr>
@@ -2184,7 +2193,7 @@
           <p:cNvPr id="12" name="">
             <a:extLst xmlns:a="http://schemas.openxmlformats.org/drawingml/2006/main">
               <a:ext uri="{FF2B5EF4-FFF2-40B4-BE49-F238E27FC236}">
-                <a16:creationId xmlns:a16="http://schemas.microsoft.com/office/drawing/2014/main" id="{39FFB15B-7FC6-4D76-9869-D8E71F4D09C1}"/>
+                <a16:creationId xmlns:a16="http://schemas.microsoft.com/office/drawing/2014/main" id="{12B68387-D58F-45F8-A27A-4E205405FF6B}"/>
               </a:ext>
             </a:extLst>
           </p:cNvPr>
@@ -2231,7 +2240,7 @@
                 <a:ea typeface="Arial"/>
                 <a:cs typeface="Arial"/>
               </a:rPr>
-              <a:t>All positive flags</a:t>
+              <a:t>All rejection flags</a:t>
             </a:r>
           </a:p>
         </p:txBody>
@@ -2241,7 +2250,7 @@
           <p:cNvPr id="13" name="">
             <a:extLst xmlns:a="http://schemas.openxmlformats.org/drawingml/2006/main">
               <a:ext uri="{FF2B5EF4-FFF2-40B4-BE49-F238E27FC236}">
-                <a16:creationId xmlns:a16="http://schemas.microsoft.com/office/drawing/2014/main" id="{CC60CD79-564F-4CD3-965D-9C60E9A78EED}"/>
+                <a16:creationId xmlns:a16="http://schemas.microsoft.com/office/drawing/2014/main" id="{8A4FC4EC-3D67-4901-84AC-FDCA80B99A7E}"/>
               </a:ext>
             </a:extLst>
           </p:cNvPr>
@@ -2298,7 +2307,7 @@
           <p:cNvPr id="14" name="">
             <a:extLst xmlns:a="http://schemas.openxmlformats.org/drawingml/2006/main">
               <a:ext uri="{FF2B5EF4-FFF2-40B4-BE49-F238E27FC236}">
-                <a16:creationId xmlns:a16="http://schemas.microsoft.com/office/drawing/2014/main" id="{F945782E-2D5F-47BD-93E6-82F8FE83487A}"/>
+                <a16:creationId xmlns:a16="http://schemas.microsoft.com/office/drawing/2014/main" id="{444E11BE-55FB-4615-BADB-618CE9E22FE0}"/>
               </a:ext>
             </a:extLst>
           </p:cNvPr>
@@ -2345,14 +2354,14 @@
                 <a:ea typeface="Arial"/>
                 <a:cs typeface="Arial"/>
               </a:rPr>
-              <a:t>Selection using screening specimens</a:t>
+              <a:t>My selection rule for screening specimens</a:t>
             </a:r>
           </a:p>
         </p:txBody>
       </p:sp>
       <p:graphicFrame>
         <p:nvGraphicFramePr>
-          <p:cNvPr id="31" name=""/>
+          <p:cNvPr id="30" name=""/>
           <p:cNvGraphicFramePr/>
           <p:nvPr/>
         </p:nvGraphicFramePr>
@@ -2465,7 +2474,7 @@
                           <a:ea typeface="Arial"/>
                           <a:cs typeface="Arial"/>
                         </a:rPr>
-                        <a:t>Detect at least 90% of recorded rejection cases.*</a:t>
+                        <a:t>Detect at least 90% of cases diagnosed as rejection.</a:t>
                       </a:r>
                     </a:p>
                   </a:txBody>
@@ -2588,67 +2597,10 @@
           </a:graphicData>
         </a:graphic>
       </p:graphicFrame>
-      <p:sp>
-        <p:nvSpPr>
-          <p:cNvPr id="16" name="">
-            <a:extLst xmlns:a="http://schemas.openxmlformats.org/drawingml/2006/main">
-              <a:ext uri="{FF2B5EF4-FFF2-40B4-BE49-F238E27FC236}">
-                <a16:creationId xmlns:a16="http://schemas.microsoft.com/office/drawing/2014/main" id="{2A7839D4-3B0F-4774-B32E-A582792A0A57}"/>
-              </a:ext>
-            </a:extLst>
-          </p:cNvPr>
-          <p:cNvSpPr>
-            <a:spLocks xmlns:a="http://schemas.openxmlformats.org/drawingml/2006/main" noGrp="1"/>
-          </p:cNvSpPr>
-          <p:nvPr/>
-        </p:nvSpPr>
-        <p:spPr>
-          <a:xfrm xmlns:a="http://schemas.openxmlformats.org/drawingml/2006/main">
-            <a:off x="609600" y="6019800"/>
-            <a:ext cx="10972800" cy="257175"/>
-          </a:xfrm>
-          <a:prstGeom xmlns:a="http://schemas.openxmlformats.org/drawingml/2006/main" prst="rect">
-            <a:avLst/>
-          </a:prstGeom>
-          <a:noFill xmlns:a="http://schemas.openxmlformats.org/drawingml/2006/main"/>
-          <a:ln xmlns:a="http://schemas.openxmlformats.org/drawingml/2006/main" w="0">
-            <a:noFill/>
-          </a:ln>
-        </p:spPr>
-        <p:txBody>
-          <a:bodyPr xmlns:a="http://schemas.openxmlformats.org/drawingml/2006/main" anchor="ctr">
-            <a:noAutofit/>
-          </a:bodyPr>
-          <a:lstStyle xmlns:a="http://schemas.openxmlformats.org/drawingml/2006/main"/>
-          <a:p xmlns:a="http://schemas.openxmlformats.org/drawingml/2006/main">
-            <a:pPr algn="l">
-              <a:defRPr sz="1725" b="0">
-                <a:solidFill>
-                  <a:srgbClr val="52656B"/>
-                </a:solidFill>
-                <a:latin typeface="Arial"/>
-                <a:ea typeface="Arial"/>
-                <a:cs typeface="Arial"/>
-              </a:defRPr>
-            </a:pPr>
-            <a:r>
-              <a:rPr sz="1725" b="0">
-                <a:solidFill>
-                  <a:srgbClr val="52656B"/>
-                </a:solidFill>
-                <a:latin typeface="Arial"/>
-                <a:ea typeface="Arial"/>
-                <a:cs typeface="Arial"/>
-              </a:rPr>
-              <a:t>*90% is an experimental target.</a:t>
-            </a:r>
-          </a:p>
-        </p:txBody>
-      </p:sp>
     </p:spTree>
     <p:extLst>
       <p:ext uri="{BB962C8B-B14F-4D97-AF65-F5344CB8AC3E}">
-        <p14:creationId xmlns:p14="http://schemas.microsoft.com/office/powerpoint/2010/main" val="950571463"/>
+        <p14:creationId xmlns:p14="http://schemas.microsoft.com/office/powerpoint/2010/main" val="1888654372"/>
       </p:ext>
     </p:extLst>
   </p:cSld>
@@ -2679,7 +2631,7 @@
           <p:cNvPr id="7" name="">
             <a:extLst xmlns:a="http://schemas.openxmlformats.org/drawingml/2006/main">
               <a:ext uri="{FF2B5EF4-FFF2-40B4-BE49-F238E27FC236}">
-                <a16:creationId xmlns:a16="http://schemas.microsoft.com/office/drawing/2014/main" id="{257C2020-65C3-404A-B319-98CC7E4254A4}"/>
+                <a16:creationId xmlns:a16="http://schemas.microsoft.com/office/drawing/2014/main" id="{978462B6-458A-4D0C-B5DA-72C8F146CA9C}"/>
               </a:ext>
             </a:extLst>
           </p:cNvPr>
@@ -2736,7 +2688,7 @@
           <p:cNvPr id="2" name="">
             <a:extLst xmlns:a="http://schemas.openxmlformats.org/drawingml/2006/main">
               <a:ext uri="{FF2B5EF4-FFF2-40B4-BE49-F238E27FC236}">
-                <a16:creationId xmlns:a16="http://schemas.microsoft.com/office/drawing/2014/main" id="{3EE09F3A-C2AC-4947-8AA1-75A5DD7A71D7}"/>
+                <a16:creationId xmlns:a16="http://schemas.microsoft.com/office/drawing/2014/main" id="{7C51F71F-2BDA-45BA-9BB4-DEE2ED37B815}"/>
               </a:ext>
             </a:extLst>
           </p:cNvPr>
@@ -2793,7 +2745,7 @@
           <p:cNvPr id="3" name="">
             <a:extLst xmlns:a="http://schemas.openxmlformats.org/drawingml/2006/main">
               <a:ext uri="{FF2B5EF4-FFF2-40B4-BE49-F238E27FC236}">
-                <a16:creationId xmlns:a16="http://schemas.microsoft.com/office/drawing/2014/main" id="{3567FABD-94A5-420E-B0D5-A41B333B268D}"/>
+                <a16:creationId xmlns:a16="http://schemas.microsoft.com/office/drawing/2014/main" id="{D3968B99-8C9A-443D-BE88-8B83AC469729}"/>
               </a:ext>
             </a:extLst>
           </p:cNvPr>
@@ -2850,7 +2802,7 @@
           <p:cNvPr id="4" name="">
             <a:extLst xmlns:a="http://schemas.openxmlformats.org/drawingml/2006/main">
               <a:ext uri="{FF2B5EF4-FFF2-40B4-BE49-F238E27FC236}">
-                <a16:creationId xmlns:a16="http://schemas.microsoft.com/office/drawing/2014/main" id="{E1324EF9-4754-4993-87F2-515997408F03}"/>
+                <a16:creationId xmlns:a16="http://schemas.microsoft.com/office/drawing/2014/main" id="{6C642893-29E5-4A62-A6B9-C450C10DAF31}"/>
               </a:ext>
             </a:extLst>
           </p:cNvPr>
@@ -2914,7 +2866,7 @@
         </p:xfrm>
         <a:graphic xmlns:a="http://schemas.openxmlformats.org/drawingml/2006/main">
           <a:graphicData uri="http://schemas.openxmlformats.org/drawingml/2006/chart">
-            <c:chart xmlns:r="http://schemas.openxmlformats.org/officeDocument/2006/relationships" xmlns:c="http://schemas.openxmlformats.org/drawingml/2006/chart" r:id="R678de3e59e194f4e"/>
+            <c:chart xmlns:r="http://schemas.openxmlformats.org/officeDocument/2006/relationships" xmlns:c="http://schemas.openxmlformats.org/drawingml/2006/chart" r:id="Rbc11e9ec15ec4666"/>
           </a:graphicData>
         </a:graphic>
       </p:graphicFrame>
@@ -2923,7 +2875,7 @@
           <p:cNvPr id="6" name="">
             <a:extLst xmlns:a="http://schemas.openxmlformats.org/drawingml/2006/main">
               <a:ext uri="{FF2B5EF4-FFF2-40B4-BE49-F238E27FC236}">
-                <a16:creationId xmlns:a16="http://schemas.microsoft.com/office/drawing/2014/main" id="{5893D65C-6FF0-4069-B2B3-B096C4EF40FD}"/>
+                <a16:creationId xmlns:a16="http://schemas.microsoft.com/office/drawing/2014/main" id="{E04CF800-19FE-4252-9FBE-658FE8A0943F}"/>
               </a:ext>
             </a:extLst>
           </p:cNvPr>
@@ -2935,7 +2887,7 @@
         <p:spPr>
           <a:xfrm xmlns:a="http://schemas.openxmlformats.org/drawingml/2006/main">
             <a:off x="609600" y="5200650"/>
-            <a:ext cx="10972800" cy="981075"/>
+            <a:ext cx="10972800" cy="571500"/>
           </a:xfrm>
           <a:prstGeom xmlns:a="http://schemas.openxmlformats.org/drawingml/2006/main" prst="rect">
             <a:avLst/>
@@ -2977,39 +2929,12 @@
               <a:t>Constant baseline: 0 false negatives, 176 false positives. It flags everyone.</a:t>
             </a:r>
           </a:p>
-          <a:p xmlns:a="http://schemas.openxmlformats.org/drawingml/2006/main">
-            <a:pPr marL="279400" indent="-152400" algn="l">
-              <a:spcAft>
-                <a:spcPts val="1100"/>
-              </a:spcAft>
-              <a:buChar char="•"/>
-              <a:defRPr sz="2175" b="0">
-                <a:solidFill>
-                  <a:srgbClr val="16343E"/>
-                </a:solidFill>
-                <a:latin typeface="Arial"/>
-                <a:ea typeface="Arial"/>
-                <a:cs typeface="Arial"/>
-              </a:defRPr>
-            </a:pPr>
-            <a:r>
-              <a:rPr sz="2175" b="0">
-                <a:solidFill>
-                  <a:srgbClr val="16343E"/>
-                </a:solidFill>
-                <a:latin typeface="Arial"/>
-                <a:ea typeface="Arial"/>
-                <a:cs typeface="Arial"/>
-              </a:rPr>
-              <a:t>CatBoost versus IFNG: 67 fewer false positives, 11 more false negatives.</a:t>
-            </a:r>
-          </a:p>
         </p:txBody>
       </p:sp>
     </p:spTree>
     <p:extLst>
       <p:ext uri="{BB962C8B-B14F-4D97-AF65-F5344CB8AC3E}">
-        <p14:creationId xmlns:p14="http://schemas.microsoft.com/office/powerpoint/2010/main" val="379318269"/>
+        <p14:creationId xmlns:p14="http://schemas.microsoft.com/office/powerpoint/2010/main" val="2067514369"/>
       </p:ext>
     </p:extLst>
   </p:cSld>
@@ -3040,7 +2965,7 @@
           <p:cNvPr id="7" name="">
             <a:extLst xmlns:a="http://schemas.openxmlformats.org/drawingml/2006/main">
               <a:ext uri="{FF2B5EF4-FFF2-40B4-BE49-F238E27FC236}">
-                <a16:creationId xmlns:a16="http://schemas.microsoft.com/office/drawing/2014/main" id="{3ABD9815-A2BD-4F2D-85A6-113175215A83}"/>
+                <a16:creationId xmlns:a16="http://schemas.microsoft.com/office/drawing/2014/main" id="{DD460867-16E5-480B-972B-36886CCC50A8}"/>
               </a:ext>
             </a:extLst>
           </p:cNvPr>
@@ -3097,7 +3022,7 @@
           <p:cNvPr id="2" name="">
             <a:extLst xmlns:a="http://schemas.openxmlformats.org/drawingml/2006/main">
               <a:ext uri="{FF2B5EF4-FFF2-40B4-BE49-F238E27FC236}">
-                <a16:creationId xmlns:a16="http://schemas.microsoft.com/office/drawing/2014/main" id="{108B9450-C5BD-4001-8267-C15CBFD1E8AB}"/>
+                <a16:creationId xmlns:a16="http://schemas.microsoft.com/office/drawing/2014/main" id="{C6C0C062-5B8C-416D-9600-33C511359AC9}"/>
               </a:ext>
             </a:extLst>
           </p:cNvPr>
@@ -3154,7 +3079,7 @@
           <p:cNvPr id="3" name="">
             <a:extLst xmlns:a="http://schemas.openxmlformats.org/drawingml/2006/main">
               <a:ext uri="{FF2B5EF4-FFF2-40B4-BE49-F238E27FC236}">
-                <a16:creationId xmlns:a16="http://schemas.microsoft.com/office/drawing/2014/main" id="{1D63CF49-F7CB-479A-AC11-1719E84D7542}"/>
+                <a16:creationId xmlns:a16="http://schemas.microsoft.com/office/drawing/2014/main" id="{A6E57419-E14E-4D26-9BF9-0CD871680E72}"/>
               </a:ext>
             </a:extLst>
           </p:cNvPr>
@@ -3211,7 +3136,7 @@
           <p:cNvPr id="4" name="">
             <a:extLst xmlns:a="http://schemas.openxmlformats.org/drawingml/2006/main">
               <a:ext uri="{FF2B5EF4-FFF2-40B4-BE49-F238E27FC236}">
-                <a16:creationId xmlns:a16="http://schemas.microsoft.com/office/drawing/2014/main" id="{525ABB64-82CF-44C1-BA44-0CDCCA9E9B53}"/>
+                <a16:creationId xmlns:a16="http://schemas.microsoft.com/office/drawing/2014/main" id="{2F5083F0-A870-4400-9A2B-ACE944747610}"/>
               </a:ext>
             </a:extLst>
           </p:cNvPr>
@@ -3268,7 +3193,7 @@
           <p:cNvPr id="5" name="">
             <a:extLst xmlns:a="http://schemas.openxmlformats.org/drawingml/2006/main">
               <a:ext uri="{FF2B5EF4-FFF2-40B4-BE49-F238E27FC236}">
-                <a16:creationId xmlns:a16="http://schemas.microsoft.com/office/drawing/2014/main" id="{C76FB4DB-A381-4FEE-9103-9405734993F0}"/>
+                <a16:creationId xmlns:a16="http://schemas.microsoft.com/office/drawing/2014/main" id="{B912FA76-504C-4592-9056-DB06B0048BC9}"/>
               </a:ext>
             </a:extLst>
           </p:cNvPr>
@@ -3383,7 +3308,7 @@
           <p:cNvPr id="6" name="">
             <a:extLst xmlns:a="http://schemas.openxmlformats.org/drawingml/2006/main">
               <a:ext uri="{FF2B5EF4-FFF2-40B4-BE49-F238E27FC236}">
-                <a16:creationId xmlns:a16="http://schemas.microsoft.com/office/drawing/2014/main" id="{3BA4E4AF-298F-4588-896B-9AC8563B1A7C}"/>
+                <a16:creationId xmlns:a16="http://schemas.microsoft.com/office/drawing/2014/main" id="{AD31ABC1-FE3F-41BA-B69B-1948FF867D79}"/>
               </a:ext>
             </a:extLst>
           </p:cNvPr>
@@ -3438,7 +3363,7 @@
     </p:spTree>
     <p:extLst>
       <p:ext uri="{BB962C8B-B14F-4D97-AF65-F5344CB8AC3E}">
-        <p14:creationId xmlns:p14="http://schemas.microsoft.com/office/powerpoint/2010/main" val="1434899958"/>
+        <p14:creationId xmlns:p14="http://schemas.microsoft.com/office/powerpoint/2010/main" val="1914430962"/>
       </p:ext>
     </p:extLst>
   </p:cSld>
@@ -3469,7 +3394,7 @@
           <p:cNvPr id="9" name="">
             <a:extLst xmlns:a="http://schemas.openxmlformats.org/drawingml/2006/main">
               <a:ext uri="{FF2B5EF4-FFF2-40B4-BE49-F238E27FC236}">
-                <a16:creationId xmlns:a16="http://schemas.microsoft.com/office/drawing/2014/main" id="{F37F33DC-BCC4-4358-A7EF-19B55CC97C1D}"/>
+                <a16:creationId xmlns:a16="http://schemas.microsoft.com/office/drawing/2014/main" id="{A2B4AE4A-EE10-4992-8728-DD2B651A5692}"/>
               </a:ext>
             </a:extLst>
           </p:cNvPr>
@@ -3526,7 +3451,7 @@
           <p:cNvPr id="2" name="">
             <a:extLst xmlns:a="http://schemas.openxmlformats.org/drawingml/2006/main">
               <a:ext uri="{FF2B5EF4-FFF2-40B4-BE49-F238E27FC236}">
-                <a16:creationId xmlns:a16="http://schemas.microsoft.com/office/drawing/2014/main" id="{FE163C54-13E3-4DC6-BCAC-4E0239671321}"/>
+                <a16:creationId xmlns:a16="http://schemas.microsoft.com/office/drawing/2014/main" id="{74BF6D9F-2F19-44E5-A5CA-FA38396AAD16}"/>
               </a:ext>
             </a:extLst>
           </p:cNvPr>
@@ -3583,7 +3508,7 @@
           <p:cNvPr id="3" name="">
             <a:extLst xmlns:a="http://schemas.openxmlformats.org/drawingml/2006/main">
               <a:ext uri="{FF2B5EF4-FFF2-40B4-BE49-F238E27FC236}">
-                <a16:creationId xmlns:a16="http://schemas.microsoft.com/office/drawing/2014/main" id="{166633F6-E0F7-4D9B-B326-08B75E181B65}"/>
+                <a16:creationId xmlns:a16="http://schemas.microsoft.com/office/drawing/2014/main" id="{4F5CD016-1329-4634-B6A3-9A0F8FEA3EB7}"/>
               </a:ext>
             </a:extLst>
           </p:cNvPr>
@@ -3640,7 +3565,7 @@
           <p:cNvPr id="4" name="">
             <a:extLst xmlns:a="http://schemas.openxmlformats.org/drawingml/2006/main">
               <a:ext uri="{FF2B5EF4-FFF2-40B4-BE49-F238E27FC236}">
-                <a16:creationId xmlns:a16="http://schemas.microsoft.com/office/drawing/2014/main" id="{73D82E7F-2E31-4A38-98DA-E7C4FE84E685}"/>
+                <a16:creationId xmlns:a16="http://schemas.microsoft.com/office/drawing/2014/main" id="{B4D36C0A-1095-444B-9010-F2FE53569A22}"/>
               </a:ext>
             </a:extLst>
           </p:cNvPr>
@@ -3884,7 +3809,7 @@
           <p:cNvPr id="6" name="">
             <a:extLst xmlns:a="http://schemas.openxmlformats.org/drawingml/2006/main">
               <a:ext uri="{FF2B5EF4-FFF2-40B4-BE49-F238E27FC236}">
-                <a16:creationId xmlns:a16="http://schemas.microsoft.com/office/drawing/2014/main" id="{54A06AE4-4C41-4242-A77F-6B0078713AAA}"/>
+                <a16:creationId xmlns:a16="http://schemas.microsoft.com/office/drawing/2014/main" id="{8FCA0C52-1056-44CB-B073-3BF9256E76F1}"/>
               </a:ext>
             </a:extLst>
           </p:cNvPr>
@@ -3941,7 +3866,7 @@
           <p:cNvPr id="7" name="">
             <a:extLst xmlns:a="http://schemas.openxmlformats.org/drawingml/2006/main">
               <a:ext uri="{FF2B5EF4-FFF2-40B4-BE49-F238E27FC236}">
-                <a16:creationId xmlns:a16="http://schemas.microsoft.com/office/drawing/2014/main" id="{4686B201-7C41-4C55-B0A2-67C4B8180493}"/>
+                <a16:creationId xmlns:a16="http://schemas.microsoft.com/office/drawing/2014/main" id="{4ACADE64-A7AF-408D-A893-692A7837628A}"/>
               </a:ext>
             </a:extLst>
           </p:cNvPr>
@@ -4029,7 +3954,7 @@
           <p:cNvPr id="8" name="">
             <a:extLst xmlns:a="http://schemas.openxmlformats.org/drawingml/2006/main">
               <a:ext uri="{FF2B5EF4-FFF2-40B4-BE49-F238E27FC236}">
-                <a16:creationId xmlns:a16="http://schemas.microsoft.com/office/drawing/2014/main" id="{36FA4853-1F73-438E-88A6-09CD41F825BA}"/>
+                <a16:creationId xmlns:a16="http://schemas.microsoft.com/office/drawing/2014/main" id="{151420BF-7358-4627-94D4-DC9893EF3661}"/>
               </a:ext>
             </a:extLst>
           </p:cNvPr>
@@ -4084,7 +4009,7 @@
     </p:spTree>
     <p:extLst>
       <p:ext uri="{BB962C8B-B14F-4D97-AF65-F5344CB8AC3E}">
-        <p14:creationId xmlns:p14="http://schemas.microsoft.com/office/powerpoint/2010/main" val="1110396161"/>
+        <p14:creationId xmlns:p14="http://schemas.microsoft.com/office/powerpoint/2010/main" val="437529894"/>
       </p:ext>
     </p:extLst>
   </p:cSld>
@@ -4115,7 +4040,7 @@
           <p:cNvPr id="13" name="">
             <a:extLst xmlns:a="http://schemas.openxmlformats.org/drawingml/2006/main">
               <a:ext uri="{FF2B5EF4-FFF2-40B4-BE49-F238E27FC236}">
-                <a16:creationId xmlns:a16="http://schemas.microsoft.com/office/drawing/2014/main" id="{E3AF68E0-E6E3-4F4A-A435-AE1C8A535035}"/>
+                <a16:creationId xmlns:a16="http://schemas.microsoft.com/office/drawing/2014/main" id="{EA0EB888-929C-4FFB-89C1-CCBA858102A9}"/>
               </a:ext>
             </a:extLst>
           </p:cNvPr>
@@ -4172,7 +4097,7 @@
           <p:cNvPr id="2" name="">
             <a:extLst xmlns:a="http://schemas.openxmlformats.org/drawingml/2006/main">
               <a:ext uri="{FF2B5EF4-FFF2-40B4-BE49-F238E27FC236}">
-                <a16:creationId xmlns:a16="http://schemas.microsoft.com/office/drawing/2014/main" id="{88D599D1-CC75-4F3F-9AFA-79E234996436}"/>
+                <a16:creationId xmlns:a16="http://schemas.microsoft.com/office/drawing/2014/main" id="{BF56D12A-1A32-48B8-944A-99179BAF164B}"/>
               </a:ext>
             </a:extLst>
           </p:cNvPr>
@@ -4229,7 +4154,7 @@
           <p:cNvPr id="3" name="">
             <a:extLst xmlns:a="http://schemas.openxmlformats.org/drawingml/2006/main">
               <a:ext uri="{FF2B5EF4-FFF2-40B4-BE49-F238E27FC236}">
-                <a16:creationId xmlns:a16="http://schemas.microsoft.com/office/drawing/2014/main" id="{1F5402B2-643C-4F11-88C5-E4083B3AC710}"/>
+                <a16:creationId xmlns:a16="http://schemas.microsoft.com/office/drawing/2014/main" id="{1BB5D65C-C070-4980-B19F-8620F1567308}"/>
               </a:ext>
             </a:extLst>
           </p:cNvPr>
@@ -4286,7 +4211,7 @@
           <p:cNvPr id="4" name="">
             <a:extLst xmlns:a="http://schemas.openxmlformats.org/drawingml/2006/main">
               <a:ext uri="{FF2B5EF4-FFF2-40B4-BE49-F238E27FC236}">
-                <a16:creationId xmlns:a16="http://schemas.microsoft.com/office/drawing/2014/main" id="{DB7E36D8-C66A-4693-994B-025C9B062463}"/>
+                <a16:creationId xmlns:a16="http://schemas.microsoft.com/office/drawing/2014/main" id="{52792544-C408-47F5-A436-304425A23F83}"/>
               </a:ext>
             </a:extLst>
           </p:cNvPr>
@@ -4343,7 +4268,7 @@
           <p:cNvPr id="5" name="">
             <a:extLst xmlns:a="http://schemas.openxmlformats.org/drawingml/2006/main">
               <a:ext uri="{FF2B5EF4-FFF2-40B4-BE49-F238E27FC236}">
-                <a16:creationId xmlns:a16="http://schemas.microsoft.com/office/drawing/2014/main" id="{F8530D30-C09F-48AF-B803-EFEAF4CC8E40}"/>
+                <a16:creationId xmlns:a16="http://schemas.microsoft.com/office/drawing/2014/main" id="{C328850B-9593-44D6-8113-E618162F535E}"/>
               </a:ext>
             </a:extLst>
           </p:cNvPr>
@@ -4404,7 +4329,7 @@
           <p:cNvPr id="6" name="">
             <a:extLst xmlns:a="http://schemas.openxmlformats.org/drawingml/2006/main">
               <a:ext uri="{FF2B5EF4-FFF2-40B4-BE49-F238E27FC236}">
-                <a16:creationId xmlns:a16="http://schemas.microsoft.com/office/drawing/2014/main" id="{676E9E75-27A8-4B2A-AF94-FA831AC34EEA}"/>
+                <a16:creationId xmlns:a16="http://schemas.microsoft.com/office/drawing/2014/main" id="{86400725-9640-43EC-8EC6-870EE511A84B}"/>
               </a:ext>
             </a:extLst>
           </p:cNvPr>
@@ -4465,7 +4390,7 @@
           <p:cNvPr id="7" name="">
             <a:extLst xmlns:a="http://schemas.openxmlformats.org/drawingml/2006/main">
               <a:ext uri="{FF2B5EF4-FFF2-40B4-BE49-F238E27FC236}">
-                <a16:creationId xmlns:a16="http://schemas.microsoft.com/office/drawing/2014/main" id="{1E4D188B-F46A-4E06-8152-B7B6542A2B69}"/>
+                <a16:creationId xmlns:a16="http://schemas.microsoft.com/office/drawing/2014/main" id="{BBCC17C4-62F1-4C13-A4FA-BCBFBD677097}"/>
               </a:ext>
             </a:extLst>
           </p:cNvPr>
@@ -4576,7 +4501,7 @@
           <p:cNvPr id="10" name="">
             <a:extLst xmlns:a="http://schemas.openxmlformats.org/drawingml/2006/main">
               <a:ext uri="{FF2B5EF4-FFF2-40B4-BE49-F238E27FC236}">
-                <a16:creationId xmlns:a16="http://schemas.microsoft.com/office/drawing/2014/main" id="{BBDD2950-BFD8-42DF-A3F9-6BCE675C343A}"/>
+                <a16:creationId xmlns:a16="http://schemas.microsoft.com/office/drawing/2014/main" id="{34965C22-73E6-4B66-BCB0-304E3B4047A3}"/>
               </a:ext>
             </a:extLst>
           </p:cNvPr>
@@ -4633,7 +4558,7 @@
           <p:cNvPr id="11" name="">
             <a:extLst xmlns:a="http://schemas.openxmlformats.org/drawingml/2006/main">
               <a:ext uri="{FF2B5EF4-FFF2-40B4-BE49-F238E27FC236}">
-                <a16:creationId xmlns:a16="http://schemas.microsoft.com/office/drawing/2014/main" id="{E84BD47A-54F3-4C51-9833-C7E60630D7F6}"/>
+                <a16:creationId xmlns:a16="http://schemas.microsoft.com/office/drawing/2014/main" id="{7776F767-C521-470B-8199-7A77793C1C7E}"/>
               </a:ext>
             </a:extLst>
           </p:cNvPr>
@@ -4759,7 +4684,7 @@
           <p:cNvPr id="12" name="">
             <a:extLst xmlns:a="http://schemas.openxmlformats.org/drawingml/2006/main">
               <a:ext uri="{FF2B5EF4-FFF2-40B4-BE49-F238E27FC236}">
-                <a16:creationId xmlns:a16="http://schemas.microsoft.com/office/drawing/2014/main" id="{2CBC9DD0-713F-4BC5-8820-5C72EFAED3E8}"/>
+                <a16:creationId xmlns:a16="http://schemas.microsoft.com/office/drawing/2014/main" id="{2A67ABF5-C377-4E3D-BDC2-FE0D16841CB8}"/>
               </a:ext>
             </a:extLst>
           </p:cNvPr>
@@ -4814,7 +4739,7 @@
     </p:spTree>
     <p:extLst>
       <p:ext uri="{BB962C8B-B14F-4D97-AF65-F5344CB8AC3E}">
-        <p14:creationId xmlns:p14="http://schemas.microsoft.com/office/powerpoint/2010/main" val="1347148943"/>
+        <p14:creationId xmlns:p14="http://schemas.microsoft.com/office/powerpoint/2010/main" val="2087244839"/>
       </p:ext>
     </p:extLst>
   </p:cSld>
@@ -4845,7 +4770,7 @@
           <p:cNvPr id="13" name="">
             <a:extLst xmlns:a="http://schemas.openxmlformats.org/drawingml/2006/main">
               <a:ext uri="{FF2B5EF4-FFF2-40B4-BE49-F238E27FC236}">
-                <a16:creationId xmlns:a16="http://schemas.microsoft.com/office/drawing/2014/main" id="{2C1C68C9-E244-4495-BCDF-B41526790AF6}"/>
+                <a16:creationId xmlns:a16="http://schemas.microsoft.com/office/drawing/2014/main" id="{D6B03CEB-2895-484A-B249-A17BF341E5D1}"/>
               </a:ext>
             </a:extLst>
           </p:cNvPr>
@@ -4902,7 +4827,7 @@
           <p:cNvPr id="2" name="">
             <a:extLst xmlns:a="http://schemas.openxmlformats.org/drawingml/2006/main">
               <a:ext uri="{FF2B5EF4-FFF2-40B4-BE49-F238E27FC236}">
-                <a16:creationId xmlns:a16="http://schemas.microsoft.com/office/drawing/2014/main" id="{85B22C30-C2FA-47F2-8114-E8B0EB8F1911}"/>
+                <a16:creationId xmlns:a16="http://schemas.microsoft.com/office/drawing/2014/main" id="{3C3657BD-BD0C-452C-9793-DC55D7138FA2}"/>
               </a:ext>
             </a:extLst>
           </p:cNvPr>
@@ -4959,7 +4884,7 @@
           <p:cNvPr id="3" name="">
             <a:extLst xmlns:a="http://schemas.openxmlformats.org/drawingml/2006/main">
               <a:ext uri="{FF2B5EF4-FFF2-40B4-BE49-F238E27FC236}">
-                <a16:creationId xmlns:a16="http://schemas.microsoft.com/office/drawing/2014/main" id="{E82A56FC-BB9A-428C-8A77-006E7504A52D}"/>
+                <a16:creationId xmlns:a16="http://schemas.microsoft.com/office/drawing/2014/main" id="{EBEEB2E8-B802-415F-AEF0-2E1A089AADC8}"/>
               </a:ext>
             </a:extLst>
           </p:cNvPr>
@@ -5016,7 +4941,7 @@
           <p:cNvPr id="4" name="">
             <a:extLst xmlns:a="http://schemas.openxmlformats.org/drawingml/2006/main">
               <a:ext uri="{FF2B5EF4-FFF2-40B4-BE49-F238E27FC236}">
-                <a16:creationId xmlns:a16="http://schemas.microsoft.com/office/drawing/2014/main" id="{EAA4147D-77D8-45B4-AB07-B9E5FCA73B94}"/>
+                <a16:creationId xmlns:a16="http://schemas.microsoft.com/office/drawing/2014/main" id="{F63F8304-6F68-4D37-A964-2878A120AEEF}"/>
               </a:ext>
             </a:extLst>
           </p:cNvPr>
@@ -5073,7 +4998,7 @@
           <p:cNvPr id="5" name="">
             <a:extLst xmlns:a="http://schemas.openxmlformats.org/drawingml/2006/main">
               <a:ext uri="{FF2B5EF4-FFF2-40B4-BE49-F238E27FC236}">
-                <a16:creationId xmlns:a16="http://schemas.microsoft.com/office/drawing/2014/main" id="{1B5B0AD1-EBC7-4B68-BBBF-A0B6FC20A6D6}"/>
+                <a16:creationId xmlns:a16="http://schemas.microsoft.com/office/drawing/2014/main" id="{7DC353DE-BE50-4E72-B03B-C5BD502D8760}"/>
               </a:ext>
             </a:extLst>
           </p:cNvPr>
@@ -5157,7 +5082,7 @@
           <p:cNvPr id="6" name="">
             <a:extLst xmlns:a="http://schemas.openxmlformats.org/drawingml/2006/main">
               <a:ext uri="{FF2B5EF4-FFF2-40B4-BE49-F238E27FC236}">
-                <a16:creationId xmlns:a16="http://schemas.microsoft.com/office/drawing/2014/main" id="{B612405E-EC2A-40AC-87BE-5A02AB8F41B1}"/>
+                <a16:creationId xmlns:a16="http://schemas.microsoft.com/office/drawing/2014/main" id="{9A422DB6-A5C1-4357-A9AA-75DBA242801D}"/>
               </a:ext>
             </a:extLst>
           </p:cNvPr>
@@ -5218,7 +5143,7 @@
           <p:cNvPr id="7" name="">
             <a:extLst xmlns:a="http://schemas.openxmlformats.org/drawingml/2006/main">
               <a:ext uri="{FF2B5EF4-FFF2-40B4-BE49-F238E27FC236}">
-                <a16:creationId xmlns:a16="http://schemas.microsoft.com/office/drawing/2014/main" id="{1BFA6E88-36D2-41FE-9C66-2EFCD4986477}"/>
+                <a16:creationId xmlns:a16="http://schemas.microsoft.com/office/drawing/2014/main" id="{7A8CA3F0-E39C-4676-BE70-CC6AF989F3C0}"/>
               </a:ext>
             </a:extLst>
           </p:cNvPr>
@@ -5352,7 +5277,7 @@
           <p:cNvPr id="10" name="">
             <a:extLst xmlns:a="http://schemas.openxmlformats.org/drawingml/2006/main">
               <a:ext uri="{FF2B5EF4-FFF2-40B4-BE49-F238E27FC236}">
-                <a16:creationId xmlns:a16="http://schemas.microsoft.com/office/drawing/2014/main" id="{A45D2A93-810E-4766-8B66-B6C1C621FC9E}"/>
+                <a16:creationId xmlns:a16="http://schemas.microsoft.com/office/drawing/2014/main" id="{1F5EBCC8-A1D5-4A5F-B8A3-77B4C691E8C7}"/>
               </a:ext>
             </a:extLst>
           </p:cNvPr>
@@ -5645,7 +5570,7 @@
           <p:cNvPr id="12" name="">
             <a:extLst xmlns:a="http://schemas.openxmlformats.org/drawingml/2006/main">
               <a:ext uri="{FF2B5EF4-FFF2-40B4-BE49-F238E27FC236}">
-                <a16:creationId xmlns:a16="http://schemas.microsoft.com/office/drawing/2014/main" id="{D1097816-3EE1-4FAA-915E-3669D677CCD2}"/>
+                <a16:creationId xmlns:a16="http://schemas.microsoft.com/office/drawing/2014/main" id="{6C4D64B8-C713-45C8-BBF5-2692E1944908}"/>
               </a:ext>
             </a:extLst>
           </p:cNvPr>
@@ -5700,7 +5625,7 @@
     </p:spTree>
     <p:extLst>
       <p:ext uri="{BB962C8B-B14F-4D97-AF65-F5344CB8AC3E}">
-        <p14:creationId xmlns:p14="http://schemas.microsoft.com/office/powerpoint/2010/main" val="1909616586"/>
+        <p14:creationId xmlns:p14="http://schemas.microsoft.com/office/powerpoint/2010/main" val="171491040"/>
       </p:ext>
     </p:extLst>
   </p:cSld>
@@ -5731,7 +5656,7 @@
           <p:cNvPr id="9" name="">
             <a:extLst xmlns:a="http://schemas.openxmlformats.org/drawingml/2006/main">
               <a:ext uri="{FF2B5EF4-FFF2-40B4-BE49-F238E27FC236}">
-                <a16:creationId xmlns:a16="http://schemas.microsoft.com/office/drawing/2014/main" id="{7BB8D7A7-1D0D-4203-B2FB-1591A46A3D49}"/>
+                <a16:creationId xmlns:a16="http://schemas.microsoft.com/office/drawing/2014/main" id="{1F7C30E4-DA30-46FD-A575-0D65F124FA2E}"/>
               </a:ext>
             </a:extLst>
           </p:cNvPr>
@@ -5788,7 +5713,7 @@
           <p:cNvPr id="2" name="">
             <a:extLst xmlns:a="http://schemas.openxmlformats.org/drawingml/2006/main">
               <a:ext uri="{FF2B5EF4-FFF2-40B4-BE49-F238E27FC236}">
-                <a16:creationId xmlns:a16="http://schemas.microsoft.com/office/drawing/2014/main" id="{F7800F54-F9AC-4AFF-A9D7-A4D6F4783B9F}"/>
+                <a16:creationId xmlns:a16="http://schemas.microsoft.com/office/drawing/2014/main" id="{394C30AD-70B0-46F2-A323-550D05375787}"/>
               </a:ext>
             </a:extLst>
           </p:cNvPr>
@@ -5845,7 +5770,7 @@
           <p:cNvPr id="3" name="">
             <a:extLst xmlns:a="http://schemas.openxmlformats.org/drawingml/2006/main">
               <a:ext uri="{FF2B5EF4-FFF2-40B4-BE49-F238E27FC236}">
-                <a16:creationId xmlns:a16="http://schemas.microsoft.com/office/drawing/2014/main" id="{087A001B-7EAA-4FF9-ABC4-3E0768AD3C59}"/>
+                <a16:creationId xmlns:a16="http://schemas.microsoft.com/office/drawing/2014/main" id="{57502E01-4129-464F-9DF1-B6A6906A0756}"/>
               </a:ext>
             </a:extLst>
           </p:cNvPr>
@@ -5902,7 +5827,7 @@
           <p:cNvPr id="4" name="">
             <a:extLst xmlns:a="http://schemas.openxmlformats.org/drawingml/2006/main">
               <a:ext uri="{FF2B5EF4-FFF2-40B4-BE49-F238E27FC236}">
-                <a16:creationId xmlns:a16="http://schemas.microsoft.com/office/drawing/2014/main" id="{C7830748-1543-4920-8080-B5B3AE62656C}"/>
+                <a16:creationId xmlns:a16="http://schemas.microsoft.com/office/drawing/2014/main" id="{9D4C14FB-155E-4B63-BA8B-630BBBADC4C0}"/>
               </a:ext>
             </a:extLst>
           </p:cNvPr>
@@ -5959,7 +5884,7 @@
           <p:cNvPr id="5" name="">
             <a:extLst xmlns:a="http://schemas.openxmlformats.org/drawingml/2006/main">
               <a:ext uri="{FF2B5EF4-FFF2-40B4-BE49-F238E27FC236}">
-                <a16:creationId xmlns:a16="http://schemas.microsoft.com/office/drawing/2014/main" id="{71169BE2-1BAE-4A4A-A113-4AAF7DD9BF42}"/>
+                <a16:creationId xmlns:a16="http://schemas.microsoft.com/office/drawing/2014/main" id="{E99A8972-D996-4DBE-B9DA-866C932F0E2B}"/>
               </a:ext>
             </a:extLst>
           </p:cNvPr>
@@ -6039,7 +5964,7 @@
           <p:cNvPr id="6" name="">
             <a:extLst xmlns:a="http://schemas.openxmlformats.org/drawingml/2006/main">
               <a:ext uri="{FF2B5EF4-FFF2-40B4-BE49-F238E27FC236}">
-                <a16:creationId xmlns:a16="http://schemas.microsoft.com/office/drawing/2014/main" id="{6F11DABD-28D5-40D0-9659-E96BACC961DE}"/>
+                <a16:creationId xmlns:a16="http://schemas.microsoft.com/office/drawing/2014/main" id="{A8604581-757F-472F-B82D-8E22A41C3C8B}"/>
               </a:ext>
             </a:extLst>
           </p:cNvPr>
@@ -6096,7 +6021,7 @@
           <p:cNvPr id="7" name="">
             <a:extLst xmlns:a="http://schemas.openxmlformats.org/drawingml/2006/main">
               <a:ext uri="{FF2B5EF4-FFF2-40B4-BE49-F238E27FC236}">
-                <a16:creationId xmlns:a16="http://schemas.microsoft.com/office/drawing/2014/main" id="{1ABA8F84-76E1-43F1-BA85-3D58BEF9B7B6}"/>
+                <a16:creationId xmlns:a16="http://schemas.microsoft.com/office/drawing/2014/main" id="{E454BEBA-E739-49F5-AB91-AE877AD13735}"/>
               </a:ext>
             </a:extLst>
           </p:cNvPr>
@@ -6381,7 +6306,7 @@
     </p:spTree>
     <p:extLst>
       <p:ext uri="{BB962C8B-B14F-4D97-AF65-F5344CB8AC3E}">
-        <p14:creationId xmlns:p14="http://schemas.microsoft.com/office/powerpoint/2010/main" val="1747341820"/>
+        <p14:creationId xmlns:p14="http://schemas.microsoft.com/office/powerpoint/2010/main" val="1246298868"/>
       </p:ext>
     </p:extLst>
   </p:cSld>
@@ -6412,7 +6337,7 @@
           <p:cNvPr id="7" name="">
             <a:extLst xmlns:a="http://schemas.openxmlformats.org/drawingml/2006/main">
               <a:ext uri="{FF2B5EF4-FFF2-40B4-BE49-F238E27FC236}">
-                <a16:creationId xmlns:a16="http://schemas.microsoft.com/office/drawing/2014/main" id="{695C5F18-B138-4F44-BD0E-98701514355C}"/>
+                <a16:creationId xmlns:a16="http://schemas.microsoft.com/office/drawing/2014/main" id="{AE1710C1-C96D-4883-A71E-5E91AB2E2E4B}"/>
               </a:ext>
             </a:extLst>
           </p:cNvPr>
@@ -6469,7 +6394,7 @@
           <p:cNvPr id="2" name="">
             <a:extLst xmlns:a="http://schemas.openxmlformats.org/drawingml/2006/main">
               <a:ext uri="{FF2B5EF4-FFF2-40B4-BE49-F238E27FC236}">
-                <a16:creationId xmlns:a16="http://schemas.microsoft.com/office/drawing/2014/main" id="{747E3E6D-EAB9-4D2B-9EF0-A5E0AFD5F62E}"/>
+                <a16:creationId xmlns:a16="http://schemas.microsoft.com/office/drawing/2014/main" id="{BA676DD2-77BE-4960-9CCF-DCCCC4D650A9}"/>
               </a:ext>
             </a:extLst>
           </p:cNvPr>
@@ -6526,7 +6451,7 @@
           <p:cNvPr id="3" name="">
             <a:extLst xmlns:a="http://schemas.openxmlformats.org/drawingml/2006/main">
               <a:ext uri="{FF2B5EF4-FFF2-40B4-BE49-F238E27FC236}">
-                <a16:creationId xmlns:a16="http://schemas.microsoft.com/office/drawing/2014/main" id="{458FB847-AC51-4432-9178-7BFAAD5A22C0}"/>
+                <a16:creationId xmlns:a16="http://schemas.microsoft.com/office/drawing/2014/main" id="{74995C4D-1DE2-4029-B1D9-DDF5045DC50C}"/>
               </a:ext>
             </a:extLst>
           </p:cNvPr>
@@ -6821,7 +6746,7 @@
           <p:cNvPr id="5" name="">
             <a:extLst xmlns:a="http://schemas.openxmlformats.org/drawingml/2006/main">
               <a:ext uri="{FF2B5EF4-FFF2-40B4-BE49-F238E27FC236}">
-                <a16:creationId xmlns:a16="http://schemas.microsoft.com/office/drawing/2014/main" id="{A3945520-1844-47EC-8506-A151AB08CDD6}"/>
+                <a16:creationId xmlns:a16="http://schemas.microsoft.com/office/drawing/2014/main" id="{6D2DBBA8-5C98-43BC-84C5-A014C6F3874D}"/>
               </a:ext>
             </a:extLst>
           </p:cNvPr>
@@ -6901,7 +6826,7 @@
           <p:cNvPr id="6" name="">
             <a:extLst xmlns:a="http://schemas.openxmlformats.org/drawingml/2006/main">
               <a:ext uri="{FF2B5EF4-FFF2-40B4-BE49-F238E27FC236}">
-                <a16:creationId xmlns:a16="http://schemas.microsoft.com/office/drawing/2014/main" id="{F8937F8F-969C-4CDE-B20C-08D780426CFE}"/>
+                <a16:creationId xmlns:a16="http://schemas.microsoft.com/office/drawing/2014/main" id="{3361CEBF-7DAB-47E0-BF8A-3A3638B907F6}"/>
               </a:ext>
             </a:extLst>
           </p:cNvPr>
@@ -6956,7 +6881,7 @@
     </p:spTree>
     <p:extLst>
       <p:ext uri="{BB962C8B-B14F-4D97-AF65-F5344CB8AC3E}">
-        <p14:creationId xmlns:p14="http://schemas.microsoft.com/office/powerpoint/2010/main" val="1126943669"/>
+        <p14:creationId xmlns:p14="http://schemas.microsoft.com/office/powerpoint/2010/main" val="1155768584"/>
       </p:ext>
     </p:extLst>
   </p:cSld>
@@ -6987,7 +6912,7 @@
           <p:cNvPr id="10" name="">
             <a:extLst xmlns:a="http://schemas.openxmlformats.org/drawingml/2006/main">
               <a:ext uri="{FF2B5EF4-FFF2-40B4-BE49-F238E27FC236}">
-                <a16:creationId xmlns:a16="http://schemas.microsoft.com/office/drawing/2014/main" id="{2BBACF9F-F502-4784-8D32-C34BD65C6D6B}"/>
+                <a16:creationId xmlns:a16="http://schemas.microsoft.com/office/drawing/2014/main" id="{E743F609-746B-47D3-A2AE-8C96D50FAC58}"/>
               </a:ext>
             </a:extLst>
           </p:cNvPr>
@@ -7044,7 +6969,7 @@
           <p:cNvPr id="2" name="">
             <a:extLst xmlns:a="http://schemas.openxmlformats.org/drawingml/2006/main">
               <a:ext uri="{FF2B5EF4-FFF2-40B4-BE49-F238E27FC236}">
-                <a16:creationId xmlns:a16="http://schemas.microsoft.com/office/drawing/2014/main" id="{BBCC311E-E987-4FC7-B90B-8A7878354342}"/>
+                <a16:creationId xmlns:a16="http://schemas.microsoft.com/office/drawing/2014/main" id="{818BB125-06AE-43E0-A28F-28FB1A9711F1}"/>
               </a:ext>
             </a:extLst>
           </p:cNvPr>
@@ -7101,7 +7026,7 @@
           <p:cNvPr id="3" name="">
             <a:extLst xmlns:a="http://schemas.openxmlformats.org/drawingml/2006/main">
               <a:ext uri="{FF2B5EF4-FFF2-40B4-BE49-F238E27FC236}">
-                <a16:creationId xmlns:a16="http://schemas.microsoft.com/office/drawing/2014/main" id="{4648ED80-4861-4822-871C-0EFC6D32E7BA}"/>
+                <a16:creationId xmlns:a16="http://schemas.microsoft.com/office/drawing/2014/main" id="{8ACC0460-5176-49A3-B622-F90D51D2C2DE}"/>
               </a:ext>
             </a:extLst>
           </p:cNvPr>
@@ -7158,7 +7083,7 @@
           <p:cNvPr id="4" name="">
             <a:extLst xmlns:a="http://schemas.openxmlformats.org/drawingml/2006/main">
               <a:ext uri="{FF2B5EF4-FFF2-40B4-BE49-F238E27FC236}">
-                <a16:creationId xmlns:a16="http://schemas.microsoft.com/office/drawing/2014/main" id="{1806DE64-69F7-4D1A-BDC6-F746E8A004AC}"/>
+                <a16:creationId xmlns:a16="http://schemas.microsoft.com/office/drawing/2014/main" id="{FB5E3A36-C794-486A-8732-FCA0C597CA3A}"/>
               </a:ext>
             </a:extLst>
           </p:cNvPr>
@@ -7215,7 +7140,7 @@
           <p:cNvPr id="5" name="">
             <a:extLst xmlns:a="http://schemas.openxmlformats.org/drawingml/2006/main">
               <a:ext uri="{FF2B5EF4-FFF2-40B4-BE49-F238E27FC236}">
-                <a16:creationId xmlns:a16="http://schemas.microsoft.com/office/drawing/2014/main" id="{94AC9A13-66E2-4C49-855F-8E1E1667B0F0}"/>
+                <a16:creationId xmlns:a16="http://schemas.microsoft.com/office/drawing/2014/main" id="{95A79F2D-6ABD-407D-A699-31B60B2C334F}"/>
               </a:ext>
             </a:extLst>
           </p:cNvPr>
@@ -7295,7 +7220,7 @@
           <p:cNvPr id="6" name="">
             <a:extLst xmlns:a="http://schemas.openxmlformats.org/drawingml/2006/main">
               <a:ext uri="{FF2B5EF4-FFF2-40B4-BE49-F238E27FC236}">
-                <a16:creationId xmlns:a16="http://schemas.microsoft.com/office/drawing/2014/main" id="{928F79EC-79C4-4ECE-9358-6341A59C38CC}"/>
+                <a16:creationId xmlns:a16="http://schemas.microsoft.com/office/drawing/2014/main" id="{5AFB34B5-29D2-49AE-8C64-5AC54BF0EAF1}"/>
               </a:ext>
             </a:extLst>
           </p:cNvPr>
@@ -7324,7 +7249,7 @@
           <p:cNvPr id="7" name="">
             <a:extLst xmlns:a="http://schemas.openxmlformats.org/drawingml/2006/main">
               <a:ext uri="{FF2B5EF4-FFF2-40B4-BE49-F238E27FC236}">
-                <a16:creationId xmlns:a16="http://schemas.microsoft.com/office/drawing/2014/main" id="{5D9FC106-78F0-4F7D-831A-6E150C7D46D6}"/>
+                <a16:creationId xmlns:a16="http://schemas.microsoft.com/office/drawing/2014/main" id="{2F6DC42F-F4FE-4219-809C-22B20D22EF61}"/>
               </a:ext>
             </a:extLst>
           </p:cNvPr>
@@ -7381,7 +7306,7 @@
           <p:cNvPr id="8" name="">
             <a:extLst xmlns:a="http://schemas.openxmlformats.org/drawingml/2006/main">
               <a:ext uri="{FF2B5EF4-FFF2-40B4-BE49-F238E27FC236}">
-                <a16:creationId xmlns:a16="http://schemas.microsoft.com/office/drawing/2014/main" id="{8E2D1F09-0FD2-4716-9934-C5D20FFACAF6}"/>
+                <a16:creationId xmlns:a16="http://schemas.microsoft.com/office/drawing/2014/main" id="{46BBFAF6-490B-4D8D-9F3A-EB94276F4E80}"/>
               </a:ext>
             </a:extLst>
           </p:cNvPr>
@@ -7438,7 +7363,7 @@
           <p:cNvPr id="9" name="">
             <a:extLst xmlns:a="http://schemas.openxmlformats.org/drawingml/2006/main">
               <a:ext uri="{FF2B5EF4-FFF2-40B4-BE49-F238E27FC236}">
-                <a16:creationId xmlns:a16="http://schemas.microsoft.com/office/drawing/2014/main" id="{2B568D7B-E69F-458F-91FD-1D8EF176B216}"/>
+                <a16:creationId xmlns:a16="http://schemas.microsoft.com/office/drawing/2014/main" id="{686D544B-B4CD-4897-B73D-D93F0B3E7F8E}"/>
               </a:ext>
             </a:extLst>
           </p:cNvPr>
@@ -7493,7 +7418,7 @@
     </p:spTree>
     <p:extLst>
       <p:ext uri="{BB962C8B-B14F-4D97-AF65-F5344CB8AC3E}">
-        <p14:creationId xmlns:p14="http://schemas.microsoft.com/office/powerpoint/2010/main" val="1149145310"/>
+        <p14:creationId xmlns:p14="http://schemas.microsoft.com/office/powerpoint/2010/main" val="1304344453"/>
       </p:ext>
     </p:extLst>
   </p:cSld>
@@ -7524,7 +7449,7 @@
           <p:cNvPr id="8" name="">
             <a:extLst xmlns:a="http://schemas.openxmlformats.org/drawingml/2006/main">
               <a:ext uri="{FF2B5EF4-FFF2-40B4-BE49-F238E27FC236}">
-                <a16:creationId xmlns:a16="http://schemas.microsoft.com/office/drawing/2014/main" id="{B99D6723-1931-44F3-9992-85F27DFCA3D3}"/>
+                <a16:creationId xmlns:a16="http://schemas.microsoft.com/office/drawing/2014/main" id="{2904ADFA-06F0-4E8B-8403-CD04B631350F}"/>
               </a:ext>
             </a:extLst>
           </p:cNvPr>
@@ -7581,7 +7506,7 @@
           <p:cNvPr id="2" name="">
             <a:extLst xmlns:a="http://schemas.openxmlformats.org/drawingml/2006/main">
               <a:ext uri="{FF2B5EF4-FFF2-40B4-BE49-F238E27FC236}">
-                <a16:creationId xmlns:a16="http://schemas.microsoft.com/office/drawing/2014/main" id="{A4EF684B-EF93-4831-A627-F6437D2B6783}"/>
+                <a16:creationId xmlns:a16="http://schemas.microsoft.com/office/drawing/2014/main" id="{1BF56291-845F-41C0-9717-365516CE930C}"/>
               </a:ext>
             </a:extLst>
           </p:cNvPr>
@@ -7638,7 +7563,7 @@
           <p:cNvPr id="3" name="">
             <a:extLst xmlns:a="http://schemas.openxmlformats.org/drawingml/2006/main">
               <a:ext uri="{FF2B5EF4-FFF2-40B4-BE49-F238E27FC236}">
-                <a16:creationId xmlns:a16="http://schemas.microsoft.com/office/drawing/2014/main" id="{A2B3D0CF-60B9-42EC-8159-656E9700BCC3}"/>
+                <a16:creationId xmlns:a16="http://schemas.microsoft.com/office/drawing/2014/main" id="{833A5581-2430-49C5-822F-F3ECC2FF2B75}"/>
               </a:ext>
             </a:extLst>
           </p:cNvPr>
@@ -7695,7 +7620,7 @@
           <p:cNvPr id="4" name="">
             <a:extLst xmlns:a="http://schemas.openxmlformats.org/drawingml/2006/main">
               <a:ext uri="{FF2B5EF4-FFF2-40B4-BE49-F238E27FC236}">
-                <a16:creationId xmlns:a16="http://schemas.microsoft.com/office/drawing/2014/main" id="{F6A7C095-227B-4166-961B-05D978BC1011}"/>
+                <a16:creationId xmlns:a16="http://schemas.microsoft.com/office/drawing/2014/main" id="{A7B488D8-8CAA-45B7-B3CB-EDB02CB44418}"/>
               </a:ext>
             </a:extLst>
           </p:cNvPr>
@@ -7752,7 +7677,7 @@
           <p:cNvPr id="5" name="">
             <a:extLst xmlns:a="http://schemas.openxmlformats.org/drawingml/2006/main">
               <a:ext uri="{FF2B5EF4-FFF2-40B4-BE49-F238E27FC236}">
-                <a16:creationId xmlns:a16="http://schemas.microsoft.com/office/drawing/2014/main" id="{94614A01-1DC1-4CC5-A599-5F86EE9E5A96}"/>
+                <a16:creationId xmlns:a16="http://schemas.microsoft.com/office/drawing/2014/main" id="{7EDBE9F1-32FA-47ED-B77F-396AA223BC9D}"/>
               </a:ext>
             </a:extLst>
           </p:cNvPr>
@@ -7809,7 +7734,7 @@
           <p:cNvPr id="6" name="">
             <a:extLst xmlns:a="http://schemas.openxmlformats.org/drawingml/2006/main">
               <a:ext uri="{FF2B5EF4-FFF2-40B4-BE49-F238E27FC236}">
-                <a16:creationId xmlns:a16="http://schemas.microsoft.com/office/drawing/2014/main" id="{55933123-8545-4C59-9D5D-4A5ABC1C1A97}"/>
+                <a16:creationId xmlns:a16="http://schemas.microsoft.com/office/drawing/2014/main" id="{CB697DF7-C04E-4293-B67B-8A5D5CFD271C}"/>
               </a:ext>
             </a:extLst>
           </p:cNvPr>
@@ -7856,7 +7781,7 @@
               <a:t>Histology: </a:t>
             </a:r>
             <a:r>
-              <a:t>Microscopic examination reveals injury and inflammation and supports the recorded diagnosis.</a:t>
+              <a:t>Microscopic examination reveals injury and inflammation that can support a rejection diagnosis.</a:t>
             </a:r>
           </a:p>
         </p:txBody>
@@ -7866,7 +7791,7 @@
           <p:cNvPr id="7" name="">
             <a:extLst xmlns:a="http://schemas.openxmlformats.org/drawingml/2006/main">
               <a:ext uri="{FF2B5EF4-FFF2-40B4-BE49-F238E27FC236}">
-                <a16:creationId xmlns:a16="http://schemas.microsoft.com/office/drawing/2014/main" id="{5045A4F9-F7A4-44DA-A4B1-6D4EEF763757}"/>
+                <a16:creationId xmlns:a16="http://schemas.microsoft.com/office/drawing/2014/main" id="{7E004F19-B81B-4144-A52C-A96B85BE0EBE}"/>
               </a:ext>
             </a:extLst>
           </p:cNvPr>
@@ -7878,7 +7803,7 @@
         <p:spPr>
           <a:xfrm xmlns:a="http://schemas.openxmlformats.org/drawingml/2006/main">
             <a:off x="1057275" y="4695825"/>
-            <a:ext cx="10525125" cy="876300"/>
+            <a:ext cx="10525125" cy="1104900"/>
           </a:xfrm>
           <a:prstGeom xmlns:a="http://schemas.openxmlformats.org/drawingml/2006/main" prst="rect">
             <a:avLst/>
@@ -7913,7 +7838,7 @@
               <a:t>Molecular measurements: </a:t>
             </a:r>
             <a:r>
-              <a:t>Counts of selected RNA types provide the model’s inputs.</a:t>
+              <a:t>Counts of selected RNA types reflect gene activity and the mix of cells in the tissue.</a:t>
             </a:r>
           </a:p>
         </p:txBody>
@@ -7921,7 +7846,7 @@
     </p:spTree>
     <p:extLst>
       <p:ext uri="{BB962C8B-B14F-4D97-AF65-F5344CB8AC3E}">
-        <p14:creationId xmlns:p14="http://schemas.microsoft.com/office/powerpoint/2010/main" val="2093742586"/>
+        <p14:creationId xmlns:p14="http://schemas.microsoft.com/office/powerpoint/2010/main" val="1079463213"/>
       </p:ext>
     </p:extLst>
   </p:cSld>
@@ -7949,10 +7874,10 @@
       </p:grpSpPr>
       <p:sp>
         <p:nvSpPr>
-          <p:cNvPr id="12" name="">
-            <a:extLst xmlns:a="http://schemas.openxmlformats.org/drawingml/2006/main">
-              <a:ext uri="{FF2B5EF4-FFF2-40B4-BE49-F238E27FC236}">
-                <a16:creationId xmlns:a16="http://schemas.microsoft.com/office/drawing/2014/main" id="{5BCAD1E5-69FC-469F-A3A7-49A3480A22B7}"/>
+          <p:cNvPr id="9" name="">
+            <a:extLst xmlns:a="http://schemas.openxmlformats.org/drawingml/2006/main">
+              <a:ext uri="{FF2B5EF4-FFF2-40B4-BE49-F238E27FC236}">
+                <a16:creationId xmlns:a16="http://schemas.microsoft.com/office/drawing/2014/main" id="{8A12B356-626B-4EBE-9F7C-DF1023FCE5BA}"/>
               </a:ext>
             </a:extLst>
           </p:cNvPr>
@@ -8009,7 +7934,7 @@
           <p:cNvPr id="2" name="">
             <a:extLst xmlns:a="http://schemas.openxmlformats.org/drawingml/2006/main">
               <a:ext uri="{FF2B5EF4-FFF2-40B4-BE49-F238E27FC236}">
-                <a16:creationId xmlns:a16="http://schemas.microsoft.com/office/drawing/2014/main" id="{DDE31E13-DAD6-45AE-8B61-36A7F0B8B08F}"/>
+                <a16:creationId xmlns:a16="http://schemas.microsoft.com/office/drawing/2014/main" id="{7C7235CB-D6B6-418B-A12A-CCDF7A1DA6FC}"/>
               </a:ext>
             </a:extLst>
           </p:cNvPr>
@@ -8056,7 +7981,7 @@
                 <a:ea typeface="Arial"/>
                 <a:cs typeface="Arial"/>
               </a:rPr>
-              <a:t>Source: Banff reference guide (updated Apr 2026).</a:t>
+              <a:t>Sources: Banff reference guide (Apr 2026); Nankivell et al. (2019)</a:t>
             </a:r>
           </a:p>
         </p:txBody>
@@ -8066,7 +7991,7 @@
           <p:cNvPr id="3" name="">
             <a:extLst xmlns:a="http://schemas.openxmlformats.org/drawingml/2006/main">
               <a:ext uri="{FF2B5EF4-FFF2-40B4-BE49-F238E27FC236}">
-                <a16:creationId xmlns:a16="http://schemas.microsoft.com/office/drawing/2014/main" id="{9E8CF440-9AEA-47AC-824D-CE2FDEEC94A3}"/>
+                <a16:creationId xmlns:a16="http://schemas.microsoft.com/office/drawing/2014/main" id="{E5FAC02F-E279-4894-BF27-B544964826FC}"/>
               </a:ext>
             </a:extLst>
           </p:cNvPr>
@@ -8123,7 +8048,7 @@
           <p:cNvPr id="4" name="">
             <a:extLst xmlns:a="http://schemas.openxmlformats.org/drawingml/2006/main">
               <a:ext uri="{FF2B5EF4-FFF2-40B4-BE49-F238E27FC236}">
-                <a16:creationId xmlns:a16="http://schemas.microsoft.com/office/drawing/2014/main" id="{2BCF21F6-5957-4DE6-91D3-EEA6C3B9038C}"/>
+                <a16:creationId xmlns:a16="http://schemas.microsoft.com/office/drawing/2014/main" id="{00527E65-8B05-4B23-84C6-3DE165EBE2FD}"/>
               </a:ext>
             </a:extLst>
           </p:cNvPr>
@@ -8174,7 +8099,7 @@
                 <a:ea typeface="Arial"/>
                 <a:cs typeface="Arial"/>
               </a:rPr>
-              <a:t>Sometimes the microscopic findings are borderline or conflict with other clinical evidence.</a:t>
+              <a:t>Sometimes the histology findings are ambiguous.</a:t>
             </a:r>
           </a:p>
         </p:txBody>
@@ -8184,7 +8109,7 @@
           <p:cNvPr id="5" name="">
             <a:extLst xmlns:a="http://schemas.openxmlformats.org/drawingml/2006/main">
               <a:ext uri="{FF2B5EF4-FFF2-40B4-BE49-F238E27FC236}">
-                <a16:creationId xmlns:a16="http://schemas.microsoft.com/office/drawing/2014/main" id="{05D71D5F-07D0-4174-82D2-64C7AC7EE66C}"/>
+                <a16:creationId xmlns:a16="http://schemas.microsoft.com/office/drawing/2014/main" id="{56B91C20-C85D-46EF-B4EC-D04314A793DD}"/>
               </a:ext>
             </a:extLst>
           </p:cNvPr>
@@ -8196,7 +8121,7 @@
         <p:spPr>
           <a:xfrm xmlns:a="http://schemas.openxmlformats.org/drawingml/2006/main">
             <a:off x="895350" y="2571750"/>
-            <a:ext cx="10687050" cy="1285875"/>
+            <a:ext cx="10687050" cy="1762125"/>
           </a:xfrm>
           <a:prstGeom xmlns:a="http://schemas.openxmlformats.org/drawingml/2006/main" prst="rect">
             <a:avLst/>
@@ -8216,7 +8141,7 @@
           <p:cNvPr id="6" name="">
             <a:extLst xmlns:a="http://schemas.openxmlformats.org/drawingml/2006/main">
               <a:ext uri="{FF2B5EF4-FFF2-40B4-BE49-F238E27FC236}">
-                <a16:creationId xmlns:a16="http://schemas.microsoft.com/office/drawing/2014/main" id="{8FF8B260-DBF6-49F6-924C-C485652B452A}"/>
+                <a16:creationId xmlns:a16="http://schemas.microsoft.com/office/drawing/2014/main" id="{EFAF72B7-FE80-4E57-BE62-DF50050F3E7B}"/>
               </a:ext>
             </a:extLst>
           </p:cNvPr>
@@ -8263,7 +8188,7 @@
                 <a:ea typeface="Arial"/>
                 <a:cs typeface="Arial"/>
               </a:rPr>
-              <a:t>Hypothetical Example:</a:t>
+              <a:t>Example:</a:t>
             </a:r>
           </a:p>
         </p:txBody>
@@ -8273,7 +8198,7 @@
           <p:cNvPr id="7" name="">
             <a:extLst xmlns:a="http://schemas.openxmlformats.org/drawingml/2006/main">
               <a:ext uri="{FF2B5EF4-FFF2-40B4-BE49-F238E27FC236}">
-                <a16:creationId xmlns:a16="http://schemas.microsoft.com/office/drawing/2014/main" id="{60508F05-A7B6-4131-86D6-4D90BC41FA02}"/>
+                <a16:creationId xmlns:a16="http://schemas.microsoft.com/office/drawing/2014/main" id="{9030F6FF-CBBB-4749-B0E8-D4E9041724A9}"/>
               </a:ext>
             </a:extLst>
           </p:cNvPr>
@@ -8285,7 +8210,7 @@
         <p:spPr>
           <a:xfrm xmlns:a="http://schemas.openxmlformats.org/drawingml/2006/main">
             <a:off x="1076325" y="3028950"/>
-            <a:ext cx="10325100" cy="762000"/>
+            <a:ext cx="10325100" cy="1238250"/>
           </a:xfrm>
           <a:prstGeom xmlns:a="http://schemas.openxmlformats.org/drawingml/2006/main" prst="rect">
             <a:avLst/>
@@ -8320,7 +8245,7 @@
                 <a:ea typeface="Arial"/>
                 <a:cs typeface="Arial"/>
               </a:rPr>
-              <a:t>A biopsy shows mild inflammation, but the microscopic findings do not clearly establish rejection.</a:t>
+              <a:t>A biopsy shows mild inflammation, but not enough to diagnose rejection. In a study of 146 borderline diagnoses, inflammation disappeared in some patients. Others later developed acute rejection.</a:t>
             </a:r>
           </a:p>
         </p:txBody>
@@ -8330,19 +8255,19 @@
           <p:cNvPr id="8" name="">
             <a:extLst xmlns:a="http://schemas.openxmlformats.org/drawingml/2006/main">
               <a:ext uri="{FF2B5EF4-FFF2-40B4-BE49-F238E27FC236}">
-                <a16:creationId xmlns:a16="http://schemas.microsoft.com/office/drawing/2014/main" id="{30409B41-D76A-43D8-97F8-88C17509C075}"/>
-              </a:ext>
-            </a:extLst>
-          </p:cNvPr>
-          <p:cNvSpPr>
-            <a:spLocks xmlns:a="http://schemas.openxmlformats.org/drawingml/2006/main" noGrp="1"/>
-          </p:cNvSpPr>
-          <p:nvPr/>
-        </p:nvSpPr>
-        <p:spPr>
-          <a:xfrm xmlns:a="http://schemas.openxmlformats.org/drawingml/2006/main">
-            <a:off x="609600" y="4048125"/>
-            <a:ext cx="10972800" cy="676275"/>
+                <a16:creationId xmlns:a16="http://schemas.microsoft.com/office/drawing/2014/main" id="{4B07F9B3-3274-4031-BCF6-3B8C633E3525}"/>
+              </a:ext>
+            </a:extLst>
+          </p:cNvPr>
+          <p:cNvSpPr>
+            <a:spLocks xmlns:a="http://schemas.openxmlformats.org/drawingml/2006/main" noGrp="1"/>
+          </p:cNvSpPr>
+          <p:nvPr/>
+        </p:nvSpPr>
+        <p:spPr>
+          <a:xfrm xmlns:a="http://schemas.openxmlformats.org/drawingml/2006/main">
+            <a:off x="609600" y="4591050"/>
+            <a:ext cx="10972800" cy="1504950"/>
           </a:xfrm>
           <a:prstGeom xmlns:a="http://schemas.openxmlformats.org/drawingml/2006/main" prst="rect">
             <a:avLst/>
@@ -8381,153 +8306,7 @@
                 <a:ea typeface="Arial"/>
                 <a:cs typeface="Arial"/>
               </a:rPr>
-              <a:t>I used RNA to classify recorded diagnoses in this personal project.</a:t>
-            </a:r>
-          </a:p>
-        </p:txBody>
-      </p:sp>
-      <p:sp>
-        <p:nvSpPr>
-          <p:cNvPr id="9" name="">
-            <a:extLst xmlns:a="http://schemas.openxmlformats.org/drawingml/2006/main">
-              <a:ext uri="{FF2B5EF4-FFF2-40B4-BE49-F238E27FC236}">
-                <a16:creationId xmlns:a16="http://schemas.microsoft.com/office/drawing/2014/main" id="{16E31919-7E1B-4F84-BC98-42EF93B2A4C9}"/>
-              </a:ext>
-            </a:extLst>
-          </p:cNvPr>
-          <p:cNvSpPr>
-            <a:spLocks xmlns:a="http://schemas.openxmlformats.org/drawingml/2006/main" noGrp="1"/>
-          </p:cNvSpPr>
-          <p:nvPr/>
-        </p:nvSpPr>
-        <p:spPr>
-          <a:xfrm xmlns:a="http://schemas.openxmlformats.org/drawingml/2006/main">
-            <a:off x="895350" y="4829175"/>
-            <a:ext cx="10687050" cy="1285875"/>
-          </a:xfrm>
-          <a:prstGeom xmlns:a="http://schemas.openxmlformats.org/drawingml/2006/main" prst="rect">
-            <a:avLst/>
-          </a:prstGeom>
-          <a:solidFill xmlns:a="http://schemas.openxmlformats.org/drawingml/2006/main">
-            <a:srgbClr val="E4EFEB"/>
-          </a:solidFill>
-          <a:ln xmlns:a="http://schemas.openxmlformats.org/drawingml/2006/main" w="9525">
-            <a:solidFill>
-              <a:srgbClr val="CEDBD7"/>
-            </a:solidFill>
-          </a:ln>
-        </p:spPr>
-      </p:sp>
-      <p:sp>
-        <p:nvSpPr>
-          <p:cNvPr id="10" name="">
-            <a:extLst xmlns:a="http://schemas.openxmlformats.org/drawingml/2006/main">
-              <a:ext uri="{FF2B5EF4-FFF2-40B4-BE49-F238E27FC236}">
-                <a16:creationId xmlns:a16="http://schemas.microsoft.com/office/drawing/2014/main" id="{C31F9090-525F-4855-9FC1-25E1D82ECA51}"/>
-              </a:ext>
-            </a:extLst>
-          </p:cNvPr>
-          <p:cNvSpPr>
-            <a:spLocks xmlns:a="http://schemas.openxmlformats.org/drawingml/2006/main" noGrp="1"/>
-          </p:cNvSpPr>
-          <p:nvPr/>
-        </p:nvSpPr>
-        <p:spPr>
-          <a:xfrm xmlns:a="http://schemas.openxmlformats.org/drawingml/2006/main">
-            <a:off x="1076325" y="4914900"/>
-            <a:ext cx="10325100" cy="352425"/>
-          </a:xfrm>
-          <a:prstGeom xmlns:a="http://schemas.openxmlformats.org/drawingml/2006/main" prst="rect">
-            <a:avLst/>
-          </a:prstGeom>
-          <a:noFill xmlns:a="http://schemas.openxmlformats.org/drawingml/2006/main"/>
-          <a:ln xmlns:a="http://schemas.openxmlformats.org/drawingml/2006/main" w="0">
-            <a:noFill/>
-          </a:ln>
-        </p:spPr>
-        <p:txBody>
-          <a:bodyPr xmlns:a="http://schemas.openxmlformats.org/drawingml/2006/main" anchor="ctr">
-            <a:noAutofit/>
-          </a:bodyPr>
-          <a:lstStyle xmlns:a="http://schemas.openxmlformats.org/drawingml/2006/main"/>
-          <a:p xmlns:a="http://schemas.openxmlformats.org/drawingml/2006/main">
-            <a:pPr algn="l">
-              <a:defRPr sz="2100" b="1">
-                <a:solidFill>
-                  <a:srgbClr val="007C78"/>
-                </a:solidFill>
-                <a:latin typeface="Arial"/>
-                <a:ea typeface="Arial"/>
-                <a:cs typeface="Arial"/>
-              </a:defRPr>
-            </a:pPr>
-            <a:r>
-              <a:rPr sz="2100" b="1">
-                <a:solidFill>
-                  <a:srgbClr val="007C78"/>
-                </a:solidFill>
-                <a:latin typeface="Arial"/>
-                <a:ea typeface="Arial"/>
-                <a:cs typeface="Arial"/>
-              </a:rPr>
-              <a:t>Hypothetical Example, continued:</a:t>
-            </a:r>
-          </a:p>
-        </p:txBody>
-      </p:sp>
-      <p:sp>
-        <p:nvSpPr>
-          <p:cNvPr id="11" name="">
-            <a:extLst xmlns:a="http://schemas.openxmlformats.org/drawingml/2006/main">
-              <a:ext uri="{FF2B5EF4-FFF2-40B4-BE49-F238E27FC236}">
-                <a16:creationId xmlns:a16="http://schemas.microsoft.com/office/drawing/2014/main" id="{F0EE0468-F29C-4F01-8FD4-3B97E531DBE8}"/>
-              </a:ext>
-            </a:extLst>
-          </p:cNvPr>
-          <p:cNvSpPr>
-            <a:spLocks xmlns:a="http://schemas.openxmlformats.org/drawingml/2006/main" noGrp="1"/>
-          </p:cNvSpPr>
-          <p:nvPr/>
-        </p:nvSpPr>
-        <p:spPr>
-          <a:xfrm xmlns:a="http://schemas.openxmlformats.org/drawingml/2006/main">
-            <a:off x="1076325" y="5286375"/>
-            <a:ext cx="10325100" cy="762000"/>
-          </a:xfrm>
-          <a:prstGeom xmlns:a="http://schemas.openxmlformats.org/drawingml/2006/main" prst="rect">
-            <a:avLst/>
-          </a:prstGeom>
-          <a:noFill xmlns:a="http://schemas.openxmlformats.org/drawingml/2006/main"/>
-          <a:ln xmlns:a="http://schemas.openxmlformats.org/drawingml/2006/main" w="0">
-            <a:noFill/>
-          </a:ln>
-        </p:spPr>
-        <p:txBody>
-          <a:bodyPr xmlns:a="http://schemas.openxmlformats.org/drawingml/2006/main" anchor="ctr">
-            <a:noAutofit/>
-          </a:bodyPr>
-          <a:lstStyle xmlns:a="http://schemas.openxmlformats.org/drawingml/2006/main"/>
-          <a:p xmlns:a="http://schemas.openxmlformats.org/drawingml/2006/main">
-            <a:pPr algn="l">
-              <a:defRPr sz="2250" b="0">
-                <a:solidFill>
-                  <a:srgbClr val="16343E"/>
-                </a:solidFill>
-                <a:latin typeface="Arial"/>
-                <a:ea typeface="Arial"/>
-                <a:cs typeface="Arial"/>
-              </a:defRPr>
-            </a:pPr>
-            <a:r>
-              <a:rPr sz="2250" b="0">
-                <a:solidFill>
-                  <a:srgbClr val="16343E"/>
-                </a:solidFill>
-                <a:latin typeface="Arial"/>
-                <a:ea typeface="Arial"/>
-                <a:cs typeface="Arial"/>
-              </a:rPr>
-              <a:t>A high rejection score could add evidence for specialist review of this biopsy.</a:t>
+              <a:t>As a step towards potentially helping resolve ambiguous biopsies, I used RNA counts to classify recorded diagnoses. A high rejection score could add evidence for specialist review.</a:t>
             </a:r>
           </a:p>
         </p:txBody>
@@ -8535,7 +8314,7 @@
     </p:spTree>
     <p:extLst>
       <p:ext uri="{BB962C8B-B14F-4D97-AF65-F5344CB8AC3E}">
-        <p14:creationId xmlns:p14="http://schemas.microsoft.com/office/powerpoint/2010/main" val="272483165"/>
+        <p14:creationId xmlns:p14="http://schemas.microsoft.com/office/powerpoint/2010/main" val="2000796435"/>
       </p:ext>
     </p:extLst>
   </p:cSld>
@@ -8566,7 +8345,7 @@
           <p:cNvPr id="13" name="">
             <a:extLst xmlns:a="http://schemas.openxmlformats.org/drawingml/2006/main">
               <a:ext uri="{FF2B5EF4-FFF2-40B4-BE49-F238E27FC236}">
-                <a16:creationId xmlns:a16="http://schemas.microsoft.com/office/drawing/2014/main" id="{97FF155C-8250-470B-B870-F85648A255A3}"/>
+                <a16:creationId xmlns:a16="http://schemas.microsoft.com/office/drawing/2014/main" id="{EF58B68E-C5D6-4586-9592-6D86E2C05028}"/>
               </a:ext>
             </a:extLst>
           </p:cNvPr>
@@ -8623,7 +8402,7 @@
           <p:cNvPr id="2" name="">
             <a:extLst xmlns:a="http://schemas.openxmlformats.org/drawingml/2006/main">
               <a:ext uri="{FF2B5EF4-FFF2-40B4-BE49-F238E27FC236}">
-                <a16:creationId xmlns:a16="http://schemas.microsoft.com/office/drawing/2014/main" id="{E32FE8A9-BD90-4E1F-90BF-D0D1176234D3}"/>
+                <a16:creationId xmlns:a16="http://schemas.microsoft.com/office/drawing/2014/main" id="{74C4918A-3C06-4D7F-A2CC-196F88328092}"/>
               </a:ext>
             </a:extLst>
           </p:cNvPr>
@@ -8680,7 +8459,7 @@
           <p:cNvPr id="3" name="">
             <a:extLst xmlns:a="http://schemas.openxmlformats.org/drawingml/2006/main">
               <a:ext uri="{FF2B5EF4-FFF2-40B4-BE49-F238E27FC236}">
-                <a16:creationId xmlns:a16="http://schemas.microsoft.com/office/drawing/2014/main" id="{E5373CF9-2422-4D87-A9A7-B59E1AC4A791}"/>
+                <a16:creationId xmlns:a16="http://schemas.microsoft.com/office/drawing/2014/main" id="{DBC3EF6B-9E35-493D-BD80-E77D068A4C21}"/>
               </a:ext>
             </a:extLst>
           </p:cNvPr>
@@ -8760,7 +8539,7 @@
           <p:cNvPr id="4" name="">
             <a:extLst xmlns:a="http://schemas.openxmlformats.org/drawingml/2006/main">
               <a:ext uri="{FF2B5EF4-FFF2-40B4-BE49-F238E27FC236}">
-                <a16:creationId xmlns:a16="http://schemas.microsoft.com/office/drawing/2014/main" id="{07A3A6C8-3903-482B-A9AD-5B5A29AFAF67}"/>
+                <a16:creationId xmlns:a16="http://schemas.microsoft.com/office/drawing/2014/main" id="{023F0052-4C25-4AE0-B94E-DC78DBDA9EA3}"/>
               </a:ext>
             </a:extLst>
           </p:cNvPr>
@@ -8840,7 +8619,7 @@
           <p:cNvPr id="5" name="">
             <a:extLst xmlns:a="http://schemas.openxmlformats.org/drawingml/2006/main">
               <a:ext uri="{FF2B5EF4-FFF2-40B4-BE49-F238E27FC236}">
-                <a16:creationId xmlns:a16="http://schemas.microsoft.com/office/drawing/2014/main" id="{4A0DC286-294A-4672-B4AD-B9FABB78EA25}"/>
+                <a16:creationId xmlns:a16="http://schemas.microsoft.com/office/drawing/2014/main" id="{B118EF41-B71E-4372-BCCE-8D1C5DCD2969}"/>
               </a:ext>
             </a:extLst>
           </p:cNvPr>
@@ -8869,7 +8648,7 @@
           <p:cNvPr id="6" name="">
             <a:extLst xmlns:a="http://schemas.openxmlformats.org/drawingml/2006/main">
               <a:ext uri="{FF2B5EF4-FFF2-40B4-BE49-F238E27FC236}">
-                <a16:creationId xmlns:a16="http://schemas.microsoft.com/office/drawing/2014/main" id="{41C3D0AC-14D3-4241-BDA2-BBCB6B94F0F7}"/>
+                <a16:creationId xmlns:a16="http://schemas.microsoft.com/office/drawing/2014/main" id="{4AB1D88E-C98E-4C9B-A3D5-D63E1D8F235F}"/>
               </a:ext>
             </a:extLst>
           </p:cNvPr>
@@ -8949,7 +8728,7 @@
           <p:cNvPr id="7" name="">
             <a:extLst xmlns:a="http://schemas.openxmlformats.org/drawingml/2006/main">
               <a:ext uri="{FF2B5EF4-FFF2-40B4-BE49-F238E27FC236}">
-                <a16:creationId xmlns:a16="http://schemas.microsoft.com/office/drawing/2014/main" id="{668BEF84-BD2B-4BC6-9457-00DA6D65ED29}"/>
+                <a16:creationId xmlns:a16="http://schemas.microsoft.com/office/drawing/2014/main" id="{874C97DE-0B13-4B9E-8166-7676B38F55B0}"/>
               </a:ext>
             </a:extLst>
           </p:cNvPr>
@@ -9052,7 +8831,7 @@
           <p:cNvPr id="8" name="">
             <a:extLst xmlns:a="http://schemas.openxmlformats.org/drawingml/2006/main">
               <a:ext uri="{FF2B5EF4-FFF2-40B4-BE49-F238E27FC236}">
-                <a16:creationId xmlns:a16="http://schemas.microsoft.com/office/drawing/2014/main" id="{2D744DF8-207F-470E-ADE1-3DA2E822DBE9}"/>
+                <a16:creationId xmlns:a16="http://schemas.microsoft.com/office/drawing/2014/main" id="{C91AF1B1-7A51-4C7D-98BA-61A51F2D8586}"/>
               </a:ext>
             </a:extLst>
           </p:cNvPr>
@@ -9081,18 +8860,18 @@
           <p:cNvPr id="9" name="">
             <a:extLst xmlns:a="http://schemas.openxmlformats.org/drawingml/2006/main">
               <a:ext uri="{FF2B5EF4-FFF2-40B4-BE49-F238E27FC236}">
-                <a16:creationId xmlns:a16="http://schemas.microsoft.com/office/drawing/2014/main" id="{56F62DAC-0CBC-4F70-9E62-47099600B34B}"/>
-              </a:ext>
-            </a:extLst>
-          </p:cNvPr>
-          <p:cNvSpPr>
-            <a:spLocks xmlns:a="http://schemas.openxmlformats.org/drawingml/2006/main" noGrp="1"/>
-          </p:cNvSpPr>
-          <p:nvPr/>
-        </p:nvSpPr>
-        <p:spPr>
-          <a:xfrm xmlns:a="http://schemas.openxmlformats.org/drawingml/2006/main">
-            <a:off x="609600" y="3829050"/>
+                <a16:creationId xmlns:a16="http://schemas.microsoft.com/office/drawing/2014/main" id="{B89040A1-8FA9-4D8C-8586-990F483A102F}"/>
+              </a:ext>
+            </a:extLst>
+          </p:cNvPr>
+          <p:cNvSpPr>
+            <a:spLocks xmlns:a="http://schemas.openxmlformats.org/drawingml/2006/main" noGrp="1"/>
+          </p:cNvSpPr>
+          <p:nvPr/>
+        </p:nvSpPr>
+        <p:spPr>
+          <a:xfrm xmlns:a="http://schemas.openxmlformats.org/drawingml/2006/main">
+            <a:off x="609600" y="3857625"/>
             <a:ext cx="2609850" cy="981075"/>
           </a:xfrm>
           <a:prstGeom xmlns:a="http://schemas.openxmlformats.org/drawingml/2006/main" prst="rect">
@@ -9128,7 +8907,7 @@
                 <a:ea typeface="Arial"/>
                 <a:cs typeface="Arial"/>
               </a:rPr>
-              <a:t>Why incorrect</a:t>
+              <a:t>Why both kinds</a:t>
             </a:r>
           </a:p>
           <a:p xmlns:a="http://schemas.openxmlformats.org/drawingml/2006/main">
@@ -9151,7 +8930,7 @@
                 <a:ea typeface="Arial"/>
                 <a:cs typeface="Arial"/>
               </a:rPr>
-              <a:t>rejection calls matter</a:t>
+              <a:t>of error matter</a:t>
             </a:r>
           </a:p>
         </p:txBody>
@@ -9161,19 +8940,19 @@
           <p:cNvPr id="10" name="">
             <a:extLst xmlns:a="http://schemas.openxmlformats.org/drawingml/2006/main">
               <a:ext uri="{FF2B5EF4-FFF2-40B4-BE49-F238E27FC236}">
-                <a16:creationId xmlns:a16="http://schemas.microsoft.com/office/drawing/2014/main" id="{0D4DFFAD-6D80-4EB1-99B7-CAE3A9581957}"/>
-              </a:ext>
-            </a:extLst>
-          </p:cNvPr>
-          <p:cNvSpPr>
-            <a:spLocks xmlns:a="http://schemas.openxmlformats.org/drawingml/2006/main" noGrp="1"/>
-          </p:cNvSpPr>
-          <p:nvPr/>
-        </p:nvSpPr>
-        <p:spPr>
-          <a:xfrm xmlns:a="http://schemas.openxmlformats.org/drawingml/2006/main">
-            <a:off x="3476625" y="3781425"/>
-            <a:ext cx="8105775" cy="1019175"/>
+                <a16:creationId xmlns:a16="http://schemas.microsoft.com/office/drawing/2014/main" id="{2D56AC8A-13B1-418A-8974-ADBC80B59BA1}"/>
+              </a:ext>
+            </a:extLst>
+          </p:cNvPr>
+          <p:cNvSpPr>
+            <a:spLocks xmlns:a="http://schemas.openxmlformats.org/drawingml/2006/main" noGrp="1"/>
+          </p:cNvSpPr>
+          <p:nvPr/>
+        </p:nvSpPr>
+        <p:spPr>
+          <a:xfrm xmlns:a="http://schemas.openxmlformats.org/drawingml/2006/main">
+            <a:off x="3476625" y="3762375"/>
+            <a:ext cx="8105775" cy="1171575"/>
           </a:xfrm>
           <a:prstGeom xmlns:a="http://schemas.openxmlformats.org/drawingml/2006/main" prst="rect">
             <a:avLst/>
@@ -9208,7 +8987,7 @@
                 <a:ea typeface="Arial"/>
                 <a:cs typeface="Arial"/>
               </a:rPr>
-              <a:t>Unnecessary rejection treatment can weaken the body’s</a:t>
+              <a:t>Missed rejection can leave kidney injury untreated.</a:t>
             </a:r>
           </a:p>
           <a:p xmlns:a="http://schemas.openxmlformats.org/drawingml/2006/main">
@@ -9231,7 +9010,30 @@
                 <a:ea typeface="Arial"/>
                 <a:cs typeface="Arial"/>
               </a:rPr>
-              <a:t>defenses and worsen an infection.</a:t>
+              <a:t>Unnecessary treatment can weaken the body’s defenses</a:t>
+            </a:r>
+          </a:p>
+          <a:p xmlns:a="http://schemas.openxmlformats.org/drawingml/2006/main">
+            <a:pPr algn="l">
+              <a:defRPr sz="2175" b="0">
+                <a:solidFill>
+                  <a:srgbClr val="16343E"/>
+                </a:solidFill>
+                <a:latin typeface="Arial"/>
+                <a:ea typeface="Arial"/>
+                <a:cs typeface="Arial"/>
+              </a:defRPr>
+            </a:pPr>
+            <a:r>
+              <a:rPr sz="2175" b="0">
+                <a:solidFill>
+                  <a:srgbClr val="16343E"/>
+                </a:solidFill>
+                <a:latin typeface="Arial"/>
+                <a:ea typeface="Arial"/>
+                <a:cs typeface="Arial"/>
+              </a:rPr>
+              <a:t>and worsen an infection.</a:t>
             </a:r>
           </a:p>
         </p:txBody>
@@ -9241,18 +9043,18 @@
           <p:cNvPr id="11" name="">
             <a:extLst xmlns:a="http://schemas.openxmlformats.org/drawingml/2006/main">
               <a:ext uri="{FF2B5EF4-FFF2-40B4-BE49-F238E27FC236}">
-                <a16:creationId xmlns:a16="http://schemas.microsoft.com/office/drawing/2014/main" id="{D080C7EF-C3A4-402B-BD38-986D14FD5742}"/>
-              </a:ext>
-            </a:extLst>
-          </p:cNvPr>
-          <p:cNvSpPr>
-            <a:spLocks xmlns:a="http://schemas.openxmlformats.org/drawingml/2006/main" noGrp="1"/>
-          </p:cNvSpPr>
-          <p:nvPr/>
-        </p:nvSpPr>
-        <p:spPr>
-          <a:xfrm xmlns:a="http://schemas.openxmlformats.org/drawingml/2006/main">
-            <a:off x="3476625" y="4829175"/>
+                <a16:creationId xmlns:a16="http://schemas.microsoft.com/office/drawing/2014/main" id="{44BFA0D1-CE29-4B8B-929F-BA81807447F7}"/>
+              </a:ext>
+            </a:extLst>
+          </p:cNvPr>
+          <p:cNvSpPr>
+            <a:spLocks xmlns:a="http://schemas.openxmlformats.org/drawingml/2006/main" noGrp="1"/>
+          </p:cNvSpPr>
+          <p:nvPr/>
+        </p:nvSpPr>
+        <p:spPr>
+          <a:xfrm xmlns:a="http://schemas.openxmlformats.org/drawingml/2006/main">
+            <a:off x="3476625" y="5010150"/>
             <a:ext cx="8105775" cy="257175"/>
           </a:xfrm>
           <a:prstGeom xmlns:a="http://schemas.openxmlformats.org/drawingml/2006/main" prst="rect">
@@ -9288,7 +9090,7 @@
                 <a:ea typeface="Arial"/>
                 <a:cs typeface="Arial"/>
               </a:rPr>
-              <a:t>KDIGO (2009); BK polyomavirus consensus (2024)</a:t>
+              <a:t>KDIGO (2009); Nankivell (2019); BK polyomavirus consensus (2024)</a:t>
             </a:r>
           </a:p>
         </p:txBody>
@@ -9298,19 +9100,19 @@
           <p:cNvPr id="12" name="">
             <a:extLst xmlns:a="http://schemas.openxmlformats.org/drawingml/2006/main">
               <a:ext uri="{FF2B5EF4-FFF2-40B4-BE49-F238E27FC236}">
-                <a16:creationId xmlns:a16="http://schemas.microsoft.com/office/drawing/2014/main" id="{1F7CD255-18FB-4FC1-A4BA-9C0887913E92}"/>
-              </a:ext>
-            </a:extLst>
-          </p:cNvPr>
-          <p:cNvSpPr>
-            <a:spLocks xmlns:a="http://schemas.openxmlformats.org/drawingml/2006/main" noGrp="1"/>
-          </p:cNvSpPr>
-          <p:nvPr/>
-        </p:nvSpPr>
-        <p:spPr>
-          <a:xfrm xmlns:a="http://schemas.openxmlformats.org/drawingml/2006/main">
-            <a:off x="609600" y="5286375"/>
-            <a:ext cx="10972800" cy="809625"/>
+                <a16:creationId xmlns:a16="http://schemas.microsoft.com/office/drawing/2014/main" id="{F38B6620-3B99-43A7-8E35-E89F674B1C23}"/>
+              </a:ext>
+            </a:extLst>
+          </p:cNvPr>
+          <p:cNvSpPr>
+            <a:spLocks xmlns:a="http://schemas.openxmlformats.org/drawingml/2006/main" noGrp="1"/>
+          </p:cNvSpPr>
+          <p:nvPr/>
+        </p:nvSpPr>
+        <p:spPr>
+          <a:xfrm xmlns:a="http://schemas.openxmlformats.org/drawingml/2006/main">
+            <a:off x="609600" y="5353050"/>
+            <a:ext cx="10972800" cy="819150"/>
           </a:xfrm>
           <a:prstGeom xmlns:a="http://schemas.openxmlformats.org/drawingml/2006/main" prst="rect">
             <a:avLst/>
@@ -9345,7 +9147,7 @@
                 <a:ea typeface="Arial"/>
                 <a:cs typeface="Arial"/>
               </a:rPr>
-              <a:t>This personal project measured agreement with recorded diagnoses.</a:t>
+              <a:t>This project has not established usefulness in ambiguous biopsies.</a:t>
             </a:r>
           </a:p>
           <a:p xmlns:a="http://schemas.openxmlformats.org/drawingml/2006/main">
@@ -9368,7 +9170,7 @@
                 <a:ea typeface="Arial"/>
                 <a:cs typeface="Arial"/>
               </a:rPr>
-              <a:t>Its value in ambiguous biopsies needs direct evaluation.</a:t>
+              <a:t>That requires comparing specialist assessment with and without RNA scores.</a:t>
             </a:r>
           </a:p>
         </p:txBody>
@@ -9376,7 +9178,7 @@
     </p:spTree>
     <p:extLst>
       <p:ext uri="{BB962C8B-B14F-4D97-AF65-F5344CB8AC3E}">
-        <p14:creationId xmlns:p14="http://schemas.microsoft.com/office/powerpoint/2010/main" val="1176125781"/>
+        <p14:creationId xmlns:p14="http://schemas.microsoft.com/office/powerpoint/2010/main" val="59722089"/>
       </p:ext>
     </p:extLst>
   </p:cSld>
@@ -9407,7 +9209,7 @@
           <p:cNvPr id="13" name="">
             <a:extLst xmlns:a="http://schemas.openxmlformats.org/drawingml/2006/main">
               <a:ext uri="{FF2B5EF4-FFF2-40B4-BE49-F238E27FC236}">
-                <a16:creationId xmlns:a16="http://schemas.microsoft.com/office/drawing/2014/main" id="{00020F42-CA4F-4C80-9CD9-5C17F15490B3}"/>
+                <a16:creationId xmlns:a16="http://schemas.microsoft.com/office/drawing/2014/main" id="{5F431C76-8A11-4C9E-AB61-4923052F290E}"/>
               </a:ext>
             </a:extLst>
           </p:cNvPr>
@@ -9464,7 +9266,7 @@
           <p:cNvPr id="2" name="">
             <a:extLst xmlns:a="http://schemas.openxmlformats.org/drawingml/2006/main">
               <a:ext uri="{FF2B5EF4-FFF2-40B4-BE49-F238E27FC236}">
-                <a16:creationId xmlns:a16="http://schemas.microsoft.com/office/drawing/2014/main" id="{A912527E-44E2-46BC-A3A1-DA74D4AE244F}"/>
+                <a16:creationId xmlns:a16="http://schemas.microsoft.com/office/drawing/2014/main" id="{C71AF8D3-3742-4D71-ADB4-7BE697D1FF41}"/>
               </a:ext>
             </a:extLst>
           </p:cNvPr>
@@ -9521,7 +9323,7 @@
           <p:cNvPr id="3" name="">
             <a:extLst xmlns:a="http://schemas.openxmlformats.org/drawingml/2006/main">
               <a:ext uri="{FF2B5EF4-FFF2-40B4-BE49-F238E27FC236}">
-                <a16:creationId xmlns:a16="http://schemas.microsoft.com/office/drawing/2014/main" id="{E11CB861-51AE-4DB7-8D00-D3F00D344237}"/>
+                <a16:creationId xmlns:a16="http://schemas.microsoft.com/office/drawing/2014/main" id="{71059A5E-51C6-4123-A0E9-B031B3410732}"/>
               </a:ext>
             </a:extLst>
           </p:cNvPr>
@@ -9578,7 +9380,7 @@
           <p:cNvPr id="4" name="">
             <a:extLst xmlns:a="http://schemas.openxmlformats.org/drawingml/2006/main">
               <a:ext uri="{FF2B5EF4-FFF2-40B4-BE49-F238E27FC236}">
-                <a16:creationId xmlns:a16="http://schemas.microsoft.com/office/drawing/2014/main" id="{7EC9A224-1053-40AD-88B0-B38F9A77FBF6}"/>
+                <a16:creationId xmlns:a16="http://schemas.microsoft.com/office/drawing/2014/main" id="{6970DC7B-E58F-45EB-BB17-897DF86B57B2}"/>
               </a:ext>
             </a:extLst>
           </p:cNvPr>
@@ -9635,7 +9437,7 @@
           <p:cNvPr id="5" name="">
             <a:extLst xmlns:a="http://schemas.openxmlformats.org/drawingml/2006/main">
               <a:ext uri="{FF2B5EF4-FFF2-40B4-BE49-F238E27FC236}">
-                <a16:creationId xmlns:a16="http://schemas.microsoft.com/office/drawing/2014/main" id="{EC1A3DEB-4856-47BF-9049-960109DAF3D8}"/>
+                <a16:creationId xmlns:a16="http://schemas.microsoft.com/office/drawing/2014/main" id="{BBF96DC9-0A9F-4F83-B308-ACE7C98219AC}"/>
               </a:ext>
             </a:extLst>
           </p:cNvPr>
@@ -9692,7 +9494,7 @@
           <p:cNvPr id="6" name="">
             <a:extLst xmlns:a="http://schemas.openxmlformats.org/drawingml/2006/main">
               <a:ext uri="{FF2B5EF4-FFF2-40B4-BE49-F238E27FC236}">
-                <a16:creationId xmlns:a16="http://schemas.microsoft.com/office/drawing/2014/main" id="{D2502894-20EC-4D60-ACBA-60CFA7585B21}"/>
+                <a16:creationId xmlns:a16="http://schemas.microsoft.com/office/drawing/2014/main" id="{BF6FAE34-481D-4D80-9908-EA81E5339E5E}"/>
               </a:ext>
             </a:extLst>
           </p:cNvPr>
@@ -10333,7 +10135,7 @@
           <p:cNvPr id="9" name="">
             <a:extLst xmlns:a="http://schemas.openxmlformats.org/drawingml/2006/main">
               <a:ext uri="{FF2B5EF4-FFF2-40B4-BE49-F238E27FC236}">
-                <a16:creationId xmlns:a16="http://schemas.microsoft.com/office/drawing/2014/main" id="{369E0FD5-63C0-4943-9912-77912EEBC511}"/>
+                <a16:creationId xmlns:a16="http://schemas.microsoft.com/office/drawing/2014/main" id="{9A247CCD-3FD6-4514-ABFC-3E7DD3613B15}"/>
               </a:ext>
             </a:extLst>
           </p:cNvPr>
@@ -10362,7 +10164,7 @@
           <p:cNvPr id="10" name="">
             <a:extLst xmlns:a="http://schemas.openxmlformats.org/drawingml/2006/main">
               <a:ext uri="{FF2B5EF4-FFF2-40B4-BE49-F238E27FC236}">
-                <a16:creationId xmlns:a16="http://schemas.microsoft.com/office/drawing/2014/main" id="{FD3ADC4E-77D7-4A5D-BB5D-082F7172BA28}"/>
+                <a16:creationId xmlns:a16="http://schemas.microsoft.com/office/drawing/2014/main" id="{598C77B8-DAE0-4583-9567-AF24558B564B}"/>
               </a:ext>
             </a:extLst>
           </p:cNvPr>
@@ -10419,7 +10221,7 @@
           <p:cNvPr id="11" name="">
             <a:extLst xmlns:a="http://schemas.openxmlformats.org/drawingml/2006/main">
               <a:ext uri="{FF2B5EF4-FFF2-40B4-BE49-F238E27FC236}">
-                <a16:creationId xmlns:a16="http://schemas.microsoft.com/office/drawing/2014/main" id="{A32BF0E6-A517-4F65-9708-7FC99A6301F0}"/>
+                <a16:creationId xmlns:a16="http://schemas.microsoft.com/office/drawing/2014/main" id="{C9D963E6-BC59-409C-9061-477D39C2358C}"/>
               </a:ext>
             </a:extLst>
           </p:cNvPr>
@@ -10476,7 +10278,7 @@
           <p:cNvPr id="12" name="">
             <a:extLst xmlns:a="http://schemas.openxmlformats.org/drawingml/2006/main">
               <a:ext uri="{FF2B5EF4-FFF2-40B4-BE49-F238E27FC236}">
-                <a16:creationId xmlns:a16="http://schemas.microsoft.com/office/drawing/2014/main" id="{6829C400-9CC7-456B-82E0-E00A97042F0F}"/>
+                <a16:creationId xmlns:a16="http://schemas.microsoft.com/office/drawing/2014/main" id="{A4FB3691-4916-414D-AAF9-D83054556C99}"/>
               </a:ext>
             </a:extLst>
           </p:cNvPr>
@@ -10562,7 +10364,7 @@
     </p:spTree>
     <p:extLst>
       <p:ext uri="{BB962C8B-B14F-4D97-AF65-F5344CB8AC3E}">
-        <p14:creationId xmlns:p14="http://schemas.microsoft.com/office/powerpoint/2010/main" val="420690078"/>
+        <p14:creationId xmlns:p14="http://schemas.microsoft.com/office/powerpoint/2010/main" val="1641302057"/>
       </p:ext>
     </p:extLst>
   </p:cSld>
@@ -10593,7 +10395,7 @@
           <p:cNvPr id="7" name="">
             <a:extLst xmlns:a="http://schemas.openxmlformats.org/drawingml/2006/main">
               <a:ext uri="{FF2B5EF4-FFF2-40B4-BE49-F238E27FC236}">
-                <a16:creationId xmlns:a16="http://schemas.microsoft.com/office/drawing/2014/main" id="{248B7970-AFAD-4D1C-8D06-7F49E914F3E6}"/>
+                <a16:creationId xmlns:a16="http://schemas.microsoft.com/office/drawing/2014/main" id="{ABC2A62F-124A-4982-9177-1729C336E399}"/>
               </a:ext>
             </a:extLst>
           </p:cNvPr>
@@ -10650,7 +10452,7 @@
           <p:cNvPr id="2" name="">
             <a:extLst xmlns:a="http://schemas.openxmlformats.org/drawingml/2006/main">
               <a:ext uri="{FF2B5EF4-FFF2-40B4-BE49-F238E27FC236}">
-                <a16:creationId xmlns:a16="http://schemas.microsoft.com/office/drawing/2014/main" id="{E7F07E5A-E1E3-4D05-80F7-8B368DBD35A8}"/>
+                <a16:creationId xmlns:a16="http://schemas.microsoft.com/office/drawing/2014/main" id="{ACA69403-A1D0-4BF0-ABA2-D1696C0A3EB8}"/>
               </a:ext>
             </a:extLst>
           </p:cNvPr>
@@ -10707,7 +10509,7 @@
           <p:cNvPr id="3" name="">
             <a:extLst xmlns:a="http://schemas.openxmlformats.org/drawingml/2006/main">
               <a:ext uri="{FF2B5EF4-FFF2-40B4-BE49-F238E27FC236}">
-                <a16:creationId xmlns:a16="http://schemas.microsoft.com/office/drawing/2014/main" id="{14B73AE0-FFDE-4B90-A3E1-A9618AA2ED0F}"/>
+                <a16:creationId xmlns:a16="http://schemas.microsoft.com/office/drawing/2014/main" id="{3E1D45C2-3D26-4395-AE54-89D96C46DCE2}"/>
               </a:ext>
             </a:extLst>
           </p:cNvPr>
@@ -10764,7 +10566,7 @@
           <p:cNvPr id="4" name="">
             <a:extLst xmlns:a="http://schemas.openxmlformats.org/drawingml/2006/main">
               <a:ext uri="{FF2B5EF4-FFF2-40B4-BE49-F238E27FC236}">
-                <a16:creationId xmlns:a16="http://schemas.microsoft.com/office/drawing/2014/main" id="{66AEE746-4D0F-4A52-93C2-E714549EEDFB}"/>
+                <a16:creationId xmlns:a16="http://schemas.microsoft.com/office/drawing/2014/main" id="{AE197FEF-73A5-4912-94C9-5B0E4E45B715}"/>
               </a:ext>
             </a:extLst>
           </p:cNvPr>
@@ -11244,7 +11046,7 @@
           <p:cNvPr id="6" name="">
             <a:extLst xmlns:a="http://schemas.openxmlformats.org/drawingml/2006/main">
               <a:ext uri="{FF2B5EF4-FFF2-40B4-BE49-F238E27FC236}">
-                <a16:creationId xmlns:a16="http://schemas.microsoft.com/office/drawing/2014/main" id="{6244E03C-C08C-4D4E-BD78-A6468A528420}"/>
+                <a16:creationId xmlns:a16="http://schemas.microsoft.com/office/drawing/2014/main" id="{B64EFF55-FEDB-4D1B-B62A-E618A5B2F290}"/>
               </a:ext>
             </a:extLst>
           </p:cNvPr>
@@ -11299,7 +11101,7 @@
     </p:spTree>
     <p:extLst>
       <p:ext uri="{BB962C8B-B14F-4D97-AF65-F5344CB8AC3E}">
-        <p14:creationId xmlns:p14="http://schemas.microsoft.com/office/powerpoint/2010/main" val="1434648340"/>
+        <p14:creationId xmlns:p14="http://schemas.microsoft.com/office/powerpoint/2010/main" val="2107203646"/>
       </p:ext>
     </p:extLst>
   </p:cSld>
@@ -11330,7 +11132,7 @@
           <p:cNvPr id="11" name="">
             <a:extLst xmlns:a="http://schemas.openxmlformats.org/drawingml/2006/main">
               <a:ext uri="{FF2B5EF4-FFF2-40B4-BE49-F238E27FC236}">
-                <a16:creationId xmlns:a16="http://schemas.microsoft.com/office/drawing/2014/main" id="{4D22231C-C958-4D64-80F8-7F63D9789E84}"/>
+                <a16:creationId xmlns:a16="http://schemas.microsoft.com/office/drawing/2014/main" id="{895F2407-C5EC-4FDE-9192-8528F4470218}"/>
               </a:ext>
             </a:extLst>
           </p:cNvPr>
@@ -11387,7 +11189,7 @@
           <p:cNvPr id="2" name="">
             <a:extLst xmlns:a="http://schemas.openxmlformats.org/drawingml/2006/main">
               <a:ext uri="{FF2B5EF4-FFF2-40B4-BE49-F238E27FC236}">
-                <a16:creationId xmlns:a16="http://schemas.microsoft.com/office/drawing/2014/main" id="{1BF2925D-1143-45DB-94F1-3F4AF56F6510}"/>
+                <a16:creationId xmlns:a16="http://schemas.microsoft.com/office/drawing/2014/main" id="{8A42B5D8-9BF7-4502-BD14-B7BD12F57DA5}"/>
               </a:ext>
             </a:extLst>
           </p:cNvPr>
@@ -11434,7 +11236,7 @@
                 <a:ea typeface="Arial"/>
                 <a:cs typeface="Arial"/>
               </a:rPr>
-              <a:t>Sources: GSE212160; B-HOT panel consensus (2020); project data contract</a:t>
+              <a:t>Sources: GSE212160; B-HOT panel consensus; NanoString analysis guidance; shared preprocessing</a:t>
             </a:r>
           </a:p>
         </p:txBody>
@@ -11444,7 +11246,7 @@
           <p:cNvPr id="3" name="">
             <a:extLst xmlns:a="http://schemas.openxmlformats.org/drawingml/2006/main">
               <a:ext uri="{FF2B5EF4-FFF2-40B4-BE49-F238E27FC236}">
-                <a16:creationId xmlns:a16="http://schemas.microsoft.com/office/drawing/2014/main" id="{82874B93-CCC5-4C56-81F4-454E8A709505}"/>
+                <a16:creationId xmlns:a16="http://schemas.microsoft.com/office/drawing/2014/main" id="{9B28A0B1-74B1-4E4E-B941-6A8A871CD72A}"/>
               </a:ext>
             </a:extLst>
           </p:cNvPr>
@@ -11501,7 +11303,7 @@
           <p:cNvPr id="4" name="">
             <a:extLst xmlns:a="http://schemas.openxmlformats.org/drawingml/2006/main">
               <a:ext uri="{FF2B5EF4-FFF2-40B4-BE49-F238E27FC236}">
-                <a16:creationId xmlns:a16="http://schemas.microsoft.com/office/drawing/2014/main" id="{1507FF61-6211-4750-A9ED-8346E49E5D38}"/>
+                <a16:creationId xmlns:a16="http://schemas.microsoft.com/office/drawing/2014/main" id="{2897DC9E-6EFA-4C3F-AE85-FE11B47A84C5}"/>
               </a:ext>
             </a:extLst>
           </p:cNvPr>
@@ -11558,19 +11360,19 @@
           <p:cNvPr id="5" name="">
             <a:extLst xmlns:a="http://schemas.openxmlformats.org/drawingml/2006/main">
               <a:ext uri="{FF2B5EF4-FFF2-40B4-BE49-F238E27FC236}">
-                <a16:creationId xmlns:a16="http://schemas.microsoft.com/office/drawing/2014/main" id="{2428D108-5306-49A5-B16E-F45D4A435668}"/>
-              </a:ext>
-            </a:extLst>
-          </p:cNvPr>
-          <p:cNvSpPr>
-            <a:spLocks xmlns:a="http://schemas.openxmlformats.org/drawingml/2006/main" noGrp="1"/>
-          </p:cNvSpPr>
-          <p:nvPr/>
-        </p:nvSpPr>
-        <p:spPr>
-          <a:xfrm xmlns:a="http://schemas.openxmlformats.org/drawingml/2006/main">
-            <a:off x="609600" y="2714625"/>
-            <a:ext cx="5095875" cy="762000"/>
+                <a16:creationId xmlns:a16="http://schemas.microsoft.com/office/drawing/2014/main" id="{078CCC6C-7B57-4EAE-AC99-98A2DBD13CD8}"/>
+              </a:ext>
+            </a:extLst>
+          </p:cNvPr>
+          <p:cNvSpPr>
+            <a:spLocks xmlns:a="http://schemas.openxmlformats.org/drawingml/2006/main" noGrp="1"/>
+          </p:cNvSpPr>
+          <p:nvPr/>
+        </p:nvSpPr>
+        <p:spPr>
+          <a:xfrm xmlns:a="http://schemas.openxmlformats.org/drawingml/2006/main">
+            <a:off x="609600" y="2562225"/>
+            <a:ext cx="5095875" cy="666750"/>
           </a:xfrm>
           <a:prstGeom xmlns:a="http://schemas.openxmlformats.org/drawingml/2006/main" prst="rect">
             <a:avLst/>
@@ -11615,18 +11417,18 @@
           <p:cNvPr id="6" name="">
             <a:extLst xmlns:a="http://schemas.openxmlformats.org/drawingml/2006/main">
               <a:ext uri="{FF2B5EF4-FFF2-40B4-BE49-F238E27FC236}">
-                <a16:creationId xmlns:a16="http://schemas.microsoft.com/office/drawing/2014/main" id="{0B75DA7B-6CA3-4B62-BEA3-BDC08EED5DD3}"/>
-              </a:ext>
-            </a:extLst>
-          </p:cNvPr>
-          <p:cNvSpPr>
-            <a:spLocks xmlns:a="http://schemas.openxmlformats.org/drawingml/2006/main" noGrp="1"/>
-          </p:cNvSpPr>
-          <p:nvPr/>
-        </p:nvSpPr>
-        <p:spPr>
-          <a:xfrm xmlns:a="http://schemas.openxmlformats.org/drawingml/2006/main">
-            <a:off x="609600" y="3514725"/>
+                <a16:creationId xmlns:a16="http://schemas.microsoft.com/office/drawing/2014/main" id="{94906B19-AFE7-46C8-AF9F-A577961D681B}"/>
+              </a:ext>
+            </a:extLst>
+          </p:cNvPr>
+          <p:cNvSpPr>
+            <a:spLocks xmlns:a="http://schemas.openxmlformats.org/drawingml/2006/main" noGrp="1"/>
+          </p:cNvSpPr>
+          <p:nvPr/>
+        </p:nvSpPr>
+        <p:spPr>
+          <a:xfrm xmlns:a="http://schemas.openxmlformats.org/drawingml/2006/main">
+            <a:off x="609600" y="3343275"/>
             <a:ext cx="5095875" cy="466725"/>
           </a:xfrm>
           <a:prstGeom xmlns:a="http://schemas.openxmlformats.org/drawingml/2006/main" prst="rect">
@@ -11672,19 +11474,19 @@
           <p:cNvPr id="7" name="">
             <a:extLst xmlns:a="http://schemas.openxmlformats.org/drawingml/2006/main">
               <a:ext uri="{FF2B5EF4-FFF2-40B4-BE49-F238E27FC236}">
-                <a16:creationId xmlns:a16="http://schemas.microsoft.com/office/drawing/2014/main" id="{925F36B8-D646-40DE-B168-B0630C798B52}"/>
-              </a:ext>
-            </a:extLst>
-          </p:cNvPr>
-          <p:cNvSpPr>
-            <a:spLocks xmlns:a="http://schemas.openxmlformats.org/drawingml/2006/main" noGrp="1"/>
-          </p:cNvSpPr>
-          <p:nvPr/>
-        </p:nvSpPr>
-        <p:spPr>
-          <a:xfrm xmlns:a="http://schemas.openxmlformats.org/drawingml/2006/main">
-            <a:off x="609600" y="4095750"/>
-            <a:ext cx="5143500" cy="1905000"/>
+                <a16:creationId xmlns:a16="http://schemas.microsoft.com/office/drawing/2014/main" id="{B38A6DA1-9F2D-4608-8FC1-A9A643A7D19E}"/>
+              </a:ext>
+            </a:extLst>
+          </p:cNvPr>
+          <p:cNvSpPr>
+            <a:spLocks xmlns:a="http://schemas.openxmlformats.org/drawingml/2006/main" noGrp="1"/>
+          </p:cNvSpPr>
+          <p:nvPr/>
+        </p:nvSpPr>
+        <p:spPr>
+          <a:xfrm xmlns:a="http://schemas.openxmlformats.org/drawingml/2006/main">
+            <a:off x="609600" y="3905250"/>
+            <a:ext cx="5143500" cy="2228850"/>
           </a:xfrm>
           <a:prstGeom xmlns:a="http://schemas.openxmlformats.org/drawingml/2006/main" prst="rect">
             <a:avLst/>
@@ -11702,7 +11504,7 @@
           <a:p xmlns:a="http://schemas.openxmlformats.org/drawingml/2006/main">
             <a:pPr marL="279400" indent="-152400" algn="l">
               <a:spcAft>
-                <a:spcPts val="1200"/>
+                <a:spcPts val="1000"/>
               </a:spcAft>
               <a:buChar char="•"/>
               <a:defRPr sz="2175" b="0">
@@ -11723,13 +11525,13 @@
                 <a:ea typeface="Arial"/>
                 <a:cs typeface="Arial"/>
               </a:rPr>
-              <a:t>Include human and viral RNA.</a:t>
+              <a:t>Selected human and viral RNA measurements.</a:t>
             </a:r>
           </a:p>
           <a:p xmlns:a="http://schemas.openxmlformats.org/drawingml/2006/main">
             <a:pPr marL="279400" indent="-152400" algn="l">
               <a:spcAft>
-                <a:spcPts val="1200"/>
+                <a:spcPts val="1000"/>
               </a:spcAft>
               <a:buChar char="•"/>
               <a:defRPr sz="2175" b="0">
@@ -11750,7 +11552,34 @@
                 <a:ea typeface="Arial"/>
                 <a:cs typeface="Arial"/>
               </a:rPr>
-              <a:t>Signals depend on gene activity and the cell mixture.</a:t>
+              <a:t>Signals reflect gene activity and the mixture of cells in the biopsy.</a:t>
+            </a:r>
+          </a:p>
+          <a:p xmlns:a="http://schemas.openxmlformats.org/drawingml/2006/main">
+            <a:pPr marL="279400" indent="-152400" algn="l">
+              <a:spcAft>
+                <a:spcPts val="1000"/>
+              </a:spcAft>
+              <a:buChar char="•"/>
+              <a:defRPr sz="2175" b="0">
+                <a:solidFill>
+                  <a:srgbClr val="16343E"/>
+                </a:solidFill>
+                <a:latin typeface="Arial"/>
+                <a:ea typeface="Arial"/>
+                <a:cs typeface="Arial"/>
+              </a:defRPr>
+            </a:pPr>
+            <a:r>
+              <a:rPr sz="2175" b="0">
+                <a:solidFill>
+                  <a:srgbClr val="16343E"/>
+                </a:solidFill>
+                <a:latin typeface="Arial"/>
+                <a:ea typeface="Arial"/>
+                <a:cs typeface="Arial"/>
+              </a:rPr>
+              <a:t>Normalized values become the model’s inputs.</a:t>
             </a:r>
           </a:p>
         </p:txBody>
@@ -11760,19 +11589,19 @@
           <p:cNvPr id="8" name="">
             <a:extLst xmlns:a="http://schemas.openxmlformats.org/drawingml/2006/main">
               <a:ext uri="{FF2B5EF4-FFF2-40B4-BE49-F238E27FC236}">
-                <a16:creationId xmlns:a16="http://schemas.microsoft.com/office/drawing/2014/main" id="{1964515F-62FD-4055-AECD-ECCB87DE5E9F}"/>
-              </a:ext>
-            </a:extLst>
-          </p:cNvPr>
-          <p:cNvSpPr>
-            <a:spLocks xmlns:a="http://schemas.openxmlformats.org/drawingml/2006/main" noGrp="1"/>
-          </p:cNvSpPr>
-          <p:nvPr/>
-        </p:nvSpPr>
-        <p:spPr>
-          <a:xfrm xmlns:a="http://schemas.openxmlformats.org/drawingml/2006/main">
-            <a:off x="6543675" y="2714625"/>
-            <a:ext cx="5038725" cy="762000"/>
+                <a16:creationId xmlns:a16="http://schemas.microsoft.com/office/drawing/2014/main" id="{332AC095-E167-4DE8-A1DB-489C1506B251}"/>
+              </a:ext>
+            </a:extLst>
+          </p:cNvPr>
+          <p:cNvSpPr>
+            <a:spLocks xmlns:a="http://schemas.openxmlformats.org/drawingml/2006/main" noGrp="1"/>
+          </p:cNvSpPr>
+          <p:nvPr/>
+        </p:nvSpPr>
+        <p:spPr>
+          <a:xfrm xmlns:a="http://schemas.openxmlformats.org/drawingml/2006/main">
+            <a:off x="6543675" y="2562225"/>
+            <a:ext cx="5038725" cy="666750"/>
           </a:xfrm>
           <a:prstGeom xmlns:a="http://schemas.openxmlformats.org/drawingml/2006/main" prst="rect">
             <a:avLst/>
@@ -11817,18 +11646,18 @@
           <p:cNvPr id="9" name="">
             <a:extLst xmlns:a="http://schemas.openxmlformats.org/drawingml/2006/main">
               <a:ext uri="{FF2B5EF4-FFF2-40B4-BE49-F238E27FC236}">
-                <a16:creationId xmlns:a16="http://schemas.microsoft.com/office/drawing/2014/main" id="{EBC3049B-DC8A-438B-B0C2-F6F43AF2FF32}"/>
-              </a:ext>
-            </a:extLst>
-          </p:cNvPr>
-          <p:cNvSpPr>
-            <a:spLocks xmlns:a="http://schemas.openxmlformats.org/drawingml/2006/main" noGrp="1"/>
-          </p:cNvSpPr>
-          <p:nvPr/>
-        </p:nvSpPr>
-        <p:spPr>
-          <a:xfrm xmlns:a="http://schemas.openxmlformats.org/drawingml/2006/main">
-            <a:off x="6543675" y="3514725"/>
+                <a16:creationId xmlns:a16="http://schemas.microsoft.com/office/drawing/2014/main" id="{2DB963A7-5719-49A6-BEBB-CCD1A19DCB05}"/>
+              </a:ext>
+            </a:extLst>
+          </p:cNvPr>
+          <p:cNvSpPr>
+            <a:spLocks xmlns:a="http://schemas.openxmlformats.org/drawingml/2006/main" noGrp="1"/>
+          </p:cNvSpPr>
+          <p:nvPr/>
+        </p:nvSpPr>
+        <p:spPr>
+          <a:xfrm xmlns:a="http://schemas.openxmlformats.org/drawingml/2006/main">
+            <a:off x="6543675" y="3343275"/>
             <a:ext cx="5038725" cy="466725"/>
           </a:xfrm>
           <a:prstGeom xmlns:a="http://schemas.openxmlformats.org/drawingml/2006/main" prst="rect">
@@ -11874,19 +11703,19 @@
           <p:cNvPr id="10" name="">
             <a:extLst xmlns:a="http://schemas.openxmlformats.org/drawingml/2006/main">
               <a:ext uri="{FF2B5EF4-FFF2-40B4-BE49-F238E27FC236}">
-                <a16:creationId xmlns:a16="http://schemas.microsoft.com/office/drawing/2014/main" id="{5FDA88FA-124F-416B-8F86-59B0303C0323}"/>
-              </a:ext>
-            </a:extLst>
-          </p:cNvPr>
-          <p:cNvSpPr>
-            <a:spLocks xmlns:a="http://schemas.openxmlformats.org/drawingml/2006/main" noGrp="1"/>
-          </p:cNvSpPr>
-          <p:nvPr/>
-        </p:nvSpPr>
-        <p:spPr>
-          <a:xfrm xmlns:a="http://schemas.openxmlformats.org/drawingml/2006/main">
-            <a:off x="6543675" y="4095750"/>
-            <a:ext cx="5038725" cy="1905000"/>
+                <a16:creationId xmlns:a16="http://schemas.microsoft.com/office/drawing/2014/main" id="{786DAC70-0981-4B06-8437-61A4F5BB780F}"/>
+              </a:ext>
+            </a:extLst>
+          </p:cNvPr>
+          <p:cNvSpPr>
+            <a:spLocks xmlns:a="http://schemas.openxmlformats.org/drawingml/2006/main" noGrp="1"/>
+          </p:cNvSpPr>
+          <p:nvPr/>
+        </p:nvSpPr>
+        <p:spPr>
+          <a:xfrm xmlns:a="http://schemas.openxmlformats.org/drawingml/2006/main">
+            <a:off x="6543675" y="3905250"/>
+            <a:ext cx="5038725" cy="2228850"/>
           </a:xfrm>
           <a:prstGeom xmlns:a="http://schemas.openxmlformats.org/drawingml/2006/main" prst="rect">
             <a:avLst/>
@@ -11904,7 +11733,7 @@
           <a:p xmlns:a="http://schemas.openxmlformats.org/drawingml/2006/main">
             <a:pPr marL="279400" indent="-152400" algn="l">
               <a:spcAft>
-                <a:spcPts val="1200"/>
+                <a:spcPts val="1000"/>
               </a:spcAft>
               <a:buChar char="•"/>
               <a:defRPr sz="2175" b="0">
@@ -11925,13 +11754,13 @@
                 <a:ea typeface="Arial"/>
                 <a:cs typeface="Arial"/>
               </a:rPr>
-              <a:t>12 different reference RNAs.</a:t>
+              <a:t>Relatively stable RNAs provide a reference for each specimen.</a:t>
             </a:r>
           </a:p>
           <a:p xmlns:a="http://schemas.openxmlformats.org/drawingml/2006/main">
             <a:pPr marL="279400" indent="-152400" algn="l">
               <a:spcAft>
-                <a:spcPts val="1200"/>
+                <a:spcPts val="1000"/>
               </a:spcAft>
               <a:buChar char="•"/>
               <a:defRPr sz="2175" b="0">
@@ -11952,7 +11781,34 @@
                 <a:ea typeface="Arial"/>
                 <a:cs typeface="Arial"/>
               </a:rPr>
-              <a:t>Used to adjust for differences in how much RNA each specimen supplies.</a:t>
+              <a:t>Help adjust for differences in overall measurable RNA input.</a:t>
+            </a:r>
+          </a:p>
+          <a:p xmlns:a="http://schemas.openxmlformats.org/drawingml/2006/main">
+            <a:pPr marL="279400" indent="-152400" algn="l">
+              <a:spcAft>
+                <a:spcPts val="1000"/>
+              </a:spcAft>
+              <a:buChar char="•"/>
+              <a:defRPr sz="2175" b="0">
+                <a:solidFill>
+                  <a:srgbClr val="16343E"/>
+                </a:solidFill>
+                <a:latin typeface="Arial"/>
+                <a:ea typeface="Arial"/>
+                <a:cs typeface="Arial"/>
+              </a:defRPr>
+            </a:pPr>
+            <a:r>
+              <a:rPr sz="2175" b="0">
+                <a:solidFill>
+                  <a:srgbClr val="16343E"/>
+                </a:solidFill>
+                <a:latin typeface="Arial"/>
+                <a:ea typeface="Arial"/>
+                <a:cs typeface="Arial"/>
+              </a:rPr>
+              <a:t>Used for normalization, then excluded from the model.</a:t>
             </a:r>
           </a:p>
         </p:txBody>
@@ -11960,7 +11816,7 @@
     </p:spTree>
     <p:extLst>
       <p:ext uri="{BB962C8B-B14F-4D97-AF65-F5344CB8AC3E}">
-        <p14:creationId xmlns:p14="http://schemas.microsoft.com/office/powerpoint/2010/main" val="1869026119"/>
+        <p14:creationId xmlns:p14="http://schemas.microsoft.com/office/powerpoint/2010/main" val="1033048387"/>
       </p:ext>
     </p:extLst>
   </p:cSld>
@@ -11991,7 +11847,7 @@
           <p:cNvPr id="5" name="">
             <a:extLst xmlns:a="http://schemas.openxmlformats.org/drawingml/2006/main">
               <a:ext uri="{FF2B5EF4-FFF2-40B4-BE49-F238E27FC236}">
-                <a16:creationId xmlns:a16="http://schemas.microsoft.com/office/drawing/2014/main" id="{3883DE41-3A9C-4BE1-AD00-B8A113D8686E}"/>
+                <a16:creationId xmlns:a16="http://schemas.microsoft.com/office/drawing/2014/main" id="{E88295D8-984F-4704-A828-A9D3DD060E24}"/>
               </a:ext>
             </a:extLst>
           </p:cNvPr>
@@ -12048,7 +11904,7 @@
           <p:cNvPr id="2" name="">
             <a:extLst xmlns:a="http://schemas.openxmlformats.org/drawingml/2006/main">
               <a:ext uri="{FF2B5EF4-FFF2-40B4-BE49-F238E27FC236}">
-                <a16:creationId xmlns:a16="http://schemas.microsoft.com/office/drawing/2014/main" id="{A8FA5CF4-8E98-4162-9E6B-9FEC54B8BDA8}"/>
+                <a16:creationId xmlns:a16="http://schemas.microsoft.com/office/drawing/2014/main" id="{3DB20259-434D-4901-981A-C74AB6ACC771}"/>
               </a:ext>
             </a:extLst>
           </p:cNvPr>
@@ -12105,7 +11961,7 @@
           <p:cNvPr id="3" name="">
             <a:extLst xmlns:a="http://schemas.openxmlformats.org/drawingml/2006/main">
               <a:ext uri="{FF2B5EF4-FFF2-40B4-BE49-F238E27FC236}">
-                <a16:creationId xmlns:a16="http://schemas.microsoft.com/office/drawing/2014/main" id="{FF239E75-3533-4080-AAA5-A3F6C72D8FA9}"/>
+                <a16:creationId xmlns:a16="http://schemas.microsoft.com/office/drawing/2014/main" id="{5A210E71-392A-4528-B030-FF235C1F46D9}"/>
               </a:ext>
             </a:extLst>
           </p:cNvPr>
@@ -12452,7 +12308,7 @@
     </p:spTree>
     <p:extLst>
       <p:ext uri="{BB962C8B-B14F-4D97-AF65-F5344CB8AC3E}">
-        <p14:creationId xmlns:p14="http://schemas.microsoft.com/office/powerpoint/2010/main" val="246310504"/>
+        <p14:creationId xmlns:p14="http://schemas.microsoft.com/office/powerpoint/2010/main" val="852904421"/>
       </p:ext>
     </p:extLst>
   </p:cSld>
@@ -12483,7 +12339,7 @@
           <p:cNvPr id="11" name="">
             <a:extLst xmlns:a="http://schemas.openxmlformats.org/drawingml/2006/main">
               <a:ext uri="{FF2B5EF4-FFF2-40B4-BE49-F238E27FC236}">
-                <a16:creationId xmlns:a16="http://schemas.microsoft.com/office/drawing/2014/main" id="{95AE2A46-412E-4DF4-95BD-FB1B7D0D0BA4}"/>
+                <a16:creationId xmlns:a16="http://schemas.microsoft.com/office/drawing/2014/main" id="{2962AE36-99C5-4042-88B7-E358FE895E9E}"/>
               </a:ext>
             </a:extLst>
           </p:cNvPr>
@@ -12540,7 +12396,7 @@
           <p:cNvPr id="2" name="">
             <a:extLst xmlns:a="http://schemas.openxmlformats.org/drawingml/2006/main">
               <a:ext uri="{FF2B5EF4-FFF2-40B4-BE49-F238E27FC236}">
-                <a16:creationId xmlns:a16="http://schemas.microsoft.com/office/drawing/2014/main" id="{C2E1DF07-998E-4A0A-9473-874BA019A2CB}"/>
+                <a16:creationId xmlns:a16="http://schemas.microsoft.com/office/drawing/2014/main" id="{ED5CCE2E-DF3C-4B0E-BA7C-1F1360B5AE11}"/>
               </a:ext>
             </a:extLst>
           </p:cNvPr>
@@ -12597,7 +12453,7 @@
           <p:cNvPr id="3" name="">
             <a:extLst xmlns:a="http://schemas.openxmlformats.org/drawingml/2006/main">
               <a:ext uri="{FF2B5EF4-FFF2-40B4-BE49-F238E27FC236}">
-                <a16:creationId xmlns:a16="http://schemas.microsoft.com/office/drawing/2014/main" id="{298ECCE5-885A-4434-98BF-FFF5139C52CA}"/>
+                <a16:creationId xmlns:a16="http://schemas.microsoft.com/office/drawing/2014/main" id="{61FB976A-EA03-4A73-A040-CDB5117AB436}"/>
               </a:ext>
             </a:extLst>
           </p:cNvPr>
@@ -12654,7 +12510,7 @@
           <p:cNvPr id="4" name="">
             <a:extLst xmlns:a="http://schemas.openxmlformats.org/drawingml/2006/main">
               <a:ext uri="{FF2B5EF4-FFF2-40B4-BE49-F238E27FC236}">
-                <a16:creationId xmlns:a16="http://schemas.microsoft.com/office/drawing/2014/main" id="{9D3F93CA-E462-40BC-8267-F2885B1D550C}"/>
+                <a16:creationId xmlns:a16="http://schemas.microsoft.com/office/drawing/2014/main" id="{7A6D0B42-0555-48BB-AFE8-454F72AC73DB}"/>
               </a:ext>
             </a:extLst>
           </p:cNvPr>
@@ -12742,7 +12598,7 @@
           <p:cNvPr id="5" name="">
             <a:extLst xmlns:a="http://schemas.openxmlformats.org/drawingml/2006/main">
               <a:ext uri="{FF2B5EF4-FFF2-40B4-BE49-F238E27FC236}">
-                <a16:creationId xmlns:a16="http://schemas.microsoft.com/office/drawing/2014/main" id="{56ED884B-C8E5-4A34-99E4-0B2E9FAFC447}"/>
+                <a16:creationId xmlns:a16="http://schemas.microsoft.com/office/drawing/2014/main" id="{102B869A-26A4-4246-AB7C-7F3462ED3F50}"/>
               </a:ext>
             </a:extLst>
           </p:cNvPr>
@@ -12826,7 +12682,7 @@
           <p:cNvPr id="6" name="">
             <a:extLst xmlns:a="http://schemas.openxmlformats.org/drawingml/2006/main">
               <a:ext uri="{FF2B5EF4-FFF2-40B4-BE49-F238E27FC236}">
-                <a16:creationId xmlns:a16="http://schemas.microsoft.com/office/drawing/2014/main" id="{4F585DF6-D350-4118-8D35-D660AF708CC6}"/>
+                <a16:creationId xmlns:a16="http://schemas.microsoft.com/office/drawing/2014/main" id="{C8DA0ABD-77D3-4B29-880B-73EA4818E2EE}"/>
               </a:ext>
             </a:extLst>
           </p:cNvPr>
@@ -12910,7 +12766,7 @@
           <p:cNvPr id="7" name="">
             <a:extLst xmlns:a="http://schemas.openxmlformats.org/drawingml/2006/main">
               <a:ext uri="{FF2B5EF4-FFF2-40B4-BE49-F238E27FC236}">
-                <a16:creationId xmlns:a16="http://schemas.microsoft.com/office/drawing/2014/main" id="{C240F3AD-77AB-49B5-A490-98E0C828D60C}"/>
+                <a16:creationId xmlns:a16="http://schemas.microsoft.com/office/drawing/2014/main" id="{62225C69-C1FD-4B90-AA82-BD514B8D2C9B}"/>
               </a:ext>
             </a:extLst>
           </p:cNvPr>
@@ -13050,7 +12906,7 @@
           <p:cNvPr id="10" name="">
             <a:extLst xmlns:a="http://schemas.openxmlformats.org/drawingml/2006/main">
               <a:ext uri="{FF2B5EF4-FFF2-40B4-BE49-F238E27FC236}">
-                <a16:creationId xmlns:a16="http://schemas.microsoft.com/office/drawing/2014/main" id="{355570F7-854D-4319-881C-3390639647B6}"/>
+                <a16:creationId xmlns:a16="http://schemas.microsoft.com/office/drawing/2014/main" id="{788EF9B9-ACE8-43D8-9CE2-C3F2892627AD}"/>
               </a:ext>
             </a:extLst>
           </p:cNvPr>
@@ -13183,7 +13039,7 @@
     </p:spTree>
     <p:extLst>
       <p:ext uri="{BB962C8B-B14F-4D97-AF65-F5344CB8AC3E}">
-        <p14:creationId xmlns:p14="http://schemas.microsoft.com/office/powerpoint/2010/main" val="203996891"/>
+        <p14:creationId xmlns:p14="http://schemas.microsoft.com/office/powerpoint/2010/main" val="1757600718"/>
       </p:ext>
     </p:extLst>
   </p:cSld>

--- a/presentation/unos_kidney_biopsy.pptx
+++ b/presentation/unos_kidney_biopsy.pptx
@@ -2,28 +2,28 @@
 <file path=ppt/presentation.xml><?xml version="1.0" encoding="utf-8"?>
 <p:presentation xmlns:p="http://schemas.openxmlformats.org/presentationml/2006/main" xmlns:r="http://schemas.openxmlformats.org/officeDocument/2006/relationships">
   <p:sldMasterIdLst>
-    <p:sldMasterId id="2147483648" r:id="R2f5593aa621b4e14"/>
+    <p:sldMasterId id="2147483648" r:id="R50ca9ad9fd284fea"/>
   </p:sldMasterIdLst>
   <p:sldIdLst>
-    <p:sldId id="256" r:id="R6af083f13c514270"/>
-    <p:sldId id="257" r:id="Rd2005c56bab44848"/>
-    <p:sldId id="258" r:id="R575f649317514e6d"/>
-    <p:sldId id="259" r:id="R5c78b9f69e99416c"/>
-    <p:sldId id="260" r:id="R3396020e0e3b4607"/>
-    <p:sldId id="261" r:id="Rde80d4debbc44634"/>
-    <p:sldId id="262" r:id="R28bc347e9b5f45d1"/>
-    <p:sldId id="263" r:id="Raf5f8eb1951f48d4"/>
-    <p:sldId id="264" r:id="R559de7d27ecd4ee4"/>
-    <p:sldId id="265" r:id="R462996b1044b4b66"/>
-    <p:sldId id="266" r:id="R6d1caee9d2924780"/>
-    <p:sldId id="267" r:id="R333a4931b4c04fd4"/>
-    <p:sldId id="268" r:id="R1deb519cb37446a0"/>
-    <p:sldId id="269" r:id="R8982a2c4a3254457"/>
-    <p:sldId id="270" r:id="R9e1c7f4126a94010"/>
-    <p:sldId id="271" r:id="Rcb9a468b62614145"/>
-    <p:sldId id="272" r:id="Re28cc3ae880c4886"/>
-    <p:sldId id="273" r:id="Rd0ffb4a6e6384feb"/>
-    <p:sldId id="274" r:id="R27da1c5114c646c2"/>
+    <p:sldId id="256" r:id="Re7db7bb8a46d4b32"/>
+    <p:sldId id="257" r:id="R4f968604d946492e"/>
+    <p:sldId id="258" r:id="R34c49a3e23a94722"/>
+    <p:sldId id="259" r:id="R686d18927feb48d7"/>
+    <p:sldId id="260" r:id="R565c92036ba34a91"/>
+    <p:sldId id="261" r:id="R6b3df11763304d4a"/>
+    <p:sldId id="262" r:id="R849d321994f741aa"/>
+    <p:sldId id="263" r:id="Rbffebd4ea35540dc"/>
+    <p:sldId id="264" r:id="Rdc77cf83ba53449c"/>
+    <p:sldId id="265" r:id="Rd128ef0c147642eb"/>
+    <p:sldId id="266" r:id="R67e2eab437f2424e"/>
+    <p:sldId id="267" r:id="R900c6fba1bbe4bbf"/>
+    <p:sldId id="268" r:id="Rf0112f79d9cb419d"/>
+    <p:sldId id="269" r:id="R358fd6ca706044ea"/>
+    <p:sldId id="270" r:id="R4f95177ecd4b45b9"/>
+    <p:sldId id="271" r:id="R6136032f43d2435b"/>
+    <p:sldId id="272" r:id="Rbedbe09b8c514403"/>
+    <p:sldId id="273" r:id="Rd0dfdfa4a6284704"/>
+    <p:sldId id="274" r:id="Reb36b179ad554ac2"/>
   </p:sldIdLst>
   <p:sldSz cx="12192000" cy="6858000"/>
   <p:notesSz cx="6858000" cy="9144000"/>
@@ -68,7 +68,7 @@
   </p:cSld>
   <p:clrMap bg1="lt1" tx1="dk1" bg2="lt2" tx2="dk2" accent1="accent1" accent2="accent2" accent3="accent3" accent4="accent4" accent5="accent5" accent6="accent6" hlink="hlink" folHlink="folHlink"/>
   <p:sldLayoutIdLst>
-    <p:sldLayoutId xmlns:r="http://schemas.openxmlformats.org/officeDocument/2006/relationships" id="2147483649" r:id="R810f935cb2bb4b05"/>
+    <p:sldLayoutId xmlns:r="http://schemas.openxmlformats.org/officeDocument/2006/relationships" id="2147483649" r:id="Rebdb733dc8284093"/>
   </p:sldLayoutIdLst>
   <p:txStyles>
     <p:titleStyle>
@@ -876,7 +876,7 @@
           <p:cNvPr id="2" name="">
             <a:extLst xmlns:a="http://schemas.openxmlformats.org/drawingml/2006/main">
               <a:ext uri="{FF2B5EF4-FFF2-40B4-BE49-F238E27FC236}">
-                <a16:creationId xmlns:a16="http://schemas.microsoft.com/office/drawing/2014/main" id="{BDFC2154-D641-48E7-BA1B-E292A3CFF361}"/>
+                <a16:creationId xmlns:a16="http://schemas.microsoft.com/office/drawing/2014/main" id="{9FB5ED01-E630-46ED-8609-55A3E6A3FD72}"/>
               </a:ext>
             </a:extLst>
           </p:cNvPr>
@@ -977,7 +977,7 @@
     </p:spTree>
     <p:extLst>
       <p:ext uri="{BB962C8B-B14F-4D97-AF65-F5344CB8AC3E}">
-        <p14:creationId xmlns:p14="http://schemas.microsoft.com/office/powerpoint/2010/main" val="1031283710"/>
+        <p14:creationId xmlns:p14="http://schemas.microsoft.com/office/powerpoint/2010/main" val="654429306"/>
       </p:ext>
     </p:extLst>
   </p:cSld>
@@ -1008,7 +1008,7 @@
           <p:cNvPr id="6" name="">
             <a:extLst xmlns:a="http://schemas.openxmlformats.org/drawingml/2006/main">
               <a:ext uri="{FF2B5EF4-FFF2-40B4-BE49-F238E27FC236}">
-                <a16:creationId xmlns:a16="http://schemas.microsoft.com/office/drawing/2014/main" id="{0685FF4D-AFA1-41AC-8672-6378914C5B6A}"/>
+                <a16:creationId xmlns:a16="http://schemas.microsoft.com/office/drawing/2014/main" id="{5468FA2C-109C-47F4-9CD6-6E2820246E98}"/>
               </a:ext>
             </a:extLst>
           </p:cNvPr>
@@ -1065,7 +1065,7 @@
           <p:cNvPr id="2" name="">
             <a:extLst xmlns:a="http://schemas.openxmlformats.org/drawingml/2006/main">
               <a:ext uri="{FF2B5EF4-FFF2-40B4-BE49-F238E27FC236}">
-                <a16:creationId xmlns:a16="http://schemas.microsoft.com/office/drawing/2014/main" id="{51BE201A-DE25-4482-8E99-A5EE8FF5B835}"/>
+                <a16:creationId xmlns:a16="http://schemas.microsoft.com/office/drawing/2014/main" id="{C9BE6A94-DB81-4337-A21E-DA2A0845D098}"/>
               </a:ext>
             </a:extLst>
           </p:cNvPr>
@@ -1122,7 +1122,7 @@
           <p:cNvPr id="3" name="">
             <a:extLst xmlns:a="http://schemas.openxmlformats.org/drawingml/2006/main">
               <a:ext uri="{FF2B5EF4-FFF2-40B4-BE49-F238E27FC236}">
-                <a16:creationId xmlns:a16="http://schemas.microsoft.com/office/drawing/2014/main" id="{CDBCBFE4-EFF9-4C14-999F-39D0DD82A92F}"/>
+                <a16:creationId xmlns:a16="http://schemas.microsoft.com/office/drawing/2014/main" id="{796E94DA-7751-4EBF-8D09-FE46C0AF2937}"/>
               </a:ext>
             </a:extLst>
           </p:cNvPr>
@@ -1179,7 +1179,7 @@
           <p:cNvPr id="4" name="">
             <a:extLst xmlns:a="http://schemas.openxmlformats.org/drawingml/2006/main">
               <a:ext uri="{FF2B5EF4-FFF2-40B4-BE49-F238E27FC236}">
-                <a16:creationId xmlns:a16="http://schemas.microsoft.com/office/drawing/2014/main" id="{81C3F490-88C3-4E43-BDC9-80FAF95AD15C}"/>
+                <a16:creationId xmlns:a16="http://schemas.microsoft.com/office/drawing/2014/main" id="{05FA872B-10F4-4533-A9CB-69885B13390A}"/>
               </a:ext>
             </a:extLst>
           </p:cNvPr>
@@ -1591,7 +1591,7 @@
     </p:spTree>
     <p:extLst>
       <p:ext uri="{BB962C8B-B14F-4D97-AF65-F5344CB8AC3E}">
-        <p14:creationId xmlns:p14="http://schemas.microsoft.com/office/powerpoint/2010/main" val="182769313"/>
+        <p14:creationId xmlns:p14="http://schemas.microsoft.com/office/powerpoint/2010/main" val="1497333713"/>
       </p:ext>
     </p:extLst>
   </p:cSld>
@@ -1619,10 +1619,10 @@
       </p:grpSpPr>
       <p:sp>
         <p:nvSpPr>
-          <p:cNvPr id="16" name="">
-            <a:extLst xmlns:a="http://schemas.openxmlformats.org/drawingml/2006/main">
-              <a:ext uri="{FF2B5EF4-FFF2-40B4-BE49-F238E27FC236}">
-                <a16:creationId xmlns:a16="http://schemas.microsoft.com/office/drawing/2014/main" id="{8FF86D79-7813-4009-BDA3-25DB380A239A}"/>
+          <p:cNvPr id="17" name="">
+            <a:extLst xmlns:a="http://schemas.openxmlformats.org/drawingml/2006/main">
+              <a:ext uri="{FF2B5EF4-FFF2-40B4-BE49-F238E27FC236}">
+                <a16:creationId xmlns:a16="http://schemas.microsoft.com/office/drawing/2014/main" id="{2F9D1339-B69F-47AD-9B8B-E164306A21BA}"/>
               </a:ext>
             </a:extLst>
           </p:cNvPr>
@@ -1669,7 +1669,7 @@
                 <a:ea typeface="Arial"/>
                 <a:cs typeface="Arial"/>
               </a:rPr>
-              <a:t>Choosing a rejection threshold</a:t>
+              <a:t>Selecting the model and threshold</a:t>
             </a:r>
           </a:p>
         </p:txBody>
@@ -1679,7 +1679,7 @@
           <p:cNvPr id="2" name="">
             <a:extLst xmlns:a="http://schemas.openxmlformats.org/drawingml/2006/main">
               <a:ext uri="{FF2B5EF4-FFF2-40B4-BE49-F238E27FC236}">
-                <a16:creationId xmlns:a16="http://schemas.microsoft.com/office/drawing/2014/main" id="{B55F21AB-DD30-4803-9712-EE0EE8404CAE}"/>
+                <a16:creationId xmlns:a16="http://schemas.microsoft.com/office/drawing/2014/main" id="{85CA2ABC-BAC1-4D39-A14A-F878B54E6FF8}"/>
               </a:ext>
             </a:extLst>
           </p:cNvPr>
@@ -1726,7 +1726,7 @@
                 <a:ea typeface="Arial"/>
                 <a:cs typeface="Arial"/>
               </a:rPr>
-              <a:t>Reference: recorded biopsy diagnoses. Source: discovery screening rule and model metadata</a:t>
+              <a:t>Reference: recorded biopsy diagnoses. Source: saved discovery screening results, 15 Sep 2026</a:t>
             </a:r>
           </a:p>
         </p:txBody>
@@ -1736,7 +1736,7 @@
           <p:cNvPr id="3" name="">
             <a:extLst xmlns:a="http://schemas.openxmlformats.org/drawingml/2006/main">
               <a:ext uri="{FF2B5EF4-FFF2-40B4-BE49-F238E27FC236}">
-                <a16:creationId xmlns:a16="http://schemas.microsoft.com/office/drawing/2014/main" id="{68D801E5-241B-4470-889C-7874FD170DBE}"/>
+                <a16:creationId xmlns:a16="http://schemas.microsoft.com/office/drawing/2014/main" id="{91B9B459-1BB3-4BB9-90F3-A18C628439A5}"/>
               </a:ext>
             </a:extLst>
           </p:cNvPr>
@@ -1793,19 +1793,19 @@
           <p:cNvPr id="4" name="">
             <a:extLst xmlns:a="http://schemas.openxmlformats.org/drawingml/2006/main">
               <a:ext uri="{FF2B5EF4-FFF2-40B4-BE49-F238E27FC236}">
-                <a16:creationId xmlns:a16="http://schemas.microsoft.com/office/drawing/2014/main" id="{832DD8D2-FF57-44AE-884E-85C2C88102CB}"/>
-              </a:ext>
-            </a:extLst>
-          </p:cNvPr>
-          <p:cNvSpPr>
-            <a:spLocks xmlns:a="http://schemas.openxmlformats.org/drawingml/2006/main" noGrp="1"/>
-          </p:cNvSpPr>
-          <p:nvPr/>
-        </p:nvSpPr>
-        <p:spPr>
-          <a:xfrm xmlns:a="http://schemas.openxmlformats.org/drawingml/2006/main">
-            <a:off x="609600" y="1590675"/>
-            <a:ext cx="5181600" cy="428625"/>
+                <a16:creationId xmlns:a16="http://schemas.microsoft.com/office/drawing/2014/main" id="{0264A9A8-9D23-41C1-9CA0-A8A28146BE16}"/>
+              </a:ext>
+            </a:extLst>
+          </p:cNvPr>
+          <p:cNvSpPr>
+            <a:spLocks xmlns:a="http://schemas.openxmlformats.org/drawingml/2006/main" noGrp="1"/>
+          </p:cNvSpPr>
+          <p:nvPr/>
+        </p:nvSpPr>
+        <p:spPr>
+          <a:xfrm xmlns:a="http://schemas.openxmlformats.org/drawingml/2006/main">
+            <a:off x="609600" y="1476375"/>
+            <a:ext cx="5181600" cy="409575"/>
           </a:xfrm>
           <a:prstGeom xmlns:a="http://schemas.openxmlformats.org/drawingml/2006/main" prst="rect">
             <a:avLst/>
@@ -1850,19 +1850,19 @@
           <p:cNvPr id="5" name="">
             <a:extLst xmlns:a="http://schemas.openxmlformats.org/drawingml/2006/main">
               <a:ext uri="{FF2B5EF4-FFF2-40B4-BE49-F238E27FC236}">
-                <a16:creationId xmlns:a16="http://schemas.microsoft.com/office/drawing/2014/main" id="{4F9D5E13-637C-48B6-85BD-A0EEB57955F7}"/>
-              </a:ext>
-            </a:extLst>
-          </p:cNvPr>
-          <p:cNvSpPr>
-            <a:spLocks xmlns:a="http://schemas.openxmlformats.org/drawingml/2006/main" noGrp="1"/>
-          </p:cNvSpPr>
-          <p:nvPr/>
-        </p:nvSpPr>
-        <p:spPr>
-          <a:xfrm xmlns:a="http://schemas.openxmlformats.org/drawingml/2006/main">
-            <a:off x="609600" y="2124075"/>
-            <a:ext cx="5181600" cy="447675"/>
+                <a16:creationId xmlns:a16="http://schemas.microsoft.com/office/drawing/2014/main" id="{3DDA304F-5E34-4FCD-B021-6865DFE00B11}"/>
+              </a:ext>
+            </a:extLst>
+          </p:cNvPr>
+          <p:cNvSpPr>
+            <a:spLocks xmlns:a="http://schemas.openxmlformats.org/drawingml/2006/main" noGrp="1"/>
+          </p:cNvSpPr>
+          <p:nvPr/>
+        </p:nvSpPr>
+        <p:spPr>
+          <a:xfrm xmlns:a="http://schemas.openxmlformats.org/drawingml/2006/main">
+            <a:off x="609600" y="1943100"/>
+            <a:ext cx="5181600" cy="409575"/>
           </a:xfrm>
           <a:prstGeom xmlns:a="http://schemas.openxmlformats.org/drawingml/2006/main" prst="rect">
             <a:avLst/>
@@ -1907,18 +1907,18 @@
           <p:cNvPr id="6" name="">
             <a:extLst xmlns:a="http://schemas.openxmlformats.org/drawingml/2006/main">
               <a:ext uri="{FF2B5EF4-FFF2-40B4-BE49-F238E27FC236}">
-                <a16:creationId xmlns:a16="http://schemas.microsoft.com/office/drawing/2014/main" id="{82D4EE50-7DFA-4261-A6DA-B261A8A9F136}"/>
-              </a:ext>
-            </a:extLst>
-          </p:cNvPr>
-          <p:cNvSpPr>
-            <a:spLocks xmlns:a="http://schemas.openxmlformats.org/drawingml/2006/main" noGrp="1"/>
-          </p:cNvSpPr>
-          <p:nvPr/>
-        </p:nvSpPr>
-        <p:spPr>
-          <a:xfrm xmlns:a="http://schemas.openxmlformats.org/drawingml/2006/main">
-            <a:off x="723900" y="2647950"/>
+                <a16:creationId xmlns:a16="http://schemas.microsoft.com/office/drawing/2014/main" id="{A77590C4-F4EA-44F4-B546-DE2BFF0D1E45}"/>
+              </a:ext>
+            </a:extLst>
+          </p:cNvPr>
+          <p:cNvSpPr>
+            <a:spLocks xmlns:a="http://schemas.openxmlformats.org/drawingml/2006/main" noGrp="1"/>
+          </p:cNvSpPr>
+          <p:nvPr/>
+        </p:nvSpPr>
+        <p:spPr>
+          <a:xfrm xmlns:a="http://schemas.openxmlformats.org/drawingml/2006/main">
+            <a:off x="723900" y="2400300"/>
             <a:ext cx="4953000" cy="0"/>
           </a:xfrm>
           <a:prstGeom xmlns:a="http://schemas.openxmlformats.org/drawingml/2006/main" prst="line">
@@ -1936,19 +1936,19 @@
           <p:cNvPr id="7" name="">
             <a:extLst xmlns:a="http://schemas.openxmlformats.org/drawingml/2006/main">
               <a:ext uri="{FF2B5EF4-FFF2-40B4-BE49-F238E27FC236}">
-                <a16:creationId xmlns:a16="http://schemas.microsoft.com/office/drawing/2014/main" id="{DE0FFA52-364F-4537-A107-951CE7D2BDE3}"/>
-              </a:ext>
-            </a:extLst>
-          </p:cNvPr>
-          <p:cNvSpPr>
-            <a:spLocks xmlns:a="http://schemas.openxmlformats.org/drawingml/2006/main" noGrp="1"/>
-          </p:cNvSpPr>
-          <p:nvPr/>
-        </p:nvSpPr>
-        <p:spPr>
-          <a:xfrm xmlns:a="http://schemas.openxmlformats.org/drawingml/2006/main">
-            <a:off x="609600" y="2705100"/>
-            <a:ext cx="5181600" cy="447675"/>
+                <a16:creationId xmlns:a16="http://schemas.microsoft.com/office/drawing/2014/main" id="{0365FFDE-2F2F-4B25-A08C-8D3622C31FA5}"/>
+              </a:ext>
+            </a:extLst>
+          </p:cNvPr>
+          <p:cNvSpPr>
+            <a:spLocks xmlns:a="http://schemas.openxmlformats.org/drawingml/2006/main" noGrp="1"/>
+          </p:cNvSpPr>
+          <p:nvPr/>
+        </p:nvSpPr>
+        <p:spPr>
+          <a:xfrm xmlns:a="http://schemas.openxmlformats.org/drawingml/2006/main">
+            <a:off x="609600" y="2486025"/>
+            <a:ext cx="5181600" cy="409575"/>
           </a:xfrm>
           <a:prstGeom xmlns:a="http://schemas.openxmlformats.org/drawingml/2006/main" prst="rect">
             <a:avLst/>
@@ -1993,19 +1993,19 @@
           <p:cNvPr id="8" name="">
             <a:extLst xmlns:a="http://schemas.openxmlformats.org/drawingml/2006/main">
               <a:ext uri="{FF2B5EF4-FFF2-40B4-BE49-F238E27FC236}">
-                <a16:creationId xmlns:a16="http://schemas.microsoft.com/office/drawing/2014/main" id="{23161C76-98E1-4335-BF82-CF35C9E35B15}"/>
-              </a:ext>
-            </a:extLst>
-          </p:cNvPr>
-          <p:cNvSpPr>
-            <a:spLocks xmlns:a="http://schemas.openxmlformats.org/drawingml/2006/main" noGrp="1"/>
-          </p:cNvSpPr>
-          <p:nvPr/>
-        </p:nvSpPr>
-        <p:spPr>
-          <a:xfrm xmlns:a="http://schemas.openxmlformats.org/drawingml/2006/main">
-            <a:off x="609600" y="3257550"/>
-            <a:ext cx="5181600" cy="523875"/>
+                <a16:creationId xmlns:a16="http://schemas.microsoft.com/office/drawing/2014/main" id="{68FE5F7B-3BB8-4E93-B2C4-3DAD49A110B1}"/>
+              </a:ext>
+            </a:extLst>
+          </p:cNvPr>
+          <p:cNvSpPr>
+            <a:spLocks xmlns:a="http://schemas.openxmlformats.org/drawingml/2006/main" noGrp="1"/>
+          </p:cNvSpPr>
+          <p:nvPr/>
+        </p:nvSpPr>
+        <p:spPr>
+          <a:xfrm xmlns:a="http://schemas.openxmlformats.org/drawingml/2006/main">
+            <a:off x="609600" y="2981325"/>
+            <a:ext cx="5181600" cy="409575"/>
           </a:xfrm>
           <a:prstGeom xmlns:a="http://schemas.openxmlformats.org/drawingml/2006/main" prst="rect">
             <a:avLst/>
@@ -2022,7 +2022,7 @@
           <a:lstStyle xmlns:a="http://schemas.openxmlformats.org/drawingml/2006/main"/>
           <a:p xmlns:a="http://schemas.openxmlformats.org/drawingml/2006/main">
             <a:pPr algn="l">
-              <a:defRPr sz="2100" b="0">
+              <a:defRPr sz="2025" b="0">
                 <a:solidFill>
                   <a:srgbClr val="B55730"/>
                 </a:solidFill>
@@ -2032,7 +2032,7 @@
               </a:defRPr>
             </a:pPr>
             <a:r>
-              <a:rPr sz="2100" b="0">
+              <a:rPr sz="2025" b="0">
                 <a:solidFill>
                   <a:srgbClr val="B55730"/>
                 </a:solidFill>
@@ -2050,19 +2050,19 @@
           <p:cNvPr id="9" name="">
             <a:extLst xmlns:a="http://schemas.openxmlformats.org/drawingml/2006/main">
               <a:ext uri="{FF2B5EF4-FFF2-40B4-BE49-F238E27FC236}">
-                <a16:creationId xmlns:a16="http://schemas.microsoft.com/office/drawing/2014/main" id="{5560FA24-84CD-4B0E-A326-A837FFB6E01E}"/>
-              </a:ext>
-            </a:extLst>
-          </p:cNvPr>
-          <p:cNvSpPr>
-            <a:spLocks xmlns:a="http://schemas.openxmlformats.org/drawingml/2006/main" noGrp="1"/>
-          </p:cNvSpPr>
-          <p:nvPr/>
-        </p:nvSpPr>
-        <p:spPr>
-          <a:xfrm xmlns:a="http://schemas.openxmlformats.org/drawingml/2006/main">
-            <a:off x="6705600" y="1590675"/>
-            <a:ext cx="4876800" cy="428625"/>
+                <a16:creationId xmlns:a16="http://schemas.microsoft.com/office/drawing/2014/main" id="{06E50C29-8DF7-475B-98BC-7733C219A8C9}"/>
+              </a:ext>
+            </a:extLst>
+          </p:cNvPr>
+          <p:cNvSpPr>
+            <a:spLocks xmlns:a="http://schemas.openxmlformats.org/drawingml/2006/main" noGrp="1"/>
+          </p:cNvSpPr>
+          <p:nvPr/>
+        </p:nvSpPr>
+        <p:spPr>
+          <a:xfrm xmlns:a="http://schemas.openxmlformats.org/drawingml/2006/main">
+            <a:off x="6705600" y="1476375"/>
+            <a:ext cx="4876800" cy="409575"/>
           </a:xfrm>
           <a:prstGeom xmlns:a="http://schemas.openxmlformats.org/drawingml/2006/main" prst="rect">
             <a:avLst/>
@@ -2107,19 +2107,19 @@
           <p:cNvPr id="10" name="">
             <a:extLst xmlns:a="http://schemas.openxmlformats.org/drawingml/2006/main">
               <a:ext uri="{FF2B5EF4-FFF2-40B4-BE49-F238E27FC236}">
-                <a16:creationId xmlns:a16="http://schemas.microsoft.com/office/drawing/2014/main" id="{B5FCE23D-6425-45BB-999F-4B8D1FD698B6}"/>
-              </a:ext>
-            </a:extLst>
-          </p:cNvPr>
-          <p:cNvSpPr>
-            <a:spLocks xmlns:a="http://schemas.openxmlformats.org/drawingml/2006/main" noGrp="1"/>
-          </p:cNvSpPr>
-          <p:nvPr/>
-        </p:nvSpPr>
-        <p:spPr>
-          <a:xfrm xmlns:a="http://schemas.openxmlformats.org/drawingml/2006/main">
-            <a:off x="6705600" y="2124075"/>
-            <a:ext cx="4876800" cy="447675"/>
+                <a16:creationId xmlns:a16="http://schemas.microsoft.com/office/drawing/2014/main" id="{200837CC-1440-4C66-B50B-0184CC268DA1}"/>
+              </a:ext>
+            </a:extLst>
+          </p:cNvPr>
+          <p:cNvSpPr>
+            <a:spLocks xmlns:a="http://schemas.openxmlformats.org/drawingml/2006/main" noGrp="1"/>
+          </p:cNvSpPr>
+          <p:nvPr/>
+        </p:nvSpPr>
+        <p:spPr>
+          <a:xfrm xmlns:a="http://schemas.openxmlformats.org/drawingml/2006/main">
+            <a:off x="6705600" y="1943100"/>
+            <a:ext cx="4876800" cy="409575"/>
           </a:xfrm>
           <a:prstGeom xmlns:a="http://schemas.openxmlformats.org/drawingml/2006/main" prst="rect">
             <a:avLst/>
@@ -2164,18 +2164,18 @@
           <p:cNvPr id="11" name="">
             <a:extLst xmlns:a="http://schemas.openxmlformats.org/drawingml/2006/main">
               <a:ext uri="{FF2B5EF4-FFF2-40B4-BE49-F238E27FC236}">
-                <a16:creationId xmlns:a16="http://schemas.microsoft.com/office/drawing/2014/main" id="{AAA5B813-FB01-4742-85BC-A7BAFED9D194}"/>
-              </a:ext>
-            </a:extLst>
-          </p:cNvPr>
-          <p:cNvSpPr>
-            <a:spLocks xmlns:a="http://schemas.openxmlformats.org/drawingml/2006/main" noGrp="1"/>
-          </p:cNvSpPr>
-          <p:nvPr/>
-        </p:nvSpPr>
-        <p:spPr>
-          <a:xfrm xmlns:a="http://schemas.openxmlformats.org/drawingml/2006/main">
-            <a:off x="6819900" y="2647950"/>
+                <a16:creationId xmlns:a16="http://schemas.microsoft.com/office/drawing/2014/main" id="{1E34DBEE-F172-4903-94ED-6F2F356F1C4F}"/>
+              </a:ext>
+            </a:extLst>
+          </p:cNvPr>
+          <p:cNvSpPr>
+            <a:spLocks xmlns:a="http://schemas.openxmlformats.org/drawingml/2006/main" noGrp="1"/>
+          </p:cNvSpPr>
+          <p:nvPr/>
+        </p:nvSpPr>
+        <p:spPr>
+          <a:xfrm xmlns:a="http://schemas.openxmlformats.org/drawingml/2006/main">
+            <a:off x="6819900" y="2400300"/>
             <a:ext cx="4648200" cy="0"/>
           </a:xfrm>
           <a:prstGeom xmlns:a="http://schemas.openxmlformats.org/drawingml/2006/main" prst="line">
@@ -2193,19 +2193,19 @@
           <p:cNvPr id="12" name="">
             <a:extLst xmlns:a="http://schemas.openxmlformats.org/drawingml/2006/main">
               <a:ext uri="{FF2B5EF4-FFF2-40B4-BE49-F238E27FC236}">
-                <a16:creationId xmlns:a16="http://schemas.microsoft.com/office/drawing/2014/main" id="{12B68387-D58F-45F8-A27A-4E205405FF6B}"/>
-              </a:ext>
-            </a:extLst>
-          </p:cNvPr>
-          <p:cNvSpPr>
-            <a:spLocks xmlns:a="http://schemas.openxmlformats.org/drawingml/2006/main" noGrp="1"/>
-          </p:cNvSpPr>
-          <p:nvPr/>
-        </p:nvSpPr>
-        <p:spPr>
-          <a:xfrm xmlns:a="http://schemas.openxmlformats.org/drawingml/2006/main">
-            <a:off x="6705600" y="2705100"/>
-            <a:ext cx="4876800" cy="447675"/>
+                <a16:creationId xmlns:a16="http://schemas.microsoft.com/office/drawing/2014/main" id="{AF584EB6-4B4F-4EEE-AC12-F5C06ECBD4A7}"/>
+              </a:ext>
+            </a:extLst>
+          </p:cNvPr>
+          <p:cNvSpPr>
+            <a:spLocks xmlns:a="http://schemas.openxmlformats.org/drawingml/2006/main" noGrp="1"/>
+          </p:cNvSpPr>
+          <p:nvPr/>
+        </p:nvSpPr>
+        <p:spPr>
+          <a:xfrm xmlns:a="http://schemas.openxmlformats.org/drawingml/2006/main">
+            <a:off x="6705600" y="2486025"/>
+            <a:ext cx="4876800" cy="409575"/>
           </a:xfrm>
           <a:prstGeom xmlns:a="http://schemas.openxmlformats.org/drawingml/2006/main" prst="rect">
             <a:avLst/>
@@ -2250,19 +2250,19 @@
           <p:cNvPr id="13" name="">
             <a:extLst xmlns:a="http://schemas.openxmlformats.org/drawingml/2006/main">
               <a:ext uri="{FF2B5EF4-FFF2-40B4-BE49-F238E27FC236}">
-                <a16:creationId xmlns:a16="http://schemas.microsoft.com/office/drawing/2014/main" id="{8A4FC4EC-3D67-4901-84AC-FDCA80B99A7E}"/>
-              </a:ext>
-            </a:extLst>
-          </p:cNvPr>
-          <p:cNvSpPr>
-            <a:spLocks xmlns:a="http://schemas.openxmlformats.org/drawingml/2006/main" noGrp="1"/>
-          </p:cNvSpPr>
-          <p:nvPr/>
-        </p:nvSpPr>
-        <p:spPr>
-          <a:xfrm xmlns:a="http://schemas.openxmlformats.org/drawingml/2006/main">
-            <a:off x="6705600" y="3257550"/>
-            <a:ext cx="4876800" cy="523875"/>
+                <a16:creationId xmlns:a16="http://schemas.microsoft.com/office/drawing/2014/main" id="{56951C02-3FEF-43C0-B939-1056B496ADD6}"/>
+              </a:ext>
+            </a:extLst>
+          </p:cNvPr>
+          <p:cNvSpPr>
+            <a:spLocks xmlns:a="http://schemas.openxmlformats.org/drawingml/2006/main" noGrp="1"/>
+          </p:cNvSpPr>
+          <p:nvPr/>
+        </p:nvSpPr>
+        <p:spPr>
+          <a:xfrm xmlns:a="http://schemas.openxmlformats.org/drawingml/2006/main">
+            <a:off x="6705600" y="2981325"/>
+            <a:ext cx="4876800" cy="409575"/>
           </a:xfrm>
           <a:prstGeom xmlns:a="http://schemas.openxmlformats.org/drawingml/2006/main" prst="rect">
             <a:avLst/>
@@ -2279,7 +2279,7 @@
           <a:lstStyle xmlns:a="http://schemas.openxmlformats.org/drawingml/2006/main"/>
           <a:p xmlns:a="http://schemas.openxmlformats.org/drawingml/2006/main">
             <a:pPr algn="l">
-              <a:defRPr sz="2100" b="0">
+              <a:defRPr sz="2025" b="0">
                 <a:solidFill>
                   <a:srgbClr val="007C78"/>
                 </a:solidFill>
@@ -2289,7 +2289,7 @@
               </a:defRPr>
             </a:pPr>
             <a:r>
-              <a:rPr sz="2100" b="0">
+              <a:rPr sz="2025" b="0">
                 <a:solidFill>
                   <a:srgbClr val="007C78"/>
                 </a:solidFill>
@@ -2307,19 +2307,19 @@
           <p:cNvPr id="14" name="">
             <a:extLst xmlns:a="http://schemas.openxmlformats.org/drawingml/2006/main">
               <a:ext uri="{FF2B5EF4-FFF2-40B4-BE49-F238E27FC236}">
-                <a16:creationId xmlns:a16="http://schemas.microsoft.com/office/drawing/2014/main" id="{444E11BE-55FB-4615-BADB-618CE9E22FE0}"/>
-              </a:ext>
-            </a:extLst>
-          </p:cNvPr>
-          <p:cNvSpPr>
-            <a:spLocks xmlns:a="http://schemas.openxmlformats.org/drawingml/2006/main" noGrp="1"/>
-          </p:cNvSpPr>
-          <p:nvPr/>
-        </p:nvSpPr>
-        <p:spPr>
-          <a:xfrm xmlns:a="http://schemas.openxmlformats.org/drawingml/2006/main">
-            <a:off x="609600" y="4000500"/>
-            <a:ext cx="10972800" cy="381000"/>
+                <a16:creationId xmlns:a16="http://schemas.microsoft.com/office/drawing/2014/main" id="{EA390391-0978-4050-A971-78EB3D96AD6E}"/>
+              </a:ext>
+            </a:extLst>
+          </p:cNvPr>
+          <p:cNvSpPr>
+            <a:spLocks xmlns:a="http://schemas.openxmlformats.org/drawingml/2006/main" noGrp="1"/>
+          </p:cNvSpPr>
+          <p:nvPr/>
+        </p:nvSpPr>
+        <p:spPr>
+          <a:xfrm xmlns:a="http://schemas.openxmlformats.org/drawingml/2006/main">
+            <a:off x="609600" y="3552825"/>
+            <a:ext cx="10972800" cy="695325"/>
           </a:xfrm>
           <a:prstGeom xmlns:a="http://schemas.openxmlformats.org/drawingml/2006/main" prst="rect">
             <a:avLst/>
@@ -2336,48 +2336,72 @@
           <a:lstStyle xmlns:a="http://schemas.openxmlformats.org/drawingml/2006/main"/>
           <a:p xmlns:a="http://schemas.openxmlformats.org/drawingml/2006/main">
             <a:pPr algn="l">
-              <a:defRPr sz="2400" b="1">
-                <a:solidFill>
-                  <a:srgbClr val="16343E"/>
-                </a:solidFill>
-                <a:latin typeface="Arial"/>
-                <a:ea typeface="Arial"/>
-                <a:cs typeface="Arial"/>
-              </a:defRPr>
-            </a:pPr>
-            <a:r>
-              <a:rPr sz="2400" b="1">
-                <a:solidFill>
-                  <a:srgbClr val="16343E"/>
-                </a:solidFill>
-                <a:latin typeface="Arial"/>
-                <a:ea typeface="Arial"/>
-                <a:cs typeface="Arial"/>
-              </a:rPr>
-              <a:t>My selection rule for screening specimens</a:t>
+              <a:defRPr sz="2100" b="1">
+                <a:solidFill>
+                  <a:srgbClr val="16343E"/>
+                </a:solidFill>
+                <a:latin typeface="Arial"/>
+                <a:ea typeface="Arial"/>
+                <a:cs typeface="Arial"/>
+              </a:defRPr>
+            </a:pPr>
+            <a:r>
+              <a:rPr sz="2100" b="1">
+                <a:solidFill>
+                  <a:srgbClr val="16343E"/>
+                </a:solidFill>
+                <a:latin typeface="Arial"/>
+                <a:ea typeface="Arial"/>
+                <a:cs typeface="Arial"/>
+              </a:rPr>
+              <a:t>Screening rule: detect at least 90% of recorded rejection cases,</a:t>
+            </a:r>
+          </a:p>
+          <a:p xmlns:a="http://schemas.openxmlformats.org/drawingml/2006/main">
+            <a:pPr algn="l">
+              <a:defRPr sz="2100" b="1">
+                <a:solidFill>
+                  <a:srgbClr val="16343E"/>
+                </a:solidFill>
+                <a:latin typeface="Arial"/>
+                <a:ea typeface="Arial"/>
+                <a:cs typeface="Arial"/>
+              </a:defRPr>
+            </a:pPr>
+            <a:r>
+              <a:rPr sz="2100" b="1">
+                <a:solidFill>
+                  <a:srgbClr val="16343E"/>
+                </a:solidFill>
+                <a:latin typeface="Arial"/>
+                <a:ea typeface="Arial"/>
+                <a:cs typeface="Arial"/>
+              </a:rPr>
+              <a:t>then minimize false positives. ROC-AUC breaks ties.</a:t>
             </a:r>
           </a:p>
         </p:txBody>
       </p:sp>
       <p:graphicFrame>
         <p:nvGraphicFramePr>
-          <p:cNvPr id="30" name=""/>
+          <p:cNvPr id="31" name=""/>
           <p:cNvGraphicFramePr/>
           <p:nvPr/>
         </p:nvGraphicFramePr>
         <p:xfrm>
-          <a:off xmlns:a="http://schemas.openxmlformats.org/drawingml/2006/main" x="609600" y="4505325"/>
-          <a:ext xmlns:a="http://schemas.openxmlformats.org/drawingml/2006/main" cx="10972800" cy="1438275"/>
+          <a:off xmlns:a="http://schemas.openxmlformats.org/drawingml/2006/main" x="609600" y="4419600"/>
+          <a:ext xmlns:a="http://schemas.openxmlformats.org/drawingml/2006/main" cx="10972800" cy="1200150"/>
         </p:xfrm>
         <a:graphic xmlns:a="http://schemas.openxmlformats.org/drawingml/2006/main">
           <a:graphicData uri="http://schemas.openxmlformats.org/drawingml/2006/table">
             <a:tbl>
               <a:tblPr/>
               <a:tblGrid>
-                <a:gridCol w="1066800"/>
-                <a:gridCol w="9906000"/>
+                <a:gridCol w="4762500"/>
+                <a:gridCol w="3105150"/>
+                <a:gridCol w="3105150"/>
               </a:tblGrid>
-              <a:tr h="352425">
+              <a:tr h="400050">
                 <a:tc>
                   <a:txBody>
                     <a:bodyPr>
@@ -2386,7 +2410,7 @@
                     <a:lstStyle/>
                     <a:p>
                       <a:r>
-                        <a:rPr sz="1875" b="1">
+                        <a:rPr sz="2025" b="1">
                           <a:solidFill>
                             <a:srgbClr val="FFFFFF"/>
                           </a:solidFill>
@@ -2394,11 +2418,11 @@
                           <a:ea typeface="Arial"/>
                           <a:cs typeface="Arial"/>
                         </a:rPr>
-                        <a:t>Step</a:t>
+                        <a:t>Screening result</a:t>
                       </a:r>
                     </a:p>
                   </a:txBody>
-                  <a:tcPr marL="171450" marR="142875" marT="19050" marB="19050" anchor="ctr">
+                  <a:tcPr marL="171450" marR="142875" marT="28575" marB="28575" anchor="ctr">
                     <a:solidFill>
                       <a:srgbClr val="16343E"/>
                     </a:solidFill>
@@ -2412,7 +2436,7 @@
                     <a:lstStyle/>
                     <a:p>
                       <a:r>
-                        <a:rPr sz="1875" b="1">
+                        <a:rPr sz="2025" b="1">
                           <a:solidFill>
                             <a:srgbClr val="FFFFFF"/>
                           </a:solidFill>
@@ -2420,18 +2444,16 @@
                           <a:ea typeface="Arial"/>
                           <a:cs typeface="Arial"/>
                         </a:rPr>
-                        <a:t>Rule</a:t>
+                        <a:t>CatBoost</a:t>
                       </a:r>
                     </a:p>
                   </a:txBody>
-                  <a:tcPr marL="171450" marR="142875" marT="19050" marB="19050" anchor="ctr">
+                  <a:tcPr marL="171450" marR="142875" marT="28575" marB="28575" anchor="ctr">
                     <a:solidFill>
                       <a:srgbClr val="16343E"/>
                     </a:solidFill>
                   </a:tcPr>
                 </a:tc>
-              </a:tr>
-              <a:tr h="361950">
                 <a:tc>
                   <a:txBody>
                     <a:bodyPr>
@@ -2440,7 +2462,35 @@
                     <a:lstStyle/>
                     <a:p>
                       <a:r>
-                        <a:rPr sz="1875" b="0">
+                        <a:rPr sz="2025" b="1">
+                          <a:solidFill>
+                            <a:srgbClr val="FFFFFF"/>
+                          </a:solidFill>
+                          <a:latin typeface="Arial"/>
+                          <a:ea typeface="Arial"/>
+                          <a:cs typeface="Arial"/>
+                        </a:rPr>
+                        <a:t>All-RNA logistic</a:t>
+                      </a:r>
+                    </a:p>
+                  </a:txBody>
+                  <a:tcPr marL="171450" marR="142875" marT="28575" marB="28575" anchor="ctr">
+                    <a:solidFill>
+                      <a:srgbClr val="16343E"/>
+                    </a:solidFill>
+                  </a:tcPr>
+                </a:tc>
+              </a:tr>
+              <a:tr h="400050">
+                <a:tc>
+                  <a:txBody>
+                    <a:bodyPr>
+                      <a:noAutofit/>
+                    </a:bodyPr>
+                    <a:lstStyle/>
+                    <a:p>
+                      <a:r>
+                        <a:rPr sz="2025" b="0">
                           <a:solidFill>
                             <a:srgbClr val="16343E"/>
                           </a:solidFill>
@@ -2448,11 +2498,11 @@
                           <a:ea typeface="Arial"/>
                           <a:cs typeface="Arial"/>
                         </a:rPr>
-                        <a:t>1</a:t>
+                        <a:t>Rejection detected</a:t>
                       </a:r>
                     </a:p>
                   </a:txBody>
-                  <a:tcPr marL="171450" marR="142875" marT="19050" marB="19050" anchor="ctr">
+                  <a:tcPr marL="171450" marR="142875" marT="28575" marB="28575" anchor="ctr">
                     <a:solidFill>
                       <a:srgbClr val="FFFFFF"/>
                     </a:solidFill>
@@ -2466,7 +2516,7 @@
                     <a:lstStyle/>
                     <a:p>
                       <a:r>
-                        <a:rPr sz="1875" b="0">
+                        <a:rPr sz="2025" b="0">
                           <a:solidFill>
                             <a:srgbClr val="16343E"/>
                           </a:solidFill>
@@ -2474,18 +2524,16 @@
                           <a:ea typeface="Arial"/>
                           <a:cs typeface="Arial"/>
                         </a:rPr>
-                        <a:t>Detect at least 90% of cases diagnosed as rejection.</a:t>
+                        <a:t>157 / 174</a:t>
                       </a:r>
                     </a:p>
                   </a:txBody>
-                  <a:tcPr marL="171450" marR="142875" marT="19050" marB="19050" anchor="ctr">
+                  <a:tcPr marL="171450" marR="142875" marT="28575" marB="28575" anchor="ctr">
                     <a:solidFill>
                       <a:srgbClr val="FFFFFF"/>
                     </a:solidFill>
                   </a:tcPr>
                 </a:tc>
-              </a:tr>
-              <a:tr h="361950">
                 <a:tc>
                   <a:txBody>
                     <a:bodyPr>
@@ -2494,7 +2542,7 @@
                     <a:lstStyle/>
                     <a:p>
                       <a:r>
-                        <a:rPr sz="1875" b="0">
+                        <a:rPr sz="2025" b="0">
                           <a:solidFill>
                             <a:srgbClr val="16343E"/>
                           </a:solidFill>
@@ -2502,11 +2550,39 @@
                           <a:ea typeface="Arial"/>
                           <a:cs typeface="Arial"/>
                         </a:rPr>
-                        <a:t>2</a:t>
+                        <a:t>157 / 174</a:t>
                       </a:r>
                     </a:p>
                   </a:txBody>
-                  <a:tcPr marL="171450" marR="142875" marT="19050" marB="19050" anchor="ctr">
+                  <a:tcPr marL="171450" marR="142875" marT="28575" marB="28575" anchor="ctr">
+                    <a:solidFill>
+                      <a:srgbClr val="FFFFFF"/>
+                    </a:solidFill>
+                  </a:tcPr>
+                </a:tc>
+              </a:tr>
+              <a:tr h="400050">
+                <a:tc>
+                  <a:txBody>
+                    <a:bodyPr>
+                      <a:noAutofit/>
+                    </a:bodyPr>
+                    <a:lstStyle/>
+                    <a:p>
+                      <a:r>
+                        <a:rPr sz="2025" b="0">
+                          <a:solidFill>
+                            <a:srgbClr val="16343E"/>
+                          </a:solidFill>
+                          <a:latin typeface="Arial"/>
+                          <a:ea typeface="Arial"/>
+                          <a:cs typeface="Arial"/>
+                        </a:rPr>
+                        <a:t>False positives</a:t>
+                      </a:r>
+                    </a:p>
+                  </a:txBody>
+                  <a:tcPr marL="171450" marR="142875" marT="28575" marB="28575" anchor="ctr">
                     <a:solidFill>
                       <a:srgbClr val="EDF3F0"/>
                     </a:solidFill>
@@ -2520,7 +2596,7 @@
                     <a:lstStyle/>
                     <a:p>
                       <a:r>
-                        <a:rPr sz="1875" b="0">
+                        <a:rPr sz="2025" b="0">
                           <a:solidFill>
                             <a:srgbClr val="16343E"/>
                           </a:solidFill>
@@ -2528,41 +2604,13 @@
                           <a:ea typeface="Arial"/>
                           <a:cs typeface="Arial"/>
                         </a:rPr>
-                        <a:t>Among qualifying choices, minimize false positives.</a:t>
+                        <a:t>5 / 89</a:t>
                       </a:r>
                     </a:p>
                   </a:txBody>
-                  <a:tcPr marL="171450" marR="142875" marT="19050" marB="19050" anchor="ctr">
+                  <a:tcPr marL="171450" marR="142875" marT="28575" marB="28575" anchor="ctr">
                     <a:solidFill>
                       <a:srgbClr val="EDF3F0"/>
-                    </a:solidFill>
-                  </a:tcPr>
-                </a:tc>
-              </a:tr>
-              <a:tr h="361950">
-                <a:tc>
-                  <a:txBody>
-                    <a:bodyPr>
-                      <a:noAutofit/>
-                    </a:bodyPr>
-                    <a:lstStyle/>
-                    <a:p>
-                      <a:r>
-                        <a:rPr sz="1875" b="0">
-                          <a:solidFill>
-                            <a:srgbClr val="16343E"/>
-                          </a:solidFill>
-                          <a:latin typeface="Arial"/>
-                          <a:ea typeface="Arial"/>
-                          <a:cs typeface="Arial"/>
-                        </a:rPr>
-                        <a:t>3</a:t>
-                      </a:r>
-                    </a:p>
-                  </a:txBody>
-                  <a:tcPr marL="171450" marR="142875" marT="19050" marB="19050" anchor="ctr">
-                    <a:solidFill>
-                      <a:srgbClr val="FFFFFF"/>
                     </a:solidFill>
                   </a:tcPr>
                 </a:tc>
@@ -2574,7 +2622,7 @@
                     <a:lstStyle/>
                     <a:p>
                       <a:r>
-                        <a:rPr sz="1875" b="0">
+                        <a:rPr sz="2025" b="0">
                           <a:solidFill>
                             <a:srgbClr val="16343E"/>
                           </a:solidFill>
@@ -2582,13 +2630,13 @@
                           <a:ea typeface="Arial"/>
                           <a:cs typeface="Arial"/>
                         </a:rPr>
-                        <a:t>Keep the chosen model and threshold for evaluation.</a:t>
+                        <a:t>6 / 89</a:t>
                       </a:r>
                     </a:p>
                   </a:txBody>
-                  <a:tcPr marL="171450" marR="142875" marT="19050" marB="19050" anchor="ctr">
+                  <a:tcPr marL="171450" marR="142875" marT="28575" marB="28575" anchor="ctr">
                     <a:solidFill>
-                      <a:srgbClr val="FFFFFF"/>
+                      <a:srgbClr val="EDF3F0"/>
                     </a:solidFill>
                   </a:tcPr>
                 </a:tc>
@@ -2597,10 +2645,90 @@
           </a:graphicData>
         </a:graphic>
       </p:graphicFrame>
+      <p:sp>
+        <p:nvSpPr>
+          <p:cNvPr id="16" name="">
+            <a:extLst xmlns:a="http://schemas.openxmlformats.org/drawingml/2006/main">
+              <a:ext uri="{FF2B5EF4-FFF2-40B4-BE49-F238E27FC236}">
+                <a16:creationId xmlns:a16="http://schemas.microsoft.com/office/drawing/2014/main" id="{6F14F4E0-9141-499B-AC08-06E6F27AB081}"/>
+              </a:ext>
+            </a:extLst>
+          </p:cNvPr>
+          <p:cNvSpPr>
+            <a:spLocks xmlns:a="http://schemas.openxmlformats.org/drawingml/2006/main" noGrp="1"/>
+          </p:cNvSpPr>
+          <p:nvPr/>
+        </p:nvSpPr>
+        <p:spPr>
+          <a:xfrm xmlns:a="http://schemas.openxmlformats.org/drawingml/2006/main">
+            <a:off x="609600" y="5724525"/>
+            <a:ext cx="10972800" cy="457200"/>
+          </a:xfrm>
+          <a:prstGeom xmlns:a="http://schemas.openxmlformats.org/drawingml/2006/main" prst="rect">
+            <a:avLst/>
+          </a:prstGeom>
+          <a:noFill xmlns:a="http://schemas.openxmlformats.org/drawingml/2006/main"/>
+          <a:ln xmlns:a="http://schemas.openxmlformats.org/drawingml/2006/main" w="0">
+            <a:noFill/>
+          </a:ln>
+        </p:spPr>
+        <p:txBody>
+          <a:bodyPr xmlns:a="http://schemas.openxmlformats.org/drawingml/2006/main" anchor="ctr">
+            <a:noAutofit/>
+          </a:bodyPr>
+          <a:lstStyle xmlns:a="http://schemas.openxmlformats.org/drawingml/2006/main"/>
+          <a:p xmlns:a="http://schemas.openxmlformats.org/drawingml/2006/main">
+            <a:pPr algn="l">
+              <a:defRPr sz="1875" b="0">
+                <a:solidFill>
+                  <a:srgbClr val="16343E"/>
+                </a:solidFill>
+                <a:latin typeface="Arial"/>
+                <a:ea typeface="Arial"/>
+                <a:cs typeface="Arial"/>
+              </a:defRPr>
+            </a:pPr>
+            <a:r>
+              <a:rPr sz="1875" b="0">
+                <a:solidFill>
+                  <a:srgbClr val="16343E"/>
+                </a:solidFill>
+                <a:latin typeface="Arial"/>
+                <a:ea typeface="Arial"/>
+                <a:cs typeface="Arial"/>
+              </a:rPr>
+              <a:t>One fewer false positive selected CatBoost.</a:t>
+            </a:r>
+          </a:p>
+          <a:p xmlns:a="http://schemas.openxmlformats.org/drawingml/2006/main">
+            <a:pPr algn="l">
+              <a:defRPr sz="1875" b="0">
+                <a:solidFill>
+                  <a:srgbClr val="16343E"/>
+                </a:solidFill>
+                <a:latin typeface="Arial"/>
+                <a:ea typeface="Arial"/>
+                <a:cs typeface="Arial"/>
+              </a:defRPr>
+            </a:pPr>
+            <a:r>
+              <a:rPr sz="1875" b="0">
+                <a:solidFill>
+                  <a:srgbClr val="16343E"/>
+                </a:solidFill>
+                <a:latin typeface="Arial"/>
+                <a:ea typeface="Arial"/>
+                <a:cs typeface="Arial"/>
+              </a:rPr>
+              <a:t>The model and threshold then stayed fixed for evaluation.</a:t>
+            </a:r>
+          </a:p>
+        </p:txBody>
+      </p:sp>
     </p:spTree>
     <p:extLst>
       <p:ext uri="{BB962C8B-B14F-4D97-AF65-F5344CB8AC3E}">
-        <p14:creationId xmlns:p14="http://schemas.microsoft.com/office/powerpoint/2010/main" val="1888654372"/>
+        <p14:creationId xmlns:p14="http://schemas.microsoft.com/office/powerpoint/2010/main" val="454686708"/>
       </p:ext>
     </p:extLst>
   </p:cSld>
@@ -2628,10 +2756,10 @@
       </p:grpSpPr>
       <p:sp>
         <p:nvSpPr>
-          <p:cNvPr id="7" name="">
-            <a:extLst xmlns:a="http://schemas.openxmlformats.org/drawingml/2006/main">
-              <a:ext uri="{FF2B5EF4-FFF2-40B4-BE49-F238E27FC236}">
-                <a16:creationId xmlns:a16="http://schemas.microsoft.com/office/drawing/2014/main" id="{978462B6-458A-4D0C-B5DA-72C8F146CA9C}"/>
+          <p:cNvPr id="8" name="">
+            <a:extLst xmlns:a="http://schemas.openxmlformats.org/drawingml/2006/main">
+              <a:ext uri="{FF2B5EF4-FFF2-40B4-BE49-F238E27FC236}">
+                <a16:creationId xmlns:a16="http://schemas.microsoft.com/office/drawing/2014/main" id="{6B080C2B-8A04-4027-96B8-797FCFB59818}"/>
               </a:ext>
             </a:extLst>
           </p:cNvPr>
@@ -2688,7 +2816,7 @@
           <p:cNvPr id="2" name="">
             <a:extLst xmlns:a="http://schemas.openxmlformats.org/drawingml/2006/main">
               <a:ext uri="{FF2B5EF4-FFF2-40B4-BE49-F238E27FC236}">
-                <a16:creationId xmlns:a16="http://schemas.microsoft.com/office/drawing/2014/main" id="{7C51F71F-2BDA-45BA-9BB4-DEE2ED37B815}"/>
+                <a16:creationId xmlns:a16="http://schemas.microsoft.com/office/drawing/2014/main" id="{A6E75F5F-C2DA-4888-B22B-6B3BFAF2B9D5}"/>
               </a:ext>
             </a:extLst>
           </p:cNvPr>
@@ -2735,7 +2863,7 @@
                 <a:ea typeface="Arial"/>
                 <a:cs typeface="Arial"/>
               </a:rPr>
-              <a:t>Source: primary evaluation, 15 Sep 2026. Errors are against recorded diagnoses.</a:t>
+              <a:t>Sources: primary evaluation (15 Sep) and discovery-only stability follow-up (17 Sep 2026).</a:t>
             </a:r>
           </a:p>
         </p:txBody>
@@ -2745,7 +2873,7 @@
           <p:cNvPr id="3" name="">
             <a:extLst xmlns:a="http://schemas.openxmlformats.org/drawingml/2006/main">
               <a:ext uri="{FF2B5EF4-FFF2-40B4-BE49-F238E27FC236}">
-                <a16:creationId xmlns:a16="http://schemas.microsoft.com/office/drawing/2014/main" id="{D3968B99-8C9A-443D-BE88-8B83AC469729}"/>
+                <a16:creationId xmlns:a16="http://schemas.microsoft.com/office/drawing/2014/main" id="{E4EB2580-B756-4FA7-BE4D-29250C3D296B}"/>
               </a:ext>
             </a:extLst>
           </p:cNvPr>
@@ -2802,7 +2930,7 @@
           <p:cNvPr id="4" name="">
             <a:extLst xmlns:a="http://schemas.openxmlformats.org/drawingml/2006/main">
               <a:ext uri="{FF2B5EF4-FFF2-40B4-BE49-F238E27FC236}">
-                <a16:creationId xmlns:a16="http://schemas.microsoft.com/office/drawing/2014/main" id="{6C642893-29E5-4A62-A6B9-C450C10DAF31}"/>
+                <a16:creationId xmlns:a16="http://schemas.microsoft.com/office/drawing/2014/main" id="{DB756204-3158-4111-A824-A7B47F7A8F09}"/>
               </a:ext>
             </a:extLst>
           </p:cNvPr>
@@ -2856,7 +2984,7 @@
       </p:sp>
       <p:graphicFrame>
         <p:nvGraphicFramePr>
-          <p:cNvPr id="11" name="Chart"/>
+          <p:cNvPr id="12" name="Chart"/>
           <p:cNvGraphicFramePr/>
           <p:nvPr/>
         </p:nvGraphicFramePr>
@@ -2866,7 +2994,7 @@
         </p:xfrm>
         <a:graphic xmlns:a="http://schemas.openxmlformats.org/drawingml/2006/main">
           <a:graphicData uri="http://schemas.openxmlformats.org/drawingml/2006/chart">
-            <c:chart xmlns:r="http://schemas.openxmlformats.org/officeDocument/2006/relationships" xmlns:c="http://schemas.openxmlformats.org/drawingml/2006/chart" r:id="Rbc11e9ec15ec4666"/>
+            <c:chart xmlns:r="http://schemas.openxmlformats.org/officeDocument/2006/relationships" xmlns:c="http://schemas.openxmlformats.org/drawingml/2006/chart" r:id="Rc3668eff1a674212"/>
           </a:graphicData>
         </a:graphic>
       </p:graphicFrame>
@@ -2875,7 +3003,7 @@
           <p:cNvPr id="6" name="">
             <a:extLst xmlns:a="http://schemas.openxmlformats.org/drawingml/2006/main">
               <a:ext uri="{FF2B5EF4-FFF2-40B4-BE49-F238E27FC236}">
-                <a16:creationId xmlns:a16="http://schemas.microsoft.com/office/drawing/2014/main" id="{E04CF800-19FE-4252-9FBE-658FE8A0943F}"/>
+                <a16:creationId xmlns:a16="http://schemas.microsoft.com/office/drawing/2014/main" id="{1C2B0F19-1D1B-4186-B4AF-D7E948DA133D}"/>
               </a:ext>
             </a:extLst>
           </p:cNvPr>
@@ -2931,10 +3059,67 @@
           </a:p>
         </p:txBody>
       </p:sp>
+      <p:sp>
+        <p:nvSpPr>
+          <p:cNvPr id="7" name="">
+            <a:extLst xmlns:a="http://schemas.openxmlformats.org/drawingml/2006/main">
+              <a:ext uri="{FF2B5EF4-FFF2-40B4-BE49-F238E27FC236}">
+                <a16:creationId xmlns:a16="http://schemas.microsoft.com/office/drawing/2014/main" id="{5C8083B6-B332-47D2-8742-A87775734FDB}"/>
+              </a:ext>
+            </a:extLst>
+          </p:cNvPr>
+          <p:cNvSpPr>
+            <a:spLocks xmlns:a="http://schemas.openxmlformats.org/drawingml/2006/main" noGrp="1"/>
+          </p:cNvSpPr>
+          <p:nvPr/>
+        </p:nvSpPr>
+        <p:spPr>
+          <a:xfrm xmlns:a="http://schemas.openxmlformats.org/drawingml/2006/main">
+            <a:off x="609600" y="5848350"/>
+            <a:ext cx="10972800" cy="333375"/>
+          </a:xfrm>
+          <a:prstGeom xmlns:a="http://schemas.openxmlformats.org/drawingml/2006/main" prst="rect">
+            <a:avLst/>
+          </a:prstGeom>
+          <a:noFill xmlns:a="http://schemas.openxmlformats.org/drawingml/2006/main"/>
+          <a:ln xmlns:a="http://schemas.openxmlformats.org/drawingml/2006/main" w="0">
+            <a:noFill/>
+          </a:ln>
+        </p:spPr>
+        <p:txBody>
+          <a:bodyPr xmlns:a="http://schemas.openxmlformats.org/drawingml/2006/main" anchor="ctr">
+            <a:noAutofit/>
+          </a:bodyPr>
+          <a:lstStyle xmlns:a="http://schemas.openxmlformats.org/drawingml/2006/main"/>
+          <a:p xmlns:a="http://schemas.openxmlformats.org/drawingml/2006/main">
+            <a:pPr algn="l">
+              <a:defRPr sz="1875" b="0">
+                <a:solidFill>
+                  <a:srgbClr val="16343E"/>
+                </a:solidFill>
+                <a:latin typeface="Arial"/>
+                <a:ea typeface="Arial"/>
+                <a:cs typeface="Arial"/>
+              </a:defRPr>
+            </a:pPr>
+            <a:r>
+              <a:rPr sz="1875" b="0">
+                <a:solidFill>
+                  <a:srgbClr val="16343E"/>
+                </a:solidFill>
+                <a:latin typeface="Arial"/>
+                <a:ea typeface="Arial"/>
+                <a:cs typeface="Arial"/>
+              </a:rPr>
+              <a:t>Across 20 discovery splits: CatBoost selected 13 times, logistic 7.</a:t>
+            </a:r>
+          </a:p>
+        </p:txBody>
+      </p:sp>
     </p:spTree>
     <p:extLst>
       <p:ext uri="{BB962C8B-B14F-4D97-AF65-F5344CB8AC3E}">
-        <p14:creationId xmlns:p14="http://schemas.microsoft.com/office/powerpoint/2010/main" val="2067514369"/>
+        <p14:creationId xmlns:p14="http://schemas.microsoft.com/office/powerpoint/2010/main" val="83555725"/>
       </p:ext>
     </p:extLst>
   </p:cSld>
@@ -2965,7 +3150,7 @@
           <p:cNvPr id="7" name="">
             <a:extLst xmlns:a="http://schemas.openxmlformats.org/drawingml/2006/main">
               <a:ext uri="{FF2B5EF4-FFF2-40B4-BE49-F238E27FC236}">
-                <a16:creationId xmlns:a16="http://schemas.microsoft.com/office/drawing/2014/main" id="{DD460867-16E5-480B-972B-36886CCC50A8}"/>
+                <a16:creationId xmlns:a16="http://schemas.microsoft.com/office/drawing/2014/main" id="{E64DC71E-E96E-4D84-85BC-96EF0D800D33}"/>
               </a:ext>
             </a:extLst>
           </p:cNvPr>
@@ -3022,7 +3207,7 @@
           <p:cNvPr id="2" name="">
             <a:extLst xmlns:a="http://schemas.openxmlformats.org/drawingml/2006/main">
               <a:ext uri="{FF2B5EF4-FFF2-40B4-BE49-F238E27FC236}">
-                <a16:creationId xmlns:a16="http://schemas.microsoft.com/office/drawing/2014/main" id="{C6C0C062-5B8C-416D-9600-33C511359AC9}"/>
+                <a16:creationId xmlns:a16="http://schemas.microsoft.com/office/drawing/2014/main" id="{9D5FAD24-480A-4734-8D45-96BABA6CF233}"/>
               </a:ext>
             </a:extLst>
           </p:cNvPr>
@@ -3079,7 +3264,7 @@
           <p:cNvPr id="3" name="">
             <a:extLst xmlns:a="http://schemas.openxmlformats.org/drawingml/2006/main">
               <a:ext uri="{FF2B5EF4-FFF2-40B4-BE49-F238E27FC236}">
-                <a16:creationId xmlns:a16="http://schemas.microsoft.com/office/drawing/2014/main" id="{A6E57419-E14E-4D26-9BF9-0CD871680E72}"/>
+                <a16:creationId xmlns:a16="http://schemas.microsoft.com/office/drawing/2014/main" id="{3A986F6E-4B0E-4C24-AD0B-7F3BE37F1E2E}"/>
               </a:ext>
             </a:extLst>
           </p:cNvPr>
@@ -3136,7 +3321,7 @@
           <p:cNvPr id="4" name="">
             <a:extLst xmlns:a="http://schemas.openxmlformats.org/drawingml/2006/main">
               <a:ext uri="{FF2B5EF4-FFF2-40B4-BE49-F238E27FC236}">
-                <a16:creationId xmlns:a16="http://schemas.microsoft.com/office/drawing/2014/main" id="{2F5083F0-A870-4400-9A2B-ACE944747610}"/>
+                <a16:creationId xmlns:a16="http://schemas.microsoft.com/office/drawing/2014/main" id="{B796B2C8-9668-42A6-8C30-F0E3285631AC}"/>
               </a:ext>
             </a:extLst>
           </p:cNvPr>
@@ -3193,7 +3378,7 @@
           <p:cNvPr id="5" name="">
             <a:extLst xmlns:a="http://schemas.openxmlformats.org/drawingml/2006/main">
               <a:ext uri="{FF2B5EF4-FFF2-40B4-BE49-F238E27FC236}">
-                <a16:creationId xmlns:a16="http://schemas.microsoft.com/office/drawing/2014/main" id="{B912FA76-504C-4592-9056-DB06B0048BC9}"/>
+                <a16:creationId xmlns:a16="http://schemas.microsoft.com/office/drawing/2014/main" id="{CEFDF15D-A4FF-4D06-9869-73EFCA77A100}"/>
               </a:ext>
             </a:extLst>
           </p:cNvPr>
@@ -3308,7 +3493,7 @@
           <p:cNvPr id="6" name="">
             <a:extLst xmlns:a="http://schemas.openxmlformats.org/drawingml/2006/main">
               <a:ext uri="{FF2B5EF4-FFF2-40B4-BE49-F238E27FC236}">
-                <a16:creationId xmlns:a16="http://schemas.microsoft.com/office/drawing/2014/main" id="{AD31ABC1-FE3F-41BA-B69B-1948FF867D79}"/>
+                <a16:creationId xmlns:a16="http://schemas.microsoft.com/office/drawing/2014/main" id="{12924DAC-5091-4A90-B96E-8753F8BAD58B}"/>
               </a:ext>
             </a:extLst>
           </p:cNvPr>
@@ -3363,7 +3548,7 @@
     </p:spTree>
     <p:extLst>
       <p:ext uri="{BB962C8B-B14F-4D97-AF65-F5344CB8AC3E}">
-        <p14:creationId xmlns:p14="http://schemas.microsoft.com/office/powerpoint/2010/main" val="1914430962"/>
+        <p14:creationId xmlns:p14="http://schemas.microsoft.com/office/powerpoint/2010/main" val="1425319573"/>
       </p:ext>
     </p:extLst>
   </p:cSld>
@@ -3394,7 +3579,7 @@
           <p:cNvPr id="9" name="">
             <a:extLst xmlns:a="http://schemas.openxmlformats.org/drawingml/2006/main">
               <a:ext uri="{FF2B5EF4-FFF2-40B4-BE49-F238E27FC236}">
-                <a16:creationId xmlns:a16="http://schemas.microsoft.com/office/drawing/2014/main" id="{A2B4AE4A-EE10-4992-8728-DD2B651A5692}"/>
+                <a16:creationId xmlns:a16="http://schemas.microsoft.com/office/drawing/2014/main" id="{E26CC142-AD39-4AE7-A828-D6A059CA7DC0}"/>
               </a:ext>
             </a:extLst>
           </p:cNvPr>
@@ -3451,7 +3636,7 @@
           <p:cNvPr id="2" name="">
             <a:extLst xmlns:a="http://schemas.openxmlformats.org/drawingml/2006/main">
               <a:ext uri="{FF2B5EF4-FFF2-40B4-BE49-F238E27FC236}">
-                <a16:creationId xmlns:a16="http://schemas.microsoft.com/office/drawing/2014/main" id="{74BF6D9F-2F19-44E5-A5CA-FA38396AAD16}"/>
+                <a16:creationId xmlns:a16="http://schemas.microsoft.com/office/drawing/2014/main" id="{87E2C48B-B66D-4CBD-B628-BE7B874293C2}"/>
               </a:ext>
             </a:extLst>
           </p:cNvPr>
@@ -3508,7 +3693,7 @@
           <p:cNvPr id="3" name="">
             <a:extLst xmlns:a="http://schemas.openxmlformats.org/drawingml/2006/main">
               <a:ext uri="{FF2B5EF4-FFF2-40B4-BE49-F238E27FC236}">
-                <a16:creationId xmlns:a16="http://schemas.microsoft.com/office/drawing/2014/main" id="{4F5CD016-1329-4634-B6A3-9A0F8FEA3EB7}"/>
+                <a16:creationId xmlns:a16="http://schemas.microsoft.com/office/drawing/2014/main" id="{DEEAB9FD-5B38-45B5-93A9-1FDDC9565B94}"/>
               </a:ext>
             </a:extLst>
           </p:cNvPr>
@@ -3565,7 +3750,7 @@
           <p:cNvPr id="4" name="">
             <a:extLst xmlns:a="http://schemas.openxmlformats.org/drawingml/2006/main">
               <a:ext uri="{FF2B5EF4-FFF2-40B4-BE49-F238E27FC236}">
-                <a16:creationId xmlns:a16="http://schemas.microsoft.com/office/drawing/2014/main" id="{B4D36C0A-1095-444B-9010-F2FE53569A22}"/>
+                <a16:creationId xmlns:a16="http://schemas.microsoft.com/office/drawing/2014/main" id="{CBC14225-1320-4D91-81AB-4B1B428587CD}"/>
               </a:ext>
             </a:extLst>
           </p:cNvPr>
@@ -3809,7 +3994,7 @@
           <p:cNvPr id="6" name="">
             <a:extLst xmlns:a="http://schemas.openxmlformats.org/drawingml/2006/main">
               <a:ext uri="{FF2B5EF4-FFF2-40B4-BE49-F238E27FC236}">
-                <a16:creationId xmlns:a16="http://schemas.microsoft.com/office/drawing/2014/main" id="{8FCA0C52-1056-44CB-B073-3BF9256E76F1}"/>
+                <a16:creationId xmlns:a16="http://schemas.microsoft.com/office/drawing/2014/main" id="{2EE2CAFF-C2AF-46B1-BAC6-0F94F9DA3D87}"/>
               </a:ext>
             </a:extLst>
           </p:cNvPr>
@@ -3866,7 +4051,7 @@
           <p:cNvPr id="7" name="">
             <a:extLst xmlns:a="http://schemas.openxmlformats.org/drawingml/2006/main">
               <a:ext uri="{FF2B5EF4-FFF2-40B4-BE49-F238E27FC236}">
-                <a16:creationId xmlns:a16="http://schemas.microsoft.com/office/drawing/2014/main" id="{4ACADE64-A7AF-408D-A893-692A7837628A}"/>
+                <a16:creationId xmlns:a16="http://schemas.microsoft.com/office/drawing/2014/main" id="{CD433A9C-3127-46D9-AF2C-2454DD781909}"/>
               </a:ext>
             </a:extLst>
           </p:cNvPr>
@@ -3954,7 +4139,7 @@
           <p:cNvPr id="8" name="">
             <a:extLst xmlns:a="http://schemas.openxmlformats.org/drawingml/2006/main">
               <a:ext uri="{FF2B5EF4-FFF2-40B4-BE49-F238E27FC236}">
-                <a16:creationId xmlns:a16="http://schemas.microsoft.com/office/drawing/2014/main" id="{151420BF-7358-4627-94D4-DC9893EF3661}"/>
+                <a16:creationId xmlns:a16="http://schemas.microsoft.com/office/drawing/2014/main" id="{C051337F-57DB-488F-97AB-0FDB3EA81FA2}"/>
               </a:ext>
             </a:extLst>
           </p:cNvPr>
@@ -4009,7 +4194,7 @@
     </p:spTree>
     <p:extLst>
       <p:ext uri="{BB962C8B-B14F-4D97-AF65-F5344CB8AC3E}">
-        <p14:creationId xmlns:p14="http://schemas.microsoft.com/office/powerpoint/2010/main" val="437529894"/>
+        <p14:creationId xmlns:p14="http://schemas.microsoft.com/office/powerpoint/2010/main" val="1602566686"/>
       </p:ext>
     </p:extLst>
   </p:cSld>
@@ -4040,7 +4225,7 @@
           <p:cNvPr id="13" name="">
             <a:extLst xmlns:a="http://schemas.openxmlformats.org/drawingml/2006/main">
               <a:ext uri="{FF2B5EF4-FFF2-40B4-BE49-F238E27FC236}">
-                <a16:creationId xmlns:a16="http://schemas.microsoft.com/office/drawing/2014/main" id="{EA0EB888-929C-4FFB-89C1-CCBA858102A9}"/>
+                <a16:creationId xmlns:a16="http://schemas.microsoft.com/office/drawing/2014/main" id="{1C9C52EB-3140-4C54-B274-1B59CEFE03DA}"/>
               </a:ext>
             </a:extLst>
           </p:cNvPr>
@@ -4097,7 +4282,7 @@
           <p:cNvPr id="2" name="">
             <a:extLst xmlns:a="http://schemas.openxmlformats.org/drawingml/2006/main">
               <a:ext uri="{FF2B5EF4-FFF2-40B4-BE49-F238E27FC236}">
-                <a16:creationId xmlns:a16="http://schemas.microsoft.com/office/drawing/2014/main" id="{BF56D12A-1A32-48B8-944A-99179BAF164B}"/>
+                <a16:creationId xmlns:a16="http://schemas.microsoft.com/office/drawing/2014/main" id="{56D5E256-0ADF-4923-B1C6-8A080D05A145}"/>
               </a:ext>
             </a:extLst>
           </p:cNvPr>
@@ -4154,7 +4339,7 @@
           <p:cNvPr id="3" name="">
             <a:extLst xmlns:a="http://schemas.openxmlformats.org/drawingml/2006/main">
               <a:ext uri="{FF2B5EF4-FFF2-40B4-BE49-F238E27FC236}">
-                <a16:creationId xmlns:a16="http://schemas.microsoft.com/office/drawing/2014/main" id="{1BB5D65C-C070-4980-B19F-8620F1567308}"/>
+                <a16:creationId xmlns:a16="http://schemas.microsoft.com/office/drawing/2014/main" id="{2FA10CC2-790B-4B5C-A652-60021A23B463}"/>
               </a:ext>
             </a:extLst>
           </p:cNvPr>
@@ -4211,7 +4396,7 @@
           <p:cNvPr id="4" name="">
             <a:extLst xmlns:a="http://schemas.openxmlformats.org/drawingml/2006/main">
               <a:ext uri="{FF2B5EF4-FFF2-40B4-BE49-F238E27FC236}">
-                <a16:creationId xmlns:a16="http://schemas.microsoft.com/office/drawing/2014/main" id="{52792544-C408-47F5-A436-304425A23F83}"/>
+                <a16:creationId xmlns:a16="http://schemas.microsoft.com/office/drawing/2014/main" id="{297E0CB4-3726-4A7E-B9E6-1A2AADDE778F}"/>
               </a:ext>
             </a:extLst>
           </p:cNvPr>
@@ -4268,7 +4453,7 @@
           <p:cNvPr id="5" name="">
             <a:extLst xmlns:a="http://schemas.openxmlformats.org/drawingml/2006/main">
               <a:ext uri="{FF2B5EF4-FFF2-40B4-BE49-F238E27FC236}">
-                <a16:creationId xmlns:a16="http://schemas.microsoft.com/office/drawing/2014/main" id="{C328850B-9593-44D6-8113-E618162F535E}"/>
+                <a16:creationId xmlns:a16="http://schemas.microsoft.com/office/drawing/2014/main" id="{D19F5D60-F27D-400D-A552-3F0B20B49277}"/>
               </a:ext>
             </a:extLst>
           </p:cNvPr>
@@ -4329,7 +4514,7 @@
           <p:cNvPr id="6" name="">
             <a:extLst xmlns:a="http://schemas.openxmlformats.org/drawingml/2006/main">
               <a:ext uri="{FF2B5EF4-FFF2-40B4-BE49-F238E27FC236}">
-                <a16:creationId xmlns:a16="http://schemas.microsoft.com/office/drawing/2014/main" id="{86400725-9640-43EC-8EC6-870EE511A84B}"/>
+                <a16:creationId xmlns:a16="http://schemas.microsoft.com/office/drawing/2014/main" id="{4F9103CC-1621-4A5A-ADE3-9C391C5AB764}"/>
               </a:ext>
             </a:extLst>
           </p:cNvPr>
@@ -4390,7 +4575,7 @@
           <p:cNvPr id="7" name="">
             <a:extLst xmlns:a="http://schemas.openxmlformats.org/drawingml/2006/main">
               <a:ext uri="{FF2B5EF4-FFF2-40B4-BE49-F238E27FC236}">
-                <a16:creationId xmlns:a16="http://schemas.microsoft.com/office/drawing/2014/main" id="{BBCC17C4-62F1-4C13-A4FA-BCBFBD677097}"/>
+                <a16:creationId xmlns:a16="http://schemas.microsoft.com/office/drawing/2014/main" id="{3F117799-7568-4DF1-BFBB-81434B55D607}"/>
               </a:ext>
             </a:extLst>
           </p:cNvPr>
@@ -4501,7 +4686,7 @@
           <p:cNvPr id="10" name="">
             <a:extLst xmlns:a="http://schemas.openxmlformats.org/drawingml/2006/main">
               <a:ext uri="{FF2B5EF4-FFF2-40B4-BE49-F238E27FC236}">
-                <a16:creationId xmlns:a16="http://schemas.microsoft.com/office/drawing/2014/main" id="{34965C22-73E6-4B66-BCB0-304E3B4047A3}"/>
+                <a16:creationId xmlns:a16="http://schemas.microsoft.com/office/drawing/2014/main" id="{41E8B592-AC7A-460A-8AB8-074C6180A215}"/>
               </a:ext>
             </a:extLst>
           </p:cNvPr>
@@ -4558,7 +4743,7 @@
           <p:cNvPr id="11" name="">
             <a:extLst xmlns:a="http://schemas.openxmlformats.org/drawingml/2006/main">
               <a:ext uri="{FF2B5EF4-FFF2-40B4-BE49-F238E27FC236}">
-                <a16:creationId xmlns:a16="http://schemas.microsoft.com/office/drawing/2014/main" id="{7776F767-C521-470B-8199-7A77793C1C7E}"/>
+                <a16:creationId xmlns:a16="http://schemas.microsoft.com/office/drawing/2014/main" id="{2F237106-9B1A-4F63-B5BB-527D15108607}"/>
               </a:ext>
             </a:extLst>
           </p:cNvPr>
@@ -4684,7 +4869,7 @@
           <p:cNvPr id="12" name="">
             <a:extLst xmlns:a="http://schemas.openxmlformats.org/drawingml/2006/main">
               <a:ext uri="{FF2B5EF4-FFF2-40B4-BE49-F238E27FC236}">
-                <a16:creationId xmlns:a16="http://schemas.microsoft.com/office/drawing/2014/main" id="{2A67ABF5-C377-4E3D-BDC2-FE0D16841CB8}"/>
+                <a16:creationId xmlns:a16="http://schemas.microsoft.com/office/drawing/2014/main" id="{4B67BF1F-E4CF-496C-B404-41C3C6E3D3B6}"/>
               </a:ext>
             </a:extLst>
           </p:cNvPr>
@@ -4739,7 +4924,7 @@
     </p:spTree>
     <p:extLst>
       <p:ext uri="{BB962C8B-B14F-4D97-AF65-F5344CB8AC3E}">
-        <p14:creationId xmlns:p14="http://schemas.microsoft.com/office/powerpoint/2010/main" val="2087244839"/>
+        <p14:creationId xmlns:p14="http://schemas.microsoft.com/office/powerpoint/2010/main" val="2147352040"/>
       </p:ext>
     </p:extLst>
   </p:cSld>
@@ -4770,7 +4955,7 @@
           <p:cNvPr id="13" name="">
             <a:extLst xmlns:a="http://schemas.openxmlformats.org/drawingml/2006/main">
               <a:ext uri="{FF2B5EF4-FFF2-40B4-BE49-F238E27FC236}">
-                <a16:creationId xmlns:a16="http://schemas.microsoft.com/office/drawing/2014/main" id="{D6B03CEB-2895-484A-B249-A17BF341E5D1}"/>
+                <a16:creationId xmlns:a16="http://schemas.microsoft.com/office/drawing/2014/main" id="{F571348B-5634-4B92-86BE-ECC0051FC272}"/>
               </a:ext>
             </a:extLst>
           </p:cNvPr>
@@ -4827,7 +5012,7 @@
           <p:cNvPr id="2" name="">
             <a:extLst xmlns:a="http://schemas.openxmlformats.org/drawingml/2006/main">
               <a:ext uri="{FF2B5EF4-FFF2-40B4-BE49-F238E27FC236}">
-                <a16:creationId xmlns:a16="http://schemas.microsoft.com/office/drawing/2014/main" id="{3C3657BD-BD0C-452C-9793-DC55D7138FA2}"/>
+                <a16:creationId xmlns:a16="http://schemas.microsoft.com/office/drawing/2014/main" id="{AD8C73CF-4C8F-43DD-835A-EEC0AC7C18F6}"/>
               </a:ext>
             </a:extLst>
           </p:cNvPr>
@@ -4884,7 +5069,7 @@
           <p:cNvPr id="3" name="">
             <a:extLst xmlns:a="http://schemas.openxmlformats.org/drawingml/2006/main">
               <a:ext uri="{FF2B5EF4-FFF2-40B4-BE49-F238E27FC236}">
-                <a16:creationId xmlns:a16="http://schemas.microsoft.com/office/drawing/2014/main" id="{EBEEB2E8-B802-415F-AEF0-2E1A089AADC8}"/>
+                <a16:creationId xmlns:a16="http://schemas.microsoft.com/office/drawing/2014/main" id="{4BD25B97-C615-42DA-AFA2-8112A1F7B609}"/>
               </a:ext>
             </a:extLst>
           </p:cNvPr>
@@ -4941,7 +5126,7 @@
           <p:cNvPr id="4" name="">
             <a:extLst xmlns:a="http://schemas.openxmlformats.org/drawingml/2006/main">
               <a:ext uri="{FF2B5EF4-FFF2-40B4-BE49-F238E27FC236}">
-                <a16:creationId xmlns:a16="http://schemas.microsoft.com/office/drawing/2014/main" id="{F63F8304-6F68-4D37-A964-2878A120AEEF}"/>
+                <a16:creationId xmlns:a16="http://schemas.microsoft.com/office/drawing/2014/main" id="{12304A59-9880-4B55-AD64-51ED67817C5C}"/>
               </a:ext>
             </a:extLst>
           </p:cNvPr>
@@ -4998,7 +5183,7 @@
           <p:cNvPr id="5" name="">
             <a:extLst xmlns:a="http://schemas.openxmlformats.org/drawingml/2006/main">
               <a:ext uri="{FF2B5EF4-FFF2-40B4-BE49-F238E27FC236}">
-                <a16:creationId xmlns:a16="http://schemas.microsoft.com/office/drawing/2014/main" id="{7DC353DE-BE50-4E72-B03B-C5BD502D8760}"/>
+                <a16:creationId xmlns:a16="http://schemas.microsoft.com/office/drawing/2014/main" id="{E4867F57-793E-469F-BA13-28BC4539E9E5}"/>
               </a:ext>
             </a:extLst>
           </p:cNvPr>
@@ -5082,7 +5267,7 @@
           <p:cNvPr id="6" name="">
             <a:extLst xmlns:a="http://schemas.openxmlformats.org/drawingml/2006/main">
               <a:ext uri="{FF2B5EF4-FFF2-40B4-BE49-F238E27FC236}">
-                <a16:creationId xmlns:a16="http://schemas.microsoft.com/office/drawing/2014/main" id="{9A422DB6-A5C1-4357-A9AA-75DBA242801D}"/>
+                <a16:creationId xmlns:a16="http://schemas.microsoft.com/office/drawing/2014/main" id="{E5E76F25-CA7F-47B9-B0E1-FD30A42ADB91}"/>
               </a:ext>
             </a:extLst>
           </p:cNvPr>
@@ -5143,7 +5328,7 @@
           <p:cNvPr id="7" name="">
             <a:extLst xmlns:a="http://schemas.openxmlformats.org/drawingml/2006/main">
               <a:ext uri="{FF2B5EF4-FFF2-40B4-BE49-F238E27FC236}">
-                <a16:creationId xmlns:a16="http://schemas.microsoft.com/office/drawing/2014/main" id="{7A8CA3F0-E39C-4676-BE70-CC6AF989F3C0}"/>
+                <a16:creationId xmlns:a16="http://schemas.microsoft.com/office/drawing/2014/main" id="{F5407F16-F1AE-48B6-B79E-812121A83599}"/>
               </a:ext>
             </a:extLst>
           </p:cNvPr>
@@ -5277,7 +5462,7 @@
           <p:cNvPr id="10" name="">
             <a:extLst xmlns:a="http://schemas.openxmlformats.org/drawingml/2006/main">
               <a:ext uri="{FF2B5EF4-FFF2-40B4-BE49-F238E27FC236}">
-                <a16:creationId xmlns:a16="http://schemas.microsoft.com/office/drawing/2014/main" id="{1F5EBCC8-A1D5-4A5F-B8A3-77B4C691E8C7}"/>
+                <a16:creationId xmlns:a16="http://schemas.microsoft.com/office/drawing/2014/main" id="{A3ACADC1-727B-4BED-9813-2AB09DA64FD9}"/>
               </a:ext>
             </a:extLst>
           </p:cNvPr>
@@ -5570,7 +5755,7 @@
           <p:cNvPr id="12" name="">
             <a:extLst xmlns:a="http://schemas.openxmlformats.org/drawingml/2006/main">
               <a:ext uri="{FF2B5EF4-FFF2-40B4-BE49-F238E27FC236}">
-                <a16:creationId xmlns:a16="http://schemas.microsoft.com/office/drawing/2014/main" id="{6C4D64B8-C713-45C8-BBF5-2692E1944908}"/>
+                <a16:creationId xmlns:a16="http://schemas.microsoft.com/office/drawing/2014/main" id="{3ECDC01B-913E-4010-B155-CC7A1166D028}"/>
               </a:ext>
             </a:extLst>
           </p:cNvPr>
@@ -5625,7 +5810,7 @@
     </p:spTree>
     <p:extLst>
       <p:ext uri="{BB962C8B-B14F-4D97-AF65-F5344CB8AC3E}">
-        <p14:creationId xmlns:p14="http://schemas.microsoft.com/office/powerpoint/2010/main" val="171491040"/>
+        <p14:creationId xmlns:p14="http://schemas.microsoft.com/office/powerpoint/2010/main" val="1386148020"/>
       </p:ext>
     </p:extLst>
   </p:cSld>
@@ -5656,7 +5841,7 @@
           <p:cNvPr id="9" name="">
             <a:extLst xmlns:a="http://schemas.openxmlformats.org/drawingml/2006/main">
               <a:ext uri="{FF2B5EF4-FFF2-40B4-BE49-F238E27FC236}">
-                <a16:creationId xmlns:a16="http://schemas.microsoft.com/office/drawing/2014/main" id="{1F7C30E4-DA30-46FD-A575-0D65F124FA2E}"/>
+                <a16:creationId xmlns:a16="http://schemas.microsoft.com/office/drawing/2014/main" id="{0286CB63-137E-4EFA-9B50-3C3482B582CD}"/>
               </a:ext>
             </a:extLst>
           </p:cNvPr>
@@ -5713,7 +5898,7 @@
           <p:cNvPr id="2" name="">
             <a:extLst xmlns:a="http://schemas.openxmlformats.org/drawingml/2006/main">
               <a:ext uri="{FF2B5EF4-FFF2-40B4-BE49-F238E27FC236}">
-                <a16:creationId xmlns:a16="http://schemas.microsoft.com/office/drawing/2014/main" id="{394C30AD-70B0-46F2-A323-550D05375787}"/>
+                <a16:creationId xmlns:a16="http://schemas.microsoft.com/office/drawing/2014/main" id="{3DAE715A-824C-40E1-B2B1-37885B5BCC57}"/>
               </a:ext>
             </a:extLst>
           </p:cNvPr>
@@ -5770,7 +5955,7 @@
           <p:cNvPr id="3" name="">
             <a:extLst xmlns:a="http://schemas.openxmlformats.org/drawingml/2006/main">
               <a:ext uri="{FF2B5EF4-FFF2-40B4-BE49-F238E27FC236}">
-                <a16:creationId xmlns:a16="http://schemas.microsoft.com/office/drawing/2014/main" id="{57502E01-4129-464F-9DF1-B6A6906A0756}"/>
+                <a16:creationId xmlns:a16="http://schemas.microsoft.com/office/drawing/2014/main" id="{581FC795-E85D-476F-91F9-AB493D6C9827}"/>
               </a:ext>
             </a:extLst>
           </p:cNvPr>
@@ -5827,7 +6012,7 @@
           <p:cNvPr id="4" name="">
             <a:extLst xmlns:a="http://schemas.openxmlformats.org/drawingml/2006/main">
               <a:ext uri="{FF2B5EF4-FFF2-40B4-BE49-F238E27FC236}">
-                <a16:creationId xmlns:a16="http://schemas.microsoft.com/office/drawing/2014/main" id="{9D4C14FB-155E-4B63-BA8B-630BBBADC4C0}"/>
+                <a16:creationId xmlns:a16="http://schemas.microsoft.com/office/drawing/2014/main" id="{8B8B375B-FDFC-4991-A80C-8AD6D12A294C}"/>
               </a:ext>
             </a:extLst>
           </p:cNvPr>
@@ -5884,7 +6069,7 @@
           <p:cNvPr id="5" name="">
             <a:extLst xmlns:a="http://schemas.openxmlformats.org/drawingml/2006/main">
               <a:ext uri="{FF2B5EF4-FFF2-40B4-BE49-F238E27FC236}">
-                <a16:creationId xmlns:a16="http://schemas.microsoft.com/office/drawing/2014/main" id="{E99A8972-D996-4DBE-B9DA-866C932F0E2B}"/>
+                <a16:creationId xmlns:a16="http://schemas.microsoft.com/office/drawing/2014/main" id="{875EF708-88CD-493E-8B46-9F31BE48B0C4}"/>
               </a:ext>
             </a:extLst>
           </p:cNvPr>
@@ -5964,7 +6149,7 @@
           <p:cNvPr id="6" name="">
             <a:extLst xmlns:a="http://schemas.openxmlformats.org/drawingml/2006/main">
               <a:ext uri="{FF2B5EF4-FFF2-40B4-BE49-F238E27FC236}">
-                <a16:creationId xmlns:a16="http://schemas.microsoft.com/office/drawing/2014/main" id="{A8604581-757F-472F-B82D-8E22A41C3C8B}"/>
+                <a16:creationId xmlns:a16="http://schemas.microsoft.com/office/drawing/2014/main" id="{ECB7770F-5F80-4E99-9A49-9D6C3B2609B3}"/>
               </a:ext>
             </a:extLst>
           </p:cNvPr>
@@ -6021,7 +6206,7 @@
           <p:cNvPr id="7" name="">
             <a:extLst xmlns:a="http://schemas.openxmlformats.org/drawingml/2006/main">
               <a:ext uri="{FF2B5EF4-FFF2-40B4-BE49-F238E27FC236}">
-                <a16:creationId xmlns:a16="http://schemas.microsoft.com/office/drawing/2014/main" id="{E454BEBA-E739-49F5-AB91-AE877AD13735}"/>
+                <a16:creationId xmlns:a16="http://schemas.microsoft.com/office/drawing/2014/main" id="{C4E59603-A2E9-40E1-AAF9-6D23D4ED2DAF}"/>
               </a:ext>
             </a:extLst>
           </p:cNvPr>
@@ -6306,7 +6491,7 @@
     </p:spTree>
     <p:extLst>
       <p:ext uri="{BB962C8B-B14F-4D97-AF65-F5344CB8AC3E}">
-        <p14:creationId xmlns:p14="http://schemas.microsoft.com/office/powerpoint/2010/main" val="1246298868"/>
+        <p14:creationId xmlns:p14="http://schemas.microsoft.com/office/powerpoint/2010/main" val="1795389812"/>
       </p:ext>
     </p:extLst>
   </p:cSld>
@@ -6337,7 +6522,7 @@
           <p:cNvPr id="7" name="">
             <a:extLst xmlns:a="http://schemas.openxmlformats.org/drawingml/2006/main">
               <a:ext uri="{FF2B5EF4-FFF2-40B4-BE49-F238E27FC236}">
-                <a16:creationId xmlns:a16="http://schemas.microsoft.com/office/drawing/2014/main" id="{AE1710C1-C96D-4883-A71E-5E91AB2E2E4B}"/>
+                <a16:creationId xmlns:a16="http://schemas.microsoft.com/office/drawing/2014/main" id="{D941C514-487B-4A04-ABCE-1CADEB9DDC76}"/>
               </a:ext>
             </a:extLst>
           </p:cNvPr>
@@ -6394,7 +6579,7 @@
           <p:cNvPr id="2" name="">
             <a:extLst xmlns:a="http://schemas.openxmlformats.org/drawingml/2006/main">
               <a:ext uri="{FF2B5EF4-FFF2-40B4-BE49-F238E27FC236}">
-                <a16:creationId xmlns:a16="http://schemas.microsoft.com/office/drawing/2014/main" id="{BA676DD2-77BE-4960-9CCF-DCCCC4D650A9}"/>
+                <a16:creationId xmlns:a16="http://schemas.microsoft.com/office/drawing/2014/main" id="{AC1C99D8-9C27-4F97-AA8F-09620EB4C0C6}"/>
               </a:ext>
             </a:extLst>
           </p:cNvPr>
@@ -6451,7 +6636,7 @@
           <p:cNvPr id="3" name="">
             <a:extLst xmlns:a="http://schemas.openxmlformats.org/drawingml/2006/main">
               <a:ext uri="{FF2B5EF4-FFF2-40B4-BE49-F238E27FC236}">
-                <a16:creationId xmlns:a16="http://schemas.microsoft.com/office/drawing/2014/main" id="{74995C4D-1DE2-4029-B1D9-DDF5045DC50C}"/>
+                <a16:creationId xmlns:a16="http://schemas.microsoft.com/office/drawing/2014/main" id="{DE26D56C-CC83-4D2D-A986-7B0F0A3AA803}"/>
               </a:ext>
             </a:extLst>
           </p:cNvPr>
@@ -6746,7 +6931,7 @@
           <p:cNvPr id="5" name="">
             <a:extLst xmlns:a="http://schemas.openxmlformats.org/drawingml/2006/main">
               <a:ext uri="{FF2B5EF4-FFF2-40B4-BE49-F238E27FC236}">
-                <a16:creationId xmlns:a16="http://schemas.microsoft.com/office/drawing/2014/main" id="{6D2DBBA8-5C98-43BC-84C5-A014C6F3874D}"/>
+                <a16:creationId xmlns:a16="http://schemas.microsoft.com/office/drawing/2014/main" id="{0C32D742-77B0-42B4-B099-5458AE371525}"/>
               </a:ext>
             </a:extLst>
           </p:cNvPr>
@@ -6826,7 +7011,7 @@
           <p:cNvPr id="6" name="">
             <a:extLst xmlns:a="http://schemas.openxmlformats.org/drawingml/2006/main">
               <a:ext uri="{FF2B5EF4-FFF2-40B4-BE49-F238E27FC236}">
-                <a16:creationId xmlns:a16="http://schemas.microsoft.com/office/drawing/2014/main" id="{3361CEBF-7DAB-47E0-BF8A-3A3638B907F6}"/>
+                <a16:creationId xmlns:a16="http://schemas.microsoft.com/office/drawing/2014/main" id="{C75DB40E-667F-4CC6-9E7A-A886D34EA2B4}"/>
               </a:ext>
             </a:extLst>
           </p:cNvPr>
@@ -6881,7 +7066,7 @@
     </p:spTree>
     <p:extLst>
       <p:ext uri="{BB962C8B-B14F-4D97-AF65-F5344CB8AC3E}">
-        <p14:creationId xmlns:p14="http://schemas.microsoft.com/office/powerpoint/2010/main" val="1155768584"/>
+        <p14:creationId xmlns:p14="http://schemas.microsoft.com/office/powerpoint/2010/main" val="1530388932"/>
       </p:ext>
     </p:extLst>
   </p:cSld>
@@ -6912,7 +7097,7 @@
           <p:cNvPr id="10" name="">
             <a:extLst xmlns:a="http://schemas.openxmlformats.org/drawingml/2006/main">
               <a:ext uri="{FF2B5EF4-FFF2-40B4-BE49-F238E27FC236}">
-                <a16:creationId xmlns:a16="http://schemas.microsoft.com/office/drawing/2014/main" id="{E743F609-746B-47D3-A2AE-8C96D50FAC58}"/>
+                <a16:creationId xmlns:a16="http://schemas.microsoft.com/office/drawing/2014/main" id="{7C4FBCEF-E665-4ECA-9458-841AF728DBAF}"/>
               </a:ext>
             </a:extLst>
           </p:cNvPr>
@@ -6969,7 +7154,7 @@
           <p:cNvPr id="2" name="">
             <a:extLst xmlns:a="http://schemas.openxmlformats.org/drawingml/2006/main">
               <a:ext uri="{FF2B5EF4-FFF2-40B4-BE49-F238E27FC236}">
-                <a16:creationId xmlns:a16="http://schemas.microsoft.com/office/drawing/2014/main" id="{818BB125-06AE-43E0-A28F-28FB1A9711F1}"/>
+                <a16:creationId xmlns:a16="http://schemas.microsoft.com/office/drawing/2014/main" id="{9F2F6380-427E-4161-9DFD-B504FC098B38}"/>
               </a:ext>
             </a:extLst>
           </p:cNvPr>
@@ -7026,7 +7211,7 @@
           <p:cNvPr id="3" name="">
             <a:extLst xmlns:a="http://schemas.openxmlformats.org/drawingml/2006/main">
               <a:ext uri="{FF2B5EF4-FFF2-40B4-BE49-F238E27FC236}">
-                <a16:creationId xmlns:a16="http://schemas.microsoft.com/office/drawing/2014/main" id="{8ACC0460-5176-49A3-B622-F90D51D2C2DE}"/>
+                <a16:creationId xmlns:a16="http://schemas.microsoft.com/office/drawing/2014/main" id="{20D0262E-37D4-4FD2-A5B4-B556AFAFC7DD}"/>
               </a:ext>
             </a:extLst>
           </p:cNvPr>
@@ -7083,7 +7268,7 @@
           <p:cNvPr id="4" name="">
             <a:extLst xmlns:a="http://schemas.openxmlformats.org/drawingml/2006/main">
               <a:ext uri="{FF2B5EF4-FFF2-40B4-BE49-F238E27FC236}">
-                <a16:creationId xmlns:a16="http://schemas.microsoft.com/office/drawing/2014/main" id="{FB5E3A36-C794-486A-8732-FCA0C597CA3A}"/>
+                <a16:creationId xmlns:a16="http://schemas.microsoft.com/office/drawing/2014/main" id="{AB16095D-7070-45DD-9E60-1DD4D68C52E5}"/>
               </a:ext>
             </a:extLst>
           </p:cNvPr>
@@ -7130,7 +7315,7 @@
                 <a:ea typeface="Arial"/>
                 <a:cs typeface="Arial"/>
               </a:rPr>
-              <a:t>A reproducible model comparison</a:t>
+              <a:t>Evidence for the classifier choice</a:t>
             </a:r>
           </a:p>
         </p:txBody>
@@ -7140,7 +7325,7 @@
           <p:cNvPr id="5" name="">
             <a:extLst xmlns:a="http://schemas.openxmlformats.org/drawingml/2006/main">
               <a:ext uri="{FF2B5EF4-FFF2-40B4-BE49-F238E27FC236}">
-                <a16:creationId xmlns:a16="http://schemas.microsoft.com/office/drawing/2014/main" id="{95A79F2D-6ABD-407D-A699-31B60B2C334F}"/>
+                <a16:creationId xmlns:a16="http://schemas.microsoft.com/office/drawing/2014/main" id="{CB3F9C68-93E0-428A-A64F-B9A294A81CDD}"/>
               </a:ext>
             </a:extLst>
           </p:cNvPr>
@@ -7187,7 +7372,7 @@
                 <a:ea typeface="Arial"/>
                 <a:cs typeface="Arial"/>
               </a:rPr>
-              <a:t>Combined measurements reduced false flags, with a tradeoff in missed cases.</a:t>
+              <a:t>CatBoost missed 8 fewer rejection cases than logistic, with 8 false flags each.</a:t>
             </a:r>
           </a:p>
           <a:p xmlns:a="http://schemas.openxmlformats.org/drawingml/2006/main">
@@ -7210,7 +7395,7 @@
                 <a:ea typeface="Arial"/>
                 <a:cs typeface="Arial"/>
               </a:rPr>
-              <a:t>The practical advantage over logistic regression remains uncertain.</a:t>
+              <a:t>A dependable advantage remains uncertain.</a:t>
             </a:r>
           </a:p>
         </p:txBody>
@@ -7220,7 +7405,7 @@
           <p:cNvPr id="6" name="">
             <a:extLst xmlns:a="http://schemas.openxmlformats.org/drawingml/2006/main">
               <a:ext uri="{FF2B5EF4-FFF2-40B4-BE49-F238E27FC236}">
-                <a16:creationId xmlns:a16="http://schemas.microsoft.com/office/drawing/2014/main" id="{5AFB34B5-29D2-49AE-8C64-5AC54BF0EAF1}"/>
+                <a16:creationId xmlns:a16="http://schemas.microsoft.com/office/drawing/2014/main" id="{8D07A37B-B033-46B3-9909-D8D1E8DBF24B}"/>
               </a:ext>
             </a:extLst>
           </p:cNvPr>
@@ -7249,7 +7434,7 @@
           <p:cNvPr id="7" name="">
             <a:extLst xmlns:a="http://schemas.openxmlformats.org/drawingml/2006/main">
               <a:ext uri="{FF2B5EF4-FFF2-40B4-BE49-F238E27FC236}">
-                <a16:creationId xmlns:a16="http://schemas.microsoft.com/office/drawing/2014/main" id="{2F6DC42F-F4FE-4219-809C-22B20D22EF61}"/>
+                <a16:creationId xmlns:a16="http://schemas.microsoft.com/office/drawing/2014/main" id="{869691A3-64E7-4C9C-A867-DC424B464BA4}"/>
               </a:ext>
             </a:extLst>
           </p:cNvPr>
@@ -7306,7 +7491,7 @@
           <p:cNvPr id="8" name="">
             <a:extLst xmlns:a="http://schemas.openxmlformats.org/drawingml/2006/main">
               <a:ext uri="{FF2B5EF4-FFF2-40B4-BE49-F238E27FC236}">
-                <a16:creationId xmlns:a16="http://schemas.microsoft.com/office/drawing/2014/main" id="{46BBFAF6-490B-4D8D-9F3A-EB94276F4E80}"/>
+                <a16:creationId xmlns:a16="http://schemas.microsoft.com/office/drawing/2014/main" id="{B5BFC880-BE2F-4D97-AD7A-A79C557E6188}"/>
               </a:ext>
             </a:extLst>
           </p:cNvPr>
@@ -7363,19 +7548,19 @@
           <p:cNvPr id="9" name="">
             <a:extLst xmlns:a="http://schemas.openxmlformats.org/drawingml/2006/main">
               <a:ext uri="{FF2B5EF4-FFF2-40B4-BE49-F238E27FC236}">
-                <a16:creationId xmlns:a16="http://schemas.microsoft.com/office/drawing/2014/main" id="{686D544B-B4CD-4897-B73D-D93F0B3E7F8E}"/>
-              </a:ext>
-            </a:extLst>
-          </p:cNvPr>
-          <p:cNvSpPr>
-            <a:spLocks xmlns:a="http://schemas.openxmlformats.org/drawingml/2006/main" noGrp="1"/>
-          </p:cNvSpPr>
-          <p:nvPr/>
-        </p:nvSpPr>
-        <p:spPr>
-          <a:xfrm xmlns:a="http://schemas.openxmlformats.org/drawingml/2006/main">
-            <a:off x="609600" y="5629275"/>
-            <a:ext cx="10972800" cy="457200"/>
+                <a16:creationId xmlns:a16="http://schemas.microsoft.com/office/drawing/2014/main" id="{877465D6-6FED-4DED-B2BB-3C4D5CFA05D6}"/>
+              </a:ext>
+            </a:extLst>
+          </p:cNvPr>
+          <p:cNvSpPr>
+            <a:spLocks xmlns:a="http://schemas.openxmlformats.org/drawingml/2006/main" noGrp="1"/>
+          </p:cNvSpPr>
+          <p:nvPr/>
+        </p:nvSpPr>
+        <p:spPr>
+          <a:xfrm xmlns:a="http://schemas.openxmlformats.org/drawingml/2006/main">
+            <a:off x="609600" y="5514975"/>
+            <a:ext cx="10972800" cy="666750"/>
           </a:xfrm>
           <a:prstGeom xmlns:a="http://schemas.openxmlformats.org/drawingml/2006/main" prst="rect">
             <a:avLst/>
@@ -7392,7 +7577,7 @@
           <a:lstStyle xmlns:a="http://schemas.openxmlformats.org/drawingml/2006/main"/>
           <a:p xmlns:a="http://schemas.openxmlformats.org/drawingml/2006/main">
             <a:pPr algn="l">
-              <a:defRPr sz="2100" b="0">
+              <a:defRPr sz="1950" b="0">
                 <a:solidFill>
                   <a:srgbClr val="FFFFFF"/>
                 </a:solidFill>
@@ -7402,7 +7587,7 @@
               </a:defRPr>
             </a:pPr>
             <a:r>
-              <a:rPr sz="2100" b="0">
+              <a:rPr sz="1950" b="0">
                 <a:solidFill>
                   <a:srgbClr val="FFFFFF"/>
                 </a:solidFill>
@@ -7410,7 +7595,30 @@
                 <a:ea typeface="Arial"/>
                 <a:cs typeface="Arial"/>
               </a:rPr>
-              <a:t>Added value for uncertain biopsies still needs direct evaluation.</a:t>
+              <a:t>Next: cross-validation within discovery.</a:t>
+            </a:r>
+          </a:p>
+          <a:p xmlns:a="http://schemas.openxmlformats.org/drawingml/2006/main">
+            <a:pPr algn="l">
+              <a:defRPr sz="1950" b="0">
+                <a:solidFill>
+                  <a:srgbClr val="FFFFFF"/>
+                </a:solidFill>
+                <a:latin typeface="Arial"/>
+                <a:ea typeface="Arial"/>
+                <a:cs typeface="Arial"/>
+              </a:defRPr>
+            </a:pPr>
+            <a:r>
+              <a:rPr sz="1950" b="0">
+                <a:solidFill>
+                  <a:srgbClr val="FFFFFF"/>
+                </a:solidFill>
+                <a:latin typeface="Arial"/>
+                <a:ea typeface="Arial"/>
+                <a:cs typeface="Arial"/>
+              </a:rPr>
+              <a:t>Added diagnostic value of this particular score needs direct evaluation.</a:t>
             </a:r>
           </a:p>
         </p:txBody>
@@ -7418,7 +7626,7 @@
     </p:spTree>
     <p:extLst>
       <p:ext uri="{BB962C8B-B14F-4D97-AF65-F5344CB8AC3E}">
-        <p14:creationId xmlns:p14="http://schemas.microsoft.com/office/powerpoint/2010/main" val="1304344453"/>
+        <p14:creationId xmlns:p14="http://schemas.microsoft.com/office/powerpoint/2010/main" val="1086332129"/>
       </p:ext>
     </p:extLst>
   </p:cSld>
@@ -7449,7 +7657,7 @@
           <p:cNvPr id="8" name="">
             <a:extLst xmlns:a="http://schemas.openxmlformats.org/drawingml/2006/main">
               <a:ext uri="{FF2B5EF4-FFF2-40B4-BE49-F238E27FC236}">
-                <a16:creationId xmlns:a16="http://schemas.microsoft.com/office/drawing/2014/main" id="{2904ADFA-06F0-4E8B-8403-CD04B631350F}"/>
+                <a16:creationId xmlns:a16="http://schemas.microsoft.com/office/drawing/2014/main" id="{E5AACE76-F09B-4101-B69F-319645C3B164}"/>
               </a:ext>
             </a:extLst>
           </p:cNvPr>
@@ -7506,7 +7714,7 @@
           <p:cNvPr id="2" name="">
             <a:extLst xmlns:a="http://schemas.openxmlformats.org/drawingml/2006/main">
               <a:ext uri="{FF2B5EF4-FFF2-40B4-BE49-F238E27FC236}">
-                <a16:creationId xmlns:a16="http://schemas.microsoft.com/office/drawing/2014/main" id="{1BF56291-845F-41C0-9717-365516CE930C}"/>
+                <a16:creationId xmlns:a16="http://schemas.microsoft.com/office/drawing/2014/main" id="{2165E769-3B74-4AFC-B649-30DD52B6B0B9}"/>
               </a:ext>
             </a:extLst>
           </p:cNvPr>
@@ -7563,7 +7771,7 @@
           <p:cNvPr id="3" name="">
             <a:extLst xmlns:a="http://schemas.openxmlformats.org/drawingml/2006/main">
               <a:ext uri="{FF2B5EF4-FFF2-40B4-BE49-F238E27FC236}">
-                <a16:creationId xmlns:a16="http://schemas.microsoft.com/office/drawing/2014/main" id="{833A5581-2430-49C5-822F-F3ECC2FF2B75}"/>
+                <a16:creationId xmlns:a16="http://schemas.microsoft.com/office/drawing/2014/main" id="{526093F8-240E-4697-BE53-38CF30458E9D}"/>
               </a:ext>
             </a:extLst>
           </p:cNvPr>
@@ -7620,7 +7828,7 @@
           <p:cNvPr id="4" name="">
             <a:extLst xmlns:a="http://schemas.openxmlformats.org/drawingml/2006/main">
               <a:ext uri="{FF2B5EF4-FFF2-40B4-BE49-F238E27FC236}">
-                <a16:creationId xmlns:a16="http://schemas.microsoft.com/office/drawing/2014/main" id="{A7B488D8-8CAA-45B7-B3CB-EDB02CB44418}"/>
+                <a16:creationId xmlns:a16="http://schemas.microsoft.com/office/drawing/2014/main" id="{B3E775AA-DCF2-44F9-BA82-8E6D6CB7C49A}"/>
               </a:ext>
             </a:extLst>
           </p:cNvPr>
@@ -7677,7 +7885,7 @@
           <p:cNvPr id="5" name="">
             <a:extLst xmlns:a="http://schemas.openxmlformats.org/drawingml/2006/main">
               <a:ext uri="{FF2B5EF4-FFF2-40B4-BE49-F238E27FC236}">
-                <a16:creationId xmlns:a16="http://schemas.microsoft.com/office/drawing/2014/main" id="{7EDBE9F1-32FA-47ED-B77F-396AA223BC9D}"/>
+                <a16:creationId xmlns:a16="http://schemas.microsoft.com/office/drawing/2014/main" id="{5B477F46-999E-4402-B044-6C544FAE59FC}"/>
               </a:ext>
             </a:extLst>
           </p:cNvPr>
@@ -7734,7 +7942,7 @@
           <p:cNvPr id="6" name="">
             <a:extLst xmlns:a="http://schemas.openxmlformats.org/drawingml/2006/main">
               <a:ext uri="{FF2B5EF4-FFF2-40B4-BE49-F238E27FC236}">
-                <a16:creationId xmlns:a16="http://schemas.microsoft.com/office/drawing/2014/main" id="{CB697DF7-C04E-4293-B67B-8A5D5CFD271C}"/>
+                <a16:creationId xmlns:a16="http://schemas.microsoft.com/office/drawing/2014/main" id="{3C0411FF-8FF5-4EAA-8C68-6A9D258F4611}"/>
               </a:ext>
             </a:extLst>
           </p:cNvPr>
@@ -7791,7 +7999,7 @@
           <p:cNvPr id="7" name="">
             <a:extLst xmlns:a="http://schemas.openxmlformats.org/drawingml/2006/main">
               <a:ext uri="{FF2B5EF4-FFF2-40B4-BE49-F238E27FC236}">
-                <a16:creationId xmlns:a16="http://schemas.microsoft.com/office/drawing/2014/main" id="{7E004F19-B81B-4144-A52C-A96B85BE0EBE}"/>
+                <a16:creationId xmlns:a16="http://schemas.microsoft.com/office/drawing/2014/main" id="{9DA87B9A-090F-4236-9B5C-644E807A74CE}"/>
               </a:ext>
             </a:extLst>
           </p:cNvPr>
@@ -7846,7 +8054,7 @@
     </p:spTree>
     <p:extLst>
       <p:ext uri="{BB962C8B-B14F-4D97-AF65-F5344CB8AC3E}">
-        <p14:creationId xmlns:p14="http://schemas.microsoft.com/office/powerpoint/2010/main" val="1079463213"/>
+        <p14:creationId xmlns:p14="http://schemas.microsoft.com/office/powerpoint/2010/main" val="1604476119"/>
       </p:ext>
     </p:extLst>
   </p:cSld>
@@ -7874,10 +8082,10 @@
       </p:grpSpPr>
       <p:sp>
         <p:nvSpPr>
-          <p:cNvPr id="9" name="">
-            <a:extLst xmlns:a="http://schemas.openxmlformats.org/drawingml/2006/main">
-              <a:ext uri="{FF2B5EF4-FFF2-40B4-BE49-F238E27FC236}">
-                <a16:creationId xmlns:a16="http://schemas.microsoft.com/office/drawing/2014/main" id="{8A12B356-626B-4EBE-9F7C-DF1023FCE5BA}"/>
+          <p:cNvPr id="6" name="">
+            <a:extLst xmlns:a="http://schemas.openxmlformats.org/drawingml/2006/main">
+              <a:ext uri="{FF2B5EF4-FFF2-40B4-BE49-F238E27FC236}">
+                <a16:creationId xmlns:a16="http://schemas.microsoft.com/office/drawing/2014/main" id="{8C7CC288-B6D6-4EE7-91C3-FBAA20CB37B8}"/>
               </a:ext>
             </a:extLst>
           </p:cNvPr>
@@ -7924,7 +8132,7 @@
                 <a:ea typeface="Arial"/>
                 <a:cs typeface="Arial"/>
               </a:rPr>
-              <a:t>Possible Use: Molecular Second Opinion for Ambiguous Biopsies</a:t>
+              <a:t>Purpose of this project</a:t>
             </a:r>
           </a:p>
         </p:txBody>
@@ -7934,7 +8142,7 @@
           <p:cNvPr id="2" name="">
             <a:extLst xmlns:a="http://schemas.openxmlformats.org/drawingml/2006/main">
               <a:ext uri="{FF2B5EF4-FFF2-40B4-BE49-F238E27FC236}">
-                <a16:creationId xmlns:a16="http://schemas.microsoft.com/office/drawing/2014/main" id="{7C7235CB-D6B6-418B-A12A-CCDF7A1DA6FC}"/>
+                <a16:creationId xmlns:a16="http://schemas.microsoft.com/office/drawing/2014/main" id="{6DCC2A99-696D-4E71-B44E-608A723A5CC9}"/>
               </a:ext>
             </a:extLst>
           </p:cNvPr>
@@ -7981,7 +8189,7 @@
                 <a:ea typeface="Arial"/>
                 <a:cs typeface="Arial"/>
               </a:rPr>
-              <a:t>Sources: Banff reference guide (Apr 2026); Nankivell et al. (2019)</a:t>
+              <a:t>Clinical context: Banff Reference Guide (2026). Public data: Zhang et al. (2024).</a:t>
             </a:r>
           </a:p>
         </p:txBody>
@@ -7991,7 +8199,7 @@
           <p:cNvPr id="3" name="">
             <a:extLst xmlns:a="http://schemas.openxmlformats.org/drawingml/2006/main">
               <a:ext uri="{FF2B5EF4-FFF2-40B4-BE49-F238E27FC236}">
-                <a16:creationId xmlns:a16="http://schemas.microsoft.com/office/drawing/2014/main" id="{E5FAC02F-E279-4894-BF27-B544964826FC}"/>
+                <a16:creationId xmlns:a16="http://schemas.microsoft.com/office/drawing/2014/main" id="{50EFC309-97C9-474C-A6FC-618DEA7DDE9E}"/>
               </a:ext>
             </a:extLst>
           </p:cNvPr>
@@ -8048,19 +8256,19 @@
           <p:cNvPr id="4" name="">
             <a:extLst xmlns:a="http://schemas.openxmlformats.org/drawingml/2006/main">
               <a:ext uri="{FF2B5EF4-FFF2-40B4-BE49-F238E27FC236}">
-                <a16:creationId xmlns:a16="http://schemas.microsoft.com/office/drawing/2014/main" id="{00527E65-8B05-4B23-84C6-3DE165EBE2FD}"/>
-              </a:ext>
-            </a:extLst>
-          </p:cNvPr>
-          <p:cNvSpPr>
-            <a:spLocks xmlns:a="http://schemas.openxmlformats.org/drawingml/2006/main" noGrp="1"/>
-          </p:cNvSpPr>
-          <p:nvPr/>
-        </p:nvSpPr>
-        <p:spPr>
-          <a:xfrm xmlns:a="http://schemas.openxmlformats.org/drawingml/2006/main">
-            <a:off x="609600" y="1638300"/>
-            <a:ext cx="10972800" cy="819150"/>
+                <a16:creationId xmlns:a16="http://schemas.microsoft.com/office/drawing/2014/main" id="{C42C2754-8114-4BD0-ACC4-82F7CF1D74F5}"/>
+              </a:ext>
+            </a:extLst>
+          </p:cNvPr>
+          <p:cNvSpPr>
+            <a:spLocks xmlns:a="http://schemas.openxmlformats.org/drawingml/2006/main" noGrp="1"/>
+          </p:cNvSpPr>
+          <p:nvPr/>
+        </p:nvSpPr>
+        <p:spPr>
+          <a:xfrm xmlns:a="http://schemas.openxmlformats.org/drawingml/2006/main">
+            <a:off x="609600" y="1876425"/>
+            <a:ext cx="10972800" cy="3219450"/>
           </a:xfrm>
           <a:prstGeom xmlns:a="http://schemas.openxmlformats.org/drawingml/2006/main" prst="rect">
             <a:avLst/>
@@ -8078,28 +8286,82 @@
           <a:p xmlns:a="http://schemas.openxmlformats.org/drawingml/2006/main">
             <a:pPr marL="279400" indent="-152400" algn="l">
               <a:spcAft>
-                <a:spcPts val="1200"/>
+                <a:spcPts val="3000"/>
               </a:spcAft>
               <a:buChar char="•"/>
-              <a:defRPr sz="2325" b="0">
-                <a:solidFill>
-                  <a:srgbClr val="16343E"/>
-                </a:solidFill>
-                <a:latin typeface="Arial"/>
-                <a:ea typeface="Arial"/>
-                <a:cs typeface="Arial"/>
-              </a:defRPr>
-            </a:pPr>
-            <a:r>
-              <a:rPr sz="2325" b="0">
-                <a:solidFill>
-                  <a:srgbClr val="16343E"/>
-                </a:solidFill>
-                <a:latin typeface="Arial"/>
-                <a:ea typeface="Arial"/>
-                <a:cs typeface="Arial"/>
-              </a:rPr>
-              <a:t>Sometimes the histology findings are ambiguous.</a:t>
+              <a:defRPr sz="2550" b="0">
+                <a:solidFill>
+                  <a:srgbClr val="16343E"/>
+                </a:solidFill>
+                <a:latin typeface="Arial"/>
+                <a:ea typeface="Arial"/>
+                <a:cs typeface="Arial"/>
+              </a:defRPr>
+            </a:pPr>
+            <a:r>
+              <a:rPr sz="2550" b="0">
+                <a:solidFill>
+                  <a:srgbClr val="16343E"/>
+                </a:solidFill>
+                <a:latin typeface="Arial"/>
+                <a:ea typeface="Arial"/>
+                <a:cs typeface="Arial"/>
+              </a:rPr>
+              <a:t>Molecular measurements already have a recognized role in parts of transplant rejection assessment.</a:t>
+            </a:r>
+          </a:p>
+          <a:p xmlns:a="http://schemas.openxmlformats.org/drawingml/2006/main">
+            <a:pPr marL="279400" indent="-152400" algn="l">
+              <a:spcAft>
+                <a:spcPts val="3000"/>
+              </a:spcAft>
+              <a:buChar char="•"/>
+              <a:defRPr sz="2550" b="0">
+                <a:solidFill>
+                  <a:srgbClr val="16343E"/>
+                </a:solidFill>
+                <a:latin typeface="Arial"/>
+                <a:ea typeface="Arial"/>
+                <a:cs typeface="Arial"/>
+              </a:defRPr>
+            </a:pPr>
+            <a:r>
+              <a:rPr sz="2550" b="0">
+                <a:solidFill>
+                  <a:srgbClr val="16343E"/>
+                </a:solidFill>
+                <a:latin typeface="Arial"/>
+                <a:ea typeface="Arial"/>
+                <a:cs typeface="Arial"/>
+              </a:rPr>
+              <a:t>This project uses that established application to compare missed rejection and false flags across classifiers.</a:t>
+            </a:r>
+          </a:p>
+          <a:p xmlns:a="http://schemas.openxmlformats.org/drawingml/2006/main">
+            <a:pPr marL="279400" indent="-152400" algn="l">
+              <a:spcAft>
+                <a:spcPts val="3000"/>
+              </a:spcAft>
+              <a:buChar char="•"/>
+              <a:defRPr sz="2550" b="0">
+                <a:solidFill>
+                  <a:srgbClr val="16343E"/>
+                </a:solidFill>
+                <a:latin typeface="Arial"/>
+                <a:ea typeface="Arial"/>
+                <a:cs typeface="Arial"/>
+              </a:defRPr>
+            </a:pPr>
+            <a:r>
+              <a:rPr sz="2550" b="0">
+                <a:solidFill>
+                  <a:srgbClr val="16343E"/>
+                </a:solidFill>
+                <a:latin typeface="Arial"/>
+                <a:ea typeface="Arial"/>
+                <a:cs typeface="Arial"/>
+              </a:rPr>
+              <a:t>The aim is to assess what a more complex model contributes before further validation.</a:t>
             </a:r>
           </a:p>
         </p:txBody>
@@ -8109,51 +8371,19 @@
           <p:cNvPr id="5" name="">
             <a:extLst xmlns:a="http://schemas.openxmlformats.org/drawingml/2006/main">
               <a:ext uri="{FF2B5EF4-FFF2-40B4-BE49-F238E27FC236}">
-                <a16:creationId xmlns:a16="http://schemas.microsoft.com/office/drawing/2014/main" id="{56B91C20-C85D-46EF-B4EC-D04314A793DD}"/>
-              </a:ext>
-            </a:extLst>
-          </p:cNvPr>
-          <p:cNvSpPr>
-            <a:spLocks xmlns:a="http://schemas.openxmlformats.org/drawingml/2006/main" noGrp="1"/>
-          </p:cNvSpPr>
-          <p:nvPr/>
-        </p:nvSpPr>
-        <p:spPr>
-          <a:xfrm xmlns:a="http://schemas.openxmlformats.org/drawingml/2006/main">
-            <a:off x="895350" y="2571750"/>
-            <a:ext cx="10687050" cy="1762125"/>
-          </a:xfrm>
-          <a:prstGeom xmlns:a="http://schemas.openxmlformats.org/drawingml/2006/main" prst="rect">
-            <a:avLst/>
-          </a:prstGeom>
-          <a:solidFill xmlns:a="http://schemas.openxmlformats.org/drawingml/2006/main">
-            <a:srgbClr val="E4EFEB"/>
-          </a:solidFill>
-          <a:ln xmlns:a="http://schemas.openxmlformats.org/drawingml/2006/main" w="9525">
-            <a:solidFill>
-              <a:srgbClr val="CEDBD7"/>
-            </a:solidFill>
-          </a:ln>
-        </p:spPr>
-      </p:sp>
-      <p:sp>
-        <p:nvSpPr>
-          <p:cNvPr id="6" name="">
-            <a:extLst xmlns:a="http://schemas.openxmlformats.org/drawingml/2006/main">
-              <a:ext uri="{FF2B5EF4-FFF2-40B4-BE49-F238E27FC236}">
-                <a16:creationId xmlns:a16="http://schemas.microsoft.com/office/drawing/2014/main" id="{EFAF72B7-FE80-4E57-BE62-DF50050F3E7B}"/>
-              </a:ext>
-            </a:extLst>
-          </p:cNvPr>
-          <p:cNvSpPr>
-            <a:spLocks xmlns:a="http://schemas.openxmlformats.org/drawingml/2006/main" noGrp="1"/>
-          </p:cNvSpPr>
-          <p:nvPr/>
-        </p:nvSpPr>
-        <p:spPr>
-          <a:xfrm xmlns:a="http://schemas.openxmlformats.org/drawingml/2006/main">
-            <a:off x="1076325" y="2657475"/>
-            <a:ext cx="10325100" cy="352425"/>
+                <a16:creationId xmlns:a16="http://schemas.microsoft.com/office/drawing/2014/main" id="{81C1807E-D2B4-4CDA-9A53-0EF399727A26}"/>
+              </a:ext>
+            </a:extLst>
+          </p:cNvPr>
+          <p:cNvSpPr>
+            <a:spLocks xmlns:a="http://schemas.openxmlformats.org/drawingml/2006/main" noGrp="1"/>
+          </p:cNvSpPr>
+          <p:nvPr/>
+        </p:nvSpPr>
+        <p:spPr>
+          <a:xfrm xmlns:a="http://schemas.openxmlformats.org/drawingml/2006/main">
+            <a:off x="609600" y="5410200"/>
+            <a:ext cx="10972800" cy="714375"/>
           </a:xfrm>
           <a:prstGeom xmlns:a="http://schemas.openxmlformats.org/drawingml/2006/main" prst="rect">
             <a:avLst/>
@@ -8170,7 +8400,7 @@
           <a:lstStyle xmlns:a="http://schemas.openxmlformats.org/drawingml/2006/main"/>
           <a:p xmlns:a="http://schemas.openxmlformats.org/drawingml/2006/main">
             <a:pPr algn="l">
-              <a:defRPr sz="2100" b="1">
+              <a:defRPr sz="2175" b="1">
                 <a:solidFill>
                   <a:srgbClr val="007C78"/>
                 </a:solidFill>
@@ -8180,7 +8410,7 @@
               </a:defRPr>
             </a:pPr>
             <a:r>
-              <a:rPr sz="2100" b="1">
+              <a:rPr sz="2175" b="1">
                 <a:solidFill>
                   <a:srgbClr val="007C78"/>
                 </a:solidFill>
@@ -8188,125 +8418,7 @@
                 <a:ea typeface="Arial"/>
                 <a:cs typeface="Arial"/>
               </a:rPr>
-              <a:t>Example:</a:t>
-            </a:r>
-          </a:p>
-        </p:txBody>
-      </p:sp>
-      <p:sp>
-        <p:nvSpPr>
-          <p:cNvPr id="7" name="">
-            <a:extLst xmlns:a="http://schemas.openxmlformats.org/drawingml/2006/main">
-              <a:ext uri="{FF2B5EF4-FFF2-40B4-BE49-F238E27FC236}">
-                <a16:creationId xmlns:a16="http://schemas.microsoft.com/office/drawing/2014/main" id="{9030F6FF-CBBB-4749-B0E8-D4E9041724A9}"/>
-              </a:ext>
-            </a:extLst>
-          </p:cNvPr>
-          <p:cNvSpPr>
-            <a:spLocks xmlns:a="http://schemas.openxmlformats.org/drawingml/2006/main" noGrp="1"/>
-          </p:cNvSpPr>
-          <p:nvPr/>
-        </p:nvSpPr>
-        <p:spPr>
-          <a:xfrm xmlns:a="http://schemas.openxmlformats.org/drawingml/2006/main">
-            <a:off x="1076325" y="3028950"/>
-            <a:ext cx="10325100" cy="1238250"/>
-          </a:xfrm>
-          <a:prstGeom xmlns:a="http://schemas.openxmlformats.org/drawingml/2006/main" prst="rect">
-            <a:avLst/>
-          </a:prstGeom>
-          <a:noFill xmlns:a="http://schemas.openxmlformats.org/drawingml/2006/main"/>
-          <a:ln xmlns:a="http://schemas.openxmlformats.org/drawingml/2006/main" w="0">
-            <a:noFill/>
-          </a:ln>
-        </p:spPr>
-        <p:txBody>
-          <a:bodyPr xmlns:a="http://schemas.openxmlformats.org/drawingml/2006/main" anchor="ctr">
-            <a:noAutofit/>
-          </a:bodyPr>
-          <a:lstStyle xmlns:a="http://schemas.openxmlformats.org/drawingml/2006/main"/>
-          <a:p xmlns:a="http://schemas.openxmlformats.org/drawingml/2006/main">
-            <a:pPr algn="l">
-              <a:defRPr sz="2250" b="0">
-                <a:solidFill>
-                  <a:srgbClr val="16343E"/>
-                </a:solidFill>
-                <a:latin typeface="Arial"/>
-                <a:ea typeface="Arial"/>
-                <a:cs typeface="Arial"/>
-              </a:defRPr>
-            </a:pPr>
-            <a:r>
-              <a:rPr sz="2250" b="0">
-                <a:solidFill>
-                  <a:srgbClr val="16343E"/>
-                </a:solidFill>
-                <a:latin typeface="Arial"/>
-                <a:ea typeface="Arial"/>
-                <a:cs typeface="Arial"/>
-              </a:rPr>
-              <a:t>A biopsy shows mild inflammation, but not enough to diagnose rejection. In a study of 146 borderline diagnoses, inflammation disappeared in some patients. Others later developed acute rejection.</a:t>
-            </a:r>
-          </a:p>
-        </p:txBody>
-      </p:sp>
-      <p:sp>
-        <p:nvSpPr>
-          <p:cNvPr id="8" name="">
-            <a:extLst xmlns:a="http://schemas.openxmlformats.org/drawingml/2006/main">
-              <a:ext uri="{FF2B5EF4-FFF2-40B4-BE49-F238E27FC236}">
-                <a16:creationId xmlns:a16="http://schemas.microsoft.com/office/drawing/2014/main" id="{4B07F9B3-3274-4031-BCF6-3B8C633E3525}"/>
-              </a:ext>
-            </a:extLst>
-          </p:cNvPr>
-          <p:cNvSpPr>
-            <a:spLocks xmlns:a="http://schemas.openxmlformats.org/drawingml/2006/main" noGrp="1"/>
-          </p:cNvSpPr>
-          <p:nvPr/>
-        </p:nvSpPr>
-        <p:spPr>
-          <a:xfrm xmlns:a="http://schemas.openxmlformats.org/drawingml/2006/main">
-            <a:off x="609600" y="4591050"/>
-            <a:ext cx="10972800" cy="1504950"/>
-          </a:xfrm>
-          <a:prstGeom xmlns:a="http://schemas.openxmlformats.org/drawingml/2006/main" prst="rect">
-            <a:avLst/>
-          </a:prstGeom>
-          <a:noFill xmlns:a="http://schemas.openxmlformats.org/drawingml/2006/main"/>
-          <a:ln xmlns:a="http://schemas.openxmlformats.org/drawingml/2006/main" w="0">
-            <a:noFill/>
-          </a:ln>
-        </p:spPr>
-        <p:txBody>
-          <a:bodyPr xmlns:a="http://schemas.openxmlformats.org/drawingml/2006/main" anchor="t">
-            <a:noAutofit/>
-          </a:bodyPr>
-          <a:lstStyle xmlns:a="http://schemas.openxmlformats.org/drawingml/2006/main"/>
-          <a:p xmlns:a="http://schemas.openxmlformats.org/drawingml/2006/main">
-            <a:pPr marL="279400" indent="-152400" algn="l">
-              <a:spcAft>
-                <a:spcPts val="1200"/>
-              </a:spcAft>
-              <a:buChar char="•"/>
-              <a:defRPr sz="2325" b="0">
-                <a:solidFill>
-                  <a:srgbClr val="16343E"/>
-                </a:solidFill>
-                <a:latin typeface="Arial"/>
-                <a:ea typeface="Arial"/>
-                <a:cs typeface="Arial"/>
-              </a:defRPr>
-            </a:pPr>
-            <a:r>
-              <a:rPr sz="2325" b="0">
-                <a:solidFill>
-                  <a:srgbClr val="16343E"/>
-                </a:solidFill>
-                <a:latin typeface="Arial"/>
-                <a:ea typeface="Arial"/>
-                <a:cs typeface="Arial"/>
-              </a:rPr>
-              <a:t>As a step towards potentially helping resolve ambiguous biopsies, I used RNA counts to classify recorded diagnoses. A high rejection score could add evidence for specialist review.</a:t>
+              <a:t>The scoring software preserves the procedure evaluated here.</a:t>
             </a:r>
           </a:p>
         </p:txBody>
@@ -8314,7 +8426,7 @@
     </p:spTree>
     <p:extLst>
       <p:ext uri="{BB962C8B-B14F-4D97-AF65-F5344CB8AC3E}">
-        <p14:creationId xmlns:p14="http://schemas.microsoft.com/office/powerpoint/2010/main" val="2000796435"/>
+        <p14:creationId xmlns:p14="http://schemas.microsoft.com/office/powerpoint/2010/main" val="1753361183"/>
       </p:ext>
     </p:extLst>
   </p:cSld>
@@ -8345,7 +8457,7 @@
           <p:cNvPr id="13" name="">
             <a:extLst xmlns:a="http://schemas.openxmlformats.org/drawingml/2006/main">
               <a:ext uri="{FF2B5EF4-FFF2-40B4-BE49-F238E27FC236}">
-                <a16:creationId xmlns:a16="http://schemas.microsoft.com/office/drawing/2014/main" id="{EF58B68E-C5D6-4586-9592-6D86E2C05028}"/>
+                <a16:creationId xmlns:a16="http://schemas.microsoft.com/office/drawing/2014/main" id="{89882B71-677C-48B5-B535-30732198E9A4}"/>
               </a:ext>
             </a:extLst>
           </p:cNvPr>
@@ -8392,7 +8504,7 @@
                 <a:ea typeface="Arial"/>
                 <a:cs typeface="Arial"/>
               </a:rPr>
-              <a:t>Evidence for a molecular second opinion</a:t>
+              <a:t>Clinical and research context</a:t>
             </a:r>
           </a:p>
         </p:txBody>
@@ -8402,19 +8514,19 @@
           <p:cNvPr id="2" name="">
             <a:extLst xmlns:a="http://schemas.openxmlformats.org/drawingml/2006/main">
               <a:ext uri="{FF2B5EF4-FFF2-40B4-BE49-F238E27FC236}">
-                <a16:creationId xmlns:a16="http://schemas.microsoft.com/office/drawing/2014/main" id="{74C4918A-3C06-4D7F-A2CC-196F88328092}"/>
-              </a:ext>
-            </a:extLst>
-          </p:cNvPr>
-          <p:cNvSpPr>
-            <a:spLocks xmlns:a="http://schemas.openxmlformats.org/drawingml/2006/main" noGrp="1"/>
-          </p:cNvSpPr>
-          <p:nvPr/>
-        </p:nvSpPr>
-        <p:spPr>
-          <a:xfrm xmlns:a="http://schemas.openxmlformats.org/drawingml/2006/main">
-            <a:off x="11115675" y="6305550"/>
-            <a:ext cx="457200" cy="285750"/>
+                <a16:creationId xmlns:a16="http://schemas.microsoft.com/office/drawing/2014/main" id="{4B025956-A920-4E6F-83EE-463298E19F8D}"/>
+              </a:ext>
+            </a:extLst>
+          </p:cNvPr>
+          <p:cNvSpPr>
+            <a:spLocks xmlns:a="http://schemas.openxmlformats.org/drawingml/2006/main" noGrp="1"/>
+          </p:cNvSpPr>
+          <p:nvPr/>
+        </p:nvSpPr>
+        <p:spPr>
+          <a:xfrm xmlns:a="http://schemas.openxmlformats.org/drawingml/2006/main">
+            <a:off x="609600" y="6257925"/>
+            <a:ext cx="10382250" cy="361950"/>
           </a:xfrm>
           <a:prstGeom xmlns:a="http://schemas.openxmlformats.org/drawingml/2006/main" prst="rect">
             <a:avLst/>
@@ -8430,7 +8542,7 @@
           </a:bodyPr>
           <a:lstStyle xmlns:a="http://schemas.openxmlformats.org/drawingml/2006/main"/>
           <a:p xmlns:a="http://schemas.openxmlformats.org/drawingml/2006/main">
-            <a:pPr algn="r">
+            <a:pPr algn="l">
               <a:defRPr sz="1350" b="0">
                 <a:solidFill>
                   <a:srgbClr val="52656B"/>
@@ -8449,7 +8561,7 @@
                 <a:ea typeface="Arial"/>
                 <a:cs typeface="Arial"/>
               </a:rPr>
-              <a:t>04</a:t>
+              <a:t>Sources: Banff Reference Guide (2026); Zhang et al. (2024); KDIGO (2009); BK consensus (2024)</a:t>
             </a:r>
           </a:p>
         </p:txBody>
@@ -8459,19 +8571,19 @@
           <p:cNvPr id="3" name="">
             <a:extLst xmlns:a="http://schemas.openxmlformats.org/drawingml/2006/main">
               <a:ext uri="{FF2B5EF4-FFF2-40B4-BE49-F238E27FC236}">
-                <a16:creationId xmlns:a16="http://schemas.microsoft.com/office/drawing/2014/main" id="{DBC3EF6B-9E35-493D-BD80-E77D068A4C21}"/>
-              </a:ext>
-            </a:extLst>
-          </p:cNvPr>
-          <p:cNvSpPr>
-            <a:spLocks xmlns:a="http://schemas.openxmlformats.org/drawingml/2006/main" noGrp="1"/>
-          </p:cNvSpPr>
-          <p:nvPr/>
-        </p:nvSpPr>
-        <p:spPr>
-          <a:xfrm xmlns:a="http://schemas.openxmlformats.org/drawingml/2006/main">
-            <a:off x="609600" y="1533525"/>
-            <a:ext cx="2609850" cy="723900"/>
+                <a16:creationId xmlns:a16="http://schemas.microsoft.com/office/drawing/2014/main" id="{4DE6B718-AE8E-4743-824F-03079EDF4800}"/>
+              </a:ext>
+            </a:extLst>
+          </p:cNvPr>
+          <p:cNvSpPr>
+            <a:spLocks xmlns:a="http://schemas.openxmlformats.org/drawingml/2006/main" noGrp="1"/>
+          </p:cNvSpPr>
+          <p:nvPr/>
+        </p:nvSpPr>
+        <p:spPr>
+          <a:xfrm xmlns:a="http://schemas.openxmlformats.org/drawingml/2006/main">
+            <a:off x="11115675" y="6305550"/>
+            <a:ext cx="457200" cy="285750"/>
           </a:xfrm>
           <a:prstGeom xmlns:a="http://schemas.openxmlformats.org/drawingml/2006/main" prst="rect">
             <a:avLst/>
@@ -8487,49 +8599,26 @@
           </a:bodyPr>
           <a:lstStyle xmlns:a="http://schemas.openxmlformats.org/drawingml/2006/main"/>
           <a:p xmlns:a="http://schemas.openxmlformats.org/drawingml/2006/main">
-            <a:pPr algn="l">
-              <a:defRPr sz="2175" b="1">
-                <a:solidFill>
-                  <a:srgbClr val="16343E"/>
-                </a:solidFill>
-                <a:latin typeface="Arial"/>
-                <a:ea typeface="Arial"/>
-                <a:cs typeface="Arial"/>
-              </a:defRPr>
-            </a:pPr>
-            <a:r>
-              <a:rPr sz="2175" b="1">
-                <a:solidFill>
-                  <a:srgbClr val="16343E"/>
-                </a:solidFill>
-                <a:latin typeface="Arial"/>
-                <a:ea typeface="Arial"/>
-                <a:cs typeface="Arial"/>
-              </a:rPr>
-              <a:t>Banff guidance</a:t>
-            </a:r>
-          </a:p>
-          <a:p xmlns:a="http://schemas.openxmlformats.org/drawingml/2006/main">
-            <a:pPr algn="l">
-              <a:defRPr sz="2175" b="1">
-                <a:solidFill>
-                  <a:srgbClr val="16343E"/>
-                </a:solidFill>
-                <a:latin typeface="Arial"/>
-                <a:ea typeface="Arial"/>
-                <a:cs typeface="Arial"/>
-              </a:defRPr>
-            </a:pPr>
-            <a:r>
-              <a:rPr sz="2175" b="1">
-                <a:solidFill>
-                  <a:srgbClr val="16343E"/>
-                </a:solidFill>
-                <a:latin typeface="Arial"/>
-                <a:ea typeface="Arial"/>
-                <a:cs typeface="Arial"/>
-              </a:rPr>
-              <a:t>2026</a:t>
+            <a:pPr algn="r">
+              <a:defRPr sz="1350" b="0">
+                <a:solidFill>
+                  <a:srgbClr val="52656B"/>
+                </a:solidFill>
+                <a:latin typeface="Arial"/>
+                <a:ea typeface="Arial"/>
+                <a:cs typeface="Arial"/>
+              </a:defRPr>
+            </a:pPr>
+            <a:r>
+              <a:rPr sz="1350" b="0">
+                <a:solidFill>
+                  <a:srgbClr val="52656B"/>
+                </a:solidFill>
+                <a:latin typeface="Arial"/>
+                <a:ea typeface="Arial"/>
+                <a:cs typeface="Arial"/>
+              </a:rPr>
+              <a:t>04</a:t>
             </a:r>
           </a:p>
         </p:txBody>
@@ -8539,19 +8628,19 @@
           <p:cNvPr id="4" name="">
             <a:extLst xmlns:a="http://schemas.openxmlformats.org/drawingml/2006/main">
               <a:ext uri="{FF2B5EF4-FFF2-40B4-BE49-F238E27FC236}">
-                <a16:creationId xmlns:a16="http://schemas.microsoft.com/office/drawing/2014/main" id="{023F0052-4C25-4AE0-B94E-DC78DBDA9EA3}"/>
-              </a:ext>
-            </a:extLst>
-          </p:cNvPr>
-          <p:cNvSpPr>
-            <a:spLocks xmlns:a="http://schemas.openxmlformats.org/drawingml/2006/main" noGrp="1"/>
-          </p:cNvSpPr>
-          <p:nvPr/>
-        </p:nvSpPr>
-        <p:spPr>
-          <a:xfrm xmlns:a="http://schemas.openxmlformats.org/drawingml/2006/main">
-            <a:off x="3476625" y="1533525"/>
-            <a:ext cx="8105775" cy="723900"/>
+                <a16:creationId xmlns:a16="http://schemas.microsoft.com/office/drawing/2014/main" id="{DB731F01-9087-4049-9D69-5EAB0A4E7F4C}"/>
+              </a:ext>
+            </a:extLst>
+          </p:cNvPr>
+          <p:cNvSpPr>
+            <a:spLocks xmlns:a="http://schemas.openxmlformats.org/drawingml/2006/main" noGrp="1"/>
+          </p:cNvSpPr>
+          <p:nvPr/>
+        </p:nvSpPr>
+        <p:spPr>
+          <a:xfrm xmlns:a="http://schemas.openxmlformats.org/drawingml/2006/main">
+            <a:off x="609600" y="1619250"/>
+            <a:ext cx="2609850" cy="857250"/>
           </a:xfrm>
           <a:prstGeom xmlns:a="http://schemas.openxmlformats.org/drawingml/2006/main" prst="rect">
             <a:avLst/>
@@ -8568,27 +8657,84 @@
           <a:lstStyle xmlns:a="http://schemas.openxmlformats.org/drawingml/2006/main"/>
           <a:p xmlns:a="http://schemas.openxmlformats.org/drawingml/2006/main">
             <a:pPr algn="l">
-              <a:defRPr sz="2250" b="0">
-                <a:solidFill>
-                  <a:srgbClr val="16343E"/>
-                </a:solidFill>
-                <a:latin typeface="Arial"/>
-                <a:ea typeface="Arial"/>
-                <a:cs typeface="Arial"/>
-              </a:defRPr>
-            </a:pPr>
-            <a:r>
-              <a:rPr sz="2250" b="0">
-                <a:solidFill>
-                  <a:srgbClr val="16343E"/>
-                </a:solidFill>
-                <a:latin typeface="Arial"/>
-                <a:ea typeface="Arial"/>
-                <a:cs typeface="Arial"/>
-              </a:rPr>
-              <a:t>Considers validated molecular tests</a:t>
-            </a:r>
-          </a:p>
+              <a:defRPr sz="2175" b="1">
+                <a:solidFill>
+                  <a:srgbClr val="16343E"/>
+                </a:solidFill>
+                <a:latin typeface="Arial"/>
+                <a:ea typeface="Arial"/>
+                <a:cs typeface="Arial"/>
+              </a:defRPr>
+            </a:pPr>
+            <a:r>
+              <a:rPr sz="2175" b="1">
+                <a:solidFill>
+                  <a:srgbClr val="16343E"/>
+                </a:solidFill>
+                <a:latin typeface="Arial"/>
+                <a:ea typeface="Arial"/>
+                <a:cs typeface="Arial"/>
+              </a:rPr>
+              <a:t>Banff diagnostic</a:t>
+            </a:r>
+          </a:p>
+          <a:p xmlns:a="http://schemas.openxmlformats.org/drawingml/2006/main">
+            <a:pPr algn="l">
+              <a:defRPr sz="2175" b="1">
+                <a:solidFill>
+                  <a:srgbClr val="16343E"/>
+                </a:solidFill>
+                <a:latin typeface="Arial"/>
+                <a:ea typeface="Arial"/>
+                <a:cs typeface="Arial"/>
+              </a:defRPr>
+            </a:pPr>
+            <a:r>
+              <a:rPr sz="2175" b="1">
+                <a:solidFill>
+                  <a:srgbClr val="16343E"/>
+                </a:solidFill>
+                <a:latin typeface="Arial"/>
+                <a:ea typeface="Arial"/>
+                <a:cs typeface="Arial"/>
+              </a:rPr>
+              <a:t>framework</a:t>
+            </a:r>
+          </a:p>
+        </p:txBody>
+      </p:sp>
+      <p:sp>
+        <p:nvSpPr>
+          <p:cNvPr id="5" name="">
+            <a:extLst xmlns:a="http://schemas.openxmlformats.org/drawingml/2006/main">
+              <a:ext uri="{FF2B5EF4-FFF2-40B4-BE49-F238E27FC236}">
+                <a16:creationId xmlns:a16="http://schemas.microsoft.com/office/drawing/2014/main" id="{BC318E99-DD40-4013-925C-52B7CBD27482}"/>
+              </a:ext>
+            </a:extLst>
+          </p:cNvPr>
+          <p:cNvSpPr>
+            <a:spLocks xmlns:a="http://schemas.openxmlformats.org/drawingml/2006/main" noGrp="1"/>
+          </p:cNvSpPr>
+          <p:nvPr/>
+        </p:nvSpPr>
+        <p:spPr>
+          <a:xfrm xmlns:a="http://schemas.openxmlformats.org/drawingml/2006/main">
+            <a:off x="3476625" y="1619250"/>
+            <a:ext cx="8105775" cy="857250"/>
+          </a:xfrm>
+          <a:prstGeom xmlns:a="http://schemas.openxmlformats.org/drawingml/2006/main" prst="rect">
+            <a:avLst/>
+          </a:prstGeom>
+          <a:noFill xmlns:a="http://schemas.openxmlformats.org/drawingml/2006/main"/>
+          <a:ln xmlns:a="http://schemas.openxmlformats.org/drawingml/2006/main" w="0">
+            <a:noFill/>
+          </a:ln>
+        </p:spPr>
+        <p:txBody>
+          <a:bodyPr xmlns:a="http://schemas.openxmlformats.org/drawingml/2006/main" anchor="ctr">
+            <a:noAutofit/>
+          </a:bodyPr>
+          <a:lstStyle xmlns:a="http://schemas.openxmlformats.org/drawingml/2006/main"/>
           <a:p xmlns:a="http://schemas.openxmlformats.org/drawingml/2006/main">
             <a:pPr algn="l">
               <a:defRPr sz="2250" b="0">
@@ -8609,28 +8755,51 @@
                 <a:ea typeface="Arial"/>
                 <a:cs typeface="Arial"/>
               </a:rPr>
-              <a:t>for difficult biopsy interpretations</a:t>
+              <a:t>Validated biopsy transcript tests have a defined role</a:t>
+            </a:r>
+          </a:p>
+          <a:p xmlns:a="http://schemas.openxmlformats.org/drawingml/2006/main">
+            <a:pPr algn="l">
+              <a:defRPr sz="2250" b="0">
+                <a:solidFill>
+                  <a:srgbClr val="16343E"/>
+                </a:solidFill>
+                <a:latin typeface="Arial"/>
+                <a:ea typeface="Arial"/>
+                <a:cs typeface="Arial"/>
+              </a:defRPr>
+            </a:pPr>
+            <a:r>
+              <a:rPr sz="2250" b="0">
+                <a:solidFill>
+                  <a:srgbClr val="16343E"/>
+                </a:solidFill>
+                <a:latin typeface="Arial"/>
+                <a:ea typeface="Arial"/>
+                <a:cs typeface="Arial"/>
+              </a:rPr>
+              <a:t>in antibody-mediated rejection assessment.</a:t>
             </a:r>
           </a:p>
         </p:txBody>
       </p:sp>
       <p:sp>
         <p:nvSpPr>
-          <p:cNvPr id="5" name="">
-            <a:extLst xmlns:a="http://schemas.openxmlformats.org/drawingml/2006/main">
-              <a:ext uri="{FF2B5EF4-FFF2-40B4-BE49-F238E27FC236}">
-                <a16:creationId xmlns:a16="http://schemas.microsoft.com/office/drawing/2014/main" id="{B118EF41-B71E-4372-BCCE-8D1C5DCD2969}"/>
-              </a:ext>
-            </a:extLst>
-          </p:cNvPr>
-          <p:cNvSpPr>
-            <a:spLocks xmlns:a="http://schemas.openxmlformats.org/drawingml/2006/main" noGrp="1"/>
-          </p:cNvSpPr>
-          <p:nvPr/>
-        </p:nvSpPr>
-        <p:spPr>
-          <a:xfrm xmlns:a="http://schemas.openxmlformats.org/drawingml/2006/main">
-            <a:off x="609600" y="2371725"/>
+          <p:cNvPr id="6" name="">
+            <a:extLst xmlns:a="http://schemas.openxmlformats.org/drawingml/2006/main">
+              <a:ext uri="{FF2B5EF4-FFF2-40B4-BE49-F238E27FC236}">
+                <a16:creationId xmlns:a16="http://schemas.microsoft.com/office/drawing/2014/main" id="{A1B94C24-7100-44D2-AD6B-BF2F0FE32851}"/>
+              </a:ext>
+            </a:extLst>
+          </p:cNvPr>
+          <p:cNvSpPr>
+            <a:spLocks xmlns:a="http://schemas.openxmlformats.org/drawingml/2006/main" noGrp="1"/>
+          </p:cNvSpPr>
+          <p:nvPr/>
+        </p:nvSpPr>
+        <p:spPr>
+          <a:xfrm xmlns:a="http://schemas.openxmlformats.org/drawingml/2006/main">
+            <a:off x="609600" y="2686050"/>
             <a:ext cx="10972800" cy="0"/>
           </a:xfrm>
           <a:prstGeom xmlns:a="http://schemas.openxmlformats.org/drawingml/2006/main" prst="line">
@@ -8645,22 +8814,22 @@
       </p:sp>
       <p:sp>
         <p:nvSpPr>
-          <p:cNvPr id="6" name="">
-            <a:extLst xmlns:a="http://schemas.openxmlformats.org/drawingml/2006/main">
-              <a:ext uri="{FF2B5EF4-FFF2-40B4-BE49-F238E27FC236}">
-                <a16:creationId xmlns:a16="http://schemas.microsoft.com/office/drawing/2014/main" id="{4AB1D88E-C98E-4C9B-A3D5-D63E1D8F235F}"/>
-              </a:ext>
-            </a:extLst>
-          </p:cNvPr>
-          <p:cNvSpPr>
-            <a:spLocks xmlns:a="http://schemas.openxmlformats.org/drawingml/2006/main" noGrp="1"/>
-          </p:cNvSpPr>
-          <p:nvPr/>
-        </p:nvSpPr>
-        <p:spPr>
-          <a:xfrm xmlns:a="http://schemas.openxmlformats.org/drawingml/2006/main">
-            <a:off x="609600" y="2552700"/>
-            <a:ext cx="2609850" cy="771525"/>
+          <p:cNvPr id="7" name="">
+            <a:extLst xmlns:a="http://schemas.openxmlformats.org/drawingml/2006/main">
+              <a:ext uri="{FF2B5EF4-FFF2-40B4-BE49-F238E27FC236}">
+                <a16:creationId xmlns:a16="http://schemas.microsoft.com/office/drawing/2014/main" id="{EC3BCDDA-454D-48EB-8186-4A57FD6F191A}"/>
+              </a:ext>
+            </a:extLst>
+          </p:cNvPr>
+          <p:cNvSpPr>
+            <a:spLocks xmlns:a="http://schemas.openxmlformats.org/drawingml/2006/main" noGrp="1"/>
+          </p:cNvSpPr>
+          <p:nvPr/>
+        </p:nvSpPr>
+        <p:spPr>
+          <a:xfrm xmlns:a="http://schemas.openxmlformats.org/drawingml/2006/main">
+            <a:off x="609600" y="2952750"/>
+            <a:ext cx="2609850" cy="857250"/>
           </a:xfrm>
           <a:prstGeom xmlns:a="http://schemas.openxmlformats.org/drawingml/2006/main" prst="rect">
             <a:avLst/>
@@ -8695,7 +8864,7 @@
                 <a:ea typeface="Arial"/>
                 <a:cs typeface="Arial"/>
               </a:rPr>
-              <a:t>B-HOT study</a:t>
+              <a:t>Published B-HOT study</a:t>
             </a:r>
           </a:p>
           <a:p xmlns:a="http://schemas.openxmlformats.org/drawingml/2006/main">
@@ -8718,29 +8887,29 @@
                 <a:ea typeface="Arial"/>
                 <a:cs typeface="Arial"/>
               </a:rPr>
-              <a:t>Rosales, 2022</a:t>
+              <a:t>Zhang, 2024</a:t>
             </a:r>
           </a:p>
         </p:txBody>
       </p:sp>
       <p:sp>
         <p:nvSpPr>
-          <p:cNvPr id="7" name="">
-            <a:extLst xmlns:a="http://schemas.openxmlformats.org/drawingml/2006/main">
-              <a:ext uri="{FF2B5EF4-FFF2-40B4-BE49-F238E27FC236}">
-                <a16:creationId xmlns:a16="http://schemas.microsoft.com/office/drawing/2014/main" id="{874C97DE-0B13-4B9E-8166-7676B38F55B0}"/>
-              </a:ext>
-            </a:extLst>
-          </p:cNvPr>
-          <p:cNvSpPr>
-            <a:spLocks xmlns:a="http://schemas.openxmlformats.org/drawingml/2006/main" noGrp="1"/>
-          </p:cNvSpPr>
-          <p:nvPr/>
-        </p:nvSpPr>
-        <p:spPr>
-          <a:xfrm xmlns:a="http://schemas.openxmlformats.org/drawingml/2006/main">
-            <a:off x="3476625" y="2466975"/>
-            <a:ext cx="8105775" cy="1028700"/>
+          <p:cNvPr id="8" name="">
+            <a:extLst xmlns:a="http://schemas.openxmlformats.org/drawingml/2006/main">
+              <a:ext uri="{FF2B5EF4-FFF2-40B4-BE49-F238E27FC236}">
+                <a16:creationId xmlns:a16="http://schemas.microsoft.com/office/drawing/2014/main" id="{B3BD8F5A-BD67-47D6-BDF2-FB9C4905E3D2}"/>
+              </a:ext>
+            </a:extLst>
+          </p:cNvPr>
+          <p:cNvSpPr>
+            <a:spLocks xmlns:a="http://schemas.openxmlformats.org/drawingml/2006/main" noGrp="1"/>
+          </p:cNvSpPr>
+          <p:nvPr/>
+        </p:nvSpPr>
+        <p:spPr>
+          <a:xfrm xmlns:a="http://schemas.openxmlformats.org/drawingml/2006/main">
+            <a:off x="3476625" y="2857500"/>
+            <a:ext cx="8105775" cy="1076325"/>
           </a:xfrm>
           <a:prstGeom xmlns:a="http://schemas.openxmlformats.org/drawingml/2006/main" prst="rect">
             <a:avLst/>
@@ -8757,92 +8926,69 @@
           <a:lstStyle xmlns:a="http://schemas.openxmlformats.org/drawingml/2006/main"/>
           <a:p xmlns:a="http://schemas.openxmlformats.org/drawingml/2006/main">
             <a:pPr algn="l">
-              <a:defRPr sz="2100" b="0">
-                <a:solidFill>
-                  <a:srgbClr val="16343E"/>
-                </a:solidFill>
-                <a:latin typeface="Arial"/>
-                <a:ea typeface="Arial"/>
-                <a:cs typeface="Arial"/>
-              </a:defRPr>
-            </a:pPr>
-            <a:r>
-              <a:rPr sz="2100" b="0">
-                <a:solidFill>
-                  <a:srgbClr val="16343E"/>
-                </a:solidFill>
-                <a:latin typeface="Arial"/>
-                <a:ea typeface="Arial"/>
-                <a:cs typeface="Arial"/>
-              </a:rPr>
-              <a:t>Higher initial molecular scores in patients who later</a:t>
+              <a:defRPr sz="2250" b="0">
+                <a:solidFill>
+                  <a:srgbClr val="16343E"/>
+                </a:solidFill>
+                <a:latin typeface="Arial"/>
+                <a:ea typeface="Arial"/>
+                <a:cs typeface="Arial"/>
+              </a:defRPr>
+            </a:pPr>
+            <a:r>
+              <a:rPr sz="2250" b="0">
+                <a:solidFill>
+                  <a:srgbClr val="16343E"/>
+                </a:solidFill>
+                <a:latin typeface="Arial"/>
+                <a:ea typeface="Arial"/>
+                <a:cs typeface="Arial"/>
+              </a:rPr>
+              <a:t>Four-class study compared regression and boosting.</a:t>
             </a:r>
           </a:p>
           <a:p xmlns:a="http://schemas.openxmlformats.org/drawingml/2006/main">
             <a:pPr algn="l">
-              <a:defRPr sz="2100" b="0">
-                <a:solidFill>
-                  <a:srgbClr val="16343E"/>
-                </a:solidFill>
-                <a:latin typeface="Arial"/>
-                <a:ea typeface="Arial"/>
-                <a:cs typeface="Arial"/>
-              </a:defRPr>
-            </a:pPr>
-            <a:r>
-              <a:rPr sz="2100" b="0">
-                <a:solidFill>
-                  <a:srgbClr val="16343E"/>
-                </a:solidFill>
-                <a:latin typeface="Arial"/>
-                <a:ea typeface="Arial"/>
-                <a:cs typeface="Arial"/>
-              </a:rPr>
-              <a:t>developed chronic active antibody-mediated rejection,</a:t>
-            </a:r>
-          </a:p>
-          <a:p xmlns:a="http://schemas.openxmlformats.org/drawingml/2006/main">
-            <a:pPr algn="l">
-              <a:defRPr sz="2100" b="0">
-                <a:solidFill>
-                  <a:srgbClr val="16343E"/>
-                </a:solidFill>
-                <a:latin typeface="Arial"/>
-                <a:ea typeface="Arial"/>
-                <a:cs typeface="Arial"/>
-              </a:defRPr>
-            </a:pPr>
-            <a:r>
-              <a:rPr sz="2100" b="0">
-                <a:solidFill>
-                  <a:srgbClr val="16343E"/>
-                </a:solidFill>
-                <a:latin typeface="Arial"/>
-                <a:ea typeface="Arial"/>
-                <a:cs typeface="Arial"/>
-              </a:rPr>
-              <a:t>despite no initial diagnosis of it</a:t>
+              <a:defRPr sz="2250" b="0">
+                <a:solidFill>
+                  <a:srgbClr val="16343E"/>
+                </a:solidFill>
+                <a:latin typeface="Arial"/>
+                <a:ea typeface="Arial"/>
+                <a:cs typeface="Arial"/>
+              </a:defRPr>
+            </a:pPr>
+            <a:r>
+              <a:rPr sz="2250" b="0">
+                <a:solidFill>
+                  <a:srgbClr val="16343E"/>
+                </a:solidFill>
+                <a:latin typeface="Arial"/>
+                <a:ea typeface="Arial"/>
+                <a:cs typeface="Arial"/>
+              </a:rPr>
+              <a:t>Selected LASSO for similar accuracy with fewer features.</a:t>
             </a:r>
           </a:p>
         </p:txBody>
       </p:sp>
       <p:sp>
         <p:nvSpPr>
-          <p:cNvPr id="8" name="">
-            <a:extLst xmlns:a="http://schemas.openxmlformats.org/drawingml/2006/main">
-              <a:ext uri="{FF2B5EF4-FFF2-40B4-BE49-F238E27FC236}">
-                <a16:creationId xmlns:a16="http://schemas.microsoft.com/office/drawing/2014/main" id="{C91AF1B1-7A51-4C7D-98BA-61A51F2D8586}"/>
-              </a:ext>
-            </a:extLst>
-          </p:cNvPr>
-          <p:cNvSpPr>
-            <a:spLocks xmlns:a="http://schemas.openxmlformats.org/drawingml/2006/main" noGrp="1"/>
-          </p:cNvSpPr>
-          <p:nvPr/>
-        </p:nvSpPr>
-        <p:spPr>
-          <a:xfrm xmlns:a="http://schemas.openxmlformats.org/drawingml/2006/main">
-            <a:off x="609600" y="3648075"/>
+          <p:cNvPr id="9" name="">
+            <a:extLst xmlns:a="http://schemas.openxmlformats.org/drawingml/2006/main">
+              <a:ext uri="{FF2B5EF4-FFF2-40B4-BE49-F238E27FC236}">
+                <a16:creationId xmlns:a16="http://schemas.microsoft.com/office/drawing/2014/main" id="{E1DCC75A-4093-4917-B677-65ECD08F2308}"/>
+              </a:ext>
+            </a:extLst>
+          </p:cNvPr>
+          <p:cNvSpPr>
+            <a:spLocks xmlns:a="http://schemas.openxmlformats.org/drawingml/2006/main" noGrp="1"/>
+          </p:cNvSpPr>
+          <p:nvPr/>
+        </p:nvSpPr>
+        <p:spPr>
+          <a:xfrm xmlns:a="http://schemas.openxmlformats.org/drawingml/2006/main">
+            <a:off x="609600" y="4124325"/>
             <a:ext cx="10972800" cy="0"/>
           </a:xfrm>
           <a:prstGeom xmlns:a="http://schemas.openxmlformats.org/drawingml/2006/main" prst="line">
@@ -8857,21 +9003,21 @@
       </p:sp>
       <p:sp>
         <p:nvSpPr>
-          <p:cNvPr id="9" name="">
-            <a:extLst xmlns:a="http://schemas.openxmlformats.org/drawingml/2006/main">
-              <a:ext uri="{FF2B5EF4-FFF2-40B4-BE49-F238E27FC236}">
-                <a16:creationId xmlns:a16="http://schemas.microsoft.com/office/drawing/2014/main" id="{B89040A1-8FA9-4D8C-8586-990F483A102F}"/>
-              </a:ext>
-            </a:extLst>
-          </p:cNvPr>
-          <p:cNvSpPr>
-            <a:spLocks xmlns:a="http://schemas.openxmlformats.org/drawingml/2006/main" noGrp="1"/>
-          </p:cNvSpPr>
-          <p:nvPr/>
-        </p:nvSpPr>
-        <p:spPr>
-          <a:xfrm xmlns:a="http://schemas.openxmlformats.org/drawingml/2006/main">
-            <a:off x="609600" y="3857625"/>
+          <p:cNvPr id="10" name="">
+            <a:extLst xmlns:a="http://schemas.openxmlformats.org/drawingml/2006/main">
+              <a:ext uri="{FF2B5EF4-FFF2-40B4-BE49-F238E27FC236}">
+                <a16:creationId xmlns:a16="http://schemas.microsoft.com/office/drawing/2014/main" id="{581F0EF1-95FB-4083-BE57-3366BB616FAA}"/>
+              </a:ext>
+            </a:extLst>
+          </p:cNvPr>
+          <p:cNvSpPr>
+            <a:spLocks xmlns:a="http://schemas.openxmlformats.org/drawingml/2006/main" noGrp="1"/>
+          </p:cNvSpPr>
+          <p:nvPr/>
+        </p:nvSpPr>
+        <p:spPr>
+          <a:xfrm xmlns:a="http://schemas.openxmlformats.org/drawingml/2006/main">
+            <a:off x="609600" y="4333875"/>
             <a:ext cx="2609850" cy="981075"/>
           </a:xfrm>
           <a:prstGeom xmlns:a="http://schemas.openxmlformats.org/drawingml/2006/main" prst="rect">
@@ -8937,22 +9083,22 @@
       </p:sp>
       <p:sp>
         <p:nvSpPr>
-          <p:cNvPr id="10" name="">
-            <a:extLst xmlns:a="http://schemas.openxmlformats.org/drawingml/2006/main">
-              <a:ext uri="{FF2B5EF4-FFF2-40B4-BE49-F238E27FC236}">
-                <a16:creationId xmlns:a16="http://schemas.microsoft.com/office/drawing/2014/main" id="{2D56AC8A-13B1-418A-8974-ADBC80B59BA1}"/>
-              </a:ext>
-            </a:extLst>
-          </p:cNvPr>
-          <p:cNvSpPr>
-            <a:spLocks xmlns:a="http://schemas.openxmlformats.org/drawingml/2006/main" noGrp="1"/>
-          </p:cNvSpPr>
-          <p:nvPr/>
-        </p:nvSpPr>
-        <p:spPr>
-          <a:xfrm xmlns:a="http://schemas.openxmlformats.org/drawingml/2006/main">
-            <a:off x="3476625" y="3762375"/>
-            <a:ext cx="8105775" cy="1171575"/>
+          <p:cNvPr id="11" name="">
+            <a:extLst xmlns:a="http://schemas.openxmlformats.org/drawingml/2006/main">
+              <a:ext uri="{FF2B5EF4-FFF2-40B4-BE49-F238E27FC236}">
+                <a16:creationId xmlns:a16="http://schemas.microsoft.com/office/drawing/2014/main" id="{CA86BAC8-AD3B-4402-9DC4-8740AFC4929B}"/>
+              </a:ext>
+            </a:extLst>
+          </p:cNvPr>
+          <p:cNvSpPr>
+            <a:spLocks xmlns:a="http://schemas.openxmlformats.org/drawingml/2006/main" noGrp="1"/>
+          </p:cNvSpPr>
+          <p:nvPr/>
+        </p:nvSpPr>
+        <p:spPr>
+          <a:xfrm xmlns:a="http://schemas.openxmlformats.org/drawingml/2006/main">
+            <a:off x="3476625" y="4295775"/>
+            <a:ext cx="8105775" cy="1114425"/>
           </a:xfrm>
           <a:prstGeom xmlns:a="http://schemas.openxmlformats.org/drawingml/2006/main" prst="rect">
             <a:avLst/>
@@ -9040,22 +9186,22 @@
       </p:sp>
       <p:sp>
         <p:nvSpPr>
-          <p:cNvPr id="11" name="">
-            <a:extLst xmlns:a="http://schemas.openxmlformats.org/drawingml/2006/main">
-              <a:ext uri="{FF2B5EF4-FFF2-40B4-BE49-F238E27FC236}">
-                <a16:creationId xmlns:a16="http://schemas.microsoft.com/office/drawing/2014/main" id="{44BFA0D1-CE29-4B8B-929F-BA81807447F7}"/>
-              </a:ext>
-            </a:extLst>
-          </p:cNvPr>
-          <p:cNvSpPr>
-            <a:spLocks xmlns:a="http://schemas.openxmlformats.org/drawingml/2006/main" noGrp="1"/>
-          </p:cNvSpPr>
-          <p:nvPr/>
-        </p:nvSpPr>
-        <p:spPr>
-          <a:xfrm xmlns:a="http://schemas.openxmlformats.org/drawingml/2006/main">
-            <a:off x="3476625" y="5010150"/>
-            <a:ext cx="8105775" cy="257175"/>
+          <p:cNvPr id="12" name="">
+            <a:extLst xmlns:a="http://schemas.openxmlformats.org/drawingml/2006/main">
+              <a:ext uri="{FF2B5EF4-FFF2-40B4-BE49-F238E27FC236}">
+                <a16:creationId xmlns:a16="http://schemas.microsoft.com/office/drawing/2014/main" id="{54CA514D-A162-4946-9D14-57F704E6A83D}"/>
+              </a:ext>
+            </a:extLst>
+          </p:cNvPr>
+          <p:cNvSpPr>
+            <a:spLocks xmlns:a="http://schemas.openxmlformats.org/drawingml/2006/main" noGrp="1"/>
+          </p:cNvSpPr>
+          <p:nvPr/>
+        </p:nvSpPr>
+        <p:spPr>
+          <a:xfrm xmlns:a="http://schemas.openxmlformats.org/drawingml/2006/main">
+            <a:off x="609600" y="5705475"/>
+            <a:ext cx="10972800" cy="409575"/>
           </a:xfrm>
           <a:prstGeom xmlns:a="http://schemas.openxmlformats.org/drawingml/2006/main" prst="rect">
             <a:avLst/>
@@ -9072,64 +9218,7 @@
           <a:lstStyle xmlns:a="http://schemas.openxmlformats.org/drawingml/2006/main"/>
           <a:p xmlns:a="http://schemas.openxmlformats.org/drawingml/2006/main">
             <a:pPr algn="l">
-              <a:defRPr sz="1350" b="0">
-                <a:solidFill>
-                  <a:srgbClr val="52656B"/>
-                </a:solidFill>
-                <a:latin typeface="Arial"/>
-                <a:ea typeface="Arial"/>
-                <a:cs typeface="Arial"/>
-              </a:defRPr>
-            </a:pPr>
-            <a:r>
-              <a:rPr sz="1350" b="0">
-                <a:solidFill>
-                  <a:srgbClr val="52656B"/>
-                </a:solidFill>
-                <a:latin typeface="Arial"/>
-                <a:ea typeface="Arial"/>
-                <a:cs typeface="Arial"/>
-              </a:rPr>
-              <a:t>KDIGO (2009); Nankivell (2019); BK polyomavirus consensus (2024)</a:t>
-            </a:r>
-          </a:p>
-        </p:txBody>
-      </p:sp>
-      <p:sp>
-        <p:nvSpPr>
-          <p:cNvPr id="12" name="">
-            <a:extLst xmlns:a="http://schemas.openxmlformats.org/drawingml/2006/main">
-              <a:ext uri="{FF2B5EF4-FFF2-40B4-BE49-F238E27FC236}">
-                <a16:creationId xmlns:a16="http://schemas.microsoft.com/office/drawing/2014/main" id="{F38B6620-3B99-43A7-8E35-E89F674B1C23}"/>
-              </a:ext>
-            </a:extLst>
-          </p:cNvPr>
-          <p:cNvSpPr>
-            <a:spLocks xmlns:a="http://schemas.openxmlformats.org/drawingml/2006/main" noGrp="1"/>
-          </p:cNvSpPr>
-          <p:nvPr/>
-        </p:nvSpPr>
-        <p:spPr>
-          <a:xfrm xmlns:a="http://schemas.openxmlformats.org/drawingml/2006/main">
-            <a:off x="609600" y="5353050"/>
-            <a:ext cx="10972800" cy="819150"/>
-          </a:xfrm>
-          <a:prstGeom xmlns:a="http://schemas.openxmlformats.org/drawingml/2006/main" prst="rect">
-            <a:avLst/>
-          </a:prstGeom>
-          <a:noFill xmlns:a="http://schemas.openxmlformats.org/drawingml/2006/main"/>
-          <a:ln xmlns:a="http://schemas.openxmlformats.org/drawingml/2006/main" w="0">
-            <a:noFill/>
-          </a:ln>
-        </p:spPr>
-        <p:txBody>
-          <a:bodyPr xmlns:a="http://schemas.openxmlformats.org/drawingml/2006/main" anchor="ctr">
-            <a:noAutofit/>
-          </a:bodyPr>
-          <a:lstStyle xmlns:a="http://schemas.openxmlformats.org/drawingml/2006/main"/>
-          <a:p xmlns:a="http://schemas.openxmlformats.org/drawingml/2006/main">
-            <a:pPr algn="l">
-              <a:defRPr sz="2250" b="1">
+              <a:defRPr sz="2025" b="1">
                 <a:solidFill>
                   <a:srgbClr val="007C78"/>
                 </a:solidFill>
@@ -9139,7 +9228,7 @@
               </a:defRPr>
             </a:pPr>
             <a:r>
-              <a:rPr sz="2250" b="1">
+              <a:rPr sz="2025" b="1">
                 <a:solidFill>
                   <a:srgbClr val="007C78"/>
                 </a:solidFill>
@@ -9147,30 +9236,7 @@
                 <a:ea typeface="Arial"/>
                 <a:cs typeface="Arial"/>
               </a:rPr>
-              <a:t>This project has not established usefulness in ambiguous biopsies.</a:t>
-            </a:r>
-          </a:p>
-          <a:p xmlns:a="http://schemas.openxmlformats.org/drawingml/2006/main">
-            <a:pPr algn="l">
-              <a:defRPr sz="2250" b="1">
-                <a:solidFill>
-                  <a:srgbClr val="007C78"/>
-                </a:solidFill>
-                <a:latin typeface="Arial"/>
-                <a:ea typeface="Arial"/>
-                <a:cs typeface="Arial"/>
-              </a:defRPr>
-            </a:pPr>
-            <a:r>
-              <a:rPr sz="2250" b="1">
-                <a:solidFill>
-                  <a:srgbClr val="007C78"/>
-                </a:solidFill>
-                <a:latin typeface="Arial"/>
-                <a:ea typeface="Arial"/>
-                <a:cs typeface="Arial"/>
-              </a:rPr>
-              <a:t>That requires comparing specialist assessment with and without RNA scores.</a:t>
+              <a:t>This project compares binary classifier errors against recorded diagnoses.</a:t>
             </a:r>
           </a:p>
         </p:txBody>
@@ -9178,7 +9244,7 @@
     </p:spTree>
     <p:extLst>
       <p:ext uri="{BB962C8B-B14F-4D97-AF65-F5344CB8AC3E}">
-        <p14:creationId xmlns:p14="http://schemas.microsoft.com/office/powerpoint/2010/main" val="59722089"/>
+        <p14:creationId xmlns:p14="http://schemas.microsoft.com/office/powerpoint/2010/main" val="1970890627"/>
       </p:ext>
     </p:extLst>
   </p:cSld>
@@ -9209,7 +9275,7 @@
           <p:cNvPr id="13" name="">
             <a:extLst xmlns:a="http://schemas.openxmlformats.org/drawingml/2006/main">
               <a:ext uri="{FF2B5EF4-FFF2-40B4-BE49-F238E27FC236}">
-                <a16:creationId xmlns:a16="http://schemas.microsoft.com/office/drawing/2014/main" id="{5F431C76-8A11-4C9E-AB61-4923052F290E}"/>
+                <a16:creationId xmlns:a16="http://schemas.microsoft.com/office/drawing/2014/main" id="{6B592D23-9C3F-4415-A260-632034D43FB8}"/>
               </a:ext>
             </a:extLst>
           </p:cNvPr>
@@ -9266,7 +9332,7 @@
           <p:cNvPr id="2" name="">
             <a:extLst xmlns:a="http://schemas.openxmlformats.org/drawingml/2006/main">
               <a:ext uri="{FF2B5EF4-FFF2-40B4-BE49-F238E27FC236}">
-                <a16:creationId xmlns:a16="http://schemas.microsoft.com/office/drawing/2014/main" id="{C71AF8D3-3742-4D71-ADB4-7BE697D1FF41}"/>
+                <a16:creationId xmlns:a16="http://schemas.microsoft.com/office/drawing/2014/main" id="{E9346531-79DC-4042-B380-AA946EA16CE1}"/>
               </a:ext>
             </a:extLst>
           </p:cNvPr>
@@ -9323,7 +9389,7 @@
           <p:cNvPr id="3" name="">
             <a:extLst xmlns:a="http://schemas.openxmlformats.org/drawingml/2006/main">
               <a:ext uri="{FF2B5EF4-FFF2-40B4-BE49-F238E27FC236}">
-                <a16:creationId xmlns:a16="http://schemas.microsoft.com/office/drawing/2014/main" id="{71059A5E-51C6-4123-A0E9-B031B3410732}"/>
+                <a16:creationId xmlns:a16="http://schemas.microsoft.com/office/drawing/2014/main" id="{A5121A58-F425-4308-9E69-DB22AC74E026}"/>
               </a:ext>
             </a:extLst>
           </p:cNvPr>
@@ -9380,7 +9446,7 @@
           <p:cNvPr id="4" name="">
             <a:extLst xmlns:a="http://schemas.openxmlformats.org/drawingml/2006/main">
               <a:ext uri="{FF2B5EF4-FFF2-40B4-BE49-F238E27FC236}">
-                <a16:creationId xmlns:a16="http://schemas.microsoft.com/office/drawing/2014/main" id="{6970DC7B-E58F-45EB-BB17-897DF86B57B2}"/>
+                <a16:creationId xmlns:a16="http://schemas.microsoft.com/office/drawing/2014/main" id="{DA2F1B2F-4BEA-4510-A055-3AAF0AE08875}"/>
               </a:ext>
             </a:extLst>
           </p:cNvPr>
@@ -9437,7 +9503,7 @@
           <p:cNvPr id="5" name="">
             <a:extLst xmlns:a="http://schemas.openxmlformats.org/drawingml/2006/main">
               <a:ext uri="{FF2B5EF4-FFF2-40B4-BE49-F238E27FC236}">
-                <a16:creationId xmlns:a16="http://schemas.microsoft.com/office/drawing/2014/main" id="{BBF96DC9-0A9F-4F83-B308-ACE7C98219AC}"/>
+                <a16:creationId xmlns:a16="http://schemas.microsoft.com/office/drawing/2014/main" id="{2315F3E2-3C79-4FFA-94B5-967BD00BC777}"/>
               </a:ext>
             </a:extLst>
           </p:cNvPr>
@@ -9494,7 +9560,7 @@
           <p:cNvPr id="6" name="">
             <a:extLst xmlns:a="http://schemas.openxmlformats.org/drawingml/2006/main">
               <a:ext uri="{FF2B5EF4-FFF2-40B4-BE49-F238E27FC236}">
-                <a16:creationId xmlns:a16="http://schemas.microsoft.com/office/drawing/2014/main" id="{BF6FAE34-481D-4D80-9908-EA81E5339E5E}"/>
+                <a16:creationId xmlns:a16="http://schemas.microsoft.com/office/drawing/2014/main" id="{88ADB40B-F54E-43BE-B52F-F398410D2B13}"/>
               </a:ext>
             </a:extLst>
           </p:cNvPr>
@@ -10135,7 +10201,7 @@
           <p:cNvPr id="9" name="">
             <a:extLst xmlns:a="http://schemas.openxmlformats.org/drawingml/2006/main">
               <a:ext uri="{FF2B5EF4-FFF2-40B4-BE49-F238E27FC236}">
-                <a16:creationId xmlns:a16="http://schemas.microsoft.com/office/drawing/2014/main" id="{9A247CCD-3FD6-4514-ABFC-3E7DD3613B15}"/>
+                <a16:creationId xmlns:a16="http://schemas.microsoft.com/office/drawing/2014/main" id="{475A6440-CB86-4151-B8C4-9C61B0E7FE43}"/>
               </a:ext>
             </a:extLst>
           </p:cNvPr>
@@ -10164,7 +10230,7 @@
           <p:cNvPr id="10" name="">
             <a:extLst xmlns:a="http://schemas.openxmlformats.org/drawingml/2006/main">
               <a:ext uri="{FF2B5EF4-FFF2-40B4-BE49-F238E27FC236}">
-                <a16:creationId xmlns:a16="http://schemas.microsoft.com/office/drawing/2014/main" id="{598C77B8-DAE0-4583-9567-AF24558B564B}"/>
+                <a16:creationId xmlns:a16="http://schemas.microsoft.com/office/drawing/2014/main" id="{68027F8E-4165-41D5-9A6B-8D13F346716C}"/>
               </a:ext>
             </a:extLst>
           </p:cNvPr>
@@ -10221,7 +10287,7 @@
           <p:cNvPr id="11" name="">
             <a:extLst xmlns:a="http://schemas.openxmlformats.org/drawingml/2006/main">
               <a:ext uri="{FF2B5EF4-FFF2-40B4-BE49-F238E27FC236}">
-                <a16:creationId xmlns:a16="http://schemas.microsoft.com/office/drawing/2014/main" id="{C9D963E6-BC59-409C-9061-477D39C2358C}"/>
+                <a16:creationId xmlns:a16="http://schemas.microsoft.com/office/drawing/2014/main" id="{995F1FB3-A0CD-4E32-80AB-05B41C74ABD6}"/>
               </a:ext>
             </a:extLst>
           </p:cNvPr>
@@ -10278,7 +10344,7 @@
           <p:cNvPr id="12" name="">
             <a:extLst xmlns:a="http://schemas.openxmlformats.org/drawingml/2006/main">
               <a:ext uri="{FF2B5EF4-FFF2-40B4-BE49-F238E27FC236}">
-                <a16:creationId xmlns:a16="http://schemas.microsoft.com/office/drawing/2014/main" id="{A4FB3691-4916-414D-AAF9-D83054556C99}"/>
+                <a16:creationId xmlns:a16="http://schemas.microsoft.com/office/drawing/2014/main" id="{26AA2BAC-D6C5-4778-B86D-0D6FC86A34D5}"/>
               </a:ext>
             </a:extLst>
           </p:cNvPr>
@@ -10364,7 +10430,7 @@
     </p:spTree>
     <p:extLst>
       <p:ext uri="{BB962C8B-B14F-4D97-AF65-F5344CB8AC3E}">
-        <p14:creationId xmlns:p14="http://schemas.microsoft.com/office/powerpoint/2010/main" val="1641302057"/>
+        <p14:creationId xmlns:p14="http://schemas.microsoft.com/office/powerpoint/2010/main" val="1603777412"/>
       </p:ext>
     </p:extLst>
   </p:cSld>
@@ -10395,7 +10461,7 @@
           <p:cNvPr id="7" name="">
             <a:extLst xmlns:a="http://schemas.openxmlformats.org/drawingml/2006/main">
               <a:ext uri="{FF2B5EF4-FFF2-40B4-BE49-F238E27FC236}">
-                <a16:creationId xmlns:a16="http://schemas.microsoft.com/office/drawing/2014/main" id="{ABC2A62F-124A-4982-9177-1729C336E399}"/>
+                <a16:creationId xmlns:a16="http://schemas.microsoft.com/office/drawing/2014/main" id="{B89D7E1F-A9B1-4F1D-893B-C1A3188295B6}"/>
               </a:ext>
             </a:extLst>
           </p:cNvPr>
@@ -10452,7 +10518,7 @@
           <p:cNvPr id="2" name="">
             <a:extLst xmlns:a="http://schemas.openxmlformats.org/drawingml/2006/main">
               <a:ext uri="{FF2B5EF4-FFF2-40B4-BE49-F238E27FC236}">
-                <a16:creationId xmlns:a16="http://schemas.microsoft.com/office/drawing/2014/main" id="{ACA69403-A1D0-4BF0-ABA2-D1696C0A3EB8}"/>
+                <a16:creationId xmlns:a16="http://schemas.microsoft.com/office/drawing/2014/main" id="{CA900364-2973-45AF-BCCE-156A2C4EB980}"/>
               </a:ext>
             </a:extLst>
           </p:cNvPr>
@@ -10509,7 +10575,7 @@
           <p:cNvPr id="3" name="">
             <a:extLst xmlns:a="http://schemas.openxmlformats.org/drawingml/2006/main">
               <a:ext uri="{FF2B5EF4-FFF2-40B4-BE49-F238E27FC236}">
-                <a16:creationId xmlns:a16="http://schemas.microsoft.com/office/drawing/2014/main" id="{3E1D45C2-3D26-4395-AE54-89D96C46DCE2}"/>
+                <a16:creationId xmlns:a16="http://schemas.microsoft.com/office/drawing/2014/main" id="{E75A8CB9-2226-4BF2-91A2-3DF663178B7C}"/>
               </a:ext>
             </a:extLst>
           </p:cNvPr>
@@ -10566,7 +10632,7 @@
           <p:cNvPr id="4" name="">
             <a:extLst xmlns:a="http://schemas.openxmlformats.org/drawingml/2006/main">
               <a:ext uri="{FF2B5EF4-FFF2-40B4-BE49-F238E27FC236}">
-                <a16:creationId xmlns:a16="http://schemas.microsoft.com/office/drawing/2014/main" id="{AE197FEF-73A5-4912-94C9-5B0E4E45B715}"/>
+                <a16:creationId xmlns:a16="http://schemas.microsoft.com/office/drawing/2014/main" id="{4B2C25E3-0066-4C1A-9B4B-8BA458499657}"/>
               </a:ext>
             </a:extLst>
           </p:cNvPr>
@@ -11046,7 +11112,7 @@
           <p:cNvPr id="6" name="">
             <a:extLst xmlns:a="http://schemas.openxmlformats.org/drawingml/2006/main">
               <a:ext uri="{FF2B5EF4-FFF2-40B4-BE49-F238E27FC236}">
-                <a16:creationId xmlns:a16="http://schemas.microsoft.com/office/drawing/2014/main" id="{B64EFF55-FEDB-4D1B-B62A-E618A5B2F290}"/>
+                <a16:creationId xmlns:a16="http://schemas.microsoft.com/office/drawing/2014/main" id="{5570221F-E817-4CD2-BC4D-54C7DBE6095C}"/>
               </a:ext>
             </a:extLst>
           </p:cNvPr>
@@ -11101,7 +11167,7 @@
     </p:spTree>
     <p:extLst>
       <p:ext uri="{BB962C8B-B14F-4D97-AF65-F5344CB8AC3E}">
-        <p14:creationId xmlns:p14="http://schemas.microsoft.com/office/powerpoint/2010/main" val="2107203646"/>
+        <p14:creationId xmlns:p14="http://schemas.microsoft.com/office/powerpoint/2010/main" val="603845905"/>
       </p:ext>
     </p:extLst>
   </p:cSld>
@@ -11132,7 +11198,7 @@
           <p:cNvPr id="11" name="">
             <a:extLst xmlns:a="http://schemas.openxmlformats.org/drawingml/2006/main">
               <a:ext uri="{FF2B5EF4-FFF2-40B4-BE49-F238E27FC236}">
-                <a16:creationId xmlns:a16="http://schemas.microsoft.com/office/drawing/2014/main" id="{895F2407-C5EC-4FDE-9192-8528F4470218}"/>
+                <a16:creationId xmlns:a16="http://schemas.microsoft.com/office/drawing/2014/main" id="{2AEB6F53-48BE-4974-A36C-BC4960B955E8}"/>
               </a:ext>
             </a:extLst>
           </p:cNvPr>
@@ -11189,7 +11255,7 @@
           <p:cNvPr id="2" name="">
             <a:extLst xmlns:a="http://schemas.openxmlformats.org/drawingml/2006/main">
               <a:ext uri="{FF2B5EF4-FFF2-40B4-BE49-F238E27FC236}">
-                <a16:creationId xmlns:a16="http://schemas.microsoft.com/office/drawing/2014/main" id="{8A42B5D8-9BF7-4502-BD14-B7BD12F57DA5}"/>
+                <a16:creationId xmlns:a16="http://schemas.microsoft.com/office/drawing/2014/main" id="{F0D46A98-93FA-44BA-B37B-FD1C6A8C341D}"/>
               </a:ext>
             </a:extLst>
           </p:cNvPr>
@@ -11246,7 +11312,7 @@
           <p:cNvPr id="3" name="">
             <a:extLst xmlns:a="http://schemas.openxmlformats.org/drawingml/2006/main">
               <a:ext uri="{FF2B5EF4-FFF2-40B4-BE49-F238E27FC236}">
-                <a16:creationId xmlns:a16="http://schemas.microsoft.com/office/drawing/2014/main" id="{9B28A0B1-74B1-4E4E-B941-6A8A871CD72A}"/>
+                <a16:creationId xmlns:a16="http://schemas.microsoft.com/office/drawing/2014/main" id="{7D4C512E-848F-4799-891E-5D3048786173}"/>
               </a:ext>
             </a:extLst>
           </p:cNvPr>
@@ -11303,7 +11369,7 @@
           <p:cNvPr id="4" name="">
             <a:extLst xmlns:a="http://schemas.openxmlformats.org/drawingml/2006/main">
               <a:ext uri="{FF2B5EF4-FFF2-40B4-BE49-F238E27FC236}">
-                <a16:creationId xmlns:a16="http://schemas.microsoft.com/office/drawing/2014/main" id="{2897DC9E-6EFA-4C3F-AE85-FE11B47A84C5}"/>
+                <a16:creationId xmlns:a16="http://schemas.microsoft.com/office/drawing/2014/main" id="{0C10486F-DDF1-4D02-84BD-8E4C4463DCB0}"/>
               </a:ext>
             </a:extLst>
           </p:cNvPr>
@@ -11360,7 +11426,7 @@
           <p:cNvPr id="5" name="">
             <a:extLst xmlns:a="http://schemas.openxmlformats.org/drawingml/2006/main">
               <a:ext uri="{FF2B5EF4-FFF2-40B4-BE49-F238E27FC236}">
-                <a16:creationId xmlns:a16="http://schemas.microsoft.com/office/drawing/2014/main" id="{078CCC6C-7B57-4EAE-AC99-98A2DBD13CD8}"/>
+                <a16:creationId xmlns:a16="http://schemas.microsoft.com/office/drawing/2014/main" id="{D849AA30-0E40-494E-A35F-70888CE86844}"/>
               </a:ext>
             </a:extLst>
           </p:cNvPr>
@@ -11417,7 +11483,7 @@
           <p:cNvPr id="6" name="">
             <a:extLst xmlns:a="http://schemas.openxmlformats.org/drawingml/2006/main">
               <a:ext uri="{FF2B5EF4-FFF2-40B4-BE49-F238E27FC236}">
-                <a16:creationId xmlns:a16="http://schemas.microsoft.com/office/drawing/2014/main" id="{94906B19-AFE7-46C8-AF9F-A577961D681B}"/>
+                <a16:creationId xmlns:a16="http://schemas.microsoft.com/office/drawing/2014/main" id="{35AAC4F8-9CD9-4271-A482-123F8076F7A3}"/>
               </a:ext>
             </a:extLst>
           </p:cNvPr>
@@ -11474,7 +11540,7 @@
           <p:cNvPr id="7" name="">
             <a:extLst xmlns:a="http://schemas.openxmlformats.org/drawingml/2006/main">
               <a:ext uri="{FF2B5EF4-FFF2-40B4-BE49-F238E27FC236}">
-                <a16:creationId xmlns:a16="http://schemas.microsoft.com/office/drawing/2014/main" id="{B38A6DA1-9F2D-4608-8FC1-A9A643A7D19E}"/>
+                <a16:creationId xmlns:a16="http://schemas.microsoft.com/office/drawing/2014/main" id="{6B870C10-CD8A-4D7E-A5CA-D1FDACF73307}"/>
               </a:ext>
             </a:extLst>
           </p:cNvPr>
@@ -11589,7 +11655,7 @@
           <p:cNvPr id="8" name="">
             <a:extLst xmlns:a="http://schemas.openxmlformats.org/drawingml/2006/main">
               <a:ext uri="{FF2B5EF4-FFF2-40B4-BE49-F238E27FC236}">
-                <a16:creationId xmlns:a16="http://schemas.microsoft.com/office/drawing/2014/main" id="{332AC095-E167-4DE8-A1DB-489C1506B251}"/>
+                <a16:creationId xmlns:a16="http://schemas.microsoft.com/office/drawing/2014/main" id="{34E46DAF-6DBC-4FF6-80FD-9F0EC934F017}"/>
               </a:ext>
             </a:extLst>
           </p:cNvPr>
@@ -11646,7 +11712,7 @@
           <p:cNvPr id="9" name="">
             <a:extLst xmlns:a="http://schemas.openxmlformats.org/drawingml/2006/main">
               <a:ext uri="{FF2B5EF4-FFF2-40B4-BE49-F238E27FC236}">
-                <a16:creationId xmlns:a16="http://schemas.microsoft.com/office/drawing/2014/main" id="{2DB963A7-5719-49A6-BEBB-CCD1A19DCB05}"/>
+                <a16:creationId xmlns:a16="http://schemas.microsoft.com/office/drawing/2014/main" id="{8245895F-AD5B-4E5E-B04F-35ACB78B0F9F}"/>
               </a:ext>
             </a:extLst>
           </p:cNvPr>
@@ -11703,7 +11769,7 @@
           <p:cNvPr id="10" name="">
             <a:extLst xmlns:a="http://schemas.openxmlformats.org/drawingml/2006/main">
               <a:ext uri="{FF2B5EF4-FFF2-40B4-BE49-F238E27FC236}">
-                <a16:creationId xmlns:a16="http://schemas.microsoft.com/office/drawing/2014/main" id="{786DAC70-0981-4B06-8437-61A4F5BB780F}"/>
+                <a16:creationId xmlns:a16="http://schemas.microsoft.com/office/drawing/2014/main" id="{526288D3-816D-4289-89FE-276534E1137E}"/>
               </a:ext>
             </a:extLst>
           </p:cNvPr>
@@ -11816,7 +11882,7 @@
     </p:spTree>
     <p:extLst>
       <p:ext uri="{BB962C8B-B14F-4D97-AF65-F5344CB8AC3E}">
-        <p14:creationId xmlns:p14="http://schemas.microsoft.com/office/powerpoint/2010/main" val="1033048387"/>
+        <p14:creationId xmlns:p14="http://schemas.microsoft.com/office/powerpoint/2010/main" val="1179486579"/>
       </p:ext>
     </p:extLst>
   </p:cSld>
@@ -11847,7 +11913,7 @@
           <p:cNvPr id="5" name="">
             <a:extLst xmlns:a="http://schemas.openxmlformats.org/drawingml/2006/main">
               <a:ext uri="{FF2B5EF4-FFF2-40B4-BE49-F238E27FC236}">
-                <a16:creationId xmlns:a16="http://schemas.microsoft.com/office/drawing/2014/main" id="{E88295D8-984F-4704-A828-A9D3DD060E24}"/>
+                <a16:creationId xmlns:a16="http://schemas.microsoft.com/office/drawing/2014/main" id="{B8E70A33-9E5B-471C-A107-11F335211070}"/>
               </a:ext>
             </a:extLst>
           </p:cNvPr>
@@ -11904,7 +11970,7 @@
           <p:cNvPr id="2" name="">
             <a:extLst xmlns:a="http://schemas.openxmlformats.org/drawingml/2006/main">
               <a:ext uri="{FF2B5EF4-FFF2-40B4-BE49-F238E27FC236}">
-                <a16:creationId xmlns:a16="http://schemas.microsoft.com/office/drawing/2014/main" id="{3DB20259-434D-4901-981A-C74AB6ACC771}"/>
+                <a16:creationId xmlns:a16="http://schemas.microsoft.com/office/drawing/2014/main" id="{598601A4-507C-4B32-8325-78D0AB0957B9}"/>
               </a:ext>
             </a:extLst>
           </p:cNvPr>
@@ -11961,7 +12027,7 @@
           <p:cNvPr id="3" name="">
             <a:extLst xmlns:a="http://schemas.openxmlformats.org/drawingml/2006/main">
               <a:ext uri="{FF2B5EF4-FFF2-40B4-BE49-F238E27FC236}">
-                <a16:creationId xmlns:a16="http://schemas.microsoft.com/office/drawing/2014/main" id="{5A210E71-392A-4528-B030-FF235C1F46D9}"/>
+                <a16:creationId xmlns:a16="http://schemas.microsoft.com/office/drawing/2014/main" id="{0A2817DD-2D72-4DC2-9CF1-6AEDBD29224D}"/>
               </a:ext>
             </a:extLst>
           </p:cNvPr>
@@ -12308,7 +12374,7 @@
     </p:spTree>
     <p:extLst>
       <p:ext uri="{BB962C8B-B14F-4D97-AF65-F5344CB8AC3E}">
-        <p14:creationId xmlns:p14="http://schemas.microsoft.com/office/powerpoint/2010/main" val="852904421"/>
+        <p14:creationId xmlns:p14="http://schemas.microsoft.com/office/powerpoint/2010/main" val="141586907"/>
       </p:ext>
     </p:extLst>
   </p:cSld>
@@ -12339,7 +12405,7 @@
           <p:cNvPr id="11" name="">
             <a:extLst xmlns:a="http://schemas.openxmlformats.org/drawingml/2006/main">
               <a:ext uri="{FF2B5EF4-FFF2-40B4-BE49-F238E27FC236}">
-                <a16:creationId xmlns:a16="http://schemas.microsoft.com/office/drawing/2014/main" id="{2962AE36-99C5-4042-88B7-E358FE895E9E}"/>
+                <a16:creationId xmlns:a16="http://schemas.microsoft.com/office/drawing/2014/main" id="{A3B64EFB-D7CB-4C1C-8105-A69DF1692552}"/>
               </a:ext>
             </a:extLst>
           </p:cNvPr>
@@ -12396,7 +12462,7 @@
           <p:cNvPr id="2" name="">
             <a:extLst xmlns:a="http://schemas.openxmlformats.org/drawingml/2006/main">
               <a:ext uri="{FF2B5EF4-FFF2-40B4-BE49-F238E27FC236}">
-                <a16:creationId xmlns:a16="http://schemas.microsoft.com/office/drawing/2014/main" id="{ED5CCE2E-DF3C-4B0E-BA7C-1F1360B5AE11}"/>
+                <a16:creationId xmlns:a16="http://schemas.microsoft.com/office/drawing/2014/main" id="{BC921378-8F81-45C5-AF83-6BCECD7007E0}"/>
               </a:ext>
             </a:extLst>
           </p:cNvPr>
@@ -12453,7 +12519,7 @@
           <p:cNvPr id="3" name="">
             <a:extLst xmlns:a="http://schemas.openxmlformats.org/drawingml/2006/main">
               <a:ext uri="{FF2B5EF4-FFF2-40B4-BE49-F238E27FC236}">
-                <a16:creationId xmlns:a16="http://schemas.microsoft.com/office/drawing/2014/main" id="{61FB976A-EA03-4A73-A040-CDB5117AB436}"/>
+                <a16:creationId xmlns:a16="http://schemas.microsoft.com/office/drawing/2014/main" id="{86668167-0F9C-48FC-B43C-A350B21BDD7C}"/>
               </a:ext>
             </a:extLst>
           </p:cNvPr>
@@ -12510,7 +12576,7 @@
           <p:cNvPr id="4" name="">
             <a:extLst xmlns:a="http://schemas.openxmlformats.org/drawingml/2006/main">
               <a:ext uri="{FF2B5EF4-FFF2-40B4-BE49-F238E27FC236}">
-                <a16:creationId xmlns:a16="http://schemas.microsoft.com/office/drawing/2014/main" id="{7A6D0B42-0555-48BB-AFE8-454F72AC73DB}"/>
+                <a16:creationId xmlns:a16="http://schemas.microsoft.com/office/drawing/2014/main" id="{44B39263-190D-43A6-9D4A-534152A7991A}"/>
               </a:ext>
             </a:extLst>
           </p:cNvPr>
@@ -12598,7 +12664,7 @@
           <p:cNvPr id="5" name="">
             <a:extLst xmlns:a="http://schemas.openxmlformats.org/drawingml/2006/main">
               <a:ext uri="{FF2B5EF4-FFF2-40B4-BE49-F238E27FC236}">
-                <a16:creationId xmlns:a16="http://schemas.microsoft.com/office/drawing/2014/main" id="{102B869A-26A4-4246-AB7C-7F3462ED3F50}"/>
+                <a16:creationId xmlns:a16="http://schemas.microsoft.com/office/drawing/2014/main" id="{855E4670-9989-4D38-BA32-ECC0E1126B8B}"/>
               </a:ext>
             </a:extLst>
           </p:cNvPr>
@@ -12682,7 +12748,7 @@
           <p:cNvPr id="6" name="">
             <a:extLst xmlns:a="http://schemas.openxmlformats.org/drawingml/2006/main">
               <a:ext uri="{FF2B5EF4-FFF2-40B4-BE49-F238E27FC236}">
-                <a16:creationId xmlns:a16="http://schemas.microsoft.com/office/drawing/2014/main" id="{C8DA0ABD-77D3-4B29-880B-73EA4818E2EE}"/>
+                <a16:creationId xmlns:a16="http://schemas.microsoft.com/office/drawing/2014/main" id="{235F124B-CF62-41AD-B116-AE87FFAF1849}"/>
               </a:ext>
             </a:extLst>
           </p:cNvPr>
@@ -12766,7 +12832,7 @@
           <p:cNvPr id="7" name="">
             <a:extLst xmlns:a="http://schemas.openxmlformats.org/drawingml/2006/main">
               <a:ext uri="{FF2B5EF4-FFF2-40B4-BE49-F238E27FC236}">
-                <a16:creationId xmlns:a16="http://schemas.microsoft.com/office/drawing/2014/main" id="{62225C69-C1FD-4B90-AA82-BD514B8D2C9B}"/>
+                <a16:creationId xmlns:a16="http://schemas.microsoft.com/office/drawing/2014/main" id="{BD499024-1C99-439A-B4B6-815A5172C2F7}"/>
               </a:ext>
             </a:extLst>
           </p:cNvPr>
@@ -12906,7 +12972,7 @@
           <p:cNvPr id="10" name="">
             <a:extLst xmlns:a="http://schemas.openxmlformats.org/drawingml/2006/main">
               <a:ext uri="{FF2B5EF4-FFF2-40B4-BE49-F238E27FC236}">
-                <a16:creationId xmlns:a16="http://schemas.microsoft.com/office/drawing/2014/main" id="{788EF9B9-ACE8-43D8-9CE2-C3F2892627AD}"/>
+                <a16:creationId xmlns:a16="http://schemas.microsoft.com/office/drawing/2014/main" id="{B669DB85-AE16-4E4E-AA00-CB7E40D505F8}"/>
               </a:ext>
             </a:extLst>
           </p:cNvPr>
@@ -13039,7 +13105,7 @@
     </p:spTree>
     <p:extLst>
       <p:ext uri="{BB962C8B-B14F-4D97-AF65-F5344CB8AC3E}">
-        <p14:creationId xmlns:p14="http://schemas.microsoft.com/office/powerpoint/2010/main" val="1757600718"/>
+        <p14:creationId xmlns:p14="http://schemas.microsoft.com/office/powerpoint/2010/main" val="940028908"/>
       </p:ext>
     </p:extLst>
   </p:cSld>

--- a/presentation/unos_kidney_biopsy.pptx
+++ b/presentation/unos_kidney_biopsy.pptx
@@ -2,28 +2,23 @@
 <file path=ppt/presentation.xml><?xml version="1.0" encoding="utf-8"?>
 <p:presentation xmlns:p="http://schemas.openxmlformats.org/presentationml/2006/main" xmlns:r="http://schemas.openxmlformats.org/officeDocument/2006/relationships">
   <p:sldMasterIdLst>
-    <p:sldMasterId id="2147483648" r:id="R50ca9ad9fd284fea"/>
+    <p:sldMasterId id="2147483648" r:id="R0ed844c1105f43f4"/>
   </p:sldMasterIdLst>
   <p:sldIdLst>
-    <p:sldId id="256" r:id="Re7db7bb8a46d4b32"/>
-    <p:sldId id="257" r:id="R4f968604d946492e"/>
-    <p:sldId id="258" r:id="R34c49a3e23a94722"/>
-    <p:sldId id="259" r:id="R686d18927feb48d7"/>
-    <p:sldId id="260" r:id="R565c92036ba34a91"/>
-    <p:sldId id="261" r:id="R6b3df11763304d4a"/>
-    <p:sldId id="262" r:id="R849d321994f741aa"/>
-    <p:sldId id="263" r:id="Rbffebd4ea35540dc"/>
-    <p:sldId id="264" r:id="Rdc77cf83ba53449c"/>
-    <p:sldId id="265" r:id="Rd128ef0c147642eb"/>
-    <p:sldId id="266" r:id="R67e2eab437f2424e"/>
-    <p:sldId id="267" r:id="R900c6fba1bbe4bbf"/>
-    <p:sldId id="268" r:id="Rf0112f79d9cb419d"/>
-    <p:sldId id="269" r:id="R358fd6ca706044ea"/>
-    <p:sldId id="270" r:id="R4f95177ecd4b45b9"/>
-    <p:sldId id="271" r:id="R6136032f43d2435b"/>
-    <p:sldId id="272" r:id="Rbedbe09b8c514403"/>
-    <p:sldId id="273" r:id="Rd0dfdfa4a6284704"/>
-    <p:sldId id="274" r:id="Reb36b179ad554ac2"/>
+    <p:sldId id="256" r:id="R1da50bf531ec4aac"/>
+    <p:sldId id="257" r:id="Rf84452d2265644c6"/>
+    <p:sldId id="258" r:id="Rd2bbc35d9db44420"/>
+    <p:sldId id="259" r:id="Re748c4c2b0c548ea"/>
+    <p:sldId id="260" r:id="Rd7d2817c67384cbf"/>
+    <p:sldId id="261" r:id="R326e2b707e904e08"/>
+    <p:sldId id="262" r:id="R9f4d3c9562e940fd"/>
+    <p:sldId id="263" r:id="Rcf1563392a334b63"/>
+    <p:sldId id="264" r:id="R80cebfcf34f4494f"/>
+    <p:sldId id="265" r:id="Rfc305686560343d3"/>
+    <p:sldId id="266" r:id="Raa05d04e427a4301"/>
+    <p:sldId id="267" r:id="R4d42540895c64039"/>
+    <p:sldId id="268" r:id="R7acc59df41194444"/>
+    <p:sldId id="269" r:id="R12b69fb94bfe4fd3"/>
   </p:sldIdLst>
   <p:sldSz cx="12192000" cy="6858000"/>
   <p:notesSz cx="6858000" cy="9144000"/>
@@ -68,7 +63,7 @@
   </p:cSld>
   <p:clrMap bg1="lt1" tx1="dk1" bg2="lt2" tx2="dk2" accent1="accent1" accent2="accent2" accent3="accent3" accent4="accent4" accent5="accent5" accent6="accent6" hlink="hlink" folHlink="folHlink"/>
   <p:sldLayoutIdLst>
-    <p:sldLayoutId xmlns:r="http://schemas.openxmlformats.org/officeDocument/2006/relationships" id="2147483649" r:id="Rebdb733dc8284093"/>
+    <p:sldLayoutId xmlns:r="http://schemas.openxmlformats.org/officeDocument/2006/relationships" id="2147483649" r:id="R7ebc50db3a104ecd"/>
   </p:sldLayoutIdLst>
   <p:txStyles>
     <p:titleStyle>
@@ -608,7 +603,7 @@
           <c:idx val="0"/>
           <c:order val="0"/>
           <c:tx>
-            <c:v>False negatives / 169</c:v>
+            <c:v>Missed cases / 169</c:v>
           </c:tx>
           <c:spPr>
             <a:solidFill xmlns:a="http://schemas.openxmlformats.org/drawingml/2006/main">
@@ -655,7 +650,7 @@
           <c:idx val="1"/>
           <c:order val="1"/>
           <c:tx>
-            <c:v>False positives / 176</c:v>
+            <c:v>Incorrect flags / 176</c:v>
           </c:tx>
           <c:spPr>
             <a:solidFill xmlns:a="http://schemas.openxmlformats.org/drawingml/2006/main">
@@ -876,7 +871,7 @@
           <p:cNvPr id="2" name="">
             <a:extLst xmlns:a="http://schemas.openxmlformats.org/drawingml/2006/main">
               <a:ext uri="{FF2B5EF4-FFF2-40B4-BE49-F238E27FC236}">
-                <a16:creationId xmlns:a16="http://schemas.microsoft.com/office/drawing/2014/main" id="{9FB5ED01-E630-46ED-8609-55A3E6A3FD72}"/>
+                <a16:creationId xmlns:a16="http://schemas.microsoft.com/office/drawing/2014/main" id="{0F8CF6AB-CAFC-4852-A4A6-32339F559DBF}"/>
               </a:ext>
             </a:extLst>
           </p:cNvPr>
@@ -977,7 +972,7 @@
     </p:spTree>
     <p:extLst>
       <p:ext uri="{BB962C8B-B14F-4D97-AF65-F5344CB8AC3E}">
-        <p14:creationId xmlns:p14="http://schemas.microsoft.com/office/powerpoint/2010/main" val="654429306"/>
+        <p14:creationId xmlns:p14="http://schemas.microsoft.com/office/powerpoint/2010/main" val="1042494574"/>
       </p:ext>
     </p:extLst>
   </p:cSld>
@@ -1008,7 +1003,7 @@
           <p:cNvPr id="6" name="">
             <a:extLst xmlns:a="http://schemas.openxmlformats.org/drawingml/2006/main">
               <a:ext uri="{FF2B5EF4-FFF2-40B4-BE49-F238E27FC236}">
-                <a16:creationId xmlns:a16="http://schemas.microsoft.com/office/drawing/2014/main" id="{5468FA2C-109C-47F4-9CD6-6E2820246E98}"/>
+                <a16:creationId xmlns:a16="http://schemas.microsoft.com/office/drawing/2014/main" id="{955859BB-C459-4BC4-8216-0140BA1794ED}"/>
               </a:ext>
             </a:extLst>
           </p:cNvPr>
@@ -1065,7 +1060,7 @@
           <p:cNvPr id="2" name="">
             <a:extLst xmlns:a="http://schemas.openxmlformats.org/drawingml/2006/main">
               <a:ext uri="{FF2B5EF4-FFF2-40B4-BE49-F238E27FC236}">
-                <a16:creationId xmlns:a16="http://schemas.microsoft.com/office/drawing/2014/main" id="{C9BE6A94-DB81-4337-A21E-DA2A0845D098}"/>
+                <a16:creationId xmlns:a16="http://schemas.microsoft.com/office/drawing/2014/main" id="{EC4AEA37-B91E-4A37-8A64-79FFCE738AEE}"/>
               </a:ext>
             </a:extLst>
           </p:cNvPr>
@@ -1122,7 +1117,7 @@
           <p:cNvPr id="3" name="">
             <a:extLst xmlns:a="http://schemas.openxmlformats.org/drawingml/2006/main">
               <a:ext uri="{FF2B5EF4-FFF2-40B4-BE49-F238E27FC236}">
-                <a16:creationId xmlns:a16="http://schemas.microsoft.com/office/drawing/2014/main" id="{796E94DA-7751-4EBF-8D09-FE46C0AF2937}"/>
+                <a16:creationId xmlns:a16="http://schemas.microsoft.com/office/drawing/2014/main" id="{5181A541-BBC7-4329-8328-AB79E16ABD48}"/>
               </a:ext>
             </a:extLst>
           </p:cNvPr>
@@ -1179,7 +1174,7 @@
           <p:cNvPr id="4" name="">
             <a:extLst xmlns:a="http://schemas.openxmlformats.org/drawingml/2006/main">
               <a:ext uri="{FF2B5EF4-FFF2-40B4-BE49-F238E27FC236}">
-                <a16:creationId xmlns:a16="http://schemas.microsoft.com/office/drawing/2014/main" id="{05FA872B-10F4-4533-A9CB-69885B13390A}"/>
+                <a16:creationId xmlns:a16="http://schemas.microsoft.com/office/drawing/2014/main" id="{E2FA1A24-85D4-4840-9C8A-06AB6CCEE35F}"/>
               </a:ext>
             </a:extLst>
           </p:cNvPr>
@@ -1591,7 +1586,7 @@
     </p:spTree>
     <p:extLst>
       <p:ext uri="{BB962C8B-B14F-4D97-AF65-F5344CB8AC3E}">
-        <p14:creationId xmlns:p14="http://schemas.microsoft.com/office/powerpoint/2010/main" val="1497333713"/>
+        <p14:creationId xmlns:p14="http://schemas.microsoft.com/office/powerpoint/2010/main" val="242133843"/>
       </p:ext>
     </p:extLst>
   </p:cSld>
@@ -1622,7 +1617,7 @@
           <p:cNvPr id="17" name="">
             <a:extLst xmlns:a="http://schemas.openxmlformats.org/drawingml/2006/main">
               <a:ext uri="{FF2B5EF4-FFF2-40B4-BE49-F238E27FC236}">
-                <a16:creationId xmlns:a16="http://schemas.microsoft.com/office/drawing/2014/main" id="{2F9D1339-B69F-47AD-9B8B-E164306A21BA}"/>
+                <a16:creationId xmlns:a16="http://schemas.microsoft.com/office/drawing/2014/main" id="{C5C11C9D-1CA5-4BF2-A777-52B504D1C532}"/>
               </a:ext>
             </a:extLst>
           </p:cNvPr>
@@ -1679,7 +1674,7 @@
           <p:cNvPr id="2" name="">
             <a:extLst xmlns:a="http://schemas.openxmlformats.org/drawingml/2006/main">
               <a:ext uri="{FF2B5EF4-FFF2-40B4-BE49-F238E27FC236}">
-                <a16:creationId xmlns:a16="http://schemas.microsoft.com/office/drawing/2014/main" id="{85CA2ABC-BAC1-4D39-A14A-F878B54E6FF8}"/>
+                <a16:creationId xmlns:a16="http://schemas.microsoft.com/office/drawing/2014/main" id="{81582DD5-62AA-4394-9C7C-606E2CB4FD5C}"/>
               </a:ext>
             </a:extLst>
           </p:cNvPr>
@@ -1736,7 +1731,7 @@
           <p:cNvPr id="3" name="">
             <a:extLst xmlns:a="http://schemas.openxmlformats.org/drawingml/2006/main">
               <a:ext uri="{FF2B5EF4-FFF2-40B4-BE49-F238E27FC236}">
-                <a16:creationId xmlns:a16="http://schemas.microsoft.com/office/drawing/2014/main" id="{91B9B459-1BB3-4BB9-90F3-A18C628439A5}"/>
+                <a16:creationId xmlns:a16="http://schemas.microsoft.com/office/drawing/2014/main" id="{E7AF7B64-0097-4729-8FC1-B999E83E5F5B}"/>
               </a:ext>
             </a:extLst>
           </p:cNvPr>
@@ -1793,7 +1788,7 @@
           <p:cNvPr id="4" name="">
             <a:extLst xmlns:a="http://schemas.openxmlformats.org/drawingml/2006/main">
               <a:ext uri="{FF2B5EF4-FFF2-40B4-BE49-F238E27FC236}">
-                <a16:creationId xmlns:a16="http://schemas.microsoft.com/office/drawing/2014/main" id="{0264A9A8-9D23-41C1-9CA0-A8A28146BE16}"/>
+                <a16:creationId xmlns:a16="http://schemas.microsoft.com/office/drawing/2014/main" id="{CAF7B699-8488-445C-A2BD-0E77DB4F5E91}"/>
               </a:ext>
             </a:extLst>
           </p:cNvPr>
@@ -1850,7 +1845,7 @@
           <p:cNvPr id="5" name="">
             <a:extLst xmlns:a="http://schemas.openxmlformats.org/drawingml/2006/main">
               <a:ext uri="{FF2B5EF4-FFF2-40B4-BE49-F238E27FC236}">
-                <a16:creationId xmlns:a16="http://schemas.microsoft.com/office/drawing/2014/main" id="{3DDA304F-5E34-4FCD-B021-6865DFE00B11}"/>
+                <a16:creationId xmlns:a16="http://schemas.microsoft.com/office/drawing/2014/main" id="{C49B3DF7-76E1-43E1-884B-1DA8F5C87839}"/>
               </a:ext>
             </a:extLst>
           </p:cNvPr>
@@ -1907,7 +1902,7 @@
           <p:cNvPr id="6" name="">
             <a:extLst xmlns:a="http://schemas.openxmlformats.org/drawingml/2006/main">
               <a:ext uri="{FF2B5EF4-FFF2-40B4-BE49-F238E27FC236}">
-                <a16:creationId xmlns:a16="http://schemas.microsoft.com/office/drawing/2014/main" id="{A77590C4-F4EA-44F4-B546-DE2BFF0D1E45}"/>
+                <a16:creationId xmlns:a16="http://schemas.microsoft.com/office/drawing/2014/main" id="{E3DD8664-F410-4247-B7F8-61650F5AACB7}"/>
               </a:ext>
             </a:extLst>
           </p:cNvPr>
@@ -1936,7 +1931,7 @@
           <p:cNvPr id="7" name="">
             <a:extLst xmlns:a="http://schemas.openxmlformats.org/drawingml/2006/main">
               <a:ext uri="{FF2B5EF4-FFF2-40B4-BE49-F238E27FC236}">
-                <a16:creationId xmlns:a16="http://schemas.microsoft.com/office/drawing/2014/main" id="{0365FFDE-2F2F-4B25-A08C-8D3622C31FA5}"/>
+                <a16:creationId xmlns:a16="http://schemas.microsoft.com/office/drawing/2014/main" id="{0A903C10-2C82-4656-9FB9-EEB6DDD98F5F}"/>
               </a:ext>
             </a:extLst>
           </p:cNvPr>
@@ -1993,7 +1988,7 @@
           <p:cNvPr id="8" name="">
             <a:extLst xmlns:a="http://schemas.openxmlformats.org/drawingml/2006/main">
               <a:ext uri="{FF2B5EF4-FFF2-40B4-BE49-F238E27FC236}">
-                <a16:creationId xmlns:a16="http://schemas.microsoft.com/office/drawing/2014/main" id="{68FE5F7B-3BB8-4E93-B2C4-3DAD49A110B1}"/>
+                <a16:creationId xmlns:a16="http://schemas.microsoft.com/office/drawing/2014/main" id="{C5F98733-F947-4FE3-AFBE-D403CEACB835}"/>
               </a:ext>
             </a:extLst>
           </p:cNvPr>
@@ -2050,7 +2045,7 @@
           <p:cNvPr id="9" name="">
             <a:extLst xmlns:a="http://schemas.openxmlformats.org/drawingml/2006/main">
               <a:ext uri="{FF2B5EF4-FFF2-40B4-BE49-F238E27FC236}">
-                <a16:creationId xmlns:a16="http://schemas.microsoft.com/office/drawing/2014/main" id="{06E50C29-8DF7-475B-98BC-7733C219A8C9}"/>
+                <a16:creationId xmlns:a16="http://schemas.microsoft.com/office/drawing/2014/main" id="{5CDF9B54-EB57-4011-9EB6-44449F58A285}"/>
               </a:ext>
             </a:extLst>
           </p:cNvPr>
@@ -2107,7 +2102,7 @@
           <p:cNvPr id="10" name="">
             <a:extLst xmlns:a="http://schemas.openxmlformats.org/drawingml/2006/main">
               <a:ext uri="{FF2B5EF4-FFF2-40B4-BE49-F238E27FC236}">
-                <a16:creationId xmlns:a16="http://schemas.microsoft.com/office/drawing/2014/main" id="{200837CC-1440-4C66-B50B-0184CC268DA1}"/>
+                <a16:creationId xmlns:a16="http://schemas.microsoft.com/office/drawing/2014/main" id="{6F08D2CB-3415-410E-A455-577623E8F27F}"/>
               </a:ext>
             </a:extLst>
           </p:cNvPr>
@@ -2164,7 +2159,7 @@
           <p:cNvPr id="11" name="">
             <a:extLst xmlns:a="http://schemas.openxmlformats.org/drawingml/2006/main">
               <a:ext uri="{FF2B5EF4-FFF2-40B4-BE49-F238E27FC236}">
-                <a16:creationId xmlns:a16="http://schemas.microsoft.com/office/drawing/2014/main" id="{1E34DBEE-F172-4903-94ED-6F2F356F1C4F}"/>
+                <a16:creationId xmlns:a16="http://schemas.microsoft.com/office/drawing/2014/main" id="{46B469E6-0F2C-483F-A1FF-991F72F251FA}"/>
               </a:ext>
             </a:extLst>
           </p:cNvPr>
@@ -2193,7 +2188,7 @@
           <p:cNvPr id="12" name="">
             <a:extLst xmlns:a="http://schemas.openxmlformats.org/drawingml/2006/main">
               <a:ext uri="{FF2B5EF4-FFF2-40B4-BE49-F238E27FC236}">
-                <a16:creationId xmlns:a16="http://schemas.microsoft.com/office/drawing/2014/main" id="{AF584EB6-4B4F-4EEE-AC12-F5C06ECBD4A7}"/>
+                <a16:creationId xmlns:a16="http://schemas.microsoft.com/office/drawing/2014/main" id="{F97EE539-693A-4775-A212-11E1D6AAD336}"/>
               </a:ext>
             </a:extLst>
           </p:cNvPr>
@@ -2250,7 +2245,7 @@
           <p:cNvPr id="13" name="">
             <a:extLst xmlns:a="http://schemas.openxmlformats.org/drawingml/2006/main">
               <a:ext uri="{FF2B5EF4-FFF2-40B4-BE49-F238E27FC236}">
-                <a16:creationId xmlns:a16="http://schemas.microsoft.com/office/drawing/2014/main" id="{56951C02-3FEF-43C0-B939-1056B496ADD6}"/>
+                <a16:creationId xmlns:a16="http://schemas.microsoft.com/office/drawing/2014/main" id="{60F1CB5C-8673-4A4A-8CE7-A49F1D16091F}"/>
               </a:ext>
             </a:extLst>
           </p:cNvPr>
@@ -2307,7 +2302,7 @@
           <p:cNvPr id="14" name="">
             <a:extLst xmlns:a="http://schemas.openxmlformats.org/drawingml/2006/main">
               <a:ext uri="{FF2B5EF4-FFF2-40B4-BE49-F238E27FC236}">
-                <a16:creationId xmlns:a16="http://schemas.microsoft.com/office/drawing/2014/main" id="{EA390391-0978-4050-A971-78EB3D96AD6E}"/>
+                <a16:creationId xmlns:a16="http://schemas.microsoft.com/office/drawing/2014/main" id="{BE67BF4A-751C-43E8-BD8B-5C4818DE798E}"/>
               </a:ext>
             </a:extLst>
           </p:cNvPr>
@@ -2650,7 +2645,7 @@
           <p:cNvPr id="16" name="">
             <a:extLst xmlns:a="http://schemas.openxmlformats.org/drawingml/2006/main">
               <a:ext uri="{FF2B5EF4-FFF2-40B4-BE49-F238E27FC236}">
-                <a16:creationId xmlns:a16="http://schemas.microsoft.com/office/drawing/2014/main" id="{6F14F4E0-9141-499B-AC08-06E6F27AB081}"/>
+                <a16:creationId xmlns:a16="http://schemas.microsoft.com/office/drawing/2014/main" id="{D4878F94-935E-470F-8330-D6EAEC799531}"/>
               </a:ext>
             </a:extLst>
           </p:cNvPr>
@@ -2728,7 +2723,7 @@
     </p:spTree>
     <p:extLst>
       <p:ext uri="{BB962C8B-B14F-4D97-AF65-F5344CB8AC3E}">
-        <p14:creationId xmlns:p14="http://schemas.microsoft.com/office/powerpoint/2010/main" val="454686708"/>
+        <p14:creationId xmlns:p14="http://schemas.microsoft.com/office/powerpoint/2010/main" val="964084325"/>
       </p:ext>
     </p:extLst>
   </p:cSld>
@@ -2759,7 +2754,7 @@
           <p:cNvPr id="8" name="">
             <a:extLst xmlns:a="http://schemas.openxmlformats.org/drawingml/2006/main">
               <a:ext uri="{FF2B5EF4-FFF2-40B4-BE49-F238E27FC236}">
-                <a16:creationId xmlns:a16="http://schemas.microsoft.com/office/drawing/2014/main" id="{6B080C2B-8A04-4027-96B8-797FCFB59818}"/>
+                <a16:creationId xmlns:a16="http://schemas.microsoft.com/office/drawing/2014/main" id="{98674A69-06CA-4897-8180-E2ABCDD8FD95}"/>
               </a:ext>
             </a:extLst>
           </p:cNvPr>
@@ -2816,7 +2811,7 @@
           <p:cNvPr id="2" name="">
             <a:extLst xmlns:a="http://schemas.openxmlformats.org/drawingml/2006/main">
               <a:ext uri="{FF2B5EF4-FFF2-40B4-BE49-F238E27FC236}">
-                <a16:creationId xmlns:a16="http://schemas.microsoft.com/office/drawing/2014/main" id="{A6E75F5F-C2DA-4888-B22B-6B3BFAF2B9D5}"/>
+                <a16:creationId xmlns:a16="http://schemas.microsoft.com/office/drawing/2014/main" id="{19E6E7B2-210F-42D1-B602-F861841702CA}"/>
               </a:ext>
             </a:extLst>
           </p:cNvPr>
@@ -2873,7 +2868,7 @@
           <p:cNvPr id="3" name="">
             <a:extLst xmlns:a="http://schemas.openxmlformats.org/drawingml/2006/main">
               <a:ext uri="{FF2B5EF4-FFF2-40B4-BE49-F238E27FC236}">
-                <a16:creationId xmlns:a16="http://schemas.microsoft.com/office/drawing/2014/main" id="{E4EB2580-B756-4FA7-BE4D-29250C3D296B}"/>
+                <a16:creationId xmlns:a16="http://schemas.microsoft.com/office/drawing/2014/main" id="{B0718E58-AC94-4535-9839-A90F4A253994}"/>
               </a:ext>
             </a:extLst>
           </p:cNvPr>
@@ -2930,7 +2925,7 @@
           <p:cNvPr id="4" name="">
             <a:extLst xmlns:a="http://schemas.openxmlformats.org/drawingml/2006/main">
               <a:ext uri="{FF2B5EF4-FFF2-40B4-BE49-F238E27FC236}">
-                <a16:creationId xmlns:a16="http://schemas.microsoft.com/office/drawing/2014/main" id="{DB756204-3158-4111-A824-A7B47F7A8F09}"/>
+                <a16:creationId xmlns:a16="http://schemas.microsoft.com/office/drawing/2014/main" id="{457F1B5A-93AE-4956-98C3-5EDBDEC50275}"/>
               </a:ext>
             </a:extLst>
           </p:cNvPr>
@@ -2994,7 +2989,7 @@
         </p:xfrm>
         <a:graphic xmlns:a="http://schemas.openxmlformats.org/drawingml/2006/main">
           <a:graphicData uri="http://schemas.openxmlformats.org/drawingml/2006/chart">
-            <c:chart xmlns:r="http://schemas.openxmlformats.org/officeDocument/2006/relationships" xmlns:c="http://schemas.openxmlformats.org/drawingml/2006/chart" r:id="Rc3668eff1a674212"/>
+            <c:chart xmlns:r="http://schemas.openxmlformats.org/officeDocument/2006/relationships" xmlns:c="http://schemas.openxmlformats.org/drawingml/2006/chart" r:id="Re36337c169344784"/>
           </a:graphicData>
         </a:graphic>
       </p:graphicFrame>
@@ -3003,7 +2998,7 @@
           <p:cNvPr id="6" name="">
             <a:extLst xmlns:a="http://schemas.openxmlformats.org/drawingml/2006/main">
               <a:ext uri="{FF2B5EF4-FFF2-40B4-BE49-F238E27FC236}">
-                <a16:creationId xmlns:a16="http://schemas.microsoft.com/office/drawing/2014/main" id="{1C2B0F19-1D1B-4186-B4AF-D7E948DA133D}"/>
+                <a16:creationId xmlns:a16="http://schemas.microsoft.com/office/drawing/2014/main" id="{A2080127-3FAF-45B7-A042-2A14D2F35BF5}"/>
               </a:ext>
             </a:extLst>
           </p:cNvPr>
@@ -3054,7 +3049,7 @@
                 <a:ea typeface="Arial"/>
                 <a:cs typeface="Arial"/>
               </a:rPr>
-              <a:t>Constant baseline: 0 false negatives, 176 false positives. It flags everyone.</a:t>
+              <a:t>Constant baseline: 0 missed cases, 176 incorrect flags. It flags everyone.</a:t>
             </a:r>
           </a:p>
         </p:txBody>
@@ -3064,7 +3059,7 @@
           <p:cNvPr id="7" name="">
             <a:extLst xmlns:a="http://schemas.openxmlformats.org/drawingml/2006/main">
               <a:ext uri="{FF2B5EF4-FFF2-40B4-BE49-F238E27FC236}">
-                <a16:creationId xmlns:a16="http://schemas.microsoft.com/office/drawing/2014/main" id="{5C8083B6-B332-47D2-8742-A87775734FDB}"/>
+                <a16:creationId xmlns:a16="http://schemas.microsoft.com/office/drawing/2014/main" id="{6011E46D-F4EA-4E44-890D-7271A44A5B24}"/>
               </a:ext>
             </a:extLst>
           </p:cNvPr>
@@ -3093,19 +3088,19 @@
           <a:lstStyle xmlns:a="http://schemas.openxmlformats.org/drawingml/2006/main"/>
           <a:p xmlns:a="http://schemas.openxmlformats.org/drawingml/2006/main">
             <a:pPr algn="l">
-              <a:defRPr sz="1875" b="0">
-                <a:solidFill>
-                  <a:srgbClr val="16343E"/>
-                </a:solidFill>
-                <a:latin typeface="Arial"/>
-                <a:ea typeface="Arial"/>
-                <a:cs typeface="Arial"/>
-              </a:defRPr>
-            </a:pPr>
-            <a:r>
-              <a:rPr sz="1875" b="0">
-                <a:solidFill>
-                  <a:srgbClr val="16343E"/>
+              <a:defRPr sz="1875" b="1">
+                <a:solidFill>
+                  <a:srgbClr val="007C78"/>
+                </a:solidFill>
+                <a:latin typeface="Arial"/>
+                <a:ea typeface="Arial"/>
+                <a:cs typeface="Arial"/>
+              </a:defRPr>
+            </a:pPr>
+            <a:r>
+              <a:rPr sz="1875" b="1">
+                <a:solidFill>
+                  <a:srgbClr val="007C78"/>
                 </a:solidFill>
                 <a:latin typeface="Arial"/>
                 <a:ea typeface="Arial"/>
@@ -3119,7 +3114,7 @@
     </p:spTree>
     <p:extLst>
       <p:ext uri="{BB962C8B-B14F-4D97-AF65-F5344CB8AC3E}">
-        <p14:creationId xmlns:p14="http://schemas.microsoft.com/office/powerpoint/2010/main" val="83555725"/>
+        <p14:creationId xmlns:p14="http://schemas.microsoft.com/office/powerpoint/2010/main" val="948490270"/>
       </p:ext>
     </p:extLst>
   </p:cSld>
@@ -3147,10 +3142,10 @@
       </p:grpSpPr>
       <p:sp>
         <p:nvSpPr>
-          <p:cNvPr id="7" name="">
-            <a:extLst xmlns:a="http://schemas.openxmlformats.org/drawingml/2006/main">
-              <a:ext uri="{FF2B5EF4-FFF2-40B4-BE49-F238E27FC236}">
-                <a16:creationId xmlns:a16="http://schemas.microsoft.com/office/drawing/2014/main" id="{E64DC71E-E96E-4D84-85BC-96EF0D800D33}"/>
+          <p:cNvPr id="5" name="">
+            <a:extLst xmlns:a="http://schemas.openxmlformats.org/drawingml/2006/main">
+              <a:ext uri="{FF2B5EF4-FFF2-40B4-BE49-F238E27FC236}">
+                <a16:creationId xmlns:a16="http://schemas.microsoft.com/office/drawing/2014/main" id="{20E9CA22-C8B7-4D1C-9310-165429E549A1}"/>
               </a:ext>
             </a:extLst>
           </p:cNvPr>
@@ -3197,7 +3192,7 @@
                 <a:ea typeface="Arial"/>
                 <a:cs typeface="Arial"/>
               </a:rPr>
-              <a:t>Inspecting the analysis report</a:t>
+              <a:t>Software engineering</a:t>
             </a:r>
           </a:p>
         </p:txBody>
@@ -3207,19 +3202,19 @@
           <p:cNvPr id="2" name="">
             <a:extLst xmlns:a="http://schemas.openxmlformats.org/drawingml/2006/main">
               <a:ext uri="{FF2B5EF4-FFF2-40B4-BE49-F238E27FC236}">
-                <a16:creationId xmlns:a16="http://schemas.microsoft.com/office/drawing/2014/main" id="{9D5FAD24-480A-4734-8D45-96BABA6CF233}"/>
-              </a:ext>
-            </a:extLst>
-          </p:cNvPr>
-          <p:cNvSpPr>
-            <a:spLocks xmlns:a="http://schemas.openxmlformats.org/drawingml/2006/main" noGrp="1"/>
-          </p:cNvSpPr>
-          <p:nvPr/>
-        </p:nvSpPr>
-        <p:spPr>
-          <a:xfrm xmlns:a="http://schemas.openxmlformats.org/drawingml/2006/main">
-            <a:off x="609600" y="6257925"/>
-            <a:ext cx="10382250" cy="361950"/>
+                <a16:creationId xmlns:a16="http://schemas.microsoft.com/office/drawing/2014/main" id="{8BF2BD10-1A38-4374-8B1E-7E2B5B339F62}"/>
+              </a:ext>
+            </a:extLst>
+          </p:cNvPr>
+          <p:cNvSpPr>
+            <a:spLocks xmlns:a="http://schemas.openxmlformats.org/drawingml/2006/main" noGrp="1"/>
+          </p:cNvSpPr>
+          <p:nvPr/>
+        </p:nvSpPr>
+        <p:spPr>
+          <a:xfrm xmlns:a="http://schemas.openxmlformats.org/drawingml/2006/main">
+            <a:off x="11115675" y="6305550"/>
+            <a:ext cx="457200" cy="285750"/>
           </a:xfrm>
           <a:prstGeom xmlns:a="http://schemas.openxmlformats.org/drawingml/2006/main" prst="rect">
             <a:avLst/>
@@ -3235,7 +3230,7 @@
           </a:bodyPr>
           <a:lstStyle xmlns:a="http://schemas.openxmlformats.org/drawingml/2006/main"/>
           <a:p xmlns:a="http://schemas.openxmlformats.org/drawingml/2006/main">
-            <a:pPr algn="l">
+            <a:pPr algn="r">
               <a:defRPr sz="1350" b="0">
                 <a:solidFill>
                   <a:srgbClr val="52656B"/>
@@ -3254,7 +3249,7 @@
                 <a:ea typeface="Arial"/>
                 <a:cs typeface="Arial"/>
               </a:rPr>
-              <a:t>Source: saved primary analysis, 15 Sep 2026</a:t>
+              <a:t>13</a:t>
             </a:r>
           </a:p>
         </p:txBody>
@@ -3264,19 +3259,19 @@
           <p:cNvPr id="3" name="">
             <a:extLst xmlns:a="http://schemas.openxmlformats.org/drawingml/2006/main">
               <a:ext uri="{FF2B5EF4-FFF2-40B4-BE49-F238E27FC236}">
-                <a16:creationId xmlns:a16="http://schemas.microsoft.com/office/drawing/2014/main" id="{3A986F6E-4B0E-4C24-AD0B-7F3BE37F1E2E}"/>
-              </a:ext>
-            </a:extLst>
-          </p:cNvPr>
-          <p:cNvSpPr>
-            <a:spLocks xmlns:a="http://schemas.openxmlformats.org/drawingml/2006/main" noGrp="1"/>
-          </p:cNvSpPr>
-          <p:nvPr/>
-        </p:nvSpPr>
-        <p:spPr>
-          <a:xfrm xmlns:a="http://schemas.openxmlformats.org/drawingml/2006/main">
-            <a:off x="11115675" y="6305550"/>
-            <a:ext cx="457200" cy="285750"/>
+                <a16:creationId xmlns:a16="http://schemas.microsoft.com/office/drawing/2014/main" id="{2481557B-C43C-4C62-AD65-B18490676247}"/>
+              </a:ext>
+            </a:extLst>
+          </p:cNvPr>
+          <p:cNvSpPr>
+            <a:spLocks xmlns:a="http://schemas.openxmlformats.org/drawingml/2006/main" noGrp="1"/>
+          </p:cNvSpPr>
+          <p:nvPr/>
+        </p:nvSpPr>
+        <p:spPr>
+          <a:xfrm xmlns:a="http://schemas.openxmlformats.org/drawingml/2006/main">
+            <a:off x="609600" y="1771650"/>
+            <a:ext cx="10972800" cy="695325"/>
           </a:xfrm>
           <a:prstGeom xmlns:a="http://schemas.openxmlformats.org/drawingml/2006/main" prst="rect">
             <a:avLst/>
@@ -3292,26 +3287,26 @@
           </a:bodyPr>
           <a:lstStyle xmlns:a="http://schemas.openxmlformats.org/drawingml/2006/main"/>
           <a:p xmlns:a="http://schemas.openxmlformats.org/drawingml/2006/main">
-            <a:pPr algn="r">
-              <a:defRPr sz="1350" b="0">
-                <a:solidFill>
-                  <a:srgbClr val="52656B"/>
-                </a:solidFill>
-                <a:latin typeface="Arial"/>
-                <a:ea typeface="Arial"/>
-                <a:cs typeface="Arial"/>
-              </a:defRPr>
-            </a:pPr>
-            <a:r>
-              <a:rPr sz="1350" b="0">
-                <a:solidFill>
-                  <a:srgbClr val="52656B"/>
-                </a:solidFill>
-                <a:latin typeface="Arial"/>
-                <a:ea typeface="Arial"/>
-                <a:cs typeface="Arial"/>
-              </a:rPr>
-              <a:t>13</a:t>
+            <a:pPr algn="l">
+              <a:defRPr sz="2925" b="0">
+                <a:solidFill>
+                  <a:srgbClr val="007C78"/>
+                </a:solidFill>
+                <a:latin typeface="Arial"/>
+                <a:ea typeface="Arial"/>
+                <a:cs typeface="Arial"/>
+              </a:defRPr>
+            </a:pPr>
+            <a:r>
+              <a:rPr sz="2925" b="0">
+                <a:solidFill>
+                  <a:srgbClr val="007C78"/>
+                </a:solidFill>
+                <a:latin typeface="Arial"/>
+                <a:ea typeface="Arial"/>
+                <a:cs typeface="Arial"/>
+              </a:rPr>
+              <a:t>Reports, application and scoring service</a:t>
             </a:r>
           </a:p>
         </p:txBody>
@@ -3321,76 +3316,19 @@
           <p:cNvPr id="4" name="">
             <a:extLst xmlns:a="http://schemas.openxmlformats.org/drawingml/2006/main">
               <a:ext uri="{FF2B5EF4-FFF2-40B4-BE49-F238E27FC236}">
-                <a16:creationId xmlns:a16="http://schemas.microsoft.com/office/drawing/2014/main" id="{B796B2C8-9668-42A6-8C30-F0E3285631AC}"/>
-              </a:ext>
-            </a:extLst>
-          </p:cNvPr>
-          <p:cNvSpPr>
-            <a:spLocks xmlns:a="http://schemas.openxmlformats.org/drawingml/2006/main" noGrp="1"/>
-          </p:cNvSpPr>
-          <p:nvPr/>
-        </p:nvSpPr>
-        <p:spPr>
-          <a:xfrm xmlns:a="http://schemas.openxmlformats.org/drawingml/2006/main">
-            <a:off x="609600" y="1781175"/>
-            <a:ext cx="10972800" cy="666750"/>
-          </a:xfrm>
-          <a:prstGeom xmlns:a="http://schemas.openxmlformats.org/drawingml/2006/main" prst="rect">
-            <a:avLst/>
-          </a:prstGeom>
-          <a:noFill xmlns:a="http://schemas.openxmlformats.org/drawingml/2006/main"/>
-          <a:ln xmlns:a="http://schemas.openxmlformats.org/drawingml/2006/main" w="0">
-            <a:noFill/>
-          </a:ln>
-        </p:spPr>
-        <p:txBody>
-          <a:bodyPr xmlns:a="http://schemas.openxmlformats.org/drawingml/2006/main" anchor="ctr">
-            <a:noAutofit/>
-          </a:bodyPr>
-          <a:lstStyle xmlns:a="http://schemas.openxmlformats.org/drawingml/2006/main"/>
-          <a:p xmlns:a="http://schemas.openxmlformats.org/drawingml/2006/main">
-            <a:pPr algn="l">
-              <a:defRPr sz="2925" b="1">
-                <a:solidFill>
-                  <a:srgbClr val="16343E"/>
-                </a:solidFill>
-                <a:latin typeface="Arial"/>
-                <a:ea typeface="Arial"/>
-                <a:cs typeface="Arial"/>
-              </a:defRPr>
-            </a:pPr>
-            <a:r>
-              <a:rPr sz="2925" b="1">
-                <a:solidFill>
-                  <a:srgbClr val="16343E"/>
-                </a:solidFill>
-                <a:latin typeface="Arial"/>
-                <a:ea typeface="Arial"/>
-                <a:cs typeface="Arial"/>
-              </a:rPr>
-              <a:t>Saved analysis for another analyst to inspect</a:t>
-            </a:r>
-          </a:p>
-        </p:txBody>
-      </p:sp>
-      <p:sp>
-        <p:nvSpPr>
-          <p:cNvPr id="5" name="">
-            <a:extLst xmlns:a="http://schemas.openxmlformats.org/drawingml/2006/main">
-              <a:ext uri="{FF2B5EF4-FFF2-40B4-BE49-F238E27FC236}">
-                <a16:creationId xmlns:a16="http://schemas.microsoft.com/office/drawing/2014/main" id="{CEFDF15D-A4FF-4D06-9869-73EFCA77A100}"/>
-              </a:ext>
-            </a:extLst>
-          </p:cNvPr>
-          <p:cNvSpPr>
-            <a:spLocks xmlns:a="http://schemas.openxmlformats.org/drawingml/2006/main" noGrp="1"/>
-          </p:cNvSpPr>
-          <p:nvPr/>
-        </p:nvSpPr>
-        <p:spPr>
-          <a:xfrm xmlns:a="http://schemas.openxmlformats.org/drawingml/2006/main">
-            <a:off x="609600" y="2895600"/>
-            <a:ext cx="10972800" cy="2019300"/>
+                <a16:creationId xmlns:a16="http://schemas.microsoft.com/office/drawing/2014/main" id="{6268E36E-F3BA-40C9-B663-377CF51AF555}"/>
+              </a:ext>
+            </a:extLst>
+          </p:cNvPr>
+          <p:cNvSpPr>
+            <a:spLocks xmlns:a="http://schemas.openxmlformats.org/drawingml/2006/main" noGrp="1"/>
+          </p:cNvSpPr>
+          <p:nvPr/>
+        </p:nvSpPr>
+        <p:spPr>
+          <a:xfrm xmlns:a="http://schemas.openxmlformats.org/drawingml/2006/main">
+            <a:off x="609600" y="2943225"/>
+            <a:ext cx="10972800" cy="2200275"/>
           </a:xfrm>
           <a:prstGeom xmlns:a="http://schemas.openxmlformats.org/drawingml/2006/main" prst="rect">
             <a:avLst/>
@@ -3408,139 +3346,82 @@
           <a:p xmlns:a="http://schemas.openxmlformats.org/drawingml/2006/main">
             <a:pPr marL="279400" indent="-152400" algn="l">
               <a:spcAft>
-                <a:spcPts val="2500"/>
+                <a:spcPts val="2800"/>
               </a:spcAft>
               <a:buChar char="•"/>
-              <a:defRPr sz="2625" b="0">
-                <a:solidFill>
-                  <a:srgbClr val="16343E"/>
-                </a:solidFill>
-                <a:latin typeface="Arial"/>
-                <a:ea typeface="Arial"/>
-                <a:cs typeface="Arial"/>
-              </a:defRPr>
-            </a:pPr>
-            <a:r>
-              <a:rPr sz="2625" b="0">
-                <a:solidFill>
-                  <a:srgbClr val="16343E"/>
-                </a:solidFill>
-                <a:latin typeface="Arial"/>
-                <a:ea typeface="Arial"/>
-                <a:cs typeface="Arial"/>
-              </a:rPr>
-              <a:t>Full model comparisons</a:t>
+              <a:defRPr sz="2850" b="0">
+                <a:solidFill>
+                  <a:srgbClr val="16343E"/>
+                </a:solidFill>
+                <a:latin typeface="Arial"/>
+                <a:ea typeface="Arial"/>
+                <a:cs typeface="Arial"/>
+              </a:defRPr>
+            </a:pPr>
+            <a:r>
+              <a:rPr sz="2850" b="0">
+                <a:solidFill>
+                  <a:srgbClr val="16343E"/>
+                </a:solidFill>
+                <a:latin typeface="Arial"/>
+                <a:ea typeface="Arial"/>
+                <a:cs typeface="Arial"/>
+              </a:rPr>
+              <a:t>Inspect the evidence</a:t>
             </a:r>
           </a:p>
           <a:p xmlns:a="http://schemas.openxmlformats.org/drawingml/2006/main">
             <a:pPr marL="279400" indent="-152400" algn="l">
               <a:spcAft>
-                <a:spcPts val="2500"/>
+                <a:spcPts val="2800"/>
               </a:spcAft>
               <a:buChar char="•"/>
-              <a:defRPr sz="2625" b="0">
-                <a:solidFill>
-                  <a:srgbClr val="16343E"/>
-                </a:solidFill>
-                <a:latin typeface="Arial"/>
-                <a:ea typeface="Arial"/>
-                <a:cs typeface="Arial"/>
-              </a:defRPr>
-            </a:pPr>
-            <a:r>
-              <a:rPr sz="2625" b="0">
-                <a:solidFill>
-                  <a:srgbClr val="16343E"/>
-                </a:solidFill>
-                <a:latin typeface="Arial"/>
-                <a:ea typeface="Arial"/>
-                <a:cs typeface="Arial"/>
-              </a:rPr>
-              <a:t>Errors by recorded diagnosis</a:t>
+              <a:defRPr sz="2850" b="0">
+                <a:solidFill>
+                  <a:srgbClr val="16343E"/>
+                </a:solidFill>
+                <a:latin typeface="Arial"/>
+                <a:ea typeface="Arial"/>
+                <a:cs typeface="Arial"/>
+              </a:defRPr>
+            </a:pPr>
+            <a:r>
+              <a:rPr sz="2850" b="0">
+                <a:solidFill>
+                  <a:srgbClr val="16343E"/>
+                </a:solidFill>
+                <a:latin typeface="Arial"/>
+                <a:ea typeface="Arial"/>
+                <a:cs typeface="Arial"/>
+              </a:rPr>
+              <a:t>Score a public specimen</a:t>
             </a:r>
           </a:p>
           <a:p xmlns:a="http://schemas.openxmlformats.org/drawingml/2006/main">
             <a:pPr marL="279400" indent="-152400" algn="l">
               <a:spcAft>
-                <a:spcPts val="2500"/>
+                <a:spcPts val="2800"/>
               </a:spcAft>
               <a:buChar char="•"/>
-              <a:defRPr sz="2625" b="0">
-                <a:solidFill>
-                  <a:srgbClr val="16343E"/>
-                </a:solidFill>
-                <a:latin typeface="Arial"/>
-                <a:ea typeface="Arial"/>
-                <a:cs typeface="Arial"/>
-              </a:defRPr>
-            </a:pPr>
-            <a:r>
-              <a:rPr sz="2625" b="0">
-                <a:solidFill>
-                  <a:srgbClr val="16343E"/>
-                </a:solidFill>
-                <a:latin typeface="Arial"/>
-                <a:ea typeface="Arial"/>
-                <a:cs typeface="Arial"/>
-              </a:rPr>
-              <a:t>Score reliability and uncertainty</a:t>
-            </a:r>
-          </a:p>
-        </p:txBody>
-      </p:sp>
-      <p:sp>
-        <p:nvSpPr>
-          <p:cNvPr id="6" name="">
-            <a:extLst xmlns:a="http://schemas.openxmlformats.org/drawingml/2006/main">
-              <a:ext uri="{FF2B5EF4-FFF2-40B4-BE49-F238E27FC236}">
-                <a16:creationId xmlns:a16="http://schemas.microsoft.com/office/drawing/2014/main" id="{12924DAC-5091-4A90-B96E-8753F8BAD58B}"/>
-              </a:ext>
-            </a:extLst>
-          </p:cNvPr>
-          <p:cNvSpPr>
-            <a:spLocks xmlns:a="http://schemas.openxmlformats.org/drawingml/2006/main" noGrp="1"/>
-          </p:cNvSpPr>
-          <p:nvPr/>
-        </p:nvSpPr>
-        <p:spPr>
-          <a:xfrm xmlns:a="http://schemas.openxmlformats.org/drawingml/2006/main">
-            <a:off x="895350" y="5391150"/>
-            <a:ext cx="10687050" cy="514350"/>
-          </a:xfrm>
-          <a:prstGeom xmlns:a="http://schemas.openxmlformats.org/drawingml/2006/main" prst="rect">
-            <a:avLst/>
-          </a:prstGeom>
-          <a:noFill xmlns:a="http://schemas.openxmlformats.org/drawingml/2006/main"/>
-          <a:ln xmlns:a="http://schemas.openxmlformats.org/drawingml/2006/main" w="0">
-            <a:noFill/>
-          </a:ln>
-        </p:spPr>
-        <p:txBody>
-          <a:bodyPr xmlns:a="http://schemas.openxmlformats.org/drawingml/2006/main" anchor="ctr">
-            <a:noAutofit/>
-          </a:bodyPr>
-          <a:lstStyle xmlns:a="http://schemas.openxmlformats.org/drawingml/2006/main"/>
-          <a:p xmlns:a="http://schemas.openxmlformats.org/drawingml/2006/main">
-            <a:pPr algn="l">
-              <a:defRPr sz="2250" b="0">
-                <a:solidFill>
-                  <a:srgbClr val="007C78"/>
-                </a:solidFill>
-                <a:latin typeface="Arial"/>
-                <a:ea typeface="Arial"/>
-                <a:cs typeface="Arial"/>
-              </a:defRPr>
-            </a:pPr>
-            <a:r>
-              <a:rPr sz="2250" b="0">
-                <a:solidFill>
-                  <a:srgbClr val="007C78"/>
-                </a:solidFill>
-                <a:latin typeface="Arial"/>
-                <a:ea typeface="Arial"/>
-                <a:cs typeface="Arial"/>
-              </a:rPr>
-              <a:t>Live walkthrough of the preserved report</a:t>
+              <a:defRPr sz="2850" b="0">
+                <a:solidFill>
+                  <a:srgbClr val="16343E"/>
+                </a:solidFill>
+                <a:latin typeface="Arial"/>
+                <a:ea typeface="Arial"/>
+                <a:cs typeface="Arial"/>
+              </a:defRPr>
+            </a:pPr>
+            <a:r>
+              <a:rPr sz="2850" b="0">
+                <a:solidFill>
+                  <a:srgbClr val="16343E"/>
+                </a:solidFill>
+                <a:latin typeface="Arial"/>
+                <a:ea typeface="Arial"/>
+                <a:cs typeface="Arial"/>
+              </a:rPr>
+              <a:t>Trace and check the calculation</a:t>
             </a:r>
           </a:p>
         </p:txBody>
@@ -3548,7 +3429,7 @@
     </p:spTree>
     <p:extLst>
       <p:ext uri="{BB962C8B-B14F-4D97-AF65-F5344CB8AC3E}">
-        <p14:creationId xmlns:p14="http://schemas.microsoft.com/office/powerpoint/2010/main" val="1425319573"/>
+        <p14:creationId xmlns:p14="http://schemas.microsoft.com/office/powerpoint/2010/main" val="2100830968"/>
       </p:ext>
     </p:extLst>
   </p:cSld>
@@ -3556,3524 +3437,6 @@
 </file>
 
 <file path=ppt/slides/slide14.xml><?xml version="1.0" encoding="utf-8"?>
-<p:sld xmlns:p="http://schemas.openxmlformats.org/presentationml/2006/main">
-  <p:cSld>
-    <p:bg>
-      <p:bgPr>
-        <a:solidFill xmlns:a="http://schemas.openxmlformats.org/drawingml/2006/main">
-          <a:srgbClr val="F7F8F5"/>
-        </a:solidFill>
-      </p:bgPr>
-    </p:bg>
-    <p:spTree>
-      <p:nvGrpSpPr>
-        <p:cNvPr id="1" name=""/>
-        <p:cNvGrpSpPr/>
-        <p:nvPr/>
-      </p:nvGrpSpPr>
-      <p:grpSpPr>
-        <a:xfrm xmlns:a="http://schemas.openxmlformats.org/drawingml/2006/main"/>
-      </p:grpSpPr>
-      <p:sp>
-        <p:nvSpPr>
-          <p:cNvPr id="9" name="">
-            <a:extLst xmlns:a="http://schemas.openxmlformats.org/drawingml/2006/main">
-              <a:ext uri="{FF2B5EF4-FFF2-40B4-BE49-F238E27FC236}">
-                <a16:creationId xmlns:a16="http://schemas.microsoft.com/office/drawing/2014/main" id="{E26CC142-AD39-4AE7-A828-D6A059CA7DC0}"/>
-              </a:ext>
-            </a:extLst>
-          </p:cNvPr>
-          <p:cNvSpPr>
-            <a:spLocks xmlns:a="http://schemas.openxmlformats.org/drawingml/2006/main" noGrp="1"/>
-          </p:cNvSpPr>
-          <p:nvPr/>
-        </p:nvSpPr>
-        <p:spPr>
-          <a:xfrm xmlns:a="http://schemas.openxmlformats.org/drawingml/2006/main">
-            <a:off x="609600" y="409575"/>
-            <a:ext cx="10972800" cy="1000125"/>
-          </a:xfrm>
-          <a:prstGeom xmlns:a="http://schemas.openxmlformats.org/drawingml/2006/main" prst="rect">
-            <a:avLst/>
-          </a:prstGeom>
-          <a:noFill xmlns:a="http://schemas.openxmlformats.org/drawingml/2006/main"/>
-          <a:ln xmlns:a="http://schemas.openxmlformats.org/drawingml/2006/main" w="0">
-            <a:noFill/>
-          </a:ln>
-        </p:spPr>
-        <p:txBody>
-          <a:bodyPr xmlns:a="http://schemas.openxmlformats.org/drawingml/2006/main" anchor="ctr">
-            <a:noAutofit/>
-          </a:bodyPr>
-          <a:lstStyle xmlns:a="http://schemas.openxmlformats.org/drawingml/2006/main"/>
-          <a:p xmlns:a="http://schemas.openxmlformats.org/drawingml/2006/main">
-            <a:pPr algn="l">
-              <a:defRPr sz="3450" b="1">
-                <a:solidFill>
-                  <a:srgbClr val="16343E"/>
-                </a:solidFill>
-                <a:latin typeface="Arial"/>
-                <a:ea typeface="Arial"/>
-                <a:cs typeface="Arial"/>
-              </a:defRPr>
-            </a:pPr>
-            <a:r>
-              <a:rPr sz="3450" b="1">
-                <a:solidFill>
-                  <a:srgbClr val="16343E"/>
-                </a:solidFill>
-                <a:latin typeface="Arial"/>
-                <a:ea typeface="Arial"/>
-                <a:cs typeface="Arial"/>
-              </a:rPr>
-              <a:t>One public specimen through the service</a:t>
-            </a:r>
-          </a:p>
-        </p:txBody>
-      </p:sp>
-      <p:sp>
-        <p:nvSpPr>
-          <p:cNvPr id="2" name="">
-            <a:extLst xmlns:a="http://schemas.openxmlformats.org/drawingml/2006/main">
-              <a:ext uri="{FF2B5EF4-FFF2-40B4-BE49-F238E27FC236}">
-                <a16:creationId xmlns:a16="http://schemas.microsoft.com/office/drawing/2014/main" id="{87E2C48B-B66D-4CBD-B628-BE7B874293C2}"/>
-              </a:ext>
-            </a:extLst>
-          </p:cNvPr>
-          <p:cNvSpPr>
-            <a:spLocks xmlns:a="http://schemas.openxmlformats.org/drawingml/2006/main" noGrp="1"/>
-          </p:cNvSpPr>
-          <p:nvPr/>
-        </p:nvSpPr>
-        <p:spPr>
-          <a:xfrm xmlns:a="http://schemas.openxmlformats.org/drawingml/2006/main">
-            <a:off x="609600" y="6257925"/>
-            <a:ext cx="10382250" cy="361950"/>
-          </a:xfrm>
-          <a:prstGeom xmlns:a="http://schemas.openxmlformats.org/drawingml/2006/main" prst="rect">
-            <a:avLst/>
-          </a:prstGeom>
-          <a:noFill xmlns:a="http://schemas.openxmlformats.org/drawingml/2006/main"/>
-          <a:ln xmlns:a="http://schemas.openxmlformats.org/drawingml/2006/main" w="0">
-            <a:noFill/>
-          </a:ln>
-        </p:spPr>
-        <p:txBody>
-          <a:bodyPr xmlns:a="http://schemas.openxmlformats.org/drawingml/2006/main" anchor="ctr">
-            <a:noAutofit/>
-          </a:bodyPr>
-          <a:lstStyle xmlns:a="http://schemas.openxmlformats.org/drawingml/2006/main"/>
-          <a:p xmlns:a="http://schemas.openxmlformats.org/drawingml/2006/main">
-            <a:pPr algn="l">
-              <a:defRPr sz="1350" b="0">
-                <a:solidFill>
-                  <a:srgbClr val="52656B"/>
-                </a:solidFill>
-                <a:latin typeface="Arial"/>
-                <a:ea typeface="Arial"/>
-                <a:cs typeface="Arial"/>
-              </a:defRPr>
-            </a:pPr>
-            <a:r>
-              <a:rPr sz="1350" b="0">
-                <a:solidFill>
-                  <a:srgbClr val="52656B"/>
-                </a:solidFill>
-                <a:latin typeface="Arial"/>
-                <a:ea typeface="Arial"/>
-                <a:cs typeface="Arial"/>
-              </a:rPr>
-              <a:t>Source: public discovery-screen example and saved application checks</a:t>
-            </a:r>
-          </a:p>
-        </p:txBody>
-      </p:sp>
-      <p:sp>
-        <p:nvSpPr>
-          <p:cNvPr id="3" name="">
-            <a:extLst xmlns:a="http://schemas.openxmlformats.org/drawingml/2006/main">
-              <a:ext uri="{FF2B5EF4-FFF2-40B4-BE49-F238E27FC236}">
-                <a16:creationId xmlns:a16="http://schemas.microsoft.com/office/drawing/2014/main" id="{DEEAB9FD-5B38-45B5-93A9-1FDDC9565B94}"/>
-              </a:ext>
-            </a:extLst>
-          </p:cNvPr>
-          <p:cNvSpPr>
-            <a:spLocks xmlns:a="http://schemas.openxmlformats.org/drawingml/2006/main" noGrp="1"/>
-          </p:cNvSpPr>
-          <p:nvPr/>
-        </p:nvSpPr>
-        <p:spPr>
-          <a:xfrm xmlns:a="http://schemas.openxmlformats.org/drawingml/2006/main">
-            <a:off x="11115675" y="6305550"/>
-            <a:ext cx="457200" cy="285750"/>
-          </a:xfrm>
-          <a:prstGeom xmlns:a="http://schemas.openxmlformats.org/drawingml/2006/main" prst="rect">
-            <a:avLst/>
-          </a:prstGeom>
-          <a:noFill xmlns:a="http://schemas.openxmlformats.org/drawingml/2006/main"/>
-          <a:ln xmlns:a="http://schemas.openxmlformats.org/drawingml/2006/main" w="0">
-            <a:noFill/>
-          </a:ln>
-        </p:spPr>
-        <p:txBody>
-          <a:bodyPr xmlns:a="http://schemas.openxmlformats.org/drawingml/2006/main" anchor="ctr">
-            <a:noAutofit/>
-          </a:bodyPr>
-          <a:lstStyle xmlns:a="http://schemas.openxmlformats.org/drawingml/2006/main"/>
-          <a:p xmlns:a="http://schemas.openxmlformats.org/drawingml/2006/main">
-            <a:pPr algn="r">
-              <a:defRPr sz="1350" b="0">
-                <a:solidFill>
-                  <a:srgbClr val="52656B"/>
-                </a:solidFill>
-                <a:latin typeface="Arial"/>
-                <a:ea typeface="Arial"/>
-                <a:cs typeface="Arial"/>
-              </a:defRPr>
-            </a:pPr>
-            <a:r>
-              <a:rPr sz="1350" b="0">
-                <a:solidFill>
-                  <a:srgbClr val="52656B"/>
-                </a:solidFill>
-                <a:latin typeface="Arial"/>
-                <a:ea typeface="Arial"/>
-                <a:cs typeface="Arial"/>
-              </a:rPr>
-              <a:t>14</a:t>
-            </a:r>
-          </a:p>
-        </p:txBody>
-      </p:sp>
-      <p:sp>
-        <p:nvSpPr>
-          <p:cNvPr id="4" name="">
-            <a:extLst xmlns:a="http://schemas.openxmlformats.org/drawingml/2006/main">
-              <a:ext uri="{FF2B5EF4-FFF2-40B4-BE49-F238E27FC236}">
-                <a16:creationId xmlns:a16="http://schemas.microsoft.com/office/drawing/2014/main" id="{CBC14225-1320-4D91-81AB-4B1B428587CD}"/>
-              </a:ext>
-            </a:extLst>
-          </p:cNvPr>
-          <p:cNvSpPr>
-            <a:spLocks xmlns:a="http://schemas.openxmlformats.org/drawingml/2006/main" noGrp="1"/>
-          </p:cNvSpPr>
-          <p:nvPr/>
-        </p:nvSpPr>
-        <p:spPr>
-          <a:xfrm xmlns:a="http://schemas.openxmlformats.org/drawingml/2006/main">
-            <a:off x="609600" y="1552575"/>
-            <a:ext cx="10972800" cy="581025"/>
-          </a:xfrm>
-          <a:prstGeom xmlns:a="http://schemas.openxmlformats.org/drawingml/2006/main" prst="rect">
-            <a:avLst/>
-          </a:prstGeom>
-          <a:noFill xmlns:a="http://schemas.openxmlformats.org/drawingml/2006/main"/>
-          <a:ln xmlns:a="http://schemas.openxmlformats.org/drawingml/2006/main" w="0">
-            <a:noFill/>
-          </a:ln>
-        </p:spPr>
-        <p:txBody>
-          <a:bodyPr xmlns:a="http://schemas.openxmlformats.org/drawingml/2006/main" anchor="t">
-            <a:noAutofit/>
-          </a:bodyPr>
-          <a:lstStyle xmlns:a="http://schemas.openxmlformats.org/drawingml/2006/main"/>
-          <a:p xmlns:a="http://schemas.openxmlformats.org/drawingml/2006/main">
-            <a:pPr marL="279400" indent="-152400" algn="l">
-              <a:spcAft>
-                <a:spcPts val="1200"/>
-              </a:spcAft>
-              <a:buChar char="•"/>
-              <a:defRPr sz="2550" b="0">
-                <a:solidFill>
-                  <a:srgbClr val="16343E"/>
-                </a:solidFill>
-                <a:latin typeface="Arial"/>
-                <a:ea typeface="Arial"/>
-                <a:cs typeface="Arial"/>
-              </a:defRPr>
-            </a:pPr>
-            <a:r>
-              <a:rPr sz="2550" b="0">
-                <a:solidFill>
-                  <a:srgbClr val="16343E"/>
-                </a:solidFill>
-                <a:latin typeface="Arial"/>
-                <a:ea typeface="Arial"/>
-                <a:cs typeface="Arial"/>
-              </a:rPr>
-              <a:t>GSM6510425: recorded no rejection.</a:t>
-            </a:r>
-          </a:p>
-        </p:txBody>
-      </p:sp>
-      <p:graphicFrame>
-        <p:nvGraphicFramePr>
-          <p:cNvPr id="13" name=""/>
-          <p:cNvGraphicFramePr/>
-          <p:nvPr/>
-        </p:nvGraphicFramePr>
-        <p:xfrm>
-          <a:off xmlns:a="http://schemas.openxmlformats.org/drawingml/2006/main" x="609600" y="2371725"/>
-          <a:ext xmlns:a="http://schemas.openxmlformats.org/drawingml/2006/main" cx="10972800" cy="1314450"/>
-        </p:xfrm>
-        <a:graphic xmlns:a="http://schemas.openxmlformats.org/drawingml/2006/main">
-          <a:graphicData uri="http://schemas.openxmlformats.org/drawingml/2006/table">
-            <a:tbl>
-              <a:tblPr/>
-              <a:tblGrid>
-                <a:gridCol w="3295650"/>
-                <a:gridCol w="3486150"/>
-                <a:gridCol w="4191000"/>
-              </a:tblGrid>
-              <a:tr h="657225">
-                <a:tc>
-                  <a:txBody>
-                    <a:bodyPr>
-                      <a:noAutofit/>
-                    </a:bodyPr>
-                    <a:lstStyle/>
-                    <a:p>
-                      <a:r>
-                        <a:rPr sz="2325" b="1">
-                          <a:solidFill>
-                            <a:srgbClr val="FFFFFF"/>
-                          </a:solidFill>
-                          <a:latin typeface="Arial"/>
-                          <a:ea typeface="Arial"/>
-                          <a:cs typeface="Arial"/>
-                        </a:rPr>
-                        <a:t>Model score</a:t>
-                      </a:r>
-                    </a:p>
-                  </a:txBody>
-                  <a:tcPr marL="171450" marR="142875" marT="104775" marB="104775" anchor="ctr">
-                    <a:solidFill>
-                      <a:srgbClr val="16343E"/>
-                    </a:solidFill>
-                  </a:tcPr>
-                </a:tc>
-                <a:tc>
-                  <a:txBody>
-                    <a:bodyPr>
-                      <a:noAutofit/>
-                    </a:bodyPr>
-                    <a:lstStyle/>
-                    <a:p>
-                      <a:r>
-                        <a:rPr sz="2325" b="1">
-                          <a:solidFill>
-                            <a:srgbClr val="FFFFFF"/>
-                          </a:solidFill>
-                          <a:latin typeface="Arial"/>
-                          <a:ea typeface="Arial"/>
-                          <a:cs typeface="Arial"/>
-                        </a:rPr>
-                        <a:t>Selected threshold</a:t>
-                      </a:r>
-                    </a:p>
-                  </a:txBody>
-                  <a:tcPr marL="171450" marR="142875" marT="104775" marB="104775" anchor="ctr">
-                    <a:solidFill>
-                      <a:srgbClr val="16343E"/>
-                    </a:solidFill>
-                  </a:tcPr>
-                </a:tc>
-                <a:tc>
-                  <a:txBody>
-                    <a:bodyPr>
-                      <a:noAutofit/>
-                    </a:bodyPr>
-                    <a:lstStyle/>
-                    <a:p>
-                      <a:r>
-                        <a:rPr sz="2325" b="1">
-                          <a:solidFill>
-                            <a:srgbClr val="FFFFFF"/>
-                          </a:solidFill>
-                          <a:latin typeface="Arial"/>
-                          <a:ea typeface="Arial"/>
-                          <a:cs typeface="Arial"/>
-                        </a:rPr>
-                        <a:t>Rejection flag</a:t>
-                      </a:r>
-                    </a:p>
-                  </a:txBody>
-                  <a:tcPr marL="171450" marR="142875" marT="104775" marB="104775" anchor="ctr">
-                    <a:solidFill>
-                      <a:srgbClr val="16343E"/>
-                    </a:solidFill>
-                  </a:tcPr>
-                </a:tc>
-              </a:tr>
-              <a:tr h="657225">
-                <a:tc>
-                  <a:txBody>
-                    <a:bodyPr>
-                      <a:noAutofit/>
-                    </a:bodyPr>
-                    <a:lstStyle/>
-                    <a:p>
-                      <a:r>
-                        <a:rPr sz="2325" b="0">
-                          <a:solidFill>
-                            <a:srgbClr val="16343E"/>
-                          </a:solidFill>
-                          <a:latin typeface="Arial"/>
-                          <a:ea typeface="Arial"/>
-                          <a:cs typeface="Arial"/>
-                        </a:rPr>
-                        <a:t>0.274934</a:t>
-                      </a:r>
-                    </a:p>
-                  </a:txBody>
-                  <a:tcPr marL="171450" marR="142875" marT="104775" marB="104775" anchor="ctr">
-                    <a:solidFill>
-                      <a:srgbClr val="FFFFFF"/>
-                    </a:solidFill>
-                  </a:tcPr>
-                </a:tc>
-                <a:tc>
-                  <a:txBody>
-                    <a:bodyPr>
-                      <a:noAutofit/>
-                    </a:bodyPr>
-                    <a:lstStyle/>
-                    <a:p>
-                      <a:r>
-                        <a:rPr sz="2325" b="0">
-                          <a:solidFill>
-                            <a:srgbClr val="16343E"/>
-                          </a:solidFill>
-                          <a:latin typeface="Arial"/>
-                          <a:ea typeface="Arial"/>
-                          <a:cs typeface="Arial"/>
-                        </a:rPr>
-                        <a:t>0.876588</a:t>
-                      </a:r>
-                    </a:p>
-                  </a:txBody>
-                  <a:tcPr marL="171450" marR="142875" marT="104775" marB="104775" anchor="ctr">
-                    <a:solidFill>
-                      <a:srgbClr val="FFFFFF"/>
-                    </a:solidFill>
-                  </a:tcPr>
-                </a:tc>
-                <a:tc>
-                  <a:txBody>
-                    <a:bodyPr>
-                      <a:noAutofit/>
-                    </a:bodyPr>
-                    <a:lstStyle/>
-                    <a:p>
-                      <a:r>
-                        <a:rPr sz="2325" b="0">
-                          <a:solidFill>
-                            <a:srgbClr val="16343E"/>
-                          </a:solidFill>
-                          <a:latin typeface="Arial"/>
-                          <a:ea typeface="Arial"/>
-                          <a:cs typeface="Arial"/>
-                        </a:rPr>
-                        <a:t>False (below cutoff)</a:t>
-                      </a:r>
-                    </a:p>
-                  </a:txBody>
-                  <a:tcPr marL="171450" marR="142875" marT="104775" marB="104775" anchor="ctr">
-                    <a:solidFill>
-                      <a:srgbClr val="FFFFFF"/>
-                    </a:solidFill>
-                  </a:tcPr>
-                </a:tc>
-              </a:tr>
-            </a:tbl>
-          </a:graphicData>
-        </a:graphic>
-      </p:graphicFrame>
-      <p:sp>
-        <p:nvSpPr>
-          <p:cNvPr id="6" name="">
-            <a:extLst xmlns:a="http://schemas.openxmlformats.org/drawingml/2006/main">
-              <a:ext uri="{FF2B5EF4-FFF2-40B4-BE49-F238E27FC236}">
-                <a16:creationId xmlns:a16="http://schemas.microsoft.com/office/drawing/2014/main" id="{2EE2CAFF-C2AF-46B1-BAC6-0F94F9DA3D87}"/>
-              </a:ext>
-            </a:extLst>
-          </p:cNvPr>
-          <p:cNvSpPr>
-            <a:spLocks xmlns:a="http://schemas.openxmlformats.org/drawingml/2006/main" noGrp="1"/>
-          </p:cNvSpPr>
-          <p:nvPr/>
-        </p:nvSpPr>
-        <p:spPr>
-          <a:xfrm xmlns:a="http://schemas.openxmlformats.org/drawingml/2006/main">
-            <a:off x="609600" y="3800475"/>
-            <a:ext cx="10972800" cy="323850"/>
-          </a:xfrm>
-          <a:prstGeom xmlns:a="http://schemas.openxmlformats.org/drawingml/2006/main" prst="rect">
-            <a:avLst/>
-          </a:prstGeom>
-          <a:noFill xmlns:a="http://schemas.openxmlformats.org/drawingml/2006/main"/>
-          <a:ln xmlns:a="http://schemas.openxmlformats.org/drawingml/2006/main" w="0">
-            <a:noFill/>
-          </a:ln>
-        </p:spPr>
-        <p:txBody>
-          <a:bodyPr xmlns:a="http://schemas.openxmlformats.org/drawingml/2006/main" anchor="ctr">
-            <a:noAutofit/>
-          </a:bodyPr>
-          <a:lstStyle xmlns:a="http://schemas.openxmlformats.org/drawingml/2006/main"/>
-          <a:p xmlns:a="http://schemas.openxmlformats.org/drawingml/2006/main">
-            <a:pPr algn="l">
-              <a:defRPr sz="1800" b="0">
-                <a:solidFill>
-                  <a:srgbClr val="52656B"/>
-                </a:solidFill>
-                <a:latin typeface="Arial"/>
-                <a:ea typeface="Arial"/>
-                <a:cs typeface="Arial"/>
-              </a:defRPr>
-            </a:pPr>
-            <a:r>
-              <a:rPr sz="1800" b="0">
-                <a:solidFill>
-                  <a:srgbClr val="52656B"/>
-                </a:solidFill>
-                <a:latin typeface="Arial"/>
-                <a:ea typeface="Arial"/>
-                <a:cs typeface="Arial"/>
-              </a:rPr>
-              <a:t>Model: 20260915_shared:any_rejection:catboost_all_depth4</a:t>
-            </a:r>
-          </a:p>
-        </p:txBody>
-      </p:sp>
-      <p:sp>
-        <p:nvSpPr>
-          <p:cNvPr id="7" name="">
-            <a:extLst xmlns:a="http://schemas.openxmlformats.org/drawingml/2006/main">
-              <a:ext uri="{FF2B5EF4-FFF2-40B4-BE49-F238E27FC236}">
-                <a16:creationId xmlns:a16="http://schemas.microsoft.com/office/drawing/2014/main" id="{CD433A9C-3127-46D9-AF2C-2454DD781909}"/>
-              </a:ext>
-            </a:extLst>
-          </p:cNvPr>
-          <p:cNvSpPr>
-            <a:spLocks xmlns:a="http://schemas.openxmlformats.org/drawingml/2006/main" noGrp="1"/>
-          </p:cNvSpPr>
-          <p:nvPr/>
-        </p:nvSpPr>
-        <p:spPr>
-          <a:xfrm xmlns:a="http://schemas.openxmlformats.org/drawingml/2006/main">
-            <a:off x="609600" y="4371975"/>
-            <a:ext cx="10972800" cy="1209675"/>
-          </a:xfrm>
-          <a:prstGeom xmlns:a="http://schemas.openxmlformats.org/drawingml/2006/main" prst="rect">
-            <a:avLst/>
-          </a:prstGeom>
-          <a:noFill xmlns:a="http://schemas.openxmlformats.org/drawingml/2006/main"/>
-          <a:ln xmlns:a="http://schemas.openxmlformats.org/drawingml/2006/main" w="0">
-            <a:noFill/>
-          </a:ln>
-        </p:spPr>
-        <p:txBody>
-          <a:bodyPr xmlns:a="http://schemas.openxmlformats.org/drawingml/2006/main" anchor="t">
-            <a:noAutofit/>
-          </a:bodyPr>
-          <a:lstStyle xmlns:a="http://schemas.openxmlformats.org/drawingml/2006/main"/>
-          <a:p xmlns:a="http://schemas.openxmlformats.org/drawingml/2006/main">
-            <a:pPr marL="279400" indent="-152400" algn="l">
-              <a:spcAft>
-                <a:spcPts val="1800"/>
-              </a:spcAft>
-              <a:buChar char="•"/>
-              <a:defRPr sz="2250" b="0">
-                <a:solidFill>
-                  <a:srgbClr val="16343E"/>
-                </a:solidFill>
-                <a:latin typeface="Arial"/>
-                <a:ea typeface="Arial"/>
-                <a:cs typeface="Arial"/>
-              </a:defRPr>
-            </a:pPr>
-            <a:r>
-              <a:rPr sz="2250" b="0">
-                <a:solidFill>
-                  <a:srgbClr val="16343E"/>
-                </a:solidFill>
-                <a:latin typeface="Arial"/>
-                <a:ea typeface="Arial"/>
-                <a:cs typeface="Arial"/>
-              </a:rPr>
-              <a:t>The complete input produces a flag that agrees with the recorded diagnosis.</a:t>
-            </a:r>
-          </a:p>
-          <a:p xmlns:a="http://schemas.openxmlformats.org/drawingml/2006/main">
-            <a:pPr marL="279400" indent="-152400" algn="l">
-              <a:spcAft>
-                <a:spcPts val="1800"/>
-              </a:spcAft>
-              <a:buChar char="•"/>
-              <a:defRPr sz="2250" b="0">
-                <a:solidFill>
-                  <a:srgbClr val="16343E"/>
-                </a:solidFill>
-                <a:latin typeface="Arial"/>
-                <a:ea typeface="Arial"/>
-                <a:cs typeface="Arial"/>
-              </a:defRPr>
-            </a:pPr>
-            <a:r>
-              <a:rPr sz="2250" b="0">
-                <a:solidFill>
-                  <a:srgbClr val="16343E"/>
-                </a:solidFill>
-                <a:latin typeface="Arial"/>
-                <a:ea typeface="Arial"/>
-                <a:cs typeface="Arial"/>
-              </a:rPr>
-              <a:t>Removing IFNG clears the previous result and returns no new score.</a:t>
-            </a:r>
-          </a:p>
-        </p:txBody>
-      </p:sp>
-      <p:sp>
-        <p:nvSpPr>
-          <p:cNvPr id="8" name="">
-            <a:extLst xmlns:a="http://schemas.openxmlformats.org/drawingml/2006/main">
-              <a:ext uri="{FF2B5EF4-FFF2-40B4-BE49-F238E27FC236}">
-                <a16:creationId xmlns:a16="http://schemas.microsoft.com/office/drawing/2014/main" id="{C051337F-57DB-488F-97AB-0FDB3EA81FA2}"/>
-              </a:ext>
-            </a:extLst>
-          </p:cNvPr>
-          <p:cNvSpPr>
-            <a:spLocks xmlns:a="http://schemas.openxmlformats.org/drawingml/2006/main" noGrp="1"/>
-          </p:cNvSpPr>
-          <p:nvPr/>
-        </p:nvSpPr>
-        <p:spPr>
-          <a:xfrm xmlns:a="http://schemas.openxmlformats.org/drawingml/2006/main">
-            <a:off x="895350" y="5638800"/>
-            <a:ext cx="10687050" cy="419100"/>
-          </a:xfrm>
-          <a:prstGeom xmlns:a="http://schemas.openxmlformats.org/drawingml/2006/main" prst="rect">
-            <a:avLst/>
-          </a:prstGeom>
-          <a:noFill xmlns:a="http://schemas.openxmlformats.org/drawingml/2006/main"/>
-          <a:ln xmlns:a="http://schemas.openxmlformats.org/drawingml/2006/main" w="0">
-            <a:noFill/>
-          </a:ln>
-        </p:spPr>
-        <p:txBody>
-          <a:bodyPr xmlns:a="http://schemas.openxmlformats.org/drawingml/2006/main" anchor="ctr">
-            <a:noAutofit/>
-          </a:bodyPr>
-          <a:lstStyle xmlns:a="http://schemas.openxmlformats.org/drawingml/2006/main"/>
-          <a:p xmlns:a="http://schemas.openxmlformats.org/drawingml/2006/main">
-            <a:pPr algn="l">
-              <a:defRPr sz="2250" b="1">
-                <a:solidFill>
-                  <a:srgbClr val="16343E"/>
-                </a:solidFill>
-                <a:latin typeface="Arial"/>
-                <a:ea typeface="Arial"/>
-                <a:cs typeface="Arial"/>
-              </a:defRPr>
-            </a:pPr>
-            <a:r>
-              <a:rPr sz="2250" b="1">
-                <a:solidFill>
-                  <a:srgbClr val="16343E"/>
-                </a:solidFill>
-                <a:latin typeface="Arial"/>
-                <a:ea typeface="Arial"/>
-                <a:cs typeface="Arial"/>
-              </a:rPr>
-              <a:t>“Missing required assay targets: IFNG”</a:t>
-            </a:r>
-          </a:p>
-        </p:txBody>
-      </p:sp>
-    </p:spTree>
-    <p:extLst>
-      <p:ext uri="{BB962C8B-B14F-4D97-AF65-F5344CB8AC3E}">
-        <p14:creationId xmlns:p14="http://schemas.microsoft.com/office/powerpoint/2010/main" val="1602566686"/>
-      </p:ext>
-    </p:extLst>
-  </p:cSld>
-</p:sld>
-</file>
-
-<file path=ppt/slides/slide15.xml><?xml version="1.0" encoding="utf-8"?>
-<p:sld xmlns:p="http://schemas.openxmlformats.org/presentationml/2006/main">
-  <p:cSld>
-    <p:bg>
-      <p:bgPr>
-        <a:solidFill xmlns:a="http://schemas.openxmlformats.org/drawingml/2006/main">
-          <a:srgbClr val="F7F8F5"/>
-        </a:solidFill>
-      </p:bgPr>
-    </p:bg>
-    <p:spTree>
-      <p:nvGrpSpPr>
-        <p:cNvPr id="1" name=""/>
-        <p:cNvGrpSpPr/>
-        <p:nvPr/>
-      </p:nvGrpSpPr>
-      <p:grpSpPr>
-        <a:xfrm xmlns:a="http://schemas.openxmlformats.org/drawingml/2006/main"/>
-      </p:grpSpPr>
-      <p:sp>
-        <p:nvSpPr>
-          <p:cNvPr id="13" name="">
-            <a:extLst xmlns:a="http://schemas.openxmlformats.org/drawingml/2006/main">
-              <a:ext uri="{FF2B5EF4-FFF2-40B4-BE49-F238E27FC236}">
-                <a16:creationId xmlns:a16="http://schemas.microsoft.com/office/drawing/2014/main" id="{1C9C52EB-3140-4C54-B274-1B59CEFE03DA}"/>
-              </a:ext>
-            </a:extLst>
-          </p:cNvPr>
-          <p:cNvSpPr>
-            <a:spLocks xmlns:a="http://schemas.openxmlformats.org/drawingml/2006/main" noGrp="1"/>
-          </p:cNvSpPr>
-          <p:nvPr/>
-        </p:nvSpPr>
-        <p:spPr>
-          <a:xfrm xmlns:a="http://schemas.openxmlformats.org/drawingml/2006/main">
-            <a:off x="609600" y="409575"/>
-            <a:ext cx="10972800" cy="1000125"/>
-          </a:xfrm>
-          <a:prstGeom xmlns:a="http://schemas.openxmlformats.org/drawingml/2006/main" prst="rect">
-            <a:avLst/>
-          </a:prstGeom>
-          <a:noFill xmlns:a="http://schemas.openxmlformats.org/drawingml/2006/main"/>
-          <a:ln xmlns:a="http://schemas.openxmlformats.org/drawingml/2006/main" w="0">
-            <a:noFill/>
-          </a:ln>
-        </p:spPr>
-        <p:txBody>
-          <a:bodyPr xmlns:a="http://schemas.openxmlformats.org/drawingml/2006/main" anchor="ctr">
-            <a:noAutofit/>
-          </a:bodyPr>
-          <a:lstStyle xmlns:a="http://schemas.openxmlformats.org/drawingml/2006/main"/>
-          <a:p xmlns:a="http://schemas.openxmlformats.org/drawingml/2006/main">
-            <a:pPr algn="l">
-              <a:defRPr sz="3450" b="1">
-                <a:solidFill>
-                  <a:srgbClr val="16343E"/>
-                </a:solidFill>
-                <a:latin typeface="Arial"/>
-                <a:ea typeface="Arial"/>
-                <a:cs typeface="Arial"/>
-              </a:defRPr>
-            </a:pPr>
-            <a:r>
-              <a:rPr sz="3450" b="1">
-                <a:solidFill>
-                  <a:srgbClr val="16343E"/>
-                </a:solidFill>
-                <a:latin typeface="Arial"/>
-                <a:ea typeface="Arial"/>
-                <a:cs typeface="Arial"/>
-              </a:rPr>
-              <a:t>Shared preparation and scoring</a:t>
-            </a:r>
-          </a:p>
-        </p:txBody>
-      </p:sp>
-      <p:sp>
-        <p:nvSpPr>
-          <p:cNvPr id="2" name="">
-            <a:extLst xmlns:a="http://schemas.openxmlformats.org/drawingml/2006/main">
-              <a:ext uri="{FF2B5EF4-FFF2-40B4-BE49-F238E27FC236}">
-                <a16:creationId xmlns:a16="http://schemas.microsoft.com/office/drawing/2014/main" id="{56D5E256-0ADF-4923-B1C6-8A080D05A145}"/>
-              </a:ext>
-            </a:extLst>
-          </p:cNvPr>
-          <p:cNvSpPr>
-            <a:spLocks xmlns:a="http://schemas.openxmlformats.org/drawingml/2006/main" noGrp="1"/>
-          </p:cNvSpPr>
-          <p:nvPr/>
-        </p:nvSpPr>
-        <p:spPr>
-          <a:xfrm xmlns:a="http://schemas.openxmlformats.org/drawingml/2006/main">
-            <a:off x="609600" y="6257925"/>
-            <a:ext cx="10382250" cy="361950"/>
-          </a:xfrm>
-          <a:prstGeom xmlns:a="http://schemas.openxmlformats.org/drawingml/2006/main" prst="rect">
-            <a:avLst/>
-          </a:prstGeom>
-          <a:noFill xmlns:a="http://schemas.openxmlformats.org/drawingml/2006/main"/>
-          <a:ln xmlns:a="http://schemas.openxmlformats.org/drawingml/2006/main" w="0">
-            <a:noFill/>
-          </a:ln>
-        </p:spPr>
-        <p:txBody>
-          <a:bodyPr xmlns:a="http://schemas.openxmlformats.org/drawingml/2006/main" anchor="ctr">
-            <a:noAutofit/>
-          </a:bodyPr>
-          <a:lstStyle xmlns:a="http://schemas.openxmlformats.org/drawingml/2006/main"/>
-          <a:p xmlns:a="http://schemas.openxmlformats.org/drawingml/2006/main">
-            <a:pPr algn="l">
-              <a:defRPr sz="1350" b="0">
-                <a:solidFill>
-                  <a:srgbClr val="52656B"/>
-                </a:solidFill>
-                <a:latin typeface="Arial"/>
-                <a:ea typeface="Arial"/>
-                <a:cs typeface="Arial"/>
-              </a:defRPr>
-            </a:pPr>
-            <a:r>
-              <a:rPr sz="1350" b="0">
-                <a:solidFill>
-                  <a:srgbClr val="52656B"/>
-                </a:solidFill>
-                <a:latin typeface="Arial"/>
-                <a:ea typeface="Arial"/>
-                <a:cs typeface="Arial"/>
-              </a:rPr>
-              <a:t>Sources: prediction.py, Predictor.predict; shared preprocessing; training workflow</a:t>
-            </a:r>
-          </a:p>
-        </p:txBody>
-      </p:sp>
-      <p:sp>
-        <p:nvSpPr>
-          <p:cNvPr id="3" name="">
-            <a:extLst xmlns:a="http://schemas.openxmlformats.org/drawingml/2006/main">
-              <a:ext uri="{FF2B5EF4-FFF2-40B4-BE49-F238E27FC236}">
-                <a16:creationId xmlns:a16="http://schemas.microsoft.com/office/drawing/2014/main" id="{2FA10CC2-790B-4B5C-A652-60021A23B463}"/>
-              </a:ext>
-            </a:extLst>
-          </p:cNvPr>
-          <p:cNvSpPr>
-            <a:spLocks xmlns:a="http://schemas.openxmlformats.org/drawingml/2006/main" noGrp="1"/>
-          </p:cNvSpPr>
-          <p:nvPr/>
-        </p:nvSpPr>
-        <p:spPr>
-          <a:xfrm xmlns:a="http://schemas.openxmlformats.org/drawingml/2006/main">
-            <a:off x="11115675" y="6305550"/>
-            <a:ext cx="457200" cy="285750"/>
-          </a:xfrm>
-          <a:prstGeom xmlns:a="http://schemas.openxmlformats.org/drawingml/2006/main" prst="rect">
-            <a:avLst/>
-          </a:prstGeom>
-          <a:noFill xmlns:a="http://schemas.openxmlformats.org/drawingml/2006/main"/>
-          <a:ln xmlns:a="http://schemas.openxmlformats.org/drawingml/2006/main" w="0">
-            <a:noFill/>
-          </a:ln>
-        </p:spPr>
-        <p:txBody>
-          <a:bodyPr xmlns:a="http://schemas.openxmlformats.org/drawingml/2006/main" anchor="ctr">
-            <a:noAutofit/>
-          </a:bodyPr>
-          <a:lstStyle xmlns:a="http://schemas.openxmlformats.org/drawingml/2006/main"/>
-          <a:p xmlns:a="http://schemas.openxmlformats.org/drawingml/2006/main">
-            <a:pPr algn="r">
-              <a:defRPr sz="1350" b="0">
-                <a:solidFill>
-                  <a:srgbClr val="52656B"/>
-                </a:solidFill>
-                <a:latin typeface="Arial"/>
-                <a:ea typeface="Arial"/>
-                <a:cs typeface="Arial"/>
-              </a:defRPr>
-            </a:pPr>
-            <a:r>
-              <a:rPr sz="1350" b="0">
-                <a:solidFill>
-                  <a:srgbClr val="52656B"/>
-                </a:solidFill>
-                <a:latin typeface="Arial"/>
-                <a:ea typeface="Arial"/>
-                <a:cs typeface="Arial"/>
-              </a:rPr>
-              <a:t>15</a:t>
-            </a:r>
-          </a:p>
-        </p:txBody>
-      </p:sp>
-      <p:sp>
-        <p:nvSpPr>
-          <p:cNvPr id="4" name="">
-            <a:extLst xmlns:a="http://schemas.openxmlformats.org/drawingml/2006/main">
-              <a:ext uri="{FF2B5EF4-FFF2-40B4-BE49-F238E27FC236}">
-                <a16:creationId xmlns:a16="http://schemas.microsoft.com/office/drawing/2014/main" id="{297E0CB4-3726-4A7E-B9E6-1A2AADDE778F}"/>
-              </a:ext>
-            </a:extLst>
-          </p:cNvPr>
-          <p:cNvSpPr>
-            <a:spLocks xmlns:a="http://schemas.openxmlformats.org/drawingml/2006/main" noGrp="1"/>
-          </p:cNvSpPr>
-          <p:nvPr/>
-        </p:nvSpPr>
-        <p:spPr>
-          <a:xfrm xmlns:a="http://schemas.openxmlformats.org/drawingml/2006/main">
-            <a:off x="609600" y="1533525"/>
-            <a:ext cx="10972800" cy="590550"/>
-          </a:xfrm>
-          <a:prstGeom xmlns:a="http://schemas.openxmlformats.org/drawingml/2006/main" prst="rect">
-            <a:avLst/>
-          </a:prstGeom>
-          <a:noFill xmlns:a="http://schemas.openxmlformats.org/drawingml/2006/main"/>
-          <a:ln xmlns:a="http://schemas.openxmlformats.org/drawingml/2006/main" w="0">
-            <a:noFill/>
-          </a:ln>
-        </p:spPr>
-        <p:txBody>
-          <a:bodyPr xmlns:a="http://schemas.openxmlformats.org/drawingml/2006/main" anchor="ctr">
-            <a:noAutofit/>
-          </a:bodyPr>
-          <a:lstStyle xmlns:a="http://schemas.openxmlformats.org/drawingml/2006/main"/>
-          <a:p xmlns:a="http://schemas.openxmlformats.org/drawingml/2006/main">
-            <a:pPr algn="l">
-              <a:defRPr sz="2475" b="1">
-                <a:solidFill>
-                  <a:srgbClr val="16343E"/>
-                </a:solidFill>
-                <a:latin typeface="Arial"/>
-                <a:ea typeface="Arial"/>
-                <a:cs typeface="Arial"/>
-              </a:defRPr>
-            </a:pPr>
-            <a:r>
-              <a:rPr sz="2475" b="1">
-                <a:solidFill>
-                  <a:srgbClr val="16343E"/>
-                </a:solidFill>
-                <a:latin typeface="Arial"/>
-                <a:ea typeface="Arial"/>
-                <a:cs typeface="Arial"/>
-              </a:rPr>
-              <a:t>The analysis and application use the same preparation code.</a:t>
-            </a:r>
-          </a:p>
-        </p:txBody>
-      </p:sp>
-      <p:sp>
-        <p:nvSpPr>
-          <p:cNvPr id="5" name="">
-            <a:extLst xmlns:a="http://schemas.openxmlformats.org/drawingml/2006/main">
-              <a:ext uri="{FF2B5EF4-FFF2-40B4-BE49-F238E27FC236}">
-                <a16:creationId xmlns:a16="http://schemas.microsoft.com/office/drawing/2014/main" id="{D19F5D60-F27D-400D-A552-3F0B20B49277}"/>
-              </a:ext>
-            </a:extLst>
-          </p:cNvPr>
-          <p:cNvSpPr>
-            <a:spLocks xmlns:a="http://schemas.openxmlformats.org/drawingml/2006/main" noGrp="1"/>
-          </p:cNvSpPr>
-          <p:nvPr/>
-        </p:nvSpPr>
-        <p:spPr>
-          <a:xfrm xmlns:a="http://schemas.openxmlformats.org/drawingml/2006/main">
-            <a:off x="609600" y="2400300"/>
-            <a:ext cx="3143250" cy="742950"/>
-          </a:xfrm>
-          <a:prstGeom xmlns:a="http://schemas.openxmlformats.org/drawingml/2006/main" prst="rect">
-            <a:avLst/>
-          </a:prstGeom>
-          <a:solidFill xmlns:a="http://schemas.openxmlformats.org/drawingml/2006/main">
-            <a:srgbClr val="E4EFEB"/>
-          </a:solidFill>
-          <a:ln xmlns:a="http://schemas.openxmlformats.org/drawingml/2006/main" w="9525">
-            <a:solidFill>
-              <a:srgbClr val="CEDBD7"/>
-            </a:solidFill>
-          </a:ln>
-        </p:spPr>
-        <p:txBody>
-          <a:bodyPr xmlns:a="http://schemas.openxmlformats.org/drawingml/2006/main" anchor="ctr">
-            <a:noAutofit/>
-          </a:bodyPr>
-          <a:lstStyle xmlns:a="http://schemas.openxmlformats.org/drawingml/2006/main"/>
-          <a:p xmlns:a="http://schemas.openxmlformats.org/drawingml/2006/main">
-            <a:pPr algn="ctr">
-              <a:defRPr sz="2175">
-                <a:solidFill>
-                  <a:srgbClr val="16343E"/>
-                </a:solidFill>
-                <a:latin typeface="Arial"/>
-                <a:ea typeface="Arial"/>
-                <a:cs typeface="Arial"/>
-              </a:defRPr>
-            </a:pPr>
-            <a:r>
-              <a:rPr sz="2175">
-                <a:solidFill>
-                  <a:srgbClr val="16343E"/>
-                </a:solidFill>
-                <a:latin typeface="Arial"/>
-                <a:ea typeface="Arial"/>
-                <a:cs typeface="Arial"/>
-              </a:rPr>
-              <a:t>Raw RNA counts</a:t>
-            </a:r>
-          </a:p>
-        </p:txBody>
-      </p:sp>
-      <p:sp>
-        <p:nvSpPr>
-          <p:cNvPr id="6" name="">
-            <a:extLst xmlns:a="http://schemas.openxmlformats.org/drawingml/2006/main">
-              <a:ext uri="{FF2B5EF4-FFF2-40B4-BE49-F238E27FC236}">
-                <a16:creationId xmlns:a16="http://schemas.microsoft.com/office/drawing/2014/main" id="{4F9103CC-1621-4A5A-ADE3-9C391C5AB764}"/>
-              </a:ext>
-            </a:extLst>
-          </p:cNvPr>
-          <p:cNvSpPr>
-            <a:spLocks xmlns:a="http://schemas.openxmlformats.org/drawingml/2006/main" noGrp="1"/>
-          </p:cNvSpPr>
-          <p:nvPr/>
-        </p:nvSpPr>
-        <p:spPr>
-          <a:xfrm xmlns:a="http://schemas.openxmlformats.org/drawingml/2006/main">
-            <a:off x="4505325" y="2400300"/>
-            <a:ext cx="3181350" cy="742950"/>
-          </a:xfrm>
-          <a:prstGeom xmlns:a="http://schemas.openxmlformats.org/drawingml/2006/main" prst="rect">
-            <a:avLst/>
-          </a:prstGeom>
-          <a:solidFill xmlns:a="http://schemas.openxmlformats.org/drawingml/2006/main">
-            <a:srgbClr val="E4EFEB"/>
-          </a:solidFill>
-          <a:ln xmlns:a="http://schemas.openxmlformats.org/drawingml/2006/main" w="9525">
-            <a:solidFill>
-              <a:srgbClr val="CEDBD7"/>
-            </a:solidFill>
-          </a:ln>
-        </p:spPr>
-        <p:txBody>
-          <a:bodyPr xmlns:a="http://schemas.openxmlformats.org/drawingml/2006/main" anchor="ctr">
-            <a:noAutofit/>
-          </a:bodyPr>
-          <a:lstStyle xmlns:a="http://schemas.openxmlformats.org/drawingml/2006/main"/>
-          <a:p xmlns:a="http://schemas.openxmlformats.org/drawingml/2006/main">
-            <a:pPr algn="ctr">
-              <a:defRPr sz="2175">
-                <a:solidFill>
-                  <a:srgbClr val="16343E"/>
-                </a:solidFill>
-                <a:latin typeface="Arial"/>
-                <a:ea typeface="Arial"/>
-                <a:cs typeface="Arial"/>
-              </a:defRPr>
-            </a:pPr>
-            <a:r>
-              <a:rPr sz="2175">
-                <a:solidFill>
-                  <a:srgbClr val="16343E"/>
-                </a:solidFill>
-                <a:latin typeface="Arial"/>
-                <a:ea typeface="Arial"/>
-                <a:cs typeface="Arial"/>
-              </a:rPr>
-              <a:t>Check and normalize</a:t>
-            </a:r>
-          </a:p>
-        </p:txBody>
-      </p:sp>
-      <p:sp>
-        <p:nvSpPr>
-          <p:cNvPr id="7" name="">
-            <a:extLst xmlns:a="http://schemas.openxmlformats.org/drawingml/2006/main">
-              <a:ext uri="{FF2B5EF4-FFF2-40B4-BE49-F238E27FC236}">
-                <a16:creationId xmlns:a16="http://schemas.microsoft.com/office/drawing/2014/main" id="{3F117799-7568-4DF1-BFBB-81434B55D607}"/>
-              </a:ext>
-            </a:extLst>
-          </p:cNvPr>
-          <p:cNvSpPr>
-            <a:spLocks xmlns:a="http://schemas.openxmlformats.org/drawingml/2006/main" noGrp="1"/>
-          </p:cNvSpPr>
-          <p:nvPr/>
-        </p:nvSpPr>
-        <p:spPr>
-          <a:xfrm xmlns:a="http://schemas.openxmlformats.org/drawingml/2006/main">
-            <a:off x="8439150" y="2400300"/>
-            <a:ext cx="3143250" cy="742950"/>
-          </a:xfrm>
-          <a:prstGeom xmlns:a="http://schemas.openxmlformats.org/drawingml/2006/main" prst="rect">
-            <a:avLst/>
-          </a:prstGeom>
-          <a:solidFill xmlns:a="http://schemas.openxmlformats.org/drawingml/2006/main">
-            <a:srgbClr val="E4EFEB"/>
-          </a:solidFill>
-          <a:ln xmlns:a="http://schemas.openxmlformats.org/drawingml/2006/main" w="9525">
-            <a:solidFill>
-              <a:srgbClr val="CEDBD7"/>
-            </a:solidFill>
-          </a:ln>
-        </p:spPr>
-        <p:txBody>
-          <a:bodyPr xmlns:a="http://schemas.openxmlformats.org/drawingml/2006/main" anchor="ctr">
-            <a:noAutofit/>
-          </a:bodyPr>
-          <a:lstStyle xmlns:a="http://schemas.openxmlformats.org/drawingml/2006/main"/>
-          <a:p xmlns:a="http://schemas.openxmlformats.org/drawingml/2006/main">
-            <a:pPr algn="ctr">
-              <a:defRPr sz="2100">
-                <a:solidFill>
-                  <a:srgbClr val="16343E"/>
-                </a:solidFill>
-                <a:latin typeface="Arial"/>
-                <a:ea typeface="Arial"/>
-                <a:cs typeface="Arial"/>
-              </a:defRPr>
-            </a:pPr>
-            <a:r>
-              <a:rPr sz="2100">
-                <a:solidFill>
-                  <a:srgbClr val="16343E"/>
-                </a:solidFill>
-                <a:latin typeface="Arial"/>
-                <a:ea typeface="Arial"/>
-                <a:cs typeface="Arial"/>
-              </a:rPr>
-              <a:t>Saved model and threshold</a:t>
-            </a:r>
-          </a:p>
-        </p:txBody>
-      </p:sp>
-      <p:cxnSp>
-        <p:nvCxnSpPr>
-          <p:cNvPr id="20" name=""/>
-          <p:cNvCxnSpPr>
-            <a:stCxn xmlns:a="http://schemas.openxmlformats.org/drawingml/2006/main" id="5" idx="3"/>
-            <a:endCxn xmlns:a="http://schemas.openxmlformats.org/drawingml/2006/main" id="6" idx="1"/>
-          </p:cNvCxnSpPr>
-          <p:nvPr/>
-        </p:nvCxnSpPr>
-        <p:spPr>
-          <a:xfrm xmlns:a="http://schemas.openxmlformats.org/drawingml/2006/main">
-            <a:off x="3752850" y="2771775"/>
-            <a:ext cx="752475" cy="0"/>
-          </a:xfrm>
-          <a:prstGeom xmlns:a="http://schemas.openxmlformats.org/drawingml/2006/main" prst="straightConnector1">
-            <a:avLst/>
-          </a:prstGeom>
-          <a:ln xmlns:a="http://schemas.openxmlformats.org/drawingml/2006/main" w="23813">
-            <a:solidFill>
-              <a:srgbClr val="52656B"/>
-            </a:solidFill>
-            <a:tailEnd type="arrow" w="med" len="med"/>
-          </a:ln>
-        </p:spPr>
-      </p:cxnSp>
-      <p:cxnSp>
-        <p:nvCxnSpPr>
-          <p:cNvPr id="21" name=""/>
-          <p:cNvCxnSpPr>
-            <a:stCxn xmlns:a="http://schemas.openxmlformats.org/drawingml/2006/main" id="6" idx="3"/>
-            <a:endCxn xmlns:a="http://schemas.openxmlformats.org/drawingml/2006/main" id="7" idx="1"/>
-          </p:cNvCxnSpPr>
-          <p:nvPr/>
-        </p:nvCxnSpPr>
-        <p:spPr>
-          <a:xfrm xmlns:a="http://schemas.openxmlformats.org/drawingml/2006/main">
-            <a:off x="7686675" y="2771775"/>
-            <a:ext cx="752475" cy="0"/>
-          </a:xfrm>
-          <a:prstGeom xmlns:a="http://schemas.openxmlformats.org/drawingml/2006/main" prst="straightConnector1">
-            <a:avLst/>
-          </a:prstGeom>
-          <a:ln xmlns:a="http://schemas.openxmlformats.org/drawingml/2006/main" w="23813">
-            <a:solidFill>
-              <a:srgbClr val="52656B"/>
-            </a:solidFill>
-            <a:tailEnd type="arrow" w="med" len="med"/>
-          </a:ln>
-        </p:spPr>
-      </p:cxnSp>
-      <p:sp>
-        <p:nvSpPr>
-          <p:cNvPr id="10" name="">
-            <a:extLst xmlns:a="http://schemas.openxmlformats.org/drawingml/2006/main">
-              <a:ext uri="{FF2B5EF4-FFF2-40B4-BE49-F238E27FC236}">
-                <a16:creationId xmlns:a16="http://schemas.microsoft.com/office/drawing/2014/main" id="{41E8B592-AC7A-460A-8AB8-074C6180A215}"/>
-              </a:ext>
-            </a:extLst>
-          </p:cNvPr>
-          <p:cNvSpPr>
-            <a:spLocks xmlns:a="http://schemas.openxmlformats.org/drawingml/2006/main" noGrp="1"/>
-          </p:cNvSpPr>
-          <p:nvPr/>
-        </p:nvSpPr>
-        <p:spPr>
-          <a:xfrm xmlns:a="http://schemas.openxmlformats.org/drawingml/2006/main">
-            <a:off x="609600" y="3505200"/>
-            <a:ext cx="10972800" cy="381000"/>
-          </a:xfrm>
-          <a:prstGeom xmlns:a="http://schemas.openxmlformats.org/drawingml/2006/main" prst="rect">
-            <a:avLst/>
-          </a:prstGeom>
-          <a:noFill xmlns:a="http://schemas.openxmlformats.org/drawingml/2006/main"/>
-          <a:ln xmlns:a="http://schemas.openxmlformats.org/drawingml/2006/main" w="0">
-            <a:noFill/>
-          </a:ln>
-        </p:spPr>
-        <p:txBody>
-          <a:bodyPr xmlns:a="http://schemas.openxmlformats.org/drawingml/2006/main" anchor="ctr">
-            <a:noAutofit/>
-          </a:bodyPr>
-          <a:lstStyle xmlns:a="http://schemas.openxmlformats.org/drawingml/2006/main"/>
-          <a:p xmlns:a="http://schemas.openxmlformats.org/drawingml/2006/main">
-            <a:pPr algn="l">
-              <a:defRPr sz="2100" b="1">
-                <a:solidFill>
-                  <a:srgbClr val="007C78"/>
-                </a:solidFill>
-                <a:latin typeface="Arial"/>
-                <a:ea typeface="Arial"/>
-                <a:cs typeface="Arial"/>
-              </a:defRPr>
-            </a:pPr>
-            <a:r>
-              <a:rPr sz="2100" b="1">
-                <a:solidFill>
-                  <a:srgbClr val="007C78"/>
-                </a:solidFill>
-                <a:latin typeface="Arial"/>
-                <a:ea typeface="Arial"/>
-                <a:cs typeface="Arial"/>
-              </a:rPr>
-              <a:t>Application entry point</a:t>
-            </a:r>
-          </a:p>
-        </p:txBody>
-      </p:sp>
-      <p:sp>
-        <p:nvSpPr>
-          <p:cNvPr id="11" name="">
-            <a:extLst xmlns:a="http://schemas.openxmlformats.org/drawingml/2006/main">
-              <a:ext uri="{FF2B5EF4-FFF2-40B4-BE49-F238E27FC236}">
-                <a16:creationId xmlns:a16="http://schemas.microsoft.com/office/drawing/2014/main" id="{2F237106-9B1A-4F63-B5BB-527D15108607}"/>
-              </a:ext>
-            </a:extLst>
-          </p:cNvPr>
-          <p:cNvSpPr>
-            <a:spLocks xmlns:a="http://schemas.openxmlformats.org/drawingml/2006/main" noGrp="1"/>
-          </p:cNvSpPr>
-          <p:nvPr/>
-        </p:nvSpPr>
-        <p:spPr>
-          <a:xfrm xmlns:a="http://schemas.openxmlformats.org/drawingml/2006/main">
-            <a:off x="609600" y="4048125"/>
-            <a:ext cx="10972800" cy="1333500"/>
-          </a:xfrm>
-          <a:prstGeom xmlns:a="http://schemas.openxmlformats.org/drawingml/2006/main" prst="rect">
-            <a:avLst/>
-          </a:prstGeom>
-          <a:noFill xmlns:a="http://schemas.openxmlformats.org/drawingml/2006/main"/>
-          <a:ln xmlns:a="http://schemas.openxmlformats.org/drawingml/2006/main" w="0">
-            <a:noFill/>
-          </a:ln>
-        </p:spPr>
-        <p:txBody>
-          <a:bodyPr xmlns:a="http://schemas.openxmlformats.org/drawingml/2006/main" anchor="ctr">
-            <a:noAutofit/>
-          </a:bodyPr>
-          <a:lstStyle xmlns:a="http://schemas.openxmlformats.org/drawingml/2006/main"/>
-          <a:p xmlns:a="http://schemas.openxmlformats.org/drawingml/2006/main">
-            <a:pPr algn="l">
-              <a:defRPr sz="1800" b="0">
-                <a:solidFill>
-                  <a:srgbClr val="16343E"/>
-                </a:solidFill>
-                <a:latin typeface="Consolas"/>
-                <a:ea typeface="Consolas"/>
-                <a:cs typeface="Consolas"/>
-              </a:defRPr>
-            </a:pPr>
-            <a:r>
-              <a:rPr sz="1800" b="0">
-                <a:solidFill>
-                  <a:srgbClr val="16343E"/>
-                </a:solidFill>
-                <a:latin typeface="Consolas"/>
-                <a:ea typeface="Consolas"/>
-                <a:cs typeface="Consolas"/>
-              </a:rPr>
-              <a:t>def predict(self, counts: pd.DataFrame) -&gt; pd.DataFrame:</a:t>
-            </a:r>
-          </a:p>
-          <a:p xmlns:a="http://schemas.openxmlformats.org/drawingml/2006/main">
-            <a:pPr algn="l">
-              <a:defRPr sz="1800" b="0">
-                <a:solidFill>
-                  <a:srgbClr val="16343E"/>
-                </a:solidFill>
-                <a:latin typeface="Consolas"/>
-                <a:ea typeface="Consolas"/>
-                <a:cs typeface="Consolas"/>
-              </a:defRPr>
-            </a:pPr>
-            <a:r>
-              <a:rPr sz="1800" b="0">
-                <a:solidFill>
-                  <a:srgbClr val="16343E"/>
-                </a:solidFill>
-                <a:latin typeface="Consolas"/>
-                <a:ea typeface="Consolas"/>
-                <a:cs typeface="Consolas"/>
-              </a:rPr>
-              <a:t>    """Validate an entire raw batch before returning any specimen results."""</a:t>
-            </a:r>
-          </a:p>
-          <a:p xmlns:a="http://schemas.openxmlformats.org/drawingml/2006/main">
-            <a:pPr algn="l">
-              <a:defRPr sz="1800" b="0">
-                <a:solidFill>
-                  <a:srgbClr val="16343E"/>
-                </a:solidFill>
-                <a:latin typeface="Consolas"/>
-                <a:ea typeface="Consolas"/>
-                <a:cs typeface="Consolas"/>
-              </a:defRPr>
-            </a:pPr>
-            <a:r>
-              <a:rPr sz="1800" b="0">
-                <a:solidFill>
-                  <a:srgbClr val="16343E"/>
-                </a:solidFill>
-                <a:latin typeface="Consolas"/>
-                <a:ea typeface="Consolas"/>
-                <a:cs typeface="Consolas"/>
-              </a:rPr>
-              <a:t>    normalized = normalize_counts(counts, self.schema)</a:t>
-            </a:r>
-          </a:p>
-          <a:p xmlns:a="http://schemas.openxmlformats.org/drawingml/2006/main">
-            <a:pPr algn="l">
-              <a:defRPr sz="1800" b="0">
-                <a:solidFill>
-                  <a:srgbClr val="16343E"/>
-                </a:solidFill>
-                <a:latin typeface="Consolas"/>
-                <a:ea typeface="Consolas"/>
-                <a:cs typeface="Consolas"/>
-              </a:defRPr>
-            </a:pPr>
-            <a:r>
-              <a:rPr sz="1800" b="0">
-                <a:solidFill>
-                  <a:srgbClr val="16343E"/>
-                </a:solidFill>
-                <a:latin typeface="Consolas"/>
-                <a:ea typeface="Consolas"/>
-                <a:cs typeface="Consolas"/>
-              </a:rPr>
-              <a:t>    return self.predict_normalized(normalized)</a:t>
-            </a:r>
-          </a:p>
-        </p:txBody>
-      </p:sp>
-      <p:sp>
-        <p:nvSpPr>
-          <p:cNvPr id="12" name="">
-            <a:extLst xmlns:a="http://schemas.openxmlformats.org/drawingml/2006/main">
-              <a:ext uri="{FF2B5EF4-FFF2-40B4-BE49-F238E27FC236}">
-                <a16:creationId xmlns:a16="http://schemas.microsoft.com/office/drawing/2014/main" id="{4B67BF1F-E4CF-496C-B404-41C3C6E3D3B6}"/>
-              </a:ext>
-            </a:extLst>
-          </p:cNvPr>
-          <p:cNvSpPr>
-            <a:spLocks xmlns:a="http://schemas.openxmlformats.org/drawingml/2006/main" noGrp="1"/>
-          </p:cNvSpPr>
-          <p:nvPr/>
-        </p:nvSpPr>
-        <p:spPr>
-          <a:xfrm xmlns:a="http://schemas.openxmlformats.org/drawingml/2006/main">
-            <a:off x="609600" y="5619750"/>
-            <a:ext cx="10972800" cy="495300"/>
-          </a:xfrm>
-          <a:prstGeom xmlns:a="http://schemas.openxmlformats.org/drawingml/2006/main" prst="rect">
-            <a:avLst/>
-          </a:prstGeom>
-          <a:noFill xmlns:a="http://schemas.openxmlformats.org/drawingml/2006/main"/>
-          <a:ln xmlns:a="http://schemas.openxmlformats.org/drawingml/2006/main" w="0">
-            <a:noFill/>
-          </a:ln>
-        </p:spPr>
-        <p:txBody>
-          <a:bodyPr xmlns:a="http://schemas.openxmlformats.org/drawingml/2006/main" anchor="ctr">
-            <a:noAutofit/>
-          </a:bodyPr>
-          <a:lstStyle xmlns:a="http://schemas.openxmlformats.org/drawingml/2006/main"/>
-          <a:p xmlns:a="http://schemas.openxmlformats.org/drawingml/2006/main">
-            <a:pPr algn="l">
-              <a:defRPr sz="2175" b="0">
-                <a:solidFill>
-                  <a:srgbClr val="16343E"/>
-                </a:solidFill>
-                <a:latin typeface="Arial"/>
-                <a:ea typeface="Arial"/>
-                <a:cs typeface="Arial"/>
-              </a:defRPr>
-            </a:pPr>
-            <a:r>
-              <a:rPr sz="2175" b="0">
-                <a:solidFill>
-                  <a:srgbClr val="16343E"/>
-                </a:solidFill>
-                <a:latin typeface="Arial"/>
-                <a:ea typeface="Arial"/>
-                <a:cs typeface="Arial"/>
-              </a:rPr>
-              <a:t>The web page and command line both use this prediction path.</a:t>
-            </a:r>
-          </a:p>
-        </p:txBody>
-      </p:sp>
-    </p:spTree>
-    <p:extLst>
-      <p:ext uri="{BB962C8B-B14F-4D97-AF65-F5344CB8AC3E}">
-        <p14:creationId xmlns:p14="http://schemas.microsoft.com/office/powerpoint/2010/main" val="2147352040"/>
-      </p:ext>
-    </p:extLst>
-  </p:cSld>
-</p:sld>
-</file>
-
-<file path=ppt/slides/slide16.xml><?xml version="1.0" encoding="utf-8"?>
-<p:sld xmlns:p="http://schemas.openxmlformats.org/presentationml/2006/main">
-  <p:cSld>
-    <p:bg>
-      <p:bgPr>
-        <a:solidFill xmlns:a="http://schemas.openxmlformats.org/drawingml/2006/main">
-          <a:srgbClr val="F7F8F5"/>
-        </a:solidFill>
-      </p:bgPr>
-    </p:bg>
-    <p:spTree>
-      <p:nvGrpSpPr>
-        <p:cNvPr id="1" name=""/>
-        <p:cNvGrpSpPr/>
-        <p:nvPr/>
-      </p:nvGrpSpPr>
-      <p:grpSpPr>
-        <a:xfrm xmlns:a="http://schemas.openxmlformats.org/drawingml/2006/main"/>
-      </p:grpSpPr>
-      <p:sp>
-        <p:nvSpPr>
-          <p:cNvPr id="13" name="">
-            <a:extLst xmlns:a="http://schemas.openxmlformats.org/drawingml/2006/main">
-              <a:ext uri="{FF2B5EF4-FFF2-40B4-BE49-F238E27FC236}">
-                <a16:creationId xmlns:a16="http://schemas.microsoft.com/office/drawing/2014/main" id="{F571348B-5634-4B92-86BE-ECC0051FC272}"/>
-              </a:ext>
-            </a:extLst>
-          </p:cNvPr>
-          <p:cNvSpPr>
-            <a:spLocks xmlns:a="http://schemas.openxmlformats.org/drawingml/2006/main" noGrp="1"/>
-          </p:cNvSpPr>
-          <p:nvPr/>
-        </p:nvSpPr>
-        <p:spPr>
-          <a:xfrm xmlns:a="http://schemas.openxmlformats.org/drawingml/2006/main">
-            <a:off x="609600" y="409575"/>
-            <a:ext cx="10972800" cy="1000125"/>
-          </a:xfrm>
-          <a:prstGeom xmlns:a="http://schemas.openxmlformats.org/drawingml/2006/main" prst="rect">
-            <a:avLst/>
-          </a:prstGeom>
-          <a:noFill xmlns:a="http://schemas.openxmlformats.org/drawingml/2006/main"/>
-          <a:ln xmlns:a="http://schemas.openxmlformats.org/drawingml/2006/main" w="0">
-            <a:noFill/>
-          </a:ln>
-        </p:spPr>
-        <p:txBody>
-          <a:bodyPr xmlns:a="http://schemas.openxmlformats.org/drawingml/2006/main" anchor="ctr">
-            <a:noAutofit/>
-          </a:bodyPr>
-          <a:lstStyle xmlns:a="http://schemas.openxmlformats.org/drawingml/2006/main"/>
-          <a:p xmlns:a="http://schemas.openxmlformats.org/drawingml/2006/main">
-            <a:pPr algn="l">
-              <a:defRPr sz="3450" b="1">
-                <a:solidFill>
-                  <a:srgbClr val="16343E"/>
-                </a:solidFill>
-                <a:latin typeface="Arial"/>
-                <a:ea typeface="Arial"/>
-                <a:cs typeface="Arial"/>
-              </a:defRPr>
-            </a:pPr>
-            <a:r>
-              <a:rPr sz="3450" b="1">
-                <a:solidFill>
-                  <a:srgbClr val="16343E"/>
-                </a:solidFill>
-                <a:latin typeface="Arial"/>
-                <a:ea typeface="Arial"/>
-                <a:cs typeface="Arial"/>
-              </a:rPr>
-              <a:t>An interface other software can call</a:t>
-            </a:r>
-          </a:p>
-        </p:txBody>
-      </p:sp>
-      <p:sp>
-        <p:nvSpPr>
-          <p:cNvPr id="2" name="">
-            <a:extLst xmlns:a="http://schemas.openxmlformats.org/drawingml/2006/main">
-              <a:ext uri="{FF2B5EF4-FFF2-40B4-BE49-F238E27FC236}">
-                <a16:creationId xmlns:a16="http://schemas.microsoft.com/office/drawing/2014/main" id="{AD8C73CF-4C8F-43DD-835A-EEC0AC7C18F6}"/>
-              </a:ext>
-            </a:extLst>
-          </p:cNvPr>
-          <p:cNvSpPr>
-            <a:spLocks xmlns:a="http://schemas.openxmlformats.org/drawingml/2006/main" noGrp="1"/>
-          </p:cNvSpPr>
-          <p:nvPr/>
-        </p:nvSpPr>
-        <p:spPr>
-          <a:xfrm xmlns:a="http://schemas.openxmlformats.org/drawingml/2006/main">
-            <a:off x="609600" y="6257925"/>
-            <a:ext cx="10382250" cy="361950"/>
-          </a:xfrm>
-          <a:prstGeom xmlns:a="http://schemas.openxmlformats.org/drawingml/2006/main" prst="rect">
-            <a:avLst/>
-          </a:prstGeom>
-          <a:noFill xmlns:a="http://schemas.openxmlformats.org/drawingml/2006/main"/>
-          <a:ln xmlns:a="http://schemas.openxmlformats.org/drawingml/2006/main" w="0">
-            <a:noFill/>
-          </a:ln>
-        </p:spPr>
-        <p:txBody>
-          <a:bodyPr xmlns:a="http://schemas.openxmlformats.org/drawingml/2006/main" anchor="ctr">
-            <a:noAutofit/>
-          </a:bodyPr>
-          <a:lstStyle xmlns:a="http://schemas.openxmlformats.org/drawingml/2006/main"/>
-          <a:p xmlns:a="http://schemas.openxmlformats.org/drawingml/2006/main">
-            <a:pPr algn="l">
-              <a:defRPr sz="1350" b="0">
-                <a:solidFill>
-                  <a:srgbClr val="52656B"/>
-                </a:solidFill>
-                <a:latin typeface="Arial"/>
-                <a:ea typeface="Arial"/>
-                <a:cs typeface="Arial"/>
-              </a:defRPr>
-            </a:pPr>
-            <a:r>
-              <a:rPr sz="1350" b="0">
-                <a:solidFill>
-                  <a:srgbClr val="52656B"/>
-                </a:solidFill>
-                <a:latin typeface="Arial"/>
-                <a:ea typeface="Arial"/>
-                <a:cs typeface="Arial"/>
-              </a:rPr>
-              <a:t>Source: implemented POST /predict contract and public demonstration response</a:t>
-            </a:r>
-          </a:p>
-        </p:txBody>
-      </p:sp>
-      <p:sp>
-        <p:nvSpPr>
-          <p:cNvPr id="3" name="">
-            <a:extLst xmlns:a="http://schemas.openxmlformats.org/drawingml/2006/main">
-              <a:ext uri="{FF2B5EF4-FFF2-40B4-BE49-F238E27FC236}">
-                <a16:creationId xmlns:a16="http://schemas.microsoft.com/office/drawing/2014/main" id="{4BD25B97-C615-42DA-AFA2-8112A1F7B609}"/>
-              </a:ext>
-            </a:extLst>
-          </p:cNvPr>
-          <p:cNvSpPr>
-            <a:spLocks xmlns:a="http://schemas.openxmlformats.org/drawingml/2006/main" noGrp="1"/>
-          </p:cNvSpPr>
-          <p:nvPr/>
-        </p:nvSpPr>
-        <p:spPr>
-          <a:xfrm xmlns:a="http://schemas.openxmlformats.org/drawingml/2006/main">
-            <a:off x="11115675" y="6305550"/>
-            <a:ext cx="457200" cy="285750"/>
-          </a:xfrm>
-          <a:prstGeom xmlns:a="http://schemas.openxmlformats.org/drawingml/2006/main" prst="rect">
-            <a:avLst/>
-          </a:prstGeom>
-          <a:noFill xmlns:a="http://schemas.openxmlformats.org/drawingml/2006/main"/>
-          <a:ln xmlns:a="http://schemas.openxmlformats.org/drawingml/2006/main" w="0">
-            <a:noFill/>
-          </a:ln>
-        </p:spPr>
-        <p:txBody>
-          <a:bodyPr xmlns:a="http://schemas.openxmlformats.org/drawingml/2006/main" anchor="ctr">
-            <a:noAutofit/>
-          </a:bodyPr>
-          <a:lstStyle xmlns:a="http://schemas.openxmlformats.org/drawingml/2006/main"/>
-          <a:p xmlns:a="http://schemas.openxmlformats.org/drawingml/2006/main">
-            <a:pPr algn="r">
-              <a:defRPr sz="1350" b="0">
-                <a:solidFill>
-                  <a:srgbClr val="52656B"/>
-                </a:solidFill>
-                <a:latin typeface="Arial"/>
-                <a:ea typeface="Arial"/>
-                <a:cs typeface="Arial"/>
-              </a:defRPr>
-            </a:pPr>
-            <a:r>
-              <a:rPr sz="1350" b="0">
-                <a:solidFill>
-                  <a:srgbClr val="52656B"/>
-                </a:solidFill>
-                <a:latin typeface="Arial"/>
-                <a:ea typeface="Arial"/>
-                <a:cs typeface="Arial"/>
-              </a:rPr>
-              <a:t>16</a:t>
-            </a:r>
-          </a:p>
-        </p:txBody>
-      </p:sp>
-      <p:sp>
-        <p:nvSpPr>
-          <p:cNvPr id="4" name="">
-            <a:extLst xmlns:a="http://schemas.openxmlformats.org/drawingml/2006/main">
-              <a:ext uri="{FF2B5EF4-FFF2-40B4-BE49-F238E27FC236}">
-                <a16:creationId xmlns:a16="http://schemas.microsoft.com/office/drawing/2014/main" id="{12304A59-9880-4B55-AD64-51ED67817C5C}"/>
-              </a:ext>
-            </a:extLst>
-          </p:cNvPr>
-          <p:cNvSpPr>
-            <a:spLocks xmlns:a="http://schemas.openxmlformats.org/drawingml/2006/main" noGrp="1"/>
-          </p:cNvSpPr>
-          <p:nvPr/>
-        </p:nvSpPr>
-        <p:spPr>
-          <a:xfrm xmlns:a="http://schemas.openxmlformats.org/drawingml/2006/main">
-            <a:off x="609600" y="1533525"/>
-            <a:ext cx="10972800" cy="638175"/>
-          </a:xfrm>
-          <a:prstGeom xmlns:a="http://schemas.openxmlformats.org/drawingml/2006/main" prst="rect">
-            <a:avLst/>
-          </a:prstGeom>
-          <a:noFill xmlns:a="http://schemas.openxmlformats.org/drawingml/2006/main"/>
-          <a:ln xmlns:a="http://schemas.openxmlformats.org/drawingml/2006/main" w="0">
-            <a:noFill/>
-          </a:ln>
-        </p:spPr>
-        <p:txBody>
-          <a:bodyPr xmlns:a="http://schemas.openxmlformats.org/drawingml/2006/main" anchor="ctr">
-            <a:noAutofit/>
-          </a:bodyPr>
-          <a:lstStyle xmlns:a="http://schemas.openxmlformats.org/drawingml/2006/main"/>
-          <a:p xmlns:a="http://schemas.openxmlformats.org/drawingml/2006/main">
-            <a:pPr algn="l">
-              <a:defRPr sz="2400" b="0">
-                <a:solidFill>
-                  <a:srgbClr val="16343E"/>
-                </a:solidFill>
-                <a:latin typeface="Arial"/>
-                <a:ea typeface="Arial"/>
-                <a:cs typeface="Arial"/>
-              </a:defRPr>
-            </a:pPr>
-            <a:r>
-              <a:rPr sz="2400" b="0">
-                <a:solidFill>
-                  <a:srgbClr val="16343E"/>
-                </a:solidFill>
-                <a:latin typeface="Arial"/>
-                <a:ea typeface="Arial"/>
-                <a:cs typeface="Arial"/>
-              </a:rPr>
-              <a:t>API: a documented way for software to send data and receive results.</a:t>
-            </a:r>
-          </a:p>
-        </p:txBody>
-      </p:sp>
-      <p:sp>
-        <p:nvSpPr>
-          <p:cNvPr id="5" name="">
-            <a:extLst xmlns:a="http://schemas.openxmlformats.org/drawingml/2006/main">
-              <a:ext uri="{FF2B5EF4-FFF2-40B4-BE49-F238E27FC236}">
-                <a16:creationId xmlns:a16="http://schemas.microsoft.com/office/drawing/2014/main" id="{E4867F57-793E-469F-BA13-28BC4539E9E5}"/>
-              </a:ext>
-            </a:extLst>
-          </p:cNvPr>
-          <p:cNvSpPr>
-            <a:spLocks xmlns:a="http://schemas.openxmlformats.org/drawingml/2006/main" noGrp="1"/>
-          </p:cNvSpPr>
-          <p:nvPr/>
-        </p:nvSpPr>
-        <p:spPr>
-          <a:xfrm xmlns:a="http://schemas.openxmlformats.org/drawingml/2006/main">
-            <a:off x="609600" y="2524125"/>
-            <a:ext cx="4171950" cy="1066800"/>
-          </a:xfrm>
-          <a:prstGeom xmlns:a="http://schemas.openxmlformats.org/drawingml/2006/main" prst="rect">
-            <a:avLst/>
-          </a:prstGeom>
-          <a:solidFill xmlns:a="http://schemas.openxmlformats.org/drawingml/2006/main">
-            <a:srgbClr val="E4EFEB"/>
-          </a:solidFill>
-          <a:ln xmlns:a="http://schemas.openxmlformats.org/drawingml/2006/main" w="9525">
-            <a:solidFill>
-              <a:srgbClr val="CEDBD7"/>
-            </a:solidFill>
-          </a:ln>
-        </p:spPr>
-        <p:txBody>
-          <a:bodyPr xmlns:a="http://schemas.openxmlformats.org/drawingml/2006/main" anchor="ctr">
-            <a:noAutofit/>
-          </a:bodyPr>
-          <a:lstStyle xmlns:a="http://schemas.openxmlformats.org/drawingml/2006/main"/>
-          <a:p xmlns:a="http://schemas.openxmlformats.org/drawingml/2006/main">
-            <a:pPr algn="ctr">
-              <a:defRPr sz="2175">
-                <a:solidFill>
-                  <a:srgbClr val="16343E"/>
-                </a:solidFill>
-                <a:latin typeface="Arial"/>
-                <a:ea typeface="Arial"/>
-                <a:cs typeface="Arial"/>
-              </a:defRPr>
-            </a:pPr>
-            <a:r>
-              <a:rPr sz="2175">
-                <a:solidFill>
-                  <a:srgbClr val="16343E"/>
-                </a:solidFill>
-                <a:latin typeface="Arial"/>
-                <a:ea typeface="Arial"/>
-                <a:cs typeface="Arial"/>
-              </a:rPr>
-              <a:t>CSV</a:t>
-            </a:r>
-          </a:p>
-          <a:p xmlns:a="http://schemas.openxmlformats.org/drawingml/2006/main">
-            <a:pPr algn="ctr">
-              <a:defRPr sz="2175">
-                <a:solidFill>
-                  <a:srgbClr val="16343E"/>
-                </a:solidFill>
-                <a:latin typeface="Arial"/>
-                <a:ea typeface="Arial"/>
-                <a:cs typeface="Arial"/>
-              </a:defRPr>
-            </a:pPr>
-            <a:r>
-              <a:rPr sz="2175">
-                <a:solidFill>
-                  <a:srgbClr val="16343E"/>
-                </a:solidFill>
-                <a:latin typeface="Arial"/>
-                <a:ea typeface="Arial"/>
-                <a:cs typeface="Arial"/>
-              </a:rPr>
-              <a:t>Specimen ID + 770 counts</a:t>
-            </a:r>
-          </a:p>
-        </p:txBody>
-      </p:sp>
-      <p:sp>
-        <p:nvSpPr>
-          <p:cNvPr id="6" name="">
-            <a:extLst xmlns:a="http://schemas.openxmlformats.org/drawingml/2006/main">
-              <a:ext uri="{FF2B5EF4-FFF2-40B4-BE49-F238E27FC236}">
-                <a16:creationId xmlns:a16="http://schemas.microsoft.com/office/drawing/2014/main" id="{E5E76F25-CA7F-47B9-B0E1-FD30A42ADB91}"/>
-              </a:ext>
-            </a:extLst>
-          </p:cNvPr>
-          <p:cNvSpPr>
-            <a:spLocks xmlns:a="http://schemas.openxmlformats.org/drawingml/2006/main" noGrp="1"/>
-          </p:cNvSpPr>
-          <p:nvPr/>
-        </p:nvSpPr>
-        <p:spPr>
-          <a:xfrm xmlns:a="http://schemas.openxmlformats.org/drawingml/2006/main">
-            <a:off x="5695950" y="2638425"/>
-            <a:ext cx="2590800" cy="838200"/>
-          </a:xfrm>
-          <a:prstGeom xmlns:a="http://schemas.openxmlformats.org/drawingml/2006/main" prst="rect">
-            <a:avLst/>
-          </a:prstGeom>
-          <a:solidFill xmlns:a="http://schemas.openxmlformats.org/drawingml/2006/main">
-            <a:srgbClr val="E4EFEB"/>
-          </a:solidFill>
-          <a:ln xmlns:a="http://schemas.openxmlformats.org/drawingml/2006/main" w="9525">
-            <a:solidFill>
-              <a:srgbClr val="CEDBD7"/>
-            </a:solidFill>
-          </a:ln>
-        </p:spPr>
-        <p:txBody>
-          <a:bodyPr xmlns:a="http://schemas.openxmlformats.org/drawingml/2006/main" anchor="ctr">
-            <a:noAutofit/>
-          </a:bodyPr>
-          <a:lstStyle xmlns:a="http://schemas.openxmlformats.org/drawingml/2006/main"/>
-          <a:p xmlns:a="http://schemas.openxmlformats.org/drawingml/2006/main">
-            <a:pPr algn="ctr">
-              <a:defRPr sz="2175">
-                <a:solidFill>
-                  <a:srgbClr val="16343E"/>
-                </a:solidFill>
-                <a:latin typeface="Arial"/>
-                <a:ea typeface="Arial"/>
-                <a:cs typeface="Arial"/>
-              </a:defRPr>
-            </a:pPr>
-            <a:r>
-              <a:rPr sz="2175">
-                <a:solidFill>
-                  <a:srgbClr val="16343E"/>
-                </a:solidFill>
-                <a:latin typeface="Arial"/>
-                <a:ea typeface="Arial"/>
-                <a:cs typeface="Arial"/>
-              </a:rPr>
-              <a:t>POST /predict</a:t>
-            </a:r>
-          </a:p>
-        </p:txBody>
-      </p:sp>
-      <p:sp>
-        <p:nvSpPr>
-          <p:cNvPr id="7" name="">
-            <a:extLst xmlns:a="http://schemas.openxmlformats.org/drawingml/2006/main">
-              <a:ext uri="{FF2B5EF4-FFF2-40B4-BE49-F238E27FC236}">
-                <a16:creationId xmlns:a16="http://schemas.microsoft.com/office/drawing/2014/main" id="{F5407F16-F1AE-48B6-B79E-812121A83599}"/>
-              </a:ext>
-            </a:extLst>
-          </p:cNvPr>
-          <p:cNvSpPr>
-            <a:spLocks xmlns:a="http://schemas.openxmlformats.org/drawingml/2006/main" noGrp="1"/>
-          </p:cNvSpPr>
-          <p:nvPr/>
-        </p:nvSpPr>
-        <p:spPr>
-          <a:xfrm xmlns:a="http://schemas.openxmlformats.org/drawingml/2006/main">
-            <a:off x="9201150" y="2524125"/>
-            <a:ext cx="2381250" cy="1066800"/>
-          </a:xfrm>
-          <a:prstGeom xmlns:a="http://schemas.openxmlformats.org/drawingml/2006/main" prst="rect">
-            <a:avLst/>
-          </a:prstGeom>
-          <a:solidFill xmlns:a="http://schemas.openxmlformats.org/drawingml/2006/main">
-            <a:srgbClr val="E4EFEB"/>
-          </a:solidFill>
-          <a:ln xmlns:a="http://schemas.openxmlformats.org/drawingml/2006/main" w="9525">
-            <a:solidFill>
-              <a:srgbClr val="CEDBD7"/>
-            </a:solidFill>
-          </a:ln>
-        </p:spPr>
-        <p:txBody>
-          <a:bodyPr xmlns:a="http://schemas.openxmlformats.org/drawingml/2006/main" anchor="ctr">
-            <a:noAutofit/>
-          </a:bodyPr>
-          <a:lstStyle xmlns:a="http://schemas.openxmlformats.org/drawingml/2006/main"/>
-          <a:p xmlns:a="http://schemas.openxmlformats.org/drawingml/2006/main">
-            <a:pPr algn="ctr">
-              <a:defRPr sz="2025">
-                <a:solidFill>
-                  <a:srgbClr val="16343E"/>
-                </a:solidFill>
-                <a:latin typeface="Arial"/>
-                <a:ea typeface="Arial"/>
-                <a:cs typeface="Arial"/>
-              </a:defRPr>
-            </a:pPr>
-            <a:r>
-              <a:rPr sz="2025">
-                <a:solidFill>
-                  <a:srgbClr val="16343E"/>
-                </a:solidFill>
-                <a:latin typeface="Arial"/>
-                <a:ea typeface="Arial"/>
-                <a:cs typeface="Arial"/>
-              </a:rPr>
-              <a:t>JSON</a:t>
-            </a:r>
-          </a:p>
-          <a:p xmlns:a="http://schemas.openxmlformats.org/drawingml/2006/main">
-            <a:pPr algn="ctr">
-              <a:defRPr sz="2025">
-                <a:solidFill>
-                  <a:srgbClr val="16343E"/>
-                </a:solidFill>
-                <a:latin typeface="Arial"/>
-                <a:ea typeface="Arial"/>
-                <a:cs typeface="Arial"/>
-              </a:defRPr>
-            </a:pPr>
-            <a:r>
-              <a:rPr sz="2025">
-                <a:solidFill>
-                  <a:srgbClr val="16343E"/>
-                </a:solidFill>
-                <a:latin typeface="Arial"/>
-                <a:ea typeface="Arial"/>
-                <a:cs typeface="Arial"/>
-              </a:rPr>
-              <a:t>Prediction results</a:t>
-            </a:r>
-          </a:p>
-        </p:txBody>
-      </p:sp>
-      <p:cxnSp>
-        <p:nvCxnSpPr>
-          <p:cNvPr id="20" name=""/>
-          <p:cNvCxnSpPr>
-            <a:stCxn xmlns:a="http://schemas.openxmlformats.org/drawingml/2006/main" id="5" idx="3"/>
-            <a:endCxn xmlns:a="http://schemas.openxmlformats.org/drawingml/2006/main" id="6" idx="1"/>
-          </p:cNvCxnSpPr>
-          <p:nvPr/>
-        </p:nvCxnSpPr>
-        <p:spPr>
-          <a:xfrm xmlns:a="http://schemas.openxmlformats.org/drawingml/2006/main">
-            <a:off x="4781550" y="3057525"/>
-            <a:ext cx="914400" cy="0"/>
-          </a:xfrm>
-          <a:prstGeom xmlns:a="http://schemas.openxmlformats.org/drawingml/2006/main" prst="straightConnector1">
-            <a:avLst/>
-          </a:prstGeom>
-          <a:ln xmlns:a="http://schemas.openxmlformats.org/drawingml/2006/main" w="23813">
-            <a:solidFill>
-              <a:srgbClr val="52656B"/>
-            </a:solidFill>
-            <a:tailEnd type="arrow" w="med" len="med"/>
-          </a:ln>
-        </p:spPr>
-      </p:cxnSp>
-      <p:cxnSp>
-        <p:nvCxnSpPr>
-          <p:cNvPr id="21" name=""/>
-          <p:cNvCxnSpPr>
-            <a:stCxn xmlns:a="http://schemas.openxmlformats.org/drawingml/2006/main" id="6" idx="3"/>
-            <a:endCxn xmlns:a="http://schemas.openxmlformats.org/drawingml/2006/main" id="7" idx="1"/>
-          </p:cNvCxnSpPr>
-          <p:nvPr/>
-        </p:nvCxnSpPr>
-        <p:spPr>
-          <a:xfrm xmlns:a="http://schemas.openxmlformats.org/drawingml/2006/main">
-            <a:off x="8286750" y="3057525"/>
-            <a:ext cx="914400" cy="0"/>
-          </a:xfrm>
-          <a:prstGeom xmlns:a="http://schemas.openxmlformats.org/drawingml/2006/main" prst="straightConnector1">
-            <a:avLst/>
-          </a:prstGeom>
-          <a:ln xmlns:a="http://schemas.openxmlformats.org/drawingml/2006/main" w="23813">
-            <a:solidFill>
-              <a:srgbClr val="52656B"/>
-            </a:solidFill>
-            <a:tailEnd type="arrow" w="med" len="med"/>
-          </a:ln>
-        </p:spPr>
-      </p:cxnSp>
-      <p:sp>
-        <p:nvSpPr>
-          <p:cNvPr id="10" name="">
-            <a:extLst xmlns:a="http://schemas.openxmlformats.org/drawingml/2006/main">
-              <a:ext uri="{FF2B5EF4-FFF2-40B4-BE49-F238E27FC236}">
-                <a16:creationId xmlns:a16="http://schemas.microsoft.com/office/drawing/2014/main" id="{A3ACADC1-727B-4BED-9813-2AB09DA64FD9}"/>
-              </a:ext>
-            </a:extLst>
-          </p:cNvPr>
-          <p:cNvSpPr>
-            <a:spLocks xmlns:a="http://schemas.openxmlformats.org/drawingml/2006/main" noGrp="1"/>
-          </p:cNvSpPr>
-          <p:nvPr/>
-        </p:nvSpPr>
-        <p:spPr>
-          <a:xfrm xmlns:a="http://schemas.openxmlformats.org/drawingml/2006/main">
-            <a:off x="609600" y="4010025"/>
-            <a:ext cx="10972800" cy="419100"/>
-          </a:xfrm>
-          <a:prstGeom xmlns:a="http://schemas.openxmlformats.org/drawingml/2006/main" prst="rect">
-            <a:avLst/>
-          </a:prstGeom>
-          <a:noFill xmlns:a="http://schemas.openxmlformats.org/drawingml/2006/main"/>
-          <a:ln xmlns:a="http://schemas.openxmlformats.org/drawingml/2006/main" w="0">
-            <a:noFill/>
-          </a:ln>
-        </p:spPr>
-        <p:txBody>
-          <a:bodyPr xmlns:a="http://schemas.openxmlformats.org/drawingml/2006/main" anchor="ctr">
-            <a:noAutofit/>
-          </a:bodyPr>
-          <a:lstStyle xmlns:a="http://schemas.openxmlformats.org/drawingml/2006/main"/>
-          <a:p xmlns:a="http://schemas.openxmlformats.org/drawingml/2006/main">
-            <a:pPr algn="l">
-              <a:defRPr sz="2325" b="1">
-                <a:solidFill>
-                  <a:srgbClr val="16343E"/>
-                </a:solidFill>
-                <a:latin typeface="Arial"/>
-                <a:ea typeface="Arial"/>
-                <a:cs typeface="Arial"/>
-              </a:defRPr>
-            </a:pPr>
-            <a:r>
-              <a:rPr sz="2325" b="1">
-                <a:solidFill>
-                  <a:srgbClr val="16343E"/>
-                </a:solidFill>
-                <a:latin typeface="Arial"/>
-                <a:ea typeface="Arial"/>
-                <a:cs typeface="Arial"/>
-              </a:rPr>
-              <a:t>Each result identifies the calculation</a:t>
-            </a:r>
-          </a:p>
-        </p:txBody>
-      </p:sp>
-      <p:graphicFrame>
-        <p:nvGraphicFramePr>
-          <p:cNvPr id="23" name=""/>
-          <p:cNvGraphicFramePr/>
-          <p:nvPr/>
-        </p:nvGraphicFramePr>
-        <p:xfrm>
-          <a:off xmlns:a="http://schemas.openxmlformats.org/drawingml/2006/main" x="609600" y="4638675"/>
-          <a:ext xmlns:a="http://schemas.openxmlformats.org/drawingml/2006/main" cx="10972800" cy="1057275"/>
-        </p:xfrm>
-        <a:graphic xmlns:a="http://schemas.openxmlformats.org/drawingml/2006/main">
-          <a:graphicData uri="http://schemas.openxmlformats.org/drawingml/2006/table">
-            <a:tbl>
-              <a:tblPr/>
-              <a:tblGrid>
-                <a:gridCol w="3543300"/>
-                <a:gridCol w="2381250"/>
-                <a:gridCol w="2667000"/>
-                <a:gridCol w="2381250"/>
-              </a:tblGrid>
-              <a:tr h="523875">
-                <a:tc>
-                  <a:txBody>
-                    <a:bodyPr>
-                      <a:noAutofit/>
-                    </a:bodyPr>
-                    <a:lstStyle/>
-                    <a:p>
-                      <a:r>
-                        <a:rPr sz="2025" b="1">
-                          <a:solidFill>
-                            <a:srgbClr val="FFFFFF"/>
-                          </a:solidFill>
-                          <a:latin typeface="Arial"/>
-                          <a:ea typeface="Arial"/>
-                          <a:cs typeface="Arial"/>
-                        </a:rPr>
-                        <a:t>Specimen</a:t>
-                      </a:r>
-                    </a:p>
-                  </a:txBody>
-                  <a:tcPr marL="171450" marR="142875" marT="66675" marB="66675" anchor="ctr">
-                    <a:solidFill>
-                      <a:srgbClr val="16343E"/>
-                    </a:solidFill>
-                  </a:tcPr>
-                </a:tc>
-                <a:tc>
-                  <a:txBody>
-                    <a:bodyPr>
-                      <a:noAutofit/>
-                    </a:bodyPr>
-                    <a:lstStyle/>
-                    <a:p>
-                      <a:r>
-                        <a:rPr sz="2025" b="1">
-                          <a:solidFill>
-                            <a:srgbClr val="FFFFFF"/>
-                          </a:solidFill>
-                          <a:latin typeface="Arial"/>
-                          <a:ea typeface="Arial"/>
-                          <a:cs typeface="Arial"/>
-                        </a:rPr>
-                        <a:t>Score</a:t>
-                      </a:r>
-                    </a:p>
-                  </a:txBody>
-                  <a:tcPr marL="171450" marR="142875" marT="66675" marB="66675" anchor="ctr">
-                    <a:solidFill>
-                      <a:srgbClr val="16343E"/>
-                    </a:solidFill>
-                  </a:tcPr>
-                </a:tc>
-                <a:tc>
-                  <a:txBody>
-                    <a:bodyPr>
-                      <a:noAutofit/>
-                    </a:bodyPr>
-                    <a:lstStyle/>
-                    <a:p>
-                      <a:r>
-                        <a:rPr sz="2025" b="1">
-                          <a:solidFill>
-                            <a:srgbClr val="FFFFFF"/>
-                          </a:solidFill>
-                          <a:latin typeface="Arial"/>
-                          <a:ea typeface="Arial"/>
-                          <a:cs typeface="Arial"/>
-                        </a:rPr>
-                        <a:t>Threshold</a:t>
-                      </a:r>
-                    </a:p>
-                  </a:txBody>
-                  <a:tcPr marL="171450" marR="142875" marT="66675" marB="66675" anchor="ctr">
-                    <a:solidFill>
-                      <a:srgbClr val="16343E"/>
-                    </a:solidFill>
-                  </a:tcPr>
-                </a:tc>
-                <a:tc>
-                  <a:txBody>
-                    <a:bodyPr>
-                      <a:noAutofit/>
-                    </a:bodyPr>
-                    <a:lstStyle/>
-                    <a:p>
-                      <a:r>
-                        <a:rPr sz="2025" b="1">
-                          <a:solidFill>
-                            <a:srgbClr val="FFFFFF"/>
-                          </a:solidFill>
-                          <a:latin typeface="Arial"/>
-                          <a:ea typeface="Arial"/>
-                          <a:cs typeface="Arial"/>
-                        </a:rPr>
-                        <a:t>Flag</a:t>
-                      </a:r>
-                    </a:p>
-                  </a:txBody>
-                  <a:tcPr marL="171450" marR="142875" marT="66675" marB="66675" anchor="ctr">
-                    <a:solidFill>
-                      <a:srgbClr val="16343E"/>
-                    </a:solidFill>
-                  </a:tcPr>
-                </a:tc>
-              </a:tr>
-              <a:tr h="533400">
-                <a:tc>
-                  <a:txBody>
-                    <a:bodyPr>
-                      <a:noAutofit/>
-                    </a:bodyPr>
-                    <a:lstStyle/>
-                    <a:p>
-                      <a:r>
-                        <a:rPr sz="2025" b="0">
-                          <a:solidFill>
-                            <a:srgbClr val="16343E"/>
-                          </a:solidFill>
-                          <a:latin typeface="Arial"/>
-                          <a:ea typeface="Arial"/>
-                          <a:cs typeface="Arial"/>
-                        </a:rPr>
-                        <a:t>GSM6510425</a:t>
-                      </a:r>
-                    </a:p>
-                  </a:txBody>
-                  <a:tcPr marL="171450" marR="142875" marT="66675" marB="66675" anchor="ctr">
-                    <a:solidFill>
-                      <a:srgbClr val="FFFFFF"/>
-                    </a:solidFill>
-                  </a:tcPr>
-                </a:tc>
-                <a:tc>
-                  <a:txBody>
-                    <a:bodyPr>
-                      <a:noAutofit/>
-                    </a:bodyPr>
-                    <a:lstStyle/>
-                    <a:p>
-                      <a:r>
-                        <a:rPr sz="2025" b="0">
-                          <a:solidFill>
-                            <a:srgbClr val="16343E"/>
-                          </a:solidFill>
-                          <a:latin typeface="Arial"/>
-                          <a:ea typeface="Arial"/>
-                          <a:cs typeface="Arial"/>
-                        </a:rPr>
-                        <a:t>0.274934</a:t>
-                      </a:r>
-                    </a:p>
-                  </a:txBody>
-                  <a:tcPr marL="171450" marR="142875" marT="66675" marB="66675" anchor="ctr">
-                    <a:solidFill>
-                      <a:srgbClr val="FFFFFF"/>
-                    </a:solidFill>
-                  </a:tcPr>
-                </a:tc>
-                <a:tc>
-                  <a:txBody>
-                    <a:bodyPr>
-                      <a:noAutofit/>
-                    </a:bodyPr>
-                    <a:lstStyle/>
-                    <a:p>
-                      <a:r>
-                        <a:rPr sz="2025" b="0">
-                          <a:solidFill>
-                            <a:srgbClr val="16343E"/>
-                          </a:solidFill>
-                          <a:latin typeface="Arial"/>
-                          <a:ea typeface="Arial"/>
-                          <a:cs typeface="Arial"/>
-                        </a:rPr>
-                        <a:t>0.876588</a:t>
-                      </a:r>
-                    </a:p>
-                  </a:txBody>
-                  <a:tcPr marL="171450" marR="142875" marT="66675" marB="66675" anchor="ctr">
-                    <a:solidFill>
-                      <a:srgbClr val="FFFFFF"/>
-                    </a:solidFill>
-                  </a:tcPr>
-                </a:tc>
-                <a:tc>
-                  <a:txBody>
-                    <a:bodyPr>
-                      <a:noAutofit/>
-                    </a:bodyPr>
-                    <a:lstStyle/>
-                    <a:p>
-                      <a:r>
-                        <a:rPr sz="2025" b="0">
-                          <a:solidFill>
-                            <a:srgbClr val="16343E"/>
-                          </a:solidFill>
-                          <a:latin typeface="Arial"/>
-                          <a:ea typeface="Arial"/>
-                          <a:cs typeface="Arial"/>
-                        </a:rPr>
-                        <a:t>False</a:t>
-                      </a:r>
-                    </a:p>
-                  </a:txBody>
-                  <a:tcPr marL="171450" marR="142875" marT="66675" marB="66675" anchor="ctr">
-                    <a:solidFill>
-                      <a:srgbClr val="FFFFFF"/>
-                    </a:solidFill>
-                  </a:tcPr>
-                </a:tc>
-              </a:tr>
-            </a:tbl>
-          </a:graphicData>
-        </a:graphic>
-      </p:graphicFrame>
-      <p:sp>
-        <p:nvSpPr>
-          <p:cNvPr id="12" name="">
-            <a:extLst xmlns:a="http://schemas.openxmlformats.org/drawingml/2006/main">
-              <a:ext uri="{FF2B5EF4-FFF2-40B4-BE49-F238E27FC236}">
-                <a16:creationId xmlns:a16="http://schemas.microsoft.com/office/drawing/2014/main" id="{3ECDC01B-913E-4010-B155-CC7A1166D028}"/>
-              </a:ext>
-            </a:extLst>
-          </p:cNvPr>
-          <p:cNvSpPr>
-            <a:spLocks xmlns:a="http://schemas.openxmlformats.org/drawingml/2006/main" noGrp="1"/>
-          </p:cNvSpPr>
-          <p:nvPr/>
-        </p:nvSpPr>
-        <p:spPr>
-          <a:xfrm xmlns:a="http://schemas.openxmlformats.org/drawingml/2006/main">
-            <a:off x="609600" y="5848350"/>
-            <a:ext cx="10972800" cy="314325"/>
-          </a:xfrm>
-          <a:prstGeom xmlns:a="http://schemas.openxmlformats.org/drawingml/2006/main" prst="rect">
-            <a:avLst/>
-          </a:prstGeom>
-          <a:noFill xmlns:a="http://schemas.openxmlformats.org/drawingml/2006/main"/>
-          <a:ln xmlns:a="http://schemas.openxmlformats.org/drawingml/2006/main" w="0">
-            <a:noFill/>
-          </a:ln>
-        </p:spPr>
-        <p:txBody>
-          <a:bodyPr xmlns:a="http://schemas.openxmlformats.org/drawingml/2006/main" anchor="ctr">
-            <a:noAutofit/>
-          </a:bodyPr>
-          <a:lstStyle xmlns:a="http://schemas.openxmlformats.org/drawingml/2006/main"/>
-          <a:p xmlns:a="http://schemas.openxmlformats.org/drawingml/2006/main">
-            <a:pPr algn="l">
-              <a:defRPr sz="2025" b="0">
-                <a:solidFill>
-                  <a:srgbClr val="16343E"/>
-                </a:solidFill>
-                <a:latin typeface="Arial"/>
-                <a:ea typeface="Arial"/>
-                <a:cs typeface="Arial"/>
-              </a:defRPr>
-            </a:pPr>
-            <a:r>
-              <a:rPr sz="2025" b="0">
-                <a:solidFill>
-                  <a:srgbClr val="16343E"/>
-                </a:solidFill>
-                <a:latin typeface="Arial"/>
-                <a:ea typeface="Arial"/>
-                <a:cs typeface="Arial"/>
-              </a:rPr>
-              <a:t>Each result includes versions for the model and expected input format.</a:t>
-            </a:r>
-          </a:p>
-        </p:txBody>
-      </p:sp>
-    </p:spTree>
-    <p:extLst>
-      <p:ext uri="{BB962C8B-B14F-4D97-AF65-F5344CB8AC3E}">
-        <p14:creationId xmlns:p14="http://schemas.microsoft.com/office/powerpoint/2010/main" val="1386148020"/>
-      </p:ext>
-    </p:extLst>
-  </p:cSld>
-</p:sld>
-</file>
-
-<file path=ppt/slides/slide17.xml><?xml version="1.0" encoding="utf-8"?>
-<p:sld xmlns:p="http://schemas.openxmlformats.org/presentationml/2006/main">
-  <p:cSld>
-    <p:bg>
-      <p:bgPr>
-        <a:solidFill xmlns:a="http://schemas.openxmlformats.org/drawingml/2006/main">
-          <a:srgbClr val="F7F8F5"/>
-        </a:solidFill>
-      </p:bgPr>
-    </p:bg>
-    <p:spTree>
-      <p:nvGrpSpPr>
-        <p:cNvPr id="1" name=""/>
-        <p:cNvGrpSpPr/>
-        <p:nvPr/>
-      </p:nvGrpSpPr>
-      <p:grpSpPr>
-        <a:xfrm xmlns:a="http://schemas.openxmlformats.org/drawingml/2006/main"/>
-      </p:grpSpPr>
-      <p:sp>
-        <p:nvSpPr>
-          <p:cNvPr id="9" name="">
-            <a:extLst xmlns:a="http://schemas.openxmlformats.org/drawingml/2006/main">
-              <a:ext uri="{FF2B5EF4-FFF2-40B4-BE49-F238E27FC236}">
-                <a16:creationId xmlns:a16="http://schemas.microsoft.com/office/drawing/2014/main" id="{0286CB63-137E-4EFA-9B50-3C3482B582CD}"/>
-              </a:ext>
-            </a:extLst>
-          </p:cNvPr>
-          <p:cNvSpPr>
-            <a:spLocks xmlns:a="http://schemas.openxmlformats.org/drawingml/2006/main" noGrp="1"/>
-          </p:cNvSpPr>
-          <p:nvPr/>
-        </p:nvSpPr>
-        <p:spPr>
-          <a:xfrm xmlns:a="http://schemas.openxmlformats.org/drawingml/2006/main">
-            <a:off x="609600" y="409575"/>
-            <a:ext cx="10972800" cy="1000125"/>
-          </a:xfrm>
-          <a:prstGeom xmlns:a="http://schemas.openxmlformats.org/drawingml/2006/main" prst="rect">
-            <a:avLst/>
-          </a:prstGeom>
-          <a:noFill xmlns:a="http://schemas.openxmlformats.org/drawingml/2006/main"/>
-          <a:ln xmlns:a="http://schemas.openxmlformats.org/drawingml/2006/main" w="0">
-            <a:noFill/>
-          </a:ln>
-        </p:spPr>
-        <p:txBody>
-          <a:bodyPr xmlns:a="http://schemas.openxmlformats.org/drawingml/2006/main" anchor="ctr">
-            <a:noAutofit/>
-          </a:bodyPr>
-          <a:lstStyle xmlns:a="http://schemas.openxmlformats.org/drawingml/2006/main"/>
-          <a:p xmlns:a="http://schemas.openxmlformats.org/drawingml/2006/main">
-            <a:pPr algn="l">
-              <a:defRPr sz="3450" b="1">
-                <a:solidFill>
-                  <a:srgbClr val="16343E"/>
-                </a:solidFill>
-                <a:latin typeface="Arial"/>
-                <a:ea typeface="Arial"/>
-                <a:cs typeface="Arial"/>
-              </a:defRPr>
-            </a:pPr>
-            <a:r>
-              <a:rPr sz="3450" b="1">
-                <a:solidFill>
-                  <a:srgbClr val="16343E"/>
-                </a:solidFill>
-                <a:latin typeface="Arial"/>
-                <a:ea typeface="Arial"/>
-                <a:cs typeface="Arial"/>
-              </a:rPr>
-              <a:t>Checking the application against the analysis</a:t>
-            </a:r>
-          </a:p>
-        </p:txBody>
-      </p:sp>
-      <p:sp>
-        <p:nvSpPr>
-          <p:cNvPr id="2" name="">
-            <a:extLst xmlns:a="http://schemas.openxmlformats.org/drawingml/2006/main">
-              <a:ext uri="{FF2B5EF4-FFF2-40B4-BE49-F238E27FC236}">
-                <a16:creationId xmlns:a16="http://schemas.microsoft.com/office/drawing/2014/main" id="{3DAE715A-824C-40E1-B2B1-37885B5BCC57}"/>
-              </a:ext>
-            </a:extLst>
-          </p:cNvPr>
-          <p:cNvSpPr>
-            <a:spLocks xmlns:a="http://schemas.openxmlformats.org/drawingml/2006/main" noGrp="1"/>
-          </p:cNvSpPr>
-          <p:nvPr/>
-        </p:nvSpPr>
-        <p:spPr>
-          <a:xfrm xmlns:a="http://schemas.openxmlformats.org/drawingml/2006/main">
-            <a:off x="609600" y="6257925"/>
-            <a:ext cx="10382250" cy="361950"/>
-          </a:xfrm>
-          <a:prstGeom xmlns:a="http://schemas.openxmlformats.org/drawingml/2006/main" prst="rect">
-            <a:avLst/>
-          </a:prstGeom>
-          <a:noFill xmlns:a="http://schemas.openxmlformats.org/drawingml/2006/main"/>
-          <a:ln xmlns:a="http://schemas.openxmlformats.org/drawingml/2006/main" w="0">
-            <a:noFill/>
-          </a:ln>
-        </p:spPr>
-        <p:txBody>
-          <a:bodyPr xmlns:a="http://schemas.openxmlformats.org/drawingml/2006/main" anchor="ctr">
-            <a:noAutofit/>
-          </a:bodyPr>
-          <a:lstStyle xmlns:a="http://schemas.openxmlformats.org/drawingml/2006/main"/>
-          <a:p xmlns:a="http://schemas.openxmlformats.org/drawingml/2006/main">
-            <a:pPr algn="l">
-              <a:defRPr sz="1350" b="0">
-                <a:solidFill>
-                  <a:srgbClr val="52656B"/>
-                </a:solidFill>
-                <a:latin typeface="Arial"/>
-                <a:ea typeface="Arial"/>
-                <a:cs typeface="Arial"/>
-              </a:defRPr>
-            </a:pPr>
-            <a:r>
-              <a:rPr sz="1350" b="0">
-                <a:solidFill>
-                  <a:srgbClr val="52656B"/>
-                </a:solidFill>
-                <a:latin typeface="Arial"/>
-                <a:ea typeface="Arial"/>
-                <a:cs typeface="Arial"/>
-              </a:rPr>
-              <a:t>Source: real HTTP verification and application tests, 17 Sep 2026</a:t>
-            </a:r>
-          </a:p>
-        </p:txBody>
-      </p:sp>
-      <p:sp>
-        <p:nvSpPr>
-          <p:cNvPr id="3" name="">
-            <a:extLst xmlns:a="http://schemas.openxmlformats.org/drawingml/2006/main">
-              <a:ext uri="{FF2B5EF4-FFF2-40B4-BE49-F238E27FC236}">
-                <a16:creationId xmlns:a16="http://schemas.microsoft.com/office/drawing/2014/main" id="{581FC795-E85D-476F-91F9-AB493D6C9827}"/>
-              </a:ext>
-            </a:extLst>
-          </p:cNvPr>
-          <p:cNvSpPr>
-            <a:spLocks xmlns:a="http://schemas.openxmlformats.org/drawingml/2006/main" noGrp="1"/>
-          </p:cNvSpPr>
-          <p:nvPr/>
-        </p:nvSpPr>
-        <p:spPr>
-          <a:xfrm xmlns:a="http://schemas.openxmlformats.org/drawingml/2006/main">
-            <a:off x="11115675" y="6305550"/>
-            <a:ext cx="457200" cy="285750"/>
-          </a:xfrm>
-          <a:prstGeom xmlns:a="http://schemas.openxmlformats.org/drawingml/2006/main" prst="rect">
-            <a:avLst/>
-          </a:prstGeom>
-          <a:noFill xmlns:a="http://schemas.openxmlformats.org/drawingml/2006/main"/>
-          <a:ln xmlns:a="http://schemas.openxmlformats.org/drawingml/2006/main" w="0">
-            <a:noFill/>
-          </a:ln>
-        </p:spPr>
-        <p:txBody>
-          <a:bodyPr xmlns:a="http://schemas.openxmlformats.org/drawingml/2006/main" anchor="ctr">
-            <a:noAutofit/>
-          </a:bodyPr>
-          <a:lstStyle xmlns:a="http://schemas.openxmlformats.org/drawingml/2006/main"/>
-          <a:p xmlns:a="http://schemas.openxmlformats.org/drawingml/2006/main">
-            <a:pPr algn="r">
-              <a:defRPr sz="1350" b="0">
-                <a:solidFill>
-                  <a:srgbClr val="52656B"/>
-                </a:solidFill>
-                <a:latin typeface="Arial"/>
-                <a:ea typeface="Arial"/>
-                <a:cs typeface="Arial"/>
-              </a:defRPr>
-            </a:pPr>
-            <a:r>
-              <a:rPr sz="1350" b="0">
-                <a:solidFill>
-                  <a:srgbClr val="52656B"/>
-                </a:solidFill>
-                <a:latin typeface="Arial"/>
-                <a:ea typeface="Arial"/>
-                <a:cs typeface="Arial"/>
-              </a:rPr>
-              <a:t>17</a:t>
-            </a:r>
-          </a:p>
-        </p:txBody>
-      </p:sp>
-      <p:sp>
-        <p:nvSpPr>
-          <p:cNvPr id="4" name="">
-            <a:extLst xmlns:a="http://schemas.openxmlformats.org/drawingml/2006/main">
-              <a:ext uri="{FF2B5EF4-FFF2-40B4-BE49-F238E27FC236}">
-                <a16:creationId xmlns:a16="http://schemas.microsoft.com/office/drawing/2014/main" id="{8B8B375B-FDFC-4991-A80C-8AD6D12A294C}"/>
-              </a:ext>
-            </a:extLst>
-          </p:cNvPr>
-          <p:cNvSpPr>
-            <a:spLocks xmlns:a="http://schemas.openxmlformats.org/drawingml/2006/main" noGrp="1"/>
-          </p:cNvSpPr>
-          <p:nvPr/>
-        </p:nvSpPr>
-        <p:spPr>
-          <a:xfrm xmlns:a="http://schemas.openxmlformats.org/drawingml/2006/main">
-            <a:off x="609600" y="1524000"/>
-            <a:ext cx="10972800" cy="552450"/>
-          </a:xfrm>
-          <a:prstGeom xmlns:a="http://schemas.openxmlformats.org/drawingml/2006/main" prst="rect">
-            <a:avLst/>
-          </a:prstGeom>
-          <a:noFill xmlns:a="http://schemas.openxmlformats.org/drawingml/2006/main"/>
-          <a:ln xmlns:a="http://schemas.openxmlformats.org/drawingml/2006/main" w="0">
-            <a:noFill/>
-          </a:ln>
-        </p:spPr>
-        <p:txBody>
-          <a:bodyPr xmlns:a="http://schemas.openxmlformats.org/drawingml/2006/main" anchor="ctr">
-            <a:noAutofit/>
-          </a:bodyPr>
-          <a:lstStyle xmlns:a="http://schemas.openxmlformats.org/drawingml/2006/main"/>
-          <a:p xmlns:a="http://schemas.openxmlformats.org/drawingml/2006/main">
-            <a:pPr algn="l">
-              <a:defRPr sz="2925" b="1">
-                <a:solidFill>
-                  <a:srgbClr val="16343E"/>
-                </a:solidFill>
-                <a:latin typeface="Arial"/>
-                <a:ea typeface="Arial"/>
-                <a:cs typeface="Arial"/>
-              </a:defRPr>
-            </a:pPr>
-            <a:r>
-              <a:rPr sz="2925" b="1">
-                <a:solidFill>
-                  <a:srgbClr val="16343E"/>
-                </a:solidFill>
-                <a:latin typeface="Arial"/>
-                <a:ea typeface="Arial"/>
-                <a:cs typeface="Arial"/>
-              </a:rPr>
-              <a:t>All 345 validation specimens</a:t>
-            </a:r>
-          </a:p>
-        </p:txBody>
-      </p:sp>
-      <p:sp>
-        <p:nvSpPr>
-          <p:cNvPr id="5" name="">
-            <a:extLst xmlns:a="http://schemas.openxmlformats.org/drawingml/2006/main">
-              <a:ext uri="{FF2B5EF4-FFF2-40B4-BE49-F238E27FC236}">
-                <a16:creationId xmlns:a16="http://schemas.microsoft.com/office/drawing/2014/main" id="{875EF708-88CD-493E-8B46-9F31BE48B0C4}"/>
-              </a:ext>
-            </a:extLst>
-          </p:cNvPr>
-          <p:cNvSpPr>
-            <a:spLocks xmlns:a="http://schemas.openxmlformats.org/drawingml/2006/main" noGrp="1"/>
-          </p:cNvSpPr>
-          <p:nvPr/>
-        </p:nvSpPr>
-        <p:spPr>
-          <a:xfrm xmlns:a="http://schemas.openxmlformats.org/drawingml/2006/main">
-            <a:off x="609600" y="2152650"/>
-            <a:ext cx="10972800" cy="857250"/>
-          </a:xfrm>
-          <a:prstGeom xmlns:a="http://schemas.openxmlformats.org/drawingml/2006/main" prst="rect">
-            <a:avLst/>
-          </a:prstGeom>
-          <a:noFill xmlns:a="http://schemas.openxmlformats.org/drawingml/2006/main"/>
-          <a:ln xmlns:a="http://schemas.openxmlformats.org/drawingml/2006/main" w="0">
-            <a:noFill/>
-          </a:ln>
-        </p:spPr>
-        <p:txBody>
-          <a:bodyPr xmlns:a="http://schemas.openxmlformats.org/drawingml/2006/main" anchor="ctr">
-            <a:noAutofit/>
-          </a:bodyPr>
-          <a:lstStyle xmlns:a="http://schemas.openxmlformats.org/drawingml/2006/main"/>
-          <a:p xmlns:a="http://schemas.openxmlformats.org/drawingml/2006/main">
-            <a:pPr algn="l">
-              <a:defRPr sz="2250" b="0">
-                <a:solidFill>
-                  <a:srgbClr val="16343E"/>
-                </a:solidFill>
-                <a:latin typeface="Arial"/>
-                <a:ea typeface="Arial"/>
-                <a:cs typeface="Arial"/>
-              </a:defRPr>
-            </a:pPr>
-            <a:r>
-              <a:rPr sz="2250" b="0">
-                <a:solidFill>
-                  <a:srgbClr val="16343E"/>
-                </a:solidFill>
-                <a:latin typeface="Arial"/>
-                <a:ea typeface="Arial"/>
-                <a:cs typeface="Arial"/>
-              </a:rPr>
-              <a:t>Saved results, command line and HTTP service had matching flags.</a:t>
-            </a:r>
-          </a:p>
-          <a:p xmlns:a="http://schemas.openxmlformats.org/drawingml/2006/main">
-            <a:pPr algn="l">
-              <a:defRPr sz="2250" b="0">
-                <a:solidFill>
-                  <a:srgbClr val="16343E"/>
-                </a:solidFill>
-                <a:latin typeface="Arial"/>
-                <a:ea typeface="Arial"/>
-                <a:cs typeface="Arial"/>
-              </a:defRPr>
-            </a:pPr>
-            <a:r>
-              <a:rPr sz="2250" b="0">
-                <a:solidFill>
-                  <a:srgbClr val="16343E"/>
-                </a:solidFill>
-                <a:latin typeface="Arial"/>
-                <a:ea typeface="Arial"/>
-                <a:cs typeface="Arial"/>
-              </a:rPr>
-              <a:t>Scores agreed within 10⁻¹², including reordered measurement columns.</a:t>
-            </a:r>
-          </a:p>
-        </p:txBody>
-      </p:sp>
-      <p:sp>
-        <p:nvSpPr>
-          <p:cNvPr id="6" name="">
-            <a:extLst xmlns:a="http://schemas.openxmlformats.org/drawingml/2006/main">
-              <a:ext uri="{FF2B5EF4-FFF2-40B4-BE49-F238E27FC236}">
-                <a16:creationId xmlns:a16="http://schemas.microsoft.com/office/drawing/2014/main" id="{ECB7770F-5F80-4E99-9A49-9D6C3B2609B3}"/>
-              </a:ext>
-            </a:extLst>
-          </p:cNvPr>
-          <p:cNvSpPr>
-            <a:spLocks xmlns:a="http://schemas.openxmlformats.org/drawingml/2006/main" noGrp="1"/>
-          </p:cNvSpPr>
-          <p:nvPr/>
-        </p:nvSpPr>
-        <p:spPr>
-          <a:xfrm xmlns:a="http://schemas.openxmlformats.org/drawingml/2006/main">
-            <a:off x="609600" y="3114675"/>
-            <a:ext cx="10972800" cy="323850"/>
-          </a:xfrm>
-          <a:prstGeom xmlns:a="http://schemas.openxmlformats.org/drawingml/2006/main" prst="rect">
-            <a:avLst/>
-          </a:prstGeom>
-          <a:noFill xmlns:a="http://schemas.openxmlformats.org/drawingml/2006/main"/>
-          <a:ln xmlns:a="http://schemas.openxmlformats.org/drawingml/2006/main" w="0">
-            <a:noFill/>
-          </a:ln>
-        </p:spPr>
-        <p:txBody>
-          <a:bodyPr xmlns:a="http://schemas.openxmlformats.org/drawingml/2006/main" anchor="ctr">
-            <a:noAutofit/>
-          </a:bodyPr>
-          <a:lstStyle xmlns:a="http://schemas.openxmlformats.org/drawingml/2006/main"/>
-          <a:p xmlns:a="http://schemas.openxmlformats.org/drawingml/2006/main">
-            <a:pPr algn="l">
-              <a:defRPr sz="1875" b="1">
-                <a:solidFill>
-                  <a:srgbClr val="007C78"/>
-                </a:solidFill>
-                <a:latin typeface="Arial"/>
-                <a:ea typeface="Arial"/>
-                <a:cs typeface="Arial"/>
-              </a:defRPr>
-            </a:pPr>
-            <a:r>
-              <a:rPr sz="1875" b="1">
-                <a:solidFill>
-                  <a:srgbClr val="007C78"/>
-                </a:solidFill>
-                <a:latin typeface="Arial"/>
-                <a:ea typeface="Arial"/>
-                <a:cs typeface="Arial"/>
-              </a:rPr>
-              <a:t>Example check: HTTP scores versus command-line scores</a:t>
-            </a:r>
-          </a:p>
-        </p:txBody>
-      </p:sp>
-      <p:sp>
-        <p:nvSpPr>
-          <p:cNvPr id="7" name="">
-            <a:extLst xmlns:a="http://schemas.openxmlformats.org/drawingml/2006/main">
-              <a:ext uri="{FF2B5EF4-FFF2-40B4-BE49-F238E27FC236}">
-                <a16:creationId xmlns:a16="http://schemas.microsoft.com/office/drawing/2014/main" id="{C4E59603-A2E9-40E1-AAF9-6D23D4ED2DAF}"/>
-              </a:ext>
-            </a:extLst>
-          </p:cNvPr>
-          <p:cNvSpPr>
-            <a:spLocks xmlns:a="http://schemas.openxmlformats.org/drawingml/2006/main" noGrp="1"/>
-          </p:cNvSpPr>
-          <p:nvPr/>
-        </p:nvSpPr>
-        <p:spPr>
-          <a:xfrm xmlns:a="http://schemas.openxmlformats.org/drawingml/2006/main">
-            <a:off x="609600" y="3467100"/>
-            <a:ext cx="10972800" cy="828675"/>
-          </a:xfrm>
-          <a:prstGeom xmlns:a="http://schemas.openxmlformats.org/drawingml/2006/main" prst="rect">
-            <a:avLst/>
-          </a:prstGeom>
-          <a:noFill xmlns:a="http://schemas.openxmlformats.org/drawingml/2006/main"/>
-          <a:ln xmlns:a="http://schemas.openxmlformats.org/drawingml/2006/main" w="0">
-            <a:noFill/>
-          </a:ln>
-        </p:spPr>
-        <p:txBody>
-          <a:bodyPr xmlns:a="http://schemas.openxmlformats.org/drawingml/2006/main" anchor="ctr">
-            <a:noAutofit/>
-          </a:bodyPr>
-          <a:lstStyle xmlns:a="http://schemas.openxmlformats.org/drawingml/2006/main"/>
-          <a:p xmlns:a="http://schemas.openxmlformats.org/drawingml/2006/main">
-            <a:pPr algn="l">
-              <a:defRPr sz="1800" b="0">
-                <a:solidFill>
-                  <a:srgbClr val="16343E"/>
-                </a:solidFill>
-                <a:latin typeface="Consolas"/>
-                <a:ea typeface="Consolas"/>
-                <a:cs typeface="Consolas"/>
-              </a:defRPr>
-            </a:pPr>
-            <a:r>
-              <a:rPr sz="1800" b="0">
-                <a:solidFill>
-                  <a:srgbClr val="16343E"/>
-                </a:solidFill>
-                <a:latin typeface="Consolas"/>
-                <a:ea typeface="Consolas"/>
-                <a:cs typeface="Consolas"/>
-              </a:rPr>
-              <a:t>np.testing.assert_allclose(</a:t>
-            </a:r>
-          </a:p>
-          <a:p xmlns:a="http://schemas.openxmlformats.org/drawingml/2006/main">
-            <a:pPr algn="l">
-              <a:defRPr sz="1800" b="0">
-                <a:solidFill>
-                  <a:srgbClr val="16343E"/>
-                </a:solidFill>
-                <a:latin typeface="Consolas"/>
-                <a:ea typeface="Consolas"/>
-                <a:cs typeface="Consolas"/>
-              </a:defRPr>
-            </a:pPr>
-            <a:r>
-              <a:rPr sz="1800" b="0">
-                <a:solidFill>
-                  <a:srgbClr val="16343E"/>
-                </a:solidFill>
-                <a:latin typeface="Consolas"/>
-                <a:ea typeface="Consolas"/>
-                <a:cs typeface="Consolas"/>
-              </a:rPr>
-              <a:t>    actual.rejection_score, cli.rejection_score, rtol=0, atol=1e-12</a:t>
-            </a:r>
-          </a:p>
-          <a:p xmlns:a="http://schemas.openxmlformats.org/drawingml/2006/main">
-            <a:pPr algn="l">
-              <a:defRPr sz="1800" b="0">
-                <a:solidFill>
-                  <a:srgbClr val="16343E"/>
-                </a:solidFill>
-                <a:latin typeface="Consolas"/>
-                <a:ea typeface="Consolas"/>
-                <a:cs typeface="Consolas"/>
-              </a:defRPr>
-            </a:pPr>
-            <a:r>
-              <a:rPr sz="1800" b="0">
-                <a:solidFill>
-                  <a:srgbClr val="16343E"/>
-                </a:solidFill>
-                <a:latin typeface="Consolas"/>
-                <a:ea typeface="Consolas"/>
-                <a:cs typeface="Consolas"/>
-              </a:rPr>
-              <a:t>)</a:t>
-            </a:r>
-          </a:p>
-        </p:txBody>
-      </p:sp>
-      <p:graphicFrame>
-        <p:nvGraphicFramePr>
-          <p:cNvPr id="16" name=""/>
-          <p:cNvGraphicFramePr/>
-          <p:nvPr/>
-        </p:nvGraphicFramePr>
-        <p:xfrm>
-          <a:off xmlns:a="http://schemas.openxmlformats.org/drawingml/2006/main" x="609600" y="4495800"/>
-          <a:ext xmlns:a="http://schemas.openxmlformats.org/drawingml/2006/main" cx="10972800" cy="1533525"/>
-        </p:xfrm>
-        <a:graphic xmlns:a="http://schemas.openxmlformats.org/drawingml/2006/main">
-          <a:graphicData uri="http://schemas.openxmlformats.org/drawingml/2006/table">
-            <a:tbl>
-              <a:tblPr/>
-              <a:tblGrid>
-                <a:gridCol w="6000750"/>
-                <a:gridCol w="4972050"/>
-              </a:tblGrid>
-              <a:tr h="485775">
-                <a:tc>
-                  <a:txBody>
-                    <a:bodyPr>
-                      <a:noAutofit/>
-                    </a:bodyPr>
-                    <a:lstStyle/>
-                    <a:p>
-                      <a:r>
-                        <a:rPr sz="1950" b="1">
-                          <a:solidFill>
-                            <a:srgbClr val="FFFFFF"/>
-                          </a:solidFill>
-                          <a:latin typeface="Arial"/>
-                          <a:ea typeface="Arial"/>
-                          <a:cs typeface="Arial"/>
-                        </a:rPr>
-                        <a:t>Failure checked</a:t>
-                      </a:r>
-                    </a:p>
-                  </a:txBody>
-                  <a:tcPr marL="171450" marR="142875" marT="57150" marB="57150" anchor="ctr">
-                    <a:solidFill>
-                      <a:srgbClr val="16343E"/>
-                    </a:solidFill>
-                  </a:tcPr>
-                </a:tc>
-                <a:tc>
-                  <a:txBody>
-                    <a:bodyPr>
-                      <a:noAutofit/>
-                    </a:bodyPr>
-                    <a:lstStyle/>
-                    <a:p>
-                      <a:r>
-                        <a:rPr sz="1950" b="1">
-                          <a:solidFill>
-                            <a:srgbClr val="FFFFFF"/>
-                          </a:solidFill>
-                          <a:latin typeface="Arial"/>
-                          <a:ea typeface="Arial"/>
-                          <a:cs typeface="Arial"/>
-                        </a:rPr>
-                        <a:t>Expected response</a:t>
-                      </a:r>
-                    </a:p>
-                  </a:txBody>
-                  <a:tcPr marL="171450" marR="142875" marT="57150" marB="57150" anchor="ctr">
-                    <a:solidFill>
-                      <a:srgbClr val="16343E"/>
-                    </a:solidFill>
-                  </a:tcPr>
-                </a:tc>
-              </a:tr>
-              <a:tr h="523875">
-                <a:tc>
-                  <a:txBody>
-                    <a:bodyPr>
-                      <a:noAutofit/>
-                    </a:bodyPr>
-                    <a:lstStyle/>
-                    <a:p>
-                      <a:r>
-                        <a:rPr sz="1950" b="0">
-                          <a:solidFill>
-                            <a:srgbClr val="16343E"/>
-                          </a:solidFill>
-                          <a:latin typeface="Arial"/>
-                          <a:ea typeface="Arial"/>
-                          <a:cs typeface="Arial"/>
-                        </a:rPr>
-                        <a:t>Missing or duplicate measurements</a:t>
-                      </a:r>
-                    </a:p>
-                  </a:txBody>
-                  <a:tcPr marL="171450" marR="142875" marT="57150" marB="57150" anchor="ctr">
-                    <a:solidFill>
-                      <a:srgbClr val="FFFFFF"/>
-                    </a:solidFill>
-                  </a:tcPr>
-                </a:tc>
-                <a:tc>
-                  <a:txBody>
-                    <a:bodyPr>
-                      <a:noAutofit/>
-                    </a:bodyPr>
-                    <a:lstStyle/>
-                    <a:p>
-                      <a:r>
-                        <a:rPr sz="1950" b="0">
-                          <a:solidFill>
-                            <a:srgbClr val="16343E"/>
-                          </a:solidFill>
-                          <a:latin typeface="Arial"/>
-                          <a:ea typeface="Arial"/>
-                          <a:cs typeface="Arial"/>
-                        </a:rPr>
-                        <a:t>No scores for the batch</a:t>
-                      </a:r>
-                    </a:p>
-                  </a:txBody>
-                  <a:tcPr marL="171450" marR="142875" marT="57150" marB="57150" anchor="ctr">
-                    <a:solidFill>
-                      <a:srgbClr val="FFFFFF"/>
-                    </a:solidFill>
-                  </a:tcPr>
-                </a:tc>
-              </a:tr>
-              <a:tr h="523875">
-                <a:tc>
-                  <a:txBody>
-                    <a:bodyPr>
-                      <a:noAutofit/>
-                    </a:bodyPr>
-                    <a:lstStyle/>
-                    <a:p>
-                      <a:r>
-                        <a:rPr sz="1950" b="0">
-                          <a:solidFill>
-                            <a:srgbClr val="16343E"/>
-                          </a:solidFill>
-                          <a:latin typeface="Arial"/>
-                          <a:ea typeface="Arial"/>
-                          <a:cs typeface="Arial"/>
-                        </a:rPr>
-                        <a:t>Incompatible model metadata</a:t>
-                      </a:r>
-                    </a:p>
-                  </a:txBody>
-                  <a:tcPr marL="171450" marR="142875" marT="57150" marB="57150" anchor="ctr">
-                    <a:solidFill>
-                      <a:srgbClr val="EDF3F0"/>
-                    </a:solidFill>
-                  </a:tcPr>
-                </a:tc>
-                <a:tc>
-                  <a:txBody>
-                    <a:bodyPr>
-                      <a:noAutofit/>
-                    </a:bodyPr>
-                    <a:lstStyle/>
-                    <a:p>
-                      <a:r>
-                        <a:rPr sz="1950" b="0">
-                          <a:solidFill>
-                            <a:srgbClr val="16343E"/>
-                          </a:solidFill>
-                          <a:latin typeface="Arial"/>
-                          <a:ea typeface="Arial"/>
-                          <a:cs typeface="Arial"/>
-                        </a:rPr>
-                        <a:t>Model does not load</a:t>
-                      </a:r>
-                    </a:p>
-                  </a:txBody>
-                  <a:tcPr marL="171450" marR="142875" marT="57150" marB="57150" anchor="ctr">
-                    <a:solidFill>
-                      <a:srgbClr val="EDF3F0"/>
-                    </a:solidFill>
-                  </a:tcPr>
-                </a:tc>
-              </a:tr>
-            </a:tbl>
-          </a:graphicData>
-        </a:graphic>
-      </p:graphicFrame>
-    </p:spTree>
-    <p:extLst>
-      <p:ext uri="{BB962C8B-B14F-4D97-AF65-F5344CB8AC3E}">
-        <p14:creationId xmlns:p14="http://schemas.microsoft.com/office/powerpoint/2010/main" val="1795389812"/>
-      </p:ext>
-    </p:extLst>
-  </p:cSld>
-</p:sld>
-</file>
-
-<file path=ppt/slides/slide18.xml><?xml version="1.0" encoding="utf-8"?>
-<p:sld xmlns:p="http://schemas.openxmlformats.org/presentationml/2006/main">
-  <p:cSld>
-    <p:bg>
-      <p:bgPr>
-        <a:solidFill xmlns:a="http://schemas.openxmlformats.org/drawingml/2006/main">
-          <a:srgbClr val="F7F8F5"/>
-        </a:solidFill>
-      </p:bgPr>
-    </p:bg>
-    <p:spTree>
-      <p:nvGrpSpPr>
-        <p:cNvPr id="1" name=""/>
-        <p:cNvGrpSpPr/>
-        <p:nvPr/>
-      </p:nvGrpSpPr>
-      <p:grpSpPr>
-        <a:xfrm xmlns:a="http://schemas.openxmlformats.org/drawingml/2006/main"/>
-      </p:grpSpPr>
-      <p:sp>
-        <p:nvSpPr>
-          <p:cNvPr id="7" name="">
-            <a:extLst xmlns:a="http://schemas.openxmlformats.org/drawingml/2006/main">
-              <a:ext uri="{FF2B5EF4-FFF2-40B4-BE49-F238E27FC236}">
-                <a16:creationId xmlns:a16="http://schemas.microsoft.com/office/drawing/2014/main" id="{D941C514-487B-4A04-ABCE-1CADEB9DDC76}"/>
-              </a:ext>
-            </a:extLst>
-          </p:cNvPr>
-          <p:cNvSpPr>
-            <a:spLocks xmlns:a="http://schemas.openxmlformats.org/drawingml/2006/main" noGrp="1"/>
-          </p:cNvSpPr>
-          <p:nvPr/>
-        </p:nvSpPr>
-        <p:spPr>
-          <a:xfrm xmlns:a="http://schemas.openxmlformats.org/drawingml/2006/main">
-            <a:off x="609600" y="409575"/>
-            <a:ext cx="10972800" cy="1000125"/>
-          </a:xfrm>
-          <a:prstGeom xmlns:a="http://schemas.openxmlformats.org/drawingml/2006/main" prst="rect">
-            <a:avLst/>
-          </a:prstGeom>
-          <a:noFill xmlns:a="http://schemas.openxmlformats.org/drawingml/2006/main"/>
-          <a:ln xmlns:a="http://schemas.openxmlformats.org/drawingml/2006/main" w="0">
-            <a:noFill/>
-          </a:ln>
-        </p:spPr>
-        <p:txBody>
-          <a:bodyPr xmlns:a="http://schemas.openxmlformats.org/drawingml/2006/main" anchor="ctr">
-            <a:noAutofit/>
-          </a:bodyPr>
-          <a:lstStyle xmlns:a="http://schemas.openxmlformats.org/drawingml/2006/main"/>
-          <a:p xmlns:a="http://schemas.openxmlformats.org/drawingml/2006/main">
-            <a:pPr algn="l">
-              <a:defRPr sz="3450" b="1">
-                <a:solidFill>
-                  <a:srgbClr val="16343E"/>
-                </a:solidFill>
-                <a:latin typeface="Arial"/>
-                <a:ea typeface="Arial"/>
-                <a:cs typeface="Arial"/>
-              </a:defRPr>
-            </a:pPr>
-            <a:r>
-              <a:rPr sz="3450" b="1">
-                <a:solidFill>
-                  <a:srgbClr val="16343E"/>
-                </a:solidFill>
-                <a:latin typeface="Arial"/>
-                <a:ea typeface="Arial"/>
-                <a:cs typeface="Arial"/>
-              </a:rPr>
-              <a:t>Running and maintaining the application</a:t>
-            </a:r>
-          </a:p>
-        </p:txBody>
-      </p:sp>
-      <p:sp>
-        <p:nvSpPr>
-          <p:cNvPr id="2" name="">
-            <a:extLst xmlns:a="http://schemas.openxmlformats.org/drawingml/2006/main">
-              <a:ext uri="{FF2B5EF4-FFF2-40B4-BE49-F238E27FC236}">
-                <a16:creationId xmlns:a16="http://schemas.microsoft.com/office/drawing/2014/main" id="{AC1C99D8-9C27-4F97-AA8F-09620EB4C0C6}"/>
-              </a:ext>
-            </a:extLst>
-          </p:cNvPr>
-          <p:cNvSpPr>
-            <a:spLocks xmlns:a="http://schemas.openxmlformats.org/drawingml/2006/main" noGrp="1"/>
-          </p:cNvSpPr>
-          <p:nvPr/>
-        </p:nvSpPr>
-        <p:spPr>
-          <a:xfrm xmlns:a="http://schemas.openxmlformats.org/drawingml/2006/main">
-            <a:off x="609600" y="6257925"/>
-            <a:ext cx="10382250" cy="361950"/>
-          </a:xfrm>
-          <a:prstGeom xmlns:a="http://schemas.openxmlformats.org/drawingml/2006/main" prst="rect">
-            <a:avLst/>
-          </a:prstGeom>
-          <a:noFill xmlns:a="http://schemas.openxmlformats.org/drawingml/2006/main"/>
-          <a:ln xmlns:a="http://schemas.openxmlformats.org/drawingml/2006/main" w="0">
-            <a:noFill/>
-          </a:ln>
-        </p:spPr>
-        <p:txBody>
-          <a:bodyPr xmlns:a="http://schemas.openxmlformats.org/drawingml/2006/main" anchor="ctr">
-            <a:noAutofit/>
-          </a:bodyPr>
-          <a:lstStyle xmlns:a="http://schemas.openxmlformats.org/drawingml/2006/main"/>
-          <a:p xmlns:a="http://schemas.openxmlformats.org/drawingml/2006/main">
-            <a:pPr algn="l">
-              <a:defRPr sz="1350" b="0">
-                <a:solidFill>
-                  <a:srgbClr val="52656B"/>
-                </a:solidFill>
-                <a:latin typeface="Arial"/>
-                <a:ea typeface="Arial"/>
-                <a:cs typeface="Arial"/>
-              </a:defRPr>
-            </a:pPr>
-            <a:r>
-              <a:rPr sz="1350" b="0">
-                <a:solidFill>
-                  <a:srgbClr val="52656B"/>
-                </a:solidFill>
-                <a:latin typeface="Arial"/>
-                <a:ea typeface="Arial"/>
-                <a:cs typeface="Arial"/>
-              </a:rPr>
-              <a:t>Sources: setup guide, automated-check workflow and dated verification records</a:t>
-            </a:r>
-          </a:p>
-        </p:txBody>
-      </p:sp>
-      <p:sp>
-        <p:nvSpPr>
-          <p:cNvPr id="3" name="">
-            <a:extLst xmlns:a="http://schemas.openxmlformats.org/drawingml/2006/main">
-              <a:ext uri="{FF2B5EF4-FFF2-40B4-BE49-F238E27FC236}">
-                <a16:creationId xmlns:a16="http://schemas.microsoft.com/office/drawing/2014/main" id="{DE26D56C-CC83-4D2D-A986-7B0F0A3AA803}"/>
-              </a:ext>
-            </a:extLst>
-          </p:cNvPr>
-          <p:cNvSpPr>
-            <a:spLocks xmlns:a="http://schemas.openxmlformats.org/drawingml/2006/main" noGrp="1"/>
-          </p:cNvSpPr>
-          <p:nvPr/>
-        </p:nvSpPr>
-        <p:spPr>
-          <a:xfrm xmlns:a="http://schemas.openxmlformats.org/drawingml/2006/main">
-            <a:off x="11115675" y="6305550"/>
-            <a:ext cx="457200" cy="285750"/>
-          </a:xfrm>
-          <a:prstGeom xmlns:a="http://schemas.openxmlformats.org/drawingml/2006/main" prst="rect">
-            <a:avLst/>
-          </a:prstGeom>
-          <a:noFill xmlns:a="http://schemas.openxmlformats.org/drawingml/2006/main"/>
-          <a:ln xmlns:a="http://schemas.openxmlformats.org/drawingml/2006/main" w="0">
-            <a:noFill/>
-          </a:ln>
-        </p:spPr>
-        <p:txBody>
-          <a:bodyPr xmlns:a="http://schemas.openxmlformats.org/drawingml/2006/main" anchor="ctr">
-            <a:noAutofit/>
-          </a:bodyPr>
-          <a:lstStyle xmlns:a="http://schemas.openxmlformats.org/drawingml/2006/main"/>
-          <a:p xmlns:a="http://schemas.openxmlformats.org/drawingml/2006/main">
-            <a:pPr algn="r">
-              <a:defRPr sz="1350" b="0">
-                <a:solidFill>
-                  <a:srgbClr val="52656B"/>
-                </a:solidFill>
-                <a:latin typeface="Arial"/>
-                <a:ea typeface="Arial"/>
-                <a:cs typeface="Arial"/>
-              </a:defRPr>
-            </a:pPr>
-            <a:r>
-              <a:rPr sz="1350" b="0">
-                <a:solidFill>
-                  <a:srgbClr val="52656B"/>
-                </a:solidFill>
-                <a:latin typeface="Arial"/>
-                <a:ea typeface="Arial"/>
-                <a:cs typeface="Arial"/>
-              </a:rPr>
-              <a:t>18</a:t>
-            </a:r>
-          </a:p>
-        </p:txBody>
-      </p:sp>
-      <p:graphicFrame>
-        <p:nvGraphicFramePr>
-          <p:cNvPr id="10" name=""/>
-          <p:cNvGraphicFramePr/>
-          <p:nvPr/>
-        </p:nvGraphicFramePr>
-        <p:xfrm>
-          <a:off xmlns:a="http://schemas.openxmlformats.org/drawingml/2006/main" x="609600" y="1743075"/>
-          <a:ext xmlns:a="http://schemas.openxmlformats.org/drawingml/2006/main" cx="10972800" cy="3124200"/>
-        </p:xfrm>
-        <a:graphic xmlns:a="http://schemas.openxmlformats.org/drawingml/2006/main">
-          <a:graphicData uri="http://schemas.openxmlformats.org/drawingml/2006/table">
-            <a:tbl>
-              <a:tblPr/>
-              <a:tblGrid>
-                <a:gridCol w="5591175"/>
-                <a:gridCol w="5381625"/>
-              </a:tblGrid>
-              <a:tr h="552450">
-                <a:tc>
-                  <a:txBody>
-                    <a:bodyPr>
-                      <a:noAutofit/>
-                    </a:bodyPr>
-                    <a:lstStyle/>
-                    <a:p>
-                      <a:r>
-                        <a:rPr sz="2100" b="1">
-                          <a:solidFill>
-                            <a:srgbClr val="FFFFFF"/>
-                          </a:solidFill>
-                          <a:latin typeface="Arial"/>
-                          <a:ea typeface="Arial"/>
-                          <a:cs typeface="Arial"/>
-                        </a:rPr>
-                        <a:t>What another developer receives</a:t>
-                      </a:r>
-                    </a:p>
-                  </a:txBody>
-                  <a:tcPr marL="171450" marR="142875" marT="76200" marB="76200" anchor="ctr">
-                    <a:solidFill>
-                      <a:srgbClr val="16343E"/>
-                    </a:solidFill>
-                  </a:tcPr>
-                </a:tc>
-                <a:tc>
-                  <a:txBody>
-                    <a:bodyPr>
-                      <a:noAutofit/>
-                    </a:bodyPr>
-                    <a:lstStyle/>
-                    <a:p>
-                      <a:r>
-                        <a:rPr sz="2100" b="1">
-                          <a:solidFill>
-                            <a:srgbClr val="FFFFFF"/>
-                          </a:solidFill>
-                          <a:latin typeface="Arial"/>
-                          <a:ea typeface="Arial"/>
-                          <a:cs typeface="Arial"/>
-                        </a:rPr>
-                        <a:t>Why it helps</a:t>
-                      </a:r>
-                    </a:p>
-                  </a:txBody>
-                  <a:tcPr marL="171450" marR="142875" marT="76200" marB="76200" anchor="ctr">
-                    <a:solidFill>
-                      <a:srgbClr val="16343E"/>
-                    </a:solidFill>
-                  </a:tcPr>
-                </a:tc>
-              </a:tr>
-              <a:tr h="857250">
-                <a:tc>
-                  <a:txBody>
-                    <a:bodyPr>
-                      <a:noAutofit/>
-                    </a:bodyPr>
-                    <a:lstStyle/>
-                    <a:p>
-                      <a:r>
-                        <a:rPr sz="2100" b="0">
-                          <a:solidFill>
-                            <a:srgbClr val="16343E"/>
-                          </a:solidFill>
-                          <a:latin typeface="Arial"/>
-                          <a:ea typeface="Arial"/>
-                          <a:cs typeface="Arial"/>
-                        </a:rPr>
-                        <a:t>Locked environment and run instructions</a:t>
-                      </a:r>
-                    </a:p>
-                  </a:txBody>
-                  <a:tcPr marL="171450" marR="142875" marT="76200" marB="76200" anchor="ctr">
-                    <a:solidFill>
-                      <a:srgbClr val="FFFFFF"/>
-                    </a:solidFill>
-                  </a:tcPr>
-                </a:tc>
-                <a:tc>
-                  <a:txBody>
-                    <a:bodyPr>
-                      <a:noAutofit/>
-                    </a:bodyPr>
-                    <a:lstStyle/>
-                    <a:p>
-                      <a:r>
-                        <a:rPr sz="2100" b="0">
-                          <a:solidFill>
-                            <a:srgbClr val="16343E"/>
-                          </a:solidFill>
-                          <a:latin typeface="Arial"/>
-                          <a:ea typeface="Arial"/>
-                          <a:cs typeface="Arial"/>
-                        </a:rPr>
-                        <a:t>Install the recorded dependencies and start the service.</a:t>
-                      </a:r>
-                    </a:p>
-                  </a:txBody>
-                  <a:tcPr marL="171450" marR="142875" marT="76200" marB="76200" anchor="ctr">
-                    <a:solidFill>
-                      <a:srgbClr val="FFFFFF"/>
-                    </a:solidFill>
-                  </a:tcPr>
-                </a:tc>
-              </a:tr>
-              <a:tr h="857250">
-                <a:tc>
-                  <a:txBody>
-                    <a:bodyPr>
-                      <a:noAutofit/>
-                    </a:bodyPr>
-                    <a:lstStyle/>
-                    <a:p>
-                      <a:r>
-                        <a:rPr sz="2100" b="0">
-                          <a:solidFill>
-                            <a:srgbClr val="16343E"/>
-                          </a:solidFill>
-                          <a:latin typeface="Arial"/>
-                          <a:ea typeface="Arial"/>
-                          <a:cs typeface="Arial"/>
-                        </a:rPr>
-                        <a:t>Automated checks on code changes</a:t>
-                      </a:r>
-                    </a:p>
-                  </a:txBody>
-                  <a:tcPr marL="171450" marR="142875" marT="76200" marB="76200" anchor="ctr">
-                    <a:solidFill>
-                      <a:srgbClr val="EDF3F0"/>
-                    </a:solidFill>
-                  </a:tcPr>
-                </a:tc>
-                <a:tc>
-                  <a:txBody>
-                    <a:bodyPr>
-                      <a:noAutofit/>
-                    </a:bodyPr>
-                    <a:lstStyle/>
-                    <a:p>
-                      <a:r>
-                        <a:rPr sz="2100" b="0">
-                          <a:solidFill>
-                            <a:srgbClr val="16343E"/>
-                          </a:solidFill>
-                          <a:latin typeface="Arial"/>
-                          <a:ea typeface="Arial"/>
-                          <a:cs typeface="Arial"/>
-                        </a:rPr>
-                        <a:t>Catch changes that break scoring or input handling.</a:t>
-                      </a:r>
-                    </a:p>
-                  </a:txBody>
-                  <a:tcPr marL="171450" marR="142875" marT="76200" marB="76200" anchor="ctr">
-                    <a:solidFill>
-                      <a:srgbClr val="EDF3F0"/>
-                    </a:solidFill>
-                  </a:tcPr>
-                </a:tc>
-              </a:tr>
-              <a:tr h="857250">
-                <a:tc>
-                  <a:txBody>
-                    <a:bodyPr>
-                      <a:noAutofit/>
-                    </a:bodyPr>
-                    <a:lstStyle/>
-                    <a:p>
-                      <a:r>
-                        <a:rPr sz="2100" b="0">
-                          <a:solidFill>
-                            <a:srgbClr val="16343E"/>
-                          </a:solidFill>
-                          <a:latin typeface="Arial"/>
-                          <a:ea typeface="Arial"/>
-                          <a:cs typeface="Arial"/>
-                        </a:rPr>
-                        <a:t>Tested local container</a:t>
-                      </a:r>
-                    </a:p>
-                  </a:txBody>
-                  <a:tcPr marL="171450" marR="142875" marT="76200" marB="76200" anchor="ctr">
-                    <a:solidFill>
-                      <a:srgbClr val="FFFFFF"/>
-                    </a:solidFill>
-                  </a:tcPr>
-                </a:tc>
-                <a:tc>
-                  <a:txBody>
-                    <a:bodyPr>
-                      <a:noAutofit/>
-                    </a:bodyPr>
-                    <a:lstStyle/>
-                    <a:p>
-                      <a:r>
-                        <a:rPr sz="2100" b="0">
-                          <a:solidFill>
-                            <a:srgbClr val="16343E"/>
-                          </a:solidFill>
-                          <a:latin typeface="Arial"/>
-                          <a:ea typeface="Arial"/>
-                          <a:cs typeface="Arial"/>
-                        </a:rPr>
-                        <a:t>Run the packaged application with its saved model.</a:t>
-                      </a:r>
-                    </a:p>
-                  </a:txBody>
-                  <a:tcPr marL="171450" marR="142875" marT="76200" marB="76200" anchor="ctr">
-                    <a:solidFill>
-                      <a:srgbClr val="FFFFFF"/>
-                    </a:solidFill>
-                  </a:tcPr>
-                </a:tc>
-              </a:tr>
-            </a:tbl>
-          </a:graphicData>
-        </a:graphic>
-      </p:graphicFrame>
-      <p:sp>
-        <p:nvSpPr>
-          <p:cNvPr id="5" name="">
-            <a:extLst xmlns:a="http://schemas.openxmlformats.org/drawingml/2006/main">
-              <a:ext uri="{FF2B5EF4-FFF2-40B4-BE49-F238E27FC236}">
-                <a16:creationId xmlns:a16="http://schemas.microsoft.com/office/drawing/2014/main" id="{0C32D742-77B0-42B4-B099-5458AE371525}"/>
-              </a:ext>
-            </a:extLst>
-          </p:cNvPr>
-          <p:cNvSpPr>
-            <a:spLocks xmlns:a="http://schemas.openxmlformats.org/drawingml/2006/main" noGrp="1"/>
-          </p:cNvSpPr>
-          <p:nvPr/>
-        </p:nvSpPr>
-        <p:spPr>
-          <a:xfrm xmlns:a="http://schemas.openxmlformats.org/drawingml/2006/main">
-            <a:off x="609600" y="5219700"/>
-            <a:ext cx="10972800" cy="723900"/>
-          </a:xfrm>
-          <a:prstGeom xmlns:a="http://schemas.openxmlformats.org/drawingml/2006/main" prst="rect">
-            <a:avLst/>
-          </a:prstGeom>
-          <a:noFill xmlns:a="http://schemas.openxmlformats.org/drawingml/2006/main"/>
-          <a:ln xmlns:a="http://schemas.openxmlformats.org/drawingml/2006/main" w="0">
-            <a:noFill/>
-          </a:ln>
-        </p:spPr>
-        <p:txBody>
-          <a:bodyPr xmlns:a="http://schemas.openxmlformats.org/drawingml/2006/main" anchor="ctr">
-            <a:noAutofit/>
-          </a:bodyPr>
-          <a:lstStyle xmlns:a="http://schemas.openxmlformats.org/drawingml/2006/main"/>
-          <a:p xmlns:a="http://schemas.openxmlformats.org/drawingml/2006/main">
-            <a:pPr algn="l">
-              <a:defRPr sz="2100" b="0">
-                <a:solidFill>
-                  <a:srgbClr val="16343E"/>
-                </a:solidFill>
-                <a:latin typeface="Arial"/>
-                <a:ea typeface="Arial"/>
-                <a:cs typeface="Arial"/>
-              </a:defRPr>
-            </a:pPr>
-            <a:r>
-              <a:rPr sz="2100" b="0">
-                <a:solidFill>
-                  <a:srgbClr val="16343E"/>
-                </a:solidFill>
-                <a:latin typeface="Arial"/>
-                <a:ea typeface="Arial"/>
-                <a:cs typeface="Arial"/>
-              </a:rPr>
-              <a:t>Hosted checks passed for an earlier revision.</a:t>
-            </a:r>
-          </a:p>
-          <a:p xmlns:a="http://schemas.openxmlformats.org/drawingml/2006/main">
-            <a:pPr algn="l">
-              <a:defRPr sz="2100" b="0">
-                <a:solidFill>
-                  <a:srgbClr val="16343E"/>
-                </a:solidFill>
-                <a:latin typeface="Arial"/>
-                <a:ea typeface="Arial"/>
-                <a:cs typeface="Arial"/>
-              </a:defRPr>
-            </a:pPr>
-            <a:r>
-              <a:rPr sz="2100" b="0">
-                <a:solidFill>
-                  <a:srgbClr val="16343E"/>
-                </a:solidFill>
-                <a:latin typeface="Arial"/>
-                <a:ea typeface="Arial"/>
-                <a:cs typeface="Arial"/>
-              </a:rPr>
-              <a:t>The current application and research container were checked locally.</a:t>
-            </a:r>
-          </a:p>
-        </p:txBody>
-      </p:sp>
-      <p:sp>
-        <p:nvSpPr>
-          <p:cNvPr id="6" name="">
-            <a:extLst xmlns:a="http://schemas.openxmlformats.org/drawingml/2006/main">
-              <a:ext uri="{FF2B5EF4-FFF2-40B4-BE49-F238E27FC236}">
-                <a16:creationId xmlns:a16="http://schemas.microsoft.com/office/drawing/2014/main" id="{C75DB40E-667F-4CC6-9E7A-A886D34EA2B4}"/>
-              </a:ext>
-            </a:extLst>
-          </p:cNvPr>
-          <p:cNvSpPr>
-            <a:spLocks xmlns:a="http://schemas.openxmlformats.org/drawingml/2006/main" noGrp="1"/>
-          </p:cNvSpPr>
-          <p:nvPr/>
-        </p:nvSpPr>
-        <p:spPr>
-          <a:xfrm xmlns:a="http://schemas.openxmlformats.org/drawingml/2006/main">
-            <a:off x="609600" y="6019800"/>
-            <a:ext cx="10972800" cy="238125"/>
-          </a:xfrm>
-          <a:prstGeom xmlns:a="http://schemas.openxmlformats.org/drawingml/2006/main" prst="rect">
-            <a:avLst/>
-          </a:prstGeom>
-          <a:noFill xmlns:a="http://schemas.openxmlformats.org/drawingml/2006/main"/>
-          <a:ln xmlns:a="http://schemas.openxmlformats.org/drawingml/2006/main" w="0">
-            <a:noFill/>
-          </a:ln>
-        </p:spPr>
-        <p:txBody>
-          <a:bodyPr xmlns:a="http://schemas.openxmlformats.org/drawingml/2006/main" anchor="ctr">
-            <a:noAutofit/>
-          </a:bodyPr>
-          <a:lstStyle xmlns:a="http://schemas.openxmlformats.org/drawingml/2006/main"/>
-          <a:p xmlns:a="http://schemas.openxmlformats.org/drawingml/2006/main">
-            <a:pPr algn="l">
-              <a:defRPr sz="1725" b="0">
-                <a:solidFill>
-                  <a:srgbClr val="52656B"/>
-                </a:solidFill>
-                <a:latin typeface="Arial"/>
-                <a:ea typeface="Arial"/>
-                <a:cs typeface="Arial"/>
-              </a:defRPr>
-            </a:pPr>
-            <a:r>
-              <a:rPr sz="1725" b="0">
-                <a:solidFill>
-                  <a:srgbClr val="52656B"/>
-                </a:solidFill>
-                <a:latin typeface="Arial"/>
-                <a:ea typeface="Arial"/>
-                <a:cs typeface="Arial"/>
-              </a:rPr>
-              <a:t>Cloud deployment remains future work.</a:t>
-            </a:r>
-          </a:p>
-        </p:txBody>
-      </p:sp>
-    </p:spTree>
-    <p:extLst>
-      <p:ext uri="{BB962C8B-B14F-4D97-AF65-F5344CB8AC3E}">
-        <p14:creationId xmlns:p14="http://schemas.microsoft.com/office/powerpoint/2010/main" val="1530388932"/>
-      </p:ext>
-    </p:extLst>
-  </p:cSld>
-</p:sld>
-</file>
-
-<file path=ppt/slides/slide19.xml><?xml version="1.0" encoding="utf-8"?>
 <p:sld xmlns:p="http://schemas.openxmlformats.org/presentationml/2006/main">
   <p:cSld>
     <p:bg>
@@ -7097,7 +3460,7 @@
           <p:cNvPr id="10" name="">
             <a:extLst xmlns:a="http://schemas.openxmlformats.org/drawingml/2006/main">
               <a:ext uri="{FF2B5EF4-FFF2-40B4-BE49-F238E27FC236}">
-                <a16:creationId xmlns:a16="http://schemas.microsoft.com/office/drawing/2014/main" id="{7C4FBCEF-E665-4ECA-9458-841AF728DBAF}"/>
+                <a16:creationId xmlns:a16="http://schemas.microsoft.com/office/drawing/2014/main" id="{74F2D1C2-2FFB-4A56-9F28-510255EFE9A6}"/>
               </a:ext>
             </a:extLst>
           </p:cNvPr>
@@ -7154,7 +3517,7 @@
           <p:cNvPr id="2" name="">
             <a:extLst xmlns:a="http://schemas.openxmlformats.org/drawingml/2006/main">
               <a:ext uri="{FF2B5EF4-FFF2-40B4-BE49-F238E27FC236}">
-                <a16:creationId xmlns:a16="http://schemas.microsoft.com/office/drawing/2014/main" id="{9F2F6380-427E-4161-9DFD-B504FC098B38}"/>
+                <a16:creationId xmlns:a16="http://schemas.microsoft.com/office/drawing/2014/main" id="{C7747D3A-B9C6-4D28-8827-042B0BCAB0CF}"/>
               </a:ext>
             </a:extLst>
           </p:cNvPr>
@@ -7211,7 +3574,7 @@
           <p:cNvPr id="3" name="">
             <a:extLst xmlns:a="http://schemas.openxmlformats.org/drawingml/2006/main">
               <a:ext uri="{FF2B5EF4-FFF2-40B4-BE49-F238E27FC236}">
-                <a16:creationId xmlns:a16="http://schemas.microsoft.com/office/drawing/2014/main" id="{20D0262E-37D4-4FD2-A5B4-B556AFAFC7DD}"/>
+                <a16:creationId xmlns:a16="http://schemas.microsoft.com/office/drawing/2014/main" id="{FD809459-563E-46FD-82B6-AF6549F7485A}"/>
               </a:ext>
             </a:extLst>
           </p:cNvPr>
@@ -7258,7 +3621,7 @@
                 <a:ea typeface="Arial"/>
                 <a:cs typeface="Arial"/>
               </a:rPr>
-              <a:t>19</a:t>
+              <a:t>14</a:t>
             </a:r>
           </a:p>
         </p:txBody>
@@ -7268,7 +3631,7 @@
           <p:cNvPr id="4" name="">
             <a:extLst xmlns:a="http://schemas.openxmlformats.org/drawingml/2006/main">
               <a:ext uri="{FF2B5EF4-FFF2-40B4-BE49-F238E27FC236}">
-                <a16:creationId xmlns:a16="http://schemas.microsoft.com/office/drawing/2014/main" id="{AB16095D-7070-45DD-9E60-1DD4D68C52E5}"/>
+                <a16:creationId xmlns:a16="http://schemas.microsoft.com/office/drawing/2014/main" id="{5675126E-5CAC-4F8E-BC96-F8E4A86107AB}"/>
               </a:ext>
             </a:extLst>
           </p:cNvPr>
@@ -7315,7 +3678,7 @@
                 <a:ea typeface="Arial"/>
                 <a:cs typeface="Arial"/>
               </a:rPr>
-              <a:t>Evidence for the classifier choice</a:t>
+              <a:t>Model comparison</a:t>
             </a:r>
           </a:p>
         </p:txBody>
@@ -7325,7 +3688,7 @@
           <p:cNvPr id="5" name="">
             <a:extLst xmlns:a="http://schemas.openxmlformats.org/drawingml/2006/main">
               <a:ext uri="{FF2B5EF4-FFF2-40B4-BE49-F238E27FC236}">
-                <a16:creationId xmlns:a16="http://schemas.microsoft.com/office/drawing/2014/main" id="{CB3F9C68-93E0-428A-A64F-B9A294A81CDD}"/>
+                <a16:creationId xmlns:a16="http://schemas.microsoft.com/office/drawing/2014/main" id="{5C0F2C50-330D-45A1-8B71-7F987C1B7341}"/>
               </a:ext>
             </a:extLst>
           </p:cNvPr>
@@ -7372,7 +3735,7 @@
                 <a:ea typeface="Arial"/>
                 <a:cs typeface="Arial"/>
               </a:rPr>
-              <a:t>CatBoost missed 8 fewer rejection cases than logistic, with 8 false flags each.</a:t>
+              <a:t>CatBoost missed 8 fewer rejection cases than logistic, with 8 incorrect flags each.</a:t>
             </a:r>
           </a:p>
           <a:p xmlns:a="http://schemas.openxmlformats.org/drawingml/2006/main">
@@ -7405,7 +3768,7 @@
           <p:cNvPr id="6" name="">
             <a:extLst xmlns:a="http://schemas.openxmlformats.org/drawingml/2006/main">
               <a:ext uri="{FF2B5EF4-FFF2-40B4-BE49-F238E27FC236}">
-                <a16:creationId xmlns:a16="http://schemas.microsoft.com/office/drawing/2014/main" id="{8D07A37B-B033-46B3-9909-D8D1E8DBF24B}"/>
+                <a16:creationId xmlns:a16="http://schemas.microsoft.com/office/drawing/2014/main" id="{8F8FE265-7F9F-4FF1-AA98-42BDAAF586B2}"/>
               </a:ext>
             </a:extLst>
           </p:cNvPr>
@@ -7434,7 +3797,7 @@
           <p:cNvPr id="7" name="">
             <a:extLst xmlns:a="http://schemas.openxmlformats.org/drawingml/2006/main">
               <a:ext uri="{FF2B5EF4-FFF2-40B4-BE49-F238E27FC236}">
-                <a16:creationId xmlns:a16="http://schemas.microsoft.com/office/drawing/2014/main" id="{869691A3-64E7-4C9C-A867-DC424B464BA4}"/>
+                <a16:creationId xmlns:a16="http://schemas.microsoft.com/office/drawing/2014/main" id="{51D44CC5-7581-4ECD-97EE-2D89FB47EC8E}"/>
               </a:ext>
             </a:extLst>
           </p:cNvPr>
@@ -7463,7 +3826,7 @@
           <a:lstStyle xmlns:a="http://schemas.openxmlformats.org/drawingml/2006/main"/>
           <a:p xmlns:a="http://schemas.openxmlformats.org/drawingml/2006/main">
             <a:pPr algn="l">
-              <a:defRPr sz="2700" b="1">
+              <a:defRPr sz="2775" b="1">
                 <a:solidFill>
                   <a:srgbClr val="FFFFFF"/>
                 </a:solidFill>
@@ -7473,7 +3836,7 @@
               </a:defRPr>
             </a:pPr>
             <a:r>
-              <a:rPr sz="2700" b="1">
+              <a:rPr sz="2775" b="1">
                 <a:solidFill>
                   <a:srgbClr val="FFFFFF"/>
                 </a:solidFill>
@@ -7481,7 +3844,7 @@
                 <a:ea typeface="Arial"/>
                 <a:cs typeface="Arial"/>
               </a:rPr>
-              <a:t>Working software that preserves the calculation</a:t>
+              <a:t>Software engineering</a:t>
             </a:r>
           </a:p>
         </p:txBody>
@@ -7491,19 +3854,19 @@
           <p:cNvPr id="8" name="">
             <a:extLst xmlns:a="http://schemas.openxmlformats.org/drawingml/2006/main">
               <a:ext uri="{FF2B5EF4-FFF2-40B4-BE49-F238E27FC236}">
-                <a16:creationId xmlns:a16="http://schemas.microsoft.com/office/drawing/2014/main" id="{B5BFC880-BE2F-4D97-AD7A-A79C557E6188}"/>
-              </a:ext>
-            </a:extLst>
-          </p:cNvPr>
-          <p:cNvSpPr>
-            <a:spLocks xmlns:a="http://schemas.openxmlformats.org/drawingml/2006/main" noGrp="1"/>
-          </p:cNvSpPr>
-          <p:nvPr/>
-        </p:nvSpPr>
-        <p:spPr>
-          <a:xfrm xmlns:a="http://schemas.openxmlformats.org/drawingml/2006/main">
-            <a:off x="609600" y="4657725"/>
-            <a:ext cx="10972800" cy="704850"/>
+                <a16:creationId xmlns:a16="http://schemas.microsoft.com/office/drawing/2014/main" id="{893C5769-C5C7-4137-B0F7-48A20CF575F1}"/>
+              </a:ext>
+            </a:extLst>
+          </p:cNvPr>
+          <p:cNvSpPr>
+            <a:spLocks xmlns:a="http://schemas.openxmlformats.org/drawingml/2006/main" noGrp="1"/>
+          </p:cNvSpPr>
+          <p:nvPr/>
+        </p:nvSpPr>
+        <p:spPr>
+          <a:xfrm xmlns:a="http://schemas.openxmlformats.org/drawingml/2006/main">
+            <a:off x="609600" y="4629150"/>
+            <a:ext cx="10972800" cy="838200"/>
           </a:xfrm>
           <a:prstGeom xmlns:a="http://schemas.openxmlformats.org/drawingml/2006/main" prst="rect">
             <a:avLst/>
@@ -7520,7 +3883,7 @@
           <a:lstStyle xmlns:a="http://schemas.openxmlformats.org/drawingml/2006/main"/>
           <a:p xmlns:a="http://schemas.openxmlformats.org/drawingml/2006/main">
             <a:pPr algn="l">
-              <a:defRPr sz="2400" b="0">
+              <a:defRPr sz="2325" b="0">
                 <a:solidFill>
                   <a:srgbClr val="FFFFFF"/>
                 </a:solidFill>
@@ -7530,7 +3893,7 @@
               </a:defRPr>
             </a:pPr>
             <a:r>
-              <a:rPr sz="2400" b="0">
+              <a:rPr sz="2325" b="0">
                 <a:solidFill>
                   <a:srgbClr val="FFFFFF"/>
                 </a:solidFill>
@@ -7538,7 +3901,30 @@
                 <a:ea typeface="Arial"/>
                 <a:cs typeface="Arial"/>
               </a:rPr>
-              <a:t>A versioned score, clear input errors and checks against the saved results.</a:t>
+              <a:t>Reproducible analysis and a tested scoring service,</a:t>
+            </a:r>
+          </a:p>
+          <a:p xmlns:a="http://schemas.openxmlformats.org/drawingml/2006/main">
+            <a:pPr algn="l">
+              <a:defRPr sz="2325" b="0">
+                <a:solidFill>
+                  <a:srgbClr val="FFFFFF"/>
+                </a:solidFill>
+                <a:latin typeface="Arial"/>
+                <a:ea typeface="Arial"/>
+                <a:cs typeface="Arial"/>
+              </a:defRPr>
+            </a:pPr>
+            <a:r>
+              <a:rPr sz="2325" b="0">
+                <a:solidFill>
+                  <a:srgbClr val="FFFFFF"/>
+                </a:solidFill>
+                <a:latin typeface="Arial"/>
+                <a:ea typeface="Arial"/>
+                <a:cs typeface="Arial"/>
+              </a:rPr>
+              <a:t>with a prototype application and checks against saved results.</a:t>
             </a:r>
           </a:p>
         </p:txBody>
@@ -7548,19 +3934,19 @@
           <p:cNvPr id="9" name="">
             <a:extLst xmlns:a="http://schemas.openxmlformats.org/drawingml/2006/main">
               <a:ext uri="{FF2B5EF4-FFF2-40B4-BE49-F238E27FC236}">
-                <a16:creationId xmlns:a16="http://schemas.microsoft.com/office/drawing/2014/main" id="{877465D6-6FED-4DED-B2BB-3C4D5CFA05D6}"/>
-              </a:ext>
-            </a:extLst>
-          </p:cNvPr>
-          <p:cNvSpPr>
-            <a:spLocks xmlns:a="http://schemas.openxmlformats.org/drawingml/2006/main" noGrp="1"/>
-          </p:cNvSpPr>
-          <p:nvPr/>
-        </p:nvSpPr>
-        <p:spPr>
-          <a:xfrm xmlns:a="http://schemas.openxmlformats.org/drawingml/2006/main">
-            <a:off x="609600" y="5514975"/>
-            <a:ext cx="10972800" cy="666750"/>
+                <a16:creationId xmlns:a16="http://schemas.microsoft.com/office/drawing/2014/main" id="{406F0F6F-77E5-4E9F-81BD-8B56BAD1D329}"/>
+              </a:ext>
+            </a:extLst>
+          </p:cNvPr>
+          <p:cNvSpPr>
+            <a:spLocks xmlns:a="http://schemas.openxmlformats.org/drawingml/2006/main" noGrp="1"/>
+          </p:cNvSpPr>
+          <p:nvPr/>
+        </p:nvSpPr>
+        <p:spPr>
+          <a:xfrm xmlns:a="http://schemas.openxmlformats.org/drawingml/2006/main">
+            <a:off x="609600" y="5572125"/>
+            <a:ext cx="10972800" cy="619125"/>
           </a:xfrm>
           <a:prstGeom xmlns:a="http://schemas.openxmlformats.org/drawingml/2006/main" prst="rect">
             <a:avLst/>
@@ -7618,7 +4004,7 @@
                 <a:ea typeface="Arial"/>
                 <a:cs typeface="Arial"/>
               </a:rPr>
-              <a:t>Added diagnostic value of this particular score needs direct evaluation.</a:t>
+              <a:t>Then investigate whether the score adds useful diagnostic information.</a:t>
             </a:r>
           </a:p>
         </p:txBody>
@@ -7626,7 +4012,7 @@
     </p:spTree>
     <p:extLst>
       <p:ext uri="{BB962C8B-B14F-4D97-AF65-F5344CB8AC3E}">
-        <p14:creationId xmlns:p14="http://schemas.microsoft.com/office/powerpoint/2010/main" val="1086332129"/>
+        <p14:creationId xmlns:p14="http://schemas.microsoft.com/office/powerpoint/2010/main" val="654479045"/>
       </p:ext>
     </p:extLst>
   </p:cSld>
@@ -7657,7 +4043,7 @@
           <p:cNvPr id="8" name="">
             <a:extLst xmlns:a="http://schemas.openxmlformats.org/drawingml/2006/main">
               <a:ext uri="{FF2B5EF4-FFF2-40B4-BE49-F238E27FC236}">
-                <a16:creationId xmlns:a16="http://schemas.microsoft.com/office/drawing/2014/main" id="{E5AACE76-F09B-4101-B69F-319645C3B164}"/>
+                <a16:creationId xmlns:a16="http://schemas.microsoft.com/office/drawing/2014/main" id="{27930E4E-2091-44E3-9EF4-8DC9CC020A9D}"/>
               </a:ext>
             </a:extLst>
           </p:cNvPr>
@@ -7714,7 +4100,7 @@
           <p:cNvPr id="2" name="">
             <a:extLst xmlns:a="http://schemas.openxmlformats.org/drawingml/2006/main">
               <a:ext uri="{FF2B5EF4-FFF2-40B4-BE49-F238E27FC236}">
-                <a16:creationId xmlns:a16="http://schemas.microsoft.com/office/drawing/2014/main" id="{2165E769-3B74-4AFC-B649-30DD52B6B0B9}"/>
+                <a16:creationId xmlns:a16="http://schemas.microsoft.com/office/drawing/2014/main" id="{DF694DCC-E773-4582-91F2-81495E3C6ACC}"/>
               </a:ext>
             </a:extLst>
           </p:cNvPr>
@@ -7771,7 +4157,7 @@
           <p:cNvPr id="3" name="">
             <a:extLst xmlns:a="http://schemas.openxmlformats.org/drawingml/2006/main">
               <a:ext uri="{FF2B5EF4-FFF2-40B4-BE49-F238E27FC236}">
-                <a16:creationId xmlns:a16="http://schemas.microsoft.com/office/drawing/2014/main" id="{526093F8-240E-4697-BE53-38CF30458E9D}"/>
+                <a16:creationId xmlns:a16="http://schemas.microsoft.com/office/drawing/2014/main" id="{156986E7-4656-4C62-867E-CA74CA558D31}"/>
               </a:ext>
             </a:extLst>
           </p:cNvPr>
@@ -7828,7 +4214,7 @@
           <p:cNvPr id="4" name="">
             <a:extLst xmlns:a="http://schemas.openxmlformats.org/drawingml/2006/main">
               <a:ext uri="{FF2B5EF4-FFF2-40B4-BE49-F238E27FC236}">
-                <a16:creationId xmlns:a16="http://schemas.microsoft.com/office/drawing/2014/main" id="{B3E775AA-DCF2-44F9-BA82-8E6D6CB7C49A}"/>
+                <a16:creationId xmlns:a16="http://schemas.microsoft.com/office/drawing/2014/main" id="{6E338257-570F-4126-9AD8-7F7D0711BF83}"/>
               </a:ext>
             </a:extLst>
           </p:cNvPr>
@@ -7885,7 +4271,7 @@
           <p:cNvPr id="5" name="">
             <a:extLst xmlns:a="http://schemas.openxmlformats.org/drawingml/2006/main">
               <a:ext uri="{FF2B5EF4-FFF2-40B4-BE49-F238E27FC236}">
-                <a16:creationId xmlns:a16="http://schemas.microsoft.com/office/drawing/2014/main" id="{5B477F46-999E-4402-B044-6C544FAE59FC}"/>
+                <a16:creationId xmlns:a16="http://schemas.microsoft.com/office/drawing/2014/main" id="{F4D1325E-2BCE-4A98-83C3-76BDE9A19ED4}"/>
               </a:ext>
             </a:extLst>
           </p:cNvPr>
@@ -7942,7 +4328,7 @@
           <p:cNvPr id="6" name="">
             <a:extLst xmlns:a="http://schemas.openxmlformats.org/drawingml/2006/main">
               <a:ext uri="{FF2B5EF4-FFF2-40B4-BE49-F238E27FC236}">
-                <a16:creationId xmlns:a16="http://schemas.microsoft.com/office/drawing/2014/main" id="{3C0411FF-8FF5-4EAA-8C68-6A9D258F4611}"/>
+                <a16:creationId xmlns:a16="http://schemas.microsoft.com/office/drawing/2014/main" id="{8A23FF54-7C51-4397-A52D-AA52987614BB}"/>
               </a:ext>
             </a:extLst>
           </p:cNvPr>
@@ -7989,7 +4375,7 @@
               <a:t>Histology: </a:t>
             </a:r>
             <a:r>
-              <a:t>Microscopic examination reveals injury and inflammation that can support a rejection diagnosis.</a:t>
+              <a:t>A microscopic examination that reveals injury and inflammation, which can support a rejection diagnosis.</a:t>
             </a:r>
           </a:p>
         </p:txBody>
@@ -7999,7 +4385,7 @@
           <p:cNvPr id="7" name="">
             <a:extLst xmlns:a="http://schemas.openxmlformats.org/drawingml/2006/main">
               <a:ext uri="{FF2B5EF4-FFF2-40B4-BE49-F238E27FC236}">
-                <a16:creationId xmlns:a16="http://schemas.microsoft.com/office/drawing/2014/main" id="{9DA87B9A-090F-4236-9B5C-644E807A74CE}"/>
+                <a16:creationId xmlns:a16="http://schemas.microsoft.com/office/drawing/2014/main" id="{E117BB0A-9A66-40A4-8026-18EE06DC4EA0}"/>
               </a:ext>
             </a:extLst>
           </p:cNvPr>
@@ -8046,7 +4432,7 @@
               <a:t>Molecular measurements: </a:t>
             </a:r>
             <a:r>
-              <a:t>Counts of selected RNA types reflect gene activity and the mix of cells in the tissue.</a:t>
+              <a:t>Counts of selected RNA types that reflect gene activity in the mix of cells in the tissue.</a:t>
             </a:r>
           </a:p>
         </p:txBody>
@@ -8054,7 +4440,7 @@
     </p:spTree>
     <p:extLst>
       <p:ext uri="{BB962C8B-B14F-4D97-AF65-F5344CB8AC3E}">
-        <p14:creationId xmlns:p14="http://schemas.microsoft.com/office/powerpoint/2010/main" val="1604476119"/>
+        <p14:creationId xmlns:p14="http://schemas.microsoft.com/office/powerpoint/2010/main" val="794775973"/>
       </p:ext>
     </p:extLst>
   </p:cSld>
@@ -8082,10 +4468,10 @@
       </p:grpSpPr>
       <p:sp>
         <p:nvSpPr>
-          <p:cNvPr id="6" name="">
-            <a:extLst xmlns:a="http://schemas.openxmlformats.org/drawingml/2006/main">
-              <a:ext uri="{FF2B5EF4-FFF2-40B4-BE49-F238E27FC236}">
-                <a16:creationId xmlns:a16="http://schemas.microsoft.com/office/drawing/2014/main" id="{8C7CC288-B6D6-4EE7-91C3-FBAA20CB37B8}"/>
+          <p:cNvPr id="9" name="">
+            <a:extLst xmlns:a="http://schemas.openxmlformats.org/drawingml/2006/main">
+              <a:ext uri="{FF2B5EF4-FFF2-40B4-BE49-F238E27FC236}">
+                <a16:creationId xmlns:a16="http://schemas.microsoft.com/office/drawing/2014/main" id="{A30E12C4-0B63-4971-A369-B32354E20995}"/>
               </a:ext>
             </a:extLst>
           </p:cNvPr>
@@ -8142,7 +4528,7 @@
           <p:cNvPr id="2" name="">
             <a:extLst xmlns:a="http://schemas.openxmlformats.org/drawingml/2006/main">
               <a:ext uri="{FF2B5EF4-FFF2-40B4-BE49-F238E27FC236}">
-                <a16:creationId xmlns:a16="http://schemas.microsoft.com/office/drawing/2014/main" id="{6DCC2A99-696D-4E71-B44E-608A723A5CC9}"/>
+                <a16:creationId xmlns:a16="http://schemas.microsoft.com/office/drawing/2014/main" id="{45F89D6D-F1C0-4CB1-8BBB-A4B55CD8C03B}"/>
               </a:ext>
             </a:extLst>
           </p:cNvPr>
@@ -8189,7 +4575,7 @@
                 <a:ea typeface="Arial"/>
                 <a:cs typeface="Arial"/>
               </a:rPr>
-              <a:t>Clinical context: Banff Reference Guide (2026). Public data: Zhang et al. (2024).</a:t>
+              <a:t>Clinical rationale: Zhang et al. (2024), Discussion, p. 13; KDIGO (2009).</a:t>
             </a:r>
           </a:p>
         </p:txBody>
@@ -8199,7 +4585,7 @@
           <p:cNvPr id="3" name="">
             <a:extLst xmlns:a="http://schemas.openxmlformats.org/drawingml/2006/main">
               <a:ext uri="{FF2B5EF4-FFF2-40B4-BE49-F238E27FC236}">
-                <a16:creationId xmlns:a16="http://schemas.microsoft.com/office/drawing/2014/main" id="{50EFC309-97C9-474C-A6FC-618DEA7DDE9E}"/>
+                <a16:creationId xmlns:a16="http://schemas.microsoft.com/office/drawing/2014/main" id="{56200CA0-C12D-4421-8696-DE2F68E059A8}"/>
               </a:ext>
             </a:extLst>
           </p:cNvPr>
@@ -8256,134 +4642,19 @@
           <p:cNvPr id="4" name="">
             <a:extLst xmlns:a="http://schemas.openxmlformats.org/drawingml/2006/main">
               <a:ext uri="{FF2B5EF4-FFF2-40B4-BE49-F238E27FC236}">
-                <a16:creationId xmlns:a16="http://schemas.microsoft.com/office/drawing/2014/main" id="{C42C2754-8114-4BD0-ACC4-82F7CF1D74F5}"/>
-              </a:ext>
-            </a:extLst>
-          </p:cNvPr>
-          <p:cNvSpPr>
-            <a:spLocks xmlns:a="http://schemas.openxmlformats.org/drawingml/2006/main" noGrp="1"/>
-          </p:cNvSpPr>
-          <p:nvPr/>
-        </p:nvSpPr>
-        <p:spPr>
-          <a:xfrm xmlns:a="http://schemas.openxmlformats.org/drawingml/2006/main">
-            <a:off x="609600" y="1876425"/>
-            <a:ext cx="10972800" cy="3219450"/>
-          </a:xfrm>
-          <a:prstGeom xmlns:a="http://schemas.openxmlformats.org/drawingml/2006/main" prst="rect">
-            <a:avLst/>
-          </a:prstGeom>
-          <a:noFill xmlns:a="http://schemas.openxmlformats.org/drawingml/2006/main"/>
-          <a:ln xmlns:a="http://schemas.openxmlformats.org/drawingml/2006/main" w="0">
-            <a:noFill/>
-          </a:ln>
-        </p:spPr>
-        <p:txBody>
-          <a:bodyPr xmlns:a="http://schemas.openxmlformats.org/drawingml/2006/main" anchor="t">
-            <a:noAutofit/>
-          </a:bodyPr>
-          <a:lstStyle xmlns:a="http://schemas.openxmlformats.org/drawingml/2006/main"/>
-          <a:p xmlns:a="http://schemas.openxmlformats.org/drawingml/2006/main">
-            <a:pPr marL="279400" indent="-152400" algn="l">
-              <a:spcAft>
-                <a:spcPts val="3000"/>
-              </a:spcAft>
-              <a:buChar char="•"/>
-              <a:defRPr sz="2550" b="0">
-                <a:solidFill>
-                  <a:srgbClr val="16343E"/>
-                </a:solidFill>
-                <a:latin typeface="Arial"/>
-                <a:ea typeface="Arial"/>
-                <a:cs typeface="Arial"/>
-              </a:defRPr>
-            </a:pPr>
-            <a:r>
-              <a:rPr sz="2550" b="0">
-                <a:solidFill>
-                  <a:srgbClr val="16343E"/>
-                </a:solidFill>
-                <a:latin typeface="Arial"/>
-                <a:ea typeface="Arial"/>
-                <a:cs typeface="Arial"/>
-              </a:rPr>
-              <a:t>Molecular measurements already have a recognized role in parts of transplant rejection assessment.</a:t>
-            </a:r>
-          </a:p>
-          <a:p xmlns:a="http://schemas.openxmlformats.org/drawingml/2006/main">
-            <a:pPr marL="279400" indent="-152400" algn="l">
-              <a:spcAft>
-                <a:spcPts val="3000"/>
-              </a:spcAft>
-              <a:buChar char="•"/>
-              <a:defRPr sz="2550" b="0">
-                <a:solidFill>
-                  <a:srgbClr val="16343E"/>
-                </a:solidFill>
-                <a:latin typeface="Arial"/>
-                <a:ea typeface="Arial"/>
-                <a:cs typeface="Arial"/>
-              </a:defRPr>
-            </a:pPr>
-            <a:r>
-              <a:rPr sz="2550" b="0">
-                <a:solidFill>
-                  <a:srgbClr val="16343E"/>
-                </a:solidFill>
-                <a:latin typeface="Arial"/>
-                <a:ea typeface="Arial"/>
-                <a:cs typeface="Arial"/>
-              </a:rPr>
-              <a:t>This project uses that established application to compare missed rejection and false flags across classifiers.</a:t>
-            </a:r>
-          </a:p>
-          <a:p xmlns:a="http://schemas.openxmlformats.org/drawingml/2006/main">
-            <a:pPr marL="279400" indent="-152400" algn="l">
-              <a:spcAft>
-                <a:spcPts val="3000"/>
-              </a:spcAft>
-              <a:buChar char="•"/>
-              <a:defRPr sz="2550" b="0">
-                <a:solidFill>
-                  <a:srgbClr val="16343E"/>
-                </a:solidFill>
-                <a:latin typeface="Arial"/>
-                <a:ea typeface="Arial"/>
-                <a:cs typeface="Arial"/>
-              </a:defRPr>
-            </a:pPr>
-            <a:r>
-              <a:rPr sz="2550" b="0">
-                <a:solidFill>
-                  <a:srgbClr val="16343E"/>
-                </a:solidFill>
-                <a:latin typeface="Arial"/>
-                <a:ea typeface="Arial"/>
-                <a:cs typeface="Arial"/>
-              </a:rPr>
-              <a:t>The aim is to assess what a more complex model contributes before further validation.</a:t>
-            </a:r>
-          </a:p>
-        </p:txBody>
-      </p:sp>
-      <p:sp>
-        <p:nvSpPr>
-          <p:cNvPr id="5" name="">
-            <a:extLst xmlns:a="http://schemas.openxmlformats.org/drawingml/2006/main">
-              <a:ext uri="{FF2B5EF4-FFF2-40B4-BE49-F238E27FC236}">
-                <a16:creationId xmlns:a16="http://schemas.microsoft.com/office/drawing/2014/main" id="{81C1807E-D2B4-4CDA-9A53-0EF399727A26}"/>
-              </a:ext>
-            </a:extLst>
-          </p:cNvPr>
-          <p:cNvSpPr>
-            <a:spLocks xmlns:a="http://schemas.openxmlformats.org/drawingml/2006/main" noGrp="1"/>
-          </p:cNvSpPr>
-          <p:nvPr/>
-        </p:nvSpPr>
-        <p:spPr>
-          <a:xfrm xmlns:a="http://schemas.openxmlformats.org/drawingml/2006/main">
-            <a:off x="609600" y="5410200"/>
-            <a:ext cx="10972800" cy="714375"/>
+                <a16:creationId xmlns:a16="http://schemas.microsoft.com/office/drawing/2014/main" id="{AFAB733E-4575-4F90-9A74-0D82A1BD2C43}"/>
+              </a:ext>
+            </a:extLst>
+          </p:cNvPr>
+          <p:cNvSpPr>
+            <a:spLocks xmlns:a="http://schemas.openxmlformats.org/drawingml/2006/main" noGrp="1"/>
+          </p:cNvSpPr>
+          <p:nvPr/>
+        </p:nvSpPr>
+        <p:spPr>
+          <a:xfrm xmlns:a="http://schemas.openxmlformats.org/drawingml/2006/main">
+            <a:off x="609600" y="1562100"/>
+            <a:ext cx="10972800" cy="762000"/>
           </a:xfrm>
           <a:prstGeom xmlns:a="http://schemas.openxmlformats.org/drawingml/2006/main" prst="rect">
             <a:avLst/>
@@ -8400,7 +4671,7 @@
           <a:lstStyle xmlns:a="http://schemas.openxmlformats.org/drawingml/2006/main"/>
           <a:p xmlns:a="http://schemas.openxmlformats.org/drawingml/2006/main">
             <a:pPr algn="l">
-              <a:defRPr sz="2175" b="1">
+              <a:defRPr sz="2325" b="0">
                 <a:solidFill>
                   <a:srgbClr val="007C78"/>
                 </a:solidFill>
@@ -8410,7 +4681,7 @@
               </a:defRPr>
             </a:pPr>
             <a:r>
-              <a:rPr sz="2175" b="1">
+              <a:rPr sz="2325" b="0">
                 <a:solidFill>
                   <a:srgbClr val="007C78"/>
                 </a:solidFill>
@@ -8418,7 +4689,235 @@
                 <a:ea typeface="Arial"/>
                 <a:cs typeface="Arial"/>
               </a:rPr>
-              <a:t>The scoring software preserves the procedure evaluated here.</a:t>
+              <a:t>Whether rejection is present can affect decisions about further treatment to suppress the immune system.</a:t>
+            </a:r>
+          </a:p>
+        </p:txBody>
+      </p:sp>
+      <p:sp>
+        <p:nvSpPr>
+          <p:cNvPr id="5" name="">
+            <a:extLst xmlns:a="http://schemas.openxmlformats.org/drawingml/2006/main">
+              <a:ext uri="{FF2B5EF4-FFF2-40B4-BE49-F238E27FC236}">
+                <a16:creationId xmlns:a16="http://schemas.microsoft.com/office/drawing/2014/main" id="{EDE55258-FBBB-4669-AAC5-5E0FC5488BF0}"/>
+              </a:ext>
+            </a:extLst>
+          </p:cNvPr>
+          <p:cNvSpPr>
+            <a:spLocks xmlns:a="http://schemas.openxmlformats.org/drawingml/2006/main" noGrp="1"/>
+          </p:cNvSpPr>
+          <p:nvPr/>
+        </p:nvSpPr>
+        <p:spPr>
+          <a:xfrm xmlns:a="http://schemas.openxmlformats.org/drawingml/2006/main">
+            <a:off x="609600" y="2581275"/>
+            <a:ext cx="10972800" cy="447675"/>
+          </a:xfrm>
+          <a:prstGeom xmlns:a="http://schemas.openxmlformats.org/drawingml/2006/main" prst="rect">
+            <a:avLst/>
+          </a:prstGeom>
+          <a:noFill xmlns:a="http://schemas.openxmlformats.org/drawingml/2006/main"/>
+          <a:ln xmlns:a="http://schemas.openxmlformats.org/drawingml/2006/main" w="0">
+            <a:noFill/>
+          </a:ln>
+        </p:spPr>
+        <p:txBody>
+          <a:bodyPr xmlns:a="http://schemas.openxmlformats.org/drawingml/2006/main" anchor="ctr">
+            <a:noAutofit/>
+          </a:bodyPr>
+          <a:lstStyle xmlns:a="http://schemas.openxmlformats.org/drawingml/2006/main"/>
+          <a:p xmlns:a="http://schemas.openxmlformats.org/drawingml/2006/main">
+            <a:pPr algn="l">
+              <a:defRPr sz="2475" b="1">
+                <a:solidFill>
+                  <a:srgbClr val="16343E"/>
+                </a:solidFill>
+                <a:latin typeface="Arial"/>
+                <a:ea typeface="Arial"/>
+                <a:cs typeface="Arial"/>
+              </a:defRPr>
+            </a:pPr>
+            <a:r>
+              <a:rPr sz="2475" b="1">
+                <a:solidFill>
+                  <a:srgbClr val="16343E"/>
+                </a:solidFill>
+                <a:latin typeface="Arial"/>
+                <a:ea typeface="Arial"/>
+                <a:cs typeface="Arial"/>
+              </a:rPr>
+              <a:t>Model comparison</a:t>
+            </a:r>
+          </a:p>
+        </p:txBody>
+      </p:sp>
+      <p:sp>
+        <p:nvSpPr>
+          <p:cNvPr id="6" name="">
+            <a:extLst xmlns:a="http://schemas.openxmlformats.org/drawingml/2006/main">
+              <a:ext uri="{FF2B5EF4-FFF2-40B4-BE49-F238E27FC236}">
+                <a16:creationId xmlns:a16="http://schemas.microsoft.com/office/drawing/2014/main" id="{0FD4F0F7-8DBE-4665-974D-BE48EE485C12}"/>
+              </a:ext>
+            </a:extLst>
+          </p:cNvPr>
+          <p:cNvSpPr>
+            <a:spLocks xmlns:a="http://schemas.openxmlformats.org/drawingml/2006/main" noGrp="1"/>
+          </p:cNvSpPr>
+          <p:nvPr/>
+        </p:nvSpPr>
+        <p:spPr>
+          <a:xfrm xmlns:a="http://schemas.openxmlformats.org/drawingml/2006/main">
+            <a:off x="609600" y="3048000"/>
+            <a:ext cx="10972800" cy="1219200"/>
+          </a:xfrm>
+          <a:prstGeom xmlns:a="http://schemas.openxmlformats.org/drawingml/2006/main" prst="rect">
+            <a:avLst/>
+          </a:prstGeom>
+          <a:noFill xmlns:a="http://schemas.openxmlformats.org/drawingml/2006/main"/>
+          <a:ln xmlns:a="http://schemas.openxmlformats.org/drawingml/2006/main" w="0">
+            <a:noFill/>
+          </a:ln>
+        </p:spPr>
+        <p:txBody>
+          <a:bodyPr xmlns:a="http://schemas.openxmlformats.org/drawingml/2006/main" anchor="ctr">
+            <a:noAutofit/>
+          </a:bodyPr>
+          <a:lstStyle xmlns:a="http://schemas.openxmlformats.org/drawingml/2006/main"/>
+          <a:p xmlns:a="http://schemas.openxmlformats.org/drawingml/2006/main">
+            <a:pPr algn="l">
+              <a:defRPr sz="2250" b="0">
+                <a:solidFill>
+                  <a:srgbClr val="16343E"/>
+                </a:solidFill>
+                <a:latin typeface="Arial"/>
+                <a:ea typeface="Arial"/>
+                <a:cs typeface="Arial"/>
+              </a:defRPr>
+            </a:pPr>
+            <a:r>
+              <a:rPr sz="2250" b="0">
+                <a:solidFill>
+                  <a:srgbClr val="16343E"/>
+                </a:solidFill>
+                <a:latin typeface="Arial"/>
+                <a:ea typeface="Arial"/>
+                <a:cs typeface="Arial"/>
+              </a:rPr>
+              <a:t>How do logistic regression and CatBoost compare in classifying any recorded rejection versus no rejection from B-HOT biopsy RNA, particularly in missed cases and incorrect flags?</a:t>
+            </a:r>
+          </a:p>
+        </p:txBody>
+      </p:sp>
+      <p:sp>
+        <p:nvSpPr>
+          <p:cNvPr id="7" name="">
+            <a:extLst xmlns:a="http://schemas.openxmlformats.org/drawingml/2006/main">
+              <a:ext uri="{FF2B5EF4-FFF2-40B4-BE49-F238E27FC236}">
+                <a16:creationId xmlns:a16="http://schemas.microsoft.com/office/drawing/2014/main" id="{1F406C38-78F6-461D-8193-2E2DBB230A2B}"/>
+              </a:ext>
+            </a:extLst>
+          </p:cNvPr>
+          <p:cNvSpPr>
+            <a:spLocks xmlns:a="http://schemas.openxmlformats.org/drawingml/2006/main" noGrp="1"/>
+          </p:cNvSpPr>
+          <p:nvPr/>
+        </p:nvSpPr>
+        <p:spPr>
+          <a:xfrm xmlns:a="http://schemas.openxmlformats.org/drawingml/2006/main">
+            <a:off x="609600" y="4457700"/>
+            <a:ext cx="10972800" cy="447675"/>
+          </a:xfrm>
+          <a:prstGeom xmlns:a="http://schemas.openxmlformats.org/drawingml/2006/main" prst="rect">
+            <a:avLst/>
+          </a:prstGeom>
+          <a:noFill xmlns:a="http://schemas.openxmlformats.org/drawingml/2006/main"/>
+          <a:ln xmlns:a="http://schemas.openxmlformats.org/drawingml/2006/main" w="0">
+            <a:noFill/>
+          </a:ln>
+        </p:spPr>
+        <p:txBody>
+          <a:bodyPr xmlns:a="http://schemas.openxmlformats.org/drawingml/2006/main" anchor="ctr">
+            <a:noAutofit/>
+          </a:bodyPr>
+          <a:lstStyle xmlns:a="http://schemas.openxmlformats.org/drawingml/2006/main"/>
+          <a:p xmlns:a="http://schemas.openxmlformats.org/drawingml/2006/main">
+            <a:pPr algn="l">
+              <a:defRPr sz="2475" b="1">
+                <a:solidFill>
+                  <a:srgbClr val="16343E"/>
+                </a:solidFill>
+                <a:latin typeface="Arial"/>
+                <a:ea typeface="Arial"/>
+                <a:cs typeface="Arial"/>
+              </a:defRPr>
+            </a:pPr>
+            <a:r>
+              <a:rPr sz="2475" b="1">
+                <a:solidFill>
+                  <a:srgbClr val="16343E"/>
+                </a:solidFill>
+                <a:latin typeface="Arial"/>
+                <a:ea typeface="Arial"/>
+                <a:cs typeface="Arial"/>
+              </a:rPr>
+              <a:t>Software engineering</a:t>
+            </a:r>
+          </a:p>
+        </p:txBody>
+      </p:sp>
+      <p:sp>
+        <p:nvSpPr>
+          <p:cNvPr id="8" name="">
+            <a:extLst xmlns:a="http://schemas.openxmlformats.org/drawingml/2006/main">
+              <a:ext uri="{FF2B5EF4-FFF2-40B4-BE49-F238E27FC236}">
+                <a16:creationId xmlns:a16="http://schemas.microsoft.com/office/drawing/2014/main" id="{A7FCD3FA-819B-4BE7-A050-F7C44F2A8B16}"/>
+              </a:ext>
+            </a:extLst>
+          </p:cNvPr>
+          <p:cNvSpPr>
+            <a:spLocks xmlns:a="http://schemas.openxmlformats.org/drawingml/2006/main" noGrp="1"/>
+          </p:cNvSpPr>
+          <p:nvPr/>
+        </p:nvSpPr>
+        <p:spPr>
+          <a:xfrm xmlns:a="http://schemas.openxmlformats.org/drawingml/2006/main">
+            <a:off x="609600" y="4924425"/>
+            <a:ext cx="10972800" cy="1200150"/>
+          </a:xfrm>
+          <a:prstGeom xmlns:a="http://schemas.openxmlformats.org/drawingml/2006/main" prst="rect">
+            <a:avLst/>
+          </a:prstGeom>
+          <a:noFill xmlns:a="http://schemas.openxmlformats.org/drawingml/2006/main"/>
+          <a:ln xmlns:a="http://schemas.openxmlformats.org/drawingml/2006/main" w="0">
+            <a:noFill/>
+          </a:ln>
+        </p:spPr>
+        <p:txBody>
+          <a:bodyPr xmlns:a="http://schemas.openxmlformats.org/drawingml/2006/main" anchor="ctr">
+            <a:noAutofit/>
+          </a:bodyPr>
+          <a:lstStyle xmlns:a="http://schemas.openxmlformats.org/drawingml/2006/main"/>
+          <a:p xmlns:a="http://schemas.openxmlformats.org/drawingml/2006/main">
+            <a:pPr algn="l">
+              <a:defRPr sz="2250" b="0">
+                <a:solidFill>
+                  <a:srgbClr val="16343E"/>
+                </a:solidFill>
+                <a:latin typeface="Arial"/>
+                <a:ea typeface="Arial"/>
+                <a:cs typeface="Arial"/>
+              </a:defRPr>
+            </a:pPr>
+            <a:r>
+              <a:rPr sz="2250" b="0">
+                <a:solidFill>
+                  <a:srgbClr val="16343E"/>
+                </a:solidFill>
+                <a:latin typeface="Arial"/>
+                <a:ea typeface="Arial"/>
+                <a:cs typeface="Arial"/>
+              </a:rPr>
+              <a:t>Make preprocessing, training and evaluation reproducible. Build a tested scoring service and prototype application that let a user submit a specimen’s RNA counts and inspect its model score, threshold and rejection flag.</a:t>
             </a:r>
           </a:p>
         </p:txBody>
@@ -8426,7 +4925,7 @@
     </p:spTree>
     <p:extLst>
       <p:ext uri="{BB962C8B-B14F-4D97-AF65-F5344CB8AC3E}">
-        <p14:creationId xmlns:p14="http://schemas.microsoft.com/office/powerpoint/2010/main" val="1753361183"/>
+        <p14:creationId xmlns:p14="http://schemas.microsoft.com/office/powerpoint/2010/main" val="1416086153"/>
       </p:ext>
     </p:extLst>
   </p:cSld>
@@ -8454,10 +4953,10 @@
       </p:grpSpPr>
       <p:sp>
         <p:nvSpPr>
-          <p:cNvPr id="13" name="">
-            <a:extLst xmlns:a="http://schemas.openxmlformats.org/drawingml/2006/main">
-              <a:ext uri="{FF2B5EF4-FFF2-40B4-BE49-F238E27FC236}">
-                <a16:creationId xmlns:a16="http://schemas.microsoft.com/office/drawing/2014/main" id="{89882B71-677C-48B5-B535-30732198E9A4}"/>
+          <p:cNvPr id="12" name="">
+            <a:extLst xmlns:a="http://schemas.openxmlformats.org/drawingml/2006/main">
+              <a:ext uri="{FF2B5EF4-FFF2-40B4-BE49-F238E27FC236}">
+                <a16:creationId xmlns:a16="http://schemas.microsoft.com/office/drawing/2014/main" id="{23EDC805-410E-4128-95F4-39638F4CBD7C}"/>
               </a:ext>
             </a:extLst>
           </p:cNvPr>
@@ -8514,7 +5013,7 @@
           <p:cNvPr id="2" name="">
             <a:extLst xmlns:a="http://schemas.openxmlformats.org/drawingml/2006/main">
               <a:ext uri="{FF2B5EF4-FFF2-40B4-BE49-F238E27FC236}">
-                <a16:creationId xmlns:a16="http://schemas.microsoft.com/office/drawing/2014/main" id="{4B025956-A920-4E6F-83EE-463298E19F8D}"/>
+                <a16:creationId xmlns:a16="http://schemas.microsoft.com/office/drawing/2014/main" id="{43E5B513-0EE0-49DA-89A8-B2A9780CC8F1}"/>
               </a:ext>
             </a:extLst>
           </p:cNvPr>
@@ -8571,7 +5070,7 @@
           <p:cNvPr id="3" name="">
             <a:extLst xmlns:a="http://schemas.openxmlformats.org/drawingml/2006/main">
               <a:ext uri="{FF2B5EF4-FFF2-40B4-BE49-F238E27FC236}">
-                <a16:creationId xmlns:a16="http://schemas.microsoft.com/office/drawing/2014/main" id="{4DE6B718-AE8E-4743-824F-03079EDF4800}"/>
+                <a16:creationId xmlns:a16="http://schemas.microsoft.com/office/drawing/2014/main" id="{7B6AC371-0525-485D-8140-7D508E686CE6}"/>
               </a:ext>
             </a:extLst>
           </p:cNvPr>
@@ -8628,7 +5127,7 @@
           <p:cNvPr id="4" name="">
             <a:extLst xmlns:a="http://schemas.openxmlformats.org/drawingml/2006/main">
               <a:ext uri="{FF2B5EF4-FFF2-40B4-BE49-F238E27FC236}">
-                <a16:creationId xmlns:a16="http://schemas.microsoft.com/office/drawing/2014/main" id="{DB731F01-9087-4049-9D69-5EAB0A4E7F4C}"/>
+                <a16:creationId xmlns:a16="http://schemas.microsoft.com/office/drawing/2014/main" id="{1D4C0E9A-ACEF-4B7A-A3B7-63E2B1D66BFB}"/>
               </a:ext>
             </a:extLst>
           </p:cNvPr>
@@ -8708,7 +5207,7 @@
           <p:cNvPr id="5" name="">
             <a:extLst xmlns:a="http://schemas.openxmlformats.org/drawingml/2006/main">
               <a:ext uri="{FF2B5EF4-FFF2-40B4-BE49-F238E27FC236}">
-                <a16:creationId xmlns:a16="http://schemas.microsoft.com/office/drawing/2014/main" id="{BC318E99-DD40-4013-925C-52B7CBD27482}"/>
+                <a16:creationId xmlns:a16="http://schemas.microsoft.com/office/drawing/2014/main" id="{C6B172A2-B223-45A8-A653-A336B0E8D32C}"/>
               </a:ext>
             </a:extLst>
           </p:cNvPr>
@@ -8788,7 +5287,7 @@
           <p:cNvPr id="6" name="">
             <a:extLst xmlns:a="http://schemas.openxmlformats.org/drawingml/2006/main">
               <a:ext uri="{FF2B5EF4-FFF2-40B4-BE49-F238E27FC236}">
-                <a16:creationId xmlns:a16="http://schemas.microsoft.com/office/drawing/2014/main" id="{A1B94C24-7100-44D2-AD6B-BF2F0FE32851}"/>
+                <a16:creationId xmlns:a16="http://schemas.microsoft.com/office/drawing/2014/main" id="{BAA786D6-4586-42C9-A760-50D0BB99C8D3}"/>
               </a:ext>
             </a:extLst>
           </p:cNvPr>
@@ -8817,7 +5316,7 @@
           <p:cNvPr id="7" name="">
             <a:extLst xmlns:a="http://schemas.openxmlformats.org/drawingml/2006/main">
               <a:ext uri="{FF2B5EF4-FFF2-40B4-BE49-F238E27FC236}">
-                <a16:creationId xmlns:a16="http://schemas.microsoft.com/office/drawing/2014/main" id="{EC3BCDDA-454D-48EB-8186-4A57FD6F191A}"/>
+                <a16:creationId xmlns:a16="http://schemas.microsoft.com/office/drawing/2014/main" id="{62260371-60F6-4F3D-98C1-3355DB734693}"/>
               </a:ext>
             </a:extLst>
           </p:cNvPr>
@@ -8897,7 +5396,7 @@
           <p:cNvPr id="8" name="">
             <a:extLst xmlns:a="http://schemas.openxmlformats.org/drawingml/2006/main">
               <a:ext uri="{FF2B5EF4-FFF2-40B4-BE49-F238E27FC236}">
-                <a16:creationId xmlns:a16="http://schemas.microsoft.com/office/drawing/2014/main" id="{B3BD8F5A-BD67-47D6-BDF2-FB9C4905E3D2}"/>
+                <a16:creationId xmlns:a16="http://schemas.microsoft.com/office/drawing/2014/main" id="{CD414656-1AB4-4C79-8CFB-0D9F095ABEA0}"/>
               </a:ext>
             </a:extLst>
           </p:cNvPr>
@@ -8977,7 +5476,7 @@
           <p:cNvPr id="9" name="">
             <a:extLst xmlns:a="http://schemas.openxmlformats.org/drawingml/2006/main">
               <a:ext uri="{FF2B5EF4-FFF2-40B4-BE49-F238E27FC236}">
-                <a16:creationId xmlns:a16="http://schemas.microsoft.com/office/drawing/2014/main" id="{E1DCC75A-4093-4917-B677-65ECD08F2308}"/>
+                <a16:creationId xmlns:a16="http://schemas.microsoft.com/office/drawing/2014/main" id="{E0CAB12F-C1DE-4987-B5B9-C736B783AA5C}"/>
               </a:ext>
             </a:extLst>
           </p:cNvPr>
@@ -9006,7 +5505,7 @@
           <p:cNvPr id="10" name="">
             <a:extLst xmlns:a="http://schemas.openxmlformats.org/drawingml/2006/main">
               <a:ext uri="{FF2B5EF4-FFF2-40B4-BE49-F238E27FC236}">
-                <a16:creationId xmlns:a16="http://schemas.microsoft.com/office/drawing/2014/main" id="{581F0EF1-95FB-4083-BE57-3366BB616FAA}"/>
+                <a16:creationId xmlns:a16="http://schemas.microsoft.com/office/drawing/2014/main" id="{65FBA750-94C7-42B9-A14C-37351B715DC2}"/>
               </a:ext>
             </a:extLst>
           </p:cNvPr>
@@ -9086,19 +5585,19 @@
           <p:cNvPr id="11" name="">
             <a:extLst xmlns:a="http://schemas.openxmlformats.org/drawingml/2006/main">
               <a:ext uri="{FF2B5EF4-FFF2-40B4-BE49-F238E27FC236}">
-                <a16:creationId xmlns:a16="http://schemas.microsoft.com/office/drawing/2014/main" id="{CA86BAC8-AD3B-4402-9DC4-8740AFC4929B}"/>
-              </a:ext>
-            </a:extLst>
-          </p:cNvPr>
-          <p:cNvSpPr>
-            <a:spLocks xmlns:a="http://schemas.openxmlformats.org/drawingml/2006/main" noGrp="1"/>
-          </p:cNvSpPr>
-          <p:nvPr/>
-        </p:nvSpPr>
-        <p:spPr>
-          <a:xfrm xmlns:a="http://schemas.openxmlformats.org/drawingml/2006/main">
-            <a:off x="3476625" y="4295775"/>
-            <a:ext cx="8105775" cy="1114425"/>
+                <a16:creationId xmlns:a16="http://schemas.microsoft.com/office/drawing/2014/main" id="{6A5B9486-652D-4AD0-8CC7-A6A77A952ED1}"/>
+              </a:ext>
+            </a:extLst>
+          </p:cNvPr>
+          <p:cNvSpPr>
+            <a:spLocks xmlns:a="http://schemas.openxmlformats.org/drawingml/2006/main" noGrp="1"/>
+          </p:cNvSpPr>
+          <p:nvPr/>
+        </p:nvSpPr>
+        <p:spPr>
+          <a:xfrm xmlns:a="http://schemas.openxmlformats.org/drawingml/2006/main">
+            <a:off x="3476625" y="4267200"/>
+            <a:ext cx="8105775" cy="1438275"/>
           </a:xfrm>
           <a:prstGeom xmlns:a="http://schemas.openxmlformats.org/drawingml/2006/main" prst="rect">
             <a:avLst/>
@@ -9133,7 +5632,7 @@
                 <a:ea typeface="Arial"/>
                 <a:cs typeface="Arial"/>
               </a:rPr>
-              <a:t>Missed rejection can leave kidney injury untreated.</a:t>
+              <a:t>Biopsy findings help guide treatment for rejection.</a:t>
             </a:r>
           </a:p>
           <a:p xmlns:a="http://schemas.openxmlformats.org/drawingml/2006/main">
@@ -9156,7 +5655,7 @@
                 <a:ea typeface="Arial"/>
                 <a:cs typeface="Arial"/>
               </a:rPr>
-              <a:t>Unnecessary treatment can weaken the body’s defenses</a:t>
+              <a:t>Missed rejection can leave kidney injury untreated.</a:t>
             </a:r>
           </a:p>
           <a:p xmlns:a="http://schemas.openxmlformats.org/drawingml/2006/main">
@@ -9179,64 +5678,7 @@
                 <a:ea typeface="Arial"/>
                 <a:cs typeface="Arial"/>
               </a:rPr>
-              <a:t>and worsen an infection.</a:t>
-            </a:r>
-          </a:p>
-        </p:txBody>
-      </p:sp>
-      <p:sp>
-        <p:nvSpPr>
-          <p:cNvPr id="12" name="">
-            <a:extLst xmlns:a="http://schemas.openxmlformats.org/drawingml/2006/main">
-              <a:ext uri="{FF2B5EF4-FFF2-40B4-BE49-F238E27FC236}">
-                <a16:creationId xmlns:a16="http://schemas.microsoft.com/office/drawing/2014/main" id="{54CA514D-A162-4946-9D14-57F704E6A83D}"/>
-              </a:ext>
-            </a:extLst>
-          </p:cNvPr>
-          <p:cNvSpPr>
-            <a:spLocks xmlns:a="http://schemas.openxmlformats.org/drawingml/2006/main" noGrp="1"/>
-          </p:cNvSpPr>
-          <p:nvPr/>
-        </p:nvSpPr>
-        <p:spPr>
-          <a:xfrm xmlns:a="http://schemas.openxmlformats.org/drawingml/2006/main">
-            <a:off x="609600" y="5705475"/>
-            <a:ext cx="10972800" cy="409575"/>
-          </a:xfrm>
-          <a:prstGeom xmlns:a="http://schemas.openxmlformats.org/drawingml/2006/main" prst="rect">
-            <a:avLst/>
-          </a:prstGeom>
-          <a:noFill xmlns:a="http://schemas.openxmlformats.org/drawingml/2006/main"/>
-          <a:ln xmlns:a="http://schemas.openxmlformats.org/drawingml/2006/main" w="0">
-            <a:noFill/>
-          </a:ln>
-        </p:spPr>
-        <p:txBody>
-          <a:bodyPr xmlns:a="http://schemas.openxmlformats.org/drawingml/2006/main" anchor="ctr">
-            <a:noAutofit/>
-          </a:bodyPr>
-          <a:lstStyle xmlns:a="http://schemas.openxmlformats.org/drawingml/2006/main"/>
-          <a:p xmlns:a="http://schemas.openxmlformats.org/drawingml/2006/main">
-            <a:pPr algn="l">
-              <a:defRPr sz="2025" b="1">
-                <a:solidFill>
-                  <a:srgbClr val="007C78"/>
-                </a:solidFill>
-                <a:latin typeface="Arial"/>
-                <a:ea typeface="Arial"/>
-                <a:cs typeface="Arial"/>
-              </a:defRPr>
-            </a:pPr>
-            <a:r>
-              <a:rPr sz="2025" b="1">
-                <a:solidFill>
-                  <a:srgbClr val="007C78"/>
-                </a:solidFill>
-                <a:latin typeface="Arial"/>
-                <a:ea typeface="Arial"/>
-                <a:cs typeface="Arial"/>
-              </a:rPr>
-              <a:t>This project compares binary classifier errors against recorded diagnoses.</a:t>
+              <a:t>Unnecessary treatment can worsen an infection.</a:t>
             </a:r>
           </a:p>
         </p:txBody>
@@ -9244,7 +5686,7 @@
     </p:spTree>
     <p:extLst>
       <p:ext uri="{BB962C8B-B14F-4D97-AF65-F5344CB8AC3E}">
-        <p14:creationId xmlns:p14="http://schemas.microsoft.com/office/powerpoint/2010/main" val="1970890627"/>
+        <p14:creationId xmlns:p14="http://schemas.microsoft.com/office/powerpoint/2010/main" val="1899912211"/>
       </p:ext>
     </p:extLst>
   </p:cSld>
@@ -9275,7 +5717,7 @@
           <p:cNvPr id="13" name="">
             <a:extLst xmlns:a="http://schemas.openxmlformats.org/drawingml/2006/main">
               <a:ext uri="{FF2B5EF4-FFF2-40B4-BE49-F238E27FC236}">
-                <a16:creationId xmlns:a16="http://schemas.microsoft.com/office/drawing/2014/main" id="{6B592D23-9C3F-4415-A260-632034D43FB8}"/>
+                <a16:creationId xmlns:a16="http://schemas.microsoft.com/office/drawing/2014/main" id="{8E5A9869-9C66-4100-9666-5EF7957BFAC0}"/>
               </a:ext>
             </a:extLst>
           </p:cNvPr>
@@ -9332,7 +5774,7 @@
           <p:cNvPr id="2" name="">
             <a:extLst xmlns:a="http://schemas.openxmlformats.org/drawingml/2006/main">
               <a:ext uri="{FF2B5EF4-FFF2-40B4-BE49-F238E27FC236}">
-                <a16:creationId xmlns:a16="http://schemas.microsoft.com/office/drawing/2014/main" id="{E9346531-79DC-4042-B380-AA946EA16CE1}"/>
+                <a16:creationId xmlns:a16="http://schemas.microsoft.com/office/drawing/2014/main" id="{4D21B652-97B5-423E-B643-8533DD97F683}"/>
               </a:ext>
             </a:extLst>
           </p:cNvPr>
@@ -9389,7 +5831,7 @@
           <p:cNvPr id="3" name="">
             <a:extLst xmlns:a="http://schemas.openxmlformats.org/drawingml/2006/main">
               <a:ext uri="{FF2B5EF4-FFF2-40B4-BE49-F238E27FC236}">
-                <a16:creationId xmlns:a16="http://schemas.microsoft.com/office/drawing/2014/main" id="{A5121A58-F425-4308-9E69-DB22AC74E026}"/>
+                <a16:creationId xmlns:a16="http://schemas.microsoft.com/office/drawing/2014/main" id="{C31855AF-8522-4E66-AA21-CF1F33859040}"/>
               </a:ext>
             </a:extLst>
           </p:cNvPr>
@@ -9446,7 +5888,7 @@
           <p:cNvPr id="4" name="">
             <a:extLst xmlns:a="http://schemas.openxmlformats.org/drawingml/2006/main">
               <a:ext uri="{FF2B5EF4-FFF2-40B4-BE49-F238E27FC236}">
-                <a16:creationId xmlns:a16="http://schemas.microsoft.com/office/drawing/2014/main" id="{DA2F1B2F-4BEA-4510-A055-3AAF0AE08875}"/>
+                <a16:creationId xmlns:a16="http://schemas.microsoft.com/office/drawing/2014/main" id="{C7F07D4A-1DFF-43A2-B189-43307C47E32A}"/>
               </a:ext>
             </a:extLst>
           </p:cNvPr>
@@ -9503,7 +5945,7 @@
           <p:cNvPr id="5" name="">
             <a:extLst xmlns:a="http://schemas.openxmlformats.org/drawingml/2006/main">
               <a:ext uri="{FF2B5EF4-FFF2-40B4-BE49-F238E27FC236}">
-                <a16:creationId xmlns:a16="http://schemas.microsoft.com/office/drawing/2014/main" id="{2315F3E2-3C79-4FFA-94B5-967BD00BC777}"/>
+                <a16:creationId xmlns:a16="http://schemas.microsoft.com/office/drawing/2014/main" id="{E1A8B6BE-737E-43DD-9DD9-661476979D12}"/>
               </a:ext>
             </a:extLst>
           </p:cNvPr>
@@ -9560,7 +6002,7 @@
           <p:cNvPr id="6" name="">
             <a:extLst xmlns:a="http://schemas.openxmlformats.org/drawingml/2006/main">
               <a:ext uri="{FF2B5EF4-FFF2-40B4-BE49-F238E27FC236}">
-                <a16:creationId xmlns:a16="http://schemas.microsoft.com/office/drawing/2014/main" id="{88ADB40B-F54E-43BE-B52F-F398410D2B13}"/>
+                <a16:creationId xmlns:a16="http://schemas.microsoft.com/office/drawing/2014/main" id="{D647E10B-4E3B-49D5-AE01-044D0529054B}"/>
               </a:ext>
             </a:extLst>
           </p:cNvPr>
@@ -10201,7 +6643,7 @@
           <p:cNvPr id="9" name="">
             <a:extLst xmlns:a="http://schemas.openxmlformats.org/drawingml/2006/main">
               <a:ext uri="{FF2B5EF4-FFF2-40B4-BE49-F238E27FC236}">
-                <a16:creationId xmlns:a16="http://schemas.microsoft.com/office/drawing/2014/main" id="{475A6440-CB86-4151-B8C4-9C61B0E7FE43}"/>
+                <a16:creationId xmlns:a16="http://schemas.microsoft.com/office/drawing/2014/main" id="{DE05F357-D214-4F82-BB1F-3EA07D3755CD}"/>
               </a:ext>
             </a:extLst>
           </p:cNvPr>
@@ -10230,7 +6672,7 @@
           <p:cNvPr id="10" name="">
             <a:extLst xmlns:a="http://schemas.openxmlformats.org/drawingml/2006/main">
               <a:ext uri="{FF2B5EF4-FFF2-40B4-BE49-F238E27FC236}">
-                <a16:creationId xmlns:a16="http://schemas.microsoft.com/office/drawing/2014/main" id="{68027F8E-4165-41D5-9A6B-8D13F346716C}"/>
+                <a16:creationId xmlns:a16="http://schemas.microsoft.com/office/drawing/2014/main" id="{9F6C7AB4-206C-46DE-8204-110ABA381C38}"/>
               </a:ext>
             </a:extLst>
           </p:cNvPr>
@@ -10287,7 +6729,7 @@
           <p:cNvPr id="11" name="">
             <a:extLst xmlns:a="http://schemas.openxmlformats.org/drawingml/2006/main">
               <a:ext uri="{FF2B5EF4-FFF2-40B4-BE49-F238E27FC236}">
-                <a16:creationId xmlns:a16="http://schemas.microsoft.com/office/drawing/2014/main" id="{995F1FB3-A0CD-4E32-80AB-05B41C74ABD6}"/>
+                <a16:creationId xmlns:a16="http://schemas.microsoft.com/office/drawing/2014/main" id="{C2B016DF-049F-41CA-A166-EF16C9F13341}"/>
               </a:ext>
             </a:extLst>
           </p:cNvPr>
@@ -10344,7 +6786,7 @@
           <p:cNvPr id="12" name="">
             <a:extLst xmlns:a="http://schemas.openxmlformats.org/drawingml/2006/main">
               <a:ext uri="{FF2B5EF4-FFF2-40B4-BE49-F238E27FC236}">
-                <a16:creationId xmlns:a16="http://schemas.microsoft.com/office/drawing/2014/main" id="{26AA2BAC-D6C5-4778-B86D-0D6FC86A34D5}"/>
+                <a16:creationId xmlns:a16="http://schemas.microsoft.com/office/drawing/2014/main" id="{7D96BC94-05CC-48CF-9CFC-C5A43F3E2F89}"/>
               </a:ext>
             </a:extLst>
           </p:cNvPr>
@@ -10430,7 +6872,7 @@
     </p:spTree>
     <p:extLst>
       <p:ext uri="{BB962C8B-B14F-4D97-AF65-F5344CB8AC3E}">
-        <p14:creationId xmlns:p14="http://schemas.microsoft.com/office/powerpoint/2010/main" val="1603777412"/>
+        <p14:creationId xmlns:p14="http://schemas.microsoft.com/office/powerpoint/2010/main" val="113553735"/>
       </p:ext>
     </p:extLst>
   </p:cSld>
@@ -10461,7 +6903,7 @@
           <p:cNvPr id="7" name="">
             <a:extLst xmlns:a="http://schemas.openxmlformats.org/drawingml/2006/main">
               <a:ext uri="{FF2B5EF4-FFF2-40B4-BE49-F238E27FC236}">
-                <a16:creationId xmlns:a16="http://schemas.microsoft.com/office/drawing/2014/main" id="{B89D7E1F-A9B1-4F1D-893B-C1A3188295B6}"/>
+                <a16:creationId xmlns:a16="http://schemas.microsoft.com/office/drawing/2014/main" id="{4C908E84-9FB4-4BE1-ABB5-7F6B6E4D198B}"/>
               </a:ext>
             </a:extLst>
           </p:cNvPr>
@@ -10518,7 +6960,7 @@
           <p:cNvPr id="2" name="">
             <a:extLst xmlns:a="http://schemas.openxmlformats.org/drawingml/2006/main">
               <a:ext uri="{FF2B5EF4-FFF2-40B4-BE49-F238E27FC236}">
-                <a16:creationId xmlns:a16="http://schemas.microsoft.com/office/drawing/2014/main" id="{CA900364-2973-45AF-BCCE-156A2C4EB980}"/>
+                <a16:creationId xmlns:a16="http://schemas.microsoft.com/office/drawing/2014/main" id="{713318D5-1415-400F-808A-D6E495131E0E}"/>
               </a:ext>
             </a:extLst>
           </p:cNvPr>
@@ -10575,7 +7017,7 @@
           <p:cNvPr id="3" name="">
             <a:extLst xmlns:a="http://schemas.openxmlformats.org/drawingml/2006/main">
               <a:ext uri="{FF2B5EF4-FFF2-40B4-BE49-F238E27FC236}">
-                <a16:creationId xmlns:a16="http://schemas.microsoft.com/office/drawing/2014/main" id="{E75A8CB9-2226-4BF2-91A2-3DF663178B7C}"/>
+                <a16:creationId xmlns:a16="http://schemas.microsoft.com/office/drawing/2014/main" id="{D1489D7E-6A70-4B4A-93D6-2C629D296A2A}"/>
               </a:ext>
             </a:extLst>
           </p:cNvPr>
@@ -10632,7 +7074,7 @@
           <p:cNvPr id="4" name="">
             <a:extLst xmlns:a="http://schemas.openxmlformats.org/drawingml/2006/main">
               <a:ext uri="{FF2B5EF4-FFF2-40B4-BE49-F238E27FC236}">
-                <a16:creationId xmlns:a16="http://schemas.microsoft.com/office/drawing/2014/main" id="{4B2C25E3-0066-4C1A-9B4B-8BA458499657}"/>
+                <a16:creationId xmlns:a16="http://schemas.microsoft.com/office/drawing/2014/main" id="{CB41243F-7142-48B5-93AB-B83E755279F7}"/>
               </a:ext>
             </a:extLst>
           </p:cNvPr>
@@ -11112,7 +7554,7 @@
           <p:cNvPr id="6" name="">
             <a:extLst xmlns:a="http://schemas.openxmlformats.org/drawingml/2006/main">
               <a:ext uri="{FF2B5EF4-FFF2-40B4-BE49-F238E27FC236}">
-                <a16:creationId xmlns:a16="http://schemas.microsoft.com/office/drawing/2014/main" id="{5570221F-E817-4CD2-BC4D-54C7DBE6095C}"/>
+                <a16:creationId xmlns:a16="http://schemas.microsoft.com/office/drawing/2014/main" id="{CBECAEA7-A9D1-4427-A1CB-F8B0B501654E}"/>
               </a:ext>
             </a:extLst>
           </p:cNvPr>
@@ -11167,7 +7609,7 @@
     </p:spTree>
     <p:extLst>
       <p:ext uri="{BB962C8B-B14F-4D97-AF65-F5344CB8AC3E}">
-        <p14:creationId xmlns:p14="http://schemas.microsoft.com/office/powerpoint/2010/main" val="603845905"/>
+        <p14:creationId xmlns:p14="http://schemas.microsoft.com/office/powerpoint/2010/main" val="609354919"/>
       </p:ext>
     </p:extLst>
   </p:cSld>
@@ -11198,7 +7640,7 @@
           <p:cNvPr id="11" name="">
             <a:extLst xmlns:a="http://schemas.openxmlformats.org/drawingml/2006/main">
               <a:ext uri="{FF2B5EF4-FFF2-40B4-BE49-F238E27FC236}">
-                <a16:creationId xmlns:a16="http://schemas.microsoft.com/office/drawing/2014/main" id="{2AEB6F53-48BE-4974-A36C-BC4960B955E8}"/>
+                <a16:creationId xmlns:a16="http://schemas.microsoft.com/office/drawing/2014/main" id="{63F61011-B34B-4687-AC39-EBBDCEA06E55}"/>
               </a:ext>
             </a:extLst>
           </p:cNvPr>
@@ -11255,7 +7697,7 @@
           <p:cNvPr id="2" name="">
             <a:extLst xmlns:a="http://schemas.openxmlformats.org/drawingml/2006/main">
               <a:ext uri="{FF2B5EF4-FFF2-40B4-BE49-F238E27FC236}">
-                <a16:creationId xmlns:a16="http://schemas.microsoft.com/office/drawing/2014/main" id="{F0D46A98-93FA-44BA-B37B-FD1C6A8C341D}"/>
+                <a16:creationId xmlns:a16="http://schemas.microsoft.com/office/drawing/2014/main" id="{5D6AD6C3-6DA3-4035-89C8-E864941E8B99}"/>
               </a:ext>
             </a:extLst>
           </p:cNvPr>
@@ -11312,7 +7754,7 @@
           <p:cNvPr id="3" name="">
             <a:extLst xmlns:a="http://schemas.openxmlformats.org/drawingml/2006/main">
               <a:ext uri="{FF2B5EF4-FFF2-40B4-BE49-F238E27FC236}">
-                <a16:creationId xmlns:a16="http://schemas.microsoft.com/office/drawing/2014/main" id="{7D4C512E-848F-4799-891E-5D3048786173}"/>
+                <a16:creationId xmlns:a16="http://schemas.microsoft.com/office/drawing/2014/main" id="{7E4FAE6D-78C5-4BBC-BB2D-0B2480B06408}"/>
               </a:ext>
             </a:extLst>
           </p:cNvPr>
@@ -11369,7 +7811,7 @@
           <p:cNvPr id="4" name="">
             <a:extLst xmlns:a="http://schemas.openxmlformats.org/drawingml/2006/main">
               <a:ext uri="{FF2B5EF4-FFF2-40B4-BE49-F238E27FC236}">
-                <a16:creationId xmlns:a16="http://schemas.microsoft.com/office/drawing/2014/main" id="{0C10486F-DDF1-4D02-84BD-8E4C4463DCB0}"/>
+                <a16:creationId xmlns:a16="http://schemas.microsoft.com/office/drawing/2014/main" id="{744AE511-1DBC-4CE4-8838-F07576B5C202}"/>
               </a:ext>
             </a:extLst>
           </p:cNvPr>
@@ -11426,7 +7868,7 @@
           <p:cNvPr id="5" name="">
             <a:extLst xmlns:a="http://schemas.openxmlformats.org/drawingml/2006/main">
               <a:ext uri="{FF2B5EF4-FFF2-40B4-BE49-F238E27FC236}">
-                <a16:creationId xmlns:a16="http://schemas.microsoft.com/office/drawing/2014/main" id="{D849AA30-0E40-494E-A35F-70888CE86844}"/>
+                <a16:creationId xmlns:a16="http://schemas.microsoft.com/office/drawing/2014/main" id="{DE4D5BF5-4173-423C-8BE2-04D512F3BBAD}"/>
               </a:ext>
             </a:extLst>
           </p:cNvPr>
@@ -11483,7 +7925,7 @@
           <p:cNvPr id="6" name="">
             <a:extLst xmlns:a="http://schemas.openxmlformats.org/drawingml/2006/main">
               <a:ext uri="{FF2B5EF4-FFF2-40B4-BE49-F238E27FC236}">
-                <a16:creationId xmlns:a16="http://schemas.microsoft.com/office/drawing/2014/main" id="{35AAC4F8-9CD9-4271-A482-123F8076F7A3}"/>
+                <a16:creationId xmlns:a16="http://schemas.microsoft.com/office/drawing/2014/main" id="{C661F9CC-36F5-4550-98F3-7D59768D881A}"/>
               </a:ext>
             </a:extLst>
           </p:cNvPr>
@@ -11540,7 +7982,7 @@
           <p:cNvPr id="7" name="">
             <a:extLst xmlns:a="http://schemas.openxmlformats.org/drawingml/2006/main">
               <a:ext uri="{FF2B5EF4-FFF2-40B4-BE49-F238E27FC236}">
-                <a16:creationId xmlns:a16="http://schemas.microsoft.com/office/drawing/2014/main" id="{6B870C10-CD8A-4D7E-A5CA-D1FDACF73307}"/>
+                <a16:creationId xmlns:a16="http://schemas.microsoft.com/office/drawing/2014/main" id="{8ECEDEA3-2482-4ED6-8CDD-E941E3CABA7F}"/>
               </a:ext>
             </a:extLst>
           </p:cNvPr>
@@ -11655,7 +8097,7 @@
           <p:cNvPr id="8" name="">
             <a:extLst xmlns:a="http://schemas.openxmlformats.org/drawingml/2006/main">
               <a:ext uri="{FF2B5EF4-FFF2-40B4-BE49-F238E27FC236}">
-                <a16:creationId xmlns:a16="http://schemas.microsoft.com/office/drawing/2014/main" id="{34E46DAF-6DBC-4FF6-80FD-9F0EC934F017}"/>
+                <a16:creationId xmlns:a16="http://schemas.microsoft.com/office/drawing/2014/main" id="{ADFE5690-D9C7-4ADE-8917-1E4FD7B71DCE}"/>
               </a:ext>
             </a:extLst>
           </p:cNvPr>
@@ -11712,7 +8154,7 @@
           <p:cNvPr id="9" name="">
             <a:extLst xmlns:a="http://schemas.openxmlformats.org/drawingml/2006/main">
               <a:ext uri="{FF2B5EF4-FFF2-40B4-BE49-F238E27FC236}">
-                <a16:creationId xmlns:a16="http://schemas.microsoft.com/office/drawing/2014/main" id="{8245895F-AD5B-4E5E-B04F-35ACB78B0F9F}"/>
+                <a16:creationId xmlns:a16="http://schemas.microsoft.com/office/drawing/2014/main" id="{B4A98344-A490-41AA-B318-EA8469C68F58}"/>
               </a:ext>
             </a:extLst>
           </p:cNvPr>
@@ -11769,7 +8211,7 @@
           <p:cNvPr id="10" name="">
             <a:extLst xmlns:a="http://schemas.openxmlformats.org/drawingml/2006/main">
               <a:ext uri="{FF2B5EF4-FFF2-40B4-BE49-F238E27FC236}">
-                <a16:creationId xmlns:a16="http://schemas.microsoft.com/office/drawing/2014/main" id="{526288D3-816D-4289-89FE-276534E1137E}"/>
+                <a16:creationId xmlns:a16="http://schemas.microsoft.com/office/drawing/2014/main" id="{FD7B2646-8BD7-4149-988C-A19DC0923889}"/>
               </a:ext>
             </a:extLst>
           </p:cNvPr>
@@ -11882,7 +8324,7 @@
     </p:spTree>
     <p:extLst>
       <p:ext uri="{BB962C8B-B14F-4D97-AF65-F5344CB8AC3E}">
-        <p14:creationId xmlns:p14="http://schemas.microsoft.com/office/powerpoint/2010/main" val="1179486579"/>
+        <p14:creationId xmlns:p14="http://schemas.microsoft.com/office/powerpoint/2010/main" val="1288594396"/>
       </p:ext>
     </p:extLst>
   </p:cSld>
@@ -11913,7 +8355,7 @@
           <p:cNvPr id="5" name="">
             <a:extLst xmlns:a="http://schemas.openxmlformats.org/drawingml/2006/main">
               <a:ext uri="{FF2B5EF4-FFF2-40B4-BE49-F238E27FC236}">
-                <a16:creationId xmlns:a16="http://schemas.microsoft.com/office/drawing/2014/main" id="{B8E70A33-9E5B-471C-A107-11F335211070}"/>
+                <a16:creationId xmlns:a16="http://schemas.microsoft.com/office/drawing/2014/main" id="{6EF01540-E329-4D06-89E1-D8CE30B0FE55}"/>
               </a:ext>
             </a:extLst>
           </p:cNvPr>
@@ -11970,7 +8412,7 @@
           <p:cNvPr id="2" name="">
             <a:extLst xmlns:a="http://schemas.openxmlformats.org/drawingml/2006/main">
               <a:ext uri="{FF2B5EF4-FFF2-40B4-BE49-F238E27FC236}">
-                <a16:creationId xmlns:a16="http://schemas.microsoft.com/office/drawing/2014/main" id="{598601A4-507C-4B32-8325-78D0AB0957B9}"/>
+                <a16:creationId xmlns:a16="http://schemas.microsoft.com/office/drawing/2014/main" id="{F3E1F216-C47E-4633-9047-9CE28FABB450}"/>
               </a:ext>
             </a:extLst>
           </p:cNvPr>
@@ -12027,7 +8469,7 @@
           <p:cNvPr id="3" name="">
             <a:extLst xmlns:a="http://schemas.openxmlformats.org/drawingml/2006/main">
               <a:ext uri="{FF2B5EF4-FFF2-40B4-BE49-F238E27FC236}">
-                <a16:creationId xmlns:a16="http://schemas.microsoft.com/office/drawing/2014/main" id="{0A2817DD-2D72-4DC2-9CF1-6AEDBD29224D}"/>
+                <a16:creationId xmlns:a16="http://schemas.microsoft.com/office/drawing/2014/main" id="{67047B84-5D7E-41AC-AF20-9EF0E5248837}"/>
               </a:ext>
             </a:extLst>
           </p:cNvPr>
@@ -12374,7 +8816,7 @@
     </p:spTree>
     <p:extLst>
       <p:ext uri="{BB962C8B-B14F-4D97-AF65-F5344CB8AC3E}">
-        <p14:creationId xmlns:p14="http://schemas.microsoft.com/office/powerpoint/2010/main" val="141586907"/>
+        <p14:creationId xmlns:p14="http://schemas.microsoft.com/office/powerpoint/2010/main" val="578683797"/>
       </p:ext>
     </p:extLst>
   </p:cSld>
@@ -12405,7 +8847,7 @@
           <p:cNvPr id="11" name="">
             <a:extLst xmlns:a="http://schemas.openxmlformats.org/drawingml/2006/main">
               <a:ext uri="{FF2B5EF4-FFF2-40B4-BE49-F238E27FC236}">
-                <a16:creationId xmlns:a16="http://schemas.microsoft.com/office/drawing/2014/main" id="{A3B64EFB-D7CB-4C1C-8105-A69DF1692552}"/>
+                <a16:creationId xmlns:a16="http://schemas.microsoft.com/office/drawing/2014/main" id="{49DFAA9C-709E-4321-9A5B-84F1351FA5C3}"/>
               </a:ext>
             </a:extLst>
           </p:cNvPr>
@@ -12462,7 +8904,7 @@
           <p:cNvPr id="2" name="">
             <a:extLst xmlns:a="http://schemas.openxmlformats.org/drawingml/2006/main">
               <a:ext uri="{FF2B5EF4-FFF2-40B4-BE49-F238E27FC236}">
-                <a16:creationId xmlns:a16="http://schemas.microsoft.com/office/drawing/2014/main" id="{BC921378-8F81-45C5-AF83-6BCECD7007E0}"/>
+                <a16:creationId xmlns:a16="http://schemas.microsoft.com/office/drawing/2014/main" id="{05AF8900-D210-4B09-AD3F-511CFA430300}"/>
               </a:ext>
             </a:extLst>
           </p:cNvPr>
@@ -12519,7 +8961,7 @@
           <p:cNvPr id="3" name="">
             <a:extLst xmlns:a="http://schemas.openxmlformats.org/drawingml/2006/main">
               <a:ext uri="{FF2B5EF4-FFF2-40B4-BE49-F238E27FC236}">
-                <a16:creationId xmlns:a16="http://schemas.microsoft.com/office/drawing/2014/main" id="{86668167-0F9C-48FC-B43C-A350B21BDD7C}"/>
+                <a16:creationId xmlns:a16="http://schemas.microsoft.com/office/drawing/2014/main" id="{7DA05A24-EC25-436F-85A1-D5A688963D48}"/>
               </a:ext>
             </a:extLst>
           </p:cNvPr>
@@ -12576,7 +9018,7 @@
           <p:cNvPr id="4" name="">
             <a:extLst xmlns:a="http://schemas.openxmlformats.org/drawingml/2006/main">
               <a:ext uri="{FF2B5EF4-FFF2-40B4-BE49-F238E27FC236}">
-                <a16:creationId xmlns:a16="http://schemas.microsoft.com/office/drawing/2014/main" id="{44B39263-190D-43A6-9D4A-534152A7991A}"/>
+                <a16:creationId xmlns:a16="http://schemas.microsoft.com/office/drawing/2014/main" id="{3DA863DB-D8ED-4BB7-AF31-6F064D8DE71C}"/>
               </a:ext>
             </a:extLst>
           </p:cNvPr>
@@ -12664,7 +9106,7 @@
           <p:cNvPr id="5" name="">
             <a:extLst xmlns:a="http://schemas.openxmlformats.org/drawingml/2006/main">
               <a:ext uri="{FF2B5EF4-FFF2-40B4-BE49-F238E27FC236}">
-                <a16:creationId xmlns:a16="http://schemas.microsoft.com/office/drawing/2014/main" id="{855E4670-9989-4D38-BA32-ECC0E1126B8B}"/>
+                <a16:creationId xmlns:a16="http://schemas.microsoft.com/office/drawing/2014/main" id="{43E7CB50-5CAD-4493-8E18-051526345DE8}"/>
               </a:ext>
             </a:extLst>
           </p:cNvPr>
@@ -12748,7 +9190,7 @@
           <p:cNvPr id="6" name="">
             <a:extLst xmlns:a="http://schemas.openxmlformats.org/drawingml/2006/main">
               <a:ext uri="{FF2B5EF4-FFF2-40B4-BE49-F238E27FC236}">
-                <a16:creationId xmlns:a16="http://schemas.microsoft.com/office/drawing/2014/main" id="{235F124B-CF62-41AD-B116-AE87FFAF1849}"/>
+                <a16:creationId xmlns:a16="http://schemas.microsoft.com/office/drawing/2014/main" id="{DE9FC681-8373-4283-8515-F4609020649A}"/>
               </a:ext>
             </a:extLst>
           </p:cNvPr>
@@ -12832,7 +9274,7 @@
           <p:cNvPr id="7" name="">
             <a:extLst xmlns:a="http://schemas.openxmlformats.org/drawingml/2006/main">
               <a:ext uri="{FF2B5EF4-FFF2-40B4-BE49-F238E27FC236}">
-                <a16:creationId xmlns:a16="http://schemas.microsoft.com/office/drawing/2014/main" id="{BD499024-1C99-439A-B4B6-815A5172C2F7}"/>
+                <a16:creationId xmlns:a16="http://schemas.microsoft.com/office/drawing/2014/main" id="{0204CFB1-070E-4655-AF21-29B49D4F7826}"/>
               </a:ext>
             </a:extLst>
           </p:cNvPr>
@@ -12972,7 +9414,7 @@
           <p:cNvPr id="10" name="">
             <a:extLst xmlns:a="http://schemas.openxmlformats.org/drawingml/2006/main">
               <a:ext uri="{FF2B5EF4-FFF2-40B4-BE49-F238E27FC236}">
-                <a16:creationId xmlns:a16="http://schemas.microsoft.com/office/drawing/2014/main" id="{B669DB85-AE16-4E4E-AA00-CB7E40D505F8}"/>
+                <a16:creationId xmlns:a16="http://schemas.microsoft.com/office/drawing/2014/main" id="{DA674A1E-0399-4A94-AF0F-6C97E6843C88}"/>
               </a:ext>
             </a:extLst>
           </p:cNvPr>
@@ -13105,7 +9547,7 @@
     </p:spTree>
     <p:extLst>
       <p:ext uri="{BB962C8B-B14F-4D97-AF65-F5344CB8AC3E}">
-        <p14:creationId xmlns:p14="http://schemas.microsoft.com/office/powerpoint/2010/main" val="940028908"/>
+        <p14:creationId xmlns:p14="http://schemas.microsoft.com/office/powerpoint/2010/main" val="100263638"/>
       </p:ext>
     </p:extLst>
   </p:cSld>

--- a/presentation/unos_kidney_biopsy.pptx
+++ b/presentation/unos_kidney_biopsy.pptx
@@ -2,23 +2,23 @@
 <file path=ppt/presentation.xml><?xml version="1.0" encoding="utf-8"?>
 <p:presentation xmlns:p="http://schemas.openxmlformats.org/presentationml/2006/main" xmlns:r="http://schemas.openxmlformats.org/officeDocument/2006/relationships">
   <p:sldMasterIdLst>
-    <p:sldMasterId id="2147483648" r:id="R0ed844c1105f43f4"/>
+    <p:sldMasterId id="2147483648" r:id="Radcac8545d59437c"/>
   </p:sldMasterIdLst>
   <p:sldIdLst>
-    <p:sldId id="256" r:id="R1da50bf531ec4aac"/>
-    <p:sldId id="257" r:id="Rf84452d2265644c6"/>
-    <p:sldId id="258" r:id="Rd2bbc35d9db44420"/>
-    <p:sldId id="259" r:id="Re748c4c2b0c548ea"/>
-    <p:sldId id="260" r:id="Rd7d2817c67384cbf"/>
-    <p:sldId id="261" r:id="R326e2b707e904e08"/>
-    <p:sldId id="262" r:id="R9f4d3c9562e940fd"/>
-    <p:sldId id="263" r:id="Rcf1563392a334b63"/>
-    <p:sldId id="264" r:id="R80cebfcf34f4494f"/>
-    <p:sldId id="265" r:id="Rfc305686560343d3"/>
-    <p:sldId id="266" r:id="Raa05d04e427a4301"/>
-    <p:sldId id="267" r:id="R4d42540895c64039"/>
-    <p:sldId id="268" r:id="R7acc59df41194444"/>
-    <p:sldId id="269" r:id="R12b69fb94bfe4fd3"/>
+    <p:sldId id="256" r:id="R781d5cc738c34436"/>
+    <p:sldId id="257" r:id="Rec3db5835e1f439a"/>
+    <p:sldId id="258" r:id="R51719fcafa0f403e"/>
+    <p:sldId id="259" r:id="R00b76af712754641"/>
+    <p:sldId id="260" r:id="Re8cd26c337104d9f"/>
+    <p:sldId id="261" r:id="Rcfef350d5687436e"/>
+    <p:sldId id="262" r:id="R15d2744f03f84fc0"/>
+    <p:sldId id="263" r:id="R66384e3f01c94cf4"/>
+    <p:sldId id="264" r:id="Rec0215ee7d3a4316"/>
+    <p:sldId id="265" r:id="R0332bfbb659f45a8"/>
+    <p:sldId id="266" r:id="R440cffbe54994fea"/>
+    <p:sldId id="267" r:id="Re07831943fa54d19"/>
+    <p:sldId id="268" r:id="Rc2c60499f0df4be4"/>
+    <p:sldId id="269" r:id="Rfc31a2a832e0429b"/>
   </p:sldIdLst>
   <p:sldSz cx="12192000" cy="6858000"/>
   <p:notesSz cx="6858000" cy="9144000"/>
@@ -63,7 +63,7 @@
   </p:cSld>
   <p:clrMap bg1="lt1" tx1="dk1" bg2="lt2" tx2="dk2" accent1="accent1" accent2="accent2" accent3="accent3" accent4="accent4" accent5="accent5" accent6="accent6" hlink="hlink" folHlink="folHlink"/>
   <p:sldLayoutIdLst>
-    <p:sldLayoutId xmlns:r="http://schemas.openxmlformats.org/officeDocument/2006/relationships" id="2147483649" r:id="R7ebc50db3a104ecd"/>
+    <p:sldLayoutId xmlns:r="http://schemas.openxmlformats.org/officeDocument/2006/relationships" id="2147483649" r:id="Re16480a5278443de"/>
   </p:sldLayoutIdLst>
   <p:txStyles>
     <p:titleStyle>
@@ -814,26 +814,6 @@
         </a:solidFill>
       </c:spPr>
     </c:plotArea>
-    <c:legend>
-      <c:legendPos val="b"/>
-      <c:overlay val="0"/>
-      <c:txPr>
-        <a:bodyPr xmlns:a="http://schemas.openxmlformats.org/drawingml/2006/main" anchorCtr="1"/>
-        <a:lstStyle xmlns:a="http://schemas.openxmlformats.org/drawingml/2006/main"/>
-        <a:p xmlns:a="http://schemas.openxmlformats.org/drawingml/2006/main">
-          <a:pPr>
-            <a:defRPr sz="1875">
-              <a:solidFill>
-                <a:srgbClr val="16343E"/>
-              </a:solidFill>
-              <a:latin typeface="Arial"/>
-              <a:ea typeface="Arial"/>
-              <a:cs typeface="Arial"/>
-            </a:defRPr>
-          </a:pPr>
-        </a:p>
-      </c:txPr>
-    </c:legend>
     <c:plotVisOnly val="1"/>
   </c:chart>
   <c:spPr>
@@ -871,7 +851,7 @@
           <p:cNvPr id="2" name="">
             <a:extLst xmlns:a="http://schemas.openxmlformats.org/drawingml/2006/main">
               <a:ext uri="{FF2B5EF4-FFF2-40B4-BE49-F238E27FC236}">
-                <a16:creationId xmlns:a16="http://schemas.microsoft.com/office/drawing/2014/main" id="{0F8CF6AB-CAFC-4852-A4A6-32339F559DBF}"/>
+                <a16:creationId xmlns:a16="http://schemas.microsoft.com/office/drawing/2014/main" id="{B0A82B52-8CE3-4D48-99D9-33FFE7A9A04E}"/>
               </a:ext>
             </a:extLst>
           </p:cNvPr>
@@ -972,7 +952,7 @@
     </p:spTree>
     <p:extLst>
       <p:ext uri="{BB962C8B-B14F-4D97-AF65-F5344CB8AC3E}">
-        <p14:creationId xmlns:p14="http://schemas.microsoft.com/office/powerpoint/2010/main" val="1042494574"/>
+        <p14:creationId xmlns:p14="http://schemas.microsoft.com/office/powerpoint/2010/main" val="127899676"/>
       </p:ext>
     </p:extLst>
   </p:cSld>
@@ -1003,7 +983,7 @@
           <p:cNvPr id="6" name="">
             <a:extLst xmlns:a="http://schemas.openxmlformats.org/drawingml/2006/main">
               <a:ext uri="{FF2B5EF4-FFF2-40B4-BE49-F238E27FC236}">
-                <a16:creationId xmlns:a16="http://schemas.microsoft.com/office/drawing/2014/main" id="{955859BB-C459-4BC4-8216-0140BA1794ED}"/>
+                <a16:creationId xmlns:a16="http://schemas.microsoft.com/office/drawing/2014/main" id="{E73B0216-C3F7-4604-905B-288AB82100BB}"/>
               </a:ext>
             </a:extLst>
           </p:cNvPr>
@@ -1060,7 +1040,7 @@
           <p:cNvPr id="2" name="">
             <a:extLst xmlns:a="http://schemas.openxmlformats.org/drawingml/2006/main">
               <a:ext uri="{FF2B5EF4-FFF2-40B4-BE49-F238E27FC236}">
-                <a16:creationId xmlns:a16="http://schemas.microsoft.com/office/drawing/2014/main" id="{EC4AEA37-B91E-4A37-8A64-79FFCE738AEE}"/>
+                <a16:creationId xmlns:a16="http://schemas.microsoft.com/office/drawing/2014/main" id="{9002DCF9-2C2B-4281-A28A-3E3437622966}"/>
               </a:ext>
             </a:extLst>
           </p:cNvPr>
@@ -1117,7 +1097,7 @@
           <p:cNvPr id="3" name="">
             <a:extLst xmlns:a="http://schemas.openxmlformats.org/drawingml/2006/main">
               <a:ext uri="{FF2B5EF4-FFF2-40B4-BE49-F238E27FC236}">
-                <a16:creationId xmlns:a16="http://schemas.microsoft.com/office/drawing/2014/main" id="{5181A541-BBC7-4329-8328-AB79E16ABD48}"/>
+                <a16:creationId xmlns:a16="http://schemas.microsoft.com/office/drawing/2014/main" id="{34ABB45B-2395-4206-9F1D-FA213348ED9F}"/>
               </a:ext>
             </a:extLst>
           </p:cNvPr>
@@ -1174,7 +1154,7 @@
           <p:cNvPr id="4" name="">
             <a:extLst xmlns:a="http://schemas.openxmlformats.org/drawingml/2006/main">
               <a:ext uri="{FF2B5EF4-FFF2-40B4-BE49-F238E27FC236}">
-                <a16:creationId xmlns:a16="http://schemas.microsoft.com/office/drawing/2014/main" id="{E2FA1A24-85D4-4840-9C8A-06AB6CCEE35F}"/>
+                <a16:creationId xmlns:a16="http://schemas.microsoft.com/office/drawing/2014/main" id="{5A1F7487-B277-4FED-805A-26C08DA5DD40}"/>
               </a:ext>
             </a:extLst>
           </p:cNvPr>
@@ -1586,7 +1566,7 @@
     </p:spTree>
     <p:extLst>
       <p:ext uri="{BB962C8B-B14F-4D97-AF65-F5344CB8AC3E}">
-        <p14:creationId xmlns:p14="http://schemas.microsoft.com/office/powerpoint/2010/main" val="242133843"/>
+        <p14:creationId xmlns:p14="http://schemas.microsoft.com/office/powerpoint/2010/main" val="284554763"/>
       </p:ext>
     </p:extLst>
   </p:cSld>
@@ -1617,7 +1597,7 @@
           <p:cNvPr id="17" name="">
             <a:extLst xmlns:a="http://schemas.openxmlformats.org/drawingml/2006/main">
               <a:ext uri="{FF2B5EF4-FFF2-40B4-BE49-F238E27FC236}">
-                <a16:creationId xmlns:a16="http://schemas.microsoft.com/office/drawing/2014/main" id="{C5C11C9D-1CA5-4BF2-A777-52B504D1C532}"/>
+                <a16:creationId xmlns:a16="http://schemas.microsoft.com/office/drawing/2014/main" id="{4739A7F1-8656-4254-9701-296F90B78597}"/>
               </a:ext>
             </a:extLst>
           </p:cNvPr>
@@ -1674,7 +1654,7 @@
           <p:cNvPr id="2" name="">
             <a:extLst xmlns:a="http://schemas.openxmlformats.org/drawingml/2006/main">
               <a:ext uri="{FF2B5EF4-FFF2-40B4-BE49-F238E27FC236}">
-                <a16:creationId xmlns:a16="http://schemas.microsoft.com/office/drawing/2014/main" id="{81582DD5-62AA-4394-9C7C-606E2CB4FD5C}"/>
+                <a16:creationId xmlns:a16="http://schemas.microsoft.com/office/drawing/2014/main" id="{066855E6-2273-4C73-88F4-055AD4EF9706}"/>
               </a:ext>
             </a:extLst>
           </p:cNvPr>
@@ -1731,7 +1711,7 @@
           <p:cNvPr id="3" name="">
             <a:extLst xmlns:a="http://schemas.openxmlformats.org/drawingml/2006/main">
               <a:ext uri="{FF2B5EF4-FFF2-40B4-BE49-F238E27FC236}">
-                <a16:creationId xmlns:a16="http://schemas.microsoft.com/office/drawing/2014/main" id="{E7AF7B64-0097-4729-8FC1-B999E83E5F5B}"/>
+                <a16:creationId xmlns:a16="http://schemas.microsoft.com/office/drawing/2014/main" id="{F769555E-9913-4882-A2B7-07EF127E5499}"/>
               </a:ext>
             </a:extLst>
           </p:cNvPr>
@@ -1788,7 +1768,7 @@
           <p:cNvPr id="4" name="">
             <a:extLst xmlns:a="http://schemas.openxmlformats.org/drawingml/2006/main">
               <a:ext uri="{FF2B5EF4-FFF2-40B4-BE49-F238E27FC236}">
-                <a16:creationId xmlns:a16="http://schemas.microsoft.com/office/drawing/2014/main" id="{CAF7B699-8488-445C-A2BD-0E77DB4F5E91}"/>
+                <a16:creationId xmlns:a16="http://schemas.microsoft.com/office/drawing/2014/main" id="{345CD311-FDF0-446C-9E3B-95D41E892E90}"/>
               </a:ext>
             </a:extLst>
           </p:cNvPr>
@@ -1845,7 +1825,7 @@
           <p:cNvPr id="5" name="">
             <a:extLst xmlns:a="http://schemas.openxmlformats.org/drawingml/2006/main">
               <a:ext uri="{FF2B5EF4-FFF2-40B4-BE49-F238E27FC236}">
-                <a16:creationId xmlns:a16="http://schemas.microsoft.com/office/drawing/2014/main" id="{C49B3DF7-76E1-43E1-884B-1DA8F5C87839}"/>
+                <a16:creationId xmlns:a16="http://schemas.microsoft.com/office/drawing/2014/main" id="{CF7005A7-3B01-40F4-A783-AD8640306483}"/>
               </a:ext>
             </a:extLst>
           </p:cNvPr>
@@ -1902,7 +1882,7 @@
           <p:cNvPr id="6" name="">
             <a:extLst xmlns:a="http://schemas.openxmlformats.org/drawingml/2006/main">
               <a:ext uri="{FF2B5EF4-FFF2-40B4-BE49-F238E27FC236}">
-                <a16:creationId xmlns:a16="http://schemas.microsoft.com/office/drawing/2014/main" id="{E3DD8664-F410-4247-B7F8-61650F5AACB7}"/>
+                <a16:creationId xmlns:a16="http://schemas.microsoft.com/office/drawing/2014/main" id="{026FE924-BD19-415D-A330-252FDA587CC3}"/>
               </a:ext>
             </a:extLst>
           </p:cNvPr>
@@ -1931,7 +1911,7 @@
           <p:cNvPr id="7" name="">
             <a:extLst xmlns:a="http://schemas.openxmlformats.org/drawingml/2006/main">
               <a:ext uri="{FF2B5EF4-FFF2-40B4-BE49-F238E27FC236}">
-                <a16:creationId xmlns:a16="http://schemas.microsoft.com/office/drawing/2014/main" id="{0A903C10-2C82-4656-9FB9-EEB6DDD98F5F}"/>
+                <a16:creationId xmlns:a16="http://schemas.microsoft.com/office/drawing/2014/main" id="{DCFF365D-98EE-4A4A-A9E7-6A7B7F6E7623}"/>
               </a:ext>
             </a:extLst>
           </p:cNvPr>
@@ -1988,7 +1968,7 @@
           <p:cNvPr id="8" name="">
             <a:extLst xmlns:a="http://schemas.openxmlformats.org/drawingml/2006/main">
               <a:ext uri="{FF2B5EF4-FFF2-40B4-BE49-F238E27FC236}">
-                <a16:creationId xmlns:a16="http://schemas.microsoft.com/office/drawing/2014/main" id="{C5F98733-F947-4FE3-AFBE-D403CEACB835}"/>
+                <a16:creationId xmlns:a16="http://schemas.microsoft.com/office/drawing/2014/main" id="{74E8CCC5-1AA3-41E8-81BD-FF7036BEBDC3}"/>
               </a:ext>
             </a:extLst>
           </p:cNvPr>
@@ -2045,7 +2025,7 @@
           <p:cNvPr id="9" name="">
             <a:extLst xmlns:a="http://schemas.openxmlformats.org/drawingml/2006/main">
               <a:ext uri="{FF2B5EF4-FFF2-40B4-BE49-F238E27FC236}">
-                <a16:creationId xmlns:a16="http://schemas.microsoft.com/office/drawing/2014/main" id="{5CDF9B54-EB57-4011-9EB6-44449F58A285}"/>
+                <a16:creationId xmlns:a16="http://schemas.microsoft.com/office/drawing/2014/main" id="{02073927-9BB1-4E6C-A3AD-BFA7C7A2E5F1}"/>
               </a:ext>
             </a:extLst>
           </p:cNvPr>
@@ -2102,7 +2082,7 @@
           <p:cNvPr id="10" name="">
             <a:extLst xmlns:a="http://schemas.openxmlformats.org/drawingml/2006/main">
               <a:ext uri="{FF2B5EF4-FFF2-40B4-BE49-F238E27FC236}">
-                <a16:creationId xmlns:a16="http://schemas.microsoft.com/office/drawing/2014/main" id="{6F08D2CB-3415-410E-A455-577623E8F27F}"/>
+                <a16:creationId xmlns:a16="http://schemas.microsoft.com/office/drawing/2014/main" id="{C9182292-7BC1-40CA-99DC-78DAABB4453B}"/>
               </a:ext>
             </a:extLst>
           </p:cNvPr>
@@ -2159,7 +2139,7 @@
           <p:cNvPr id="11" name="">
             <a:extLst xmlns:a="http://schemas.openxmlformats.org/drawingml/2006/main">
               <a:ext uri="{FF2B5EF4-FFF2-40B4-BE49-F238E27FC236}">
-                <a16:creationId xmlns:a16="http://schemas.microsoft.com/office/drawing/2014/main" id="{46B469E6-0F2C-483F-A1FF-991F72F251FA}"/>
+                <a16:creationId xmlns:a16="http://schemas.microsoft.com/office/drawing/2014/main" id="{ABAC7DC1-9675-45A9-BA6A-2B3A34D13E58}"/>
               </a:ext>
             </a:extLst>
           </p:cNvPr>
@@ -2188,7 +2168,7 @@
           <p:cNvPr id="12" name="">
             <a:extLst xmlns:a="http://schemas.openxmlformats.org/drawingml/2006/main">
               <a:ext uri="{FF2B5EF4-FFF2-40B4-BE49-F238E27FC236}">
-                <a16:creationId xmlns:a16="http://schemas.microsoft.com/office/drawing/2014/main" id="{F97EE539-693A-4775-A212-11E1D6AAD336}"/>
+                <a16:creationId xmlns:a16="http://schemas.microsoft.com/office/drawing/2014/main" id="{8AE41C2D-D195-4D6F-8786-F1461927C9EA}"/>
               </a:ext>
             </a:extLst>
           </p:cNvPr>
@@ -2245,7 +2225,7 @@
           <p:cNvPr id="13" name="">
             <a:extLst xmlns:a="http://schemas.openxmlformats.org/drawingml/2006/main">
               <a:ext uri="{FF2B5EF4-FFF2-40B4-BE49-F238E27FC236}">
-                <a16:creationId xmlns:a16="http://schemas.microsoft.com/office/drawing/2014/main" id="{60F1CB5C-8673-4A4A-8CE7-A49F1D16091F}"/>
+                <a16:creationId xmlns:a16="http://schemas.microsoft.com/office/drawing/2014/main" id="{E9B645D9-71EF-44F3-AC34-8EF5AFF41FB5}"/>
               </a:ext>
             </a:extLst>
           </p:cNvPr>
@@ -2302,7 +2282,7 @@
           <p:cNvPr id="14" name="">
             <a:extLst xmlns:a="http://schemas.openxmlformats.org/drawingml/2006/main">
               <a:ext uri="{FF2B5EF4-FFF2-40B4-BE49-F238E27FC236}">
-                <a16:creationId xmlns:a16="http://schemas.microsoft.com/office/drawing/2014/main" id="{BE67BF4A-751C-43E8-BD8B-5C4818DE798E}"/>
+                <a16:creationId xmlns:a16="http://schemas.microsoft.com/office/drawing/2014/main" id="{EAC29816-8B17-4F06-8F31-A2D03385B137}"/>
               </a:ext>
             </a:extLst>
           </p:cNvPr>
@@ -2645,7 +2625,7 @@
           <p:cNvPr id="16" name="">
             <a:extLst xmlns:a="http://schemas.openxmlformats.org/drawingml/2006/main">
               <a:ext uri="{FF2B5EF4-FFF2-40B4-BE49-F238E27FC236}">
-                <a16:creationId xmlns:a16="http://schemas.microsoft.com/office/drawing/2014/main" id="{D4878F94-935E-470F-8330-D6EAEC799531}"/>
+                <a16:creationId xmlns:a16="http://schemas.microsoft.com/office/drawing/2014/main" id="{AE62C9A8-D667-4B8F-84A4-B7FD2A2BCB0B}"/>
               </a:ext>
             </a:extLst>
           </p:cNvPr>
@@ -2723,7 +2703,7 @@
     </p:spTree>
     <p:extLst>
       <p:ext uri="{BB962C8B-B14F-4D97-AF65-F5344CB8AC3E}">
-        <p14:creationId xmlns:p14="http://schemas.microsoft.com/office/powerpoint/2010/main" val="964084325"/>
+        <p14:creationId xmlns:p14="http://schemas.microsoft.com/office/powerpoint/2010/main" val="912230454"/>
       </p:ext>
     </p:extLst>
   </p:cSld>
@@ -2751,10 +2731,10 @@
       </p:grpSpPr>
       <p:sp>
         <p:nvSpPr>
-          <p:cNvPr id="8" name="">
-            <a:extLst xmlns:a="http://schemas.openxmlformats.org/drawingml/2006/main">
-              <a:ext uri="{FF2B5EF4-FFF2-40B4-BE49-F238E27FC236}">
-                <a16:creationId xmlns:a16="http://schemas.microsoft.com/office/drawing/2014/main" id="{98674A69-06CA-4897-8180-E2ABCDD8FD95}"/>
+          <p:cNvPr id="12" name="">
+            <a:extLst xmlns:a="http://schemas.openxmlformats.org/drawingml/2006/main">
+              <a:ext uri="{FF2B5EF4-FFF2-40B4-BE49-F238E27FC236}">
+                <a16:creationId xmlns:a16="http://schemas.microsoft.com/office/drawing/2014/main" id="{5C8E6EC2-31F3-4035-9346-B501394FB6BB}"/>
               </a:ext>
             </a:extLst>
           </p:cNvPr>
@@ -2811,7 +2791,7 @@
           <p:cNvPr id="2" name="">
             <a:extLst xmlns:a="http://schemas.openxmlformats.org/drawingml/2006/main">
               <a:ext uri="{FF2B5EF4-FFF2-40B4-BE49-F238E27FC236}">
-                <a16:creationId xmlns:a16="http://schemas.microsoft.com/office/drawing/2014/main" id="{19E6E7B2-210F-42D1-B602-F861841702CA}"/>
+                <a16:creationId xmlns:a16="http://schemas.microsoft.com/office/drawing/2014/main" id="{9A4AD195-AD4B-40A6-B989-1D15AEFE0986}"/>
               </a:ext>
             </a:extLst>
           </p:cNvPr>
@@ -2868,7 +2848,7 @@
           <p:cNvPr id="3" name="">
             <a:extLst xmlns:a="http://schemas.openxmlformats.org/drawingml/2006/main">
               <a:ext uri="{FF2B5EF4-FFF2-40B4-BE49-F238E27FC236}">
-                <a16:creationId xmlns:a16="http://schemas.microsoft.com/office/drawing/2014/main" id="{B0718E58-AC94-4535-9839-A90F4A253994}"/>
+                <a16:creationId xmlns:a16="http://schemas.microsoft.com/office/drawing/2014/main" id="{FA2FA11F-14ED-47AE-83FE-90D12918E02E}"/>
               </a:ext>
             </a:extLst>
           </p:cNvPr>
@@ -2925,7 +2905,7 @@
           <p:cNvPr id="4" name="">
             <a:extLst xmlns:a="http://schemas.openxmlformats.org/drawingml/2006/main">
               <a:ext uri="{FF2B5EF4-FFF2-40B4-BE49-F238E27FC236}">
-                <a16:creationId xmlns:a16="http://schemas.microsoft.com/office/drawing/2014/main" id="{457F1B5A-93AE-4956-98C3-5EDBDEC50275}"/>
+                <a16:creationId xmlns:a16="http://schemas.microsoft.com/office/drawing/2014/main" id="{9142C96A-3CE7-49FC-AFDB-F746BBC5725C}"/>
               </a:ext>
             </a:extLst>
           </p:cNvPr>
@@ -2979,17 +2959,17 @@
       </p:sp>
       <p:graphicFrame>
         <p:nvGraphicFramePr>
-          <p:cNvPr id="12" name="Chart"/>
+          <p:cNvPr id="16" name="Chart"/>
           <p:cNvGraphicFramePr/>
           <p:nvPr/>
         </p:nvGraphicFramePr>
         <p:xfrm>
           <a:off xmlns:a="http://schemas.openxmlformats.org/drawingml/2006/main" x="533400" y="1924050"/>
-          <a:ext xmlns:a="http://schemas.openxmlformats.org/drawingml/2006/main" cx="11144250" cy="3114675"/>
+          <a:ext xmlns:a="http://schemas.openxmlformats.org/drawingml/2006/main" cx="11144250" cy="2762250"/>
         </p:xfrm>
         <a:graphic xmlns:a="http://schemas.openxmlformats.org/drawingml/2006/main">
           <a:graphicData uri="http://schemas.openxmlformats.org/drawingml/2006/chart">
-            <c:chart xmlns:r="http://schemas.openxmlformats.org/officeDocument/2006/relationships" xmlns:c="http://schemas.openxmlformats.org/drawingml/2006/chart" r:id="Re36337c169344784"/>
+            <c:chart xmlns:r="http://schemas.openxmlformats.org/officeDocument/2006/relationships" xmlns:c="http://schemas.openxmlformats.org/drawingml/2006/chart" r:id="Rd7f09683c6344652"/>
           </a:graphicData>
         </a:graphic>
       </p:graphicFrame>
@@ -2998,7 +2978,181 @@
           <p:cNvPr id="6" name="">
             <a:extLst xmlns:a="http://schemas.openxmlformats.org/drawingml/2006/main">
               <a:ext uri="{FF2B5EF4-FFF2-40B4-BE49-F238E27FC236}">
-                <a16:creationId xmlns:a16="http://schemas.microsoft.com/office/drawing/2014/main" id="{A2080127-3FAF-45B7-A042-2A14D2F35BF5}"/>
+                <a16:creationId xmlns:a16="http://schemas.microsoft.com/office/drawing/2014/main" id="{9C7BE111-CC24-4F7E-BE86-D30BA340E39B}"/>
+              </a:ext>
+            </a:extLst>
+          </p:cNvPr>
+          <p:cNvSpPr>
+            <a:spLocks xmlns:a="http://schemas.openxmlformats.org/drawingml/2006/main" noGrp="1"/>
+          </p:cNvSpPr>
+          <p:nvPr/>
+        </p:nvSpPr>
+        <p:spPr>
+          <a:xfrm xmlns:a="http://schemas.openxmlformats.org/drawingml/2006/main">
+            <a:off x="3829050" y="4810125"/>
+            <a:ext cx="95250" cy="95250"/>
+          </a:xfrm>
+          <a:prstGeom xmlns:a="http://schemas.openxmlformats.org/drawingml/2006/main" prst="rect">
+            <a:avLst/>
+          </a:prstGeom>
+          <a:solidFill xmlns:a="http://schemas.openxmlformats.org/drawingml/2006/main">
+            <a:srgbClr val="007C78"/>
+          </a:solidFill>
+          <a:ln xmlns:a="http://schemas.openxmlformats.org/drawingml/2006/main" w="0">
+            <a:noFill/>
+          </a:ln>
+        </p:spPr>
+      </p:sp>
+      <p:sp>
+        <p:nvSpPr>
+          <p:cNvPr id="7" name="">
+            <a:extLst xmlns:a="http://schemas.openxmlformats.org/drawingml/2006/main">
+              <a:ext uri="{FF2B5EF4-FFF2-40B4-BE49-F238E27FC236}">
+                <a16:creationId xmlns:a16="http://schemas.microsoft.com/office/drawing/2014/main" id="{E7EA94A8-E4C8-4D2D-B420-2B072FD3C222}"/>
+              </a:ext>
+            </a:extLst>
+          </p:cNvPr>
+          <p:cNvSpPr>
+            <a:spLocks xmlns:a="http://schemas.openxmlformats.org/drawingml/2006/main" noGrp="1"/>
+          </p:cNvSpPr>
+          <p:nvPr/>
+        </p:nvSpPr>
+        <p:spPr>
+          <a:xfrm xmlns:a="http://schemas.openxmlformats.org/drawingml/2006/main">
+            <a:off x="3981450" y="4667250"/>
+            <a:ext cx="2324100" cy="381000"/>
+          </a:xfrm>
+          <a:prstGeom xmlns:a="http://schemas.openxmlformats.org/drawingml/2006/main" prst="rect">
+            <a:avLst/>
+          </a:prstGeom>
+          <a:noFill xmlns:a="http://schemas.openxmlformats.org/drawingml/2006/main"/>
+          <a:ln xmlns:a="http://schemas.openxmlformats.org/drawingml/2006/main" w="0">
+            <a:noFill/>
+          </a:ln>
+        </p:spPr>
+        <p:txBody>
+          <a:bodyPr xmlns:a="http://schemas.openxmlformats.org/drawingml/2006/main" anchor="ctr">
+            <a:noAutofit/>
+          </a:bodyPr>
+          <a:lstStyle xmlns:a="http://schemas.openxmlformats.org/drawingml/2006/main"/>
+          <a:p xmlns:a="http://schemas.openxmlformats.org/drawingml/2006/main">
+            <a:pPr algn="l">
+              <a:defRPr sz="1875" b="0">
+                <a:solidFill>
+                  <a:srgbClr val="16343E"/>
+                </a:solidFill>
+                <a:latin typeface="Arial"/>
+                <a:ea typeface="Arial"/>
+                <a:cs typeface="Arial"/>
+              </a:defRPr>
+            </a:pPr>
+            <a:r>
+              <a:rPr sz="1875" b="0">
+                <a:solidFill>
+                  <a:srgbClr val="16343E"/>
+                </a:solidFill>
+                <a:latin typeface="Arial"/>
+                <a:ea typeface="Arial"/>
+                <a:cs typeface="Arial"/>
+              </a:rPr>
+              <a:t>Incorrect flags / 176</a:t>
+            </a:r>
+          </a:p>
+        </p:txBody>
+      </p:sp>
+      <p:sp>
+        <p:nvSpPr>
+          <p:cNvPr id="8" name="">
+            <a:extLst xmlns:a="http://schemas.openxmlformats.org/drawingml/2006/main">
+              <a:ext uri="{FF2B5EF4-FFF2-40B4-BE49-F238E27FC236}">
+                <a16:creationId xmlns:a16="http://schemas.microsoft.com/office/drawing/2014/main" id="{A2E9DE57-5E6E-4250-9F40-244987335A79}"/>
+              </a:ext>
+            </a:extLst>
+          </p:cNvPr>
+          <p:cNvSpPr>
+            <a:spLocks xmlns:a="http://schemas.openxmlformats.org/drawingml/2006/main" noGrp="1"/>
+          </p:cNvSpPr>
+          <p:nvPr/>
+        </p:nvSpPr>
+        <p:spPr>
+          <a:xfrm xmlns:a="http://schemas.openxmlformats.org/drawingml/2006/main">
+            <a:off x="6248400" y="4810125"/>
+            <a:ext cx="95250" cy="95250"/>
+          </a:xfrm>
+          <a:prstGeom xmlns:a="http://schemas.openxmlformats.org/drawingml/2006/main" prst="rect">
+            <a:avLst/>
+          </a:prstGeom>
+          <a:solidFill xmlns:a="http://schemas.openxmlformats.org/drawingml/2006/main">
+            <a:srgbClr val="B55730"/>
+          </a:solidFill>
+          <a:ln xmlns:a="http://schemas.openxmlformats.org/drawingml/2006/main" w="0">
+            <a:noFill/>
+          </a:ln>
+        </p:spPr>
+      </p:sp>
+      <p:sp>
+        <p:nvSpPr>
+          <p:cNvPr id="9" name="">
+            <a:extLst xmlns:a="http://schemas.openxmlformats.org/drawingml/2006/main">
+              <a:ext uri="{FF2B5EF4-FFF2-40B4-BE49-F238E27FC236}">
+                <a16:creationId xmlns:a16="http://schemas.microsoft.com/office/drawing/2014/main" id="{614EDB17-6B04-42FD-A061-4C267BFC875B}"/>
+              </a:ext>
+            </a:extLst>
+          </p:cNvPr>
+          <p:cNvSpPr>
+            <a:spLocks xmlns:a="http://schemas.openxmlformats.org/drawingml/2006/main" noGrp="1"/>
+          </p:cNvSpPr>
+          <p:nvPr/>
+        </p:nvSpPr>
+        <p:spPr>
+          <a:xfrm xmlns:a="http://schemas.openxmlformats.org/drawingml/2006/main">
+            <a:off x="6400800" y="4667250"/>
+            <a:ext cx="2381250" cy="381000"/>
+          </a:xfrm>
+          <a:prstGeom xmlns:a="http://schemas.openxmlformats.org/drawingml/2006/main" prst="rect">
+            <a:avLst/>
+          </a:prstGeom>
+          <a:noFill xmlns:a="http://schemas.openxmlformats.org/drawingml/2006/main"/>
+          <a:ln xmlns:a="http://schemas.openxmlformats.org/drawingml/2006/main" w="0">
+            <a:noFill/>
+          </a:ln>
+        </p:spPr>
+        <p:txBody>
+          <a:bodyPr xmlns:a="http://schemas.openxmlformats.org/drawingml/2006/main" anchor="ctr">
+            <a:noAutofit/>
+          </a:bodyPr>
+          <a:lstStyle xmlns:a="http://schemas.openxmlformats.org/drawingml/2006/main"/>
+          <a:p xmlns:a="http://schemas.openxmlformats.org/drawingml/2006/main">
+            <a:pPr algn="l">
+              <a:defRPr sz="1875" b="0">
+                <a:solidFill>
+                  <a:srgbClr val="16343E"/>
+                </a:solidFill>
+                <a:latin typeface="Arial"/>
+                <a:ea typeface="Arial"/>
+                <a:cs typeface="Arial"/>
+              </a:defRPr>
+            </a:pPr>
+            <a:r>
+              <a:rPr sz="1875" b="0">
+                <a:solidFill>
+                  <a:srgbClr val="16343E"/>
+                </a:solidFill>
+                <a:latin typeface="Arial"/>
+                <a:ea typeface="Arial"/>
+                <a:cs typeface="Arial"/>
+              </a:rPr>
+              <a:t>Missed cases / 169</a:t>
+            </a:r>
+          </a:p>
+        </p:txBody>
+      </p:sp>
+      <p:sp>
+        <p:nvSpPr>
+          <p:cNvPr id="10" name="">
+            <a:extLst xmlns:a="http://schemas.openxmlformats.org/drawingml/2006/main">
+              <a:ext uri="{FF2B5EF4-FFF2-40B4-BE49-F238E27FC236}">
+                <a16:creationId xmlns:a16="http://schemas.microsoft.com/office/drawing/2014/main" id="{56E8268C-4E47-426E-9D81-568A89D3B4ED}"/>
               </a:ext>
             </a:extLst>
           </p:cNvPr>
@@ -3056,10 +3210,10 @@
       </p:sp>
       <p:sp>
         <p:nvSpPr>
-          <p:cNvPr id="7" name="">
-            <a:extLst xmlns:a="http://schemas.openxmlformats.org/drawingml/2006/main">
-              <a:ext uri="{FF2B5EF4-FFF2-40B4-BE49-F238E27FC236}">
-                <a16:creationId xmlns:a16="http://schemas.microsoft.com/office/drawing/2014/main" id="{6011E46D-F4EA-4E44-890D-7271A44A5B24}"/>
+          <p:cNvPr id="11" name="">
+            <a:extLst xmlns:a="http://schemas.openxmlformats.org/drawingml/2006/main">
+              <a:ext uri="{FF2B5EF4-FFF2-40B4-BE49-F238E27FC236}">
+                <a16:creationId xmlns:a16="http://schemas.microsoft.com/office/drawing/2014/main" id="{496F0C23-7281-4EFF-9040-535900A97197}"/>
               </a:ext>
             </a:extLst>
           </p:cNvPr>
@@ -3114,7 +3268,7 @@
     </p:spTree>
     <p:extLst>
       <p:ext uri="{BB962C8B-B14F-4D97-AF65-F5344CB8AC3E}">
-        <p14:creationId xmlns:p14="http://schemas.microsoft.com/office/powerpoint/2010/main" val="948490270"/>
+        <p14:creationId xmlns:p14="http://schemas.microsoft.com/office/powerpoint/2010/main" val="1750877085"/>
       </p:ext>
     </p:extLst>
   </p:cSld>
@@ -3142,10 +3296,10 @@
       </p:grpSpPr>
       <p:sp>
         <p:nvSpPr>
-          <p:cNvPr id="5" name="">
-            <a:extLst xmlns:a="http://schemas.openxmlformats.org/drawingml/2006/main">
-              <a:ext uri="{FF2B5EF4-FFF2-40B4-BE49-F238E27FC236}">
-                <a16:creationId xmlns:a16="http://schemas.microsoft.com/office/drawing/2014/main" id="{20E9CA22-C8B7-4D1C-9310-165429E549A1}"/>
+          <p:cNvPr id="4" name="">
+            <a:extLst xmlns:a="http://schemas.openxmlformats.org/drawingml/2006/main">
+              <a:ext uri="{FF2B5EF4-FFF2-40B4-BE49-F238E27FC236}">
+                <a16:creationId xmlns:a16="http://schemas.microsoft.com/office/drawing/2014/main" id="{C69A5426-B04F-4300-B53F-51226A6AEABE}"/>
               </a:ext>
             </a:extLst>
           </p:cNvPr>
@@ -3192,7 +3346,7 @@
                 <a:ea typeface="Arial"/>
                 <a:cs typeface="Arial"/>
               </a:rPr>
-              <a:t>Software engineering</a:t>
+              <a:t>Software Engineering Demo</a:t>
             </a:r>
           </a:p>
         </p:txBody>
@@ -3202,7 +3356,7 @@
           <p:cNvPr id="2" name="">
             <a:extLst xmlns:a="http://schemas.openxmlformats.org/drawingml/2006/main">
               <a:ext uri="{FF2B5EF4-FFF2-40B4-BE49-F238E27FC236}">
-                <a16:creationId xmlns:a16="http://schemas.microsoft.com/office/drawing/2014/main" id="{8BF2BD10-1A38-4374-8B1E-7E2B5B339F62}"/>
+                <a16:creationId xmlns:a16="http://schemas.microsoft.com/office/drawing/2014/main" id="{DEA39A17-67EB-486C-9C9C-F4920F3DBF18}"/>
               </a:ext>
             </a:extLst>
           </p:cNvPr>
@@ -3259,7 +3413,7 @@
           <p:cNvPr id="3" name="">
             <a:extLst xmlns:a="http://schemas.openxmlformats.org/drawingml/2006/main">
               <a:ext uri="{FF2B5EF4-FFF2-40B4-BE49-F238E27FC236}">
-                <a16:creationId xmlns:a16="http://schemas.microsoft.com/office/drawing/2014/main" id="{2481557B-C43C-4C62-AD65-B18490676247}"/>
+                <a16:creationId xmlns:a16="http://schemas.microsoft.com/office/drawing/2014/main" id="{153F1898-AD1B-4D73-AB61-245DF1B24B4F}"/>
               </a:ext>
             </a:extLst>
           </p:cNvPr>
@@ -3311,125 +3465,10 @@
           </a:p>
         </p:txBody>
       </p:sp>
-      <p:sp>
-        <p:nvSpPr>
-          <p:cNvPr id="4" name="">
-            <a:extLst xmlns:a="http://schemas.openxmlformats.org/drawingml/2006/main">
-              <a:ext uri="{FF2B5EF4-FFF2-40B4-BE49-F238E27FC236}">
-                <a16:creationId xmlns:a16="http://schemas.microsoft.com/office/drawing/2014/main" id="{6268E36E-F3BA-40C9-B663-377CF51AF555}"/>
-              </a:ext>
-            </a:extLst>
-          </p:cNvPr>
-          <p:cNvSpPr>
-            <a:spLocks xmlns:a="http://schemas.openxmlformats.org/drawingml/2006/main" noGrp="1"/>
-          </p:cNvSpPr>
-          <p:nvPr/>
-        </p:nvSpPr>
-        <p:spPr>
-          <a:xfrm xmlns:a="http://schemas.openxmlformats.org/drawingml/2006/main">
-            <a:off x="609600" y="2943225"/>
-            <a:ext cx="10972800" cy="2200275"/>
-          </a:xfrm>
-          <a:prstGeom xmlns:a="http://schemas.openxmlformats.org/drawingml/2006/main" prst="rect">
-            <a:avLst/>
-          </a:prstGeom>
-          <a:noFill xmlns:a="http://schemas.openxmlformats.org/drawingml/2006/main"/>
-          <a:ln xmlns:a="http://schemas.openxmlformats.org/drawingml/2006/main" w="0">
-            <a:noFill/>
-          </a:ln>
-        </p:spPr>
-        <p:txBody>
-          <a:bodyPr xmlns:a="http://schemas.openxmlformats.org/drawingml/2006/main" anchor="t">
-            <a:noAutofit/>
-          </a:bodyPr>
-          <a:lstStyle xmlns:a="http://schemas.openxmlformats.org/drawingml/2006/main"/>
-          <a:p xmlns:a="http://schemas.openxmlformats.org/drawingml/2006/main">
-            <a:pPr marL="279400" indent="-152400" algn="l">
-              <a:spcAft>
-                <a:spcPts val="2800"/>
-              </a:spcAft>
-              <a:buChar char="•"/>
-              <a:defRPr sz="2850" b="0">
-                <a:solidFill>
-                  <a:srgbClr val="16343E"/>
-                </a:solidFill>
-                <a:latin typeface="Arial"/>
-                <a:ea typeface="Arial"/>
-                <a:cs typeface="Arial"/>
-              </a:defRPr>
-            </a:pPr>
-            <a:r>
-              <a:rPr sz="2850" b="0">
-                <a:solidFill>
-                  <a:srgbClr val="16343E"/>
-                </a:solidFill>
-                <a:latin typeface="Arial"/>
-                <a:ea typeface="Arial"/>
-                <a:cs typeface="Arial"/>
-              </a:rPr>
-              <a:t>Inspect the evidence</a:t>
-            </a:r>
-          </a:p>
-          <a:p xmlns:a="http://schemas.openxmlformats.org/drawingml/2006/main">
-            <a:pPr marL="279400" indent="-152400" algn="l">
-              <a:spcAft>
-                <a:spcPts val="2800"/>
-              </a:spcAft>
-              <a:buChar char="•"/>
-              <a:defRPr sz="2850" b="0">
-                <a:solidFill>
-                  <a:srgbClr val="16343E"/>
-                </a:solidFill>
-                <a:latin typeface="Arial"/>
-                <a:ea typeface="Arial"/>
-                <a:cs typeface="Arial"/>
-              </a:defRPr>
-            </a:pPr>
-            <a:r>
-              <a:rPr sz="2850" b="0">
-                <a:solidFill>
-                  <a:srgbClr val="16343E"/>
-                </a:solidFill>
-                <a:latin typeface="Arial"/>
-                <a:ea typeface="Arial"/>
-                <a:cs typeface="Arial"/>
-              </a:rPr>
-              <a:t>Score a public specimen</a:t>
-            </a:r>
-          </a:p>
-          <a:p xmlns:a="http://schemas.openxmlformats.org/drawingml/2006/main">
-            <a:pPr marL="279400" indent="-152400" algn="l">
-              <a:spcAft>
-                <a:spcPts val="2800"/>
-              </a:spcAft>
-              <a:buChar char="•"/>
-              <a:defRPr sz="2850" b="0">
-                <a:solidFill>
-                  <a:srgbClr val="16343E"/>
-                </a:solidFill>
-                <a:latin typeface="Arial"/>
-                <a:ea typeface="Arial"/>
-                <a:cs typeface="Arial"/>
-              </a:defRPr>
-            </a:pPr>
-            <a:r>
-              <a:rPr sz="2850" b="0">
-                <a:solidFill>
-                  <a:srgbClr val="16343E"/>
-                </a:solidFill>
-                <a:latin typeface="Arial"/>
-                <a:ea typeface="Arial"/>
-                <a:cs typeface="Arial"/>
-              </a:rPr>
-              <a:t>Trace and check the calculation</a:t>
-            </a:r>
-          </a:p>
-        </p:txBody>
-      </p:sp>
     </p:spTree>
     <p:extLst>
       <p:ext uri="{BB962C8B-B14F-4D97-AF65-F5344CB8AC3E}">
-        <p14:creationId xmlns:p14="http://schemas.microsoft.com/office/powerpoint/2010/main" val="2100830968"/>
+        <p14:creationId xmlns:p14="http://schemas.microsoft.com/office/powerpoint/2010/main" val="1091844925"/>
       </p:ext>
     </p:extLst>
   </p:cSld>
@@ -3457,10 +3496,10 @@
       </p:grpSpPr>
       <p:sp>
         <p:nvSpPr>
-          <p:cNvPr id="10" name="">
-            <a:extLst xmlns:a="http://schemas.openxmlformats.org/drawingml/2006/main">
-              <a:ext uri="{FF2B5EF4-FFF2-40B4-BE49-F238E27FC236}">
-                <a16:creationId xmlns:a16="http://schemas.microsoft.com/office/drawing/2014/main" id="{74F2D1C2-2FFB-4A56-9F28-510255EFE9A6}"/>
+          <p:cNvPr id="9" name="">
+            <a:extLst xmlns:a="http://schemas.openxmlformats.org/drawingml/2006/main">
+              <a:ext uri="{FF2B5EF4-FFF2-40B4-BE49-F238E27FC236}">
+                <a16:creationId xmlns:a16="http://schemas.microsoft.com/office/drawing/2014/main" id="{A980FE43-807B-4742-BCCE-854C510A4549}"/>
               </a:ext>
             </a:extLst>
           </p:cNvPr>
@@ -3517,7 +3556,7 @@
           <p:cNvPr id="2" name="">
             <a:extLst xmlns:a="http://schemas.openxmlformats.org/drawingml/2006/main">
               <a:ext uri="{FF2B5EF4-FFF2-40B4-BE49-F238E27FC236}">
-                <a16:creationId xmlns:a16="http://schemas.microsoft.com/office/drawing/2014/main" id="{C7747D3A-B9C6-4D28-8827-042B0BCAB0CF}"/>
+                <a16:creationId xmlns:a16="http://schemas.microsoft.com/office/drawing/2014/main" id="{9E92B173-B533-4038-B622-B2FB2BC5F3AB}"/>
               </a:ext>
             </a:extLst>
           </p:cNvPr>
@@ -3574,7 +3613,7 @@
           <p:cNvPr id="3" name="">
             <a:extLst xmlns:a="http://schemas.openxmlformats.org/drawingml/2006/main">
               <a:ext uri="{FF2B5EF4-FFF2-40B4-BE49-F238E27FC236}">
-                <a16:creationId xmlns:a16="http://schemas.microsoft.com/office/drawing/2014/main" id="{FD809459-563E-46FD-82B6-AF6549F7485A}"/>
+                <a16:creationId xmlns:a16="http://schemas.microsoft.com/office/drawing/2014/main" id="{67BAAEF5-C09C-4C45-BAEE-29E60923F65F}"/>
               </a:ext>
             </a:extLst>
           </p:cNvPr>
@@ -3631,7 +3670,7 @@
           <p:cNvPr id="4" name="">
             <a:extLst xmlns:a="http://schemas.openxmlformats.org/drawingml/2006/main">
               <a:ext uri="{FF2B5EF4-FFF2-40B4-BE49-F238E27FC236}">
-                <a16:creationId xmlns:a16="http://schemas.microsoft.com/office/drawing/2014/main" id="{5675126E-5CAC-4F8E-BC96-F8E4A86107AB}"/>
+                <a16:creationId xmlns:a16="http://schemas.microsoft.com/office/drawing/2014/main" id="{E1710BEF-9EEC-45EA-9B8E-D44AAA0A9B95}"/>
               </a:ext>
             </a:extLst>
           </p:cNvPr>
@@ -3688,7 +3727,7 @@
           <p:cNvPr id="5" name="">
             <a:extLst xmlns:a="http://schemas.openxmlformats.org/drawingml/2006/main">
               <a:ext uri="{FF2B5EF4-FFF2-40B4-BE49-F238E27FC236}">
-                <a16:creationId xmlns:a16="http://schemas.microsoft.com/office/drawing/2014/main" id="{5C0F2C50-330D-45A1-8B71-7F987C1B7341}"/>
+                <a16:creationId xmlns:a16="http://schemas.microsoft.com/office/drawing/2014/main" id="{7F059A08-0788-4AB3-B4F1-851B990DC589}"/>
               </a:ext>
             </a:extLst>
           </p:cNvPr>
@@ -3768,7 +3807,7 @@
           <p:cNvPr id="6" name="">
             <a:extLst xmlns:a="http://schemas.openxmlformats.org/drawingml/2006/main">
               <a:ext uri="{FF2B5EF4-FFF2-40B4-BE49-F238E27FC236}">
-                <a16:creationId xmlns:a16="http://schemas.microsoft.com/office/drawing/2014/main" id="{8F8FE265-7F9F-4FF1-AA98-42BDAAF586B2}"/>
+                <a16:creationId xmlns:a16="http://schemas.microsoft.com/office/drawing/2014/main" id="{79BE1B5A-2FA5-4AC3-A9D2-C8197DC60080}"/>
               </a:ext>
             </a:extLst>
           </p:cNvPr>
@@ -3797,7 +3836,7 @@
           <p:cNvPr id="7" name="">
             <a:extLst xmlns:a="http://schemas.openxmlformats.org/drawingml/2006/main">
               <a:ext uri="{FF2B5EF4-FFF2-40B4-BE49-F238E27FC236}">
-                <a16:creationId xmlns:a16="http://schemas.microsoft.com/office/drawing/2014/main" id="{51D44CC5-7581-4ECD-97EE-2D89FB47EC8E}"/>
+                <a16:creationId xmlns:a16="http://schemas.microsoft.com/office/drawing/2014/main" id="{94D1DC89-53B2-4B91-B60F-B29F4EC478D9}"/>
               </a:ext>
             </a:extLst>
           </p:cNvPr>
@@ -3854,7 +3893,7 @@
           <p:cNvPr id="8" name="">
             <a:extLst xmlns:a="http://schemas.openxmlformats.org/drawingml/2006/main">
               <a:ext uri="{FF2B5EF4-FFF2-40B4-BE49-F238E27FC236}">
-                <a16:creationId xmlns:a16="http://schemas.microsoft.com/office/drawing/2014/main" id="{893C5769-C5C7-4137-B0F7-48A20CF575F1}"/>
+                <a16:creationId xmlns:a16="http://schemas.microsoft.com/office/drawing/2014/main" id="{2FDF0F0D-D727-49D4-81CA-1EE12BA07B54}"/>
               </a:ext>
             </a:extLst>
           </p:cNvPr>
@@ -3929,90 +3968,10 @@
           </a:p>
         </p:txBody>
       </p:sp>
-      <p:sp>
-        <p:nvSpPr>
-          <p:cNvPr id="9" name="">
-            <a:extLst xmlns:a="http://schemas.openxmlformats.org/drawingml/2006/main">
-              <a:ext uri="{FF2B5EF4-FFF2-40B4-BE49-F238E27FC236}">
-                <a16:creationId xmlns:a16="http://schemas.microsoft.com/office/drawing/2014/main" id="{406F0F6F-77E5-4E9F-81BD-8B56BAD1D329}"/>
-              </a:ext>
-            </a:extLst>
-          </p:cNvPr>
-          <p:cNvSpPr>
-            <a:spLocks xmlns:a="http://schemas.openxmlformats.org/drawingml/2006/main" noGrp="1"/>
-          </p:cNvSpPr>
-          <p:nvPr/>
-        </p:nvSpPr>
-        <p:spPr>
-          <a:xfrm xmlns:a="http://schemas.openxmlformats.org/drawingml/2006/main">
-            <a:off x="609600" y="5572125"/>
-            <a:ext cx="10972800" cy="619125"/>
-          </a:xfrm>
-          <a:prstGeom xmlns:a="http://schemas.openxmlformats.org/drawingml/2006/main" prst="rect">
-            <a:avLst/>
-          </a:prstGeom>
-          <a:noFill xmlns:a="http://schemas.openxmlformats.org/drawingml/2006/main"/>
-          <a:ln xmlns:a="http://schemas.openxmlformats.org/drawingml/2006/main" w="0">
-            <a:noFill/>
-          </a:ln>
-        </p:spPr>
-        <p:txBody>
-          <a:bodyPr xmlns:a="http://schemas.openxmlformats.org/drawingml/2006/main" anchor="ctr">
-            <a:noAutofit/>
-          </a:bodyPr>
-          <a:lstStyle xmlns:a="http://schemas.openxmlformats.org/drawingml/2006/main"/>
-          <a:p xmlns:a="http://schemas.openxmlformats.org/drawingml/2006/main">
-            <a:pPr algn="l">
-              <a:defRPr sz="1950" b="0">
-                <a:solidFill>
-                  <a:srgbClr val="FFFFFF"/>
-                </a:solidFill>
-                <a:latin typeface="Arial"/>
-                <a:ea typeface="Arial"/>
-                <a:cs typeface="Arial"/>
-              </a:defRPr>
-            </a:pPr>
-            <a:r>
-              <a:rPr sz="1950" b="0">
-                <a:solidFill>
-                  <a:srgbClr val="FFFFFF"/>
-                </a:solidFill>
-                <a:latin typeface="Arial"/>
-                <a:ea typeface="Arial"/>
-                <a:cs typeface="Arial"/>
-              </a:rPr>
-              <a:t>Next: cross-validation within discovery.</a:t>
-            </a:r>
-          </a:p>
-          <a:p xmlns:a="http://schemas.openxmlformats.org/drawingml/2006/main">
-            <a:pPr algn="l">
-              <a:defRPr sz="1950" b="0">
-                <a:solidFill>
-                  <a:srgbClr val="FFFFFF"/>
-                </a:solidFill>
-                <a:latin typeface="Arial"/>
-                <a:ea typeface="Arial"/>
-                <a:cs typeface="Arial"/>
-              </a:defRPr>
-            </a:pPr>
-            <a:r>
-              <a:rPr sz="1950" b="0">
-                <a:solidFill>
-                  <a:srgbClr val="FFFFFF"/>
-                </a:solidFill>
-                <a:latin typeface="Arial"/>
-                <a:ea typeface="Arial"/>
-                <a:cs typeface="Arial"/>
-              </a:rPr>
-              <a:t>Then investigate whether the score adds useful diagnostic information.</a:t>
-            </a:r>
-          </a:p>
-        </p:txBody>
-      </p:sp>
     </p:spTree>
     <p:extLst>
       <p:ext uri="{BB962C8B-B14F-4D97-AF65-F5344CB8AC3E}">
-        <p14:creationId xmlns:p14="http://schemas.microsoft.com/office/powerpoint/2010/main" val="654479045"/>
+        <p14:creationId xmlns:p14="http://schemas.microsoft.com/office/powerpoint/2010/main" val="1607663596"/>
       </p:ext>
     </p:extLst>
   </p:cSld>
@@ -4043,7 +4002,7 @@
           <p:cNvPr id="8" name="">
             <a:extLst xmlns:a="http://schemas.openxmlformats.org/drawingml/2006/main">
               <a:ext uri="{FF2B5EF4-FFF2-40B4-BE49-F238E27FC236}">
-                <a16:creationId xmlns:a16="http://schemas.microsoft.com/office/drawing/2014/main" id="{27930E4E-2091-44E3-9EF4-8DC9CC020A9D}"/>
+                <a16:creationId xmlns:a16="http://schemas.microsoft.com/office/drawing/2014/main" id="{CA76857C-FCFC-4198-8D20-06F13949F4EB}"/>
               </a:ext>
             </a:extLst>
           </p:cNvPr>
@@ -4100,7 +4059,7 @@
           <p:cNvPr id="2" name="">
             <a:extLst xmlns:a="http://schemas.openxmlformats.org/drawingml/2006/main">
               <a:ext uri="{FF2B5EF4-FFF2-40B4-BE49-F238E27FC236}">
-                <a16:creationId xmlns:a16="http://schemas.microsoft.com/office/drawing/2014/main" id="{DF694DCC-E773-4582-91F2-81495E3C6ACC}"/>
+                <a16:creationId xmlns:a16="http://schemas.microsoft.com/office/drawing/2014/main" id="{84D2937C-5BAB-4401-B4C2-9A5FCDA822A4}"/>
               </a:ext>
             </a:extLst>
           </p:cNvPr>
@@ -4157,7 +4116,7 @@
           <p:cNvPr id="3" name="">
             <a:extLst xmlns:a="http://schemas.openxmlformats.org/drawingml/2006/main">
               <a:ext uri="{FF2B5EF4-FFF2-40B4-BE49-F238E27FC236}">
-                <a16:creationId xmlns:a16="http://schemas.microsoft.com/office/drawing/2014/main" id="{156986E7-4656-4C62-867E-CA74CA558D31}"/>
+                <a16:creationId xmlns:a16="http://schemas.microsoft.com/office/drawing/2014/main" id="{6F17A776-DE48-4B28-B9C3-B74FB9078909}"/>
               </a:ext>
             </a:extLst>
           </p:cNvPr>
@@ -4214,7 +4173,7 @@
           <p:cNvPr id="4" name="">
             <a:extLst xmlns:a="http://schemas.openxmlformats.org/drawingml/2006/main">
               <a:ext uri="{FF2B5EF4-FFF2-40B4-BE49-F238E27FC236}">
-                <a16:creationId xmlns:a16="http://schemas.microsoft.com/office/drawing/2014/main" id="{6E338257-570F-4126-9AD8-7F7D0711BF83}"/>
+                <a16:creationId xmlns:a16="http://schemas.microsoft.com/office/drawing/2014/main" id="{8D2B2CCD-BA95-4351-8FF4-7176765E72BE}"/>
               </a:ext>
             </a:extLst>
           </p:cNvPr>
@@ -4271,7 +4230,7 @@
           <p:cNvPr id="5" name="">
             <a:extLst xmlns:a="http://schemas.openxmlformats.org/drawingml/2006/main">
               <a:ext uri="{FF2B5EF4-FFF2-40B4-BE49-F238E27FC236}">
-                <a16:creationId xmlns:a16="http://schemas.microsoft.com/office/drawing/2014/main" id="{F4D1325E-2BCE-4A98-83C3-76BDE9A19ED4}"/>
+                <a16:creationId xmlns:a16="http://schemas.microsoft.com/office/drawing/2014/main" id="{EF4D9A95-A095-40E5-8059-9DB63F7F7E0C}"/>
               </a:ext>
             </a:extLst>
           </p:cNvPr>
@@ -4328,7 +4287,7 @@
           <p:cNvPr id="6" name="">
             <a:extLst xmlns:a="http://schemas.openxmlformats.org/drawingml/2006/main">
               <a:ext uri="{FF2B5EF4-FFF2-40B4-BE49-F238E27FC236}">
-                <a16:creationId xmlns:a16="http://schemas.microsoft.com/office/drawing/2014/main" id="{8A23FF54-7C51-4397-A52D-AA52987614BB}"/>
+                <a16:creationId xmlns:a16="http://schemas.microsoft.com/office/drawing/2014/main" id="{4EC37699-C424-45B8-9F89-6E33858EBB42}"/>
               </a:ext>
             </a:extLst>
           </p:cNvPr>
@@ -4385,7 +4344,7 @@
           <p:cNvPr id="7" name="">
             <a:extLst xmlns:a="http://schemas.openxmlformats.org/drawingml/2006/main">
               <a:ext uri="{FF2B5EF4-FFF2-40B4-BE49-F238E27FC236}">
-                <a16:creationId xmlns:a16="http://schemas.microsoft.com/office/drawing/2014/main" id="{E117BB0A-9A66-40A4-8026-18EE06DC4EA0}"/>
+                <a16:creationId xmlns:a16="http://schemas.microsoft.com/office/drawing/2014/main" id="{B046639D-A9B4-4BEF-AB28-65B490A5E5F9}"/>
               </a:ext>
             </a:extLst>
           </p:cNvPr>
@@ -4440,7 +4399,7 @@
     </p:spTree>
     <p:extLst>
       <p:ext uri="{BB962C8B-B14F-4D97-AF65-F5344CB8AC3E}">
-        <p14:creationId xmlns:p14="http://schemas.microsoft.com/office/powerpoint/2010/main" val="794775973"/>
+        <p14:creationId xmlns:p14="http://schemas.microsoft.com/office/powerpoint/2010/main" val="1513283384"/>
       </p:ext>
     </p:extLst>
   </p:cSld>
@@ -4471,7 +4430,7 @@
           <p:cNvPr id="9" name="">
             <a:extLst xmlns:a="http://schemas.openxmlformats.org/drawingml/2006/main">
               <a:ext uri="{FF2B5EF4-FFF2-40B4-BE49-F238E27FC236}">
-                <a16:creationId xmlns:a16="http://schemas.microsoft.com/office/drawing/2014/main" id="{A30E12C4-0B63-4971-A369-B32354E20995}"/>
+                <a16:creationId xmlns:a16="http://schemas.microsoft.com/office/drawing/2014/main" id="{E9E3CE2B-AA48-4CE5-A97D-932CC25947C1}"/>
               </a:ext>
             </a:extLst>
           </p:cNvPr>
@@ -4528,7 +4487,7 @@
           <p:cNvPr id="2" name="">
             <a:extLst xmlns:a="http://schemas.openxmlformats.org/drawingml/2006/main">
               <a:ext uri="{FF2B5EF4-FFF2-40B4-BE49-F238E27FC236}">
-                <a16:creationId xmlns:a16="http://schemas.microsoft.com/office/drawing/2014/main" id="{45F89D6D-F1C0-4CB1-8BBB-A4B55CD8C03B}"/>
+                <a16:creationId xmlns:a16="http://schemas.microsoft.com/office/drawing/2014/main" id="{3947172C-13AA-474E-88FD-389859DF21F7}"/>
               </a:ext>
             </a:extLst>
           </p:cNvPr>
@@ -4585,7 +4544,7 @@
           <p:cNvPr id="3" name="">
             <a:extLst xmlns:a="http://schemas.openxmlformats.org/drawingml/2006/main">
               <a:ext uri="{FF2B5EF4-FFF2-40B4-BE49-F238E27FC236}">
-                <a16:creationId xmlns:a16="http://schemas.microsoft.com/office/drawing/2014/main" id="{56200CA0-C12D-4421-8696-DE2F68E059A8}"/>
+                <a16:creationId xmlns:a16="http://schemas.microsoft.com/office/drawing/2014/main" id="{F1B3ABC6-AF79-4801-AB10-0BAD1B3F33FB}"/>
               </a:ext>
             </a:extLst>
           </p:cNvPr>
@@ -4642,7 +4601,7 @@
           <p:cNvPr id="4" name="">
             <a:extLst xmlns:a="http://schemas.openxmlformats.org/drawingml/2006/main">
               <a:ext uri="{FF2B5EF4-FFF2-40B4-BE49-F238E27FC236}">
-                <a16:creationId xmlns:a16="http://schemas.microsoft.com/office/drawing/2014/main" id="{AFAB733E-4575-4F90-9A74-0D82A1BD2C43}"/>
+                <a16:creationId xmlns:a16="http://schemas.microsoft.com/office/drawing/2014/main" id="{3D522432-CF2F-400C-ABA1-8558D96CD48A}"/>
               </a:ext>
             </a:extLst>
           </p:cNvPr>
@@ -4699,7 +4658,7 @@
           <p:cNvPr id="5" name="">
             <a:extLst xmlns:a="http://schemas.openxmlformats.org/drawingml/2006/main">
               <a:ext uri="{FF2B5EF4-FFF2-40B4-BE49-F238E27FC236}">
-                <a16:creationId xmlns:a16="http://schemas.microsoft.com/office/drawing/2014/main" id="{EDE55258-FBBB-4669-AAC5-5E0FC5488BF0}"/>
+                <a16:creationId xmlns:a16="http://schemas.microsoft.com/office/drawing/2014/main" id="{EDAB55F9-F91E-4EF5-93C3-2111FC801E13}"/>
               </a:ext>
             </a:extLst>
           </p:cNvPr>
@@ -4756,7 +4715,7 @@
           <p:cNvPr id="6" name="">
             <a:extLst xmlns:a="http://schemas.openxmlformats.org/drawingml/2006/main">
               <a:ext uri="{FF2B5EF4-FFF2-40B4-BE49-F238E27FC236}">
-                <a16:creationId xmlns:a16="http://schemas.microsoft.com/office/drawing/2014/main" id="{0FD4F0F7-8DBE-4665-974D-BE48EE485C12}"/>
+                <a16:creationId xmlns:a16="http://schemas.microsoft.com/office/drawing/2014/main" id="{9B2B7D56-19AA-4FF2-B342-D5BBB62D0E81}"/>
               </a:ext>
             </a:extLst>
           </p:cNvPr>
@@ -4813,7 +4772,7 @@
           <p:cNvPr id="7" name="">
             <a:extLst xmlns:a="http://schemas.openxmlformats.org/drawingml/2006/main">
               <a:ext uri="{FF2B5EF4-FFF2-40B4-BE49-F238E27FC236}">
-                <a16:creationId xmlns:a16="http://schemas.microsoft.com/office/drawing/2014/main" id="{1F406C38-78F6-461D-8193-2E2DBB230A2B}"/>
+                <a16:creationId xmlns:a16="http://schemas.microsoft.com/office/drawing/2014/main" id="{24F88333-DAA8-40E4-A282-F970B5994CAD}"/>
               </a:ext>
             </a:extLst>
           </p:cNvPr>
@@ -4870,7 +4829,7 @@
           <p:cNvPr id="8" name="">
             <a:extLst xmlns:a="http://schemas.openxmlformats.org/drawingml/2006/main">
               <a:ext uri="{FF2B5EF4-FFF2-40B4-BE49-F238E27FC236}">
-                <a16:creationId xmlns:a16="http://schemas.microsoft.com/office/drawing/2014/main" id="{A7FCD3FA-819B-4BE7-A050-F7C44F2A8B16}"/>
+                <a16:creationId xmlns:a16="http://schemas.microsoft.com/office/drawing/2014/main" id="{ECFE1E6E-53EF-468B-B466-3F252072A6CA}"/>
               </a:ext>
             </a:extLst>
           </p:cNvPr>
@@ -4925,7 +4884,7 @@
     </p:spTree>
     <p:extLst>
       <p:ext uri="{BB962C8B-B14F-4D97-AF65-F5344CB8AC3E}">
-        <p14:creationId xmlns:p14="http://schemas.microsoft.com/office/powerpoint/2010/main" val="1416086153"/>
+        <p14:creationId xmlns:p14="http://schemas.microsoft.com/office/powerpoint/2010/main" val="1441763343"/>
       </p:ext>
     </p:extLst>
   </p:cSld>
@@ -4956,7 +4915,7 @@
           <p:cNvPr id="12" name="">
             <a:extLst xmlns:a="http://schemas.openxmlformats.org/drawingml/2006/main">
               <a:ext uri="{FF2B5EF4-FFF2-40B4-BE49-F238E27FC236}">
-                <a16:creationId xmlns:a16="http://schemas.microsoft.com/office/drawing/2014/main" id="{23EDC805-410E-4128-95F4-39638F4CBD7C}"/>
+                <a16:creationId xmlns:a16="http://schemas.microsoft.com/office/drawing/2014/main" id="{4CB293F1-2271-4BDB-B17C-D5B82D5F0194}"/>
               </a:ext>
             </a:extLst>
           </p:cNvPr>
@@ -5013,7 +4972,7 @@
           <p:cNvPr id="2" name="">
             <a:extLst xmlns:a="http://schemas.openxmlformats.org/drawingml/2006/main">
               <a:ext uri="{FF2B5EF4-FFF2-40B4-BE49-F238E27FC236}">
-                <a16:creationId xmlns:a16="http://schemas.microsoft.com/office/drawing/2014/main" id="{43E5B513-0EE0-49DA-89A8-B2A9780CC8F1}"/>
+                <a16:creationId xmlns:a16="http://schemas.microsoft.com/office/drawing/2014/main" id="{A7DA66FC-8CD8-4FEF-B025-051E14A20247}"/>
               </a:ext>
             </a:extLst>
           </p:cNvPr>
@@ -5060,7 +5019,7 @@
                 <a:ea typeface="Arial"/>
                 <a:cs typeface="Arial"/>
               </a:rPr>
-              <a:t>Sources: Banff Reference Guide (2026); Zhang et al. (2024); KDIGO (2009); BK consensus (2024)</a:t>
+              <a:t>Sources: Banff Reference Guide (2026); Zhang et al. (2024); KDIGO (2009), recommendation 6.1</a:t>
             </a:r>
           </a:p>
         </p:txBody>
@@ -5070,7 +5029,7 @@
           <p:cNvPr id="3" name="">
             <a:extLst xmlns:a="http://schemas.openxmlformats.org/drawingml/2006/main">
               <a:ext uri="{FF2B5EF4-FFF2-40B4-BE49-F238E27FC236}">
-                <a16:creationId xmlns:a16="http://schemas.microsoft.com/office/drawing/2014/main" id="{7B6AC371-0525-485D-8140-7D508E686CE6}"/>
+                <a16:creationId xmlns:a16="http://schemas.microsoft.com/office/drawing/2014/main" id="{9E9C4292-573F-4785-986F-09F2D5E84463}"/>
               </a:ext>
             </a:extLst>
           </p:cNvPr>
@@ -5127,7 +5086,7 @@
           <p:cNvPr id="4" name="">
             <a:extLst xmlns:a="http://schemas.openxmlformats.org/drawingml/2006/main">
               <a:ext uri="{FF2B5EF4-FFF2-40B4-BE49-F238E27FC236}">
-                <a16:creationId xmlns:a16="http://schemas.microsoft.com/office/drawing/2014/main" id="{1D4C0E9A-ACEF-4B7A-A3B7-63E2B1D66BFB}"/>
+                <a16:creationId xmlns:a16="http://schemas.microsoft.com/office/drawing/2014/main" id="{697C47FD-2169-44C9-A15E-16A426E76F8C}"/>
               </a:ext>
             </a:extLst>
           </p:cNvPr>
@@ -5207,7 +5166,7 @@
           <p:cNvPr id="5" name="">
             <a:extLst xmlns:a="http://schemas.openxmlformats.org/drawingml/2006/main">
               <a:ext uri="{FF2B5EF4-FFF2-40B4-BE49-F238E27FC236}">
-                <a16:creationId xmlns:a16="http://schemas.microsoft.com/office/drawing/2014/main" id="{C6B172A2-B223-45A8-A653-A336B0E8D32C}"/>
+                <a16:creationId xmlns:a16="http://schemas.microsoft.com/office/drawing/2014/main" id="{E349854A-4A33-4A90-AEAA-B900834D5637}"/>
               </a:ext>
             </a:extLst>
           </p:cNvPr>
@@ -5287,7 +5246,7 @@
           <p:cNvPr id="6" name="">
             <a:extLst xmlns:a="http://schemas.openxmlformats.org/drawingml/2006/main">
               <a:ext uri="{FF2B5EF4-FFF2-40B4-BE49-F238E27FC236}">
-                <a16:creationId xmlns:a16="http://schemas.microsoft.com/office/drawing/2014/main" id="{BAA786D6-4586-42C9-A760-50D0BB99C8D3}"/>
+                <a16:creationId xmlns:a16="http://schemas.microsoft.com/office/drawing/2014/main" id="{D926CC53-1725-4049-AC2F-896332E3F44B}"/>
               </a:ext>
             </a:extLst>
           </p:cNvPr>
@@ -5316,7 +5275,7 @@
           <p:cNvPr id="7" name="">
             <a:extLst xmlns:a="http://schemas.openxmlformats.org/drawingml/2006/main">
               <a:ext uri="{FF2B5EF4-FFF2-40B4-BE49-F238E27FC236}">
-                <a16:creationId xmlns:a16="http://schemas.microsoft.com/office/drawing/2014/main" id="{62260371-60F6-4F3D-98C1-3355DB734693}"/>
+                <a16:creationId xmlns:a16="http://schemas.microsoft.com/office/drawing/2014/main" id="{F8451A83-6FF2-4FF3-A21F-87738FF6704E}"/>
               </a:ext>
             </a:extLst>
           </p:cNvPr>
@@ -5396,7 +5355,7 @@
           <p:cNvPr id="8" name="">
             <a:extLst xmlns:a="http://schemas.openxmlformats.org/drawingml/2006/main">
               <a:ext uri="{FF2B5EF4-FFF2-40B4-BE49-F238E27FC236}">
-                <a16:creationId xmlns:a16="http://schemas.microsoft.com/office/drawing/2014/main" id="{CD414656-1AB4-4C79-8CFB-0D9F095ABEA0}"/>
+                <a16:creationId xmlns:a16="http://schemas.microsoft.com/office/drawing/2014/main" id="{27AE159F-C68B-440B-962A-8A4D2A6A01CA}"/>
               </a:ext>
             </a:extLst>
           </p:cNvPr>
@@ -5476,7 +5435,7 @@
           <p:cNvPr id="9" name="">
             <a:extLst xmlns:a="http://schemas.openxmlformats.org/drawingml/2006/main">
               <a:ext uri="{FF2B5EF4-FFF2-40B4-BE49-F238E27FC236}">
-                <a16:creationId xmlns:a16="http://schemas.microsoft.com/office/drawing/2014/main" id="{E0CAB12F-C1DE-4987-B5B9-C736B783AA5C}"/>
+                <a16:creationId xmlns:a16="http://schemas.microsoft.com/office/drawing/2014/main" id="{73A01B1C-517C-42B7-BCA9-7E0F7C4A35FE}"/>
               </a:ext>
             </a:extLst>
           </p:cNvPr>
@@ -5505,7 +5464,7 @@
           <p:cNvPr id="10" name="">
             <a:extLst xmlns:a="http://schemas.openxmlformats.org/drawingml/2006/main">
               <a:ext uri="{FF2B5EF4-FFF2-40B4-BE49-F238E27FC236}">
-                <a16:creationId xmlns:a16="http://schemas.microsoft.com/office/drawing/2014/main" id="{65FBA750-94C7-42B9-A14C-37351B715DC2}"/>
+                <a16:creationId xmlns:a16="http://schemas.microsoft.com/office/drawing/2014/main" id="{E21AC423-B99D-43E5-B11D-89F9D9BD3CA9}"/>
               </a:ext>
             </a:extLst>
           </p:cNvPr>
@@ -5534,48 +5493,48 @@
           <a:lstStyle xmlns:a="http://schemas.openxmlformats.org/drawingml/2006/main"/>
           <a:p xmlns:a="http://schemas.openxmlformats.org/drawingml/2006/main">
             <a:pPr algn="l">
-              <a:defRPr sz="2100" b="1">
-                <a:solidFill>
-                  <a:srgbClr val="16343E"/>
-                </a:solidFill>
-                <a:latin typeface="Arial"/>
-                <a:ea typeface="Arial"/>
-                <a:cs typeface="Arial"/>
-              </a:defRPr>
-            </a:pPr>
-            <a:r>
-              <a:rPr sz="2100" b="1">
-                <a:solidFill>
-                  <a:srgbClr val="16343E"/>
-                </a:solidFill>
-                <a:latin typeface="Arial"/>
-                <a:ea typeface="Arial"/>
-                <a:cs typeface="Arial"/>
-              </a:rPr>
-              <a:t>Why both kinds</a:t>
+              <a:defRPr sz="2175" b="1">
+                <a:solidFill>
+                  <a:srgbClr val="16343E"/>
+                </a:solidFill>
+                <a:latin typeface="Arial"/>
+                <a:ea typeface="Arial"/>
+                <a:cs typeface="Arial"/>
+              </a:defRPr>
+            </a:pPr>
+            <a:r>
+              <a:rPr sz="2175" b="1">
+                <a:solidFill>
+                  <a:srgbClr val="16343E"/>
+                </a:solidFill>
+                <a:latin typeface="Arial"/>
+                <a:ea typeface="Arial"/>
+                <a:cs typeface="Arial"/>
+              </a:rPr>
+              <a:t>Biopsy and</a:t>
             </a:r>
           </a:p>
           <a:p xmlns:a="http://schemas.openxmlformats.org/drawingml/2006/main">
             <a:pPr algn="l">
-              <a:defRPr sz="2100" b="1">
-                <a:solidFill>
-                  <a:srgbClr val="16343E"/>
-                </a:solidFill>
-                <a:latin typeface="Arial"/>
-                <a:ea typeface="Arial"/>
-                <a:cs typeface="Arial"/>
-              </a:defRPr>
-            </a:pPr>
-            <a:r>
-              <a:rPr sz="2100" b="1">
-                <a:solidFill>
-                  <a:srgbClr val="16343E"/>
-                </a:solidFill>
-                <a:latin typeface="Arial"/>
-                <a:ea typeface="Arial"/>
-                <a:cs typeface="Arial"/>
-              </a:rPr>
-              <a:t>of error matter</a:t>
+              <a:defRPr sz="2175" b="1">
+                <a:solidFill>
+                  <a:srgbClr val="16343E"/>
+                </a:solidFill>
+                <a:latin typeface="Arial"/>
+                <a:ea typeface="Arial"/>
+                <a:cs typeface="Arial"/>
+              </a:defRPr>
+            </a:pPr>
+            <a:r>
+              <a:rPr sz="2175" b="1">
+                <a:solidFill>
+                  <a:srgbClr val="16343E"/>
+                </a:solidFill>
+                <a:latin typeface="Arial"/>
+                <a:ea typeface="Arial"/>
+                <a:cs typeface="Arial"/>
+              </a:rPr>
+              <a:t>treatment</a:t>
             </a:r>
           </a:p>
         </p:txBody>
@@ -5585,7 +5544,7 @@
           <p:cNvPr id="11" name="">
             <a:extLst xmlns:a="http://schemas.openxmlformats.org/drawingml/2006/main">
               <a:ext uri="{FF2B5EF4-FFF2-40B4-BE49-F238E27FC236}">
-                <a16:creationId xmlns:a16="http://schemas.microsoft.com/office/drawing/2014/main" id="{6A5B9486-652D-4AD0-8CC7-A6A77A952ED1}"/>
+                <a16:creationId xmlns:a16="http://schemas.microsoft.com/office/drawing/2014/main" id="{FE3FBC30-1B00-490A-B6EB-5A0B6F16221E}"/>
               </a:ext>
             </a:extLst>
           </p:cNvPr>
@@ -5614,71 +5573,48 @@
           <a:lstStyle xmlns:a="http://schemas.openxmlformats.org/drawingml/2006/main"/>
           <a:p xmlns:a="http://schemas.openxmlformats.org/drawingml/2006/main">
             <a:pPr algn="l">
-              <a:defRPr sz="2175" b="0">
-                <a:solidFill>
-                  <a:srgbClr val="16343E"/>
-                </a:solidFill>
-                <a:latin typeface="Arial"/>
-                <a:ea typeface="Arial"/>
-                <a:cs typeface="Arial"/>
-              </a:defRPr>
-            </a:pPr>
-            <a:r>
-              <a:rPr sz="2175" b="0">
-                <a:solidFill>
-                  <a:srgbClr val="16343E"/>
-                </a:solidFill>
-                <a:latin typeface="Arial"/>
-                <a:ea typeface="Arial"/>
-                <a:cs typeface="Arial"/>
-              </a:rPr>
-              <a:t>Biopsy findings help guide treatment for rejection.</a:t>
+              <a:defRPr sz="2250" b="0">
+                <a:solidFill>
+                  <a:srgbClr val="16343E"/>
+                </a:solidFill>
+                <a:latin typeface="Arial"/>
+                <a:ea typeface="Arial"/>
+                <a:cs typeface="Arial"/>
+              </a:defRPr>
+            </a:pPr>
+            <a:r>
+              <a:rPr sz="2250" b="0">
+                <a:solidFill>
+                  <a:srgbClr val="16343E"/>
+                </a:solidFill>
+                <a:latin typeface="Arial"/>
+                <a:ea typeface="Arial"/>
+                <a:cs typeface="Arial"/>
+              </a:rPr>
+              <a:t>KDIGO recommends biopsy before treating acute rejection,</a:t>
             </a:r>
           </a:p>
           <a:p xmlns:a="http://schemas.openxmlformats.org/drawingml/2006/main">
             <a:pPr algn="l">
-              <a:defRPr sz="2175" b="0">
-                <a:solidFill>
-                  <a:srgbClr val="16343E"/>
-                </a:solidFill>
-                <a:latin typeface="Arial"/>
-                <a:ea typeface="Arial"/>
-                <a:cs typeface="Arial"/>
-              </a:defRPr>
-            </a:pPr>
-            <a:r>
-              <a:rPr sz="2175" b="0">
-                <a:solidFill>
-                  <a:srgbClr val="16343E"/>
-                </a:solidFill>
-                <a:latin typeface="Arial"/>
-                <a:ea typeface="Arial"/>
-                <a:cs typeface="Arial"/>
-              </a:rPr>
-              <a:t>Missed rejection can leave kidney injury untreated.</a:t>
-            </a:r>
-          </a:p>
-          <a:p xmlns:a="http://schemas.openxmlformats.org/drawingml/2006/main">
-            <a:pPr algn="l">
-              <a:defRPr sz="2175" b="0">
-                <a:solidFill>
-                  <a:srgbClr val="16343E"/>
-                </a:solidFill>
-                <a:latin typeface="Arial"/>
-                <a:ea typeface="Arial"/>
-                <a:cs typeface="Arial"/>
-              </a:defRPr>
-            </a:pPr>
-            <a:r>
-              <a:rPr sz="2175" b="0">
-                <a:solidFill>
-                  <a:srgbClr val="16343E"/>
-                </a:solidFill>
-                <a:latin typeface="Arial"/>
-                <a:ea typeface="Arial"/>
-                <a:cs typeface="Arial"/>
-              </a:rPr>
-              <a:t>Unnecessary treatment can worsen an infection.</a:t>
+              <a:defRPr sz="2250" b="0">
+                <a:solidFill>
+                  <a:srgbClr val="16343E"/>
+                </a:solidFill>
+                <a:latin typeface="Arial"/>
+                <a:ea typeface="Arial"/>
+                <a:cs typeface="Arial"/>
+              </a:defRPr>
+            </a:pPr>
+            <a:r>
+              <a:rPr sz="2250" b="0">
+                <a:solidFill>
+                  <a:srgbClr val="16343E"/>
+                </a:solidFill>
+                <a:latin typeface="Arial"/>
+                <a:ea typeface="Arial"/>
+                <a:cs typeface="Arial"/>
+              </a:rPr>
+              <a:t>unless waiting would substantially delay treatment.</a:t>
             </a:r>
           </a:p>
         </p:txBody>
@@ -5686,7 +5622,7 @@
     </p:spTree>
     <p:extLst>
       <p:ext uri="{BB962C8B-B14F-4D97-AF65-F5344CB8AC3E}">
-        <p14:creationId xmlns:p14="http://schemas.microsoft.com/office/powerpoint/2010/main" val="1899912211"/>
+        <p14:creationId xmlns:p14="http://schemas.microsoft.com/office/powerpoint/2010/main" val="1699217620"/>
       </p:ext>
     </p:extLst>
   </p:cSld>
@@ -5717,7 +5653,7 @@
           <p:cNvPr id="13" name="">
             <a:extLst xmlns:a="http://schemas.openxmlformats.org/drawingml/2006/main">
               <a:ext uri="{FF2B5EF4-FFF2-40B4-BE49-F238E27FC236}">
-                <a16:creationId xmlns:a16="http://schemas.microsoft.com/office/drawing/2014/main" id="{8E5A9869-9C66-4100-9666-5EF7957BFAC0}"/>
+                <a16:creationId xmlns:a16="http://schemas.microsoft.com/office/drawing/2014/main" id="{96EBAD5A-7AC4-42AC-958A-2B591CCB573F}"/>
               </a:ext>
             </a:extLst>
           </p:cNvPr>
@@ -5774,7 +5710,7 @@
           <p:cNvPr id="2" name="">
             <a:extLst xmlns:a="http://schemas.openxmlformats.org/drawingml/2006/main">
               <a:ext uri="{FF2B5EF4-FFF2-40B4-BE49-F238E27FC236}">
-                <a16:creationId xmlns:a16="http://schemas.microsoft.com/office/drawing/2014/main" id="{4D21B652-97B5-423E-B643-8533DD97F683}"/>
+                <a16:creationId xmlns:a16="http://schemas.microsoft.com/office/drawing/2014/main" id="{5E6E1D15-BE57-4CDB-A574-51E23AA2D977}"/>
               </a:ext>
             </a:extLst>
           </p:cNvPr>
@@ -5831,7 +5767,7 @@
           <p:cNvPr id="3" name="">
             <a:extLst xmlns:a="http://schemas.openxmlformats.org/drawingml/2006/main">
               <a:ext uri="{FF2B5EF4-FFF2-40B4-BE49-F238E27FC236}">
-                <a16:creationId xmlns:a16="http://schemas.microsoft.com/office/drawing/2014/main" id="{C31855AF-8522-4E66-AA21-CF1F33859040}"/>
+                <a16:creationId xmlns:a16="http://schemas.microsoft.com/office/drawing/2014/main" id="{EE867CA5-B1B4-481C-8FC7-92678305ACC4}"/>
               </a:ext>
             </a:extLst>
           </p:cNvPr>
@@ -5888,7 +5824,7 @@
           <p:cNvPr id="4" name="">
             <a:extLst xmlns:a="http://schemas.openxmlformats.org/drawingml/2006/main">
               <a:ext uri="{FF2B5EF4-FFF2-40B4-BE49-F238E27FC236}">
-                <a16:creationId xmlns:a16="http://schemas.microsoft.com/office/drawing/2014/main" id="{C7F07D4A-1DFF-43A2-B189-43307C47E32A}"/>
+                <a16:creationId xmlns:a16="http://schemas.microsoft.com/office/drawing/2014/main" id="{143EDC5C-D4A5-44E1-9A14-4D487B9AF519}"/>
               </a:ext>
             </a:extLst>
           </p:cNvPr>
@@ -5945,7 +5881,7 @@
           <p:cNvPr id="5" name="">
             <a:extLst xmlns:a="http://schemas.openxmlformats.org/drawingml/2006/main">
               <a:ext uri="{FF2B5EF4-FFF2-40B4-BE49-F238E27FC236}">
-                <a16:creationId xmlns:a16="http://schemas.microsoft.com/office/drawing/2014/main" id="{E1A8B6BE-737E-43DD-9DD9-661476979D12}"/>
+                <a16:creationId xmlns:a16="http://schemas.microsoft.com/office/drawing/2014/main" id="{2AE16F40-45D8-4EAE-AC7D-49155562D809}"/>
               </a:ext>
             </a:extLst>
           </p:cNvPr>
@@ -6002,7 +5938,7 @@
           <p:cNvPr id="6" name="">
             <a:extLst xmlns:a="http://schemas.openxmlformats.org/drawingml/2006/main">
               <a:ext uri="{FF2B5EF4-FFF2-40B4-BE49-F238E27FC236}">
-                <a16:creationId xmlns:a16="http://schemas.microsoft.com/office/drawing/2014/main" id="{D647E10B-4E3B-49D5-AE01-044D0529054B}"/>
+                <a16:creationId xmlns:a16="http://schemas.microsoft.com/office/drawing/2014/main" id="{1A87ED3A-7D97-4FE6-88F3-5BD5055C485E}"/>
               </a:ext>
             </a:extLst>
           </p:cNvPr>
@@ -6643,7 +6579,7 @@
           <p:cNvPr id="9" name="">
             <a:extLst xmlns:a="http://schemas.openxmlformats.org/drawingml/2006/main">
               <a:ext uri="{FF2B5EF4-FFF2-40B4-BE49-F238E27FC236}">
-                <a16:creationId xmlns:a16="http://schemas.microsoft.com/office/drawing/2014/main" id="{DE05F357-D214-4F82-BB1F-3EA07D3755CD}"/>
+                <a16:creationId xmlns:a16="http://schemas.microsoft.com/office/drawing/2014/main" id="{450BE7C0-BC1F-4E36-8246-28C193B308EE}"/>
               </a:ext>
             </a:extLst>
           </p:cNvPr>
@@ -6672,7 +6608,7 @@
           <p:cNvPr id="10" name="">
             <a:extLst xmlns:a="http://schemas.openxmlformats.org/drawingml/2006/main">
               <a:ext uri="{FF2B5EF4-FFF2-40B4-BE49-F238E27FC236}">
-                <a16:creationId xmlns:a16="http://schemas.microsoft.com/office/drawing/2014/main" id="{9F6C7AB4-206C-46DE-8204-110ABA381C38}"/>
+                <a16:creationId xmlns:a16="http://schemas.microsoft.com/office/drawing/2014/main" id="{45E4AB8B-C8D5-44BE-B8AF-2FF66400E12B}"/>
               </a:ext>
             </a:extLst>
           </p:cNvPr>
@@ -6729,7 +6665,7 @@
           <p:cNvPr id="11" name="">
             <a:extLst xmlns:a="http://schemas.openxmlformats.org/drawingml/2006/main">
               <a:ext uri="{FF2B5EF4-FFF2-40B4-BE49-F238E27FC236}">
-                <a16:creationId xmlns:a16="http://schemas.microsoft.com/office/drawing/2014/main" id="{C2B016DF-049F-41CA-A166-EF16C9F13341}"/>
+                <a16:creationId xmlns:a16="http://schemas.microsoft.com/office/drawing/2014/main" id="{C27A4426-E489-47D0-BDC7-11A774C4B281}"/>
               </a:ext>
             </a:extLst>
           </p:cNvPr>
@@ -6786,7 +6722,7 @@
           <p:cNvPr id="12" name="">
             <a:extLst xmlns:a="http://schemas.openxmlformats.org/drawingml/2006/main">
               <a:ext uri="{FF2B5EF4-FFF2-40B4-BE49-F238E27FC236}">
-                <a16:creationId xmlns:a16="http://schemas.microsoft.com/office/drawing/2014/main" id="{7D96BC94-05CC-48CF-9CFC-C5A43F3E2F89}"/>
+                <a16:creationId xmlns:a16="http://schemas.microsoft.com/office/drawing/2014/main" id="{6AA7A7C0-05F1-4916-9BF2-F4C3A0CAA872}"/>
               </a:ext>
             </a:extLst>
           </p:cNvPr>
@@ -6872,7 +6808,7 @@
     </p:spTree>
     <p:extLst>
       <p:ext uri="{BB962C8B-B14F-4D97-AF65-F5344CB8AC3E}">
-        <p14:creationId xmlns:p14="http://schemas.microsoft.com/office/powerpoint/2010/main" val="113553735"/>
+        <p14:creationId xmlns:p14="http://schemas.microsoft.com/office/powerpoint/2010/main" val="1680210600"/>
       </p:ext>
     </p:extLst>
   </p:cSld>
@@ -6903,7 +6839,7 @@
           <p:cNvPr id="7" name="">
             <a:extLst xmlns:a="http://schemas.openxmlformats.org/drawingml/2006/main">
               <a:ext uri="{FF2B5EF4-FFF2-40B4-BE49-F238E27FC236}">
-                <a16:creationId xmlns:a16="http://schemas.microsoft.com/office/drawing/2014/main" id="{4C908E84-9FB4-4BE1-ABB5-7F6B6E4D198B}"/>
+                <a16:creationId xmlns:a16="http://schemas.microsoft.com/office/drawing/2014/main" id="{0B503235-E3A0-4F4F-B7EB-EF1D63287BF3}"/>
               </a:ext>
             </a:extLst>
           </p:cNvPr>
@@ -6960,7 +6896,7 @@
           <p:cNvPr id="2" name="">
             <a:extLst xmlns:a="http://schemas.openxmlformats.org/drawingml/2006/main">
               <a:ext uri="{FF2B5EF4-FFF2-40B4-BE49-F238E27FC236}">
-                <a16:creationId xmlns:a16="http://schemas.microsoft.com/office/drawing/2014/main" id="{713318D5-1415-400F-808A-D6E495131E0E}"/>
+                <a16:creationId xmlns:a16="http://schemas.microsoft.com/office/drawing/2014/main" id="{AD82C2FC-2873-42D7-969E-F9D9D682366F}"/>
               </a:ext>
             </a:extLst>
           </p:cNvPr>
@@ -7017,7 +6953,7 @@
           <p:cNvPr id="3" name="">
             <a:extLst xmlns:a="http://schemas.openxmlformats.org/drawingml/2006/main">
               <a:ext uri="{FF2B5EF4-FFF2-40B4-BE49-F238E27FC236}">
-                <a16:creationId xmlns:a16="http://schemas.microsoft.com/office/drawing/2014/main" id="{D1489D7E-6A70-4B4A-93D6-2C629D296A2A}"/>
+                <a16:creationId xmlns:a16="http://schemas.microsoft.com/office/drawing/2014/main" id="{ABEB3D62-F89A-4577-BB45-F20603D0F3F0}"/>
               </a:ext>
             </a:extLst>
           </p:cNvPr>
@@ -7074,7 +7010,7 @@
           <p:cNvPr id="4" name="">
             <a:extLst xmlns:a="http://schemas.openxmlformats.org/drawingml/2006/main">
               <a:ext uri="{FF2B5EF4-FFF2-40B4-BE49-F238E27FC236}">
-                <a16:creationId xmlns:a16="http://schemas.microsoft.com/office/drawing/2014/main" id="{CB41243F-7142-48B5-93AB-B83E755279F7}"/>
+                <a16:creationId xmlns:a16="http://schemas.microsoft.com/office/drawing/2014/main" id="{F289C4D6-6BD2-4A4C-AB7C-3384BFB5454C}"/>
               </a:ext>
             </a:extLst>
           </p:cNvPr>
@@ -7554,7 +7490,7 @@
           <p:cNvPr id="6" name="">
             <a:extLst xmlns:a="http://schemas.openxmlformats.org/drawingml/2006/main">
               <a:ext uri="{FF2B5EF4-FFF2-40B4-BE49-F238E27FC236}">
-                <a16:creationId xmlns:a16="http://schemas.microsoft.com/office/drawing/2014/main" id="{CBECAEA7-A9D1-4427-A1CB-F8B0B501654E}"/>
+                <a16:creationId xmlns:a16="http://schemas.microsoft.com/office/drawing/2014/main" id="{19864617-E989-4DD4-8A87-03D47171BA93}"/>
               </a:ext>
             </a:extLst>
           </p:cNvPr>
@@ -7609,7 +7545,7 @@
     </p:spTree>
     <p:extLst>
       <p:ext uri="{BB962C8B-B14F-4D97-AF65-F5344CB8AC3E}">
-        <p14:creationId xmlns:p14="http://schemas.microsoft.com/office/powerpoint/2010/main" val="609354919"/>
+        <p14:creationId xmlns:p14="http://schemas.microsoft.com/office/powerpoint/2010/main" val="701418320"/>
       </p:ext>
     </p:extLst>
   </p:cSld>
@@ -7640,7 +7576,7 @@
           <p:cNvPr id="11" name="">
             <a:extLst xmlns:a="http://schemas.openxmlformats.org/drawingml/2006/main">
               <a:ext uri="{FF2B5EF4-FFF2-40B4-BE49-F238E27FC236}">
-                <a16:creationId xmlns:a16="http://schemas.microsoft.com/office/drawing/2014/main" id="{63F61011-B34B-4687-AC39-EBBDCEA06E55}"/>
+                <a16:creationId xmlns:a16="http://schemas.microsoft.com/office/drawing/2014/main" id="{94596A69-3FF9-4DF3-8926-D69B69A670B5}"/>
               </a:ext>
             </a:extLst>
           </p:cNvPr>
@@ -7697,7 +7633,7 @@
           <p:cNvPr id="2" name="">
             <a:extLst xmlns:a="http://schemas.openxmlformats.org/drawingml/2006/main">
               <a:ext uri="{FF2B5EF4-FFF2-40B4-BE49-F238E27FC236}">
-                <a16:creationId xmlns:a16="http://schemas.microsoft.com/office/drawing/2014/main" id="{5D6AD6C3-6DA3-4035-89C8-E864941E8B99}"/>
+                <a16:creationId xmlns:a16="http://schemas.microsoft.com/office/drawing/2014/main" id="{A6FC6155-AA4C-42DC-A2ED-0C42BDBE360C}"/>
               </a:ext>
             </a:extLst>
           </p:cNvPr>
@@ -7754,7 +7690,7 @@
           <p:cNvPr id="3" name="">
             <a:extLst xmlns:a="http://schemas.openxmlformats.org/drawingml/2006/main">
               <a:ext uri="{FF2B5EF4-FFF2-40B4-BE49-F238E27FC236}">
-                <a16:creationId xmlns:a16="http://schemas.microsoft.com/office/drawing/2014/main" id="{7E4FAE6D-78C5-4BBC-BB2D-0B2480B06408}"/>
+                <a16:creationId xmlns:a16="http://schemas.microsoft.com/office/drawing/2014/main" id="{2C830EA4-CAE0-41B7-A70A-C0FA37B771CD}"/>
               </a:ext>
             </a:extLst>
           </p:cNvPr>
@@ -7811,7 +7747,7 @@
           <p:cNvPr id="4" name="">
             <a:extLst xmlns:a="http://schemas.openxmlformats.org/drawingml/2006/main">
               <a:ext uri="{FF2B5EF4-FFF2-40B4-BE49-F238E27FC236}">
-                <a16:creationId xmlns:a16="http://schemas.microsoft.com/office/drawing/2014/main" id="{744AE511-1DBC-4CE4-8838-F07576B5C202}"/>
+                <a16:creationId xmlns:a16="http://schemas.microsoft.com/office/drawing/2014/main" id="{C8E6217F-7CB8-4753-BE71-448433FD2C1E}"/>
               </a:ext>
             </a:extLst>
           </p:cNvPr>
@@ -7868,7 +7804,7 @@
           <p:cNvPr id="5" name="">
             <a:extLst xmlns:a="http://schemas.openxmlformats.org/drawingml/2006/main">
               <a:ext uri="{FF2B5EF4-FFF2-40B4-BE49-F238E27FC236}">
-                <a16:creationId xmlns:a16="http://schemas.microsoft.com/office/drawing/2014/main" id="{DE4D5BF5-4173-423C-8BE2-04D512F3BBAD}"/>
+                <a16:creationId xmlns:a16="http://schemas.microsoft.com/office/drawing/2014/main" id="{86B4DB6D-2E56-44E8-AF9F-5B0934BB2F3B}"/>
               </a:ext>
             </a:extLst>
           </p:cNvPr>
@@ -7925,7 +7861,7 @@
           <p:cNvPr id="6" name="">
             <a:extLst xmlns:a="http://schemas.openxmlformats.org/drawingml/2006/main">
               <a:ext uri="{FF2B5EF4-FFF2-40B4-BE49-F238E27FC236}">
-                <a16:creationId xmlns:a16="http://schemas.microsoft.com/office/drawing/2014/main" id="{C661F9CC-36F5-4550-98F3-7D59768D881A}"/>
+                <a16:creationId xmlns:a16="http://schemas.microsoft.com/office/drawing/2014/main" id="{71B56ADA-D9B9-417C-B1F0-4E05B66445DC}"/>
               </a:ext>
             </a:extLst>
           </p:cNvPr>
@@ -7982,7 +7918,7 @@
           <p:cNvPr id="7" name="">
             <a:extLst xmlns:a="http://schemas.openxmlformats.org/drawingml/2006/main">
               <a:ext uri="{FF2B5EF4-FFF2-40B4-BE49-F238E27FC236}">
-                <a16:creationId xmlns:a16="http://schemas.microsoft.com/office/drawing/2014/main" id="{8ECEDEA3-2482-4ED6-8CDD-E941E3CABA7F}"/>
+                <a16:creationId xmlns:a16="http://schemas.microsoft.com/office/drawing/2014/main" id="{658152AF-8711-40A0-A848-74F6545182D2}"/>
               </a:ext>
             </a:extLst>
           </p:cNvPr>
@@ -8097,7 +8033,7 @@
           <p:cNvPr id="8" name="">
             <a:extLst xmlns:a="http://schemas.openxmlformats.org/drawingml/2006/main">
               <a:ext uri="{FF2B5EF4-FFF2-40B4-BE49-F238E27FC236}">
-                <a16:creationId xmlns:a16="http://schemas.microsoft.com/office/drawing/2014/main" id="{ADFE5690-D9C7-4ADE-8917-1E4FD7B71DCE}"/>
+                <a16:creationId xmlns:a16="http://schemas.microsoft.com/office/drawing/2014/main" id="{7A0DD812-9C65-4A35-B898-F8C8D4596C28}"/>
               </a:ext>
             </a:extLst>
           </p:cNvPr>
@@ -8154,7 +8090,7 @@
           <p:cNvPr id="9" name="">
             <a:extLst xmlns:a="http://schemas.openxmlformats.org/drawingml/2006/main">
               <a:ext uri="{FF2B5EF4-FFF2-40B4-BE49-F238E27FC236}">
-                <a16:creationId xmlns:a16="http://schemas.microsoft.com/office/drawing/2014/main" id="{B4A98344-A490-41AA-B318-EA8469C68F58}"/>
+                <a16:creationId xmlns:a16="http://schemas.microsoft.com/office/drawing/2014/main" id="{46ACDAAE-B004-4174-A7D0-508A49CA648D}"/>
               </a:ext>
             </a:extLst>
           </p:cNvPr>
@@ -8211,7 +8147,7 @@
           <p:cNvPr id="10" name="">
             <a:extLst xmlns:a="http://schemas.openxmlformats.org/drawingml/2006/main">
               <a:ext uri="{FF2B5EF4-FFF2-40B4-BE49-F238E27FC236}">
-                <a16:creationId xmlns:a16="http://schemas.microsoft.com/office/drawing/2014/main" id="{FD7B2646-8BD7-4149-988C-A19DC0923889}"/>
+                <a16:creationId xmlns:a16="http://schemas.microsoft.com/office/drawing/2014/main" id="{63E3917B-75CE-45B5-8E28-4E37EF43B452}"/>
               </a:ext>
             </a:extLst>
           </p:cNvPr>
@@ -8324,7 +8260,7 @@
     </p:spTree>
     <p:extLst>
       <p:ext uri="{BB962C8B-B14F-4D97-AF65-F5344CB8AC3E}">
-        <p14:creationId xmlns:p14="http://schemas.microsoft.com/office/powerpoint/2010/main" val="1288594396"/>
+        <p14:creationId xmlns:p14="http://schemas.microsoft.com/office/powerpoint/2010/main" val="1579420710"/>
       </p:ext>
     </p:extLst>
   </p:cSld>
@@ -8355,7 +8291,7 @@
           <p:cNvPr id="5" name="">
             <a:extLst xmlns:a="http://schemas.openxmlformats.org/drawingml/2006/main">
               <a:ext uri="{FF2B5EF4-FFF2-40B4-BE49-F238E27FC236}">
-                <a16:creationId xmlns:a16="http://schemas.microsoft.com/office/drawing/2014/main" id="{6EF01540-E329-4D06-89E1-D8CE30B0FE55}"/>
+                <a16:creationId xmlns:a16="http://schemas.microsoft.com/office/drawing/2014/main" id="{BACD7049-9214-45FF-AC0A-0C033403621C}"/>
               </a:ext>
             </a:extLst>
           </p:cNvPr>
@@ -8412,7 +8348,7 @@
           <p:cNvPr id="2" name="">
             <a:extLst xmlns:a="http://schemas.openxmlformats.org/drawingml/2006/main">
               <a:ext uri="{FF2B5EF4-FFF2-40B4-BE49-F238E27FC236}">
-                <a16:creationId xmlns:a16="http://schemas.microsoft.com/office/drawing/2014/main" id="{F3E1F216-C47E-4633-9047-9CE28FABB450}"/>
+                <a16:creationId xmlns:a16="http://schemas.microsoft.com/office/drawing/2014/main" id="{CF40F072-C767-4E58-8A1C-96A48C3B7917}"/>
               </a:ext>
             </a:extLst>
           </p:cNvPr>
@@ -8469,7 +8405,7 @@
           <p:cNvPr id="3" name="">
             <a:extLst xmlns:a="http://schemas.openxmlformats.org/drawingml/2006/main">
               <a:ext uri="{FF2B5EF4-FFF2-40B4-BE49-F238E27FC236}">
-                <a16:creationId xmlns:a16="http://schemas.microsoft.com/office/drawing/2014/main" id="{67047B84-5D7E-41AC-AF20-9EF0E5248837}"/>
+                <a16:creationId xmlns:a16="http://schemas.microsoft.com/office/drawing/2014/main" id="{847D6A82-ED39-44DE-8A2E-697A95D9B9EE}"/>
               </a:ext>
             </a:extLst>
           </p:cNvPr>
@@ -8816,7 +8752,7 @@
     </p:spTree>
     <p:extLst>
       <p:ext uri="{BB962C8B-B14F-4D97-AF65-F5344CB8AC3E}">
-        <p14:creationId xmlns:p14="http://schemas.microsoft.com/office/powerpoint/2010/main" val="578683797"/>
+        <p14:creationId xmlns:p14="http://schemas.microsoft.com/office/powerpoint/2010/main" val="725308089"/>
       </p:ext>
     </p:extLst>
   </p:cSld>
@@ -8847,7 +8783,7 @@
           <p:cNvPr id="11" name="">
             <a:extLst xmlns:a="http://schemas.openxmlformats.org/drawingml/2006/main">
               <a:ext uri="{FF2B5EF4-FFF2-40B4-BE49-F238E27FC236}">
-                <a16:creationId xmlns:a16="http://schemas.microsoft.com/office/drawing/2014/main" id="{49DFAA9C-709E-4321-9A5B-84F1351FA5C3}"/>
+                <a16:creationId xmlns:a16="http://schemas.microsoft.com/office/drawing/2014/main" id="{83EBDC0A-4E2B-4B15-BB67-D661660D3137}"/>
               </a:ext>
             </a:extLst>
           </p:cNvPr>
@@ -8904,7 +8840,7 @@
           <p:cNvPr id="2" name="">
             <a:extLst xmlns:a="http://schemas.openxmlformats.org/drawingml/2006/main">
               <a:ext uri="{FF2B5EF4-FFF2-40B4-BE49-F238E27FC236}">
-                <a16:creationId xmlns:a16="http://schemas.microsoft.com/office/drawing/2014/main" id="{05AF8900-D210-4B09-AD3F-511CFA430300}"/>
+                <a16:creationId xmlns:a16="http://schemas.microsoft.com/office/drawing/2014/main" id="{009655F9-C97F-4EB7-9639-44EF32AA7F52}"/>
               </a:ext>
             </a:extLst>
           </p:cNvPr>
@@ -8961,7 +8897,7 @@
           <p:cNvPr id="3" name="">
             <a:extLst xmlns:a="http://schemas.openxmlformats.org/drawingml/2006/main">
               <a:ext uri="{FF2B5EF4-FFF2-40B4-BE49-F238E27FC236}">
-                <a16:creationId xmlns:a16="http://schemas.microsoft.com/office/drawing/2014/main" id="{7DA05A24-EC25-436F-85A1-D5A688963D48}"/>
+                <a16:creationId xmlns:a16="http://schemas.microsoft.com/office/drawing/2014/main" id="{F0B3F083-4BFB-4DB4-BF97-81B0B829F88C}"/>
               </a:ext>
             </a:extLst>
           </p:cNvPr>
@@ -9018,7 +8954,7 @@
           <p:cNvPr id="4" name="">
             <a:extLst xmlns:a="http://schemas.openxmlformats.org/drawingml/2006/main">
               <a:ext uri="{FF2B5EF4-FFF2-40B4-BE49-F238E27FC236}">
-                <a16:creationId xmlns:a16="http://schemas.microsoft.com/office/drawing/2014/main" id="{3DA863DB-D8ED-4BB7-AF31-6F064D8DE71C}"/>
+                <a16:creationId xmlns:a16="http://schemas.microsoft.com/office/drawing/2014/main" id="{29C76656-63ED-493E-9EDB-817AF0C68F57}"/>
               </a:ext>
             </a:extLst>
           </p:cNvPr>
@@ -9106,7 +9042,7 @@
           <p:cNvPr id="5" name="">
             <a:extLst xmlns:a="http://schemas.openxmlformats.org/drawingml/2006/main">
               <a:ext uri="{FF2B5EF4-FFF2-40B4-BE49-F238E27FC236}">
-                <a16:creationId xmlns:a16="http://schemas.microsoft.com/office/drawing/2014/main" id="{43E7CB50-5CAD-4493-8E18-051526345DE8}"/>
+                <a16:creationId xmlns:a16="http://schemas.microsoft.com/office/drawing/2014/main" id="{C531D12D-8DAA-4FA7-A856-63CE44766DBF}"/>
               </a:ext>
             </a:extLst>
           </p:cNvPr>
@@ -9190,7 +9126,7 @@
           <p:cNvPr id="6" name="">
             <a:extLst xmlns:a="http://schemas.openxmlformats.org/drawingml/2006/main">
               <a:ext uri="{FF2B5EF4-FFF2-40B4-BE49-F238E27FC236}">
-                <a16:creationId xmlns:a16="http://schemas.microsoft.com/office/drawing/2014/main" id="{DE9FC681-8373-4283-8515-F4609020649A}"/>
+                <a16:creationId xmlns:a16="http://schemas.microsoft.com/office/drawing/2014/main" id="{291D677B-532B-44D7-9373-49595D2302C1}"/>
               </a:ext>
             </a:extLst>
           </p:cNvPr>
@@ -9274,7 +9210,7 @@
           <p:cNvPr id="7" name="">
             <a:extLst xmlns:a="http://schemas.openxmlformats.org/drawingml/2006/main">
               <a:ext uri="{FF2B5EF4-FFF2-40B4-BE49-F238E27FC236}">
-                <a16:creationId xmlns:a16="http://schemas.microsoft.com/office/drawing/2014/main" id="{0204CFB1-070E-4655-AF21-29B49D4F7826}"/>
+                <a16:creationId xmlns:a16="http://schemas.microsoft.com/office/drawing/2014/main" id="{02AB2353-F00E-407F-8EDA-053B4F905BFE}"/>
               </a:ext>
             </a:extLst>
           </p:cNvPr>
@@ -9414,7 +9350,7 @@
           <p:cNvPr id="10" name="">
             <a:extLst xmlns:a="http://schemas.openxmlformats.org/drawingml/2006/main">
               <a:ext uri="{FF2B5EF4-FFF2-40B4-BE49-F238E27FC236}">
-                <a16:creationId xmlns:a16="http://schemas.microsoft.com/office/drawing/2014/main" id="{DA674A1E-0399-4A94-AF0F-6C97E6843C88}"/>
+                <a16:creationId xmlns:a16="http://schemas.microsoft.com/office/drawing/2014/main" id="{29DFE84E-76F6-4DD7-A13D-C0AE3C87BED7}"/>
               </a:ext>
             </a:extLst>
           </p:cNvPr>
@@ -9547,7 +9483,7 @@
     </p:spTree>
     <p:extLst>
       <p:ext uri="{BB962C8B-B14F-4D97-AF65-F5344CB8AC3E}">
-        <p14:creationId xmlns:p14="http://schemas.microsoft.com/office/powerpoint/2010/main" val="100263638"/>
+        <p14:creationId xmlns:p14="http://schemas.microsoft.com/office/powerpoint/2010/main" val="1036492177"/>
       </p:ext>
     </p:extLst>
   </p:cSld>

--- a/presentation/unos_kidney_biopsy.pptx
+++ b/presentation/unos_kidney_biopsy.pptx
@@ -2,23 +2,23 @@
 <file path=ppt/presentation.xml><?xml version="1.0" encoding="utf-8"?>
 <p:presentation xmlns:p="http://schemas.openxmlformats.org/presentationml/2006/main" xmlns:r="http://schemas.openxmlformats.org/officeDocument/2006/relationships">
   <p:sldMasterIdLst>
-    <p:sldMasterId id="2147483648" r:id="Radcac8545d59437c"/>
+    <p:sldMasterId id="2147483648" r:id="Rf66096a0ca224ace"/>
   </p:sldMasterIdLst>
   <p:sldIdLst>
-    <p:sldId id="256" r:id="R781d5cc738c34436"/>
-    <p:sldId id="257" r:id="Rec3db5835e1f439a"/>
-    <p:sldId id="258" r:id="R51719fcafa0f403e"/>
-    <p:sldId id="259" r:id="R00b76af712754641"/>
-    <p:sldId id="260" r:id="Re8cd26c337104d9f"/>
-    <p:sldId id="261" r:id="Rcfef350d5687436e"/>
-    <p:sldId id="262" r:id="R15d2744f03f84fc0"/>
-    <p:sldId id="263" r:id="R66384e3f01c94cf4"/>
-    <p:sldId id="264" r:id="Rec0215ee7d3a4316"/>
-    <p:sldId id="265" r:id="R0332bfbb659f45a8"/>
-    <p:sldId id="266" r:id="R440cffbe54994fea"/>
-    <p:sldId id="267" r:id="Re07831943fa54d19"/>
-    <p:sldId id="268" r:id="Rc2c60499f0df4be4"/>
-    <p:sldId id="269" r:id="Rfc31a2a832e0429b"/>
+    <p:sldId id="256" r:id="R929541006fc24323"/>
+    <p:sldId id="257" r:id="R2308b4464e3c4e1a"/>
+    <p:sldId id="258" r:id="R201bcbad29c846be"/>
+    <p:sldId id="259" r:id="R1bb58af00cbd417d"/>
+    <p:sldId id="260" r:id="Rd9d67569632d49d9"/>
+    <p:sldId id="261" r:id="Rcc4d16d8b1c2481c"/>
+    <p:sldId id="262" r:id="Ra8f975ce5fa1491e"/>
+    <p:sldId id="263" r:id="R6d4dc4deb0b64c6a"/>
+    <p:sldId id="264" r:id="Rb6d568d672f34e11"/>
+    <p:sldId id="265" r:id="R1cf8861be31d4378"/>
+    <p:sldId id="266" r:id="R97a7dbaedb524ab1"/>
+    <p:sldId id="267" r:id="R362554e70bdc4c83"/>
+    <p:sldId id="268" r:id="R960bdb4507324ca4"/>
+    <p:sldId id="269" r:id="R5e88523445fb41fb"/>
   </p:sldIdLst>
   <p:sldSz cx="12192000" cy="6858000"/>
   <p:notesSz cx="6858000" cy="9144000"/>
@@ -63,7 +63,7 @@
   </p:cSld>
   <p:clrMap bg1="lt1" tx1="dk1" bg2="lt2" tx2="dk2" accent1="accent1" accent2="accent2" accent3="accent3" accent4="accent4" accent5="accent5" accent6="accent6" hlink="hlink" folHlink="folHlink"/>
   <p:sldLayoutIdLst>
-    <p:sldLayoutId xmlns:r="http://schemas.openxmlformats.org/officeDocument/2006/relationships" id="2147483649" r:id="Re16480a5278443de"/>
+    <p:sldLayoutId xmlns:r="http://schemas.openxmlformats.org/officeDocument/2006/relationships" id="2147483649" r:id="Rcd76588cdc9b4739"/>
   </p:sldLayoutIdLst>
   <p:txStyles>
     <p:titleStyle>
@@ -851,7 +851,7 @@
           <p:cNvPr id="2" name="">
             <a:extLst xmlns:a="http://schemas.openxmlformats.org/drawingml/2006/main">
               <a:ext uri="{FF2B5EF4-FFF2-40B4-BE49-F238E27FC236}">
-                <a16:creationId xmlns:a16="http://schemas.microsoft.com/office/drawing/2014/main" id="{B0A82B52-8CE3-4D48-99D9-33FFE7A9A04E}"/>
+                <a16:creationId xmlns:a16="http://schemas.microsoft.com/office/drawing/2014/main" id="{1BEBBD3D-FF57-4B8D-B446-1D3FCF6697A3}"/>
               </a:ext>
             </a:extLst>
           </p:cNvPr>
@@ -952,7 +952,7 @@
     </p:spTree>
     <p:extLst>
       <p:ext uri="{BB962C8B-B14F-4D97-AF65-F5344CB8AC3E}">
-        <p14:creationId xmlns:p14="http://schemas.microsoft.com/office/powerpoint/2010/main" val="127899676"/>
+        <p14:creationId xmlns:p14="http://schemas.microsoft.com/office/powerpoint/2010/main" val="242733946"/>
       </p:ext>
     </p:extLst>
   </p:cSld>
@@ -983,7 +983,7 @@
           <p:cNvPr id="6" name="">
             <a:extLst xmlns:a="http://schemas.openxmlformats.org/drawingml/2006/main">
               <a:ext uri="{FF2B5EF4-FFF2-40B4-BE49-F238E27FC236}">
-                <a16:creationId xmlns:a16="http://schemas.microsoft.com/office/drawing/2014/main" id="{E73B0216-C3F7-4604-905B-288AB82100BB}"/>
+                <a16:creationId xmlns:a16="http://schemas.microsoft.com/office/drawing/2014/main" id="{36FC60F0-700F-496D-B5D0-7547E524AEA3}"/>
               </a:ext>
             </a:extLst>
           </p:cNvPr>
@@ -1040,7 +1040,7 @@
           <p:cNvPr id="2" name="">
             <a:extLst xmlns:a="http://schemas.openxmlformats.org/drawingml/2006/main">
               <a:ext uri="{FF2B5EF4-FFF2-40B4-BE49-F238E27FC236}">
-                <a16:creationId xmlns:a16="http://schemas.microsoft.com/office/drawing/2014/main" id="{9002DCF9-2C2B-4281-A28A-3E3437622966}"/>
+                <a16:creationId xmlns:a16="http://schemas.microsoft.com/office/drawing/2014/main" id="{60EC6AC6-3711-4140-8904-6525632228CD}"/>
               </a:ext>
             </a:extLst>
           </p:cNvPr>
@@ -1097,7 +1097,7 @@
           <p:cNvPr id="3" name="">
             <a:extLst xmlns:a="http://schemas.openxmlformats.org/drawingml/2006/main">
               <a:ext uri="{FF2B5EF4-FFF2-40B4-BE49-F238E27FC236}">
-                <a16:creationId xmlns:a16="http://schemas.microsoft.com/office/drawing/2014/main" id="{34ABB45B-2395-4206-9F1D-FA213348ED9F}"/>
+                <a16:creationId xmlns:a16="http://schemas.microsoft.com/office/drawing/2014/main" id="{0FA2B47F-7C60-4817-A669-58B76A36B421}"/>
               </a:ext>
             </a:extLst>
           </p:cNvPr>
@@ -1154,7 +1154,7 @@
           <p:cNvPr id="4" name="">
             <a:extLst xmlns:a="http://schemas.openxmlformats.org/drawingml/2006/main">
               <a:ext uri="{FF2B5EF4-FFF2-40B4-BE49-F238E27FC236}">
-                <a16:creationId xmlns:a16="http://schemas.microsoft.com/office/drawing/2014/main" id="{5A1F7487-B277-4FED-805A-26C08DA5DD40}"/>
+                <a16:creationId xmlns:a16="http://schemas.microsoft.com/office/drawing/2014/main" id="{72829B63-058D-4FFC-A9D5-1FA344EB77CB}"/>
               </a:ext>
             </a:extLst>
           </p:cNvPr>
@@ -1566,7 +1566,7 @@
     </p:spTree>
     <p:extLst>
       <p:ext uri="{BB962C8B-B14F-4D97-AF65-F5344CB8AC3E}">
-        <p14:creationId xmlns:p14="http://schemas.microsoft.com/office/powerpoint/2010/main" val="284554763"/>
+        <p14:creationId xmlns:p14="http://schemas.microsoft.com/office/powerpoint/2010/main" val="573810268"/>
       </p:ext>
     </p:extLst>
   </p:cSld>
@@ -1597,7 +1597,7 @@
           <p:cNvPr id="17" name="">
             <a:extLst xmlns:a="http://schemas.openxmlformats.org/drawingml/2006/main">
               <a:ext uri="{FF2B5EF4-FFF2-40B4-BE49-F238E27FC236}">
-                <a16:creationId xmlns:a16="http://schemas.microsoft.com/office/drawing/2014/main" id="{4739A7F1-8656-4254-9701-296F90B78597}"/>
+                <a16:creationId xmlns:a16="http://schemas.microsoft.com/office/drawing/2014/main" id="{DDFD68C6-2833-4DB1-B462-897A2BE8B65F}"/>
               </a:ext>
             </a:extLst>
           </p:cNvPr>
@@ -1654,7 +1654,7 @@
           <p:cNvPr id="2" name="">
             <a:extLst xmlns:a="http://schemas.openxmlformats.org/drawingml/2006/main">
               <a:ext uri="{FF2B5EF4-FFF2-40B4-BE49-F238E27FC236}">
-                <a16:creationId xmlns:a16="http://schemas.microsoft.com/office/drawing/2014/main" id="{066855E6-2273-4C73-88F4-055AD4EF9706}"/>
+                <a16:creationId xmlns:a16="http://schemas.microsoft.com/office/drawing/2014/main" id="{FA3F4A08-A164-43E6-8B99-D21CD762ACD7}"/>
               </a:ext>
             </a:extLst>
           </p:cNvPr>
@@ -1711,7 +1711,7 @@
           <p:cNvPr id="3" name="">
             <a:extLst xmlns:a="http://schemas.openxmlformats.org/drawingml/2006/main">
               <a:ext uri="{FF2B5EF4-FFF2-40B4-BE49-F238E27FC236}">
-                <a16:creationId xmlns:a16="http://schemas.microsoft.com/office/drawing/2014/main" id="{F769555E-9913-4882-A2B7-07EF127E5499}"/>
+                <a16:creationId xmlns:a16="http://schemas.microsoft.com/office/drawing/2014/main" id="{6FD0C6A7-CD7E-42BC-BF01-62B4378E3530}"/>
               </a:ext>
             </a:extLst>
           </p:cNvPr>
@@ -1768,7 +1768,7 @@
           <p:cNvPr id="4" name="">
             <a:extLst xmlns:a="http://schemas.openxmlformats.org/drawingml/2006/main">
               <a:ext uri="{FF2B5EF4-FFF2-40B4-BE49-F238E27FC236}">
-                <a16:creationId xmlns:a16="http://schemas.microsoft.com/office/drawing/2014/main" id="{345CD311-FDF0-446C-9E3B-95D41E892E90}"/>
+                <a16:creationId xmlns:a16="http://schemas.microsoft.com/office/drawing/2014/main" id="{61B48FED-F5B9-4605-98F2-79EE34D331E4}"/>
               </a:ext>
             </a:extLst>
           </p:cNvPr>
@@ -1825,7 +1825,7 @@
           <p:cNvPr id="5" name="">
             <a:extLst xmlns:a="http://schemas.openxmlformats.org/drawingml/2006/main">
               <a:ext uri="{FF2B5EF4-FFF2-40B4-BE49-F238E27FC236}">
-                <a16:creationId xmlns:a16="http://schemas.microsoft.com/office/drawing/2014/main" id="{CF7005A7-3B01-40F4-A783-AD8640306483}"/>
+                <a16:creationId xmlns:a16="http://schemas.microsoft.com/office/drawing/2014/main" id="{F5D2DCED-540A-419B-BBD8-AC692D724B54}"/>
               </a:ext>
             </a:extLst>
           </p:cNvPr>
@@ -1882,7 +1882,7 @@
           <p:cNvPr id="6" name="">
             <a:extLst xmlns:a="http://schemas.openxmlformats.org/drawingml/2006/main">
               <a:ext uri="{FF2B5EF4-FFF2-40B4-BE49-F238E27FC236}">
-                <a16:creationId xmlns:a16="http://schemas.microsoft.com/office/drawing/2014/main" id="{026FE924-BD19-415D-A330-252FDA587CC3}"/>
+                <a16:creationId xmlns:a16="http://schemas.microsoft.com/office/drawing/2014/main" id="{85AB7043-CB28-41FB-9141-3CD9A78CD500}"/>
               </a:ext>
             </a:extLst>
           </p:cNvPr>
@@ -1911,7 +1911,7 @@
           <p:cNvPr id="7" name="">
             <a:extLst xmlns:a="http://schemas.openxmlformats.org/drawingml/2006/main">
               <a:ext uri="{FF2B5EF4-FFF2-40B4-BE49-F238E27FC236}">
-                <a16:creationId xmlns:a16="http://schemas.microsoft.com/office/drawing/2014/main" id="{DCFF365D-98EE-4A4A-A9E7-6A7B7F6E7623}"/>
+                <a16:creationId xmlns:a16="http://schemas.microsoft.com/office/drawing/2014/main" id="{9B919CC4-85F2-4171-9C01-2E0E413D74B4}"/>
               </a:ext>
             </a:extLst>
           </p:cNvPr>
@@ -1968,7 +1968,7 @@
           <p:cNvPr id="8" name="">
             <a:extLst xmlns:a="http://schemas.openxmlformats.org/drawingml/2006/main">
               <a:ext uri="{FF2B5EF4-FFF2-40B4-BE49-F238E27FC236}">
-                <a16:creationId xmlns:a16="http://schemas.microsoft.com/office/drawing/2014/main" id="{74E8CCC5-1AA3-41E8-81BD-FF7036BEBDC3}"/>
+                <a16:creationId xmlns:a16="http://schemas.microsoft.com/office/drawing/2014/main" id="{A6FCD865-F750-42BE-8BD5-2A4531A23785}"/>
               </a:ext>
             </a:extLst>
           </p:cNvPr>
@@ -2025,7 +2025,7 @@
           <p:cNvPr id="9" name="">
             <a:extLst xmlns:a="http://schemas.openxmlformats.org/drawingml/2006/main">
               <a:ext uri="{FF2B5EF4-FFF2-40B4-BE49-F238E27FC236}">
-                <a16:creationId xmlns:a16="http://schemas.microsoft.com/office/drawing/2014/main" id="{02073927-9BB1-4E6C-A3AD-BFA7C7A2E5F1}"/>
+                <a16:creationId xmlns:a16="http://schemas.microsoft.com/office/drawing/2014/main" id="{EFE0D82E-6D7F-4410-8838-2074C10753FD}"/>
               </a:ext>
             </a:extLst>
           </p:cNvPr>
@@ -2082,7 +2082,7 @@
           <p:cNvPr id="10" name="">
             <a:extLst xmlns:a="http://schemas.openxmlformats.org/drawingml/2006/main">
               <a:ext uri="{FF2B5EF4-FFF2-40B4-BE49-F238E27FC236}">
-                <a16:creationId xmlns:a16="http://schemas.microsoft.com/office/drawing/2014/main" id="{C9182292-7BC1-40CA-99DC-78DAABB4453B}"/>
+                <a16:creationId xmlns:a16="http://schemas.microsoft.com/office/drawing/2014/main" id="{29EDA83C-CF3F-4B4F-8291-CC735229CB25}"/>
               </a:ext>
             </a:extLst>
           </p:cNvPr>
@@ -2139,7 +2139,7 @@
           <p:cNvPr id="11" name="">
             <a:extLst xmlns:a="http://schemas.openxmlformats.org/drawingml/2006/main">
               <a:ext uri="{FF2B5EF4-FFF2-40B4-BE49-F238E27FC236}">
-                <a16:creationId xmlns:a16="http://schemas.microsoft.com/office/drawing/2014/main" id="{ABAC7DC1-9675-45A9-BA6A-2B3A34D13E58}"/>
+                <a16:creationId xmlns:a16="http://schemas.microsoft.com/office/drawing/2014/main" id="{00E13638-A0B0-4884-89FD-590D48A0A7DD}"/>
               </a:ext>
             </a:extLst>
           </p:cNvPr>
@@ -2168,7 +2168,7 @@
           <p:cNvPr id="12" name="">
             <a:extLst xmlns:a="http://schemas.openxmlformats.org/drawingml/2006/main">
               <a:ext uri="{FF2B5EF4-FFF2-40B4-BE49-F238E27FC236}">
-                <a16:creationId xmlns:a16="http://schemas.microsoft.com/office/drawing/2014/main" id="{8AE41C2D-D195-4D6F-8786-F1461927C9EA}"/>
+                <a16:creationId xmlns:a16="http://schemas.microsoft.com/office/drawing/2014/main" id="{CB893A15-B7FB-40CC-96F3-76B73F5D8EB6}"/>
               </a:ext>
             </a:extLst>
           </p:cNvPr>
@@ -2225,7 +2225,7 @@
           <p:cNvPr id="13" name="">
             <a:extLst xmlns:a="http://schemas.openxmlformats.org/drawingml/2006/main">
               <a:ext uri="{FF2B5EF4-FFF2-40B4-BE49-F238E27FC236}">
-                <a16:creationId xmlns:a16="http://schemas.microsoft.com/office/drawing/2014/main" id="{E9B645D9-71EF-44F3-AC34-8EF5AFF41FB5}"/>
+                <a16:creationId xmlns:a16="http://schemas.microsoft.com/office/drawing/2014/main" id="{BD2FBDFE-CB11-4C35-BB07-DAF602A81EF7}"/>
               </a:ext>
             </a:extLst>
           </p:cNvPr>
@@ -2282,7 +2282,7 @@
           <p:cNvPr id="14" name="">
             <a:extLst xmlns:a="http://schemas.openxmlformats.org/drawingml/2006/main">
               <a:ext uri="{FF2B5EF4-FFF2-40B4-BE49-F238E27FC236}">
-                <a16:creationId xmlns:a16="http://schemas.microsoft.com/office/drawing/2014/main" id="{EAC29816-8B17-4F06-8F31-A2D03385B137}"/>
+                <a16:creationId xmlns:a16="http://schemas.microsoft.com/office/drawing/2014/main" id="{73F5AB52-7F41-4F3B-B0B2-7649C9AB59CC}"/>
               </a:ext>
             </a:extLst>
           </p:cNvPr>
@@ -2625,7 +2625,7 @@
           <p:cNvPr id="16" name="">
             <a:extLst xmlns:a="http://schemas.openxmlformats.org/drawingml/2006/main">
               <a:ext uri="{FF2B5EF4-FFF2-40B4-BE49-F238E27FC236}">
-                <a16:creationId xmlns:a16="http://schemas.microsoft.com/office/drawing/2014/main" id="{AE62C9A8-D667-4B8F-84A4-B7FD2A2BCB0B}"/>
+                <a16:creationId xmlns:a16="http://schemas.microsoft.com/office/drawing/2014/main" id="{EFF4FB92-EBB4-4360-B2AE-62A3E4D87C09}"/>
               </a:ext>
             </a:extLst>
           </p:cNvPr>
@@ -2703,7 +2703,7 @@
     </p:spTree>
     <p:extLst>
       <p:ext uri="{BB962C8B-B14F-4D97-AF65-F5344CB8AC3E}">
-        <p14:creationId xmlns:p14="http://schemas.microsoft.com/office/powerpoint/2010/main" val="912230454"/>
+        <p14:creationId xmlns:p14="http://schemas.microsoft.com/office/powerpoint/2010/main" val="1312984157"/>
       </p:ext>
     </p:extLst>
   </p:cSld>
@@ -2734,7 +2734,7 @@
           <p:cNvPr id="12" name="">
             <a:extLst xmlns:a="http://schemas.openxmlformats.org/drawingml/2006/main">
               <a:ext uri="{FF2B5EF4-FFF2-40B4-BE49-F238E27FC236}">
-                <a16:creationId xmlns:a16="http://schemas.microsoft.com/office/drawing/2014/main" id="{5C8E6EC2-31F3-4035-9346-B501394FB6BB}"/>
+                <a16:creationId xmlns:a16="http://schemas.microsoft.com/office/drawing/2014/main" id="{13270DC5-5AC3-42F8-94DA-0F69DD8F95BA}"/>
               </a:ext>
             </a:extLst>
           </p:cNvPr>
@@ -2791,7 +2791,7 @@
           <p:cNvPr id="2" name="">
             <a:extLst xmlns:a="http://schemas.openxmlformats.org/drawingml/2006/main">
               <a:ext uri="{FF2B5EF4-FFF2-40B4-BE49-F238E27FC236}">
-                <a16:creationId xmlns:a16="http://schemas.microsoft.com/office/drawing/2014/main" id="{9A4AD195-AD4B-40A6-B989-1D15AEFE0986}"/>
+                <a16:creationId xmlns:a16="http://schemas.microsoft.com/office/drawing/2014/main" id="{DA96CC09-3819-4C5B-AA7F-9A6B23B53D90}"/>
               </a:ext>
             </a:extLst>
           </p:cNvPr>
@@ -2848,7 +2848,7 @@
           <p:cNvPr id="3" name="">
             <a:extLst xmlns:a="http://schemas.openxmlformats.org/drawingml/2006/main">
               <a:ext uri="{FF2B5EF4-FFF2-40B4-BE49-F238E27FC236}">
-                <a16:creationId xmlns:a16="http://schemas.microsoft.com/office/drawing/2014/main" id="{FA2FA11F-14ED-47AE-83FE-90D12918E02E}"/>
+                <a16:creationId xmlns:a16="http://schemas.microsoft.com/office/drawing/2014/main" id="{B4C0DF9D-BFD2-471B-82C8-6025FBE5D778}"/>
               </a:ext>
             </a:extLst>
           </p:cNvPr>
@@ -2905,7 +2905,7 @@
           <p:cNvPr id="4" name="">
             <a:extLst xmlns:a="http://schemas.openxmlformats.org/drawingml/2006/main">
               <a:ext uri="{FF2B5EF4-FFF2-40B4-BE49-F238E27FC236}">
-                <a16:creationId xmlns:a16="http://schemas.microsoft.com/office/drawing/2014/main" id="{9142C96A-3CE7-49FC-AFDB-F746BBC5725C}"/>
+                <a16:creationId xmlns:a16="http://schemas.microsoft.com/office/drawing/2014/main" id="{96E901F3-205B-4B68-9314-0B627065A2F1}"/>
               </a:ext>
             </a:extLst>
           </p:cNvPr>
@@ -2969,7 +2969,7 @@
         </p:xfrm>
         <a:graphic xmlns:a="http://schemas.openxmlformats.org/drawingml/2006/main">
           <a:graphicData uri="http://schemas.openxmlformats.org/drawingml/2006/chart">
-            <c:chart xmlns:r="http://schemas.openxmlformats.org/officeDocument/2006/relationships" xmlns:c="http://schemas.openxmlformats.org/drawingml/2006/chart" r:id="Rd7f09683c6344652"/>
+            <c:chart xmlns:r="http://schemas.openxmlformats.org/officeDocument/2006/relationships" xmlns:c="http://schemas.openxmlformats.org/drawingml/2006/chart" r:id="R3da263465cde4fcb"/>
           </a:graphicData>
         </a:graphic>
       </p:graphicFrame>
@@ -2978,7 +2978,7 @@
           <p:cNvPr id="6" name="">
             <a:extLst xmlns:a="http://schemas.openxmlformats.org/drawingml/2006/main">
               <a:ext uri="{FF2B5EF4-FFF2-40B4-BE49-F238E27FC236}">
-                <a16:creationId xmlns:a16="http://schemas.microsoft.com/office/drawing/2014/main" id="{9C7BE111-CC24-4F7E-BE86-D30BA340E39B}"/>
+                <a16:creationId xmlns:a16="http://schemas.microsoft.com/office/drawing/2014/main" id="{27818D9F-C4D2-4F6A-BA72-08CAE5BA6018}"/>
               </a:ext>
             </a:extLst>
           </p:cNvPr>
@@ -3008,7 +3008,7 @@
           <p:cNvPr id="7" name="">
             <a:extLst xmlns:a="http://schemas.openxmlformats.org/drawingml/2006/main">
               <a:ext uri="{FF2B5EF4-FFF2-40B4-BE49-F238E27FC236}">
-                <a16:creationId xmlns:a16="http://schemas.microsoft.com/office/drawing/2014/main" id="{E7EA94A8-E4C8-4D2D-B420-2B072FD3C222}"/>
+                <a16:creationId xmlns:a16="http://schemas.microsoft.com/office/drawing/2014/main" id="{4704AF32-FB84-45A9-81B6-A3F6EB86827D}"/>
               </a:ext>
             </a:extLst>
           </p:cNvPr>
@@ -3065,7 +3065,7 @@
           <p:cNvPr id="8" name="">
             <a:extLst xmlns:a="http://schemas.openxmlformats.org/drawingml/2006/main">
               <a:ext uri="{FF2B5EF4-FFF2-40B4-BE49-F238E27FC236}">
-                <a16:creationId xmlns:a16="http://schemas.microsoft.com/office/drawing/2014/main" id="{A2E9DE57-5E6E-4250-9F40-244987335A79}"/>
+                <a16:creationId xmlns:a16="http://schemas.microsoft.com/office/drawing/2014/main" id="{90F23125-7B6D-4A3C-B6B8-02D2D22214D2}"/>
               </a:ext>
             </a:extLst>
           </p:cNvPr>
@@ -3095,7 +3095,7 @@
           <p:cNvPr id="9" name="">
             <a:extLst xmlns:a="http://schemas.openxmlformats.org/drawingml/2006/main">
               <a:ext uri="{FF2B5EF4-FFF2-40B4-BE49-F238E27FC236}">
-                <a16:creationId xmlns:a16="http://schemas.microsoft.com/office/drawing/2014/main" id="{614EDB17-6B04-42FD-A061-4C267BFC875B}"/>
+                <a16:creationId xmlns:a16="http://schemas.microsoft.com/office/drawing/2014/main" id="{C38B7DB9-949F-4C2C-9FC5-8DAB905F81C8}"/>
               </a:ext>
             </a:extLst>
           </p:cNvPr>
@@ -3152,7 +3152,7 @@
           <p:cNvPr id="10" name="">
             <a:extLst xmlns:a="http://schemas.openxmlformats.org/drawingml/2006/main">
               <a:ext uri="{FF2B5EF4-FFF2-40B4-BE49-F238E27FC236}">
-                <a16:creationId xmlns:a16="http://schemas.microsoft.com/office/drawing/2014/main" id="{56E8268C-4E47-426E-9D81-568A89D3B4ED}"/>
+                <a16:creationId xmlns:a16="http://schemas.microsoft.com/office/drawing/2014/main" id="{0DCF4F92-D749-49EA-A271-7901241AB2A2}"/>
               </a:ext>
             </a:extLst>
           </p:cNvPr>
@@ -3213,7 +3213,7 @@
           <p:cNvPr id="11" name="">
             <a:extLst xmlns:a="http://schemas.openxmlformats.org/drawingml/2006/main">
               <a:ext uri="{FF2B5EF4-FFF2-40B4-BE49-F238E27FC236}">
-                <a16:creationId xmlns:a16="http://schemas.microsoft.com/office/drawing/2014/main" id="{496F0C23-7281-4EFF-9040-535900A97197}"/>
+                <a16:creationId xmlns:a16="http://schemas.microsoft.com/office/drawing/2014/main" id="{9C7E8306-34BF-41A0-B942-707D9A927537}"/>
               </a:ext>
             </a:extLst>
           </p:cNvPr>
@@ -3260,7 +3260,7 @@
                 <a:ea typeface="Arial"/>
                 <a:cs typeface="Arial"/>
               </a:rPr>
-              <a:t>Across 20 discovery splits: CatBoost selected 13 times, logistic 7.</a:t>
+              <a:t>Follow-up screening selections across 20 discovery splits: CatBoost 13, logistic 7.</a:t>
             </a:r>
           </a:p>
         </p:txBody>
@@ -3268,7 +3268,7 @@
     </p:spTree>
     <p:extLst>
       <p:ext uri="{BB962C8B-B14F-4D97-AF65-F5344CB8AC3E}">
-        <p14:creationId xmlns:p14="http://schemas.microsoft.com/office/powerpoint/2010/main" val="1750877085"/>
+        <p14:creationId xmlns:p14="http://schemas.microsoft.com/office/powerpoint/2010/main" val="305746940"/>
       </p:ext>
     </p:extLst>
   </p:cSld>
@@ -3299,7 +3299,7 @@
           <p:cNvPr id="4" name="">
             <a:extLst xmlns:a="http://schemas.openxmlformats.org/drawingml/2006/main">
               <a:ext uri="{FF2B5EF4-FFF2-40B4-BE49-F238E27FC236}">
-                <a16:creationId xmlns:a16="http://schemas.microsoft.com/office/drawing/2014/main" id="{C69A5426-B04F-4300-B53F-51226A6AEABE}"/>
+                <a16:creationId xmlns:a16="http://schemas.microsoft.com/office/drawing/2014/main" id="{59ED9233-E711-4DE2-8D6F-88A260B19AC5}"/>
               </a:ext>
             </a:extLst>
           </p:cNvPr>
@@ -3356,7 +3356,7 @@
           <p:cNvPr id="2" name="">
             <a:extLst xmlns:a="http://schemas.openxmlformats.org/drawingml/2006/main">
               <a:ext uri="{FF2B5EF4-FFF2-40B4-BE49-F238E27FC236}">
-                <a16:creationId xmlns:a16="http://schemas.microsoft.com/office/drawing/2014/main" id="{DEA39A17-67EB-486C-9C9C-F4920F3DBF18}"/>
+                <a16:creationId xmlns:a16="http://schemas.microsoft.com/office/drawing/2014/main" id="{F02AD4FA-32F8-4BE7-BD4E-25A7D74E1055}"/>
               </a:ext>
             </a:extLst>
           </p:cNvPr>
@@ -3413,7 +3413,7 @@
           <p:cNvPr id="3" name="">
             <a:extLst xmlns:a="http://schemas.openxmlformats.org/drawingml/2006/main">
               <a:ext uri="{FF2B5EF4-FFF2-40B4-BE49-F238E27FC236}">
-                <a16:creationId xmlns:a16="http://schemas.microsoft.com/office/drawing/2014/main" id="{153F1898-AD1B-4D73-AB61-245DF1B24B4F}"/>
+                <a16:creationId xmlns:a16="http://schemas.microsoft.com/office/drawing/2014/main" id="{9E24FAC0-F59E-44AC-B20D-42FABB957BA6}"/>
               </a:ext>
             </a:extLst>
           </p:cNvPr>
@@ -3468,7 +3468,7 @@
     </p:spTree>
     <p:extLst>
       <p:ext uri="{BB962C8B-B14F-4D97-AF65-F5344CB8AC3E}">
-        <p14:creationId xmlns:p14="http://schemas.microsoft.com/office/powerpoint/2010/main" val="1091844925"/>
+        <p14:creationId xmlns:p14="http://schemas.microsoft.com/office/powerpoint/2010/main" val="340105872"/>
       </p:ext>
     </p:extLst>
   </p:cSld>
@@ -3499,7 +3499,7 @@
           <p:cNvPr id="9" name="">
             <a:extLst xmlns:a="http://schemas.openxmlformats.org/drawingml/2006/main">
               <a:ext uri="{FF2B5EF4-FFF2-40B4-BE49-F238E27FC236}">
-                <a16:creationId xmlns:a16="http://schemas.microsoft.com/office/drawing/2014/main" id="{A980FE43-807B-4742-BCCE-854C510A4549}"/>
+                <a16:creationId xmlns:a16="http://schemas.microsoft.com/office/drawing/2014/main" id="{32AFC8B9-3661-4B76-8396-F344D0CE0D78}"/>
               </a:ext>
             </a:extLst>
           </p:cNvPr>
@@ -3556,7 +3556,7 @@
           <p:cNvPr id="2" name="">
             <a:extLst xmlns:a="http://schemas.openxmlformats.org/drawingml/2006/main">
               <a:ext uri="{FF2B5EF4-FFF2-40B4-BE49-F238E27FC236}">
-                <a16:creationId xmlns:a16="http://schemas.microsoft.com/office/drawing/2014/main" id="{9E92B173-B533-4038-B622-B2FB2BC5F3AB}"/>
+                <a16:creationId xmlns:a16="http://schemas.microsoft.com/office/drawing/2014/main" id="{19D194F2-79B6-4474-A94F-50FCA779AC36}"/>
               </a:ext>
             </a:extLst>
           </p:cNvPr>
@@ -3613,7 +3613,7 @@
           <p:cNvPr id="3" name="">
             <a:extLst xmlns:a="http://schemas.openxmlformats.org/drawingml/2006/main">
               <a:ext uri="{FF2B5EF4-FFF2-40B4-BE49-F238E27FC236}">
-                <a16:creationId xmlns:a16="http://schemas.microsoft.com/office/drawing/2014/main" id="{67BAAEF5-C09C-4C45-BAEE-29E60923F65F}"/>
+                <a16:creationId xmlns:a16="http://schemas.microsoft.com/office/drawing/2014/main" id="{CCB6C3CB-CFAC-4452-90A8-AC00B62A1940}"/>
               </a:ext>
             </a:extLst>
           </p:cNvPr>
@@ -3670,7 +3670,7 @@
           <p:cNvPr id="4" name="">
             <a:extLst xmlns:a="http://schemas.openxmlformats.org/drawingml/2006/main">
               <a:ext uri="{FF2B5EF4-FFF2-40B4-BE49-F238E27FC236}">
-                <a16:creationId xmlns:a16="http://schemas.microsoft.com/office/drawing/2014/main" id="{E1710BEF-9EEC-45EA-9B8E-D44AAA0A9B95}"/>
+                <a16:creationId xmlns:a16="http://schemas.microsoft.com/office/drawing/2014/main" id="{F036F871-2BB1-44DD-A309-A77C3F85C588}"/>
               </a:ext>
             </a:extLst>
           </p:cNvPr>
@@ -3727,7 +3727,7 @@
           <p:cNvPr id="5" name="">
             <a:extLst xmlns:a="http://schemas.openxmlformats.org/drawingml/2006/main">
               <a:ext uri="{FF2B5EF4-FFF2-40B4-BE49-F238E27FC236}">
-                <a16:creationId xmlns:a16="http://schemas.microsoft.com/office/drawing/2014/main" id="{7F059A08-0788-4AB3-B4F1-851B990DC589}"/>
+                <a16:creationId xmlns:a16="http://schemas.microsoft.com/office/drawing/2014/main" id="{9A27C6C6-B17A-42AC-8EEF-7718CE60CC7F}"/>
               </a:ext>
             </a:extLst>
           </p:cNvPr>
@@ -3807,7 +3807,7 @@
           <p:cNvPr id="6" name="">
             <a:extLst xmlns:a="http://schemas.openxmlformats.org/drawingml/2006/main">
               <a:ext uri="{FF2B5EF4-FFF2-40B4-BE49-F238E27FC236}">
-                <a16:creationId xmlns:a16="http://schemas.microsoft.com/office/drawing/2014/main" id="{79BE1B5A-2FA5-4AC3-A9D2-C8197DC60080}"/>
+                <a16:creationId xmlns:a16="http://schemas.microsoft.com/office/drawing/2014/main" id="{21E7E826-C1D8-467D-9624-8D9E99E30336}"/>
               </a:ext>
             </a:extLst>
           </p:cNvPr>
@@ -3836,7 +3836,7 @@
           <p:cNvPr id="7" name="">
             <a:extLst xmlns:a="http://schemas.openxmlformats.org/drawingml/2006/main">
               <a:ext uri="{FF2B5EF4-FFF2-40B4-BE49-F238E27FC236}">
-                <a16:creationId xmlns:a16="http://schemas.microsoft.com/office/drawing/2014/main" id="{94D1DC89-53B2-4B91-B60F-B29F4EC478D9}"/>
+                <a16:creationId xmlns:a16="http://schemas.microsoft.com/office/drawing/2014/main" id="{A62B7C18-567D-4EA2-AD49-3276E40441EE}"/>
               </a:ext>
             </a:extLst>
           </p:cNvPr>
@@ -3893,7 +3893,7 @@
           <p:cNvPr id="8" name="">
             <a:extLst xmlns:a="http://schemas.openxmlformats.org/drawingml/2006/main">
               <a:ext uri="{FF2B5EF4-FFF2-40B4-BE49-F238E27FC236}">
-                <a16:creationId xmlns:a16="http://schemas.microsoft.com/office/drawing/2014/main" id="{2FDF0F0D-D727-49D4-81CA-1EE12BA07B54}"/>
+                <a16:creationId xmlns:a16="http://schemas.microsoft.com/office/drawing/2014/main" id="{752D35D5-3534-448A-97FE-BA5BCED6AE67}"/>
               </a:ext>
             </a:extLst>
           </p:cNvPr>
@@ -3971,7 +3971,7 @@
     </p:spTree>
     <p:extLst>
       <p:ext uri="{BB962C8B-B14F-4D97-AF65-F5344CB8AC3E}">
-        <p14:creationId xmlns:p14="http://schemas.microsoft.com/office/powerpoint/2010/main" val="1607663596"/>
+        <p14:creationId xmlns:p14="http://schemas.microsoft.com/office/powerpoint/2010/main" val="405358652"/>
       </p:ext>
     </p:extLst>
   </p:cSld>
@@ -4002,7 +4002,7 @@
           <p:cNvPr id="8" name="">
             <a:extLst xmlns:a="http://schemas.openxmlformats.org/drawingml/2006/main">
               <a:ext uri="{FF2B5EF4-FFF2-40B4-BE49-F238E27FC236}">
-                <a16:creationId xmlns:a16="http://schemas.microsoft.com/office/drawing/2014/main" id="{CA76857C-FCFC-4198-8D20-06F13949F4EB}"/>
+                <a16:creationId xmlns:a16="http://schemas.microsoft.com/office/drawing/2014/main" id="{307D6D15-6760-4258-B568-E5D44FFC7190}"/>
               </a:ext>
             </a:extLst>
           </p:cNvPr>
@@ -4059,7 +4059,7 @@
           <p:cNvPr id="2" name="">
             <a:extLst xmlns:a="http://schemas.openxmlformats.org/drawingml/2006/main">
               <a:ext uri="{FF2B5EF4-FFF2-40B4-BE49-F238E27FC236}">
-                <a16:creationId xmlns:a16="http://schemas.microsoft.com/office/drawing/2014/main" id="{84D2937C-5BAB-4401-B4C2-9A5FCDA822A4}"/>
+                <a16:creationId xmlns:a16="http://schemas.microsoft.com/office/drawing/2014/main" id="{89D74DD0-31A8-4B4A-90CC-9C4CEEB45C8A}"/>
               </a:ext>
             </a:extLst>
           </p:cNvPr>
@@ -4116,7 +4116,7 @@
           <p:cNvPr id="3" name="">
             <a:extLst xmlns:a="http://schemas.openxmlformats.org/drawingml/2006/main">
               <a:ext uri="{FF2B5EF4-FFF2-40B4-BE49-F238E27FC236}">
-                <a16:creationId xmlns:a16="http://schemas.microsoft.com/office/drawing/2014/main" id="{6F17A776-DE48-4B28-B9C3-B74FB9078909}"/>
+                <a16:creationId xmlns:a16="http://schemas.microsoft.com/office/drawing/2014/main" id="{4ECCAD31-B16F-4E7B-A383-1369A18B611A}"/>
               </a:ext>
             </a:extLst>
           </p:cNvPr>
@@ -4173,7 +4173,7 @@
           <p:cNvPr id="4" name="">
             <a:extLst xmlns:a="http://schemas.openxmlformats.org/drawingml/2006/main">
               <a:ext uri="{FF2B5EF4-FFF2-40B4-BE49-F238E27FC236}">
-                <a16:creationId xmlns:a16="http://schemas.microsoft.com/office/drawing/2014/main" id="{8D2B2CCD-BA95-4351-8FF4-7176765E72BE}"/>
+                <a16:creationId xmlns:a16="http://schemas.microsoft.com/office/drawing/2014/main" id="{B931218D-E9EB-4B22-BE44-3B682E99AD3B}"/>
               </a:ext>
             </a:extLst>
           </p:cNvPr>
@@ -4230,7 +4230,7 @@
           <p:cNvPr id="5" name="">
             <a:extLst xmlns:a="http://schemas.openxmlformats.org/drawingml/2006/main">
               <a:ext uri="{FF2B5EF4-FFF2-40B4-BE49-F238E27FC236}">
-                <a16:creationId xmlns:a16="http://schemas.microsoft.com/office/drawing/2014/main" id="{EF4D9A95-A095-40E5-8059-9DB63F7F7E0C}"/>
+                <a16:creationId xmlns:a16="http://schemas.microsoft.com/office/drawing/2014/main" id="{D6D9F45F-48A1-4696-B7A4-97DC2961C833}"/>
               </a:ext>
             </a:extLst>
           </p:cNvPr>
@@ -4287,7 +4287,7 @@
           <p:cNvPr id="6" name="">
             <a:extLst xmlns:a="http://schemas.openxmlformats.org/drawingml/2006/main">
               <a:ext uri="{FF2B5EF4-FFF2-40B4-BE49-F238E27FC236}">
-                <a16:creationId xmlns:a16="http://schemas.microsoft.com/office/drawing/2014/main" id="{4EC37699-C424-45B8-9F89-6E33858EBB42}"/>
+                <a16:creationId xmlns:a16="http://schemas.microsoft.com/office/drawing/2014/main" id="{9C701502-21B5-4E84-B84F-DFB545703F79}"/>
               </a:ext>
             </a:extLst>
           </p:cNvPr>
@@ -4344,7 +4344,7 @@
           <p:cNvPr id="7" name="">
             <a:extLst xmlns:a="http://schemas.openxmlformats.org/drawingml/2006/main">
               <a:ext uri="{FF2B5EF4-FFF2-40B4-BE49-F238E27FC236}">
-                <a16:creationId xmlns:a16="http://schemas.microsoft.com/office/drawing/2014/main" id="{B046639D-A9B4-4BEF-AB28-65B490A5E5F9}"/>
+                <a16:creationId xmlns:a16="http://schemas.microsoft.com/office/drawing/2014/main" id="{7C41AA78-848E-4EDD-875A-99A399A8865A}"/>
               </a:ext>
             </a:extLst>
           </p:cNvPr>
@@ -4399,7 +4399,7 @@
     </p:spTree>
     <p:extLst>
       <p:ext uri="{BB962C8B-B14F-4D97-AF65-F5344CB8AC3E}">
-        <p14:creationId xmlns:p14="http://schemas.microsoft.com/office/powerpoint/2010/main" val="1513283384"/>
+        <p14:creationId xmlns:p14="http://schemas.microsoft.com/office/powerpoint/2010/main" val="576648320"/>
       </p:ext>
     </p:extLst>
   </p:cSld>
@@ -4430,7 +4430,7 @@
           <p:cNvPr id="9" name="">
             <a:extLst xmlns:a="http://schemas.openxmlformats.org/drawingml/2006/main">
               <a:ext uri="{FF2B5EF4-FFF2-40B4-BE49-F238E27FC236}">
-                <a16:creationId xmlns:a16="http://schemas.microsoft.com/office/drawing/2014/main" id="{E9E3CE2B-AA48-4CE5-A97D-932CC25947C1}"/>
+                <a16:creationId xmlns:a16="http://schemas.microsoft.com/office/drawing/2014/main" id="{05934B30-F0D9-4634-99E9-5D41D0BCD911}"/>
               </a:ext>
             </a:extLst>
           </p:cNvPr>
@@ -4487,7 +4487,7 @@
           <p:cNvPr id="2" name="">
             <a:extLst xmlns:a="http://schemas.openxmlformats.org/drawingml/2006/main">
               <a:ext uri="{FF2B5EF4-FFF2-40B4-BE49-F238E27FC236}">
-                <a16:creationId xmlns:a16="http://schemas.microsoft.com/office/drawing/2014/main" id="{3947172C-13AA-474E-88FD-389859DF21F7}"/>
+                <a16:creationId xmlns:a16="http://schemas.microsoft.com/office/drawing/2014/main" id="{BE92FD7A-7429-46F5-8A5C-F8389A4055BB}"/>
               </a:ext>
             </a:extLst>
           </p:cNvPr>
@@ -4544,7 +4544,7 @@
           <p:cNvPr id="3" name="">
             <a:extLst xmlns:a="http://schemas.openxmlformats.org/drawingml/2006/main">
               <a:ext uri="{FF2B5EF4-FFF2-40B4-BE49-F238E27FC236}">
-                <a16:creationId xmlns:a16="http://schemas.microsoft.com/office/drawing/2014/main" id="{F1B3ABC6-AF79-4801-AB10-0BAD1B3F33FB}"/>
+                <a16:creationId xmlns:a16="http://schemas.microsoft.com/office/drawing/2014/main" id="{B5846C47-60FF-4427-8686-BE4737896067}"/>
               </a:ext>
             </a:extLst>
           </p:cNvPr>
@@ -4601,7 +4601,7 @@
           <p:cNvPr id="4" name="">
             <a:extLst xmlns:a="http://schemas.openxmlformats.org/drawingml/2006/main">
               <a:ext uri="{FF2B5EF4-FFF2-40B4-BE49-F238E27FC236}">
-                <a16:creationId xmlns:a16="http://schemas.microsoft.com/office/drawing/2014/main" id="{3D522432-CF2F-400C-ABA1-8558D96CD48A}"/>
+                <a16:creationId xmlns:a16="http://schemas.microsoft.com/office/drawing/2014/main" id="{DBEC1414-65CA-47D9-A074-6BB7E4BD35D5}"/>
               </a:ext>
             </a:extLst>
           </p:cNvPr>
@@ -4658,7 +4658,7 @@
           <p:cNvPr id="5" name="">
             <a:extLst xmlns:a="http://schemas.openxmlformats.org/drawingml/2006/main">
               <a:ext uri="{FF2B5EF4-FFF2-40B4-BE49-F238E27FC236}">
-                <a16:creationId xmlns:a16="http://schemas.microsoft.com/office/drawing/2014/main" id="{EDAB55F9-F91E-4EF5-93C3-2111FC801E13}"/>
+                <a16:creationId xmlns:a16="http://schemas.microsoft.com/office/drawing/2014/main" id="{BDECC472-940E-4CE8-B89C-7C3954F78198}"/>
               </a:ext>
             </a:extLst>
           </p:cNvPr>
@@ -4715,7 +4715,7 @@
           <p:cNvPr id="6" name="">
             <a:extLst xmlns:a="http://schemas.openxmlformats.org/drawingml/2006/main">
               <a:ext uri="{FF2B5EF4-FFF2-40B4-BE49-F238E27FC236}">
-                <a16:creationId xmlns:a16="http://schemas.microsoft.com/office/drawing/2014/main" id="{9B2B7D56-19AA-4FF2-B342-D5BBB62D0E81}"/>
+                <a16:creationId xmlns:a16="http://schemas.microsoft.com/office/drawing/2014/main" id="{F0EE228C-BE5E-4BDD-BD93-6BBACDF88744}"/>
               </a:ext>
             </a:extLst>
           </p:cNvPr>
@@ -4772,7 +4772,7 @@
           <p:cNvPr id="7" name="">
             <a:extLst xmlns:a="http://schemas.openxmlformats.org/drawingml/2006/main">
               <a:ext uri="{FF2B5EF4-FFF2-40B4-BE49-F238E27FC236}">
-                <a16:creationId xmlns:a16="http://schemas.microsoft.com/office/drawing/2014/main" id="{24F88333-DAA8-40E4-A282-F970B5994CAD}"/>
+                <a16:creationId xmlns:a16="http://schemas.microsoft.com/office/drawing/2014/main" id="{1AE21BE2-29CC-4A5A-9CDA-B64A52211C05}"/>
               </a:ext>
             </a:extLst>
           </p:cNvPr>
@@ -4829,7 +4829,7 @@
           <p:cNvPr id="8" name="">
             <a:extLst xmlns:a="http://schemas.openxmlformats.org/drawingml/2006/main">
               <a:ext uri="{FF2B5EF4-FFF2-40B4-BE49-F238E27FC236}">
-                <a16:creationId xmlns:a16="http://schemas.microsoft.com/office/drawing/2014/main" id="{ECFE1E6E-53EF-468B-B466-3F252072A6CA}"/>
+                <a16:creationId xmlns:a16="http://schemas.microsoft.com/office/drawing/2014/main" id="{81AEE26C-CD1C-4939-BF39-5001777D8AEB}"/>
               </a:ext>
             </a:extLst>
           </p:cNvPr>
@@ -4884,7 +4884,7 @@
     </p:spTree>
     <p:extLst>
       <p:ext uri="{BB962C8B-B14F-4D97-AF65-F5344CB8AC3E}">
-        <p14:creationId xmlns:p14="http://schemas.microsoft.com/office/powerpoint/2010/main" val="1441763343"/>
+        <p14:creationId xmlns:p14="http://schemas.microsoft.com/office/powerpoint/2010/main" val="1969791153"/>
       </p:ext>
     </p:extLst>
   </p:cSld>
@@ -4915,7 +4915,7 @@
           <p:cNvPr id="12" name="">
             <a:extLst xmlns:a="http://schemas.openxmlformats.org/drawingml/2006/main">
               <a:ext uri="{FF2B5EF4-FFF2-40B4-BE49-F238E27FC236}">
-                <a16:creationId xmlns:a16="http://schemas.microsoft.com/office/drawing/2014/main" id="{4CB293F1-2271-4BDB-B17C-D5B82D5F0194}"/>
+                <a16:creationId xmlns:a16="http://schemas.microsoft.com/office/drawing/2014/main" id="{D2EA8BD4-567E-42E6-8B21-0CCAEA123245}"/>
               </a:ext>
             </a:extLst>
           </p:cNvPr>
@@ -4972,7 +4972,7 @@
           <p:cNvPr id="2" name="">
             <a:extLst xmlns:a="http://schemas.openxmlformats.org/drawingml/2006/main">
               <a:ext uri="{FF2B5EF4-FFF2-40B4-BE49-F238E27FC236}">
-                <a16:creationId xmlns:a16="http://schemas.microsoft.com/office/drawing/2014/main" id="{A7DA66FC-8CD8-4FEF-B025-051E14A20247}"/>
+                <a16:creationId xmlns:a16="http://schemas.microsoft.com/office/drawing/2014/main" id="{1EE745EA-253C-422C-97CB-B7815CA79FD5}"/>
               </a:ext>
             </a:extLst>
           </p:cNvPr>
@@ -5029,7 +5029,7 @@
           <p:cNvPr id="3" name="">
             <a:extLst xmlns:a="http://schemas.openxmlformats.org/drawingml/2006/main">
               <a:ext uri="{FF2B5EF4-FFF2-40B4-BE49-F238E27FC236}">
-                <a16:creationId xmlns:a16="http://schemas.microsoft.com/office/drawing/2014/main" id="{9E9C4292-573F-4785-986F-09F2D5E84463}"/>
+                <a16:creationId xmlns:a16="http://schemas.microsoft.com/office/drawing/2014/main" id="{2D5F84BD-7FF1-4705-8C4D-02D9BF771D35}"/>
               </a:ext>
             </a:extLst>
           </p:cNvPr>
@@ -5086,7 +5086,7 @@
           <p:cNvPr id="4" name="">
             <a:extLst xmlns:a="http://schemas.openxmlformats.org/drawingml/2006/main">
               <a:ext uri="{FF2B5EF4-FFF2-40B4-BE49-F238E27FC236}">
-                <a16:creationId xmlns:a16="http://schemas.microsoft.com/office/drawing/2014/main" id="{697C47FD-2169-44C9-A15E-16A426E76F8C}"/>
+                <a16:creationId xmlns:a16="http://schemas.microsoft.com/office/drawing/2014/main" id="{4E1FA940-A8DE-4AC7-BB31-725533C90577}"/>
               </a:ext>
             </a:extLst>
           </p:cNvPr>
@@ -5166,7 +5166,7 @@
           <p:cNvPr id="5" name="">
             <a:extLst xmlns:a="http://schemas.openxmlformats.org/drawingml/2006/main">
               <a:ext uri="{FF2B5EF4-FFF2-40B4-BE49-F238E27FC236}">
-                <a16:creationId xmlns:a16="http://schemas.microsoft.com/office/drawing/2014/main" id="{E349854A-4A33-4A90-AEAA-B900834D5637}"/>
+                <a16:creationId xmlns:a16="http://schemas.microsoft.com/office/drawing/2014/main" id="{7930EE56-988B-4564-884E-DBC4AB7032FD}"/>
               </a:ext>
             </a:extLst>
           </p:cNvPr>
@@ -5246,7 +5246,7 @@
           <p:cNvPr id="6" name="">
             <a:extLst xmlns:a="http://schemas.openxmlformats.org/drawingml/2006/main">
               <a:ext uri="{FF2B5EF4-FFF2-40B4-BE49-F238E27FC236}">
-                <a16:creationId xmlns:a16="http://schemas.microsoft.com/office/drawing/2014/main" id="{D926CC53-1725-4049-AC2F-896332E3F44B}"/>
+                <a16:creationId xmlns:a16="http://schemas.microsoft.com/office/drawing/2014/main" id="{5E1314FF-6E04-417B-B2B9-9DBE59EA7130}"/>
               </a:ext>
             </a:extLst>
           </p:cNvPr>
@@ -5275,7 +5275,7 @@
           <p:cNvPr id="7" name="">
             <a:extLst xmlns:a="http://schemas.openxmlformats.org/drawingml/2006/main">
               <a:ext uri="{FF2B5EF4-FFF2-40B4-BE49-F238E27FC236}">
-                <a16:creationId xmlns:a16="http://schemas.microsoft.com/office/drawing/2014/main" id="{F8451A83-6FF2-4FF3-A21F-87738FF6704E}"/>
+                <a16:creationId xmlns:a16="http://schemas.microsoft.com/office/drawing/2014/main" id="{CC4F0B82-946A-4EE2-AE29-C0DCE4AD2FDD}"/>
               </a:ext>
             </a:extLst>
           </p:cNvPr>
@@ -5355,7 +5355,7 @@
           <p:cNvPr id="8" name="">
             <a:extLst xmlns:a="http://schemas.openxmlformats.org/drawingml/2006/main">
               <a:ext uri="{FF2B5EF4-FFF2-40B4-BE49-F238E27FC236}">
-                <a16:creationId xmlns:a16="http://schemas.microsoft.com/office/drawing/2014/main" id="{27AE159F-C68B-440B-962A-8A4D2A6A01CA}"/>
+                <a16:creationId xmlns:a16="http://schemas.microsoft.com/office/drawing/2014/main" id="{240F2441-A8B9-4EC8-A6D9-5FD1406CB6A8}"/>
               </a:ext>
             </a:extLst>
           </p:cNvPr>
@@ -5435,7 +5435,7 @@
           <p:cNvPr id="9" name="">
             <a:extLst xmlns:a="http://schemas.openxmlformats.org/drawingml/2006/main">
               <a:ext uri="{FF2B5EF4-FFF2-40B4-BE49-F238E27FC236}">
-                <a16:creationId xmlns:a16="http://schemas.microsoft.com/office/drawing/2014/main" id="{73A01B1C-517C-42B7-BCA9-7E0F7C4A35FE}"/>
+                <a16:creationId xmlns:a16="http://schemas.microsoft.com/office/drawing/2014/main" id="{2D016587-C6EC-49F3-9637-80C59F73BAEC}"/>
               </a:ext>
             </a:extLst>
           </p:cNvPr>
@@ -5464,7 +5464,7 @@
           <p:cNvPr id="10" name="">
             <a:extLst xmlns:a="http://schemas.openxmlformats.org/drawingml/2006/main">
               <a:ext uri="{FF2B5EF4-FFF2-40B4-BE49-F238E27FC236}">
-                <a16:creationId xmlns:a16="http://schemas.microsoft.com/office/drawing/2014/main" id="{E21AC423-B99D-43E5-B11D-89F9D9BD3CA9}"/>
+                <a16:creationId xmlns:a16="http://schemas.microsoft.com/office/drawing/2014/main" id="{51C1D718-297A-4983-857E-1F06CBED013B}"/>
               </a:ext>
             </a:extLst>
           </p:cNvPr>
@@ -5544,7 +5544,7 @@
           <p:cNvPr id="11" name="">
             <a:extLst xmlns:a="http://schemas.openxmlformats.org/drawingml/2006/main">
               <a:ext uri="{FF2B5EF4-FFF2-40B4-BE49-F238E27FC236}">
-                <a16:creationId xmlns:a16="http://schemas.microsoft.com/office/drawing/2014/main" id="{FE3FBC30-1B00-490A-B6EB-5A0B6F16221E}"/>
+                <a16:creationId xmlns:a16="http://schemas.microsoft.com/office/drawing/2014/main" id="{56D42D15-2713-4648-B87C-EB6D27CC9FD3}"/>
               </a:ext>
             </a:extLst>
           </p:cNvPr>
@@ -5622,7 +5622,7 @@
     </p:spTree>
     <p:extLst>
       <p:ext uri="{BB962C8B-B14F-4D97-AF65-F5344CB8AC3E}">
-        <p14:creationId xmlns:p14="http://schemas.microsoft.com/office/powerpoint/2010/main" val="1699217620"/>
+        <p14:creationId xmlns:p14="http://schemas.microsoft.com/office/powerpoint/2010/main" val="1605068816"/>
       </p:ext>
     </p:extLst>
   </p:cSld>
@@ -5653,7 +5653,7 @@
           <p:cNvPr id="13" name="">
             <a:extLst xmlns:a="http://schemas.openxmlformats.org/drawingml/2006/main">
               <a:ext uri="{FF2B5EF4-FFF2-40B4-BE49-F238E27FC236}">
-                <a16:creationId xmlns:a16="http://schemas.microsoft.com/office/drawing/2014/main" id="{96EBAD5A-7AC4-42AC-958A-2B591CCB573F}"/>
+                <a16:creationId xmlns:a16="http://schemas.microsoft.com/office/drawing/2014/main" id="{FFFEEA99-7895-493F-82FF-602E7F1DEF83}"/>
               </a:ext>
             </a:extLst>
           </p:cNvPr>
@@ -5710,7 +5710,7 @@
           <p:cNvPr id="2" name="">
             <a:extLst xmlns:a="http://schemas.openxmlformats.org/drawingml/2006/main">
               <a:ext uri="{FF2B5EF4-FFF2-40B4-BE49-F238E27FC236}">
-                <a16:creationId xmlns:a16="http://schemas.microsoft.com/office/drawing/2014/main" id="{5E6E1D15-BE57-4CDB-A574-51E23AA2D977}"/>
+                <a16:creationId xmlns:a16="http://schemas.microsoft.com/office/drawing/2014/main" id="{9DC8F077-CB97-4C17-AC00-7D575BB4C680}"/>
               </a:ext>
             </a:extLst>
           </p:cNvPr>
@@ -5767,7 +5767,7 @@
           <p:cNvPr id="3" name="">
             <a:extLst xmlns:a="http://schemas.openxmlformats.org/drawingml/2006/main">
               <a:ext uri="{FF2B5EF4-FFF2-40B4-BE49-F238E27FC236}">
-                <a16:creationId xmlns:a16="http://schemas.microsoft.com/office/drawing/2014/main" id="{EE867CA5-B1B4-481C-8FC7-92678305ACC4}"/>
+                <a16:creationId xmlns:a16="http://schemas.microsoft.com/office/drawing/2014/main" id="{E8F199D6-06F7-455C-8D60-19022D34296B}"/>
               </a:ext>
             </a:extLst>
           </p:cNvPr>
@@ -5824,7 +5824,7 @@
           <p:cNvPr id="4" name="">
             <a:extLst xmlns:a="http://schemas.openxmlformats.org/drawingml/2006/main">
               <a:ext uri="{FF2B5EF4-FFF2-40B4-BE49-F238E27FC236}">
-                <a16:creationId xmlns:a16="http://schemas.microsoft.com/office/drawing/2014/main" id="{143EDC5C-D4A5-44E1-9A14-4D487B9AF519}"/>
+                <a16:creationId xmlns:a16="http://schemas.microsoft.com/office/drawing/2014/main" id="{53E6BE25-2195-4D2D-BC20-96E59029AD6F}"/>
               </a:ext>
             </a:extLst>
           </p:cNvPr>
@@ -5881,7 +5881,7 @@
           <p:cNvPr id="5" name="">
             <a:extLst xmlns:a="http://schemas.openxmlformats.org/drawingml/2006/main">
               <a:ext uri="{FF2B5EF4-FFF2-40B4-BE49-F238E27FC236}">
-                <a16:creationId xmlns:a16="http://schemas.microsoft.com/office/drawing/2014/main" id="{2AE16F40-45D8-4EAE-AC7D-49155562D809}"/>
+                <a16:creationId xmlns:a16="http://schemas.microsoft.com/office/drawing/2014/main" id="{BAF2C263-4C1E-4FAF-8065-852797ED03C2}"/>
               </a:ext>
             </a:extLst>
           </p:cNvPr>
@@ -5938,7 +5938,7 @@
           <p:cNvPr id="6" name="">
             <a:extLst xmlns:a="http://schemas.openxmlformats.org/drawingml/2006/main">
               <a:ext uri="{FF2B5EF4-FFF2-40B4-BE49-F238E27FC236}">
-                <a16:creationId xmlns:a16="http://schemas.microsoft.com/office/drawing/2014/main" id="{1A87ED3A-7D97-4FE6-88F3-5BD5055C485E}"/>
+                <a16:creationId xmlns:a16="http://schemas.microsoft.com/office/drawing/2014/main" id="{D511355A-654B-41DA-8F42-A46D1EFB3318}"/>
               </a:ext>
             </a:extLst>
           </p:cNvPr>
@@ -6579,7 +6579,7 @@
           <p:cNvPr id="9" name="">
             <a:extLst xmlns:a="http://schemas.openxmlformats.org/drawingml/2006/main">
               <a:ext uri="{FF2B5EF4-FFF2-40B4-BE49-F238E27FC236}">
-                <a16:creationId xmlns:a16="http://schemas.microsoft.com/office/drawing/2014/main" id="{450BE7C0-BC1F-4E36-8246-28C193B308EE}"/>
+                <a16:creationId xmlns:a16="http://schemas.microsoft.com/office/drawing/2014/main" id="{588C2C4E-09BE-4CF7-BD35-F4423CCC1F8F}"/>
               </a:ext>
             </a:extLst>
           </p:cNvPr>
@@ -6608,7 +6608,7 @@
           <p:cNvPr id="10" name="">
             <a:extLst xmlns:a="http://schemas.openxmlformats.org/drawingml/2006/main">
               <a:ext uri="{FF2B5EF4-FFF2-40B4-BE49-F238E27FC236}">
-                <a16:creationId xmlns:a16="http://schemas.microsoft.com/office/drawing/2014/main" id="{45E4AB8B-C8D5-44BE-B8AF-2FF66400E12B}"/>
+                <a16:creationId xmlns:a16="http://schemas.microsoft.com/office/drawing/2014/main" id="{53569A82-3E21-4090-B39A-C00992A0C432}"/>
               </a:ext>
             </a:extLst>
           </p:cNvPr>
@@ -6665,7 +6665,7 @@
           <p:cNvPr id="11" name="">
             <a:extLst xmlns:a="http://schemas.openxmlformats.org/drawingml/2006/main">
               <a:ext uri="{FF2B5EF4-FFF2-40B4-BE49-F238E27FC236}">
-                <a16:creationId xmlns:a16="http://schemas.microsoft.com/office/drawing/2014/main" id="{C27A4426-E489-47D0-BDC7-11A774C4B281}"/>
+                <a16:creationId xmlns:a16="http://schemas.microsoft.com/office/drawing/2014/main" id="{44CF6F7B-55CA-4EA2-AB82-C8C924E7B6BE}"/>
               </a:ext>
             </a:extLst>
           </p:cNvPr>
@@ -6722,7 +6722,7 @@
           <p:cNvPr id="12" name="">
             <a:extLst xmlns:a="http://schemas.openxmlformats.org/drawingml/2006/main">
               <a:ext uri="{FF2B5EF4-FFF2-40B4-BE49-F238E27FC236}">
-                <a16:creationId xmlns:a16="http://schemas.microsoft.com/office/drawing/2014/main" id="{6AA7A7C0-05F1-4916-9BF2-F4C3A0CAA872}"/>
+                <a16:creationId xmlns:a16="http://schemas.microsoft.com/office/drawing/2014/main" id="{D3FB9634-0DAC-4D08-AA89-A2FD0E6B0BB3}"/>
               </a:ext>
             </a:extLst>
           </p:cNvPr>
@@ -6808,7 +6808,7 @@
     </p:spTree>
     <p:extLst>
       <p:ext uri="{BB962C8B-B14F-4D97-AF65-F5344CB8AC3E}">
-        <p14:creationId xmlns:p14="http://schemas.microsoft.com/office/powerpoint/2010/main" val="1680210600"/>
+        <p14:creationId xmlns:p14="http://schemas.microsoft.com/office/powerpoint/2010/main" val="236602185"/>
       </p:ext>
     </p:extLst>
   </p:cSld>
@@ -6839,7 +6839,7 @@
           <p:cNvPr id="7" name="">
             <a:extLst xmlns:a="http://schemas.openxmlformats.org/drawingml/2006/main">
               <a:ext uri="{FF2B5EF4-FFF2-40B4-BE49-F238E27FC236}">
-                <a16:creationId xmlns:a16="http://schemas.microsoft.com/office/drawing/2014/main" id="{0B503235-E3A0-4F4F-B7EB-EF1D63287BF3}"/>
+                <a16:creationId xmlns:a16="http://schemas.microsoft.com/office/drawing/2014/main" id="{40CC7029-DBD2-4BD1-8F4E-DAFB09B04863}"/>
               </a:ext>
             </a:extLst>
           </p:cNvPr>
@@ -6896,7 +6896,7 @@
           <p:cNvPr id="2" name="">
             <a:extLst xmlns:a="http://schemas.openxmlformats.org/drawingml/2006/main">
               <a:ext uri="{FF2B5EF4-FFF2-40B4-BE49-F238E27FC236}">
-                <a16:creationId xmlns:a16="http://schemas.microsoft.com/office/drawing/2014/main" id="{AD82C2FC-2873-42D7-969E-F9D9D682366F}"/>
+                <a16:creationId xmlns:a16="http://schemas.microsoft.com/office/drawing/2014/main" id="{A66AF794-AF5D-4C8D-A9FF-9BDFDC5A7E68}"/>
               </a:ext>
             </a:extLst>
           </p:cNvPr>
@@ -6953,7 +6953,7 @@
           <p:cNvPr id="3" name="">
             <a:extLst xmlns:a="http://schemas.openxmlformats.org/drawingml/2006/main">
               <a:ext uri="{FF2B5EF4-FFF2-40B4-BE49-F238E27FC236}">
-                <a16:creationId xmlns:a16="http://schemas.microsoft.com/office/drawing/2014/main" id="{ABEB3D62-F89A-4577-BB45-F20603D0F3F0}"/>
+                <a16:creationId xmlns:a16="http://schemas.microsoft.com/office/drawing/2014/main" id="{1271DA19-0206-4445-BAAF-AF64750E6DB9}"/>
               </a:ext>
             </a:extLst>
           </p:cNvPr>
@@ -7010,7 +7010,7 @@
           <p:cNvPr id="4" name="">
             <a:extLst xmlns:a="http://schemas.openxmlformats.org/drawingml/2006/main">
               <a:ext uri="{FF2B5EF4-FFF2-40B4-BE49-F238E27FC236}">
-                <a16:creationId xmlns:a16="http://schemas.microsoft.com/office/drawing/2014/main" id="{F289C4D6-6BD2-4A4C-AB7C-3384BFB5454C}"/>
+                <a16:creationId xmlns:a16="http://schemas.microsoft.com/office/drawing/2014/main" id="{B3943C6D-ACF7-43F6-AC3A-7E789F520419}"/>
               </a:ext>
             </a:extLst>
           </p:cNvPr>
@@ -7490,7 +7490,7 @@
           <p:cNvPr id="6" name="">
             <a:extLst xmlns:a="http://schemas.openxmlformats.org/drawingml/2006/main">
               <a:ext uri="{FF2B5EF4-FFF2-40B4-BE49-F238E27FC236}">
-                <a16:creationId xmlns:a16="http://schemas.microsoft.com/office/drawing/2014/main" id="{19864617-E989-4DD4-8A87-03D47171BA93}"/>
+                <a16:creationId xmlns:a16="http://schemas.microsoft.com/office/drawing/2014/main" id="{65C8D265-FF69-4251-8FAC-327D61325784}"/>
               </a:ext>
             </a:extLst>
           </p:cNvPr>
@@ -7545,7 +7545,7 @@
     </p:spTree>
     <p:extLst>
       <p:ext uri="{BB962C8B-B14F-4D97-AF65-F5344CB8AC3E}">
-        <p14:creationId xmlns:p14="http://schemas.microsoft.com/office/powerpoint/2010/main" val="701418320"/>
+        <p14:creationId xmlns:p14="http://schemas.microsoft.com/office/powerpoint/2010/main" val="1234190895"/>
       </p:ext>
     </p:extLst>
   </p:cSld>
@@ -7576,7 +7576,7 @@
           <p:cNvPr id="11" name="">
             <a:extLst xmlns:a="http://schemas.openxmlformats.org/drawingml/2006/main">
               <a:ext uri="{FF2B5EF4-FFF2-40B4-BE49-F238E27FC236}">
-                <a16:creationId xmlns:a16="http://schemas.microsoft.com/office/drawing/2014/main" id="{94596A69-3FF9-4DF3-8926-D69B69A670B5}"/>
+                <a16:creationId xmlns:a16="http://schemas.microsoft.com/office/drawing/2014/main" id="{78EBFF8C-0834-42BA-B300-F390843BDF2B}"/>
               </a:ext>
             </a:extLst>
           </p:cNvPr>
@@ -7633,7 +7633,7 @@
           <p:cNvPr id="2" name="">
             <a:extLst xmlns:a="http://schemas.openxmlformats.org/drawingml/2006/main">
               <a:ext uri="{FF2B5EF4-FFF2-40B4-BE49-F238E27FC236}">
-                <a16:creationId xmlns:a16="http://schemas.microsoft.com/office/drawing/2014/main" id="{A6FC6155-AA4C-42DC-A2ED-0C42BDBE360C}"/>
+                <a16:creationId xmlns:a16="http://schemas.microsoft.com/office/drawing/2014/main" id="{53BBC085-BA2A-4D9D-BA07-47E350E56883}"/>
               </a:ext>
             </a:extLst>
           </p:cNvPr>
@@ -7690,7 +7690,7 @@
           <p:cNvPr id="3" name="">
             <a:extLst xmlns:a="http://schemas.openxmlformats.org/drawingml/2006/main">
               <a:ext uri="{FF2B5EF4-FFF2-40B4-BE49-F238E27FC236}">
-                <a16:creationId xmlns:a16="http://schemas.microsoft.com/office/drawing/2014/main" id="{2C830EA4-CAE0-41B7-A70A-C0FA37B771CD}"/>
+                <a16:creationId xmlns:a16="http://schemas.microsoft.com/office/drawing/2014/main" id="{760C0861-B6EF-4E1C-A108-AD67D84D83E0}"/>
               </a:ext>
             </a:extLst>
           </p:cNvPr>
@@ -7747,7 +7747,7 @@
           <p:cNvPr id="4" name="">
             <a:extLst xmlns:a="http://schemas.openxmlformats.org/drawingml/2006/main">
               <a:ext uri="{FF2B5EF4-FFF2-40B4-BE49-F238E27FC236}">
-                <a16:creationId xmlns:a16="http://schemas.microsoft.com/office/drawing/2014/main" id="{C8E6217F-7CB8-4753-BE71-448433FD2C1E}"/>
+                <a16:creationId xmlns:a16="http://schemas.microsoft.com/office/drawing/2014/main" id="{B5EDFDBA-3564-4A63-8C00-1DE1BFCB1869}"/>
               </a:ext>
             </a:extLst>
           </p:cNvPr>
@@ -7804,7 +7804,7 @@
           <p:cNvPr id="5" name="">
             <a:extLst xmlns:a="http://schemas.openxmlformats.org/drawingml/2006/main">
               <a:ext uri="{FF2B5EF4-FFF2-40B4-BE49-F238E27FC236}">
-                <a16:creationId xmlns:a16="http://schemas.microsoft.com/office/drawing/2014/main" id="{86B4DB6D-2E56-44E8-AF9F-5B0934BB2F3B}"/>
+                <a16:creationId xmlns:a16="http://schemas.microsoft.com/office/drawing/2014/main" id="{041C30C9-716D-477C-A244-18084488CBD1}"/>
               </a:ext>
             </a:extLst>
           </p:cNvPr>
@@ -7861,7 +7861,7 @@
           <p:cNvPr id="6" name="">
             <a:extLst xmlns:a="http://schemas.openxmlformats.org/drawingml/2006/main">
               <a:ext uri="{FF2B5EF4-FFF2-40B4-BE49-F238E27FC236}">
-                <a16:creationId xmlns:a16="http://schemas.microsoft.com/office/drawing/2014/main" id="{71B56ADA-D9B9-417C-B1F0-4E05B66445DC}"/>
+                <a16:creationId xmlns:a16="http://schemas.microsoft.com/office/drawing/2014/main" id="{20E69EE8-F983-4063-AAF0-7A66514103AA}"/>
               </a:ext>
             </a:extLst>
           </p:cNvPr>
@@ -7918,7 +7918,7 @@
           <p:cNvPr id="7" name="">
             <a:extLst xmlns:a="http://schemas.openxmlformats.org/drawingml/2006/main">
               <a:ext uri="{FF2B5EF4-FFF2-40B4-BE49-F238E27FC236}">
-                <a16:creationId xmlns:a16="http://schemas.microsoft.com/office/drawing/2014/main" id="{658152AF-8711-40A0-A848-74F6545182D2}"/>
+                <a16:creationId xmlns:a16="http://schemas.microsoft.com/office/drawing/2014/main" id="{D3F714A9-1B3D-401C-944A-BCD59409CD28}"/>
               </a:ext>
             </a:extLst>
           </p:cNvPr>
@@ -8033,7 +8033,7 @@
           <p:cNvPr id="8" name="">
             <a:extLst xmlns:a="http://schemas.openxmlformats.org/drawingml/2006/main">
               <a:ext uri="{FF2B5EF4-FFF2-40B4-BE49-F238E27FC236}">
-                <a16:creationId xmlns:a16="http://schemas.microsoft.com/office/drawing/2014/main" id="{7A0DD812-9C65-4A35-B898-F8C8D4596C28}"/>
+                <a16:creationId xmlns:a16="http://schemas.microsoft.com/office/drawing/2014/main" id="{07571F6C-10AA-4653-9B64-16799E8458FB}"/>
               </a:ext>
             </a:extLst>
           </p:cNvPr>
@@ -8090,7 +8090,7 @@
           <p:cNvPr id="9" name="">
             <a:extLst xmlns:a="http://schemas.openxmlformats.org/drawingml/2006/main">
               <a:ext uri="{FF2B5EF4-FFF2-40B4-BE49-F238E27FC236}">
-                <a16:creationId xmlns:a16="http://schemas.microsoft.com/office/drawing/2014/main" id="{46ACDAAE-B004-4174-A7D0-508A49CA648D}"/>
+                <a16:creationId xmlns:a16="http://schemas.microsoft.com/office/drawing/2014/main" id="{A3E4AF80-47EB-493E-9C43-CD8A537326F7}"/>
               </a:ext>
             </a:extLst>
           </p:cNvPr>
@@ -8147,7 +8147,7 @@
           <p:cNvPr id="10" name="">
             <a:extLst xmlns:a="http://schemas.openxmlformats.org/drawingml/2006/main">
               <a:ext uri="{FF2B5EF4-FFF2-40B4-BE49-F238E27FC236}">
-                <a16:creationId xmlns:a16="http://schemas.microsoft.com/office/drawing/2014/main" id="{63E3917B-75CE-45B5-8E28-4E37EF43B452}"/>
+                <a16:creationId xmlns:a16="http://schemas.microsoft.com/office/drawing/2014/main" id="{84BF9274-2889-4216-8431-552A365E4EE5}"/>
               </a:ext>
             </a:extLst>
           </p:cNvPr>
@@ -8260,7 +8260,7 @@
     </p:spTree>
     <p:extLst>
       <p:ext uri="{BB962C8B-B14F-4D97-AF65-F5344CB8AC3E}">
-        <p14:creationId xmlns:p14="http://schemas.microsoft.com/office/powerpoint/2010/main" val="1579420710"/>
+        <p14:creationId xmlns:p14="http://schemas.microsoft.com/office/powerpoint/2010/main" val="1957838437"/>
       </p:ext>
     </p:extLst>
   </p:cSld>
@@ -8291,7 +8291,7 @@
           <p:cNvPr id="5" name="">
             <a:extLst xmlns:a="http://schemas.openxmlformats.org/drawingml/2006/main">
               <a:ext uri="{FF2B5EF4-FFF2-40B4-BE49-F238E27FC236}">
-                <a16:creationId xmlns:a16="http://schemas.microsoft.com/office/drawing/2014/main" id="{BACD7049-9214-45FF-AC0A-0C033403621C}"/>
+                <a16:creationId xmlns:a16="http://schemas.microsoft.com/office/drawing/2014/main" id="{E66EDA1E-EDDF-4B16-AFEA-5EF77DCE7906}"/>
               </a:ext>
             </a:extLst>
           </p:cNvPr>
@@ -8348,7 +8348,7 @@
           <p:cNvPr id="2" name="">
             <a:extLst xmlns:a="http://schemas.openxmlformats.org/drawingml/2006/main">
               <a:ext uri="{FF2B5EF4-FFF2-40B4-BE49-F238E27FC236}">
-                <a16:creationId xmlns:a16="http://schemas.microsoft.com/office/drawing/2014/main" id="{CF40F072-C767-4E58-8A1C-96A48C3B7917}"/>
+                <a16:creationId xmlns:a16="http://schemas.microsoft.com/office/drawing/2014/main" id="{87E28662-F24A-4C4E-AADC-51C1F7C3E527}"/>
               </a:ext>
             </a:extLst>
           </p:cNvPr>
@@ -8405,7 +8405,7 @@
           <p:cNvPr id="3" name="">
             <a:extLst xmlns:a="http://schemas.openxmlformats.org/drawingml/2006/main">
               <a:ext uri="{FF2B5EF4-FFF2-40B4-BE49-F238E27FC236}">
-                <a16:creationId xmlns:a16="http://schemas.microsoft.com/office/drawing/2014/main" id="{847D6A82-ED39-44DE-8A2E-697A95D9B9EE}"/>
+                <a16:creationId xmlns:a16="http://schemas.microsoft.com/office/drawing/2014/main" id="{E3498D4E-79A7-4E97-AE3F-8460403EDB79}"/>
               </a:ext>
             </a:extLst>
           </p:cNvPr>
@@ -8752,7 +8752,7 @@
     </p:spTree>
     <p:extLst>
       <p:ext uri="{BB962C8B-B14F-4D97-AF65-F5344CB8AC3E}">
-        <p14:creationId xmlns:p14="http://schemas.microsoft.com/office/powerpoint/2010/main" val="725308089"/>
+        <p14:creationId xmlns:p14="http://schemas.microsoft.com/office/powerpoint/2010/main" val="1311100645"/>
       </p:ext>
     </p:extLst>
   </p:cSld>
@@ -8783,7 +8783,7 @@
           <p:cNvPr id="11" name="">
             <a:extLst xmlns:a="http://schemas.openxmlformats.org/drawingml/2006/main">
               <a:ext uri="{FF2B5EF4-FFF2-40B4-BE49-F238E27FC236}">
-                <a16:creationId xmlns:a16="http://schemas.microsoft.com/office/drawing/2014/main" id="{83EBDC0A-4E2B-4B15-BB67-D661660D3137}"/>
+                <a16:creationId xmlns:a16="http://schemas.microsoft.com/office/drawing/2014/main" id="{B56EC34A-E9FC-40BA-8771-D6C8C48BC30B}"/>
               </a:ext>
             </a:extLst>
           </p:cNvPr>
@@ -8840,7 +8840,7 @@
           <p:cNvPr id="2" name="">
             <a:extLst xmlns:a="http://schemas.openxmlformats.org/drawingml/2006/main">
               <a:ext uri="{FF2B5EF4-FFF2-40B4-BE49-F238E27FC236}">
-                <a16:creationId xmlns:a16="http://schemas.microsoft.com/office/drawing/2014/main" id="{009655F9-C97F-4EB7-9639-44EF32AA7F52}"/>
+                <a16:creationId xmlns:a16="http://schemas.microsoft.com/office/drawing/2014/main" id="{C30DA7C5-1BC6-4E16-8142-28AF8DAB5600}"/>
               </a:ext>
             </a:extLst>
           </p:cNvPr>
@@ -8897,7 +8897,7 @@
           <p:cNvPr id="3" name="">
             <a:extLst xmlns:a="http://schemas.openxmlformats.org/drawingml/2006/main">
               <a:ext uri="{FF2B5EF4-FFF2-40B4-BE49-F238E27FC236}">
-                <a16:creationId xmlns:a16="http://schemas.microsoft.com/office/drawing/2014/main" id="{F0B3F083-4BFB-4DB4-BF97-81B0B829F88C}"/>
+                <a16:creationId xmlns:a16="http://schemas.microsoft.com/office/drawing/2014/main" id="{9FF541F2-F367-4B39-BB7F-A8FEBA119818}"/>
               </a:ext>
             </a:extLst>
           </p:cNvPr>
@@ -8954,7 +8954,7 @@
           <p:cNvPr id="4" name="">
             <a:extLst xmlns:a="http://schemas.openxmlformats.org/drawingml/2006/main">
               <a:ext uri="{FF2B5EF4-FFF2-40B4-BE49-F238E27FC236}">
-                <a16:creationId xmlns:a16="http://schemas.microsoft.com/office/drawing/2014/main" id="{29C76656-63ED-493E-9EDB-817AF0C68F57}"/>
+                <a16:creationId xmlns:a16="http://schemas.microsoft.com/office/drawing/2014/main" id="{24E7D227-A067-4EF1-80C9-203094F68EDD}"/>
               </a:ext>
             </a:extLst>
           </p:cNvPr>
@@ -9042,7 +9042,7 @@
           <p:cNvPr id="5" name="">
             <a:extLst xmlns:a="http://schemas.openxmlformats.org/drawingml/2006/main">
               <a:ext uri="{FF2B5EF4-FFF2-40B4-BE49-F238E27FC236}">
-                <a16:creationId xmlns:a16="http://schemas.microsoft.com/office/drawing/2014/main" id="{C531D12D-8DAA-4FA7-A856-63CE44766DBF}"/>
+                <a16:creationId xmlns:a16="http://schemas.microsoft.com/office/drawing/2014/main" id="{978D17B2-0AE0-422F-A42E-1F25CD1EF473}"/>
               </a:ext>
             </a:extLst>
           </p:cNvPr>
@@ -9126,7 +9126,7 @@
           <p:cNvPr id="6" name="">
             <a:extLst xmlns:a="http://schemas.openxmlformats.org/drawingml/2006/main">
               <a:ext uri="{FF2B5EF4-FFF2-40B4-BE49-F238E27FC236}">
-                <a16:creationId xmlns:a16="http://schemas.microsoft.com/office/drawing/2014/main" id="{291D677B-532B-44D7-9373-49595D2302C1}"/>
+                <a16:creationId xmlns:a16="http://schemas.microsoft.com/office/drawing/2014/main" id="{0B69B962-E85B-458A-AE49-512F74500A26}"/>
               </a:ext>
             </a:extLst>
           </p:cNvPr>
@@ -9210,7 +9210,7 @@
           <p:cNvPr id="7" name="">
             <a:extLst xmlns:a="http://schemas.openxmlformats.org/drawingml/2006/main">
               <a:ext uri="{FF2B5EF4-FFF2-40B4-BE49-F238E27FC236}">
-                <a16:creationId xmlns:a16="http://schemas.microsoft.com/office/drawing/2014/main" id="{02AB2353-F00E-407F-8EDA-053B4F905BFE}"/>
+                <a16:creationId xmlns:a16="http://schemas.microsoft.com/office/drawing/2014/main" id="{F85FE899-28F4-4E79-A455-98A1CFFDB8DA}"/>
               </a:ext>
             </a:extLst>
           </p:cNvPr>
@@ -9350,7 +9350,7 @@
           <p:cNvPr id="10" name="">
             <a:extLst xmlns:a="http://schemas.openxmlformats.org/drawingml/2006/main">
               <a:ext uri="{FF2B5EF4-FFF2-40B4-BE49-F238E27FC236}">
-                <a16:creationId xmlns:a16="http://schemas.microsoft.com/office/drawing/2014/main" id="{29DFE84E-76F6-4DD7-A13D-C0AE3C87BED7}"/>
+                <a16:creationId xmlns:a16="http://schemas.microsoft.com/office/drawing/2014/main" id="{A1EA4F0F-2865-4F53-A0D6-2212A1E31176}"/>
               </a:ext>
             </a:extLst>
           </p:cNvPr>
@@ -9483,7 +9483,7 @@
     </p:spTree>
     <p:extLst>
       <p:ext uri="{BB962C8B-B14F-4D97-AF65-F5344CB8AC3E}">
-        <p14:creationId xmlns:p14="http://schemas.microsoft.com/office/powerpoint/2010/main" val="1036492177"/>
+        <p14:creationId xmlns:p14="http://schemas.microsoft.com/office/powerpoint/2010/main" val="1115869935"/>
       </p:ext>
     </p:extLst>
   </p:cSld>

--- a/presentation/unos_kidney_biopsy.pptx
+++ b/presentation/unos_kidney_biopsy.pptx
@@ -3346,7 +3346,7 @@
                 <a:ea typeface="Arial"/>
                 <a:cs typeface="Arial"/>
               </a:rPr>
-              <a:t>Software Engineering Demo</a:t>
+              <a:t>Project walkthrough</a:t>
             </a:r>
           </a:p>
         </p:txBody>

--- a/presentation/unos_kidney_biopsy.pptx
+++ b/presentation/unos_kidney_biopsy.pptx
@@ -2,23 +2,23 @@
 <file path=ppt/presentation.xml><?xml version="1.0" encoding="utf-8"?>
 <p:presentation xmlns:p="http://schemas.openxmlformats.org/presentationml/2006/main" xmlns:r="http://schemas.openxmlformats.org/officeDocument/2006/relationships">
   <p:sldMasterIdLst>
-    <p:sldMasterId id="2147483648" r:id="Rf66096a0ca224ace"/>
+    <p:sldMasterId id="2147483648" r:id="R223b3d1551fb458e"/>
   </p:sldMasterIdLst>
   <p:sldIdLst>
-    <p:sldId id="256" r:id="R929541006fc24323"/>
-    <p:sldId id="257" r:id="R2308b4464e3c4e1a"/>
-    <p:sldId id="258" r:id="R201bcbad29c846be"/>
-    <p:sldId id="259" r:id="R1bb58af00cbd417d"/>
-    <p:sldId id="260" r:id="Rd9d67569632d49d9"/>
-    <p:sldId id="261" r:id="Rcc4d16d8b1c2481c"/>
-    <p:sldId id="262" r:id="Ra8f975ce5fa1491e"/>
-    <p:sldId id="263" r:id="R6d4dc4deb0b64c6a"/>
-    <p:sldId id="264" r:id="Rb6d568d672f34e11"/>
-    <p:sldId id="265" r:id="R1cf8861be31d4378"/>
-    <p:sldId id="266" r:id="R97a7dbaedb524ab1"/>
-    <p:sldId id="267" r:id="R362554e70bdc4c83"/>
-    <p:sldId id="268" r:id="R960bdb4507324ca4"/>
-    <p:sldId id="269" r:id="R5e88523445fb41fb"/>
+    <p:sldId id="256" r:id="R26b9c642ec2b44b0"/>
+    <p:sldId id="257" r:id="R2df6f29c10d243d2"/>
+    <p:sldId id="258" r:id="Rb88705bb3eed4fc4"/>
+    <p:sldId id="259" r:id="R49555f813d4d43b7"/>
+    <p:sldId id="260" r:id="Rdeb095eec77044ed"/>
+    <p:sldId id="261" r:id="R8ed3e188531a49af"/>
+    <p:sldId id="262" r:id="R604ebb13927242dc"/>
+    <p:sldId id="263" r:id="Rb48c3bd1588c47dc"/>
+    <p:sldId id="264" r:id="R531b9980dfb14724"/>
+    <p:sldId id="265" r:id="R9e95bab0a2ba467f"/>
+    <p:sldId id="266" r:id="Rf12f23cfa0a143af"/>
+    <p:sldId id="267" r:id="Rfbfce958f36643df"/>
+    <p:sldId id="268" r:id="R1e29edb8ef5e40f9"/>
+    <p:sldId id="269" r:id="R7d1d62e4045b46ea"/>
   </p:sldIdLst>
   <p:sldSz cx="12192000" cy="6858000"/>
   <p:notesSz cx="6858000" cy="9144000"/>
@@ -63,7 +63,7 @@
   </p:cSld>
   <p:clrMap bg1="lt1" tx1="dk1" bg2="lt2" tx2="dk2" accent1="accent1" accent2="accent2" accent3="accent3" accent4="accent4" accent5="accent5" accent6="accent6" hlink="hlink" folHlink="folHlink"/>
   <p:sldLayoutIdLst>
-    <p:sldLayoutId xmlns:r="http://schemas.openxmlformats.org/officeDocument/2006/relationships" id="2147483649" r:id="Rcd76588cdc9b4739"/>
+    <p:sldLayoutId xmlns:r="http://schemas.openxmlformats.org/officeDocument/2006/relationships" id="2147483649" r:id="R3bc950443ebf492a"/>
   </p:sldLayoutIdLst>
   <p:txStyles>
     <p:titleStyle>
@@ -851,7 +851,7 @@
           <p:cNvPr id="2" name="">
             <a:extLst xmlns:a="http://schemas.openxmlformats.org/drawingml/2006/main">
               <a:ext uri="{FF2B5EF4-FFF2-40B4-BE49-F238E27FC236}">
-                <a16:creationId xmlns:a16="http://schemas.microsoft.com/office/drawing/2014/main" id="{1BEBBD3D-FF57-4B8D-B446-1D3FCF6697A3}"/>
+                <a16:creationId xmlns:a16="http://schemas.microsoft.com/office/drawing/2014/main" id="{B8AF5ADB-7C66-4B93-9A41-E99F5EBBD240}"/>
               </a:ext>
             </a:extLst>
           </p:cNvPr>
@@ -952,7 +952,7 @@
     </p:spTree>
     <p:extLst>
       <p:ext uri="{BB962C8B-B14F-4D97-AF65-F5344CB8AC3E}">
-        <p14:creationId xmlns:p14="http://schemas.microsoft.com/office/powerpoint/2010/main" val="242733946"/>
+        <p14:creationId xmlns:p14="http://schemas.microsoft.com/office/powerpoint/2010/main" val="539046513"/>
       </p:ext>
     </p:extLst>
   </p:cSld>
@@ -983,7 +983,7 @@
           <p:cNvPr id="6" name="">
             <a:extLst xmlns:a="http://schemas.openxmlformats.org/drawingml/2006/main">
               <a:ext uri="{FF2B5EF4-FFF2-40B4-BE49-F238E27FC236}">
-                <a16:creationId xmlns:a16="http://schemas.microsoft.com/office/drawing/2014/main" id="{36FC60F0-700F-496D-B5D0-7547E524AEA3}"/>
+                <a16:creationId xmlns:a16="http://schemas.microsoft.com/office/drawing/2014/main" id="{7BB99064-C32E-4D38-8756-BE824DF27552}"/>
               </a:ext>
             </a:extLst>
           </p:cNvPr>
@@ -1040,7 +1040,7 @@
           <p:cNvPr id="2" name="">
             <a:extLst xmlns:a="http://schemas.openxmlformats.org/drawingml/2006/main">
               <a:ext uri="{FF2B5EF4-FFF2-40B4-BE49-F238E27FC236}">
-                <a16:creationId xmlns:a16="http://schemas.microsoft.com/office/drawing/2014/main" id="{60EC6AC6-3711-4140-8904-6525632228CD}"/>
+                <a16:creationId xmlns:a16="http://schemas.microsoft.com/office/drawing/2014/main" id="{31F54562-DDF9-43A2-B98D-99AC6A855C22}"/>
               </a:ext>
             </a:extLst>
           </p:cNvPr>
@@ -1097,7 +1097,7 @@
           <p:cNvPr id="3" name="">
             <a:extLst xmlns:a="http://schemas.openxmlformats.org/drawingml/2006/main">
               <a:ext uri="{FF2B5EF4-FFF2-40B4-BE49-F238E27FC236}">
-                <a16:creationId xmlns:a16="http://schemas.microsoft.com/office/drawing/2014/main" id="{0FA2B47F-7C60-4817-A669-58B76A36B421}"/>
+                <a16:creationId xmlns:a16="http://schemas.microsoft.com/office/drawing/2014/main" id="{21EDCD74-94FC-4446-9A56-E5BF81C9203C}"/>
               </a:ext>
             </a:extLst>
           </p:cNvPr>
@@ -1154,7 +1154,7 @@
           <p:cNvPr id="4" name="">
             <a:extLst xmlns:a="http://schemas.openxmlformats.org/drawingml/2006/main">
               <a:ext uri="{FF2B5EF4-FFF2-40B4-BE49-F238E27FC236}">
-                <a16:creationId xmlns:a16="http://schemas.microsoft.com/office/drawing/2014/main" id="{72829B63-058D-4FFC-A9D5-1FA344EB77CB}"/>
+                <a16:creationId xmlns:a16="http://schemas.microsoft.com/office/drawing/2014/main" id="{6F8CBD8F-6D4B-409B-B81C-C83BDD0C8430}"/>
               </a:ext>
             </a:extLst>
           </p:cNvPr>
@@ -1566,7 +1566,7 @@
     </p:spTree>
     <p:extLst>
       <p:ext uri="{BB962C8B-B14F-4D97-AF65-F5344CB8AC3E}">
-        <p14:creationId xmlns:p14="http://schemas.microsoft.com/office/powerpoint/2010/main" val="573810268"/>
+        <p14:creationId xmlns:p14="http://schemas.microsoft.com/office/powerpoint/2010/main" val="1463190424"/>
       </p:ext>
     </p:extLst>
   </p:cSld>
@@ -1597,7 +1597,7 @@
           <p:cNvPr id="17" name="">
             <a:extLst xmlns:a="http://schemas.openxmlformats.org/drawingml/2006/main">
               <a:ext uri="{FF2B5EF4-FFF2-40B4-BE49-F238E27FC236}">
-                <a16:creationId xmlns:a16="http://schemas.microsoft.com/office/drawing/2014/main" id="{DDFD68C6-2833-4DB1-B462-897A2BE8B65F}"/>
+                <a16:creationId xmlns:a16="http://schemas.microsoft.com/office/drawing/2014/main" id="{E085C082-8744-4A43-9F46-00846ED79656}"/>
               </a:ext>
             </a:extLst>
           </p:cNvPr>
@@ -1654,7 +1654,7 @@
           <p:cNvPr id="2" name="">
             <a:extLst xmlns:a="http://schemas.openxmlformats.org/drawingml/2006/main">
               <a:ext uri="{FF2B5EF4-FFF2-40B4-BE49-F238E27FC236}">
-                <a16:creationId xmlns:a16="http://schemas.microsoft.com/office/drawing/2014/main" id="{FA3F4A08-A164-43E6-8B99-D21CD762ACD7}"/>
+                <a16:creationId xmlns:a16="http://schemas.microsoft.com/office/drawing/2014/main" id="{0CBFA457-C493-4AF8-B0A0-27C0B7C02D06}"/>
               </a:ext>
             </a:extLst>
           </p:cNvPr>
@@ -1711,7 +1711,7 @@
           <p:cNvPr id="3" name="">
             <a:extLst xmlns:a="http://schemas.openxmlformats.org/drawingml/2006/main">
               <a:ext uri="{FF2B5EF4-FFF2-40B4-BE49-F238E27FC236}">
-                <a16:creationId xmlns:a16="http://schemas.microsoft.com/office/drawing/2014/main" id="{6FD0C6A7-CD7E-42BC-BF01-62B4378E3530}"/>
+                <a16:creationId xmlns:a16="http://schemas.microsoft.com/office/drawing/2014/main" id="{9F2C4317-F75D-440A-A937-603D301B87CB}"/>
               </a:ext>
             </a:extLst>
           </p:cNvPr>
@@ -1768,7 +1768,7 @@
           <p:cNvPr id="4" name="">
             <a:extLst xmlns:a="http://schemas.openxmlformats.org/drawingml/2006/main">
               <a:ext uri="{FF2B5EF4-FFF2-40B4-BE49-F238E27FC236}">
-                <a16:creationId xmlns:a16="http://schemas.microsoft.com/office/drawing/2014/main" id="{61B48FED-F5B9-4605-98F2-79EE34D331E4}"/>
+                <a16:creationId xmlns:a16="http://schemas.microsoft.com/office/drawing/2014/main" id="{C227CF2A-66C4-4DD1-8734-51AFF3CFABA5}"/>
               </a:ext>
             </a:extLst>
           </p:cNvPr>
@@ -1825,7 +1825,7 @@
           <p:cNvPr id="5" name="">
             <a:extLst xmlns:a="http://schemas.openxmlformats.org/drawingml/2006/main">
               <a:ext uri="{FF2B5EF4-FFF2-40B4-BE49-F238E27FC236}">
-                <a16:creationId xmlns:a16="http://schemas.microsoft.com/office/drawing/2014/main" id="{F5D2DCED-540A-419B-BBD8-AC692D724B54}"/>
+                <a16:creationId xmlns:a16="http://schemas.microsoft.com/office/drawing/2014/main" id="{F0F6D3F3-A6CF-4E49-8176-68C03C331412}"/>
               </a:ext>
             </a:extLst>
           </p:cNvPr>
@@ -1882,7 +1882,7 @@
           <p:cNvPr id="6" name="">
             <a:extLst xmlns:a="http://schemas.openxmlformats.org/drawingml/2006/main">
               <a:ext uri="{FF2B5EF4-FFF2-40B4-BE49-F238E27FC236}">
-                <a16:creationId xmlns:a16="http://schemas.microsoft.com/office/drawing/2014/main" id="{85AB7043-CB28-41FB-9141-3CD9A78CD500}"/>
+                <a16:creationId xmlns:a16="http://schemas.microsoft.com/office/drawing/2014/main" id="{64167E4F-FAA8-4469-9FC5-7FF85CFAC3BC}"/>
               </a:ext>
             </a:extLst>
           </p:cNvPr>
@@ -1911,7 +1911,7 @@
           <p:cNvPr id="7" name="">
             <a:extLst xmlns:a="http://schemas.openxmlformats.org/drawingml/2006/main">
               <a:ext uri="{FF2B5EF4-FFF2-40B4-BE49-F238E27FC236}">
-                <a16:creationId xmlns:a16="http://schemas.microsoft.com/office/drawing/2014/main" id="{9B919CC4-85F2-4171-9C01-2E0E413D74B4}"/>
+                <a16:creationId xmlns:a16="http://schemas.microsoft.com/office/drawing/2014/main" id="{99C5E791-83F9-495D-A6DB-57DE3EC97AC5}"/>
               </a:ext>
             </a:extLst>
           </p:cNvPr>
@@ -1968,7 +1968,7 @@
           <p:cNvPr id="8" name="">
             <a:extLst xmlns:a="http://schemas.openxmlformats.org/drawingml/2006/main">
               <a:ext uri="{FF2B5EF4-FFF2-40B4-BE49-F238E27FC236}">
-                <a16:creationId xmlns:a16="http://schemas.microsoft.com/office/drawing/2014/main" id="{A6FCD865-F750-42BE-8BD5-2A4531A23785}"/>
+                <a16:creationId xmlns:a16="http://schemas.microsoft.com/office/drawing/2014/main" id="{2F7D7868-D2E4-4919-853D-517E05D9B1AD}"/>
               </a:ext>
             </a:extLst>
           </p:cNvPr>
@@ -2025,7 +2025,7 @@
           <p:cNvPr id="9" name="">
             <a:extLst xmlns:a="http://schemas.openxmlformats.org/drawingml/2006/main">
               <a:ext uri="{FF2B5EF4-FFF2-40B4-BE49-F238E27FC236}">
-                <a16:creationId xmlns:a16="http://schemas.microsoft.com/office/drawing/2014/main" id="{EFE0D82E-6D7F-4410-8838-2074C10753FD}"/>
+                <a16:creationId xmlns:a16="http://schemas.microsoft.com/office/drawing/2014/main" id="{13C2E51C-B075-4CE5-93AD-2BF05008FFE3}"/>
               </a:ext>
             </a:extLst>
           </p:cNvPr>
@@ -2082,7 +2082,7 @@
           <p:cNvPr id="10" name="">
             <a:extLst xmlns:a="http://schemas.openxmlformats.org/drawingml/2006/main">
               <a:ext uri="{FF2B5EF4-FFF2-40B4-BE49-F238E27FC236}">
-                <a16:creationId xmlns:a16="http://schemas.microsoft.com/office/drawing/2014/main" id="{29EDA83C-CF3F-4B4F-8291-CC735229CB25}"/>
+                <a16:creationId xmlns:a16="http://schemas.microsoft.com/office/drawing/2014/main" id="{E982E456-B2A7-4664-8D75-B88FE0B31542}"/>
               </a:ext>
             </a:extLst>
           </p:cNvPr>
@@ -2139,7 +2139,7 @@
           <p:cNvPr id="11" name="">
             <a:extLst xmlns:a="http://schemas.openxmlformats.org/drawingml/2006/main">
               <a:ext uri="{FF2B5EF4-FFF2-40B4-BE49-F238E27FC236}">
-                <a16:creationId xmlns:a16="http://schemas.microsoft.com/office/drawing/2014/main" id="{00E13638-A0B0-4884-89FD-590D48A0A7DD}"/>
+                <a16:creationId xmlns:a16="http://schemas.microsoft.com/office/drawing/2014/main" id="{2833BAD6-7248-4DD6-81F2-B70CA4C6C4CE}"/>
               </a:ext>
             </a:extLst>
           </p:cNvPr>
@@ -2168,7 +2168,7 @@
           <p:cNvPr id="12" name="">
             <a:extLst xmlns:a="http://schemas.openxmlformats.org/drawingml/2006/main">
               <a:ext uri="{FF2B5EF4-FFF2-40B4-BE49-F238E27FC236}">
-                <a16:creationId xmlns:a16="http://schemas.microsoft.com/office/drawing/2014/main" id="{CB893A15-B7FB-40CC-96F3-76B73F5D8EB6}"/>
+                <a16:creationId xmlns:a16="http://schemas.microsoft.com/office/drawing/2014/main" id="{B237188E-70FD-463F-B028-DDC3D8C789EA}"/>
               </a:ext>
             </a:extLst>
           </p:cNvPr>
@@ -2225,7 +2225,7 @@
           <p:cNvPr id="13" name="">
             <a:extLst xmlns:a="http://schemas.openxmlformats.org/drawingml/2006/main">
               <a:ext uri="{FF2B5EF4-FFF2-40B4-BE49-F238E27FC236}">
-                <a16:creationId xmlns:a16="http://schemas.microsoft.com/office/drawing/2014/main" id="{BD2FBDFE-CB11-4C35-BB07-DAF602A81EF7}"/>
+                <a16:creationId xmlns:a16="http://schemas.microsoft.com/office/drawing/2014/main" id="{7274EEE0-A162-4AA8-9780-B3F8FDCC68B9}"/>
               </a:ext>
             </a:extLst>
           </p:cNvPr>
@@ -2282,7 +2282,7 @@
           <p:cNvPr id="14" name="">
             <a:extLst xmlns:a="http://schemas.openxmlformats.org/drawingml/2006/main">
               <a:ext uri="{FF2B5EF4-FFF2-40B4-BE49-F238E27FC236}">
-                <a16:creationId xmlns:a16="http://schemas.microsoft.com/office/drawing/2014/main" id="{73F5AB52-7F41-4F3B-B0B2-7649C9AB59CC}"/>
+                <a16:creationId xmlns:a16="http://schemas.microsoft.com/office/drawing/2014/main" id="{26FEF1EE-3FB1-4270-8E3E-38E16AE6E60B}"/>
               </a:ext>
             </a:extLst>
           </p:cNvPr>
@@ -2625,7 +2625,7 @@
           <p:cNvPr id="16" name="">
             <a:extLst xmlns:a="http://schemas.openxmlformats.org/drawingml/2006/main">
               <a:ext uri="{FF2B5EF4-FFF2-40B4-BE49-F238E27FC236}">
-                <a16:creationId xmlns:a16="http://schemas.microsoft.com/office/drawing/2014/main" id="{EFF4FB92-EBB4-4360-B2AE-62A3E4D87C09}"/>
+                <a16:creationId xmlns:a16="http://schemas.microsoft.com/office/drawing/2014/main" id="{D1C15353-160F-4A5B-BC33-C19A336EE293}"/>
               </a:ext>
             </a:extLst>
           </p:cNvPr>
@@ -2703,7 +2703,7 @@
     </p:spTree>
     <p:extLst>
       <p:ext uri="{BB962C8B-B14F-4D97-AF65-F5344CB8AC3E}">
-        <p14:creationId xmlns:p14="http://schemas.microsoft.com/office/powerpoint/2010/main" val="1312984157"/>
+        <p14:creationId xmlns:p14="http://schemas.microsoft.com/office/powerpoint/2010/main" val="320137286"/>
       </p:ext>
     </p:extLst>
   </p:cSld>
@@ -2734,7 +2734,7 @@
           <p:cNvPr id="12" name="">
             <a:extLst xmlns:a="http://schemas.openxmlformats.org/drawingml/2006/main">
               <a:ext uri="{FF2B5EF4-FFF2-40B4-BE49-F238E27FC236}">
-                <a16:creationId xmlns:a16="http://schemas.microsoft.com/office/drawing/2014/main" id="{13270DC5-5AC3-42F8-94DA-0F69DD8F95BA}"/>
+                <a16:creationId xmlns:a16="http://schemas.microsoft.com/office/drawing/2014/main" id="{2630A666-C0D1-4CCC-833D-2FE765101306}"/>
               </a:ext>
             </a:extLst>
           </p:cNvPr>
@@ -2791,7 +2791,7 @@
           <p:cNvPr id="2" name="">
             <a:extLst xmlns:a="http://schemas.openxmlformats.org/drawingml/2006/main">
               <a:ext uri="{FF2B5EF4-FFF2-40B4-BE49-F238E27FC236}">
-                <a16:creationId xmlns:a16="http://schemas.microsoft.com/office/drawing/2014/main" id="{DA96CC09-3819-4C5B-AA7F-9A6B23B53D90}"/>
+                <a16:creationId xmlns:a16="http://schemas.microsoft.com/office/drawing/2014/main" id="{9A46C718-A8F2-4983-9613-1DAFCBEE7287}"/>
               </a:ext>
             </a:extLst>
           </p:cNvPr>
@@ -2848,7 +2848,7 @@
           <p:cNvPr id="3" name="">
             <a:extLst xmlns:a="http://schemas.openxmlformats.org/drawingml/2006/main">
               <a:ext uri="{FF2B5EF4-FFF2-40B4-BE49-F238E27FC236}">
-                <a16:creationId xmlns:a16="http://schemas.microsoft.com/office/drawing/2014/main" id="{B4C0DF9D-BFD2-471B-82C8-6025FBE5D778}"/>
+                <a16:creationId xmlns:a16="http://schemas.microsoft.com/office/drawing/2014/main" id="{0C24A47A-67EB-4D18-9A62-C3E87650B548}"/>
               </a:ext>
             </a:extLst>
           </p:cNvPr>
@@ -2905,7 +2905,7 @@
           <p:cNvPr id="4" name="">
             <a:extLst xmlns:a="http://schemas.openxmlformats.org/drawingml/2006/main">
               <a:ext uri="{FF2B5EF4-FFF2-40B4-BE49-F238E27FC236}">
-                <a16:creationId xmlns:a16="http://schemas.microsoft.com/office/drawing/2014/main" id="{96E901F3-205B-4B68-9314-0B627065A2F1}"/>
+                <a16:creationId xmlns:a16="http://schemas.microsoft.com/office/drawing/2014/main" id="{EB78B5F8-B4B7-4C5E-9EA4-3E96BF3E9E75}"/>
               </a:ext>
             </a:extLst>
           </p:cNvPr>
@@ -2969,7 +2969,7 @@
         </p:xfrm>
         <a:graphic xmlns:a="http://schemas.openxmlformats.org/drawingml/2006/main">
           <a:graphicData uri="http://schemas.openxmlformats.org/drawingml/2006/chart">
-            <c:chart xmlns:r="http://schemas.openxmlformats.org/officeDocument/2006/relationships" xmlns:c="http://schemas.openxmlformats.org/drawingml/2006/chart" r:id="R3da263465cde4fcb"/>
+            <c:chart xmlns:r="http://schemas.openxmlformats.org/officeDocument/2006/relationships" xmlns:c="http://schemas.openxmlformats.org/drawingml/2006/chart" r:id="R0b156990f18546c2"/>
           </a:graphicData>
         </a:graphic>
       </p:graphicFrame>
@@ -2978,7 +2978,7 @@
           <p:cNvPr id="6" name="">
             <a:extLst xmlns:a="http://schemas.openxmlformats.org/drawingml/2006/main">
               <a:ext uri="{FF2B5EF4-FFF2-40B4-BE49-F238E27FC236}">
-                <a16:creationId xmlns:a16="http://schemas.microsoft.com/office/drawing/2014/main" id="{27818D9F-C4D2-4F6A-BA72-08CAE5BA6018}"/>
+                <a16:creationId xmlns:a16="http://schemas.microsoft.com/office/drawing/2014/main" id="{5DA10638-D3A9-4AB3-8A16-3475BAAFB08E}"/>
               </a:ext>
             </a:extLst>
           </p:cNvPr>
@@ -3008,7 +3008,7 @@
           <p:cNvPr id="7" name="">
             <a:extLst xmlns:a="http://schemas.openxmlformats.org/drawingml/2006/main">
               <a:ext uri="{FF2B5EF4-FFF2-40B4-BE49-F238E27FC236}">
-                <a16:creationId xmlns:a16="http://schemas.microsoft.com/office/drawing/2014/main" id="{4704AF32-FB84-45A9-81B6-A3F6EB86827D}"/>
+                <a16:creationId xmlns:a16="http://schemas.microsoft.com/office/drawing/2014/main" id="{98EDDD5B-8D8A-4502-9171-0FDD775F667F}"/>
               </a:ext>
             </a:extLst>
           </p:cNvPr>
@@ -3065,7 +3065,7 @@
           <p:cNvPr id="8" name="">
             <a:extLst xmlns:a="http://schemas.openxmlformats.org/drawingml/2006/main">
               <a:ext uri="{FF2B5EF4-FFF2-40B4-BE49-F238E27FC236}">
-                <a16:creationId xmlns:a16="http://schemas.microsoft.com/office/drawing/2014/main" id="{90F23125-7B6D-4A3C-B6B8-02D2D22214D2}"/>
+                <a16:creationId xmlns:a16="http://schemas.microsoft.com/office/drawing/2014/main" id="{1A8E3120-338E-4602-884A-81A7A0EA89A8}"/>
               </a:ext>
             </a:extLst>
           </p:cNvPr>
@@ -3095,7 +3095,7 @@
           <p:cNvPr id="9" name="">
             <a:extLst xmlns:a="http://schemas.openxmlformats.org/drawingml/2006/main">
               <a:ext uri="{FF2B5EF4-FFF2-40B4-BE49-F238E27FC236}">
-                <a16:creationId xmlns:a16="http://schemas.microsoft.com/office/drawing/2014/main" id="{C38B7DB9-949F-4C2C-9FC5-8DAB905F81C8}"/>
+                <a16:creationId xmlns:a16="http://schemas.microsoft.com/office/drawing/2014/main" id="{CCB137AA-9A30-4600-A9BD-4B3F24AAC27E}"/>
               </a:ext>
             </a:extLst>
           </p:cNvPr>
@@ -3152,7 +3152,7 @@
           <p:cNvPr id="10" name="">
             <a:extLst xmlns:a="http://schemas.openxmlformats.org/drawingml/2006/main">
               <a:ext uri="{FF2B5EF4-FFF2-40B4-BE49-F238E27FC236}">
-                <a16:creationId xmlns:a16="http://schemas.microsoft.com/office/drawing/2014/main" id="{0DCF4F92-D749-49EA-A271-7901241AB2A2}"/>
+                <a16:creationId xmlns:a16="http://schemas.microsoft.com/office/drawing/2014/main" id="{7658BB83-5610-4790-A10F-F918C67B9B42}"/>
               </a:ext>
             </a:extLst>
           </p:cNvPr>
@@ -3213,7 +3213,7 @@
           <p:cNvPr id="11" name="">
             <a:extLst xmlns:a="http://schemas.openxmlformats.org/drawingml/2006/main">
               <a:ext uri="{FF2B5EF4-FFF2-40B4-BE49-F238E27FC236}">
-                <a16:creationId xmlns:a16="http://schemas.microsoft.com/office/drawing/2014/main" id="{9C7E8306-34BF-41A0-B942-707D9A927537}"/>
+                <a16:creationId xmlns:a16="http://schemas.microsoft.com/office/drawing/2014/main" id="{60B57B95-C587-4C71-B678-7DF6216FA42D}"/>
               </a:ext>
             </a:extLst>
           </p:cNvPr>
@@ -3268,7 +3268,7 @@
     </p:spTree>
     <p:extLst>
       <p:ext uri="{BB962C8B-B14F-4D97-AF65-F5344CB8AC3E}">
-        <p14:creationId xmlns:p14="http://schemas.microsoft.com/office/powerpoint/2010/main" val="305746940"/>
+        <p14:creationId xmlns:p14="http://schemas.microsoft.com/office/powerpoint/2010/main" val="2079004286"/>
       </p:ext>
     </p:extLst>
   </p:cSld>
@@ -3299,7 +3299,7 @@
           <p:cNvPr id="4" name="">
             <a:extLst xmlns:a="http://schemas.openxmlformats.org/drawingml/2006/main">
               <a:ext uri="{FF2B5EF4-FFF2-40B4-BE49-F238E27FC236}">
-                <a16:creationId xmlns:a16="http://schemas.microsoft.com/office/drawing/2014/main" id="{59ED9233-E711-4DE2-8D6F-88A260B19AC5}"/>
+                <a16:creationId xmlns:a16="http://schemas.microsoft.com/office/drawing/2014/main" id="{664DDC8C-D0BB-42A2-B6C4-40D4754B93D6}"/>
               </a:ext>
             </a:extLst>
           </p:cNvPr>
@@ -3356,7 +3356,7 @@
           <p:cNvPr id="2" name="">
             <a:extLst xmlns:a="http://schemas.openxmlformats.org/drawingml/2006/main">
               <a:ext uri="{FF2B5EF4-FFF2-40B4-BE49-F238E27FC236}">
-                <a16:creationId xmlns:a16="http://schemas.microsoft.com/office/drawing/2014/main" id="{F02AD4FA-32F8-4BE7-BD4E-25A7D74E1055}"/>
+                <a16:creationId xmlns:a16="http://schemas.microsoft.com/office/drawing/2014/main" id="{98B6566D-E309-4E3C-8A79-ED3DC653D436}"/>
               </a:ext>
             </a:extLst>
           </p:cNvPr>
@@ -3413,7 +3413,7 @@
           <p:cNvPr id="3" name="">
             <a:extLst xmlns:a="http://schemas.openxmlformats.org/drawingml/2006/main">
               <a:ext uri="{FF2B5EF4-FFF2-40B4-BE49-F238E27FC236}">
-                <a16:creationId xmlns:a16="http://schemas.microsoft.com/office/drawing/2014/main" id="{9E24FAC0-F59E-44AC-B20D-42FABB957BA6}"/>
+                <a16:creationId xmlns:a16="http://schemas.microsoft.com/office/drawing/2014/main" id="{C03D12AC-1B4A-4747-932E-3A4989329FDE}"/>
               </a:ext>
             </a:extLst>
           </p:cNvPr>
@@ -3468,7 +3468,7 @@
     </p:spTree>
     <p:extLst>
       <p:ext uri="{BB962C8B-B14F-4D97-AF65-F5344CB8AC3E}">
-        <p14:creationId xmlns:p14="http://schemas.microsoft.com/office/powerpoint/2010/main" val="340105872"/>
+        <p14:creationId xmlns:p14="http://schemas.microsoft.com/office/powerpoint/2010/main" val="1215287104"/>
       </p:ext>
     </p:extLst>
   </p:cSld>
@@ -3499,7 +3499,7 @@
           <p:cNvPr id="9" name="">
             <a:extLst xmlns:a="http://schemas.openxmlformats.org/drawingml/2006/main">
               <a:ext uri="{FF2B5EF4-FFF2-40B4-BE49-F238E27FC236}">
-                <a16:creationId xmlns:a16="http://schemas.microsoft.com/office/drawing/2014/main" id="{32AFC8B9-3661-4B76-8396-F344D0CE0D78}"/>
+                <a16:creationId xmlns:a16="http://schemas.microsoft.com/office/drawing/2014/main" id="{EB8E6CBD-E26D-4785-BED2-B0DD45D4B49D}"/>
               </a:ext>
             </a:extLst>
           </p:cNvPr>
@@ -3556,7 +3556,7 @@
           <p:cNvPr id="2" name="">
             <a:extLst xmlns:a="http://schemas.openxmlformats.org/drawingml/2006/main">
               <a:ext uri="{FF2B5EF4-FFF2-40B4-BE49-F238E27FC236}">
-                <a16:creationId xmlns:a16="http://schemas.microsoft.com/office/drawing/2014/main" id="{19D194F2-79B6-4474-A94F-50FCA779AC36}"/>
+                <a16:creationId xmlns:a16="http://schemas.microsoft.com/office/drawing/2014/main" id="{C2C84770-F38C-4A9E-A71E-348FCD1E01CB}"/>
               </a:ext>
             </a:extLst>
           </p:cNvPr>
@@ -3613,7 +3613,7 @@
           <p:cNvPr id="3" name="">
             <a:extLst xmlns:a="http://schemas.openxmlformats.org/drawingml/2006/main">
               <a:ext uri="{FF2B5EF4-FFF2-40B4-BE49-F238E27FC236}">
-                <a16:creationId xmlns:a16="http://schemas.microsoft.com/office/drawing/2014/main" id="{CCB6C3CB-CFAC-4452-90A8-AC00B62A1940}"/>
+                <a16:creationId xmlns:a16="http://schemas.microsoft.com/office/drawing/2014/main" id="{071C1239-ECEA-49F1-BD72-B0BEBFCB61FE}"/>
               </a:ext>
             </a:extLst>
           </p:cNvPr>
@@ -3670,7 +3670,7 @@
           <p:cNvPr id="4" name="">
             <a:extLst xmlns:a="http://schemas.openxmlformats.org/drawingml/2006/main">
               <a:ext uri="{FF2B5EF4-FFF2-40B4-BE49-F238E27FC236}">
-                <a16:creationId xmlns:a16="http://schemas.microsoft.com/office/drawing/2014/main" id="{F036F871-2BB1-44DD-A309-A77C3F85C588}"/>
+                <a16:creationId xmlns:a16="http://schemas.microsoft.com/office/drawing/2014/main" id="{46BC4060-4482-42CB-A806-828B52251794}"/>
               </a:ext>
             </a:extLst>
           </p:cNvPr>
@@ -3727,7 +3727,7 @@
           <p:cNvPr id="5" name="">
             <a:extLst xmlns:a="http://schemas.openxmlformats.org/drawingml/2006/main">
               <a:ext uri="{FF2B5EF4-FFF2-40B4-BE49-F238E27FC236}">
-                <a16:creationId xmlns:a16="http://schemas.microsoft.com/office/drawing/2014/main" id="{9A27C6C6-B17A-42AC-8EEF-7718CE60CC7F}"/>
+                <a16:creationId xmlns:a16="http://schemas.microsoft.com/office/drawing/2014/main" id="{7B7BC3F2-5516-4AA3-A4D2-2175218F6065}"/>
               </a:ext>
             </a:extLst>
           </p:cNvPr>
@@ -3807,7 +3807,7 @@
           <p:cNvPr id="6" name="">
             <a:extLst xmlns:a="http://schemas.openxmlformats.org/drawingml/2006/main">
               <a:ext uri="{FF2B5EF4-FFF2-40B4-BE49-F238E27FC236}">
-                <a16:creationId xmlns:a16="http://schemas.microsoft.com/office/drawing/2014/main" id="{21E7E826-C1D8-467D-9624-8D9E99E30336}"/>
+                <a16:creationId xmlns:a16="http://schemas.microsoft.com/office/drawing/2014/main" id="{0D641DEA-E52E-4FFA-9C95-705AA93EAE01}"/>
               </a:ext>
             </a:extLst>
           </p:cNvPr>
@@ -3836,7 +3836,7 @@
           <p:cNvPr id="7" name="">
             <a:extLst xmlns:a="http://schemas.openxmlformats.org/drawingml/2006/main">
               <a:ext uri="{FF2B5EF4-FFF2-40B4-BE49-F238E27FC236}">
-                <a16:creationId xmlns:a16="http://schemas.microsoft.com/office/drawing/2014/main" id="{A62B7C18-567D-4EA2-AD49-3276E40441EE}"/>
+                <a16:creationId xmlns:a16="http://schemas.microsoft.com/office/drawing/2014/main" id="{346EE597-DA69-404A-AFE4-E8731AD3D82B}"/>
               </a:ext>
             </a:extLst>
           </p:cNvPr>
@@ -3893,7 +3893,7 @@
           <p:cNvPr id="8" name="">
             <a:extLst xmlns:a="http://schemas.openxmlformats.org/drawingml/2006/main">
               <a:ext uri="{FF2B5EF4-FFF2-40B4-BE49-F238E27FC236}">
-                <a16:creationId xmlns:a16="http://schemas.microsoft.com/office/drawing/2014/main" id="{752D35D5-3534-448A-97FE-BA5BCED6AE67}"/>
+                <a16:creationId xmlns:a16="http://schemas.microsoft.com/office/drawing/2014/main" id="{3A1ED07E-9304-4335-9107-019BB0E977A7}"/>
               </a:ext>
             </a:extLst>
           </p:cNvPr>
@@ -3971,7 +3971,7 @@
     </p:spTree>
     <p:extLst>
       <p:ext uri="{BB962C8B-B14F-4D97-AF65-F5344CB8AC3E}">
-        <p14:creationId xmlns:p14="http://schemas.microsoft.com/office/powerpoint/2010/main" val="405358652"/>
+        <p14:creationId xmlns:p14="http://schemas.microsoft.com/office/powerpoint/2010/main" val="1062656025"/>
       </p:ext>
     </p:extLst>
   </p:cSld>
@@ -4002,7 +4002,7 @@
           <p:cNvPr id="8" name="">
             <a:extLst xmlns:a="http://schemas.openxmlformats.org/drawingml/2006/main">
               <a:ext uri="{FF2B5EF4-FFF2-40B4-BE49-F238E27FC236}">
-                <a16:creationId xmlns:a16="http://schemas.microsoft.com/office/drawing/2014/main" id="{307D6D15-6760-4258-B568-E5D44FFC7190}"/>
+                <a16:creationId xmlns:a16="http://schemas.microsoft.com/office/drawing/2014/main" id="{38E61777-A03D-44C4-A99D-92D893DA220F}"/>
               </a:ext>
             </a:extLst>
           </p:cNvPr>
@@ -4059,7 +4059,7 @@
           <p:cNvPr id="2" name="">
             <a:extLst xmlns:a="http://schemas.openxmlformats.org/drawingml/2006/main">
               <a:ext uri="{FF2B5EF4-FFF2-40B4-BE49-F238E27FC236}">
-                <a16:creationId xmlns:a16="http://schemas.microsoft.com/office/drawing/2014/main" id="{89D74DD0-31A8-4B4A-90CC-9C4CEEB45C8A}"/>
+                <a16:creationId xmlns:a16="http://schemas.microsoft.com/office/drawing/2014/main" id="{7C57FE96-C3E4-4D4E-A277-4F44F6420B03}"/>
               </a:ext>
             </a:extLst>
           </p:cNvPr>
@@ -4116,7 +4116,7 @@
           <p:cNvPr id="3" name="">
             <a:extLst xmlns:a="http://schemas.openxmlformats.org/drawingml/2006/main">
               <a:ext uri="{FF2B5EF4-FFF2-40B4-BE49-F238E27FC236}">
-                <a16:creationId xmlns:a16="http://schemas.microsoft.com/office/drawing/2014/main" id="{4ECCAD31-B16F-4E7B-A383-1369A18B611A}"/>
+                <a16:creationId xmlns:a16="http://schemas.microsoft.com/office/drawing/2014/main" id="{AE33C83E-C307-45FC-AE22-7AD9D7A3459F}"/>
               </a:ext>
             </a:extLst>
           </p:cNvPr>
@@ -4173,7 +4173,7 @@
           <p:cNvPr id="4" name="">
             <a:extLst xmlns:a="http://schemas.openxmlformats.org/drawingml/2006/main">
               <a:ext uri="{FF2B5EF4-FFF2-40B4-BE49-F238E27FC236}">
-                <a16:creationId xmlns:a16="http://schemas.microsoft.com/office/drawing/2014/main" id="{B931218D-E9EB-4B22-BE44-3B682E99AD3B}"/>
+                <a16:creationId xmlns:a16="http://schemas.microsoft.com/office/drawing/2014/main" id="{63682E03-5327-40D1-8768-99516F9210CC}"/>
               </a:ext>
             </a:extLst>
           </p:cNvPr>
@@ -4230,7 +4230,7 @@
           <p:cNvPr id="5" name="">
             <a:extLst xmlns:a="http://schemas.openxmlformats.org/drawingml/2006/main">
               <a:ext uri="{FF2B5EF4-FFF2-40B4-BE49-F238E27FC236}">
-                <a16:creationId xmlns:a16="http://schemas.microsoft.com/office/drawing/2014/main" id="{D6D9F45F-48A1-4696-B7A4-97DC2961C833}"/>
+                <a16:creationId xmlns:a16="http://schemas.microsoft.com/office/drawing/2014/main" id="{4A9AD0C9-90DE-49EC-85DC-CBF1BD0ED863}"/>
               </a:ext>
             </a:extLst>
           </p:cNvPr>
@@ -4287,7 +4287,7 @@
           <p:cNvPr id="6" name="">
             <a:extLst xmlns:a="http://schemas.openxmlformats.org/drawingml/2006/main">
               <a:ext uri="{FF2B5EF4-FFF2-40B4-BE49-F238E27FC236}">
-                <a16:creationId xmlns:a16="http://schemas.microsoft.com/office/drawing/2014/main" id="{9C701502-21B5-4E84-B84F-DFB545703F79}"/>
+                <a16:creationId xmlns:a16="http://schemas.microsoft.com/office/drawing/2014/main" id="{9C0FEEEF-3B61-40EA-B527-4932FA16BC8A}"/>
               </a:ext>
             </a:extLst>
           </p:cNvPr>
@@ -4344,7 +4344,7 @@
           <p:cNvPr id="7" name="">
             <a:extLst xmlns:a="http://schemas.openxmlformats.org/drawingml/2006/main">
               <a:ext uri="{FF2B5EF4-FFF2-40B4-BE49-F238E27FC236}">
-                <a16:creationId xmlns:a16="http://schemas.microsoft.com/office/drawing/2014/main" id="{7C41AA78-848E-4EDD-875A-99A399A8865A}"/>
+                <a16:creationId xmlns:a16="http://schemas.microsoft.com/office/drawing/2014/main" id="{42BAAD8F-EE73-4444-9EE8-52A107DB6ABA}"/>
               </a:ext>
             </a:extLst>
           </p:cNvPr>
@@ -4399,7 +4399,7 @@
     </p:spTree>
     <p:extLst>
       <p:ext uri="{BB962C8B-B14F-4D97-AF65-F5344CB8AC3E}">
-        <p14:creationId xmlns:p14="http://schemas.microsoft.com/office/powerpoint/2010/main" val="576648320"/>
+        <p14:creationId xmlns:p14="http://schemas.microsoft.com/office/powerpoint/2010/main" val="843963215"/>
       </p:ext>
     </p:extLst>
   </p:cSld>
@@ -4430,7 +4430,7 @@
           <p:cNvPr id="9" name="">
             <a:extLst xmlns:a="http://schemas.openxmlformats.org/drawingml/2006/main">
               <a:ext uri="{FF2B5EF4-FFF2-40B4-BE49-F238E27FC236}">
-                <a16:creationId xmlns:a16="http://schemas.microsoft.com/office/drawing/2014/main" id="{05934B30-F0D9-4634-99E9-5D41D0BCD911}"/>
+                <a16:creationId xmlns:a16="http://schemas.microsoft.com/office/drawing/2014/main" id="{80593794-E2DD-48EC-8560-1FB854BF8533}"/>
               </a:ext>
             </a:extLst>
           </p:cNvPr>
@@ -4487,7 +4487,7 @@
           <p:cNvPr id="2" name="">
             <a:extLst xmlns:a="http://schemas.openxmlformats.org/drawingml/2006/main">
               <a:ext uri="{FF2B5EF4-FFF2-40B4-BE49-F238E27FC236}">
-                <a16:creationId xmlns:a16="http://schemas.microsoft.com/office/drawing/2014/main" id="{BE92FD7A-7429-46F5-8A5C-F8389A4055BB}"/>
+                <a16:creationId xmlns:a16="http://schemas.microsoft.com/office/drawing/2014/main" id="{4A8D8C43-032F-48C3-AD05-E746AE21E09B}"/>
               </a:ext>
             </a:extLst>
           </p:cNvPr>
@@ -4544,7 +4544,7 @@
           <p:cNvPr id="3" name="">
             <a:extLst xmlns:a="http://schemas.openxmlformats.org/drawingml/2006/main">
               <a:ext uri="{FF2B5EF4-FFF2-40B4-BE49-F238E27FC236}">
-                <a16:creationId xmlns:a16="http://schemas.microsoft.com/office/drawing/2014/main" id="{B5846C47-60FF-4427-8686-BE4737896067}"/>
+                <a16:creationId xmlns:a16="http://schemas.microsoft.com/office/drawing/2014/main" id="{DCEE9675-8FF7-4B94-A5CA-977CD4EC15B3}"/>
               </a:ext>
             </a:extLst>
           </p:cNvPr>
@@ -4601,7 +4601,7 @@
           <p:cNvPr id="4" name="">
             <a:extLst xmlns:a="http://schemas.openxmlformats.org/drawingml/2006/main">
               <a:ext uri="{FF2B5EF4-FFF2-40B4-BE49-F238E27FC236}">
-                <a16:creationId xmlns:a16="http://schemas.microsoft.com/office/drawing/2014/main" id="{DBEC1414-65CA-47D9-A074-6BB7E4BD35D5}"/>
+                <a16:creationId xmlns:a16="http://schemas.microsoft.com/office/drawing/2014/main" id="{B6EE2600-5C74-4545-BBA0-3D5F411737B4}"/>
               </a:ext>
             </a:extLst>
           </p:cNvPr>
@@ -4658,7 +4658,7 @@
           <p:cNvPr id="5" name="">
             <a:extLst xmlns:a="http://schemas.openxmlformats.org/drawingml/2006/main">
               <a:ext uri="{FF2B5EF4-FFF2-40B4-BE49-F238E27FC236}">
-                <a16:creationId xmlns:a16="http://schemas.microsoft.com/office/drawing/2014/main" id="{BDECC472-940E-4CE8-B89C-7C3954F78198}"/>
+                <a16:creationId xmlns:a16="http://schemas.microsoft.com/office/drawing/2014/main" id="{98037F6E-0839-487D-A1A8-D98DCB5D74AB}"/>
               </a:ext>
             </a:extLst>
           </p:cNvPr>
@@ -4715,7 +4715,7 @@
           <p:cNvPr id="6" name="">
             <a:extLst xmlns:a="http://schemas.openxmlformats.org/drawingml/2006/main">
               <a:ext uri="{FF2B5EF4-FFF2-40B4-BE49-F238E27FC236}">
-                <a16:creationId xmlns:a16="http://schemas.microsoft.com/office/drawing/2014/main" id="{F0EE228C-BE5E-4BDD-BD93-6BBACDF88744}"/>
+                <a16:creationId xmlns:a16="http://schemas.microsoft.com/office/drawing/2014/main" id="{BBBE4D8B-CCB5-4641-A4EA-5E4224F5034D}"/>
               </a:ext>
             </a:extLst>
           </p:cNvPr>
@@ -4772,7 +4772,7 @@
           <p:cNvPr id="7" name="">
             <a:extLst xmlns:a="http://schemas.openxmlformats.org/drawingml/2006/main">
               <a:ext uri="{FF2B5EF4-FFF2-40B4-BE49-F238E27FC236}">
-                <a16:creationId xmlns:a16="http://schemas.microsoft.com/office/drawing/2014/main" id="{1AE21BE2-29CC-4A5A-9CDA-B64A52211C05}"/>
+                <a16:creationId xmlns:a16="http://schemas.microsoft.com/office/drawing/2014/main" id="{68FE9C3E-418D-477D-B521-211112C3E7AA}"/>
               </a:ext>
             </a:extLst>
           </p:cNvPr>
@@ -4829,7 +4829,7 @@
           <p:cNvPr id="8" name="">
             <a:extLst xmlns:a="http://schemas.openxmlformats.org/drawingml/2006/main">
               <a:ext uri="{FF2B5EF4-FFF2-40B4-BE49-F238E27FC236}">
-                <a16:creationId xmlns:a16="http://schemas.microsoft.com/office/drawing/2014/main" id="{81AEE26C-CD1C-4939-BF39-5001777D8AEB}"/>
+                <a16:creationId xmlns:a16="http://schemas.microsoft.com/office/drawing/2014/main" id="{DAA24551-5C72-404B-9E47-41B1D82DF921}"/>
               </a:ext>
             </a:extLst>
           </p:cNvPr>
@@ -4884,7 +4884,7 @@
     </p:spTree>
     <p:extLst>
       <p:ext uri="{BB962C8B-B14F-4D97-AF65-F5344CB8AC3E}">
-        <p14:creationId xmlns:p14="http://schemas.microsoft.com/office/powerpoint/2010/main" val="1969791153"/>
+        <p14:creationId xmlns:p14="http://schemas.microsoft.com/office/powerpoint/2010/main" val="1195776425"/>
       </p:ext>
     </p:extLst>
   </p:cSld>
@@ -4915,7 +4915,7 @@
           <p:cNvPr id="12" name="">
             <a:extLst xmlns:a="http://schemas.openxmlformats.org/drawingml/2006/main">
               <a:ext uri="{FF2B5EF4-FFF2-40B4-BE49-F238E27FC236}">
-                <a16:creationId xmlns:a16="http://schemas.microsoft.com/office/drawing/2014/main" id="{D2EA8BD4-567E-42E6-8B21-0CCAEA123245}"/>
+                <a16:creationId xmlns:a16="http://schemas.microsoft.com/office/drawing/2014/main" id="{65F473C2-9ACB-4D5C-81EE-EE5A9DB62BA8}"/>
               </a:ext>
             </a:extLst>
           </p:cNvPr>
@@ -4972,7 +4972,7 @@
           <p:cNvPr id="2" name="">
             <a:extLst xmlns:a="http://schemas.openxmlformats.org/drawingml/2006/main">
               <a:ext uri="{FF2B5EF4-FFF2-40B4-BE49-F238E27FC236}">
-                <a16:creationId xmlns:a16="http://schemas.microsoft.com/office/drawing/2014/main" id="{1EE745EA-253C-422C-97CB-B7815CA79FD5}"/>
+                <a16:creationId xmlns:a16="http://schemas.microsoft.com/office/drawing/2014/main" id="{30627592-BA4C-4633-A23A-6076FDFADFED}"/>
               </a:ext>
             </a:extLst>
           </p:cNvPr>
@@ -5029,7 +5029,7 @@
           <p:cNvPr id="3" name="">
             <a:extLst xmlns:a="http://schemas.openxmlformats.org/drawingml/2006/main">
               <a:ext uri="{FF2B5EF4-FFF2-40B4-BE49-F238E27FC236}">
-                <a16:creationId xmlns:a16="http://schemas.microsoft.com/office/drawing/2014/main" id="{2D5F84BD-7FF1-4705-8C4D-02D9BF771D35}"/>
+                <a16:creationId xmlns:a16="http://schemas.microsoft.com/office/drawing/2014/main" id="{484052BD-ED26-42D0-A6D5-3118D89858A2}"/>
               </a:ext>
             </a:extLst>
           </p:cNvPr>
@@ -5086,7 +5086,7 @@
           <p:cNvPr id="4" name="">
             <a:extLst xmlns:a="http://schemas.openxmlformats.org/drawingml/2006/main">
               <a:ext uri="{FF2B5EF4-FFF2-40B4-BE49-F238E27FC236}">
-                <a16:creationId xmlns:a16="http://schemas.microsoft.com/office/drawing/2014/main" id="{4E1FA940-A8DE-4AC7-BB31-725533C90577}"/>
+                <a16:creationId xmlns:a16="http://schemas.microsoft.com/office/drawing/2014/main" id="{811F7440-4F55-4611-912F-1FD4D3E11CE0}"/>
               </a:ext>
             </a:extLst>
           </p:cNvPr>
@@ -5166,7 +5166,7 @@
           <p:cNvPr id="5" name="">
             <a:extLst xmlns:a="http://schemas.openxmlformats.org/drawingml/2006/main">
               <a:ext uri="{FF2B5EF4-FFF2-40B4-BE49-F238E27FC236}">
-                <a16:creationId xmlns:a16="http://schemas.microsoft.com/office/drawing/2014/main" id="{7930EE56-988B-4564-884E-DBC4AB7032FD}"/>
+                <a16:creationId xmlns:a16="http://schemas.microsoft.com/office/drawing/2014/main" id="{E5535579-1A90-4BED-9B66-138307CD1970}"/>
               </a:ext>
             </a:extLst>
           </p:cNvPr>
@@ -5246,7 +5246,7 @@
           <p:cNvPr id="6" name="">
             <a:extLst xmlns:a="http://schemas.openxmlformats.org/drawingml/2006/main">
               <a:ext uri="{FF2B5EF4-FFF2-40B4-BE49-F238E27FC236}">
-                <a16:creationId xmlns:a16="http://schemas.microsoft.com/office/drawing/2014/main" id="{5E1314FF-6E04-417B-B2B9-9DBE59EA7130}"/>
+                <a16:creationId xmlns:a16="http://schemas.microsoft.com/office/drawing/2014/main" id="{1B83D37D-2A65-4B9C-A4C0-F5D3FD94A1D0}"/>
               </a:ext>
             </a:extLst>
           </p:cNvPr>
@@ -5275,7 +5275,7 @@
           <p:cNvPr id="7" name="">
             <a:extLst xmlns:a="http://schemas.openxmlformats.org/drawingml/2006/main">
               <a:ext uri="{FF2B5EF4-FFF2-40B4-BE49-F238E27FC236}">
-                <a16:creationId xmlns:a16="http://schemas.microsoft.com/office/drawing/2014/main" id="{CC4F0B82-946A-4EE2-AE29-C0DCE4AD2FDD}"/>
+                <a16:creationId xmlns:a16="http://schemas.microsoft.com/office/drawing/2014/main" id="{DF6596ED-A4E1-4F1D-BE0A-86E839DF5DA8}"/>
               </a:ext>
             </a:extLst>
           </p:cNvPr>
@@ -5322,7 +5322,7 @@
                 <a:ea typeface="Arial"/>
                 <a:cs typeface="Arial"/>
               </a:rPr>
-              <a:t>Published B-HOT study</a:t>
+              <a:t>Biopsy and</a:t>
             </a:r>
           </a:p>
           <a:p xmlns:a="http://schemas.openxmlformats.org/drawingml/2006/main">
@@ -5345,7 +5345,7 @@
                 <a:ea typeface="Arial"/>
                 <a:cs typeface="Arial"/>
               </a:rPr>
-              <a:t>Zhang, 2024</a:t>
+              <a:t>treatment</a:t>
             </a:r>
           </a:p>
         </p:txBody>
@@ -5355,7 +5355,7 @@
           <p:cNvPr id="8" name="">
             <a:extLst xmlns:a="http://schemas.openxmlformats.org/drawingml/2006/main">
               <a:ext uri="{FF2B5EF4-FFF2-40B4-BE49-F238E27FC236}">
-                <a16:creationId xmlns:a16="http://schemas.microsoft.com/office/drawing/2014/main" id="{240F2441-A8B9-4EC8-A6D9-5FD1406CB6A8}"/>
+                <a16:creationId xmlns:a16="http://schemas.microsoft.com/office/drawing/2014/main" id="{694C1C0C-D2EB-4F8C-83DB-3682A965AEAE}"/>
               </a:ext>
             </a:extLst>
           </p:cNvPr>
@@ -5402,7 +5402,7 @@
                 <a:ea typeface="Arial"/>
                 <a:cs typeface="Arial"/>
               </a:rPr>
-              <a:t>Four-class study compared regression and boosting.</a:t>
+              <a:t>KDIGO recommends biopsy before treating acute rejection,</a:t>
             </a:r>
           </a:p>
           <a:p xmlns:a="http://schemas.openxmlformats.org/drawingml/2006/main">
@@ -5425,7 +5425,7 @@
                 <a:ea typeface="Arial"/>
                 <a:cs typeface="Arial"/>
               </a:rPr>
-              <a:t>Selected LASSO for similar accuracy with fewer features.</a:t>
+              <a:t>unless waiting would substantially delay treatment.</a:t>
             </a:r>
           </a:p>
         </p:txBody>
@@ -5435,7 +5435,7 @@
           <p:cNvPr id="9" name="">
             <a:extLst xmlns:a="http://schemas.openxmlformats.org/drawingml/2006/main">
               <a:ext uri="{FF2B5EF4-FFF2-40B4-BE49-F238E27FC236}">
-                <a16:creationId xmlns:a16="http://schemas.microsoft.com/office/drawing/2014/main" id="{2D016587-C6EC-49F3-9637-80C59F73BAEC}"/>
+                <a16:creationId xmlns:a16="http://schemas.microsoft.com/office/drawing/2014/main" id="{DA0E6AA3-29CA-4E37-942A-FD69163E9D7E}"/>
               </a:ext>
             </a:extLst>
           </p:cNvPr>
@@ -5464,7 +5464,7 @@
           <p:cNvPr id="10" name="">
             <a:extLst xmlns:a="http://schemas.openxmlformats.org/drawingml/2006/main">
               <a:ext uri="{FF2B5EF4-FFF2-40B4-BE49-F238E27FC236}">
-                <a16:creationId xmlns:a16="http://schemas.microsoft.com/office/drawing/2014/main" id="{51C1D718-297A-4983-857E-1F06CBED013B}"/>
+                <a16:creationId xmlns:a16="http://schemas.microsoft.com/office/drawing/2014/main" id="{5E783D3C-C3CC-4CF1-B394-17084842F51A}"/>
               </a:ext>
             </a:extLst>
           </p:cNvPr>
@@ -5511,7 +5511,7 @@
                 <a:ea typeface="Arial"/>
                 <a:cs typeface="Arial"/>
               </a:rPr>
-              <a:t>Biopsy and</a:t>
+              <a:t>Published B-HOT study</a:t>
             </a:r>
           </a:p>
           <a:p xmlns:a="http://schemas.openxmlformats.org/drawingml/2006/main">
@@ -5534,7 +5534,7 @@
                 <a:ea typeface="Arial"/>
                 <a:cs typeface="Arial"/>
               </a:rPr>
-              <a:t>treatment</a:t>
+              <a:t>Zhang, 2024</a:t>
             </a:r>
           </a:p>
         </p:txBody>
@@ -5544,7 +5544,7 @@
           <p:cNvPr id="11" name="">
             <a:extLst xmlns:a="http://schemas.openxmlformats.org/drawingml/2006/main">
               <a:ext uri="{FF2B5EF4-FFF2-40B4-BE49-F238E27FC236}">
-                <a16:creationId xmlns:a16="http://schemas.microsoft.com/office/drawing/2014/main" id="{56D42D15-2713-4648-B87C-EB6D27CC9FD3}"/>
+                <a16:creationId xmlns:a16="http://schemas.microsoft.com/office/drawing/2014/main" id="{E4BE20FC-DC25-4F38-AA27-D9F42041CF50}"/>
               </a:ext>
             </a:extLst>
           </p:cNvPr>
@@ -5591,7 +5591,7 @@
                 <a:ea typeface="Arial"/>
                 <a:cs typeface="Arial"/>
               </a:rPr>
-              <a:t>KDIGO recommends biopsy before treating acute rejection,</a:t>
+              <a:t>Four-class study compared regression and boosting.</a:t>
             </a:r>
           </a:p>
           <a:p xmlns:a="http://schemas.openxmlformats.org/drawingml/2006/main">
@@ -5614,7 +5614,7 @@
                 <a:ea typeface="Arial"/>
                 <a:cs typeface="Arial"/>
               </a:rPr>
-              <a:t>unless waiting would substantially delay treatment.</a:t>
+              <a:t>Selected LASSO for similar accuracy with fewer features.</a:t>
             </a:r>
           </a:p>
         </p:txBody>
@@ -5622,7 +5622,7 @@
     </p:spTree>
     <p:extLst>
       <p:ext uri="{BB962C8B-B14F-4D97-AF65-F5344CB8AC3E}">
-        <p14:creationId xmlns:p14="http://schemas.microsoft.com/office/powerpoint/2010/main" val="1605068816"/>
+        <p14:creationId xmlns:p14="http://schemas.microsoft.com/office/powerpoint/2010/main" val="600997037"/>
       </p:ext>
     </p:extLst>
   </p:cSld>
@@ -5653,7 +5653,7 @@
           <p:cNvPr id="13" name="">
             <a:extLst xmlns:a="http://schemas.openxmlformats.org/drawingml/2006/main">
               <a:ext uri="{FF2B5EF4-FFF2-40B4-BE49-F238E27FC236}">
-                <a16:creationId xmlns:a16="http://schemas.microsoft.com/office/drawing/2014/main" id="{FFFEEA99-7895-493F-82FF-602E7F1DEF83}"/>
+                <a16:creationId xmlns:a16="http://schemas.microsoft.com/office/drawing/2014/main" id="{7EE1977F-D804-4932-9D5A-E8C4FF422C28}"/>
               </a:ext>
             </a:extLst>
           </p:cNvPr>
@@ -5710,7 +5710,7 @@
           <p:cNvPr id="2" name="">
             <a:extLst xmlns:a="http://schemas.openxmlformats.org/drawingml/2006/main">
               <a:ext uri="{FF2B5EF4-FFF2-40B4-BE49-F238E27FC236}">
-                <a16:creationId xmlns:a16="http://schemas.microsoft.com/office/drawing/2014/main" id="{9DC8F077-CB97-4C17-AC00-7D575BB4C680}"/>
+                <a16:creationId xmlns:a16="http://schemas.microsoft.com/office/drawing/2014/main" id="{B056A256-47AC-4A37-8960-1C7B521B68FF}"/>
               </a:ext>
             </a:extLst>
           </p:cNvPr>
@@ -5767,7 +5767,7 @@
           <p:cNvPr id="3" name="">
             <a:extLst xmlns:a="http://schemas.openxmlformats.org/drawingml/2006/main">
               <a:ext uri="{FF2B5EF4-FFF2-40B4-BE49-F238E27FC236}">
-                <a16:creationId xmlns:a16="http://schemas.microsoft.com/office/drawing/2014/main" id="{E8F199D6-06F7-455C-8D60-19022D34296B}"/>
+                <a16:creationId xmlns:a16="http://schemas.microsoft.com/office/drawing/2014/main" id="{5D4D967F-56C3-4621-B29E-0FAEA51B9A15}"/>
               </a:ext>
             </a:extLst>
           </p:cNvPr>
@@ -5824,7 +5824,7 @@
           <p:cNvPr id="4" name="">
             <a:extLst xmlns:a="http://schemas.openxmlformats.org/drawingml/2006/main">
               <a:ext uri="{FF2B5EF4-FFF2-40B4-BE49-F238E27FC236}">
-                <a16:creationId xmlns:a16="http://schemas.microsoft.com/office/drawing/2014/main" id="{53E6BE25-2195-4D2D-BC20-96E59029AD6F}"/>
+                <a16:creationId xmlns:a16="http://schemas.microsoft.com/office/drawing/2014/main" id="{B609F5AA-57B8-439E-A9C5-AD6A283E4A26}"/>
               </a:ext>
             </a:extLst>
           </p:cNvPr>
@@ -5881,7 +5881,7 @@
           <p:cNvPr id="5" name="">
             <a:extLst xmlns:a="http://schemas.openxmlformats.org/drawingml/2006/main">
               <a:ext uri="{FF2B5EF4-FFF2-40B4-BE49-F238E27FC236}">
-                <a16:creationId xmlns:a16="http://schemas.microsoft.com/office/drawing/2014/main" id="{BAF2C263-4C1E-4FAF-8065-852797ED03C2}"/>
+                <a16:creationId xmlns:a16="http://schemas.microsoft.com/office/drawing/2014/main" id="{7BF8A34C-93EA-4548-88A0-36DD5C4A2306}"/>
               </a:ext>
             </a:extLst>
           </p:cNvPr>
@@ -5938,7 +5938,7 @@
           <p:cNvPr id="6" name="">
             <a:extLst xmlns:a="http://schemas.openxmlformats.org/drawingml/2006/main">
               <a:ext uri="{FF2B5EF4-FFF2-40B4-BE49-F238E27FC236}">
-                <a16:creationId xmlns:a16="http://schemas.microsoft.com/office/drawing/2014/main" id="{D511355A-654B-41DA-8F42-A46D1EFB3318}"/>
+                <a16:creationId xmlns:a16="http://schemas.microsoft.com/office/drawing/2014/main" id="{146CEBAC-6F6E-4402-AB14-3D0E87A6F623}"/>
               </a:ext>
             </a:extLst>
           </p:cNvPr>
@@ -6579,7 +6579,7 @@
           <p:cNvPr id="9" name="">
             <a:extLst xmlns:a="http://schemas.openxmlformats.org/drawingml/2006/main">
               <a:ext uri="{FF2B5EF4-FFF2-40B4-BE49-F238E27FC236}">
-                <a16:creationId xmlns:a16="http://schemas.microsoft.com/office/drawing/2014/main" id="{588C2C4E-09BE-4CF7-BD35-F4423CCC1F8F}"/>
+                <a16:creationId xmlns:a16="http://schemas.microsoft.com/office/drawing/2014/main" id="{31A40323-2628-444E-A14D-FBFCD543CCF3}"/>
               </a:ext>
             </a:extLst>
           </p:cNvPr>
@@ -6608,7 +6608,7 @@
           <p:cNvPr id="10" name="">
             <a:extLst xmlns:a="http://schemas.openxmlformats.org/drawingml/2006/main">
               <a:ext uri="{FF2B5EF4-FFF2-40B4-BE49-F238E27FC236}">
-                <a16:creationId xmlns:a16="http://schemas.microsoft.com/office/drawing/2014/main" id="{53569A82-3E21-4090-B39A-C00992A0C432}"/>
+                <a16:creationId xmlns:a16="http://schemas.microsoft.com/office/drawing/2014/main" id="{304E74FE-F50E-40BC-A5EA-F5ED464B5579}"/>
               </a:ext>
             </a:extLst>
           </p:cNvPr>
@@ -6665,7 +6665,7 @@
           <p:cNvPr id="11" name="">
             <a:extLst xmlns:a="http://schemas.openxmlformats.org/drawingml/2006/main">
               <a:ext uri="{FF2B5EF4-FFF2-40B4-BE49-F238E27FC236}">
-                <a16:creationId xmlns:a16="http://schemas.microsoft.com/office/drawing/2014/main" id="{44CF6F7B-55CA-4EA2-AB82-C8C924E7B6BE}"/>
+                <a16:creationId xmlns:a16="http://schemas.microsoft.com/office/drawing/2014/main" id="{117959F8-12D3-43E1-A84B-064135448D76}"/>
               </a:ext>
             </a:extLst>
           </p:cNvPr>
@@ -6722,7 +6722,7 @@
           <p:cNvPr id="12" name="">
             <a:extLst xmlns:a="http://schemas.openxmlformats.org/drawingml/2006/main">
               <a:ext uri="{FF2B5EF4-FFF2-40B4-BE49-F238E27FC236}">
-                <a16:creationId xmlns:a16="http://schemas.microsoft.com/office/drawing/2014/main" id="{D3FB9634-0DAC-4D08-AA89-A2FD0E6B0BB3}"/>
+                <a16:creationId xmlns:a16="http://schemas.microsoft.com/office/drawing/2014/main" id="{48BC482D-774A-4CA4-8495-9C649AD2AB59}"/>
               </a:ext>
             </a:extLst>
           </p:cNvPr>
@@ -6808,7 +6808,7 @@
     </p:spTree>
     <p:extLst>
       <p:ext uri="{BB962C8B-B14F-4D97-AF65-F5344CB8AC3E}">
-        <p14:creationId xmlns:p14="http://schemas.microsoft.com/office/powerpoint/2010/main" val="236602185"/>
+        <p14:creationId xmlns:p14="http://schemas.microsoft.com/office/powerpoint/2010/main" val="326481135"/>
       </p:ext>
     </p:extLst>
   </p:cSld>
@@ -6839,7 +6839,7 @@
           <p:cNvPr id="7" name="">
             <a:extLst xmlns:a="http://schemas.openxmlformats.org/drawingml/2006/main">
               <a:ext uri="{FF2B5EF4-FFF2-40B4-BE49-F238E27FC236}">
-                <a16:creationId xmlns:a16="http://schemas.microsoft.com/office/drawing/2014/main" id="{40CC7029-DBD2-4BD1-8F4E-DAFB09B04863}"/>
+                <a16:creationId xmlns:a16="http://schemas.microsoft.com/office/drawing/2014/main" id="{53432AEE-C184-46F0-B112-A878530AFFCC}"/>
               </a:ext>
             </a:extLst>
           </p:cNvPr>
@@ -6896,7 +6896,7 @@
           <p:cNvPr id="2" name="">
             <a:extLst xmlns:a="http://schemas.openxmlformats.org/drawingml/2006/main">
               <a:ext uri="{FF2B5EF4-FFF2-40B4-BE49-F238E27FC236}">
-                <a16:creationId xmlns:a16="http://schemas.microsoft.com/office/drawing/2014/main" id="{A66AF794-AF5D-4C8D-A9FF-9BDFDC5A7E68}"/>
+                <a16:creationId xmlns:a16="http://schemas.microsoft.com/office/drawing/2014/main" id="{729D865A-4AB0-42EA-9363-806E2249DF3E}"/>
               </a:ext>
             </a:extLst>
           </p:cNvPr>
@@ -6953,7 +6953,7 @@
           <p:cNvPr id="3" name="">
             <a:extLst xmlns:a="http://schemas.openxmlformats.org/drawingml/2006/main">
               <a:ext uri="{FF2B5EF4-FFF2-40B4-BE49-F238E27FC236}">
-                <a16:creationId xmlns:a16="http://schemas.microsoft.com/office/drawing/2014/main" id="{1271DA19-0206-4445-BAAF-AF64750E6DB9}"/>
+                <a16:creationId xmlns:a16="http://schemas.microsoft.com/office/drawing/2014/main" id="{D582E29E-8B5F-401A-B3A4-1E8DDA9FE924}"/>
               </a:ext>
             </a:extLst>
           </p:cNvPr>
@@ -7010,7 +7010,7 @@
           <p:cNvPr id="4" name="">
             <a:extLst xmlns:a="http://schemas.openxmlformats.org/drawingml/2006/main">
               <a:ext uri="{FF2B5EF4-FFF2-40B4-BE49-F238E27FC236}">
-                <a16:creationId xmlns:a16="http://schemas.microsoft.com/office/drawing/2014/main" id="{B3943C6D-ACF7-43F6-AC3A-7E789F520419}"/>
+                <a16:creationId xmlns:a16="http://schemas.microsoft.com/office/drawing/2014/main" id="{7D568820-3644-4D85-892C-FB621DA3B689}"/>
               </a:ext>
             </a:extLst>
           </p:cNvPr>
@@ -7490,7 +7490,7 @@
           <p:cNvPr id="6" name="">
             <a:extLst xmlns:a="http://schemas.openxmlformats.org/drawingml/2006/main">
               <a:ext uri="{FF2B5EF4-FFF2-40B4-BE49-F238E27FC236}">
-                <a16:creationId xmlns:a16="http://schemas.microsoft.com/office/drawing/2014/main" id="{65C8D265-FF69-4251-8FAC-327D61325784}"/>
+                <a16:creationId xmlns:a16="http://schemas.microsoft.com/office/drawing/2014/main" id="{BF458036-F445-4BBB-BFE4-9FDC8462A826}"/>
               </a:ext>
             </a:extLst>
           </p:cNvPr>
@@ -7545,7 +7545,7 @@
     </p:spTree>
     <p:extLst>
       <p:ext uri="{BB962C8B-B14F-4D97-AF65-F5344CB8AC3E}">
-        <p14:creationId xmlns:p14="http://schemas.microsoft.com/office/powerpoint/2010/main" val="1234190895"/>
+        <p14:creationId xmlns:p14="http://schemas.microsoft.com/office/powerpoint/2010/main" val="1758839984"/>
       </p:ext>
     </p:extLst>
   </p:cSld>
@@ -7576,7 +7576,7 @@
           <p:cNvPr id="11" name="">
             <a:extLst xmlns:a="http://schemas.openxmlformats.org/drawingml/2006/main">
               <a:ext uri="{FF2B5EF4-FFF2-40B4-BE49-F238E27FC236}">
-                <a16:creationId xmlns:a16="http://schemas.microsoft.com/office/drawing/2014/main" id="{78EBFF8C-0834-42BA-B300-F390843BDF2B}"/>
+                <a16:creationId xmlns:a16="http://schemas.microsoft.com/office/drawing/2014/main" id="{DDAB2819-0BE5-4935-9E25-02E0C8BF6F38}"/>
               </a:ext>
             </a:extLst>
           </p:cNvPr>
@@ -7633,7 +7633,7 @@
           <p:cNvPr id="2" name="">
             <a:extLst xmlns:a="http://schemas.openxmlformats.org/drawingml/2006/main">
               <a:ext uri="{FF2B5EF4-FFF2-40B4-BE49-F238E27FC236}">
-                <a16:creationId xmlns:a16="http://schemas.microsoft.com/office/drawing/2014/main" id="{53BBC085-BA2A-4D9D-BA07-47E350E56883}"/>
+                <a16:creationId xmlns:a16="http://schemas.microsoft.com/office/drawing/2014/main" id="{65FB3B4F-7E57-4801-8136-B1705E6041FC}"/>
               </a:ext>
             </a:extLst>
           </p:cNvPr>
@@ -7690,7 +7690,7 @@
           <p:cNvPr id="3" name="">
             <a:extLst xmlns:a="http://schemas.openxmlformats.org/drawingml/2006/main">
               <a:ext uri="{FF2B5EF4-FFF2-40B4-BE49-F238E27FC236}">
-                <a16:creationId xmlns:a16="http://schemas.microsoft.com/office/drawing/2014/main" id="{760C0861-B6EF-4E1C-A108-AD67D84D83E0}"/>
+                <a16:creationId xmlns:a16="http://schemas.microsoft.com/office/drawing/2014/main" id="{C42AA788-BD2A-4BAB-96B8-8BCCBFA85BAE}"/>
               </a:ext>
             </a:extLst>
           </p:cNvPr>
@@ -7747,7 +7747,7 @@
           <p:cNvPr id="4" name="">
             <a:extLst xmlns:a="http://schemas.openxmlformats.org/drawingml/2006/main">
               <a:ext uri="{FF2B5EF4-FFF2-40B4-BE49-F238E27FC236}">
-                <a16:creationId xmlns:a16="http://schemas.microsoft.com/office/drawing/2014/main" id="{B5EDFDBA-3564-4A63-8C00-1DE1BFCB1869}"/>
+                <a16:creationId xmlns:a16="http://schemas.microsoft.com/office/drawing/2014/main" id="{E6083D05-684D-490F-822A-27C7EAC7C639}"/>
               </a:ext>
             </a:extLst>
           </p:cNvPr>
@@ -7804,7 +7804,7 @@
           <p:cNvPr id="5" name="">
             <a:extLst xmlns:a="http://schemas.openxmlformats.org/drawingml/2006/main">
               <a:ext uri="{FF2B5EF4-FFF2-40B4-BE49-F238E27FC236}">
-                <a16:creationId xmlns:a16="http://schemas.microsoft.com/office/drawing/2014/main" id="{041C30C9-716D-477C-A244-18084488CBD1}"/>
+                <a16:creationId xmlns:a16="http://schemas.microsoft.com/office/drawing/2014/main" id="{7C59A351-F84C-4770-9AA7-F1ECE03E450E}"/>
               </a:ext>
             </a:extLst>
           </p:cNvPr>
@@ -7861,7 +7861,7 @@
           <p:cNvPr id="6" name="">
             <a:extLst xmlns:a="http://schemas.openxmlformats.org/drawingml/2006/main">
               <a:ext uri="{FF2B5EF4-FFF2-40B4-BE49-F238E27FC236}">
-                <a16:creationId xmlns:a16="http://schemas.microsoft.com/office/drawing/2014/main" id="{20E69EE8-F983-4063-AAF0-7A66514103AA}"/>
+                <a16:creationId xmlns:a16="http://schemas.microsoft.com/office/drawing/2014/main" id="{854C5531-8363-4DF2-AE32-44D4ACC37D31}"/>
               </a:ext>
             </a:extLst>
           </p:cNvPr>
@@ -7918,7 +7918,7 @@
           <p:cNvPr id="7" name="">
             <a:extLst xmlns:a="http://schemas.openxmlformats.org/drawingml/2006/main">
               <a:ext uri="{FF2B5EF4-FFF2-40B4-BE49-F238E27FC236}">
-                <a16:creationId xmlns:a16="http://schemas.microsoft.com/office/drawing/2014/main" id="{D3F714A9-1B3D-401C-944A-BCD59409CD28}"/>
+                <a16:creationId xmlns:a16="http://schemas.microsoft.com/office/drawing/2014/main" id="{C059595D-20D6-4F43-8201-1C6A6BBC2C47}"/>
               </a:ext>
             </a:extLst>
           </p:cNvPr>
@@ -8033,7 +8033,7 @@
           <p:cNvPr id="8" name="">
             <a:extLst xmlns:a="http://schemas.openxmlformats.org/drawingml/2006/main">
               <a:ext uri="{FF2B5EF4-FFF2-40B4-BE49-F238E27FC236}">
-                <a16:creationId xmlns:a16="http://schemas.microsoft.com/office/drawing/2014/main" id="{07571F6C-10AA-4653-9B64-16799E8458FB}"/>
+                <a16:creationId xmlns:a16="http://schemas.microsoft.com/office/drawing/2014/main" id="{1272E807-4039-475D-9CB9-0483F1A3451A}"/>
               </a:ext>
             </a:extLst>
           </p:cNvPr>
@@ -8090,7 +8090,7 @@
           <p:cNvPr id="9" name="">
             <a:extLst xmlns:a="http://schemas.openxmlformats.org/drawingml/2006/main">
               <a:ext uri="{FF2B5EF4-FFF2-40B4-BE49-F238E27FC236}">
-                <a16:creationId xmlns:a16="http://schemas.microsoft.com/office/drawing/2014/main" id="{A3E4AF80-47EB-493E-9C43-CD8A537326F7}"/>
+                <a16:creationId xmlns:a16="http://schemas.microsoft.com/office/drawing/2014/main" id="{1682A441-3114-4443-97C3-A2A711F1DD76}"/>
               </a:ext>
             </a:extLst>
           </p:cNvPr>
@@ -8147,7 +8147,7 @@
           <p:cNvPr id="10" name="">
             <a:extLst xmlns:a="http://schemas.openxmlformats.org/drawingml/2006/main">
               <a:ext uri="{FF2B5EF4-FFF2-40B4-BE49-F238E27FC236}">
-                <a16:creationId xmlns:a16="http://schemas.microsoft.com/office/drawing/2014/main" id="{84BF9274-2889-4216-8431-552A365E4EE5}"/>
+                <a16:creationId xmlns:a16="http://schemas.microsoft.com/office/drawing/2014/main" id="{B5ADB508-80FB-42D3-968F-AC30AE7BB608}"/>
               </a:ext>
             </a:extLst>
           </p:cNvPr>
@@ -8260,7 +8260,7 @@
     </p:spTree>
     <p:extLst>
       <p:ext uri="{BB962C8B-B14F-4D97-AF65-F5344CB8AC3E}">
-        <p14:creationId xmlns:p14="http://schemas.microsoft.com/office/powerpoint/2010/main" val="1957838437"/>
+        <p14:creationId xmlns:p14="http://schemas.microsoft.com/office/powerpoint/2010/main" val="1527990080"/>
       </p:ext>
     </p:extLst>
   </p:cSld>
@@ -8291,7 +8291,7 @@
           <p:cNvPr id="5" name="">
             <a:extLst xmlns:a="http://schemas.openxmlformats.org/drawingml/2006/main">
               <a:ext uri="{FF2B5EF4-FFF2-40B4-BE49-F238E27FC236}">
-                <a16:creationId xmlns:a16="http://schemas.microsoft.com/office/drawing/2014/main" id="{E66EDA1E-EDDF-4B16-AFEA-5EF77DCE7906}"/>
+                <a16:creationId xmlns:a16="http://schemas.microsoft.com/office/drawing/2014/main" id="{641E403C-D991-4AED-B030-A435ED8A6840}"/>
               </a:ext>
             </a:extLst>
           </p:cNvPr>
@@ -8348,7 +8348,7 @@
           <p:cNvPr id="2" name="">
             <a:extLst xmlns:a="http://schemas.openxmlformats.org/drawingml/2006/main">
               <a:ext uri="{FF2B5EF4-FFF2-40B4-BE49-F238E27FC236}">
-                <a16:creationId xmlns:a16="http://schemas.microsoft.com/office/drawing/2014/main" id="{87E28662-F24A-4C4E-AADC-51C1F7C3E527}"/>
+                <a16:creationId xmlns:a16="http://schemas.microsoft.com/office/drawing/2014/main" id="{65CD13AB-C623-4B81-A95E-A6FCA2CBCD18}"/>
               </a:ext>
             </a:extLst>
           </p:cNvPr>
@@ -8405,7 +8405,7 @@
           <p:cNvPr id="3" name="">
             <a:extLst xmlns:a="http://schemas.openxmlformats.org/drawingml/2006/main">
               <a:ext uri="{FF2B5EF4-FFF2-40B4-BE49-F238E27FC236}">
-                <a16:creationId xmlns:a16="http://schemas.microsoft.com/office/drawing/2014/main" id="{E3498D4E-79A7-4E97-AE3F-8460403EDB79}"/>
+                <a16:creationId xmlns:a16="http://schemas.microsoft.com/office/drawing/2014/main" id="{DBB44267-176A-42A3-AEFF-0774D6EBC2E0}"/>
               </a:ext>
             </a:extLst>
           </p:cNvPr>
@@ -8752,7 +8752,7 @@
     </p:spTree>
     <p:extLst>
       <p:ext uri="{BB962C8B-B14F-4D97-AF65-F5344CB8AC3E}">
-        <p14:creationId xmlns:p14="http://schemas.microsoft.com/office/powerpoint/2010/main" val="1311100645"/>
+        <p14:creationId xmlns:p14="http://schemas.microsoft.com/office/powerpoint/2010/main" val="2085686686"/>
       </p:ext>
     </p:extLst>
   </p:cSld>
@@ -8783,7 +8783,7 @@
           <p:cNvPr id="11" name="">
             <a:extLst xmlns:a="http://schemas.openxmlformats.org/drawingml/2006/main">
               <a:ext uri="{FF2B5EF4-FFF2-40B4-BE49-F238E27FC236}">
-                <a16:creationId xmlns:a16="http://schemas.microsoft.com/office/drawing/2014/main" id="{B56EC34A-E9FC-40BA-8771-D6C8C48BC30B}"/>
+                <a16:creationId xmlns:a16="http://schemas.microsoft.com/office/drawing/2014/main" id="{ECAC70C1-078C-445C-B8B7-866FDF086A61}"/>
               </a:ext>
             </a:extLst>
           </p:cNvPr>
@@ -8840,7 +8840,7 @@
           <p:cNvPr id="2" name="">
             <a:extLst xmlns:a="http://schemas.openxmlformats.org/drawingml/2006/main">
               <a:ext uri="{FF2B5EF4-FFF2-40B4-BE49-F238E27FC236}">
-                <a16:creationId xmlns:a16="http://schemas.microsoft.com/office/drawing/2014/main" id="{C30DA7C5-1BC6-4E16-8142-28AF8DAB5600}"/>
+                <a16:creationId xmlns:a16="http://schemas.microsoft.com/office/drawing/2014/main" id="{2B1D951F-889C-4242-8C6A-5920ECF371A8}"/>
               </a:ext>
             </a:extLst>
           </p:cNvPr>
@@ -8897,7 +8897,7 @@
           <p:cNvPr id="3" name="">
             <a:extLst xmlns:a="http://schemas.openxmlformats.org/drawingml/2006/main">
               <a:ext uri="{FF2B5EF4-FFF2-40B4-BE49-F238E27FC236}">
-                <a16:creationId xmlns:a16="http://schemas.microsoft.com/office/drawing/2014/main" id="{9FF541F2-F367-4B39-BB7F-A8FEBA119818}"/>
+                <a16:creationId xmlns:a16="http://schemas.microsoft.com/office/drawing/2014/main" id="{05F3B26F-9B59-4EF0-9D8F-7D17E97ECD35}"/>
               </a:ext>
             </a:extLst>
           </p:cNvPr>
@@ -8954,7 +8954,7 @@
           <p:cNvPr id="4" name="">
             <a:extLst xmlns:a="http://schemas.openxmlformats.org/drawingml/2006/main">
               <a:ext uri="{FF2B5EF4-FFF2-40B4-BE49-F238E27FC236}">
-                <a16:creationId xmlns:a16="http://schemas.microsoft.com/office/drawing/2014/main" id="{24E7D227-A067-4EF1-80C9-203094F68EDD}"/>
+                <a16:creationId xmlns:a16="http://schemas.microsoft.com/office/drawing/2014/main" id="{AB3E1C50-1CC1-410E-B6C5-31F9F76FBFAA}"/>
               </a:ext>
             </a:extLst>
           </p:cNvPr>
@@ -9042,7 +9042,7 @@
           <p:cNvPr id="5" name="">
             <a:extLst xmlns:a="http://schemas.openxmlformats.org/drawingml/2006/main">
               <a:ext uri="{FF2B5EF4-FFF2-40B4-BE49-F238E27FC236}">
-                <a16:creationId xmlns:a16="http://schemas.microsoft.com/office/drawing/2014/main" id="{978D17B2-0AE0-422F-A42E-1F25CD1EF473}"/>
+                <a16:creationId xmlns:a16="http://schemas.microsoft.com/office/drawing/2014/main" id="{DF30AF7D-B15A-4749-99BB-5AD3C23239A8}"/>
               </a:ext>
             </a:extLst>
           </p:cNvPr>
@@ -9126,7 +9126,7 @@
           <p:cNvPr id="6" name="">
             <a:extLst xmlns:a="http://schemas.openxmlformats.org/drawingml/2006/main">
               <a:ext uri="{FF2B5EF4-FFF2-40B4-BE49-F238E27FC236}">
-                <a16:creationId xmlns:a16="http://schemas.microsoft.com/office/drawing/2014/main" id="{0B69B962-E85B-458A-AE49-512F74500A26}"/>
+                <a16:creationId xmlns:a16="http://schemas.microsoft.com/office/drawing/2014/main" id="{6817AC26-A6DA-44A8-8D32-EEBE2895BE06}"/>
               </a:ext>
             </a:extLst>
           </p:cNvPr>
@@ -9210,7 +9210,7 @@
           <p:cNvPr id="7" name="">
             <a:extLst xmlns:a="http://schemas.openxmlformats.org/drawingml/2006/main">
               <a:ext uri="{FF2B5EF4-FFF2-40B4-BE49-F238E27FC236}">
-                <a16:creationId xmlns:a16="http://schemas.microsoft.com/office/drawing/2014/main" id="{F85FE899-28F4-4E79-A455-98A1CFFDB8DA}"/>
+                <a16:creationId xmlns:a16="http://schemas.microsoft.com/office/drawing/2014/main" id="{99FE52A2-0C09-412B-9217-CFA87B84F849}"/>
               </a:ext>
             </a:extLst>
           </p:cNvPr>
@@ -9350,7 +9350,7 @@
           <p:cNvPr id="10" name="">
             <a:extLst xmlns:a="http://schemas.openxmlformats.org/drawingml/2006/main">
               <a:ext uri="{FF2B5EF4-FFF2-40B4-BE49-F238E27FC236}">
-                <a16:creationId xmlns:a16="http://schemas.microsoft.com/office/drawing/2014/main" id="{A1EA4F0F-2865-4F53-A0D6-2212A1E31176}"/>
+                <a16:creationId xmlns:a16="http://schemas.microsoft.com/office/drawing/2014/main" id="{15C57391-5DBE-49C5-BCFB-A40D3AE4FFA2}"/>
               </a:ext>
             </a:extLst>
           </p:cNvPr>
@@ -9483,7 +9483,7 @@
     </p:spTree>
     <p:extLst>
       <p:ext uri="{BB962C8B-B14F-4D97-AF65-F5344CB8AC3E}">
-        <p14:creationId xmlns:p14="http://schemas.microsoft.com/office/powerpoint/2010/main" val="1115869935"/>
+        <p14:creationId xmlns:p14="http://schemas.microsoft.com/office/powerpoint/2010/main" val="1728724351"/>
       </p:ext>
     </p:extLst>
   </p:cSld>
